--- a/myReclaim-Exec-Deck.pptx
+++ b/myReclaim-Exec-Deck.pptx
@@ -17,6 +17,7 @@
     <p:sldId id="265" r:id="rId16"/>
     <p:sldId id="266" r:id="rId17"/>
     <p:sldId id="267" r:id="rId18"/>
+    <p:sldId id="268" r:id="rId19"/>
   </p:sldIdLst>
   <p:sldSz cx="12188952" cy="6858000" type="screen4x3"/>
   <p:notesSz cx="6858000" cy="9144000"/>
@@ -3736,7 +3737,7 @@
                 </a:solidFill>
                 <a:latin typeface="Open Sans"/>
               </a:rPr>
-              <a:t>10 / 12</a:t>
+              <a:t>10 / 13</a:t>
             </a:r>
           </a:p>
         </p:txBody>
@@ -3806,7 +3807,7 @@
                 </a:solidFill>
                 <a:latin typeface="Open Sans"/>
               </a:rPr>
-              <a:t>WHAT'S ALREADY BUILT</a:t>
+              <a:t>COMPLIANCE POSTURE</a:t>
             </a:r>
           </a:p>
         </p:txBody>
@@ -3841,7 +3842,7 @@
                 </a:solidFill>
                 <a:latin typeface="Open Sans"/>
               </a:rPr>
-              <a:t>Working prototype. Real California data. Running today.</a:t>
+              <a:t>Free + deep-link = no new regulatory exposure.</a:t>
             </a:r>
           </a:p>
         </p:txBody>
@@ -3854,8 +3855,8 @@
         </p:nvSpPr>
         <p:spPr>
           <a:xfrm>
-            <a:off x="457200" y="2468880"/>
-            <a:ext cx="2697480" cy="1554480"/>
+            <a:off x="457200" y="2377440"/>
+            <a:ext cx="3657600" cy="1417320"/>
           </a:xfrm>
           <a:prstGeom prst="roundRect">
             <a:avLst>
@@ -3902,14 +3903,14 @@
         </p:nvSpPr>
         <p:spPr>
           <a:xfrm>
-            <a:off x="457200" y="2468880"/>
-            <a:ext cx="2697480" cy="137160"/>
+            <a:off x="457200" y="2377440"/>
+            <a:ext cx="146304" cy="1417320"/>
           </a:xfrm>
           <a:prstGeom prst="rect">
             <a:avLst/>
           </a:prstGeom>
           <a:solidFill>
-            <a:srgbClr val="2863C5"/>
+            <a:srgbClr val="059669"/>
           </a:solidFill>
           <a:ln>
             <a:noFill/>
@@ -3946,29 +3947,29 @@
         </p:nvSpPr>
         <p:spPr>
           <a:xfrm>
-            <a:off x="640080" y="2788920"/>
-            <a:ext cx="2331720" cy="868680"/>
-          </a:xfrm>
-          <a:prstGeom prst="rect">
-            <a:avLst/>
-          </a:prstGeom>
-          <a:noFill/>
-        </p:spPr>
-        <p:txBody>
-          <a:bodyPr wrap="square" anchor="t" lIns="0" rIns="0" tIns="0" bIns="0">
-            <a:spAutoFit/>
-          </a:bodyPr>
-          <a:lstStyle/>
-          <a:p>
-            <a:pPr algn="l"/>
-            <a:r>
-              <a:rPr sz="4400" b="1">
-                <a:solidFill>
-                  <a:srgbClr val="2863C5"/>
-                </a:solidFill>
-                <a:latin typeface="Open Sans"/>
-              </a:rPr>
-              <a:t>38M+</a:t>
+            <a:off x="731520" y="2542032"/>
+            <a:ext cx="457200" cy="457200"/>
+          </a:xfrm>
+          <a:prstGeom prst="rect">
+            <a:avLst/>
+          </a:prstGeom>
+          <a:noFill/>
+        </p:spPr>
+        <p:txBody>
+          <a:bodyPr wrap="square" anchor="t" lIns="0" rIns="0" tIns="0" bIns="0">
+            <a:spAutoFit/>
+          </a:bodyPr>
+          <a:lstStyle/>
+          <a:p>
+            <a:pPr algn="l"/>
+            <a:r>
+              <a:rPr sz="2400" b="1">
+                <a:solidFill>
+                  <a:srgbClr val="059669"/>
+                </a:solidFill>
+                <a:latin typeface="Open Sans"/>
+              </a:rPr>
+              <a:t>✓</a:t>
             </a:r>
           </a:p>
         </p:txBody>
@@ -3981,8 +3982,43 @@
         </p:nvSpPr>
         <p:spPr>
           <a:xfrm>
-            <a:off x="640080" y="3657600"/>
-            <a:ext cx="2331720" cy="365760"/>
+            <a:off x="1234440" y="2578608"/>
+            <a:ext cx="2743200" cy="411480"/>
+          </a:xfrm>
+          <a:prstGeom prst="rect">
+            <a:avLst/>
+          </a:prstGeom>
+          <a:noFill/>
+        </p:spPr>
+        <p:txBody>
+          <a:bodyPr wrap="square" anchor="t" lIns="0" rIns="0" tIns="0" bIns="0">
+            <a:spAutoFit/>
+          </a:bodyPr>
+          <a:lstStyle/>
+          <a:p>
+            <a:pPr algn="l"/>
+            <a:r>
+              <a:rPr sz="1400" b="1">
+                <a:solidFill>
+                  <a:srgbClr val="0F172A"/>
+                </a:solidFill>
+                <a:latin typeface="Open Sans"/>
+              </a:rPr>
+              <a:t>FCRA-safe</a:t>
+            </a:r>
+          </a:p>
+        </p:txBody>
+      </p:sp>
+      <p:sp>
+        <p:nvSpPr>
+          <p:cNvPr id="14" name="TextBox 13"/>
+          <p:cNvSpPr txBox="1"/>
+          <p:nvPr/>
+        </p:nvSpPr>
+        <p:spPr>
+          <a:xfrm>
+            <a:off x="1234440" y="3017520"/>
+            <a:ext cx="2743200" cy="731520"/>
           </a:xfrm>
           <a:prstGeom prst="rect">
             <a:avLst/>
@@ -4003,21 +4039,21 @@
                 </a:solidFill>
                 <a:latin typeface="Open Sans"/>
               </a:rPr>
-              <a:t>records indexed</a:t>
-            </a:r>
-          </a:p>
-        </p:txBody>
-      </p:sp>
-      <p:sp>
-        <p:nvSpPr>
-          <p:cNvPr id="14" name="Rounded Rectangle 13"/>
+              <a:t>Unclaimed-property search isn't a credit-reporting activity.</a:t>
+            </a:r>
+          </a:p>
+        </p:txBody>
+      </p:sp>
+      <p:sp>
+        <p:nvSpPr>
+          <p:cNvPr id="15" name="Rounded Rectangle 14"/>
           <p:cNvSpPr/>
           <p:nvPr/>
         </p:nvSpPr>
         <p:spPr>
           <a:xfrm>
-            <a:off x="3337560" y="2468880"/>
-            <a:ext cx="2697480" cy="1554480"/>
+            <a:off x="4251960" y="2377440"/>
+            <a:ext cx="3657600" cy="1417320"/>
           </a:xfrm>
           <a:prstGeom prst="roundRect">
             <a:avLst>
@@ -4058,20 +4094,20 @@
       </p:sp>
       <p:sp>
         <p:nvSpPr>
-          <p:cNvPr id="15" name="Rectangle 14"/>
+          <p:cNvPr id="16" name="Rectangle 15"/>
           <p:cNvSpPr/>
           <p:nvPr/>
         </p:nvSpPr>
         <p:spPr>
           <a:xfrm>
-            <a:off x="3337560" y="2468880"/>
-            <a:ext cx="2697480" cy="137160"/>
+            <a:off x="4251960" y="2377440"/>
+            <a:ext cx="146304" cy="1417320"/>
           </a:xfrm>
           <a:prstGeom prst="rect">
             <a:avLst/>
           </a:prstGeom>
           <a:solidFill>
-            <a:srgbClr val="FC4C0B"/>
+            <a:srgbClr val="059669"/>
           </a:solidFill>
           <a:ln>
             <a:noFill/>
@@ -4102,49 +4138,84 @@
       </p:sp>
       <p:sp>
         <p:nvSpPr>
-          <p:cNvPr id="16" name="TextBox 15"/>
-          <p:cNvSpPr txBox="1"/>
-          <p:nvPr/>
-        </p:nvSpPr>
-        <p:spPr>
-          <a:xfrm>
-            <a:off x="3520440" y="2788920"/>
-            <a:ext cx="2331720" cy="868680"/>
-          </a:xfrm>
-          <a:prstGeom prst="rect">
-            <a:avLst/>
-          </a:prstGeom>
-          <a:noFill/>
-        </p:spPr>
-        <p:txBody>
-          <a:bodyPr wrap="square" anchor="t" lIns="0" rIns="0" tIns="0" bIns="0">
-            <a:spAutoFit/>
-          </a:bodyPr>
-          <a:lstStyle/>
-          <a:p>
-            <a:pPr algn="l"/>
-            <a:r>
-              <a:rPr sz="4400" b="1">
-                <a:solidFill>
-                  <a:srgbClr val="FC4C0B"/>
-                </a:solidFill>
-                <a:latin typeface="Open Sans"/>
-              </a:rPr>
-              <a:t>$11B</a:t>
-            </a:r>
-          </a:p>
-        </p:txBody>
-      </p:sp>
-      <p:sp>
-        <p:nvSpPr>
           <p:cNvPr id="17" name="TextBox 16"/>
           <p:cNvSpPr txBox="1"/>
           <p:nvPr/>
         </p:nvSpPr>
         <p:spPr>
           <a:xfrm>
-            <a:off x="3520440" y="3657600"/>
-            <a:ext cx="2331720" cy="365760"/>
+            <a:off x="4526280" y="2542032"/>
+            <a:ext cx="457200" cy="457200"/>
+          </a:xfrm>
+          <a:prstGeom prst="rect">
+            <a:avLst/>
+          </a:prstGeom>
+          <a:noFill/>
+        </p:spPr>
+        <p:txBody>
+          <a:bodyPr wrap="square" anchor="t" lIns="0" rIns="0" tIns="0" bIns="0">
+            <a:spAutoFit/>
+          </a:bodyPr>
+          <a:lstStyle/>
+          <a:p>
+            <a:pPr algn="l"/>
+            <a:r>
+              <a:rPr sz="2400" b="1">
+                <a:solidFill>
+                  <a:srgbClr val="059669"/>
+                </a:solidFill>
+                <a:latin typeface="Open Sans"/>
+              </a:rPr>
+              <a:t>✓</a:t>
+            </a:r>
+          </a:p>
+        </p:txBody>
+      </p:sp>
+      <p:sp>
+        <p:nvSpPr>
+          <p:cNvPr id="18" name="TextBox 17"/>
+          <p:cNvSpPr txBox="1"/>
+          <p:nvPr/>
+        </p:nvSpPr>
+        <p:spPr>
+          <a:xfrm>
+            <a:off x="5029200" y="2578608"/>
+            <a:ext cx="2743200" cy="411480"/>
+          </a:xfrm>
+          <a:prstGeom prst="rect">
+            <a:avLst/>
+          </a:prstGeom>
+          <a:noFill/>
+        </p:spPr>
+        <p:txBody>
+          <a:bodyPr wrap="square" anchor="t" lIns="0" rIns="0" tIns="0" bIns="0">
+            <a:spAutoFit/>
+          </a:bodyPr>
+          <a:lstStyle/>
+          <a:p>
+            <a:pPr algn="l"/>
+            <a:r>
+              <a:rPr sz="1400" b="1">
+                <a:solidFill>
+                  <a:srgbClr val="0F172A"/>
+                </a:solidFill>
+                <a:latin typeface="Open Sans"/>
+              </a:rPr>
+              <a:t>No finder license</a:t>
+            </a:r>
+          </a:p>
+        </p:txBody>
+      </p:sp>
+      <p:sp>
+        <p:nvSpPr>
+          <p:cNvPr id="19" name="TextBox 18"/>
+          <p:cNvSpPr txBox="1"/>
+          <p:nvPr/>
+        </p:nvSpPr>
+        <p:spPr>
+          <a:xfrm>
+            <a:off x="5029200" y="3017520"/>
+            <a:ext cx="2743200" cy="731520"/>
           </a:xfrm>
           <a:prstGeom prst="rect">
             <a:avLst/>
@@ -4165,21 +4236,21 @@
                 </a:solidFill>
                 <a:latin typeface="Open Sans"/>
               </a:rPr>
-              <a:t>in unclaimed property</a:t>
-            </a:r>
-          </a:p>
-        </p:txBody>
-      </p:sp>
-      <p:sp>
-        <p:nvSpPr>
-          <p:cNvPr id="18" name="Rounded Rectangle 17"/>
+              <a:t>We don't take a fee on claims, so the 30-state finder regime doesn't apply.</a:t>
+            </a:r>
+          </a:p>
+        </p:txBody>
+      </p:sp>
+      <p:sp>
+        <p:nvSpPr>
+          <p:cNvPr id="20" name="Rounded Rectangle 19"/>
           <p:cNvSpPr/>
           <p:nvPr/>
         </p:nvSpPr>
         <p:spPr>
           <a:xfrm>
-            <a:off x="6217920" y="2468880"/>
-            <a:ext cx="2697480" cy="1554480"/>
+            <a:off x="8046720" y="2377440"/>
+            <a:ext cx="3657600" cy="1417320"/>
           </a:xfrm>
           <a:prstGeom prst="roundRect">
             <a:avLst>
@@ -4220,20 +4291,20 @@
       </p:sp>
       <p:sp>
         <p:nvSpPr>
-          <p:cNvPr id="19" name="Rectangle 18"/>
+          <p:cNvPr id="21" name="Rectangle 20"/>
           <p:cNvSpPr/>
           <p:nvPr/>
         </p:nvSpPr>
         <p:spPr>
           <a:xfrm>
-            <a:off x="6217920" y="2468880"/>
-            <a:ext cx="2697480" cy="137160"/>
+            <a:off x="8046720" y="2377440"/>
+            <a:ext cx="146304" cy="1417320"/>
           </a:xfrm>
           <a:prstGeom prst="rect">
             <a:avLst/>
           </a:prstGeom>
           <a:solidFill>
-            <a:srgbClr val="1F4F9E"/>
+            <a:srgbClr val="059669"/>
           </a:solidFill>
           <a:ln>
             <a:noFill/>
@@ -4264,49 +4335,84 @@
       </p:sp>
       <p:sp>
         <p:nvSpPr>
-          <p:cNvPr id="20" name="TextBox 19"/>
-          <p:cNvSpPr txBox="1"/>
-          <p:nvPr/>
-        </p:nvSpPr>
-        <p:spPr>
-          <a:xfrm>
-            <a:off x="6400800" y="2788920"/>
-            <a:ext cx="2331720" cy="868680"/>
-          </a:xfrm>
-          <a:prstGeom prst="rect">
-            <a:avLst/>
-          </a:prstGeom>
-          <a:noFill/>
-        </p:spPr>
-        <p:txBody>
-          <a:bodyPr wrap="square" anchor="t" lIns="0" rIns="0" tIns="0" bIns="0">
-            <a:spAutoFit/>
-          </a:bodyPr>
-          <a:lstStyle/>
-          <a:p>
-            <a:pPr algn="l"/>
-            <a:r>
-              <a:rPr sz="4400" b="1">
-                <a:solidFill>
-                  <a:srgbClr val="1F4F9E"/>
-                </a:solidFill>
-                <a:latin typeface="Open Sans"/>
-              </a:rPr>
-              <a:t>113s</a:t>
-            </a:r>
-          </a:p>
-        </p:txBody>
-      </p:sp>
-      <p:sp>
-        <p:nvSpPr>
-          <p:cNvPr id="21" name="TextBox 20"/>
-          <p:cNvSpPr txBox="1"/>
-          <p:nvPr/>
-        </p:nvSpPr>
-        <p:spPr>
-          <a:xfrm>
-            <a:off x="6400800" y="3657600"/>
-            <a:ext cx="2331720" cy="365760"/>
+          <p:cNvPr id="22" name="TextBox 21"/>
+          <p:cNvSpPr txBox="1"/>
+          <p:nvPr/>
+        </p:nvSpPr>
+        <p:spPr>
+          <a:xfrm>
+            <a:off x="8321040" y="2542032"/>
+            <a:ext cx="457200" cy="457200"/>
+          </a:xfrm>
+          <a:prstGeom prst="rect">
+            <a:avLst/>
+          </a:prstGeom>
+          <a:noFill/>
+        </p:spPr>
+        <p:txBody>
+          <a:bodyPr wrap="square" anchor="t" lIns="0" rIns="0" tIns="0" bIns="0">
+            <a:spAutoFit/>
+          </a:bodyPr>
+          <a:lstStyle/>
+          <a:p>
+            <a:pPr algn="l"/>
+            <a:r>
+              <a:rPr sz="2400" b="1">
+                <a:solidFill>
+                  <a:srgbClr val="059669"/>
+                </a:solidFill>
+                <a:latin typeface="Open Sans"/>
+              </a:rPr>
+              <a:t>✓</a:t>
+            </a:r>
+          </a:p>
+        </p:txBody>
+      </p:sp>
+      <p:sp>
+        <p:nvSpPr>
+          <p:cNvPr id="23" name="TextBox 22"/>
+          <p:cNvSpPr txBox="1"/>
+          <p:nvPr/>
+        </p:nvSpPr>
+        <p:spPr>
+          <a:xfrm>
+            <a:off x="8823960" y="2578608"/>
+            <a:ext cx="2743200" cy="411480"/>
+          </a:xfrm>
+          <a:prstGeom prst="rect">
+            <a:avLst/>
+          </a:prstGeom>
+          <a:noFill/>
+        </p:spPr>
+        <p:txBody>
+          <a:bodyPr wrap="square" anchor="t" lIns="0" rIns="0" tIns="0" bIns="0">
+            <a:spAutoFit/>
+          </a:bodyPr>
+          <a:lstStyle/>
+          <a:p>
+            <a:pPr algn="l"/>
+            <a:r>
+              <a:rPr sz="1400" b="1">
+                <a:solidFill>
+                  <a:srgbClr val="0F172A"/>
+                </a:solidFill>
+                <a:latin typeface="Open Sans"/>
+              </a:rPr>
+              <a:t>No new PII surface</a:t>
+            </a:r>
+          </a:p>
+        </p:txBody>
+      </p:sp>
+      <p:sp>
+        <p:nvSpPr>
+          <p:cNvPr id="24" name="TextBox 23"/>
+          <p:cNvSpPr txBox="1"/>
+          <p:nvPr/>
+        </p:nvSpPr>
+        <p:spPr>
+          <a:xfrm>
+            <a:off x="8823960" y="3017520"/>
+            <a:ext cx="2743200" cy="731520"/>
           </a:xfrm>
           <a:prstGeom prst="rect">
             <a:avLst/>
@@ -4327,21 +4433,21 @@
                 </a:solidFill>
                 <a:latin typeface="Open Sans"/>
               </a:rPr>
-              <a:t>to bulk-load 34M rows</a:t>
-            </a:r>
-          </a:p>
-        </p:txBody>
-      </p:sp>
-      <p:sp>
-        <p:nvSpPr>
-          <p:cNvPr id="22" name="Rounded Rectangle 21"/>
+              <a:t>Reuses identity records members already consented to.</a:t>
+            </a:r>
+          </a:p>
+        </p:txBody>
+      </p:sp>
+      <p:sp>
+        <p:nvSpPr>
+          <p:cNvPr id="25" name="Rounded Rectangle 24"/>
           <p:cNvSpPr/>
           <p:nvPr/>
         </p:nvSpPr>
         <p:spPr>
           <a:xfrm>
-            <a:off x="9098280" y="2468880"/>
-            <a:ext cx="2697480" cy="1554480"/>
+            <a:off x="457200" y="3977639"/>
+            <a:ext cx="3657600" cy="1417320"/>
           </a:xfrm>
           <a:prstGeom prst="roundRect">
             <a:avLst>
@@ -4382,14 +4488,14 @@
       </p:sp>
       <p:sp>
         <p:nvSpPr>
-          <p:cNvPr id="23" name="Rectangle 22"/>
+          <p:cNvPr id="26" name="Rectangle 25"/>
           <p:cNvSpPr/>
           <p:nvPr/>
         </p:nvSpPr>
         <p:spPr>
           <a:xfrm>
-            <a:off x="9098280" y="2468880"/>
-            <a:ext cx="2697480" cy="137160"/>
+            <a:off x="457200" y="3977639"/>
+            <a:ext cx="146304" cy="1417320"/>
           </a:xfrm>
           <a:prstGeom prst="rect">
             <a:avLst/>
@@ -4426,49 +4532,84 @@
       </p:sp>
       <p:sp>
         <p:nvSpPr>
-          <p:cNvPr id="24" name="TextBox 23"/>
-          <p:cNvSpPr txBox="1"/>
-          <p:nvPr/>
-        </p:nvSpPr>
-        <p:spPr>
-          <a:xfrm>
-            <a:off x="9281160" y="2788920"/>
-            <a:ext cx="2331720" cy="868680"/>
-          </a:xfrm>
-          <a:prstGeom prst="rect">
-            <a:avLst/>
-          </a:prstGeom>
-          <a:noFill/>
-        </p:spPr>
-        <p:txBody>
-          <a:bodyPr wrap="square" anchor="t" lIns="0" rIns="0" tIns="0" bIns="0">
-            <a:spAutoFit/>
-          </a:bodyPr>
-          <a:lstStyle/>
-          <a:p>
-            <a:pPr algn="l"/>
-            <a:r>
-              <a:rPr sz="4400" b="1">
+          <p:cNvPr id="27" name="TextBox 26"/>
+          <p:cNvSpPr txBox="1"/>
+          <p:nvPr/>
+        </p:nvSpPr>
+        <p:spPr>
+          <a:xfrm>
+            <a:off x="731520" y="4142231"/>
+            <a:ext cx="457200" cy="457200"/>
+          </a:xfrm>
+          <a:prstGeom prst="rect">
+            <a:avLst/>
+          </a:prstGeom>
+          <a:noFill/>
+        </p:spPr>
+        <p:txBody>
+          <a:bodyPr wrap="square" anchor="t" lIns="0" rIns="0" tIns="0" bIns="0">
+            <a:spAutoFit/>
+          </a:bodyPr>
+          <a:lstStyle/>
+          <a:p>
+            <a:pPr algn="l"/>
+            <a:r>
+              <a:rPr sz="2400" b="1">
                 <a:solidFill>
                   <a:srgbClr val="FFB352"/>
                 </a:solidFill>
                 <a:latin typeface="Open Sans"/>
               </a:rPr>
-              <a:t>3</a:t>
-            </a:r>
-          </a:p>
-        </p:txBody>
-      </p:sp>
-      <p:sp>
-        <p:nvSpPr>
-          <p:cNvPr id="25" name="TextBox 24"/>
-          <p:cNvSpPr txBox="1"/>
-          <p:nvPr/>
-        </p:nvSpPr>
-        <p:spPr>
-          <a:xfrm>
-            <a:off x="9281160" y="3657600"/>
-            <a:ext cx="2331720" cy="365760"/>
+              <a:t>✓</a:t>
+            </a:r>
+          </a:p>
+        </p:txBody>
+      </p:sp>
+      <p:sp>
+        <p:nvSpPr>
+          <p:cNvPr id="28" name="TextBox 27"/>
+          <p:cNvSpPr txBox="1"/>
+          <p:nvPr/>
+        </p:nvSpPr>
+        <p:spPr>
+          <a:xfrm>
+            <a:off x="1234440" y="4178807"/>
+            <a:ext cx="2743200" cy="411480"/>
+          </a:xfrm>
+          <a:prstGeom prst="rect">
+            <a:avLst/>
+          </a:prstGeom>
+          <a:noFill/>
+        </p:spPr>
+        <p:txBody>
+          <a:bodyPr wrap="square" anchor="t" lIns="0" rIns="0" tIns="0" bIns="0">
+            <a:spAutoFit/>
+          </a:bodyPr>
+          <a:lstStyle/>
+          <a:p>
+            <a:pPr algn="l"/>
+            <a:r>
+              <a:rPr sz="1400" b="1">
+                <a:solidFill>
+                  <a:srgbClr val="0F172A"/>
+                </a:solidFill>
+                <a:latin typeface="Open Sans"/>
+              </a:rPr>
+              <a:t>State data ToS</a:t>
+            </a:r>
+          </a:p>
+        </p:txBody>
+      </p:sp>
+      <p:sp>
+        <p:nvSpPr>
+          <p:cNvPr id="29" name="TextBox 28"/>
+          <p:cNvSpPr txBox="1"/>
+          <p:nvPr/>
+        </p:nvSpPr>
+        <p:spPr>
+          <a:xfrm>
+            <a:off x="1234440" y="4617720"/>
+            <a:ext cx="2743200" cy="731520"/>
           </a:xfrm>
           <a:prstGeom prst="rect">
             <a:avLst/>
@@ -4489,201 +4630,269 @@
                 </a:solidFill>
                 <a:latin typeface="Open Sans"/>
               </a:rPr>
-              <a:t>of Ahmed's records found</a:t>
-            </a:r>
-          </a:p>
-        </p:txBody>
-      </p:sp>
-      <p:sp>
-        <p:nvSpPr>
-          <p:cNvPr id="26" name="TextBox 25"/>
-          <p:cNvSpPr txBox="1"/>
-          <p:nvPr/>
-        </p:nvSpPr>
-        <p:spPr>
-          <a:xfrm>
-            <a:off x="457200" y="4297680"/>
-            <a:ext cx="11430000" cy="365760"/>
-          </a:xfrm>
-          <a:prstGeom prst="rect">
-            <a:avLst/>
-          </a:prstGeom>
-          <a:noFill/>
-        </p:spPr>
-        <p:txBody>
-          <a:bodyPr wrap="square" anchor="t" lIns="0" rIns="0" tIns="0" bIns="0">
-            <a:spAutoFit/>
-          </a:bodyPr>
-          <a:lstStyle/>
-          <a:p>
-            <a:pPr algn="l"/>
-            <a:r>
-              <a:rPr sz="1100" b="1">
-                <a:solidFill>
-                  <a:srgbClr val="2863C5"/>
-                </a:solidFill>
-                <a:latin typeface="Open Sans"/>
-              </a:rPr>
-              <a:t>WHAT'S RUNNING TODAY</a:t>
-            </a:r>
-          </a:p>
-        </p:txBody>
-      </p:sp>
-      <p:sp>
-        <p:nvSpPr>
-          <p:cNvPr id="27" name="TextBox 26"/>
-          <p:cNvSpPr txBox="1"/>
-          <p:nvPr/>
-        </p:nvSpPr>
-        <p:spPr>
-          <a:xfrm>
-            <a:off x="640080" y="4663440"/>
-            <a:ext cx="10972800" cy="365760"/>
-          </a:xfrm>
-          <a:prstGeom prst="rect">
-            <a:avLst/>
-          </a:prstGeom>
-          <a:noFill/>
-        </p:spPr>
-        <p:txBody>
-          <a:bodyPr wrap="square" anchor="t" lIns="0" rIns="0" tIns="0" bIns="0">
-            <a:spAutoFit/>
-          </a:bodyPr>
-          <a:lstStyle/>
-          <a:p>
-            <a:pPr algn="l"/>
-            <a:r>
-              <a:rPr sz="1200" b="0">
-                <a:solidFill>
-                  <a:srgbClr val="334155"/>
-                </a:solidFill>
-                <a:latin typeface="Open Sans"/>
-              </a:rPr>
-              <a:t>✓  Web app — SmartCredit-themed search UI with the new BETA visual language</a:t>
-            </a:r>
-          </a:p>
-        </p:txBody>
-      </p:sp>
-      <p:sp>
-        <p:nvSpPr>
-          <p:cNvPr id="28" name="TextBox 27"/>
-          <p:cNvSpPr txBox="1"/>
-          <p:nvPr/>
-        </p:nvSpPr>
-        <p:spPr>
-          <a:xfrm>
-            <a:off x="640080" y="4956048"/>
-            <a:ext cx="10972800" cy="365760"/>
-          </a:xfrm>
-          <a:prstGeom prst="rect">
-            <a:avLst/>
-          </a:prstGeom>
-          <a:noFill/>
-        </p:spPr>
-        <p:txBody>
-          <a:bodyPr wrap="square" anchor="t" lIns="0" rIns="0" tIns="0" bIns="0">
-            <a:spAutoFit/>
-          </a:bodyPr>
-          <a:lstStyle/>
-          <a:p>
-            <a:pPr algn="l"/>
-            <a:r>
-              <a:rPr sz="1200" b="0">
-                <a:solidFill>
-                  <a:srgbClr val="334155"/>
-                </a:solidFill>
-                <a:latin typeface="Open Sans"/>
-              </a:rPr>
-              <a:t>✓  Data — California State Controller bulk CSVs in DuckDB (Snowflake-shaped SQL)</a:t>
-            </a:r>
-          </a:p>
-        </p:txBody>
-      </p:sp>
-      <p:sp>
-        <p:nvSpPr>
-          <p:cNvPr id="29" name="TextBox 28"/>
-          <p:cNvSpPr txBox="1"/>
-          <p:nvPr/>
-        </p:nvSpPr>
-        <p:spPr>
-          <a:xfrm>
-            <a:off x="640080" y="5248656"/>
-            <a:ext cx="10972800" cy="365760"/>
-          </a:xfrm>
-          <a:prstGeom prst="rect">
-            <a:avLst/>
-          </a:prstGeom>
-          <a:noFill/>
-        </p:spPr>
-        <p:txBody>
-          <a:bodyPr wrap="square" anchor="t" lIns="0" rIns="0" tIns="0" bIns="0">
-            <a:spAutoFit/>
-          </a:bodyPr>
-          <a:lstStyle/>
-          <a:p>
-            <a:pPr algn="l"/>
-            <a:r>
-              <a:rPr sz="1200" b="0">
-                <a:solidFill>
-                  <a:srgbClr val="334155"/>
-                </a:solidFill>
-                <a:latin typeface="Open Sans"/>
-              </a:rPr>
-              <a:t>✓  Match service — pluggable Protocol; production swaps in Privacy Master matcher</a:t>
-            </a:r>
-          </a:p>
-        </p:txBody>
-      </p:sp>
-      <p:sp>
-        <p:nvSpPr>
-          <p:cNvPr id="30" name="TextBox 29"/>
-          <p:cNvSpPr txBox="1"/>
-          <p:nvPr/>
-        </p:nvSpPr>
-        <p:spPr>
-          <a:xfrm>
-            <a:off x="640080" y="5541264"/>
-            <a:ext cx="10972800" cy="365760"/>
-          </a:xfrm>
-          <a:prstGeom prst="rect">
-            <a:avLst/>
-          </a:prstGeom>
-          <a:noFill/>
-        </p:spPr>
-        <p:txBody>
-          <a:bodyPr wrap="square" anchor="t" lIns="0" rIns="0" tIns="0" bIns="0">
-            <a:spAutoFit/>
-          </a:bodyPr>
-          <a:lstStyle/>
-          <a:p>
-            <a:pPr algn="l"/>
-            <a:r>
-              <a:rPr sz="1200" b="0">
-                <a:solidFill>
-                  <a:srgbClr val="334155"/>
-                </a:solidFill>
-                <a:latin typeface="Open Sans"/>
-              </a:rPr>
-              <a:t>✓  Admin page — real ingestion stats, file load history, row counts</a:t>
-            </a:r>
-          </a:p>
-        </p:txBody>
-      </p:sp>
-      <p:sp>
-        <p:nvSpPr>
-          <p:cNvPr id="31" name="Rounded Rectangle 30"/>
+              <a:t>Restricted states are gated behind registration or skipped entirely.</a:t>
+            </a:r>
+          </a:p>
+        </p:txBody>
+      </p:sp>
+      <p:sp>
+        <p:nvSpPr>
+          <p:cNvPr id="30" name="Rounded Rectangle 29"/>
           <p:cNvSpPr/>
           <p:nvPr/>
         </p:nvSpPr>
         <p:spPr>
           <a:xfrm>
-            <a:off x="457200" y="5989320"/>
-            <a:ext cx="11247120" cy="457200"/>
+            <a:off x="4251960" y="3977639"/>
+            <a:ext cx="3657600" cy="1417320"/>
           </a:xfrm>
           <a:prstGeom prst="roundRect">
             <a:avLst>
-              <a:gd name="adj" fmla="val 10000"/>
+              <a:gd name="adj" fmla="val 4000"/>
             </a:avLst>
+          </a:prstGeom>
+          <a:solidFill>
+            <a:srgbClr val="FFFFFF"/>
+          </a:solidFill>
+          <a:ln w="6350">
+            <a:solidFill>
+              <a:srgbClr val="E2E8F0"/>
+            </a:solidFill>
+          </a:ln>
+          <a:effectLst/>
+        </p:spPr>
+        <p:style>
+          <a:lnRef idx="1">
+            <a:schemeClr val="accent1"/>
+          </a:lnRef>
+          <a:fillRef idx="3">
+            <a:schemeClr val="accent1"/>
+          </a:fillRef>
+          <a:effectRef idx="2">
+            <a:schemeClr val="accent1"/>
+          </a:effectRef>
+          <a:fontRef idx="minor">
+            <a:schemeClr val="lt1"/>
+          </a:fontRef>
+        </p:style>
+        <p:txBody>
+          <a:bodyPr rtlCol="0" anchor="ctr"/>
+          <a:lstStyle/>
+          <a:p>
+            <a:pPr algn="ctr"/>
+          </a:p>
+        </p:txBody>
+      </p:sp>
+      <p:sp>
+        <p:nvSpPr>
+          <p:cNvPr id="31" name="Rectangle 30"/>
+          <p:cNvSpPr/>
+          <p:nvPr/>
+        </p:nvSpPr>
+        <p:spPr>
+          <a:xfrm>
+            <a:off x="4251960" y="3977639"/>
+            <a:ext cx="146304" cy="1417320"/>
+          </a:xfrm>
+          <a:prstGeom prst="rect">
+            <a:avLst/>
+          </a:prstGeom>
+          <a:solidFill>
+            <a:srgbClr val="059669"/>
+          </a:solidFill>
+          <a:ln>
+            <a:noFill/>
+          </a:ln>
+          <a:effectLst/>
+        </p:spPr>
+        <p:style>
+          <a:lnRef idx="1">
+            <a:schemeClr val="accent1"/>
+          </a:lnRef>
+          <a:fillRef idx="3">
+            <a:schemeClr val="accent1"/>
+          </a:fillRef>
+          <a:effectRef idx="2">
+            <a:schemeClr val="accent1"/>
+          </a:effectRef>
+          <a:fontRef idx="minor">
+            <a:schemeClr val="lt1"/>
+          </a:fontRef>
+        </p:style>
+        <p:txBody>
+          <a:bodyPr rtlCol="0" anchor="ctr"/>
+          <a:lstStyle/>
+          <a:p>
+            <a:pPr algn="ctr"/>
+          </a:p>
+        </p:txBody>
+      </p:sp>
+      <p:sp>
+        <p:nvSpPr>
+          <p:cNvPr id="32" name="TextBox 31"/>
+          <p:cNvSpPr txBox="1"/>
+          <p:nvPr/>
+        </p:nvSpPr>
+        <p:spPr>
+          <a:xfrm>
+            <a:off x="4526280" y="4142231"/>
+            <a:ext cx="457200" cy="457200"/>
+          </a:xfrm>
+          <a:prstGeom prst="rect">
+            <a:avLst/>
+          </a:prstGeom>
+          <a:noFill/>
+        </p:spPr>
+        <p:txBody>
+          <a:bodyPr wrap="square" anchor="t" lIns="0" rIns="0" tIns="0" bIns="0">
+            <a:spAutoFit/>
+          </a:bodyPr>
+          <a:lstStyle/>
+          <a:p>
+            <a:pPr algn="l"/>
+            <a:r>
+              <a:rPr sz="2400" b="1">
+                <a:solidFill>
+                  <a:srgbClr val="059669"/>
+                </a:solidFill>
+                <a:latin typeface="Open Sans"/>
+              </a:rPr>
+              <a:t>✓</a:t>
+            </a:r>
+          </a:p>
+        </p:txBody>
+      </p:sp>
+      <p:sp>
+        <p:nvSpPr>
+          <p:cNvPr id="33" name="TextBox 32"/>
+          <p:cNvSpPr txBox="1"/>
+          <p:nvPr/>
+        </p:nvSpPr>
+        <p:spPr>
+          <a:xfrm>
+            <a:off x="5029200" y="4178807"/>
+            <a:ext cx="2743200" cy="411480"/>
+          </a:xfrm>
+          <a:prstGeom prst="rect">
+            <a:avLst/>
+          </a:prstGeom>
+          <a:noFill/>
+        </p:spPr>
+        <p:txBody>
+          <a:bodyPr wrap="square" anchor="t" lIns="0" rIns="0" tIns="0" bIns="0">
+            <a:spAutoFit/>
+          </a:bodyPr>
+          <a:lstStyle/>
+          <a:p>
+            <a:pPr algn="l"/>
+            <a:r>
+              <a:rPr sz="1400" b="1">
+                <a:solidFill>
+                  <a:srgbClr val="0F172A"/>
+                </a:solidFill>
+                <a:latin typeface="Open Sans"/>
+              </a:rPr>
+              <a:t>State files claims</a:t>
+            </a:r>
+          </a:p>
+        </p:txBody>
+      </p:sp>
+      <p:sp>
+        <p:nvSpPr>
+          <p:cNvPr id="34" name="TextBox 33"/>
+          <p:cNvSpPr txBox="1"/>
+          <p:nvPr/>
+        </p:nvSpPr>
+        <p:spPr>
+          <a:xfrm>
+            <a:off x="5029200" y="4617720"/>
+            <a:ext cx="2743200" cy="731520"/>
+          </a:xfrm>
+          <a:prstGeom prst="rect">
+            <a:avLst/>
+          </a:prstGeom>
+          <a:noFill/>
+        </p:spPr>
+        <p:txBody>
+          <a:bodyPr wrap="square" anchor="t" lIns="0" rIns="0" tIns="0" bIns="0">
+            <a:spAutoFit/>
+          </a:bodyPr>
+          <a:lstStyle/>
+          <a:p>
+            <a:pPr algn="l"/>
+            <a:r>
+              <a:rPr sz="1100" b="0">
+                <a:solidFill>
+                  <a:srgbClr val="334155"/>
+                </a:solidFill>
+                <a:latin typeface="Open Sans"/>
+              </a:rPr>
+              <a:t>Member is deep-linked to the state portal. We never hold claim funds.</a:t>
+            </a:r>
+          </a:p>
+        </p:txBody>
+      </p:sp>
+      <p:sp>
+        <p:nvSpPr>
+          <p:cNvPr id="35" name="Rounded Rectangle 34"/>
+          <p:cNvSpPr/>
+          <p:nvPr/>
+        </p:nvSpPr>
+        <p:spPr>
+          <a:xfrm>
+            <a:off x="8046720" y="3977639"/>
+            <a:ext cx="3657600" cy="1417320"/>
+          </a:xfrm>
+          <a:prstGeom prst="roundRect">
+            <a:avLst>
+              <a:gd name="adj" fmla="val 4000"/>
+            </a:avLst>
+          </a:prstGeom>
+          <a:solidFill>
+            <a:srgbClr val="FFFFFF"/>
+          </a:solidFill>
+          <a:ln w="6350">
+            <a:solidFill>
+              <a:srgbClr val="E2E8F0"/>
+            </a:solidFill>
+          </a:ln>
+          <a:effectLst/>
+        </p:spPr>
+        <p:style>
+          <a:lnRef idx="1">
+            <a:schemeClr val="accent1"/>
+          </a:lnRef>
+          <a:fillRef idx="3">
+            <a:schemeClr val="accent1"/>
+          </a:fillRef>
+          <a:effectRef idx="2">
+            <a:schemeClr val="accent1"/>
+          </a:effectRef>
+          <a:fontRef idx="minor">
+            <a:schemeClr val="lt1"/>
+          </a:fontRef>
+        </p:style>
+        <p:txBody>
+          <a:bodyPr rtlCol="0" anchor="ctr"/>
+          <a:lstStyle/>
+          <a:p>
+            <a:pPr algn="ctr"/>
+          </a:p>
+        </p:txBody>
+      </p:sp>
+      <p:sp>
+        <p:nvSpPr>
+          <p:cNvPr id="36" name="Rectangle 35"/>
+          <p:cNvSpPr/>
+          <p:nvPr/>
+        </p:nvSpPr>
+        <p:spPr>
+          <a:xfrm>
+            <a:off x="8046720" y="3977639"/>
+            <a:ext cx="146304" cy="1417320"/>
+          </a:xfrm>
+          <a:prstGeom prst="rect">
+            <a:avLst/>
           </a:prstGeom>
           <a:solidFill>
             <a:srgbClr val="2863C5"/>
@@ -4717,35 +4926,105 @@
       </p:sp>
       <p:sp>
         <p:nvSpPr>
-          <p:cNvPr id="32" name="TextBox 31"/>
-          <p:cNvSpPr txBox="1"/>
-          <p:nvPr/>
-        </p:nvSpPr>
-        <p:spPr>
-          <a:xfrm>
-            <a:off x="640080" y="6035040"/>
-            <a:ext cx="10972800" cy="365760"/>
-          </a:xfrm>
-          <a:prstGeom prst="rect">
-            <a:avLst/>
-          </a:prstGeom>
-          <a:noFill/>
-        </p:spPr>
-        <p:txBody>
-          <a:bodyPr wrap="square" anchor="t" lIns="0" rIns="0" tIns="0" bIns="0">
-            <a:spAutoFit/>
-          </a:bodyPr>
-          <a:lstStyle/>
-          <a:p>
-            <a:pPr algn="l"/>
-            <a:r>
-              <a:rPr sz="1200" b="1">
-                <a:solidFill>
-                  <a:srgbClr val="FFFFFF"/>
-                </a:solidFill>
-                <a:latin typeface="Open Sans"/>
-              </a:rPr>
-              <a:t>Demo available now — ask any question, we'll search live.</a:t>
+          <p:cNvPr id="37" name="TextBox 36"/>
+          <p:cNvSpPr txBox="1"/>
+          <p:nvPr/>
+        </p:nvSpPr>
+        <p:spPr>
+          <a:xfrm>
+            <a:off x="8321040" y="4142231"/>
+            <a:ext cx="457200" cy="457200"/>
+          </a:xfrm>
+          <a:prstGeom prst="rect">
+            <a:avLst/>
+          </a:prstGeom>
+          <a:noFill/>
+        </p:spPr>
+        <p:txBody>
+          <a:bodyPr wrap="square" anchor="t" lIns="0" rIns="0" tIns="0" bIns="0">
+            <a:spAutoFit/>
+          </a:bodyPr>
+          <a:lstStyle/>
+          <a:p>
+            <a:pPr algn="l"/>
+            <a:r>
+              <a:rPr sz="2400" b="1">
+                <a:solidFill>
+                  <a:srgbClr val="2863C5"/>
+                </a:solidFill>
+                <a:latin typeface="Open Sans"/>
+              </a:rPr>
+              <a:t>✓</a:t>
+            </a:r>
+          </a:p>
+        </p:txBody>
+      </p:sp>
+      <p:sp>
+        <p:nvSpPr>
+          <p:cNvPr id="38" name="TextBox 37"/>
+          <p:cNvSpPr txBox="1"/>
+          <p:nvPr/>
+        </p:nvSpPr>
+        <p:spPr>
+          <a:xfrm>
+            <a:off x="8823960" y="4178807"/>
+            <a:ext cx="2743200" cy="411480"/>
+          </a:xfrm>
+          <a:prstGeom prst="rect">
+            <a:avLst/>
+          </a:prstGeom>
+          <a:noFill/>
+        </p:spPr>
+        <p:txBody>
+          <a:bodyPr wrap="square" anchor="t" lIns="0" rIns="0" tIns="0" bIns="0">
+            <a:spAutoFit/>
+          </a:bodyPr>
+          <a:lstStyle/>
+          <a:p>
+            <a:pPr algn="l"/>
+            <a:r>
+              <a:rPr sz="1400" b="1">
+                <a:solidFill>
+                  <a:srgbClr val="0F172A"/>
+                </a:solidFill>
+                <a:latin typeface="Open Sans"/>
+              </a:rPr>
+              <a:t>Legal sign-off</a:t>
+            </a:r>
+          </a:p>
+        </p:txBody>
+      </p:sp>
+      <p:sp>
+        <p:nvSpPr>
+          <p:cNvPr id="39" name="TextBox 38"/>
+          <p:cNvSpPr txBox="1"/>
+          <p:nvPr/>
+        </p:nvSpPr>
+        <p:spPr>
+          <a:xfrm>
+            <a:off x="8823960" y="4617720"/>
+            <a:ext cx="2743200" cy="731520"/>
+          </a:xfrm>
+          <a:prstGeom prst="rect">
+            <a:avLst/>
+          </a:prstGeom>
+          <a:noFill/>
+        </p:spPr>
+        <p:txBody>
+          <a:bodyPr wrap="square" anchor="t" lIns="0" rIns="0" tIns="0" bIns="0">
+            <a:spAutoFit/>
+          </a:bodyPr>
+          <a:lstStyle/>
+          <a:p>
+            <a:pPr algn="l"/>
+            <a:r>
+              <a:rPr sz="1100" b="0">
+                <a:solidFill>
+                  <a:srgbClr val="334155"/>
+                </a:solidFill>
+                <a:latin typeface="Open Sans"/>
+              </a:rPr>
+              <a:t>Every state ingestion has a legal review gate before going live.</a:t>
             </a:r>
           </a:p>
         </p:txBody>
@@ -4956,7 +5235,7 @@
                 </a:solidFill>
                 <a:latin typeface="Open Sans"/>
               </a:rPr>
-              <a:t>11 / 12</a:t>
+              <a:t>11 / 13</a:t>
             </a:r>
           </a:p>
         </p:txBody>
@@ -5026,7 +5305,7 @@
                 </a:solidFill>
                 <a:latin typeface="Open Sans"/>
               </a:rPr>
-              <a:t>THE ASK</a:t>
+              <a:t>WHAT'S ALREADY BUILT</a:t>
             </a:r>
           </a:p>
         </p:txBody>
@@ -5055,13 +5334,13 @@
           <a:p>
             <a:pPr algn="l"/>
             <a:r>
-              <a:rPr sz="3200" b="1">
+              <a:rPr sz="2800" b="1">
                 <a:solidFill>
                   <a:srgbClr val="0F172A"/>
                 </a:solidFill>
                 <a:latin typeface="Open Sans"/>
               </a:rPr>
-              <a:t>Approve the program. Staff it. Ship.</a:t>
+              <a:t>Working prototype. Real California data. Running today.</a:t>
             </a:r>
           </a:p>
         </p:txBody>
@@ -5075,298 +5354,7 @@
         <p:spPr>
           <a:xfrm>
             <a:off x="457200" y="2468880"/>
-            <a:ext cx="5486400" cy="3657600"/>
-          </a:xfrm>
-          <a:prstGeom prst="roundRect">
-            <a:avLst>
-              <a:gd name="adj" fmla="val 4000"/>
-            </a:avLst>
-          </a:prstGeom>
-          <a:solidFill>
-            <a:srgbClr val="2863C5"/>
-          </a:solidFill>
-          <a:ln>
-            <a:noFill/>
-          </a:ln>
-          <a:effectLst/>
-        </p:spPr>
-        <p:style>
-          <a:lnRef idx="1">
-            <a:schemeClr val="accent1"/>
-          </a:lnRef>
-          <a:fillRef idx="3">
-            <a:schemeClr val="accent1"/>
-          </a:fillRef>
-          <a:effectRef idx="2">
-            <a:schemeClr val="accent1"/>
-          </a:effectRef>
-          <a:fontRef idx="minor">
-            <a:schemeClr val="lt1"/>
-          </a:fontRef>
-        </p:style>
-        <p:txBody>
-          <a:bodyPr rtlCol="0" anchor="ctr"/>
-          <a:lstStyle/>
-          <a:p>
-            <a:pPr algn="ctr"/>
-          </a:p>
-        </p:txBody>
-      </p:sp>
-      <p:sp>
-        <p:nvSpPr>
-          <p:cNvPr id="11" name="TextBox 10"/>
-          <p:cNvSpPr txBox="1"/>
-          <p:nvPr/>
-        </p:nvSpPr>
-        <p:spPr>
-          <a:xfrm>
-            <a:off x="640080" y="2697480"/>
-            <a:ext cx="5120640" cy="457200"/>
-          </a:xfrm>
-          <a:prstGeom prst="rect">
-            <a:avLst/>
-          </a:prstGeom>
-          <a:noFill/>
-        </p:spPr>
-        <p:txBody>
-          <a:bodyPr wrap="square" anchor="t" lIns="0" rIns="0" tIns="0" bIns="0">
-            <a:spAutoFit/>
-          </a:bodyPr>
-          <a:lstStyle/>
-          <a:p>
-            <a:pPr algn="l"/>
-            <a:r>
-              <a:rPr sz="1200" b="1">
-                <a:solidFill>
-                  <a:srgbClr val="CCDDFF"/>
-                </a:solidFill>
-                <a:latin typeface="Open Sans"/>
-              </a:rPr>
-              <a:t>RESOURCE REQUEST</a:t>
-            </a:r>
-          </a:p>
-        </p:txBody>
-      </p:sp>
-      <p:sp>
-        <p:nvSpPr>
-          <p:cNvPr id="12" name="TextBox 11"/>
-          <p:cNvSpPr txBox="1"/>
-          <p:nvPr/>
-        </p:nvSpPr>
-        <p:spPr>
-          <a:xfrm>
-            <a:off x="640080" y="3200400"/>
-            <a:ext cx="5120640" cy="640080"/>
-          </a:xfrm>
-          <a:prstGeom prst="rect">
-            <a:avLst/>
-          </a:prstGeom>
-          <a:noFill/>
-        </p:spPr>
-        <p:txBody>
-          <a:bodyPr wrap="square" anchor="t" lIns="0" rIns="0" tIns="0" bIns="0">
-            <a:spAutoFit/>
-          </a:bodyPr>
-          <a:lstStyle/>
-          <a:p>
-            <a:pPr algn="l"/>
-            <a:r>
-              <a:rPr sz="2400" b="1">
-                <a:solidFill>
-                  <a:srgbClr val="FFFFFF"/>
-                </a:solidFill>
-                <a:latin typeface="Open Sans"/>
-              </a:rPr>
-              <a:t>1 data engineer</a:t>
-            </a:r>
-          </a:p>
-        </p:txBody>
-      </p:sp>
-      <p:sp>
-        <p:nvSpPr>
-          <p:cNvPr id="13" name="TextBox 12"/>
-          <p:cNvSpPr txBox="1"/>
-          <p:nvPr/>
-        </p:nvSpPr>
-        <p:spPr>
-          <a:xfrm>
-            <a:off x="640080" y="3794760"/>
-            <a:ext cx="5120640" cy="640080"/>
-          </a:xfrm>
-          <a:prstGeom prst="rect">
-            <a:avLst/>
-          </a:prstGeom>
-          <a:noFill/>
-        </p:spPr>
-        <p:txBody>
-          <a:bodyPr wrap="square" anchor="t" lIns="0" rIns="0" tIns="0" bIns="0">
-            <a:spAutoFit/>
-          </a:bodyPr>
-          <a:lstStyle/>
-          <a:p>
-            <a:pPr algn="l"/>
-            <a:r>
-              <a:rPr sz="2400" b="1">
-                <a:solidFill>
-                  <a:srgbClr val="FFFFFF"/>
-                </a:solidFill>
-                <a:latin typeface="Open Sans"/>
-              </a:rPr>
-              <a:t>1 product engineer</a:t>
-            </a:r>
-          </a:p>
-        </p:txBody>
-      </p:sp>
-      <p:sp>
-        <p:nvSpPr>
-          <p:cNvPr id="14" name="TextBox 13"/>
-          <p:cNvSpPr txBox="1"/>
-          <p:nvPr/>
-        </p:nvSpPr>
-        <p:spPr>
-          <a:xfrm>
-            <a:off x="640080" y="4572000"/>
-            <a:ext cx="5120640" cy="548640"/>
-          </a:xfrm>
-          <a:prstGeom prst="rect">
-            <a:avLst/>
-          </a:prstGeom>
-          <a:noFill/>
-        </p:spPr>
-        <p:txBody>
-          <a:bodyPr wrap="square" anchor="t" lIns="0" rIns="0" tIns="0" bIns="0">
-            <a:spAutoFit/>
-          </a:bodyPr>
-          <a:lstStyle/>
-          <a:p>
-            <a:pPr algn="l"/>
-            <a:r>
-              <a:rPr sz="2000" b="1">
-                <a:solidFill>
-                  <a:srgbClr val="FFFFFF"/>
-                </a:solidFill>
-                <a:latin typeface="Open Sans"/>
-              </a:rPr>
-              <a:t>~6 weeks to first state live</a:t>
-            </a:r>
-          </a:p>
-        </p:txBody>
-      </p:sp>
-      <p:sp>
-        <p:nvSpPr>
-          <p:cNvPr id="15" name="TextBox 14"/>
-          <p:cNvSpPr txBox="1"/>
-          <p:nvPr/>
-        </p:nvSpPr>
-        <p:spPr>
-          <a:xfrm>
-            <a:off x="640080" y="5074920"/>
-            <a:ext cx="5120640" cy="365760"/>
-          </a:xfrm>
-          <a:prstGeom prst="rect">
-            <a:avLst/>
-          </a:prstGeom>
-          <a:noFill/>
-        </p:spPr>
-        <p:txBody>
-          <a:bodyPr wrap="square" anchor="t" lIns="0" rIns="0" tIns="0" bIns="0">
-            <a:spAutoFit/>
-          </a:bodyPr>
-          <a:lstStyle/>
-          <a:p>
-            <a:pPr algn="l"/>
-            <a:r>
-              <a:rPr sz="1400" b="0">
-                <a:solidFill>
-                  <a:srgbClr val="CCDDFF"/>
-                </a:solidFill>
-                <a:latin typeface="Open Sans"/>
-              </a:rPr>
-              <a:t>~6 months to top-10 state coverage</a:t>
-            </a:r>
-          </a:p>
-        </p:txBody>
-      </p:sp>
-      <p:sp>
-        <p:nvSpPr>
-          <p:cNvPr id="16" name="TextBox 15"/>
-          <p:cNvSpPr txBox="1"/>
-          <p:nvPr/>
-        </p:nvSpPr>
-        <p:spPr>
-          <a:xfrm>
-            <a:off x="640080" y="5486400"/>
-            <a:ext cx="5120640" cy="457200"/>
-          </a:xfrm>
-          <a:prstGeom prst="rect">
-            <a:avLst/>
-          </a:prstGeom>
-          <a:noFill/>
-        </p:spPr>
-        <p:txBody>
-          <a:bodyPr wrap="square" anchor="t" lIns="0" rIns="0" tIns="0" bIns="0">
-            <a:spAutoFit/>
-          </a:bodyPr>
-          <a:lstStyle/>
-          <a:p>
-            <a:pPr algn="l"/>
-            <a:r>
-              <a:rPr sz="1200" b="0">
-                <a:solidFill>
-                  <a:srgbClr val="CCDDFF"/>
-                </a:solidFill>
-                <a:latin typeface="Open Sans"/>
-              </a:rPr>
-              <a:t>No new infrastructure — Snowflake already paid for.</a:t>
-            </a:r>
-          </a:p>
-        </p:txBody>
-      </p:sp>
-      <p:sp>
-        <p:nvSpPr>
-          <p:cNvPr id="17" name="TextBox 16"/>
-          <p:cNvSpPr txBox="1"/>
-          <p:nvPr/>
-        </p:nvSpPr>
-        <p:spPr>
-          <a:xfrm>
-            <a:off x="6400800" y="2468880"/>
-            <a:ext cx="5303520" cy="365760"/>
-          </a:xfrm>
-          <a:prstGeom prst="rect">
-            <a:avLst/>
-          </a:prstGeom>
-          <a:noFill/>
-        </p:spPr>
-        <p:txBody>
-          <a:bodyPr wrap="square" anchor="t" lIns="0" rIns="0" tIns="0" bIns="0">
-            <a:spAutoFit/>
-          </a:bodyPr>
-          <a:lstStyle/>
-          <a:p>
-            <a:pPr algn="l"/>
-            <a:r>
-              <a:rPr sz="1200" b="1">
-                <a:solidFill>
-                  <a:srgbClr val="2863C5"/>
-                </a:solidFill>
-                <a:latin typeface="Open Sans"/>
-              </a:rPr>
-              <a:t>WHAT WE GET</a:t>
-            </a:r>
-          </a:p>
-        </p:txBody>
-      </p:sp>
-      <p:sp>
-        <p:nvSpPr>
-          <p:cNvPr id="18" name="Rounded Rectangle 17"/>
-          <p:cNvSpPr/>
-          <p:nvPr/>
-        </p:nvSpPr>
-        <p:spPr>
-          <a:xfrm>
-            <a:off x="6400800" y="2926080"/>
-            <a:ext cx="5303520" cy="713232"/>
+            <a:ext cx="2697480" cy="1554480"/>
           </a:xfrm>
           <a:prstGeom prst="roundRect">
             <a:avLst>
@@ -5407,20 +5395,20 @@
       </p:sp>
       <p:sp>
         <p:nvSpPr>
-          <p:cNvPr id="19" name="Rectangle 18"/>
+          <p:cNvPr id="11" name="Rectangle 10"/>
           <p:cNvSpPr/>
           <p:nvPr/>
         </p:nvSpPr>
         <p:spPr>
           <a:xfrm>
-            <a:off x="6400800" y="2926080"/>
-            <a:ext cx="146304" cy="713232"/>
+            <a:off x="457200" y="2468880"/>
+            <a:ext cx="2697480" cy="137160"/>
           </a:xfrm>
           <a:prstGeom prst="rect">
             <a:avLst/>
           </a:prstGeom>
           <a:solidFill>
-            <a:srgbClr val="FC4C0B"/>
+            <a:srgbClr val="2863C5"/>
           </a:solidFill>
           <a:ln>
             <a:noFill/>
@@ -5451,49 +5439,49 @@
       </p:sp>
       <p:sp>
         <p:nvSpPr>
-          <p:cNvPr id="20" name="TextBox 19"/>
-          <p:cNvSpPr txBox="1"/>
-          <p:nvPr/>
-        </p:nvSpPr>
-        <p:spPr>
-          <a:xfrm>
-            <a:off x="6675120" y="2999232"/>
-            <a:ext cx="4937760" cy="292608"/>
-          </a:xfrm>
-          <a:prstGeom prst="rect">
-            <a:avLst/>
-          </a:prstGeom>
-          <a:noFill/>
-        </p:spPr>
-        <p:txBody>
-          <a:bodyPr wrap="square" anchor="t" lIns="0" rIns="0" tIns="0" bIns="0">
-            <a:spAutoFit/>
-          </a:bodyPr>
-          <a:lstStyle/>
-          <a:p>
-            <a:pPr algn="l"/>
-            <a:r>
-              <a:rPr sz="1400" b="1">
-                <a:solidFill>
-                  <a:srgbClr val="0F172A"/>
-                </a:solidFill>
-                <a:latin typeface="Open Sans"/>
-              </a:rPr>
-              <a:t>A first-of-its-kind feature</a:t>
-            </a:r>
-          </a:p>
-        </p:txBody>
-      </p:sp>
-      <p:sp>
-        <p:nvSpPr>
-          <p:cNvPr id="21" name="TextBox 20"/>
-          <p:cNvSpPr txBox="1"/>
-          <p:nvPr/>
-        </p:nvSpPr>
-        <p:spPr>
-          <a:xfrm>
-            <a:off x="6675120" y="3310128"/>
-            <a:ext cx="4937760" cy="310896"/>
+          <p:cNvPr id="12" name="TextBox 11"/>
+          <p:cNvSpPr txBox="1"/>
+          <p:nvPr/>
+        </p:nvSpPr>
+        <p:spPr>
+          <a:xfrm>
+            <a:off x="640080" y="2788920"/>
+            <a:ext cx="2331720" cy="868680"/>
+          </a:xfrm>
+          <a:prstGeom prst="rect">
+            <a:avLst/>
+          </a:prstGeom>
+          <a:noFill/>
+        </p:spPr>
+        <p:txBody>
+          <a:bodyPr wrap="square" anchor="t" lIns="0" rIns="0" tIns="0" bIns="0">
+            <a:spAutoFit/>
+          </a:bodyPr>
+          <a:lstStyle/>
+          <a:p>
+            <a:pPr algn="l"/>
+            <a:r>
+              <a:rPr sz="4400" b="1">
+                <a:solidFill>
+                  <a:srgbClr val="2863C5"/>
+                </a:solidFill>
+                <a:latin typeface="Open Sans"/>
+              </a:rPr>
+              <a:t>38M+</a:t>
+            </a:r>
+          </a:p>
+        </p:txBody>
+      </p:sp>
+      <p:sp>
+        <p:nvSpPr>
+          <p:cNvPr id="13" name="TextBox 12"/>
+          <p:cNvSpPr txBox="1"/>
+          <p:nvPr/>
+        </p:nvSpPr>
+        <p:spPr>
+          <a:xfrm>
+            <a:off x="640080" y="3657600"/>
+            <a:ext cx="2331720" cy="365760"/>
           </a:xfrm>
           <a:prstGeom prst="rect">
             <a:avLst/>
@@ -5514,21 +5502,21 @@
                 </a:solidFill>
                 <a:latin typeface="Open Sans"/>
               </a:rPr>
-              <a:t>No credit-monitoring competitor offers this.</a:t>
-            </a:r>
-          </a:p>
-        </p:txBody>
-      </p:sp>
-      <p:sp>
-        <p:nvSpPr>
-          <p:cNvPr id="22" name="Rounded Rectangle 21"/>
+              <a:t>records indexed</a:t>
+            </a:r>
+          </a:p>
+        </p:txBody>
+      </p:sp>
+      <p:sp>
+        <p:nvSpPr>
+          <p:cNvPr id="14" name="Rounded Rectangle 13"/>
           <p:cNvSpPr/>
           <p:nvPr/>
         </p:nvSpPr>
         <p:spPr>
           <a:xfrm>
-            <a:off x="6400800" y="3730752"/>
-            <a:ext cx="5303520" cy="713232"/>
+            <a:off x="3337560" y="2468880"/>
+            <a:ext cx="2697480" cy="1554480"/>
           </a:xfrm>
           <a:prstGeom prst="roundRect">
             <a:avLst>
@@ -5569,14 +5557,14 @@
       </p:sp>
       <p:sp>
         <p:nvSpPr>
-          <p:cNvPr id="23" name="Rectangle 22"/>
+          <p:cNvPr id="15" name="Rectangle 14"/>
           <p:cNvSpPr/>
           <p:nvPr/>
         </p:nvSpPr>
         <p:spPr>
           <a:xfrm>
-            <a:off x="6400800" y="3730752"/>
-            <a:ext cx="146304" cy="713232"/>
+            <a:off x="3337560" y="2468880"/>
+            <a:ext cx="2697480" cy="137160"/>
           </a:xfrm>
           <a:prstGeom prst="rect">
             <a:avLst/>
@@ -5613,49 +5601,49 @@
       </p:sp>
       <p:sp>
         <p:nvSpPr>
-          <p:cNvPr id="24" name="TextBox 23"/>
-          <p:cNvSpPr txBox="1"/>
-          <p:nvPr/>
-        </p:nvSpPr>
-        <p:spPr>
-          <a:xfrm>
-            <a:off x="6675120" y="3803904"/>
-            <a:ext cx="4937760" cy="292608"/>
-          </a:xfrm>
-          <a:prstGeom prst="rect">
-            <a:avLst/>
-          </a:prstGeom>
-          <a:noFill/>
-        </p:spPr>
-        <p:txBody>
-          <a:bodyPr wrap="square" anchor="t" lIns="0" rIns="0" tIns="0" bIns="0">
-            <a:spAutoFit/>
-          </a:bodyPr>
-          <a:lstStyle/>
-          <a:p>
-            <a:pPr algn="l"/>
-            <a:r>
-              <a:rPr sz="1400" b="1">
-                <a:solidFill>
-                  <a:srgbClr val="0F172A"/>
-                </a:solidFill>
-                <a:latin typeface="Open Sans"/>
-              </a:rPr>
-              <a:t>Retention lift</a:t>
-            </a:r>
-          </a:p>
-        </p:txBody>
-      </p:sp>
-      <p:sp>
-        <p:nvSpPr>
-          <p:cNvPr id="25" name="TextBox 24"/>
-          <p:cNvSpPr txBox="1"/>
-          <p:nvPr/>
-        </p:nvSpPr>
-        <p:spPr>
-          <a:xfrm>
-            <a:off x="6675120" y="4114800"/>
-            <a:ext cx="4937760" cy="310896"/>
+          <p:cNvPr id="16" name="TextBox 15"/>
+          <p:cNvSpPr txBox="1"/>
+          <p:nvPr/>
+        </p:nvSpPr>
+        <p:spPr>
+          <a:xfrm>
+            <a:off x="3520440" y="2788920"/>
+            <a:ext cx="2331720" cy="868680"/>
+          </a:xfrm>
+          <a:prstGeom prst="rect">
+            <a:avLst/>
+          </a:prstGeom>
+          <a:noFill/>
+        </p:spPr>
+        <p:txBody>
+          <a:bodyPr wrap="square" anchor="t" lIns="0" rIns="0" tIns="0" bIns="0">
+            <a:spAutoFit/>
+          </a:bodyPr>
+          <a:lstStyle/>
+          <a:p>
+            <a:pPr algn="l"/>
+            <a:r>
+              <a:rPr sz="4400" b="1">
+                <a:solidFill>
+                  <a:srgbClr val="FC4C0B"/>
+                </a:solidFill>
+                <a:latin typeface="Open Sans"/>
+              </a:rPr>
+              <a:t>$11B</a:t>
+            </a:r>
+          </a:p>
+        </p:txBody>
+      </p:sp>
+      <p:sp>
+        <p:nvSpPr>
+          <p:cNvPr id="17" name="TextBox 16"/>
+          <p:cNvSpPr txBox="1"/>
+          <p:nvPr/>
+        </p:nvSpPr>
+        <p:spPr>
+          <a:xfrm>
+            <a:off x="3520440" y="3657600"/>
+            <a:ext cx="2331720" cy="365760"/>
           </a:xfrm>
           <a:prstGeom prst="rect">
             <a:avLst/>
@@ -5676,21 +5664,21 @@
                 </a:solidFill>
                 <a:latin typeface="Open Sans"/>
               </a:rPr>
-              <a:t>Every found-money notification is a "wow" from us.</a:t>
-            </a:r>
-          </a:p>
-        </p:txBody>
-      </p:sp>
-      <p:sp>
-        <p:nvSpPr>
-          <p:cNvPr id="26" name="Rounded Rectangle 25"/>
+              <a:t>in unclaimed property</a:t>
+            </a:r>
+          </a:p>
+        </p:txBody>
+      </p:sp>
+      <p:sp>
+        <p:nvSpPr>
+          <p:cNvPr id="18" name="Rounded Rectangle 17"/>
           <p:cNvSpPr/>
           <p:nvPr/>
         </p:nvSpPr>
         <p:spPr>
           <a:xfrm>
-            <a:off x="6400800" y="4535424"/>
-            <a:ext cx="5303520" cy="713232"/>
+            <a:off x="6217920" y="2468880"/>
+            <a:ext cx="2697480" cy="1554480"/>
           </a:xfrm>
           <a:prstGeom prst="roundRect">
             <a:avLst>
@@ -5731,20 +5719,20 @@
       </p:sp>
       <p:sp>
         <p:nvSpPr>
-          <p:cNvPr id="27" name="Rectangle 26"/>
+          <p:cNvPr id="19" name="Rectangle 18"/>
           <p:cNvSpPr/>
           <p:nvPr/>
         </p:nvSpPr>
         <p:spPr>
           <a:xfrm>
-            <a:off x="6400800" y="4535424"/>
-            <a:ext cx="146304" cy="713232"/>
+            <a:off x="6217920" y="2468880"/>
+            <a:ext cx="2697480" cy="137160"/>
           </a:xfrm>
           <a:prstGeom prst="rect">
             <a:avLst/>
           </a:prstGeom>
           <a:solidFill>
-            <a:srgbClr val="FC4C0B"/>
+            <a:srgbClr val="1F4F9E"/>
           </a:solidFill>
           <a:ln>
             <a:noFill/>
@@ -5775,49 +5763,49 @@
       </p:sp>
       <p:sp>
         <p:nvSpPr>
-          <p:cNvPr id="28" name="TextBox 27"/>
-          <p:cNvSpPr txBox="1"/>
-          <p:nvPr/>
-        </p:nvSpPr>
-        <p:spPr>
-          <a:xfrm>
-            <a:off x="6675120" y="4608576"/>
-            <a:ext cx="4937760" cy="292608"/>
-          </a:xfrm>
-          <a:prstGeom prst="rect">
-            <a:avLst/>
-          </a:prstGeom>
-          <a:noFill/>
-        </p:spPr>
-        <p:txBody>
-          <a:bodyPr wrap="square" anchor="t" lIns="0" rIns="0" tIns="0" bIns="0">
-            <a:spAutoFit/>
-          </a:bodyPr>
-          <a:lstStyle/>
-          <a:p>
-            <a:pPr algn="l"/>
-            <a:r>
-              <a:rPr sz="1400" b="1">
-                <a:solidFill>
-                  <a:srgbClr val="0F172A"/>
-                </a:solidFill>
-                <a:latin typeface="Open Sans"/>
-              </a:rPr>
-              <a:t>Acquisition hook</a:t>
-            </a:r>
-          </a:p>
-        </p:txBody>
-      </p:sp>
-      <p:sp>
-        <p:nvSpPr>
-          <p:cNvPr id="29" name="TextBox 28"/>
-          <p:cNvSpPr txBox="1"/>
-          <p:nvPr/>
-        </p:nvSpPr>
-        <p:spPr>
-          <a:xfrm>
-            <a:off x="6675120" y="4919472"/>
-            <a:ext cx="4937760" cy="310896"/>
+          <p:cNvPr id="20" name="TextBox 19"/>
+          <p:cNvSpPr txBox="1"/>
+          <p:nvPr/>
+        </p:nvSpPr>
+        <p:spPr>
+          <a:xfrm>
+            <a:off x="6400800" y="2788920"/>
+            <a:ext cx="2331720" cy="868680"/>
+          </a:xfrm>
+          <a:prstGeom prst="rect">
+            <a:avLst/>
+          </a:prstGeom>
+          <a:noFill/>
+        </p:spPr>
+        <p:txBody>
+          <a:bodyPr wrap="square" anchor="t" lIns="0" rIns="0" tIns="0" bIns="0">
+            <a:spAutoFit/>
+          </a:bodyPr>
+          <a:lstStyle/>
+          <a:p>
+            <a:pPr algn="l"/>
+            <a:r>
+              <a:rPr sz="4400" b="1">
+                <a:solidFill>
+                  <a:srgbClr val="1F4F9E"/>
+                </a:solidFill>
+                <a:latin typeface="Open Sans"/>
+              </a:rPr>
+              <a:t>113s</a:t>
+            </a:r>
+          </a:p>
+        </p:txBody>
+      </p:sp>
+      <p:sp>
+        <p:nvSpPr>
+          <p:cNvPr id="21" name="TextBox 20"/>
+          <p:cNvSpPr txBox="1"/>
+          <p:nvPr/>
+        </p:nvSpPr>
+        <p:spPr>
+          <a:xfrm>
+            <a:off x="6400800" y="3657600"/>
+            <a:ext cx="2331720" cy="365760"/>
           </a:xfrm>
           <a:prstGeom prst="rect">
             <a:avLst/>
@@ -5838,21 +5826,21 @@
                 </a:solidFill>
                 <a:latin typeface="Open Sans"/>
               </a:rPr>
-              <a:t>"You may have unclaimed money. Free to find out."</a:t>
-            </a:r>
-          </a:p>
-        </p:txBody>
-      </p:sp>
-      <p:sp>
-        <p:nvSpPr>
-          <p:cNvPr id="30" name="Rounded Rectangle 29"/>
+              <a:t>to bulk-load 34M rows</a:t>
+            </a:r>
+          </a:p>
+        </p:txBody>
+      </p:sp>
+      <p:sp>
+        <p:nvSpPr>
+          <p:cNvPr id="22" name="Rounded Rectangle 21"/>
           <p:cNvSpPr/>
           <p:nvPr/>
         </p:nvSpPr>
         <p:spPr>
           <a:xfrm>
-            <a:off x="6400800" y="5340096"/>
-            <a:ext cx="5303520" cy="713232"/>
+            <a:off x="9098280" y="2468880"/>
+            <a:ext cx="2697480" cy="1554480"/>
           </a:xfrm>
           <a:prstGeom prst="roundRect">
             <a:avLst>
@@ -5893,20 +5881,20 @@
       </p:sp>
       <p:sp>
         <p:nvSpPr>
-          <p:cNvPr id="31" name="Rectangle 30"/>
+          <p:cNvPr id="23" name="Rectangle 22"/>
           <p:cNvSpPr/>
           <p:nvPr/>
         </p:nvSpPr>
         <p:spPr>
           <a:xfrm>
-            <a:off x="6400800" y="5340096"/>
-            <a:ext cx="146304" cy="713232"/>
+            <a:off x="9098280" y="2468880"/>
+            <a:ext cx="2697480" cy="137160"/>
           </a:xfrm>
           <a:prstGeom prst="rect">
             <a:avLst/>
           </a:prstGeom>
           <a:solidFill>
-            <a:srgbClr val="FC4C0B"/>
+            <a:srgbClr val="FFB352"/>
           </a:solidFill>
           <a:ln>
             <a:noFill/>
@@ -5937,49 +5925,49 @@
       </p:sp>
       <p:sp>
         <p:nvSpPr>
-          <p:cNvPr id="32" name="TextBox 31"/>
-          <p:cNvSpPr txBox="1"/>
-          <p:nvPr/>
-        </p:nvSpPr>
-        <p:spPr>
-          <a:xfrm>
-            <a:off x="6675120" y="5413248"/>
-            <a:ext cx="4937760" cy="292608"/>
-          </a:xfrm>
-          <a:prstGeom prst="rect">
-            <a:avLst/>
-          </a:prstGeom>
-          <a:noFill/>
-        </p:spPr>
-        <p:txBody>
-          <a:bodyPr wrap="square" anchor="t" lIns="0" rIns="0" tIns="0" bIns="0">
-            <a:spAutoFit/>
-          </a:bodyPr>
-          <a:lstStyle/>
-          <a:p>
-            <a:pPr algn="l"/>
-            <a:r>
-              <a:rPr sz="1400" b="1">
-                <a:solidFill>
-                  <a:srgbClr val="0F172A"/>
-                </a:solidFill>
-                <a:latin typeface="Open Sans"/>
-              </a:rPr>
-              <a:t>Defensible moat</a:t>
-            </a:r>
-          </a:p>
-        </p:txBody>
-      </p:sp>
-      <p:sp>
-        <p:nvSpPr>
-          <p:cNvPr id="33" name="TextBox 32"/>
-          <p:cNvSpPr txBox="1"/>
-          <p:nvPr/>
-        </p:nvSpPr>
-        <p:spPr>
-          <a:xfrm>
-            <a:off x="6675120" y="5724144"/>
-            <a:ext cx="4937760" cy="310896"/>
+          <p:cNvPr id="24" name="TextBox 23"/>
+          <p:cNvSpPr txBox="1"/>
+          <p:nvPr/>
+        </p:nvSpPr>
+        <p:spPr>
+          <a:xfrm>
+            <a:off x="9281160" y="2788920"/>
+            <a:ext cx="2331720" cy="868680"/>
+          </a:xfrm>
+          <a:prstGeom prst="rect">
+            <a:avLst/>
+          </a:prstGeom>
+          <a:noFill/>
+        </p:spPr>
+        <p:txBody>
+          <a:bodyPr wrap="square" anchor="t" lIns="0" rIns="0" tIns="0" bIns="0">
+            <a:spAutoFit/>
+          </a:bodyPr>
+          <a:lstStyle/>
+          <a:p>
+            <a:pPr algn="l"/>
+            <a:r>
+              <a:rPr sz="4400" b="1">
+                <a:solidFill>
+                  <a:srgbClr val="FFB352"/>
+                </a:solidFill>
+                <a:latin typeface="Open Sans"/>
+              </a:rPr>
+              <a:t>3</a:t>
+            </a:r>
+          </a:p>
+        </p:txBody>
+      </p:sp>
+      <p:sp>
+        <p:nvSpPr>
+          <p:cNvPr id="25" name="TextBox 24"/>
+          <p:cNvSpPr txBox="1"/>
+          <p:nvPr/>
+        </p:nvSpPr>
+        <p:spPr>
+          <a:xfrm>
+            <a:off x="9281160" y="3657600"/>
+            <a:ext cx="2331720" cy="365760"/>
           </a:xfrm>
           <a:prstGeom prst="rect">
             <a:avLst/>
@@ -6000,27 +5988,204 @@
                 </a:solidFill>
                 <a:latin typeface="Open Sans"/>
               </a:rPr>
-              <a:t>12+ months of state work others would have to repeat.</a:t>
-            </a:r>
-          </a:p>
-        </p:txBody>
-      </p:sp>
-      <p:sp>
-        <p:nvSpPr>
-          <p:cNvPr id="34" name="Rectangle 33"/>
+              <a:t>of Ahmed's records found</a:t>
+            </a:r>
+          </a:p>
+        </p:txBody>
+      </p:sp>
+      <p:sp>
+        <p:nvSpPr>
+          <p:cNvPr id="26" name="TextBox 25"/>
+          <p:cNvSpPr txBox="1"/>
+          <p:nvPr/>
+        </p:nvSpPr>
+        <p:spPr>
+          <a:xfrm>
+            <a:off x="457200" y="4297680"/>
+            <a:ext cx="11430000" cy="365760"/>
+          </a:xfrm>
+          <a:prstGeom prst="rect">
+            <a:avLst/>
+          </a:prstGeom>
+          <a:noFill/>
+        </p:spPr>
+        <p:txBody>
+          <a:bodyPr wrap="square" anchor="t" lIns="0" rIns="0" tIns="0" bIns="0">
+            <a:spAutoFit/>
+          </a:bodyPr>
+          <a:lstStyle/>
+          <a:p>
+            <a:pPr algn="l"/>
+            <a:r>
+              <a:rPr sz="1100" b="1">
+                <a:solidFill>
+                  <a:srgbClr val="2863C5"/>
+                </a:solidFill>
+                <a:latin typeface="Open Sans"/>
+              </a:rPr>
+              <a:t>WHAT'S RUNNING TODAY</a:t>
+            </a:r>
+          </a:p>
+        </p:txBody>
+      </p:sp>
+      <p:sp>
+        <p:nvSpPr>
+          <p:cNvPr id="27" name="TextBox 26"/>
+          <p:cNvSpPr txBox="1"/>
+          <p:nvPr/>
+        </p:nvSpPr>
+        <p:spPr>
+          <a:xfrm>
+            <a:off x="640080" y="4663440"/>
+            <a:ext cx="10972800" cy="365760"/>
+          </a:xfrm>
+          <a:prstGeom prst="rect">
+            <a:avLst/>
+          </a:prstGeom>
+          <a:noFill/>
+        </p:spPr>
+        <p:txBody>
+          <a:bodyPr wrap="square" anchor="t" lIns="0" rIns="0" tIns="0" bIns="0">
+            <a:spAutoFit/>
+          </a:bodyPr>
+          <a:lstStyle/>
+          <a:p>
+            <a:pPr algn="l"/>
+            <a:r>
+              <a:rPr sz="1200" b="0">
+                <a:solidFill>
+                  <a:srgbClr val="334155"/>
+                </a:solidFill>
+                <a:latin typeface="Open Sans"/>
+              </a:rPr>
+              <a:t>✓  Web app — SmartCredit-themed search UI with the new BETA visual language</a:t>
+            </a:r>
+          </a:p>
+        </p:txBody>
+      </p:sp>
+      <p:sp>
+        <p:nvSpPr>
+          <p:cNvPr id="28" name="TextBox 27"/>
+          <p:cNvSpPr txBox="1"/>
+          <p:nvPr/>
+        </p:nvSpPr>
+        <p:spPr>
+          <a:xfrm>
+            <a:off x="640080" y="4956048"/>
+            <a:ext cx="10972800" cy="365760"/>
+          </a:xfrm>
+          <a:prstGeom prst="rect">
+            <a:avLst/>
+          </a:prstGeom>
+          <a:noFill/>
+        </p:spPr>
+        <p:txBody>
+          <a:bodyPr wrap="square" anchor="t" lIns="0" rIns="0" tIns="0" bIns="0">
+            <a:spAutoFit/>
+          </a:bodyPr>
+          <a:lstStyle/>
+          <a:p>
+            <a:pPr algn="l"/>
+            <a:r>
+              <a:rPr sz="1200" b="0">
+                <a:solidFill>
+                  <a:srgbClr val="334155"/>
+                </a:solidFill>
+                <a:latin typeface="Open Sans"/>
+              </a:rPr>
+              <a:t>✓  Data — California State Controller bulk CSVs in DuckDB (Snowflake-shaped SQL)</a:t>
+            </a:r>
+          </a:p>
+        </p:txBody>
+      </p:sp>
+      <p:sp>
+        <p:nvSpPr>
+          <p:cNvPr id="29" name="TextBox 28"/>
+          <p:cNvSpPr txBox="1"/>
+          <p:nvPr/>
+        </p:nvSpPr>
+        <p:spPr>
+          <a:xfrm>
+            <a:off x="640080" y="5248656"/>
+            <a:ext cx="10972800" cy="365760"/>
+          </a:xfrm>
+          <a:prstGeom prst="rect">
+            <a:avLst/>
+          </a:prstGeom>
+          <a:noFill/>
+        </p:spPr>
+        <p:txBody>
+          <a:bodyPr wrap="square" anchor="t" lIns="0" rIns="0" tIns="0" bIns="0">
+            <a:spAutoFit/>
+          </a:bodyPr>
+          <a:lstStyle/>
+          <a:p>
+            <a:pPr algn="l"/>
+            <a:r>
+              <a:rPr sz="1200" b="0">
+                <a:solidFill>
+                  <a:srgbClr val="334155"/>
+                </a:solidFill>
+                <a:latin typeface="Open Sans"/>
+              </a:rPr>
+              <a:t>✓  Match service — pluggable Protocol; production swaps in Privacy Master matcher</a:t>
+            </a:r>
+          </a:p>
+        </p:txBody>
+      </p:sp>
+      <p:sp>
+        <p:nvSpPr>
+          <p:cNvPr id="30" name="TextBox 29"/>
+          <p:cNvSpPr txBox="1"/>
+          <p:nvPr/>
+        </p:nvSpPr>
+        <p:spPr>
+          <a:xfrm>
+            <a:off x="640080" y="5541264"/>
+            <a:ext cx="10972800" cy="365760"/>
+          </a:xfrm>
+          <a:prstGeom prst="rect">
+            <a:avLst/>
+          </a:prstGeom>
+          <a:noFill/>
+        </p:spPr>
+        <p:txBody>
+          <a:bodyPr wrap="square" anchor="t" lIns="0" rIns="0" tIns="0" bIns="0">
+            <a:spAutoFit/>
+          </a:bodyPr>
+          <a:lstStyle/>
+          <a:p>
+            <a:pPr algn="l"/>
+            <a:r>
+              <a:rPr sz="1200" b="0">
+                <a:solidFill>
+                  <a:srgbClr val="334155"/>
+                </a:solidFill>
+                <a:latin typeface="Open Sans"/>
+              </a:rPr>
+              <a:t>✓  Admin page — real ingestion stats, file load history, row counts</a:t>
+            </a:r>
+          </a:p>
+        </p:txBody>
+      </p:sp>
+      <p:sp>
+        <p:nvSpPr>
+          <p:cNvPr id="31" name="Rounded Rectangle 30"/>
           <p:cNvSpPr/>
           <p:nvPr/>
         </p:nvSpPr>
         <p:spPr>
           <a:xfrm>
-            <a:off x="457200" y="6263640"/>
-            <a:ext cx="11247120" cy="0"/>
-          </a:xfrm>
-          <a:prstGeom prst="rect">
-            <a:avLst/>
+            <a:off x="457200" y="5989320"/>
+            <a:ext cx="11247120" cy="457200"/>
+          </a:xfrm>
+          <a:prstGeom prst="roundRect">
+            <a:avLst>
+              <a:gd name="adj" fmla="val 10000"/>
+            </a:avLst>
           </a:prstGeom>
           <a:solidFill>
-            <a:srgbClr val="0F172A"/>
+            <a:srgbClr val="2863C5"/>
           </a:solidFill>
           <a:ln>
             <a:noFill/>
@@ -6046,6 +6211,41 @@
           <a:lstStyle/>
           <a:p>
             <a:pPr algn="ctr"/>
+          </a:p>
+        </p:txBody>
+      </p:sp>
+      <p:sp>
+        <p:nvSpPr>
+          <p:cNvPr id="32" name="TextBox 31"/>
+          <p:cNvSpPr txBox="1"/>
+          <p:nvPr/>
+        </p:nvSpPr>
+        <p:spPr>
+          <a:xfrm>
+            <a:off x="640080" y="6035040"/>
+            <a:ext cx="10972800" cy="365760"/>
+          </a:xfrm>
+          <a:prstGeom prst="rect">
+            <a:avLst/>
+          </a:prstGeom>
+          <a:noFill/>
+        </p:spPr>
+        <p:txBody>
+          <a:bodyPr wrap="square" anchor="t" lIns="0" rIns="0" tIns="0" bIns="0">
+            <a:spAutoFit/>
+          </a:bodyPr>
+          <a:lstStyle/>
+          <a:p>
+            <a:pPr algn="l"/>
+            <a:r>
+              <a:rPr sz="1200" b="1">
+                <a:solidFill>
+                  <a:srgbClr val="FFFFFF"/>
+                </a:solidFill>
+                <a:latin typeface="Open Sans"/>
+              </a:rPr>
+              <a:t>Demo available now — ask any question, we'll search live.</a:t>
+            </a:r>
           </a:p>
         </p:txBody>
       </p:sp>
@@ -6120,6 +6320,1305 @@
         <p:spPr>
           <a:xfrm>
             <a:off x="0" y="0"/>
+            <a:ext cx="12188952" cy="54864"/>
+          </a:xfrm>
+          <a:prstGeom prst="rect">
+            <a:avLst/>
+          </a:prstGeom>
+          <a:solidFill>
+            <a:srgbClr val="2863C5"/>
+          </a:solidFill>
+          <a:ln>
+            <a:noFill/>
+          </a:ln>
+          <a:effectLst/>
+        </p:spPr>
+        <p:style>
+          <a:lnRef idx="1">
+            <a:schemeClr val="accent1"/>
+          </a:lnRef>
+          <a:fillRef idx="3">
+            <a:schemeClr val="accent1"/>
+          </a:fillRef>
+          <a:effectRef idx="2">
+            <a:schemeClr val="accent1"/>
+          </a:effectRef>
+          <a:fontRef idx="minor">
+            <a:schemeClr val="lt1"/>
+          </a:fontRef>
+        </p:style>
+        <p:txBody>
+          <a:bodyPr rtlCol="0" anchor="ctr"/>
+          <a:lstStyle/>
+          <a:p>
+            <a:pPr algn="ctr"/>
+          </a:p>
+        </p:txBody>
+      </p:sp>
+      <p:sp>
+        <p:nvSpPr>
+          <p:cNvPr id="4" name="TextBox 3"/>
+          <p:cNvSpPr txBox="1"/>
+          <p:nvPr/>
+        </p:nvSpPr>
+        <p:spPr>
+          <a:xfrm>
+            <a:off x="457200" y="164592"/>
+            <a:ext cx="1828800" cy="329184"/>
+          </a:xfrm>
+          <a:prstGeom prst="rect">
+            <a:avLst/>
+          </a:prstGeom>
+          <a:noFill/>
+        </p:spPr>
+        <p:txBody>
+          <a:bodyPr wrap="square" anchor="t" lIns="0" rIns="0" tIns="0" bIns="0">
+            <a:spAutoFit/>
+          </a:bodyPr>
+          <a:lstStyle/>
+          <a:p>
+            <a:pPr algn="l"/>
+            <a:r>
+              <a:rPr sz="1600" b="1">
+                <a:solidFill>
+                  <a:srgbClr val="0F172A"/>
+                </a:solidFill>
+                <a:latin typeface="Open Sans"/>
+              </a:rPr>
+              <a:t>smartcredit</a:t>
+            </a:r>
+          </a:p>
+        </p:txBody>
+      </p:sp>
+      <p:sp>
+        <p:nvSpPr>
+          <p:cNvPr id="5" name="TextBox 4"/>
+          <p:cNvSpPr txBox="1"/>
+          <p:nvPr/>
+        </p:nvSpPr>
+        <p:spPr>
+          <a:xfrm>
+            <a:off x="1691640" y="201168"/>
+            <a:ext cx="822960" cy="274320"/>
+          </a:xfrm>
+          <a:prstGeom prst="rect">
+            <a:avLst/>
+          </a:prstGeom>
+          <a:noFill/>
+        </p:spPr>
+        <p:txBody>
+          <a:bodyPr wrap="square" anchor="t" lIns="0" rIns="0" tIns="0" bIns="0">
+            <a:spAutoFit/>
+          </a:bodyPr>
+          <a:lstStyle/>
+          <a:p>
+            <a:pPr algn="l"/>
+            <a:r>
+              <a:rPr sz="1100" b="1">
+                <a:solidFill>
+                  <a:srgbClr val="2863C5"/>
+                </a:solidFill>
+                <a:latin typeface="Open Sans"/>
+              </a:rPr>
+              <a:t>BETA</a:t>
+            </a:r>
+          </a:p>
+        </p:txBody>
+      </p:sp>
+      <p:sp>
+        <p:nvSpPr>
+          <p:cNvPr id="6" name="TextBox 5"/>
+          <p:cNvSpPr txBox="1"/>
+          <p:nvPr/>
+        </p:nvSpPr>
+        <p:spPr>
+          <a:xfrm>
+            <a:off x="11338560" y="6446520"/>
+            <a:ext cx="731520" cy="274320"/>
+          </a:xfrm>
+          <a:prstGeom prst="rect">
+            <a:avLst/>
+          </a:prstGeom>
+          <a:noFill/>
+        </p:spPr>
+        <p:txBody>
+          <a:bodyPr wrap="square" anchor="t" lIns="0" rIns="0" tIns="0" bIns="0">
+            <a:spAutoFit/>
+          </a:bodyPr>
+          <a:lstStyle/>
+          <a:p>
+            <a:pPr algn="r"/>
+            <a:r>
+              <a:rPr sz="900" b="0">
+                <a:solidFill>
+                  <a:srgbClr val="64748B"/>
+                </a:solidFill>
+                <a:latin typeface="Open Sans"/>
+              </a:rPr>
+              <a:t>12 / 13</a:t>
+            </a:r>
+          </a:p>
+        </p:txBody>
+      </p:sp>
+      <p:sp>
+        <p:nvSpPr>
+          <p:cNvPr id="7" name="TextBox 6"/>
+          <p:cNvSpPr txBox="1"/>
+          <p:nvPr/>
+        </p:nvSpPr>
+        <p:spPr>
+          <a:xfrm>
+            <a:off x="457200" y="6446520"/>
+            <a:ext cx="7315200" cy="274320"/>
+          </a:xfrm>
+          <a:prstGeom prst="rect">
+            <a:avLst/>
+          </a:prstGeom>
+          <a:noFill/>
+        </p:spPr>
+        <p:txBody>
+          <a:bodyPr wrap="square" anchor="t" lIns="0" rIns="0" tIns="0" bIns="0">
+            <a:spAutoFit/>
+          </a:bodyPr>
+          <a:lstStyle/>
+          <a:p>
+            <a:pPr algn="l"/>
+            <a:r>
+              <a:rPr sz="900" b="0">
+                <a:solidFill>
+                  <a:srgbClr val="64748B"/>
+                </a:solidFill>
+                <a:latin typeface="Open Sans"/>
+              </a:rPr>
+              <a:t>myReclaim · Confidential — Consumer Direct, Inc.</a:t>
+            </a:r>
+          </a:p>
+        </p:txBody>
+      </p:sp>
+      <p:sp>
+        <p:nvSpPr>
+          <p:cNvPr id="8" name="TextBox 7"/>
+          <p:cNvSpPr txBox="1"/>
+          <p:nvPr/>
+        </p:nvSpPr>
+        <p:spPr>
+          <a:xfrm>
+            <a:off x="457200" y="777240"/>
+            <a:ext cx="11430000" cy="365760"/>
+          </a:xfrm>
+          <a:prstGeom prst="rect">
+            <a:avLst/>
+          </a:prstGeom>
+          <a:noFill/>
+        </p:spPr>
+        <p:txBody>
+          <a:bodyPr wrap="square" anchor="t" lIns="0" rIns="0" tIns="0" bIns="0">
+            <a:spAutoFit/>
+          </a:bodyPr>
+          <a:lstStyle/>
+          <a:p>
+            <a:pPr algn="l"/>
+            <a:r>
+              <a:rPr sz="1200" b="1">
+                <a:solidFill>
+                  <a:srgbClr val="2863C5"/>
+                </a:solidFill>
+                <a:latin typeface="Open Sans"/>
+              </a:rPr>
+              <a:t>THE ASK</a:t>
+            </a:r>
+          </a:p>
+        </p:txBody>
+      </p:sp>
+      <p:sp>
+        <p:nvSpPr>
+          <p:cNvPr id="9" name="TextBox 8"/>
+          <p:cNvSpPr txBox="1"/>
+          <p:nvPr/>
+        </p:nvSpPr>
+        <p:spPr>
+          <a:xfrm>
+            <a:off x="457200" y="1143000"/>
+            <a:ext cx="11430000" cy="914400"/>
+          </a:xfrm>
+          <a:prstGeom prst="rect">
+            <a:avLst/>
+          </a:prstGeom>
+          <a:noFill/>
+        </p:spPr>
+        <p:txBody>
+          <a:bodyPr wrap="square" anchor="t" lIns="0" rIns="0" tIns="0" bIns="0">
+            <a:spAutoFit/>
+          </a:bodyPr>
+          <a:lstStyle/>
+          <a:p>
+            <a:pPr algn="l"/>
+            <a:r>
+              <a:rPr sz="3200" b="1">
+                <a:solidFill>
+                  <a:srgbClr val="0F172A"/>
+                </a:solidFill>
+                <a:latin typeface="Open Sans"/>
+              </a:rPr>
+              <a:t>Approve the program. Staff it. Ship.</a:t>
+            </a:r>
+          </a:p>
+        </p:txBody>
+      </p:sp>
+      <p:sp>
+        <p:nvSpPr>
+          <p:cNvPr id="10" name="Rounded Rectangle 9"/>
+          <p:cNvSpPr/>
+          <p:nvPr/>
+        </p:nvSpPr>
+        <p:spPr>
+          <a:xfrm>
+            <a:off x="457200" y="2468880"/>
+            <a:ext cx="5486400" cy="3657600"/>
+          </a:xfrm>
+          <a:prstGeom prst="roundRect">
+            <a:avLst>
+              <a:gd name="adj" fmla="val 4000"/>
+            </a:avLst>
+          </a:prstGeom>
+          <a:solidFill>
+            <a:srgbClr val="2863C5"/>
+          </a:solidFill>
+          <a:ln>
+            <a:noFill/>
+          </a:ln>
+          <a:effectLst/>
+        </p:spPr>
+        <p:style>
+          <a:lnRef idx="1">
+            <a:schemeClr val="accent1"/>
+          </a:lnRef>
+          <a:fillRef idx="3">
+            <a:schemeClr val="accent1"/>
+          </a:fillRef>
+          <a:effectRef idx="2">
+            <a:schemeClr val="accent1"/>
+          </a:effectRef>
+          <a:fontRef idx="minor">
+            <a:schemeClr val="lt1"/>
+          </a:fontRef>
+        </p:style>
+        <p:txBody>
+          <a:bodyPr rtlCol="0" anchor="ctr"/>
+          <a:lstStyle/>
+          <a:p>
+            <a:pPr algn="ctr"/>
+          </a:p>
+        </p:txBody>
+      </p:sp>
+      <p:sp>
+        <p:nvSpPr>
+          <p:cNvPr id="11" name="TextBox 10"/>
+          <p:cNvSpPr txBox="1"/>
+          <p:nvPr/>
+        </p:nvSpPr>
+        <p:spPr>
+          <a:xfrm>
+            <a:off x="640080" y="2697480"/>
+            <a:ext cx="5120640" cy="457200"/>
+          </a:xfrm>
+          <a:prstGeom prst="rect">
+            <a:avLst/>
+          </a:prstGeom>
+          <a:noFill/>
+        </p:spPr>
+        <p:txBody>
+          <a:bodyPr wrap="square" anchor="t" lIns="0" rIns="0" tIns="0" bIns="0">
+            <a:spAutoFit/>
+          </a:bodyPr>
+          <a:lstStyle/>
+          <a:p>
+            <a:pPr algn="l"/>
+            <a:r>
+              <a:rPr sz="1200" b="1">
+                <a:solidFill>
+                  <a:srgbClr val="CCDDFF"/>
+                </a:solidFill>
+                <a:latin typeface="Open Sans"/>
+              </a:rPr>
+              <a:t>RESOURCE REQUEST</a:t>
+            </a:r>
+          </a:p>
+        </p:txBody>
+      </p:sp>
+      <p:sp>
+        <p:nvSpPr>
+          <p:cNvPr id="12" name="TextBox 11"/>
+          <p:cNvSpPr txBox="1"/>
+          <p:nvPr/>
+        </p:nvSpPr>
+        <p:spPr>
+          <a:xfrm>
+            <a:off x="640080" y="3200400"/>
+            <a:ext cx="5120640" cy="640080"/>
+          </a:xfrm>
+          <a:prstGeom prst="rect">
+            <a:avLst/>
+          </a:prstGeom>
+          <a:noFill/>
+        </p:spPr>
+        <p:txBody>
+          <a:bodyPr wrap="square" anchor="t" lIns="0" rIns="0" tIns="0" bIns="0">
+            <a:spAutoFit/>
+          </a:bodyPr>
+          <a:lstStyle/>
+          <a:p>
+            <a:pPr algn="l"/>
+            <a:r>
+              <a:rPr sz="2400" b="1">
+                <a:solidFill>
+                  <a:srgbClr val="FFFFFF"/>
+                </a:solidFill>
+                <a:latin typeface="Open Sans"/>
+              </a:rPr>
+              <a:t>1 data engineer</a:t>
+            </a:r>
+          </a:p>
+        </p:txBody>
+      </p:sp>
+      <p:sp>
+        <p:nvSpPr>
+          <p:cNvPr id="13" name="TextBox 12"/>
+          <p:cNvSpPr txBox="1"/>
+          <p:nvPr/>
+        </p:nvSpPr>
+        <p:spPr>
+          <a:xfrm>
+            <a:off x="640080" y="3794760"/>
+            <a:ext cx="5120640" cy="640080"/>
+          </a:xfrm>
+          <a:prstGeom prst="rect">
+            <a:avLst/>
+          </a:prstGeom>
+          <a:noFill/>
+        </p:spPr>
+        <p:txBody>
+          <a:bodyPr wrap="square" anchor="t" lIns="0" rIns="0" tIns="0" bIns="0">
+            <a:spAutoFit/>
+          </a:bodyPr>
+          <a:lstStyle/>
+          <a:p>
+            <a:pPr algn="l"/>
+            <a:r>
+              <a:rPr sz="2400" b="1">
+                <a:solidFill>
+                  <a:srgbClr val="FFFFFF"/>
+                </a:solidFill>
+                <a:latin typeface="Open Sans"/>
+              </a:rPr>
+              <a:t>1 product engineer</a:t>
+            </a:r>
+          </a:p>
+        </p:txBody>
+      </p:sp>
+      <p:sp>
+        <p:nvSpPr>
+          <p:cNvPr id="14" name="TextBox 13"/>
+          <p:cNvSpPr txBox="1"/>
+          <p:nvPr/>
+        </p:nvSpPr>
+        <p:spPr>
+          <a:xfrm>
+            <a:off x="640080" y="4572000"/>
+            <a:ext cx="5120640" cy="548640"/>
+          </a:xfrm>
+          <a:prstGeom prst="rect">
+            <a:avLst/>
+          </a:prstGeom>
+          <a:noFill/>
+        </p:spPr>
+        <p:txBody>
+          <a:bodyPr wrap="square" anchor="t" lIns="0" rIns="0" tIns="0" bIns="0">
+            <a:spAutoFit/>
+          </a:bodyPr>
+          <a:lstStyle/>
+          <a:p>
+            <a:pPr algn="l"/>
+            <a:r>
+              <a:rPr sz="2000" b="1">
+                <a:solidFill>
+                  <a:srgbClr val="FFFFFF"/>
+                </a:solidFill>
+                <a:latin typeface="Open Sans"/>
+              </a:rPr>
+              <a:t>~6 weeks to first state live</a:t>
+            </a:r>
+          </a:p>
+        </p:txBody>
+      </p:sp>
+      <p:sp>
+        <p:nvSpPr>
+          <p:cNvPr id="15" name="TextBox 14"/>
+          <p:cNvSpPr txBox="1"/>
+          <p:nvPr/>
+        </p:nvSpPr>
+        <p:spPr>
+          <a:xfrm>
+            <a:off x="640080" y="5074920"/>
+            <a:ext cx="5120640" cy="365760"/>
+          </a:xfrm>
+          <a:prstGeom prst="rect">
+            <a:avLst/>
+          </a:prstGeom>
+          <a:noFill/>
+        </p:spPr>
+        <p:txBody>
+          <a:bodyPr wrap="square" anchor="t" lIns="0" rIns="0" tIns="0" bIns="0">
+            <a:spAutoFit/>
+          </a:bodyPr>
+          <a:lstStyle/>
+          <a:p>
+            <a:pPr algn="l"/>
+            <a:r>
+              <a:rPr sz="1400" b="0">
+                <a:solidFill>
+                  <a:srgbClr val="CCDDFF"/>
+                </a:solidFill>
+                <a:latin typeface="Open Sans"/>
+              </a:rPr>
+              <a:t>~6 months to top-10 state coverage</a:t>
+            </a:r>
+          </a:p>
+        </p:txBody>
+      </p:sp>
+      <p:sp>
+        <p:nvSpPr>
+          <p:cNvPr id="16" name="TextBox 15"/>
+          <p:cNvSpPr txBox="1"/>
+          <p:nvPr/>
+        </p:nvSpPr>
+        <p:spPr>
+          <a:xfrm>
+            <a:off x="640080" y="5486400"/>
+            <a:ext cx="5120640" cy="457200"/>
+          </a:xfrm>
+          <a:prstGeom prst="rect">
+            <a:avLst/>
+          </a:prstGeom>
+          <a:noFill/>
+        </p:spPr>
+        <p:txBody>
+          <a:bodyPr wrap="square" anchor="t" lIns="0" rIns="0" tIns="0" bIns="0">
+            <a:spAutoFit/>
+          </a:bodyPr>
+          <a:lstStyle/>
+          <a:p>
+            <a:pPr algn="l"/>
+            <a:r>
+              <a:rPr sz="1200" b="0">
+                <a:solidFill>
+                  <a:srgbClr val="CCDDFF"/>
+                </a:solidFill>
+                <a:latin typeface="Open Sans"/>
+              </a:rPr>
+              <a:t>No new infrastructure — Snowflake already paid for.</a:t>
+            </a:r>
+          </a:p>
+        </p:txBody>
+      </p:sp>
+      <p:sp>
+        <p:nvSpPr>
+          <p:cNvPr id="17" name="TextBox 16"/>
+          <p:cNvSpPr txBox="1"/>
+          <p:nvPr/>
+        </p:nvSpPr>
+        <p:spPr>
+          <a:xfrm>
+            <a:off x="6400800" y="2468880"/>
+            <a:ext cx="5303520" cy="365760"/>
+          </a:xfrm>
+          <a:prstGeom prst="rect">
+            <a:avLst/>
+          </a:prstGeom>
+          <a:noFill/>
+        </p:spPr>
+        <p:txBody>
+          <a:bodyPr wrap="square" anchor="t" lIns="0" rIns="0" tIns="0" bIns="0">
+            <a:spAutoFit/>
+          </a:bodyPr>
+          <a:lstStyle/>
+          <a:p>
+            <a:pPr algn="l"/>
+            <a:r>
+              <a:rPr sz="1200" b="1">
+                <a:solidFill>
+                  <a:srgbClr val="2863C5"/>
+                </a:solidFill>
+                <a:latin typeface="Open Sans"/>
+              </a:rPr>
+              <a:t>WHAT WE GET</a:t>
+            </a:r>
+          </a:p>
+        </p:txBody>
+      </p:sp>
+      <p:sp>
+        <p:nvSpPr>
+          <p:cNvPr id="18" name="Rounded Rectangle 17"/>
+          <p:cNvSpPr/>
+          <p:nvPr/>
+        </p:nvSpPr>
+        <p:spPr>
+          <a:xfrm>
+            <a:off x="6400800" y="2926080"/>
+            <a:ext cx="5303520" cy="713232"/>
+          </a:xfrm>
+          <a:prstGeom prst="roundRect">
+            <a:avLst>
+              <a:gd name="adj" fmla="val 4000"/>
+            </a:avLst>
+          </a:prstGeom>
+          <a:solidFill>
+            <a:srgbClr val="FFFFFF"/>
+          </a:solidFill>
+          <a:ln w="6350">
+            <a:solidFill>
+              <a:srgbClr val="E2E8F0"/>
+            </a:solidFill>
+          </a:ln>
+          <a:effectLst/>
+        </p:spPr>
+        <p:style>
+          <a:lnRef idx="1">
+            <a:schemeClr val="accent1"/>
+          </a:lnRef>
+          <a:fillRef idx="3">
+            <a:schemeClr val="accent1"/>
+          </a:fillRef>
+          <a:effectRef idx="2">
+            <a:schemeClr val="accent1"/>
+          </a:effectRef>
+          <a:fontRef idx="minor">
+            <a:schemeClr val="lt1"/>
+          </a:fontRef>
+        </p:style>
+        <p:txBody>
+          <a:bodyPr rtlCol="0" anchor="ctr"/>
+          <a:lstStyle/>
+          <a:p>
+            <a:pPr algn="ctr"/>
+          </a:p>
+        </p:txBody>
+      </p:sp>
+      <p:sp>
+        <p:nvSpPr>
+          <p:cNvPr id="19" name="Rectangle 18"/>
+          <p:cNvSpPr/>
+          <p:nvPr/>
+        </p:nvSpPr>
+        <p:spPr>
+          <a:xfrm>
+            <a:off x="6400800" y="2926080"/>
+            <a:ext cx="146304" cy="713232"/>
+          </a:xfrm>
+          <a:prstGeom prst="rect">
+            <a:avLst/>
+          </a:prstGeom>
+          <a:solidFill>
+            <a:srgbClr val="FC4C0B"/>
+          </a:solidFill>
+          <a:ln>
+            <a:noFill/>
+          </a:ln>
+          <a:effectLst/>
+        </p:spPr>
+        <p:style>
+          <a:lnRef idx="1">
+            <a:schemeClr val="accent1"/>
+          </a:lnRef>
+          <a:fillRef idx="3">
+            <a:schemeClr val="accent1"/>
+          </a:fillRef>
+          <a:effectRef idx="2">
+            <a:schemeClr val="accent1"/>
+          </a:effectRef>
+          <a:fontRef idx="minor">
+            <a:schemeClr val="lt1"/>
+          </a:fontRef>
+        </p:style>
+        <p:txBody>
+          <a:bodyPr rtlCol="0" anchor="ctr"/>
+          <a:lstStyle/>
+          <a:p>
+            <a:pPr algn="ctr"/>
+          </a:p>
+        </p:txBody>
+      </p:sp>
+      <p:sp>
+        <p:nvSpPr>
+          <p:cNvPr id="20" name="TextBox 19"/>
+          <p:cNvSpPr txBox="1"/>
+          <p:nvPr/>
+        </p:nvSpPr>
+        <p:spPr>
+          <a:xfrm>
+            <a:off x="6675120" y="2999232"/>
+            <a:ext cx="4937760" cy="292608"/>
+          </a:xfrm>
+          <a:prstGeom prst="rect">
+            <a:avLst/>
+          </a:prstGeom>
+          <a:noFill/>
+        </p:spPr>
+        <p:txBody>
+          <a:bodyPr wrap="square" anchor="t" lIns="0" rIns="0" tIns="0" bIns="0">
+            <a:spAutoFit/>
+          </a:bodyPr>
+          <a:lstStyle/>
+          <a:p>
+            <a:pPr algn="l"/>
+            <a:r>
+              <a:rPr sz="1400" b="1">
+                <a:solidFill>
+                  <a:srgbClr val="0F172A"/>
+                </a:solidFill>
+                <a:latin typeface="Open Sans"/>
+              </a:rPr>
+              <a:t>A first-of-its-kind feature</a:t>
+            </a:r>
+          </a:p>
+        </p:txBody>
+      </p:sp>
+      <p:sp>
+        <p:nvSpPr>
+          <p:cNvPr id="21" name="TextBox 20"/>
+          <p:cNvSpPr txBox="1"/>
+          <p:nvPr/>
+        </p:nvSpPr>
+        <p:spPr>
+          <a:xfrm>
+            <a:off x="6675120" y="3310128"/>
+            <a:ext cx="4937760" cy="310896"/>
+          </a:xfrm>
+          <a:prstGeom prst="rect">
+            <a:avLst/>
+          </a:prstGeom>
+          <a:noFill/>
+        </p:spPr>
+        <p:txBody>
+          <a:bodyPr wrap="square" anchor="t" lIns="0" rIns="0" tIns="0" bIns="0">
+            <a:spAutoFit/>
+          </a:bodyPr>
+          <a:lstStyle/>
+          <a:p>
+            <a:pPr algn="l"/>
+            <a:r>
+              <a:rPr sz="1100" b="0">
+                <a:solidFill>
+                  <a:srgbClr val="334155"/>
+                </a:solidFill>
+                <a:latin typeface="Open Sans"/>
+              </a:rPr>
+              <a:t>No credit-monitoring competitor offers this.</a:t>
+            </a:r>
+          </a:p>
+        </p:txBody>
+      </p:sp>
+      <p:sp>
+        <p:nvSpPr>
+          <p:cNvPr id="22" name="Rounded Rectangle 21"/>
+          <p:cNvSpPr/>
+          <p:nvPr/>
+        </p:nvSpPr>
+        <p:spPr>
+          <a:xfrm>
+            <a:off x="6400800" y="3730752"/>
+            <a:ext cx="5303520" cy="713232"/>
+          </a:xfrm>
+          <a:prstGeom prst="roundRect">
+            <a:avLst>
+              <a:gd name="adj" fmla="val 4000"/>
+            </a:avLst>
+          </a:prstGeom>
+          <a:solidFill>
+            <a:srgbClr val="FFFFFF"/>
+          </a:solidFill>
+          <a:ln w="6350">
+            <a:solidFill>
+              <a:srgbClr val="E2E8F0"/>
+            </a:solidFill>
+          </a:ln>
+          <a:effectLst/>
+        </p:spPr>
+        <p:style>
+          <a:lnRef idx="1">
+            <a:schemeClr val="accent1"/>
+          </a:lnRef>
+          <a:fillRef idx="3">
+            <a:schemeClr val="accent1"/>
+          </a:fillRef>
+          <a:effectRef idx="2">
+            <a:schemeClr val="accent1"/>
+          </a:effectRef>
+          <a:fontRef idx="minor">
+            <a:schemeClr val="lt1"/>
+          </a:fontRef>
+        </p:style>
+        <p:txBody>
+          <a:bodyPr rtlCol="0" anchor="ctr"/>
+          <a:lstStyle/>
+          <a:p>
+            <a:pPr algn="ctr"/>
+          </a:p>
+        </p:txBody>
+      </p:sp>
+      <p:sp>
+        <p:nvSpPr>
+          <p:cNvPr id="23" name="Rectangle 22"/>
+          <p:cNvSpPr/>
+          <p:nvPr/>
+        </p:nvSpPr>
+        <p:spPr>
+          <a:xfrm>
+            <a:off x="6400800" y="3730752"/>
+            <a:ext cx="146304" cy="713232"/>
+          </a:xfrm>
+          <a:prstGeom prst="rect">
+            <a:avLst/>
+          </a:prstGeom>
+          <a:solidFill>
+            <a:srgbClr val="FC4C0B"/>
+          </a:solidFill>
+          <a:ln>
+            <a:noFill/>
+          </a:ln>
+          <a:effectLst/>
+        </p:spPr>
+        <p:style>
+          <a:lnRef idx="1">
+            <a:schemeClr val="accent1"/>
+          </a:lnRef>
+          <a:fillRef idx="3">
+            <a:schemeClr val="accent1"/>
+          </a:fillRef>
+          <a:effectRef idx="2">
+            <a:schemeClr val="accent1"/>
+          </a:effectRef>
+          <a:fontRef idx="minor">
+            <a:schemeClr val="lt1"/>
+          </a:fontRef>
+        </p:style>
+        <p:txBody>
+          <a:bodyPr rtlCol="0" anchor="ctr"/>
+          <a:lstStyle/>
+          <a:p>
+            <a:pPr algn="ctr"/>
+          </a:p>
+        </p:txBody>
+      </p:sp>
+      <p:sp>
+        <p:nvSpPr>
+          <p:cNvPr id="24" name="TextBox 23"/>
+          <p:cNvSpPr txBox="1"/>
+          <p:nvPr/>
+        </p:nvSpPr>
+        <p:spPr>
+          <a:xfrm>
+            <a:off x="6675120" y="3803904"/>
+            <a:ext cx="4937760" cy="292608"/>
+          </a:xfrm>
+          <a:prstGeom prst="rect">
+            <a:avLst/>
+          </a:prstGeom>
+          <a:noFill/>
+        </p:spPr>
+        <p:txBody>
+          <a:bodyPr wrap="square" anchor="t" lIns="0" rIns="0" tIns="0" bIns="0">
+            <a:spAutoFit/>
+          </a:bodyPr>
+          <a:lstStyle/>
+          <a:p>
+            <a:pPr algn="l"/>
+            <a:r>
+              <a:rPr sz="1400" b="1">
+                <a:solidFill>
+                  <a:srgbClr val="0F172A"/>
+                </a:solidFill>
+                <a:latin typeface="Open Sans"/>
+              </a:rPr>
+              <a:t>Retention lift</a:t>
+            </a:r>
+          </a:p>
+        </p:txBody>
+      </p:sp>
+      <p:sp>
+        <p:nvSpPr>
+          <p:cNvPr id="25" name="TextBox 24"/>
+          <p:cNvSpPr txBox="1"/>
+          <p:nvPr/>
+        </p:nvSpPr>
+        <p:spPr>
+          <a:xfrm>
+            <a:off x="6675120" y="4114800"/>
+            <a:ext cx="4937760" cy="310896"/>
+          </a:xfrm>
+          <a:prstGeom prst="rect">
+            <a:avLst/>
+          </a:prstGeom>
+          <a:noFill/>
+        </p:spPr>
+        <p:txBody>
+          <a:bodyPr wrap="square" anchor="t" lIns="0" rIns="0" tIns="0" bIns="0">
+            <a:spAutoFit/>
+          </a:bodyPr>
+          <a:lstStyle/>
+          <a:p>
+            <a:pPr algn="l"/>
+            <a:r>
+              <a:rPr sz="1100" b="0">
+                <a:solidFill>
+                  <a:srgbClr val="334155"/>
+                </a:solidFill>
+                <a:latin typeface="Open Sans"/>
+              </a:rPr>
+              <a:t>Every found-money notification is a "wow" from us.</a:t>
+            </a:r>
+          </a:p>
+        </p:txBody>
+      </p:sp>
+      <p:sp>
+        <p:nvSpPr>
+          <p:cNvPr id="26" name="Rounded Rectangle 25"/>
+          <p:cNvSpPr/>
+          <p:nvPr/>
+        </p:nvSpPr>
+        <p:spPr>
+          <a:xfrm>
+            <a:off x="6400800" y="4535424"/>
+            <a:ext cx="5303520" cy="713232"/>
+          </a:xfrm>
+          <a:prstGeom prst="roundRect">
+            <a:avLst>
+              <a:gd name="adj" fmla="val 4000"/>
+            </a:avLst>
+          </a:prstGeom>
+          <a:solidFill>
+            <a:srgbClr val="FFFFFF"/>
+          </a:solidFill>
+          <a:ln w="6350">
+            <a:solidFill>
+              <a:srgbClr val="E2E8F0"/>
+            </a:solidFill>
+          </a:ln>
+          <a:effectLst/>
+        </p:spPr>
+        <p:style>
+          <a:lnRef idx="1">
+            <a:schemeClr val="accent1"/>
+          </a:lnRef>
+          <a:fillRef idx="3">
+            <a:schemeClr val="accent1"/>
+          </a:fillRef>
+          <a:effectRef idx="2">
+            <a:schemeClr val="accent1"/>
+          </a:effectRef>
+          <a:fontRef idx="minor">
+            <a:schemeClr val="lt1"/>
+          </a:fontRef>
+        </p:style>
+        <p:txBody>
+          <a:bodyPr rtlCol="0" anchor="ctr"/>
+          <a:lstStyle/>
+          <a:p>
+            <a:pPr algn="ctr"/>
+          </a:p>
+        </p:txBody>
+      </p:sp>
+      <p:sp>
+        <p:nvSpPr>
+          <p:cNvPr id="27" name="Rectangle 26"/>
+          <p:cNvSpPr/>
+          <p:nvPr/>
+        </p:nvSpPr>
+        <p:spPr>
+          <a:xfrm>
+            <a:off x="6400800" y="4535424"/>
+            <a:ext cx="146304" cy="713232"/>
+          </a:xfrm>
+          <a:prstGeom prst="rect">
+            <a:avLst/>
+          </a:prstGeom>
+          <a:solidFill>
+            <a:srgbClr val="FC4C0B"/>
+          </a:solidFill>
+          <a:ln>
+            <a:noFill/>
+          </a:ln>
+          <a:effectLst/>
+        </p:spPr>
+        <p:style>
+          <a:lnRef idx="1">
+            <a:schemeClr val="accent1"/>
+          </a:lnRef>
+          <a:fillRef idx="3">
+            <a:schemeClr val="accent1"/>
+          </a:fillRef>
+          <a:effectRef idx="2">
+            <a:schemeClr val="accent1"/>
+          </a:effectRef>
+          <a:fontRef idx="minor">
+            <a:schemeClr val="lt1"/>
+          </a:fontRef>
+        </p:style>
+        <p:txBody>
+          <a:bodyPr rtlCol="0" anchor="ctr"/>
+          <a:lstStyle/>
+          <a:p>
+            <a:pPr algn="ctr"/>
+          </a:p>
+        </p:txBody>
+      </p:sp>
+      <p:sp>
+        <p:nvSpPr>
+          <p:cNvPr id="28" name="TextBox 27"/>
+          <p:cNvSpPr txBox="1"/>
+          <p:nvPr/>
+        </p:nvSpPr>
+        <p:spPr>
+          <a:xfrm>
+            <a:off x="6675120" y="4608576"/>
+            <a:ext cx="4937760" cy="292608"/>
+          </a:xfrm>
+          <a:prstGeom prst="rect">
+            <a:avLst/>
+          </a:prstGeom>
+          <a:noFill/>
+        </p:spPr>
+        <p:txBody>
+          <a:bodyPr wrap="square" anchor="t" lIns="0" rIns="0" tIns="0" bIns="0">
+            <a:spAutoFit/>
+          </a:bodyPr>
+          <a:lstStyle/>
+          <a:p>
+            <a:pPr algn="l"/>
+            <a:r>
+              <a:rPr sz="1400" b="1">
+                <a:solidFill>
+                  <a:srgbClr val="0F172A"/>
+                </a:solidFill>
+                <a:latin typeface="Open Sans"/>
+              </a:rPr>
+              <a:t>Acquisition hook</a:t>
+            </a:r>
+          </a:p>
+        </p:txBody>
+      </p:sp>
+      <p:sp>
+        <p:nvSpPr>
+          <p:cNvPr id="29" name="TextBox 28"/>
+          <p:cNvSpPr txBox="1"/>
+          <p:nvPr/>
+        </p:nvSpPr>
+        <p:spPr>
+          <a:xfrm>
+            <a:off x="6675120" y="4919472"/>
+            <a:ext cx="4937760" cy="310896"/>
+          </a:xfrm>
+          <a:prstGeom prst="rect">
+            <a:avLst/>
+          </a:prstGeom>
+          <a:noFill/>
+        </p:spPr>
+        <p:txBody>
+          <a:bodyPr wrap="square" anchor="t" lIns="0" rIns="0" tIns="0" bIns="0">
+            <a:spAutoFit/>
+          </a:bodyPr>
+          <a:lstStyle/>
+          <a:p>
+            <a:pPr algn="l"/>
+            <a:r>
+              <a:rPr sz="1100" b="0">
+                <a:solidFill>
+                  <a:srgbClr val="334155"/>
+                </a:solidFill>
+                <a:latin typeface="Open Sans"/>
+              </a:rPr>
+              <a:t>"You may have unclaimed money. Free to find out."</a:t>
+            </a:r>
+          </a:p>
+        </p:txBody>
+      </p:sp>
+      <p:sp>
+        <p:nvSpPr>
+          <p:cNvPr id="30" name="Rounded Rectangle 29"/>
+          <p:cNvSpPr/>
+          <p:nvPr/>
+        </p:nvSpPr>
+        <p:spPr>
+          <a:xfrm>
+            <a:off x="6400800" y="5340096"/>
+            <a:ext cx="5303520" cy="713232"/>
+          </a:xfrm>
+          <a:prstGeom prst="roundRect">
+            <a:avLst>
+              <a:gd name="adj" fmla="val 4000"/>
+            </a:avLst>
+          </a:prstGeom>
+          <a:solidFill>
+            <a:srgbClr val="FFFFFF"/>
+          </a:solidFill>
+          <a:ln w="6350">
+            <a:solidFill>
+              <a:srgbClr val="E2E8F0"/>
+            </a:solidFill>
+          </a:ln>
+          <a:effectLst/>
+        </p:spPr>
+        <p:style>
+          <a:lnRef idx="1">
+            <a:schemeClr val="accent1"/>
+          </a:lnRef>
+          <a:fillRef idx="3">
+            <a:schemeClr val="accent1"/>
+          </a:fillRef>
+          <a:effectRef idx="2">
+            <a:schemeClr val="accent1"/>
+          </a:effectRef>
+          <a:fontRef idx="minor">
+            <a:schemeClr val="lt1"/>
+          </a:fontRef>
+        </p:style>
+        <p:txBody>
+          <a:bodyPr rtlCol="0" anchor="ctr"/>
+          <a:lstStyle/>
+          <a:p>
+            <a:pPr algn="ctr"/>
+          </a:p>
+        </p:txBody>
+      </p:sp>
+      <p:sp>
+        <p:nvSpPr>
+          <p:cNvPr id="31" name="Rectangle 30"/>
+          <p:cNvSpPr/>
+          <p:nvPr/>
+        </p:nvSpPr>
+        <p:spPr>
+          <a:xfrm>
+            <a:off x="6400800" y="5340096"/>
+            <a:ext cx="146304" cy="713232"/>
+          </a:xfrm>
+          <a:prstGeom prst="rect">
+            <a:avLst/>
+          </a:prstGeom>
+          <a:solidFill>
+            <a:srgbClr val="FC4C0B"/>
+          </a:solidFill>
+          <a:ln>
+            <a:noFill/>
+          </a:ln>
+          <a:effectLst/>
+        </p:spPr>
+        <p:style>
+          <a:lnRef idx="1">
+            <a:schemeClr val="accent1"/>
+          </a:lnRef>
+          <a:fillRef idx="3">
+            <a:schemeClr val="accent1"/>
+          </a:fillRef>
+          <a:effectRef idx="2">
+            <a:schemeClr val="accent1"/>
+          </a:effectRef>
+          <a:fontRef idx="minor">
+            <a:schemeClr val="lt1"/>
+          </a:fontRef>
+        </p:style>
+        <p:txBody>
+          <a:bodyPr rtlCol="0" anchor="ctr"/>
+          <a:lstStyle/>
+          <a:p>
+            <a:pPr algn="ctr"/>
+          </a:p>
+        </p:txBody>
+      </p:sp>
+      <p:sp>
+        <p:nvSpPr>
+          <p:cNvPr id="32" name="TextBox 31"/>
+          <p:cNvSpPr txBox="1"/>
+          <p:nvPr/>
+        </p:nvSpPr>
+        <p:spPr>
+          <a:xfrm>
+            <a:off x="6675120" y="5413248"/>
+            <a:ext cx="4937760" cy="292608"/>
+          </a:xfrm>
+          <a:prstGeom prst="rect">
+            <a:avLst/>
+          </a:prstGeom>
+          <a:noFill/>
+        </p:spPr>
+        <p:txBody>
+          <a:bodyPr wrap="square" anchor="t" lIns="0" rIns="0" tIns="0" bIns="0">
+            <a:spAutoFit/>
+          </a:bodyPr>
+          <a:lstStyle/>
+          <a:p>
+            <a:pPr algn="l"/>
+            <a:r>
+              <a:rPr sz="1400" b="1">
+                <a:solidFill>
+                  <a:srgbClr val="0F172A"/>
+                </a:solidFill>
+                <a:latin typeface="Open Sans"/>
+              </a:rPr>
+              <a:t>Defensible moat</a:t>
+            </a:r>
+          </a:p>
+        </p:txBody>
+      </p:sp>
+      <p:sp>
+        <p:nvSpPr>
+          <p:cNvPr id="33" name="TextBox 32"/>
+          <p:cNvSpPr txBox="1"/>
+          <p:nvPr/>
+        </p:nvSpPr>
+        <p:spPr>
+          <a:xfrm>
+            <a:off x="6675120" y="5724144"/>
+            <a:ext cx="4937760" cy="310896"/>
+          </a:xfrm>
+          <a:prstGeom prst="rect">
+            <a:avLst/>
+          </a:prstGeom>
+          <a:noFill/>
+        </p:spPr>
+        <p:txBody>
+          <a:bodyPr wrap="square" anchor="t" lIns="0" rIns="0" tIns="0" bIns="0">
+            <a:spAutoFit/>
+          </a:bodyPr>
+          <a:lstStyle/>
+          <a:p>
+            <a:pPr algn="l"/>
+            <a:r>
+              <a:rPr sz="1100" b="0">
+                <a:solidFill>
+                  <a:srgbClr val="334155"/>
+                </a:solidFill>
+                <a:latin typeface="Open Sans"/>
+              </a:rPr>
+              <a:t>12+ months of state work others would have to repeat.</a:t>
+            </a:r>
+          </a:p>
+        </p:txBody>
+      </p:sp>
+      <p:sp>
+        <p:nvSpPr>
+          <p:cNvPr id="34" name="Rectangle 33"/>
+          <p:cNvSpPr/>
+          <p:nvPr/>
+        </p:nvSpPr>
+        <p:spPr>
+          <a:xfrm>
+            <a:off x="457200" y="6263640"/>
+            <a:ext cx="11247120" cy="0"/>
+          </a:xfrm>
+          <a:prstGeom prst="rect">
+            <a:avLst/>
+          </a:prstGeom>
+          <a:solidFill>
+            <a:srgbClr val="0F172A"/>
+          </a:solidFill>
+          <a:ln>
+            <a:noFill/>
+          </a:ln>
+          <a:effectLst/>
+        </p:spPr>
+        <p:style>
+          <a:lnRef idx="1">
+            <a:schemeClr val="accent1"/>
+          </a:lnRef>
+          <a:fillRef idx="3">
+            <a:schemeClr val="accent1"/>
+          </a:fillRef>
+          <a:effectRef idx="2">
+            <a:schemeClr val="accent1"/>
+          </a:effectRef>
+          <a:fontRef idx="minor">
+            <a:schemeClr val="lt1"/>
+          </a:fontRef>
+        </p:style>
+        <p:txBody>
+          <a:bodyPr rtlCol="0" anchor="ctr"/>
+          <a:lstStyle/>
+          <a:p>
+            <a:pPr algn="ctr"/>
+          </a:p>
+        </p:txBody>
+      </p:sp>
+    </p:spTree>
+  </p:cSld>
+  <p:clrMapOvr>
+    <a:masterClrMapping/>
+  </p:clrMapOvr>
+</p:sld>
+</file>
+
+<file path=ppt/slides/slide13.xml><?xml version="1.0" encoding="utf-8"?>
+<p:sld xmlns:a="http://schemas.openxmlformats.org/drawingml/2006/main" xmlns:p="http://schemas.openxmlformats.org/presentationml/2006/main" xmlns:r="http://schemas.openxmlformats.org/officeDocument/2006/relationships">
+  <p:cSld>
+    <p:spTree>
+      <p:nvGrpSpPr>
+        <p:cNvPr id="1" name=""/>
+        <p:cNvGrpSpPr/>
+        <p:nvPr/>
+      </p:nvGrpSpPr>
+      <p:grpSpPr/>
+      <p:sp>
+        <p:nvSpPr>
+          <p:cNvPr id="2" name="Rectangle 1"/>
+          <p:cNvSpPr/>
+          <p:nvPr/>
+        </p:nvSpPr>
+        <p:spPr>
+          <a:xfrm>
+            <a:off x="0" y="0"/>
+            <a:ext cx="12188952" cy="6858000"/>
+          </a:xfrm>
+          <a:prstGeom prst="rect">
+            <a:avLst/>
+          </a:prstGeom>
+          <a:solidFill>
+            <a:srgbClr val="F8FAFC"/>
+          </a:solidFill>
+          <a:ln>
+            <a:noFill/>
+          </a:ln>
+          <a:effectLst/>
+        </p:spPr>
+        <p:style>
+          <a:lnRef idx="1">
+            <a:schemeClr val="accent1"/>
+          </a:lnRef>
+          <a:fillRef idx="3">
+            <a:schemeClr val="accent1"/>
+          </a:fillRef>
+          <a:effectRef idx="2">
+            <a:schemeClr val="accent1"/>
+          </a:effectRef>
+          <a:fontRef idx="minor">
+            <a:schemeClr val="lt1"/>
+          </a:fontRef>
+        </p:style>
+        <p:txBody>
+          <a:bodyPr rtlCol="0" anchor="ctr"/>
+          <a:lstStyle/>
+          <a:p>
+            <a:pPr algn="ctr"/>
+          </a:p>
+        </p:txBody>
+      </p:sp>
+      <p:sp>
+        <p:nvSpPr>
+          <p:cNvPr id="3" name="Rectangle 2"/>
+          <p:cNvSpPr/>
+          <p:nvPr/>
+        </p:nvSpPr>
+        <p:spPr>
+          <a:xfrm>
+            <a:off x="0" y="0"/>
             <a:ext cx="12188952" cy="6858000"/>
           </a:xfrm>
           <a:prstGeom prst="rect">
@@ -6501,7 +8000,7 @@
                 </a:solidFill>
                 <a:latin typeface="Open Sans"/>
               </a:rPr>
-              <a:t>2 / 12</a:t>
+              <a:t>2 / 13</a:t>
             </a:r>
           </a:p>
         </p:txBody>
@@ -7206,7 +8705,7 @@
                 </a:solidFill>
                 <a:latin typeface="Open Sans"/>
               </a:rPr>
-              <a:t>3 / 12</a:t>
+              <a:t>3 / 13</a:t>
             </a:r>
           </a:p>
         </p:txBody>
@@ -8475,7 +9974,7 @@
                 </a:solidFill>
                 <a:latin typeface="Open Sans"/>
               </a:rPr>
-              <a:t>4 / 12</a:t>
+              <a:t>4 / 13</a:t>
             </a:r>
           </a:p>
         </p:txBody>
@@ -9329,7 +10828,7 @@
                 </a:solidFill>
                 <a:latin typeface="Open Sans"/>
               </a:rPr>
-              <a:t>5 / 12</a:t>
+              <a:t>5 / 13</a:t>
             </a:r>
           </a:p>
         </p:txBody>
@@ -12287,7 +13786,7 @@
                 </a:solidFill>
                 <a:latin typeface="Open Sans"/>
               </a:rPr>
-              <a:t>6 / 12</a:t>
+              <a:t>6 / 13</a:t>
             </a:r>
           </a:p>
         </p:txBody>
@@ -13728,7 +15227,7 @@
                 </a:solidFill>
                 <a:latin typeface="Open Sans"/>
               </a:rPr>
-              <a:t>7 / 12</a:t>
+              <a:t>7 / 13</a:t>
             </a:r>
           </a:p>
         </p:txBody>
@@ -15042,7 +16541,7 @@
                 </a:solidFill>
                 <a:latin typeface="Open Sans"/>
               </a:rPr>
-              <a:t>8 / 12</a:t>
+              <a:t>8 / 13</a:t>
             </a:r>
           </a:p>
         </p:txBody>
@@ -15112,7 +16611,7 @@
                 </a:solidFill>
                 <a:latin typeface="Open Sans"/>
               </a:rPr>
-              <a:t>ROADMAP</a:t>
+              <a:t>FILING THE CLAIM</a:t>
             </a:r>
           </a:p>
         </p:txBody>
@@ -15126,28 +16625,28 @@
         <p:spPr>
           <a:xfrm>
             <a:off x="457200" y="1143000"/>
-            <a:ext cx="11430000" cy="822960"/>
-          </a:xfrm>
-          <a:prstGeom prst="rect">
-            <a:avLst/>
-          </a:prstGeom>
-          <a:noFill/>
-        </p:spPr>
-        <p:txBody>
-          <a:bodyPr wrap="square" anchor="t" lIns="0" rIns="0" tIns="0" bIns="0">
-            <a:spAutoFit/>
-          </a:bodyPr>
-          <a:lstStyle/>
-          <a:p>
-            <a:pPr algn="l"/>
-            <a:r>
-              <a:rPr sz="3200" b="1">
+            <a:ext cx="11430000" cy="914400"/>
+          </a:xfrm>
+          <a:prstGeom prst="rect">
+            <a:avLst/>
+          </a:prstGeom>
+          <a:noFill/>
+        </p:spPr>
+        <p:txBody>
+          <a:bodyPr wrap="square" anchor="t" lIns="0" rIns="0" tIns="0" bIns="0">
+            <a:spAutoFit/>
+          </a:bodyPr>
+          <a:lstStyle/>
+          <a:p>
+            <a:pPr algn="l"/>
+            <a:r>
+              <a:rPr sz="2200" b="1">
                 <a:solidFill>
                   <a:srgbClr val="0F172A"/>
                 </a:solidFill>
                 <a:latin typeface="Open Sans"/>
               </a:rPr>
-              <a:t>First state live in ~6 weeks.</a:t>
+              <a:t>Four ways we can deliver the money — pick the highest tier each state allows.</a:t>
             </a:r>
           </a:p>
         </p:txBody>
@@ -15160,12 +16659,12 @@
         </p:nvSpPr>
         <p:spPr>
           <a:xfrm>
-            <a:off x="457200" y="2240280"/>
-            <a:ext cx="11247120" cy="585216"/>
+            <a:off x="457200" y="2286000"/>
+            <a:ext cx="11247120" cy="886968"/>
           </a:xfrm>
           <a:prstGeom prst="roundRect">
             <a:avLst>
-              <a:gd name="adj" fmla="val 4000"/>
+              <a:gd name="adj" fmla="val 3000"/>
             </a:avLst>
           </a:prstGeom>
           <a:solidFill>
@@ -15208,8 +16707,8 @@
         </p:nvSpPr>
         <p:spPr>
           <a:xfrm>
-            <a:off x="457200" y="2240280"/>
-            <a:ext cx="164592" cy="585216"/>
+            <a:off x="457200" y="2286000"/>
+            <a:ext cx="201168" cy="886968"/>
           </a:xfrm>
           <a:prstGeom prst="rect">
             <a:avLst/>
@@ -15252,8 +16751,8 @@
         </p:nvSpPr>
         <p:spPr>
           <a:xfrm>
-            <a:off x="777240" y="2313432"/>
-            <a:ext cx="1554480" cy="274320"/>
+            <a:off x="777240" y="2377440"/>
+            <a:ext cx="1280160" cy="292608"/>
           </a:xfrm>
           <a:prstGeom prst="rect">
             <a:avLst/>
@@ -15274,7 +16773,7 @@
                 </a:solidFill>
                 <a:latin typeface="Open Sans"/>
               </a:rPr>
-              <a:t>Sprint 1</a:t>
+              <a:t>TIER 1</a:t>
             </a:r>
           </a:p>
         </p:txBody>
@@ -15287,29 +16786,29 @@
         </p:nvSpPr>
         <p:spPr>
           <a:xfrm>
-            <a:off x="777240" y="2532888"/>
-            <a:ext cx="2286000" cy="292608"/>
-          </a:xfrm>
-          <a:prstGeom prst="rect">
-            <a:avLst/>
-          </a:prstGeom>
-          <a:noFill/>
-        </p:spPr>
-        <p:txBody>
-          <a:bodyPr wrap="square" anchor="t" lIns="0" rIns="0" tIns="0" bIns="0">
-            <a:spAutoFit/>
-          </a:bodyPr>
-          <a:lstStyle/>
-          <a:p>
-            <a:pPr algn="l"/>
-            <a:r>
-              <a:rPr sz="1300" b="1">
+            <a:off x="777240" y="2651760"/>
+            <a:ext cx="2377440" cy="384048"/>
+          </a:xfrm>
+          <a:prstGeom prst="rect">
+            <a:avLst/>
+          </a:prstGeom>
+          <a:noFill/>
+        </p:spPr>
+        <p:txBody>
+          <a:bodyPr wrap="square" anchor="t" lIns="0" rIns="0" tIns="0" bIns="0">
+            <a:spAutoFit/>
+          </a:bodyPr>
+          <a:lstStyle/>
+          <a:p>
+            <a:pPr algn="l"/>
+            <a:r>
+              <a:rPr sz="1400" b="1">
                 <a:solidFill>
                   <a:srgbClr val="0F172A"/>
                 </a:solidFill>
                 <a:latin typeface="Open Sans"/>
               </a:rPr>
-              <a:t>California foundation</a:t>
+              <a:t>Deep-link to state portal</a:t>
             </a:r>
           </a:p>
         </p:txBody>
@@ -15322,8 +16821,8 @@
         </p:nvSpPr>
         <p:spPr>
           <a:xfrm>
-            <a:off x="3154680" y="2423160"/>
-            <a:ext cx="8229600" cy="365760"/>
+            <a:off x="3246120" y="2404872"/>
+            <a:ext cx="5303520" cy="777240"/>
           </a:xfrm>
           <a:prstGeom prst="rect">
             <a:avLst/>
@@ -15344,25 +16843,114 @@
                 </a:solidFill>
                 <a:latin typeface="Open Sans"/>
               </a:rPr>
-              <a:t>CA ingest · Snowflake schema · matcher integration · alert UX</a:t>
-            </a:r>
-          </a:p>
-        </p:txBody>
-      </p:sp>
-      <p:sp>
-        <p:nvSpPr>
-          <p:cNvPr id="15" name="Rounded Rectangle 14"/>
+              <a:t>Member clicks Claim → state's official site opens with property pre-selected.</a:t>
+            </a:r>
+          </a:p>
+        </p:txBody>
+      </p:sp>
+      <p:sp>
+        <p:nvSpPr>
+          <p:cNvPr id="15" name="TextBox 14"/>
+          <p:cNvSpPr txBox="1"/>
+          <p:nvPr/>
+        </p:nvSpPr>
+        <p:spPr>
+          <a:xfrm>
+            <a:off x="3246120" y="2880360"/>
+            <a:ext cx="5303520" cy="365760"/>
+          </a:xfrm>
+          <a:prstGeom prst="rect">
+            <a:avLst/>
+          </a:prstGeom>
+          <a:noFill/>
+        </p:spPr>
+        <p:txBody>
+          <a:bodyPr wrap="square" anchor="t" lIns="0" rIns="0" tIns="0" bIns="0">
+            <a:spAutoFit/>
+          </a:bodyPr>
+          <a:lstStyle/>
+          <a:p>
+            <a:pPr algn="l"/>
+            <a:r>
+              <a:rPr sz="900" b="0">
+                <a:solidFill>
+                  <a:srgbClr val="64748B"/>
+                </a:solidFill>
+                <a:latin typeface="Open Sans"/>
+              </a:rPr>
+              <a:t>All states with online claims  ·  Zero regulatory exposure  ·  Ships with Sprint 1</a:t>
+            </a:r>
+          </a:p>
+        </p:txBody>
+      </p:sp>
+      <p:sp>
+        <p:nvSpPr>
+          <p:cNvPr id="16" name="Rounded Rectangle 15"/>
           <p:cNvSpPr/>
           <p:nvPr/>
         </p:nvSpPr>
         <p:spPr>
           <a:xfrm>
-            <a:off x="457200" y="2916936"/>
-            <a:ext cx="11247120" cy="585216"/>
+            <a:off x="8778240" y="2578608"/>
+            <a:ext cx="1554480" cy="365760"/>
           </a:xfrm>
           <a:prstGeom prst="roundRect">
             <a:avLst>
-              <a:gd name="adj" fmla="val 4000"/>
+              <a:gd name="adj" fmla="val 50000"/>
+            </a:avLst>
+          </a:prstGeom>
+          <a:solidFill>
+            <a:srgbClr val="059669"/>
+          </a:solidFill>
+          <a:ln>
+            <a:noFill/>
+          </a:ln>
+        </p:spPr>
+        <p:style>
+          <a:lnRef idx="1">
+            <a:schemeClr val="accent1"/>
+          </a:lnRef>
+          <a:fillRef idx="3">
+            <a:schemeClr val="accent1"/>
+          </a:fillRef>
+          <a:effectRef idx="2">
+            <a:schemeClr val="accent1"/>
+          </a:effectRef>
+          <a:fontRef idx="minor">
+            <a:schemeClr val="lt1"/>
+          </a:fontRef>
+        </p:style>
+        <p:txBody>
+          <a:bodyPr rtlCol="0" anchor="ctr" lIns="45720" rIns="45720" tIns="18288" bIns="18288"/>
+          <a:lstStyle/>
+          <a:p>
+            <a:pPr algn="ctr"/>
+            <a:r>
+              <a:rPr sz="1000" b="1">
+                <a:solidFill>
+                  <a:srgbClr val="FFFFFF"/>
+                </a:solidFill>
+                <a:latin typeface="Open Sans"/>
+              </a:rPr>
+              <a:t>SHIP NOW</a:t>
+            </a:r>
+          </a:p>
+        </p:txBody>
+      </p:sp>
+      <p:sp>
+        <p:nvSpPr>
+          <p:cNvPr id="17" name="Rounded Rectangle 16"/>
+          <p:cNvSpPr/>
+          <p:nvPr/>
+        </p:nvSpPr>
+        <p:spPr>
+          <a:xfrm>
+            <a:off x="457200" y="3246120"/>
+            <a:ext cx="11247120" cy="886968"/>
+          </a:xfrm>
+          <a:prstGeom prst="roundRect">
+            <a:avLst>
+              <a:gd name="adj" fmla="val 3000"/>
             </a:avLst>
           </a:prstGeom>
           <a:solidFill>
@@ -15399,20 +16987,20 @@
       </p:sp>
       <p:sp>
         <p:nvSpPr>
-          <p:cNvPr id="16" name="Rectangle 15"/>
+          <p:cNvPr id="18" name="Rectangle 17"/>
           <p:cNvSpPr/>
           <p:nvPr/>
         </p:nvSpPr>
         <p:spPr>
           <a:xfrm>
-            <a:off x="457200" y="2916936"/>
-            <a:ext cx="164592" cy="585216"/>
+            <a:off x="457200" y="3246120"/>
+            <a:ext cx="201168" cy="886968"/>
           </a:xfrm>
           <a:prstGeom prst="rect">
             <a:avLst/>
           </a:prstGeom>
           <a:solidFill>
-            <a:srgbClr val="FFB352"/>
+            <a:srgbClr val="2863C5"/>
           </a:solidFill>
           <a:ln>
             <a:noFill/>
@@ -15443,14 +17031,14 @@
       </p:sp>
       <p:sp>
         <p:nvSpPr>
-          <p:cNvPr id="17" name="TextBox 16"/>
-          <p:cNvSpPr txBox="1"/>
-          <p:nvPr/>
-        </p:nvSpPr>
-        <p:spPr>
-          <a:xfrm>
-            <a:off x="777240" y="2990088"/>
-            <a:ext cx="1554480" cy="274320"/>
+          <p:cNvPr id="19" name="TextBox 18"/>
+          <p:cNvSpPr txBox="1"/>
+          <p:nvPr/>
+        </p:nvSpPr>
+        <p:spPr>
+          <a:xfrm>
+            <a:off x="777240" y="3337560"/>
+            <a:ext cx="1280160" cy="292608"/>
           </a:xfrm>
           <a:prstGeom prst="rect">
             <a:avLst/>
@@ -15467,60 +17055,60 @@
             <a:r>
               <a:rPr sz="1100" b="1">
                 <a:solidFill>
-                  <a:srgbClr val="FFB352"/>
-                </a:solidFill>
-                <a:latin typeface="Open Sans"/>
-              </a:rPr>
-              <a:t>Sprint 2</a:t>
-            </a:r>
-          </a:p>
-        </p:txBody>
-      </p:sp>
-      <p:sp>
-        <p:nvSpPr>
-          <p:cNvPr id="18" name="TextBox 17"/>
-          <p:cNvSpPr txBox="1"/>
-          <p:nvPr/>
-        </p:nvSpPr>
-        <p:spPr>
-          <a:xfrm>
-            <a:off x="777240" y="3209544"/>
-            <a:ext cx="2286000" cy="292608"/>
-          </a:xfrm>
-          <a:prstGeom prst="rect">
-            <a:avLst/>
-          </a:prstGeom>
-          <a:noFill/>
-        </p:spPr>
-        <p:txBody>
-          <a:bodyPr wrap="square" anchor="t" lIns="0" rIns="0" tIns="0" bIns="0">
-            <a:spAutoFit/>
-          </a:bodyPr>
-          <a:lstStyle/>
-          <a:p>
-            <a:pPr algn="l"/>
-            <a:r>
-              <a:rPr sz="1300" b="1">
+                  <a:srgbClr val="2863C5"/>
+                </a:solidFill>
+                <a:latin typeface="Open Sans"/>
+              </a:rPr>
+              <a:t>TIER 2</a:t>
+            </a:r>
+          </a:p>
+        </p:txBody>
+      </p:sp>
+      <p:sp>
+        <p:nvSpPr>
+          <p:cNvPr id="20" name="TextBox 19"/>
+          <p:cNvSpPr txBox="1"/>
+          <p:nvPr/>
+        </p:nvSpPr>
+        <p:spPr>
+          <a:xfrm>
+            <a:off x="777240" y="3611879"/>
+            <a:ext cx="2377440" cy="384048"/>
+          </a:xfrm>
+          <a:prstGeom prst="rect">
+            <a:avLst/>
+          </a:prstGeom>
+          <a:noFill/>
+        </p:spPr>
+        <p:txBody>
+          <a:bodyPr wrap="square" anchor="t" lIns="0" rIns="0" tIns="0" bIns="0">
+            <a:spAutoFit/>
+          </a:bodyPr>
+          <a:lstStyle/>
+          <a:p>
+            <a:pPr algn="l"/>
+            <a:r>
+              <a:rPr sz="1400" b="1">
                 <a:solidFill>
                   <a:srgbClr val="0F172A"/>
                 </a:solidFill>
                 <a:latin typeface="Open Sans"/>
               </a:rPr>
-              <a:t>Permission outreach</a:t>
-            </a:r>
-          </a:p>
-        </p:txBody>
-      </p:sp>
-      <p:sp>
-        <p:nvSpPr>
-          <p:cNvPr id="19" name="TextBox 18"/>
-          <p:cNvSpPr txBox="1"/>
-          <p:nvPr/>
-        </p:nvSpPr>
-        <p:spPr>
-          <a:xfrm>
-            <a:off x="3154680" y="3099816"/>
-            <a:ext cx="8229600" cy="365760"/>
+              <a:t>Browser-extension form-fill</a:t>
+            </a:r>
+          </a:p>
+        </p:txBody>
+      </p:sp>
+      <p:sp>
+        <p:nvSpPr>
+          <p:cNvPr id="21" name="TextBox 20"/>
+          <p:cNvSpPr txBox="1"/>
+          <p:nvPr/>
+        </p:nvSpPr>
+        <p:spPr>
+          <a:xfrm>
+            <a:off x="3246120" y="3364991"/>
+            <a:ext cx="5303520" cy="777240"/>
           </a:xfrm>
           <a:prstGeom prst="rect">
             <a:avLst/>
@@ -15541,25 +17129,114 @@
                 </a:solidFill>
                 <a:latin typeface="Open Sans"/>
               </a:rPr>
-              <a:t>Texas data request · NY SFTP request · FL partnership conversations</a:t>
-            </a:r>
-          </a:p>
-        </p:txBody>
-      </p:sp>
-      <p:sp>
-        <p:nvSpPr>
-          <p:cNvPr id="20" name="Rounded Rectangle 19"/>
+              <a:t>A SmartCredit extension auto-fills the state's claim form from the member's profile. Member still clicks Submit.</a:t>
+            </a:r>
+          </a:p>
+        </p:txBody>
+      </p:sp>
+      <p:sp>
+        <p:nvSpPr>
+          <p:cNvPr id="22" name="TextBox 21"/>
+          <p:cNvSpPr txBox="1"/>
+          <p:nvPr/>
+        </p:nvSpPr>
+        <p:spPr>
+          <a:xfrm>
+            <a:off x="3246120" y="3840480"/>
+            <a:ext cx="5303520" cy="365760"/>
+          </a:xfrm>
+          <a:prstGeom prst="rect">
+            <a:avLst/>
+          </a:prstGeom>
+          <a:noFill/>
+        </p:spPr>
+        <p:txBody>
+          <a:bodyPr wrap="square" anchor="t" lIns="0" rIns="0" tIns="0" bIns="0">
+            <a:spAutoFit/>
+          </a:bodyPr>
+          <a:lstStyle/>
+          <a:p>
+            <a:pPr algn="l"/>
+            <a:r>
+              <a:rPr sz="900" b="0">
+                <a:solidFill>
+                  <a:srgbClr val="64748B"/>
+                </a:solidFill>
+                <a:latin typeface="Open Sans"/>
+              </a:rPr>
+              <a:t>CA · TX · NY · IL · OH · PA · NJ  ·  FL excluded (ToS forbids automation)  ·  Member-driven, no auto-submit</a:t>
+            </a:r>
+          </a:p>
+        </p:txBody>
+      </p:sp>
+      <p:sp>
+        <p:nvSpPr>
+          <p:cNvPr id="23" name="Rounded Rectangle 22"/>
           <p:cNvSpPr/>
           <p:nvPr/>
         </p:nvSpPr>
         <p:spPr>
           <a:xfrm>
-            <a:off x="457200" y="3593592"/>
-            <a:ext cx="11247120" cy="585216"/>
+            <a:off x="8778240" y="3538727"/>
+            <a:ext cx="1554480" cy="365760"/>
           </a:xfrm>
           <a:prstGeom prst="roundRect">
             <a:avLst>
-              <a:gd name="adj" fmla="val 4000"/>
+              <a:gd name="adj" fmla="val 50000"/>
+            </a:avLst>
+          </a:prstGeom>
+          <a:solidFill>
+            <a:srgbClr val="2863C5"/>
+          </a:solidFill>
+          <a:ln>
+            <a:noFill/>
+          </a:ln>
+        </p:spPr>
+        <p:style>
+          <a:lnRef idx="1">
+            <a:schemeClr val="accent1"/>
+          </a:lnRef>
+          <a:fillRef idx="3">
+            <a:schemeClr val="accent1"/>
+          </a:fillRef>
+          <a:effectRef idx="2">
+            <a:schemeClr val="accent1"/>
+          </a:effectRef>
+          <a:fontRef idx="minor">
+            <a:schemeClr val="lt1"/>
+          </a:fontRef>
+        </p:style>
+        <p:txBody>
+          <a:bodyPr rtlCol="0" anchor="ctr" lIns="45720" rIns="45720" tIns="18288" bIns="18288"/>
+          <a:lstStyle/>
+          <a:p>
+            <a:pPr algn="ctr"/>
+            <a:r>
+              <a:rPr sz="1000" b="1">
+                <a:solidFill>
+                  <a:srgbClr val="FFFFFF"/>
+                </a:solidFill>
+                <a:latin typeface="Open Sans"/>
+              </a:rPr>
+              <a:t>SPRINT 4-5</a:t>
+            </a:r>
+          </a:p>
+        </p:txBody>
+      </p:sp>
+      <p:sp>
+        <p:nvSpPr>
+          <p:cNvPr id="24" name="Rounded Rectangle 23"/>
+          <p:cNvSpPr/>
+          <p:nvPr/>
+        </p:nvSpPr>
+        <p:spPr>
+          <a:xfrm>
+            <a:off x="457200" y="4206240"/>
+            <a:ext cx="11247120" cy="886968"/>
+          </a:xfrm>
+          <a:prstGeom prst="roundRect">
+            <a:avLst>
+              <a:gd name="adj" fmla="val 3000"/>
             </a:avLst>
           </a:prstGeom>
           <a:solidFill>
@@ -15596,14 +17273,14 @@
       </p:sp>
       <p:sp>
         <p:nvSpPr>
-          <p:cNvPr id="21" name="Rectangle 20"/>
+          <p:cNvPr id="25" name="Rectangle 24"/>
           <p:cNvSpPr/>
           <p:nvPr/>
         </p:nvSpPr>
         <p:spPr>
           <a:xfrm>
-            <a:off x="457200" y="3593592"/>
-            <a:ext cx="164592" cy="585216"/>
+            <a:off x="457200" y="4206240"/>
+            <a:ext cx="201168" cy="886968"/>
           </a:xfrm>
           <a:prstGeom prst="rect">
             <a:avLst/>
@@ -15640,14 +17317,14 @@
       </p:sp>
       <p:sp>
         <p:nvSpPr>
-          <p:cNvPr id="22" name="TextBox 21"/>
-          <p:cNvSpPr txBox="1"/>
-          <p:nvPr/>
-        </p:nvSpPr>
-        <p:spPr>
-          <a:xfrm>
-            <a:off x="777240" y="3666744"/>
-            <a:ext cx="1554480" cy="274320"/>
+          <p:cNvPr id="26" name="TextBox 25"/>
+          <p:cNvSpPr txBox="1"/>
+          <p:nvPr/>
+        </p:nvSpPr>
+        <p:spPr>
+          <a:xfrm>
+            <a:off x="777240" y="4297679"/>
+            <a:ext cx="1280160" cy="292608"/>
           </a:xfrm>
           <a:prstGeom prst="rect">
             <a:avLst/>
@@ -15668,56 +17345,56 @@
                 </a:solidFill>
                 <a:latin typeface="Open Sans"/>
               </a:rPr>
-              <a:t>Sprint 3</a:t>
-            </a:r>
-          </a:p>
-        </p:txBody>
-      </p:sp>
-      <p:sp>
-        <p:nvSpPr>
-          <p:cNvPr id="23" name="TextBox 22"/>
-          <p:cNvSpPr txBox="1"/>
-          <p:nvPr/>
-        </p:nvSpPr>
-        <p:spPr>
-          <a:xfrm>
-            <a:off x="777240" y="3886200"/>
-            <a:ext cx="2286000" cy="292608"/>
-          </a:xfrm>
-          <a:prstGeom prst="rect">
-            <a:avLst/>
-          </a:prstGeom>
-          <a:noFill/>
-        </p:spPr>
-        <p:txBody>
-          <a:bodyPr wrap="square" anchor="t" lIns="0" rIns="0" tIns="0" bIns="0">
-            <a:spAutoFit/>
-          </a:bodyPr>
-          <a:lstStyle/>
-          <a:p>
-            <a:pPr algn="l"/>
-            <a:r>
-              <a:rPr sz="1300" b="1">
+              <a:t>TIER 3</a:t>
+            </a:r>
+          </a:p>
+        </p:txBody>
+      </p:sp>
+      <p:sp>
+        <p:nvSpPr>
+          <p:cNvPr id="27" name="TextBox 26"/>
+          <p:cNvSpPr txBox="1"/>
+          <p:nvPr/>
+        </p:nvSpPr>
+        <p:spPr>
+          <a:xfrm>
+            <a:off x="777240" y="4572000"/>
+            <a:ext cx="2377440" cy="384048"/>
+          </a:xfrm>
+          <a:prstGeom prst="rect">
+            <a:avLst/>
+          </a:prstGeom>
+          <a:noFill/>
+        </p:spPr>
+        <p:txBody>
+          <a:bodyPr wrap="square" anchor="t" lIns="0" rIns="0" tIns="0" bIns="0">
+            <a:spAutoFit/>
+          </a:bodyPr>
+          <a:lstStyle/>
+          <a:p>
+            <a:pPr algn="l"/>
+            <a:r>
+              <a:rPr sz="1400" b="1">
                 <a:solidFill>
                   <a:srgbClr val="0F172A"/>
                 </a:solidFill>
                 <a:latin typeface="Open Sans"/>
               </a:rPr>
-              <a:t>Texas + New York live</a:t>
-            </a:r>
-          </a:p>
-        </p:txBody>
-      </p:sp>
-      <p:sp>
-        <p:nvSpPr>
-          <p:cNvPr id="24" name="TextBox 23"/>
-          <p:cNvSpPr txBox="1"/>
-          <p:nvPr/>
-        </p:nvSpPr>
-        <p:spPr>
-          <a:xfrm>
-            <a:off x="3154680" y="3776472"/>
-            <a:ext cx="8229600" cy="365760"/>
+              <a:t>We file the claim for them</a:t>
+            </a:r>
+          </a:p>
+        </p:txBody>
+      </p:sp>
+      <p:sp>
+        <p:nvSpPr>
+          <p:cNvPr id="28" name="TextBox 27"/>
+          <p:cNvSpPr txBox="1"/>
+          <p:nvPr/>
+        </p:nvSpPr>
+        <p:spPr>
+          <a:xfrm>
+            <a:off x="3246120" y="4325112"/>
+            <a:ext cx="5303520" cy="777240"/>
           </a:xfrm>
           <a:prstGeom prst="rect">
             <a:avLst/>
@@ -15738,25 +17415,114 @@
                 </a:solidFill>
                 <a:latin typeface="Open Sans"/>
               </a:rPr>
-              <a:t>NY SFTP ingest (quarterly) · TX file ingest if approved</a:t>
-            </a:r>
-          </a:p>
-        </p:txBody>
-      </p:sp>
-      <p:sp>
-        <p:nvSpPr>
-          <p:cNvPr id="25" name="Rounded Rectangle 24"/>
+              <a:t>SmartCredit registers as a claimant representative and submits paperwork on the member's behalf — high-value claims only.</a:t>
+            </a:r>
+          </a:p>
+        </p:txBody>
+      </p:sp>
+      <p:sp>
+        <p:nvSpPr>
+          <p:cNvPr id="29" name="TextBox 28"/>
+          <p:cNvSpPr txBox="1"/>
+          <p:nvPr/>
+        </p:nvSpPr>
+        <p:spPr>
+          <a:xfrm>
+            <a:off x="3246120" y="4800600"/>
+            <a:ext cx="5303520" cy="365760"/>
+          </a:xfrm>
+          <a:prstGeom prst="rect">
+            <a:avLst/>
+          </a:prstGeom>
+          <a:noFill/>
+        </p:spPr>
+        <p:txBody>
+          <a:bodyPr wrap="square" anchor="t" lIns="0" rIns="0" tIns="0" bIns="0">
+            <a:spAutoFit/>
+          </a:bodyPr>
+          <a:lstStyle/>
+          <a:p>
+            <a:pPr algn="l"/>
+            <a:r>
+              <a:rPr sz="900" b="0">
+                <a:solidFill>
+                  <a:srgbClr val="64748B"/>
+                </a:solidFill>
+                <a:latin typeface="Open Sans"/>
+              </a:rPr>
+              <a:t>GA · OH · MI (registered finder regimes)  ·  Background-check + legal-review gated  ·  $500+ records only initially</a:t>
+            </a:r>
+          </a:p>
+        </p:txBody>
+      </p:sp>
+      <p:sp>
+        <p:nvSpPr>
+          <p:cNvPr id="30" name="Rounded Rectangle 29"/>
           <p:cNvSpPr/>
           <p:nvPr/>
         </p:nvSpPr>
         <p:spPr>
           <a:xfrm>
-            <a:off x="457200" y="4270248"/>
-            <a:ext cx="11247120" cy="585216"/>
+            <a:off x="8778240" y="4498848"/>
+            <a:ext cx="1554480" cy="365760"/>
           </a:xfrm>
           <a:prstGeom prst="roundRect">
             <a:avLst>
-              <a:gd name="adj" fmla="val 4000"/>
+              <a:gd name="adj" fmla="val 50000"/>
+            </a:avLst>
+          </a:prstGeom>
+          <a:solidFill>
+            <a:srgbClr val="FFB352"/>
+          </a:solidFill>
+          <a:ln>
+            <a:noFill/>
+          </a:ln>
+        </p:spPr>
+        <p:style>
+          <a:lnRef idx="1">
+            <a:schemeClr val="accent1"/>
+          </a:lnRef>
+          <a:fillRef idx="3">
+            <a:schemeClr val="accent1"/>
+          </a:fillRef>
+          <a:effectRef idx="2">
+            <a:schemeClr val="accent1"/>
+          </a:effectRef>
+          <a:fontRef idx="minor">
+            <a:schemeClr val="lt1"/>
+          </a:fontRef>
+        </p:style>
+        <p:txBody>
+          <a:bodyPr rtlCol="0" anchor="ctr" lIns="45720" rIns="45720" tIns="18288" bIns="18288"/>
+          <a:lstStyle/>
+          <a:p>
+            <a:pPr algn="ctr"/>
+            <a:r>
+              <a:rPr sz="1000" b="1">
+                <a:solidFill>
+                  <a:srgbClr val="FFFFFF"/>
+                </a:solidFill>
+                <a:latin typeface="Open Sans"/>
+              </a:rPr>
+              <a:t>Q4 2026</a:t>
+            </a:r>
+          </a:p>
+        </p:txBody>
+      </p:sp>
+      <p:sp>
+        <p:nvSpPr>
+          <p:cNvPr id="31" name="Rounded Rectangle 30"/>
+          <p:cNvSpPr/>
+          <p:nvPr/>
+        </p:nvSpPr>
+        <p:spPr>
+          <a:xfrm>
+            <a:off x="457200" y="5166359"/>
+            <a:ext cx="11247120" cy="886968"/>
+          </a:xfrm>
+          <a:prstGeom prst="roundRect">
+            <a:avLst>
+              <a:gd name="adj" fmla="val 3000"/>
             </a:avLst>
           </a:prstGeom>
           <a:solidFill>
@@ -15793,408 +17559,14 @@
       </p:sp>
       <p:sp>
         <p:nvSpPr>
-          <p:cNvPr id="26" name="Rectangle 25"/>
+          <p:cNvPr id="32" name="Rectangle 31"/>
           <p:cNvSpPr/>
           <p:nvPr/>
         </p:nvSpPr>
         <p:spPr>
           <a:xfrm>
-            <a:off x="457200" y="4270248"/>
-            <a:ext cx="164592" cy="585216"/>
-          </a:xfrm>
-          <a:prstGeom prst="rect">
-            <a:avLst/>
-          </a:prstGeom>
-          <a:solidFill>
-            <a:srgbClr val="FFB352"/>
-          </a:solidFill>
-          <a:ln>
-            <a:noFill/>
-          </a:ln>
-          <a:effectLst/>
-        </p:spPr>
-        <p:style>
-          <a:lnRef idx="1">
-            <a:schemeClr val="accent1"/>
-          </a:lnRef>
-          <a:fillRef idx="3">
-            <a:schemeClr val="accent1"/>
-          </a:fillRef>
-          <a:effectRef idx="2">
-            <a:schemeClr val="accent1"/>
-          </a:effectRef>
-          <a:fontRef idx="minor">
-            <a:schemeClr val="lt1"/>
-          </a:fontRef>
-        </p:style>
-        <p:txBody>
-          <a:bodyPr rtlCol="0" anchor="ctr"/>
-          <a:lstStyle/>
-          <a:p>
-            <a:pPr algn="ctr"/>
-          </a:p>
-        </p:txBody>
-      </p:sp>
-      <p:sp>
-        <p:nvSpPr>
-          <p:cNvPr id="27" name="TextBox 26"/>
-          <p:cNvSpPr txBox="1"/>
-          <p:nvPr/>
-        </p:nvSpPr>
-        <p:spPr>
-          <a:xfrm>
-            <a:off x="777240" y="4343400"/>
-            <a:ext cx="1554480" cy="274320"/>
-          </a:xfrm>
-          <a:prstGeom prst="rect">
-            <a:avLst/>
-          </a:prstGeom>
-          <a:noFill/>
-        </p:spPr>
-        <p:txBody>
-          <a:bodyPr wrap="square" anchor="t" lIns="0" rIns="0" tIns="0" bIns="0">
-            <a:spAutoFit/>
-          </a:bodyPr>
-          <a:lstStyle/>
-          <a:p>
-            <a:pPr algn="l"/>
-            <a:r>
-              <a:rPr sz="1100" b="1">
-                <a:solidFill>
-                  <a:srgbClr val="FFB352"/>
-                </a:solidFill>
-                <a:latin typeface="Open Sans"/>
-              </a:rPr>
-              <a:t>Sprint 4</a:t>
-            </a:r>
-          </a:p>
-        </p:txBody>
-      </p:sp>
-      <p:sp>
-        <p:nvSpPr>
-          <p:cNvPr id="28" name="TextBox 27"/>
-          <p:cNvSpPr txBox="1"/>
-          <p:nvPr/>
-        </p:nvSpPr>
-        <p:spPr>
-          <a:xfrm>
-            <a:off x="777240" y="4562856"/>
-            <a:ext cx="2286000" cy="292608"/>
-          </a:xfrm>
-          <a:prstGeom prst="rect">
-            <a:avLst/>
-          </a:prstGeom>
-          <a:noFill/>
-        </p:spPr>
-        <p:txBody>
-          <a:bodyPr wrap="square" anchor="t" lIns="0" rIns="0" tIns="0" bIns="0">
-            <a:spAutoFit/>
-          </a:bodyPr>
-          <a:lstStyle/>
-          <a:p>
-            <a:pPr algn="l"/>
-            <a:r>
-              <a:rPr sz="1300" b="1">
-                <a:solidFill>
-                  <a:srgbClr val="0F172A"/>
-                </a:solidFill>
-                <a:latin typeface="Open Sans"/>
-              </a:rPr>
-              <a:t>Georgia path</a:t>
-            </a:r>
-          </a:p>
-        </p:txBody>
-      </p:sp>
-      <p:sp>
-        <p:nvSpPr>
-          <p:cNvPr id="29" name="TextBox 28"/>
-          <p:cNvSpPr txBox="1"/>
-          <p:nvPr/>
-        </p:nvSpPr>
-        <p:spPr>
-          <a:xfrm>
-            <a:off x="3154680" y="4453128"/>
-            <a:ext cx="8229600" cy="365760"/>
-          </a:xfrm>
-          <a:prstGeom prst="rect">
-            <a:avLst/>
-          </a:prstGeom>
-          <a:noFill/>
-        </p:spPr>
-        <p:txBody>
-          <a:bodyPr wrap="square" anchor="t" lIns="0" rIns="0" tIns="0" bIns="0">
-            <a:spAutoFit/>
-          </a:bodyPr>
-          <a:lstStyle/>
-          <a:p>
-            <a:pPr algn="l"/>
-            <a:r>
-              <a:rPr sz="1100" b="0">
-                <a:solidFill>
-                  <a:srgbClr val="334155"/>
-                </a:solidFill>
-                <a:latin typeface="Open Sans"/>
-              </a:rPr>
-              <a:t>CDR registration · background checks · legal approval · ingest</a:t>
-            </a:r>
-          </a:p>
-        </p:txBody>
-      </p:sp>
-      <p:sp>
-        <p:nvSpPr>
-          <p:cNvPr id="30" name="Rounded Rectangle 29"/>
-          <p:cNvSpPr/>
-          <p:nvPr/>
-        </p:nvSpPr>
-        <p:spPr>
-          <a:xfrm>
-            <a:off x="457200" y="4946904"/>
-            <a:ext cx="11247120" cy="585216"/>
-          </a:xfrm>
-          <a:prstGeom prst="roundRect">
-            <a:avLst>
-              <a:gd name="adj" fmla="val 4000"/>
-            </a:avLst>
-          </a:prstGeom>
-          <a:solidFill>
-            <a:srgbClr val="FFFFFF"/>
-          </a:solidFill>
-          <a:ln w="6350">
-            <a:solidFill>
-              <a:srgbClr val="E2E8F0"/>
-            </a:solidFill>
-          </a:ln>
-          <a:effectLst/>
-        </p:spPr>
-        <p:style>
-          <a:lnRef idx="1">
-            <a:schemeClr val="accent1"/>
-          </a:lnRef>
-          <a:fillRef idx="3">
-            <a:schemeClr val="accent1"/>
-          </a:fillRef>
-          <a:effectRef idx="2">
-            <a:schemeClr val="accent1"/>
-          </a:effectRef>
-          <a:fontRef idx="minor">
-            <a:schemeClr val="lt1"/>
-          </a:fontRef>
-        </p:style>
-        <p:txBody>
-          <a:bodyPr rtlCol="0" anchor="ctr"/>
-          <a:lstStyle/>
-          <a:p>
-            <a:pPr algn="ctr"/>
-          </a:p>
-        </p:txBody>
-      </p:sp>
-      <p:sp>
-        <p:nvSpPr>
-          <p:cNvPr id="31" name="Rectangle 30"/>
-          <p:cNvSpPr/>
-          <p:nvPr/>
-        </p:nvSpPr>
-        <p:spPr>
-          <a:xfrm>
-            <a:off x="457200" y="4946904"/>
-            <a:ext cx="164592" cy="585216"/>
-          </a:xfrm>
-          <a:prstGeom prst="rect">
-            <a:avLst/>
-          </a:prstGeom>
-          <a:solidFill>
-            <a:srgbClr val="E11D48"/>
-          </a:solidFill>
-          <a:ln>
-            <a:noFill/>
-          </a:ln>
-          <a:effectLst/>
-        </p:spPr>
-        <p:style>
-          <a:lnRef idx="1">
-            <a:schemeClr val="accent1"/>
-          </a:lnRef>
-          <a:fillRef idx="3">
-            <a:schemeClr val="accent1"/>
-          </a:fillRef>
-          <a:effectRef idx="2">
-            <a:schemeClr val="accent1"/>
-          </a:effectRef>
-          <a:fontRef idx="minor">
-            <a:schemeClr val="lt1"/>
-          </a:fontRef>
-        </p:style>
-        <p:txBody>
-          <a:bodyPr rtlCol="0" anchor="ctr"/>
-          <a:lstStyle/>
-          <a:p>
-            <a:pPr algn="ctr"/>
-          </a:p>
-        </p:txBody>
-      </p:sp>
-      <p:sp>
-        <p:nvSpPr>
-          <p:cNvPr id="32" name="TextBox 31"/>
-          <p:cNvSpPr txBox="1"/>
-          <p:nvPr/>
-        </p:nvSpPr>
-        <p:spPr>
-          <a:xfrm>
-            <a:off x="777240" y="5020056"/>
-            <a:ext cx="1554480" cy="274320"/>
-          </a:xfrm>
-          <a:prstGeom prst="rect">
-            <a:avLst/>
-          </a:prstGeom>
-          <a:noFill/>
-        </p:spPr>
-        <p:txBody>
-          <a:bodyPr wrap="square" anchor="t" lIns="0" rIns="0" tIns="0" bIns="0">
-            <a:spAutoFit/>
-          </a:bodyPr>
-          <a:lstStyle/>
-          <a:p>
-            <a:pPr algn="l"/>
-            <a:r>
-              <a:rPr sz="1100" b="1">
-                <a:solidFill>
-                  <a:srgbClr val="E11D48"/>
-                </a:solidFill>
-                <a:latin typeface="Open Sans"/>
-              </a:rPr>
-              <a:t>Sprint 5</a:t>
-            </a:r>
-          </a:p>
-        </p:txBody>
-      </p:sp>
-      <p:sp>
-        <p:nvSpPr>
-          <p:cNvPr id="33" name="TextBox 32"/>
-          <p:cNvSpPr txBox="1"/>
-          <p:nvPr/>
-        </p:nvSpPr>
-        <p:spPr>
-          <a:xfrm>
-            <a:off x="777240" y="5239512"/>
-            <a:ext cx="2286000" cy="292608"/>
-          </a:xfrm>
-          <a:prstGeom prst="rect">
-            <a:avLst/>
-          </a:prstGeom>
-          <a:noFill/>
-        </p:spPr>
-        <p:txBody>
-          <a:bodyPr wrap="square" anchor="t" lIns="0" rIns="0" tIns="0" bIns="0">
-            <a:spAutoFit/>
-          </a:bodyPr>
-          <a:lstStyle/>
-          <a:p>
-            <a:pPr algn="l"/>
-            <a:r>
-              <a:rPr sz="1300" b="1">
-                <a:solidFill>
-                  <a:srgbClr val="0F172A"/>
-                </a:solidFill>
-                <a:latin typeface="Open Sans"/>
-              </a:rPr>
-              <a:t>Florida path</a:t>
-            </a:r>
-          </a:p>
-        </p:txBody>
-      </p:sp>
-      <p:sp>
-        <p:nvSpPr>
-          <p:cNvPr id="34" name="TextBox 33"/>
-          <p:cNvSpPr txBox="1"/>
-          <p:nvPr/>
-        </p:nvSpPr>
-        <p:spPr>
-          <a:xfrm>
-            <a:off x="3154680" y="5129784"/>
-            <a:ext cx="8229600" cy="365760"/>
-          </a:xfrm>
-          <a:prstGeom prst="rect">
-            <a:avLst/>
-          </a:prstGeom>
-          <a:noFill/>
-        </p:spPr>
-        <p:txBody>
-          <a:bodyPr wrap="square" anchor="t" lIns="0" rIns="0" tIns="0" bIns="0">
-            <a:spAutoFit/>
-          </a:bodyPr>
-          <a:lstStyle/>
-          <a:p>
-            <a:pPr algn="l"/>
-            <a:r>
-              <a:rPr sz="1100" b="0">
-                <a:solidFill>
-                  <a:srgbClr val="334155"/>
-                </a:solidFill>
-                <a:latin typeface="Open Sans"/>
-              </a:rPr>
-              <a:t>Partnership with registered claimant rep, OR written permission</a:t>
-            </a:r>
-          </a:p>
-        </p:txBody>
-      </p:sp>
-      <p:sp>
-        <p:nvSpPr>
-          <p:cNvPr id="35" name="Rounded Rectangle 34"/>
-          <p:cNvSpPr/>
-          <p:nvPr/>
-        </p:nvSpPr>
-        <p:spPr>
-          <a:xfrm>
-            <a:off x="457200" y="5623560"/>
-            <a:ext cx="11247120" cy="585216"/>
-          </a:xfrm>
-          <a:prstGeom prst="roundRect">
-            <a:avLst>
-              <a:gd name="adj" fmla="val 4000"/>
-            </a:avLst>
-          </a:prstGeom>
-          <a:solidFill>
-            <a:srgbClr val="FFFFFF"/>
-          </a:solidFill>
-          <a:ln w="6350">
-            <a:solidFill>
-              <a:srgbClr val="E2E8F0"/>
-            </a:solidFill>
-          </a:ln>
-          <a:effectLst/>
-        </p:spPr>
-        <p:style>
-          <a:lnRef idx="1">
-            <a:schemeClr val="accent1"/>
-          </a:lnRef>
-          <a:fillRef idx="3">
-            <a:schemeClr val="accent1"/>
-          </a:fillRef>
-          <a:effectRef idx="2">
-            <a:schemeClr val="accent1"/>
-          </a:effectRef>
-          <a:fontRef idx="minor">
-            <a:schemeClr val="lt1"/>
-          </a:fontRef>
-        </p:style>
-        <p:txBody>
-          <a:bodyPr rtlCol="0" anchor="ctr"/>
-          <a:lstStyle/>
-          <a:p>
-            <a:pPr algn="ctr"/>
-          </a:p>
-        </p:txBody>
-      </p:sp>
-      <p:sp>
-        <p:nvSpPr>
-          <p:cNvPr id="36" name="Rectangle 35"/>
-          <p:cNvSpPr/>
-          <p:nvPr/>
-        </p:nvSpPr>
-        <p:spPr>
-          <a:xfrm>
-            <a:off x="457200" y="5623560"/>
-            <a:ext cx="164592" cy="585216"/>
+            <a:off x="457200" y="5166359"/>
+            <a:ext cx="201168" cy="886968"/>
           </a:xfrm>
           <a:prstGeom prst="rect">
             <a:avLst/>
@@ -16231,14 +17603,14 @@
       </p:sp>
       <p:sp>
         <p:nvSpPr>
-          <p:cNvPr id="37" name="TextBox 36"/>
-          <p:cNvSpPr txBox="1"/>
-          <p:nvPr/>
-        </p:nvSpPr>
-        <p:spPr>
-          <a:xfrm>
-            <a:off x="777240" y="5696712"/>
-            <a:ext cx="1554480" cy="274320"/>
+          <p:cNvPr id="33" name="TextBox 32"/>
+          <p:cNvSpPr txBox="1"/>
+          <p:nvPr/>
+        </p:nvSpPr>
+        <p:spPr>
+          <a:xfrm>
+            <a:off x="777240" y="5257799"/>
+            <a:ext cx="1280160" cy="292608"/>
           </a:xfrm>
           <a:prstGeom prst="rect">
             <a:avLst/>
@@ -16259,43 +17631,213 @@
                 </a:solidFill>
                 <a:latin typeface="Open Sans"/>
               </a:rPr>
-              <a:t>Ongoing</a:t>
-            </a:r>
-          </a:p>
-        </p:txBody>
-      </p:sp>
-      <p:sp>
-        <p:nvSpPr>
-          <p:cNvPr id="38" name="TextBox 37"/>
-          <p:cNvSpPr txBox="1"/>
-          <p:nvPr/>
-        </p:nvSpPr>
-        <p:spPr>
-          <a:xfrm>
-            <a:off x="777240" y="5916168"/>
-            <a:ext cx="2286000" cy="292608"/>
-          </a:xfrm>
-          <a:prstGeom prst="rect">
-            <a:avLst/>
-          </a:prstGeom>
-          <a:noFill/>
-        </p:spPr>
-        <p:txBody>
-          <a:bodyPr wrap="square" anchor="t" lIns="0" rIns="0" tIns="0" bIns="0">
-            <a:spAutoFit/>
-          </a:bodyPr>
-          <a:lstStyle/>
-          <a:p>
-            <a:pPr algn="l"/>
-            <a:r>
-              <a:rPr sz="1300" b="1">
+              <a:t>TIER 4</a:t>
+            </a:r>
+          </a:p>
+        </p:txBody>
+      </p:sp>
+      <p:sp>
+        <p:nvSpPr>
+          <p:cNvPr id="34" name="TextBox 33"/>
+          <p:cNvSpPr txBox="1"/>
+          <p:nvPr/>
+        </p:nvSpPr>
+        <p:spPr>
+          <a:xfrm>
+            <a:off x="777240" y="5532120"/>
+            <a:ext cx="2377440" cy="384048"/>
+          </a:xfrm>
+          <a:prstGeom prst="rect">
+            <a:avLst/>
+          </a:prstGeom>
+          <a:noFill/>
+        </p:spPr>
+        <p:txBody>
+          <a:bodyPr wrap="square" anchor="t" lIns="0" rIns="0" tIns="0" bIns="0">
+            <a:spAutoFit/>
+          </a:bodyPr>
+          <a:lstStyle/>
+          <a:p>
+            <a:pPr algn="l"/>
+            <a:r>
+              <a:rPr sz="1400" b="1">
                 <a:solidFill>
                   <a:srgbClr val="0F172A"/>
                 </a:solidFill>
                 <a:latin typeface="Open Sans"/>
               </a:rPr>
-              <a:t>Search-only handoff</a:t>
-            </a:r>
+              <a:t>Direct API submission</a:t>
+            </a:r>
+          </a:p>
+        </p:txBody>
+      </p:sp>
+      <p:sp>
+        <p:nvSpPr>
+          <p:cNvPr id="35" name="TextBox 34"/>
+          <p:cNvSpPr txBox="1"/>
+          <p:nvPr/>
+        </p:nvSpPr>
+        <p:spPr>
+          <a:xfrm>
+            <a:off x="3246120" y="5285231"/>
+            <a:ext cx="5303520" cy="777240"/>
+          </a:xfrm>
+          <a:prstGeom prst="rect">
+            <a:avLst/>
+          </a:prstGeom>
+          <a:noFill/>
+        </p:spPr>
+        <p:txBody>
+          <a:bodyPr wrap="square" anchor="t" lIns="0" rIns="0" tIns="0" bIns="0">
+            <a:spAutoFit/>
+          </a:bodyPr>
+          <a:lstStyle/>
+          <a:p>
+            <a:pPr algn="l"/>
+            <a:r>
+              <a:rPr sz="1100" b="0">
+                <a:solidFill>
+                  <a:srgbClr val="334155"/>
+                </a:solidFill>
+                <a:latin typeface="Open Sans"/>
+              </a:rPr>
+              <a:t>If a state ever exposes a claim-submission API, we wire it up.</a:t>
+            </a:r>
+          </a:p>
+        </p:txBody>
+      </p:sp>
+      <p:sp>
+        <p:nvSpPr>
+          <p:cNvPr id="36" name="TextBox 35"/>
+          <p:cNvSpPr txBox="1"/>
+          <p:nvPr/>
+        </p:nvSpPr>
+        <p:spPr>
+          <a:xfrm>
+            <a:off x="3246120" y="5760720"/>
+            <a:ext cx="5303520" cy="365760"/>
+          </a:xfrm>
+          <a:prstGeom prst="rect">
+            <a:avLst/>
+          </a:prstGeom>
+          <a:noFill/>
+        </p:spPr>
+        <p:txBody>
+          <a:bodyPr wrap="square" anchor="t" lIns="0" rIns="0" tIns="0" bIns="0">
+            <a:spAutoFit/>
+          </a:bodyPr>
+          <a:lstStyle/>
+          <a:p>
+            <a:pPr algn="l"/>
+            <a:r>
+              <a:rPr sz="900" b="0">
+                <a:solidFill>
+                  <a:srgbClr val="64748B"/>
+                </a:solidFill>
+                <a:latin typeface="Open Sans"/>
+              </a:rPr>
+              <a:t>No state offers this today  ·  Watch NAUPA / Kelmar evolution  ·  Opportunistic — not on roadmap</a:t>
+            </a:r>
+          </a:p>
+        </p:txBody>
+      </p:sp>
+      <p:sp>
+        <p:nvSpPr>
+          <p:cNvPr id="37" name="Rounded Rectangle 36"/>
+          <p:cNvSpPr/>
+          <p:nvPr/>
+        </p:nvSpPr>
+        <p:spPr>
+          <a:xfrm>
+            <a:off x="8778240" y="5458968"/>
+            <a:ext cx="1554480" cy="365760"/>
+          </a:xfrm>
+          <a:prstGeom prst="roundRect">
+            <a:avLst>
+              <a:gd name="adj" fmla="val 50000"/>
+            </a:avLst>
+          </a:prstGeom>
+          <a:solidFill>
+            <a:srgbClr val="64748B"/>
+          </a:solidFill>
+          <a:ln>
+            <a:noFill/>
+          </a:ln>
+        </p:spPr>
+        <p:style>
+          <a:lnRef idx="1">
+            <a:schemeClr val="accent1"/>
+          </a:lnRef>
+          <a:fillRef idx="3">
+            <a:schemeClr val="accent1"/>
+          </a:fillRef>
+          <a:effectRef idx="2">
+            <a:schemeClr val="accent1"/>
+          </a:effectRef>
+          <a:fontRef idx="minor">
+            <a:schemeClr val="lt1"/>
+          </a:fontRef>
+        </p:style>
+        <p:txBody>
+          <a:bodyPr rtlCol="0" anchor="ctr" lIns="45720" rIns="45720" tIns="18288" bIns="18288"/>
+          <a:lstStyle/>
+          <a:p>
+            <a:pPr algn="ctr"/>
+            <a:r>
+              <a:rPr sz="1000" b="1">
+                <a:solidFill>
+                  <a:srgbClr val="FFFFFF"/>
+                </a:solidFill>
+                <a:latin typeface="Open Sans"/>
+              </a:rPr>
+              <a:t>WATCH</a:t>
+            </a:r>
+          </a:p>
+        </p:txBody>
+      </p:sp>
+      <p:sp>
+        <p:nvSpPr>
+          <p:cNvPr id="38" name="Rounded Rectangle 37"/>
+          <p:cNvSpPr/>
+          <p:nvPr/>
+        </p:nvSpPr>
+        <p:spPr>
+          <a:xfrm>
+            <a:off x="457200" y="6263640"/>
+            <a:ext cx="11247120" cy="411480"/>
+          </a:xfrm>
+          <a:prstGeom prst="roundRect">
+            <a:avLst>
+              <a:gd name="adj" fmla="val 10000"/>
+            </a:avLst>
+          </a:prstGeom>
+          <a:solidFill>
+            <a:srgbClr val="2863C5"/>
+          </a:solidFill>
+          <a:ln>
+            <a:noFill/>
+          </a:ln>
+          <a:effectLst/>
+        </p:spPr>
+        <p:style>
+          <a:lnRef idx="1">
+            <a:schemeClr val="accent1"/>
+          </a:lnRef>
+          <a:fillRef idx="3">
+            <a:schemeClr val="accent1"/>
+          </a:fillRef>
+          <a:effectRef idx="2">
+            <a:schemeClr val="accent1"/>
+          </a:effectRef>
+          <a:fontRef idx="minor">
+            <a:schemeClr val="lt1"/>
+          </a:fontRef>
+        </p:style>
+        <p:txBody>
+          <a:bodyPr rtlCol="0" anchor="ctr"/>
+          <a:lstStyle/>
+          <a:p>
+            <a:pPr algn="ctr"/>
           </a:p>
         </p:txBody>
       </p:sp>
@@ -16307,29 +17849,29 @@
         </p:nvSpPr>
         <p:spPr>
           <a:xfrm>
-            <a:off x="3154680" y="5806440"/>
-            <a:ext cx="8229600" cy="365760"/>
-          </a:xfrm>
-          <a:prstGeom prst="rect">
-            <a:avLst/>
-          </a:prstGeom>
-          <a:noFill/>
-        </p:spPr>
-        <p:txBody>
-          <a:bodyPr wrap="square" anchor="t" lIns="0" rIns="0" tIns="0" bIns="0">
-            <a:spAutoFit/>
-          </a:bodyPr>
-          <a:lstStyle/>
-          <a:p>
-            <a:pPr algn="l"/>
-            <a:r>
-              <a:rPr sz="1100" b="0">
-                <a:solidFill>
-                  <a:srgbClr val="334155"/>
-                </a:solidFill>
-                <a:latin typeface="Open Sans"/>
-              </a:rPr>
-              <a:t>IL · PA · NJ · SC · AL · LA · VA · AZ · MD · TN · MS · NC</a:t>
+            <a:off x="640080" y="6309360"/>
+            <a:ext cx="10972800" cy="365760"/>
+          </a:xfrm>
+          <a:prstGeom prst="rect">
+            <a:avLst/>
+          </a:prstGeom>
+          <a:noFill/>
+        </p:spPr>
+        <p:txBody>
+          <a:bodyPr wrap="square" anchor="t" lIns="0" rIns="0" tIns="0" bIns="0">
+            <a:spAutoFit/>
+          </a:bodyPr>
+          <a:lstStyle/>
+          <a:p>
+            <a:pPr algn="l"/>
+            <a:r>
+              <a:rPr sz="1100" b="1">
+                <a:solidFill>
+                  <a:srgbClr val="FFFFFF"/>
+                </a:solidFill>
+                <a:latin typeface="Open Sans"/>
+              </a:rPr>
+              <a:t>Tier 2 is the breakthrough — "we found money" → "we filled the form" is what nobody else can ship.</a:t>
             </a:r>
           </a:p>
         </p:txBody>
@@ -16540,7 +18082,7 @@
                 </a:solidFill>
                 <a:latin typeface="Open Sans"/>
               </a:rPr>
-              <a:t>9 / 12</a:t>
+              <a:t>9 / 13</a:t>
             </a:r>
           </a:p>
         </p:txBody>
@@ -16610,7 +18152,7 @@
                 </a:solidFill>
                 <a:latin typeface="Open Sans"/>
               </a:rPr>
-              <a:t>COMPLIANCE POSTURE</a:t>
+              <a:t>ROADMAP</a:t>
             </a:r>
           </a:p>
         </p:txBody>
@@ -16624,28 +18166,28 @@
         <p:spPr>
           <a:xfrm>
             <a:off x="457200" y="1143000"/>
-            <a:ext cx="11430000" cy="914400"/>
-          </a:xfrm>
-          <a:prstGeom prst="rect">
-            <a:avLst/>
-          </a:prstGeom>
-          <a:noFill/>
-        </p:spPr>
-        <p:txBody>
-          <a:bodyPr wrap="square" anchor="t" lIns="0" rIns="0" tIns="0" bIns="0">
-            <a:spAutoFit/>
-          </a:bodyPr>
-          <a:lstStyle/>
-          <a:p>
-            <a:pPr algn="l"/>
-            <a:r>
-              <a:rPr sz="2800" b="1">
+            <a:ext cx="11430000" cy="822960"/>
+          </a:xfrm>
+          <a:prstGeom prst="rect">
+            <a:avLst/>
+          </a:prstGeom>
+          <a:noFill/>
+        </p:spPr>
+        <p:txBody>
+          <a:bodyPr wrap="square" anchor="t" lIns="0" rIns="0" tIns="0" bIns="0">
+            <a:spAutoFit/>
+          </a:bodyPr>
+          <a:lstStyle/>
+          <a:p>
+            <a:pPr algn="l"/>
+            <a:r>
+              <a:rPr sz="3200" b="1">
                 <a:solidFill>
                   <a:srgbClr val="0F172A"/>
                 </a:solidFill>
                 <a:latin typeface="Open Sans"/>
               </a:rPr>
-              <a:t>Free + deep-link = no new regulatory exposure.</a:t>
+              <a:t>First state live in ~6 weeks.</a:t>
             </a:r>
           </a:p>
         </p:txBody>
@@ -16658,8 +18200,8 @@
         </p:nvSpPr>
         <p:spPr>
           <a:xfrm>
-            <a:off x="457200" y="2377440"/>
-            <a:ext cx="3657600" cy="1417320"/>
+            <a:off x="457200" y="2240280"/>
+            <a:ext cx="11247120" cy="585216"/>
           </a:xfrm>
           <a:prstGeom prst="roundRect">
             <a:avLst>
@@ -16706,8 +18248,8 @@
         </p:nvSpPr>
         <p:spPr>
           <a:xfrm>
-            <a:off x="457200" y="2377440"/>
-            <a:ext cx="146304" cy="1417320"/>
+            <a:off x="457200" y="2240280"/>
+            <a:ext cx="164592" cy="585216"/>
           </a:xfrm>
           <a:prstGeom prst="rect">
             <a:avLst/>
@@ -16750,29 +18292,29 @@
         </p:nvSpPr>
         <p:spPr>
           <a:xfrm>
-            <a:off x="731520" y="2542032"/>
-            <a:ext cx="457200" cy="457200"/>
-          </a:xfrm>
-          <a:prstGeom prst="rect">
-            <a:avLst/>
-          </a:prstGeom>
-          <a:noFill/>
-        </p:spPr>
-        <p:txBody>
-          <a:bodyPr wrap="square" anchor="t" lIns="0" rIns="0" tIns="0" bIns="0">
-            <a:spAutoFit/>
-          </a:bodyPr>
-          <a:lstStyle/>
-          <a:p>
-            <a:pPr algn="l"/>
-            <a:r>
-              <a:rPr sz="2400" b="1">
+            <a:off x="777240" y="2313432"/>
+            <a:ext cx="1554480" cy="274320"/>
+          </a:xfrm>
+          <a:prstGeom prst="rect">
+            <a:avLst/>
+          </a:prstGeom>
+          <a:noFill/>
+        </p:spPr>
+        <p:txBody>
+          <a:bodyPr wrap="square" anchor="t" lIns="0" rIns="0" tIns="0" bIns="0">
+            <a:spAutoFit/>
+          </a:bodyPr>
+          <a:lstStyle/>
+          <a:p>
+            <a:pPr algn="l"/>
+            <a:r>
+              <a:rPr sz="1100" b="1">
                 <a:solidFill>
                   <a:srgbClr val="059669"/>
                 </a:solidFill>
                 <a:latin typeface="Open Sans"/>
               </a:rPr>
-              <a:t>✓</a:t>
+              <a:t>Sprint 1</a:t>
             </a:r>
           </a:p>
         </p:txBody>
@@ -16785,29 +18327,29 @@
         </p:nvSpPr>
         <p:spPr>
           <a:xfrm>
-            <a:off x="1234440" y="2578608"/>
-            <a:ext cx="2743200" cy="411480"/>
-          </a:xfrm>
-          <a:prstGeom prst="rect">
-            <a:avLst/>
-          </a:prstGeom>
-          <a:noFill/>
-        </p:spPr>
-        <p:txBody>
-          <a:bodyPr wrap="square" anchor="t" lIns="0" rIns="0" tIns="0" bIns="0">
-            <a:spAutoFit/>
-          </a:bodyPr>
-          <a:lstStyle/>
-          <a:p>
-            <a:pPr algn="l"/>
-            <a:r>
-              <a:rPr sz="1400" b="1">
+            <a:off x="777240" y="2532888"/>
+            <a:ext cx="2286000" cy="292608"/>
+          </a:xfrm>
+          <a:prstGeom prst="rect">
+            <a:avLst/>
+          </a:prstGeom>
+          <a:noFill/>
+        </p:spPr>
+        <p:txBody>
+          <a:bodyPr wrap="square" anchor="t" lIns="0" rIns="0" tIns="0" bIns="0">
+            <a:spAutoFit/>
+          </a:bodyPr>
+          <a:lstStyle/>
+          <a:p>
+            <a:pPr algn="l"/>
+            <a:r>
+              <a:rPr sz="1300" b="1">
                 <a:solidFill>
                   <a:srgbClr val="0F172A"/>
                 </a:solidFill>
                 <a:latin typeface="Open Sans"/>
               </a:rPr>
-              <a:t>FCRA-safe</a:t>
+              <a:t>California foundation</a:t>
             </a:r>
           </a:p>
         </p:txBody>
@@ -16820,8 +18362,8 @@
         </p:nvSpPr>
         <p:spPr>
           <a:xfrm>
-            <a:off x="1234440" y="3017520"/>
-            <a:ext cx="2743200" cy="731520"/>
+            <a:off x="3154680" y="2423160"/>
+            <a:ext cx="8229600" cy="365760"/>
           </a:xfrm>
           <a:prstGeom prst="rect">
             <a:avLst/>
@@ -16842,7 +18384,7 @@
                 </a:solidFill>
                 <a:latin typeface="Open Sans"/>
               </a:rPr>
-              <a:t>Unclaimed-property search isn't a credit-reporting activity.</a:t>
+              <a:t>CA ingest · Snowflake schema · matcher integration · alert UX</a:t>
             </a:r>
           </a:p>
         </p:txBody>
@@ -16855,8 +18397,8 @@
         </p:nvSpPr>
         <p:spPr>
           <a:xfrm>
-            <a:off x="4251960" y="2377440"/>
-            <a:ext cx="3657600" cy="1417320"/>
+            <a:off x="457200" y="2916936"/>
+            <a:ext cx="11247120" cy="585216"/>
           </a:xfrm>
           <a:prstGeom prst="roundRect">
             <a:avLst>
@@ -16903,14 +18445,14 @@
         </p:nvSpPr>
         <p:spPr>
           <a:xfrm>
-            <a:off x="4251960" y="2377440"/>
-            <a:ext cx="146304" cy="1417320"/>
+            <a:off x="457200" y="2916936"/>
+            <a:ext cx="164592" cy="585216"/>
           </a:xfrm>
           <a:prstGeom prst="rect">
             <a:avLst/>
           </a:prstGeom>
           <a:solidFill>
-            <a:srgbClr val="059669"/>
+            <a:srgbClr val="FFB352"/>
           </a:solidFill>
           <a:ln>
             <a:noFill/>
@@ -16947,29 +18489,29 @@
         </p:nvSpPr>
         <p:spPr>
           <a:xfrm>
-            <a:off x="4526280" y="2542032"/>
-            <a:ext cx="457200" cy="457200"/>
-          </a:xfrm>
-          <a:prstGeom prst="rect">
-            <a:avLst/>
-          </a:prstGeom>
-          <a:noFill/>
-        </p:spPr>
-        <p:txBody>
-          <a:bodyPr wrap="square" anchor="t" lIns="0" rIns="0" tIns="0" bIns="0">
-            <a:spAutoFit/>
-          </a:bodyPr>
-          <a:lstStyle/>
-          <a:p>
-            <a:pPr algn="l"/>
-            <a:r>
-              <a:rPr sz="2400" b="1">
-                <a:solidFill>
-                  <a:srgbClr val="059669"/>
-                </a:solidFill>
-                <a:latin typeface="Open Sans"/>
-              </a:rPr>
-              <a:t>✓</a:t>
+            <a:off x="777240" y="2990088"/>
+            <a:ext cx="1554480" cy="274320"/>
+          </a:xfrm>
+          <a:prstGeom prst="rect">
+            <a:avLst/>
+          </a:prstGeom>
+          <a:noFill/>
+        </p:spPr>
+        <p:txBody>
+          <a:bodyPr wrap="square" anchor="t" lIns="0" rIns="0" tIns="0" bIns="0">
+            <a:spAutoFit/>
+          </a:bodyPr>
+          <a:lstStyle/>
+          <a:p>
+            <a:pPr algn="l"/>
+            <a:r>
+              <a:rPr sz="1100" b="1">
+                <a:solidFill>
+                  <a:srgbClr val="FFB352"/>
+                </a:solidFill>
+                <a:latin typeface="Open Sans"/>
+              </a:rPr>
+              <a:t>Sprint 2</a:t>
             </a:r>
           </a:p>
         </p:txBody>
@@ -16982,29 +18524,29 @@
         </p:nvSpPr>
         <p:spPr>
           <a:xfrm>
-            <a:off x="5029200" y="2578608"/>
-            <a:ext cx="2743200" cy="411480"/>
-          </a:xfrm>
-          <a:prstGeom prst="rect">
-            <a:avLst/>
-          </a:prstGeom>
-          <a:noFill/>
-        </p:spPr>
-        <p:txBody>
-          <a:bodyPr wrap="square" anchor="t" lIns="0" rIns="0" tIns="0" bIns="0">
-            <a:spAutoFit/>
-          </a:bodyPr>
-          <a:lstStyle/>
-          <a:p>
-            <a:pPr algn="l"/>
-            <a:r>
-              <a:rPr sz="1400" b="1">
+            <a:off x="777240" y="3209544"/>
+            <a:ext cx="2286000" cy="292608"/>
+          </a:xfrm>
+          <a:prstGeom prst="rect">
+            <a:avLst/>
+          </a:prstGeom>
+          <a:noFill/>
+        </p:spPr>
+        <p:txBody>
+          <a:bodyPr wrap="square" anchor="t" lIns="0" rIns="0" tIns="0" bIns="0">
+            <a:spAutoFit/>
+          </a:bodyPr>
+          <a:lstStyle/>
+          <a:p>
+            <a:pPr algn="l"/>
+            <a:r>
+              <a:rPr sz="1300" b="1">
                 <a:solidFill>
                   <a:srgbClr val="0F172A"/>
                 </a:solidFill>
                 <a:latin typeface="Open Sans"/>
               </a:rPr>
-              <a:t>No finder license</a:t>
+              <a:t>Permission outreach</a:t>
             </a:r>
           </a:p>
         </p:txBody>
@@ -17017,8 +18559,8 @@
         </p:nvSpPr>
         <p:spPr>
           <a:xfrm>
-            <a:off x="5029200" y="3017520"/>
-            <a:ext cx="2743200" cy="731520"/>
+            <a:off x="3154680" y="3099816"/>
+            <a:ext cx="8229600" cy="365760"/>
           </a:xfrm>
           <a:prstGeom prst="rect">
             <a:avLst/>
@@ -17039,7 +18581,7 @@
                 </a:solidFill>
                 <a:latin typeface="Open Sans"/>
               </a:rPr>
-              <a:t>We don't take a fee on claims, so the 30-state finder regime doesn't apply.</a:t>
+              <a:t>Texas data request · NY SFTP request · FL partnership conversations</a:t>
             </a:r>
           </a:p>
         </p:txBody>
@@ -17052,8 +18594,8 @@
         </p:nvSpPr>
         <p:spPr>
           <a:xfrm>
-            <a:off x="8046720" y="2377440"/>
-            <a:ext cx="3657600" cy="1417320"/>
+            <a:off x="457200" y="3593592"/>
+            <a:ext cx="11247120" cy="585216"/>
           </a:xfrm>
           <a:prstGeom prst="roundRect">
             <a:avLst>
@@ -17100,14 +18642,14 @@
         </p:nvSpPr>
         <p:spPr>
           <a:xfrm>
-            <a:off x="8046720" y="2377440"/>
-            <a:ext cx="146304" cy="1417320"/>
+            <a:off x="457200" y="3593592"/>
+            <a:ext cx="164592" cy="585216"/>
           </a:xfrm>
           <a:prstGeom prst="rect">
             <a:avLst/>
           </a:prstGeom>
           <a:solidFill>
-            <a:srgbClr val="059669"/>
+            <a:srgbClr val="FFB352"/>
           </a:solidFill>
           <a:ln>
             <a:noFill/>
@@ -17144,29 +18686,29 @@
         </p:nvSpPr>
         <p:spPr>
           <a:xfrm>
-            <a:off x="8321040" y="2542032"/>
-            <a:ext cx="457200" cy="457200"/>
-          </a:xfrm>
-          <a:prstGeom prst="rect">
-            <a:avLst/>
-          </a:prstGeom>
-          <a:noFill/>
-        </p:spPr>
-        <p:txBody>
-          <a:bodyPr wrap="square" anchor="t" lIns="0" rIns="0" tIns="0" bIns="0">
-            <a:spAutoFit/>
-          </a:bodyPr>
-          <a:lstStyle/>
-          <a:p>
-            <a:pPr algn="l"/>
-            <a:r>
-              <a:rPr sz="2400" b="1">
-                <a:solidFill>
-                  <a:srgbClr val="059669"/>
-                </a:solidFill>
-                <a:latin typeface="Open Sans"/>
-              </a:rPr>
-              <a:t>✓</a:t>
+            <a:off x="777240" y="3666744"/>
+            <a:ext cx="1554480" cy="274320"/>
+          </a:xfrm>
+          <a:prstGeom prst="rect">
+            <a:avLst/>
+          </a:prstGeom>
+          <a:noFill/>
+        </p:spPr>
+        <p:txBody>
+          <a:bodyPr wrap="square" anchor="t" lIns="0" rIns="0" tIns="0" bIns="0">
+            <a:spAutoFit/>
+          </a:bodyPr>
+          <a:lstStyle/>
+          <a:p>
+            <a:pPr algn="l"/>
+            <a:r>
+              <a:rPr sz="1100" b="1">
+                <a:solidFill>
+                  <a:srgbClr val="FFB352"/>
+                </a:solidFill>
+                <a:latin typeface="Open Sans"/>
+              </a:rPr>
+              <a:t>Sprint 3</a:t>
             </a:r>
           </a:p>
         </p:txBody>
@@ -17179,29 +18721,29 @@
         </p:nvSpPr>
         <p:spPr>
           <a:xfrm>
-            <a:off x="8823960" y="2578608"/>
-            <a:ext cx="2743200" cy="411480"/>
-          </a:xfrm>
-          <a:prstGeom prst="rect">
-            <a:avLst/>
-          </a:prstGeom>
-          <a:noFill/>
-        </p:spPr>
-        <p:txBody>
-          <a:bodyPr wrap="square" anchor="t" lIns="0" rIns="0" tIns="0" bIns="0">
-            <a:spAutoFit/>
-          </a:bodyPr>
-          <a:lstStyle/>
-          <a:p>
-            <a:pPr algn="l"/>
-            <a:r>
-              <a:rPr sz="1400" b="1">
+            <a:off x="777240" y="3886200"/>
+            <a:ext cx="2286000" cy="292608"/>
+          </a:xfrm>
+          <a:prstGeom prst="rect">
+            <a:avLst/>
+          </a:prstGeom>
+          <a:noFill/>
+        </p:spPr>
+        <p:txBody>
+          <a:bodyPr wrap="square" anchor="t" lIns="0" rIns="0" tIns="0" bIns="0">
+            <a:spAutoFit/>
+          </a:bodyPr>
+          <a:lstStyle/>
+          <a:p>
+            <a:pPr algn="l"/>
+            <a:r>
+              <a:rPr sz="1300" b="1">
                 <a:solidFill>
                   <a:srgbClr val="0F172A"/>
                 </a:solidFill>
                 <a:latin typeface="Open Sans"/>
               </a:rPr>
-              <a:t>No new PII surface</a:t>
+              <a:t>Texas + New York live</a:t>
             </a:r>
           </a:p>
         </p:txBody>
@@ -17214,8 +18756,8 @@
         </p:nvSpPr>
         <p:spPr>
           <a:xfrm>
-            <a:off x="8823960" y="3017520"/>
-            <a:ext cx="2743200" cy="731520"/>
+            <a:off x="3154680" y="3776472"/>
+            <a:ext cx="8229600" cy="365760"/>
           </a:xfrm>
           <a:prstGeom prst="rect">
             <a:avLst/>
@@ -17236,7 +18778,7 @@
                 </a:solidFill>
                 <a:latin typeface="Open Sans"/>
               </a:rPr>
-              <a:t>Reuses identity records members already consented to.</a:t>
+              <a:t>NY SFTP ingest (quarterly) · TX file ingest if approved</a:t>
             </a:r>
           </a:p>
         </p:txBody>
@@ -17249,8 +18791,8 @@
         </p:nvSpPr>
         <p:spPr>
           <a:xfrm>
-            <a:off x="457200" y="3977639"/>
-            <a:ext cx="3657600" cy="1417320"/>
+            <a:off x="457200" y="4270248"/>
+            <a:ext cx="11247120" cy="585216"/>
           </a:xfrm>
           <a:prstGeom prst="roundRect">
             <a:avLst>
@@ -17297,8 +18839,8 @@
         </p:nvSpPr>
         <p:spPr>
           <a:xfrm>
-            <a:off x="457200" y="3977639"/>
-            <a:ext cx="146304" cy="1417320"/>
+            <a:off x="457200" y="4270248"/>
+            <a:ext cx="164592" cy="585216"/>
           </a:xfrm>
           <a:prstGeom prst="rect">
             <a:avLst/>
@@ -17341,29 +18883,29 @@
         </p:nvSpPr>
         <p:spPr>
           <a:xfrm>
-            <a:off x="731520" y="4142231"/>
-            <a:ext cx="457200" cy="457200"/>
-          </a:xfrm>
-          <a:prstGeom prst="rect">
-            <a:avLst/>
-          </a:prstGeom>
-          <a:noFill/>
-        </p:spPr>
-        <p:txBody>
-          <a:bodyPr wrap="square" anchor="t" lIns="0" rIns="0" tIns="0" bIns="0">
-            <a:spAutoFit/>
-          </a:bodyPr>
-          <a:lstStyle/>
-          <a:p>
-            <a:pPr algn="l"/>
-            <a:r>
-              <a:rPr sz="2400" b="1">
+            <a:off x="777240" y="4343400"/>
+            <a:ext cx="1554480" cy="274320"/>
+          </a:xfrm>
+          <a:prstGeom prst="rect">
+            <a:avLst/>
+          </a:prstGeom>
+          <a:noFill/>
+        </p:spPr>
+        <p:txBody>
+          <a:bodyPr wrap="square" anchor="t" lIns="0" rIns="0" tIns="0" bIns="0">
+            <a:spAutoFit/>
+          </a:bodyPr>
+          <a:lstStyle/>
+          <a:p>
+            <a:pPr algn="l"/>
+            <a:r>
+              <a:rPr sz="1100" b="1">
                 <a:solidFill>
                   <a:srgbClr val="FFB352"/>
                 </a:solidFill>
                 <a:latin typeface="Open Sans"/>
               </a:rPr>
-              <a:t>✓</a:t>
+              <a:t>Sprint 4</a:t>
             </a:r>
           </a:p>
         </p:txBody>
@@ -17376,29 +18918,29 @@
         </p:nvSpPr>
         <p:spPr>
           <a:xfrm>
-            <a:off x="1234440" y="4178807"/>
-            <a:ext cx="2743200" cy="411480"/>
-          </a:xfrm>
-          <a:prstGeom prst="rect">
-            <a:avLst/>
-          </a:prstGeom>
-          <a:noFill/>
-        </p:spPr>
-        <p:txBody>
-          <a:bodyPr wrap="square" anchor="t" lIns="0" rIns="0" tIns="0" bIns="0">
-            <a:spAutoFit/>
-          </a:bodyPr>
-          <a:lstStyle/>
-          <a:p>
-            <a:pPr algn="l"/>
-            <a:r>
-              <a:rPr sz="1400" b="1">
+            <a:off x="777240" y="4562856"/>
+            <a:ext cx="2286000" cy="292608"/>
+          </a:xfrm>
+          <a:prstGeom prst="rect">
+            <a:avLst/>
+          </a:prstGeom>
+          <a:noFill/>
+        </p:spPr>
+        <p:txBody>
+          <a:bodyPr wrap="square" anchor="t" lIns="0" rIns="0" tIns="0" bIns="0">
+            <a:spAutoFit/>
+          </a:bodyPr>
+          <a:lstStyle/>
+          <a:p>
+            <a:pPr algn="l"/>
+            <a:r>
+              <a:rPr sz="1300" b="1">
                 <a:solidFill>
                   <a:srgbClr val="0F172A"/>
                 </a:solidFill>
                 <a:latin typeface="Open Sans"/>
               </a:rPr>
-              <a:t>State data ToS</a:t>
+              <a:t>Georgia path</a:t>
             </a:r>
           </a:p>
         </p:txBody>
@@ -17411,8 +18953,8 @@
         </p:nvSpPr>
         <p:spPr>
           <a:xfrm>
-            <a:off x="1234440" y="4617720"/>
-            <a:ext cx="2743200" cy="731520"/>
+            <a:off x="3154680" y="4453128"/>
+            <a:ext cx="8229600" cy="365760"/>
           </a:xfrm>
           <a:prstGeom prst="rect">
             <a:avLst/>
@@ -17433,7 +18975,7 @@
                 </a:solidFill>
                 <a:latin typeface="Open Sans"/>
               </a:rPr>
-              <a:t>Restricted states are gated behind registration or skipped entirely.</a:t>
+              <a:t>CDR registration · background checks · legal approval · ingest</a:t>
             </a:r>
           </a:p>
         </p:txBody>
@@ -17446,8 +18988,8 @@
         </p:nvSpPr>
         <p:spPr>
           <a:xfrm>
-            <a:off x="4251960" y="3977639"/>
-            <a:ext cx="3657600" cy="1417320"/>
+            <a:off x="457200" y="4946904"/>
+            <a:ext cx="11247120" cy="585216"/>
           </a:xfrm>
           <a:prstGeom prst="roundRect">
             <a:avLst>
@@ -17494,14 +19036,14 @@
         </p:nvSpPr>
         <p:spPr>
           <a:xfrm>
-            <a:off x="4251960" y="3977639"/>
-            <a:ext cx="146304" cy="1417320"/>
+            <a:off x="457200" y="4946904"/>
+            <a:ext cx="164592" cy="585216"/>
           </a:xfrm>
           <a:prstGeom prst="rect">
             <a:avLst/>
           </a:prstGeom>
           <a:solidFill>
-            <a:srgbClr val="059669"/>
+            <a:srgbClr val="E11D48"/>
           </a:solidFill>
           <a:ln>
             <a:noFill/>
@@ -17538,29 +19080,29 @@
         </p:nvSpPr>
         <p:spPr>
           <a:xfrm>
-            <a:off x="4526280" y="4142231"/>
-            <a:ext cx="457200" cy="457200"/>
-          </a:xfrm>
-          <a:prstGeom prst="rect">
-            <a:avLst/>
-          </a:prstGeom>
-          <a:noFill/>
-        </p:spPr>
-        <p:txBody>
-          <a:bodyPr wrap="square" anchor="t" lIns="0" rIns="0" tIns="0" bIns="0">
-            <a:spAutoFit/>
-          </a:bodyPr>
-          <a:lstStyle/>
-          <a:p>
-            <a:pPr algn="l"/>
-            <a:r>
-              <a:rPr sz="2400" b="1">
-                <a:solidFill>
-                  <a:srgbClr val="059669"/>
-                </a:solidFill>
-                <a:latin typeface="Open Sans"/>
-              </a:rPr>
-              <a:t>✓</a:t>
+            <a:off x="777240" y="5020056"/>
+            <a:ext cx="1554480" cy="274320"/>
+          </a:xfrm>
+          <a:prstGeom prst="rect">
+            <a:avLst/>
+          </a:prstGeom>
+          <a:noFill/>
+        </p:spPr>
+        <p:txBody>
+          <a:bodyPr wrap="square" anchor="t" lIns="0" rIns="0" tIns="0" bIns="0">
+            <a:spAutoFit/>
+          </a:bodyPr>
+          <a:lstStyle/>
+          <a:p>
+            <a:pPr algn="l"/>
+            <a:r>
+              <a:rPr sz="1100" b="1">
+                <a:solidFill>
+                  <a:srgbClr val="E11D48"/>
+                </a:solidFill>
+                <a:latin typeface="Open Sans"/>
+              </a:rPr>
+              <a:t>Sprint 5</a:t>
             </a:r>
           </a:p>
         </p:txBody>
@@ -17573,29 +19115,29 @@
         </p:nvSpPr>
         <p:spPr>
           <a:xfrm>
-            <a:off x="5029200" y="4178807"/>
-            <a:ext cx="2743200" cy="411480"/>
-          </a:xfrm>
-          <a:prstGeom prst="rect">
-            <a:avLst/>
-          </a:prstGeom>
-          <a:noFill/>
-        </p:spPr>
-        <p:txBody>
-          <a:bodyPr wrap="square" anchor="t" lIns="0" rIns="0" tIns="0" bIns="0">
-            <a:spAutoFit/>
-          </a:bodyPr>
-          <a:lstStyle/>
-          <a:p>
-            <a:pPr algn="l"/>
-            <a:r>
-              <a:rPr sz="1400" b="1">
+            <a:off x="777240" y="5239512"/>
+            <a:ext cx="2286000" cy="292608"/>
+          </a:xfrm>
+          <a:prstGeom prst="rect">
+            <a:avLst/>
+          </a:prstGeom>
+          <a:noFill/>
+        </p:spPr>
+        <p:txBody>
+          <a:bodyPr wrap="square" anchor="t" lIns="0" rIns="0" tIns="0" bIns="0">
+            <a:spAutoFit/>
+          </a:bodyPr>
+          <a:lstStyle/>
+          <a:p>
+            <a:pPr algn="l"/>
+            <a:r>
+              <a:rPr sz="1300" b="1">
                 <a:solidFill>
                   <a:srgbClr val="0F172A"/>
                 </a:solidFill>
                 <a:latin typeface="Open Sans"/>
               </a:rPr>
-              <a:t>State files claims</a:t>
+              <a:t>Florida path</a:t>
             </a:r>
           </a:p>
         </p:txBody>
@@ -17608,8 +19150,8 @@
         </p:nvSpPr>
         <p:spPr>
           <a:xfrm>
-            <a:off x="5029200" y="4617720"/>
-            <a:ext cx="2743200" cy="731520"/>
+            <a:off x="3154680" y="5129784"/>
+            <a:ext cx="8229600" cy="365760"/>
           </a:xfrm>
           <a:prstGeom prst="rect">
             <a:avLst/>
@@ -17630,7 +19172,7 @@
                 </a:solidFill>
                 <a:latin typeface="Open Sans"/>
               </a:rPr>
-              <a:t>Member is deep-linked to the state portal. We never hold claim funds.</a:t>
+              <a:t>Partnership with registered claimant rep, OR written permission</a:t>
             </a:r>
           </a:p>
         </p:txBody>
@@ -17643,8 +19185,8 @@
         </p:nvSpPr>
         <p:spPr>
           <a:xfrm>
-            <a:off x="8046720" y="3977639"/>
-            <a:ext cx="3657600" cy="1417320"/>
+            <a:off x="457200" y="5623560"/>
+            <a:ext cx="11247120" cy="585216"/>
           </a:xfrm>
           <a:prstGeom prst="roundRect">
             <a:avLst>
@@ -17691,14 +19233,14 @@
         </p:nvSpPr>
         <p:spPr>
           <a:xfrm>
-            <a:off x="8046720" y="3977639"/>
-            <a:ext cx="146304" cy="1417320"/>
+            <a:off x="457200" y="5623560"/>
+            <a:ext cx="164592" cy="585216"/>
           </a:xfrm>
           <a:prstGeom prst="rect">
             <a:avLst/>
           </a:prstGeom>
           <a:solidFill>
-            <a:srgbClr val="2863C5"/>
+            <a:srgbClr val="64748B"/>
           </a:solidFill>
           <a:ln>
             <a:noFill/>
@@ -17735,29 +19277,29 @@
         </p:nvSpPr>
         <p:spPr>
           <a:xfrm>
-            <a:off x="8321040" y="4142231"/>
-            <a:ext cx="457200" cy="457200"/>
-          </a:xfrm>
-          <a:prstGeom prst="rect">
-            <a:avLst/>
-          </a:prstGeom>
-          <a:noFill/>
-        </p:spPr>
-        <p:txBody>
-          <a:bodyPr wrap="square" anchor="t" lIns="0" rIns="0" tIns="0" bIns="0">
-            <a:spAutoFit/>
-          </a:bodyPr>
-          <a:lstStyle/>
-          <a:p>
-            <a:pPr algn="l"/>
-            <a:r>
-              <a:rPr sz="2400" b="1">
-                <a:solidFill>
-                  <a:srgbClr val="2863C5"/>
-                </a:solidFill>
-                <a:latin typeface="Open Sans"/>
-              </a:rPr>
-              <a:t>✓</a:t>
+            <a:off x="777240" y="5696712"/>
+            <a:ext cx="1554480" cy="274320"/>
+          </a:xfrm>
+          <a:prstGeom prst="rect">
+            <a:avLst/>
+          </a:prstGeom>
+          <a:noFill/>
+        </p:spPr>
+        <p:txBody>
+          <a:bodyPr wrap="square" anchor="t" lIns="0" rIns="0" tIns="0" bIns="0">
+            <a:spAutoFit/>
+          </a:bodyPr>
+          <a:lstStyle/>
+          <a:p>
+            <a:pPr algn="l"/>
+            <a:r>
+              <a:rPr sz="1100" b="1">
+                <a:solidFill>
+                  <a:srgbClr val="64748B"/>
+                </a:solidFill>
+                <a:latin typeface="Open Sans"/>
+              </a:rPr>
+              <a:t>Ongoing</a:t>
             </a:r>
           </a:p>
         </p:txBody>
@@ -17770,29 +19312,29 @@
         </p:nvSpPr>
         <p:spPr>
           <a:xfrm>
-            <a:off x="8823960" y="4178807"/>
-            <a:ext cx="2743200" cy="411480"/>
-          </a:xfrm>
-          <a:prstGeom prst="rect">
-            <a:avLst/>
-          </a:prstGeom>
-          <a:noFill/>
-        </p:spPr>
-        <p:txBody>
-          <a:bodyPr wrap="square" anchor="t" lIns="0" rIns="0" tIns="0" bIns="0">
-            <a:spAutoFit/>
-          </a:bodyPr>
-          <a:lstStyle/>
-          <a:p>
-            <a:pPr algn="l"/>
-            <a:r>
-              <a:rPr sz="1400" b="1">
+            <a:off x="777240" y="5916168"/>
+            <a:ext cx="2286000" cy="292608"/>
+          </a:xfrm>
+          <a:prstGeom prst="rect">
+            <a:avLst/>
+          </a:prstGeom>
+          <a:noFill/>
+        </p:spPr>
+        <p:txBody>
+          <a:bodyPr wrap="square" anchor="t" lIns="0" rIns="0" tIns="0" bIns="0">
+            <a:spAutoFit/>
+          </a:bodyPr>
+          <a:lstStyle/>
+          <a:p>
+            <a:pPr algn="l"/>
+            <a:r>
+              <a:rPr sz="1300" b="1">
                 <a:solidFill>
                   <a:srgbClr val="0F172A"/>
                 </a:solidFill>
                 <a:latin typeface="Open Sans"/>
               </a:rPr>
-              <a:t>Legal sign-off</a:t>
+              <a:t>Search-only handoff</a:t>
             </a:r>
           </a:p>
         </p:txBody>
@@ -17805,8 +19347,8 @@
         </p:nvSpPr>
         <p:spPr>
           <a:xfrm>
-            <a:off x="8823960" y="4617720"/>
-            <a:ext cx="2743200" cy="731520"/>
+            <a:off x="3154680" y="5806440"/>
+            <a:ext cx="8229600" cy="365760"/>
           </a:xfrm>
           <a:prstGeom prst="rect">
             <a:avLst/>
@@ -17827,7 +19369,7 @@
                 </a:solidFill>
                 <a:latin typeface="Open Sans"/>
               </a:rPr>
-              <a:t>Every state ingestion has a legal review gate before going live.</a:t>
+              <a:t>IL · PA · NJ · SC · AL · LA · VA · AZ · MD · TN · MS · NC</a:t>
             </a:r>
           </a:p>
         </p:txBody>

--- a/myReclaim-Exec-Deck.pptx
+++ b/myReclaim-Exec-Deck.pptx
@@ -3286,7 +3286,7 @@
         <p:spPr>
           <a:xfrm>
             <a:off x="914400" y="457200"/>
-            <a:ext cx="2743200" cy="411480"/>
+            <a:ext cx="3657600" cy="411480"/>
           </a:xfrm>
           <a:prstGeom prst="rect">
             <a:avLst/>
@@ -3315,41 +3315,6 @@
       <p:sp>
         <p:nvSpPr>
           <p:cNvPr id="7" name="TextBox 6"/>
-          <p:cNvSpPr txBox="1"/>
-          <p:nvPr/>
-        </p:nvSpPr>
-        <p:spPr>
-          <a:xfrm>
-            <a:off x="2606040" y="502920"/>
-            <a:ext cx="914400" cy="365760"/>
-          </a:xfrm>
-          <a:prstGeom prst="rect">
-            <a:avLst/>
-          </a:prstGeom>
-          <a:noFill/>
-        </p:spPr>
-        <p:txBody>
-          <a:bodyPr wrap="square" anchor="t" lIns="0" rIns="0" tIns="0" bIns="0">
-            <a:spAutoFit/>
-          </a:bodyPr>
-          <a:lstStyle/>
-          <a:p>
-            <a:pPr algn="l"/>
-            <a:r>
-              <a:rPr sz="1400" b="1">
-                <a:solidFill>
-                  <a:srgbClr val="2863C5"/>
-                </a:solidFill>
-                <a:latin typeface="Open Sans"/>
-              </a:rPr>
-              <a:t>BETA</a:t>
-            </a:r>
-          </a:p>
-        </p:txBody>
-      </p:sp>
-      <p:sp>
-        <p:nvSpPr>
-          <p:cNvPr id="8" name="TextBox 7"/>
           <p:cNvSpPr txBox="1"/>
           <p:nvPr/>
         </p:nvSpPr>
@@ -3384,7 +3349,7 @@
       </p:sp>
       <p:sp>
         <p:nvSpPr>
-          <p:cNvPr id="9" name="TextBox 8"/>
+          <p:cNvPr id="8" name="TextBox 7"/>
           <p:cNvSpPr txBox="1"/>
           <p:nvPr/>
         </p:nvSpPr>
@@ -3419,7 +3384,7 @@
       </p:sp>
       <p:sp>
         <p:nvSpPr>
-          <p:cNvPr id="10" name="TextBox 9"/>
+          <p:cNvPr id="9" name="TextBox 8"/>
           <p:cNvSpPr txBox="1"/>
           <p:nvPr/>
         </p:nvSpPr>
@@ -3455,7 +3420,7 @@
       </p:sp>
       <p:sp>
         <p:nvSpPr>
-          <p:cNvPr id="11" name="Rectangle 10"/>
+          <p:cNvPr id="10" name="Rectangle 9"/>
           <p:cNvSpPr/>
           <p:nvPr/>
         </p:nvSpPr>
@@ -3499,7 +3464,7 @@
       </p:sp>
       <p:sp>
         <p:nvSpPr>
-          <p:cNvPr id="12" name="TextBox 11"/>
+          <p:cNvPr id="11" name="TextBox 10"/>
           <p:cNvSpPr txBox="1"/>
           <p:nvPr/>
         </p:nvSpPr>
@@ -3647,7 +3612,7 @@
         <p:spPr>
           <a:xfrm>
             <a:off x="457200" y="164592"/>
-            <a:ext cx="1828800" cy="329184"/>
+            <a:ext cx="2286000" cy="329184"/>
           </a:xfrm>
           <a:prstGeom prst="rect">
             <a:avLst/>
@@ -3676,41 +3641,6 @@
       <p:sp>
         <p:nvSpPr>
           <p:cNvPr id="5" name="TextBox 4"/>
-          <p:cNvSpPr txBox="1"/>
-          <p:nvPr/>
-        </p:nvSpPr>
-        <p:spPr>
-          <a:xfrm>
-            <a:off x="1691640" y="201168"/>
-            <a:ext cx="822960" cy="274320"/>
-          </a:xfrm>
-          <a:prstGeom prst="rect">
-            <a:avLst/>
-          </a:prstGeom>
-          <a:noFill/>
-        </p:spPr>
-        <p:txBody>
-          <a:bodyPr wrap="square" anchor="t" lIns="0" rIns="0" tIns="0" bIns="0">
-            <a:spAutoFit/>
-          </a:bodyPr>
-          <a:lstStyle/>
-          <a:p>
-            <a:pPr algn="l"/>
-            <a:r>
-              <a:rPr sz="1100" b="1">
-                <a:solidFill>
-                  <a:srgbClr val="2863C5"/>
-                </a:solidFill>
-                <a:latin typeface="Open Sans"/>
-              </a:rPr>
-              <a:t>BETA</a:t>
-            </a:r>
-          </a:p>
-        </p:txBody>
-      </p:sp>
-      <p:sp>
-        <p:nvSpPr>
-          <p:cNvPr id="6" name="TextBox 5"/>
           <p:cNvSpPr txBox="1"/>
           <p:nvPr/>
         </p:nvSpPr>
@@ -3745,7 +3675,7 @@
       </p:sp>
       <p:sp>
         <p:nvSpPr>
-          <p:cNvPr id="7" name="TextBox 6"/>
+          <p:cNvPr id="6" name="TextBox 5"/>
           <p:cNvSpPr txBox="1"/>
           <p:nvPr/>
         </p:nvSpPr>
@@ -3780,7 +3710,7 @@
       </p:sp>
       <p:sp>
         <p:nvSpPr>
-          <p:cNvPr id="8" name="TextBox 7"/>
+          <p:cNvPr id="7" name="TextBox 6"/>
           <p:cNvSpPr txBox="1"/>
           <p:nvPr/>
         </p:nvSpPr>
@@ -3815,7 +3745,7 @@
       </p:sp>
       <p:sp>
         <p:nvSpPr>
-          <p:cNvPr id="9" name="TextBox 8"/>
+          <p:cNvPr id="8" name="TextBox 7"/>
           <p:cNvSpPr txBox="1"/>
           <p:nvPr/>
         </p:nvSpPr>
@@ -3850,7 +3780,7 @@
       </p:sp>
       <p:sp>
         <p:nvSpPr>
-          <p:cNvPr id="10" name="Rounded Rectangle 9"/>
+          <p:cNvPr id="9" name="Rounded Rectangle 8"/>
           <p:cNvSpPr/>
           <p:nvPr/>
         </p:nvSpPr>
@@ -3898,7 +3828,7 @@
       </p:sp>
       <p:sp>
         <p:nvSpPr>
-          <p:cNvPr id="11" name="Rectangle 10"/>
+          <p:cNvPr id="10" name="Rectangle 9"/>
           <p:cNvSpPr/>
           <p:nvPr/>
         </p:nvSpPr>
@@ -3942,7 +3872,7 @@
       </p:sp>
       <p:sp>
         <p:nvSpPr>
-          <p:cNvPr id="12" name="TextBox 11"/>
+          <p:cNvPr id="11" name="TextBox 10"/>
           <p:cNvSpPr txBox="1"/>
           <p:nvPr/>
         </p:nvSpPr>
@@ -3977,7 +3907,7 @@
       </p:sp>
       <p:sp>
         <p:nvSpPr>
-          <p:cNvPr id="13" name="TextBox 12"/>
+          <p:cNvPr id="12" name="TextBox 11"/>
           <p:cNvSpPr txBox="1"/>
           <p:nvPr/>
         </p:nvSpPr>
@@ -4012,7 +3942,7 @@
       </p:sp>
       <p:sp>
         <p:nvSpPr>
-          <p:cNvPr id="14" name="TextBox 13"/>
+          <p:cNvPr id="13" name="TextBox 12"/>
           <p:cNvSpPr txBox="1"/>
           <p:nvPr/>
         </p:nvSpPr>
@@ -4047,7 +3977,7 @@
       </p:sp>
       <p:sp>
         <p:nvSpPr>
-          <p:cNvPr id="15" name="Rounded Rectangle 14"/>
+          <p:cNvPr id="14" name="Rounded Rectangle 13"/>
           <p:cNvSpPr/>
           <p:nvPr/>
         </p:nvSpPr>
@@ -4095,7 +4025,7 @@
       </p:sp>
       <p:sp>
         <p:nvSpPr>
-          <p:cNvPr id="16" name="Rectangle 15"/>
+          <p:cNvPr id="15" name="Rectangle 14"/>
           <p:cNvSpPr/>
           <p:nvPr/>
         </p:nvSpPr>
@@ -4139,7 +4069,7 @@
       </p:sp>
       <p:sp>
         <p:nvSpPr>
-          <p:cNvPr id="17" name="TextBox 16"/>
+          <p:cNvPr id="16" name="TextBox 15"/>
           <p:cNvSpPr txBox="1"/>
           <p:nvPr/>
         </p:nvSpPr>
@@ -4174,7 +4104,7 @@
       </p:sp>
       <p:sp>
         <p:nvSpPr>
-          <p:cNvPr id="18" name="TextBox 17"/>
+          <p:cNvPr id="17" name="TextBox 16"/>
           <p:cNvSpPr txBox="1"/>
           <p:nvPr/>
         </p:nvSpPr>
@@ -4209,7 +4139,7 @@
       </p:sp>
       <p:sp>
         <p:nvSpPr>
-          <p:cNvPr id="19" name="TextBox 18"/>
+          <p:cNvPr id="18" name="TextBox 17"/>
           <p:cNvSpPr txBox="1"/>
           <p:nvPr/>
         </p:nvSpPr>
@@ -4244,7 +4174,7 @@
       </p:sp>
       <p:sp>
         <p:nvSpPr>
-          <p:cNvPr id="20" name="Rounded Rectangle 19"/>
+          <p:cNvPr id="19" name="Rounded Rectangle 18"/>
           <p:cNvSpPr/>
           <p:nvPr/>
         </p:nvSpPr>
@@ -4292,7 +4222,7 @@
       </p:sp>
       <p:sp>
         <p:nvSpPr>
-          <p:cNvPr id="21" name="Rectangle 20"/>
+          <p:cNvPr id="20" name="Rectangle 19"/>
           <p:cNvSpPr/>
           <p:nvPr/>
         </p:nvSpPr>
@@ -4336,7 +4266,7 @@
       </p:sp>
       <p:sp>
         <p:nvSpPr>
-          <p:cNvPr id="22" name="TextBox 21"/>
+          <p:cNvPr id="21" name="TextBox 20"/>
           <p:cNvSpPr txBox="1"/>
           <p:nvPr/>
         </p:nvSpPr>
@@ -4371,7 +4301,7 @@
       </p:sp>
       <p:sp>
         <p:nvSpPr>
-          <p:cNvPr id="23" name="TextBox 22"/>
+          <p:cNvPr id="22" name="TextBox 21"/>
           <p:cNvSpPr txBox="1"/>
           <p:nvPr/>
         </p:nvSpPr>
@@ -4406,7 +4336,7 @@
       </p:sp>
       <p:sp>
         <p:nvSpPr>
-          <p:cNvPr id="24" name="TextBox 23"/>
+          <p:cNvPr id="23" name="TextBox 22"/>
           <p:cNvSpPr txBox="1"/>
           <p:nvPr/>
         </p:nvSpPr>
@@ -4441,7 +4371,7 @@
       </p:sp>
       <p:sp>
         <p:nvSpPr>
-          <p:cNvPr id="25" name="Rounded Rectangle 24"/>
+          <p:cNvPr id="24" name="Rounded Rectangle 23"/>
           <p:cNvSpPr/>
           <p:nvPr/>
         </p:nvSpPr>
@@ -4489,7 +4419,7 @@
       </p:sp>
       <p:sp>
         <p:nvSpPr>
-          <p:cNvPr id="26" name="Rectangle 25"/>
+          <p:cNvPr id="25" name="Rectangle 24"/>
           <p:cNvSpPr/>
           <p:nvPr/>
         </p:nvSpPr>
@@ -4533,7 +4463,7 @@
       </p:sp>
       <p:sp>
         <p:nvSpPr>
-          <p:cNvPr id="27" name="TextBox 26"/>
+          <p:cNvPr id="26" name="TextBox 25"/>
           <p:cNvSpPr txBox="1"/>
           <p:nvPr/>
         </p:nvSpPr>
@@ -4568,7 +4498,7 @@
       </p:sp>
       <p:sp>
         <p:nvSpPr>
-          <p:cNvPr id="28" name="TextBox 27"/>
+          <p:cNvPr id="27" name="TextBox 26"/>
           <p:cNvSpPr txBox="1"/>
           <p:nvPr/>
         </p:nvSpPr>
@@ -4603,7 +4533,7 @@
       </p:sp>
       <p:sp>
         <p:nvSpPr>
-          <p:cNvPr id="29" name="TextBox 28"/>
+          <p:cNvPr id="28" name="TextBox 27"/>
           <p:cNvSpPr txBox="1"/>
           <p:nvPr/>
         </p:nvSpPr>
@@ -4638,7 +4568,7 @@
       </p:sp>
       <p:sp>
         <p:nvSpPr>
-          <p:cNvPr id="30" name="Rounded Rectangle 29"/>
+          <p:cNvPr id="29" name="Rounded Rectangle 28"/>
           <p:cNvSpPr/>
           <p:nvPr/>
         </p:nvSpPr>
@@ -4686,7 +4616,7 @@
       </p:sp>
       <p:sp>
         <p:nvSpPr>
-          <p:cNvPr id="31" name="Rectangle 30"/>
+          <p:cNvPr id="30" name="Rectangle 29"/>
           <p:cNvSpPr/>
           <p:nvPr/>
         </p:nvSpPr>
@@ -4730,7 +4660,7 @@
       </p:sp>
       <p:sp>
         <p:nvSpPr>
-          <p:cNvPr id="32" name="TextBox 31"/>
+          <p:cNvPr id="31" name="TextBox 30"/>
           <p:cNvSpPr txBox="1"/>
           <p:nvPr/>
         </p:nvSpPr>
@@ -4765,7 +4695,7 @@
       </p:sp>
       <p:sp>
         <p:nvSpPr>
-          <p:cNvPr id="33" name="TextBox 32"/>
+          <p:cNvPr id="32" name="TextBox 31"/>
           <p:cNvSpPr txBox="1"/>
           <p:nvPr/>
         </p:nvSpPr>
@@ -4800,7 +4730,7 @@
       </p:sp>
       <p:sp>
         <p:nvSpPr>
-          <p:cNvPr id="34" name="TextBox 33"/>
+          <p:cNvPr id="33" name="TextBox 32"/>
           <p:cNvSpPr txBox="1"/>
           <p:nvPr/>
         </p:nvSpPr>
@@ -4835,7 +4765,7 @@
       </p:sp>
       <p:sp>
         <p:nvSpPr>
-          <p:cNvPr id="35" name="Rounded Rectangle 34"/>
+          <p:cNvPr id="34" name="Rounded Rectangle 33"/>
           <p:cNvSpPr/>
           <p:nvPr/>
         </p:nvSpPr>
@@ -4883,7 +4813,7 @@
       </p:sp>
       <p:sp>
         <p:nvSpPr>
-          <p:cNvPr id="36" name="Rectangle 35"/>
+          <p:cNvPr id="35" name="Rectangle 34"/>
           <p:cNvSpPr/>
           <p:nvPr/>
         </p:nvSpPr>
@@ -4927,7 +4857,7 @@
       </p:sp>
       <p:sp>
         <p:nvSpPr>
-          <p:cNvPr id="37" name="TextBox 36"/>
+          <p:cNvPr id="36" name="TextBox 35"/>
           <p:cNvSpPr txBox="1"/>
           <p:nvPr/>
         </p:nvSpPr>
@@ -4962,7 +4892,7 @@
       </p:sp>
       <p:sp>
         <p:nvSpPr>
-          <p:cNvPr id="38" name="TextBox 37"/>
+          <p:cNvPr id="37" name="TextBox 36"/>
           <p:cNvSpPr txBox="1"/>
           <p:nvPr/>
         </p:nvSpPr>
@@ -4997,7 +4927,7 @@
       </p:sp>
       <p:sp>
         <p:nvSpPr>
-          <p:cNvPr id="39" name="TextBox 38"/>
+          <p:cNvPr id="38" name="TextBox 37"/>
           <p:cNvSpPr txBox="1"/>
           <p:nvPr/>
         </p:nvSpPr>
@@ -5145,7 +5075,7 @@
         <p:spPr>
           <a:xfrm>
             <a:off x="457200" y="164592"/>
-            <a:ext cx="1828800" cy="329184"/>
+            <a:ext cx="2286000" cy="329184"/>
           </a:xfrm>
           <a:prstGeom prst="rect">
             <a:avLst/>
@@ -5174,41 +5104,6 @@
       <p:sp>
         <p:nvSpPr>
           <p:cNvPr id="5" name="TextBox 4"/>
-          <p:cNvSpPr txBox="1"/>
-          <p:nvPr/>
-        </p:nvSpPr>
-        <p:spPr>
-          <a:xfrm>
-            <a:off x="1691640" y="201168"/>
-            <a:ext cx="822960" cy="274320"/>
-          </a:xfrm>
-          <a:prstGeom prst="rect">
-            <a:avLst/>
-          </a:prstGeom>
-          <a:noFill/>
-        </p:spPr>
-        <p:txBody>
-          <a:bodyPr wrap="square" anchor="t" lIns="0" rIns="0" tIns="0" bIns="0">
-            <a:spAutoFit/>
-          </a:bodyPr>
-          <a:lstStyle/>
-          <a:p>
-            <a:pPr algn="l"/>
-            <a:r>
-              <a:rPr sz="1100" b="1">
-                <a:solidFill>
-                  <a:srgbClr val="2863C5"/>
-                </a:solidFill>
-                <a:latin typeface="Open Sans"/>
-              </a:rPr>
-              <a:t>BETA</a:t>
-            </a:r>
-          </a:p>
-        </p:txBody>
-      </p:sp>
-      <p:sp>
-        <p:nvSpPr>
-          <p:cNvPr id="6" name="TextBox 5"/>
           <p:cNvSpPr txBox="1"/>
           <p:nvPr/>
         </p:nvSpPr>
@@ -5243,7 +5138,7 @@
       </p:sp>
       <p:sp>
         <p:nvSpPr>
-          <p:cNvPr id="7" name="TextBox 6"/>
+          <p:cNvPr id="6" name="TextBox 5"/>
           <p:cNvSpPr txBox="1"/>
           <p:nvPr/>
         </p:nvSpPr>
@@ -5278,7 +5173,7 @@
       </p:sp>
       <p:sp>
         <p:nvSpPr>
-          <p:cNvPr id="8" name="TextBox 7"/>
+          <p:cNvPr id="7" name="TextBox 6"/>
           <p:cNvSpPr txBox="1"/>
           <p:nvPr/>
         </p:nvSpPr>
@@ -5313,7 +5208,7 @@
       </p:sp>
       <p:sp>
         <p:nvSpPr>
-          <p:cNvPr id="9" name="TextBox 8"/>
+          <p:cNvPr id="8" name="TextBox 7"/>
           <p:cNvSpPr txBox="1"/>
           <p:nvPr/>
         </p:nvSpPr>
@@ -5348,7 +5243,7 @@
       </p:sp>
       <p:sp>
         <p:nvSpPr>
-          <p:cNvPr id="10" name="Rounded Rectangle 9"/>
+          <p:cNvPr id="9" name="Rounded Rectangle 8"/>
           <p:cNvSpPr/>
           <p:nvPr/>
         </p:nvSpPr>
@@ -5396,7 +5291,7 @@
       </p:sp>
       <p:sp>
         <p:nvSpPr>
-          <p:cNvPr id="11" name="Rectangle 10"/>
+          <p:cNvPr id="10" name="Rectangle 9"/>
           <p:cNvSpPr/>
           <p:nvPr/>
         </p:nvSpPr>
@@ -5440,7 +5335,7 @@
       </p:sp>
       <p:sp>
         <p:nvSpPr>
-          <p:cNvPr id="12" name="TextBox 11"/>
+          <p:cNvPr id="11" name="TextBox 10"/>
           <p:cNvSpPr txBox="1"/>
           <p:nvPr/>
         </p:nvSpPr>
@@ -5475,7 +5370,7 @@
       </p:sp>
       <p:sp>
         <p:nvSpPr>
-          <p:cNvPr id="13" name="TextBox 12"/>
+          <p:cNvPr id="12" name="TextBox 11"/>
           <p:cNvSpPr txBox="1"/>
           <p:nvPr/>
         </p:nvSpPr>
@@ -5510,7 +5405,7 @@
       </p:sp>
       <p:sp>
         <p:nvSpPr>
-          <p:cNvPr id="14" name="TextBox 13"/>
+          <p:cNvPr id="13" name="TextBox 12"/>
           <p:cNvSpPr txBox="1"/>
           <p:nvPr/>
         </p:nvSpPr>
@@ -5545,7 +5440,7 @@
       </p:sp>
       <p:sp>
         <p:nvSpPr>
-          <p:cNvPr id="15" name="Rounded Rectangle 14"/>
+          <p:cNvPr id="14" name="Rounded Rectangle 13"/>
           <p:cNvSpPr/>
           <p:nvPr/>
         </p:nvSpPr>
@@ -5593,7 +5488,7 @@
       </p:sp>
       <p:sp>
         <p:nvSpPr>
-          <p:cNvPr id="16" name="Rectangle 15"/>
+          <p:cNvPr id="15" name="Rectangle 14"/>
           <p:cNvSpPr/>
           <p:nvPr/>
         </p:nvSpPr>
@@ -5637,7 +5532,7 @@
       </p:sp>
       <p:sp>
         <p:nvSpPr>
-          <p:cNvPr id="17" name="TextBox 16"/>
+          <p:cNvPr id="16" name="TextBox 15"/>
           <p:cNvSpPr txBox="1"/>
           <p:nvPr/>
         </p:nvSpPr>
@@ -5672,7 +5567,7 @@
       </p:sp>
       <p:sp>
         <p:nvSpPr>
-          <p:cNvPr id="18" name="TextBox 17"/>
+          <p:cNvPr id="17" name="TextBox 16"/>
           <p:cNvSpPr txBox="1"/>
           <p:nvPr/>
         </p:nvSpPr>
@@ -5707,7 +5602,7 @@
       </p:sp>
       <p:sp>
         <p:nvSpPr>
-          <p:cNvPr id="19" name="TextBox 18"/>
+          <p:cNvPr id="18" name="TextBox 17"/>
           <p:cNvSpPr txBox="1"/>
           <p:nvPr/>
         </p:nvSpPr>
@@ -5742,7 +5637,7 @@
       </p:sp>
       <p:sp>
         <p:nvSpPr>
-          <p:cNvPr id="20" name="Rounded Rectangle 19"/>
+          <p:cNvPr id="19" name="Rounded Rectangle 18"/>
           <p:cNvSpPr/>
           <p:nvPr/>
         </p:nvSpPr>
@@ -5790,7 +5685,7 @@
       </p:sp>
       <p:sp>
         <p:nvSpPr>
-          <p:cNvPr id="21" name="Rectangle 20"/>
+          <p:cNvPr id="20" name="Rectangle 19"/>
           <p:cNvSpPr/>
           <p:nvPr/>
         </p:nvSpPr>
@@ -5834,7 +5729,7 @@
       </p:sp>
       <p:sp>
         <p:nvSpPr>
-          <p:cNvPr id="22" name="TextBox 21"/>
+          <p:cNvPr id="21" name="TextBox 20"/>
           <p:cNvSpPr txBox="1"/>
           <p:nvPr/>
         </p:nvSpPr>
@@ -5869,7 +5764,7 @@
       </p:sp>
       <p:sp>
         <p:nvSpPr>
-          <p:cNvPr id="23" name="TextBox 22"/>
+          <p:cNvPr id="22" name="TextBox 21"/>
           <p:cNvSpPr txBox="1"/>
           <p:nvPr/>
         </p:nvSpPr>
@@ -5904,7 +5799,7 @@
       </p:sp>
       <p:sp>
         <p:nvSpPr>
-          <p:cNvPr id="24" name="TextBox 23"/>
+          <p:cNvPr id="23" name="TextBox 22"/>
           <p:cNvSpPr txBox="1"/>
           <p:nvPr/>
         </p:nvSpPr>
@@ -5939,7 +5834,7 @@
       </p:sp>
       <p:sp>
         <p:nvSpPr>
-          <p:cNvPr id="25" name="Rounded Rectangle 24"/>
+          <p:cNvPr id="24" name="Rounded Rectangle 23"/>
           <p:cNvSpPr/>
           <p:nvPr/>
         </p:nvSpPr>
@@ -5987,7 +5882,7 @@
       </p:sp>
       <p:sp>
         <p:nvSpPr>
-          <p:cNvPr id="26" name="Rectangle 25"/>
+          <p:cNvPr id="25" name="Rectangle 24"/>
           <p:cNvSpPr/>
           <p:nvPr/>
         </p:nvSpPr>
@@ -6031,7 +5926,7 @@
       </p:sp>
       <p:sp>
         <p:nvSpPr>
-          <p:cNvPr id="27" name="TextBox 26"/>
+          <p:cNvPr id="26" name="TextBox 25"/>
           <p:cNvSpPr txBox="1"/>
           <p:nvPr/>
         </p:nvSpPr>
@@ -6066,7 +5961,7 @@
       </p:sp>
       <p:sp>
         <p:nvSpPr>
-          <p:cNvPr id="28" name="TextBox 27"/>
+          <p:cNvPr id="27" name="TextBox 26"/>
           <p:cNvSpPr txBox="1"/>
           <p:nvPr/>
         </p:nvSpPr>
@@ -6101,7 +5996,7 @@
       </p:sp>
       <p:sp>
         <p:nvSpPr>
-          <p:cNvPr id="29" name="TextBox 28"/>
+          <p:cNvPr id="28" name="TextBox 27"/>
           <p:cNvSpPr txBox="1"/>
           <p:nvPr/>
         </p:nvSpPr>
@@ -6136,7 +6031,7 @@
       </p:sp>
       <p:sp>
         <p:nvSpPr>
-          <p:cNvPr id="30" name="Rounded Rectangle 29"/>
+          <p:cNvPr id="29" name="Rounded Rectangle 28"/>
           <p:cNvSpPr/>
           <p:nvPr/>
         </p:nvSpPr>
@@ -6184,7 +6079,7 @@
       </p:sp>
       <p:sp>
         <p:nvSpPr>
-          <p:cNvPr id="31" name="Rectangle 30"/>
+          <p:cNvPr id="30" name="Rectangle 29"/>
           <p:cNvSpPr/>
           <p:nvPr/>
         </p:nvSpPr>
@@ -6228,7 +6123,7 @@
       </p:sp>
       <p:sp>
         <p:nvSpPr>
-          <p:cNvPr id="32" name="TextBox 31"/>
+          <p:cNvPr id="31" name="TextBox 30"/>
           <p:cNvSpPr txBox="1"/>
           <p:nvPr/>
         </p:nvSpPr>
@@ -6263,7 +6158,7 @@
       </p:sp>
       <p:sp>
         <p:nvSpPr>
-          <p:cNvPr id="33" name="TextBox 32"/>
+          <p:cNvPr id="32" name="TextBox 31"/>
           <p:cNvSpPr txBox="1"/>
           <p:nvPr/>
         </p:nvSpPr>
@@ -6298,7 +6193,7 @@
       </p:sp>
       <p:sp>
         <p:nvSpPr>
-          <p:cNvPr id="34" name="TextBox 33"/>
+          <p:cNvPr id="33" name="TextBox 32"/>
           <p:cNvSpPr txBox="1"/>
           <p:nvPr/>
         </p:nvSpPr>
@@ -6333,7 +6228,7 @@
       </p:sp>
       <p:sp>
         <p:nvSpPr>
-          <p:cNvPr id="35" name="Rounded Rectangle 34"/>
+          <p:cNvPr id="34" name="Rounded Rectangle 33"/>
           <p:cNvSpPr/>
           <p:nvPr/>
         </p:nvSpPr>
@@ -6381,7 +6276,7 @@
       </p:sp>
       <p:sp>
         <p:nvSpPr>
-          <p:cNvPr id="36" name="Rectangle 35"/>
+          <p:cNvPr id="35" name="Rectangle 34"/>
           <p:cNvSpPr/>
           <p:nvPr/>
         </p:nvSpPr>
@@ -6425,7 +6320,7 @@
       </p:sp>
       <p:sp>
         <p:nvSpPr>
-          <p:cNvPr id="37" name="TextBox 36"/>
+          <p:cNvPr id="36" name="TextBox 35"/>
           <p:cNvSpPr txBox="1"/>
           <p:nvPr/>
         </p:nvSpPr>
@@ -6460,7 +6355,7 @@
       </p:sp>
       <p:sp>
         <p:nvSpPr>
-          <p:cNvPr id="38" name="TextBox 37"/>
+          <p:cNvPr id="37" name="TextBox 36"/>
           <p:cNvSpPr txBox="1"/>
           <p:nvPr/>
         </p:nvSpPr>
@@ -6495,7 +6390,7 @@
       </p:sp>
       <p:sp>
         <p:nvSpPr>
-          <p:cNvPr id="39" name="TextBox 38"/>
+          <p:cNvPr id="38" name="TextBox 37"/>
           <p:cNvSpPr txBox="1"/>
           <p:nvPr/>
         </p:nvSpPr>
@@ -6643,7 +6538,7 @@
         <p:spPr>
           <a:xfrm>
             <a:off x="457200" y="164592"/>
-            <a:ext cx="1828800" cy="329184"/>
+            <a:ext cx="2286000" cy="329184"/>
           </a:xfrm>
           <a:prstGeom prst="rect">
             <a:avLst/>
@@ -6672,41 +6567,6 @@
       <p:sp>
         <p:nvSpPr>
           <p:cNvPr id="5" name="TextBox 4"/>
-          <p:cNvSpPr txBox="1"/>
-          <p:nvPr/>
-        </p:nvSpPr>
-        <p:spPr>
-          <a:xfrm>
-            <a:off x="1691640" y="201168"/>
-            <a:ext cx="822960" cy="274320"/>
-          </a:xfrm>
-          <a:prstGeom prst="rect">
-            <a:avLst/>
-          </a:prstGeom>
-          <a:noFill/>
-        </p:spPr>
-        <p:txBody>
-          <a:bodyPr wrap="square" anchor="t" lIns="0" rIns="0" tIns="0" bIns="0">
-            <a:spAutoFit/>
-          </a:bodyPr>
-          <a:lstStyle/>
-          <a:p>
-            <a:pPr algn="l"/>
-            <a:r>
-              <a:rPr sz="1100" b="1">
-                <a:solidFill>
-                  <a:srgbClr val="2863C5"/>
-                </a:solidFill>
-                <a:latin typeface="Open Sans"/>
-              </a:rPr>
-              <a:t>BETA</a:t>
-            </a:r>
-          </a:p>
-        </p:txBody>
-      </p:sp>
-      <p:sp>
-        <p:nvSpPr>
-          <p:cNvPr id="6" name="TextBox 5"/>
           <p:cNvSpPr txBox="1"/>
           <p:nvPr/>
         </p:nvSpPr>
@@ -6741,7 +6601,7 @@
       </p:sp>
       <p:sp>
         <p:nvSpPr>
-          <p:cNvPr id="7" name="TextBox 6"/>
+          <p:cNvPr id="6" name="TextBox 5"/>
           <p:cNvSpPr txBox="1"/>
           <p:nvPr/>
         </p:nvSpPr>
@@ -6776,7 +6636,7 @@
       </p:sp>
       <p:sp>
         <p:nvSpPr>
-          <p:cNvPr id="8" name="TextBox 7"/>
+          <p:cNvPr id="7" name="TextBox 6"/>
           <p:cNvSpPr txBox="1"/>
           <p:nvPr/>
         </p:nvSpPr>
@@ -6811,7 +6671,7 @@
       </p:sp>
       <p:sp>
         <p:nvSpPr>
-          <p:cNvPr id="9" name="TextBox 8"/>
+          <p:cNvPr id="8" name="TextBox 7"/>
           <p:cNvSpPr txBox="1"/>
           <p:nvPr/>
         </p:nvSpPr>
@@ -6846,7 +6706,7 @@
       </p:sp>
       <p:sp>
         <p:nvSpPr>
-          <p:cNvPr id="10" name="Rounded Rectangle 9"/>
+          <p:cNvPr id="9" name="Rounded Rectangle 8"/>
           <p:cNvSpPr/>
           <p:nvPr/>
         </p:nvSpPr>
@@ -6894,7 +6754,7 @@
       </p:sp>
       <p:sp>
         <p:nvSpPr>
-          <p:cNvPr id="11" name="Rectangle 10"/>
+          <p:cNvPr id="10" name="Rectangle 9"/>
           <p:cNvSpPr/>
           <p:nvPr/>
         </p:nvSpPr>
@@ -6938,7 +6798,7 @@
       </p:sp>
       <p:sp>
         <p:nvSpPr>
-          <p:cNvPr id="12" name="TextBox 11"/>
+          <p:cNvPr id="11" name="TextBox 10"/>
           <p:cNvSpPr txBox="1"/>
           <p:nvPr/>
         </p:nvSpPr>
@@ -6973,7 +6833,7 @@
       </p:sp>
       <p:sp>
         <p:nvSpPr>
-          <p:cNvPr id="13" name="TextBox 12"/>
+          <p:cNvPr id="12" name="TextBox 11"/>
           <p:cNvSpPr txBox="1"/>
           <p:nvPr/>
         </p:nvSpPr>
@@ -7008,7 +6868,7 @@
       </p:sp>
       <p:sp>
         <p:nvSpPr>
-          <p:cNvPr id="14" name="Rounded Rectangle 13"/>
+          <p:cNvPr id="13" name="Rounded Rectangle 12"/>
           <p:cNvSpPr/>
           <p:nvPr/>
         </p:nvSpPr>
@@ -7056,7 +6916,7 @@
       </p:sp>
       <p:sp>
         <p:nvSpPr>
-          <p:cNvPr id="15" name="Rectangle 14"/>
+          <p:cNvPr id="14" name="Rectangle 13"/>
           <p:cNvSpPr/>
           <p:nvPr/>
         </p:nvSpPr>
@@ -7100,7 +6960,7 @@
       </p:sp>
       <p:sp>
         <p:nvSpPr>
-          <p:cNvPr id="16" name="TextBox 15"/>
+          <p:cNvPr id="15" name="TextBox 14"/>
           <p:cNvSpPr txBox="1"/>
           <p:nvPr/>
         </p:nvSpPr>
@@ -7135,7 +6995,7 @@
       </p:sp>
       <p:sp>
         <p:nvSpPr>
-          <p:cNvPr id="17" name="TextBox 16"/>
+          <p:cNvPr id="16" name="TextBox 15"/>
           <p:cNvSpPr txBox="1"/>
           <p:nvPr/>
         </p:nvSpPr>
@@ -7170,7 +7030,7 @@
       </p:sp>
       <p:sp>
         <p:nvSpPr>
-          <p:cNvPr id="18" name="Rounded Rectangle 17"/>
+          <p:cNvPr id="17" name="Rounded Rectangle 16"/>
           <p:cNvSpPr/>
           <p:nvPr/>
         </p:nvSpPr>
@@ -7218,7 +7078,7 @@
       </p:sp>
       <p:sp>
         <p:nvSpPr>
-          <p:cNvPr id="19" name="Rectangle 18"/>
+          <p:cNvPr id="18" name="Rectangle 17"/>
           <p:cNvSpPr/>
           <p:nvPr/>
         </p:nvSpPr>
@@ -7262,7 +7122,7 @@
       </p:sp>
       <p:sp>
         <p:nvSpPr>
-          <p:cNvPr id="20" name="TextBox 19"/>
+          <p:cNvPr id="19" name="TextBox 18"/>
           <p:cNvSpPr txBox="1"/>
           <p:nvPr/>
         </p:nvSpPr>
@@ -7297,7 +7157,7 @@
       </p:sp>
       <p:sp>
         <p:nvSpPr>
-          <p:cNvPr id="21" name="TextBox 20"/>
+          <p:cNvPr id="20" name="TextBox 19"/>
           <p:cNvSpPr txBox="1"/>
           <p:nvPr/>
         </p:nvSpPr>
@@ -7332,7 +7192,7 @@
       </p:sp>
       <p:sp>
         <p:nvSpPr>
-          <p:cNvPr id="22" name="Rounded Rectangle 21"/>
+          <p:cNvPr id="21" name="Rounded Rectangle 20"/>
           <p:cNvSpPr/>
           <p:nvPr/>
         </p:nvSpPr>
@@ -7380,7 +7240,7 @@
       </p:sp>
       <p:sp>
         <p:nvSpPr>
-          <p:cNvPr id="23" name="Rectangle 22"/>
+          <p:cNvPr id="22" name="Rectangle 21"/>
           <p:cNvSpPr/>
           <p:nvPr/>
         </p:nvSpPr>
@@ -7424,7 +7284,7 @@
       </p:sp>
       <p:sp>
         <p:nvSpPr>
-          <p:cNvPr id="24" name="TextBox 23"/>
+          <p:cNvPr id="23" name="TextBox 22"/>
           <p:cNvSpPr txBox="1"/>
           <p:nvPr/>
         </p:nvSpPr>
@@ -7459,7 +7319,7 @@
       </p:sp>
       <p:sp>
         <p:nvSpPr>
-          <p:cNvPr id="25" name="TextBox 24"/>
+          <p:cNvPr id="24" name="TextBox 23"/>
           <p:cNvSpPr txBox="1"/>
           <p:nvPr/>
         </p:nvSpPr>
@@ -7494,7 +7354,7 @@
       </p:sp>
       <p:sp>
         <p:nvSpPr>
-          <p:cNvPr id="26" name="TextBox 25"/>
+          <p:cNvPr id="25" name="TextBox 24"/>
           <p:cNvSpPr txBox="1"/>
           <p:nvPr/>
         </p:nvSpPr>
@@ -7529,7 +7389,7 @@
       </p:sp>
       <p:sp>
         <p:nvSpPr>
-          <p:cNvPr id="27" name="TextBox 26"/>
+          <p:cNvPr id="26" name="TextBox 25"/>
           <p:cNvSpPr txBox="1"/>
           <p:nvPr/>
         </p:nvSpPr>
@@ -7557,14 +7417,14 @@
                 </a:solidFill>
                 <a:latin typeface="Open Sans"/>
               </a:rPr>
-              <a:t>✓  Web app — SmartCredit-themed search UI with the new BETA visual language</a:t>
-            </a:r>
-          </a:p>
-        </p:txBody>
-      </p:sp>
-      <p:sp>
-        <p:nvSpPr>
-          <p:cNvPr id="28" name="TextBox 27"/>
+              <a:t>✓  Web app — SmartCredit-themed search UI matching the production visual language</a:t>
+            </a:r>
+          </a:p>
+        </p:txBody>
+      </p:sp>
+      <p:sp>
+        <p:nvSpPr>
+          <p:cNvPr id="27" name="TextBox 26"/>
           <p:cNvSpPr txBox="1"/>
           <p:nvPr/>
         </p:nvSpPr>
@@ -7599,7 +7459,7 @@
       </p:sp>
       <p:sp>
         <p:nvSpPr>
-          <p:cNvPr id="29" name="TextBox 28"/>
+          <p:cNvPr id="28" name="TextBox 27"/>
           <p:cNvSpPr txBox="1"/>
           <p:nvPr/>
         </p:nvSpPr>
@@ -7634,7 +7494,7 @@
       </p:sp>
       <p:sp>
         <p:nvSpPr>
-          <p:cNvPr id="30" name="TextBox 29"/>
+          <p:cNvPr id="29" name="TextBox 28"/>
           <p:cNvSpPr txBox="1"/>
           <p:nvPr/>
         </p:nvSpPr>
@@ -7669,7 +7529,7 @@
       </p:sp>
       <p:sp>
         <p:nvSpPr>
-          <p:cNvPr id="31" name="Rounded Rectangle 30"/>
+          <p:cNvPr id="30" name="Rounded Rectangle 29"/>
           <p:cNvSpPr/>
           <p:nvPr/>
         </p:nvSpPr>
@@ -7715,7 +7575,7 @@
       </p:sp>
       <p:sp>
         <p:nvSpPr>
-          <p:cNvPr id="32" name="TextBox 31"/>
+          <p:cNvPr id="31" name="TextBox 30"/>
           <p:cNvSpPr txBox="1"/>
           <p:nvPr/>
         </p:nvSpPr>
@@ -7863,7 +7723,7 @@
         <p:spPr>
           <a:xfrm>
             <a:off x="457200" y="164592"/>
-            <a:ext cx="1828800" cy="329184"/>
+            <a:ext cx="2286000" cy="329184"/>
           </a:xfrm>
           <a:prstGeom prst="rect">
             <a:avLst/>
@@ -7892,41 +7752,6 @@
       <p:sp>
         <p:nvSpPr>
           <p:cNvPr id="5" name="TextBox 4"/>
-          <p:cNvSpPr txBox="1"/>
-          <p:nvPr/>
-        </p:nvSpPr>
-        <p:spPr>
-          <a:xfrm>
-            <a:off x="1691640" y="201168"/>
-            <a:ext cx="822960" cy="274320"/>
-          </a:xfrm>
-          <a:prstGeom prst="rect">
-            <a:avLst/>
-          </a:prstGeom>
-          <a:noFill/>
-        </p:spPr>
-        <p:txBody>
-          <a:bodyPr wrap="square" anchor="t" lIns="0" rIns="0" tIns="0" bIns="0">
-            <a:spAutoFit/>
-          </a:bodyPr>
-          <a:lstStyle/>
-          <a:p>
-            <a:pPr algn="l"/>
-            <a:r>
-              <a:rPr sz="1100" b="1">
-                <a:solidFill>
-                  <a:srgbClr val="2863C5"/>
-                </a:solidFill>
-                <a:latin typeface="Open Sans"/>
-              </a:rPr>
-              <a:t>BETA</a:t>
-            </a:r>
-          </a:p>
-        </p:txBody>
-      </p:sp>
-      <p:sp>
-        <p:nvSpPr>
-          <p:cNvPr id="6" name="TextBox 5"/>
           <p:cNvSpPr txBox="1"/>
           <p:nvPr/>
         </p:nvSpPr>
@@ -7961,7 +7786,7 @@
       </p:sp>
       <p:sp>
         <p:nvSpPr>
-          <p:cNvPr id="7" name="TextBox 6"/>
+          <p:cNvPr id="6" name="TextBox 5"/>
           <p:cNvSpPr txBox="1"/>
           <p:nvPr/>
         </p:nvSpPr>
@@ -7996,7 +7821,7 @@
       </p:sp>
       <p:sp>
         <p:nvSpPr>
-          <p:cNvPr id="8" name="TextBox 7"/>
+          <p:cNvPr id="7" name="TextBox 6"/>
           <p:cNvSpPr txBox="1"/>
           <p:nvPr/>
         </p:nvSpPr>
@@ -8031,7 +7856,7 @@
       </p:sp>
       <p:sp>
         <p:nvSpPr>
-          <p:cNvPr id="9" name="TextBox 8"/>
+          <p:cNvPr id="8" name="TextBox 7"/>
           <p:cNvSpPr txBox="1"/>
           <p:nvPr/>
         </p:nvSpPr>
@@ -8066,7 +7891,7 @@
       </p:sp>
       <p:sp>
         <p:nvSpPr>
-          <p:cNvPr id="10" name="Rounded Rectangle 9"/>
+          <p:cNvPr id="9" name="Rounded Rectangle 8"/>
           <p:cNvSpPr/>
           <p:nvPr/>
         </p:nvSpPr>
@@ -8112,7 +7937,7 @@
       </p:sp>
       <p:sp>
         <p:nvSpPr>
-          <p:cNvPr id="11" name="TextBox 10"/>
+          <p:cNvPr id="10" name="TextBox 9"/>
           <p:cNvSpPr txBox="1"/>
           <p:nvPr/>
         </p:nvSpPr>
@@ -8147,7 +7972,7 @@
       </p:sp>
       <p:sp>
         <p:nvSpPr>
-          <p:cNvPr id="12" name="TextBox 11"/>
+          <p:cNvPr id="11" name="TextBox 10"/>
           <p:cNvSpPr txBox="1"/>
           <p:nvPr/>
         </p:nvSpPr>
@@ -8182,7 +8007,7 @@
       </p:sp>
       <p:sp>
         <p:nvSpPr>
-          <p:cNvPr id="13" name="TextBox 12"/>
+          <p:cNvPr id="12" name="TextBox 11"/>
           <p:cNvSpPr txBox="1"/>
           <p:nvPr/>
         </p:nvSpPr>
@@ -8217,7 +8042,7 @@
       </p:sp>
       <p:sp>
         <p:nvSpPr>
-          <p:cNvPr id="14" name="TextBox 13"/>
+          <p:cNvPr id="13" name="TextBox 12"/>
           <p:cNvSpPr txBox="1"/>
           <p:nvPr/>
         </p:nvSpPr>
@@ -8252,7 +8077,7 @@
       </p:sp>
       <p:sp>
         <p:nvSpPr>
-          <p:cNvPr id="15" name="TextBox 14"/>
+          <p:cNvPr id="14" name="TextBox 13"/>
           <p:cNvSpPr txBox="1"/>
           <p:nvPr/>
         </p:nvSpPr>
@@ -8287,7 +8112,7 @@
       </p:sp>
       <p:sp>
         <p:nvSpPr>
-          <p:cNvPr id="16" name="TextBox 15"/>
+          <p:cNvPr id="15" name="TextBox 14"/>
           <p:cNvSpPr txBox="1"/>
           <p:nvPr/>
         </p:nvSpPr>
@@ -8322,7 +8147,7 @@
       </p:sp>
       <p:sp>
         <p:nvSpPr>
-          <p:cNvPr id="17" name="TextBox 16"/>
+          <p:cNvPr id="16" name="TextBox 15"/>
           <p:cNvSpPr txBox="1"/>
           <p:nvPr/>
         </p:nvSpPr>
@@ -8357,7 +8182,7 @@
       </p:sp>
       <p:sp>
         <p:nvSpPr>
-          <p:cNvPr id="18" name="Rounded Rectangle 17"/>
+          <p:cNvPr id="17" name="Rounded Rectangle 16"/>
           <p:cNvSpPr/>
           <p:nvPr/>
         </p:nvSpPr>
@@ -8405,7 +8230,7 @@
       </p:sp>
       <p:sp>
         <p:nvSpPr>
-          <p:cNvPr id="19" name="Rectangle 18"/>
+          <p:cNvPr id="18" name="Rectangle 17"/>
           <p:cNvSpPr/>
           <p:nvPr/>
         </p:nvSpPr>
@@ -8449,7 +8274,7 @@
       </p:sp>
       <p:sp>
         <p:nvSpPr>
-          <p:cNvPr id="20" name="TextBox 19"/>
+          <p:cNvPr id="19" name="TextBox 18"/>
           <p:cNvSpPr txBox="1"/>
           <p:nvPr/>
         </p:nvSpPr>
@@ -8484,7 +8309,7 @@
       </p:sp>
       <p:sp>
         <p:nvSpPr>
-          <p:cNvPr id="21" name="TextBox 20"/>
+          <p:cNvPr id="20" name="TextBox 19"/>
           <p:cNvSpPr txBox="1"/>
           <p:nvPr/>
         </p:nvSpPr>
@@ -8519,7 +8344,7 @@
       </p:sp>
       <p:sp>
         <p:nvSpPr>
-          <p:cNvPr id="22" name="Rounded Rectangle 21"/>
+          <p:cNvPr id="21" name="Rounded Rectangle 20"/>
           <p:cNvSpPr/>
           <p:nvPr/>
         </p:nvSpPr>
@@ -8567,7 +8392,7 @@
       </p:sp>
       <p:sp>
         <p:nvSpPr>
-          <p:cNvPr id="23" name="Rectangle 22"/>
+          <p:cNvPr id="22" name="Rectangle 21"/>
           <p:cNvSpPr/>
           <p:nvPr/>
         </p:nvSpPr>
@@ -8611,7 +8436,7 @@
       </p:sp>
       <p:sp>
         <p:nvSpPr>
-          <p:cNvPr id="24" name="TextBox 23"/>
+          <p:cNvPr id="23" name="TextBox 22"/>
           <p:cNvSpPr txBox="1"/>
           <p:nvPr/>
         </p:nvSpPr>
@@ -8646,7 +8471,7 @@
       </p:sp>
       <p:sp>
         <p:nvSpPr>
-          <p:cNvPr id="25" name="TextBox 24"/>
+          <p:cNvPr id="24" name="TextBox 23"/>
           <p:cNvSpPr txBox="1"/>
           <p:nvPr/>
         </p:nvSpPr>
@@ -8681,7 +8506,7 @@
       </p:sp>
       <p:sp>
         <p:nvSpPr>
-          <p:cNvPr id="26" name="Rounded Rectangle 25"/>
+          <p:cNvPr id="25" name="Rounded Rectangle 24"/>
           <p:cNvSpPr/>
           <p:nvPr/>
         </p:nvSpPr>
@@ -8729,7 +8554,7 @@
       </p:sp>
       <p:sp>
         <p:nvSpPr>
-          <p:cNvPr id="27" name="Rectangle 26"/>
+          <p:cNvPr id="26" name="Rectangle 25"/>
           <p:cNvSpPr/>
           <p:nvPr/>
         </p:nvSpPr>
@@ -8773,7 +8598,7 @@
       </p:sp>
       <p:sp>
         <p:nvSpPr>
-          <p:cNvPr id="28" name="TextBox 27"/>
+          <p:cNvPr id="27" name="TextBox 26"/>
           <p:cNvSpPr txBox="1"/>
           <p:nvPr/>
         </p:nvSpPr>
@@ -8808,7 +8633,7 @@
       </p:sp>
       <p:sp>
         <p:nvSpPr>
-          <p:cNvPr id="29" name="TextBox 28"/>
+          <p:cNvPr id="28" name="TextBox 27"/>
           <p:cNvSpPr txBox="1"/>
           <p:nvPr/>
         </p:nvSpPr>
@@ -8843,7 +8668,7 @@
       </p:sp>
       <p:sp>
         <p:nvSpPr>
-          <p:cNvPr id="30" name="Rounded Rectangle 29"/>
+          <p:cNvPr id="29" name="Rounded Rectangle 28"/>
           <p:cNvSpPr/>
           <p:nvPr/>
         </p:nvSpPr>
@@ -8891,7 +8716,7 @@
       </p:sp>
       <p:sp>
         <p:nvSpPr>
-          <p:cNvPr id="31" name="Rectangle 30"/>
+          <p:cNvPr id="30" name="Rectangle 29"/>
           <p:cNvSpPr/>
           <p:nvPr/>
         </p:nvSpPr>
@@ -8935,7 +8760,7 @@
       </p:sp>
       <p:sp>
         <p:nvSpPr>
-          <p:cNvPr id="32" name="TextBox 31"/>
+          <p:cNvPr id="31" name="TextBox 30"/>
           <p:cNvSpPr txBox="1"/>
           <p:nvPr/>
         </p:nvSpPr>
@@ -8970,7 +8795,7 @@
       </p:sp>
       <p:sp>
         <p:nvSpPr>
-          <p:cNvPr id="33" name="TextBox 32"/>
+          <p:cNvPr id="32" name="TextBox 31"/>
           <p:cNvSpPr txBox="1"/>
           <p:nvPr/>
         </p:nvSpPr>
@@ -9005,7 +8830,7 @@
       </p:sp>
       <p:sp>
         <p:nvSpPr>
-          <p:cNvPr id="34" name="Rectangle 33"/>
+          <p:cNvPr id="33" name="Rectangle 32"/>
           <p:cNvSpPr/>
           <p:nvPr/>
         </p:nvSpPr>
@@ -9408,7 +9233,7 @@
         <p:spPr>
           <a:xfrm>
             <a:off x="457200" y="164592"/>
-            <a:ext cx="1828800" cy="329184"/>
+            <a:ext cx="2286000" cy="329184"/>
           </a:xfrm>
           <a:prstGeom prst="rect">
             <a:avLst/>
@@ -9437,41 +9262,6 @@
       <p:sp>
         <p:nvSpPr>
           <p:cNvPr id="5" name="TextBox 4"/>
-          <p:cNvSpPr txBox="1"/>
-          <p:nvPr/>
-        </p:nvSpPr>
-        <p:spPr>
-          <a:xfrm>
-            <a:off x="1691640" y="201168"/>
-            <a:ext cx="822960" cy="274320"/>
-          </a:xfrm>
-          <a:prstGeom prst="rect">
-            <a:avLst/>
-          </a:prstGeom>
-          <a:noFill/>
-        </p:spPr>
-        <p:txBody>
-          <a:bodyPr wrap="square" anchor="t" lIns="0" rIns="0" tIns="0" bIns="0">
-            <a:spAutoFit/>
-          </a:bodyPr>
-          <a:lstStyle/>
-          <a:p>
-            <a:pPr algn="l"/>
-            <a:r>
-              <a:rPr sz="1100" b="1">
-                <a:solidFill>
-                  <a:srgbClr val="2863C5"/>
-                </a:solidFill>
-                <a:latin typeface="Open Sans"/>
-              </a:rPr>
-              <a:t>BETA</a:t>
-            </a:r>
-          </a:p>
-        </p:txBody>
-      </p:sp>
-      <p:sp>
-        <p:nvSpPr>
-          <p:cNvPr id="6" name="TextBox 5"/>
           <p:cNvSpPr txBox="1"/>
           <p:nvPr/>
         </p:nvSpPr>
@@ -9506,7 +9296,7 @@
       </p:sp>
       <p:sp>
         <p:nvSpPr>
-          <p:cNvPr id="7" name="TextBox 6"/>
+          <p:cNvPr id="6" name="TextBox 5"/>
           <p:cNvSpPr txBox="1"/>
           <p:nvPr/>
         </p:nvSpPr>
@@ -9541,7 +9331,7 @@
       </p:sp>
       <p:sp>
         <p:nvSpPr>
-          <p:cNvPr id="8" name="TextBox 7"/>
+          <p:cNvPr id="7" name="TextBox 6"/>
           <p:cNvSpPr txBox="1"/>
           <p:nvPr/>
         </p:nvSpPr>
@@ -9576,7 +9366,7 @@
       </p:sp>
       <p:sp>
         <p:nvSpPr>
-          <p:cNvPr id="9" name="TextBox 8"/>
+          <p:cNvPr id="8" name="TextBox 7"/>
           <p:cNvSpPr txBox="1"/>
           <p:nvPr/>
         </p:nvSpPr>
@@ -9611,7 +9401,7 @@
       </p:sp>
       <p:sp>
         <p:nvSpPr>
-          <p:cNvPr id="10" name="TextBox 9"/>
+          <p:cNvPr id="9" name="TextBox 8"/>
           <p:cNvSpPr txBox="1"/>
           <p:nvPr/>
         </p:nvSpPr>
@@ -9646,7 +9436,7 @@
       </p:sp>
       <p:sp>
         <p:nvSpPr>
-          <p:cNvPr id="11" name="Rounded Rectangle 10"/>
+          <p:cNvPr id="10" name="Rounded Rectangle 9"/>
           <p:cNvSpPr/>
           <p:nvPr/>
         </p:nvSpPr>
@@ -9694,7 +9484,7 @@
       </p:sp>
       <p:sp>
         <p:nvSpPr>
-          <p:cNvPr id="12" name="TextBox 11"/>
+          <p:cNvPr id="11" name="TextBox 10"/>
           <p:cNvSpPr txBox="1"/>
           <p:nvPr/>
         </p:nvSpPr>
@@ -9729,7 +9519,7 @@
       </p:sp>
       <p:sp>
         <p:nvSpPr>
-          <p:cNvPr id="13" name="TextBox 12"/>
+          <p:cNvPr id="12" name="TextBox 11"/>
           <p:cNvSpPr txBox="1"/>
           <p:nvPr/>
         </p:nvSpPr>
@@ -9764,7 +9554,7 @@
       </p:sp>
       <p:sp>
         <p:nvSpPr>
-          <p:cNvPr id="14" name="Rounded Rectangle 13"/>
+          <p:cNvPr id="13" name="Rounded Rectangle 12"/>
           <p:cNvSpPr/>
           <p:nvPr/>
         </p:nvSpPr>
@@ -9812,7 +9602,7 @@
       </p:sp>
       <p:sp>
         <p:nvSpPr>
-          <p:cNvPr id="15" name="TextBox 14"/>
+          <p:cNvPr id="14" name="TextBox 13"/>
           <p:cNvSpPr txBox="1"/>
           <p:nvPr/>
         </p:nvSpPr>
@@ -9847,7 +9637,7 @@
       </p:sp>
       <p:sp>
         <p:nvSpPr>
-          <p:cNvPr id="16" name="TextBox 15"/>
+          <p:cNvPr id="15" name="TextBox 14"/>
           <p:cNvSpPr txBox="1"/>
           <p:nvPr/>
         </p:nvSpPr>
@@ -9882,7 +9672,7 @@
       </p:sp>
       <p:sp>
         <p:nvSpPr>
-          <p:cNvPr id="17" name="Rounded Rectangle 16"/>
+          <p:cNvPr id="16" name="Rounded Rectangle 15"/>
           <p:cNvSpPr/>
           <p:nvPr/>
         </p:nvSpPr>
@@ -9930,7 +9720,7 @@
       </p:sp>
       <p:sp>
         <p:nvSpPr>
-          <p:cNvPr id="18" name="TextBox 17"/>
+          <p:cNvPr id="17" name="TextBox 16"/>
           <p:cNvSpPr txBox="1"/>
           <p:nvPr/>
         </p:nvSpPr>
@@ -9965,7 +9755,7 @@
       </p:sp>
       <p:sp>
         <p:nvSpPr>
-          <p:cNvPr id="19" name="TextBox 18"/>
+          <p:cNvPr id="18" name="TextBox 17"/>
           <p:cNvSpPr txBox="1"/>
           <p:nvPr/>
         </p:nvSpPr>
@@ -10113,7 +9903,7 @@
         <p:spPr>
           <a:xfrm>
             <a:off x="457200" y="164592"/>
-            <a:ext cx="1828800" cy="329184"/>
+            <a:ext cx="2286000" cy="329184"/>
           </a:xfrm>
           <a:prstGeom prst="rect">
             <a:avLst/>
@@ -10142,41 +9932,6 @@
       <p:sp>
         <p:nvSpPr>
           <p:cNvPr id="5" name="TextBox 4"/>
-          <p:cNvSpPr txBox="1"/>
-          <p:nvPr/>
-        </p:nvSpPr>
-        <p:spPr>
-          <a:xfrm>
-            <a:off x="1691640" y="201168"/>
-            <a:ext cx="822960" cy="274320"/>
-          </a:xfrm>
-          <a:prstGeom prst="rect">
-            <a:avLst/>
-          </a:prstGeom>
-          <a:noFill/>
-        </p:spPr>
-        <p:txBody>
-          <a:bodyPr wrap="square" anchor="t" lIns="0" rIns="0" tIns="0" bIns="0">
-            <a:spAutoFit/>
-          </a:bodyPr>
-          <a:lstStyle/>
-          <a:p>
-            <a:pPr algn="l"/>
-            <a:r>
-              <a:rPr sz="1100" b="1">
-                <a:solidFill>
-                  <a:srgbClr val="2863C5"/>
-                </a:solidFill>
-                <a:latin typeface="Open Sans"/>
-              </a:rPr>
-              <a:t>BETA</a:t>
-            </a:r>
-          </a:p>
-        </p:txBody>
-      </p:sp>
-      <p:sp>
-        <p:nvSpPr>
-          <p:cNvPr id="6" name="TextBox 5"/>
           <p:cNvSpPr txBox="1"/>
           <p:nvPr/>
         </p:nvSpPr>
@@ -10211,7 +9966,7 @@
       </p:sp>
       <p:sp>
         <p:nvSpPr>
-          <p:cNvPr id="7" name="TextBox 6"/>
+          <p:cNvPr id="6" name="TextBox 5"/>
           <p:cNvSpPr txBox="1"/>
           <p:nvPr/>
         </p:nvSpPr>
@@ -10246,7 +10001,7 @@
       </p:sp>
       <p:sp>
         <p:nvSpPr>
-          <p:cNvPr id="8" name="TextBox 7"/>
+          <p:cNvPr id="7" name="TextBox 6"/>
           <p:cNvSpPr txBox="1"/>
           <p:nvPr/>
         </p:nvSpPr>
@@ -10281,7 +10036,7 @@
       </p:sp>
       <p:sp>
         <p:nvSpPr>
-          <p:cNvPr id="9" name="TextBox 8"/>
+          <p:cNvPr id="8" name="TextBox 7"/>
           <p:cNvSpPr txBox="1"/>
           <p:nvPr/>
         </p:nvSpPr>
@@ -10317,7 +10072,7 @@
       </p:sp>
       <p:sp>
         <p:nvSpPr>
-          <p:cNvPr id="10" name="TextBox 9"/>
+          <p:cNvPr id="9" name="TextBox 8"/>
           <p:cNvSpPr txBox="1"/>
           <p:nvPr/>
         </p:nvSpPr>
@@ -10352,7 +10107,7 @@
       </p:sp>
       <p:sp>
         <p:nvSpPr>
-          <p:cNvPr id="11" name="Rounded Rectangle 10"/>
+          <p:cNvPr id="10" name="Rounded Rectangle 9"/>
           <p:cNvSpPr/>
           <p:nvPr/>
         </p:nvSpPr>
@@ -10400,7 +10155,7 @@
       </p:sp>
       <p:sp>
         <p:nvSpPr>
-          <p:cNvPr id="12" name="Rounded Rectangle 11"/>
+          <p:cNvPr id="11" name="Rounded Rectangle 10"/>
           <p:cNvSpPr/>
           <p:nvPr/>
         </p:nvSpPr>
@@ -10454,7 +10209,7 @@
       </p:sp>
       <p:sp>
         <p:nvSpPr>
-          <p:cNvPr id="13" name="TextBox 12"/>
+          <p:cNvPr id="12" name="TextBox 11"/>
           <p:cNvSpPr txBox="1"/>
           <p:nvPr/>
         </p:nvSpPr>
@@ -10489,7 +10244,7 @@
       </p:sp>
       <p:sp>
         <p:nvSpPr>
-          <p:cNvPr id="14" name="TextBox 13"/>
+          <p:cNvPr id="13" name="TextBox 12"/>
           <p:cNvSpPr txBox="1"/>
           <p:nvPr/>
         </p:nvSpPr>
@@ -10524,7 +10279,7 @@
       </p:sp>
       <p:sp>
         <p:nvSpPr>
-          <p:cNvPr id="15" name="Rounded Rectangle 14"/>
+          <p:cNvPr id="14" name="Rounded Rectangle 13"/>
           <p:cNvSpPr/>
           <p:nvPr/>
         </p:nvSpPr>
@@ -10572,7 +10327,7 @@
       </p:sp>
       <p:sp>
         <p:nvSpPr>
-          <p:cNvPr id="16" name="Rounded Rectangle 15"/>
+          <p:cNvPr id="15" name="Rounded Rectangle 14"/>
           <p:cNvSpPr/>
           <p:nvPr/>
         </p:nvSpPr>
@@ -10626,7 +10381,7 @@
       </p:sp>
       <p:sp>
         <p:nvSpPr>
-          <p:cNvPr id="17" name="TextBox 16"/>
+          <p:cNvPr id="16" name="TextBox 15"/>
           <p:cNvSpPr txBox="1"/>
           <p:nvPr/>
         </p:nvSpPr>
@@ -10661,7 +10416,7 @@
       </p:sp>
       <p:sp>
         <p:nvSpPr>
-          <p:cNvPr id="18" name="TextBox 17"/>
+          <p:cNvPr id="17" name="TextBox 16"/>
           <p:cNvSpPr txBox="1"/>
           <p:nvPr/>
         </p:nvSpPr>
@@ -10696,7 +10451,7 @@
       </p:sp>
       <p:sp>
         <p:nvSpPr>
-          <p:cNvPr id="19" name="Rounded Rectangle 18"/>
+          <p:cNvPr id="18" name="Rounded Rectangle 17"/>
           <p:cNvSpPr/>
           <p:nvPr/>
         </p:nvSpPr>
@@ -10744,7 +10499,7 @@
       </p:sp>
       <p:sp>
         <p:nvSpPr>
-          <p:cNvPr id="20" name="Rounded Rectangle 19"/>
+          <p:cNvPr id="19" name="Rounded Rectangle 18"/>
           <p:cNvSpPr/>
           <p:nvPr/>
         </p:nvSpPr>
@@ -10798,7 +10553,7 @@
       </p:sp>
       <p:sp>
         <p:nvSpPr>
-          <p:cNvPr id="21" name="TextBox 20"/>
+          <p:cNvPr id="20" name="TextBox 19"/>
           <p:cNvSpPr txBox="1"/>
           <p:nvPr/>
         </p:nvSpPr>
@@ -10833,7 +10588,7 @@
       </p:sp>
       <p:sp>
         <p:nvSpPr>
-          <p:cNvPr id="22" name="TextBox 21"/>
+          <p:cNvPr id="21" name="TextBox 20"/>
           <p:cNvSpPr txBox="1"/>
           <p:nvPr/>
         </p:nvSpPr>
@@ -10868,7 +10623,7 @@
       </p:sp>
       <p:sp>
         <p:nvSpPr>
-          <p:cNvPr id="23" name="TextBox 22"/>
+          <p:cNvPr id="22" name="TextBox 21"/>
           <p:cNvSpPr txBox="1"/>
           <p:nvPr/>
         </p:nvSpPr>
@@ -10903,7 +10658,7 @@
       </p:sp>
       <p:sp>
         <p:nvSpPr>
-          <p:cNvPr id="24" name="Rounded Rectangle 23"/>
+          <p:cNvPr id="23" name="Rounded Rectangle 22"/>
           <p:cNvSpPr/>
           <p:nvPr/>
         </p:nvSpPr>
@@ -10951,7 +10706,7 @@
       </p:sp>
       <p:sp>
         <p:nvSpPr>
-          <p:cNvPr id="25" name="TextBox 24"/>
+          <p:cNvPr id="24" name="TextBox 23"/>
           <p:cNvSpPr txBox="1"/>
           <p:nvPr/>
         </p:nvSpPr>
@@ -10986,7 +10741,7 @@
       </p:sp>
       <p:sp>
         <p:nvSpPr>
-          <p:cNvPr id="26" name="TextBox 25"/>
+          <p:cNvPr id="25" name="TextBox 24"/>
           <p:cNvSpPr txBox="1"/>
           <p:nvPr/>
         </p:nvSpPr>
@@ -11021,7 +10776,7 @@
       </p:sp>
       <p:sp>
         <p:nvSpPr>
-          <p:cNvPr id="27" name="TextBox 26"/>
+          <p:cNvPr id="26" name="TextBox 25"/>
           <p:cNvSpPr txBox="1"/>
           <p:nvPr/>
         </p:nvSpPr>
@@ -11056,7 +10811,7 @@
       </p:sp>
       <p:sp>
         <p:nvSpPr>
-          <p:cNvPr id="28" name="Rounded Rectangle 27"/>
+          <p:cNvPr id="27" name="Rounded Rectangle 26"/>
           <p:cNvSpPr/>
           <p:nvPr/>
         </p:nvSpPr>
@@ -11110,7 +10865,7 @@
       </p:sp>
       <p:sp>
         <p:nvSpPr>
-          <p:cNvPr id="29" name="TextBox 28"/>
+          <p:cNvPr id="28" name="TextBox 27"/>
           <p:cNvSpPr txBox="1"/>
           <p:nvPr/>
         </p:nvSpPr>
@@ -11145,7 +10900,7 @@
       </p:sp>
       <p:sp>
         <p:nvSpPr>
-          <p:cNvPr id="30" name="TextBox 29"/>
+          <p:cNvPr id="29" name="TextBox 28"/>
           <p:cNvSpPr txBox="1"/>
           <p:nvPr/>
         </p:nvSpPr>
@@ -11180,7 +10935,7 @@
       </p:sp>
       <p:sp>
         <p:nvSpPr>
-          <p:cNvPr id="31" name="Rounded Rectangle 30"/>
+          <p:cNvPr id="30" name="Rounded Rectangle 29"/>
           <p:cNvSpPr/>
           <p:nvPr/>
         </p:nvSpPr>
@@ -11234,7 +10989,7 @@
       </p:sp>
       <p:sp>
         <p:nvSpPr>
-          <p:cNvPr id="32" name="TextBox 31"/>
+          <p:cNvPr id="31" name="TextBox 30"/>
           <p:cNvSpPr txBox="1"/>
           <p:nvPr/>
         </p:nvSpPr>
@@ -11382,7 +11137,7 @@
         <p:spPr>
           <a:xfrm>
             <a:off x="457200" y="164592"/>
-            <a:ext cx="1828800" cy="329184"/>
+            <a:ext cx="2286000" cy="329184"/>
           </a:xfrm>
           <a:prstGeom prst="rect">
             <a:avLst/>
@@ -11411,41 +11166,6 @@
       <p:sp>
         <p:nvSpPr>
           <p:cNvPr id="5" name="TextBox 4"/>
-          <p:cNvSpPr txBox="1"/>
-          <p:nvPr/>
-        </p:nvSpPr>
-        <p:spPr>
-          <a:xfrm>
-            <a:off x="1691640" y="201168"/>
-            <a:ext cx="822960" cy="274320"/>
-          </a:xfrm>
-          <a:prstGeom prst="rect">
-            <a:avLst/>
-          </a:prstGeom>
-          <a:noFill/>
-        </p:spPr>
-        <p:txBody>
-          <a:bodyPr wrap="square" anchor="t" lIns="0" rIns="0" tIns="0" bIns="0">
-            <a:spAutoFit/>
-          </a:bodyPr>
-          <a:lstStyle/>
-          <a:p>
-            <a:pPr algn="l"/>
-            <a:r>
-              <a:rPr sz="1100" b="1">
-                <a:solidFill>
-                  <a:srgbClr val="2863C5"/>
-                </a:solidFill>
-                <a:latin typeface="Open Sans"/>
-              </a:rPr>
-              <a:t>BETA</a:t>
-            </a:r>
-          </a:p>
-        </p:txBody>
-      </p:sp>
-      <p:sp>
-        <p:nvSpPr>
-          <p:cNvPr id="6" name="TextBox 5"/>
           <p:cNvSpPr txBox="1"/>
           <p:nvPr/>
         </p:nvSpPr>
@@ -11480,7 +11200,7 @@
       </p:sp>
       <p:sp>
         <p:nvSpPr>
-          <p:cNvPr id="7" name="TextBox 6"/>
+          <p:cNvPr id="6" name="TextBox 5"/>
           <p:cNvSpPr txBox="1"/>
           <p:nvPr/>
         </p:nvSpPr>
@@ -11515,7 +11235,7 @@
       </p:sp>
       <p:sp>
         <p:nvSpPr>
-          <p:cNvPr id="8" name="TextBox 7"/>
+          <p:cNvPr id="7" name="TextBox 6"/>
           <p:cNvSpPr txBox="1"/>
           <p:nvPr/>
         </p:nvSpPr>
@@ -11550,7 +11270,7 @@
       </p:sp>
       <p:sp>
         <p:nvSpPr>
-          <p:cNvPr id="9" name="TextBox 8"/>
+          <p:cNvPr id="8" name="TextBox 7"/>
           <p:cNvSpPr txBox="1"/>
           <p:nvPr/>
         </p:nvSpPr>
@@ -11585,7 +11305,7 @@
       </p:sp>
       <p:sp>
         <p:nvSpPr>
-          <p:cNvPr id="10" name="Rounded Rectangle 9"/>
+          <p:cNvPr id="9" name="Rounded Rectangle 8"/>
           <p:cNvSpPr/>
           <p:nvPr/>
         </p:nvSpPr>
@@ -11633,7 +11353,7 @@
       </p:sp>
       <p:sp>
         <p:nvSpPr>
-          <p:cNvPr id="11" name="TextBox 10"/>
+          <p:cNvPr id="10" name="TextBox 9"/>
           <p:cNvSpPr txBox="1"/>
           <p:nvPr/>
         </p:nvSpPr>
@@ -11668,7 +11388,7 @@
       </p:sp>
       <p:sp>
         <p:nvSpPr>
-          <p:cNvPr id="12" name="TextBox 11"/>
+          <p:cNvPr id="11" name="TextBox 10"/>
           <p:cNvSpPr txBox="1"/>
           <p:nvPr/>
         </p:nvSpPr>
@@ -11703,7 +11423,7 @@
       </p:sp>
       <p:sp>
         <p:nvSpPr>
-          <p:cNvPr id="13" name="TextBox 12"/>
+          <p:cNvPr id="12" name="TextBox 11"/>
           <p:cNvSpPr txBox="1"/>
           <p:nvPr/>
         </p:nvSpPr>
@@ -11738,7 +11458,7 @@
       </p:sp>
       <p:sp>
         <p:nvSpPr>
-          <p:cNvPr id="14" name="Rounded Rectangle 13"/>
+          <p:cNvPr id="13" name="Rounded Rectangle 12"/>
           <p:cNvSpPr/>
           <p:nvPr/>
         </p:nvSpPr>
@@ -11786,7 +11506,7 @@
       </p:sp>
       <p:sp>
         <p:nvSpPr>
-          <p:cNvPr id="15" name="TextBox 14"/>
+          <p:cNvPr id="14" name="TextBox 13"/>
           <p:cNvSpPr txBox="1"/>
           <p:nvPr/>
         </p:nvSpPr>
@@ -11821,7 +11541,7 @@
       </p:sp>
       <p:sp>
         <p:nvSpPr>
-          <p:cNvPr id="16" name="TextBox 15"/>
+          <p:cNvPr id="15" name="TextBox 14"/>
           <p:cNvSpPr txBox="1"/>
           <p:nvPr/>
         </p:nvSpPr>
@@ -11856,7 +11576,7 @@
       </p:sp>
       <p:sp>
         <p:nvSpPr>
-          <p:cNvPr id="17" name="TextBox 16"/>
+          <p:cNvPr id="16" name="TextBox 15"/>
           <p:cNvSpPr txBox="1"/>
           <p:nvPr/>
         </p:nvSpPr>
@@ -11891,7 +11611,7 @@
       </p:sp>
       <p:sp>
         <p:nvSpPr>
-          <p:cNvPr id="18" name="Rounded Rectangle 17"/>
+          <p:cNvPr id="17" name="Rounded Rectangle 16"/>
           <p:cNvSpPr/>
           <p:nvPr/>
         </p:nvSpPr>
@@ -11939,7 +11659,7 @@
       </p:sp>
       <p:sp>
         <p:nvSpPr>
-          <p:cNvPr id="19" name="TextBox 18"/>
+          <p:cNvPr id="18" name="TextBox 17"/>
           <p:cNvSpPr txBox="1"/>
           <p:nvPr/>
         </p:nvSpPr>
@@ -11974,7 +11694,7 @@
       </p:sp>
       <p:sp>
         <p:nvSpPr>
-          <p:cNvPr id="20" name="TextBox 19"/>
+          <p:cNvPr id="19" name="TextBox 18"/>
           <p:cNvSpPr txBox="1"/>
           <p:nvPr/>
         </p:nvSpPr>
@@ -12009,7 +11729,7 @@
       </p:sp>
       <p:sp>
         <p:nvSpPr>
-          <p:cNvPr id="21" name="TextBox 20"/>
+          <p:cNvPr id="20" name="TextBox 19"/>
           <p:cNvSpPr txBox="1"/>
           <p:nvPr/>
         </p:nvSpPr>
@@ -12044,7 +11764,7 @@
       </p:sp>
       <p:sp>
         <p:nvSpPr>
-          <p:cNvPr id="22" name="Rectangle 21"/>
+          <p:cNvPr id="21" name="Rectangle 20"/>
           <p:cNvSpPr/>
           <p:nvPr/>
         </p:nvSpPr>
@@ -12088,7 +11808,7 @@
       </p:sp>
       <p:sp>
         <p:nvSpPr>
-          <p:cNvPr id="23" name="TextBox 22"/>
+          <p:cNvPr id="22" name="TextBox 21"/>
           <p:cNvSpPr txBox="1"/>
           <p:nvPr/>
         </p:nvSpPr>
@@ -12236,7 +11956,7 @@
         <p:spPr>
           <a:xfrm>
             <a:off x="457200" y="164592"/>
-            <a:ext cx="1828800" cy="329184"/>
+            <a:ext cx="2286000" cy="329184"/>
           </a:xfrm>
           <a:prstGeom prst="rect">
             <a:avLst/>
@@ -12265,41 +11985,6 @@
       <p:sp>
         <p:nvSpPr>
           <p:cNvPr id="5" name="TextBox 4"/>
-          <p:cNvSpPr txBox="1"/>
-          <p:nvPr/>
-        </p:nvSpPr>
-        <p:spPr>
-          <a:xfrm>
-            <a:off x="1691640" y="201168"/>
-            <a:ext cx="822960" cy="274320"/>
-          </a:xfrm>
-          <a:prstGeom prst="rect">
-            <a:avLst/>
-          </a:prstGeom>
-          <a:noFill/>
-        </p:spPr>
-        <p:txBody>
-          <a:bodyPr wrap="square" anchor="t" lIns="0" rIns="0" tIns="0" bIns="0">
-            <a:spAutoFit/>
-          </a:bodyPr>
-          <a:lstStyle/>
-          <a:p>
-            <a:pPr algn="l"/>
-            <a:r>
-              <a:rPr sz="1100" b="1">
-                <a:solidFill>
-                  <a:srgbClr val="2863C5"/>
-                </a:solidFill>
-                <a:latin typeface="Open Sans"/>
-              </a:rPr>
-              <a:t>BETA</a:t>
-            </a:r>
-          </a:p>
-        </p:txBody>
-      </p:sp>
-      <p:sp>
-        <p:nvSpPr>
-          <p:cNvPr id="6" name="TextBox 5"/>
           <p:cNvSpPr txBox="1"/>
           <p:nvPr/>
         </p:nvSpPr>
@@ -12334,7 +12019,7 @@
       </p:sp>
       <p:sp>
         <p:nvSpPr>
-          <p:cNvPr id="7" name="TextBox 6"/>
+          <p:cNvPr id="6" name="TextBox 5"/>
           <p:cNvSpPr txBox="1"/>
           <p:nvPr/>
         </p:nvSpPr>
@@ -12369,7 +12054,7 @@
       </p:sp>
       <p:sp>
         <p:nvSpPr>
-          <p:cNvPr id="8" name="TextBox 7"/>
+          <p:cNvPr id="7" name="TextBox 6"/>
           <p:cNvSpPr txBox="1"/>
           <p:nvPr/>
         </p:nvSpPr>
@@ -12404,7 +12089,7 @@
       </p:sp>
       <p:sp>
         <p:nvSpPr>
-          <p:cNvPr id="9" name="TextBox 8"/>
+          <p:cNvPr id="8" name="TextBox 7"/>
           <p:cNvSpPr txBox="1"/>
           <p:nvPr/>
         </p:nvSpPr>
@@ -12439,7 +12124,7 @@
       </p:sp>
       <p:sp>
         <p:nvSpPr>
-          <p:cNvPr id="10" name="TextBox 9"/>
+          <p:cNvPr id="9" name="TextBox 8"/>
           <p:cNvSpPr txBox="1"/>
           <p:nvPr/>
         </p:nvSpPr>
@@ -12474,7 +12159,7 @@
       </p:sp>
       <p:sp>
         <p:nvSpPr>
-          <p:cNvPr id="11" name="Rounded Rectangle 10"/>
+          <p:cNvPr id="10" name="Rounded Rectangle 9"/>
           <p:cNvSpPr/>
           <p:nvPr/>
         </p:nvSpPr>
@@ -12522,7 +12207,7 @@
       </p:sp>
       <p:sp>
         <p:nvSpPr>
-          <p:cNvPr id="12" name="Rectangle 11"/>
+          <p:cNvPr id="11" name="Rectangle 10"/>
           <p:cNvSpPr/>
           <p:nvPr/>
         </p:nvSpPr>
@@ -12566,7 +12251,7 @@
       </p:sp>
       <p:sp>
         <p:nvSpPr>
-          <p:cNvPr id="13" name="TextBox 12"/>
+          <p:cNvPr id="12" name="TextBox 11"/>
           <p:cNvSpPr txBox="1"/>
           <p:nvPr/>
         </p:nvSpPr>
@@ -12601,7 +12286,7 @@
       </p:sp>
       <p:sp>
         <p:nvSpPr>
-          <p:cNvPr id="14" name="TextBox 13"/>
+          <p:cNvPr id="13" name="TextBox 12"/>
           <p:cNvSpPr txBox="1"/>
           <p:nvPr/>
         </p:nvSpPr>
@@ -12636,7 +12321,7 @@
       </p:sp>
       <p:sp>
         <p:nvSpPr>
-          <p:cNvPr id="15" name="TextBox 14"/>
+          <p:cNvPr id="14" name="TextBox 13"/>
           <p:cNvSpPr txBox="1"/>
           <p:nvPr/>
         </p:nvSpPr>
@@ -12671,7 +12356,7 @@
       </p:sp>
       <p:sp>
         <p:nvSpPr>
-          <p:cNvPr id="16" name="TextBox 15"/>
+          <p:cNvPr id="15" name="TextBox 14"/>
           <p:cNvSpPr txBox="1"/>
           <p:nvPr/>
         </p:nvSpPr>
@@ -12706,7 +12391,7 @@
       </p:sp>
       <p:sp>
         <p:nvSpPr>
-          <p:cNvPr id="17" name="TextBox 16"/>
+          <p:cNvPr id="16" name="TextBox 15"/>
           <p:cNvSpPr txBox="1"/>
           <p:nvPr/>
         </p:nvSpPr>
@@ -12741,7 +12426,7 @@
       </p:sp>
       <p:sp>
         <p:nvSpPr>
-          <p:cNvPr id="18" name="TextBox 17"/>
+          <p:cNvPr id="17" name="TextBox 16"/>
           <p:cNvSpPr txBox="1"/>
           <p:nvPr/>
         </p:nvSpPr>
@@ -12776,7 +12461,7 @@
       </p:sp>
       <p:sp>
         <p:nvSpPr>
-          <p:cNvPr id="19" name="TextBox 18"/>
+          <p:cNvPr id="18" name="TextBox 17"/>
           <p:cNvSpPr txBox="1"/>
           <p:nvPr/>
         </p:nvSpPr>
@@ -12811,7 +12496,7 @@
       </p:sp>
       <p:sp>
         <p:nvSpPr>
-          <p:cNvPr id="20" name="TextBox 19"/>
+          <p:cNvPr id="19" name="TextBox 18"/>
           <p:cNvSpPr txBox="1"/>
           <p:nvPr/>
         </p:nvSpPr>
@@ -12846,7 +12531,7 @@
       </p:sp>
       <p:sp>
         <p:nvSpPr>
-          <p:cNvPr id="21" name="TextBox 20"/>
+          <p:cNvPr id="20" name="TextBox 19"/>
           <p:cNvSpPr txBox="1"/>
           <p:nvPr/>
         </p:nvSpPr>
@@ -12881,7 +12566,7 @@
       </p:sp>
       <p:sp>
         <p:nvSpPr>
-          <p:cNvPr id="22" name="Rounded Rectangle 21"/>
+          <p:cNvPr id="21" name="Rounded Rectangle 20"/>
           <p:cNvSpPr/>
           <p:nvPr/>
         </p:nvSpPr>
@@ -12929,7 +12614,7 @@
       </p:sp>
       <p:sp>
         <p:nvSpPr>
-          <p:cNvPr id="23" name="Rectangle 22"/>
+          <p:cNvPr id="22" name="Rectangle 21"/>
           <p:cNvSpPr/>
           <p:nvPr/>
         </p:nvSpPr>
@@ -12973,7 +12658,7 @@
       </p:sp>
       <p:sp>
         <p:nvSpPr>
-          <p:cNvPr id="24" name="TextBox 23"/>
+          <p:cNvPr id="23" name="TextBox 22"/>
           <p:cNvSpPr txBox="1"/>
           <p:nvPr/>
         </p:nvSpPr>
@@ -13008,7 +12693,7 @@
       </p:sp>
       <p:sp>
         <p:nvSpPr>
-          <p:cNvPr id="25" name="TextBox 24"/>
+          <p:cNvPr id="24" name="TextBox 23"/>
           <p:cNvSpPr txBox="1"/>
           <p:nvPr/>
         </p:nvSpPr>
@@ -13043,7 +12728,7 @@
       </p:sp>
       <p:sp>
         <p:nvSpPr>
-          <p:cNvPr id="26" name="TextBox 25"/>
+          <p:cNvPr id="25" name="TextBox 24"/>
           <p:cNvSpPr txBox="1"/>
           <p:nvPr/>
         </p:nvSpPr>
@@ -13078,7 +12763,7 @@
       </p:sp>
       <p:sp>
         <p:nvSpPr>
-          <p:cNvPr id="27" name="TextBox 26"/>
+          <p:cNvPr id="26" name="TextBox 25"/>
           <p:cNvSpPr txBox="1"/>
           <p:nvPr/>
         </p:nvSpPr>
@@ -13113,7 +12798,7 @@
       </p:sp>
       <p:sp>
         <p:nvSpPr>
-          <p:cNvPr id="28" name="TextBox 27"/>
+          <p:cNvPr id="27" name="TextBox 26"/>
           <p:cNvSpPr txBox="1"/>
           <p:nvPr/>
         </p:nvSpPr>
@@ -13148,7 +12833,7 @@
       </p:sp>
       <p:sp>
         <p:nvSpPr>
-          <p:cNvPr id="29" name="TextBox 28"/>
+          <p:cNvPr id="28" name="TextBox 27"/>
           <p:cNvSpPr txBox="1"/>
           <p:nvPr/>
         </p:nvSpPr>
@@ -13183,7 +12868,7 @@
       </p:sp>
       <p:sp>
         <p:nvSpPr>
-          <p:cNvPr id="30" name="TextBox 29"/>
+          <p:cNvPr id="29" name="TextBox 28"/>
           <p:cNvSpPr txBox="1"/>
           <p:nvPr/>
         </p:nvSpPr>
@@ -13218,7 +12903,7 @@
       </p:sp>
       <p:sp>
         <p:nvSpPr>
-          <p:cNvPr id="31" name="TextBox 30"/>
+          <p:cNvPr id="30" name="TextBox 29"/>
           <p:cNvSpPr txBox="1"/>
           <p:nvPr/>
         </p:nvSpPr>
@@ -13253,7 +12938,7 @@
       </p:sp>
       <p:sp>
         <p:nvSpPr>
-          <p:cNvPr id="32" name="TextBox 31"/>
+          <p:cNvPr id="31" name="TextBox 30"/>
           <p:cNvSpPr txBox="1"/>
           <p:nvPr/>
         </p:nvSpPr>
@@ -13288,7 +12973,7 @@
       </p:sp>
       <p:sp>
         <p:nvSpPr>
-          <p:cNvPr id="33" name="Rounded Rectangle 32"/>
+          <p:cNvPr id="32" name="Rounded Rectangle 31"/>
           <p:cNvSpPr/>
           <p:nvPr/>
         </p:nvSpPr>
@@ -13336,7 +13021,7 @@
       </p:sp>
       <p:sp>
         <p:nvSpPr>
-          <p:cNvPr id="34" name="Rectangle 33"/>
+          <p:cNvPr id="33" name="Rectangle 32"/>
           <p:cNvSpPr/>
           <p:nvPr/>
         </p:nvSpPr>
@@ -13380,7 +13065,7 @@
       </p:sp>
       <p:sp>
         <p:nvSpPr>
-          <p:cNvPr id="35" name="TextBox 34"/>
+          <p:cNvPr id="34" name="TextBox 33"/>
           <p:cNvSpPr txBox="1"/>
           <p:nvPr/>
         </p:nvSpPr>
@@ -13415,7 +13100,7 @@
       </p:sp>
       <p:sp>
         <p:nvSpPr>
-          <p:cNvPr id="36" name="TextBox 35"/>
+          <p:cNvPr id="35" name="TextBox 34"/>
           <p:cNvSpPr txBox="1"/>
           <p:nvPr/>
         </p:nvSpPr>
@@ -13450,7 +13135,7 @@
       </p:sp>
       <p:sp>
         <p:nvSpPr>
-          <p:cNvPr id="37" name="TextBox 36"/>
+          <p:cNvPr id="36" name="TextBox 35"/>
           <p:cNvSpPr txBox="1"/>
           <p:nvPr/>
         </p:nvSpPr>
@@ -13485,7 +13170,7 @@
       </p:sp>
       <p:sp>
         <p:nvSpPr>
-          <p:cNvPr id="38" name="TextBox 37"/>
+          <p:cNvPr id="37" name="TextBox 36"/>
           <p:cNvSpPr txBox="1"/>
           <p:nvPr/>
         </p:nvSpPr>
@@ -13520,7 +13205,7 @@
       </p:sp>
       <p:sp>
         <p:nvSpPr>
-          <p:cNvPr id="39" name="TextBox 38"/>
+          <p:cNvPr id="38" name="TextBox 37"/>
           <p:cNvSpPr txBox="1"/>
           <p:nvPr/>
         </p:nvSpPr>
@@ -13555,7 +13240,7 @@
       </p:sp>
       <p:sp>
         <p:nvSpPr>
-          <p:cNvPr id="40" name="TextBox 39"/>
+          <p:cNvPr id="39" name="TextBox 38"/>
           <p:cNvSpPr txBox="1"/>
           <p:nvPr/>
         </p:nvSpPr>
@@ -13590,7 +13275,7 @@
       </p:sp>
       <p:sp>
         <p:nvSpPr>
-          <p:cNvPr id="41" name="TextBox 40"/>
+          <p:cNvPr id="40" name="TextBox 39"/>
           <p:cNvSpPr txBox="1"/>
           <p:nvPr/>
         </p:nvSpPr>
@@ -13625,7 +13310,7 @@
       </p:sp>
       <p:sp>
         <p:nvSpPr>
-          <p:cNvPr id="42" name="TextBox 41"/>
+          <p:cNvPr id="41" name="TextBox 40"/>
           <p:cNvSpPr txBox="1"/>
           <p:nvPr/>
         </p:nvSpPr>
@@ -13660,7 +13345,7 @@
       </p:sp>
       <p:sp>
         <p:nvSpPr>
-          <p:cNvPr id="43" name="TextBox 42"/>
+          <p:cNvPr id="42" name="TextBox 41"/>
           <p:cNvSpPr txBox="1"/>
           <p:nvPr/>
         </p:nvSpPr>
@@ -13695,7 +13380,7 @@
       </p:sp>
       <p:sp>
         <p:nvSpPr>
-          <p:cNvPr id="44" name="Rounded Rectangle 43"/>
+          <p:cNvPr id="43" name="Rounded Rectangle 42"/>
           <p:cNvSpPr/>
           <p:nvPr/>
         </p:nvSpPr>
@@ -13743,7 +13428,7 @@
       </p:sp>
       <p:sp>
         <p:nvSpPr>
-          <p:cNvPr id="45" name="TextBox 44"/>
+          <p:cNvPr id="44" name="TextBox 43"/>
           <p:cNvSpPr txBox="1"/>
           <p:nvPr/>
         </p:nvSpPr>
@@ -13778,7 +13463,7 @@
       </p:sp>
       <p:sp>
         <p:nvSpPr>
-          <p:cNvPr id="46" name="TextBox 45"/>
+          <p:cNvPr id="45" name="TextBox 44"/>
           <p:cNvSpPr txBox="1"/>
           <p:nvPr/>
         </p:nvSpPr>
@@ -13926,7 +13611,7 @@
         <p:spPr>
           <a:xfrm>
             <a:off x="457200" y="164592"/>
-            <a:ext cx="1828800" cy="329184"/>
+            <a:ext cx="2286000" cy="329184"/>
           </a:xfrm>
           <a:prstGeom prst="rect">
             <a:avLst/>
@@ -13955,41 +13640,6 @@
       <p:sp>
         <p:nvSpPr>
           <p:cNvPr id="5" name="TextBox 4"/>
-          <p:cNvSpPr txBox="1"/>
-          <p:nvPr/>
-        </p:nvSpPr>
-        <p:spPr>
-          <a:xfrm>
-            <a:off x="1691640" y="201168"/>
-            <a:ext cx="822960" cy="274320"/>
-          </a:xfrm>
-          <a:prstGeom prst="rect">
-            <a:avLst/>
-          </a:prstGeom>
-          <a:noFill/>
-        </p:spPr>
-        <p:txBody>
-          <a:bodyPr wrap="square" anchor="t" lIns="0" rIns="0" tIns="0" bIns="0">
-            <a:spAutoFit/>
-          </a:bodyPr>
-          <a:lstStyle/>
-          <a:p>
-            <a:pPr algn="l"/>
-            <a:r>
-              <a:rPr sz="1100" b="1">
-                <a:solidFill>
-                  <a:srgbClr val="2863C5"/>
-                </a:solidFill>
-                <a:latin typeface="Open Sans"/>
-              </a:rPr>
-              <a:t>BETA</a:t>
-            </a:r>
-          </a:p>
-        </p:txBody>
-      </p:sp>
-      <p:sp>
-        <p:nvSpPr>
-          <p:cNvPr id="6" name="TextBox 5"/>
           <p:cNvSpPr txBox="1"/>
           <p:nvPr/>
         </p:nvSpPr>
@@ -14024,7 +13674,7 @@
       </p:sp>
       <p:sp>
         <p:nvSpPr>
-          <p:cNvPr id="7" name="TextBox 6"/>
+          <p:cNvPr id="6" name="TextBox 5"/>
           <p:cNvSpPr txBox="1"/>
           <p:nvPr/>
         </p:nvSpPr>
@@ -14059,7 +13709,7 @@
       </p:sp>
       <p:sp>
         <p:nvSpPr>
-          <p:cNvPr id="8" name="TextBox 7"/>
+          <p:cNvPr id="7" name="TextBox 6"/>
           <p:cNvSpPr txBox="1"/>
           <p:nvPr/>
         </p:nvSpPr>
@@ -14094,7 +13744,7 @@
       </p:sp>
       <p:sp>
         <p:nvSpPr>
-          <p:cNvPr id="9" name="TextBox 8"/>
+          <p:cNvPr id="8" name="TextBox 7"/>
           <p:cNvSpPr txBox="1"/>
           <p:nvPr/>
         </p:nvSpPr>
@@ -14129,7 +13779,7 @@
       </p:sp>
       <p:sp>
         <p:nvSpPr>
-          <p:cNvPr id="10" name="Rounded Rectangle 9"/>
+          <p:cNvPr id="9" name="Rounded Rectangle 8"/>
           <p:cNvSpPr/>
           <p:nvPr/>
         </p:nvSpPr>
@@ -14177,7 +13827,7 @@
       </p:sp>
       <p:sp>
         <p:nvSpPr>
-          <p:cNvPr id="11" name="Rectangle 10"/>
+          <p:cNvPr id="10" name="Rectangle 9"/>
           <p:cNvSpPr/>
           <p:nvPr/>
         </p:nvSpPr>
@@ -14221,7 +13871,7 @@
       </p:sp>
       <p:sp>
         <p:nvSpPr>
-          <p:cNvPr id="12" name="TextBox 11"/>
+          <p:cNvPr id="11" name="TextBox 10"/>
           <p:cNvSpPr txBox="1"/>
           <p:nvPr/>
         </p:nvSpPr>
@@ -14256,7 +13906,7 @@
       </p:sp>
       <p:sp>
         <p:nvSpPr>
-          <p:cNvPr id="13" name="TextBox 12"/>
+          <p:cNvPr id="12" name="TextBox 11"/>
           <p:cNvSpPr txBox="1"/>
           <p:nvPr/>
         </p:nvSpPr>
@@ -14291,7 +13941,7 @@
       </p:sp>
       <p:sp>
         <p:nvSpPr>
-          <p:cNvPr id="14" name="TextBox 13"/>
+          <p:cNvPr id="13" name="TextBox 12"/>
           <p:cNvSpPr txBox="1"/>
           <p:nvPr/>
         </p:nvSpPr>
@@ -14326,7 +13976,7 @@
       </p:sp>
       <p:sp>
         <p:nvSpPr>
-          <p:cNvPr id="15" name="TextBox 14"/>
+          <p:cNvPr id="14" name="TextBox 13"/>
           <p:cNvSpPr txBox="1"/>
           <p:nvPr/>
         </p:nvSpPr>
@@ -14361,7 +14011,7 @@
       </p:sp>
       <p:sp>
         <p:nvSpPr>
-          <p:cNvPr id="16" name="TextBox 15"/>
+          <p:cNvPr id="15" name="TextBox 14"/>
           <p:cNvSpPr txBox="1"/>
           <p:nvPr/>
         </p:nvSpPr>
@@ -14396,7 +14046,7 @@
       </p:sp>
       <p:sp>
         <p:nvSpPr>
-          <p:cNvPr id="17" name="TextBox 16"/>
+          <p:cNvPr id="16" name="TextBox 15"/>
           <p:cNvSpPr txBox="1"/>
           <p:nvPr/>
         </p:nvSpPr>
@@ -14431,7 +14081,7 @@
       </p:sp>
       <p:sp>
         <p:nvSpPr>
-          <p:cNvPr id="18" name="TextBox 17"/>
+          <p:cNvPr id="17" name="TextBox 16"/>
           <p:cNvSpPr txBox="1"/>
           <p:nvPr/>
         </p:nvSpPr>
@@ -14466,7 +14116,7 @@
       </p:sp>
       <p:sp>
         <p:nvSpPr>
-          <p:cNvPr id="19" name="TextBox 18"/>
+          <p:cNvPr id="18" name="TextBox 17"/>
           <p:cNvSpPr txBox="1"/>
           <p:nvPr/>
         </p:nvSpPr>
@@ -14501,7 +14151,7 @@
       </p:sp>
       <p:sp>
         <p:nvSpPr>
-          <p:cNvPr id="20" name="TextBox 19"/>
+          <p:cNvPr id="19" name="TextBox 18"/>
           <p:cNvSpPr txBox="1"/>
           <p:nvPr/>
         </p:nvSpPr>
@@ -14536,7 +14186,7 @@
       </p:sp>
       <p:sp>
         <p:nvSpPr>
-          <p:cNvPr id="21" name="TextBox 20"/>
+          <p:cNvPr id="20" name="TextBox 19"/>
           <p:cNvSpPr txBox="1"/>
           <p:nvPr/>
         </p:nvSpPr>
@@ -14571,7 +14221,7 @@
       </p:sp>
       <p:sp>
         <p:nvSpPr>
-          <p:cNvPr id="22" name="Right Arrow 21"/>
+          <p:cNvPr id="21" name="Right Arrow 20"/>
           <p:cNvSpPr/>
           <p:nvPr/>
         </p:nvSpPr>
@@ -14615,7 +14265,7 @@
       </p:sp>
       <p:sp>
         <p:nvSpPr>
-          <p:cNvPr id="23" name="TextBox 22"/>
+          <p:cNvPr id="22" name="TextBox 21"/>
           <p:cNvSpPr txBox="1"/>
           <p:nvPr/>
         </p:nvSpPr>
@@ -14650,7 +14300,7 @@
       </p:sp>
       <p:sp>
         <p:nvSpPr>
-          <p:cNvPr id="24" name="Rounded Rectangle 23"/>
+          <p:cNvPr id="23" name="Rounded Rectangle 22"/>
           <p:cNvSpPr/>
           <p:nvPr/>
         </p:nvSpPr>
@@ -14698,7 +14348,7 @@
       </p:sp>
       <p:sp>
         <p:nvSpPr>
-          <p:cNvPr id="25" name="Rectangle 24"/>
+          <p:cNvPr id="24" name="Rectangle 23"/>
           <p:cNvSpPr/>
           <p:nvPr/>
         </p:nvSpPr>
@@ -14742,7 +14392,7 @@
       </p:sp>
       <p:sp>
         <p:nvSpPr>
-          <p:cNvPr id="26" name="TextBox 25"/>
+          <p:cNvPr id="25" name="TextBox 24"/>
           <p:cNvSpPr txBox="1"/>
           <p:nvPr/>
         </p:nvSpPr>
@@ -14777,7 +14427,7 @@
       </p:sp>
       <p:sp>
         <p:nvSpPr>
-          <p:cNvPr id="27" name="TextBox 26"/>
+          <p:cNvPr id="26" name="TextBox 25"/>
           <p:cNvSpPr txBox="1"/>
           <p:nvPr/>
         </p:nvSpPr>
@@ -14812,7 +14462,7 @@
       </p:sp>
       <p:sp>
         <p:nvSpPr>
-          <p:cNvPr id="28" name="TextBox 27"/>
+          <p:cNvPr id="27" name="TextBox 26"/>
           <p:cNvSpPr txBox="1"/>
           <p:nvPr/>
         </p:nvSpPr>
@@ -14847,7 +14497,7 @@
       </p:sp>
       <p:sp>
         <p:nvSpPr>
-          <p:cNvPr id="29" name="TextBox 28"/>
+          <p:cNvPr id="28" name="TextBox 27"/>
           <p:cNvSpPr txBox="1"/>
           <p:nvPr/>
         </p:nvSpPr>
@@ -14882,7 +14532,7 @@
       </p:sp>
       <p:sp>
         <p:nvSpPr>
-          <p:cNvPr id="30" name="TextBox 29"/>
+          <p:cNvPr id="29" name="TextBox 28"/>
           <p:cNvSpPr txBox="1"/>
           <p:nvPr/>
         </p:nvSpPr>
@@ -14917,7 +14567,7 @@
       </p:sp>
       <p:sp>
         <p:nvSpPr>
-          <p:cNvPr id="31" name="TextBox 30"/>
+          <p:cNvPr id="30" name="TextBox 29"/>
           <p:cNvSpPr txBox="1"/>
           <p:nvPr/>
         </p:nvSpPr>
@@ -14952,7 +14602,7 @@
       </p:sp>
       <p:sp>
         <p:nvSpPr>
-          <p:cNvPr id="32" name="TextBox 31"/>
+          <p:cNvPr id="31" name="TextBox 30"/>
           <p:cNvSpPr txBox="1"/>
           <p:nvPr/>
         </p:nvSpPr>
@@ -14987,7 +14637,7 @@
       </p:sp>
       <p:sp>
         <p:nvSpPr>
-          <p:cNvPr id="33" name="TextBox 32"/>
+          <p:cNvPr id="32" name="TextBox 31"/>
           <p:cNvSpPr txBox="1"/>
           <p:nvPr/>
         </p:nvSpPr>
@@ -15022,7 +14672,7 @@
       </p:sp>
       <p:sp>
         <p:nvSpPr>
-          <p:cNvPr id="34" name="TextBox 33"/>
+          <p:cNvPr id="33" name="TextBox 32"/>
           <p:cNvSpPr txBox="1"/>
           <p:nvPr/>
         </p:nvSpPr>
@@ -15057,7 +14707,7 @@
       </p:sp>
       <p:sp>
         <p:nvSpPr>
-          <p:cNvPr id="35" name="TextBox 34"/>
+          <p:cNvPr id="34" name="TextBox 33"/>
           <p:cNvSpPr txBox="1"/>
           <p:nvPr/>
         </p:nvSpPr>
@@ -15092,7 +14742,7 @@
       </p:sp>
       <p:sp>
         <p:nvSpPr>
-          <p:cNvPr id="36" name="TextBox 35"/>
+          <p:cNvPr id="35" name="TextBox 34"/>
           <p:cNvSpPr txBox="1"/>
           <p:nvPr/>
         </p:nvSpPr>
@@ -15240,7 +14890,7 @@
         <p:spPr>
           <a:xfrm>
             <a:off x="457200" y="164592"/>
-            <a:ext cx="1828800" cy="329184"/>
+            <a:ext cx="2286000" cy="329184"/>
           </a:xfrm>
           <a:prstGeom prst="rect">
             <a:avLst/>
@@ -15269,41 +14919,6 @@
       <p:sp>
         <p:nvSpPr>
           <p:cNvPr id="5" name="TextBox 4"/>
-          <p:cNvSpPr txBox="1"/>
-          <p:nvPr/>
-        </p:nvSpPr>
-        <p:spPr>
-          <a:xfrm>
-            <a:off x="1691640" y="201168"/>
-            <a:ext cx="822960" cy="274320"/>
-          </a:xfrm>
-          <a:prstGeom prst="rect">
-            <a:avLst/>
-          </a:prstGeom>
-          <a:noFill/>
-        </p:spPr>
-        <p:txBody>
-          <a:bodyPr wrap="square" anchor="t" lIns="0" rIns="0" tIns="0" bIns="0">
-            <a:spAutoFit/>
-          </a:bodyPr>
-          <a:lstStyle/>
-          <a:p>
-            <a:pPr algn="l"/>
-            <a:r>
-              <a:rPr sz="1100" b="1">
-                <a:solidFill>
-                  <a:srgbClr val="2863C5"/>
-                </a:solidFill>
-                <a:latin typeface="Open Sans"/>
-              </a:rPr>
-              <a:t>BETA</a:t>
-            </a:r>
-          </a:p>
-        </p:txBody>
-      </p:sp>
-      <p:sp>
-        <p:nvSpPr>
-          <p:cNvPr id="6" name="TextBox 5"/>
           <p:cNvSpPr txBox="1"/>
           <p:nvPr/>
         </p:nvSpPr>
@@ -15338,7 +14953,7 @@
       </p:sp>
       <p:sp>
         <p:nvSpPr>
-          <p:cNvPr id="7" name="TextBox 6"/>
+          <p:cNvPr id="6" name="TextBox 5"/>
           <p:cNvSpPr txBox="1"/>
           <p:nvPr/>
         </p:nvSpPr>
@@ -15373,7 +14988,7 @@
       </p:sp>
       <p:sp>
         <p:nvSpPr>
-          <p:cNvPr id="8" name="TextBox 7"/>
+          <p:cNvPr id="7" name="TextBox 6"/>
           <p:cNvSpPr txBox="1"/>
           <p:nvPr/>
         </p:nvSpPr>
@@ -15408,7 +15023,7 @@
       </p:sp>
       <p:sp>
         <p:nvSpPr>
-          <p:cNvPr id="9" name="TextBox 8"/>
+          <p:cNvPr id="8" name="TextBox 7"/>
           <p:cNvSpPr txBox="1"/>
           <p:nvPr/>
         </p:nvSpPr>
@@ -15443,7 +15058,7 @@
       </p:sp>
       <p:sp>
         <p:nvSpPr>
-          <p:cNvPr id="10" name="TextBox 9"/>
+          <p:cNvPr id="9" name="TextBox 8"/>
           <p:cNvSpPr txBox="1"/>
           <p:nvPr/>
         </p:nvSpPr>
@@ -15478,7 +15093,7 @@
       </p:sp>
       <p:sp>
         <p:nvSpPr>
-          <p:cNvPr id="11" name="Rounded Rectangle 10"/>
+          <p:cNvPr id="10" name="Rounded Rectangle 9"/>
           <p:cNvSpPr/>
           <p:nvPr/>
         </p:nvSpPr>
@@ -15526,7 +15141,7 @@
       </p:sp>
       <p:sp>
         <p:nvSpPr>
-          <p:cNvPr id="12" name="Rectangle 11"/>
+          <p:cNvPr id="11" name="Rectangle 10"/>
           <p:cNvSpPr/>
           <p:nvPr/>
         </p:nvSpPr>
@@ -15570,7 +15185,7 @@
       </p:sp>
       <p:sp>
         <p:nvSpPr>
-          <p:cNvPr id="13" name="Rounded Rectangle 12"/>
+          <p:cNvPr id="12" name="Rounded Rectangle 11"/>
           <p:cNvSpPr/>
           <p:nvPr/>
         </p:nvSpPr>
@@ -15624,7 +15239,7 @@
       </p:sp>
       <p:sp>
         <p:nvSpPr>
-          <p:cNvPr id="14" name="TextBox 13"/>
+          <p:cNvPr id="13" name="TextBox 12"/>
           <p:cNvSpPr txBox="1"/>
           <p:nvPr/>
         </p:nvSpPr>
@@ -15659,7 +15274,7 @@
       </p:sp>
       <p:sp>
         <p:nvSpPr>
-          <p:cNvPr id="15" name="Rounded Rectangle 14"/>
+          <p:cNvPr id="14" name="Rounded Rectangle 13"/>
           <p:cNvSpPr/>
           <p:nvPr/>
         </p:nvSpPr>
@@ -15707,7 +15322,7 @@
       </p:sp>
       <p:sp>
         <p:nvSpPr>
-          <p:cNvPr id="16" name="TextBox 15"/>
+          <p:cNvPr id="15" name="TextBox 14"/>
           <p:cNvSpPr txBox="1"/>
           <p:nvPr/>
         </p:nvSpPr>
@@ -15742,7 +15357,7 @@
       </p:sp>
       <p:sp>
         <p:nvSpPr>
-          <p:cNvPr id="17" name="TextBox 16"/>
+          <p:cNvPr id="16" name="TextBox 15"/>
           <p:cNvSpPr txBox="1"/>
           <p:nvPr/>
         </p:nvSpPr>
@@ -15777,7 +15392,7 @@
       </p:sp>
       <p:sp>
         <p:nvSpPr>
-          <p:cNvPr id="18" name="Rounded Rectangle 17"/>
+          <p:cNvPr id="17" name="Rounded Rectangle 16"/>
           <p:cNvSpPr/>
           <p:nvPr/>
         </p:nvSpPr>
@@ -15825,7 +15440,7 @@
       </p:sp>
       <p:sp>
         <p:nvSpPr>
-          <p:cNvPr id="19" name="Rectangle 18"/>
+          <p:cNvPr id="18" name="Rectangle 17"/>
           <p:cNvSpPr/>
           <p:nvPr/>
         </p:nvSpPr>
@@ -15869,7 +15484,7 @@
       </p:sp>
       <p:sp>
         <p:nvSpPr>
-          <p:cNvPr id="20" name="Rounded Rectangle 19"/>
+          <p:cNvPr id="19" name="Rounded Rectangle 18"/>
           <p:cNvSpPr/>
           <p:nvPr/>
         </p:nvSpPr>
@@ -15923,7 +15538,7 @@
       </p:sp>
       <p:sp>
         <p:nvSpPr>
-          <p:cNvPr id="21" name="TextBox 20"/>
+          <p:cNvPr id="20" name="TextBox 19"/>
           <p:cNvSpPr txBox="1"/>
           <p:nvPr/>
         </p:nvSpPr>
@@ -15958,7 +15573,7 @@
       </p:sp>
       <p:sp>
         <p:nvSpPr>
-          <p:cNvPr id="22" name="Rounded Rectangle 21"/>
+          <p:cNvPr id="21" name="Rounded Rectangle 20"/>
           <p:cNvSpPr/>
           <p:nvPr/>
         </p:nvSpPr>
@@ -16006,7 +15621,7 @@
       </p:sp>
       <p:sp>
         <p:nvSpPr>
-          <p:cNvPr id="23" name="TextBox 22"/>
+          <p:cNvPr id="22" name="TextBox 21"/>
           <p:cNvSpPr txBox="1"/>
           <p:nvPr/>
         </p:nvSpPr>
@@ -16041,7 +15656,7 @@
       </p:sp>
       <p:sp>
         <p:nvSpPr>
-          <p:cNvPr id="24" name="Rounded Rectangle 23"/>
+          <p:cNvPr id="23" name="Rounded Rectangle 22"/>
           <p:cNvSpPr/>
           <p:nvPr/>
         </p:nvSpPr>
@@ -16089,7 +15704,7 @@
       </p:sp>
       <p:sp>
         <p:nvSpPr>
-          <p:cNvPr id="25" name="TextBox 24"/>
+          <p:cNvPr id="24" name="TextBox 23"/>
           <p:cNvSpPr txBox="1"/>
           <p:nvPr/>
         </p:nvSpPr>
@@ -16124,7 +15739,7 @@
       </p:sp>
       <p:sp>
         <p:nvSpPr>
-          <p:cNvPr id="26" name="Rounded Rectangle 25"/>
+          <p:cNvPr id="25" name="Rounded Rectangle 24"/>
           <p:cNvSpPr/>
           <p:nvPr/>
         </p:nvSpPr>
@@ -16172,7 +15787,7 @@
       </p:sp>
       <p:sp>
         <p:nvSpPr>
-          <p:cNvPr id="27" name="TextBox 26"/>
+          <p:cNvPr id="26" name="TextBox 25"/>
           <p:cNvSpPr txBox="1"/>
           <p:nvPr/>
         </p:nvSpPr>
@@ -16207,7 +15822,7 @@
       </p:sp>
       <p:sp>
         <p:nvSpPr>
-          <p:cNvPr id="28" name="Rounded Rectangle 27"/>
+          <p:cNvPr id="27" name="Rounded Rectangle 26"/>
           <p:cNvSpPr/>
           <p:nvPr/>
         </p:nvSpPr>
@@ -16255,7 +15870,7 @@
       </p:sp>
       <p:sp>
         <p:nvSpPr>
-          <p:cNvPr id="29" name="TextBox 28"/>
+          <p:cNvPr id="28" name="TextBox 27"/>
           <p:cNvSpPr txBox="1"/>
           <p:nvPr/>
         </p:nvSpPr>
@@ -16290,7 +15905,7 @@
       </p:sp>
       <p:sp>
         <p:nvSpPr>
-          <p:cNvPr id="30" name="Rounded Rectangle 29"/>
+          <p:cNvPr id="29" name="Rounded Rectangle 28"/>
           <p:cNvSpPr/>
           <p:nvPr/>
         </p:nvSpPr>
@@ -16338,7 +15953,7 @@
       </p:sp>
       <p:sp>
         <p:nvSpPr>
-          <p:cNvPr id="31" name="TextBox 30"/>
+          <p:cNvPr id="30" name="TextBox 29"/>
           <p:cNvSpPr txBox="1"/>
           <p:nvPr/>
         </p:nvSpPr>
@@ -16373,7 +15988,7 @@
       </p:sp>
       <p:sp>
         <p:nvSpPr>
-          <p:cNvPr id="32" name="TextBox 31"/>
+          <p:cNvPr id="31" name="TextBox 30"/>
           <p:cNvSpPr txBox="1"/>
           <p:nvPr/>
         </p:nvSpPr>
@@ -16408,7 +16023,7 @@
       </p:sp>
       <p:sp>
         <p:nvSpPr>
-          <p:cNvPr id="33" name="Rounded Rectangle 32"/>
+          <p:cNvPr id="32" name="Rounded Rectangle 31"/>
           <p:cNvSpPr/>
           <p:nvPr/>
         </p:nvSpPr>
@@ -16456,7 +16071,7 @@
       </p:sp>
       <p:sp>
         <p:nvSpPr>
-          <p:cNvPr id="34" name="Rectangle 33"/>
+          <p:cNvPr id="33" name="Rectangle 32"/>
           <p:cNvSpPr/>
           <p:nvPr/>
         </p:nvSpPr>
@@ -16500,7 +16115,7 @@
       </p:sp>
       <p:sp>
         <p:nvSpPr>
-          <p:cNvPr id="35" name="Rounded Rectangle 34"/>
+          <p:cNvPr id="34" name="Rounded Rectangle 33"/>
           <p:cNvSpPr/>
           <p:nvPr/>
         </p:nvSpPr>
@@ -16554,7 +16169,7 @@
       </p:sp>
       <p:sp>
         <p:nvSpPr>
-          <p:cNvPr id="36" name="TextBox 35"/>
+          <p:cNvPr id="35" name="TextBox 34"/>
           <p:cNvSpPr txBox="1"/>
           <p:nvPr/>
         </p:nvSpPr>
@@ -16589,7 +16204,7 @@
       </p:sp>
       <p:sp>
         <p:nvSpPr>
-          <p:cNvPr id="37" name="Rounded Rectangle 36"/>
+          <p:cNvPr id="36" name="Rounded Rectangle 35"/>
           <p:cNvSpPr/>
           <p:nvPr/>
         </p:nvSpPr>
@@ -16637,7 +16252,7 @@
       </p:sp>
       <p:sp>
         <p:nvSpPr>
-          <p:cNvPr id="38" name="TextBox 37"/>
+          <p:cNvPr id="37" name="TextBox 36"/>
           <p:cNvSpPr txBox="1"/>
           <p:nvPr/>
         </p:nvSpPr>
@@ -16672,7 +16287,7 @@
       </p:sp>
       <p:sp>
         <p:nvSpPr>
-          <p:cNvPr id="39" name="Rounded Rectangle 38"/>
+          <p:cNvPr id="38" name="Rounded Rectangle 37"/>
           <p:cNvSpPr/>
           <p:nvPr/>
         </p:nvSpPr>
@@ -16720,7 +16335,7 @@
       </p:sp>
       <p:sp>
         <p:nvSpPr>
-          <p:cNvPr id="40" name="TextBox 39"/>
+          <p:cNvPr id="39" name="TextBox 38"/>
           <p:cNvSpPr txBox="1"/>
           <p:nvPr/>
         </p:nvSpPr>
@@ -16755,7 +16370,7 @@
       </p:sp>
       <p:sp>
         <p:nvSpPr>
-          <p:cNvPr id="41" name="Rounded Rectangle 40"/>
+          <p:cNvPr id="40" name="Rounded Rectangle 39"/>
           <p:cNvSpPr/>
           <p:nvPr/>
         </p:nvSpPr>
@@ -16803,7 +16418,7 @@
       </p:sp>
       <p:sp>
         <p:nvSpPr>
-          <p:cNvPr id="42" name="TextBox 41"/>
+          <p:cNvPr id="41" name="TextBox 40"/>
           <p:cNvSpPr txBox="1"/>
           <p:nvPr/>
         </p:nvSpPr>
@@ -16838,7 +16453,7 @@
       </p:sp>
       <p:sp>
         <p:nvSpPr>
-          <p:cNvPr id="43" name="Rounded Rectangle 42"/>
+          <p:cNvPr id="42" name="Rounded Rectangle 41"/>
           <p:cNvSpPr/>
           <p:nvPr/>
         </p:nvSpPr>
@@ -16886,7 +16501,7 @@
       </p:sp>
       <p:sp>
         <p:nvSpPr>
-          <p:cNvPr id="44" name="TextBox 43"/>
+          <p:cNvPr id="43" name="TextBox 42"/>
           <p:cNvSpPr txBox="1"/>
           <p:nvPr/>
         </p:nvSpPr>
@@ -16921,7 +16536,7 @@
       </p:sp>
       <p:sp>
         <p:nvSpPr>
-          <p:cNvPr id="45" name="Rounded Rectangle 44"/>
+          <p:cNvPr id="44" name="Rounded Rectangle 43"/>
           <p:cNvSpPr/>
           <p:nvPr/>
         </p:nvSpPr>
@@ -16969,7 +16584,7 @@
       </p:sp>
       <p:sp>
         <p:nvSpPr>
-          <p:cNvPr id="46" name="TextBox 45"/>
+          <p:cNvPr id="45" name="TextBox 44"/>
           <p:cNvSpPr txBox="1"/>
           <p:nvPr/>
         </p:nvSpPr>
@@ -17004,7 +16619,7 @@
       </p:sp>
       <p:sp>
         <p:nvSpPr>
-          <p:cNvPr id="47" name="Rounded Rectangle 46"/>
+          <p:cNvPr id="46" name="Rounded Rectangle 45"/>
           <p:cNvSpPr/>
           <p:nvPr/>
         </p:nvSpPr>
@@ -17052,7 +16667,7 @@
       </p:sp>
       <p:sp>
         <p:nvSpPr>
-          <p:cNvPr id="48" name="TextBox 47"/>
+          <p:cNvPr id="47" name="TextBox 46"/>
           <p:cNvSpPr txBox="1"/>
           <p:nvPr/>
         </p:nvSpPr>
@@ -17087,7 +16702,7 @@
       </p:sp>
       <p:sp>
         <p:nvSpPr>
-          <p:cNvPr id="49" name="Rounded Rectangle 48"/>
+          <p:cNvPr id="48" name="Rounded Rectangle 47"/>
           <p:cNvSpPr/>
           <p:nvPr/>
         </p:nvSpPr>
@@ -17135,7 +16750,7 @@
       </p:sp>
       <p:sp>
         <p:nvSpPr>
-          <p:cNvPr id="50" name="TextBox 49"/>
+          <p:cNvPr id="49" name="TextBox 48"/>
           <p:cNvSpPr txBox="1"/>
           <p:nvPr/>
         </p:nvSpPr>
@@ -17170,7 +16785,7 @@
       </p:sp>
       <p:sp>
         <p:nvSpPr>
-          <p:cNvPr id="51" name="Rounded Rectangle 50"/>
+          <p:cNvPr id="50" name="Rounded Rectangle 49"/>
           <p:cNvSpPr/>
           <p:nvPr/>
         </p:nvSpPr>
@@ -17218,7 +16833,7 @@
       </p:sp>
       <p:sp>
         <p:nvSpPr>
-          <p:cNvPr id="52" name="TextBox 51"/>
+          <p:cNvPr id="51" name="TextBox 50"/>
           <p:cNvSpPr txBox="1"/>
           <p:nvPr/>
         </p:nvSpPr>
@@ -17253,7 +16868,7 @@
       </p:sp>
       <p:sp>
         <p:nvSpPr>
-          <p:cNvPr id="53" name="Rounded Rectangle 52"/>
+          <p:cNvPr id="52" name="Rounded Rectangle 51"/>
           <p:cNvSpPr/>
           <p:nvPr/>
         </p:nvSpPr>
@@ -17301,7 +16916,7 @@
       </p:sp>
       <p:sp>
         <p:nvSpPr>
-          <p:cNvPr id="54" name="TextBox 53"/>
+          <p:cNvPr id="53" name="TextBox 52"/>
           <p:cNvSpPr txBox="1"/>
           <p:nvPr/>
         </p:nvSpPr>
@@ -17336,7 +16951,7 @@
       </p:sp>
       <p:sp>
         <p:nvSpPr>
-          <p:cNvPr id="55" name="Rounded Rectangle 54"/>
+          <p:cNvPr id="54" name="Rounded Rectangle 53"/>
           <p:cNvSpPr/>
           <p:nvPr/>
         </p:nvSpPr>
@@ -17384,7 +16999,7 @@
       </p:sp>
       <p:sp>
         <p:nvSpPr>
-          <p:cNvPr id="56" name="TextBox 55"/>
+          <p:cNvPr id="55" name="TextBox 54"/>
           <p:cNvSpPr txBox="1"/>
           <p:nvPr/>
         </p:nvSpPr>
@@ -17419,7 +17034,7 @@
       </p:sp>
       <p:sp>
         <p:nvSpPr>
-          <p:cNvPr id="57" name="Rounded Rectangle 56"/>
+          <p:cNvPr id="56" name="Rounded Rectangle 55"/>
           <p:cNvSpPr/>
           <p:nvPr/>
         </p:nvSpPr>
@@ -17467,7 +17082,7 @@
       </p:sp>
       <p:sp>
         <p:nvSpPr>
-          <p:cNvPr id="58" name="TextBox 57"/>
+          <p:cNvPr id="57" name="TextBox 56"/>
           <p:cNvSpPr txBox="1"/>
           <p:nvPr/>
         </p:nvSpPr>
@@ -17502,7 +17117,7 @@
       </p:sp>
       <p:sp>
         <p:nvSpPr>
-          <p:cNvPr id="59" name="Rounded Rectangle 58"/>
+          <p:cNvPr id="58" name="Rounded Rectangle 57"/>
           <p:cNvSpPr/>
           <p:nvPr/>
         </p:nvSpPr>
@@ -17550,7 +17165,7 @@
       </p:sp>
       <p:sp>
         <p:nvSpPr>
-          <p:cNvPr id="60" name="TextBox 59"/>
+          <p:cNvPr id="59" name="TextBox 58"/>
           <p:cNvSpPr txBox="1"/>
           <p:nvPr/>
         </p:nvSpPr>
@@ -17585,7 +17200,7 @@
       </p:sp>
       <p:sp>
         <p:nvSpPr>
-          <p:cNvPr id="61" name="Rounded Rectangle 60"/>
+          <p:cNvPr id="60" name="Rounded Rectangle 59"/>
           <p:cNvSpPr/>
           <p:nvPr/>
         </p:nvSpPr>
@@ -17633,7 +17248,7 @@
       </p:sp>
       <p:sp>
         <p:nvSpPr>
-          <p:cNvPr id="62" name="TextBox 61"/>
+          <p:cNvPr id="61" name="TextBox 60"/>
           <p:cNvSpPr txBox="1"/>
           <p:nvPr/>
         </p:nvSpPr>
@@ -17668,7 +17283,7 @@
       </p:sp>
       <p:sp>
         <p:nvSpPr>
-          <p:cNvPr id="63" name="TextBox 62"/>
+          <p:cNvPr id="62" name="TextBox 61"/>
           <p:cNvSpPr txBox="1"/>
           <p:nvPr/>
         </p:nvSpPr>
@@ -17703,7 +17318,7 @@
       </p:sp>
       <p:sp>
         <p:nvSpPr>
-          <p:cNvPr id="64" name="Rounded Rectangle 63"/>
+          <p:cNvPr id="63" name="Rounded Rectangle 62"/>
           <p:cNvSpPr/>
           <p:nvPr/>
         </p:nvSpPr>
@@ -17751,7 +17366,7 @@
       </p:sp>
       <p:sp>
         <p:nvSpPr>
-          <p:cNvPr id="65" name="Rectangle 64"/>
+          <p:cNvPr id="64" name="Rectangle 63"/>
           <p:cNvSpPr/>
           <p:nvPr/>
         </p:nvSpPr>
@@ -17795,7 +17410,7 @@
       </p:sp>
       <p:sp>
         <p:nvSpPr>
-          <p:cNvPr id="66" name="Rounded Rectangle 65"/>
+          <p:cNvPr id="65" name="Rounded Rectangle 64"/>
           <p:cNvSpPr/>
           <p:nvPr/>
         </p:nvSpPr>
@@ -17849,7 +17464,7 @@
       </p:sp>
       <p:sp>
         <p:nvSpPr>
-          <p:cNvPr id="67" name="TextBox 66"/>
+          <p:cNvPr id="66" name="TextBox 65"/>
           <p:cNvSpPr txBox="1"/>
           <p:nvPr/>
         </p:nvSpPr>
@@ -17884,7 +17499,7 @@
       </p:sp>
       <p:sp>
         <p:nvSpPr>
-          <p:cNvPr id="68" name="Rounded Rectangle 67"/>
+          <p:cNvPr id="67" name="Rounded Rectangle 66"/>
           <p:cNvSpPr/>
           <p:nvPr/>
         </p:nvSpPr>
@@ -17932,7 +17547,7 @@
       </p:sp>
       <p:sp>
         <p:nvSpPr>
-          <p:cNvPr id="69" name="TextBox 68"/>
+          <p:cNvPr id="68" name="TextBox 67"/>
           <p:cNvSpPr txBox="1"/>
           <p:nvPr/>
         </p:nvSpPr>
@@ -17967,7 +17582,7 @@
       </p:sp>
       <p:sp>
         <p:nvSpPr>
-          <p:cNvPr id="70" name="Rounded Rectangle 69"/>
+          <p:cNvPr id="69" name="Rounded Rectangle 68"/>
           <p:cNvSpPr/>
           <p:nvPr/>
         </p:nvSpPr>
@@ -18015,7 +17630,7 @@
       </p:sp>
       <p:sp>
         <p:nvSpPr>
-          <p:cNvPr id="71" name="TextBox 70"/>
+          <p:cNvPr id="70" name="TextBox 69"/>
           <p:cNvSpPr txBox="1"/>
           <p:nvPr/>
         </p:nvSpPr>
@@ -18050,7 +17665,7 @@
       </p:sp>
       <p:sp>
         <p:nvSpPr>
-          <p:cNvPr id="72" name="TextBox 71"/>
+          <p:cNvPr id="71" name="TextBox 70"/>
           <p:cNvSpPr txBox="1"/>
           <p:nvPr/>
         </p:nvSpPr>
@@ -18198,7 +17813,7 @@
         <p:spPr>
           <a:xfrm>
             <a:off x="457200" y="164592"/>
-            <a:ext cx="1828800" cy="329184"/>
+            <a:ext cx="2286000" cy="329184"/>
           </a:xfrm>
           <a:prstGeom prst="rect">
             <a:avLst/>
@@ -18227,41 +17842,6 @@
       <p:sp>
         <p:nvSpPr>
           <p:cNvPr id="5" name="TextBox 4"/>
-          <p:cNvSpPr txBox="1"/>
-          <p:nvPr/>
-        </p:nvSpPr>
-        <p:spPr>
-          <a:xfrm>
-            <a:off x="1691640" y="201168"/>
-            <a:ext cx="822960" cy="274320"/>
-          </a:xfrm>
-          <a:prstGeom prst="rect">
-            <a:avLst/>
-          </a:prstGeom>
-          <a:noFill/>
-        </p:spPr>
-        <p:txBody>
-          <a:bodyPr wrap="square" anchor="t" lIns="0" rIns="0" tIns="0" bIns="0">
-            <a:spAutoFit/>
-          </a:bodyPr>
-          <a:lstStyle/>
-          <a:p>
-            <a:pPr algn="l"/>
-            <a:r>
-              <a:rPr sz="1100" b="1">
-                <a:solidFill>
-                  <a:srgbClr val="2863C5"/>
-                </a:solidFill>
-                <a:latin typeface="Open Sans"/>
-              </a:rPr>
-              <a:t>BETA</a:t>
-            </a:r>
-          </a:p>
-        </p:txBody>
-      </p:sp>
-      <p:sp>
-        <p:nvSpPr>
-          <p:cNvPr id="6" name="TextBox 5"/>
           <p:cNvSpPr txBox="1"/>
           <p:nvPr/>
         </p:nvSpPr>
@@ -18296,7 +17876,7 @@
       </p:sp>
       <p:sp>
         <p:nvSpPr>
-          <p:cNvPr id="7" name="TextBox 6"/>
+          <p:cNvPr id="6" name="TextBox 5"/>
           <p:cNvSpPr txBox="1"/>
           <p:nvPr/>
         </p:nvSpPr>
@@ -18331,7 +17911,7 @@
       </p:sp>
       <p:sp>
         <p:nvSpPr>
-          <p:cNvPr id="8" name="TextBox 7"/>
+          <p:cNvPr id="7" name="TextBox 6"/>
           <p:cNvSpPr txBox="1"/>
           <p:nvPr/>
         </p:nvSpPr>
@@ -18366,7 +17946,7 @@
       </p:sp>
       <p:sp>
         <p:nvSpPr>
-          <p:cNvPr id="9" name="TextBox 8"/>
+          <p:cNvPr id="8" name="TextBox 7"/>
           <p:cNvSpPr txBox="1"/>
           <p:nvPr/>
         </p:nvSpPr>
@@ -18401,7 +17981,7 @@
       </p:sp>
       <p:sp>
         <p:nvSpPr>
-          <p:cNvPr id="10" name="Rounded Rectangle 9"/>
+          <p:cNvPr id="9" name="Rounded Rectangle 8"/>
           <p:cNvSpPr/>
           <p:nvPr/>
         </p:nvSpPr>
@@ -18449,7 +18029,7 @@
       </p:sp>
       <p:sp>
         <p:nvSpPr>
-          <p:cNvPr id="11" name="Rectangle 10"/>
+          <p:cNvPr id="10" name="Rectangle 9"/>
           <p:cNvSpPr/>
           <p:nvPr/>
         </p:nvSpPr>
@@ -18493,7 +18073,7 @@
       </p:sp>
       <p:sp>
         <p:nvSpPr>
-          <p:cNvPr id="12" name="Rounded Rectangle 11"/>
+          <p:cNvPr id="11" name="Rounded Rectangle 10"/>
           <p:cNvSpPr/>
           <p:nvPr/>
         </p:nvSpPr>
@@ -18547,7 +18127,7 @@
       </p:sp>
       <p:sp>
         <p:nvSpPr>
-          <p:cNvPr id="13" name="TextBox 12"/>
+          <p:cNvPr id="12" name="TextBox 11"/>
           <p:cNvSpPr txBox="1"/>
           <p:nvPr/>
         </p:nvSpPr>
@@ -18583,7 +18163,7 @@
       </p:sp>
       <p:sp>
         <p:nvSpPr>
-          <p:cNvPr id="14" name="TextBox 13"/>
+          <p:cNvPr id="13" name="TextBox 12"/>
           <p:cNvSpPr txBox="1"/>
           <p:nvPr/>
         </p:nvSpPr>
@@ -18621,7 +18201,7 @@
       </p:sp>
       <p:sp>
         <p:nvSpPr>
-          <p:cNvPr id="15" name="Right Arrow 14"/>
+          <p:cNvPr id="14" name="Right Arrow 13"/>
           <p:cNvSpPr/>
           <p:nvPr/>
         </p:nvSpPr>
@@ -18665,7 +18245,7 @@
       </p:sp>
       <p:sp>
         <p:nvSpPr>
-          <p:cNvPr id="16" name="Rounded Rectangle 15"/>
+          <p:cNvPr id="15" name="Rounded Rectangle 14"/>
           <p:cNvSpPr/>
           <p:nvPr/>
         </p:nvSpPr>
@@ -18713,7 +18293,7 @@
       </p:sp>
       <p:sp>
         <p:nvSpPr>
-          <p:cNvPr id="17" name="Rectangle 16"/>
+          <p:cNvPr id="16" name="Rectangle 15"/>
           <p:cNvSpPr/>
           <p:nvPr/>
         </p:nvSpPr>
@@ -18757,7 +18337,7 @@
       </p:sp>
       <p:sp>
         <p:nvSpPr>
-          <p:cNvPr id="18" name="Rounded Rectangle 17"/>
+          <p:cNvPr id="17" name="Rounded Rectangle 16"/>
           <p:cNvSpPr/>
           <p:nvPr/>
         </p:nvSpPr>
@@ -18811,7 +18391,7 @@
       </p:sp>
       <p:sp>
         <p:nvSpPr>
-          <p:cNvPr id="19" name="TextBox 18"/>
+          <p:cNvPr id="18" name="TextBox 17"/>
           <p:cNvSpPr txBox="1"/>
           <p:nvPr/>
         </p:nvSpPr>
@@ -18846,7 +18426,7 @@
       </p:sp>
       <p:sp>
         <p:nvSpPr>
-          <p:cNvPr id="20" name="TextBox 19"/>
+          <p:cNvPr id="19" name="TextBox 18"/>
           <p:cNvSpPr txBox="1"/>
           <p:nvPr/>
         </p:nvSpPr>
@@ -18883,7 +18463,7 @@
       </p:sp>
       <p:sp>
         <p:nvSpPr>
-          <p:cNvPr id="21" name="Right Arrow 20"/>
+          <p:cNvPr id="20" name="Right Arrow 19"/>
           <p:cNvSpPr/>
           <p:nvPr/>
         </p:nvSpPr>
@@ -18927,7 +18507,7 @@
       </p:sp>
       <p:sp>
         <p:nvSpPr>
-          <p:cNvPr id="22" name="Rounded Rectangle 21"/>
+          <p:cNvPr id="21" name="Rounded Rectangle 20"/>
           <p:cNvSpPr/>
           <p:nvPr/>
         </p:nvSpPr>
@@ -18975,7 +18555,7 @@
       </p:sp>
       <p:sp>
         <p:nvSpPr>
-          <p:cNvPr id="23" name="Rectangle 22"/>
+          <p:cNvPr id="22" name="Rectangle 21"/>
           <p:cNvSpPr/>
           <p:nvPr/>
         </p:nvSpPr>
@@ -19019,7 +18599,7 @@
       </p:sp>
       <p:sp>
         <p:nvSpPr>
-          <p:cNvPr id="24" name="Rounded Rectangle 23"/>
+          <p:cNvPr id="23" name="Rounded Rectangle 22"/>
           <p:cNvSpPr/>
           <p:nvPr/>
         </p:nvSpPr>
@@ -19073,7 +18653,7 @@
       </p:sp>
       <p:sp>
         <p:nvSpPr>
-          <p:cNvPr id="25" name="TextBox 24"/>
+          <p:cNvPr id="24" name="TextBox 23"/>
           <p:cNvSpPr txBox="1"/>
           <p:nvPr/>
         </p:nvSpPr>
@@ -19108,7 +18688,7 @@
       </p:sp>
       <p:sp>
         <p:nvSpPr>
-          <p:cNvPr id="26" name="TextBox 25"/>
+          <p:cNvPr id="25" name="TextBox 24"/>
           <p:cNvSpPr txBox="1"/>
           <p:nvPr/>
         </p:nvSpPr>
@@ -19145,7 +18725,7 @@
       </p:sp>
       <p:sp>
         <p:nvSpPr>
-          <p:cNvPr id="27" name="Right Arrow 26"/>
+          <p:cNvPr id="26" name="Right Arrow 25"/>
           <p:cNvSpPr/>
           <p:nvPr/>
         </p:nvSpPr>
@@ -19189,7 +18769,7 @@
       </p:sp>
       <p:sp>
         <p:nvSpPr>
-          <p:cNvPr id="28" name="Rounded Rectangle 27"/>
+          <p:cNvPr id="27" name="Rounded Rectangle 26"/>
           <p:cNvSpPr/>
           <p:nvPr/>
         </p:nvSpPr>
@@ -19237,7 +18817,7 @@
       </p:sp>
       <p:sp>
         <p:nvSpPr>
-          <p:cNvPr id="29" name="Rectangle 28"/>
+          <p:cNvPr id="28" name="Rectangle 27"/>
           <p:cNvSpPr/>
           <p:nvPr/>
         </p:nvSpPr>
@@ -19281,7 +18861,7 @@
       </p:sp>
       <p:sp>
         <p:nvSpPr>
-          <p:cNvPr id="30" name="Rounded Rectangle 29"/>
+          <p:cNvPr id="29" name="Rounded Rectangle 28"/>
           <p:cNvSpPr/>
           <p:nvPr/>
         </p:nvSpPr>
@@ -19335,7 +18915,7 @@
       </p:sp>
       <p:sp>
         <p:nvSpPr>
-          <p:cNvPr id="31" name="TextBox 30"/>
+          <p:cNvPr id="30" name="TextBox 29"/>
           <p:cNvSpPr txBox="1"/>
           <p:nvPr/>
         </p:nvSpPr>
@@ -19370,7 +18950,7 @@
       </p:sp>
       <p:sp>
         <p:nvSpPr>
-          <p:cNvPr id="32" name="TextBox 31"/>
+          <p:cNvPr id="31" name="TextBox 30"/>
           <p:cNvSpPr txBox="1"/>
           <p:nvPr/>
         </p:nvSpPr>
@@ -19408,7 +18988,7 @@
       </p:sp>
       <p:sp>
         <p:nvSpPr>
-          <p:cNvPr id="33" name="Rounded Rectangle 32"/>
+          <p:cNvPr id="32" name="Rounded Rectangle 31"/>
           <p:cNvSpPr/>
           <p:nvPr/>
         </p:nvSpPr>
@@ -19456,7 +19036,7 @@
       </p:sp>
       <p:sp>
         <p:nvSpPr>
-          <p:cNvPr id="34" name="TextBox 33"/>
+          <p:cNvPr id="33" name="TextBox 32"/>
           <p:cNvSpPr txBox="1"/>
           <p:nvPr/>
         </p:nvSpPr>
@@ -19491,7 +19071,7 @@
       </p:sp>
       <p:sp>
         <p:nvSpPr>
-          <p:cNvPr id="35" name="TextBox 34"/>
+          <p:cNvPr id="34" name="TextBox 33"/>
           <p:cNvSpPr txBox="1"/>
           <p:nvPr/>
         </p:nvSpPr>
@@ -19639,7 +19219,7 @@
         <p:spPr>
           <a:xfrm>
             <a:off x="457200" y="164592"/>
-            <a:ext cx="1828800" cy="329184"/>
+            <a:ext cx="2286000" cy="329184"/>
           </a:xfrm>
           <a:prstGeom prst="rect">
             <a:avLst/>
@@ -19668,41 +19248,6 @@
       <p:sp>
         <p:nvSpPr>
           <p:cNvPr id="5" name="TextBox 4"/>
-          <p:cNvSpPr txBox="1"/>
-          <p:nvPr/>
-        </p:nvSpPr>
-        <p:spPr>
-          <a:xfrm>
-            <a:off x="1691640" y="201168"/>
-            <a:ext cx="822960" cy="274320"/>
-          </a:xfrm>
-          <a:prstGeom prst="rect">
-            <a:avLst/>
-          </a:prstGeom>
-          <a:noFill/>
-        </p:spPr>
-        <p:txBody>
-          <a:bodyPr wrap="square" anchor="t" lIns="0" rIns="0" tIns="0" bIns="0">
-            <a:spAutoFit/>
-          </a:bodyPr>
-          <a:lstStyle/>
-          <a:p>
-            <a:pPr algn="l"/>
-            <a:r>
-              <a:rPr sz="1100" b="1">
-                <a:solidFill>
-                  <a:srgbClr val="2863C5"/>
-                </a:solidFill>
-                <a:latin typeface="Open Sans"/>
-              </a:rPr>
-              <a:t>BETA</a:t>
-            </a:r>
-          </a:p>
-        </p:txBody>
-      </p:sp>
-      <p:sp>
-        <p:nvSpPr>
-          <p:cNvPr id="6" name="TextBox 5"/>
           <p:cNvSpPr txBox="1"/>
           <p:nvPr/>
         </p:nvSpPr>
@@ -19737,7 +19282,7 @@
       </p:sp>
       <p:sp>
         <p:nvSpPr>
-          <p:cNvPr id="7" name="TextBox 6"/>
+          <p:cNvPr id="6" name="TextBox 5"/>
           <p:cNvSpPr txBox="1"/>
           <p:nvPr/>
         </p:nvSpPr>
@@ -19772,7 +19317,7 @@
       </p:sp>
       <p:sp>
         <p:nvSpPr>
-          <p:cNvPr id="8" name="TextBox 7"/>
+          <p:cNvPr id="7" name="TextBox 6"/>
           <p:cNvSpPr txBox="1"/>
           <p:nvPr/>
         </p:nvSpPr>
@@ -19807,7 +19352,7 @@
       </p:sp>
       <p:sp>
         <p:nvSpPr>
-          <p:cNvPr id="9" name="TextBox 8"/>
+          <p:cNvPr id="8" name="TextBox 7"/>
           <p:cNvSpPr txBox="1"/>
           <p:nvPr/>
         </p:nvSpPr>
@@ -19842,7 +19387,7 @@
       </p:sp>
       <p:sp>
         <p:nvSpPr>
-          <p:cNvPr id="10" name="Rounded Rectangle 9"/>
+          <p:cNvPr id="9" name="Rounded Rectangle 8"/>
           <p:cNvSpPr/>
           <p:nvPr/>
         </p:nvSpPr>
@@ -19890,7 +19435,7 @@
       </p:sp>
       <p:sp>
         <p:nvSpPr>
-          <p:cNvPr id="11" name="Rectangle 10"/>
+          <p:cNvPr id="10" name="Rectangle 9"/>
           <p:cNvSpPr/>
           <p:nvPr/>
         </p:nvSpPr>
@@ -19934,7 +19479,7 @@
       </p:sp>
       <p:sp>
         <p:nvSpPr>
-          <p:cNvPr id="12" name="TextBox 11"/>
+          <p:cNvPr id="11" name="TextBox 10"/>
           <p:cNvSpPr txBox="1"/>
           <p:nvPr/>
         </p:nvSpPr>
@@ -19969,7 +19514,7 @@
       </p:sp>
       <p:sp>
         <p:nvSpPr>
-          <p:cNvPr id="13" name="TextBox 12"/>
+          <p:cNvPr id="12" name="TextBox 11"/>
           <p:cNvSpPr txBox="1"/>
           <p:nvPr/>
         </p:nvSpPr>
@@ -20004,7 +19549,7 @@
       </p:sp>
       <p:sp>
         <p:nvSpPr>
-          <p:cNvPr id="14" name="TextBox 13"/>
+          <p:cNvPr id="13" name="TextBox 12"/>
           <p:cNvSpPr txBox="1"/>
           <p:nvPr/>
         </p:nvSpPr>
@@ -20039,7 +19584,7 @@
       </p:sp>
       <p:sp>
         <p:nvSpPr>
-          <p:cNvPr id="15" name="TextBox 14"/>
+          <p:cNvPr id="14" name="TextBox 13"/>
           <p:cNvSpPr txBox="1"/>
           <p:nvPr/>
         </p:nvSpPr>
@@ -20074,7 +19619,7 @@
       </p:sp>
       <p:sp>
         <p:nvSpPr>
-          <p:cNvPr id="16" name="Rounded Rectangle 15"/>
+          <p:cNvPr id="15" name="Rounded Rectangle 14"/>
           <p:cNvSpPr/>
           <p:nvPr/>
         </p:nvSpPr>
@@ -20128,7 +19673,7 @@
       </p:sp>
       <p:sp>
         <p:nvSpPr>
-          <p:cNvPr id="17" name="Rounded Rectangle 16"/>
+          <p:cNvPr id="16" name="Rounded Rectangle 15"/>
           <p:cNvSpPr/>
           <p:nvPr/>
         </p:nvSpPr>
@@ -20176,7 +19721,7 @@
       </p:sp>
       <p:sp>
         <p:nvSpPr>
-          <p:cNvPr id="18" name="Rectangle 17"/>
+          <p:cNvPr id="17" name="Rectangle 16"/>
           <p:cNvSpPr/>
           <p:nvPr/>
         </p:nvSpPr>
@@ -20220,7 +19765,7 @@
       </p:sp>
       <p:sp>
         <p:nvSpPr>
-          <p:cNvPr id="19" name="TextBox 18"/>
+          <p:cNvPr id="18" name="TextBox 17"/>
           <p:cNvSpPr txBox="1"/>
           <p:nvPr/>
         </p:nvSpPr>
@@ -20255,7 +19800,7 @@
       </p:sp>
       <p:sp>
         <p:nvSpPr>
-          <p:cNvPr id="20" name="TextBox 19"/>
+          <p:cNvPr id="19" name="TextBox 18"/>
           <p:cNvSpPr txBox="1"/>
           <p:nvPr/>
         </p:nvSpPr>
@@ -20290,7 +19835,7 @@
       </p:sp>
       <p:sp>
         <p:nvSpPr>
-          <p:cNvPr id="21" name="TextBox 20"/>
+          <p:cNvPr id="20" name="TextBox 19"/>
           <p:cNvSpPr txBox="1"/>
           <p:nvPr/>
         </p:nvSpPr>
@@ -20325,7 +19870,7 @@
       </p:sp>
       <p:sp>
         <p:nvSpPr>
-          <p:cNvPr id="22" name="TextBox 21"/>
+          <p:cNvPr id="21" name="TextBox 20"/>
           <p:cNvSpPr txBox="1"/>
           <p:nvPr/>
         </p:nvSpPr>
@@ -20360,7 +19905,7 @@
       </p:sp>
       <p:sp>
         <p:nvSpPr>
-          <p:cNvPr id="23" name="Rounded Rectangle 22"/>
+          <p:cNvPr id="22" name="Rounded Rectangle 21"/>
           <p:cNvSpPr/>
           <p:nvPr/>
         </p:nvSpPr>
@@ -20414,7 +19959,7 @@
       </p:sp>
       <p:sp>
         <p:nvSpPr>
-          <p:cNvPr id="24" name="Rounded Rectangle 23"/>
+          <p:cNvPr id="23" name="Rounded Rectangle 22"/>
           <p:cNvSpPr/>
           <p:nvPr/>
         </p:nvSpPr>
@@ -20462,7 +20007,7 @@
       </p:sp>
       <p:sp>
         <p:nvSpPr>
-          <p:cNvPr id="25" name="Rectangle 24"/>
+          <p:cNvPr id="24" name="Rectangle 23"/>
           <p:cNvSpPr/>
           <p:nvPr/>
         </p:nvSpPr>
@@ -20506,7 +20051,7 @@
       </p:sp>
       <p:sp>
         <p:nvSpPr>
-          <p:cNvPr id="26" name="TextBox 25"/>
+          <p:cNvPr id="25" name="TextBox 24"/>
           <p:cNvSpPr txBox="1"/>
           <p:nvPr/>
         </p:nvSpPr>
@@ -20541,7 +20086,7 @@
       </p:sp>
       <p:sp>
         <p:nvSpPr>
-          <p:cNvPr id="27" name="TextBox 26"/>
+          <p:cNvPr id="26" name="TextBox 25"/>
           <p:cNvSpPr txBox="1"/>
           <p:nvPr/>
         </p:nvSpPr>
@@ -20576,7 +20121,7 @@
       </p:sp>
       <p:sp>
         <p:nvSpPr>
-          <p:cNvPr id="28" name="TextBox 27"/>
+          <p:cNvPr id="27" name="TextBox 26"/>
           <p:cNvSpPr txBox="1"/>
           <p:nvPr/>
         </p:nvSpPr>
@@ -20611,7 +20156,7 @@
       </p:sp>
       <p:sp>
         <p:nvSpPr>
-          <p:cNvPr id="29" name="TextBox 28"/>
+          <p:cNvPr id="28" name="TextBox 27"/>
           <p:cNvSpPr txBox="1"/>
           <p:nvPr/>
         </p:nvSpPr>
@@ -20646,7 +20191,7 @@
       </p:sp>
       <p:sp>
         <p:nvSpPr>
-          <p:cNvPr id="30" name="Rounded Rectangle 29"/>
+          <p:cNvPr id="29" name="Rounded Rectangle 28"/>
           <p:cNvSpPr/>
           <p:nvPr/>
         </p:nvSpPr>
@@ -20700,7 +20245,7 @@
       </p:sp>
       <p:sp>
         <p:nvSpPr>
-          <p:cNvPr id="31" name="Rounded Rectangle 30"/>
+          <p:cNvPr id="30" name="Rounded Rectangle 29"/>
           <p:cNvSpPr/>
           <p:nvPr/>
         </p:nvSpPr>
@@ -20748,7 +20293,7 @@
       </p:sp>
       <p:sp>
         <p:nvSpPr>
-          <p:cNvPr id="32" name="Rectangle 31"/>
+          <p:cNvPr id="31" name="Rectangle 30"/>
           <p:cNvSpPr/>
           <p:nvPr/>
         </p:nvSpPr>
@@ -20792,7 +20337,7 @@
       </p:sp>
       <p:sp>
         <p:nvSpPr>
-          <p:cNvPr id="33" name="TextBox 32"/>
+          <p:cNvPr id="32" name="TextBox 31"/>
           <p:cNvSpPr txBox="1"/>
           <p:nvPr/>
         </p:nvSpPr>
@@ -20827,7 +20372,7 @@
       </p:sp>
       <p:sp>
         <p:nvSpPr>
-          <p:cNvPr id="34" name="TextBox 33"/>
+          <p:cNvPr id="33" name="TextBox 32"/>
           <p:cNvSpPr txBox="1"/>
           <p:nvPr/>
         </p:nvSpPr>
@@ -20862,7 +20407,7 @@
       </p:sp>
       <p:sp>
         <p:nvSpPr>
-          <p:cNvPr id="35" name="TextBox 34"/>
+          <p:cNvPr id="34" name="TextBox 33"/>
           <p:cNvSpPr txBox="1"/>
           <p:nvPr/>
         </p:nvSpPr>
@@ -20897,7 +20442,7 @@
       </p:sp>
       <p:sp>
         <p:nvSpPr>
-          <p:cNvPr id="36" name="TextBox 35"/>
+          <p:cNvPr id="35" name="TextBox 34"/>
           <p:cNvSpPr txBox="1"/>
           <p:nvPr/>
         </p:nvSpPr>
@@ -20932,7 +20477,7 @@
       </p:sp>
       <p:sp>
         <p:nvSpPr>
-          <p:cNvPr id="37" name="Rounded Rectangle 36"/>
+          <p:cNvPr id="36" name="Rounded Rectangle 35"/>
           <p:cNvSpPr/>
           <p:nvPr/>
         </p:nvSpPr>
@@ -20986,7 +20531,7 @@
       </p:sp>
       <p:sp>
         <p:nvSpPr>
-          <p:cNvPr id="38" name="Rounded Rectangle 37"/>
+          <p:cNvPr id="37" name="Rounded Rectangle 36"/>
           <p:cNvSpPr/>
           <p:nvPr/>
         </p:nvSpPr>
@@ -21032,7 +20577,7 @@
       </p:sp>
       <p:sp>
         <p:nvSpPr>
-          <p:cNvPr id="39" name="TextBox 38"/>
+          <p:cNvPr id="38" name="TextBox 37"/>
           <p:cNvSpPr txBox="1"/>
           <p:nvPr/>
         </p:nvSpPr>

--- a/myReclaim-Exec-Deck.pptx
+++ b/myReclaim-Exec-Deck.pptx
@@ -19359,42 +19359,77 @@
         <p:spPr>
           <a:xfrm>
             <a:off x="457200" y="1143000"/>
-            <a:ext cx="11430000" cy="914400"/>
-          </a:xfrm>
-          <a:prstGeom prst="rect">
-            <a:avLst/>
-          </a:prstGeom>
-          <a:noFill/>
-        </p:spPr>
-        <p:txBody>
-          <a:bodyPr wrap="square" anchor="t" lIns="0" rIns="0" tIns="0" bIns="0">
-            <a:spAutoFit/>
-          </a:bodyPr>
-          <a:lstStyle/>
-          <a:p>
-            <a:pPr algn="l"/>
-            <a:r>
-              <a:rPr sz="2200" b="1">
+            <a:ext cx="11430000" cy="868680"/>
+          </a:xfrm>
+          <a:prstGeom prst="rect">
+            <a:avLst/>
+          </a:prstGeom>
+          <a:noFill/>
+        </p:spPr>
+        <p:txBody>
+          <a:bodyPr wrap="square" anchor="t" lIns="0" rIns="0" tIns="0" bIns="0">
+            <a:spAutoFit/>
+          </a:bodyPr>
+          <a:lstStyle/>
+          <a:p>
+            <a:pPr algn="l"/>
+            <a:r>
+              <a:rPr sz="2400" b="1">
                 <a:solidFill>
                   <a:srgbClr val="0F172A"/>
                 </a:solidFill>
                 <a:latin typeface="Open Sans"/>
               </a:rPr>
-              <a:t>Four ways we can deliver the money — pick the highest tier each state allows.</a:t>
-            </a:r>
-          </a:p>
-        </p:txBody>
-      </p:sp>
-      <p:sp>
-        <p:nvSpPr>
-          <p:cNvPr id="9" name="Rounded Rectangle 8"/>
+              <a:t>The next unlock is regulatory, not technical.</a:t>
+            </a:r>
+          </a:p>
+        </p:txBody>
+      </p:sp>
+      <p:sp>
+        <p:nvSpPr>
+          <p:cNvPr id="9" name="TextBox 8"/>
+          <p:cNvSpPr txBox="1"/>
+          <p:nvPr/>
+        </p:nvSpPr>
+        <p:spPr>
+          <a:xfrm>
+            <a:off x="457200" y="1920240"/>
+            <a:ext cx="11430000" cy="457200"/>
+          </a:xfrm>
+          <a:prstGeom prst="rect">
+            <a:avLst/>
+          </a:prstGeom>
+          <a:noFill/>
+        </p:spPr>
+        <p:txBody>
+          <a:bodyPr wrap="square" anchor="t" lIns="0" rIns="0" tIns="0" bIns="0">
+            <a:spAutoFit/>
+          </a:bodyPr>
+          <a:lstStyle/>
+          <a:p>
+            <a:pPr algn="l"/>
+            <a:r>
+              <a:rPr sz="1100" b="0">
+                <a:solidFill>
+                  <a:srgbClr val="64748B"/>
+                </a:solidFill>
+                <a:latin typeface="Open Sans"/>
+              </a:rPr>
+              <a:t>For SmartCredit to submit claims on the member's behalf, we need state-approved representative status — or a third-party claim-submission API where one exists. The code is straightforward; the relationship is the moat.</a:t>
+            </a:r>
+          </a:p>
+        </p:txBody>
+      </p:sp>
+      <p:sp>
+        <p:nvSpPr>
+          <p:cNvPr id="10" name="Rounded Rectangle 9"/>
           <p:cNvSpPr/>
           <p:nvPr/>
         </p:nvSpPr>
         <p:spPr>
           <a:xfrm>
-            <a:off x="457200" y="2286000"/>
-            <a:ext cx="11247120" cy="886968"/>
+            <a:off x="457200" y="2514600"/>
+            <a:ext cx="11247120" cy="813816"/>
           </a:xfrm>
           <a:prstGeom prst="roundRect">
             <a:avLst>
@@ -19435,14 +19470,14 @@
       </p:sp>
       <p:sp>
         <p:nvSpPr>
-          <p:cNvPr id="10" name="Rectangle 9"/>
+          <p:cNvPr id="11" name="Rectangle 10"/>
           <p:cNvSpPr/>
           <p:nvPr/>
         </p:nvSpPr>
         <p:spPr>
           <a:xfrm>
-            <a:off x="457200" y="2286000"/>
-            <a:ext cx="201168" cy="886968"/>
+            <a:off x="457200" y="2514600"/>
+            <a:ext cx="201168" cy="813816"/>
           </a:xfrm>
           <a:prstGeom prst="rect">
             <a:avLst/>
@@ -19479,14 +19514,14 @@
       </p:sp>
       <p:sp>
         <p:nvSpPr>
-          <p:cNvPr id="11" name="TextBox 10"/>
-          <p:cNvSpPr txBox="1"/>
-          <p:nvPr/>
-        </p:nvSpPr>
-        <p:spPr>
-          <a:xfrm>
-            <a:off x="777240" y="2377440"/>
-            <a:ext cx="1280160" cy="292608"/>
+          <p:cNvPr id="12" name="TextBox 11"/>
+          <p:cNvSpPr txBox="1"/>
+          <p:nvPr/>
+        </p:nvSpPr>
+        <p:spPr>
+          <a:xfrm>
+            <a:off x="777240" y="2587752"/>
+            <a:ext cx="1280160" cy="274320"/>
           </a:xfrm>
           <a:prstGeom prst="rect">
             <a:avLst/>
@@ -19514,13 +19549,13 @@
       </p:sp>
       <p:sp>
         <p:nvSpPr>
-          <p:cNvPr id="12" name="TextBox 11"/>
-          <p:cNvSpPr txBox="1"/>
-          <p:nvPr/>
-        </p:nvSpPr>
-        <p:spPr>
-          <a:xfrm>
-            <a:off x="777240" y="2651760"/>
+          <p:cNvPr id="13" name="TextBox 12"/>
+          <p:cNvSpPr txBox="1"/>
+          <p:nvPr/>
+        </p:nvSpPr>
+        <p:spPr>
+          <a:xfrm>
+            <a:off x="777240" y="2834640"/>
             <a:ext cx="2377440" cy="384048"/>
           </a:xfrm>
           <a:prstGeom prst="rect">
@@ -19536,7 +19571,7 @@
           <a:p>
             <a:pPr algn="l"/>
             <a:r>
-              <a:rPr sz="1400" b="1">
+              <a:rPr sz="1200" b="1">
                 <a:solidFill>
                   <a:srgbClr val="0F172A"/>
                 </a:solidFill>
@@ -19549,14 +19584,14 @@
       </p:sp>
       <p:sp>
         <p:nvSpPr>
-          <p:cNvPr id="13" name="TextBox 12"/>
-          <p:cNvSpPr txBox="1"/>
-          <p:nvPr/>
-        </p:nvSpPr>
-        <p:spPr>
-          <a:xfrm>
-            <a:off x="3246120" y="2404872"/>
-            <a:ext cx="5303520" cy="777240"/>
+          <p:cNvPr id="14" name="TextBox 13"/>
+          <p:cNvSpPr txBox="1"/>
+          <p:nvPr/>
+        </p:nvSpPr>
+        <p:spPr>
+          <a:xfrm>
+            <a:off x="3246120" y="2606040"/>
+            <a:ext cx="5303520" cy="731520"/>
           </a:xfrm>
           <a:prstGeom prst="rect">
             <a:avLst/>
@@ -19577,21 +19612,21 @@
                 </a:solidFill>
                 <a:latin typeface="Open Sans"/>
               </a:rPr>
-              <a:t>Member clicks Claim → state's official site opens with property pre-selected.</a:t>
-            </a:r>
-          </a:p>
-        </p:txBody>
-      </p:sp>
-      <p:sp>
-        <p:nvSpPr>
-          <p:cNvPr id="14" name="TextBox 13"/>
-          <p:cNvSpPr txBox="1"/>
-          <p:nvPr/>
-        </p:nvSpPr>
-        <p:spPr>
-          <a:xfrm>
-            <a:off x="3246120" y="2880360"/>
-            <a:ext cx="5303520" cy="365760"/>
+              <a:t>Member clicks Claim → state's official site opens. Member files their own claim.</a:t>
+            </a:r>
+          </a:p>
+        </p:txBody>
+      </p:sp>
+      <p:sp>
+        <p:nvSpPr>
+          <p:cNvPr id="15" name="TextBox 14"/>
+          <p:cNvSpPr txBox="1"/>
+          <p:nvPr/>
+        </p:nvSpPr>
+        <p:spPr>
+          <a:xfrm>
+            <a:off x="3246120" y="3063240"/>
+            <a:ext cx="5303520" cy="320040"/>
           </a:xfrm>
           <a:prstGeom prst="rect">
             <a:avLst/>
@@ -19612,20 +19647,20 @@
                 </a:solidFill>
                 <a:latin typeface="Open Sans"/>
               </a:rPr>
-              <a:t>All states with online claims  ·  Zero regulatory exposure  ·  Ships with Sprint 1</a:t>
-            </a:r>
-          </a:p>
-        </p:txBody>
-      </p:sp>
-      <p:sp>
-        <p:nvSpPr>
-          <p:cNvPr id="15" name="Rounded Rectangle 14"/>
+              <a:t>All states with online filing  ·  Zero regulatory exposure  ·  Ships with Sprint 1</a:t>
+            </a:r>
+          </a:p>
+        </p:txBody>
+      </p:sp>
+      <p:sp>
+        <p:nvSpPr>
+          <p:cNvPr id="16" name="Rounded Rectangle 15"/>
           <p:cNvSpPr/>
           <p:nvPr/>
         </p:nvSpPr>
         <p:spPr>
           <a:xfrm>
-            <a:off x="8778240" y="2578608"/>
+            <a:off x="8778240" y="2770632"/>
             <a:ext cx="1554480" cy="365760"/>
           </a:xfrm>
           <a:prstGeom prst="roundRect">
@@ -19673,14 +19708,14 @@
       </p:sp>
       <p:sp>
         <p:nvSpPr>
-          <p:cNvPr id="16" name="Rounded Rectangle 15"/>
+          <p:cNvPr id="17" name="Rounded Rectangle 16"/>
           <p:cNvSpPr/>
           <p:nvPr/>
         </p:nvSpPr>
         <p:spPr>
           <a:xfrm>
-            <a:off x="457200" y="3246120"/>
-            <a:ext cx="11247120" cy="886968"/>
+            <a:off x="457200" y="3401568"/>
+            <a:ext cx="11247120" cy="813816"/>
           </a:xfrm>
           <a:prstGeom prst="roundRect">
             <a:avLst>
@@ -19721,14 +19756,14 @@
       </p:sp>
       <p:sp>
         <p:nvSpPr>
-          <p:cNvPr id="17" name="Rectangle 16"/>
+          <p:cNvPr id="18" name="Rectangle 17"/>
           <p:cNvSpPr/>
           <p:nvPr/>
         </p:nvSpPr>
         <p:spPr>
           <a:xfrm>
-            <a:off x="457200" y="3246120"/>
-            <a:ext cx="201168" cy="886968"/>
+            <a:off x="457200" y="3401568"/>
+            <a:ext cx="201168" cy="813816"/>
           </a:xfrm>
           <a:prstGeom prst="rect">
             <a:avLst/>
@@ -19765,14 +19800,14 @@
       </p:sp>
       <p:sp>
         <p:nvSpPr>
-          <p:cNvPr id="18" name="TextBox 17"/>
-          <p:cNvSpPr txBox="1"/>
-          <p:nvPr/>
-        </p:nvSpPr>
-        <p:spPr>
-          <a:xfrm>
-            <a:off x="777240" y="3337560"/>
-            <a:ext cx="1280160" cy="292608"/>
+          <p:cNvPr id="19" name="TextBox 18"/>
+          <p:cNvSpPr txBox="1"/>
+          <p:nvPr/>
+        </p:nvSpPr>
+        <p:spPr>
+          <a:xfrm>
+            <a:off x="777240" y="3474720"/>
+            <a:ext cx="1280160" cy="274320"/>
           </a:xfrm>
           <a:prstGeom prst="rect">
             <a:avLst/>
@@ -19800,13 +19835,13 @@
       </p:sp>
       <p:sp>
         <p:nvSpPr>
-          <p:cNvPr id="19" name="TextBox 18"/>
-          <p:cNvSpPr txBox="1"/>
-          <p:nvPr/>
-        </p:nvSpPr>
-        <p:spPr>
-          <a:xfrm>
-            <a:off x="777240" y="3611879"/>
+          <p:cNvPr id="20" name="TextBox 19"/>
+          <p:cNvSpPr txBox="1"/>
+          <p:nvPr/>
+        </p:nvSpPr>
+        <p:spPr>
+          <a:xfrm>
+            <a:off x="777240" y="3721607"/>
             <a:ext cx="2377440" cy="384048"/>
           </a:xfrm>
           <a:prstGeom prst="rect">
@@ -19822,7 +19857,7 @@
           <a:p>
             <a:pPr algn="l"/>
             <a:r>
-              <a:rPr sz="1400" b="1">
+              <a:rPr sz="1200" b="1">
                 <a:solidFill>
                   <a:srgbClr val="0F172A"/>
                 </a:solidFill>
@@ -19835,14 +19870,14 @@
       </p:sp>
       <p:sp>
         <p:nvSpPr>
-          <p:cNvPr id="20" name="TextBox 19"/>
-          <p:cNvSpPr txBox="1"/>
-          <p:nvPr/>
-        </p:nvSpPr>
-        <p:spPr>
-          <a:xfrm>
-            <a:off x="3246120" y="3364991"/>
-            <a:ext cx="5303520" cy="777240"/>
+          <p:cNvPr id="21" name="TextBox 20"/>
+          <p:cNvSpPr txBox="1"/>
+          <p:nvPr/>
+        </p:nvSpPr>
+        <p:spPr>
+          <a:xfrm>
+            <a:off x="3246120" y="3493008"/>
+            <a:ext cx="5303520" cy="731520"/>
           </a:xfrm>
           <a:prstGeom prst="rect">
             <a:avLst/>
@@ -19863,21 +19898,21 @@
                 </a:solidFill>
                 <a:latin typeface="Open Sans"/>
               </a:rPr>
-              <a:t>A SmartCredit extension auto-fills the state's claim form from the member's profile. Member still clicks Submit.</a:t>
-            </a:r>
-          </a:p>
-        </p:txBody>
-      </p:sp>
-      <p:sp>
-        <p:nvSpPr>
-          <p:cNvPr id="21" name="TextBox 20"/>
-          <p:cNvSpPr txBox="1"/>
-          <p:nvPr/>
-        </p:nvSpPr>
-        <p:spPr>
-          <a:xfrm>
-            <a:off x="3246120" y="3840480"/>
-            <a:ext cx="5303520" cy="365760"/>
+              <a:t>SmartCredit extension auto-fills the state's claim form from the member's profile. Member still clicks Submit.</a:t>
+            </a:r>
+          </a:p>
+        </p:txBody>
+      </p:sp>
+      <p:sp>
+        <p:nvSpPr>
+          <p:cNvPr id="22" name="TextBox 21"/>
+          <p:cNvSpPr txBox="1"/>
+          <p:nvPr/>
+        </p:nvSpPr>
+        <p:spPr>
+          <a:xfrm>
+            <a:off x="3246120" y="3950207"/>
+            <a:ext cx="5303520" cy="320040"/>
           </a:xfrm>
           <a:prstGeom prst="rect">
             <a:avLst/>
@@ -19898,20 +19933,20 @@
                 </a:solidFill>
                 <a:latin typeface="Open Sans"/>
               </a:rPr>
-              <a:t>CA · TX · NY · IL · OH · PA · NJ  ·  FL excluded (ToS forbids automation)  ·  Member-driven, no auto-submit</a:t>
-            </a:r>
-          </a:p>
-        </p:txBody>
-      </p:sp>
-      <p:sp>
-        <p:nvSpPr>
-          <p:cNvPr id="22" name="Rounded Rectangle 21"/>
+              <a:t>CA · TX · NY · IL · OH · PA · NJ  ·  FL excluded (ToS forbids automation)  ·  Still member-driven submit</a:t>
+            </a:r>
+          </a:p>
+        </p:txBody>
+      </p:sp>
+      <p:sp>
+        <p:nvSpPr>
+          <p:cNvPr id="23" name="Rounded Rectangle 22"/>
           <p:cNvSpPr/>
           <p:nvPr/>
         </p:nvSpPr>
         <p:spPr>
           <a:xfrm>
-            <a:off x="8778240" y="3538727"/>
+            <a:off x="8778240" y="3657600"/>
             <a:ext cx="1554480" cy="365760"/>
           </a:xfrm>
           <a:prstGeom prst="roundRect">
@@ -19959,14 +19994,14 @@
       </p:sp>
       <p:sp>
         <p:nvSpPr>
-          <p:cNvPr id="23" name="Rounded Rectangle 22"/>
+          <p:cNvPr id="24" name="Rounded Rectangle 23"/>
           <p:cNvSpPr/>
           <p:nvPr/>
         </p:nvSpPr>
         <p:spPr>
           <a:xfrm>
-            <a:off x="457200" y="4206240"/>
-            <a:ext cx="11247120" cy="886968"/>
+            <a:off x="457200" y="4288536"/>
+            <a:ext cx="11247120" cy="813816"/>
           </a:xfrm>
           <a:prstGeom prst="roundRect">
             <a:avLst>
@@ -20007,14 +20042,14 @@
       </p:sp>
       <p:sp>
         <p:nvSpPr>
-          <p:cNvPr id="24" name="Rectangle 23"/>
+          <p:cNvPr id="25" name="Rectangle 24"/>
           <p:cNvSpPr/>
           <p:nvPr/>
         </p:nvSpPr>
         <p:spPr>
           <a:xfrm>
-            <a:off x="457200" y="4206240"/>
-            <a:ext cx="201168" cy="886968"/>
+            <a:off x="457200" y="4288536"/>
+            <a:ext cx="201168" cy="813816"/>
           </a:xfrm>
           <a:prstGeom prst="rect">
             <a:avLst/>
@@ -20051,14 +20086,14 @@
       </p:sp>
       <p:sp>
         <p:nvSpPr>
-          <p:cNvPr id="25" name="TextBox 24"/>
-          <p:cNvSpPr txBox="1"/>
-          <p:nvPr/>
-        </p:nvSpPr>
-        <p:spPr>
-          <a:xfrm>
-            <a:off x="777240" y="4297679"/>
-            <a:ext cx="1280160" cy="292608"/>
+          <p:cNvPr id="26" name="TextBox 25"/>
+          <p:cNvSpPr txBox="1"/>
+          <p:nvPr/>
+        </p:nvSpPr>
+        <p:spPr>
+          <a:xfrm>
+            <a:off x="777240" y="4361688"/>
+            <a:ext cx="1280160" cy="274320"/>
           </a:xfrm>
           <a:prstGeom prst="rect">
             <a:avLst/>
@@ -20086,13 +20121,13 @@
       </p:sp>
       <p:sp>
         <p:nvSpPr>
-          <p:cNvPr id="26" name="TextBox 25"/>
-          <p:cNvSpPr txBox="1"/>
-          <p:nvPr/>
-        </p:nvSpPr>
-        <p:spPr>
-          <a:xfrm>
-            <a:off x="777240" y="4572000"/>
+          <p:cNvPr id="27" name="TextBox 26"/>
+          <p:cNvSpPr txBox="1"/>
+          <p:nvPr/>
+        </p:nvSpPr>
+        <p:spPr>
+          <a:xfrm>
+            <a:off x="777240" y="4608575"/>
             <a:ext cx="2377440" cy="384048"/>
           </a:xfrm>
           <a:prstGeom prst="rect">
@@ -20108,27 +20143,27 @@
           <a:p>
             <a:pPr algn="l"/>
             <a:r>
-              <a:rPr sz="1400" b="1">
+              <a:rPr sz="1200" b="1">
                 <a:solidFill>
                   <a:srgbClr val="0F172A"/>
                 </a:solidFill>
                 <a:latin typeface="Open Sans"/>
               </a:rPr>
-              <a:t>We file the claim for them</a:t>
-            </a:r>
-          </a:p>
-        </p:txBody>
-      </p:sp>
-      <p:sp>
-        <p:nvSpPr>
-          <p:cNvPr id="27" name="TextBox 26"/>
-          <p:cNvSpPr txBox="1"/>
-          <p:nvPr/>
-        </p:nvSpPr>
-        <p:spPr>
-          <a:xfrm>
-            <a:off x="3246120" y="4325112"/>
-            <a:ext cx="5303520" cy="777240"/>
+              <a:t>Registered representative — SmartCredit submits</a:t>
+            </a:r>
+          </a:p>
+        </p:txBody>
+      </p:sp>
+      <p:sp>
+        <p:nvSpPr>
+          <p:cNvPr id="28" name="TextBox 27"/>
+          <p:cNvSpPr txBox="1"/>
+          <p:nvPr/>
+        </p:nvSpPr>
+        <p:spPr>
+          <a:xfrm>
+            <a:off x="3246120" y="4379975"/>
+            <a:ext cx="5303520" cy="731520"/>
           </a:xfrm>
           <a:prstGeom prst="rect">
             <a:avLst/>
@@ -20149,21 +20184,21 @@
                 </a:solidFill>
                 <a:latin typeface="Open Sans"/>
               </a:rPr>
-              <a:t>SmartCredit registers as a claimant representative and submits paperwork on the member's behalf — high-value claims only.</a:t>
-            </a:r>
-          </a:p>
-        </p:txBody>
-      </p:sp>
-      <p:sp>
-        <p:nvSpPr>
-          <p:cNvPr id="28" name="TextBox 27"/>
-          <p:cNvSpPr txBox="1"/>
-          <p:nvPr/>
-        </p:nvSpPr>
-        <p:spPr>
-          <a:xfrm>
-            <a:off x="3246120" y="4800600"/>
-            <a:ext cx="5303520" cy="365760"/>
+              <a:t>SmartCredit registers under each state's claimant-representative regime and files claims on the member's behalf.</a:t>
+            </a:r>
+          </a:p>
+        </p:txBody>
+      </p:sp>
+      <p:sp>
+        <p:nvSpPr>
+          <p:cNvPr id="29" name="TextBox 28"/>
+          <p:cNvSpPr txBox="1"/>
+          <p:nvPr/>
+        </p:nvSpPr>
+        <p:spPr>
+          <a:xfrm>
+            <a:off x="3246120" y="4837175"/>
+            <a:ext cx="5303520" cy="320040"/>
           </a:xfrm>
           <a:prstGeom prst="rect">
             <a:avLst/>
@@ -20184,20 +20219,20 @@
                 </a:solidFill>
                 <a:latin typeface="Open Sans"/>
               </a:rPr>
-              <a:t>GA · OH · MI (registered finder regimes)  ·  Background-check + legal-review gated  ·  $500+ records only initially</a:t>
-            </a:r>
-          </a:p>
-        </p:txBody>
-      </p:sp>
-      <p:sp>
-        <p:nvSpPr>
-          <p:cNvPr id="29" name="Rounded Rectangle 28"/>
+              <a:t>GA (CDR) · OH (Registered Finder) · MI (locator) · FL (atty/CPA/PI)  ·  Background-check + legal review per state  ·  This is the regulatory unlock</a:t>
+            </a:r>
+          </a:p>
+        </p:txBody>
+      </p:sp>
+      <p:sp>
+        <p:nvSpPr>
+          <p:cNvPr id="30" name="Rounded Rectangle 29"/>
           <p:cNvSpPr/>
           <p:nvPr/>
         </p:nvSpPr>
         <p:spPr>
           <a:xfrm>
-            <a:off x="8778240" y="4498848"/>
+            <a:off x="8778240" y="4544568"/>
             <a:ext cx="1554480" cy="365760"/>
           </a:xfrm>
           <a:prstGeom prst="roundRect">
@@ -20238,21 +20273,21 @@
                 </a:solidFill>
                 <a:latin typeface="Open Sans"/>
               </a:rPr>
-              <a:t>Q4 2026</a:t>
-            </a:r>
-          </a:p>
-        </p:txBody>
-      </p:sp>
-      <p:sp>
-        <p:nvSpPr>
-          <p:cNvPr id="30" name="Rounded Rectangle 29"/>
+              <a:t>Q4 2026+</a:t>
+            </a:r>
+          </a:p>
+        </p:txBody>
+      </p:sp>
+      <p:sp>
+        <p:nvSpPr>
+          <p:cNvPr id="31" name="Rounded Rectangle 30"/>
           <p:cNvSpPr/>
           <p:nvPr/>
         </p:nvSpPr>
         <p:spPr>
           <a:xfrm>
-            <a:off x="457200" y="5166359"/>
-            <a:ext cx="11247120" cy="886968"/>
+            <a:off x="457200" y="5175503"/>
+            <a:ext cx="11247120" cy="813816"/>
           </a:xfrm>
           <a:prstGeom prst="roundRect">
             <a:avLst>
@@ -20293,14 +20328,14 @@
       </p:sp>
       <p:sp>
         <p:nvSpPr>
-          <p:cNvPr id="31" name="Rectangle 30"/>
+          <p:cNvPr id="32" name="Rectangle 31"/>
           <p:cNvSpPr/>
           <p:nvPr/>
         </p:nvSpPr>
         <p:spPr>
           <a:xfrm>
-            <a:off x="457200" y="5166359"/>
-            <a:ext cx="201168" cy="886968"/>
+            <a:off x="457200" y="5175503"/>
+            <a:ext cx="201168" cy="813816"/>
           </a:xfrm>
           <a:prstGeom prst="rect">
             <a:avLst/>
@@ -20337,14 +20372,14 @@
       </p:sp>
       <p:sp>
         <p:nvSpPr>
-          <p:cNvPr id="32" name="TextBox 31"/>
-          <p:cNvSpPr txBox="1"/>
-          <p:nvPr/>
-        </p:nvSpPr>
-        <p:spPr>
-          <a:xfrm>
-            <a:off x="777240" y="5257799"/>
-            <a:ext cx="1280160" cy="292608"/>
+          <p:cNvPr id="33" name="TextBox 32"/>
+          <p:cNvSpPr txBox="1"/>
+          <p:nvPr/>
+        </p:nvSpPr>
+        <p:spPr>
+          <a:xfrm>
+            <a:off x="777240" y="5248655"/>
+            <a:ext cx="1280160" cy="274320"/>
           </a:xfrm>
           <a:prstGeom prst="rect">
             <a:avLst/>
@@ -20372,13 +20407,13 @@
       </p:sp>
       <p:sp>
         <p:nvSpPr>
-          <p:cNvPr id="33" name="TextBox 32"/>
-          <p:cNvSpPr txBox="1"/>
-          <p:nvPr/>
-        </p:nvSpPr>
-        <p:spPr>
-          <a:xfrm>
-            <a:off x="777240" y="5532120"/>
+          <p:cNvPr id="34" name="TextBox 33"/>
+          <p:cNvSpPr txBox="1"/>
+          <p:nvPr/>
+        </p:nvSpPr>
+        <p:spPr>
+          <a:xfrm>
+            <a:off x="777240" y="5495543"/>
             <a:ext cx="2377440" cy="384048"/>
           </a:xfrm>
           <a:prstGeom prst="rect">
@@ -20394,27 +20429,27 @@
           <a:p>
             <a:pPr algn="l"/>
             <a:r>
-              <a:rPr sz="1400" b="1">
+              <a:rPr sz="1200" b="1">
                 <a:solidFill>
                   <a:srgbClr val="0F172A"/>
                 </a:solidFill>
                 <a:latin typeface="Open Sans"/>
               </a:rPr>
-              <a:t>Direct API submission</a:t>
-            </a:r>
-          </a:p>
-        </p:txBody>
-      </p:sp>
-      <p:sp>
-        <p:nvSpPr>
-          <p:cNvPr id="34" name="TextBox 33"/>
-          <p:cNvSpPr txBox="1"/>
-          <p:nvPr/>
-        </p:nvSpPr>
-        <p:spPr>
-          <a:xfrm>
-            <a:off x="3246120" y="5285231"/>
-            <a:ext cx="5303520" cy="777240"/>
+              <a:t>Direct claim-submission API</a:t>
+            </a:r>
+          </a:p>
+        </p:txBody>
+      </p:sp>
+      <p:sp>
+        <p:nvSpPr>
+          <p:cNvPr id="35" name="TextBox 34"/>
+          <p:cNvSpPr txBox="1"/>
+          <p:nvPr/>
+        </p:nvSpPr>
+        <p:spPr>
+          <a:xfrm>
+            <a:off x="3246120" y="5266943"/>
+            <a:ext cx="5303520" cy="731520"/>
           </a:xfrm>
           <a:prstGeom prst="rect">
             <a:avLst/>
@@ -20435,21 +20470,21 @@
                 </a:solidFill>
                 <a:latin typeface="Open Sans"/>
               </a:rPr>
-              <a:t>If a state ever exposes a claim-submission API, we wire it up.</a:t>
-            </a:r>
-          </a:p>
-        </p:txBody>
-      </p:sp>
-      <p:sp>
-        <p:nvSpPr>
-          <p:cNvPr id="35" name="TextBox 34"/>
-          <p:cNvSpPr txBox="1"/>
-          <p:nvPr/>
-        </p:nvSpPr>
-        <p:spPr>
-          <a:xfrm>
-            <a:off x="3246120" y="5760720"/>
-            <a:ext cx="5303520" cy="365760"/>
+              <a:t>Wire up a third-party API once a state, NAUPA, or Kelmar exposes one.</a:t>
+            </a:r>
+          </a:p>
+        </p:txBody>
+      </p:sp>
+      <p:sp>
+        <p:nvSpPr>
+          <p:cNvPr id="36" name="TextBox 35"/>
+          <p:cNvSpPr txBox="1"/>
+          <p:nvPr/>
+        </p:nvSpPr>
+        <p:spPr>
+          <a:xfrm>
+            <a:off x="3246120" y="5724143"/>
+            <a:ext cx="5303520" cy="320040"/>
           </a:xfrm>
           <a:prstGeom prst="rect">
             <a:avLst/>
@@ -20470,20 +20505,20 @@
                 </a:solidFill>
                 <a:latin typeface="Open Sans"/>
               </a:rPr>
-              <a:t>No state offers this today  ·  Watch NAUPA / Kelmar evolution  ·  Opportunistic — not on roadmap</a:t>
-            </a:r>
-          </a:p>
-        </p:txBody>
-      </p:sp>
-      <p:sp>
-        <p:nvSpPr>
-          <p:cNvPr id="36" name="Rounded Rectangle 35"/>
+              <a:t>No state offers this today  ·  Watch NAUPA III / Kelmar evolution  ·  Opportunistic — not scheduled</a:t>
+            </a:r>
+          </a:p>
+        </p:txBody>
+      </p:sp>
+      <p:sp>
+        <p:nvSpPr>
+          <p:cNvPr id="37" name="Rounded Rectangle 36"/>
           <p:cNvSpPr/>
           <p:nvPr/>
         </p:nvSpPr>
         <p:spPr>
           <a:xfrm>
-            <a:off x="8778240" y="5458968"/>
+            <a:off x="8778240" y="5431536"/>
             <a:ext cx="1554480" cy="365760"/>
           </a:xfrm>
           <a:prstGeom prst="roundRect">
@@ -20531,18 +20566,18 @@
       </p:sp>
       <p:sp>
         <p:nvSpPr>
-          <p:cNvPr id="37" name="Rounded Rectangle 36"/>
+          <p:cNvPr id="38" name="Rounded Rectangle 37"/>
           <p:cNvSpPr/>
           <p:nvPr/>
         </p:nvSpPr>
         <p:spPr>
           <a:xfrm>
-            <a:off x="457200" y="6263640"/>
-            <a:ext cx="11247120" cy="411480"/>
+            <a:off x="457200" y="6080760"/>
+            <a:ext cx="11247120" cy="594360"/>
           </a:xfrm>
           <a:prstGeom prst="roundRect">
             <a:avLst>
-              <a:gd name="adj" fmla="val 10000"/>
+              <a:gd name="adj" fmla="val 5000"/>
             </a:avLst>
           </a:prstGeom>
           <a:solidFill>
@@ -20577,35 +20612,70 @@
       </p:sp>
       <p:sp>
         <p:nvSpPr>
-          <p:cNvPr id="38" name="TextBox 37"/>
-          <p:cNvSpPr txBox="1"/>
-          <p:nvPr/>
-        </p:nvSpPr>
-        <p:spPr>
-          <a:xfrm>
-            <a:off x="640080" y="6309360"/>
-            <a:ext cx="10972800" cy="365760"/>
-          </a:xfrm>
-          <a:prstGeom prst="rect">
-            <a:avLst/>
-          </a:prstGeom>
-          <a:noFill/>
-        </p:spPr>
-        <p:txBody>
-          <a:bodyPr wrap="square" anchor="t" lIns="0" rIns="0" tIns="0" bIns="0">
-            <a:spAutoFit/>
-          </a:bodyPr>
-          <a:lstStyle/>
-          <a:p>
-            <a:pPr algn="l"/>
-            <a:r>
-              <a:rPr sz="1100" b="1">
+          <p:cNvPr id="39" name="TextBox 38"/>
+          <p:cNvSpPr txBox="1"/>
+          <p:nvPr/>
+        </p:nvSpPr>
+        <p:spPr>
+          <a:xfrm>
+            <a:off x="640080" y="6144768"/>
+            <a:ext cx="10972800" cy="292608"/>
+          </a:xfrm>
+          <a:prstGeom prst="rect">
+            <a:avLst/>
+          </a:prstGeom>
+          <a:noFill/>
+        </p:spPr>
+        <p:txBody>
+          <a:bodyPr wrap="square" anchor="t" lIns="0" rIns="0" tIns="0" bIns="0">
+            <a:spAutoFit/>
+          </a:bodyPr>
+          <a:lstStyle/>
+          <a:p>
+            <a:pPr algn="l"/>
+            <a:r>
+              <a:rPr sz="1300" b="1">
                 <a:solidFill>
                   <a:srgbClr val="FFFFFF"/>
                 </a:solidFill>
                 <a:latin typeface="Open Sans"/>
               </a:rPr>
-              <a:t>Tier 2 is the breakthrough — "we found money" → "we filled the form" is what nobody else can ship.</a:t>
+              <a:t>The technical work is done in days. The state-approval work is the program.</a:t>
+            </a:r>
+          </a:p>
+        </p:txBody>
+      </p:sp>
+      <p:sp>
+        <p:nvSpPr>
+          <p:cNvPr id="40" name="TextBox 39"/>
+          <p:cNvSpPr txBox="1"/>
+          <p:nvPr/>
+        </p:nvSpPr>
+        <p:spPr>
+          <a:xfrm>
+            <a:off x="640080" y="6419088"/>
+            <a:ext cx="10972800" cy="256032"/>
+          </a:xfrm>
+          <a:prstGeom prst="rect">
+            <a:avLst/>
+          </a:prstGeom>
+          <a:noFill/>
+        </p:spPr>
+        <p:txBody>
+          <a:bodyPr wrap="square" anchor="t" lIns="0" rIns="0" tIns="0" bIns="0">
+            <a:spAutoFit/>
+          </a:bodyPr>
+          <a:lstStyle/>
+          <a:p>
+            <a:pPr algn="l"/>
+            <a:r>
+              <a:rPr sz="1000" b="0">
+                <a:solidFill>
+                  <a:srgbClr val="CCDDFF"/>
+                </a:solidFill>
+                <a:latin typeface="Open Sans"/>
+              </a:rPr>
+              <a:t>Each state we register in expands what "we found you money" actually means — from "go file this" to "we filed it for you."</a:t>
             </a:r>
           </a:p>
         </p:txBody>

--- a/myReclaim-Exec-Deck.pptx
+++ b/myReclaim-Exec-Deck.pptx
@@ -9784,7 +9784,90 @@
       </p:sp>
       <p:sp>
         <p:nvSpPr>
-          <p:cNvPr id="71" name="TextBox 70"/>
+          <p:cNvPr id="71" name="Rounded Rectangle 70"/>
+          <p:cNvSpPr/>
+          <p:nvPr/>
+        </p:nvSpPr>
+        <p:spPr>
+          <a:xfrm>
+            <a:off x="3291840" y="5641848"/>
+            <a:ext cx="384048" cy="329184"/>
+          </a:xfrm>
+          <a:prstGeom prst="roundRect">
+            <a:avLst>
+              <a:gd name="adj" fmla="val 20000"/>
+            </a:avLst>
+          </a:prstGeom>
+          <a:solidFill>
+            <a:srgbClr val="FFFFFF"/>
+          </a:solidFill>
+          <a:ln w="6350">
+            <a:solidFill>
+              <a:srgbClr val="E11D48"/>
+            </a:solidFill>
+          </a:ln>
+          <a:effectLst/>
+        </p:spPr>
+        <p:style>
+          <a:lnRef idx="1">
+            <a:schemeClr val="accent1"/>
+          </a:lnRef>
+          <a:fillRef idx="3">
+            <a:schemeClr val="accent1"/>
+          </a:fillRef>
+          <a:effectRef idx="2">
+            <a:schemeClr val="accent1"/>
+          </a:effectRef>
+          <a:fontRef idx="minor">
+            <a:schemeClr val="lt1"/>
+          </a:fontRef>
+        </p:style>
+        <p:txBody>
+          <a:bodyPr rtlCol="0" anchor="ctr"/>
+          <a:lstStyle/>
+          <a:p>
+            <a:pPr algn="ctr"/>
+          </a:p>
+        </p:txBody>
+      </p:sp>
+      <p:sp>
+        <p:nvSpPr>
+          <p:cNvPr id="72" name="TextBox 71"/>
+          <p:cNvSpPr txBox="1"/>
+          <p:nvPr/>
+        </p:nvSpPr>
+        <p:spPr>
+          <a:xfrm>
+            <a:off x="3291840" y="5678424"/>
+            <a:ext cx="384048" cy="274320"/>
+          </a:xfrm>
+          <a:prstGeom prst="rect">
+            <a:avLst/>
+          </a:prstGeom>
+          <a:noFill/>
+        </p:spPr>
+        <p:txBody>
+          <a:bodyPr wrap="square" anchor="t" lIns="0" rIns="0" tIns="0" bIns="0">
+            <a:spAutoFit/>
+          </a:bodyPr>
+          <a:lstStyle/>
+          <a:p>
+            <a:pPr algn="ctr"/>
+            <a:r>
+              <a:rPr sz="1000" b="1">
+                <a:solidFill>
+                  <a:srgbClr val="E11D48"/>
+                </a:solidFill>
+                <a:latin typeface="Open Sans"/>
+              </a:rPr>
+              <a:t>UT</a:t>
+            </a:r>
+          </a:p>
+        </p:txBody>
+      </p:sp>
+      <p:sp>
+        <p:nvSpPr>
+          <p:cNvPr id="73" name="TextBox 72"/>
           <p:cNvSpPr txBox="1"/>
           <p:nvPr/>
         </p:nvSpPr>
@@ -9812,7 +9895,7 @@
                 </a:solidFill>
                 <a:latin typeface="Open Sans"/>
               </a:rPr>
-              <a:t>FL portal terms forbid automated access. WA statute prohibits commercial redistribution of the unclaimed-property owner list.</a:t>
+              <a:t>FL portal terms forbid automated access (rep-only via FL atty/CPA/PI). WA + UT statute prohibits commercial redistribution of the owner list.</a:t>
             </a:r>
           </a:p>
         </p:txBody>
@@ -10087,13 +10170,13 @@
           <a:p>
             <a:pPr algn="l"/>
             <a:r>
-              <a:rPr sz="2600" b="1">
+              <a:rPr sz="2200" b="1">
                 <a:solidFill>
                   <a:srgbClr val="0F172A"/>
                 </a:solidFill>
                 <a:latin typeface="Open Sans"/>
               </a:rPr>
-              <a:t>The next unlock is regulatory, not technical.</a:t>
+              <a:t>Three channels. E-file preferred. Mail when required. Rep when approved.</a:t>
             </a:r>
           </a:p>
         </p:txBody>
@@ -10122,13 +10205,13 @@
           <a:p>
             <a:pPr algn="l"/>
             <a:r>
-              <a:rPr sz="1200" b="0">
+              <a:rPr sz="1100" b="0">
                 <a:solidFill>
                   <a:srgbClr val="64748B"/>
                 </a:solidFill>
                 <a:latin typeface="Open Sans"/>
               </a:rPr>
-              <a:t>Every major state already accepts online claim filings. To file on the member's behalf — instead of handing them off — we need state-approved representative status. The code takes days. The state approval is the program.</a:t>
+              <a:t>Most states accept online claim filings — that's our v1 path. When a state requires a notarized paper packet, we ship it via Lob (already in production for our credit-dispute mailers). Filing on the member's behalf is a regulatory unlock per state, not a technical one.</a:t>
             </a:r>
           </a:p>
         </p:txBody>
@@ -10255,7 +10338,7 @@
                 </a:solidFill>
                 <a:latin typeface="Open Sans"/>
               </a:rPr>
-              <a:t>TODAY</a:t>
+              <a:t>v1 · DEFAULT</a:t>
             </a:r>
           </a:p>
         </p:txBody>
@@ -10290,7 +10373,7 @@
                 </a:solidFill>
                 <a:latin typeface="Open Sans"/>
               </a:rPr>
-              <a:t>Deep-link to state portal</a:t>
+              <a:t>Assisted e-file</a:t>
             </a:r>
           </a:p>
         </p:txBody>
@@ -10325,7 +10408,7 @@
                 </a:solidFill>
                 <a:latin typeface="Open Sans"/>
               </a:rPr>
-              <a:t>Who files</a:t>
+              <a:t>Who submits</a:t>
             </a:r>
           </a:p>
         </p:txBody>
@@ -10430,7 +10513,7 @@
                 </a:solidFill>
                 <a:latin typeface="Open Sans"/>
               </a:rPr>
-              <a:t>We surface the match → click → state's official portal</a:t>
+              <a:t>We prepare the packet → state's official portal → user submits</a:t>
             </a:r>
           </a:p>
         </p:txBody>
@@ -10465,7 +10548,7 @@
                 </a:solidFill>
                 <a:latin typeface="Open Sans"/>
               </a:rPr>
-              <a:t>Coverage</a:t>
+              <a:t>We track</a:t>
             </a:r>
           </a:p>
         </p:txBody>
@@ -10500,7 +10583,7 @@
                 </a:solidFill>
                 <a:latin typeface="Open Sans"/>
               </a:rPr>
-              <a:t>Every state with online filing</a:t>
+              <a:t>Claim ID + status updates back into SmartCredit</a:t>
             </a:r>
           </a:p>
         </p:txBody>
@@ -10535,7 +10618,7 @@
                 </a:solidFill>
                 <a:latin typeface="Open Sans"/>
               </a:rPr>
-              <a:t>Risk</a:t>
+              <a:t>Coverage</a:t>
             </a:r>
           </a:p>
         </p:txBody>
@@ -10570,7 +10653,7 @@
                 </a:solidFill>
                 <a:latin typeface="Open Sans"/>
               </a:rPr>
-              <a:t>None — zero regulatory exposure</a:t>
+              <a:t>Every state with online filing</a:t>
             </a:r>
           </a:p>
         </p:txBody>
@@ -10640,7 +10723,7 @@
                 </a:solidFill>
                 <a:latin typeface="Open Sans"/>
               </a:rPr>
-              <a:t>Ships with Sprint 1</a:t>
+              <a:t>Ships Sprint 1</a:t>
             </a:r>
           </a:p>
         </p:txBody>
@@ -10708,7 +10791,7 @@
             <a:avLst/>
           </a:prstGeom>
           <a:solidFill>
-            <a:srgbClr val="2863C5"/>
+            <a:srgbClr val="FFB352"/>
           </a:solidFill>
           <a:ln>
             <a:noFill/>
@@ -10763,11 +10846,11 @@
             <a:r>
               <a:rPr sz="1100" b="1">
                 <a:solidFill>
-                  <a:srgbClr val="2863C5"/>
-                </a:solidFill>
-                <a:latin typeface="Open Sans"/>
-              </a:rPr>
-              <a:t>TOMORROW</a:t>
+                  <a:srgbClr val="FFB352"/>
+                </a:solidFill>
+                <a:latin typeface="Open Sans"/>
+              </a:rPr>
+              <a:t>v1 · FALLBACK</a:t>
             </a:r>
           </a:p>
         </p:txBody>
@@ -10802,7 +10885,7 @@
                 </a:solidFill>
                 <a:latin typeface="Open Sans"/>
               </a:rPr>
-              <a:t>Registered representative — we file for them</a:t>
+              <a:t>Mail packet via Lob</a:t>
             </a:r>
           </a:p>
         </p:txBody>
@@ -10837,7 +10920,7 @@
                 </a:solidFill>
                 <a:latin typeface="Open Sans"/>
               </a:rPr>
-              <a:t>Who files</a:t>
+              <a:t>Who submits</a:t>
             </a:r>
           </a:p>
         </p:txBody>
@@ -10872,7 +10955,7 @@
                 </a:solidFill>
                 <a:latin typeface="Open Sans"/>
               </a:rPr>
-              <a:t>SmartCredit, on the member's behalf</a:t>
+              <a:t>The member, but we generate + send the paper</a:t>
             </a:r>
           </a:p>
         </p:txBody>
@@ -10942,7 +11025,7 @@
                 </a:solidFill>
                 <a:latin typeface="Open Sans"/>
               </a:rPr>
-              <a:t>Register under each state's claimant-rep regime</a:t>
+              <a:t>Notarized claim packet → Lob → state mail intake</a:t>
             </a:r>
           </a:p>
         </p:txBody>
@@ -10977,7 +11060,7 @@
                 </a:solidFill>
                 <a:latin typeface="Open Sans"/>
               </a:rPr>
-              <a:t>Coverage</a:t>
+              <a:t>Asset reused</a:t>
             </a:r>
           </a:p>
         </p:txBody>
@@ -11012,7 +11095,7 @@
                 </a:solidFill>
                 <a:latin typeface="Open Sans"/>
               </a:rPr>
-              <a:t>Per-state. Each registration is a deal of its own.</a:t>
+              <a:t>Same Lob rail SmartCredit already uses for credit-bureau dispute letters</a:t>
             </a:r>
           </a:p>
         </p:txBody>
@@ -11047,7 +11130,7 @@
                 </a:solidFill>
                 <a:latin typeface="Open Sans"/>
               </a:rPr>
-              <a:t>Risk</a:t>
+              <a:t>When</a:t>
             </a:r>
           </a:p>
         </p:txBody>
@@ -11082,7 +11165,7 @@
                 </a:solidFill>
                 <a:latin typeface="Open Sans"/>
               </a:rPr>
-              <a:t>Regulated. Background checks. Annual renewals.</a:t>
+              <a:t>States that require notarized physical paperwork</a:t>
             </a:r>
           </a:p>
         </p:txBody>
@@ -11152,7 +11235,7 @@
                 </a:solidFill>
                 <a:latin typeface="Open Sans"/>
               </a:rPr>
-              <a:t>Sprint 4+ once first state approves</a:t>
+              <a:t>Available now — no new vendor</a:t>
             </a:r>
           </a:p>
         </p:txBody>
@@ -11220,7 +11303,7 @@
             <a:avLst/>
           </a:prstGeom>
           <a:solidFill>
-            <a:srgbClr val="FC4C0B"/>
+            <a:srgbClr val="2863C5"/>
           </a:solidFill>
           <a:ln>
             <a:noFill/>
@@ -11275,11 +11358,11 @@
             <a:r>
               <a:rPr sz="1100" b="1">
                 <a:solidFill>
-                  <a:srgbClr val="FC4C0B"/>
-                </a:solidFill>
-                <a:latin typeface="Open Sans"/>
-              </a:rPr>
-              <a:t>WHERE WE START</a:t>
+                  <a:srgbClr val="2863C5"/>
+                </a:solidFill>
+                <a:latin typeface="Open Sans"/>
+              </a:rPr>
+              <a:t>v2 · UNLOCK</a:t>
             </a:r>
           </a:p>
         </p:txBody>
@@ -11314,7 +11397,7 @@
                 </a:solidFill>
                 <a:latin typeface="Open Sans"/>
               </a:rPr>
-              <a:t>Three concrete state programs</a:t>
+              <a:t>Registered representative</a:t>
             </a:r>
           </a:p>
         </p:txBody>
@@ -11349,7 +11432,7 @@
                 </a:solidFill>
                 <a:latin typeface="Open Sans"/>
               </a:rPr>
-              <a:t>Georgia</a:t>
+              <a:t>Who submits</a:t>
             </a:r>
           </a:p>
         </p:txBody>
@@ -11384,7 +11467,7 @@
                 </a:solidFill>
                 <a:latin typeface="Open Sans"/>
               </a:rPr>
-              <a:t>CDR program (live since Jul 2024). Registered reps get a searchable data file and can file claims for the member.</a:t>
+              <a:t>SmartCredit, on the member's behalf</a:t>
             </a:r>
           </a:p>
         </p:txBody>
@@ -11419,7 +11502,7 @@
                 </a:solidFill>
                 <a:latin typeface="Open Sans"/>
               </a:rPr>
-              <a:t>Florida</a:t>
+              <a:t>Georgia</a:t>
             </a:r>
           </a:p>
         </p:txBody>
@@ -11454,7 +11537,7 @@
                 </a:solidFill>
                 <a:latin typeface="Open Sans"/>
               </a:rPr>
-              <a:t>Reps must be FL attorney, CPA, or licensed PI registered with the Department. Smaller pool, stricter.</a:t>
+              <a:t>CDR program (live Jul 2024). Searchable file + claim filing.</a:t>
             </a:r>
           </a:p>
         </p:txBody>
@@ -11489,7 +11572,7 @@
                 </a:solidFill>
                 <a:latin typeface="Open Sans"/>
               </a:rPr>
-              <a:t>Ohio</a:t>
+              <a:t>Florida</a:t>
             </a:r>
           </a:p>
         </p:txBody>
@@ -11524,7 +11607,7 @@
                 </a:solidFill>
                 <a:latin typeface="Open Sans"/>
               </a:rPr>
-              <a:t>Registered Professional Finder path. Regulator-administered.</a:t>
+              <a:t>FL attorney, CPA, or licensed PI registered with the Dept.</a:t>
             </a:r>
           </a:p>
         </p:txBody>
@@ -11559,7 +11642,7 @@
                 </a:solidFill>
                 <a:latin typeface="Open Sans"/>
               </a:rPr>
-              <a:t>Fee cap</a:t>
+              <a:t>Ohio · Michigan</a:t>
             </a:r>
           </a:p>
         </p:txBody>
@@ -11594,20 +11677,90 @@
                 </a:solidFill>
                 <a:latin typeface="Open Sans"/>
               </a:rPr>
-              <a:t>GA caps third-party fees at 30% of recovery. We charge $0.</a:t>
-            </a:r>
-          </a:p>
-        </p:txBody>
-      </p:sp>
-      <p:sp>
-        <p:nvSpPr>
-          <p:cNvPr id="50" name="Rounded Rectangle 49"/>
+              <a:t>Registered Finder / locator path.</a:t>
+            </a:r>
+          </a:p>
+        </p:txBody>
+      </p:sp>
+      <p:sp>
+        <p:nvSpPr>
+          <p:cNvPr id="50" name="TextBox 49"/>
+          <p:cNvSpPr txBox="1"/>
+          <p:nvPr/>
+        </p:nvSpPr>
+        <p:spPr>
+          <a:xfrm>
+            <a:off x="8275320" y="5623560"/>
+            <a:ext cx="1188720" cy="256032"/>
+          </a:xfrm>
+          <a:prstGeom prst="rect">
+            <a:avLst/>
+          </a:prstGeom>
+          <a:noFill/>
+        </p:spPr>
+        <p:txBody>
+          <a:bodyPr wrap="square" anchor="t" lIns="0" rIns="0" tIns="0" bIns="0">
+            <a:spAutoFit/>
+          </a:bodyPr>
+          <a:lstStyle/>
+          <a:p>
+            <a:pPr algn="l"/>
+            <a:r>
+              <a:rPr sz="950" b="1">
+                <a:solidFill>
+                  <a:srgbClr val="2863C5"/>
+                </a:solidFill>
+                <a:latin typeface="Open Sans"/>
+              </a:rPr>
+              <a:t>Fee cap</a:t>
+            </a:r>
+          </a:p>
+        </p:txBody>
+      </p:sp>
+      <p:sp>
+        <p:nvSpPr>
+          <p:cNvPr id="51" name="TextBox 50"/>
+          <p:cNvSpPr txBox="1"/>
+          <p:nvPr/>
+        </p:nvSpPr>
+        <p:spPr>
+          <a:xfrm>
+            <a:off x="8275320" y="5861304"/>
+            <a:ext cx="3200400" cy="411480"/>
+          </a:xfrm>
+          <a:prstGeom prst="rect">
+            <a:avLst/>
+          </a:prstGeom>
+          <a:noFill/>
+        </p:spPr>
+        <p:txBody>
+          <a:bodyPr wrap="square" anchor="t" lIns="0" rIns="0" tIns="0" bIns="0">
+            <a:spAutoFit/>
+          </a:bodyPr>
+          <a:lstStyle/>
+          <a:p>
+            <a:pPr algn="l"/>
+            <a:r>
+              <a:rPr sz="950" b="0">
+                <a:solidFill>
+                  <a:srgbClr val="334155"/>
+                </a:solidFill>
+                <a:latin typeface="Open Sans"/>
+              </a:rPr>
+              <a:t>GA caps reps at 30%. We charge $0.</a:t>
+            </a:r>
+          </a:p>
+        </p:txBody>
+      </p:sp>
+      <p:sp>
+        <p:nvSpPr>
+          <p:cNvPr id="52" name="Rounded Rectangle 51"/>
           <p:cNvSpPr/>
           <p:nvPr/>
         </p:nvSpPr>
         <p:spPr>
           <a:xfrm>
-            <a:off x="457200" y="6126480"/>
+            <a:off x="457200" y="6080760"/>
             <a:ext cx="11247120" cy="502920"/>
           </a:xfrm>
           <a:prstGeom prst="roundRect">
@@ -11647,13 +11800,13 @@
       </p:sp>
       <p:sp>
         <p:nvSpPr>
-          <p:cNvPr id="51" name="TextBox 50"/>
-          <p:cNvSpPr txBox="1"/>
-          <p:nvPr/>
-        </p:nvSpPr>
-        <p:spPr>
-          <a:xfrm>
-            <a:off x="640080" y="6199632"/>
+          <p:cNvPr id="53" name="TextBox 52"/>
+          <p:cNvSpPr txBox="1"/>
+          <p:nvPr/>
+        </p:nvSpPr>
+        <p:spPr>
+          <a:xfrm>
+            <a:off x="640080" y="6153912"/>
             <a:ext cx="10972800" cy="292608"/>
           </a:xfrm>
           <a:prstGeom prst="rect">
@@ -12871,7 +13024,7 @@
                 </a:solidFill>
                 <a:latin typeface="Open Sans"/>
               </a:rPr>
-              <a:t>Deep-link claim flow shipped</a:t>
+              <a:t>Assisted e-file shipped (with mail-packet fallback via Lob)</a:t>
             </a:r>
           </a:p>
         </p:txBody>
@@ -12906,7 +13059,7 @@
                 </a:solidFill>
                 <a:latin typeface="Open Sans"/>
               </a:rPr>
-              <a:t>Member clicks Claim → state portal opens. Zero regulatory exposure. First retention signal lands.</a:t>
+              <a:t>Member confirms a match → SmartCredit preps the packet → user submits via state portal. Lob handles physical packets where states require it.</a:t>
             </a:r>
           </a:p>
         </p:txBody>

--- a/myReclaim-Exec-Deck.pptx
+++ b/myReclaim-Exec-Deck.pptx
@@ -7135,7 +7135,7 @@
                 </a:solidFill>
                 <a:latin typeface="Open Sans"/>
               </a:rPr>
-              <a:t>DATA INGESTION</a:t>
+              <a:t>DATA INGESTION · CUSTOMER-DRIVEN PRIORITY</a:t>
             </a:r>
           </a:p>
         </p:txBody>
@@ -7170,7 +7170,7 @@
                 </a:solidFill>
                 <a:latin typeface="Open Sans"/>
               </a:rPr>
-              <a:t>How we get the data — state by state, on a schedule.</a:t>
+              <a:t>Where our members live. What each state lets us do.</a:t>
             </a:r>
           </a:p>
         </p:txBody>
@@ -7184,55 +7184,51 @@
         <p:spPr>
           <a:xfrm>
             <a:off x="457200" y="1920240"/>
-            <a:ext cx="11430000" cy="457200"/>
-          </a:xfrm>
-          <a:prstGeom prst="rect">
-            <a:avLst/>
-          </a:prstGeom>
-          <a:noFill/>
-        </p:spPr>
-        <p:txBody>
-          <a:bodyPr wrap="square" anchor="t" lIns="0" rIns="0" tIns="0" bIns="0">
-            <a:spAutoFit/>
-          </a:bodyPr>
-          <a:lstStyle/>
-          <a:p>
-            <a:pPr algn="l"/>
-            <a:r>
-              <a:rPr sz="1200" b="0">
+            <a:ext cx="11430000" cy="411480"/>
+          </a:xfrm>
+          <a:prstGeom prst="rect">
+            <a:avLst/>
+          </a:prstGeom>
+          <a:noFill/>
+        </p:spPr>
+        <p:txBody>
+          <a:bodyPr wrap="square" anchor="t" lIns="0" rIns="0" tIns="0" bIns="0">
+            <a:spAutoFit/>
+          </a:bodyPr>
+          <a:lstStyle/>
+          <a:p>
+            <a:pPr algn="l"/>
+            <a:r>
+              <a:rPr sz="1100" b="0">
                 <a:solidFill>
                   <a:srgbClr val="64748B"/>
                 </a:solidFill>
                 <a:latin typeface="Open Sans"/>
               </a:rPr>
-              <a:t>There is no public MissingMoney API. Each state runs its own program. We sort 21 priority states into four ingest tiers based on what each state actually allows.</a:t>
-            </a:r>
-          </a:p>
-        </p:txBody>
-      </p:sp>
-      <p:sp>
-        <p:nvSpPr>
-          <p:cNvPr id="10" name="Rounded Rectangle 9"/>
+              <a:t>Top 10 customer states cover ~70% of the SmartCredit base. Three of the top five (FL, TX, GA) need a state agreement before we can ingest. CA is the only top-10 state with a clean public bulk feed — that's where the prototype starts.</a:t>
+            </a:r>
+          </a:p>
+        </p:txBody>
+      </p:sp>
+      <p:sp>
+        <p:nvSpPr>
+          <p:cNvPr id="10" name="Rectangle 9"/>
           <p:cNvSpPr/>
           <p:nvPr/>
         </p:nvSpPr>
         <p:spPr>
           <a:xfrm>
-            <a:off x="457200" y="2606040"/>
-            <a:ext cx="11247120" cy="822960"/>
-          </a:xfrm>
-          <a:prstGeom prst="roundRect">
-            <a:avLst>
-              <a:gd name="adj" fmla="val 3000"/>
-            </a:avLst>
+            <a:off x="457200" y="2468880"/>
+            <a:ext cx="11247120" cy="292608"/>
+          </a:xfrm>
+          <a:prstGeom prst="rect">
+            <a:avLst/>
           </a:prstGeom>
           <a:solidFill>
-            <a:srgbClr val="FFFFFF"/>
+            <a:srgbClr val="0F172A"/>
           </a:solidFill>
-          <a:ln w="6350">
-            <a:solidFill>
-              <a:srgbClr val="E2E8F0"/>
-            </a:solidFill>
+          <a:ln>
+            <a:noFill/>
           </a:ln>
           <a:effectLst/>
         </p:spPr>
@@ -7260,14 +7256,709 @@
       </p:sp>
       <p:sp>
         <p:nvSpPr>
-          <p:cNvPr id="11" name="Rectangle 10"/>
+          <p:cNvPr id="11" name="TextBox 10"/>
+          <p:cNvSpPr txBox="1"/>
+          <p:nvPr/>
+        </p:nvSpPr>
+        <p:spPr>
+          <a:xfrm>
+            <a:off x="548640" y="2523744"/>
+            <a:ext cx="457200" cy="201168"/>
+          </a:xfrm>
+          <a:prstGeom prst="rect">
+            <a:avLst/>
+          </a:prstGeom>
+          <a:noFill/>
+        </p:spPr>
+        <p:txBody>
+          <a:bodyPr wrap="square" anchor="t" lIns="0" rIns="0" tIns="0" bIns="0">
+            <a:spAutoFit/>
+          </a:bodyPr>
+          <a:lstStyle/>
+          <a:p>
+            <a:pPr algn="l"/>
+            <a:r>
+              <a:rPr sz="900" b="1">
+                <a:solidFill>
+                  <a:srgbClr val="FFFFFF"/>
+                </a:solidFill>
+                <a:latin typeface="Open Sans"/>
+              </a:rPr>
+              <a:t>#</a:t>
+            </a:r>
+          </a:p>
+        </p:txBody>
+      </p:sp>
+      <p:sp>
+        <p:nvSpPr>
+          <p:cNvPr id="12" name="TextBox 11"/>
+          <p:cNvSpPr txBox="1"/>
+          <p:nvPr/>
+        </p:nvSpPr>
+        <p:spPr>
+          <a:xfrm>
+            <a:off x="1051560" y="2523744"/>
+            <a:ext cx="822960" cy="201168"/>
+          </a:xfrm>
+          <a:prstGeom prst="rect">
+            <a:avLst/>
+          </a:prstGeom>
+          <a:noFill/>
+        </p:spPr>
+        <p:txBody>
+          <a:bodyPr wrap="square" anchor="t" lIns="0" rIns="0" tIns="0" bIns="0">
+            <a:spAutoFit/>
+          </a:bodyPr>
+          <a:lstStyle/>
+          <a:p>
+            <a:pPr algn="l"/>
+            <a:r>
+              <a:rPr sz="900" b="1">
+                <a:solidFill>
+                  <a:srgbClr val="FFFFFF"/>
+                </a:solidFill>
+                <a:latin typeface="Open Sans"/>
+              </a:rPr>
+              <a:t>STATE</a:t>
+            </a:r>
+          </a:p>
+        </p:txBody>
+      </p:sp>
+      <p:sp>
+        <p:nvSpPr>
+          <p:cNvPr id="13" name="TextBox 12"/>
+          <p:cNvSpPr txBox="1"/>
+          <p:nvPr/>
+        </p:nvSpPr>
+        <p:spPr>
+          <a:xfrm>
+            <a:off x="1920240" y="2523744"/>
+            <a:ext cx="1463040" cy="201168"/>
+          </a:xfrm>
+          <a:prstGeom prst="rect">
+            <a:avLst/>
+          </a:prstGeom>
+          <a:noFill/>
+        </p:spPr>
+        <p:txBody>
+          <a:bodyPr wrap="square" anchor="t" lIns="0" rIns="0" tIns="0" bIns="0">
+            <a:spAutoFit/>
+          </a:bodyPr>
+          <a:lstStyle/>
+          <a:p>
+            <a:pPr algn="l"/>
+            <a:r>
+              <a:rPr sz="900" b="1">
+                <a:solidFill>
+                  <a:srgbClr val="FFFFFF"/>
+                </a:solidFill>
+                <a:latin typeface="Open Sans"/>
+              </a:rPr>
+              <a:t>CUSTOMERS</a:t>
+            </a:r>
+          </a:p>
+        </p:txBody>
+      </p:sp>
+      <p:sp>
+        <p:nvSpPr>
+          <p:cNvPr id="14" name="TextBox 13"/>
+          <p:cNvSpPr txBox="1"/>
+          <p:nvPr/>
+        </p:nvSpPr>
+        <p:spPr>
+          <a:xfrm>
+            <a:off x="3520440" y="2523744"/>
+            <a:ext cx="1280160" cy="201168"/>
+          </a:xfrm>
+          <a:prstGeom prst="rect">
+            <a:avLst/>
+          </a:prstGeom>
+          <a:noFill/>
+        </p:spPr>
+        <p:txBody>
+          <a:bodyPr wrap="square" anchor="t" lIns="0" rIns="0" tIns="0" bIns="0">
+            <a:spAutoFit/>
+          </a:bodyPr>
+          <a:lstStyle/>
+          <a:p>
+            <a:pPr algn="l"/>
+            <a:r>
+              <a:rPr sz="900" b="1">
+                <a:solidFill>
+                  <a:srgbClr val="FFFFFF"/>
+                </a:solidFill>
+                <a:latin typeface="Open Sans"/>
+              </a:rPr>
+              <a:t>INGEST</a:t>
+            </a:r>
+          </a:p>
+        </p:txBody>
+      </p:sp>
+      <p:sp>
+        <p:nvSpPr>
+          <p:cNvPr id="15" name="TextBox 14"/>
+          <p:cNvSpPr txBox="1"/>
+          <p:nvPr/>
+        </p:nvSpPr>
+        <p:spPr>
+          <a:xfrm>
+            <a:off x="4937760" y="2523744"/>
+            <a:ext cx="6766560" cy="201168"/>
+          </a:xfrm>
+          <a:prstGeom prst="rect">
+            <a:avLst/>
+          </a:prstGeom>
+          <a:noFill/>
+        </p:spPr>
+        <p:txBody>
+          <a:bodyPr wrap="square" anchor="t" lIns="0" rIns="0" tIns="0" bIns="0">
+            <a:spAutoFit/>
+          </a:bodyPr>
+          <a:lstStyle/>
+          <a:p>
+            <a:pPr algn="l"/>
+            <a:r>
+              <a:rPr sz="900" b="1">
+                <a:solidFill>
+                  <a:srgbClr val="FFFFFF"/>
+                </a:solidFill>
+                <a:latin typeface="Open Sans"/>
+              </a:rPr>
+              <a:t>WHAT THAT MEANS</a:t>
+            </a:r>
+          </a:p>
+        </p:txBody>
+      </p:sp>
+      <p:sp>
+        <p:nvSpPr>
+          <p:cNvPr id="16" name="Rectangle 15"/>
           <p:cNvSpPr/>
           <p:nvPr/>
         </p:nvSpPr>
         <p:spPr>
           <a:xfrm>
-            <a:off x="457200" y="2606040"/>
-            <a:ext cx="164592" cy="822960"/>
+            <a:off x="457200" y="2761488"/>
+            <a:ext cx="11247120" cy="329184"/>
+          </a:xfrm>
+          <a:prstGeom prst="rect">
+            <a:avLst/>
+          </a:prstGeom>
+          <a:solidFill>
+            <a:srgbClr val="F8FAFC"/>
+          </a:solidFill>
+          <a:ln>
+            <a:noFill/>
+          </a:ln>
+          <a:effectLst/>
+        </p:spPr>
+        <p:style>
+          <a:lnRef idx="1">
+            <a:schemeClr val="accent1"/>
+          </a:lnRef>
+          <a:fillRef idx="3">
+            <a:schemeClr val="accent1"/>
+          </a:fillRef>
+          <a:effectRef idx="2">
+            <a:schemeClr val="accent1"/>
+          </a:effectRef>
+          <a:fontRef idx="minor">
+            <a:schemeClr val="lt1"/>
+          </a:fontRef>
+        </p:style>
+        <p:txBody>
+          <a:bodyPr rtlCol="0" anchor="ctr"/>
+          <a:lstStyle/>
+          <a:p>
+            <a:pPr algn="ctr"/>
+          </a:p>
+        </p:txBody>
+      </p:sp>
+      <p:sp>
+        <p:nvSpPr>
+          <p:cNvPr id="17" name="TextBox 16"/>
+          <p:cNvSpPr txBox="1"/>
+          <p:nvPr/>
+        </p:nvSpPr>
+        <p:spPr>
+          <a:xfrm>
+            <a:off x="548640" y="2834640"/>
+            <a:ext cx="457200" cy="201168"/>
+          </a:xfrm>
+          <a:prstGeom prst="rect">
+            <a:avLst/>
+          </a:prstGeom>
+          <a:noFill/>
+        </p:spPr>
+        <p:txBody>
+          <a:bodyPr wrap="square" anchor="t" lIns="0" rIns="0" tIns="0" bIns="0">
+            <a:spAutoFit/>
+          </a:bodyPr>
+          <a:lstStyle/>
+          <a:p>
+            <a:pPr algn="l"/>
+            <a:r>
+              <a:rPr sz="1100" b="1">
+                <a:solidFill>
+                  <a:srgbClr val="64748B"/>
+                </a:solidFill>
+                <a:latin typeface="Open Sans"/>
+              </a:rPr>
+              <a:t>1</a:t>
+            </a:r>
+          </a:p>
+        </p:txBody>
+      </p:sp>
+      <p:sp>
+        <p:nvSpPr>
+          <p:cNvPr id="18" name="TextBox 17"/>
+          <p:cNvSpPr txBox="1"/>
+          <p:nvPr/>
+        </p:nvSpPr>
+        <p:spPr>
+          <a:xfrm>
+            <a:off x="1051560" y="2816352"/>
+            <a:ext cx="822960" cy="219456"/>
+          </a:xfrm>
+          <a:prstGeom prst="rect">
+            <a:avLst/>
+          </a:prstGeom>
+          <a:noFill/>
+        </p:spPr>
+        <p:txBody>
+          <a:bodyPr wrap="square" anchor="t" lIns="0" rIns="0" tIns="0" bIns="0">
+            <a:spAutoFit/>
+          </a:bodyPr>
+          <a:lstStyle/>
+          <a:p>
+            <a:pPr algn="l"/>
+            <a:r>
+              <a:rPr sz="1400" b="1">
+                <a:solidFill>
+                  <a:srgbClr val="0F172A"/>
+                </a:solidFill>
+                <a:latin typeface="Open Sans"/>
+              </a:rPr>
+              <a:t>FL</a:t>
+            </a:r>
+          </a:p>
+        </p:txBody>
+      </p:sp>
+      <p:sp>
+        <p:nvSpPr>
+          <p:cNvPr id="19" name="TextBox 18"/>
+          <p:cNvSpPr txBox="1"/>
+          <p:nvPr/>
+        </p:nvSpPr>
+        <p:spPr>
+          <a:xfrm>
+            <a:off x="1920240" y="2825496"/>
+            <a:ext cx="1463040" cy="201168"/>
+          </a:xfrm>
+          <a:prstGeom prst="rect">
+            <a:avLst/>
+          </a:prstGeom>
+          <a:noFill/>
+        </p:spPr>
+        <p:txBody>
+          <a:bodyPr wrap="square" anchor="t" lIns="0" rIns="0" tIns="0" bIns="0">
+            <a:spAutoFit/>
+          </a:bodyPr>
+          <a:lstStyle/>
+          <a:p>
+            <a:pPr algn="l"/>
+            <a:r>
+              <a:rPr sz="1200" b="1">
+                <a:solidFill>
+                  <a:srgbClr val="0F172A"/>
+                </a:solidFill>
+                <a:latin typeface="Open Sans"/>
+              </a:rPr>
+              <a:t>65,400</a:t>
+            </a:r>
+          </a:p>
+        </p:txBody>
+      </p:sp>
+      <p:sp>
+        <p:nvSpPr>
+          <p:cNvPr id="20" name="Rounded Rectangle 19"/>
+          <p:cNvSpPr/>
+          <p:nvPr/>
+        </p:nvSpPr>
+        <p:spPr>
+          <a:xfrm>
+            <a:off x="3520440" y="2816352"/>
+            <a:ext cx="960120" cy="219456"/>
+          </a:xfrm>
+          <a:prstGeom prst="roundRect">
+            <a:avLst>
+              <a:gd name="adj" fmla="val 50000"/>
+            </a:avLst>
+          </a:prstGeom>
+          <a:solidFill>
+            <a:srgbClr val="E11D48"/>
+          </a:solidFill>
+          <a:ln>
+            <a:noFill/>
+          </a:ln>
+        </p:spPr>
+        <p:style>
+          <a:lnRef idx="1">
+            <a:schemeClr val="accent1"/>
+          </a:lnRef>
+          <a:fillRef idx="3">
+            <a:schemeClr val="accent1"/>
+          </a:fillRef>
+          <a:effectRef idx="2">
+            <a:schemeClr val="accent1"/>
+          </a:effectRef>
+          <a:fontRef idx="minor">
+            <a:schemeClr val="lt1"/>
+          </a:fontRef>
+        </p:style>
+        <p:txBody>
+          <a:bodyPr rtlCol="0" anchor="ctr" lIns="45720" rIns="45720" tIns="18288" bIns="18288"/>
+          <a:lstStyle/>
+          <a:p>
+            <a:pPr algn="ctr"/>
+            <a:r>
+              <a:rPr sz="800" b="1">
+                <a:solidFill>
+                  <a:srgbClr val="FFFFFF"/>
+                </a:solidFill>
+                <a:latin typeface="Open Sans"/>
+              </a:rPr>
+              <a:t>BLOCKED</a:t>
+            </a:r>
+          </a:p>
+        </p:txBody>
+      </p:sp>
+      <p:sp>
+        <p:nvSpPr>
+          <p:cNvPr id="21" name="TextBox 20"/>
+          <p:cNvSpPr txBox="1"/>
+          <p:nvPr/>
+        </p:nvSpPr>
+        <p:spPr>
+          <a:xfrm>
+            <a:off x="4937760" y="2834640"/>
+            <a:ext cx="6766560" cy="201168"/>
+          </a:xfrm>
+          <a:prstGeom prst="rect">
+            <a:avLst/>
+          </a:prstGeom>
+          <a:noFill/>
+        </p:spPr>
+        <p:txBody>
+          <a:bodyPr wrap="square" anchor="t" lIns="0" rIns="0" tIns="0" bIns="0">
+            <a:spAutoFit/>
+          </a:bodyPr>
+          <a:lstStyle/>
+          <a:p>
+            <a:pPr algn="l"/>
+            <a:r>
+              <a:rPr sz="1000" b="0">
+                <a:solidFill>
+                  <a:srgbClr val="334155"/>
+                </a:solidFill>
+                <a:latin typeface="Open Sans"/>
+              </a:rPr>
+              <a:t>FL atty/CPA/PI rep-only — partner or skip ingest</a:t>
+            </a:r>
+          </a:p>
+        </p:txBody>
+      </p:sp>
+      <p:sp>
+        <p:nvSpPr>
+          <p:cNvPr id="22" name="Rectangle 21"/>
+          <p:cNvSpPr/>
+          <p:nvPr/>
+        </p:nvSpPr>
+        <p:spPr>
+          <a:xfrm>
+            <a:off x="457200" y="3090672"/>
+            <a:ext cx="11247120" cy="329184"/>
+          </a:xfrm>
+          <a:prstGeom prst="rect">
+            <a:avLst/>
+          </a:prstGeom>
+          <a:solidFill>
+            <a:srgbClr val="FFFFFF"/>
+          </a:solidFill>
+          <a:ln>
+            <a:noFill/>
+          </a:ln>
+          <a:effectLst/>
+        </p:spPr>
+        <p:style>
+          <a:lnRef idx="1">
+            <a:schemeClr val="accent1"/>
+          </a:lnRef>
+          <a:fillRef idx="3">
+            <a:schemeClr val="accent1"/>
+          </a:fillRef>
+          <a:effectRef idx="2">
+            <a:schemeClr val="accent1"/>
+          </a:effectRef>
+          <a:fontRef idx="minor">
+            <a:schemeClr val="lt1"/>
+          </a:fontRef>
+        </p:style>
+        <p:txBody>
+          <a:bodyPr rtlCol="0" anchor="ctr"/>
+          <a:lstStyle/>
+          <a:p>
+            <a:pPr algn="ctr"/>
+          </a:p>
+        </p:txBody>
+      </p:sp>
+      <p:sp>
+        <p:nvSpPr>
+          <p:cNvPr id="23" name="TextBox 22"/>
+          <p:cNvSpPr txBox="1"/>
+          <p:nvPr/>
+        </p:nvSpPr>
+        <p:spPr>
+          <a:xfrm>
+            <a:off x="548640" y="3163824"/>
+            <a:ext cx="457200" cy="201168"/>
+          </a:xfrm>
+          <a:prstGeom prst="rect">
+            <a:avLst/>
+          </a:prstGeom>
+          <a:noFill/>
+        </p:spPr>
+        <p:txBody>
+          <a:bodyPr wrap="square" anchor="t" lIns="0" rIns="0" tIns="0" bIns="0">
+            <a:spAutoFit/>
+          </a:bodyPr>
+          <a:lstStyle/>
+          <a:p>
+            <a:pPr algn="l"/>
+            <a:r>
+              <a:rPr sz="1100" b="1">
+                <a:solidFill>
+                  <a:srgbClr val="64748B"/>
+                </a:solidFill>
+                <a:latin typeface="Open Sans"/>
+              </a:rPr>
+              <a:t>2</a:t>
+            </a:r>
+          </a:p>
+        </p:txBody>
+      </p:sp>
+      <p:sp>
+        <p:nvSpPr>
+          <p:cNvPr id="24" name="TextBox 23"/>
+          <p:cNvSpPr txBox="1"/>
+          <p:nvPr/>
+        </p:nvSpPr>
+        <p:spPr>
+          <a:xfrm>
+            <a:off x="1051560" y="3145536"/>
+            <a:ext cx="822960" cy="219456"/>
+          </a:xfrm>
+          <a:prstGeom prst="rect">
+            <a:avLst/>
+          </a:prstGeom>
+          <a:noFill/>
+        </p:spPr>
+        <p:txBody>
+          <a:bodyPr wrap="square" anchor="t" lIns="0" rIns="0" tIns="0" bIns="0">
+            <a:spAutoFit/>
+          </a:bodyPr>
+          <a:lstStyle/>
+          <a:p>
+            <a:pPr algn="l"/>
+            <a:r>
+              <a:rPr sz="1400" b="1">
+                <a:solidFill>
+                  <a:srgbClr val="0F172A"/>
+                </a:solidFill>
+                <a:latin typeface="Open Sans"/>
+              </a:rPr>
+              <a:t>TX</a:t>
+            </a:r>
+          </a:p>
+        </p:txBody>
+      </p:sp>
+      <p:sp>
+        <p:nvSpPr>
+          <p:cNvPr id="25" name="TextBox 24"/>
+          <p:cNvSpPr txBox="1"/>
+          <p:nvPr/>
+        </p:nvSpPr>
+        <p:spPr>
+          <a:xfrm>
+            <a:off x="1920240" y="3154679"/>
+            <a:ext cx="1463040" cy="201168"/>
+          </a:xfrm>
+          <a:prstGeom prst="rect">
+            <a:avLst/>
+          </a:prstGeom>
+          <a:noFill/>
+        </p:spPr>
+        <p:txBody>
+          <a:bodyPr wrap="square" anchor="t" lIns="0" rIns="0" tIns="0" bIns="0">
+            <a:spAutoFit/>
+          </a:bodyPr>
+          <a:lstStyle/>
+          <a:p>
+            <a:pPr algn="l"/>
+            <a:r>
+              <a:rPr sz="1200" b="1">
+                <a:solidFill>
+                  <a:srgbClr val="0F172A"/>
+                </a:solidFill>
+                <a:latin typeface="Open Sans"/>
+              </a:rPr>
+              <a:t>61,414</a:t>
+            </a:r>
+          </a:p>
+        </p:txBody>
+      </p:sp>
+      <p:sp>
+        <p:nvSpPr>
+          <p:cNvPr id="26" name="Rounded Rectangle 25"/>
+          <p:cNvSpPr/>
+          <p:nvPr/>
+        </p:nvSpPr>
+        <p:spPr>
+          <a:xfrm>
+            <a:off x="3520440" y="3145536"/>
+            <a:ext cx="960120" cy="219456"/>
+          </a:xfrm>
+          <a:prstGeom prst="roundRect">
+            <a:avLst>
+              <a:gd name="adj" fmla="val 50000"/>
+            </a:avLst>
+          </a:prstGeom>
+          <a:solidFill>
+            <a:srgbClr val="FFB352"/>
+          </a:solidFill>
+          <a:ln>
+            <a:noFill/>
+          </a:ln>
+        </p:spPr>
+        <p:style>
+          <a:lnRef idx="1">
+            <a:schemeClr val="accent1"/>
+          </a:lnRef>
+          <a:fillRef idx="3">
+            <a:schemeClr val="accent1"/>
+          </a:fillRef>
+          <a:effectRef idx="2">
+            <a:schemeClr val="accent1"/>
+          </a:effectRef>
+          <a:fontRef idx="minor">
+            <a:schemeClr val="lt1"/>
+          </a:fontRef>
+        </p:style>
+        <p:txBody>
+          <a:bodyPr rtlCol="0" anchor="ctr" lIns="45720" rIns="45720" tIns="18288" bIns="18288"/>
+          <a:lstStyle/>
+          <a:p>
+            <a:pPr algn="ctr"/>
+            <a:r>
+              <a:rPr sz="800" b="1">
+                <a:solidFill>
+                  <a:srgbClr val="FFFFFF"/>
+                </a:solidFill>
+                <a:latin typeface="Open Sans"/>
+              </a:rPr>
+              <a:t>REQUEST</a:t>
+            </a:r>
+          </a:p>
+        </p:txBody>
+      </p:sp>
+      <p:sp>
+        <p:nvSpPr>
+          <p:cNvPr id="27" name="TextBox 26"/>
+          <p:cNvSpPr txBox="1"/>
+          <p:nvPr/>
+        </p:nvSpPr>
+        <p:spPr>
+          <a:xfrm>
+            <a:off x="4937760" y="3163824"/>
+            <a:ext cx="6766560" cy="201168"/>
+          </a:xfrm>
+          <a:prstGeom prst="rect">
+            <a:avLst/>
+          </a:prstGeom>
+          <a:noFill/>
+        </p:spPr>
+        <p:txBody>
+          <a:bodyPr wrap="square" anchor="t" lIns="0" rIns="0" tIns="0" bIns="0">
+            <a:spAutoFit/>
+          </a:bodyPr>
+          <a:lstStyle/>
+          <a:p>
+            <a:pPr algn="l"/>
+            <a:r>
+              <a:rPr sz="1000" b="0">
+                <a:solidFill>
+                  <a:srgbClr val="334155"/>
+                </a:solidFill>
+                <a:latin typeface="Open Sans"/>
+              </a:rPr>
+              <a:t>Written data request + caching agreement</a:t>
+            </a:r>
+          </a:p>
+        </p:txBody>
+      </p:sp>
+      <p:sp>
+        <p:nvSpPr>
+          <p:cNvPr id="28" name="Rectangle 27"/>
+          <p:cNvSpPr/>
+          <p:nvPr/>
+        </p:nvSpPr>
+        <p:spPr>
+          <a:xfrm>
+            <a:off x="457200" y="3419856"/>
+            <a:ext cx="11247120" cy="329184"/>
+          </a:xfrm>
+          <a:prstGeom prst="rect">
+            <a:avLst/>
+          </a:prstGeom>
+          <a:solidFill>
+            <a:srgbClr val="F8FAFC"/>
+          </a:solidFill>
+          <a:ln>
+            <a:noFill/>
+          </a:ln>
+          <a:effectLst/>
+        </p:spPr>
+        <p:style>
+          <a:lnRef idx="1">
+            <a:schemeClr val="accent1"/>
+          </a:lnRef>
+          <a:fillRef idx="3">
+            <a:schemeClr val="accent1"/>
+          </a:fillRef>
+          <a:effectRef idx="2">
+            <a:schemeClr val="accent1"/>
+          </a:effectRef>
+          <a:fontRef idx="minor">
+            <a:schemeClr val="lt1"/>
+          </a:fontRef>
+        </p:style>
+        <p:txBody>
+          <a:bodyPr rtlCol="0" anchor="ctr"/>
+          <a:lstStyle/>
+          <a:p>
+            <a:pPr algn="ctr"/>
+          </a:p>
+        </p:txBody>
+      </p:sp>
+      <p:sp>
+        <p:nvSpPr>
+          <p:cNvPr id="29" name="Rectangle 28"/>
+          <p:cNvSpPr/>
+          <p:nvPr/>
+        </p:nvSpPr>
+        <p:spPr>
+          <a:xfrm>
+            <a:off x="457200" y="3419856"/>
+            <a:ext cx="109728" cy="329184"/>
           </a:xfrm>
           <a:prstGeom prst="rect">
             <a:avLst/>
@@ -7304,14 +7995,119 @@
       </p:sp>
       <p:sp>
         <p:nvSpPr>
-          <p:cNvPr id="12" name="Rounded Rectangle 11"/>
+          <p:cNvPr id="30" name="TextBox 29"/>
+          <p:cNvSpPr txBox="1"/>
+          <p:nvPr/>
+        </p:nvSpPr>
+        <p:spPr>
+          <a:xfrm>
+            <a:off x="548640" y="3493008"/>
+            <a:ext cx="457200" cy="201168"/>
+          </a:xfrm>
+          <a:prstGeom prst="rect">
+            <a:avLst/>
+          </a:prstGeom>
+          <a:noFill/>
+        </p:spPr>
+        <p:txBody>
+          <a:bodyPr wrap="square" anchor="t" lIns="0" rIns="0" tIns="0" bIns="0">
+            <a:spAutoFit/>
+          </a:bodyPr>
+          <a:lstStyle/>
+          <a:p>
+            <a:pPr algn="l"/>
+            <a:r>
+              <a:rPr sz="1100" b="1">
+                <a:solidFill>
+                  <a:srgbClr val="64748B"/>
+                </a:solidFill>
+                <a:latin typeface="Open Sans"/>
+              </a:rPr>
+              <a:t>3</a:t>
+            </a:r>
+          </a:p>
+        </p:txBody>
+      </p:sp>
+      <p:sp>
+        <p:nvSpPr>
+          <p:cNvPr id="31" name="TextBox 30"/>
+          <p:cNvSpPr txBox="1"/>
+          <p:nvPr/>
+        </p:nvSpPr>
+        <p:spPr>
+          <a:xfrm>
+            <a:off x="1051560" y="3474720"/>
+            <a:ext cx="822960" cy="219456"/>
+          </a:xfrm>
+          <a:prstGeom prst="rect">
+            <a:avLst/>
+          </a:prstGeom>
+          <a:noFill/>
+        </p:spPr>
+        <p:txBody>
+          <a:bodyPr wrap="square" anchor="t" lIns="0" rIns="0" tIns="0" bIns="0">
+            <a:spAutoFit/>
+          </a:bodyPr>
+          <a:lstStyle/>
+          <a:p>
+            <a:pPr algn="l"/>
+            <a:r>
+              <a:rPr sz="1400" b="1">
+                <a:solidFill>
+                  <a:srgbClr val="0F172A"/>
+                </a:solidFill>
+                <a:latin typeface="Open Sans"/>
+              </a:rPr>
+              <a:t>CA</a:t>
+            </a:r>
+          </a:p>
+        </p:txBody>
+      </p:sp>
+      <p:sp>
+        <p:nvSpPr>
+          <p:cNvPr id="32" name="TextBox 31"/>
+          <p:cNvSpPr txBox="1"/>
+          <p:nvPr/>
+        </p:nvSpPr>
+        <p:spPr>
+          <a:xfrm>
+            <a:off x="1920240" y="3483863"/>
+            <a:ext cx="1463040" cy="201168"/>
+          </a:xfrm>
+          <a:prstGeom prst="rect">
+            <a:avLst/>
+          </a:prstGeom>
+          <a:noFill/>
+        </p:spPr>
+        <p:txBody>
+          <a:bodyPr wrap="square" anchor="t" lIns="0" rIns="0" tIns="0" bIns="0">
+            <a:spAutoFit/>
+          </a:bodyPr>
+          <a:lstStyle/>
+          <a:p>
+            <a:pPr algn="l"/>
+            <a:r>
+              <a:rPr sz="1200" b="1">
+                <a:solidFill>
+                  <a:srgbClr val="0F172A"/>
+                </a:solidFill>
+                <a:latin typeface="Open Sans"/>
+              </a:rPr>
+              <a:t>44,222</a:t>
+            </a:r>
+          </a:p>
+        </p:txBody>
+      </p:sp>
+      <p:sp>
+        <p:nvSpPr>
+          <p:cNvPr id="33" name="Rounded Rectangle 32"/>
           <p:cNvSpPr/>
           <p:nvPr/>
         </p:nvSpPr>
         <p:spPr>
           <a:xfrm>
-            <a:off x="777240" y="2770632"/>
-            <a:ext cx="1188720" cy="329184"/>
+            <a:off x="3520440" y="3474720"/>
+            <a:ext cx="960120" cy="219456"/>
           </a:xfrm>
           <a:prstGeom prst="roundRect">
             <a:avLst>
@@ -7345,7 +8141,7 @@
           <a:p>
             <a:pPr algn="ctr"/>
             <a:r>
-              <a:rPr sz="1100" b="1">
+              <a:rPr sz="800" b="1">
                 <a:solidFill>
                   <a:srgbClr val="FFFFFF"/>
                 </a:solidFill>
@@ -7358,62 +8154,58 @@
       </p:sp>
       <p:sp>
         <p:nvSpPr>
-          <p:cNvPr id="13" name="TextBox 12"/>
-          <p:cNvSpPr txBox="1"/>
-          <p:nvPr/>
-        </p:nvSpPr>
-        <p:spPr>
-          <a:xfrm>
-            <a:off x="777240" y="3108960"/>
-            <a:ext cx="1828800" cy="292608"/>
-          </a:xfrm>
-          <a:prstGeom prst="rect">
-            <a:avLst/>
-          </a:prstGeom>
-          <a:noFill/>
-        </p:spPr>
-        <p:txBody>
-          <a:bodyPr wrap="square" anchor="t" lIns="0" rIns="0" tIns="0" bIns="0">
-            <a:spAutoFit/>
-          </a:bodyPr>
-          <a:lstStyle/>
-          <a:p>
-            <a:pPr algn="l"/>
-            <a:r>
-              <a:rPr sz="1100" b="0">
-                <a:solidFill>
-                  <a:srgbClr val="64748B"/>
-                </a:solidFill>
-                <a:latin typeface="Open Sans"/>
-              </a:rPr>
-              <a:t>Public bulk download</a:t>
-            </a:r>
-          </a:p>
-        </p:txBody>
-      </p:sp>
-      <p:sp>
-        <p:nvSpPr>
-          <p:cNvPr id="14" name="Rounded Rectangle 13"/>
+          <p:cNvPr id="34" name="TextBox 33"/>
+          <p:cNvSpPr txBox="1"/>
+          <p:nvPr/>
+        </p:nvSpPr>
+        <p:spPr>
+          <a:xfrm>
+            <a:off x="4937760" y="3493008"/>
+            <a:ext cx="6766560" cy="201168"/>
+          </a:xfrm>
+          <a:prstGeom prst="rect">
+            <a:avLst/>
+          </a:prstGeom>
+          <a:noFill/>
+        </p:spPr>
+        <p:txBody>
+          <a:bodyPr wrap="square" anchor="t" lIns="0" rIns="0" tIns="0" bIns="0">
+            <a:spAutoFit/>
+          </a:bodyPr>
+          <a:lstStyle/>
+          <a:p>
+            <a:pPr algn="l"/>
+            <a:r>
+              <a:rPr sz="1000" b="0">
+                <a:solidFill>
+                  <a:srgbClr val="334155"/>
+                </a:solidFill>
+                <a:latin typeface="Open Sans"/>
+              </a:rPr>
+              <a:t>Public CSV, weekly — 81M rows already loaded ✓</a:t>
+            </a:r>
+          </a:p>
+        </p:txBody>
+      </p:sp>
+      <p:sp>
+        <p:nvSpPr>
+          <p:cNvPr id="35" name="Rectangle 34"/>
           <p:cNvSpPr/>
           <p:nvPr/>
         </p:nvSpPr>
         <p:spPr>
           <a:xfrm>
-            <a:off x="2377440" y="2898648"/>
-            <a:ext cx="384048" cy="329184"/>
-          </a:xfrm>
-          <a:prstGeom prst="roundRect">
-            <a:avLst>
-              <a:gd name="adj" fmla="val 20000"/>
-            </a:avLst>
+            <a:off x="457200" y="3749039"/>
+            <a:ext cx="11247120" cy="329184"/>
+          </a:xfrm>
+          <a:prstGeom prst="rect">
+            <a:avLst/>
           </a:prstGeom>
           <a:solidFill>
             <a:srgbClr val="FFFFFF"/>
           </a:solidFill>
-          <a:ln w="6350">
-            <a:solidFill>
-              <a:srgbClr val="059669"/>
-            </a:solidFill>
+          <a:ln>
+            <a:noFill/>
           </a:ln>
           <a:effectLst/>
         </p:spPr>
@@ -7441,135 +8233,124 @@
       </p:sp>
       <p:sp>
         <p:nvSpPr>
-          <p:cNvPr id="15" name="TextBox 14"/>
-          <p:cNvSpPr txBox="1"/>
-          <p:nvPr/>
-        </p:nvSpPr>
-        <p:spPr>
-          <a:xfrm>
-            <a:off x="2377440" y="2935224"/>
-            <a:ext cx="384048" cy="274320"/>
-          </a:xfrm>
-          <a:prstGeom prst="rect">
-            <a:avLst/>
-          </a:prstGeom>
-          <a:noFill/>
-        </p:spPr>
-        <p:txBody>
-          <a:bodyPr wrap="square" anchor="t" lIns="0" rIns="0" tIns="0" bIns="0">
-            <a:spAutoFit/>
-          </a:bodyPr>
-          <a:lstStyle/>
-          <a:p>
-            <a:pPr algn="ctr"/>
-            <a:r>
-              <a:rPr sz="1000" b="1">
-                <a:solidFill>
-                  <a:srgbClr val="059669"/>
-                </a:solidFill>
-                <a:latin typeface="Open Sans"/>
-              </a:rPr>
-              <a:t>CA</a:t>
-            </a:r>
-          </a:p>
-        </p:txBody>
-      </p:sp>
-      <p:sp>
-        <p:nvSpPr>
-          <p:cNvPr id="16" name="TextBox 15"/>
-          <p:cNvSpPr txBox="1"/>
-          <p:nvPr/>
-        </p:nvSpPr>
-        <p:spPr>
-          <a:xfrm>
-            <a:off x="2377440" y="3246120"/>
-            <a:ext cx="9144000" cy="274320"/>
-          </a:xfrm>
-          <a:prstGeom prst="rect">
-            <a:avLst/>
-          </a:prstGeom>
-          <a:noFill/>
-        </p:spPr>
-        <p:txBody>
-          <a:bodyPr wrap="square" anchor="t" lIns="0" rIns="0" tIns="0" bIns="0">
-            <a:spAutoFit/>
-          </a:bodyPr>
-          <a:lstStyle/>
-          <a:p>
-            <a:pPr algn="l"/>
-            <a:r>
-              <a:rPr sz="1000" b="0">
-                <a:solidFill>
-                  <a:srgbClr val="334155"/>
-                </a:solidFill>
-                <a:latin typeface="Open Sans"/>
-              </a:rPr>
-              <a:t>California State Controller publishes the full database as zipped CSVs on sco.ca.gov, refreshed weekly. Already prototyped — 81M rows loaded.</a:t>
-            </a:r>
-          </a:p>
-        </p:txBody>
-      </p:sp>
-      <p:sp>
-        <p:nvSpPr>
-          <p:cNvPr id="17" name="Rounded Rectangle 16"/>
+          <p:cNvPr id="36" name="TextBox 35"/>
+          <p:cNvSpPr txBox="1"/>
+          <p:nvPr/>
+        </p:nvSpPr>
+        <p:spPr>
+          <a:xfrm>
+            <a:off x="548640" y="3822191"/>
+            <a:ext cx="457200" cy="201168"/>
+          </a:xfrm>
+          <a:prstGeom prst="rect">
+            <a:avLst/>
+          </a:prstGeom>
+          <a:noFill/>
+        </p:spPr>
+        <p:txBody>
+          <a:bodyPr wrap="square" anchor="t" lIns="0" rIns="0" tIns="0" bIns="0">
+            <a:spAutoFit/>
+          </a:bodyPr>
+          <a:lstStyle/>
+          <a:p>
+            <a:pPr algn="l"/>
+            <a:r>
+              <a:rPr sz="1100" b="1">
+                <a:solidFill>
+                  <a:srgbClr val="64748B"/>
+                </a:solidFill>
+                <a:latin typeface="Open Sans"/>
+              </a:rPr>
+              <a:t>4</a:t>
+            </a:r>
+          </a:p>
+        </p:txBody>
+      </p:sp>
+      <p:sp>
+        <p:nvSpPr>
+          <p:cNvPr id="37" name="TextBox 36"/>
+          <p:cNvSpPr txBox="1"/>
+          <p:nvPr/>
+        </p:nvSpPr>
+        <p:spPr>
+          <a:xfrm>
+            <a:off x="1051560" y="3803903"/>
+            <a:ext cx="822960" cy="219456"/>
+          </a:xfrm>
+          <a:prstGeom prst="rect">
+            <a:avLst/>
+          </a:prstGeom>
+          <a:noFill/>
+        </p:spPr>
+        <p:txBody>
+          <a:bodyPr wrap="square" anchor="t" lIns="0" rIns="0" tIns="0" bIns="0">
+            <a:spAutoFit/>
+          </a:bodyPr>
+          <a:lstStyle/>
+          <a:p>
+            <a:pPr algn="l"/>
+            <a:r>
+              <a:rPr sz="1400" b="1">
+                <a:solidFill>
+                  <a:srgbClr val="0F172A"/>
+                </a:solidFill>
+                <a:latin typeface="Open Sans"/>
+              </a:rPr>
+              <a:t>GA</a:t>
+            </a:r>
+          </a:p>
+        </p:txBody>
+      </p:sp>
+      <p:sp>
+        <p:nvSpPr>
+          <p:cNvPr id="38" name="TextBox 37"/>
+          <p:cNvSpPr txBox="1"/>
+          <p:nvPr/>
+        </p:nvSpPr>
+        <p:spPr>
+          <a:xfrm>
+            <a:off x="1920240" y="3813048"/>
+            <a:ext cx="1463040" cy="201168"/>
+          </a:xfrm>
+          <a:prstGeom prst="rect">
+            <a:avLst/>
+          </a:prstGeom>
+          <a:noFill/>
+        </p:spPr>
+        <p:txBody>
+          <a:bodyPr wrap="square" anchor="t" lIns="0" rIns="0" tIns="0" bIns="0">
+            <a:spAutoFit/>
+          </a:bodyPr>
+          <a:lstStyle/>
+          <a:p>
+            <a:pPr algn="l"/>
+            <a:r>
+              <a:rPr sz="1200" b="1">
+                <a:solidFill>
+                  <a:srgbClr val="0F172A"/>
+                </a:solidFill>
+                <a:latin typeface="Open Sans"/>
+              </a:rPr>
+              <a:t>29,566</a:t>
+            </a:r>
+          </a:p>
+        </p:txBody>
+      </p:sp>
+      <p:sp>
+        <p:nvSpPr>
+          <p:cNvPr id="39" name="Rounded Rectangle 38"/>
           <p:cNvSpPr/>
           <p:nvPr/>
         </p:nvSpPr>
         <p:spPr>
           <a:xfrm>
-            <a:off x="457200" y="3520440"/>
-            <a:ext cx="11247120" cy="822960"/>
+            <a:off x="3520440" y="3803903"/>
+            <a:ext cx="960120" cy="219456"/>
           </a:xfrm>
           <a:prstGeom prst="roundRect">
             <a:avLst>
-              <a:gd name="adj" fmla="val 3000"/>
+              <a:gd name="adj" fmla="val 50000"/>
             </a:avLst>
-          </a:prstGeom>
-          <a:solidFill>
-            <a:srgbClr val="FFFFFF"/>
-          </a:solidFill>
-          <a:ln w="6350">
-            <a:solidFill>
-              <a:srgbClr val="E2E8F0"/>
-            </a:solidFill>
-          </a:ln>
-          <a:effectLst/>
-        </p:spPr>
-        <p:style>
-          <a:lnRef idx="1">
-            <a:schemeClr val="accent1"/>
-          </a:lnRef>
-          <a:fillRef idx="3">
-            <a:schemeClr val="accent1"/>
-          </a:fillRef>
-          <a:effectRef idx="2">
-            <a:schemeClr val="accent1"/>
-          </a:effectRef>
-          <a:fontRef idx="minor">
-            <a:schemeClr val="lt1"/>
-          </a:fontRef>
-        </p:style>
-        <p:txBody>
-          <a:bodyPr rtlCol="0" anchor="ctr"/>
-          <a:lstStyle/>
-          <a:p>
-            <a:pPr algn="ctr"/>
-          </a:p>
-        </p:txBody>
-      </p:sp>
-      <p:sp>
-        <p:nvSpPr>
-          <p:cNvPr id="18" name="Rectangle 17"/>
-          <p:cNvSpPr/>
-          <p:nvPr/>
-        </p:nvSpPr>
-        <p:spPr>
-          <a:xfrm>
-            <a:off x="457200" y="3520440"/>
-            <a:ext cx="164592" cy="822960"/>
-          </a:xfrm>
-          <a:prstGeom prst="rect">
-            <a:avLst/>
           </a:prstGeom>
           <a:solidFill>
             <a:srgbClr val="FFB352"/>
@@ -7577,7 +8358,6 @@
           <a:ln>
             <a:noFill/>
           </a:ln>
-          <a:effectLst/>
         </p:spPr>
         <p:style>
           <a:lnRef idx="1">
@@ -7594,6 +8374,94 @@
           </a:fontRef>
         </p:style>
         <p:txBody>
+          <a:bodyPr rtlCol="0" anchor="ctr" lIns="45720" rIns="45720" tIns="18288" bIns="18288"/>
+          <a:lstStyle/>
+          <a:p>
+            <a:pPr algn="ctr"/>
+            <a:r>
+              <a:rPr sz="800" b="1">
+                <a:solidFill>
+                  <a:srgbClr val="FFFFFF"/>
+                </a:solidFill>
+                <a:latin typeface="Open Sans"/>
+              </a:rPr>
+              <a:t>REQUEST</a:t>
+            </a:r>
+          </a:p>
+        </p:txBody>
+      </p:sp>
+      <p:sp>
+        <p:nvSpPr>
+          <p:cNvPr id="40" name="TextBox 39"/>
+          <p:cNvSpPr txBox="1"/>
+          <p:nvPr/>
+        </p:nvSpPr>
+        <p:spPr>
+          <a:xfrm>
+            <a:off x="4937760" y="3822191"/>
+            <a:ext cx="6766560" cy="201168"/>
+          </a:xfrm>
+          <a:prstGeom prst="rect">
+            <a:avLst/>
+          </a:prstGeom>
+          <a:noFill/>
+        </p:spPr>
+        <p:txBody>
+          <a:bodyPr wrap="square" anchor="t" lIns="0" rIns="0" tIns="0" bIns="0">
+            <a:spAutoFit/>
+          </a:bodyPr>
+          <a:lstStyle/>
+          <a:p>
+            <a:pPr algn="l"/>
+            <a:r>
+              <a:rPr sz="1000" b="0">
+                <a:solidFill>
+                  <a:srgbClr val="334155"/>
+                </a:solidFill>
+                <a:latin typeface="Open Sans"/>
+              </a:rPr>
+              <a:t>CDR registration → searchable data file (live Jul '24)</a:t>
+            </a:r>
+          </a:p>
+        </p:txBody>
+      </p:sp>
+      <p:sp>
+        <p:nvSpPr>
+          <p:cNvPr id="41" name="Rectangle 40"/>
+          <p:cNvSpPr/>
+          <p:nvPr/>
+        </p:nvSpPr>
+        <p:spPr>
+          <a:xfrm>
+            <a:off x="457200" y="4078224"/>
+            <a:ext cx="11247120" cy="329184"/>
+          </a:xfrm>
+          <a:prstGeom prst="rect">
+            <a:avLst/>
+          </a:prstGeom>
+          <a:solidFill>
+            <a:srgbClr val="F8FAFC"/>
+          </a:solidFill>
+          <a:ln>
+            <a:noFill/>
+          </a:ln>
+          <a:effectLst/>
+        </p:spPr>
+        <p:style>
+          <a:lnRef idx="1">
+            <a:schemeClr val="accent1"/>
+          </a:lnRef>
+          <a:fillRef idx="3">
+            <a:schemeClr val="accent1"/>
+          </a:fillRef>
+          <a:effectRef idx="2">
+            <a:schemeClr val="accent1"/>
+          </a:effectRef>
+          <a:fontRef idx="minor">
+            <a:schemeClr val="lt1"/>
+          </a:fontRef>
+        </p:style>
+        <p:txBody>
           <a:bodyPr rtlCol="0" anchor="ctr"/>
           <a:lstStyle/>
           <a:p>
@@ -7603,14 +8471,119 @@
       </p:sp>
       <p:sp>
         <p:nvSpPr>
-          <p:cNvPr id="19" name="Rounded Rectangle 18"/>
+          <p:cNvPr id="42" name="TextBox 41"/>
+          <p:cNvSpPr txBox="1"/>
+          <p:nvPr/>
+        </p:nvSpPr>
+        <p:spPr>
+          <a:xfrm>
+            <a:off x="548640" y="4151376"/>
+            <a:ext cx="457200" cy="201168"/>
+          </a:xfrm>
+          <a:prstGeom prst="rect">
+            <a:avLst/>
+          </a:prstGeom>
+          <a:noFill/>
+        </p:spPr>
+        <p:txBody>
+          <a:bodyPr wrap="square" anchor="t" lIns="0" rIns="0" tIns="0" bIns="0">
+            <a:spAutoFit/>
+          </a:bodyPr>
+          <a:lstStyle/>
+          <a:p>
+            <a:pPr algn="l"/>
+            <a:r>
+              <a:rPr sz="1100" b="1">
+                <a:solidFill>
+                  <a:srgbClr val="64748B"/>
+                </a:solidFill>
+                <a:latin typeface="Open Sans"/>
+              </a:rPr>
+              <a:t>5</a:t>
+            </a:r>
+          </a:p>
+        </p:txBody>
+      </p:sp>
+      <p:sp>
+        <p:nvSpPr>
+          <p:cNvPr id="43" name="TextBox 42"/>
+          <p:cNvSpPr txBox="1"/>
+          <p:nvPr/>
+        </p:nvSpPr>
+        <p:spPr>
+          <a:xfrm>
+            <a:off x="1051560" y="4133087"/>
+            <a:ext cx="822960" cy="219456"/>
+          </a:xfrm>
+          <a:prstGeom prst="rect">
+            <a:avLst/>
+          </a:prstGeom>
+          <a:noFill/>
+        </p:spPr>
+        <p:txBody>
+          <a:bodyPr wrap="square" anchor="t" lIns="0" rIns="0" tIns="0" bIns="0">
+            <a:spAutoFit/>
+          </a:bodyPr>
+          <a:lstStyle/>
+          <a:p>
+            <a:pPr algn="l"/>
+            <a:r>
+              <a:rPr sz="1400" b="1">
+                <a:solidFill>
+                  <a:srgbClr val="0F172A"/>
+                </a:solidFill>
+                <a:latin typeface="Open Sans"/>
+              </a:rPr>
+              <a:t>NY</a:t>
+            </a:r>
+          </a:p>
+        </p:txBody>
+      </p:sp>
+      <p:sp>
+        <p:nvSpPr>
+          <p:cNvPr id="44" name="TextBox 43"/>
+          <p:cNvSpPr txBox="1"/>
+          <p:nvPr/>
+        </p:nvSpPr>
+        <p:spPr>
+          <a:xfrm>
+            <a:off x="1920240" y="4142232"/>
+            <a:ext cx="1463040" cy="201168"/>
+          </a:xfrm>
+          <a:prstGeom prst="rect">
+            <a:avLst/>
+          </a:prstGeom>
+          <a:noFill/>
+        </p:spPr>
+        <p:txBody>
+          <a:bodyPr wrap="square" anchor="t" lIns="0" rIns="0" tIns="0" bIns="0">
+            <a:spAutoFit/>
+          </a:bodyPr>
+          <a:lstStyle/>
+          <a:p>
+            <a:pPr algn="l"/>
+            <a:r>
+              <a:rPr sz="1200" b="1">
+                <a:solidFill>
+                  <a:srgbClr val="0F172A"/>
+                </a:solidFill>
+                <a:latin typeface="Open Sans"/>
+              </a:rPr>
+              <a:t>22,137</a:t>
+            </a:r>
+          </a:p>
+        </p:txBody>
+      </p:sp>
+      <p:sp>
+        <p:nvSpPr>
+          <p:cNvPr id="45" name="Rounded Rectangle 44"/>
           <p:cNvSpPr/>
           <p:nvPr/>
         </p:nvSpPr>
         <p:spPr>
           <a:xfrm>
-            <a:off x="777240" y="3685032"/>
-            <a:ext cx="1188720" cy="329184"/>
+            <a:off x="3520440" y="4133087"/>
+            <a:ext cx="960120" cy="219456"/>
           </a:xfrm>
           <a:prstGeom prst="roundRect">
             <a:avLst>
@@ -7644,7 +8617,7 @@
           <a:p>
             <a:pPr algn="ctr"/>
             <a:r>
-              <a:rPr sz="1100" b="1">
+              <a:rPr sz="800" b="1">
                 <a:solidFill>
                   <a:srgbClr val="FFFFFF"/>
                 </a:solidFill>
@@ -7657,62 +8630,58 @@
       </p:sp>
       <p:sp>
         <p:nvSpPr>
-          <p:cNvPr id="20" name="TextBox 19"/>
-          <p:cNvSpPr txBox="1"/>
-          <p:nvPr/>
-        </p:nvSpPr>
-        <p:spPr>
-          <a:xfrm>
-            <a:off x="777240" y="4023360"/>
-            <a:ext cx="1828800" cy="292608"/>
-          </a:xfrm>
-          <a:prstGeom prst="rect">
-            <a:avLst/>
-          </a:prstGeom>
-          <a:noFill/>
-        </p:spPr>
-        <p:txBody>
-          <a:bodyPr wrap="square" anchor="t" lIns="0" rIns="0" tIns="0" bIns="0">
-            <a:spAutoFit/>
-          </a:bodyPr>
-          <a:lstStyle/>
-          <a:p>
-            <a:pPr algn="l"/>
-            <a:r>
-              <a:rPr sz="1100" b="0">
-                <a:solidFill>
-                  <a:srgbClr val="64748B"/>
-                </a:solidFill>
-                <a:latin typeface="Open Sans"/>
-              </a:rPr>
-              <a:t>Permission / API access required</a:t>
-            </a:r>
-          </a:p>
-        </p:txBody>
-      </p:sp>
-      <p:sp>
-        <p:nvSpPr>
-          <p:cNvPr id="21" name="Rounded Rectangle 20"/>
+          <p:cNvPr id="46" name="TextBox 45"/>
+          <p:cNvSpPr txBox="1"/>
+          <p:nvPr/>
+        </p:nvSpPr>
+        <p:spPr>
+          <a:xfrm>
+            <a:off x="4937760" y="4151376"/>
+            <a:ext cx="6766560" cy="201168"/>
+          </a:xfrm>
+          <a:prstGeom prst="rect">
+            <a:avLst/>
+          </a:prstGeom>
+          <a:noFill/>
+        </p:spPr>
+        <p:txBody>
+          <a:bodyPr wrap="square" anchor="t" lIns="0" rIns="0" tIns="0" bIns="0">
+            <a:spAutoFit/>
+          </a:bodyPr>
+          <a:lstStyle/>
+          <a:p>
+            <a:pPr algn="l"/>
+            <a:r>
+              <a:rPr sz="1000" b="0">
+                <a:solidFill>
+                  <a:srgbClr val="334155"/>
+                </a:solidFill>
+                <a:latin typeface="Open Sans"/>
+              </a:rPr>
+              <a:t>Secure-FTP owner-name file, quarterly</a:t>
+            </a:r>
+          </a:p>
+        </p:txBody>
+      </p:sp>
+      <p:sp>
+        <p:nvSpPr>
+          <p:cNvPr id="47" name="Rectangle 46"/>
           <p:cNvSpPr/>
           <p:nvPr/>
         </p:nvSpPr>
         <p:spPr>
           <a:xfrm>
-            <a:off x="2377440" y="3813048"/>
-            <a:ext cx="384048" cy="329184"/>
-          </a:xfrm>
-          <a:prstGeom prst="roundRect">
-            <a:avLst>
-              <a:gd name="adj" fmla="val 20000"/>
-            </a:avLst>
+            <a:off x="457200" y="4407408"/>
+            <a:ext cx="11247120" cy="329184"/>
+          </a:xfrm>
+          <a:prstGeom prst="rect">
+            <a:avLst/>
           </a:prstGeom>
           <a:solidFill>
             <a:srgbClr val="FFFFFF"/>
           </a:solidFill>
-          <a:ln w="6350">
-            <a:solidFill>
-              <a:srgbClr val="FFB352"/>
-            </a:solidFill>
+          <a:ln>
+            <a:noFill/>
           </a:ln>
           <a:effectLst/>
         </p:spPr>
@@ -7740,467 +8709,124 @@
       </p:sp>
       <p:sp>
         <p:nvSpPr>
-          <p:cNvPr id="22" name="TextBox 21"/>
-          <p:cNvSpPr txBox="1"/>
-          <p:nvPr/>
-        </p:nvSpPr>
-        <p:spPr>
-          <a:xfrm>
-            <a:off x="2377440" y="3849624"/>
-            <a:ext cx="384048" cy="274320"/>
-          </a:xfrm>
-          <a:prstGeom prst="rect">
-            <a:avLst/>
-          </a:prstGeom>
-          <a:noFill/>
-        </p:spPr>
-        <p:txBody>
-          <a:bodyPr wrap="square" anchor="t" lIns="0" rIns="0" tIns="0" bIns="0">
-            <a:spAutoFit/>
-          </a:bodyPr>
-          <a:lstStyle/>
-          <a:p>
-            <a:pPr algn="ctr"/>
-            <a:r>
-              <a:rPr sz="1000" b="1">
-                <a:solidFill>
-                  <a:srgbClr val="FFB352"/>
-                </a:solidFill>
-                <a:latin typeface="Open Sans"/>
-              </a:rPr>
-              <a:t>TX</a:t>
-            </a:r>
-          </a:p>
-        </p:txBody>
-      </p:sp>
-      <p:sp>
-        <p:nvSpPr>
-          <p:cNvPr id="23" name="Rounded Rectangle 22"/>
+          <p:cNvPr id="48" name="TextBox 47"/>
+          <p:cNvSpPr txBox="1"/>
+          <p:nvPr/>
+        </p:nvSpPr>
+        <p:spPr>
+          <a:xfrm>
+            <a:off x="548640" y="4480560"/>
+            <a:ext cx="457200" cy="201168"/>
+          </a:xfrm>
+          <a:prstGeom prst="rect">
+            <a:avLst/>
+          </a:prstGeom>
+          <a:noFill/>
+        </p:spPr>
+        <p:txBody>
+          <a:bodyPr wrap="square" anchor="t" lIns="0" rIns="0" tIns="0" bIns="0">
+            <a:spAutoFit/>
+          </a:bodyPr>
+          <a:lstStyle/>
+          <a:p>
+            <a:pPr algn="l"/>
+            <a:r>
+              <a:rPr sz="1100" b="1">
+                <a:solidFill>
+                  <a:srgbClr val="64748B"/>
+                </a:solidFill>
+                <a:latin typeface="Open Sans"/>
+              </a:rPr>
+              <a:t>6</a:t>
+            </a:r>
+          </a:p>
+        </p:txBody>
+      </p:sp>
+      <p:sp>
+        <p:nvSpPr>
+          <p:cNvPr id="49" name="TextBox 48"/>
+          <p:cNvSpPr txBox="1"/>
+          <p:nvPr/>
+        </p:nvSpPr>
+        <p:spPr>
+          <a:xfrm>
+            <a:off x="1051560" y="4462272"/>
+            <a:ext cx="822960" cy="219456"/>
+          </a:xfrm>
+          <a:prstGeom prst="rect">
+            <a:avLst/>
+          </a:prstGeom>
+          <a:noFill/>
+        </p:spPr>
+        <p:txBody>
+          <a:bodyPr wrap="square" anchor="t" lIns="0" rIns="0" tIns="0" bIns="0">
+            <a:spAutoFit/>
+          </a:bodyPr>
+          <a:lstStyle/>
+          <a:p>
+            <a:pPr algn="l"/>
+            <a:r>
+              <a:rPr sz="1400" b="1">
+                <a:solidFill>
+                  <a:srgbClr val="0F172A"/>
+                </a:solidFill>
+                <a:latin typeface="Open Sans"/>
+              </a:rPr>
+              <a:t>IL</a:t>
+            </a:r>
+          </a:p>
+        </p:txBody>
+      </p:sp>
+      <p:sp>
+        <p:nvSpPr>
+          <p:cNvPr id="50" name="TextBox 49"/>
+          <p:cNvSpPr txBox="1"/>
+          <p:nvPr/>
+        </p:nvSpPr>
+        <p:spPr>
+          <a:xfrm>
+            <a:off x="1920240" y="4471416"/>
+            <a:ext cx="1463040" cy="201168"/>
+          </a:xfrm>
+          <a:prstGeom prst="rect">
+            <a:avLst/>
+          </a:prstGeom>
+          <a:noFill/>
+        </p:spPr>
+        <p:txBody>
+          <a:bodyPr wrap="square" anchor="t" lIns="0" rIns="0" tIns="0" bIns="0">
+            <a:spAutoFit/>
+          </a:bodyPr>
+          <a:lstStyle/>
+          <a:p>
+            <a:pPr algn="l"/>
+            <a:r>
+              <a:rPr sz="1200" b="1">
+                <a:solidFill>
+                  <a:srgbClr val="0F172A"/>
+                </a:solidFill>
+                <a:latin typeface="Open Sans"/>
+              </a:rPr>
+              <a:t>16,242</a:t>
+            </a:r>
+          </a:p>
+        </p:txBody>
+      </p:sp>
+      <p:sp>
+        <p:nvSpPr>
+          <p:cNvPr id="51" name="Rounded Rectangle 50"/>
           <p:cNvSpPr/>
           <p:nvPr/>
         </p:nvSpPr>
         <p:spPr>
           <a:xfrm>
-            <a:off x="2834640" y="3813048"/>
-            <a:ext cx="384048" cy="329184"/>
+            <a:off x="3520440" y="4462272"/>
+            <a:ext cx="960120" cy="219456"/>
           </a:xfrm>
           <a:prstGeom prst="roundRect">
             <a:avLst>
-              <a:gd name="adj" fmla="val 20000"/>
+              <a:gd name="adj" fmla="val 50000"/>
             </a:avLst>
-          </a:prstGeom>
-          <a:solidFill>
-            <a:srgbClr val="FFFFFF"/>
-          </a:solidFill>
-          <a:ln w="6350">
-            <a:solidFill>
-              <a:srgbClr val="FFB352"/>
-            </a:solidFill>
-          </a:ln>
-          <a:effectLst/>
-        </p:spPr>
-        <p:style>
-          <a:lnRef idx="1">
-            <a:schemeClr val="accent1"/>
-          </a:lnRef>
-          <a:fillRef idx="3">
-            <a:schemeClr val="accent1"/>
-          </a:fillRef>
-          <a:effectRef idx="2">
-            <a:schemeClr val="accent1"/>
-          </a:effectRef>
-          <a:fontRef idx="minor">
-            <a:schemeClr val="lt1"/>
-          </a:fontRef>
-        </p:style>
-        <p:txBody>
-          <a:bodyPr rtlCol="0" anchor="ctr"/>
-          <a:lstStyle/>
-          <a:p>
-            <a:pPr algn="ctr"/>
-          </a:p>
-        </p:txBody>
-      </p:sp>
-      <p:sp>
-        <p:nvSpPr>
-          <p:cNvPr id="24" name="TextBox 23"/>
-          <p:cNvSpPr txBox="1"/>
-          <p:nvPr/>
-        </p:nvSpPr>
-        <p:spPr>
-          <a:xfrm>
-            <a:off x="2834640" y="3849624"/>
-            <a:ext cx="384048" cy="274320"/>
-          </a:xfrm>
-          <a:prstGeom prst="rect">
-            <a:avLst/>
-          </a:prstGeom>
-          <a:noFill/>
-        </p:spPr>
-        <p:txBody>
-          <a:bodyPr wrap="square" anchor="t" lIns="0" rIns="0" tIns="0" bIns="0">
-            <a:spAutoFit/>
-          </a:bodyPr>
-          <a:lstStyle/>
-          <a:p>
-            <a:pPr algn="ctr"/>
-            <a:r>
-              <a:rPr sz="1000" b="1">
-                <a:solidFill>
-                  <a:srgbClr val="FFB352"/>
-                </a:solidFill>
-                <a:latin typeface="Open Sans"/>
-              </a:rPr>
-              <a:t>NY</a:t>
-            </a:r>
-          </a:p>
-        </p:txBody>
-      </p:sp>
-      <p:sp>
-        <p:nvSpPr>
-          <p:cNvPr id="25" name="Rounded Rectangle 24"/>
-          <p:cNvSpPr/>
-          <p:nvPr/>
-        </p:nvSpPr>
-        <p:spPr>
-          <a:xfrm>
-            <a:off x="3291840" y="3813048"/>
-            <a:ext cx="384048" cy="329184"/>
-          </a:xfrm>
-          <a:prstGeom prst="roundRect">
-            <a:avLst>
-              <a:gd name="adj" fmla="val 20000"/>
-            </a:avLst>
-          </a:prstGeom>
-          <a:solidFill>
-            <a:srgbClr val="FFFFFF"/>
-          </a:solidFill>
-          <a:ln w="6350">
-            <a:solidFill>
-              <a:srgbClr val="FFB352"/>
-            </a:solidFill>
-          </a:ln>
-          <a:effectLst/>
-        </p:spPr>
-        <p:style>
-          <a:lnRef idx="1">
-            <a:schemeClr val="accent1"/>
-          </a:lnRef>
-          <a:fillRef idx="3">
-            <a:schemeClr val="accent1"/>
-          </a:fillRef>
-          <a:effectRef idx="2">
-            <a:schemeClr val="accent1"/>
-          </a:effectRef>
-          <a:fontRef idx="minor">
-            <a:schemeClr val="lt1"/>
-          </a:fontRef>
-        </p:style>
-        <p:txBody>
-          <a:bodyPr rtlCol="0" anchor="ctr"/>
-          <a:lstStyle/>
-          <a:p>
-            <a:pPr algn="ctr"/>
-          </a:p>
-        </p:txBody>
-      </p:sp>
-      <p:sp>
-        <p:nvSpPr>
-          <p:cNvPr id="26" name="TextBox 25"/>
-          <p:cNvSpPr txBox="1"/>
-          <p:nvPr/>
-        </p:nvSpPr>
-        <p:spPr>
-          <a:xfrm>
-            <a:off x="3291840" y="3849624"/>
-            <a:ext cx="384048" cy="274320"/>
-          </a:xfrm>
-          <a:prstGeom prst="rect">
-            <a:avLst/>
-          </a:prstGeom>
-          <a:noFill/>
-        </p:spPr>
-        <p:txBody>
-          <a:bodyPr wrap="square" anchor="t" lIns="0" rIns="0" tIns="0" bIns="0">
-            <a:spAutoFit/>
-          </a:bodyPr>
-          <a:lstStyle/>
-          <a:p>
-            <a:pPr algn="ctr"/>
-            <a:r>
-              <a:rPr sz="1000" b="1">
-                <a:solidFill>
-                  <a:srgbClr val="FFB352"/>
-                </a:solidFill>
-                <a:latin typeface="Open Sans"/>
-              </a:rPr>
-              <a:t>GA</a:t>
-            </a:r>
-          </a:p>
-        </p:txBody>
-      </p:sp>
-      <p:sp>
-        <p:nvSpPr>
-          <p:cNvPr id="27" name="Rounded Rectangle 26"/>
-          <p:cNvSpPr/>
-          <p:nvPr/>
-        </p:nvSpPr>
-        <p:spPr>
-          <a:xfrm>
-            <a:off x="3749039" y="3813048"/>
-            <a:ext cx="384048" cy="329184"/>
-          </a:xfrm>
-          <a:prstGeom prst="roundRect">
-            <a:avLst>
-              <a:gd name="adj" fmla="val 20000"/>
-            </a:avLst>
-          </a:prstGeom>
-          <a:solidFill>
-            <a:srgbClr val="FFFFFF"/>
-          </a:solidFill>
-          <a:ln w="6350">
-            <a:solidFill>
-              <a:srgbClr val="FFB352"/>
-            </a:solidFill>
-          </a:ln>
-          <a:effectLst/>
-        </p:spPr>
-        <p:style>
-          <a:lnRef idx="1">
-            <a:schemeClr val="accent1"/>
-          </a:lnRef>
-          <a:fillRef idx="3">
-            <a:schemeClr val="accent1"/>
-          </a:fillRef>
-          <a:effectRef idx="2">
-            <a:schemeClr val="accent1"/>
-          </a:effectRef>
-          <a:fontRef idx="minor">
-            <a:schemeClr val="lt1"/>
-          </a:fontRef>
-        </p:style>
-        <p:txBody>
-          <a:bodyPr rtlCol="0" anchor="ctr"/>
-          <a:lstStyle/>
-          <a:p>
-            <a:pPr algn="ctr"/>
-          </a:p>
-        </p:txBody>
-      </p:sp>
-      <p:sp>
-        <p:nvSpPr>
-          <p:cNvPr id="28" name="TextBox 27"/>
-          <p:cNvSpPr txBox="1"/>
-          <p:nvPr/>
-        </p:nvSpPr>
-        <p:spPr>
-          <a:xfrm>
-            <a:off x="3749039" y="3849624"/>
-            <a:ext cx="384048" cy="274320"/>
-          </a:xfrm>
-          <a:prstGeom prst="rect">
-            <a:avLst/>
-          </a:prstGeom>
-          <a:noFill/>
-        </p:spPr>
-        <p:txBody>
-          <a:bodyPr wrap="square" anchor="t" lIns="0" rIns="0" tIns="0" bIns="0">
-            <a:spAutoFit/>
-          </a:bodyPr>
-          <a:lstStyle/>
-          <a:p>
-            <a:pPr algn="ctr"/>
-            <a:r>
-              <a:rPr sz="1000" b="1">
-                <a:solidFill>
-                  <a:srgbClr val="FFB352"/>
-                </a:solidFill>
-                <a:latin typeface="Open Sans"/>
-              </a:rPr>
-              <a:t>OH</a:t>
-            </a:r>
-          </a:p>
-        </p:txBody>
-      </p:sp>
-      <p:sp>
-        <p:nvSpPr>
-          <p:cNvPr id="29" name="Rounded Rectangle 28"/>
-          <p:cNvSpPr/>
-          <p:nvPr/>
-        </p:nvSpPr>
-        <p:spPr>
-          <a:xfrm>
-            <a:off x="4206240" y="3813048"/>
-            <a:ext cx="384048" cy="329184"/>
-          </a:xfrm>
-          <a:prstGeom prst="roundRect">
-            <a:avLst>
-              <a:gd name="adj" fmla="val 20000"/>
-            </a:avLst>
-          </a:prstGeom>
-          <a:solidFill>
-            <a:srgbClr val="FFFFFF"/>
-          </a:solidFill>
-          <a:ln w="6350">
-            <a:solidFill>
-              <a:srgbClr val="FFB352"/>
-            </a:solidFill>
-          </a:ln>
-          <a:effectLst/>
-        </p:spPr>
-        <p:style>
-          <a:lnRef idx="1">
-            <a:schemeClr val="accent1"/>
-          </a:lnRef>
-          <a:fillRef idx="3">
-            <a:schemeClr val="accent1"/>
-          </a:fillRef>
-          <a:effectRef idx="2">
-            <a:schemeClr val="accent1"/>
-          </a:effectRef>
-          <a:fontRef idx="minor">
-            <a:schemeClr val="lt1"/>
-          </a:fontRef>
-        </p:style>
-        <p:txBody>
-          <a:bodyPr rtlCol="0" anchor="ctr"/>
-          <a:lstStyle/>
-          <a:p>
-            <a:pPr algn="ctr"/>
-          </a:p>
-        </p:txBody>
-      </p:sp>
-      <p:sp>
-        <p:nvSpPr>
-          <p:cNvPr id="30" name="TextBox 29"/>
-          <p:cNvSpPr txBox="1"/>
-          <p:nvPr/>
-        </p:nvSpPr>
-        <p:spPr>
-          <a:xfrm>
-            <a:off x="4206240" y="3849624"/>
-            <a:ext cx="384048" cy="274320"/>
-          </a:xfrm>
-          <a:prstGeom prst="rect">
-            <a:avLst/>
-          </a:prstGeom>
-          <a:noFill/>
-        </p:spPr>
-        <p:txBody>
-          <a:bodyPr wrap="square" anchor="t" lIns="0" rIns="0" tIns="0" bIns="0">
-            <a:spAutoFit/>
-          </a:bodyPr>
-          <a:lstStyle/>
-          <a:p>
-            <a:pPr algn="ctr"/>
-            <a:r>
-              <a:rPr sz="1000" b="1">
-                <a:solidFill>
-                  <a:srgbClr val="FFB352"/>
-                </a:solidFill>
-                <a:latin typeface="Open Sans"/>
-              </a:rPr>
-              <a:t>MI</a:t>
-            </a:r>
-          </a:p>
-        </p:txBody>
-      </p:sp>
-      <p:sp>
-        <p:nvSpPr>
-          <p:cNvPr id="31" name="TextBox 30"/>
-          <p:cNvSpPr txBox="1"/>
-          <p:nvPr/>
-        </p:nvSpPr>
-        <p:spPr>
-          <a:xfrm>
-            <a:off x="2377440" y="4160520"/>
-            <a:ext cx="9144000" cy="274320"/>
-          </a:xfrm>
-          <a:prstGeom prst="rect">
-            <a:avLst/>
-          </a:prstGeom>
-          <a:noFill/>
-        </p:spPr>
-        <p:txBody>
-          <a:bodyPr wrap="square" anchor="t" lIns="0" rIns="0" tIns="0" bIns="0">
-            <a:spAutoFit/>
-          </a:bodyPr>
-          <a:lstStyle/>
-          <a:p>
-            <a:pPr algn="l"/>
-            <a:r>
-              <a:rPr sz="1000" b="0">
-                <a:solidFill>
-                  <a:srgbClr val="334155"/>
-                </a:solidFill>
-                <a:latin typeface="Open Sans"/>
-              </a:rPr>
-              <a:t>Formal request to the state treasurer or department. NY uses secure FTP (quarterly). GA requires CDR registration to receive the data file. TX requires a written request.</a:t>
-            </a:r>
-          </a:p>
-        </p:txBody>
-      </p:sp>
-      <p:sp>
-        <p:nvSpPr>
-          <p:cNvPr id="32" name="Rounded Rectangle 31"/>
-          <p:cNvSpPr/>
-          <p:nvPr/>
-        </p:nvSpPr>
-        <p:spPr>
-          <a:xfrm>
-            <a:off x="457200" y="4434840"/>
-            <a:ext cx="11247120" cy="822960"/>
-          </a:xfrm>
-          <a:prstGeom prst="roundRect">
-            <a:avLst>
-              <a:gd name="adj" fmla="val 3000"/>
-            </a:avLst>
-          </a:prstGeom>
-          <a:solidFill>
-            <a:srgbClr val="FFFFFF"/>
-          </a:solidFill>
-          <a:ln w="6350">
-            <a:solidFill>
-              <a:srgbClr val="E2E8F0"/>
-            </a:solidFill>
-          </a:ln>
-          <a:effectLst/>
-        </p:spPr>
-        <p:style>
-          <a:lnRef idx="1">
-            <a:schemeClr val="accent1"/>
-          </a:lnRef>
-          <a:fillRef idx="3">
-            <a:schemeClr val="accent1"/>
-          </a:fillRef>
-          <a:effectRef idx="2">
-            <a:schemeClr val="accent1"/>
-          </a:effectRef>
-          <a:fontRef idx="minor">
-            <a:schemeClr val="lt1"/>
-          </a:fontRef>
-        </p:style>
-        <p:txBody>
-          <a:bodyPr rtlCol="0" anchor="ctr"/>
-          <a:lstStyle/>
-          <a:p>
-            <a:pPr algn="ctr"/>
-          </a:p>
-        </p:txBody>
-      </p:sp>
-      <p:sp>
-        <p:nvSpPr>
-          <p:cNvPr id="33" name="Rectangle 32"/>
-          <p:cNvSpPr/>
-          <p:nvPr/>
-        </p:nvSpPr>
-        <p:spPr>
-          <a:xfrm>
-            <a:off x="457200" y="4434840"/>
-            <a:ext cx="164592" cy="822960"/>
-          </a:xfrm>
-          <a:prstGeom prst="rect">
-            <a:avLst/>
           </a:prstGeom>
           <a:solidFill>
             <a:srgbClr val="64748B"/>
@@ -8208,7 +8834,6 @@
           <a:ln>
             <a:noFill/>
           </a:ln>
-          <a:effectLst/>
         </p:spPr>
         <p:style>
           <a:lnRef idx="1">
@@ -8225,6 +8850,94 @@
           </a:fontRef>
         </p:style>
         <p:txBody>
+          <a:bodyPr rtlCol="0" anchor="ctr" lIns="45720" rIns="45720" tIns="18288" bIns="18288"/>
+          <a:lstStyle/>
+          <a:p>
+            <a:pPr algn="ctr"/>
+            <a:r>
+              <a:rPr sz="800" b="1">
+                <a:solidFill>
+                  <a:srgbClr val="FFFFFF"/>
+                </a:solidFill>
+                <a:latin typeface="Open Sans"/>
+              </a:rPr>
+              <a:t>HANDOFF</a:t>
+            </a:r>
+          </a:p>
+        </p:txBody>
+      </p:sp>
+      <p:sp>
+        <p:nvSpPr>
+          <p:cNvPr id="52" name="TextBox 51"/>
+          <p:cNvSpPr txBox="1"/>
+          <p:nvPr/>
+        </p:nvSpPr>
+        <p:spPr>
+          <a:xfrm>
+            <a:off x="4937760" y="4480560"/>
+            <a:ext cx="6766560" cy="201168"/>
+          </a:xfrm>
+          <a:prstGeom prst="rect">
+            <a:avLst/>
+          </a:prstGeom>
+          <a:noFill/>
+        </p:spPr>
+        <p:txBody>
+          <a:bodyPr wrap="square" anchor="t" lIns="0" rIns="0" tIns="0" bIns="0">
+            <a:spAutoFit/>
+          </a:bodyPr>
+          <a:lstStyle/>
+          <a:p>
+            <a:pPr algn="l"/>
+            <a:r>
+              <a:rPr sz="1000" b="0">
+                <a:solidFill>
+                  <a:srgbClr val="334155"/>
+                </a:solidFill>
+                <a:latin typeface="Open Sans"/>
+              </a:rPr>
+              <a:t>No bulk feed; assisted e-file via iCash</a:t>
+            </a:r>
+          </a:p>
+        </p:txBody>
+      </p:sp>
+      <p:sp>
+        <p:nvSpPr>
+          <p:cNvPr id="53" name="Rectangle 52"/>
+          <p:cNvSpPr/>
+          <p:nvPr/>
+        </p:nvSpPr>
+        <p:spPr>
+          <a:xfrm>
+            <a:off x="457200" y="4736592"/>
+            <a:ext cx="11247120" cy="329184"/>
+          </a:xfrm>
+          <a:prstGeom prst="rect">
+            <a:avLst/>
+          </a:prstGeom>
+          <a:solidFill>
+            <a:srgbClr val="F8FAFC"/>
+          </a:solidFill>
+          <a:ln>
+            <a:noFill/>
+          </a:ln>
+          <a:effectLst/>
+        </p:spPr>
+        <p:style>
+          <a:lnRef idx="1">
+            <a:schemeClr val="accent1"/>
+          </a:lnRef>
+          <a:fillRef idx="3">
+            <a:schemeClr val="accent1"/>
+          </a:fillRef>
+          <a:effectRef idx="2">
+            <a:schemeClr val="accent1"/>
+          </a:effectRef>
+          <a:fontRef idx="minor">
+            <a:schemeClr val="lt1"/>
+          </a:fontRef>
+        </p:style>
+        <p:txBody>
           <a:bodyPr rtlCol="0" anchor="ctr"/>
           <a:lstStyle/>
           <a:p>
@@ -8234,14 +8947,119 @@
       </p:sp>
       <p:sp>
         <p:nvSpPr>
-          <p:cNvPr id="34" name="Rounded Rectangle 33"/>
+          <p:cNvPr id="54" name="TextBox 53"/>
+          <p:cNvSpPr txBox="1"/>
+          <p:nvPr/>
+        </p:nvSpPr>
+        <p:spPr>
+          <a:xfrm>
+            <a:off x="548640" y="4809744"/>
+            <a:ext cx="457200" cy="201168"/>
+          </a:xfrm>
+          <a:prstGeom prst="rect">
+            <a:avLst/>
+          </a:prstGeom>
+          <a:noFill/>
+        </p:spPr>
+        <p:txBody>
+          <a:bodyPr wrap="square" anchor="t" lIns="0" rIns="0" tIns="0" bIns="0">
+            <a:spAutoFit/>
+          </a:bodyPr>
+          <a:lstStyle/>
+          <a:p>
+            <a:pPr algn="l"/>
+            <a:r>
+              <a:rPr sz="1100" b="1">
+                <a:solidFill>
+                  <a:srgbClr val="64748B"/>
+                </a:solidFill>
+                <a:latin typeface="Open Sans"/>
+              </a:rPr>
+              <a:t>7</a:t>
+            </a:r>
+          </a:p>
+        </p:txBody>
+      </p:sp>
+      <p:sp>
+        <p:nvSpPr>
+          <p:cNvPr id="55" name="TextBox 54"/>
+          <p:cNvSpPr txBox="1"/>
+          <p:nvPr/>
+        </p:nvSpPr>
+        <p:spPr>
+          <a:xfrm>
+            <a:off x="1051560" y="4791456"/>
+            <a:ext cx="822960" cy="219456"/>
+          </a:xfrm>
+          <a:prstGeom prst="rect">
+            <a:avLst/>
+          </a:prstGeom>
+          <a:noFill/>
+        </p:spPr>
+        <p:txBody>
+          <a:bodyPr wrap="square" anchor="t" lIns="0" rIns="0" tIns="0" bIns="0">
+            <a:spAutoFit/>
+          </a:bodyPr>
+          <a:lstStyle/>
+          <a:p>
+            <a:pPr algn="l"/>
+            <a:r>
+              <a:rPr sz="1400" b="1">
+                <a:solidFill>
+                  <a:srgbClr val="0F172A"/>
+                </a:solidFill>
+                <a:latin typeface="Open Sans"/>
+              </a:rPr>
+              <a:t>NC</a:t>
+            </a:r>
+          </a:p>
+        </p:txBody>
+      </p:sp>
+      <p:sp>
+        <p:nvSpPr>
+          <p:cNvPr id="56" name="TextBox 55"/>
+          <p:cNvSpPr txBox="1"/>
+          <p:nvPr/>
+        </p:nvSpPr>
+        <p:spPr>
+          <a:xfrm>
+            <a:off x="1920240" y="4800600"/>
+            <a:ext cx="1463040" cy="201168"/>
+          </a:xfrm>
+          <a:prstGeom prst="rect">
+            <a:avLst/>
+          </a:prstGeom>
+          <a:noFill/>
+        </p:spPr>
+        <p:txBody>
+          <a:bodyPr wrap="square" anchor="t" lIns="0" rIns="0" tIns="0" bIns="0">
+            <a:spAutoFit/>
+          </a:bodyPr>
+          <a:lstStyle/>
+          <a:p>
+            <a:pPr algn="l"/>
+            <a:r>
+              <a:rPr sz="1200" b="1">
+                <a:solidFill>
+                  <a:srgbClr val="0F172A"/>
+                </a:solidFill>
+                <a:latin typeface="Open Sans"/>
+              </a:rPr>
+              <a:t>14,404</a:t>
+            </a:r>
+          </a:p>
+        </p:txBody>
+      </p:sp>
+      <p:sp>
+        <p:nvSpPr>
+          <p:cNvPr id="57" name="Rounded Rectangle 56"/>
           <p:cNvSpPr/>
           <p:nvPr/>
         </p:nvSpPr>
         <p:spPr>
           <a:xfrm>
-            <a:off x="777240" y="4599431"/>
-            <a:ext cx="1188720" cy="329184"/>
+            <a:off x="3520440" y="4791456"/>
+            <a:ext cx="960120" cy="219456"/>
           </a:xfrm>
           <a:prstGeom prst="roundRect">
             <a:avLst>
@@ -8275,7 +9093,7 @@
           <a:p>
             <a:pPr algn="ctr"/>
             <a:r>
-              <a:rPr sz="1100" b="1">
+              <a:rPr sz="800" b="1">
                 <a:solidFill>
                   <a:srgbClr val="FFFFFF"/>
                 </a:solidFill>
@@ -8288,62 +9106,58 @@
       </p:sp>
       <p:sp>
         <p:nvSpPr>
-          <p:cNvPr id="35" name="TextBox 34"/>
-          <p:cNvSpPr txBox="1"/>
-          <p:nvPr/>
-        </p:nvSpPr>
-        <p:spPr>
-          <a:xfrm>
-            <a:off x="777240" y="4937759"/>
-            <a:ext cx="1828800" cy="292608"/>
-          </a:xfrm>
-          <a:prstGeom prst="rect">
-            <a:avLst/>
-          </a:prstGeom>
-          <a:noFill/>
-        </p:spPr>
-        <p:txBody>
-          <a:bodyPr wrap="square" anchor="t" lIns="0" rIns="0" tIns="0" bIns="0">
-            <a:spAutoFit/>
-          </a:bodyPr>
-          <a:lstStyle/>
-          <a:p>
-            <a:pPr algn="l"/>
-            <a:r>
-              <a:rPr sz="1100" b="0">
-                <a:solidFill>
-                  <a:srgbClr val="64748B"/>
-                </a:solidFill>
-                <a:latin typeface="Open Sans"/>
-              </a:rPr>
-              <a:t>Deep-link to state portal only</a:t>
-            </a:r>
-          </a:p>
-        </p:txBody>
-      </p:sp>
-      <p:sp>
-        <p:nvSpPr>
-          <p:cNvPr id="36" name="Rounded Rectangle 35"/>
+          <p:cNvPr id="58" name="TextBox 57"/>
+          <p:cNvSpPr txBox="1"/>
+          <p:nvPr/>
+        </p:nvSpPr>
+        <p:spPr>
+          <a:xfrm>
+            <a:off x="4937760" y="4809744"/>
+            <a:ext cx="6766560" cy="201168"/>
+          </a:xfrm>
+          <a:prstGeom prst="rect">
+            <a:avLst/>
+          </a:prstGeom>
+          <a:noFill/>
+        </p:spPr>
+        <p:txBody>
+          <a:bodyPr wrap="square" anchor="t" lIns="0" rIns="0" tIns="0" bIns="0">
+            <a:spAutoFit/>
+          </a:bodyPr>
+          <a:lstStyle/>
+          <a:p>
+            <a:pPr algn="l"/>
+            <a:r>
+              <a:rPr sz="1000" b="0">
+                <a:solidFill>
+                  <a:srgbClr val="334155"/>
+                </a:solidFill>
+                <a:latin typeface="Open Sans"/>
+              </a:rPr>
+              <a:t>PDFs only; not a clean feed</a:t>
+            </a:r>
+          </a:p>
+        </p:txBody>
+      </p:sp>
+      <p:sp>
+        <p:nvSpPr>
+          <p:cNvPr id="59" name="Rectangle 58"/>
           <p:cNvSpPr/>
           <p:nvPr/>
         </p:nvSpPr>
         <p:spPr>
           <a:xfrm>
-            <a:off x="2377440" y="4727448"/>
-            <a:ext cx="384048" cy="329184"/>
-          </a:xfrm>
-          <a:prstGeom prst="roundRect">
-            <a:avLst>
-              <a:gd name="adj" fmla="val 20000"/>
-            </a:avLst>
+            <a:off x="457200" y="5065776"/>
+            <a:ext cx="11247120" cy="329184"/>
+          </a:xfrm>
+          <a:prstGeom prst="rect">
+            <a:avLst/>
           </a:prstGeom>
           <a:solidFill>
             <a:srgbClr val="FFFFFF"/>
           </a:solidFill>
-          <a:ln w="6350">
-            <a:solidFill>
-              <a:srgbClr val="64748B"/>
-            </a:solidFill>
+          <a:ln>
+            <a:noFill/>
           </a:ln>
           <a:effectLst/>
         </p:spPr>
@@ -8371,64 +9185,131 @@
       </p:sp>
       <p:sp>
         <p:nvSpPr>
-          <p:cNvPr id="37" name="TextBox 36"/>
-          <p:cNvSpPr txBox="1"/>
-          <p:nvPr/>
-        </p:nvSpPr>
-        <p:spPr>
-          <a:xfrm>
-            <a:off x="2377440" y="4764024"/>
-            <a:ext cx="384048" cy="274320"/>
-          </a:xfrm>
-          <a:prstGeom prst="rect">
-            <a:avLst/>
-          </a:prstGeom>
-          <a:noFill/>
-        </p:spPr>
-        <p:txBody>
-          <a:bodyPr wrap="square" anchor="t" lIns="0" rIns="0" tIns="0" bIns="0">
-            <a:spAutoFit/>
-          </a:bodyPr>
-          <a:lstStyle/>
-          <a:p>
-            <a:pPr algn="ctr"/>
-            <a:r>
-              <a:rPr sz="1000" b="1">
+          <p:cNvPr id="60" name="TextBox 59"/>
+          <p:cNvSpPr txBox="1"/>
+          <p:nvPr/>
+        </p:nvSpPr>
+        <p:spPr>
+          <a:xfrm>
+            <a:off x="548640" y="5138928"/>
+            <a:ext cx="457200" cy="201168"/>
+          </a:xfrm>
+          <a:prstGeom prst="rect">
+            <a:avLst/>
+          </a:prstGeom>
+          <a:noFill/>
+        </p:spPr>
+        <p:txBody>
+          <a:bodyPr wrap="square" anchor="t" lIns="0" rIns="0" tIns="0" bIns="0">
+            <a:spAutoFit/>
+          </a:bodyPr>
+          <a:lstStyle/>
+          <a:p>
+            <a:pPr algn="l"/>
+            <a:r>
+              <a:rPr sz="1100" b="1">
                 <a:solidFill>
                   <a:srgbClr val="64748B"/>
                 </a:solidFill>
                 <a:latin typeface="Open Sans"/>
               </a:rPr>
-              <a:t>IL</a:t>
-            </a:r>
-          </a:p>
-        </p:txBody>
-      </p:sp>
-      <p:sp>
-        <p:nvSpPr>
-          <p:cNvPr id="38" name="Rounded Rectangle 37"/>
+              <a:t>8</a:t>
+            </a:r>
+          </a:p>
+        </p:txBody>
+      </p:sp>
+      <p:sp>
+        <p:nvSpPr>
+          <p:cNvPr id="61" name="TextBox 60"/>
+          <p:cNvSpPr txBox="1"/>
+          <p:nvPr/>
+        </p:nvSpPr>
+        <p:spPr>
+          <a:xfrm>
+            <a:off x="1051560" y="5120640"/>
+            <a:ext cx="822960" cy="219456"/>
+          </a:xfrm>
+          <a:prstGeom prst="rect">
+            <a:avLst/>
+          </a:prstGeom>
+          <a:noFill/>
+        </p:spPr>
+        <p:txBody>
+          <a:bodyPr wrap="square" anchor="t" lIns="0" rIns="0" tIns="0" bIns="0">
+            <a:spAutoFit/>
+          </a:bodyPr>
+          <a:lstStyle/>
+          <a:p>
+            <a:pPr algn="l"/>
+            <a:r>
+              <a:rPr sz="1400" b="1">
+                <a:solidFill>
+                  <a:srgbClr val="0F172A"/>
+                </a:solidFill>
+                <a:latin typeface="Open Sans"/>
+              </a:rPr>
+              <a:t>PA</a:t>
+            </a:r>
+          </a:p>
+        </p:txBody>
+      </p:sp>
+      <p:sp>
+        <p:nvSpPr>
+          <p:cNvPr id="62" name="TextBox 61"/>
+          <p:cNvSpPr txBox="1"/>
+          <p:nvPr/>
+        </p:nvSpPr>
+        <p:spPr>
+          <a:xfrm>
+            <a:off x="1920240" y="5129784"/>
+            <a:ext cx="1463040" cy="201168"/>
+          </a:xfrm>
+          <a:prstGeom prst="rect">
+            <a:avLst/>
+          </a:prstGeom>
+          <a:noFill/>
+        </p:spPr>
+        <p:txBody>
+          <a:bodyPr wrap="square" anchor="t" lIns="0" rIns="0" tIns="0" bIns="0">
+            <a:spAutoFit/>
+          </a:bodyPr>
+          <a:lstStyle/>
+          <a:p>
+            <a:pPr algn="l"/>
+            <a:r>
+              <a:rPr sz="1200" b="1">
+                <a:solidFill>
+                  <a:srgbClr val="0F172A"/>
+                </a:solidFill>
+                <a:latin typeface="Open Sans"/>
+              </a:rPr>
+              <a:t>12,290</a:t>
+            </a:r>
+          </a:p>
+        </p:txBody>
+      </p:sp>
+      <p:sp>
+        <p:nvSpPr>
+          <p:cNvPr id="63" name="Rounded Rectangle 62"/>
           <p:cNvSpPr/>
           <p:nvPr/>
         </p:nvSpPr>
         <p:spPr>
           <a:xfrm>
-            <a:off x="2834640" y="4727448"/>
-            <a:ext cx="384048" cy="329184"/>
+            <a:off x="3520440" y="5120640"/>
+            <a:ext cx="960120" cy="219456"/>
           </a:xfrm>
           <a:prstGeom prst="roundRect">
             <a:avLst>
-              <a:gd name="adj" fmla="val 20000"/>
+              <a:gd name="adj" fmla="val 50000"/>
             </a:avLst>
           </a:prstGeom>
           <a:solidFill>
-            <a:srgbClr val="FFFFFF"/>
+            <a:srgbClr val="64748B"/>
           </a:solidFill>
-          <a:ln w="6350">
-            <a:solidFill>
-              <a:srgbClr val="64748B"/>
-            </a:solidFill>
+          <a:ln>
+            <a:noFill/>
           </a:ln>
-          <a:effectLst/>
         </p:spPr>
         <p:style>
           <a:lnRef idx="1">
@@ -8445,71 +9326,76 @@
           </a:fontRef>
         </p:style>
         <p:txBody>
-          <a:bodyPr rtlCol="0" anchor="ctr"/>
+          <a:bodyPr rtlCol="0" anchor="ctr" lIns="45720" rIns="45720" tIns="18288" bIns="18288"/>
           <a:lstStyle/>
           <a:p>
             <a:pPr algn="ctr"/>
-          </a:p>
-        </p:txBody>
-      </p:sp>
-      <p:sp>
-        <p:nvSpPr>
-          <p:cNvPr id="39" name="TextBox 38"/>
-          <p:cNvSpPr txBox="1"/>
-          <p:nvPr/>
-        </p:nvSpPr>
-        <p:spPr>
-          <a:xfrm>
-            <a:off x="2834640" y="4764024"/>
-            <a:ext cx="384048" cy="274320"/>
-          </a:xfrm>
-          <a:prstGeom prst="rect">
-            <a:avLst/>
-          </a:prstGeom>
-          <a:noFill/>
-        </p:spPr>
-        <p:txBody>
-          <a:bodyPr wrap="square" anchor="t" lIns="0" rIns="0" tIns="0" bIns="0">
-            <a:spAutoFit/>
-          </a:bodyPr>
-          <a:lstStyle/>
-          <a:p>
-            <a:pPr algn="ctr"/>
-            <a:r>
-              <a:rPr sz="1000" b="1">
-                <a:solidFill>
-                  <a:srgbClr val="64748B"/>
-                </a:solidFill>
-                <a:latin typeface="Open Sans"/>
-              </a:rPr>
-              <a:t>PA</a:t>
-            </a:r>
-          </a:p>
-        </p:txBody>
-      </p:sp>
-      <p:sp>
-        <p:nvSpPr>
-          <p:cNvPr id="40" name="Rounded Rectangle 39"/>
+            <a:r>
+              <a:rPr sz="800" b="1">
+                <a:solidFill>
+                  <a:srgbClr val="FFFFFF"/>
+                </a:solidFill>
+                <a:latin typeface="Open Sans"/>
+              </a:rPr>
+              <a:t>HANDOFF</a:t>
+            </a:r>
+          </a:p>
+        </p:txBody>
+      </p:sp>
+      <p:sp>
+        <p:nvSpPr>
+          <p:cNvPr id="64" name="TextBox 63"/>
+          <p:cNvSpPr txBox="1"/>
+          <p:nvPr/>
+        </p:nvSpPr>
+        <p:spPr>
+          <a:xfrm>
+            <a:off x="4937760" y="5138928"/>
+            <a:ext cx="6766560" cy="201168"/>
+          </a:xfrm>
+          <a:prstGeom prst="rect">
+            <a:avLst/>
+          </a:prstGeom>
+          <a:noFill/>
+        </p:spPr>
+        <p:txBody>
+          <a:bodyPr wrap="square" anchor="t" lIns="0" rIns="0" tIns="0" bIns="0">
+            <a:spAutoFit/>
+          </a:bodyPr>
+          <a:lstStyle/>
+          <a:p>
+            <a:pPr algn="l"/>
+            <a:r>
+              <a:rPr sz="1000" b="0">
+                <a:solidFill>
+                  <a:srgbClr val="334155"/>
+                </a:solidFill>
+                <a:latin typeface="Open Sans"/>
+              </a:rPr>
+              <a:t>No bulk; assisted e-file</a:t>
+            </a:r>
+          </a:p>
+        </p:txBody>
+      </p:sp>
+      <p:sp>
+        <p:nvSpPr>
+          <p:cNvPr id="65" name="Rectangle 64"/>
           <p:cNvSpPr/>
           <p:nvPr/>
         </p:nvSpPr>
         <p:spPr>
           <a:xfrm>
-            <a:off x="3291840" y="4727448"/>
-            <a:ext cx="384048" cy="329184"/>
-          </a:xfrm>
-          <a:prstGeom prst="roundRect">
-            <a:avLst>
-              <a:gd name="adj" fmla="val 20000"/>
-            </a:avLst>
+            <a:off x="457200" y="5394960"/>
+            <a:ext cx="11247120" cy="329184"/>
+          </a:xfrm>
+          <a:prstGeom prst="rect">
+            <a:avLst/>
           </a:prstGeom>
           <a:solidFill>
-            <a:srgbClr val="FFFFFF"/>
+            <a:srgbClr val="F8FAFC"/>
           </a:solidFill>
-          <a:ln w="6350">
-            <a:solidFill>
-              <a:srgbClr val="64748B"/>
-            </a:solidFill>
+          <a:ln>
+            <a:noFill/>
           </a:ln>
           <a:effectLst/>
         </p:spPr>
@@ -8537,34 +9423,69 @@
       </p:sp>
       <p:sp>
         <p:nvSpPr>
-          <p:cNvPr id="41" name="TextBox 40"/>
-          <p:cNvSpPr txBox="1"/>
-          <p:nvPr/>
-        </p:nvSpPr>
-        <p:spPr>
-          <a:xfrm>
-            <a:off x="3291840" y="4764024"/>
-            <a:ext cx="384048" cy="274320"/>
-          </a:xfrm>
-          <a:prstGeom prst="rect">
-            <a:avLst/>
-          </a:prstGeom>
-          <a:noFill/>
-        </p:spPr>
-        <p:txBody>
-          <a:bodyPr wrap="square" anchor="t" lIns="0" rIns="0" tIns="0" bIns="0">
-            <a:spAutoFit/>
-          </a:bodyPr>
-          <a:lstStyle/>
-          <a:p>
-            <a:pPr algn="ctr"/>
-            <a:r>
-              <a:rPr sz="1000" b="1">
+          <p:cNvPr id="66" name="TextBox 65"/>
+          <p:cNvSpPr txBox="1"/>
+          <p:nvPr/>
+        </p:nvSpPr>
+        <p:spPr>
+          <a:xfrm>
+            <a:off x="548640" y="5468112"/>
+            <a:ext cx="457200" cy="201168"/>
+          </a:xfrm>
+          <a:prstGeom prst="rect">
+            <a:avLst/>
+          </a:prstGeom>
+          <a:noFill/>
+        </p:spPr>
+        <p:txBody>
+          <a:bodyPr wrap="square" anchor="t" lIns="0" rIns="0" tIns="0" bIns="0">
+            <a:spAutoFit/>
+          </a:bodyPr>
+          <a:lstStyle/>
+          <a:p>
+            <a:pPr algn="l"/>
+            <a:r>
+              <a:rPr sz="1100" b="1">
                 <a:solidFill>
                   <a:srgbClr val="64748B"/>
                 </a:solidFill>
                 <a:latin typeface="Open Sans"/>
               </a:rPr>
+              <a:t>9</a:t>
+            </a:r>
+          </a:p>
+        </p:txBody>
+      </p:sp>
+      <p:sp>
+        <p:nvSpPr>
+          <p:cNvPr id="67" name="TextBox 66"/>
+          <p:cNvSpPr txBox="1"/>
+          <p:nvPr/>
+        </p:nvSpPr>
+        <p:spPr>
+          <a:xfrm>
+            <a:off x="1051560" y="5449824"/>
+            <a:ext cx="822960" cy="219456"/>
+          </a:xfrm>
+          <a:prstGeom prst="rect">
+            <a:avLst/>
+          </a:prstGeom>
+          <a:noFill/>
+        </p:spPr>
+        <p:txBody>
+          <a:bodyPr wrap="square" anchor="t" lIns="0" rIns="0" tIns="0" bIns="0">
+            <a:spAutoFit/>
+          </a:bodyPr>
+          <a:lstStyle/>
+          <a:p>
+            <a:pPr algn="l"/>
+            <a:r>
+              <a:rPr sz="1400" b="1">
+                <a:solidFill>
+                  <a:srgbClr val="0F172A"/>
+                </a:solidFill>
+                <a:latin typeface="Open Sans"/>
+              </a:rPr>
               <a:t>NJ</a:t>
             </a:r>
           </a:p>
@@ -8572,29 +9493,61 @@
       </p:sp>
       <p:sp>
         <p:nvSpPr>
-          <p:cNvPr id="42" name="Rounded Rectangle 41"/>
+          <p:cNvPr id="68" name="TextBox 67"/>
+          <p:cNvSpPr txBox="1"/>
+          <p:nvPr/>
+        </p:nvSpPr>
+        <p:spPr>
+          <a:xfrm>
+            <a:off x="1920240" y="5458968"/>
+            <a:ext cx="1463040" cy="201168"/>
+          </a:xfrm>
+          <a:prstGeom prst="rect">
+            <a:avLst/>
+          </a:prstGeom>
+          <a:noFill/>
+        </p:spPr>
+        <p:txBody>
+          <a:bodyPr wrap="square" anchor="t" lIns="0" rIns="0" tIns="0" bIns="0">
+            <a:spAutoFit/>
+          </a:bodyPr>
+          <a:lstStyle/>
+          <a:p>
+            <a:pPr algn="l"/>
+            <a:r>
+              <a:rPr sz="1200" b="1">
+                <a:solidFill>
+                  <a:srgbClr val="0F172A"/>
+                </a:solidFill>
+                <a:latin typeface="Open Sans"/>
+              </a:rPr>
+              <a:t>11,856</a:t>
+            </a:r>
+          </a:p>
+        </p:txBody>
+      </p:sp>
+      <p:sp>
+        <p:nvSpPr>
+          <p:cNvPr id="69" name="Rounded Rectangle 68"/>
           <p:cNvSpPr/>
           <p:nvPr/>
         </p:nvSpPr>
         <p:spPr>
           <a:xfrm>
-            <a:off x="3749039" y="4727448"/>
-            <a:ext cx="384048" cy="329184"/>
+            <a:off x="3520440" y="5449824"/>
+            <a:ext cx="960120" cy="219456"/>
           </a:xfrm>
           <a:prstGeom prst="roundRect">
             <a:avLst>
-              <a:gd name="adj" fmla="val 20000"/>
+              <a:gd name="adj" fmla="val 50000"/>
             </a:avLst>
           </a:prstGeom>
           <a:solidFill>
-            <a:srgbClr val="FFFFFF"/>
+            <a:srgbClr val="64748B"/>
           </a:solidFill>
-          <a:ln w="6350">
-            <a:solidFill>
-              <a:srgbClr val="64748B"/>
-            </a:solidFill>
+          <a:ln>
+            <a:noFill/>
           </a:ln>
-          <a:effectLst/>
         </p:spPr>
         <p:style>
           <a:lnRef idx="1">
@@ -8611,71 +9564,76 @@
           </a:fontRef>
         </p:style>
         <p:txBody>
-          <a:bodyPr rtlCol="0" anchor="ctr"/>
+          <a:bodyPr rtlCol="0" anchor="ctr" lIns="45720" rIns="45720" tIns="18288" bIns="18288"/>
           <a:lstStyle/>
           <a:p>
             <a:pPr algn="ctr"/>
-          </a:p>
-        </p:txBody>
-      </p:sp>
-      <p:sp>
-        <p:nvSpPr>
-          <p:cNvPr id="43" name="TextBox 42"/>
-          <p:cNvSpPr txBox="1"/>
-          <p:nvPr/>
-        </p:nvSpPr>
-        <p:spPr>
-          <a:xfrm>
-            <a:off x="3749039" y="4764024"/>
-            <a:ext cx="384048" cy="274320"/>
-          </a:xfrm>
-          <a:prstGeom prst="rect">
-            <a:avLst/>
-          </a:prstGeom>
-          <a:noFill/>
-        </p:spPr>
-        <p:txBody>
-          <a:bodyPr wrap="square" anchor="t" lIns="0" rIns="0" tIns="0" bIns="0">
-            <a:spAutoFit/>
-          </a:bodyPr>
-          <a:lstStyle/>
-          <a:p>
-            <a:pPr algn="ctr"/>
-            <a:r>
-              <a:rPr sz="1000" b="1">
-                <a:solidFill>
-                  <a:srgbClr val="64748B"/>
-                </a:solidFill>
-                <a:latin typeface="Open Sans"/>
-              </a:rPr>
-              <a:t>SC</a:t>
-            </a:r>
-          </a:p>
-        </p:txBody>
-      </p:sp>
-      <p:sp>
-        <p:nvSpPr>
-          <p:cNvPr id="44" name="Rounded Rectangle 43"/>
+            <a:r>
+              <a:rPr sz="800" b="1">
+                <a:solidFill>
+                  <a:srgbClr val="FFFFFF"/>
+                </a:solidFill>
+                <a:latin typeface="Open Sans"/>
+              </a:rPr>
+              <a:t>HANDOFF</a:t>
+            </a:r>
+          </a:p>
+        </p:txBody>
+      </p:sp>
+      <p:sp>
+        <p:nvSpPr>
+          <p:cNvPr id="70" name="TextBox 69"/>
+          <p:cNvSpPr txBox="1"/>
+          <p:nvPr/>
+        </p:nvSpPr>
+        <p:spPr>
+          <a:xfrm>
+            <a:off x="4937760" y="5468112"/>
+            <a:ext cx="6766560" cy="201168"/>
+          </a:xfrm>
+          <a:prstGeom prst="rect">
+            <a:avLst/>
+          </a:prstGeom>
+          <a:noFill/>
+        </p:spPr>
+        <p:txBody>
+          <a:bodyPr wrap="square" anchor="t" lIns="0" rIns="0" tIns="0" bIns="0">
+            <a:spAutoFit/>
+          </a:bodyPr>
+          <a:lstStyle/>
+          <a:p>
+            <a:pPr algn="l"/>
+            <a:r>
+              <a:rPr sz="1000" b="0">
+                <a:solidFill>
+                  <a:srgbClr val="334155"/>
+                </a:solidFill>
+                <a:latin typeface="Open Sans"/>
+              </a:rPr>
+              <a:t>No bulk; assisted e-file</a:t>
+            </a:r>
+          </a:p>
+        </p:txBody>
+      </p:sp>
+      <p:sp>
+        <p:nvSpPr>
+          <p:cNvPr id="71" name="Rectangle 70"/>
           <p:cNvSpPr/>
           <p:nvPr/>
         </p:nvSpPr>
         <p:spPr>
           <a:xfrm>
-            <a:off x="4206240" y="4727448"/>
-            <a:ext cx="384048" cy="329184"/>
-          </a:xfrm>
-          <a:prstGeom prst="roundRect">
-            <a:avLst>
-              <a:gd name="adj" fmla="val 20000"/>
-            </a:avLst>
+            <a:off x="457200" y="5724144"/>
+            <a:ext cx="11247120" cy="329184"/>
+          </a:xfrm>
+          <a:prstGeom prst="rect">
+            <a:avLst/>
           </a:prstGeom>
           <a:solidFill>
             <a:srgbClr val="FFFFFF"/>
           </a:solidFill>
-          <a:ln w="6350">
-            <a:solidFill>
-              <a:srgbClr val="64748B"/>
-            </a:solidFill>
+          <a:ln>
+            <a:noFill/>
           </a:ln>
           <a:effectLst/>
         </p:spPr>
@@ -8703,64 +9661,131 @@
       </p:sp>
       <p:sp>
         <p:nvSpPr>
-          <p:cNvPr id="45" name="TextBox 44"/>
-          <p:cNvSpPr txBox="1"/>
-          <p:nvPr/>
-        </p:nvSpPr>
-        <p:spPr>
-          <a:xfrm>
-            <a:off x="4206240" y="4764024"/>
-            <a:ext cx="384048" cy="274320"/>
-          </a:xfrm>
-          <a:prstGeom prst="rect">
-            <a:avLst/>
-          </a:prstGeom>
-          <a:noFill/>
-        </p:spPr>
-        <p:txBody>
-          <a:bodyPr wrap="square" anchor="t" lIns="0" rIns="0" tIns="0" bIns="0">
-            <a:spAutoFit/>
-          </a:bodyPr>
-          <a:lstStyle/>
-          <a:p>
-            <a:pPr algn="ctr"/>
-            <a:r>
-              <a:rPr sz="1000" b="1">
+          <p:cNvPr id="72" name="TextBox 71"/>
+          <p:cNvSpPr txBox="1"/>
+          <p:nvPr/>
+        </p:nvSpPr>
+        <p:spPr>
+          <a:xfrm>
+            <a:off x="548640" y="5797296"/>
+            <a:ext cx="457200" cy="201168"/>
+          </a:xfrm>
+          <a:prstGeom prst="rect">
+            <a:avLst/>
+          </a:prstGeom>
+          <a:noFill/>
+        </p:spPr>
+        <p:txBody>
+          <a:bodyPr wrap="square" anchor="t" lIns="0" rIns="0" tIns="0" bIns="0">
+            <a:spAutoFit/>
+          </a:bodyPr>
+          <a:lstStyle/>
+          <a:p>
+            <a:pPr algn="l"/>
+            <a:r>
+              <a:rPr sz="1100" b="1">
                 <a:solidFill>
                   <a:srgbClr val="64748B"/>
                 </a:solidFill>
                 <a:latin typeface="Open Sans"/>
               </a:rPr>
-              <a:t>AL</a:t>
-            </a:r>
-          </a:p>
-        </p:txBody>
-      </p:sp>
-      <p:sp>
-        <p:nvSpPr>
-          <p:cNvPr id="46" name="Rounded Rectangle 45"/>
+              <a:t>10</a:t>
+            </a:r>
+          </a:p>
+        </p:txBody>
+      </p:sp>
+      <p:sp>
+        <p:nvSpPr>
+          <p:cNvPr id="73" name="TextBox 72"/>
+          <p:cNvSpPr txBox="1"/>
+          <p:nvPr/>
+        </p:nvSpPr>
+        <p:spPr>
+          <a:xfrm>
+            <a:off x="1051560" y="5779008"/>
+            <a:ext cx="822960" cy="219456"/>
+          </a:xfrm>
+          <a:prstGeom prst="rect">
+            <a:avLst/>
+          </a:prstGeom>
+          <a:noFill/>
+        </p:spPr>
+        <p:txBody>
+          <a:bodyPr wrap="square" anchor="t" lIns="0" rIns="0" tIns="0" bIns="0">
+            <a:spAutoFit/>
+          </a:bodyPr>
+          <a:lstStyle/>
+          <a:p>
+            <a:pPr algn="l"/>
+            <a:r>
+              <a:rPr sz="1400" b="1">
+                <a:solidFill>
+                  <a:srgbClr val="0F172A"/>
+                </a:solidFill>
+                <a:latin typeface="Open Sans"/>
+              </a:rPr>
+              <a:t>SC</a:t>
+            </a:r>
+          </a:p>
+        </p:txBody>
+      </p:sp>
+      <p:sp>
+        <p:nvSpPr>
+          <p:cNvPr id="74" name="TextBox 73"/>
+          <p:cNvSpPr txBox="1"/>
+          <p:nvPr/>
+        </p:nvSpPr>
+        <p:spPr>
+          <a:xfrm>
+            <a:off x="1920240" y="5788152"/>
+            <a:ext cx="1463040" cy="201168"/>
+          </a:xfrm>
+          <a:prstGeom prst="rect">
+            <a:avLst/>
+          </a:prstGeom>
+          <a:noFill/>
+        </p:spPr>
+        <p:txBody>
+          <a:bodyPr wrap="square" anchor="t" lIns="0" rIns="0" tIns="0" bIns="0">
+            <a:spAutoFit/>
+          </a:bodyPr>
+          <a:lstStyle/>
+          <a:p>
+            <a:pPr algn="l"/>
+            <a:r>
+              <a:rPr sz="1200" b="1">
+                <a:solidFill>
+                  <a:srgbClr val="0F172A"/>
+                </a:solidFill>
+                <a:latin typeface="Open Sans"/>
+              </a:rPr>
+              <a:t>10,534</a:t>
+            </a:r>
+          </a:p>
+        </p:txBody>
+      </p:sp>
+      <p:sp>
+        <p:nvSpPr>
+          <p:cNvPr id="75" name="Rounded Rectangle 74"/>
           <p:cNvSpPr/>
           <p:nvPr/>
         </p:nvSpPr>
         <p:spPr>
           <a:xfrm>
-            <a:off x="4663440" y="4727448"/>
-            <a:ext cx="384048" cy="329184"/>
+            <a:off x="3520440" y="5779008"/>
+            <a:ext cx="960120" cy="219456"/>
           </a:xfrm>
           <a:prstGeom prst="roundRect">
             <a:avLst>
-              <a:gd name="adj" fmla="val 20000"/>
+              <a:gd name="adj" fmla="val 50000"/>
             </a:avLst>
           </a:prstGeom>
           <a:solidFill>
-            <a:srgbClr val="FFFFFF"/>
+            <a:srgbClr val="64748B"/>
           </a:solidFill>
-          <a:ln w="6350">
-            <a:solidFill>
-              <a:srgbClr val="64748B"/>
-            </a:solidFill>
+          <a:ln>
+            <a:noFill/>
           </a:ln>
-          <a:effectLst/>
         </p:spPr>
         <p:style>
           <a:lnRef idx="1">
@@ -8777,71 +9802,78 @@
           </a:fontRef>
         </p:style>
         <p:txBody>
-          <a:bodyPr rtlCol="0" anchor="ctr"/>
+          <a:bodyPr rtlCol="0" anchor="ctr" lIns="45720" rIns="45720" tIns="18288" bIns="18288"/>
           <a:lstStyle/>
           <a:p>
             <a:pPr algn="ctr"/>
-          </a:p>
-        </p:txBody>
-      </p:sp>
-      <p:sp>
-        <p:nvSpPr>
-          <p:cNvPr id="47" name="TextBox 46"/>
-          <p:cNvSpPr txBox="1"/>
-          <p:nvPr/>
-        </p:nvSpPr>
-        <p:spPr>
-          <a:xfrm>
-            <a:off x="4663440" y="4764024"/>
-            <a:ext cx="384048" cy="274320"/>
-          </a:xfrm>
-          <a:prstGeom prst="rect">
-            <a:avLst/>
-          </a:prstGeom>
-          <a:noFill/>
-        </p:spPr>
-        <p:txBody>
-          <a:bodyPr wrap="square" anchor="t" lIns="0" rIns="0" tIns="0" bIns="0">
-            <a:spAutoFit/>
-          </a:bodyPr>
-          <a:lstStyle/>
-          <a:p>
-            <a:pPr algn="ctr"/>
-            <a:r>
-              <a:rPr sz="1000" b="1">
-                <a:solidFill>
-                  <a:srgbClr val="64748B"/>
-                </a:solidFill>
-                <a:latin typeface="Open Sans"/>
-              </a:rPr>
-              <a:t>LA</a:t>
-            </a:r>
-          </a:p>
-        </p:txBody>
-      </p:sp>
-      <p:sp>
-        <p:nvSpPr>
-          <p:cNvPr id="48" name="Rounded Rectangle 47"/>
+            <a:r>
+              <a:rPr sz="800" b="1">
+                <a:solidFill>
+                  <a:srgbClr val="FFFFFF"/>
+                </a:solidFill>
+                <a:latin typeface="Open Sans"/>
+              </a:rPr>
+              <a:t>HANDOFF</a:t>
+            </a:r>
+          </a:p>
+        </p:txBody>
+      </p:sp>
+      <p:sp>
+        <p:nvSpPr>
+          <p:cNvPr id="76" name="TextBox 75"/>
+          <p:cNvSpPr txBox="1"/>
+          <p:nvPr/>
+        </p:nvSpPr>
+        <p:spPr>
+          <a:xfrm>
+            <a:off x="4937760" y="5797296"/>
+            <a:ext cx="6766560" cy="201168"/>
+          </a:xfrm>
+          <a:prstGeom prst="rect">
+            <a:avLst/>
+          </a:prstGeom>
+          <a:noFill/>
+        </p:spPr>
+        <p:txBody>
+          <a:bodyPr wrap="square" anchor="t" lIns="0" rIns="0" tIns="0" bIns="0">
+            <a:spAutoFit/>
+          </a:bodyPr>
+          <a:lstStyle/>
+          <a:p>
+            <a:pPr algn="l"/>
+            <a:r>
+              <a:rPr sz="1000" b="0">
+                <a:solidFill>
+                  <a:srgbClr val="334155"/>
+                </a:solidFill>
+                <a:latin typeface="Open Sans"/>
+              </a:rPr>
+              <a:t>No bulk; assisted e-file</a:t>
+            </a:r>
+          </a:p>
+        </p:txBody>
+      </p:sp>
+      <p:sp>
+        <p:nvSpPr>
+          <p:cNvPr id="77" name="Rounded Rectangle 76"/>
           <p:cNvSpPr/>
           <p:nvPr/>
         </p:nvSpPr>
         <p:spPr>
           <a:xfrm>
-            <a:off x="5120640" y="4727448"/>
-            <a:ext cx="384048" cy="329184"/>
+            <a:off x="457200" y="6080760"/>
+            <a:ext cx="11247120" cy="502920"/>
           </a:xfrm>
           <a:prstGeom prst="roundRect">
             <a:avLst>
-              <a:gd name="adj" fmla="val 20000"/>
+              <a:gd name="adj" fmla="val 7000"/>
             </a:avLst>
           </a:prstGeom>
           <a:solidFill>
-            <a:srgbClr val="FFFFFF"/>
+            <a:srgbClr val="2863C5"/>
           </a:solidFill>
-          <a:ln w="6350">
-            <a:solidFill>
-              <a:srgbClr val="64748B"/>
-            </a:solidFill>
+          <a:ln>
+            <a:noFill/>
           </a:ln>
           <a:effectLst/>
         </p:spPr>
@@ -8869,547 +9901,49 @@
       </p:sp>
       <p:sp>
         <p:nvSpPr>
-          <p:cNvPr id="49" name="TextBox 48"/>
-          <p:cNvSpPr txBox="1"/>
-          <p:nvPr/>
-        </p:nvSpPr>
-        <p:spPr>
-          <a:xfrm>
-            <a:off x="5120640" y="4764024"/>
-            <a:ext cx="384048" cy="274320"/>
-          </a:xfrm>
-          <a:prstGeom prst="rect">
-            <a:avLst/>
-          </a:prstGeom>
-          <a:noFill/>
-        </p:spPr>
-        <p:txBody>
-          <a:bodyPr wrap="square" anchor="t" lIns="0" rIns="0" tIns="0" bIns="0">
-            <a:spAutoFit/>
-          </a:bodyPr>
-          <a:lstStyle/>
-          <a:p>
-            <a:pPr algn="ctr"/>
-            <a:r>
-              <a:rPr sz="1000" b="1">
-                <a:solidFill>
-                  <a:srgbClr val="64748B"/>
-                </a:solidFill>
-                <a:latin typeface="Open Sans"/>
-              </a:rPr>
-              <a:t>VA</a:t>
-            </a:r>
-          </a:p>
-        </p:txBody>
-      </p:sp>
-      <p:sp>
-        <p:nvSpPr>
-          <p:cNvPr id="50" name="Rounded Rectangle 49"/>
-          <p:cNvSpPr/>
-          <p:nvPr/>
-        </p:nvSpPr>
-        <p:spPr>
-          <a:xfrm>
-            <a:off x="5577840" y="4727448"/>
-            <a:ext cx="384048" cy="329184"/>
-          </a:xfrm>
-          <a:prstGeom prst="roundRect">
-            <a:avLst>
-              <a:gd name="adj" fmla="val 20000"/>
-            </a:avLst>
-          </a:prstGeom>
-          <a:solidFill>
-            <a:srgbClr val="FFFFFF"/>
-          </a:solidFill>
-          <a:ln w="6350">
-            <a:solidFill>
-              <a:srgbClr val="64748B"/>
-            </a:solidFill>
-          </a:ln>
-          <a:effectLst/>
-        </p:spPr>
-        <p:style>
-          <a:lnRef idx="1">
-            <a:schemeClr val="accent1"/>
-          </a:lnRef>
-          <a:fillRef idx="3">
-            <a:schemeClr val="accent1"/>
-          </a:fillRef>
-          <a:effectRef idx="2">
-            <a:schemeClr val="accent1"/>
-          </a:effectRef>
-          <a:fontRef idx="minor">
-            <a:schemeClr val="lt1"/>
-          </a:fontRef>
-        </p:style>
-        <p:txBody>
-          <a:bodyPr rtlCol="0" anchor="ctr"/>
-          <a:lstStyle/>
-          <a:p>
-            <a:pPr algn="ctr"/>
-          </a:p>
-        </p:txBody>
-      </p:sp>
-      <p:sp>
-        <p:nvSpPr>
-          <p:cNvPr id="51" name="TextBox 50"/>
-          <p:cNvSpPr txBox="1"/>
-          <p:nvPr/>
-        </p:nvSpPr>
-        <p:spPr>
-          <a:xfrm>
-            <a:off x="5577840" y="4764024"/>
-            <a:ext cx="384048" cy="274320"/>
-          </a:xfrm>
-          <a:prstGeom prst="rect">
-            <a:avLst/>
-          </a:prstGeom>
-          <a:noFill/>
-        </p:spPr>
-        <p:txBody>
-          <a:bodyPr wrap="square" anchor="t" lIns="0" rIns="0" tIns="0" bIns="0">
-            <a:spAutoFit/>
-          </a:bodyPr>
-          <a:lstStyle/>
-          <a:p>
-            <a:pPr algn="ctr"/>
-            <a:r>
-              <a:rPr sz="1000" b="1">
-                <a:solidFill>
-                  <a:srgbClr val="64748B"/>
-                </a:solidFill>
-                <a:latin typeface="Open Sans"/>
-              </a:rPr>
-              <a:t>AZ</a:t>
-            </a:r>
-          </a:p>
-        </p:txBody>
-      </p:sp>
-      <p:sp>
-        <p:nvSpPr>
-          <p:cNvPr id="52" name="Rounded Rectangle 51"/>
-          <p:cNvSpPr/>
-          <p:nvPr/>
-        </p:nvSpPr>
-        <p:spPr>
-          <a:xfrm>
-            <a:off x="6035040" y="4727448"/>
-            <a:ext cx="384048" cy="329184"/>
-          </a:xfrm>
-          <a:prstGeom prst="roundRect">
-            <a:avLst>
-              <a:gd name="adj" fmla="val 20000"/>
-            </a:avLst>
-          </a:prstGeom>
-          <a:solidFill>
-            <a:srgbClr val="FFFFFF"/>
-          </a:solidFill>
-          <a:ln w="6350">
-            <a:solidFill>
-              <a:srgbClr val="64748B"/>
-            </a:solidFill>
-          </a:ln>
-          <a:effectLst/>
-        </p:spPr>
-        <p:style>
-          <a:lnRef idx="1">
-            <a:schemeClr val="accent1"/>
-          </a:lnRef>
-          <a:fillRef idx="3">
-            <a:schemeClr val="accent1"/>
-          </a:fillRef>
-          <a:effectRef idx="2">
-            <a:schemeClr val="accent1"/>
-          </a:effectRef>
-          <a:fontRef idx="minor">
-            <a:schemeClr val="lt1"/>
-          </a:fontRef>
-        </p:style>
-        <p:txBody>
-          <a:bodyPr rtlCol="0" anchor="ctr"/>
-          <a:lstStyle/>
-          <a:p>
-            <a:pPr algn="ctr"/>
-          </a:p>
-        </p:txBody>
-      </p:sp>
-      <p:sp>
-        <p:nvSpPr>
-          <p:cNvPr id="53" name="TextBox 52"/>
-          <p:cNvSpPr txBox="1"/>
-          <p:nvPr/>
-        </p:nvSpPr>
-        <p:spPr>
-          <a:xfrm>
-            <a:off x="6035040" y="4764024"/>
-            <a:ext cx="384048" cy="274320"/>
-          </a:xfrm>
-          <a:prstGeom prst="rect">
-            <a:avLst/>
-          </a:prstGeom>
-          <a:noFill/>
-        </p:spPr>
-        <p:txBody>
-          <a:bodyPr wrap="square" anchor="t" lIns="0" rIns="0" tIns="0" bIns="0">
-            <a:spAutoFit/>
-          </a:bodyPr>
-          <a:lstStyle/>
-          <a:p>
-            <a:pPr algn="ctr"/>
-            <a:r>
-              <a:rPr sz="1000" b="1">
-                <a:solidFill>
-                  <a:srgbClr val="64748B"/>
-                </a:solidFill>
-                <a:latin typeface="Open Sans"/>
-              </a:rPr>
-              <a:t>MD</a:t>
-            </a:r>
-          </a:p>
-        </p:txBody>
-      </p:sp>
-      <p:sp>
-        <p:nvSpPr>
-          <p:cNvPr id="54" name="Rounded Rectangle 53"/>
-          <p:cNvSpPr/>
-          <p:nvPr/>
-        </p:nvSpPr>
-        <p:spPr>
-          <a:xfrm>
-            <a:off x="6492240" y="4727448"/>
-            <a:ext cx="384048" cy="329184"/>
-          </a:xfrm>
-          <a:prstGeom prst="roundRect">
-            <a:avLst>
-              <a:gd name="adj" fmla="val 20000"/>
-            </a:avLst>
-          </a:prstGeom>
-          <a:solidFill>
-            <a:srgbClr val="FFFFFF"/>
-          </a:solidFill>
-          <a:ln w="6350">
-            <a:solidFill>
-              <a:srgbClr val="64748B"/>
-            </a:solidFill>
-          </a:ln>
-          <a:effectLst/>
-        </p:spPr>
-        <p:style>
-          <a:lnRef idx="1">
-            <a:schemeClr val="accent1"/>
-          </a:lnRef>
-          <a:fillRef idx="3">
-            <a:schemeClr val="accent1"/>
-          </a:fillRef>
-          <a:effectRef idx="2">
-            <a:schemeClr val="accent1"/>
-          </a:effectRef>
-          <a:fontRef idx="minor">
-            <a:schemeClr val="lt1"/>
-          </a:fontRef>
-        </p:style>
-        <p:txBody>
-          <a:bodyPr rtlCol="0" anchor="ctr"/>
-          <a:lstStyle/>
-          <a:p>
-            <a:pPr algn="ctr"/>
-          </a:p>
-        </p:txBody>
-      </p:sp>
-      <p:sp>
-        <p:nvSpPr>
-          <p:cNvPr id="55" name="TextBox 54"/>
-          <p:cNvSpPr txBox="1"/>
-          <p:nvPr/>
-        </p:nvSpPr>
-        <p:spPr>
-          <a:xfrm>
-            <a:off x="6492240" y="4764024"/>
-            <a:ext cx="384048" cy="274320"/>
-          </a:xfrm>
-          <a:prstGeom prst="rect">
-            <a:avLst/>
-          </a:prstGeom>
-          <a:noFill/>
-        </p:spPr>
-        <p:txBody>
-          <a:bodyPr wrap="square" anchor="t" lIns="0" rIns="0" tIns="0" bIns="0">
-            <a:spAutoFit/>
-          </a:bodyPr>
-          <a:lstStyle/>
-          <a:p>
-            <a:pPr algn="ctr"/>
-            <a:r>
-              <a:rPr sz="1000" b="1">
-                <a:solidFill>
-                  <a:srgbClr val="64748B"/>
-                </a:solidFill>
-                <a:latin typeface="Open Sans"/>
-              </a:rPr>
-              <a:t>TN</a:t>
-            </a:r>
-          </a:p>
-        </p:txBody>
-      </p:sp>
-      <p:sp>
-        <p:nvSpPr>
-          <p:cNvPr id="56" name="Rounded Rectangle 55"/>
-          <p:cNvSpPr/>
-          <p:nvPr/>
-        </p:nvSpPr>
-        <p:spPr>
-          <a:xfrm>
-            <a:off x="6949440" y="4727448"/>
-            <a:ext cx="384048" cy="329184"/>
-          </a:xfrm>
-          <a:prstGeom prst="roundRect">
-            <a:avLst>
-              <a:gd name="adj" fmla="val 20000"/>
-            </a:avLst>
-          </a:prstGeom>
-          <a:solidFill>
-            <a:srgbClr val="FFFFFF"/>
-          </a:solidFill>
-          <a:ln w="6350">
-            <a:solidFill>
-              <a:srgbClr val="64748B"/>
-            </a:solidFill>
-          </a:ln>
-          <a:effectLst/>
-        </p:spPr>
-        <p:style>
-          <a:lnRef idx="1">
-            <a:schemeClr val="accent1"/>
-          </a:lnRef>
-          <a:fillRef idx="3">
-            <a:schemeClr val="accent1"/>
-          </a:fillRef>
-          <a:effectRef idx="2">
-            <a:schemeClr val="accent1"/>
-          </a:effectRef>
-          <a:fontRef idx="minor">
-            <a:schemeClr val="lt1"/>
-          </a:fontRef>
-        </p:style>
-        <p:txBody>
-          <a:bodyPr rtlCol="0" anchor="ctr"/>
-          <a:lstStyle/>
-          <a:p>
-            <a:pPr algn="ctr"/>
-          </a:p>
-        </p:txBody>
-      </p:sp>
-      <p:sp>
-        <p:nvSpPr>
-          <p:cNvPr id="57" name="TextBox 56"/>
-          <p:cNvSpPr txBox="1"/>
-          <p:nvPr/>
-        </p:nvSpPr>
-        <p:spPr>
-          <a:xfrm>
-            <a:off x="6949440" y="4764024"/>
-            <a:ext cx="384048" cy="274320"/>
-          </a:xfrm>
-          <a:prstGeom prst="rect">
-            <a:avLst/>
-          </a:prstGeom>
-          <a:noFill/>
-        </p:spPr>
-        <p:txBody>
-          <a:bodyPr wrap="square" anchor="t" lIns="0" rIns="0" tIns="0" bIns="0">
-            <a:spAutoFit/>
-          </a:bodyPr>
-          <a:lstStyle/>
-          <a:p>
-            <a:pPr algn="ctr"/>
-            <a:r>
-              <a:rPr sz="1000" b="1">
-                <a:solidFill>
-                  <a:srgbClr val="64748B"/>
-                </a:solidFill>
-                <a:latin typeface="Open Sans"/>
-              </a:rPr>
-              <a:t>MS</a:t>
-            </a:r>
-          </a:p>
-        </p:txBody>
-      </p:sp>
-      <p:sp>
-        <p:nvSpPr>
-          <p:cNvPr id="58" name="Rounded Rectangle 57"/>
-          <p:cNvSpPr/>
-          <p:nvPr/>
-        </p:nvSpPr>
-        <p:spPr>
-          <a:xfrm>
-            <a:off x="7406640" y="4727448"/>
-            <a:ext cx="384048" cy="329184"/>
-          </a:xfrm>
-          <a:prstGeom prst="roundRect">
-            <a:avLst>
-              <a:gd name="adj" fmla="val 20000"/>
-            </a:avLst>
-          </a:prstGeom>
-          <a:solidFill>
-            <a:srgbClr val="FFFFFF"/>
-          </a:solidFill>
-          <a:ln w="6350">
-            <a:solidFill>
-              <a:srgbClr val="64748B"/>
-            </a:solidFill>
-          </a:ln>
-          <a:effectLst/>
-        </p:spPr>
-        <p:style>
-          <a:lnRef idx="1">
-            <a:schemeClr val="accent1"/>
-          </a:lnRef>
-          <a:fillRef idx="3">
-            <a:schemeClr val="accent1"/>
-          </a:fillRef>
-          <a:effectRef idx="2">
-            <a:schemeClr val="accent1"/>
-          </a:effectRef>
-          <a:fontRef idx="minor">
-            <a:schemeClr val="lt1"/>
-          </a:fontRef>
-        </p:style>
-        <p:txBody>
-          <a:bodyPr rtlCol="0" anchor="ctr"/>
-          <a:lstStyle/>
-          <a:p>
-            <a:pPr algn="ctr"/>
-          </a:p>
-        </p:txBody>
-      </p:sp>
-      <p:sp>
-        <p:nvSpPr>
-          <p:cNvPr id="59" name="TextBox 58"/>
-          <p:cNvSpPr txBox="1"/>
-          <p:nvPr/>
-        </p:nvSpPr>
-        <p:spPr>
-          <a:xfrm>
-            <a:off x="7406640" y="4764024"/>
-            <a:ext cx="384048" cy="274320"/>
-          </a:xfrm>
-          <a:prstGeom prst="rect">
-            <a:avLst/>
-          </a:prstGeom>
-          <a:noFill/>
-        </p:spPr>
-        <p:txBody>
-          <a:bodyPr wrap="square" anchor="t" lIns="0" rIns="0" tIns="0" bIns="0">
-            <a:spAutoFit/>
-          </a:bodyPr>
-          <a:lstStyle/>
-          <a:p>
-            <a:pPr algn="ctr"/>
-            <a:r>
-              <a:rPr sz="1000" b="1">
-                <a:solidFill>
-                  <a:srgbClr val="64748B"/>
-                </a:solidFill>
-                <a:latin typeface="Open Sans"/>
-              </a:rPr>
-              <a:t>MO</a:t>
-            </a:r>
-          </a:p>
-        </p:txBody>
-      </p:sp>
-      <p:sp>
-        <p:nvSpPr>
-          <p:cNvPr id="60" name="Rounded Rectangle 59"/>
-          <p:cNvSpPr/>
-          <p:nvPr/>
-        </p:nvSpPr>
-        <p:spPr>
-          <a:xfrm>
-            <a:off x="7863840" y="4727448"/>
-            <a:ext cx="384048" cy="329184"/>
-          </a:xfrm>
-          <a:prstGeom prst="roundRect">
-            <a:avLst>
-              <a:gd name="adj" fmla="val 20000"/>
-            </a:avLst>
-          </a:prstGeom>
-          <a:solidFill>
-            <a:srgbClr val="FFFFFF"/>
-          </a:solidFill>
-          <a:ln w="6350">
-            <a:solidFill>
-              <a:srgbClr val="64748B"/>
-            </a:solidFill>
-          </a:ln>
-          <a:effectLst/>
-        </p:spPr>
-        <p:style>
-          <a:lnRef idx="1">
-            <a:schemeClr val="accent1"/>
-          </a:lnRef>
-          <a:fillRef idx="3">
-            <a:schemeClr val="accent1"/>
-          </a:fillRef>
-          <a:effectRef idx="2">
-            <a:schemeClr val="accent1"/>
-          </a:effectRef>
-          <a:fontRef idx="minor">
-            <a:schemeClr val="lt1"/>
-          </a:fontRef>
-        </p:style>
-        <p:txBody>
-          <a:bodyPr rtlCol="0" anchor="ctr"/>
-          <a:lstStyle/>
-          <a:p>
-            <a:pPr algn="ctr"/>
-          </a:p>
-        </p:txBody>
-      </p:sp>
-      <p:sp>
-        <p:nvSpPr>
-          <p:cNvPr id="61" name="TextBox 60"/>
-          <p:cNvSpPr txBox="1"/>
-          <p:nvPr/>
-        </p:nvSpPr>
-        <p:spPr>
-          <a:xfrm>
-            <a:off x="7863840" y="4764024"/>
-            <a:ext cx="384048" cy="274320"/>
-          </a:xfrm>
-          <a:prstGeom prst="rect">
-            <a:avLst/>
-          </a:prstGeom>
-          <a:noFill/>
-        </p:spPr>
-        <p:txBody>
-          <a:bodyPr wrap="square" anchor="t" lIns="0" rIns="0" tIns="0" bIns="0">
-            <a:spAutoFit/>
-          </a:bodyPr>
-          <a:lstStyle/>
-          <a:p>
-            <a:pPr algn="ctr"/>
-            <a:r>
-              <a:rPr sz="1000" b="1">
-                <a:solidFill>
-                  <a:srgbClr val="64748B"/>
-                </a:solidFill>
-                <a:latin typeface="Open Sans"/>
-              </a:rPr>
-              <a:t>NC</a:t>
-            </a:r>
-          </a:p>
-        </p:txBody>
-      </p:sp>
-      <p:sp>
-        <p:nvSpPr>
-          <p:cNvPr id="62" name="TextBox 61"/>
-          <p:cNvSpPr txBox="1"/>
-          <p:nvPr/>
-        </p:nvSpPr>
-        <p:spPr>
-          <a:xfrm>
-            <a:off x="2377440" y="5074920"/>
-            <a:ext cx="9144000" cy="274320"/>
+          <p:cNvPr id="78" name="TextBox 77"/>
+          <p:cNvSpPr txBox="1"/>
+          <p:nvPr/>
+        </p:nvSpPr>
+        <p:spPr>
+          <a:xfrm>
+            <a:off x="640080" y="6144768"/>
+            <a:ext cx="10972800" cy="292608"/>
+          </a:xfrm>
+          <a:prstGeom prst="rect">
+            <a:avLst/>
+          </a:prstGeom>
+          <a:noFill/>
+        </p:spPr>
+        <p:txBody>
+          <a:bodyPr wrap="square" anchor="t" lIns="0" rIns="0" tIns="0" bIns="0">
+            <a:spAutoFit/>
+          </a:bodyPr>
+          <a:lstStyle/>
+          <a:p>
+            <a:pPr algn="l"/>
+            <a:r>
+              <a:rPr sz="1200" b="1">
+                <a:solidFill>
+                  <a:srgbClr val="FFFFFF"/>
+                </a:solidFill>
+                <a:latin typeface="Open Sans"/>
+              </a:rPr>
+              <a:t>Top-10 states = 287,765 customers (~70% of base). Only CA is fully ingestable today.</a:t>
+            </a:r>
+          </a:p>
+        </p:txBody>
+      </p:sp>
+      <p:sp>
+        <p:nvSpPr>
+          <p:cNvPr id="79" name="TextBox 78"/>
+          <p:cNvSpPr txBox="1"/>
+          <p:nvPr/>
+        </p:nvSpPr>
+        <p:spPr>
+          <a:xfrm>
+            <a:off x="640080" y="6400800"/>
+            <a:ext cx="10972800" cy="201168"/>
           </a:xfrm>
           <a:prstGeom prst="rect">
             <a:avLst/>
@@ -9426,476 +9960,11 @@
             <a:r>
               <a:rPr sz="1000" b="0">
                 <a:solidFill>
-                  <a:srgbClr val="334155"/>
-                </a:solidFill>
-                <a:latin typeface="Open Sans"/>
-              </a:rPr>
-              <a:t>No public bulk feed. Surface the member's match — if any — by querying the state's public search and deep-linking to their claim portal.</a:t>
-            </a:r>
-          </a:p>
-        </p:txBody>
-      </p:sp>
-      <p:sp>
-        <p:nvSpPr>
-          <p:cNvPr id="63" name="Rounded Rectangle 62"/>
-          <p:cNvSpPr/>
-          <p:nvPr/>
-        </p:nvSpPr>
-        <p:spPr>
-          <a:xfrm>
-            <a:off x="457200" y="5349240"/>
-            <a:ext cx="11247120" cy="822960"/>
-          </a:xfrm>
-          <a:prstGeom prst="roundRect">
-            <a:avLst>
-              <a:gd name="adj" fmla="val 3000"/>
-            </a:avLst>
-          </a:prstGeom>
-          <a:solidFill>
-            <a:srgbClr val="FFFFFF"/>
-          </a:solidFill>
-          <a:ln w="6350">
-            <a:solidFill>
-              <a:srgbClr val="E2E8F0"/>
-            </a:solidFill>
-          </a:ln>
-          <a:effectLst/>
-        </p:spPr>
-        <p:style>
-          <a:lnRef idx="1">
-            <a:schemeClr val="accent1"/>
-          </a:lnRef>
-          <a:fillRef idx="3">
-            <a:schemeClr val="accent1"/>
-          </a:fillRef>
-          <a:effectRef idx="2">
-            <a:schemeClr val="accent1"/>
-          </a:effectRef>
-          <a:fontRef idx="minor">
-            <a:schemeClr val="lt1"/>
-          </a:fontRef>
-        </p:style>
-        <p:txBody>
-          <a:bodyPr rtlCol="0" anchor="ctr"/>
-          <a:lstStyle/>
-          <a:p>
-            <a:pPr algn="ctr"/>
-          </a:p>
-        </p:txBody>
-      </p:sp>
-      <p:sp>
-        <p:nvSpPr>
-          <p:cNvPr id="64" name="Rectangle 63"/>
-          <p:cNvSpPr/>
-          <p:nvPr/>
-        </p:nvSpPr>
-        <p:spPr>
-          <a:xfrm>
-            <a:off x="457200" y="5349240"/>
-            <a:ext cx="164592" cy="822960"/>
-          </a:xfrm>
-          <a:prstGeom prst="rect">
-            <a:avLst/>
-          </a:prstGeom>
-          <a:solidFill>
-            <a:srgbClr val="E11D48"/>
-          </a:solidFill>
-          <a:ln>
-            <a:noFill/>
-          </a:ln>
-          <a:effectLst/>
-        </p:spPr>
-        <p:style>
-          <a:lnRef idx="1">
-            <a:schemeClr val="accent1"/>
-          </a:lnRef>
-          <a:fillRef idx="3">
-            <a:schemeClr val="accent1"/>
-          </a:fillRef>
-          <a:effectRef idx="2">
-            <a:schemeClr val="accent1"/>
-          </a:effectRef>
-          <a:fontRef idx="minor">
-            <a:schemeClr val="lt1"/>
-          </a:fontRef>
-        </p:style>
-        <p:txBody>
-          <a:bodyPr rtlCol="0" anchor="ctr"/>
-          <a:lstStyle/>
-          <a:p>
-            <a:pPr algn="ctr"/>
-          </a:p>
-        </p:txBody>
-      </p:sp>
-      <p:sp>
-        <p:nvSpPr>
-          <p:cNvPr id="65" name="Rounded Rectangle 64"/>
-          <p:cNvSpPr/>
-          <p:nvPr/>
-        </p:nvSpPr>
-        <p:spPr>
-          <a:xfrm>
-            <a:off x="777240" y="5513831"/>
-            <a:ext cx="1188720" cy="329184"/>
-          </a:xfrm>
-          <a:prstGeom prst="roundRect">
-            <a:avLst>
-              <a:gd name="adj" fmla="val 50000"/>
-            </a:avLst>
-          </a:prstGeom>
-          <a:solidFill>
-            <a:srgbClr val="E11D48"/>
-          </a:solidFill>
-          <a:ln>
-            <a:noFill/>
-          </a:ln>
-        </p:spPr>
-        <p:style>
-          <a:lnRef idx="1">
-            <a:schemeClr val="accent1"/>
-          </a:lnRef>
-          <a:fillRef idx="3">
-            <a:schemeClr val="accent1"/>
-          </a:fillRef>
-          <a:effectRef idx="2">
-            <a:schemeClr val="accent1"/>
-          </a:effectRef>
-          <a:fontRef idx="minor">
-            <a:schemeClr val="lt1"/>
-          </a:fontRef>
-        </p:style>
-        <p:txBody>
-          <a:bodyPr rtlCol="0" anchor="ctr" lIns="45720" rIns="45720" tIns="18288" bIns="18288"/>
-          <a:lstStyle/>
-          <a:p>
-            <a:pPr algn="ctr"/>
-            <a:r>
-              <a:rPr sz="1100" b="1">
-                <a:solidFill>
-                  <a:srgbClr val="FFFFFF"/>
-                </a:solidFill>
-                <a:latin typeface="Open Sans"/>
-              </a:rPr>
-              <a:t>BLOCKED</a:t>
-            </a:r>
-          </a:p>
-        </p:txBody>
-      </p:sp>
-      <p:sp>
-        <p:nvSpPr>
-          <p:cNvPr id="66" name="TextBox 65"/>
-          <p:cNvSpPr txBox="1"/>
-          <p:nvPr/>
-        </p:nvSpPr>
-        <p:spPr>
-          <a:xfrm>
-            <a:off x="777240" y="5852159"/>
-            <a:ext cx="1828800" cy="292608"/>
-          </a:xfrm>
-          <a:prstGeom prst="rect">
-            <a:avLst/>
-          </a:prstGeom>
-          <a:noFill/>
-        </p:spPr>
-        <p:txBody>
-          <a:bodyPr wrap="square" anchor="t" lIns="0" rIns="0" tIns="0" bIns="0">
-            <a:spAutoFit/>
-          </a:bodyPr>
-          <a:lstStyle/>
-          <a:p>
-            <a:pPr algn="l"/>
-            <a:r>
-              <a:rPr sz="1100" b="0">
-                <a:solidFill>
-                  <a:srgbClr val="64748B"/>
-                </a:solidFill>
-                <a:latin typeface="Open Sans"/>
-              </a:rPr>
-              <a:t>Do not ingest</a:t>
-            </a:r>
-          </a:p>
-        </p:txBody>
-      </p:sp>
-      <p:sp>
-        <p:nvSpPr>
-          <p:cNvPr id="67" name="Rounded Rectangle 66"/>
-          <p:cNvSpPr/>
-          <p:nvPr/>
-        </p:nvSpPr>
-        <p:spPr>
-          <a:xfrm>
-            <a:off x="2377440" y="5641848"/>
-            <a:ext cx="384048" cy="329184"/>
-          </a:xfrm>
-          <a:prstGeom prst="roundRect">
-            <a:avLst>
-              <a:gd name="adj" fmla="val 20000"/>
-            </a:avLst>
-          </a:prstGeom>
-          <a:solidFill>
-            <a:srgbClr val="FFFFFF"/>
-          </a:solidFill>
-          <a:ln w="6350">
-            <a:solidFill>
-              <a:srgbClr val="E11D48"/>
-            </a:solidFill>
-          </a:ln>
-          <a:effectLst/>
-        </p:spPr>
-        <p:style>
-          <a:lnRef idx="1">
-            <a:schemeClr val="accent1"/>
-          </a:lnRef>
-          <a:fillRef idx="3">
-            <a:schemeClr val="accent1"/>
-          </a:fillRef>
-          <a:effectRef idx="2">
-            <a:schemeClr val="accent1"/>
-          </a:effectRef>
-          <a:fontRef idx="minor">
-            <a:schemeClr val="lt1"/>
-          </a:fontRef>
-        </p:style>
-        <p:txBody>
-          <a:bodyPr rtlCol="0" anchor="ctr"/>
-          <a:lstStyle/>
-          <a:p>
-            <a:pPr algn="ctr"/>
-          </a:p>
-        </p:txBody>
-      </p:sp>
-      <p:sp>
-        <p:nvSpPr>
-          <p:cNvPr id="68" name="TextBox 67"/>
-          <p:cNvSpPr txBox="1"/>
-          <p:nvPr/>
-        </p:nvSpPr>
-        <p:spPr>
-          <a:xfrm>
-            <a:off x="2377440" y="5678424"/>
-            <a:ext cx="384048" cy="274320"/>
-          </a:xfrm>
-          <a:prstGeom prst="rect">
-            <a:avLst/>
-          </a:prstGeom>
-          <a:noFill/>
-        </p:spPr>
-        <p:txBody>
-          <a:bodyPr wrap="square" anchor="t" lIns="0" rIns="0" tIns="0" bIns="0">
-            <a:spAutoFit/>
-          </a:bodyPr>
-          <a:lstStyle/>
-          <a:p>
-            <a:pPr algn="ctr"/>
-            <a:r>
-              <a:rPr sz="1000" b="1">
-                <a:solidFill>
-                  <a:srgbClr val="E11D48"/>
-                </a:solidFill>
-                <a:latin typeface="Open Sans"/>
-              </a:rPr>
-              <a:t>FL</a:t>
-            </a:r>
-          </a:p>
-        </p:txBody>
-      </p:sp>
-      <p:sp>
-        <p:nvSpPr>
-          <p:cNvPr id="69" name="Rounded Rectangle 68"/>
-          <p:cNvSpPr/>
-          <p:nvPr/>
-        </p:nvSpPr>
-        <p:spPr>
-          <a:xfrm>
-            <a:off x="2834640" y="5641848"/>
-            <a:ext cx="384048" cy="329184"/>
-          </a:xfrm>
-          <a:prstGeom prst="roundRect">
-            <a:avLst>
-              <a:gd name="adj" fmla="val 20000"/>
-            </a:avLst>
-          </a:prstGeom>
-          <a:solidFill>
-            <a:srgbClr val="FFFFFF"/>
-          </a:solidFill>
-          <a:ln w="6350">
-            <a:solidFill>
-              <a:srgbClr val="E11D48"/>
-            </a:solidFill>
-          </a:ln>
-          <a:effectLst/>
-        </p:spPr>
-        <p:style>
-          <a:lnRef idx="1">
-            <a:schemeClr val="accent1"/>
-          </a:lnRef>
-          <a:fillRef idx="3">
-            <a:schemeClr val="accent1"/>
-          </a:fillRef>
-          <a:effectRef idx="2">
-            <a:schemeClr val="accent1"/>
-          </a:effectRef>
-          <a:fontRef idx="minor">
-            <a:schemeClr val="lt1"/>
-          </a:fontRef>
-        </p:style>
-        <p:txBody>
-          <a:bodyPr rtlCol="0" anchor="ctr"/>
-          <a:lstStyle/>
-          <a:p>
-            <a:pPr algn="ctr"/>
-          </a:p>
-        </p:txBody>
-      </p:sp>
-      <p:sp>
-        <p:nvSpPr>
-          <p:cNvPr id="70" name="TextBox 69"/>
-          <p:cNvSpPr txBox="1"/>
-          <p:nvPr/>
-        </p:nvSpPr>
-        <p:spPr>
-          <a:xfrm>
-            <a:off x="2834640" y="5678424"/>
-            <a:ext cx="384048" cy="274320"/>
-          </a:xfrm>
-          <a:prstGeom prst="rect">
-            <a:avLst/>
-          </a:prstGeom>
-          <a:noFill/>
-        </p:spPr>
-        <p:txBody>
-          <a:bodyPr wrap="square" anchor="t" lIns="0" rIns="0" tIns="0" bIns="0">
-            <a:spAutoFit/>
-          </a:bodyPr>
-          <a:lstStyle/>
-          <a:p>
-            <a:pPr algn="ctr"/>
-            <a:r>
-              <a:rPr sz="1000" b="1">
-                <a:solidFill>
-                  <a:srgbClr val="E11D48"/>
-                </a:solidFill>
-                <a:latin typeface="Open Sans"/>
-              </a:rPr>
-              <a:t>WA</a:t>
-            </a:r>
-          </a:p>
-        </p:txBody>
-      </p:sp>
-      <p:sp>
-        <p:nvSpPr>
-          <p:cNvPr id="71" name="Rounded Rectangle 70"/>
-          <p:cNvSpPr/>
-          <p:nvPr/>
-        </p:nvSpPr>
-        <p:spPr>
-          <a:xfrm>
-            <a:off x="3291840" y="5641848"/>
-            <a:ext cx="384048" cy="329184"/>
-          </a:xfrm>
-          <a:prstGeom prst="roundRect">
-            <a:avLst>
-              <a:gd name="adj" fmla="val 20000"/>
-            </a:avLst>
-          </a:prstGeom>
-          <a:solidFill>
-            <a:srgbClr val="FFFFFF"/>
-          </a:solidFill>
-          <a:ln w="6350">
-            <a:solidFill>
-              <a:srgbClr val="E11D48"/>
-            </a:solidFill>
-          </a:ln>
-          <a:effectLst/>
-        </p:spPr>
-        <p:style>
-          <a:lnRef idx="1">
-            <a:schemeClr val="accent1"/>
-          </a:lnRef>
-          <a:fillRef idx="3">
-            <a:schemeClr val="accent1"/>
-          </a:fillRef>
-          <a:effectRef idx="2">
-            <a:schemeClr val="accent1"/>
-          </a:effectRef>
-          <a:fontRef idx="minor">
-            <a:schemeClr val="lt1"/>
-          </a:fontRef>
-        </p:style>
-        <p:txBody>
-          <a:bodyPr rtlCol="0" anchor="ctr"/>
-          <a:lstStyle/>
-          <a:p>
-            <a:pPr algn="ctr"/>
-          </a:p>
-        </p:txBody>
-      </p:sp>
-      <p:sp>
-        <p:nvSpPr>
-          <p:cNvPr id="72" name="TextBox 71"/>
-          <p:cNvSpPr txBox="1"/>
-          <p:nvPr/>
-        </p:nvSpPr>
-        <p:spPr>
-          <a:xfrm>
-            <a:off x="3291840" y="5678424"/>
-            <a:ext cx="384048" cy="274320"/>
-          </a:xfrm>
-          <a:prstGeom prst="rect">
-            <a:avLst/>
-          </a:prstGeom>
-          <a:noFill/>
-        </p:spPr>
-        <p:txBody>
-          <a:bodyPr wrap="square" anchor="t" lIns="0" rIns="0" tIns="0" bIns="0">
-            <a:spAutoFit/>
-          </a:bodyPr>
-          <a:lstStyle/>
-          <a:p>
-            <a:pPr algn="ctr"/>
-            <a:r>
-              <a:rPr sz="1000" b="1">
-                <a:solidFill>
-                  <a:srgbClr val="E11D48"/>
-                </a:solidFill>
-                <a:latin typeface="Open Sans"/>
-              </a:rPr>
-              <a:t>UT</a:t>
-            </a:r>
-          </a:p>
-        </p:txBody>
-      </p:sp>
-      <p:sp>
-        <p:nvSpPr>
-          <p:cNvPr id="73" name="TextBox 72"/>
-          <p:cNvSpPr txBox="1"/>
-          <p:nvPr/>
-        </p:nvSpPr>
-        <p:spPr>
-          <a:xfrm>
-            <a:off x="2377440" y="5989320"/>
-            <a:ext cx="9144000" cy="274320"/>
-          </a:xfrm>
-          <a:prstGeom prst="rect">
-            <a:avLst/>
-          </a:prstGeom>
-          <a:noFill/>
-        </p:spPr>
-        <p:txBody>
-          <a:bodyPr wrap="square" anchor="t" lIns="0" rIns="0" tIns="0" bIns="0">
-            <a:spAutoFit/>
-          </a:bodyPr>
-          <a:lstStyle/>
-          <a:p>
-            <a:pPr algn="l"/>
-            <a:r>
-              <a:rPr sz="1000" b="0">
-                <a:solidFill>
-                  <a:srgbClr val="334155"/>
-                </a:solidFill>
-                <a:latin typeface="Open Sans"/>
-              </a:rPr>
-              <a:t>FL portal terms forbid automated access (rep-only via FL atty/CPA/PI). WA + UT statute prohibits commercial redistribution of the owner list.</a:t>
+                  <a:srgbClr val="CCDDFF"/>
+                </a:solidFill>
+                <a:latin typeface="Open Sans"/>
+              </a:rPr>
+              <a:t>Sprint 2 unlocks TX + NY + GA → covers our top 5 states (~225K customers, 5× current coverage).</a:t>
             </a:r>
           </a:p>
         </p:txBody>
@@ -10211,7 +10280,7 @@
                 </a:solidFill>
                 <a:latin typeface="Open Sans"/>
               </a:rPr>
-              <a:t>Most states accept online claim filings — that's our v1 path. When a state requires a notarized paper packet, we ship it via Lob (already in production for our credit-dispute mailers). Filing on the member's behalf is a regulatory unlock per state, not a technical one.</a:t>
+              <a:t>Most states accept online claim filings — that's our v1 path. When a state requires a notarized paper packet, we ship it via ActionLetters (our existing letter-mailing service that already handles credit-dispute mailers). Filing on the member's behalf is a regulatory unlock per state, not a technical one.</a:t>
             </a:r>
           </a:p>
         </p:txBody>
@@ -10885,7 +10954,7 @@
                 </a:solidFill>
                 <a:latin typeface="Open Sans"/>
               </a:rPr>
-              <a:t>Mail packet via Lob</a:t>
+              <a:t>Mail packet via ActionLetters</a:t>
             </a:r>
           </a:p>
         </p:txBody>
@@ -11025,7 +11094,7 @@
                 </a:solidFill>
                 <a:latin typeface="Open Sans"/>
               </a:rPr>
-              <a:t>Notarized claim packet → Lob → state mail intake</a:t>
+              <a:t>Notarized claim packet → ActionLetters → state mail intake</a:t>
             </a:r>
           </a:p>
         </p:txBody>
@@ -11095,7 +11164,7 @@
                 </a:solidFill>
                 <a:latin typeface="Open Sans"/>
               </a:rPr>
-              <a:t>Same Lob rail SmartCredit already uses for credit-bureau dispute letters</a:t>
+              <a:t>Same ActionLetters rail SmartCredit uses for credit-bureau dispute letters</a:t>
             </a:r>
           </a:p>
         </p:txBody>
@@ -13024,7 +13093,7 @@
                 </a:solidFill>
                 <a:latin typeface="Open Sans"/>
               </a:rPr>
-              <a:t>Assisted e-file shipped (with mail-packet fallback via Lob)</a:t>
+              <a:t>Assisted e-file shipped (with ActionLetters mail-packet fallback)</a:t>
             </a:r>
           </a:p>
         </p:txBody>
@@ -13059,7 +13128,7 @@
                 </a:solidFill>
                 <a:latin typeface="Open Sans"/>
               </a:rPr>
-              <a:t>Member confirms a match → SmartCredit preps the packet → user submits via state portal. Lob handles physical packets where states require it.</a:t>
+              <a:t>Member confirms a match → SmartCredit preps the packet → user submits via state portal. ActionLetters handles physical packets where states require it.</a:t>
             </a:r>
           </a:p>
         </p:txBody>

--- a/myReclaim-Exec-Deck.pptx
+++ b/myReclaim-Exec-Deck.pptx
@@ -7205,7 +7205,7 @@
                 </a:solidFill>
                 <a:latin typeface="Open Sans"/>
               </a:rPr>
-              <a:t>Top 10 customer states cover ~70% of the SmartCredit base. Three of the top five (FL, TX, GA) need a state agreement before we can ingest. CA is the only top-10 state with a clean public bulk feed — that's where the prototype starts.</a:t>
+              <a:t>Top 10 customer states cover ~70% of the SmartCredit base. Four of the top five (FL, TX, GA, NY) need a state agreement before we can ingest at scale. CA is the only top-10 state with a clean public bulk feed — that's where the prototype starts.</a:t>
             </a:r>
           </a:p>
         </p:txBody>
@@ -7595,7 +7595,7 @@
             </a:avLst>
           </a:prstGeom>
           <a:solidFill>
-            <a:srgbClr val="E11D48"/>
+            <a:srgbClr val="FC4C0B"/>
           </a:solidFill>
           <a:ln>
             <a:noFill/>
@@ -7627,7 +7627,7 @@
                 </a:solidFill>
                 <a:latin typeface="Open Sans"/>
               </a:rPr>
-              <a:t>BLOCKED</a:t>
+              <a:t>MANUAL</a:t>
             </a:r>
           </a:p>
         </p:txBody>
@@ -7662,7 +7662,7 @@
                 </a:solidFill>
                 <a:latin typeface="Open Sans"/>
               </a:rPr>
-              <a:t>FL atty/CPA/PI rep-only — partner or skip ingest</a:t>
+              <a:t>Registered FL rep (atty/CPA/PI per Ch. 717) — manual portal lookups, no automation</a:t>
             </a:r>
           </a:p>
         </p:txBody>
@@ -9929,7 +9929,7 @@
                 </a:solidFill>
                 <a:latin typeface="Open Sans"/>
               </a:rPr>
-              <a:t>Top-10 states = 287,765 customers (~70% of base). Only CA is fully ingestable today.</a:t>
+              <a:t>Top-10 states = 287,765 customers (~70% of base). CA is the only fully bulk-ingestable state today.</a:t>
             </a:r>
           </a:p>
         </p:txBody>
@@ -9964,7 +9964,7 @@
                 </a:solidFill>
                 <a:latin typeface="Open Sans"/>
               </a:rPr>
-              <a:t>Sprint 2 unlocks TX + NY + GA → covers our top 5 states (~225K customers, 5× current coverage).</a:t>
+              <a:t>Sprint 2 unlocks TX + NY + GA at bulk; FL needs a registered-rep partnership for manual access (no automation, but full data).</a:t>
             </a:r>
           </a:p>
         </p:txBody>
@@ -11676,7 +11676,7 @@
                 </a:solidFill>
                 <a:latin typeface="Open Sans"/>
               </a:rPr>
-              <a:t>FL attorney, CPA, or licensed PI registered with the Dept.</a:t>
+              <a:t>Registered FL atty/CPA/PI per Ch. 717. Same rep can pull data manually.</a:t>
             </a:r>
           </a:p>
         </p:txBody>

--- a/myReclaim-Exec-Deck.pptx
+++ b/myReclaim-Exec-Deck.pptx
@@ -10293,8 +10293,8 @@
         </p:nvSpPr>
         <p:spPr>
           <a:xfrm>
-            <a:off x="457200" y="2697480"/>
-            <a:ext cx="3657600" cy="3291840"/>
+            <a:off x="457200" y="2606040"/>
+            <a:ext cx="3657600" cy="3657600"/>
           </a:xfrm>
           <a:prstGeom prst="roundRect">
             <a:avLst>
@@ -10341,7 +10341,7 @@
         </p:nvSpPr>
         <p:spPr>
           <a:xfrm>
-            <a:off x="457200" y="2697480"/>
+            <a:off x="457200" y="2606040"/>
             <a:ext cx="3657600" cy="164592"/>
           </a:xfrm>
           <a:prstGeom prst="rect">
@@ -10385,8 +10385,8 @@
         </p:nvSpPr>
         <p:spPr>
           <a:xfrm>
-            <a:off x="685800" y="2990088"/>
-            <a:ext cx="3200400" cy="365760"/>
+            <a:off x="685800" y="2898648"/>
+            <a:ext cx="3200400" cy="329184"/>
           </a:xfrm>
           <a:prstGeom prst="rect">
             <a:avLst/>
@@ -10420,7 +10420,7 @@
         </p:nvSpPr>
         <p:spPr>
           <a:xfrm>
-            <a:off x="685800" y="3337560"/>
+            <a:off x="685800" y="3246120"/>
             <a:ext cx="3200400" cy="502920"/>
           </a:xfrm>
           <a:prstGeom prst="rect">
@@ -10456,22 +10456,22 @@
         <p:spPr>
           <a:xfrm>
             <a:off x="685800" y="3977639"/>
-            <a:ext cx="1188720" cy="256032"/>
-          </a:xfrm>
-          <a:prstGeom prst="rect">
-            <a:avLst/>
-          </a:prstGeom>
-          <a:noFill/>
-        </p:spPr>
-        <p:txBody>
-          <a:bodyPr wrap="square" anchor="t" lIns="0" rIns="0" tIns="0" bIns="0">
-            <a:spAutoFit/>
-          </a:bodyPr>
-          <a:lstStyle/>
-          <a:p>
-            <a:pPr algn="l"/>
-            <a:r>
-              <a:rPr sz="950" b="1">
+            <a:ext cx="1371600" cy="201168"/>
+          </a:xfrm>
+          <a:prstGeom prst="rect">
+            <a:avLst/>
+          </a:prstGeom>
+          <a:noFill/>
+        </p:spPr>
+        <p:txBody>
+          <a:bodyPr wrap="square" anchor="t" lIns="0" rIns="0" tIns="0" bIns="0">
+            <a:spAutoFit/>
+          </a:bodyPr>
+          <a:lstStyle/>
+          <a:p>
+            <a:pPr algn="l"/>
+            <a:r>
+              <a:rPr sz="900" b="1">
                 <a:solidFill>
                   <a:srgbClr val="2863C5"/>
                 </a:solidFill>
@@ -10490,23 +10490,23 @@
         </p:nvSpPr>
         <p:spPr>
           <a:xfrm>
-            <a:off x="685800" y="4215383"/>
-            <a:ext cx="3200400" cy="411480"/>
-          </a:xfrm>
-          <a:prstGeom prst="rect">
-            <a:avLst/>
-          </a:prstGeom>
-          <a:noFill/>
-        </p:spPr>
-        <p:txBody>
-          <a:bodyPr wrap="square" anchor="t" lIns="0" rIns="0" tIns="0" bIns="0">
-            <a:spAutoFit/>
-          </a:bodyPr>
-          <a:lstStyle/>
-          <a:p>
-            <a:pPr algn="l"/>
-            <a:r>
-              <a:rPr sz="950" b="0">
+            <a:off x="685800" y="4197096"/>
+            <a:ext cx="3200400" cy="457200"/>
+          </a:xfrm>
+          <a:prstGeom prst="rect">
+            <a:avLst/>
+          </a:prstGeom>
+          <a:noFill/>
+        </p:spPr>
+        <p:txBody>
+          <a:bodyPr wrap="square" anchor="t" lIns="0" rIns="0" tIns="0" bIns="0">
+            <a:spAutoFit/>
+          </a:bodyPr>
+          <a:lstStyle/>
+          <a:p>
+            <a:pPr algn="l"/>
+            <a:r>
+              <a:rPr sz="1000" b="0">
                 <a:solidFill>
                   <a:srgbClr val="334155"/>
                 </a:solidFill>
@@ -10525,23 +10525,23 @@
         </p:nvSpPr>
         <p:spPr>
           <a:xfrm>
-            <a:off x="685800" y="4389120"/>
-            <a:ext cx="1188720" cy="256032"/>
-          </a:xfrm>
-          <a:prstGeom prst="rect">
-            <a:avLst/>
-          </a:prstGeom>
-          <a:noFill/>
-        </p:spPr>
-        <p:txBody>
-          <a:bodyPr wrap="square" anchor="t" lIns="0" rIns="0" tIns="0" bIns="0">
-            <a:spAutoFit/>
-          </a:bodyPr>
-          <a:lstStyle/>
-          <a:p>
-            <a:pPr algn="l"/>
-            <a:r>
-              <a:rPr sz="950" b="1">
+            <a:off x="685800" y="4526279"/>
+            <a:ext cx="1371600" cy="201168"/>
+          </a:xfrm>
+          <a:prstGeom prst="rect">
+            <a:avLst/>
+          </a:prstGeom>
+          <a:noFill/>
+        </p:spPr>
+        <p:txBody>
+          <a:bodyPr wrap="square" anchor="t" lIns="0" rIns="0" tIns="0" bIns="0">
+            <a:spAutoFit/>
+          </a:bodyPr>
+          <a:lstStyle/>
+          <a:p>
+            <a:pPr algn="l"/>
+            <a:r>
+              <a:rPr sz="900" b="1">
                 <a:solidFill>
                   <a:srgbClr val="2863C5"/>
                 </a:solidFill>
@@ -10560,29 +10560,29 @@
         </p:nvSpPr>
         <p:spPr>
           <a:xfrm>
-            <a:off x="685800" y="4626864"/>
-            <a:ext cx="3200400" cy="411480"/>
-          </a:xfrm>
-          <a:prstGeom prst="rect">
-            <a:avLst/>
-          </a:prstGeom>
-          <a:noFill/>
-        </p:spPr>
-        <p:txBody>
-          <a:bodyPr wrap="square" anchor="t" lIns="0" rIns="0" tIns="0" bIns="0">
-            <a:spAutoFit/>
-          </a:bodyPr>
-          <a:lstStyle/>
-          <a:p>
-            <a:pPr algn="l"/>
-            <a:r>
-              <a:rPr sz="950" b="0">
+            <a:off x="685800" y="4745736"/>
+            <a:ext cx="3200400" cy="457200"/>
+          </a:xfrm>
+          <a:prstGeom prst="rect">
+            <a:avLst/>
+          </a:prstGeom>
+          <a:noFill/>
+        </p:spPr>
+        <p:txBody>
+          <a:bodyPr wrap="square" anchor="t" lIns="0" rIns="0" tIns="0" bIns="0">
+            <a:spAutoFit/>
+          </a:bodyPr>
+          <a:lstStyle/>
+          <a:p>
+            <a:pPr algn="l"/>
+            <a:r>
+              <a:rPr sz="1000" b="0">
                 <a:solidFill>
                   <a:srgbClr val="334155"/>
                 </a:solidFill>
                 <a:latin typeface="Open Sans"/>
               </a:rPr>
-              <a:t>We prepare the packet → state's official portal → user submits</a:t>
+              <a:t>We prep the packet · user submits via state portal</a:t>
             </a:r>
           </a:p>
         </p:txBody>
@@ -10595,23 +10595,23 @@
         </p:nvSpPr>
         <p:spPr>
           <a:xfrm>
-            <a:off x="685800" y="4800600"/>
-            <a:ext cx="1188720" cy="256032"/>
-          </a:xfrm>
-          <a:prstGeom prst="rect">
-            <a:avLst/>
-          </a:prstGeom>
-          <a:noFill/>
-        </p:spPr>
-        <p:txBody>
-          <a:bodyPr wrap="square" anchor="t" lIns="0" rIns="0" tIns="0" bIns="0">
-            <a:spAutoFit/>
-          </a:bodyPr>
-          <a:lstStyle/>
-          <a:p>
-            <a:pPr algn="l"/>
-            <a:r>
-              <a:rPr sz="950" b="1">
+            <a:off x="685800" y="5074919"/>
+            <a:ext cx="1371600" cy="201168"/>
+          </a:xfrm>
+          <a:prstGeom prst="rect">
+            <a:avLst/>
+          </a:prstGeom>
+          <a:noFill/>
+        </p:spPr>
+        <p:txBody>
+          <a:bodyPr wrap="square" anchor="t" lIns="0" rIns="0" tIns="0" bIns="0">
+            <a:spAutoFit/>
+          </a:bodyPr>
+          <a:lstStyle/>
+          <a:p>
+            <a:pPr algn="l"/>
+            <a:r>
+              <a:rPr sz="900" b="1">
                 <a:solidFill>
                   <a:srgbClr val="2863C5"/>
                 </a:solidFill>
@@ -10630,29 +10630,29 @@
         </p:nvSpPr>
         <p:spPr>
           <a:xfrm>
-            <a:off x="685800" y="5038344"/>
-            <a:ext cx="3200400" cy="411480"/>
-          </a:xfrm>
-          <a:prstGeom prst="rect">
-            <a:avLst/>
-          </a:prstGeom>
-          <a:noFill/>
-        </p:spPr>
-        <p:txBody>
-          <a:bodyPr wrap="square" anchor="t" lIns="0" rIns="0" tIns="0" bIns="0">
-            <a:spAutoFit/>
-          </a:bodyPr>
-          <a:lstStyle/>
-          <a:p>
-            <a:pPr algn="l"/>
-            <a:r>
-              <a:rPr sz="950" b="0">
+            <a:off x="685800" y="5294375"/>
+            <a:ext cx="3200400" cy="457200"/>
+          </a:xfrm>
+          <a:prstGeom prst="rect">
+            <a:avLst/>
+          </a:prstGeom>
+          <a:noFill/>
+        </p:spPr>
+        <p:txBody>
+          <a:bodyPr wrap="square" anchor="t" lIns="0" rIns="0" tIns="0" bIns="0">
+            <a:spAutoFit/>
+          </a:bodyPr>
+          <a:lstStyle/>
+          <a:p>
+            <a:pPr algn="l"/>
+            <a:r>
+              <a:rPr sz="1000" b="0">
                 <a:solidFill>
                   <a:srgbClr val="334155"/>
                 </a:solidFill>
                 <a:latin typeface="Open Sans"/>
               </a:rPr>
-              <a:t>Claim ID + status updates back into SmartCredit</a:t>
+              <a:t>Claim ID + status sync back to SmartCredit</a:t>
             </a:r>
           </a:p>
         </p:txBody>
@@ -10665,29 +10665,29 @@
         </p:nvSpPr>
         <p:spPr>
           <a:xfrm>
-            <a:off x="685800" y="5212080"/>
-            <a:ext cx="1188720" cy="256032"/>
-          </a:xfrm>
-          <a:prstGeom prst="rect">
-            <a:avLst/>
-          </a:prstGeom>
-          <a:noFill/>
-        </p:spPr>
-        <p:txBody>
-          <a:bodyPr wrap="square" anchor="t" lIns="0" rIns="0" tIns="0" bIns="0">
-            <a:spAutoFit/>
-          </a:bodyPr>
-          <a:lstStyle/>
-          <a:p>
-            <a:pPr algn="l"/>
-            <a:r>
-              <a:rPr sz="950" b="1">
+            <a:off x="685800" y="5623559"/>
+            <a:ext cx="1371600" cy="201168"/>
+          </a:xfrm>
+          <a:prstGeom prst="rect">
+            <a:avLst/>
+          </a:prstGeom>
+          <a:noFill/>
+        </p:spPr>
+        <p:txBody>
+          <a:bodyPr wrap="square" anchor="t" lIns="0" rIns="0" tIns="0" bIns="0">
+            <a:spAutoFit/>
+          </a:bodyPr>
+          <a:lstStyle/>
+          <a:p>
+            <a:pPr algn="l"/>
+            <a:r>
+              <a:rPr sz="900" b="1">
                 <a:solidFill>
                   <a:srgbClr val="2863C5"/>
                 </a:solidFill>
                 <a:latin typeface="Open Sans"/>
               </a:rPr>
-              <a:t>Coverage</a:t>
+              <a:t>Status</a:t>
             </a:r>
           </a:p>
         </p:txBody>
@@ -10700,113 +10700,43 @@
         </p:nvSpPr>
         <p:spPr>
           <a:xfrm>
-            <a:off x="685800" y="5449824"/>
-            <a:ext cx="3200400" cy="411480"/>
-          </a:xfrm>
-          <a:prstGeom prst="rect">
-            <a:avLst/>
-          </a:prstGeom>
-          <a:noFill/>
-        </p:spPr>
-        <p:txBody>
-          <a:bodyPr wrap="square" anchor="t" lIns="0" rIns="0" tIns="0" bIns="0">
-            <a:spAutoFit/>
-          </a:bodyPr>
-          <a:lstStyle/>
-          <a:p>
-            <a:pPr algn="l"/>
-            <a:r>
-              <a:rPr sz="950" b="0">
+            <a:off x="685800" y="5843015"/>
+            <a:ext cx="3200400" cy="457200"/>
+          </a:xfrm>
+          <a:prstGeom prst="rect">
+            <a:avLst/>
+          </a:prstGeom>
+          <a:noFill/>
+        </p:spPr>
+        <p:txBody>
+          <a:bodyPr wrap="square" anchor="t" lIns="0" rIns="0" tIns="0" bIns="0">
+            <a:spAutoFit/>
+          </a:bodyPr>
+          <a:lstStyle/>
+          <a:p>
+            <a:pPr algn="l"/>
+            <a:r>
+              <a:rPr sz="1000" b="0">
                 <a:solidFill>
                   <a:srgbClr val="334155"/>
                 </a:solidFill>
                 <a:latin typeface="Open Sans"/>
               </a:rPr>
-              <a:t>Every state with online filing</a:t>
-            </a:r>
-          </a:p>
-        </p:txBody>
-      </p:sp>
-      <p:sp>
-        <p:nvSpPr>
-          <p:cNvPr id="22" name="TextBox 21"/>
-          <p:cNvSpPr txBox="1"/>
-          <p:nvPr/>
-        </p:nvSpPr>
-        <p:spPr>
-          <a:xfrm>
-            <a:off x="685800" y="5623560"/>
-            <a:ext cx="1188720" cy="256032"/>
-          </a:xfrm>
-          <a:prstGeom prst="rect">
-            <a:avLst/>
-          </a:prstGeom>
-          <a:noFill/>
-        </p:spPr>
-        <p:txBody>
-          <a:bodyPr wrap="square" anchor="t" lIns="0" rIns="0" tIns="0" bIns="0">
-            <a:spAutoFit/>
-          </a:bodyPr>
-          <a:lstStyle/>
-          <a:p>
-            <a:pPr algn="l"/>
-            <a:r>
-              <a:rPr sz="950" b="1">
-                <a:solidFill>
-                  <a:srgbClr val="2863C5"/>
-                </a:solidFill>
-                <a:latin typeface="Open Sans"/>
-              </a:rPr>
-              <a:t>Status</a:t>
-            </a:r>
-          </a:p>
-        </p:txBody>
-      </p:sp>
-      <p:sp>
-        <p:nvSpPr>
-          <p:cNvPr id="23" name="TextBox 22"/>
-          <p:cNvSpPr txBox="1"/>
-          <p:nvPr/>
-        </p:nvSpPr>
-        <p:spPr>
-          <a:xfrm>
-            <a:off x="685800" y="5861304"/>
-            <a:ext cx="3200400" cy="411480"/>
-          </a:xfrm>
-          <a:prstGeom prst="rect">
-            <a:avLst/>
-          </a:prstGeom>
-          <a:noFill/>
-        </p:spPr>
-        <p:txBody>
-          <a:bodyPr wrap="square" anchor="t" lIns="0" rIns="0" tIns="0" bIns="0">
-            <a:spAutoFit/>
-          </a:bodyPr>
-          <a:lstStyle/>
-          <a:p>
-            <a:pPr algn="l"/>
-            <a:r>
-              <a:rPr sz="950" b="0">
-                <a:solidFill>
-                  <a:srgbClr val="334155"/>
-                </a:solidFill>
-                <a:latin typeface="Open Sans"/>
-              </a:rPr>
-              <a:t>Ships Sprint 1</a:t>
-            </a:r>
-          </a:p>
-        </p:txBody>
-      </p:sp>
-      <p:sp>
-        <p:nvSpPr>
-          <p:cNvPr id="24" name="Rounded Rectangle 23"/>
+              <a:t>Ships Sprint 1 · every state with online filing</a:t>
+            </a:r>
+          </a:p>
+        </p:txBody>
+      </p:sp>
+      <p:sp>
+        <p:nvSpPr>
+          <p:cNvPr id="22" name="Rounded Rectangle 21"/>
           <p:cNvSpPr/>
           <p:nvPr/>
         </p:nvSpPr>
         <p:spPr>
           <a:xfrm>
-            <a:off x="4251960" y="2697480"/>
-            <a:ext cx="3657600" cy="3291840"/>
+            <a:off x="4251960" y="2606040"/>
+            <a:ext cx="3657600" cy="3657600"/>
           </a:xfrm>
           <a:prstGeom prst="roundRect">
             <a:avLst>
@@ -10847,13 +10777,13 @@
       </p:sp>
       <p:sp>
         <p:nvSpPr>
-          <p:cNvPr id="25" name="Rectangle 24"/>
+          <p:cNvPr id="23" name="Rectangle 22"/>
           <p:cNvSpPr/>
           <p:nvPr/>
         </p:nvSpPr>
         <p:spPr>
           <a:xfrm>
-            <a:off x="4251960" y="2697480"/>
+            <a:off x="4251960" y="2606040"/>
             <a:ext cx="3657600" cy="164592"/>
           </a:xfrm>
           <a:prstGeom prst="rect">
@@ -10891,35 +10821,105 @@
       </p:sp>
       <p:sp>
         <p:nvSpPr>
+          <p:cNvPr id="24" name="TextBox 23"/>
+          <p:cNvSpPr txBox="1"/>
+          <p:nvPr/>
+        </p:nvSpPr>
+        <p:spPr>
+          <a:xfrm>
+            <a:off x="4480560" y="2898648"/>
+            <a:ext cx="3200400" cy="329184"/>
+          </a:xfrm>
+          <a:prstGeom prst="rect">
+            <a:avLst/>
+          </a:prstGeom>
+          <a:noFill/>
+        </p:spPr>
+        <p:txBody>
+          <a:bodyPr wrap="square" anchor="t" lIns="0" rIns="0" tIns="0" bIns="0">
+            <a:spAutoFit/>
+          </a:bodyPr>
+          <a:lstStyle/>
+          <a:p>
+            <a:pPr algn="l"/>
+            <a:r>
+              <a:rPr sz="1100" b="1">
+                <a:solidFill>
+                  <a:srgbClr val="FFB352"/>
+                </a:solidFill>
+                <a:latin typeface="Open Sans"/>
+              </a:rPr>
+              <a:t>v1 · FALLBACK</a:t>
+            </a:r>
+          </a:p>
+        </p:txBody>
+      </p:sp>
+      <p:sp>
+        <p:nvSpPr>
+          <p:cNvPr id="25" name="TextBox 24"/>
+          <p:cNvSpPr txBox="1"/>
+          <p:nvPr/>
+        </p:nvSpPr>
+        <p:spPr>
+          <a:xfrm>
+            <a:off x="4480560" y="3246120"/>
+            <a:ext cx="3200400" cy="502920"/>
+          </a:xfrm>
+          <a:prstGeom prst="rect">
+            <a:avLst/>
+          </a:prstGeom>
+          <a:noFill/>
+        </p:spPr>
+        <p:txBody>
+          <a:bodyPr wrap="square" anchor="t" lIns="0" rIns="0" tIns="0" bIns="0">
+            <a:spAutoFit/>
+          </a:bodyPr>
+          <a:lstStyle/>
+          <a:p>
+            <a:pPr algn="l"/>
+            <a:r>
+              <a:rPr sz="1400" b="1">
+                <a:solidFill>
+                  <a:srgbClr val="0F172A"/>
+                </a:solidFill>
+                <a:latin typeface="Open Sans"/>
+              </a:rPr>
+              <a:t>Mail packet via ActionLetters</a:t>
+            </a:r>
+          </a:p>
+        </p:txBody>
+      </p:sp>
+      <p:sp>
+        <p:nvSpPr>
           <p:cNvPr id="26" name="TextBox 25"/>
           <p:cNvSpPr txBox="1"/>
           <p:nvPr/>
         </p:nvSpPr>
         <p:spPr>
           <a:xfrm>
-            <a:off x="4480560" y="2990088"/>
-            <a:ext cx="3200400" cy="365760"/>
-          </a:xfrm>
-          <a:prstGeom prst="rect">
-            <a:avLst/>
-          </a:prstGeom>
-          <a:noFill/>
-        </p:spPr>
-        <p:txBody>
-          <a:bodyPr wrap="square" anchor="t" lIns="0" rIns="0" tIns="0" bIns="0">
-            <a:spAutoFit/>
-          </a:bodyPr>
-          <a:lstStyle/>
-          <a:p>
-            <a:pPr algn="l"/>
-            <a:r>
-              <a:rPr sz="1100" b="1">
-                <a:solidFill>
-                  <a:srgbClr val="FFB352"/>
-                </a:solidFill>
-                <a:latin typeface="Open Sans"/>
-              </a:rPr>
-              <a:t>v1 · FALLBACK</a:t>
+            <a:off x="4480560" y="3977639"/>
+            <a:ext cx="1371600" cy="201168"/>
+          </a:xfrm>
+          <a:prstGeom prst="rect">
+            <a:avLst/>
+          </a:prstGeom>
+          <a:noFill/>
+        </p:spPr>
+        <p:txBody>
+          <a:bodyPr wrap="square" anchor="t" lIns="0" rIns="0" tIns="0" bIns="0">
+            <a:spAutoFit/>
+          </a:bodyPr>
+          <a:lstStyle/>
+          <a:p>
+            <a:pPr algn="l"/>
+            <a:r>
+              <a:rPr sz="900" b="1">
+                <a:solidFill>
+                  <a:srgbClr val="2863C5"/>
+                </a:solidFill>
+                <a:latin typeface="Open Sans"/>
+              </a:rPr>
+              <a:t>Who submits</a:t>
             </a:r>
           </a:p>
         </p:txBody>
@@ -10932,29 +10932,29 @@
         </p:nvSpPr>
         <p:spPr>
           <a:xfrm>
-            <a:off x="4480560" y="3337560"/>
-            <a:ext cx="3200400" cy="502920"/>
-          </a:xfrm>
-          <a:prstGeom prst="rect">
-            <a:avLst/>
-          </a:prstGeom>
-          <a:noFill/>
-        </p:spPr>
-        <p:txBody>
-          <a:bodyPr wrap="square" anchor="t" lIns="0" rIns="0" tIns="0" bIns="0">
-            <a:spAutoFit/>
-          </a:bodyPr>
-          <a:lstStyle/>
-          <a:p>
-            <a:pPr algn="l"/>
-            <a:r>
-              <a:rPr sz="1400" b="1">
-                <a:solidFill>
-                  <a:srgbClr val="0F172A"/>
-                </a:solidFill>
-                <a:latin typeface="Open Sans"/>
-              </a:rPr>
-              <a:t>Mail packet via ActionLetters</a:t>
+            <a:off x="4480560" y="4197096"/>
+            <a:ext cx="3200400" cy="457200"/>
+          </a:xfrm>
+          <a:prstGeom prst="rect">
+            <a:avLst/>
+          </a:prstGeom>
+          <a:noFill/>
+        </p:spPr>
+        <p:txBody>
+          <a:bodyPr wrap="square" anchor="t" lIns="0" rIns="0" tIns="0" bIns="0">
+            <a:spAutoFit/>
+          </a:bodyPr>
+          <a:lstStyle/>
+          <a:p>
+            <a:pPr algn="l"/>
+            <a:r>
+              <a:rPr sz="1000" b="0">
+                <a:solidFill>
+                  <a:srgbClr val="334155"/>
+                </a:solidFill>
+                <a:latin typeface="Open Sans"/>
+              </a:rPr>
+              <a:t>Member submits; we generate the paper</a:t>
             </a:r>
           </a:p>
         </p:txBody>
@@ -10967,29 +10967,29 @@
         </p:nvSpPr>
         <p:spPr>
           <a:xfrm>
-            <a:off x="4480560" y="3977639"/>
-            <a:ext cx="1188720" cy="256032"/>
-          </a:xfrm>
-          <a:prstGeom prst="rect">
-            <a:avLst/>
-          </a:prstGeom>
-          <a:noFill/>
-        </p:spPr>
-        <p:txBody>
-          <a:bodyPr wrap="square" anchor="t" lIns="0" rIns="0" tIns="0" bIns="0">
-            <a:spAutoFit/>
-          </a:bodyPr>
-          <a:lstStyle/>
-          <a:p>
-            <a:pPr algn="l"/>
-            <a:r>
-              <a:rPr sz="950" b="1">
+            <a:off x="4480560" y="4526279"/>
+            <a:ext cx="1371600" cy="201168"/>
+          </a:xfrm>
+          <a:prstGeom prst="rect">
+            <a:avLst/>
+          </a:prstGeom>
+          <a:noFill/>
+        </p:spPr>
+        <p:txBody>
+          <a:bodyPr wrap="square" anchor="t" lIns="0" rIns="0" tIns="0" bIns="0">
+            <a:spAutoFit/>
+          </a:bodyPr>
+          <a:lstStyle/>
+          <a:p>
+            <a:pPr algn="l"/>
+            <a:r>
+              <a:rPr sz="900" b="1">
                 <a:solidFill>
                   <a:srgbClr val="2863C5"/>
                 </a:solidFill>
                 <a:latin typeface="Open Sans"/>
               </a:rPr>
-              <a:t>Who submits</a:t>
+              <a:t>How</a:t>
             </a:r>
           </a:p>
         </p:txBody>
@@ -11002,29 +11002,29 @@
         </p:nvSpPr>
         <p:spPr>
           <a:xfrm>
-            <a:off x="4480560" y="4215383"/>
-            <a:ext cx="3200400" cy="411480"/>
-          </a:xfrm>
-          <a:prstGeom prst="rect">
-            <a:avLst/>
-          </a:prstGeom>
-          <a:noFill/>
-        </p:spPr>
-        <p:txBody>
-          <a:bodyPr wrap="square" anchor="t" lIns="0" rIns="0" tIns="0" bIns="0">
-            <a:spAutoFit/>
-          </a:bodyPr>
-          <a:lstStyle/>
-          <a:p>
-            <a:pPr algn="l"/>
-            <a:r>
-              <a:rPr sz="950" b="0">
+            <a:off x="4480560" y="4745736"/>
+            <a:ext cx="3200400" cy="457200"/>
+          </a:xfrm>
+          <a:prstGeom prst="rect">
+            <a:avLst/>
+          </a:prstGeom>
+          <a:noFill/>
+        </p:spPr>
+        <p:txBody>
+          <a:bodyPr wrap="square" anchor="t" lIns="0" rIns="0" tIns="0" bIns="0">
+            <a:spAutoFit/>
+          </a:bodyPr>
+          <a:lstStyle/>
+          <a:p>
+            <a:pPr algn="l"/>
+            <a:r>
+              <a:rPr sz="1000" b="0">
                 <a:solidFill>
                   <a:srgbClr val="334155"/>
                 </a:solidFill>
                 <a:latin typeface="Open Sans"/>
               </a:rPr>
-              <a:t>The member, but we generate + send the paper</a:t>
+              <a:t>Notarized packet → ActionLetters → state mail intake</a:t>
             </a:r>
           </a:p>
         </p:txBody>
@@ -11037,29 +11037,29 @@
         </p:nvSpPr>
         <p:spPr>
           <a:xfrm>
-            <a:off x="4480560" y="4389120"/>
-            <a:ext cx="1188720" cy="256032"/>
-          </a:xfrm>
-          <a:prstGeom prst="rect">
-            <a:avLst/>
-          </a:prstGeom>
-          <a:noFill/>
-        </p:spPr>
-        <p:txBody>
-          <a:bodyPr wrap="square" anchor="t" lIns="0" rIns="0" tIns="0" bIns="0">
-            <a:spAutoFit/>
-          </a:bodyPr>
-          <a:lstStyle/>
-          <a:p>
-            <a:pPr algn="l"/>
-            <a:r>
-              <a:rPr sz="950" b="1">
+            <a:off x="4480560" y="5074919"/>
+            <a:ext cx="1371600" cy="201168"/>
+          </a:xfrm>
+          <a:prstGeom prst="rect">
+            <a:avLst/>
+          </a:prstGeom>
+          <a:noFill/>
+        </p:spPr>
+        <p:txBody>
+          <a:bodyPr wrap="square" anchor="t" lIns="0" rIns="0" tIns="0" bIns="0">
+            <a:spAutoFit/>
+          </a:bodyPr>
+          <a:lstStyle/>
+          <a:p>
+            <a:pPr algn="l"/>
+            <a:r>
+              <a:rPr sz="900" b="1">
                 <a:solidFill>
                   <a:srgbClr val="2863C5"/>
                 </a:solidFill>
                 <a:latin typeface="Open Sans"/>
               </a:rPr>
-              <a:t>How</a:t>
+              <a:t>When</a:t>
             </a:r>
           </a:p>
         </p:txBody>
@@ -11072,29 +11072,29 @@
         </p:nvSpPr>
         <p:spPr>
           <a:xfrm>
-            <a:off x="4480560" y="4626864"/>
-            <a:ext cx="3200400" cy="411480"/>
-          </a:xfrm>
-          <a:prstGeom prst="rect">
-            <a:avLst/>
-          </a:prstGeom>
-          <a:noFill/>
-        </p:spPr>
-        <p:txBody>
-          <a:bodyPr wrap="square" anchor="t" lIns="0" rIns="0" tIns="0" bIns="0">
-            <a:spAutoFit/>
-          </a:bodyPr>
-          <a:lstStyle/>
-          <a:p>
-            <a:pPr algn="l"/>
-            <a:r>
-              <a:rPr sz="950" b="0">
+            <a:off x="4480560" y="5294375"/>
+            <a:ext cx="3200400" cy="457200"/>
+          </a:xfrm>
+          <a:prstGeom prst="rect">
+            <a:avLst/>
+          </a:prstGeom>
+          <a:noFill/>
+        </p:spPr>
+        <p:txBody>
+          <a:bodyPr wrap="square" anchor="t" lIns="0" rIns="0" tIns="0" bIns="0">
+            <a:spAutoFit/>
+          </a:bodyPr>
+          <a:lstStyle/>
+          <a:p>
+            <a:pPr algn="l"/>
+            <a:r>
+              <a:rPr sz="1000" b="0">
                 <a:solidFill>
                   <a:srgbClr val="334155"/>
                 </a:solidFill>
                 <a:latin typeface="Open Sans"/>
               </a:rPr>
-              <a:t>Notarized claim packet → ActionLetters → state mail intake</a:t>
+              <a:t>States requiring notarized physical paperwork</a:t>
             </a:r>
           </a:p>
         </p:txBody>
@@ -11107,29 +11107,29 @@
         </p:nvSpPr>
         <p:spPr>
           <a:xfrm>
-            <a:off x="4480560" y="4800600"/>
-            <a:ext cx="1188720" cy="256032"/>
-          </a:xfrm>
-          <a:prstGeom prst="rect">
-            <a:avLst/>
-          </a:prstGeom>
-          <a:noFill/>
-        </p:spPr>
-        <p:txBody>
-          <a:bodyPr wrap="square" anchor="t" lIns="0" rIns="0" tIns="0" bIns="0">
-            <a:spAutoFit/>
-          </a:bodyPr>
-          <a:lstStyle/>
-          <a:p>
-            <a:pPr algn="l"/>
-            <a:r>
-              <a:rPr sz="950" b="1">
+            <a:off x="4480560" y="5623559"/>
+            <a:ext cx="1371600" cy="201168"/>
+          </a:xfrm>
+          <a:prstGeom prst="rect">
+            <a:avLst/>
+          </a:prstGeom>
+          <a:noFill/>
+        </p:spPr>
+        <p:txBody>
+          <a:bodyPr wrap="square" anchor="t" lIns="0" rIns="0" tIns="0" bIns="0">
+            <a:spAutoFit/>
+          </a:bodyPr>
+          <a:lstStyle/>
+          <a:p>
+            <a:pPr algn="l"/>
+            <a:r>
+              <a:rPr sz="900" b="1">
                 <a:solidFill>
                   <a:srgbClr val="2863C5"/>
                 </a:solidFill>
                 <a:latin typeface="Open Sans"/>
               </a:rPr>
-              <a:t>Asset reused</a:t>
+              <a:t>Status</a:t>
             </a:r>
           </a:p>
         </p:txBody>
@@ -11142,183 +11142,43 @@
         </p:nvSpPr>
         <p:spPr>
           <a:xfrm>
-            <a:off x="4480560" y="5038344"/>
-            <a:ext cx="3200400" cy="411480"/>
-          </a:xfrm>
-          <a:prstGeom prst="rect">
-            <a:avLst/>
-          </a:prstGeom>
-          <a:noFill/>
-        </p:spPr>
-        <p:txBody>
-          <a:bodyPr wrap="square" anchor="t" lIns="0" rIns="0" tIns="0" bIns="0">
-            <a:spAutoFit/>
-          </a:bodyPr>
-          <a:lstStyle/>
-          <a:p>
-            <a:pPr algn="l"/>
-            <a:r>
-              <a:rPr sz="950" b="0">
+            <a:off x="4480560" y="5843015"/>
+            <a:ext cx="3200400" cy="457200"/>
+          </a:xfrm>
+          <a:prstGeom prst="rect">
+            <a:avLst/>
+          </a:prstGeom>
+          <a:noFill/>
+        </p:spPr>
+        <p:txBody>
+          <a:bodyPr wrap="square" anchor="t" lIns="0" rIns="0" tIns="0" bIns="0">
+            <a:spAutoFit/>
+          </a:bodyPr>
+          <a:lstStyle/>
+          <a:p>
+            <a:pPr algn="l"/>
+            <a:r>
+              <a:rPr sz="1000" b="0">
                 <a:solidFill>
                   <a:srgbClr val="334155"/>
                 </a:solidFill>
                 <a:latin typeface="Open Sans"/>
               </a:rPr>
-              <a:t>Same ActionLetters rail SmartCredit uses for credit-bureau dispute letters</a:t>
-            </a:r>
-          </a:p>
-        </p:txBody>
-      </p:sp>
-      <p:sp>
-        <p:nvSpPr>
-          <p:cNvPr id="34" name="TextBox 33"/>
-          <p:cNvSpPr txBox="1"/>
-          <p:nvPr/>
-        </p:nvSpPr>
-        <p:spPr>
-          <a:xfrm>
-            <a:off x="4480560" y="5212080"/>
-            <a:ext cx="1188720" cy="256032"/>
-          </a:xfrm>
-          <a:prstGeom prst="rect">
-            <a:avLst/>
-          </a:prstGeom>
-          <a:noFill/>
-        </p:spPr>
-        <p:txBody>
-          <a:bodyPr wrap="square" anchor="t" lIns="0" rIns="0" tIns="0" bIns="0">
-            <a:spAutoFit/>
-          </a:bodyPr>
-          <a:lstStyle/>
-          <a:p>
-            <a:pPr algn="l"/>
-            <a:r>
-              <a:rPr sz="950" b="1">
-                <a:solidFill>
-                  <a:srgbClr val="2863C5"/>
-                </a:solidFill>
-                <a:latin typeface="Open Sans"/>
-              </a:rPr>
-              <a:t>When</a:t>
-            </a:r>
-          </a:p>
-        </p:txBody>
-      </p:sp>
-      <p:sp>
-        <p:nvSpPr>
-          <p:cNvPr id="35" name="TextBox 34"/>
-          <p:cNvSpPr txBox="1"/>
-          <p:nvPr/>
-        </p:nvSpPr>
-        <p:spPr>
-          <a:xfrm>
-            <a:off x="4480560" y="5449824"/>
-            <a:ext cx="3200400" cy="411480"/>
-          </a:xfrm>
-          <a:prstGeom prst="rect">
-            <a:avLst/>
-          </a:prstGeom>
-          <a:noFill/>
-        </p:spPr>
-        <p:txBody>
-          <a:bodyPr wrap="square" anchor="t" lIns="0" rIns="0" tIns="0" bIns="0">
-            <a:spAutoFit/>
-          </a:bodyPr>
-          <a:lstStyle/>
-          <a:p>
-            <a:pPr algn="l"/>
-            <a:r>
-              <a:rPr sz="950" b="0">
-                <a:solidFill>
-                  <a:srgbClr val="334155"/>
-                </a:solidFill>
-                <a:latin typeface="Open Sans"/>
-              </a:rPr>
-              <a:t>States that require notarized physical paperwork</a:t>
-            </a:r>
-          </a:p>
-        </p:txBody>
-      </p:sp>
-      <p:sp>
-        <p:nvSpPr>
-          <p:cNvPr id="36" name="TextBox 35"/>
-          <p:cNvSpPr txBox="1"/>
-          <p:nvPr/>
-        </p:nvSpPr>
-        <p:spPr>
-          <a:xfrm>
-            <a:off x="4480560" y="5623560"/>
-            <a:ext cx="1188720" cy="256032"/>
-          </a:xfrm>
-          <a:prstGeom prst="rect">
-            <a:avLst/>
-          </a:prstGeom>
-          <a:noFill/>
-        </p:spPr>
-        <p:txBody>
-          <a:bodyPr wrap="square" anchor="t" lIns="0" rIns="0" tIns="0" bIns="0">
-            <a:spAutoFit/>
-          </a:bodyPr>
-          <a:lstStyle/>
-          <a:p>
-            <a:pPr algn="l"/>
-            <a:r>
-              <a:rPr sz="950" b="1">
-                <a:solidFill>
-                  <a:srgbClr val="2863C5"/>
-                </a:solidFill>
-                <a:latin typeface="Open Sans"/>
-              </a:rPr>
-              <a:t>Status</a:t>
-            </a:r>
-          </a:p>
-        </p:txBody>
-      </p:sp>
-      <p:sp>
-        <p:nvSpPr>
-          <p:cNvPr id="37" name="TextBox 36"/>
-          <p:cNvSpPr txBox="1"/>
-          <p:nvPr/>
-        </p:nvSpPr>
-        <p:spPr>
-          <a:xfrm>
-            <a:off x="4480560" y="5861304"/>
-            <a:ext cx="3200400" cy="411480"/>
-          </a:xfrm>
-          <a:prstGeom prst="rect">
-            <a:avLst/>
-          </a:prstGeom>
-          <a:noFill/>
-        </p:spPr>
-        <p:txBody>
-          <a:bodyPr wrap="square" anchor="t" lIns="0" rIns="0" tIns="0" bIns="0">
-            <a:spAutoFit/>
-          </a:bodyPr>
-          <a:lstStyle/>
-          <a:p>
-            <a:pPr algn="l"/>
-            <a:r>
-              <a:rPr sz="950" b="0">
-                <a:solidFill>
-                  <a:srgbClr val="334155"/>
-                </a:solidFill>
-                <a:latin typeface="Open Sans"/>
-              </a:rPr>
-              <a:t>Available now — no new vendor</a:t>
-            </a:r>
-          </a:p>
-        </p:txBody>
-      </p:sp>
-      <p:sp>
-        <p:nvSpPr>
-          <p:cNvPr id="38" name="Rounded Rectangle 37"/>
+              <a:t>Available now · same rail as credit-dispute mailers</a:t>
+            </a:r>
+          </a:p>
+        </p:txBody>
+      </p:sp>
+      <p:sp>
+        <p:nvSpPr>
+          <p:cNvPr id="34" name="Rounded Rectangle 33"/>
           <p:cNvSpPr/>
           <p:nvPr/>
         </p:nvSpPr>
         <p:spPr>
           <a:xfrm>
-            <a:off x="8046720" y="2697480"/>
-            <a:ext cx="3657600" cy="3291840"/>
+            <a:off x="8046720" y="2606040"/>
+            <a:ext cx="3657600" cy="3657600"/>
           </a:xfrm>
           <a:prstGeom prst="roundRect">
             <a:avLst>
@@ -11359,13 +11219,13 @@
       </p:sp>
       <p:sp>
         <p:nvSpPr>
-          <p:cNvPr id="39" name="Rectangle 38"/>
+          <p:cNvPr id="35" name="Rectangle 34"/>
           <p:cNvSpPr/>
           <p:nvPr/>
         </p:nvSpPr>
         <p:spPr>
           <a:xfrm>
-            <a:off x="8046720" y="2697480"/>
+            <a:off x="8046720" y="2606040"/>
             <a:ext cx="3657600" cy="164592"/>
           </a:xfrm>
           <a:prstGeom prst="rect">
@@ -11403,35 +11263,175 @@
       </p:sp>
       <p:sp>
         <p:nvSpPr>
+          <p:cNvPr id="36" name="TextBox 35"/>
+          <p:cNvSpPr txBox="1"/>
+          <p:nvPr/>
+        </p:nvSpPr>
+        <p:spPr>
+          <a:xfrm>
+            <a:off x="8275320" y="2898648"/>
+            <a:ext cx="3200400" cy="329184"/>
+          </a:xfrm>
+          <a:prstGeom prst="rect">
+            <a:avLst/>
+          </a:prstGeom>
+          <a:noFill/>
+        </p:spPr>
+        <p:txBody>
+          <a:bodyPr wrap="square" anchor="t" lIns="0" rIns="0" tIns="0" bIns="0">
+            <a:spAutoFit/>
+          </a:bodyPr>
+          <a:lstStyle/>
+          <a:p>
+            <a:pPr algn="l"/>
+            <a:r>
+              <a:rPr sz="1100" b="1">
+                <a:solidFill>
+                  <a:srgbClr val="2863C5"/>
+                </a:solidFill>
+                <a:latin typeface="Open Sans"/>
+              </a:rPr>
+              <a:t>v2 · UNLOCK</a:t>
+            </a:r>
+          </a:p>
+        </p:txBody>
+      </p:sp>
+      <p:sp>
+        <p:nvSpPr>
+          <p:cNvPr id="37" name="TextBox 36"/>
+          <p:cNvSpPr txBox="1"/>
+          <p:nvPr/>
+        </p:nvSpPr>
+        <p:spPr>
+          <a:xfrm>
+            <a:off x="8275320" y="3246120"/>
+            <a:ext cx="3200400" cy="502920"/>
+          </a:xfrm>
+          <a:prstGeom prst="rect">
+            <a:avLst/>
+          </a:prstGeom>
+          <a:noFill/>
+        </p:spPr>
+        <p:txBody>
+          <a:bodyPr wrap="square" anchor="t" lIns="0" rIns="0" tIns="0" bIns="0">
+            <a:spAutoFit/>
+          </a:bodyPr>
+          <a:lstStyle/>
+          <a:p>
+            <a:pPr algn="l"/>
+            <a:r>
+              <a:rPr sz="1400" b="1">
+                <a:solidFill>
+                  <a:srgbClr val="0F172A"/>
+                </a:solidFill>
+                <a:latin typeface="Open Sans"/>
+              </a:rPr>
+              <a:t>Registered representative</a:t>
+            </a:r>
+          </a:p>
+        </p:txBody>
+      </p:sp>
+      <p:sp>
+        <p:nvSpPr>
+          <p:cNvPr id="38" name="TextBox 37"/>
+          <p:cNvSpPr txBox="1"/>
+          <p:nvPr/>
+        </p:nvSpPr>
+        <p:spPr>
+          <a:xfrm>
+            <a:off x="8275320" y="3977639"/>
+            <a:ext cx="1371600" cy="201168"/>
+          </a:xfrm>
+          <a:prstGeom prst="rect">
+            <a:avLst/>
+          </a:prstGeom>
+          <a:noFill/>
+        </p:spPr>
+        <p:txBody>
+          <a:bodyPr wrap="square" anchor="t" lIns="0" rIns="0" tIns="0" bIns="0">
+            <a:spAutoFit/>
+          </a:bodyPr>
+          <a:lstStyle/>
+          <a:p>
+            <a:pPr algn="l"/>
+            <a:r>
+              <a:rPr sz="900" b="1">
+                <a:solidFill>
+                  <a:srgbClr val="2863C5"/>
+                </a:solidFill>
+                <a:latin typeface="Open Sans"/>
+              </a:rPr>
+              <a:t>Who submits</a:t>
+            </a:r>
+          </a:p>
+        </p:txBody>
+      </p:sp>
+      <p:sp>
+        <p:nvSpPr>
+          <p:cNvPr id="39" name="TextBox 38"/>
+          <p:cNvSpPr txBox="1"/>
+          <p:nvPr/>
+        </p:nvSpPr>
+        <p:spPr>
+          <a:xfrm>
+            <a:off x="8275320" y="4197096"/>
+            <a:ext cx="3200400" cy="457200"/>
+          </a:xfrm>
+          <a:prstGeom prst="rect">
+            <a:avLst/>
+          </a:prstGeom>
+          <a:noFill/>
+        </p:spPr>
+        <p:txBody>
+          <a:bodyPr wrap="square" anchor="t" lIns="0" rIns="0" tIns="0" bIns="0">
+            <a:spAutoFit/>
+          </a:bodyPr>
+          <a:lstStyle/>
+          <a:p>
+            <a:pPr algn="l"/>
+            <a:r>
+              <a:rPr sz="1000" b="0">
+                <a:solidFill>
+                  <a:srgbClr val="334155"/>
+                </a:solidFill>
+                <a:latin typeface="Open Sans"/>
+              </a:rPr>
+              <a:t>SmartCredit, on the member's behalf</a:t>
+            </a:r>
+          </a:p>
+        </p:txBody>
+      </p:sp>
+      <p:sp>
+        <p:nvSpPr>
           <p:cNvPr id="40" name="TextBox 39"/>
           <p:cNvSpPr txBox="1"/>
           <p:nvPr/>
         </p:nvSpPr>
         <p:spPr>
           <a:xfrm>
-            <a:off x="8275320" y="2990088"/>
-            <a:ext cx="3200400" cy="365760"/>
-          </a:xfrm>
-          <a:prstGeom prst="rect">
-            <a:avLst/>
-          </a:prstGeom>
-          <a:noFill/>
-        </p:spPr>
-        <p:txBody>
-          <a:bodyPr wrap="square" anchor="t" lIns="0" rIns="0" tIns="0" bIns="0">
-            <a:spAutoFit/>
-          </a:bodyPr>
-          <a:lstStyle/>
-          <a:p>
-            <a:pPr algn="l"/>
-            <a:r>
-              <a:rPr sz="1100" b="1">
+            <a:off x="8275320" y="4526279"/>
+            <a:ext cx="1371600" cy="201168"/>
+          </a:xfrm>
+          <a:prstGeom prst="rect">
+            <a:avLst/>
+          </a:prstGeom>
+          <a:noFill/>
+        </p:spPr>
+        <p:txBody>
+          <a:bodyPr wrap="square" anchor="t" lIns="0" rIns="0" tIns="0" bIns="0">
+            <a:spAutoFit/>
+          </a:bodyPr>
+          <a:lstStyle/>
+          <a:p>
+            <a:pPr algn="l"/>
+            <a:r>
+              <a:rPr sz="900" b="1">
                 <a:solidFill>
                   <a:srgbClr val="2863C5"/>
                 </a:solidFill>
                 <a:latin typeface="Open Sans"/>
               </a:rPr>
-              <a:t>v2 · UNLOCK</a:t>
+              <a:t>Where</a:t>
             </a:r>
           </a:p>
         </p:txBody>
@@ -11444,29 +11444,29 @@
         </p:nvSpPr>
         <p:spPr>
           <a:xfrm>
-            <a:off x="8275320" y="3337560"/>
-            <a:ext cx="3200400" cy="502920"/>
-          </a:xfrm>
-          <a:prstGeom prst="rect">
-            <a:avLst/>
-          </a:prstGeom>
-          <a:noFill/>
-        </p:spPr>
-        <p:txBody>
-          <a:bodyPr wrap="square" anchor="t" lIns="0" rIns="0" tIns="0" bIns="0">
-            <a:spAutoFit/>
-          </a:bodyPr>
-          <a:lstStyle/>
-          <a:p>
-            <a:pPr algn="l"/>
-            <a:r>
-              <a:rPr sz="1400" b="1">
-                <a:solidFill>
-                  <a:srgbClr val="0F172A"/>
-                </a:solidFill>
-                <a:latin typeface="Open Sans"/>
-              </a:rPr>
-              <a:t>Registered representative</a:t>
+            <a:off x="8275320" y="4745736"/>
+            <a:ext cx="3200400" cy="457200"/>
+          </a:xfrm>
+          <a:prstGeom prst="rect">
+            <a:avLst/>
+          </a:prstGeom>
+          <a:noFill/>
+        </p:spPr>
+        <p:txBody>
+          <a:bodyPr wrap="square" anchor="t" lIns="0" rIns="0" tIns="0" bIns="0">
+            <a:spAutoFit/>
+          </a:bodyPr>
+          <a:lstStyle/>
+          <a:p>
+            <a:pPr algn="l"/>
+            <a:r>
+              <a:rPr sz="1000" b="0">
+                <a:solidFill>
+                  <a:srgbClr val="334155"/>
+                </a:solidFill>
+                <a:latin typeface="Open Sans"/>
+              </a:rPr>
+              <a:t>GA (CDR) · FL (Ch. 717) · OH (Finder) · MI (locator)</a:t>
             </a:r>
           </a:p>
         </p:txBody>
@@ -11479,29 +11479,29 @@
         </p:nvSpPr>
         <p:spPr>
           <a:xfrm>
-            <a:off x="8275320" y="3977639"/>
-            <a:ext cx="1188720" cy="256032"/>
-          </a:xfrm>
-          <a:prstGeom prst="rect">
-            <a:avLst/>
-          </a:prstGeom>
-          <a:noFill/>
-        </p:spPr>
-        <p:txBody>
-          <a:bodyPr wrap="square" anchor="t" lIns="0" rIns="0" tIns="0" bIns="0">
-            <a:spAutoFit/>
-          </a:bodyPr>
-          <a:lstStyle/>
-          <a:p>
-            <a:pPr algn="l"/>
-            <a:r>
-              <a:rPr sz="950" b="1">
+            <a:off x="8275320" y="5074919"/>
+            <a:ext cx="1371600" cy="201168"/>
+          </a:xfrm>
+          <a:prstGeom prst="rect">
+            <a:avLst/>
+          </a:prstGeom>
+          <a:noFill/>
+        </p:spPr>
+        <p:txBody>
+          <a:bodyPr wrap="square" anchor="t" lIns="0" rIns="0" tIns="0" bIns="0">
+            <a:spAutoFit/>
+          </a:bodyPr>
+          <a:lstStyle/>
+          <a:p>
+            <a:pPr algn="l"/>
+            <a:r>
+              <a:rPr sz="900" b="1">
                 <a:solidFill>
                   <a:srgbClr val="2863C5"/>
                 </a:solidFill>
                 <a:latin typeface="Open Sans"/>
               </a:rPr>
-              <a:t>Who submits</a:t>
+              <a:t>Fee</a:t>
             </a:r>
           </a:p>
         </p:txBody>
@@ -11514,29 +11514,29 @@
         </p:nvSpPr>
         <p:spPr>
           <a:xfrm>
-            <a:off x="8275320" y="4215383"/>
-            <a:ext cx="3200400" cy="411480"/>
-          </a:xfrm>
-          <a:prstGeom prst="rect">
-            <a:avLst/>
-          </a:prstGeom>
-          <a:noFill/>
-        </p:spPr>
-        <p:txBody>
-          <a:bodyPr wrap="square" anchor="t" lIns="0" rIns="0" tIns="0" bIns="0">
-            <a:spAutoFit/>
-          </a:bodyPr>
-          <a:lstStyle/>
-          <a:p>
-            <a:pPr algn="l"/>
-            <a:r>
-              <a:rPr sz="950" b="0">
+            <a:off x="8275320" y="5294375"/>
+            <a:ext cx="3200400" cy="457200"/>
+          </a:xfrm>
+          <a:prstGeom prst="rect">
+            <a:avLst/>
+          </a:prstGeom>
+          <a:noFill/>
+        </p:spPr>
+        <p:txBody>
+          <a:bodyPr wrap="square" anchor="t" lIns="0" rIns="0" tIns="0" bIns="0">
+            <a:spAutoFit/>
+          </a:bodyPr>
+          <a:lstStyle/>
+          <a:p>
+            <a:pPr algn="l"/>
+            <a:r>
+              <a:rPr sz="1000" b="0">
                 <a:solidFill>
                   <a:srgbClr val="334155"/>
                 </a:solidFill>
                 <a:latin typeface="Open Sans"/>
               </a:rPr>
-              <a:t>SmartCredit, on the member's behalf</a:t>
+              <a:t>GA caps reps at 30% · we charge $0</a:t>
             </a:r>
           </a:p>
         </p:txBody>
@@ -11549,29 +11549,29 @@
         </p:nvSpPr>
         <p:spPr>
           <a:xfrm>
-            <a:off x="8275320" y="4389120"/>
-            <a:ext cx="1188720" cy="256032"/>
-          </a:xfrm>
-          <a:prstGeom prst="rect">
-            <a:avLst/>
-          </a:prstGeom>
-          <a:noFill/>
-        </p:spPr>
-        <p:txBody>
-          <a:bodyPr wrap="square" anchor="t" lIns="0" rIns="0" tIns="0" bIns="0">
-            <a:spAutoFit/>
-          </a:bodyPr>
-          <a:lstStyle/>
-          <a:p>
-            <a:pPr algn="l"/>
-            <a:r>
-              <a:rPr sz="950" b="1">
+            <a:off x="8275320" y="5623559"/>
+            <a:ext cx="1371600" cy="201168"/>
+          </a:xfrm>
+          <a:prstGeom prst="rect">
+            <a:avLst/>
+          </a:prstGeom>
+          <a:noFill/>
+        </p:spPr>
+        <p:txBody>
+          <a:bodyPr wrap="square" anchor="t" lIns="0" rIns="0" tIns="0" bIns="0">
+            <a:spAutoFit/>
+          </a:bodyPr>
+          <a:lstStyle/>
+          <a:p>
+            <a:pPr algn="l"/>
+            <a:r>
+              <a:rPr sz="900" b="1">
                 <a:solidFill>
                   <a:srgbClr val="2863C5"/>
                 </a:solidFill>
                 <a:latin typeface="Open Sans"/>
               </a:rPr>
-              <a:t>Georgia</a:t>
+              <a:t>Status</a:t>
             </a:r>
           </a:p>
         </p:txBody>
@@ -11584,257 +11584,47 @@
         </p:nvSpPr>
         <p:spPr>
           <a:xfrm>
-            <a:off x="8275320" y="4626864"/>
-            <a:ext cx="3200400" cy="411480"/>
-          </a:xfrm>
-          <a:prstGeom prst="rect">
-            <a:avLst/>
-          </a:prstGeom>
-          <a:noFill/>
-        </p:spPr>
-        <p:txBody>
-          <a:bodyPr wrap="square" anchor="t" lIns="0" rIns="0" tIns="0" bIns="0">
-            <a:spAutoFit/>
-          </a:bodyPr>
-          <a:lstStyle/>
-          <a:p>
-            <a:pPr algn="l"/>
-            <a:r>
-              <a:rPr sz="950" b="0">
+            <a:off x="8275320" y="5843015"/>
+            <a:ext cx="3200400" cy="457200"/>
+          </a:xfrm>
+          <a:prstGeom prst="rect">
+            <a:avLst/>
+          </a:prstGeom>
+          <a:noFill/>
+        </p:spPr>
+        <p:txBody>
+          <a:bodyPr wrap="square" anchor="t" lIns="0" rIns="0" tIns="0" bIns="0">
+            <a:spAutoFit/>
+          </a:bodyPr>
+          <a:lstStyle/>
+          <a:p>
+            <a:pPr algn="l"/>
+            <a:r>
+              <a:rPr sz="1000" b="0">
                 <a:solidFill>
                   <a:srgbClr val="334155"/>
                 </a:solidFill>
                 <a:latin typeface="Open Sans"/>
               </a:rPr>
-              <a:t>CDR program (live Jul 2024). Searchable file + claim filing.</a:t>
-            </a:r>
-          </a:p>
-        </p:txBody>
-      </p:sp>
-      <p:sp>
-        <p:nvSpPr>
-          <p:cNvPr id="46" name="TextBox 45"/>
-          <p:cNvSpPr txBox="1"/>
-          <p:nvPr/>
-        </p:nvSpPr>
-        <p:spPr>
-          <a:xfrm>
-            <a:off x="8275320" y="4800600"/>
-            <a:ext cx="1188720" cy="256032"/>
-          </a:xfrm>
-          <a:prstGeom prst="rect">
-            <a:avLst/>
-          </a:prstGeom>
-          <a:noFill/>
-        </p:spPr>
-        <p:txBody>
-          <a:bodyPr wrap="square" anchor="t" lIns="0" rIns="0" tIns="0" bIns="0">
-            <a:spAutoFit/>
-          </a:bodyPr>
-          <a:lstStyle/>
-          <a:p>
-            <a:pPr algn="l"/>
-            <a:r>
-              <a:rPr sz="950" b="1">
-                <a:solidFill>
-                  <a:srgbClr val="2863C5"/>
-                </a:solidFill>
-                <a:latin typeface="Open Sans"/>
-              </a:rPr>
-              <a:t>Florida</a:t>
-            </a:r>
-          </a:p>
-        </p:txBody>
-      </p:sp>
-      <p:sp>
-        <p:nvSpPr>
-          <p:cNvPr id="47" name="TextBox 46"/>
-          <p:cNvSpPr txBox="1"/>
-          <p:nvPr/>
-        </p:nvSpPr>
-        <p:spPr>
-          <a:xfrm>
-            <a:off x="8275320" y="5038344"/>
-            <a:ext cx="3200400" cy="411480"/>
-          </a:xfrm>
-          <a:prstGeom prst="rect">
-            <a:avLst/>
-          </a:prstGeom>
-          <a:noFill/>
-        </p:spPr>
-        <p:txBody>
-          <a:bodyPr wrap="square" anchor="t" lIns="0" rIns="0" tIns="0" bIns="0">
-            <a:spAutoFit/>
-          </a:bodyPr>
-          <a:lstStyle/>
-          <a:p>
-            <a:pPr algn="l"/>
-            <a:r>
-              <a:rPr sz="950" b="0">
-                <a:solidFill>
-                  <a:srgbClr val="334155"/>
-                </a:solidFill>
-                <a:latin typeface="Open Sans"/>
-              </a:rPr>
-              <a:t>Registered FL atty/CPA/PI per Ch. 717. Same rep can pull data manually.</a:t>
-            </a:r>
-          </a:p>
-        </p:txBody>
-      </p:sp>
-      <p:sp>
-        <p:nvSpPr>
-          <p:cNvPr id="48" name="TextBox 47"/>
-          <p:cNvSpPr txBox="1"/>
-          <p:nvPr/>
-        </p:nvSpPr>
-        <p:spPr>
-          <a:xfrm>
-            <a:off x="8275320" y="5212080"/>
-            <a:ext cx="1188720" cy="256032"/>
-          </a:xfrm>
-          <a:prstGeom prst="rect">
-            <a:avLst/>
-          </a:prstGeom>
-          <a:noFill/>
-        </p:spPr>
-        <p:txBody>
-          <a:bodyPr wrap="square" anchor="t" lIns="0" rIns="0" tIns="0" bIns="0">
-            <a:spAutoFit/>
-          </a:bodyPr>
-          <a:lstStyle/>
-          <a:p>
-            <a:pPr algn="l"/>
-            <a:r>
-              <a:rPr sz="950" b="1">
-                <a:solidFill>
-                  <a:srgbClr val="2863C5"/>
-                </a:solidFill>
-                <a:latin typeface="Open Sans"/>
-              </a:rPr>
-              <a:t>Ohio · Michigan</a:t>
-            </a:r>
-          </a:p>
-        </p:txBody>
-      </p:sp>
-      <p:sp>
-        <p:nvSpPr>
-          <p:cNvPr id="49" name="TextBox 48"/>
-          <p:cNvSpPr txBox="1"/>
-          <p:nvPr/>
-        </p:nvSpPr>
-        <p:spPr>
-          <a:xfrm>
-            <a:off x="8275320" y="5449824"/>
-            <a:ext cx="3200400" cy="411480"/>
-          </a:xfrm>
-          <a:prstGeom prst="rect">
-            <a:avLst/>
-          </a:prstGeom>
-          <a:noFill/>
-        </p:spPr>
-        <p:txBody>
-          <a:bodyPr wrap="square" anchor="t" lIns="0" rIns="0" tIns="0" bIns="0">
-            <a:spAutoFit/>
-          </a:bodyPr>
-          <a:lstStyle/>
-          <a:p>
-            <a:pPr algn="l"/>
-            <a:r>
-              <a:rPr sz="950" b="0">
-                <a:solidFill>
-                  <a:srgbClr val="334155"/>
-                </a:solidFill>
-                <a:latin typeface="Open Sans"/>
-              </a:rPr>
-              <a:t>Registered Finder / locator path.</a:t>
-            </a:r>
-          </a:p>
-        </p:txBody>
-      </p:sp>
-      <p:sp>
-        <p:nvSpPr>
-          <p:cNvPr id="50" name="TextBox 49"/>
-          <p:cNvSpPr txBox="1"/>
-          <p:nvPr/>
-        </p:nvSpPr>
-        <p:spPr>
-          <a:xfrm>
-            <a:off x="8275320" y="5623560"/>
-            <a:ext cx="1188720" cy="256032"/>
-          </a:xfrm>
-          <a:prstGeom prst="rect">
-            <a:avLst/>
-          </a:prstGeom>
-          <a:noFill/>
-        </p:spPr>
-        <p:txBody>
-          <a:bodyPr wrap="square" anchor="t" lIns="0" rIns="0" tIns="0" bIns="0">
-            <a:spAutoFit/>
-          </a:bodyPr>
-          <a:lstStyle/>
-          <a:p>
-            <a:pPr algn="l"/>
-            <a:r>
-              <a:rPr sz="950" b="1">
-                <a:solidFill>
-                  <a:srgbClr val="2863C5"/>
-                </a:solidFill>
-                <a:latin typeface="Open Sans"/>
-              </a:rPr>
-              <a:t>Fee cap</a:t>
-            </a:r>
-          </a:p>
-        </p:txBody>
-      </p:sp>
-      <p:sp>
-        <p:nvSpPr>
-          <p:cNvPr id="51" name="TextBox 50"/>
-          <p:cNvSpPr txBox="1"/>
-          <p:nvPr/>
-        </p:nvSpPr>
-        <p:spPr>
-          <a:xfrm>
-            <a:off x="8275320" y="5861304"/>
-            <a:ext cx="3200400" cy="411480"/>
-          </a:xfrm>
-          <a:prstGeom prst="rect">
-            <a:avLst/>
-          </a:prstGeom>
-          <a:noFill/>
-        </p:spPr>
-        <p:txBody>
-          <a:bodyPr wrap="square" anchor="t" lIns="0" rIns="0" tIns="0" bIns="0">
-            <a:spAutoFit/>
-          </a:bodyPr>
-          <a:lstStyle/>
-          <a:p>
-            <a:pPr algn="l"/>
-            <a:r>
-              <a:rPr sz="950" b="0">
-                <a:solidFill>
-                  <a:srgbClr val="334155"/>
-                </a:solidFill>
-                <a:latin typeface="Open Sans"/>
-              </a:rPr>
-              <a:t>GA caps reps at 30%. We charge $0.</a:t>
-            </a:r>
-          </a:p>
-        </p:txBody>
-      </p:sp>
-      <p:sp>
-        <p:nvSpPr>
-          <p:cNvPr id="52" name="Rounded Rectangle 51"/>
+              <a:t>Sprint 4+ once first state approves</a:t>
+            </a:r>
+          </a:p>
+        </p:txBody>
+      </p:sp>
+      <p:sp>
+        <p:nvSpPr>
+          <p:cNvPr id="46" name="Rounded Rectangle 45"/>
           <p:cNvSpPr/>
           <p:nvPr/>
         </p:nvSpPr>
         <p:spPr>
           <a:xfrm>
-            <a:off x="457200" y="6080760"/>
-            <a:ext cx="11247120" cy="502920"/>
+            <a:off x="457200" y="6400800"/>
+            <a:ext cx="11247120" cy="365760"/>
           </a:xfrm>
           <a:prstGeom prst="roundRect">
             <a:avLst>
-              <a:gd name="adj" fmla="val 7000"/>
+              <a:gd name="adj" fmla="val 10000"/>
             </a:avLst>
           </a:prstGeom>
           <a:solidFill>
@@ -11869,13 +11659,13 @@
       </p:sp>
       <p:sp>
         <p:nvSpPr>
-          <p:cNvPr id="53" name="TextBox 52"/>
-          <p:cNvSpPr txBox="1"/>
-          <p:nvPr/>
-        </p:nvSpPr>
-        <p:spPr>
-          <a:xfrm>
-            <a:off x="640080" y="6153912"/>
+          <p:cNvPr id="47" name="TextBox 46"/>
+          <p:cNvSpPr txBox="1"/>
+          <p:nvPr/>
+        </p:nvSpPr>
+        <p:spPr>
+          <a:xfrm>
+            <a:off x="640080" y="6446520"/>
             <a:ext cx="10972800" cy="292608"/>
           </a:xfrm>
           <a:prstGeom prst="rect">
@@ -11891,7 +11681,7 @@
           <a:p>
             <a:pPr algn="l"/>
             <a:r>
-              <a:rPr sz="1300" b="1">
+              <a:rPr sz="1200" b="1">
                 <a:solidFill>
                   <a:srgbClr val="FFFFFF"/>
                 </a:solidFill>

--- a/myReclaim-Exec-Deck.pptx
+++ b/myReclaim-Exec-Deck.pptx
@@ -11981,8 +11981,8 @@
         </p:nvSpPr>
         <p:spPr>
           <a:xfrm>
-            <a:off x="457200" y="2103120"/>
-            <a:ext cx="11247120" cy="539496"/>
+            <a:off x="457200" y="2011680"/>
+            <a:ext cx="11247120" cy="603503"/>
           </a:xfrm>
           <a:prstGeom prst="roundRect">
             <a:avLst>
@@ -12029,8 +12029,8 @@
         </p:nvSpPr>
         <p:spPr>
           <a:xfrm>
-            <a:off x="457200" y="2103120"/>
-            <a:ext cx="164592" cy="539496"/>
+            <a:off x="457200" y="2011680"/>
+            <a:ext cx="164592" cy="603503"/>
           </a:xfrm>
           <a:prstGeom prst="rect">
             <a:avLst/>
@@ -12073,23 +12073,23 @@
         </p:nvSpPr>
         <p:spPr>
           <a:xfrm>
-            <a:off x="777240" y="2221991"/>
-            <a:ext cx="548640" cy="329184"/>
-          </a:xfrm>
-          <a:prstGeom prst="rect">
-            <a:avLst/>
-          </a:prstGeom>
-          <a:noFill/>
-        </p:spPr>
-        <p:txBody>
-          <a:bodyPr wrap="square" anchor="t" lIns="0" rIns="0" tIns="0" bIns="0">
-            <a:spAutoFit/>
-          </a:bodyPr>
-          <a:lstStyle/>
-          <a:p>
-            <a:pPr algn="l"/>
-            <a:r>
-              <a:rPr sz="1500" b="1">
+            <a:off x="777240" y="2176272"/>
+            <a:ext cx="594360" cy="365760"/>
+          </a:xfrm>
+          <a:prstGeom prst="rect">
+            <a:avLst/>
+          </a:prstGeom>
+          <a:noFill/>
+        </p:spPr>
+        <p:txBody>
+          <a:bodyPr wrap="square" anchor="t" lIns="0" rIns="0" tIns="0" bIns="0">
+            <a:spAutoFit/>
+          </a:bodyPr>
+          <a:lstStyle/>
+          <a:p>
+            <a:pPr algn="l"/>
+            <a:r>
+              <a:rPr sz="1800" b="1">
                 <a:solidFill>
                   <a:srgbClr val="2863C5"/>
                 </a:solidFill>
@@ -12108,8 +12108,8 @@
         </p:nvSpPr>
         <p:spPr>
           <a:xfrm>
-            <a:off x="1417320" y="2176272"/>
-            <a:ext cx="4114800" cy="256032"/>
+            <a:off x="1508760" y="2066544"/>
+            <a:ext cx="7863840" cy="274320"/>
           </a:xfrm>
           <a:prstGeom prst="rect">
             <a:avLst/>
@@ -12143,23 +12143,23 @@
         </p:nvSpPr>
         <p:spPr>
           <a:xfrm>
-            <a:off x="1417320" y="2395727"/>
-            <a:ext cx="7863840" cy="274320"/>
-          </a:xfrm>
-          <a:prstGeom prst="rect">
-            <a:avLst/>
-          </a:prstGeom>
-          <a:noFill/>
-        </p:spPr>
-        <p:txBody>
-          <a:bodyPr wrap="square" anchor="t" lIns="0" rIns="0" tIns="0" bIns="0">
-            <a:spAutoFit/>
-          </a:bodyPr>
-          <a:lstStyle/>
-          <a:p>
-            <a:pPr algn="l"/>
-            <a:r>
-              <a:rPr sz="1000" b="0">
+            <a:off x="1508760" y="2340864"/>
+            <a:ext cx="7863840" cy="292608"/>
+          </a:xfrm>
+          <a:prstGeom prst="rect">
+            <a:avLst/>
+          </a:prstGeom>
+          <a:noFill/>
+        </p:spPr>
+        <p:txBody>
+          <a:bodyPr wrap="square" anchor="t" lIns="0" rIns="0" tIns="0" bIns="0">
+            <a:spAutoFit/>
+          </a:bodyPr>
+          <a:lstStyle/>
+          <a:p>
+            <a:pPr algn="l"/>
+            <a:r>
+              <a:rPr sz="950" b="0">
                 <a:solidFill>
                   <a:srgbClr val="334155"/>
                 </a:solidFill>
@@ -12178,8 +12178,8 @@
         </p:nvSpPr>
         <p:spPr>
           <a:xfrm>
-            <a:off x="9601200" y="2249424"/>
-            <a:ext cx="1554480" cy="274320"/>
+            <a:off x="9555480" y="2212848"/>
+            <a:ext cx="1600200" cy="274320"/>
           </a:xfrm>
           <a:prstGeom prst="roundRect">
             <a:avLst>
@@ -12232,8 +12232,8 @@
         </p:nvSpPr>
         <p:spPr>
           <a:xfrm>
-            <a:off x="457200" y="2697479"/>
-            <a:ext cx="11247120" cy="539496"/>
+            <a:off x="457200" y="2670048"/>
+            <a:ext cx="11247120" cy="603503"/>
           </a:xfrm>
           <a:prstGeom prst="roundRect">
             <a:avLst>
@@ -12280,8 +12280,8 @@
         </p:nvSpPr>
         <p:spPr>
           <a:xfrm>
-            <a:off x="457200" y="2697479"/>
-            <a:ext cx="164592" cy="539496"/>
+            <a:off x="457200" y="2670048"/>
+            <a:ext cx="164592" cy="603503"/>
           </a:xfrm>
           <a:prstGeom prst="rect">
             <a:avLst/>
@@ -12324,23 +12324,23 @@
         </p:nvSpPr>
         <p:spPr>
           <a:xfrm>
-            <a:off x="777240" y="2816351"/>
-            <a:ext cx="548640" cy="329184"/>
-          </a:xfrm>
-          <a:prstGeom prst="rect">
-            <a:avLst/>
-          </a:prstGeom>
-          <a:noFill/>
-        </p:spPr>
-        <p:txBody>
-          <a:bodyPr wrap="square" anchor="t" lIns="0" rIns="0" tIns="0" bIns="0">
-            <a:spAutoFit/>
-          </a:bodyPr>
-          <a:lstStyle/>
-          <a:p>
-            <a:pPr algn="l"/>
-            <a:r>
-              <a:rPr sz="1500" b="1">
+            <a:off x="777240" y="2834640"/>
+            <a:ext cx="594360" cy="365760"/>
+          </a:xfrm>
+          <a:prstGeom prst="rect">
+            <a:avLst/>
+          </a:prstGeom>
+          <a:noFill/>
+        </p:spPr>
+        <p:txBody>
+          <a:bodyPr wrap="square" anchor="t" lIns="0" rIns="0" tIns="0" bIns="0">
+            <a:spAutoFit/>
+          </a:bodyPr>
+          <a:lstStyle/>
+          <a:p>
+            <a:pPr algn="l"/>
+            <a:r>
+              <a:rPr sz="1800" b="1">
                 <a:solidFill>
                   <a:srgbClr val="2863C5"/>
                 </a:solidFill>
@@ -12359,8 +12359,8 @@
         </p:nvSpPr>
         <p:spPr>
           <a:xfrm>
-            <a:off x="1417320" y="2770632"/>
-            <a:ext cx="4114800" cy="256032"/>
+            <a:off x="1508760" y="2724912"/>
+            <a:ext cx="7863840" cy="274320"/>
           </a:xfrm>
           <a:prstGeom prst="rect">
             <a:avLst/>
@@ -12394,23 +12394,23 @@
         </p:nvSpPr>
         <p:spPr>
           <a:xfrm>
-            <a:off x="1417320" y="2990087"/>
-            <a:ext cx="7863840" cy="274320"/>
-          </a:xfrm>
-          <a:prstGeom prst="rect">
-            <a:avLst/>
-          </a:prstGeom>
-          <a:noFill/>
-        </p:spPr>
-        <p:txBody>
-          <a:bodyPr wrap="square" anchor="t" lIns="0" rIns="0" tIns="0" bIns="0">
-            <a:spAutoFit/>
-          </a:bodyPr>
-          <a:lstStyle/>
-          <a:p>
-            <a:pPr algn="l"/>
-            <a:r>
-              <a:rPr sz="1000" b="0">
+            <a:off x="1508760" y="2999232"/>
+            <a:ext cx="7863840" cy="292608"/>
+          </a:xfrm>
+          <a:prstGeom prst="rect">
+            <a:avLst/>
+          </a:prstGeom>
+          <a:noFill/>
+        </p:spPr>
+        <p:txBody>
+          <a:bodyPr wrap="square" anchor="t" lIns="0" rIns="0" tIns="0" bIns="0">
+            <a:spAutoFit/>
+          </a:bodyPr>
+          <a:lstStyle/>
+          <a:p>
+            <a:pPr algn="l"/>
+            <a:r>
+              <a:rPr sz="950" b="0">
                 <a:solidFill>
                   <a:srgbClr val="334155"/>
                 </a:solidFill>
@@ -12429,8 +12429,8 @@
         </p:nvSpPr>
         <p:spPr>
           <a:xfrm>
-            <a:off x="9601200" y="2843784"/>
-            <a:ext cx="1554480" cy="274320"/>
+            <a:off x="9555480" y="2871216"/>
+            <a:ext cx="1600200" cy="274320"/>
           </a:xfrm>
           <a:prstGeom prst="roundRect">
             <a:avLst>
@@ -12483,8 +12483,8 @@
         </p:nvSpPr>
         <p:spPr>
           <a:xfrm>
-            <a:off x="457200" y="3291839"/>
-            <a:ext cx="11247120" cy="539496"/>
+            <a:off x="457200" y="3328415"/>
+            <a:ext cx="11247120" cy="603503"/>
           </a:xfrm>
           <a:prstGeom prst="roundRect">
             <a:avLst>
@@ -12531,8 +12531,8 @@
         </p:nvSpPr>
         <p:spPr>
           <a:xfrm>
-            <a:off x="457200" y="3291839"/>
-            <a:ext cx="164592" cy="539496"/>
+            <a:off x="457200" y="3328415"/>
+            <a:ext cx="164592" cy="603503"/>
           </a:xfrm>
           <a:prstGeom prst="rect">
             <a:avLst/>
@@ -12575,23 +12575,23 @@
         </p:nvSpPr>
         <p:spPr>
           <a:xfrm>
-            <a:off x="777240" y="3410711"/>
-            <a:ext cx="548640" cy="329184"/>
-          </a:xfrm>
-          <a:prstGeom prst="rect">
-            <a:avLst/>
-          </a:prstGeom>
-          <a:noFill/>
-        </p:spPr>
-        <p:txBody>
-          <a:bodyPr wrap="square" anchor="t" lIns="0" rIns="0" tIns="0" bIns="0">
-            <a:spAutoFit/>
-          </a:bodyPr>
-          <a:lstStyle/>
-          <a:p>
-            <a:pPr algn="l"/>
-            <a:r>
-              <a:rPr sz="1500" b="1">
+            <a:off x="777240" y="3493008"/>
+            <a:ext cx="594360" cy="365760"/>
+          </a:xfrm>
+          <a:prstGeom prst="rect">
+            <a:avLst/>
+          </a:prstGeom>
+          <a:noFill/>
+        </p:spPr>
+        <p:txBody>
+          <a:bodyPr wrap="square" anchor="t" lIns="0" rIns="0" tIns="0" bIns="0">
+            <a:spAutoFit/>
+          </a:bodyPr>
+          <a:lstStyle/>
+          <a:p>
+            <a:pPr algn="l"/>
+            <a:r>
+              <a:rPr sz="1800" b="1">
                 <a:solidFill>
                   <a:srgbClr val="2863C5"/>
                 </a:solidFill>
@@ -12610,8 +12610,8 @@
         </p:nvSpPr>
         <p:spPr>
           <a:xfrm>
-            <a:off x="1417320" y="3364991"/>
-            <a:ext cx="4114800" cy="256032"/>
+            <a:off x="1508760" y="3383279"/>
+            <a:ext cx="7863840" cy="274320"/>
           </a:xfrm>
           <a:prstGeom prst="rect">
             <a:avLst/>
@@ -12645,23 +12645,23 @@
         </p:nvSpPr>
         <p:spPr>
           <a:xfrm>
-            <a:off x="1417320" y="3584447"/>
-            <a:ext cx="7863840" cy="274320"/>
-          </a:xfrm>
-          <a:prstGeom prst="rect">
-            <a:avLst/>
-          </a:prstGeom>
-          <a:noFill/>
-        </p:spPr>
-        <p:txBody>
-          <a:bodyPr wrap="square" anchor="t" lIns="0" rIns="0" tIns="0" bIns="0">
-            <a:spAutoFit/>
-          </a:bodyPr>
-          <a:lstStyle/>
-          <a:p>
-            <a:pPr algn="l"/>
-            <a:r>
-              <a:rPr sz="1000" b="0">
+            <a:off x="1508760" y="3657599"/>
+            <a:ext cx="7863840" cy="292608"/>
+          </a:xfrm>
+          <a:prstGeom prst="rect">
+            <a:avLst/>
+          </a:prstGeom>
+          <a:noFill/>
+        </p:spPr>
+        <p:txBody>
+          <a:bodyPr wrap="square" anchor="t" lIns="0" rIns="0" tIns="0" bIns="0">
+            <a:spAutoFit/>
+          </a:bodyPr>
+          <a:lstStyle/>
+          <a:p>
+            <a:pPr algn="l"/>
+            <a:r>
+              <a:rPr sz="950" b="0">
                 <a:solidFill>
                   <a:srgbClr val="334155"/>
                 </a:solidFill>
@@ -12680,8 +12680,8 @@
         </p:nvSpPr>
         <p:spPr>
           <a:xfrm>
-            <a:off x="9601200" y="3438144"/>
-            <a:ext cx="1554480" cy="274320"/>
+            <a:off x="9555480" y="3529584"/>
+            <a:ext cx="1600200" cy="274320"/>
           </a:xfrm>
           <a:prstGeom prst="roundRect">
             <a:avLst>
@@ -12734,8 +12734,8 @@
         </p:nvSpPr>
         <p:spPr>
           <a:xfrm>
-            <a:off x="457200" y="3886200"/>
-            <a:ext cx="11247120" cy="539496"/>
+            <a:off x="457200" y="3986783"/>
+            <a:ext cx="11247120" cy="603503"/>
           </a:xfrm>
           <a:prstGeom prst="roundRect">
             <a:avLst>
@@ -12782,8 +12782,8 @@
         </p:nvSpPr>
         <p:spPr>
           <a:xfrm>
-            <a:off x="457200" y="3886200"/>
-            <a:ext cx="164592" cy="539496"/>
+            <a:off x="457200" y="3986783"/>
+            <a:ext cx="164592" cy="603503"/>
           </a:xfrm>
           <a:prstGeom prst="rect">
             <a:avLst/>
@@ -12826,23 +12826,23 @@
         </p:nvSpPr>
         <p:spPr>
           <a:xfrm>
-            <a:off x="777240" y="4005072"/>
-            <a:ext cx="548640" cy="329184"/>
-          </a:xfrm>
-          <a:prstGeom prst="rect">
-            <a:avLst/>
-          </a:prstGeom>
-          <a:noFill/>
-        </p:spPr>
-        <p:txBody>
-          <a:bodyPr wrap="square" anchor="t" lIns="0" rIns="0" tIns="0" bIns="0">
-            <a:spAutoFit/>
-          </a:bodyPr>
-          <a:lstStyle/>
-          <a:p>
-            <a:pPr algn="l"/>
-            <a:r>
-              <a:rPr sz="1500" b="1">
+            <a:off x="777240" y="4151375"/>
+            <a:ext cx="594360" cy="365760"/>
+          </a:xfrm>
+          <a:prstGeom prst="rect">
+            <a:avLst/>
+          </a:prstGeom>
+          <a:noFill/>
+        </p:spPr>
+        <p:txBody>
+          <a:bodyPr wrap="square" anchor="t" lIns="0" rIns="0" tIns="0" bIns="0">
+            <a:spAutoFit/>
+          </a:bodyPr>
+          <a:lstStyle/>
+          <a:p>
+            <a:pPr algn="l"/>
+            <a:r>
+              <a:rPr sz="1800" b="1">
                 <a:solidFill>
                   <a:srgbClr val="059669"/>
                 </a:solidFill>
@@ -12861,8 +12861,8 @@
         </p:nvSpPr>
         <p:spPr>
           <a:xfrm>
-            <a:off x="1417320" y="3959352"/>
-            <a:ext cx="4114800" cy="256032"/>
+            <a:off x="1508760" y="4041647"/>
+            <a:ext cx="7863840" cy="274320"/>
           </a:xfrm>
           <a:prstGeom prst="rect">
             <a:avLst/>
@@ -12883,7 +12883,7 @@
                 </a:solidFill>
                 <a:latin typeface="Open Sans"/>
               </a:rPr>
-              <a:t>Assisted e-file shipped (with ActionLetters mail-packet fallback)</a:t>
+              <a:t>Assisted e-file + ActionLetters fallback shipped</a:t>
             </a:r>
           </a:p>
         </p:txBody>
@@ -12896,29 +12896,29 @@
         </p:nvSpPr>
         <p:spPr>
           <a:xfrm>
-            <a:off x="1417320" y="4178808"/>
-            <a:ext cx="7863840" cy="274320"/>
-          </a:xfrm>
-          <a:prstGeom prst="rect">
-            <a:avLst/>
-          </a:prstGeom>
-          <a:noFill/>
-        </p:spPr>
-        <p:txBody>
-          <a:bodyPr wrap="square" anchor="t" lIns="0" rIns="0" tIns="0" bIns="0">
-            <a:spAutoFit/>
-          </a:bodyPr>
-          <a:lstStyle/>
-          <a:p>
-            <a:pPr algn="l"/>
-            <a:r>
-              <a:rPr sz="1000" b="0">
+            <a:off x="1508760" y="4315968"/>
+            <a:ext cx="7863840" cy="292608"/>
+          </a:xfrm>
+          <a:prstGeom prst="rect">
+            <a:avLst/>
+          </a:prstGeom>
+          <a:noFill/>
+        </p:spPr>
+        <p:txBody>
+          <a:bodyPr wrap="square" anchor="t" lIns="0" rIns="0" tIns="0" bIns="0">
+            <a:spAutoFit/>
+          </a:bodyPr>
+          <a:lstStyle/>
+          <a:p>
+            <a:pPr algn="l"/>
+            <a:r>
+              <a:rPr sz="950" b="0">
                 <a:solidFill>
                   <a:srgbClr val="334155"/>
                 </a:solidFill>
                 <a:latin typeface="Open Sans"/>
               </a:rPr>
-              <a:t>Member confirms a match → SmartCredit preps the packet → user submits via state portal. ActionLetters handles physical packets where states require it.</a:t>
+              <a:t>Member confirms a match. We prep packet → user submits via state portal. Mail packet via ActionLetters when states require physical paperwork.</a:t>
             </a:r>
           </a:p>
         </p:txBody>
@@ -12931,8 +12931,8 @@
         </p:nvSpPr>
         <p:spPr>
           <a:xfrm>
-            <a:off x="9601200" y="4032504"/>
-            <a:ext cx="1554480" cy="274320"/>
+            <a:off x="9555480" y="4187951"/>
+            <a:ext cx="1600200" cy="274320"/>
           </a:xfrm>
           <a:prstGeom prst="roundRect">
             <a:avLst>
@@ -12985,8 +12985,8 @@
         </p:nvSpPr>
         <p:spPr>
           <a:xfrm>
-            <a:off x="457200" y="4480560"/>
-            <a:ext cx="11247120" cy="539496"/>
+            <a:off x="457200" y="4645151"/>
+            <a:ext cx="11247120" cy="603503"/>
           </a:xfrm>
           <a:prstGeom prst="roundRect">
             <a:avLst>
@@ -13033,8 +13033,8 @@
         </p:nvSpPr>
         <p:spPr>
           <a:xfrm>
-            <a:off x="457200" y="4480560"/>
-            <a:ext cx="164592" cy="539496"/>
+            <a:off x="457200" y="4645151"/>
+            <a:ext cx="164592" cy="603503"/>
           </a:xfrm>
           <a:prstGeom prst="rect">
             <a:avLst/>
@@ -13077,23 +13077,23 @@
         </p:nvSpPr>
         <p:spPr>
           <a:xfrm>
-            <a:off x="777240" y="4599432"/>
-            <a:ext cx="548640" cy="329184"/>
-          </a:xfrm>
-          <a:prstGeom prst="rect">
-            <a:avLst/>
-          </a:prstGeom>
-          <a:noFill/>
-        </p:spPr>
-        <p:txBody>
-          <a:bodyPr wrap="square" anchor="t" lIns="0" rIns="0" tIns="0" bIns="0">
-            <a:spAutoFit/>
-          </a:bodyPr>
-          <a:lstStyle/>
-          <a:p>
-            <a:pPr algn="l"/>
-            <a:r>
-              <a:rPr sz="1500" b="1">
+            <a:off x="777240" y="4809743"/>
+            <a:ext cx="594360" cy="365760"/>
+          </a:xfrm>
+          <a:prstGeom prst="rect">
+            <a:avLst/>
+          </a:prstGeom>
+          <a:noFill/>
+        </p:spPr>
+        <p:txBody>
+          <a:bodyPr wrap="square" anchor="t" lIns="0" rIns="0" tIns="0" bIns="0">
+            <a:spAutoFit/>
+          </a:bodyPr>
+          <a:lstStyle/>
+          <a:p>
+            <a:pPr algn="l"/>
+            <a:r>
+              <a:rPr sz="1800" b="1">
                 <a:solidFill>
                   <a:srgbClr val="FFB352"/>
                 </a:solidFill>
@@ -13112,8 +13112,8 @@
         </p:nvSpPr>
         <p:spPr>
           <a:xfrm>
-            <a:off x="1417320" y="4553712"/>
-            <a:ext cx="4114800" cy="256032"/>
+            <a:off x="1508760" y="4700015"/>
+            <a:ext cx="7863840" cy="274320"/>
           </a:xfrm>
           <a:prstGeom prst="rect">
             <a:avLst/>
@@ -13147,29 +13147,29 @@
         </p:nvSpPr>
         <p:spPr>
           <a:xfrm>
-            <a:off x="1417320" y="4773168"/>
-            <a:ext cx="7863840" cy="274320"/>
-          </a:xfrm>
-          <a:prstGeom prst="rect">
-            <a:avLst/>
-          </a:prstGeom>
-          <a:noFill/>
-        </p:spPr>
-        <p:txBody>
-          <a:bodyPr wrap="square" anchor="t" lIns="0" rIns="0" tIns="0" bIns="0">
-            <a:spAutoFit/>
-          </a:bodyPr>
-          <a:lstStyle/>
-          <a:p>
-            <a:pPr algn="l"/>
-            <a:r>
-              <a:rPr sz="1000" b="0">
+            <a:off x="1508760" y="4974336"/>
+            <a:ext cx="7863840" cy="292608"/>
+          </a:xfrm>
+          <a:prstGeom prst="rect">
+            <a:avLst/>
+          </a:prstGeom>
+          <a:noFill/>
+        </p:spPr>
+        <p:txBody>
+          <a:bodyPr wrap="square" anchor="t" lIns="0" rIns="0" tIns="0" bIns="0">
+            <a:spAutoFit/>
+          </a:bodyPr>
+          <a:lstStyle/>
+          <a:p>
+            <a:pPr algn="l"/>
+            <a:r>
+              <a:rPr sz="950" b="0">
                 <a:solidFill>
                   <a:srgbClr val="334155"/>
                 </a:solidFill>
                 <a:latin typeface="Open Sans"/>
               </a:rPr>
-              <a:t>Begin TX &amp; NY data requests. File Georgia CDR registration (first rep path). Open FL conversations.</a:t>
+              <a:t>Begin TX &amp; NY data requests. File Georgia CDR registration (first rep path). Open FL Ch. 717 conversations.</a:t>
             </a:r>
           </a:p>
         </p:txBody>
@@ -13182,8 +13182,8 @@
         </p:nvSpPr>
         <p:spPr>
           <a:xfrm>
-            <a:off x="9601200" y="4626864"/>
-            <a:ext cx="1554480" cy="274320"/>
+            <a:off x="9555480" y="4846319"/>
+            <a:ext cx="1600200" cy="274320"/>
           </a:xfrm>
           <a:prstGeom prst="roundRect">
             <a:avLst>
@@ -13236,8 +13236,8 @@
         </p:nvSpPr>
         <p:spPr>
           <a:xfrm>
-            <a:off x="457200" y="5074920"/>
-            <a:ext cx="11247120" cy="539496"/>
+            <a:off x="457200" y="5303519"/>
+            <a:ext cx="11247120" cy="603503"/>
           </a:xfrm>
           <a:prstGeom prst="roundRect">
             <a:avLst>
@@ -13284,8 +13284,8 @@
         </p:nvSpPr>
         <p:spPr>
           <a:xfrm>
-            <a:off x="457200" y="5074920"/>
-            <a:ext cx="164592" cy="539496"/>
+            <a:off x="457200" y="5303519"/>
+            <a:ext cx="164592" cy="603503"/>
           </a:xfrm>
           <a:prstGeom prst="rect">
             <a:avLst/>
@@ -13328,23 +13328,23 @@
         </p:nvSpPr>
         <p:spPr>
           <a:xfrm>
-            <a:off x="777240" y="5193792"/>
-            <a:ext cx="548640" cy="329184"/>
-          </a:xfrm>
-          <a:prstGeom prst="rect">
-            <a:avLst/>
-          </a:prstGeom>
-          <a:noFill/>
-        </p:spPr>
-        <p:txBody>
-          <a:bodyPr wrap="square" anchor="t" lIns="0" rIns="0" tIns="0" bIns="0">
-            <a:spAutoFit/>
-          </a:bodyPr>
-          <a:lstStyle/>
-          <a:p>
-            <a:pPr algn="l"/>
-            <a:r>
-              <a:rPr sz="1500" b="1">
+            <a:off x="777240" y="5468111"/>
+            <a:ext cx="594360" cy="365760"/>
+          </a:xfrm>
+          <a:prstGeom prst="rect">
+            <a:avLst/>
+          </a:prstGeom>
+          <a:noFill/>
+        </p:spPr>
+        <p:txBody>
+          <a:bodyPr wrap="square" anchor="t" lIns="0" rIns="0" tIns="0" bIns="0">
+            <a:spAutoFit/>
+          </a:bodyPr>
+          <a:lstStyle/>
+          <a:p>
+            <a:pPr algn="l"/>
+            <a:r>
+              <a:rPr sz="1800" b="1">
                 <a:solidFill>
                   <a:srgbClr val="FFB352"/>
                 </a:solidFill>
@@ -13363,8 +13363,8 @@
         </p:nvSpPr>
         <p:spPr>
           <a:xfrm>
-            <a:off x="1417320" y="5148072"/>
-            <a:ext cx="4114800" cy="256032"/>
+            <a:off x="1508760" y="5358383"/>
+            <a:ext cx="7863840" cy="274320"/>
           </a:xfrm>
           <a:prstGeom prst="rect">
             <a:avLst/>
@@ -13385,7 +13385,7 @@
                 </a:solidFill>
                 <a:latin typeface="Open Sans"/>
               </a:rPr>
-              <a:t>Expand: more states, more states' worth of money</a:t>
+              <a:t>Expand to top-5 states</a:t>
             </a:r>
           </a:p>
         </p:txBody>
@@ -13398,29 +13398,29 @@
         </p:nvSpPr>
         <p:spPr>
           <a:xfrm>
-            <a:off x="1417320" y="5367528"/>
-            <a:ext cx="7863840" cy="274320"/>
-          </a:xfrm>
-          <a:prstGeom prst="rect">
-            <a:avLst/>
-          </a:prstGeom>
-          <a:noFill/>
-        </p:spPr>
-        <p:txBody>
-          <a:bodyPr wrap="square" anchor="t" lIns="0" rIns="0" tIns="0" bIns="0">
-            <a:spAutoFit/>
-          </a:bodyPr>
-          <a:lstStyle/>
-          <a:p>
-            <a:pPr algn="l"/>
-            <a:r>
-              <a:rPr sz="1000" b="0">
+            <a:off x="1508760" y="5632703"/>
+            <a:ext cx="7863840" cy="292608"/>
+          </a:xfrm>
+          <a:prstGeom prst="rect">
+            <a:avLst/>
+          </a:prstGeom>
+          <a:noFill/>
+        </p:spPr>
+        <p:txBody>
+          <a:bodyPr wrap="square" anchor="t" lIns="0" rIns="0" tIns="0" bIns="0">
+            <a:spAutoFit/>
+          </a:bodyPr>
+          <a:lstStyle/>
+          <a:p>
+            <a:pPr algn="l"/>
+            <a:r>
+              <a:rPr sz="950" b="0">
                 <a:solidFill>
                   <a:srgbClr val="334155"/>
                 </a:solidFill>
                 <a:latin typeface="Open Sans"/>
               </a:rPr>
-              <a:t>TX + NY + GA online (data + claim filing). Browser-extension form-fill for member-driven submit. Quarterly state additions.</a:t>
+              <a:t>TX + NY + GA online for data + claim filing. Member-driven submit via state portals. Quarterly state additions.</a:t>
             </a:r>
           </a:p>
         </p:txBody>
@@ -13433,8 +13433,8 @@
         </p:nvSpPr>
         <p:spPr>
           <a:xfrm>
-            <a:off x="9601200" y="5221224"/>
-            <a:ext cx="1554480" cy="274320"/>
+            <a:off x="9555480" y="5504687"/>
+            <a:ext cx="1600200" cy="274320"/>
           </a:xfrm>
           <a:prstGeom prst="roundRect">
             <a:avLst>
@@ -13487,8 +13487,8 @@
         </p:nvSpPr>
         <p:spPr>
           <a:xfrm>
-            <a:off x="457200" y="5669280"/>
-            <a:ext cx="11247120" cy="539496"/>
+            <a:off x="457200" y="5961887"/>
+            <a:ext cx="11247120" cy="603503"/>
           </a:xfrm>
           <a:prstGeom prst="roundRect">
             <a:avLst>
@@ -13535,8 +13535,8 @@
         </p:nvSpPr>
         <p:spPr>
           <a:xfrm>
-            <a:off x="457200" y="5669280"/>
-            <a:ext cx="164592" cy="539496"/>
+            <a:off x="457200" y="5961887"/>
+            <a:ext cx="164592" cy="603503"/>
           </a:xfrm>
           <a:prstGeom prst="rect">
             <a:avLst/>
@@ -13579,23 +13579,23 @@
         </p:nvSpPr>
         <p:spPr>
           <a:xfrm>
-            <a:off x="777240" y="5788152"/>
-            <a:ext cx="548640" cy="329184"/>
-          </a:xfrm>
-          <a:prstGeom prst="rect">
-            <a:avLst/>
-          </a:prstGeom>
-          <a:noFill/>
-        </p:spPr>
-        <p:txBody>
-          <a:bodyPr wrap="square" anchor="t" lIns="0" rIns="0" tIns="0" bIns="0">
-            <a:spAutoFit/>
-          </a:bodyPr>
-          <a:lstStyle/>
-          <a:p>
-            <a:pPr algn="l"/>
-            <a:r>
-              <a:rPr sz="1500" b="1">
+            <a:off x="777240" y="6126479"/>
+            <a:ext cx="594360" cy="365760"/>
+          </a:xfrm>
+          <a:prstGeom prst="rect">
+            <a:avLst/>
+          </a:prstGeom>
+          <a:noFill/>
+        </p:spPr>
+        <p:txBody>
+          <a:bodyPr wrap="square" anchor="t" lIns="0" rIns="0" tIns="0" bIns="0">
+            <a:spAutoFit/>
+          </a:bodyPr>
+          <a:lstStyle/>
+          <a:p>
+            <a:pPr algn="l"/>
+            <a:r>
+              <a:rPr sz="1800" b="1">
                 <a:solidFill>
                   <a:srgbClr val="FC4C0B"/>
                 </a:solidFill>
@@ -13614,8 +13614,8 @@
         </p:nvSpPr>
         <p:spPr>
           <a:xfrm>
-            <a:off x="1417320" y="5742432"/>
-            <a:ext cx="4114800" cy="256032"/>
+            <a:off x="1508760" y="6016751"/>
+            <a:ext cx="7863840" cy="274320"/>
           </a:xfrm>
           <a:prstGeom prst="rect">
             <a:avLst/>
@@ -13649,23 +13649,23 @@
         </p:nvSpPr>
         <p:spPr>
           <a:xfrm>
-            <a:off x="1417320" y="5961888"/>
-            <a:ext cx="7863840" cy="274320"/>
-          </a:xfrm>
-          <a:prstGeom prst="rect">
-            <a:avLst/>
-          </a:prstGeom>
-          <a:noFill/>
-        </p:spPr>
-        <p:txBody>
-          <a:bodyPr wrap="square" anchor="t" lIns="0" rIns="0" tIns="0" bIns="0">
-            <a:spAutoFit/>
-          </a:bodyPr>
-          <a:lstStyle/>
-          <a:p>
-            <a:pPr algn="l"/>
-            <a:r>
-              <a:rPr sz="1000" b="0">
+            <a:off x="1508760" y="6291071"/>
+            <a:ext cx="7863840" cy="292608"/>
+          </a:xfrm>
+          <a:prstGeom prst="rect">
+            <a:avLst/>
+          </a:prstGeom>
+          <a:noFill/>
+        </p:spPr>
+        <p:txBody>
+          <a:bodyPr wrap="square" anchor="t" lIns="0" rIns="0" tIns="0" bIns="0">
+            <a:spAutoFit/>
+          </a:bodyPr>
+          <a:lstStyle/>
+          <a:p>
+            <a:pPr algn="l"/>
+            <a:r>
+              <a:rPr sz="950" b="0">
                 <a:solidFill>
                   <a:srgbClr val="334155"/>
                 </a:solidFill>
@@ -13684,8 +13684,8 @@
         </p:nvSpPr>
         <p:spPr>
           <a:xfrm>
-            <a:off x="9601200" y="5815584"/>
-            <a:ext cx="1554480" cy="274320"/>
+            <a:off x="9555480" y="6163055"/>
+            <a:ext cx="1600200" cy="274320"/>
           </a:xfrm>
           <a:prstGeom prst="roundRect">
             <a:avLst>
@@ -13725,7 +13725,7 @@
                 </a:solidFill>
                 <a:latin typeface="Open Sans"/>
               </a:rPr>
-              <a:t>Q4 2026 / Q1 2027</a:t>
+              <a:t>Q4 2026 · Q1 2027</a:t>
             </a:r>
           </a:p>
         </p:txBody>
@@ -13738,12 +13738,12 @@
         </p:nvSpPr>
         <p:spPr>
           <a:xfrm>
-            <a:off x="457200" y="6400800"/>
-            <a:ext cx="11247120" cy="365760"/>
+            <a:off x="457200" y="6647688"/>
+            <a:ext cx="11247120" cy="182880"/>
           </a:xfrm>
           <a:prstGeom prst="roundRect">
             <a:avLst>
-              <a:gd name="adj" fmla="val 7000"/>
+              <a:gd name="adj" fmla="val 10000"/>
             </a:avLst>
           </a:prstGeom>
           <a:solidFill>
@@ -13784,23 +13784,23 @@
         </p:nvSpPr>
         <p:spPr>
           <a:xfrm>
-            <a:off x="640080" y="6446520"/>
-            <a:ext cx="10972800" cy="292608"/>
-          </a:xfrm>
-          <a:prstGeom prst="rect">
-            <a:avLst/>
-          </a:prstGeom>
-          <a:noFill/>
-        </p:spPr>
-        <p:txBody>
-          <a:bodyPr wrap="square" anchor="t" lIns="0" rIns="0" tIns="0" bIns="0">
-            <a:spAutoFit/>
-          </a:bodyPr>
-          <a:lstStyle/>
-          <a:p>
-            <a:pPr algn="l"/>
-            <a:r>
-              <a:rPr sz="1200" b="1">
+            <a:off x="640080" y="6675120"/>
+            <a:ext cx="10972800" cy="146304"/>
+          </a:xfrm>
+          <a:prstGeom prst="rect">
+            <a:avLst/>
+          </a:prstGeom>
+          <a:noFill/>
+        </p:spPr>
+        <p:txBody>
+          <a:bodyPr wrap="square" anchor="t" lIns="0" rIns="0" tIns="0" bIns="0">
+            <a:spAutoFit/>
+          </a:bodyPr>
+          <a:lstStyle/>
+          <a:p>
+            <a:pPr algn="l"/>
+            <a:r>
+              <a:rPr sz="1000" b="1">
                 <a:solidFill>
                   <a:srgbClr val="FFFFFF"/>
                 </a:solidFill>

--- a/myReclaim-Exec-Deck.pptx
+++ b/myReclaim-Exec-Deck.pptx
@@ -12,6 +12,7 @@
     <p:sldId id="260" r:id="rId11"/>
     <p:sldId id="261" r:id="rId12"/>
     <p:sldId id="262" r:id="rId13"/>
+    <p:sldId id="263" r:id="rId14"/>
   </p:sldIdLst>
   <p:sldSz cx="12188952" cy="6858000" type="screen4x3"/>
   <p:notesSz cx="6858000" cy="9144000"/>
@@ -3661,7 +3662,7 @@
                 </a:solidFill>
                 <a:latin typeface="Open Sans"/>
               </a:rPr>
-              <a:t>2 / 7</a:t>
+              <a:t>2 / 8</a:t>
             </a:r>
           </a:p>
         </p:txBody>
@@ -3766,7 +3767,7 @@
                 </a:solidFill>
                 <a:latin typeface="Open Sans"/>
               </a:rPr>
-              <a:t>$70 billion</a:t>
+              <a:t>$70B+</a:t>
             </a:r>
           </a:p>
         </p:txBody>
@@ -3795,13 +3796,13 @@
           <a:p>
             <a:pPr algn="l"/>
             <a:r>
-              <a:rPr sz="2800" b="1">
+              <a:rPr sz="2400" b="1">
                 <a:solidFill>
                   <a:srgbClr val="0F172A"/>
                 </a:solidFill>
                 <a:latin typeface="Open Sans"/>
               </a:rPr>
-              <a:t>is sitting in U.S. state treasuries — money our members are owed.</a:t>
+              <a:t>estimated in unclaimed property nationwide. Some of it is reported in our members' names.</a:t>
             </a:r>
           </a:p>
         </p:txBody>
@@ -3884,7 +3885,7 @@
                 </a:solidFill>
                 <a:latin typeface="Open Sans"/>
               </a:rPr>
-              <a:t>1 in 7</a:t>
+              <a:t>~33M</a:t>
             </a:r>
           </a:p>
         </p:txBody>
@@ -3919,7 +3920,7 @@
                 </a:solidFill>
                 <a:latin typeface="Open Sans"/>
               </a:rPr>
-              <a:t>Americans has unclaimed property — about 33 million people</a:t>
+              <a:t>people may have property waiting to be claimed (NAUPA)</a:t>
             </a:r>
           </a:p>
         </p:txBody>
@@ -4002,7 +4003,7 @@
                 </a:solidFill>
                 <a:latin typeface="Open Sans"/>
               </a:rPr>
-              <a:t>~$2,080</a:t>
+              <a:t>$2,080</a:t>
             </a:r>
           </a:p>
         </p:txBody>
@@ -4037,7 +4038,7 @@
                 </a:solidFill>
                 <a:latin typeface="Open Sans"/>
               </a:rPr>
-              <a:t>average claim value (median $100, mean ~$2,000)</a:t>
+              <a:t>average claim paid through MissingMoney.com (median $100, FY2024)</a:t>
             </a:r>
           </a:p>
         </p:txBody>
@@ -4120,7 +4121,7 @@
                 </a:solidFill>
                 <a:latin typeface="Open Sans"/>
               </a:rPr>
-              <a:t>0</a:t>
+              <a:t>Unique</a:t>
             </a:r>
           </a:p>
         </p:txBody>
@@ -4155,7 +4156,7 @@
                 </a:solidFill>
                 <a:latin typeface="Open Sans"/>
               </a:rPr>
-              <a:t>credit-monitoring competitors offer this today</a:t>
+              <a:t>combination of verified-identity matching + alerts + free claim guidance</a:t>
             </a:r>
           </a:p>
         </p:txBody>
@@ -4331,7 +4332,7 @@
                 </a:solidFill>
                 <a:latin typeface="Open Sans"/>
               </a:rPr>
-              <a:t>3 / 7</a:t>
+              <a:t>3 / 8</a:t>
             </a:r>
           </a:p>
         </p:txBody>
@@ -4644,7 +4645,7 @@
                 </a:solidFill>
                 <a:latin typeface="Open Sans"/>
               </a:rPr>
-              <a:t>"You may have $X waiting. We found it for you."</a:t>
+              <a:t>"Possible match found. The state may be holding property in your name."</a:t>
             </a:r>
           </a:p>
         </p:txBody>
@@ -4781,7 +4782,7 @@
                 </a:solidFill>
                 <a:latin typeface="Open Sans"/>
               </a:rPr>
-              <a:t>They review the matches</a:t>
+              <a:t>They review the possible matches</a:t>
             </a:r>
           </a:p>
         </p:txBody>
@@ -4816,7 +4817,7 @@
                 </a:solidFill>
                 <a:latin typeface="Open Sans"/>
               </a:rPr>
-              <a:t>Holder, amount, type — laid out as cards.</a:t>
+              <a:t>Holder, type, amount range — laid out as cards. The state determines eligibility.</a:t>
             </a:r>
           </a:p>
         </p:txBody>
@@ -4953,7 +4954,7 @@
                 </a:solidFill>
                 <a:latin typeface="Open Sans"/>
               </a:rPr>
-              <a:t>They claim with the state</a:t>
+              <a:t>We help them file with the state</a:t>
             </a:r>
           </a:p>
         </p:txBody>
@@ -4988,7 +4989,7 @@
                 </a:solidFill>
                 <a:latin typeface="Open Sans"/>
               </a:rPr>
-              <a:t>One click → official state claim portal.</a:t>
+              <a:t>Prepare claim packet · route to official state portal · track status.</a:t>
             </a:r>
           </a:p>
         </p:txBody>
@@ -5106,7 +5107,7 @@
                 </a:solidFill>
                 <a:latin typeface="Open Sans"/>
               </a:rPr>
-              <a:t>MATCH FOUND</a:t>
+              <a:t>POSSIBLE MATCH</a:t>
             </a:r>
           </a:p>
         </p:txBody>
@@ -5176,7 +5177,7 @@
                 </a:solidFill>
                 <a:latin typeface="Open Sans"/>
               </a:rPr>
-              <a:t>Holder financial institution</a:t>
+              <a:t>Reported by financial institution</a:t>
             </a:r>
           </a:p>
         </p:txBody>
@@ -5259,13 +5260,13 @@
           <a:p>
             <a:pPr algn="l"/>
             <a:r>
-              <a:rPr sz="4400" b="1">
+              <a:rPr sz="3600" b="1">
                 <a:solidFill>
                   <a:srgbClr val="FC4C0B"/>
                 </a:solidFill>
                 <a:latin typeface="Open Sans"/>
               </a:rPr>
-              <a:t>$ —</a:t>
+              <a:t>$100 – $499</a:t>
             </a:r>
           </a:p>
         </p:txBody>
@@ -5300,7 +5301,7 @@
                 </a:solidFill>
                 <a:latin typeface="Open Sans"/>
               </a:rPr>
-              <a:t>Reported in member's name · last known city</a:t>
+              <a:t>Matched on name + prior city / address</a:t>
             </a:r>
           </a:p>
         </p:txBody>
@@ -5314,7 +5315,7 @@
         <p:spPr>
           <a:xfrm>
             <a:off x="6629400" y="5897880"/>
-            <a:ext cx="1554480" cy="365760"/>
+            <a:ext cx="2194560" cy="365760"/>
           </a:xfrm>
           <a:prstGeom prst="roundRect">
             <a:avLst>
@@ -5348,48 +5349,83 @@
           <a:p>
             <a:pPr algn="ctr"/>
             <a:r>
+              <a:rPr sz="1000" b="1">
+                <a:solidFill>
+                  <a:srgbClr val="FFFFFF"/>
+                </a:solidFill>
+                <a:latin typeface="Open Sans"/>
+              </a:rPr>
+              <a:t>Continue to official claim</a:t>
+            </a:r>
+          </a:p>
+        </p:txBody>
+      </p:sp>
+      <p:sp>
+        <p:nvSpPr>
+          <p:cNvPr id="31" name="TextBox 30"/>
+          <p:cNvSpPr txBox="1"/>
+          <p:nvPr/>
+        </p:nvSpPr>
+        <p:spPr>
+          <a:xfrm>
+            <a:off x="9006840" y="5943600"/>
+            <a:ext cx="2651760" cy="365760"/>
+          </a:xfrm>
+          <a:prstGeom prst="rect">
+            <a:avLst/>
+          </a:prstGeom>
+          <a:noFill/>
+        </p:spPr>
+        <p:txBody>
+          <a:bodyPr wrap="square" anchor="t" lIns="0" rIns="0" tIns="0" bIns="0">
+            <a:spAutoFit/>
+          </a:bodyPr>
+          <a:lstStyle/>
+          <a:p>
+            <a:pPr algn="l"/>
+            <a:r>
               <a:rPr sz="1100" b="1">
                 <a:solidFill>
-                  <a:srgbClr val="FFFFFF"/>
-                </a:solidFill>
-                <a:latin typeface="Open Sans"/>
-              </a:rPr>
-              <a:t>Claim →</a:t>
-            </a:r>
-          </a:p>
-        </p:txBody>
-      </p:sp>
-      <p:sp>
-        <p:nvSpPr>
-          <p:cNvPr id="31" name="TextBox 30"/>
-          <p:cNvSpPr txBox="1"/>
-          <p:nvPr/>
-        </p:nvSpPr>
-        <p:spPr>
-          <a:xfrm>
-            <a:off x="8412480" y="5943600"/>
-            <a:ext cx="3200400" cy="365760"/>
-          </a:xfrm>
-          <a:prstGeom prst="rect">
-            <a:avLst/>
-          </a:prstGeom>
-          <a:noFill/>
-        </p:spPr>
-        <p:txBody>
-          <a:bodyPr wrap="square" anchor="t" lIns="0" rIns="0" tIns="0" bIns="0">
-            <a:spAutoFit/>
-          </a:bodyPr>
-          <a:lstStyle/>
-          <a:p>
-            <a:pPr algn="l"/>
-            <a:r>
-              <a:rPr sz="1100" b="1">
-                <a:solidFill>
                   <a:srgbClr val="2863C5"/>
                 </a:solidFill>
                 <a:latin typeface="Open Sans"/>
               </a:rPr>
               <a:t>Not me</a:t>
+            </a:r>
+          </a:p>
+        </p:txBody>
+      </p:sp>
+      <p:sp>
+        <p:nvSpPr>
+          <p:cNvPr id="32" name="TextBox 31"/>
+          <p:cNvSpPr txBox="1"/>
+          <p:nvPr/>
+        </p:nvSpPr>
+        <p:spPr>
+          <a:xfrm>
+            <a:off x="6400800" y="6492240"/>
+            <a:ext cx="5303520" cy="457200"/>
+          </a:xfrm>
+          <a:prstGeom prst="rect">
+            <a:avLst/>
+          </a:prstGeom>
+          <a:noFill/>
+        </p:spPr>
+        <p:txBody>
+          <a:bodyPr wrap="square" anchor="t" lIns="0" rIns="0" tIns="0" bIns="0">
+            <a:spAutoFit/>
+          </a:bodyPr>
+          <a:lstStyle/>
+          <a:p>
+            <a:pPr algn="l"/>
+            <a:r>
+              <a:rPr sz="800" b="0">
+                <a:solidFill>
+                  <a:srgbClr val="64748B"/>
+                </a:solidFill>
+                <a:latin typeface="Open Sans"/>
+              </a:rPr>
+              <a:t>The state determines eligibility. Official state claims are free. SmartCredit does not guarantee approval.</a:t>
             </a:r>
           </a:p>
         </p:txBody>
@@ -5565,7 +5601,7 @@
                 </a:solidFill>
                 <a:latin typeface="Open Sans"/>
               </a:rPr>
-              <a:t>4 / 7</a:t>
+              <a:t>4 / 8</a:t>
             </a:r>
           </a:p>
         </p:txBody>
@@ -7065,7 +7101,7 @@
                 </a:solidFill>
                 <a:latin typeface="Open Sans"/>
               </a:rPr>
-              <a:t>5 / 7</a:t>
+              <a:t>5 / 8</a:t>
             </a:r>
           </a:p>
         </p:txBody>
@@ -7662,7 +7698,7 @@
                 </a:solidFill>
                 <a:latin typeface="Open Sans"/>
               </a:rPr>
-              <a:t>Registered FL rep (atty/CPA/PI per Ch. 717) — manual portal lookups, no automation</a:t>
+              <a:t>Registered FL rep path (atty/CPA/PI, Ch. 717). No cacheable bulk dataset confirmed.</a:t>
             </a:r>
           </a:p>
         </p:txBody>
@@ -7900,7 +7936,7 @@
                 </a:solidFill>
                 <a:latin typeface="Open Sans"/>
               </a:rPr>
-              <a:t>Written data request + caching agreement</a:t>
+              <a:t>Request-based dataset; enable only after written caching/redisplay approval.</a:t>
             </a:r>
           </a:p>
         </p:txBody>
@@ -8182,7 +8218,7 @@
                 </a:solidFill>
                 <a:latin typeface="Open Sans"/>
               </a:rPr>
-              <a:t>Public CSV, weekly — 81M rows already loaded ✓</a:t>
+              <a:t>Public CSV, updated Thursdays — prototype loaded 81M rows ✓</a:t>
             </a:r>
           </a:p>
         </p:txBody>
@@ -8420,7 +8456,7 @@
                 </a:solidFill>
                 <a:latin typeface="Open Sans"/>
               </a:rPr>
-              <a:t>CDR registration → searchable data file (live Jul '24)</a:t>
+              <a:t>CDR registration + background checks → weekly delimited file (&gt;1 GB)</a:t>
             </a:r>
           </a:p>
         </p:txBody>
@@ -8658,7 +8694,7 @@
                 </a:solidFill>
                 <a:latin typeface="Open Sans"/>
               </a:rPr>
-              <a:t>Secure-FTP owner-name file, quarterly</a:t>
+              <a:t>Secure-FTP owner-name file, quarterly. Excludes amounts and tax IDs.</a:t>
             </a:r>
           </a:p>
         </p:txBody>
@@ -8896,7 +8932,7 @@
                 </a:solidFill>
                 <a:latin typeface="Open Sans"/>
               </a:rPr>
-              <a:t>No bulk feed; assisted e-file via iCash</a:t>
+              <a:t>No public bulk feed confirmed. Assisted e-file via iCash.</a:t>
             </a:r>
           </a:p>
         </p:txBody>
@@ -9134,7 +9170,7 @@
                 </a:solidFill>
                 <a:latin typeface="Open Sans"/>
               </a:rPr>
-              <a:t>PDFs only; not a clean feed</a:t>
+              <a:t>No clean bulk feed confirmed; annual public PDFs exist.</a:t>
             </a:r>
           </a:p>
         </p:txBody>
@@ -9372,7 +9408,7 @@
                 </a:solidFill>
                 <a:latin typeface="Open Sans"/>
               </a:rPr>
-              <a:t>No bulk; assisted e-file</a:t>
+              <a:t>No public bulk feed confirmed.</a:t>
             </a:r>
           </a:p>
         </p:txBody>
@@ -9610,7 +9646,7 @@
                 </a:solidFill>
                 <a:latin typeface="Open Sans"/>
               </a:rPr>
-              <a:t>No bulk; assisted e-file</a:t>
+              <a:t>No public bulk feed confirmed.</a:t>
             </a:r>
           </a:p>
         </p:txBody>
@@ -9848,7 +9884,7 @@
                 </a:solidFill>
                 <a:latin typeface="Open Sans"/>
               </a:rPr>
-              <a:t>No bulk; assisted e-file</a:t>
+              <a:t>No public bulk feed confirmed.</a:t>
             </a:r>
           </a:p>
         </p:txBody>
@@ -9929,7 +9965,7 @@
                 </a:solidFill>
                 <a:latin typeface="Open Sans"/>
               </a:rPr>
-              <a:t>Top-10 states = 287,765 customers (~70% of base). CA is the only fully bulk-ingestable state today.</a:t>
+              <a:t>Top-10 states = 288,065 customers (~70% of base, pending base-size confirmation).</a:t>
             </a:r>
           </a:p>
         </p:txBody>
@@ -9964,7 +10000,7 @@
                 </a:solidFill>
                 <a:latin typeface="Open Sans"/>
               </a:rPr>
-              <a:t>Sprint 2 unlocks TX + NY + GA at bulk; FL needs a registered-rep partnership for manual access (no automation, but full data).</a:t>
+              <a:t>CA is the only top-10 state with a confirmed public bulk feed. Sprint 2 begins TX + NY data requests and GA CDR registration; bulk availability depends on state approval, terms, and legal sign-off.</a:t>
             </a:r>
           </a:p>
         </p:txBody>
@@ -10140,7 +10176,7 @@
                 </a:solidFill>
                 <a:latin typeface="Open Sans"/>
               </a:rPr>
-              <a:t>6 / 7</a:t>
+              <a:t>6 / 8</a:t>
             </a:r>
           </a:p>
         </p:txBody>
@@ -10280,7 +10316,7 @@
                 </a:solidFill>
                 <a:latin typeface="Open Sans"/>
               </a:rPr>
-              <a:t>Most states accept online claim filings — that's our v1 path. When a state requires a notarized paper packet, we ship it via ActionLetters (our existing letter-mailing service that already handles credit-dispute mailers). Filing on the member's behalf is a regulatory unlock per state, not a technical one.</a:t>
+              <a:t>Most states support online claim initiation, but some claims still require document upload, notarization, mailed forms, or manual review. v1 is assisted e-file. Mail packets via our ActionLetters service when states require physical paperwork. Filing on the member's behalf is a state-by-state regulatory unlock — not a technical one.</a:t>
             </a:r>
           </a:p>
         </p:txBody>
@@ -10652,7 +10688,7 @@
                 </a:solidFill>
                 <a:latin typeface="Open Sans"/>
               </a:rPr>
-              <a:t>Claim ID + status sync back to SmartCredit</a:t>
+              <a:t>Claim ID + status entered by member or updated manually until state APIs exist</a:t>
             </a:r>
           </a:p>
         </p:txBody>
@@ -10954,7 +10990,7 @@
                 </a:solidFill>
                 <a:latin typeface="Open Sans"/>
               </a:rPr>
-              <a:t>Member submits; we generate the paper</a:t>
+              <a:t>Member; we generate the packet + mailing instructions</a:t>
             </a:r>
           </a:p>
         </p:txBody>
@@ -11024,7 +11060,7 @@
                 </a:solidFill>
                 <a:latin typeface="Open Sans"/>
               </a:rPr>
-              <a:t>Notarized packet → ActionLetters → state mail intake</a:t>
+              <a:t>If ActionLetters mails directly, legal must confirm it isn't representative filing</a:t>
             </a:r>
           </a:p>
         </p:txBody>
@@ -11681,13 +11717,13 @@
           <a:p>
             <a:pPr algn="l"/>
             <a:r>
-              <a:rPr sz="1200" b="1">
+              <a:rPr sz="1000" b="1">
                 <a:solidFill>
                   <a:srgbClr val="FFFFFF"/>
                 </a:solidFill>
                 <a:latin typeface="Open Sans"/>
               </a:rPr>
-              <a:t>Members never pay. We never take a cut. Free is the regulatory shield and the brand promise.</a:t>
+              <a:t>Members never pay. We never take a cut. Free reduces finder-fee risk — but representative filing still requires state-by-state approval, registration, and legal sign-off.</a:t>
             </a:r>
           </a:p>
         </p:txBody>
@@ -11863,7 +11899,7 @@
                 </a:solidFill>
                 <a:latin typeface="Open Sans"/>
               </a:rPr>
-              <a:t>7 / 7</a:t>
+              <a:t>7 / 8</a:t>
             </a:r>
           </a:p>
         </p:txBody>
@@ -11933,7 +11969,7 @@
                 </a:solidFill>
                 <a:latin typeface="Open Sans"/>
               </a:rPr>
-              <a:t>WORKFLOW · WHAT NEEDS TO HAPPEN NEXT</a:t>
+              <a:t>COMPLIANCE GUARDRAILS</a:t>
             </a:r>
           </a:p>
         </p:txBody>
@@ -11947,42 +11983,77 @@
         <p:spPr>
           <a:xfrm>
             <a:off x="457200" y="1143000"/>
-            <a:ext cx="11430000" cy="822960"/>
-          </a:xfrm>
-          <a:prstGeom prst="rect">
-            <a:avLst/>
-          </a:prstGeom>
-          <a:noFill/>
-        </p:spPr>
-        <p:txBody>
-          <a:bodyPr wrap="square" anchor="t" lIns="0" rIns="0" tIns="0" bIns="0">
-            <a:spAutoFit/>
-          </a:bodyPr>
-          <a:lstStyle/>
-          <a:p>
-            <a:pPr algn="l"/>
-            <a:r>
-              <a:rPr sz="2800" b="1">
+            <a:ext cx="11430000" cy="868680"/>
+          </a:xfrm>
+          <a:prstGeom prst="rect">
+            <a:avLst/>
+          </a:prstGeom>
+          <a:noFill/>
+        </p:spPr>
+        <p:txBody>
+          <a:bodyPr wrap="square" anchor="t" lIns="0" rIns="0" tIns="0" bIns="0">
+            <a:spAutoFit/>
+          </a:bodyPr>
+          <a:lstStyle/>
+          <a:p>
+            <a:pPr algn="l"/>
+            <a:r>
+              <a:rPr sz="2600" b="1">
                 <a:solidFill>
                   <a:srgbClr val="0F172A"/>
                 </a:solidFill>
                 <a:latin typeface="Open Sans"/>
               </a:rPr>
-              <a:t>From approval to first member alert.</a:t>
-            </a:r>
-          </a:p>
-        </p:txBody>
-      </p:sp>
-      <p:sp>
-        <p:nvSpPr>
-          <p:cNvPr id="9" name="Rounded Rectangle 8"/>
+              <a:t>Free for members. State-approved where required.</a:t>
+            </a:r>
+          </a:p>
+        </p:txBody>
+      </p:sp>
+      <p:sp>
+        <p:nvSpPr>
+          <p:cNvPr id="9" name="TextBox 8"/>
+          <p:cNvSpPr txBox="1"/>
+          <p:nvPr/>
+        </p:nvSpPr>
+        <p:spPr>
+          <a:xfrm>
+            <a:off x="457200" y="1965960"/>
+            <a:ext cx="11430000" cy="411480"/>
+          </a:xfrm>
+          <a:prstGeom prst="rect">
+            <a:avLst/>
+          </a:prstGeom>
+          <a:noFill/>
+        </p:spPr>
+        <p:txBody>
+          <a:bodyPr wrap="square" anchor="t" lIns="0" rIns="0" tIns="0" bIns="0">
+            <a:spAutoFit/>
+          </a:bodyPr>
+          <a:lstStyle/>
+          <a:p>
+            <a:pPr algn="l"/>
+            <a:r>
+              <a:rPr sz="1200" b="0">
+                <a:solidFill>
+                  <a:srgbClr val="64748B"/>
+                </a:solidFill>
+                <a:latin typeface="Open Sans"/>
+              </a:rPr>
+              <a:t>Verified-identity matching, member consent, official state filing channels — and a clear list of things we will not do.</a:t>
+            </a:r>
+          </a:p>
+        </p:txBody>
+      </p:sp>
+      <p:sp>
+        <p:nvSpPr>
+          <p:cNvPr id="10" name="Rounded Rectangle 9"/>
           <p:cNvSpPr/>
           <p:nvPr/>
         </p:nvSpPr>
         <p:spPr>
           <a:xfrm>
-            <a:off x="457200" y="2011680"/>
-            <a:ext cx="11247120" cy="603503"/>
+            <a:off x="457200" y="2606040"/>
+            <a:ext cx="5486400" cy="3703320"/>
           </a:xfrm>
           <a:prstGeom prst="roundRect">
             <a:avLst>
@@ -12023,20 +12094,20 @@
       </p:sp>
       <p:sp>
         <p:nvSpPr>
-          <p:cNvPr id="10" name="Rectangle 9"/>
+          <p:cNvPr id="11" name="Rectangle 10"/>
           <p:cNvSpPr/>
           <p:nvPr/>
         </p:nvSpPr>
         <p:spPr>
           <a:xfrm>
-            <a:off x="457200" y="2011680"/>
-            <a:ext cx="164592" cy="603503"/>
+            <a:off x="457200" y="2606040"/>
+            <a:ext cx="5486400" cy="164592"/>
           </a:xfrm>
           <a:prstGeom prst="rect">
             <a:avLst/>
           </a:prstGeom>
           <a:solidFill>
-            <a:srgbClr val="2863C5"/>
+            <a:srgbClr val="059669"/>
           </a:solidFill>
           <a:ln>
             <a:noFill/>
@@ -12067,49 +12138,14 @@
       </p:sp>
       <p:sp>
         <p:nvSpPr>
-          <p:cNvPr id="11" name="TextBox 10"/>
-          <p:cNvSpPr txBox="1"/>
-          <p:nvPr/>
-        </p:nvSpPr>
-        <p:spPr>
-          <a:xfrm>
-            <a:off x="777240" y="2176272"/>
-            <a:ext cx="594360" cy="365760"/>
-          </a:xfrm>
-          <a:prstGeom prst="rect">
-            <a:avLst/>
-          </a:prstGeom>
-          <a:noFill/>
-        </p:spPr>
-        <p:txBody>
-          <a:bodyPr wrap="square" anchor="t" lIns="0" rIns="0" tIns="0" bIns="0">
-            <a:spAutoFit/>
-          </a:bodyPr>
-          <a:lstStyle/>
-          <a:p>
-            <a:pPr algn="l"/>
-            <a:r>
-              <a:rPr sz="1800" b="1">
-                <a:solidFill>
-                  <a:srgbClr val="2863C5"/>
-                </a:solidFill>
-                <a:latin typeface="Open Sans"/>
-              </a:rPr>
-              <a:t>01</a:t>
-            </a:r>
-          </a:p>
-        </p:txBody>
-      </p:sp>
-      <p:sp>
-        <p:nvSpPr>
           <p:cNvPr id="12" name="TextBox 11"/>
           <p:cNvSpPr txBox="1"/>
           <p:nvPr/>
         </p:nvSpPr>
         <p:spPr>
           <a:xfrm>
-            <a:off x="1508760" y="2066544"/>
-            <a:ext cx="7863840" cy="274320"/>
+            <a:off x="640080" y="2898648"/>
+            <a:ext cx="5120640" cy="365760"/>
           </a:xfrm>
           <a:prstGeom prst="rect">
             <a:avLst/>
@@ -12126,11 +12162,11 @@
             <a:r>
               <a:rPr sz="1200" b="1">
                 <a:solidFill>
-                  <a:srgbClr val="0F172A"/>
-                </a:solidFill>
-                <a:latin typeface="Open Sans"/>
-              </a:rPr>
-              <a:t>Exec approval &amp; resourcing</a:t>
+                  <a:srgbClr val="059669"/>
+                </a:solidFill>
+                <a:latin typeface="Open Sans"/>
+              </a:rPr>
+              <a:t>WHAT WE WILL DO</a:t>
             </a:r>
           </a:p>
         </p:txBody>
@@ -12143,97 +12179,428 @@
         </p:nvSpPr>
         <p:spPr>
           <a:xfrm>
-            <a:off x="1508760" y="2340864"/>
-            <a:ext cx="7863840" cy="292608"/>
-          </a:xfrm>
-          <a:prstGeom prst="rect">
-            <a:avLst/>
-          </a:prstGeom>
-          <a:noFill/>
-        </p:spPr>
-        <p:txBody>
-          <a:bodyPr wrap="square" anchor="t" lIns="0" rIns="0" tIns="0" bIns="0">
-            <a:spAutoFit/>
-          </a:bodyPr>
-          <a:lstStyle/>
-          <a:p>
-            <a:pPr algn="l"/>
-            <a:r>
-              <a:rPr sz="950" b="0">
+            <a:off x="777240" y="3383280"/>
+            <a:ext cx="274320" cy="274320"/>
+          </a:xfrm>
+          <a:prstGeom prst="rect">
+            <a:avLst/>
+          </a:prstGeom>
+          <a:noFill/>
+        </p:spPr>
+        <p:txBody>
+          <a:bodyPr wrap="square" anchor="t" lIns="0" rIns="0" tIns="0" bIns="0">
+            <a:spAutoFit/>
+          </a:bodyPr>
+          <a:lstStyle/>
+          <a:p>
+            <a:pPr algn="l"/>
+            <a:r>
+              <a:rPr sz="1400" b="1">
+                <a:solidFill>
+                  <a:srgbClr val="059669"/>
+                </a:solidFill>
+                <a:latin typeface="Open Sans"/>
+              </a:rPr>
+              <a:t>✓</a:t>
+            </a:r>
+          </a:p>
+        </p:txBody>
+      </p:sp>
+      <p:sp>
+        <p:nvSpPr>
+          <p:cNvPr id="14" name="TextBox 13"/>
+          <p:cNvSpPr txBox="1"/>
+          <p:nvPr/>
+        </p:nvSpPr>
+        <p:spPr>
+          <a:xfrm>
+            <a:off x="1097280" y="3401568"/>
+            <a:ext cx="4572000" cy="457200"/>
+          </a:xfrm>
+          <a:prstGeom prst="rect">
+            <a:avLst/>
+          </a:prstGeom>
+          <a:noFill/>
+        </p:spPr>
+        <p:txBody>
+          <a:bodyPr wrap="square" anchor="t" lIns="0" rIns="0" tIns="0" bIns="0">
+            <a:spAutoFit/>
+          </a:bodyPr>
+          <a:lstStyle/>
+          <a:p>
+            <a:pPr algn="l"/>
+            <a:r>
+              <a:rPr sz="1100" b="0">
                 <a:solidFill>
                   <a:srgbClr val="334155"/>
                 </a:solidFill>
                 <a:latin typeface="Open Sans"/>
               </a:rPr>
-              <a:t>Greenlight myReclaim. Assign 1 data engineer + 1 product engineer.</a:t>
-            </a:r>
-          </a:p>
-        </p:txBody>
-      </p:sp>
-      <p:sp>
-        <p:nvSpPr>
-          <p:cNvPr id="14" name="Rounded Rectangle 13"/>
+              <a:t>Use official state files or state-approved data access only</a:t>
+            </a:r>
+          </a:p>
+        </p:txBody>
+      </p:sp>
+      <p:sp>
+        <p:nvSpPr>
+          <p:cNvPr id="15" name="TextBox 14"/>
+          <p:cNvSpPr txBox="1"/>
+          <p:nvPr/>
+        </p:nvSpPr>
+        <p:spPr>
+          <a:xfrm>
+            <a:off x="777240" y="3840480"/>
+            <a:ext cx="274320" cy="274320"/>
+          </a:xfrm>
+          <a:prstGeom prst="rect">
+            <a:avLst/>
+          </a:prstGeom>
+          <a:noFill/>
+        </p:spPr>
+        <p:txBody>
+          <a:bodyPr wrap="square" anchor="t" lIns="0" rIns="0" tIns="0" bIns="0">
+            <a:spAutoFit/>
+          </a:bodyPr>
+          <a:lstStyle/>
+          <a:p>
+            <a:pPr algn="l"/>
+            <a:r>
+              <a:rPr sz="1400" b="1">
+                <a:solidFill>
+                  <a:srgbClr val="059669"/>
+                </a:solidFill>
+                <a:latin typeface="Open Sans"/>
+              </a:rPr>
+              <a:t>✓</a:t>
+            </a:r>
+          </a:p>
+        </p:txBody>
+      </p:sp>
+      <p:sp>
+        <p:nvSpPr>
+          <p:cNvPr id="16" name="TextBox 15"/>
+          <p:cNvSpPr txBox="1"/>
+          <p:nvPr/>
+        </p:nvSpPr>
+        <p:spPr>
+          <a:xfrm>
+            <a:off x="1097280" y="3858768"/>
+            <a:ext cx="4572000" cy="457200"/>
+          </a:xfrm>
+          <a:prstGeom prst="rect">
+            <a:avLst/>
+          </a:prstGeom>
+          <a:noFill/>
+        </p:spPr>
+        <p:txBody>
+          <a:bodyPr wrap="square" anchor="t" lIns="0" rIns="0" tIns="0" bIns="0">
+            <a:spAutoFit/>
+          </a:bodyPr>
+          <a:lstStyle/>
+          <a:p>
+            <a:pPr algn="l"/>
+            <a:r>
+              <a:rPr sz="1100" b="0">
+                <a:solidFill>
+                  <a:srgbClr val="334155"/>
+                </a:solidFill>
+                <a:latin typeface="Open Sans"/>
+              </a:rPr>
+              <a:t>Get explicit member consent before matching and claim prep</a:t>
+            </a:r>
+          </a:p>
+        </p:txBody>
+      </p:sp>
+      <p:sp>
+        <p:nvSpPr>
+          <p:cNvPr id="17" name="TextBox 16"/>
+          <p:cNvSpPr txBox="1"/>
+          <p:nvPr/>
+        </p:nvSpPr>
+        <p:spPr>
+          <a:xfrm>
+            <a:off x="777240" y="4297680"/>
+            <a:ext cx="274320" cy="274320"/>
+          </a:xfrm>
+          <a:prstGeom prst="rect">
+            <a:avLst/>
+          </a:prstGeom>
+          <a:noFill/>
+        </p:spPr>
+        <p:txBody>
+          <a:bodyPr wrap="square" anchor="t" lIns="0" rIns="0" tIns="0" bIns="0">
+            <a:spAutoFit/>
+          </a:bodyPr>
+          <a:lstStyle/>
+          <a:p>
+            <a:pPr algn="l"/>
+            <a:r>
+              <a:rPr sz="1400" b="1">
+                <a:solidFill>
+                  <a:srgbClr val="059669"/>
+                </a:solidFill>
+                <a:latin typeface="Open Sans"/>
+              </a:rPr>
+              <a:t>✓</a:t>
+            </a:r>
+          </a:p>
+        </p:txBody>
+      </p:sp>
+      <p:sp>
+        <p:nvSpPr>
+          <p:cNvPr id="18" name="TextBox 17"/>
+          <p:cNvSpPr txBox="1"/>
+          <p:nvPr/>
+        </p:nvSpPr>
+        <p:spPr>
+          <a:xfrm>
+            <a:off x="1097280" y="4315968"/>
+            <a:ext cx="4572000" cy="457200"/>
+          </a:xfrm>
+          <a:prstGeom prst="rect">
+            <a:avLst/>
+          </a:prstGeom>
+          <a:noFill/>
+        </p:spPr>
+        <p:txBody>
+          <a:bodyPr wrap="square" anchor="t" lIns="0" rIns="0" tIns="0" bIns="0">
+            <a:spAutoFit/>
+          </a:bodyPr>
+          <a:lstStyle/>
+          <a:p>
+            <a:pPr algn="l"/>
+            <a:r>
+              <a:rPr sz="1100" b="0">
+                <a:solidFill>
+                  <a:srgbClr val="334155"/>
+                </a:solidFill>
+                <a:latin typeface="Open Sans"/>
+              </a:rPr>
+              <a:t>Route members to official state claim portals for v1</a:t>
+            </a:r>
+          </a:p>
+        </p:txBody>
+      </p:sp>
+      <p:sp>
+        <p:nvSpPr>
+          <p:cNvPr id="19" name="TextBox 18"/>
+          <p:cNvSpPr txBox="1"/>
+          <p:nvPr/>
+        </p:nvSpPr>
+        <p:spPr>
+          <a:xfrm>
+            <a:off x="777240" y="4754880"/>
+            <a:ext cx="274320" cy="274320"/>
+          </a:xfrm>
+          <a:prstGeom prst="rect">
+            <a:avLst/>
+          </a:prstGeom>
+          <a:noFill/>
+        </p:spPr>
+        <p:txBody>
+          <a:bodyPr wrap="square" anchor="t" lIns="0" rIns="0" tIns="0" bIns="0">
+            <a:spAutoFit/>
+          </a:bodyPr>
+          <a:lstStyle/>
+          <a:p>
+            <a:pPr algn="l"/>
+            <a:r>
+              <a:rPr sz="1400" b="1">
+                <a:solidFill>
+                  <a:srgbClr val="059669"/>
+                </a:solidFill>
+                <a:latin typeface="Open Sans"/>
+              </a:rPr>
+              <a:t>✓</a:t>
+            </a:r>
+          </a:p>
+        </p:txBody>
+      </p:sp>
+      <p:sp>
+        <p:nvSpPr>
+          <p:cNvPr id="20" name="TextBox 19"/>
+          <p:cNvSpPr txBox="1"/>
+          <p:nvPr/>
+        </p:nvSpPr>
+        <p:spPr>
+          <a:xfrm>
+            <a:off x="1097280" y="4773168"/>
+            <a:ext cx="4572000" cy="457200"/>
+          </a:xfrm>
+          <a:prstGeom prst="rect">
+            <a:avLst/>
+          </a:prstGeom>
+          <a:noFill/>
+        </p:spPr>
+        <p:txBody>
+          <a:bodyPr wrap="square" anchor="t" lIns="0" rIns="0" tIns="0" bIns="0">
+            <a:spAutoFit/>
+          </a:bodyPr>
+          <a:lstStyle/>
+          <a:p>
+            <a:pPr algn="l"/>
+            <a:r>
+              <a:rPr sz="1100" b="0">
+                <a:solidFill>
+                  <a:srgbClr val="334155"/>
+                </a:solidFill>
+                <a:latin typeface="Open Sans"/>
+              </a:rPr>
+              <a:t>Track claim ID + status inside SmartCredit (manual entry)</a:t>
+            </a:r>
+          </a:p>
+        </p:txBody>
+      </p:sp>
+      <p:sp>
+        <p:nvSpPr>
+          <p:cNvPr id="21" name="TextBox 20"/>
+          <p:cNvSpPr txBox="1"/>
+          <p:nvPr/>
+        </p:nvSpPr>
+        <p:spPr>
+          <a:xfrm>
+            <a:off x="777240" y="5212080"/>
+            <a:ext cx="274320" cy="274320"/>
+          </a:xfrm>
+          <a:prstGeom prst="rect">
+            <a:avLst/>
+          </a:prstGeom>
+          <a:noFill/>
+        </p:spPr>
+        <p:txBody>
+          <a:bodyPr wrap="square" anchor="t" lIns="0" rIns="0" tIns="0" bIns="0">
+            <a:spAutoFit/>
+          </a:bodyPr>
+          <a:lstStyle/>
+          <a:p>
+            <a:pPr algn="l"/>
+            <a:r>
+              <a:rPr sz="1400" b="1">
+                <a:solidFill>
+                  <a:srgbClr val="059669"/>
+                </a:solidFill>
+                <a:latin typeface="Open Sans"/>
+              </a:rPr>
+              <a:t>✓</a:t>
+            </a:r>
+          </a:p>
+        </p:txBody>
+      </p:sp>
+      <p:sp>
+        <p:nvSpPr>
+          <p:cNvPr id="22" name="TextBox 21"/>
+          <p:cNvSpPr txBox="1"/>
+          <p:nvPr/>
+        </p:nvSpPr>
+        <p:spPr>
+          <a:xfrm>
+            <a:off x="1097280" y="5230368"/>
+            <a:ext cx="4572000" cy="457200"/>
+          </a:xfrm>
+          <a:prstGeom prst="rect">
+            <a:avLst/>
+          </a:prstGeom>
+          <a:noFill/>
+        </p:spPr>
+        <p:txBody>
+          <a:bodyPr wrap="square" anchor="t" lIns="0" rIns="0" tIns="0" bIns="0">
+            <a:spAutoFit/>
+          </a:bodyPr>
+          <a:lstStyle/>
+          <a:p>
+            <a:pPr algn="l"/>
+            <a:r>
+              <a:rPr sz="1100" b="0">
+                <a:solidFill>
+                  <a:srgbClr val="334155"/>
+                </a:solidFill>
+                <a:latin typeface="Open Sans"/>
+              </a:rPr>
+              <a:t>File on members' behalf only where registered or approved</a:t>
+            </a:r>
+          </a:p>
+        </p:txBody>
+      </p:sp>
+      <p:sp>
+        <p:nvSpPr>
+          <p:cNvPr id="23" name="TextBox 22"/>
+          <p:cNvSpPr txBox="1"/>
+          <p:nvPr/>
+        </p:nvSpPr>
+        <p:spPr>
+          <a:xfrm>
+            <a:off x="777240" y="5669280"/>
+            <a:ext cx="274320" cy="274320"/>
+          </a:xfrm>
+          <a:prstGeom prst="rect">
+            <a:avLst/>
+          </a:prstGeom>
+          <a:noFill/>
+        </p:spPr>
+        <p:txBody>
+          <a:bodyPr wrap="square" anchor="t" lIns="0" rIns="0" tIns="0" bIns="0">
+            <a:spAutoFit/>
+          </a:bodyPr>
+          <a:lstStyle/>
+          <a:p>
+            <a:pPr algn="l"/>
+            <a:r>
+              <a:rPr sz="1400" b="1">
+                <a:solidFill>
+                  <a:srgbClr val="059669"/>
+                </a:solidFill>
+                <a:latin typeface="Open Sans"/>
+              </a:rPr>
+              <a:t>✓</a:t>
+            </a:r>
+          </a:p>
+        </p:txBody>
+      </p:sp>
+      <p:sp>
+        <p:nvSpPr>
+          <p:cNvPr id="24" name="TextBox 23"/>
+          <p:cNvSpPr txBox="1"/>
+          <p:nvPr/>
+        </p:nvSpPr>
+        <p:spPr>
+          <a:xfrm>
+            <a:off x="1097280" y="5687568"/>
+            <a:ext cx="4572000" cy="457200"/>
+          </a:xfrm>
+          <a:prstGeom prst="rect">
+            <a:avLst/>
+          </a:prstGeom>
+          <a:noFill/>
+        </p:spPr>
+        <p:txBody>
+          <a:bodyPr wrap="square" anchor="t" lIns="0" rIns="0" tIns="0" bIns="0">
+            <a:spAutoFit/>
+          </a:bodyPr>
+          <a:lstStyle/>
+          <a:p>
+            <a:pPr algn="l"/>
+            <a:r>
+              <a:rPr sz="1100" b="0">
+                <a:solidFill>
+                  <a:srgbClr val="334155"/>
+                </a:solidFill>
+                <a:latin typeface="Open Sans"/>
+              </a:rPr>
+              <a:t>Source-by-source data-use permissions; legal review per state</a:t>
+            </a:r>
+          </a:p>
+        </p:txBody>
+      </p:sp>
+      <p:sp>
+        <p:nvSpPr>
+          <p:cNvPr id="25" name="Rounded Rectangle 24"/>
           <p:cNvSpPr/>
           <p:nvPr/>
         </p:nvSpPr>
         <p:spPr>
           <a:xfrm>
-            <a:off x="9555480" y="2212848"/>
-            <a:ext cx="1600200" cy="274320"/>
-          </a:xfrm>
-          <a:prstGeom prst="roundRect">
-            <a:avLst>
-              <a:gd name="adj" fmla="val 50000"/>
-            </a:avLst>
-          </a:prstGeom>
-          <a:solidFill>
-            <a:srgbClr val="2863C5"/>
-          </a:solidFill>
-          <a:ln>
-            <a:noFill/>
-          </a:ln>
-        </p:spPr>
-        <p:style>
-          <a:lnRef idx="1">
-            <a:schemeClr val="accent1"/>
-          </a:lnRef>
-          <a:fillRef idx="3">
-            <a:schemeClr val="accent1"/>
-          </a:fillRef>
-          <a:effectRef idx="2">
-            <a:schemeClr val="accent1"/>
-          </a:effectRef>
-          <a:fontRef idx="minor">
-            <a:schemeClr val="lt1"/>
-          </a:fontRef>
-        </p:style>
-        <p:txBody>
-          <a:bodyPr rtlCol="0" anchor="ctr" lIns="45720" rIns="45720" tIns="18288" bIns="18288"/>
-          <a:lstStyle/>
-          <a:p>
-            <a:pPr algn="ctr"/>
-            <a:r>
-              <a:rPr sz="900" b="1">
-                <a:solidFill>
-                  <a:srgbClr val="FFFFFF"/>
-                </a:solidFill>
-                <a:latin typeface="Open Sans"/>
-              </a:rPr>
-              <a:t>Now</a:t>
-            </a:r>
-          </a:p>
-        </p:txBody>
-      </p:sp>
-      <p:sp>
-        <p:nvSpPr>
-          <p:cNvPr id="15" name="Rounded Rectangle 14"/>
-          <p:cNvSpPr/>
-          <p:nvPr/>
-        </p:nvSpPr>
-        <p:spPr>
-          <a:xfrm>
-            <a:off x="457200" y="2670048"/>
-            <a:ext cx="11247120" cy="603503"/>
+            <a:off x="6217920" y="2606040"/>
+            <a:ext cx="5486400" cy="3703320"/>
           </a:xfrm>
           <a:prstGeom prst="roundRect">
             <a:avLst>
@@ -12274,14 +12641,656 @@
       </p:sp>
       <p:sp>
         <p:nvSpPr>
-          <p:cNvPr id="16" name="Rectangle 15"/>
+          <p:cNvPr id="26" name="Rectangle 25"/>
           <p:cNvSpPr/>
           <p:nvPr/>
         </p:nvSpPr>
         <p:spPr>
           <a:xfrm>
-            <a:off x="457200" y="2670048"/>
-            <a:ext cx="164592" cy="603503"/>
+            <a:off x="6217920" y="2606040"/>
+            <a:ext cx="5486400" cy="164592"/>
+          </a:xfrm>
+          <a:prstGeom prst="rect">
+            <a:avLst/>
+          </a:prstGeom>
+          <a:solidFill>
+            <a:srgbClr val="E11D48"/>
+          </a:solidFill>
+          <a:ln>
+            <a:noFill/>
+          </a:ln>
+          <a:effectLst/>
+        </p:spPr>
+        <p:style>
+          <a:lnRef idx="1">
+            <a:schemeClr val="accent1"/>
+          </a:lnRef>
+          <a:fillRef idx="3">
+            <a:schemeClr val="accent1"/>
+          </a:fillRef>
+          <a:effectRef idx="2">
+            <a:schemeClr val="accent1"/>
+          </a:effectRef>
+          <a:fontRef idx="minor">
+            <a:schemeClr val="lt1"/>
+          </a:fontRef>
+        </p:style>
+        <p:txBody>
+          <a:bodyPr rtlCol="0" anchor="ctr"/>
+          <a:lstStyle/>
+          <a:p>
+            <a:pPr algn="ctr"/>
+          </a:p>
+        </p:txBody>
+      </p:sp>
+      <p:sp>
+        <p:nvSpPr>
+          <p:cNvPr id="27" name="TextBox 26"/>
+          <p:cNvSpPr txBox="1"/>
+          <p:nvPr/>
+        </p:nvSpPr>
+        <p:spPr>
+          <a:xfrm>
+            <a:off x="6400800" y="2898648"/>
+            <a:ext cx="5120640" cy="365760"/>
+          </a:xfrm>
+          <a:prstGeom prst="rect">
+            <a:avLst/>
+          </a:prstGeom>
+          <a:noFill/>
+        </p:spPr>
+        <p:txBody>
+          <a:bodyPr wrap="square" anchor="t" lIns="0" rIns="0" tIns="0" bIns="0">
+            <a:spAutoFit/>
+          </a:bodyPr>
+          <a:lstStyle/>
+          <a:p>
+            <a:pPr algn="l"/>
+            <a:r>
+              <a:rPr sz="1200" b="1">
+                <a:solidFill>
+                  <a:srgbClr val="E11D48"/>
+                </a:solidFill>
+                <a:latin typeface="Open Sans"/>
+              </a:rPr>
+              <a:t>WHAT WE WILL NOT DO</a:t>
+            </a:r>
+          </a:p>
+        </p:txBody>
+      </p:sp>
+      <p:sp>
+        <p:nvSpPr>
+          <p:cNvPr id="28" name="TextBox 27"/>
+          <p:cNvSpPr txBox="1"/>
+          <p:nvPr/>
+        </p:nvSpPr>
+        <p:spPr>
+          <a:xfrm>
+            <a:off x="6355080" y="3383280"/>
+            <a:ext cx="274320" cy="274320"/>
+          </a:xfrm>
+          <a:prstGeom prst="rect">
+            <a:avLst/>
+          </a:prstGeom>
+          <a:noFill/>
+        </p:spPr>
+        <p:txBody>
+          <a:bodyPr wrap="square" anchor="t" lIns="0" rIns="0" tIns="0" bIns="0">
+            <a:spAutoFit/>
+          </a:bodyPr>
+          <a:lstStyle/>
+          <a:p>
+            <a:pPr algn="l"/>
+            <a:r>
+              <a:rPr sz="1400" b="1">
+                <a:solidFill>
+                  <a:srgbClr val="E11D48"/>
+                </a:solidFill>
+                <a:latin typeface="Open Sans"/>
+              </a:rPr>
+              <a:t>✗</a:t>
+            </a:r>
+          </a:p>
+        </p:txBody>
+      </p:sp>
+      <p:sp>
+        <p:nvSpPr>
+          <p:cNvPr id="29" name="TextBox 28"/>
+          <p:cNvSpPr txBox="1"/>
+          <p:nvPr/>
+        </p:nvSpPr>
+        <p:spPr>
+          <a:xfrm>
+            <a:off x="6675120" y="3401568"/>
+            <a:ext cx="4846320" cy="457200"/>
+          </a:xfrm>
+          <a:prstGeom prst="rect">
+            <a:avLst/>
+          </a:prstGeom>
+          <a:noFill/>
+        </p:spPr>
+        <p:txBody>
+          <a:bodyPr wrap="square" anchor="t" lIns="0" rIns="0" tIns="0" bIns="0">
+            <a:spAutoFit/>
+          </a:bodyPr>
+          <a:lstStyle/>
+          <a:p>
+            <a:pPr algn="l"/>
+            <a:r>
+              <a:rPr sz="1100" b="0">
+                <a:solidFill>
+                  <a:srgbClr val="334155"/>
+                </a:solidFill>
+                <a:latin typeface="Open Sans"/>
+              </a:rPr>
+              <a:t>Scrape state portals or MissingMoney.com</a:t>
+            </a:r>
+          </a:p>
+        </p:txBody>
+      </p:sp>
+      <p:sp>
+        <p:nvSpPr>
+          <p:cNvPr id="30" name="TextBox 29"/>
+          <p:cNvSpPr txBox="1"/>
+          <p:nvPr/>
+        </p:nvSpPr>
+        <p:spPr>
+          <a:xfrm>
+            <a:off x="6355080" y="3840480"/>
+            <a:ext cx="274320" cy="274320"/>
+          </a:xfrm>
+          <a:prstGeom prst="rect">
+            <a:avLst/>
+          </a:prstGeom>
+          <a:noFill/>
+        </p:spPr>
+        <p:txBody>
+          <a:bodyPr wrap="square" anchor="t" lIns="0" rIns="0" tIns="0" bIns="0">
+            <a:spAutoFit/>
+          </a:bodyPr>
+          <a:lstStyle/>
+          <a:p>
+            <a:pPr algn="l"/>
+            <a:r>
+              <a:rPr sz="1400" b="1">
+                <a:solidFill>
+                  <a:srgbClr val="E11D48"/>
+                </a:solidFill>
+                <a:latin typeface="Open Sans"/>
+              </a:rPr>
+              <a:t>✗</a:t>
+            </a:r>
+          </a:p>
+        </p:txBody>
+      </p:sp>
+      <p:sp>
+        <p:nvSpPr>
+          <p:cNvPr id="31" name="TextBox 30"/>
+          <p:cNvSpPr txBox="1"/>
+          <p:nvPr/>
+        </p:nvSpPr>
+        <p:spPr>
+          <a:xfrm>
+            <a:off x="6675120" y="3858768"/>
+            <a:ext cx="4846320" cy="457200"/>
+          </a:xfrm>
+          <a:prstGeom prst="rect">
+            <a:avLst/>
+          </a:prstGeom>
+          <a:noFill/>
+        </p:spPr>
+        <p:txBody>
+          <a:bodyPr wrap="square" anchor="t" lIns="0" rIns="0" tIns="0" bIns="0">
+            <a:spAutoFit/>
+          </a:bodyPr>
+          <a:lstStyle/>
+          <a:p>
+            <a:pPr algn="l"/>
+            <a:r>
+              <a:rPr sz="1100" b="0">
+                <a:solidFill>
+                  <a:srgbClr val="334155"/>
+                </a:solidFill>
+                <a:latin typeface="Open Sans"/>
+              </a:rPr>
+              <a:t>Guarantee a claim belongs to the member</a:t>
+            </a:r>
+          </a:p>
+        </p:txBody>
+      </p:sp>
+      <p:sp>
+        <p:nvSpPr>
+          <p:cNvPr id="32" name="TextBox 31"/>
+          <p:cNvSpPr txBox="1"/>
+          <p:nvPr/>
+        </p:nvSpPr>
+        <p:spPr>
+          <a:xfrm>
+            <a:off x="6355080" y="4297680"/>
+            <a:ext cx="274320" cy="274320"/>
+          </a:xfrm>
+          <a:prstGeom prst="rect">
+            <a:avLst/>
+          </a:prstGeom>
+          <a:noFill/>
+        </p:spPr>
+        <p:txBody>
+          <a:bodyPr wrap="square" anchor="t" lIns="0" rIns="0" tIns="0" bIns="0">
+            <a:spAutoFit/>
+          </a:bodyPr>
+          <a:lstStyle/>
+          <a:p>
+            <a:pPr algn="l"/>
+            <a:r>
+              <a:rPr sz="1400" b="1">
+                <a:solidFill>
+                  <a:srgbClr val="E11D48"/>
+                </a:solidFill>
+                <a:latin typeface="Open Sans"/>
+              </a:rPr>
+              <a:t>✗</a:t>
+            </a:r>
+          </a:p>
+        </p:txBody>
+      </p:sp>
+      <p:sp>
+        <p:nvSpPr>
+          <p:cNvPr id="33" name="TextBox 32"/>
+          <p:cNvSpPr txBox="1"/>
+          <p:nvPr/>
+        </p:nvSpPr>
+        <p:spPr>
+          <a:xfrm>
+            <a:off x="6675120" y="4315968"/>
+            <a:ext cx="4846320" cy="457200"/>
+          </a:xfrm>
+          <a:prstGeom prst="rect">
+            <a:avLst/>
+          </a:prstGeom>
+          <a:noFill/>
+        </p:spPr>
+        <p:txBody>
+          <a:bodyPr wrap="square" anchor="t" lIns="0" rIns="0" tIns="0" bIns="0">
+            <a:spAutoFit/>
+          </a:bodyPr>
+          <a:lstStyle/>
+          <a:p>
+            <a:pPr algn="l"/>
+            <a:r>
+              <a:rPr sz="1100" b="0">
+                <a:solidFill>
+                  <a:srgbClr val="334155"/>
+                </a:solidFill>
+                <a:latin typeface="Open Sans"/>
+              </a:rPr>
+              <a:t>Charge a success fee or take a cut</a:t>
+            </a:r>
+          </a:p>
+        </p:txBody>
+      </p:sp>
+      <p:sp>
+        <p:nvSpPr>
+          <p:cNvPr id="34" name="TextBox 33"/>
+          <p:cNvSpPr txBox="1"/>
+          <p:nvPr/>
+        </p:nvSpPr>
+        <p:spPr>
+          <a:xfrm>
+            <a:off x="6355080" y="4754880"/>
+            <a:ext cx="274320" cy="274320"/>
+          </a:xfrm>
+          <a:prstGeom prst="rect">
+            <a:avLst/>
+          </a:prstGeom>
+          <a:noFill/>
+        </p:spPr>
+        <p:txBody>
+          <a:bodyPr wrap="square" anchor="t" lIns="0" rIns="0" tIns="0" bIns="0">
+            <a:spAutoFit/>
+          </a:bodyPr>
+          <a:lstStyle/>
+          <a:p>
+            <a:pPr algn="l"/>
+            <a:r>
+              <a:rPr sz="1400" b="1">
+                <a:solidFill>
+                  <a:srgbClr val="E11D48"/>
+                </a:solidFill>
+                <a:latin typeface="Open Sans"/>
+              </a:rPr>
+              <a:t>✗</a:t>
+            </a:r>
+          </a:p>
+        </p:txBody>
+      </p:sp>
+      <p:sp>
+        <p:nvSpPr>
+          <p:cNvPr id="35" name="TextBox 34"/>
+          <p:cNvSpPr txBox="1"/>
+          <p:nvPr/>
+        </p:nvSpPr>
+        <p:spPr>
+          <a:xfrm>
+            <a:off x="6675120" y="4773168"/>
+            <a:ext cx="4846320" cy="457200"/>
+          </a:xfrm>
+          <a:prstGeom prst="rect">
+            <a:avLst/>
+          </a:prstGeom>
+          <a:noFill/>
+        </p:spPr>
+        <p:txBody>
+          <a:bodyPr wrap="square" anchor="t" lIns="0" rIns="0" tIns="0" bIns="0">
+            <a:spAutoFit/>
+          </a:bodyPr>
+          <a:lstStyle/>
+          <a:p>
+            <a:pPr algn="l"/>
+            <a:r>
+              <a:rPr sz="1100" b="0">
+                <a:solidFill>
+                  <a:srgbClr val="334155"/>
+                </a:solidFill>
+                <a:latin typeface="Open Sans"/>
+              </a:rPr>
+              <a:t>Submit claims without fresh user authorization</a:t>
+            </a:r>
+          </a:p>
+        </p:txBody>
+      </p:sp>
+      <p:sp>
+        <p:nvSpPr>
+          <p:cNvPr id="36" name="TextBox 35"/>
+          <p:cNvSpPr txBox="1"/>
+          <p:nvPr/>
+        </p:nvSpPr>
+        <p:spPr>
+          <a:xfrm>
+            <a:off x="6355080" y="5212080"/>
+            <a:ext cx="274320" cy="274320"/>
+          </a:xfrm>
+          <a:prstGeom prst="rect">
+            <a:avLst/>
+          </a:prstGeom>
+          <a:noFill/>
+        </p:spPr>
+        <p:txBody>
+          <a:bodyPr wrap="square" anchor="t" lIns="0" rIns="0" tIns="0" bIns="0">
+            <a:spAutoFit/>
+          </a:bodyPr>
+          <a:lstStyle/>
+          <a:p>
+            <a:pPr algn="l"/>
+            <a:r>
+              <a:rPr sz="1400" b="1">
+                <a:solidFill>
+                  <a:srgbClr val="E11D48"/>
+                </a:solidFill>
+                <a:latin typeface="Open Sans"/>
+              </a:rPr>
+              <a:t>✗</a:t>
+            </a:r>
+          </a:p>
+        </p:txBody>
+      </p:sp>
+      <p:sp>
+        <p:nvSpPr>
+          <p:cNvPr id="37" name="TextBox 36"/>
+          <p:cNvSpPr txBox="1"/>
+          <p:nvPr/>
+        </p:nvSpPr>
+        <p:spPr>
+          <a:xfrm>
+            <a:off x="6675120" y="5230368"/>
+            <a:ext cx="4846320" cy="457200"/>
+          </a:xfrm>
+          <a:prstGeom prst="rect">
+            <a:avLst/>
+          </a:prstGeom>
+          <a:noFill/>
+        </p:spPr>
+        <p:txBody>
+          <a:bodyPr wrap="square" anchor="t" lIns="0" rIns="0" tIns="0" bIns="0">
+            <a:spAutoFit/>
+          </a:bodyPr>
+          <a:lstStyle/>
+          <a:p>
+            <a:pPr algn="l"/>
+            <a:r>
+              <a:rPr sz="1100" b="0">
+                <a:solidFill>
+                  <a:srgbClr val="334155"/>
+                </a:solidFill>
+                <a:latin typeface="Open Sans"/>
+              </a:rPr>
+              <a:t>Re-use credit-report-derived data without legal sign-off</a:t>
+            </a:r>
+          </a:p>
+        </p:txBody>
+      </p:sp>
+      <p:sp>
+        <p:nvSpPr>
+          <p:cNvPr id="38" name="TextBox 37"/>
+          <p:cNvSpPr txBox="1"/>
+          <p:nvPr/>
+        </p:nvSpPr>
+        <p:spPr>
+          <a:xfrm>
+            <a:off x="6355080" y="5669280"/>
+            <a:ext cx="274320" cy="274320"/>
+          </a:xfrm>
+          <a:prstGeom prst="rect">
+            <a:avLst/>
+          </a:prstGeom>
+          <a:noFill/>
+        </p:spPr>
+        <p:txBody>
+          <a:bodyPr wrap="square" anchor="t" lIns="0" rIns="0" tIns="0" bIns="0">
+            <a:spAutoFit/>
+          </a:bodyPr>
+          <a:lstStyle/>
+          <a:p>
+            <a:pPr algn="l"/>
+            <a:r>
+              <a:rPr sz="1400" b="1">
+                <a:solidFill>
+                  <a:srgbClr val="E11D48"/>
+                </a:solidFill>
+                <a:latin typeface="Open Sans"/>
+              </a:rPr>
+              <a:t>✗</a:t>
+            </a:r>
+          </a:p>
+        </p:txBody>
+      </p:sp>
+      <p:sp>
+        <p:nvSpPr>
+          <p:cNvPr id="39" name="TextBox 38"/>
+          <p:cNvSpPr txBox="1"/>
+          <p:nvPr/>
+        </p:nvSpPr>
+        <p:spPr>
+          <a:xfrm>
+            <a:off x="6675120" y="5687568"/>
+            <a:ext cx="4846320" cy="457200"/>
+          </a:xfrm>
+          <a:prstGeom prst="rect">
+            <a:avLst/>
+          </a:prstGeom>
+          <a:noFill/>
+        </p:spPr>
+        <p:txBody>
+          <a:bodyPr wrap="square" anchor="t" lIns="0" rIns="0" tIns="0" bIns="0">
+            <a:spAutoFit/>
+          </a:bodyPr>
+          <a:lstStyle/>
+          <a:p>
+            <a:pPr algn="l"/>
+            <a:r>
+              <a:rPr sz="1100" b="0">
+                <a:solidFill>
+                  <a:srgbClr val="334155"/>
+                </a:solidFill>
+                <a:latin typeface="Open Sans"/>
+              </a:rPr>
+              <a:t>Store sensitive claim documents unless required and approved</a:t>
+            </a:r>
+          </a:p>
+        </p:txBody>
+      </p:sp>
+      <p:sp>
+        <p:nvSpPr>
+          <p:cNvPr id="40" name="Rounded Rectangle 39"/>
+          <p:cNvSpPr/>
+          <p:nvPr/>
+        </p:nvSpPr>
+        <p:spPr>
+          <a:xfrm>
+            <a:off x="457200" y="6446520"/>
+            <a:ext cx="11247120" cy="365760"/>
+          </a:xfrm>
+          <a:prstGeom prst="roundRect">
+            <a:avLst>
+              <a:gd name="adj" fmla="val 7000"/>
+            </a:avLst>
+          </a:prstGeom>
+          <a:solidFill>
+            <a:srgbClr val="0F172A"/>
+          </a:solidFill>
+          <a:ln>
+            <a:noFill/>
+          </a:ln>
+          <a:effectLst/>
+        </p:spPr>
+        <p:style>
+          <a:lnRef idx="1">
+            <a:schemeClr val="accent1"/>
+          </a:lnRef>
+          <a:fillRef idx="3">
+            <a:schemeClr val="accent1"/>
+          </a:fillRef>
+          <a:effectRef idx="2">
+            <a:schemeClr val="accent1"/>
+          </a:effectRef>
+          <a:fontRef idx="minor">
+            <a:schemeClr val="lt1"/>
+          </a:fontRef>
+        </p:style>
+        <p:txBody>
+          <a:bodyPr rtlCol="0" anchor="ctr"/>
+          <a:lstStyle/>
+          <a:p>
+            <a:pPr algn="ctr"/>
+          </a:p>
+        </p:txBody>
+      </p:sp>
+      <p:sp>
+        <p:nvSpPr>
+          <p:cNvPr id="41" name="TextBox 40"/>
+          <p:cNvSpPr txBox="1"/>
+          <p:nvPr/>
+        </p:nvSpPr>
+        <p:spPr>
+          <a:xfrm>
+            <a:off x="640080" y="6492240"/>
+            <a:ext cx="10972800" cy="292608"/>
+          </a:xfrm>
+          <a:prstGeom prst="rect">
+            <a:avLst/>
+          </a:prstGeom>
+          <a:noFill/>
+        </p:spPr>
+        <p:txBody>
+          <a:bodyPr wrap="square" anchor="t" lIns="0" rIns="0" tIns="0" bIns="0">
+            <a:spAutoFit/>
+          </a:bodyPr>
+          <a:lstStyle/>
+          <a:p>
+            <a:pPr algn="l"/>
+            <a:r>
+              <a:rPr sz="1100" b="1">
+                <a:solidFill>
+                  <a:srgbClr val="FFFFFF"/>
+                </a:solidFill>
+                <a:latin typeface="Open Sans"/>
+              </a:rPr>
+              <a:t>Every state ingestion has a legal review gate. Every claim has a fresh consent. Every data source has documented terms.</a:t>
+            </a:r>
+          </a:p>
+        </p:txBody>
+      </p:sp>
+    </p:spTree>
+  </p:cSld>
+  <p:clrMapOvr>
+    <a:masterClrMapping/>
+  </p:clrMapOvr>
+</p:sld>
+</file>
+
+<file path=ppt/slides/slide8.xml><?xml version="1.0" encoding="utf-8"?>
+<p:sld xmlns:a="http://schemas.openxmlformats.org/drawingml/2006/main" xmlns:p="http://schemas.openxmlformats.org/presentationml/2006/main" xmlns:r="http://schemas.openxmlformats.org/officeDocument/2006/relationships">
+  <p:cSld>
+    <p:spTree>
+      <p:nvGrpSpPr>
+        <p:cNvPr id="1" name=""/>
+        <p:cNvGrpSpPr/>
+        <p:nvPr/>
+      </p:nvGrpSpPr>
+      <p:grpSpPr/>
+      <p:sp>
+        <p:nvSpPr>
+          <p:cNvPr id="2" name="Rectangle 1"/>
+          <p:cNvSpPr/>
+          <p:nvPr/>
+        </p:nvSpPr>
+        <p:spPr>
+          <a:xfrm>
+            <a:off x="0" y="0"/>
+            <a:ext cx="12188952" cy="6858000"/>
+          </a:xfrm>
+          <a:prstGeom prst="rect">
+            <a:avLst/>
+          </a:prstGeom>
+          <a:solidFill>
+            <a:srgbClr val="F8FAFC"/>
+          </a:solidFill>
+          <a:ln>
+            <a:noFill/>
+          </a:ln>
+          <a:effectLst/>
+        </p:spPr>
+        <p:style>
+          <a:lnRef idx="1">
+            <a:schemeClr val="accent1"/>
+          </a:lnRef>
+          <a:fillRef idx="3">
+            <a:schemeClr val="accent1"/>
+          </a:fillRef>
+          <a:effectRef idx="2">
+            <a:schemeClr val="accent1"/>
+          </a:effectRef>
+          <a:fontRef idx="minor">
+            <a:schemeClr val="lt1"/>
+          </a:fontRef>
+        </p:style>
+        <p:txBody>
+          <a:bodyPr rtlCol="0" anchor="ctr"/>
+          <a:lstStyle/>
+          <a:p>
+            <a:pPr algn="ctr"/>
+          </a:p>
+        </p:txBody>
+      </p:sp>
+      <p:sp>
+        <p:nvSpPr>
+          <p:cNvPr id="3" name="Rectangle 2"/>
+          <p:cNvSpPr/>
+          <p:nvPr/>
+        </p:nvSpPr>
+        <p:spPr>
+          <a:xfrm>
+            <a:off x="0" y="0"/>
+            <a:ext cx="12188952" cy="54864"/>
           </a:xfrm>
           <a:prstGeom prst="rect">
             <a:avLst/>
@@ -12318,172 +13327,188 @@
       </p:sp>
       <p:sp>
         <p:nvSpPr>
-          <p:cNvPr id="17" name="TextBox 16"/>
-          <p:cNvSpPr txBox="1"/>
-          <p:nvPr/>
-        </p:nvSpPr>
-        <p:spPr>
-          <a:xfrm>
-            <a:off x="777240" y="2834640"/>
-            <a:ext cx="594360" cy="365760"/>
-          </a:xfrm>
-          <a:prstGeom prst="rect">
-            <a:avLst/>
-          </a:prstGeom>
-          <a:noFill/>
-        </p:spPr>
-        <p:txBody>
-          <a:bodyPr wrap="square" anchor="t" lIns="0" rIns="0" tIns="0" bIns="0">
-            <a:spAutoFit/>
-          </a:bodyPr>
-          <a:lstStyle/>
-          <a:p>
-            <a:pPr algn="l"/>
-            <a:r>
-              <a:rPr sz="1800" b="1">
+          <p:cNvPr id="4" name="TextBox 3"/>
+          <p:cNvSpPr txBox="1"/>
+          <p:nvPr/>
+        </p:nvSpPr>
+        <p:spPr>
+          <a:xfrm>
+            <a:off x="457200" y="164592"/>
+            <a:ext cx="2286000" cy="329184"/>
+          </a:xfrm>
+          <a:prstGeom prst="rect">
+            <a:avLst/>
+          </a:prstGeom>
+          <a:noFill/>
+        </p:spPr>
+        <p:txBody>
+          <a:bodyPr wrap="square" anchor="t" lIns="0" rIns="0" tIns="0" bIns="0">
+            <a:spAutoFit/>
+          </a:bodyPr>
+          <a:lstStyle/>
+          <a:p>
+            <a:pPr algn="l"/>
+            <a:r>
+              <a:rPr sz="1600" b="1">
+                <a:solidFill>
+                  <a:srgbClr val="0F172A"/>
+                </a:solidFill>
+                <a:latin typeface="Open Sans"/>
+              </a:rPr>
+              <a:t>smartcredit</a:t>
+            </a:r>
+          </a:p>
+        </p:txBody>
+      </p:sp>
+      <p:sp>
+        <p:nvSpPr>
+          <p:cNvPr id="5" name="TextBox 4"/>
+          <p:cNvSpPr txBox="1"/>
+          <p:nvPr/>
+        </p:nvSpPr>
+        <p:spPr>
+          <a:xfrm>
+            <a:off x="11338560" y="6446520"/>
+            <a:ext cx="731520" cy="274320"/>
+          </a:xfrm>
+          <a:prstGeom prst="rect">
+            <a:avLst/>
+          </a:prstGeom>
+          <a:noFill/>
+        </p:spPr>
+        <p:txBody>
+          <a:bodyPr wrap="square" anchor="t" lIns="0" rIns="0" tIns="0" bIns="0">
+            <a:spAutoFit/>
+          </a:bodyPr>
+          <a:lstStyle/>
+          <a:p>
+            <a:pPr algn="r"/>
+            <a:r>
+              <a:rPr sz="900" b="0">
+                <a:solidFill>
+                  <a:srgbClr val="64748B"/>
+                </a:solidFill>
+                <a:latin typeface="Open Sans"/>
+              </a:rPr>
+              <a:t>8 / 8</a:t>
+            </a:r>
+          </a:p>
+        </p:txBody>
+      </p:sp>
+      <p:sp>
+        <p:nvSpPr>
+          <p:cNvPr id="6" name="TextBox 5"/>
+          <p:cNvSpPr txBox="1"/>
+          <p:nvPr/>
+        </p:nvSpPr>
+        <p:spPr>
+          <a:xfrm>
+            <a:off x="457200" y="6446520"/>
+            <a:ext cx="7315200" cy="274320"/>
+          </a:xfrm>
+          <a:prstGeom prst="rect">
+            <a:avLst/>
+          </a:prstGeom>
+          <a:noFill/>
+        </p:spPr>
+        <p:txBody>
+          <a:bodyPr wrap="square" anchor="t" lIns="0" rIns="0" tIns="0" bIns="0">
+            <a:spAutoFit/>
+          </a:bodyPr>
+          <a:lstStyle/>
+          <a:p>
+            <a:pPr algn="l"/>
+            <a:r>
+              <a:rPr sz="900" b="0">
+                <a:solidFill>
+                  <a:srgbClr val="64748B"/>
+                </a:solidFill>
+                <a:latin typeface="Open Sans"/>
+              </a:rPr>
+              <a:t>myReclaim · Confidential — Consumer Direct, Inc.</a:t>
+            </a:r>
+          </a:p>
+        </p:txBody>
+      </p:sp>
+      <p:sp>
+        <p:nvSpPr>
+          <p:cNvPr id="7" name="TextBox 6"/>
+          <p:cNvSpPr txBox="1"/>
+          <p:nvPr/>
+        </p:nvSpPr>
+        <p:spPr>
+          <a:xfrm>
+            <a:off x="457200" y="777240"/>
+            <a:ext cx="11430000" cy="365760"/>
+          </a:xfrm>
+          <a:prstGeom prst="rect">
+            <a:avLst/>
+          </a:prstGeom>
+          <a:noFill/>
+        </p:spPr>
+        <p:txBody>
+          <a:bodyPr wrap="square" anchor="t" lIns="0" rIns="0" tIns="0" bIns="0">
+            <a:spAutoFit/>
+          </a:bodyPr>
+          <a:lstStyle/>
+          <a:p>
+            <a:pPr algn="l"/>
+            <a:r>
+              <a:rPr sz="1200" b="1">
                 <a:solidFill>
                   <a:srgbClr val="2863C5"/>
                 </a:solidFill>
                 <a:latin typeface="Open Sans"/>
               </a:rPr>
-              <a:t>02</a:t>
-            </a:r>
-          </a:p>
-        </p:txBody>
-      </p:sp>
-      <p:sp>
-        <p:nvSpPr>
-          <p:cNvPr id="18" name="TextBox 17"/>
-          <p:cNvSpPr txBox="1"/>
-          <p:nvPr/>
-        </p:nvSpPr>
-        <p:spPr>
-          <a:xfrm>
-            <a:off x="1508760" y="2724912"/>
-            <a:ext cx="7863840" cy="274320"/>
-          </a:xfrm>
-          <a:prstGeom prst="rect">
-            <a:avLst/>
-          </a:prstGeom>
-          <a:noFill/>
-        </p:spPr>
-        <p:txBody>
-          <a:bodyPr wrap="square" anchor="t" lIns="0" rIns="0" tIns="0" bIns="0">
-            <a:spAutoFit/>
-          </a:bodyPr>
-          <a:lstStyle/>
-          <a:p>
-            <a:pPr algn="l"/>
-            <a:r>
-              <a:rPr sz="1200" b="1">
+              <a:t>WORKFLOW · WHAT NEEDS TO HAPPEN NEXT</a:t>
+            </a:r>
+          </a:p>
+        </p:txBody>
+      </p:sp>
+      <p:sp>
+        <p:nvSpPr>
+          <p:cNvPr id="8" name="TextBox 7"/>
+          <p:cNvSpPr txBox="1"/>
+          <p:nvPr/>
+        </p:nvSpPr>
+        <p:spPr>
+          <a:xfrm>
+            <a:off x="457200" y="1143000"/>
+            <a:ext cx="11430000" cy="822960"/>
+          </a:xfrm>
+          <a:prstGeom prst="rect">
+            <a:avLst/>
+          </a:prstGeom>
+          <a:noFill/>
+        </p:spPr>
+        <p:txBody>
+          <a:bodyPr wrap="square" anchor="t" lIns="0" rIns="0" tIns="0" bIns="0">
+            <a:spAutoFit/>
+          </a:bodyPr>
+          <a:lstStyle/>
+          <a:p>
+            <a:pPr algn="l"/>
+            <a:r>
+              <a:rPr sz="2800" b="1">
                 <a:solidFill>
                   <a:srgbClr val="0F172A"/>
                 </a:solidFill>
                 <a:latin typeface="Open Sans"/>
               </a:rPr>
-              <a:t>California ingestion live</a:t>
-            </a:r>
-          </a:p>
-        </p:txBody>
-      </p:sp>
-      <p:sp>
-        <p:nvSpPr>
-          <p:cNvPr id="19" name="TextBox 18"/>
-          <p:cNvSpPr txBox="1"/>
-          <p:nvPr/>
-        </p:nvSpPr>
-        <p:spPr>
-          <a:xfrm>
-            <a:off x="1508760" y="2999232"/>
-            <a:ext cx="7863840" cy="292608"/>
-          </a:xfrm>
-          <a:prstGeom prst="rect">
-            <a:avLst/>
-          </a:prstGeom>
-          <a:noFill/>
-        </p:spPr>
-        <p:txBody>
-          <a:bodyPr wrap="square" anchor="t" lIns="0" rIns="0" tIns="0" bIns="0">
-            <a:spAutoFit/>
-          </a:bodyPr>
-          <a:lstStyle/>
-          <a:p>
-            <a:pPr algn="l"/>
-            <a:r>
-              <a:rPr sz="950" b="0">
-                <a:solidFill>
-                  <a:srgbClr val="334155"/>
-                </a:solidFill>
-                <a:latin typeface="Open Sans"/>
-              </a:rPr>
-              <a:t>Scheduled pull from sco.ca.gov → S3 → Snowflake. Canonical schema, dedupe, dbt models.</a:t>
-            </a:r>
-          </a:p>
-        </p:txBody>
-      </p:sp>
-      <p:sp>
-        <p:nvSpPr>
-          <p:cNvPr id="20" name="Rounded Rectangle 19"/>
+              <a:t>From approval to first member alert.</a:t>
+            </a:r>
+          </a:p>
+        </p:txBody>
+      </p:sp>
+      <p:sp>
+        <p:nvSpPr>
+          <p:cNvPr id="9" name="Rounded Rectangle 8"/>
           <p:cNvSpPr/>
           <p:nvPr/>
         </p:nvSpPr>
         <p:spPr>
           <a:xfrm>
-            <a:off x="9555480" y="2871216"/>
-            <a:ext cx="1600200" cy="274320"/>
-          </a:xfrm>
-          <a:prstGeom prst="roundRect">
-            <a:avLst>
-              <a:gd name="adj" fmla="val 50000"/>
-            </a:avLst>
-          </a:prstGeom>
-          <a:solidFill>
-            <a:srgbClr val="2863C5"/>
-          </a:solidFill>
-          <a:ln>
-            <a:noFill/>
-          </a:ln>
-        </p:spPr>
-        <p:style>
-          <a:lnRef idx="1">
-            <a:schemeClr val="accent1"/>
-          </a:lnRef>
-          <a:fillRef idx="3">
-            <a:schemeClr val="accent1"/>
-          </a:fillRef>
-          <a:effectRef idx="2">
-            <a:schemeClr val="accent1"/>
-          </a:effectRef>
-          <a:fontRef idx="minor">
-            <a:schemeClr val="lt1"/>
-          </a:fontRef>
-        </p:style>
-        <p:txBody>
-          <a:bodyPr rtlCol="0" anchor="ctr" lIns="45720" rIns="45720" tIns="18288" bIns="18288"/>
-          <a:lstStyle/>
-          <a:p>
-            <a:pPr algn="ctr"/>
-            <a:r>
-              <a:rPr sz="900" b="1">
-                <a:solidFill>
-                  <a:srgbClr val="FFFFFF"/>
-                </a:solidFill>
-                <a:latin typeface="Open Sans"/>
-              </a:rPr>
-              <a:t>Sprint 1 · ~6 weeks</a:t>
-            </a:r>
-          </a:p>
-        </p:txBody>
-      </p:sp>
-      <p:sp>
-        <p:nvSpPr>
-          <p:cNvPr id="21" name="Rounded Rectangle 20"/>
-          <p:cNvSpPr/>
-          <p:nvPr/>
-        </p:nvSpPr>
-        <p:spPr>
-          <a:xfrm>
-            <a:off x="457200" y="3328415"/>
+            <a:off x="457200" y="2011680"/>
             <a:ext cx="11247120" cy="603503"/>
           </a:xfrm>
           <a:prstGeom prst="roundRect">
@@ -12525,13 +13550,13 @@
       </p:sp>
       <p:sp>
         <p:nvSpPr>
-          <p:cNvPr id="22" name="Rectangle 21"/>
+          <p:cNvPr id="10" name="Rectangle 9"/>
           <p:cNvSpPr/>
           <p:nvPr/>
         </p:nvSpPr>
         <p:spPr>
           <a:xfrm>
-            <a:off x="457200" y="3328415"/>
+            <a:off x="457200" y="2011680"/>
             <a:ext cx="164592" cy="603503"/>
           </a:xfrm>
           <a:prstGeom prst="rect">
@@ -12569,13 +13594,13 @@
       </p:sp>
       <p:sp>
         <p:nvSpPr>
-          <p:cNvPr id="23" name="TextBox 22"/>
-          <p:cNvSpPr txBox="1"/>
-          <p:nvPr/>
-        </p:nvSpPr>
-        <p:spPr>
-          <a:xfrm>
-            <a:off x="777240" y="3493008"/>
+          <p:cNvPr id="11" name="TextBox 10"/>
+          <p:cNvSpPr txBox="1"/>
+          <p:nvPr/>
+        </p:nvSpPr>
+        <p:spPr>
+          <a:xfrm>
+            <a:off x="777240" y="2176272"/>
             <a:ext cx="594360" cy="365760"/>
           </a:xfrm>
           <a:prstGeom prst="rect">
@@ -12597,20 +13622,20 @@
                 </a:solidFill>
                 <a:latin typeface="Open Sans"/>
               </a:rPr>
-              <a:t>03</a:t>
-            </a:r>
-          </a:p>
-        </p:txBody>
-      </p:sp>
-      <p:sp>
-        <p:nvSpPr>
-          <p:cNvPr id="24" name="TextBox 23"/>
-          <p:cNvSpPr txBox="1"/>
-          <p:nvPr/>
-        </p:nvSpPr>
-        <p:spPr>
-          <a:xfrm>
-            <a:off x="1508760" y="3383279"/>
+              <a:t>01</a:t>
+            </a:r>
+          </a:p>
+        </p:txBody>
+      </p:sp>
+      <p:sp>
+        <p:nvSpPr>
+          <p:cNvPr id="12" name="TextBox 11"/>
+          <p:cNvSpPr txBox="1"/>
+          <p:nvPr/>
+        </p:nvSpPr>
+        <p:spPr>
+          <a:xfrm>
+            <a:off x="1508760" y="2066544"/>
             <a:ext cx="7863840" cy="274320"/>
           </a:xfrm>
           <a:prstGeom prst="rect">
@@ -12632,20 +13657,20 @@
                 </a:solidFill>
                 <a:latin typeface="Open Sans"/>
               </a:rPr>
-              <a:t>Plug in the PII matching engine</a:t>
-            </a:r>
-          </a:p>
-        </p:txBody>
-      </p:sp>
-      <p:sp>
-        <p:nvSpPr>
-          <p:cNvPr id="25" name="TextBox 24"/>
-          <p:cNvSpPr txBox="1"/>
-          <p:nvPr/>
-        </p:nvSpPr>
-        <p:spPr>
-          <a:xfrm>
-            <a:off x="1508760" y="3657599"/>
+              <a:t>Exec approval &amp; resourcing</a:t>
+            </a:r>
+          </a:p>
+        </p:txBody>
+      </p:sp>
+      <p:sp>
+        <p:nvSpPr>
+          <p:cNvPr id="13" name="TextBox 12"/>
+          <p:cNvSpPr txBox="1"/>
+          <p:nvPr/>
+        </p:nvSpPr>
+        <p:spPr>
+          <a:xfrm>
+            <a:off x="1508760" y="2340864"/>
             <a:ext cx="7863840" cy="292608"/>
           </a:xfrm>
           <a:prstGeom prst="rect">
@@ -12667,20 +13692,20 @@
                 </a:solidFill>
                 <a:latin typeface="Open Sans"/>
               </a:rPr>
-              <a:t>Connect SmartCredit's existing identity matcher to the Snowflake corpus. Surface alerts in member dashboard.</a:t>
-            </a:r>
-          </a:p>
-        </p:txBody>
-      </p:sp>
-      <p:sp>
-        <p:nvSpPr>
-          <p:cNvPr id="26" name="Rounded Rectangle 25"/>
+              <a:t>Greenlight myReclaim. Assign 1 data engineer + 1 product engineer.</a:t>
+            </a:r>
+          </a:p>
+        </p:txBody>
+      </p:sp>
+      <p:sp>
+        <p:nvSpPr>
+          <p:cNvPr id="14" name="Rounded Rectangle 13"/>
           <p:cNvSpPr/>
           <p:nvPr/>
         </p:nvSpPr>
         <p:spPr>
           <a:xfrm>
-            <a:off x="9555480" y="3529584"/>
+            <a:off x="9555480" y="2212848"/>
             <a:ext cx="1600200" cy="274320"/>
           </a:xfrm>
           <a:prstGeom prst="roundRect">
@@ -12721,20 +13746,20 @@
                 </a:solidFill>
                 <a:latin typeface="Open Sans"/>
               </a:rPr>
-              <a:t>Sprint 1–2</a:t>
-            </a:r>
-          </a:p>
-        </p:txBody>
-      </p:sp>
-      <p:sp>
-        <p:nvSpPr>
-          <p:cNvPr id="27" name="Rounded Rectangle 26"/>
+              <a:t>Now</a:t>
+            </a:r>
+          </a:p>
+        </p:txBody>
+      </p:sp>
+      <p:sp>
+        <p:nvSpPr>
+          <p:cNvPr id="15" name="Rounded Rectangle 14"/>
           <p:cNvSpPr/>
           <p:nvPr/>
         </p:nvSpPr>
         <p:spPr>
           <a:xfrm>
-            <a:off x="457200" y="3986783"/>
+            <a:off x="457200" y="2670048"/>
             <a:ext cx="11247120" cy="603503"/>
           </a:xfrm>
           <a:prstGeom prst="roundRect">
@@ -12776,20 +13801,20 @@
       </p:sp>
       <p:sp>
         <p:nvSpPr>
-          <p:cNvPr id="28" name="Rectangle 27"/>
+          <p:cNvPr id="16" name="Rectangle 15"/>
           <p:cNvSpPr/>
           <p:nvPr/>
         </p:nvSpPr>
         <p:spPr>
           <a:xfrm>
-            <a:off x="457200" y="3986783"/>
+            <a:off x="457200" y="2670048"/>
             <a:ext cx="164592" cy="603503"/>
           </a:xfrm>
           <a:prstGeom prst="rect">
             <a:avLst/>
           </a:prstGeom>
           <a:solidFill>
-            <a:srgbClr val="059669"/>
+            <a:srgbClr val="2863C5"/>
           </a:solidFill>
           <a:ln>
             <a:noFill/>
@@ -12820,13 +13845,13 @@
       </p:sp>
       <p:sp>
         <p:nvSpPr>
-          <p:cNvPr id="29" name="TextBox 28"/>
-          <p:cNvSpPr txBox="1"/>
-          <p:nvPr/>
-        </p:nvSpPr>
-        <p:spPr>
-          <a:xfrm>
-            <a:off x="777240" y="4151375"/>
+          <p:cNvPr id="17" name="TextBox 16"/>
+          <p:cNvSpPr txBox="1"/>
+          <p:nvPr/>
+        </p:nvSpPr>
+        <p:spPr>
+          <a:xfrm>
+            <a:off x="777240" y="2834640"/>
             <a:ext cx="594360" cy="365760"/>
           </a:xfrm>
           <a:prstGeom prst="rect">
@@ -12844,24 +13869,24 @@
             <a:r>
               <a:rPr sz="1800" b="1">
                 <a:solidFill>
-                  <a:srgbClr val="059669"/>
-                </a:solidFill>
-                <a:latin typeface="Open Sans"/>
-              </a:rPr>
-              <a:t>04</a:t>
-            </a:r>
-          </a:p>
-        </p:txBody>
-      </p:sp>
-      <p:sp>
-        <p:nvSpPr>
-          <p:cNvPr id="30" name="TextBox 29"/>
-          <p:cNvSpPr txBox="1"/>
-          <p:nvPr/>
-        </p:nvSpPr>
-        <p:spPr>
-          <a:xfrm>
-            <a:off x="1508760" y="4041647"/>
+                  <a:srgbClr val="2863C5"/>
+                </a:solidFill>
+                <a:latin typeface="Open Sans"/>
+              </a:rPr>
+              <a:t>02</a:t>
+            </a:r>
+          </a:p>
+        </p:txBody>
+      </p:sp>
+      <p:sp>
+        <p:nvSpPr>
+          <p:cNvPr id="18" name="TextBox 17"/>
+          <p:cNvSpPr txBox="1"/>
+          <p:nvPr/>
+        </p:nvSpPr>
+        <p:spPr>
+          <a:xfrm>
+            <a:off x="1508760" y="2724912"/>
             <a:ext cx="7863840" cy="274320"/>
           </a:xfrm>
           <a:prstGeom prst="rect">
@@ -12883,20 +13908,20 @@
                 </a:solidFill>
                 <a:latin typeface="Open Sans"/>
               </a:rPr>
-              <a:t>Assisted e-file + ActionLetters fallback shipped</a:t>
-            </a:r>
-          </a:p>
-        </p:txBody>
-      </p:sp>
-      <p:sp>
-        <p:nvSpPr>
-          <p:cNvPr id="31" name="TextBox 30"/>
-          <p:cNvSpPr txBox="1"/>
-          <p:nvPr/>
-        </p:nvSpPr>
-        <p:spPr>
-          <a:xfrm>
-            <a:off x="1508760" y="4315968"/>
+              <a:t>California ingestion live</a:t>
+            </a:r>
+          </a:p>
+        </p:txBody>
+      </p:sp>
+      <p:sp>
+        <p:nvSpPr>
+          <p:cNvPr id="19" name="TextBox 18"/>
+          <p:cNvSpPr txBox="1"/>
+          <p:nvPr/>
+        </p:nvSpPr>
+        <p:spPr>
+          <a:xfrm>
+            <a:off x="1508760" y="2999232"/>
             <a:ext cx="7863840" cy="292608"/>
           </a:xfrm>
           <a:prstGeom prst="rect">
@@ -12918,20 +13943,20 @@
                 </a:solidFill>
                 <a:latin typeface="Open Sans"/>
               </a:rPr>
-              <a:t>Member confirms a match. We prep packet → user submits via state portal. Mail packet via ActionLetters when states require physical paperwork.</a:t>
-            </a:r>
-          </a:p>
-        </p:txBody>
-      </p:sp>
-      <p:sp>
-        <p:nvSpPr>
-          <p:cNvPr id="32" name="Rounded Rectangle 31"/>
+              <a:t>Scheduled pull from sco.ca.gov → S3 → Snowflake. Canonical schema, dedupe, dbt models.</a:t>
+            </a:r>
+          </a:p>
+        </p:txBody>
+      </p:sp>
+      <p:sp>
+        <p:nvSpPr>
+          <p:cNvPr id="20" name="Rounded Rectangle 19"/>
           <p:cNvSpPr/>
           <p:nvPr/>
         </p:nvSpPr>
         <p:spPr>
           <a:xfrm>
-            <a:off x="9555480" y="4187951"/>
+            <a:off x="9555480" y="2871216"/>
             <a:ext cx="1600200" cy="274320"/>
           </a:xfrm>
           <a:prstGeom prst="roundRect">
@@ -12940,7 +13965,7 @@
             </a:avLst>
           </a:prstGeom>
           <a:solidFill>
-            <a:srgbClr val="059669"/>
+            <a:srgbClr val="2863C5"/>
           </a:solidFill>
           <a:ln>
             <a:noFill/>
@@ -12972,20 +13997,20 @@
                 </a:solidFill>
                 <a:latin typeface="Open Sans"/>
               </a:rPr>
-              <a:t>End of Sprint 2</a:t>
-            </a:r>
-          </a:p>
-        </p:txBody>
-      </p:sp>
-      <p:sp>
-        <p:nvSpPr>
-          <p:cNvPr id="33" name="Rounded Rectangle 32"/>
+              <a:t>Sprint 1 · ~6 weeks</a:t>
+            </a:r>
+          </a:p>
+        </p:txBody>
+      </p:sp>
+      <p:sp>
+        <p:nvSpPr>
+          <p:cNvPr id="21" name="Rounded Rectangle 20"/>
           <p:cNvSpPr/>
           <p:nvPr/>
         </p:nvSpPr>
         <p:spPr>
           <a:xfrm>
-            <a:off x="457200" y="4645151"/>
+            <a:off x="457200" y="3328415"/>
             <a:ext cx="11247120" cy="603503"/>
           </a:xfrm>
           <a:prstGeom prst="roundRect">
@@ -13027,20 +14052,20 @@
       </p:sp>
       <p:sp>
         <p:nvSpPr>
-          <p:cNvPr id="34" name="Rectangle 33"/>
+          <p:cNvPr id="22" name="Rectangle 21"/>
           <p:cNvSpPr/>
           <p:nvPr/>
         </p:nvSpPr>
         <p:spPr>
           <a:xfrm>
-            <a:off x="457200" y="4645151"/>
+            <a:off x="457200" y="3328415"/>
             <a:ext cx="164592" cy="603503"/>
           </a:xfrm>
           <a:prstGeom prst="rect">
             <a:avLst/>
           </a:prstGeom>
           <a:solidFill>
-            <a:srgbClr val="FFB352"/>
+            <a:srgbClr val="2863C5"/>
           </a:solidFill>
           <a:ln>
             <a:noFill/>
@@ -13071,13 +14096,13 @@
       </p:sp>
       <p:sp>
         <p:nvSpPr>
-          <p:cNvPr id="35" name="TextBox 34"/>
-          <p:cNvSpPr txBox="1"/>
-          <p:nvPr/>
-        </p:nvSpPr>
-        <p:spPr>
-          <a:xfrm>
-            <a:off x="777240" y="4809743"/>
+          <p:cNvPr id="23" name="TextBox 22"/>
+          <p:cNvSpPr txBox="1"/>
+          <p:nvPr/>
+        </p:nvSpPr>
+        <p:spPr>
+          <a:xfrm>
+            <a:off x="777240" y="3493008"/>
             <a:ext cx="594360" cy="365760"/>
           </a:xfrm>
           <a:prstGeom prst="rect">
@@ -13095,24 +14120,24 @@
             <a:r>
               <a:rPr sz="1800" b="1">
                 <a:solidFill>
-                  <a:srgbClr val="FFB352"/>
-                </a:solidFill>
-                <a:latin typeface="Open Sans"/>
-              </a:rPr>
-              <a:t>05</a:t>
-            </a:r>
-          </a:p>
-        </p:txBody>
-      </p:sp>
-      <p:sp>
-        <p:nvSpPr>
-          <p:cNvPr id="36" name="TextBox 35"/>
-          <p:cNvSpPr txBox="1"/>
-          <p:nvPr/>
-        </p:nvSpPr>
-        <p:spPr>
-          <a:xfrm>
-            <a:off x="1508760" y="4700015"/>
+                  <a:srgbClr val="2863C5"/>
+                </a:solidFill>
+                <a:latin typeface="Open Sans"/>
+              </a:rPr>
+              <a:t>03</a:t>
+            </a:r>
+          </a:p>
+        </p:txBody>
+      </p:sp>
+      <p:sp>
+        <p:nvSpPr>
+          <p:cNvPr id="24" name="TextBox 23"/>
+          <p:cNvSpPr txBox="1"/>
+          <p:nvPr/>
+        </p:nvSpPr>
+        <p:spPr>
+          <a:xfrm>
+            <a:off x="1508760" y="3383279"/>
             <a:ext cx="7863840" cy="274320"/>
           </a:xfrm>
           <a:prstGeom prst="rect">
@@ -13134,20 +14159,20 @@
                 </a:solidFill>
                 <a:latin typeface="Open Sans"/>
               </a:rPr>
-              <a:t>State outreach &amp; registrations</a:t>
-            </a:r>
-          </a:p>
-        </p:txBody>
-      </p:sp>
-      <p:sp>
-        <p:nvSpPr>
-          <p:cNvPr id="37" name="TextBox 36"/>
-          <p:cNvSpPr txBox="1"/>
-          <p:nvPr/>
-        </p:nvSpPr>
-        <p:spPr>
-          <a:xfrm>
-            <a:off x="1508760" y="4974336"/>
+              <a:t>Plug in the PII matching engine</a:t>
+            </a:r>
+          </a:p>
+        </p:txBody>
+      </p:sp>
+      <p:sp>
+        <p:nvSpPr>
+          <p:cNvPr id="25" name="TextBox 24"/>
+          <p:cNvSpPr txBox="1"/>
+          <p:nvPr/>
+        </p:nvSpPr>
+        <p:spPr>
+          <a:xfrm>
+            <a:off x="1508760" y="3657599"/>
             <a:ext cx="7863840" cy="292608"/>
           </a:xfrm>
           <a:prstGeom prst="rect">
@@ -13169,20 +14194,20 @@
                 </a:solidFill>
                 <a:latin typeface="Open Sans"/>
               </a:rPr>
-              <a:t>Begin TX &amp; NY data requests. File Georgia CDR registration (first rep path). Open FL Ch. 717 conversations.</a:t>
-            </a:r>
-          </a:p>
-        </p:txBody>
-      </p:sp>
-      <p:sp>
-        <p:nvSpPr>
-          <p:cNvPr id="38" name="Rounded Rectangle 37"/>
+              <a:t>Connect SmartCredit's existing identity matcher. Alert only on high-confidence matches (name + address/city/state). Suppress name-only matches.</a:t>
+            </a:r>
+          </a:p>
+        </p:txBody>
+      </p:sp>
+      <p:sp>
+        <p:nvSpPr>
+          <p:cNvPr id="26" name="Rounded Rectangle 25"/>
           <p:cNvSpPr/>
           <p:nvPr/>
         </p:nvSpPr>
         <p:spPr>
           <a:xfrm>
-            <a:off x="9555480" y="4846319"/>
+            <a:off x="9555480" y="3529584"/>
             <a:ext cx="1600200" cy="274320"/>
           </a:xfrm>
           <a:prstGeom prst="roundRect">
@@ -13191,7 +14216,7 @@
             </a:avLst>
           </a:prstGeom>
           <a:solidFill>
-            <a:srgbClr val="FFB352"/>
+            <a:srgbClr val="2863C5"/>
           </a:solidFill>
           <a:ln>
             <a:noFill/>
@@ -13223,20 +14248,20 @@
                 </a:solidFill>
                 <a:latin typeface="Open Sans"/>
               </a:rPr>
-              <a:t>Parallel · Sprint 2+</a:t>
-            </a:r>
-          </a:p>
-        </p:txBody>
-      </p:sp>
-      <p:sp>
-        <p:nvSpPr>
-          <p:cNvPr id="39" name="Rounded Rectangle 38"/>
+              <a:t>Sprint 1–2</a:t>
+            </a:r>
+          </a:p>
+        </p:txBody>
+      </p:sp>
+      <p:sp>
+        <p:nvSpPr>
+          <p:cNvPr id="27" name="Rounded Rectangle 26"/>
           <p:cNvSpPr/>
           <p:nvPr/>
         </p:nvSpPr>
         <p:spPr>
           <a:xfrm>
-            <a:off x="457200" y="5303519"/>
+            <a:off x="457200" y="3986783"/>
             <a:ext cx="11247120" cy="603503"/>
           </a:xfrm>
           <a:prstGeom prst="roundRect">
@@ -13278,20 +14303,20 @@
       </p:sp>
       <p:sp>
         <p:nvSpPr>
-          <p:cNvPr id="40" name="Rectangle 39"/>
+          <p:cNvPr id="28" name="Rectangle 27"/>
           <p:cNvSpPr/>
           <p:nvPr/>
         </p:nvSpPr>
         <p:spPr>
           <a:xfrm>
-            <a:off x="457200" y="5303519"/>
+            <a:off x="457200" y="3986783"/>
             <a:ext cx="164592" cy="603503"/>
           </a:xfrm>
           <a:prstGeom prst="rect">
             <a:avLst/>
           </a:prstGeom>
           <a:solidFill>
-            <a:srgbClr val="FFB352"/>
+            <a:srgbClr val="059669"/>
           </a:solidFill>
           <a:ln>
             <a:noFill/>
@@ -13322,13 +14347,13 @@
       </p:sp>
       <p:sp>
         <p:nvSpPr>
-          <p:cNvPr id="41" name="TextBox 40"/>
-          <p:cNvSpPr txBox="1"/>
-          <p:nvPr/>
-        </p:nvSpPr>
-        <p:spPr>
-          <a:xfrm>
-            <a:off x="777240" y="5468111"/>
+          <p:cNvPr id="29" name="TextBox 28"/>
+          <p:cNvSpPr txBox="1"/>
+          <p:nvPr/>
+        </p:nvSpPr>
+        <p:spPr>
+          <a:xfrm>
+            <a:off x="777240" y="4151375"/>
             <a:ext cx="594360" cy="365760"/>
           </a:xfrm>
           <a:prstGeom prst="rect">
@@ -13346,24 +14371,24 @@
             <a:r>
               <a:rPr sz="1800" b="1">
                 <a:solidFill>
-                  <a:srgbClr val="FFB352"/>
-                </a:solidFill>
-                <a:latin typeface="Open Sans"/>
-              </a:rPr>
-              <a:t>06</a:t>
-            </a:r>
-          </a:p>
-        </p:txBody>
-      </p:sp>
-      <p:sp>
-        <p:nvSpPr>
-          <p:cNvPr id="42" name="TextBox 41"/>
-          <p:cNvSpPr txBox="1"/>
-          <p:nvPr/>
-        </p:nvSpPr>
-        <p:spPr>
-          <a:xfrm>
-            <a:off x="1508760" y="5358383"/>
+                  <a:srgbClr val="059669"/>
+                </a:solidFill>
+                <a:latin typeface="Open Sans"/>
+              </a:rPr>
+              <a:t>04</a:t>
+            </a:r>
+          </a:p>
+        </p:txBody>
+      </p:sp>
+      <p:sp>
+        <p:nvSpPr>
+          <p:cNvPr id="30" name="TextBox 29"/>
+          <p:cNvSpPr txBox="1"/>
+          <p:nvPr/>
+        </p:nvSpPr>
+        <p:spPr>
+          <a:xfrm>
+            <a:off x="1508760" y="4041647"/>
             <a:ext cx="7863840" cy="274320"/>
           </a:xfrm>
           <a:prstGeom prst="rect">
@@ -13385,20 +14410,20 @@
                 </a:solidFill>
                 <a:latin typeface="Open Sans"/>
               </a:rPr>
-              <a:t>Expand to top-5 states</a:t>
-            </a:r>
-          </a:p>
-        </p:txBody>
-      </p:sp>
-      <p:sp>
-        <p:nvSpPr>
-          <p:cNvPr id="43" name="TextBox 42"/>
-          <p:cNvSpPr txBox="1"/>
-          <p:nvPr/>
-        </p:nvSpPr>
-        <p:spPr>
-          <a:xfrm>
-            <a:off x="1508760" y="5632703"/>
+              <a:t>Assisted e-file + ActionLetters fallback shipped</a:t>
+            </a:r>
+          </a:p>
+        </p:txBody>
+      </p:sp>
+      <p:sp>
+        <p:nvSpPr>
+          <p:cNvPr id="31" name="TextBox 30"/>
+          <p:cNvSpPr txBox="1"/>
+          <p:nvPr/>
+        </p:nvSpPr>
+        <p:spPr>
+          <a:xfrm>
+            <a:off x="1508760" y="4315968"/>
             <a:ext cx="7863840" cy="292608"/>
           </a:xfrm>
           <a:prstGeom prst="rect">
@@ -13420,20 +14445,20 @@
                 </a:solidFill>
                 <a:latin typeface="Open Sans"/>
               </a:rPr>
-              <a:t>TX + NY + GA online for data + claim filing. Member-driven submit via state portals. Quarterly state additions.</a:t>
-            </a:r>
-          </a:p>
-        </p:txBody>
-      </p:sp>
-      <p:sp>
-        <p:nvSpPr>
-          <p:cNvPr id="44" name="Rounded Rectangle 43"/>
+              <a:t>Member confirms a match. We prep packet → official state portal. Mail packet enabled only where legal approves the workflow.</a:t>
+            </a:r>
+          </a:p>
+        </p:txBody>
+      </p:sp>
+      <p:sp>
+        <p:nvSpPr>
+          <p:cNvPr id="32" name="Rounded Rectangle 31"/>
           <p:cNvSpPr/>
           <p:nvPr/>
         </p:nvSpPr>
         <p:spPr>
           <a:xfrm>
-            <a:off x="9555480" y="5504687"/>
+            <a:off x="9555480" y="4187951"/>
             <a:ext cx="1600200" cy="274320"/>
           </a:xfrm>
           <a:prstGeom prst="roundRect">
@@ -13442,7 +14467,7 @@
             </a:avLst>
           </a:prstGeom>
           <a:solidFill>
-            <a:srgbClr val="FFB352"/>
+            <a:srgbClr val="059669"/>
           </a:solidFill>
           <a:ln>
             <a:noFill/>
@@ -13474,20 +14499,20 @@
                 </a:solidFill>
                 <a:latin typeface="Open Sans"/>
               </a:rPr>
-              <a:t>Q3–Q4 2026</a:t>
-            </a:r>
-          </a:p>
-        </p:txBody>
-      </p:sp>
-      <p:sp>
-        <p:nvSpPr>
-          <p:cNvPr id="45" name="Rounded Rectangle 44"/>
+              <a:t>End of Sprint 2</a:t>
+            </a:r>
+          </a:p>
+        </p:txBody>
+      </p:sp>
+      <p:sp>
+        <p:nvSpPr>
+          <p:cNvPr id="33" name="Rounded Rectangle 32"/>
           <p:cNvSpPr/>
           <p:nvPr/>
         </p:nvSpPr>
         <p:spPr>
           <a:xfrm>
-            <a:off x="457200" y="5961887"/>
+            <a:off x="457200" y="4645151"/>
             <a:ext cx="11247120" cy="603503"/>
           </a:xfrm>
           <a:prstGeom prst="roundRect">
@@ -13529,6 +14554,508 @@
       </p:sp>
       <p:sp>
         <p:nvSpPr>
+          <p:cNvPr id="34" name="Rectangle 33"/>
+          <p:cNvSpPr/>
+          <p:nvPr/>
+        </p:nvSpPr>
+        <p:spPr>
+          <a:xfrm>
+            <a:off x="457200" y="4645151"/>
+            <a:ext cx="164592" cy="603503"/>
+          </a:xfrm>
+          <a:prstGeom prst="rect">
+            <a:avLst/>
+          </a:prstGeom>
+          <a:solidFill>
+            <a:srgbClr val="FFB352"/>
+          </a:solidFill>
+          <a:ln>
+            <a:noFill/>
+          </a:ln>
+          <a:effectLst/>
+        </p:spPr>
+        <p:style>
+          <a:lnRef idx="1">
+            <a:schemeClr val="accent1"/>
+          </a:lnRef>
+          <a:fillRef idx="3">
+            <a:schemeClr val="accent1"/>
+          </a:fillRef>
+          <a:effectRef idx="2">
+            <a:schemeClr val="accent1"/>
+          </a:effectRef>
+          <a:fontRef idx="minor">
+            <a:schemeClr val="lt1"/>
+          </a:fontRef>
+        </p:style>
+        <p:txBody>
+          <a:bodyPr rtlCol="0" anchor="ctr"/>
+          <a:lstStyle/>
+          <a:p>
+            <a:pPr algn="ctr"/>
+          </a:p>
+        </p:txBody>
+      </p:sp>
+      <p:sp>
+        <p:nvSpPr>
+          <p:cNvPr id="35" name="TextBox 34"/>
+          <p:cNvSpPr txBox="1"/>
+          <p:nvPr/>
+        </p:nvSpPr>
+        <p:spPr>
+          <a:xfrm>
+            <a:off x="777240" y="4809743"/>
+            <a:ext cx="594360" cy="365760"/>
+          </a:xfrm>
+          <a:prstGeom prst="rect">
+            <a:avLst/>
+          </a:prstGeom>
+          <a:noFill/>
+        </p:spPr>
+        <p:txBody>
+          <a:bodyPr wrap="square" anchor="t" lIns="0" rIns="0" tIns="0" bIns="0">
+            <a:spAutoFit/>
+          </a:bodyPr>
+          <a:lstStyle/>
+          <a:p>
+            <a:pPr algn="l"/>
+            <a:r>
+              <a:rPr sz="1800" b="1">
+                <a:solidFill>
+                  <a:srgbClr val="FFB352"/>
+                </a:solidFill>
+                <a:latin typeface="Open Sans"/>
+              </a:rPr>
+              <a:t>05</a:t>
+            </a:r>
+          </a:p>
+        </p:txBody>
+      </p:sp>
+      <p:sp>
+        <p:nvSpPr>
+          <p:cNvPr id="36" name="TextBox 35"/>
+          <p:cNvSpPr txBox="1"/>
+          <p:nvPr/>
+        </p:nvSpPr>
+        <p:spPr>
+          <a:xfrm>
+            <a:off x="1508760" y="4700015"/>
+            <a:ext cx="7863840" cy="274320"/>
+          </a:xfrm>
+          <a:prstGeom prst="rect">
+            <a:avLst/>
+          </a:prstGeom>
+          <a:noFill/>
+        </p:spPr>
+        <p:txBody>
+          <a:bodyPr wrap="square" anchor="t" lIns="0" rIns="0" tIns="0" bIns="0">
+            <a:spAutoFit/>
+          </a:bodyPr>
+          <a:lstStyle/>
+          <a:p>
+            <a:pPr algn="l"/>
+            <a:r>
+              <a:rPr sz="1200" b="1">
+                <a:solidFill>
+                  <a:srgbClr val="0F172A"/>
+                </a:solidFill>
+                <a:latin typeface="Open Sans"/>
+              </a:rPr>
+              <a:t>State outreach &amp; registrations</a:t>
+            </a:r>
+          </a:p>
+        </p:txBody>
+      </p:sp>
+      <p:sp>
+        <p:nvSpPr>
+          <p:cNvPr id="37" name="TextBox 36"/>
+          <p:cNvSpPr txBox="1"/>
+          <p:nvPr/>
+        </p:nvSpPr>
+        <p:spPr>
+          <a:xfrm>
+            <a:off x="1508760" y="4974336"/>
+            <a:ext cx="7863840" cy="292608"/>
+          </a:xfrm>
+          <a:prstGeom prst="rect">
+            <a:avLst/>
+          </a:prstGeom>
+          <a:noFill/>
+        </p:spPr>
+        <p:txBody>
+          <a:bodyPr wrap="square" anchor="t" lIns="0" rIns="0" tIns="0" bIns="0">
+            <a:spAutoFit/>
+          </a:bodyPr>
+          <a:lstStyle/>
+          <a:p>
+            <a:pPr algn="l"/>
+            <a:r>
+              <a:rPr sz="950" b="0">
+                <a:solidFill>
+                  <a:srgbClr val="334155"/>
+                </a:solidFill>
+                <a:latin typeface="Open Sans"/>
+              </a:rPr>
+              <a:t>Request written permission for caching, matching, redisplay, retention, commercial use. File GA CDR; open TX, NY, FL conversations.</a:t>
+            </a:r>
+          </a:p>
+        </p:txBody>
+      </p:sp>
+      <p:sp>
+        <p:nvSpPr>
+          <p:cNvPr id="38" name="Rounded Rectangle 37"/>
+          <p:cNvSpPr/>
+          <p:nvPr/>
+        </p:nvSpPr>
+        <p:spPr>
+          <a:xfrm>
+            <a:off x="9555480" y="4846319"/>
+            <a:ext cx="1600200" cy="274320"/>
+          </a:xfrm>
+          <a:prstGeom prst="roundRect">
+            <a:avLst>
+              <a:gd name="adj" fmla="val 50000"/>
+            </a:avLst>
+          </a:prstGeom>
+          <a:solidFill>
+            <a:srgbClr val="FFB352"/>
+          </a:solidFill>
+          <a:ln>
+            <a:noFill/>
+          </a:ln>
+        </p:spPr>
+        <p:style>
+          <a:lnRef idx="1">
+            <a:schemeClr val="accent1"/>
+          </a:lnRef>
+          <a:fillRef idx="3">
+            <a:schemeClr val="accent1"/>
+          </a:fillRef>
+          <a:effectRef idx="2">
+            <a:schemeClr val="accent1"/>
+          </a:effectRef>
+          <a:fontRef idx="minor">
+            <a:schemeClr val="lt1"/>
+          </a:fontRef>
+        </p:style>
+        <p:txBody>
+          <a:bodyPr rtlCol="0" anchor="ctr" lIns="45720" rIns="45720" tIns="18288" bIns="18288"/>
+          <a:lstStyle/>
+          <a:p>
+            <a:pPr algn="ctr"/>
+            <a:r>
+              <a:rPr sz="900" b="1">
+                <a:solidFill>
+                  <a:srgbClr val="FFFFFF"/>
+                </a:solidFill>
+                <a:latin typeface="Open Sans"/>
+              </a:rPr>
+              <a:t>Parallel · Sprint 2+</a:t>
+            </a:r>
+          </a:p>
+        </p:txBody>
+      </p:sp>
+      <p:sp>
+        <p:nvSpPr>
+          <p:cNvPr id="39" name="Rounded Rectangle 38"/>
+          <p:cNvSpPr/>
+          <p:nvPr/>
+        </p:nvSpPr>
+        <p:spPr>
+          <a:xfrm>
+            <a:off x="457200" y="5303519"/>
+            <a:ext cx="11247120" cy="603503"/>
+          </a:xfrm>
+          <a:prstGeom prst="roundRect">
+            <a:avLst>
+              <a:gd name="adj" fmla="val 3000"/>
+            </a:avLst>
+          </a:prstGeom>
+          <a:solidFill>
+            <a:srgbClr val="FFFFFF"/>
+          </a:solidFill>
+          <a:ln w="6350">
+            <a:solidFill>
+              <a:srgbClr val="E2E8F0"/>
+            </a:solidFill>
+          </a:ln>
+          <a:effectLst/>
+        </p:spPr>
+        <p:style>
+          <a:lnRef idx="1">
+            <a:schemeClr val="accent1"/>
+          </a:lnRef>
+          <a:fillRef idx="3">
+            <a:schemeClr val="accent1"/>
+          </a:fillRef>
+          <a:effectRef idx="2">
+            <a:schemeClr val="accent1"/>
+          </a:effectRef>
+          <a:fontRef idx="minor">
+            <a:schemeClr val="lt1"/>
+          </a:fontRef>
+        </p:style>
+        <p:txBody>
+          <a:bodyPr rtlCol="0" anchor="ctr"/>
+          <a:lstStyle/>
+          <a:p>
+            <a:pPr algn="ctr"/>
+          </a:p>
+        </p:txBody>
+      </p:sp>
+      <p:sp>
+        <p:nvSpPr>
+          <p:cNvPr id="40" name="Rectangle 39"/>
+          <p:cNvSpPr/>
+          <p:nvPr/>
+        </p:nvSpPr>
+        <p:spPr>
+          <a:xfrm>
+            <a:off x="457200" y="5303519"/>
+            <a:ext cx="164592" cy="603503"/>
+          </a:xfrm>
+          <a:prstGeom prst="rect">
+            <a:avLst/>
+          </a:prstGeom>
+          <a:solidFill>
+            <a:srgbClr val="FFB352"/>
+          </a:solidFill>
+          <a:ln>
+            <a:noFill/>
+          </a:ln>
+          <a:effectLst/>
+        </p:spPr>
+        <p:style>
+          <a:lnRef idx="1">
+            <a:schemeClr val="accent1"/>
+          </a:lnRef>
+          <a:fillRef idx="3">
+            <a:schemeClr val="accent1"/>
+          </a:fillRef>
+          <a:effectRef idx="2">
+            <a:schemeClr val="accent1"/>
+          </a:effectRef>
+          <a:fontRef idx="minor">
+            <a:schemeClr val="lt1"/>
+          </a:fontRef>
+        </p:style>
+        <p:txBody>
+          <a:bodyPr rtlCol="0" anchor="ctr"/>
+          <a:lstStyle/>
+          <a:p>
+            <a:pPr algn="ctr"/>
+          </a:p>
+        </p:txBody>
+      </p:sp>
+      <p:sp>
+        <p:nvSpPr>
+          <p:cNvPr id="41" name="TextBox 40"/>
+          <p:cNvSpPr txBox="1"/>
+          <p:nvPr/>
+        </p:nvSpPr>
+        <p:spPr>
+          <a:xfrm>
+            <a:off x="777240" y="5468111"/>
+            <a:ext cx="594360" cy="365760"/>
+          </a:xfrm>
+          <a:prstGeom prst="rect">
+            <a:avLst/>
+          </a:prstGeom>
+          <a:noFill/>
+        </p:spPr>
+        <p:txBody>
+          <a:bodyPr wrap="square" anchor="t" lIns="0" rIns="0" tIns="0" bIns="0">
+            <a:spAutoFit/>
+          </a:bodyPr>
+          <a:lstStyle/>
+          <a:p>
+            <a:pPr algn="l"/>
+            <a:r>
+              <a:rPr sz="1800" b="1">
+                <a:solidFill>
+                  <a:srgbClr val="FFB352"/>
+                </a:solidFill>
+                <a:latin typeface="Open Sans"/>
+              </a:rPr>
+              <a:t>06</a:t>
+            </a:r>
+          </a:p>
+        </p:txBody>
+      </p:sp>
+      <p:sp>
+        <p:nvSpPr>
+          <p:cNvPr id="42" name="TextBox 41"/>
+          <p:cNvSpPr txBox="1"/>
+          <p:nvPr/>
+        </p:nvSpPr>
+        <p:spPr>
+          <a:xfrm>
+            <a:off x="1508760" y="5358383"/>
+            <a:ext cx="7863840" cy="274320"/>
+          </a:xfrm>
+          <a:prstGeom prst="rect">
+            <a:avLst/>
+          </a:prstGeom>
+          <a:noFill/>
+        </p:spPr>
+        <p:txBody>
+          <a:bodyPr wrap="square" anchor="t" lIns="0" rIns="0" tIns="0" bIns="0">
+            <a:spAutoFit/>
+          </a:bodyPr>
+          <a:lstStyle/>
+          <a:p>
+            <a:pPr algn="l"/>
+            <a:r>
+              <a:rPr sz="1200" b="1">
+                <a:solidFill>
+                  <a:srgbClr val="0F172A"/>
+                </a:solidFill>
+                <a:latin typeface="Open Sans"/>
+              </a:rPr>
+              <a:t>Expand to top-5 states (as approved)</a:t>
+            </a:r>
+          </a:p>
+        </p:txBody>
+      </p:sp>
+      <p:sp>
+        <p:nvSpPr>
+          <p:cNvPr id="43" name="TextBox 42"/>
+          <p:cNvSpPr txBox="1"/>
+          <p:nvPr/>
+        </p:nvSpPr>
+        <p:spPr>
+          <a:xfrm>
+            <a:off x="1508760" y="5632703"/>
+            <a:ext cx="7863840" cy="292608"/>
+          </a:xfrm>
+          <a:prstGeom prst="rect">
+            <a:avLst/>
+          </a:prstGeom>
+          <a:noFill/>
+        </p:spPr>
+        <p:txBody>
+          <a:bodyPr wrap="square" anchor="t" lIns="0" rIns="0" tIns="0" bIns="0">
+            <a:spAutoFit/>
+          </a:bodyPr>
+          <a:lstStyle/>
+          <a:p>
+            <a:pPr algn="l"/>
+            <a:r>
+              <a:rPr sz="950" b="0">
+                <a:solidFill>
+                  <a:srgbClr val="334155"/>
+                </a:solidFill>
+                <a:latin typeface="Open Sans"/>
+              </a:rPr>
+              <a:t>TX + NY added pending data-request approval; GA pending CDR registration + legal sign-off. Member-driven submit via state portals.</a:t>
+            </a:r>
+          </a:p>
+        </p:txBody>
+      </p:sp>
+      <p:sp>
+        <p:nvSpPr>
+          <p:cNvPr id="44" name="Rounded Rectangle 43"/>
+          <p:cNvSpPr/>
+          <p:nvPr/>
+        </p:nvSpPr>
+        <p:spPr>
+          <a:xfrm>
+            <a:off x="9555480" y="5504687"/>
+            <a:ext cx="1600200" cy="274320"/>
+          </a:xfrm>
+          <a:prstGeom prst="roundRect">
+            <a:avLst>
+              <a:gd name="adj" fmla="val 50000"/>
+            </a:avLst>
+          </a:prstGeom>
+          <a:solidFill>
+            <a:srgbClr val="FFB352"/>
+          </a:solidFill>
+          <a:ln>
+            <a:noFill/>
+          </a:ln>
+        </p:spPr>
+        <p:style>
+          <a:lnRef idx="1">
+            <a:schemeClr val="accent1"/>
+          </a:lnRef>
+          <a:fillRef idx="3">
+            <a:schemeClr val="accent1"/>
+          </a:fillRef>
+          <a:effectRef idx="2">
+            <a:schemeClr val="accent1"/>
+          </a:effectRef>
+          <a:fontRef idx="minor">
+            <a:schemeClr val="lt1"/>
+          </a:fontRef>
+        </p:style>
+        <p:txBody>
+          <a:bodyPr rtlCol="0" anchor="ctr" lIns="45720" rIns="45720" tIns="18288" bIns="18288"/>
+          <a:lstStyle/>
+          <a:p>
+            <a:pPr algn="ctr"/>
+            <a:r>
+              <a:rPr sz="900" b="1">
+                <a:solidFill>
+                  <a:srgbClr val="FFFFFF"/>
+                </a:solidFill>
+                <a:latin typeface="Open Sans"/>
+              </a:rPr>
+              <a:t>Q3–Q4 2026</a:t>
+            </a:r>
+          </a:p>
+        </p:txBody>
+      </p:sp>
+      <p:sp>
+        <p:nvSpPr>
+          <p:cNvPr id="45" name="Rounded Rectangle 44"/>
+          <p:cNvSpPr/>
+          <p:nvPr/>
+        </p:nvSpPr>
+        <p:spPr>
+          <a:xfrm>
+            <a:off x="457200" y="5961887"/>
+            <a:ext cx="11247120" cy="603503"/>
+          </a:xfrm>
+          <a:prstGeom prst="roundRect">
+            <a:avLst>
+              <a:gd name="adj" fmla="val 3000"/>
+            </a:avLst>
+          </a:prstGeom>
+          <a:solidFill>
+            <a:srgbClr val="FFFFFF"/>
+          </a:solidFill>
+          <a:ln w="6350">
+            <a:solidFill>
+              <a:srgbClr val="E2E8F0"/>
+            </a:solidFill>
+          </a:ln>
+          <a:effectLst/>
+        </p:spPr>
+        <p:style>
+          <a:lnRef idx="1">
+            <a:schemeClr val="accent1"/>
+          </a:lnRef>
+          <a:fillRef idx="3">
+            <a:schemeClr val="accent1"/>
+          </a:fillRef>
+          <a:effectRef idx="2">
+            <a:schemeClr val="accent1"/>
+          </a:effectRef>
+          <a:fontRef idx="minor">
+            <a:schemeClr val="lt1"/>
+          </a:fontRef>
+        </p:style>
+        <p:txBody>
+          <a:bodyPr rtlCol="0" anchor="ctr"/>
+          <a:lstStyle/>
+          <a:p>
+            <a:pPr algn="ctr"/>
+          </a:p>
+        </p:txBody>
+      </p:sp>
+      <p:sp>
+        <p:nvSpPr>
           <p:cNvPr id="46" name="Rectangle 45"/>
           <p:cNvSpPr/>
           <p:nvPr/>
@@ -13671,7 +15198,7 @@
                 </a:solidFill>
                 <a:latin typeface="Open Sans"/>
               </a:rPr>
-              <a:t>First state-approved representative submission. "We found you money" becomes "we filed it for you."</a:t>
+              <a:t>First approved representative workflow. Show "we filed for you" only in states where SmartCredit (or partner) is authorized.</a:t>
             </a:r>
           </a:p>
         </p:txBody>

--- a/myReclaim-Exec-Deck.pptx
+++ b/myReclaim-Exec-Deck.pptx
@@ -13,6 +13,7 @@
     <p:sldId id="261" r:id="rId12"/>
     <p:sldId id="262" r:id="rId13"/>
     <p:sldId id="263" r:id="rId14"/>
+    <p:sldId id="264" r:id="rId15"/>
   </p:sldIdLst>
   <p:sldSz cx="12188952" cy="6858000" type="screen4x3"/>
   <p:notesSz cx="6858000" cy="9144000"/>
@@ -3662,7 +3663,7 @@
                 </a:solidFill>
                 <a:latin typeface="Open Sans"/>
               </a:rPr>
-              <a:t>2 / 8</a:t>
+              <a:t>2 / 9</a:t>
             </a:r>
           </a:p>
         </p:txBody>
@@ -4332,7 +4333,7 @@
                 </a:solidFill>
                 <a:latin typeface="Open Sans"/>
               </a:rPr>
-              <a:t>3 / 8</a:t>
+              <a:t>3 / 9</a:t>
             </a:r>
           </a:p>
         </p:txBody>
@@ -5601,7 +5602,7 @@
                 </a:solidFill>
                 <a:latin typeface="Open Sans"/>
               </a:rPr>
-              <a:t>4 / 8</a:t>
+              <a:t>4 / 9</a:t>
             </a:r>
           </a:p>
         </p:txBody>
@@ -7101,7 +7102,7 @@
                 </a:solidFill>
                 <a:latin typeface="Open Sans"/>
               </a:rPr>
-              <a:t>5 / 8</a:t>
+              <a:t>5 / 9</a:t>
             </a:r>
           </a:p>
         </p:txBody>
@@ -10176,7 +10177,7 @@
                 </a:solidFill>
                 <a:latin typeface="Open Sans"/>
               </a:rPr>
-              <a:t>6 / 8</a:t>
+              <a:t>6 / 9</a:t>
             </a:r>
           </a:p>
         </p:txBody>
@@ -10246,7 +10247,7 @@
                 </a:solidFill>
                 <a:latin typeface="Open Sans"/>
               </a:rPr>
-              <a:t>FILING THE CLAIM</a:t>
+              <a:t>WHAT WE'D FIND TODAY · LIVE MATCH</a:t>
             </a:r>
           </a:p>
         </p:txBody>
@@ -10281,7 +10282,7 @@
                 </a:solidFill>
                 <a:latin typeface="Open Sans"/>
               </a:rPr>
-              <a:t>Three channels. E-file preferred. Mail when required. Rep when approved.</a:t>
+              <a:t>We matched 30,862 active CA customers against all four CA unclaimed tiers (92.4M records).</a:t>
             </a:r>
           </a:p>
         </p:txBody>
@@ -10294,8 +10295,8 @@
         </p:nvSpPr>
         <p:spPr>
           <a:xfrm>
-            <a:off x="457200" y="1965960"/>
-            <a:ext cx="11430000" cy="457200"/>
+            <a:off x="457200" y="2011680"/>
+            <a:ext cx="11430000" cy="411480"/>
           </a:xfrm>
           <a:prstGeom prst="rect">
             <a:avLst/>
@@ -10316,7 +10317,7 @@
                 </a:solidFill>
                 <a:latin typeface="Open Sans"/>
               </a:rPr>
-              <a:t>Most states support online claim initiation, but some claims still require document upload, notarization, mailed forms, or manual review. v1 is assisted e-file. Mail packets via our ActionLetters service when states require physical paperwork. Filing on the member's behalf is a state-by-state regulatory unlock — not a technical one.</a:t>
+              <a:t>Method: exact name match (FIRST LAST or LAST FIRST) — same matching logic the prototype uses, run via the indexed equality path. The state determines actual eligibility per record.</a:t>
             </a:r>
           </a:p>
         </p:txBody>
@@ -10330,11 +10331,11 @@
         <p:spPr>
           <a:xfrm>
             <a:off x="457200" y="2606040"/>
-            <a:ext cx="3657600" cy="3657600"/>
+            <a:ext cx="2697480" cy="1417320"/>
           </a:xfrm>
           <a:prstGeom prst="roundRect">
             <a:avLst>
-              <a:gd name="adj" fmla="val 3000"/>
+              <a:gd name="adj" fmla="val 4000"/>
             </a:avLst>
           </a:prstGeom>
           <a:solidFill>
@@ -10378,13 +10379,13 @@
         <p:spPr>
           <a:xfrm>
             <a:off x="457200" y="2606040"/>
-            <a:ext cx="3657600" cy="164592"/>
+            <a:ext cx="2697480" cy="137160"/>
           </a:xfrm>
           <a:prstGeom prst="rect">
             <a:avLst/>
           </a:prstGeom>
           <a:solidFill>
-            <a:srgbClr val="059669"/>
+            <a:srgbClr val="2863C5"/>
           </a:solidFill>
           <a:ln>
             <a:noFill/>
@@ -10421,29 +10422,29 @@
         </p:nvSpPr>
         <p:spPr>
           <a:xfrm>
-            <a:off x="685800" y="2898648"/>
-            <a:ext cx="3200400" cy="329184"/>
-          </a:xfrm>
-          <a:prstGeom prst="rect">
-            <a:avLst/>
-          </a:prstGeom>
-          <a:noFill/>
-        </p:spPr>
-        <p:txBody>
-          <a:bodyPr wrap="square" anchor="t" lIns="0" rIns="0" tIns="0" bIns="0">
-            <a:spAutoFit/>
-          </a:bodyPr>
-          <a:lstStyle/>
-          <a:p>
-            <a:pPr algn="l"/>
-            <a:r>
-              <a:rPr sz="1100" b="1">
-                <a:solidFill>
-                  <a:srgbClr val="059669"/>
-                </a:solidFill>
-                <a:latin typeface="Open Sans"/>
-              </a:rPr>
-              <a:t>v1 · DEFAULT</a:t>
+            <a:off x="640080" y="2880360"/>
+            <a:ext cx="2331720" cy="777240"/>
+          </a:xfrm>
+          <a:prstGeom prst="rect">
+            <a:avLst/>
+          </a:prstGeom>
+          <a:noFill/>
+        </p:spPr>
+        <p:txBody>
+          <a:bodyPr wrap="square" anchor="t" lIns="0" rIns="0" tIns="0" bIns="0">
+            <a:spAutoFit/>
+          </a:bodyPr>
+          <a:lstStyle/>
+          <a:p>
+            <a:pPr algn="l"/>
+            <a:r>
+              <a:rPr sz="3600" b="1">
+                <a:solidFill>
+                  <a:srgbClr val="2863C5"/>
+                </a:solidFill>
+                <a:latin typeface="Open Sans"/>
+              </a:rPr>
+              <a:t>21,864</a:t>
             </a:r>
           </a:p>
         </p:txBody>
@@ -10456,78 +10457,8 @@
         </p:nvSpPr>
         <p:spPr>
           <a:xfrm>
-            <a:off x="685800" y="3246120"/>
-            <a:ext cx="3200400" cy="502920"/>
-          </a:xfrm>
-          <a:prstGeom prst="rect">
-            <a:avLst/>
-          </a:prstGeom>
-          <a:noFill/>
-        </p:spPr>
-        <p:txBody>
-          <a:bodyPr wrap="square" anchor="t" lIns="0" rIns="0" tIns="0" bIns="0">
-            <a:spAutoFit/>
-          </a:bodyPr>
-          <a:lstStyle/>
-          <a:p>
-            <a:pPr algn="l"/>
-            <a:r>
-              <a:rPr sz="1400" b="1">
-                <a:solidFill>
-                  <a:srgbClr val="0F172A"/>
-                </a:solidFill>
-                <a:latin typeface="Open Sans"/>
-              </a:rPr>
-              <a:t>Assisted e-file</a:t>
-            </a:r>
-          </a:p>
-        </p:txBody>
-      </p:sp>
-      <p:sp>
-        <p:nvSpPr>
-          <p:cNvPr id="14" name="TextBox 13"/>
-          <p:cNvSpPr txBox="1"/>
-          <p:nvPr/>
-        </p:nvSpPr>
-        <p:spPr>
-          <a:xfrm>
-            <a:off x="685800" y="3977639"/>
-            <a:ext cx="1371600" cy="201168"/>
-          </a:xfrm>
-          <a:prstGeom prst="rect">
-            <a:avLst/>
-          </a:prstGeom>
-          <a:noFill/>
-        </p:spPr>
-        <p:txBody>
-          <a:bodyPr wrap="square" anchor="t" lIns="0" rIns="0" tIns="0" bIns="0">
-            <a:spAutoFit/>
-          </a:bodyPr>
-          <a:lstStyle/>
-          <a:p>
-            <a:pPr algn="l"/>
-            <a:r>
-              <a:rPr sz="900" b="1">
-                <a:solidFill>
-                  <a:srgbClr val="2863C5"/>
-                </a:solidFill>
-                <a:latin typeface="Open Sans"/>
-              </a:rPr>
-              <a:t>Who submits</a:t>
-            </a:r>
-          </a:p>
-        </p:txBody>
-      </p:sp>
-      <p:sp>
-        <p:nvSpPr>
-          <p:cNvPr id="15" name="TextBox 14"/>
-          <p:cNvSpPr txBox="1"/>
-          <p:nvPr/>
-        </p:nvSpPr>
-        <p:spPr>
-          <a:xfrm>
-            <a:off x="685800" y="4197096"/>
-            <a:ext cx="3200400" cy="457200"/>
+            <a:off x="640080" y="3611880"/>
+            <a:ext cx="2331720" cy="365760"/>
           </a:xfrm>
           <a:prstGeom prst="rect">
             <a:avLst/>
@@ -10548,235 +10479,25 @@
                 </a:solidFill>
                 <a:latin typeface="Open Sans"/>
               </a:rPr>
-              <a:t>The member</a:t>
-            </a:r>
-          </a:p>
-        </p:txBody>
-      </p:sp>
-      <p:sp>
-        <p:nvSpPr>
-          <p:cNvPr id="16" name="TextBox 15"/>
-          <p:cNvSpPr txBox="1"/>
-          <p:nvPr/>
-        </p:nvSpPr>
-        <p:spPr>
-          <a:xfrm>
-            <a:off x="685800" y="4526279"/>
-            <a:ext cx="1371600" cy="201168"/>
-          </a:xfrm>
-          <a:prstGeom prst="rect">
-            <a:avLst/>
-          </a:prstGeom>
-          <a:noFill/>
-        </p:spPr>
-        <p:txBody>
-          <a:bodyPr wrap="square" anchor="t" lIns="0" rIns="0" tIns="0" bIns="0">
-            <a:spAutoFit/>
-          </a:bodyPr>
-          <a:lstStyle/>
-          <a:p>
-            <a:pPr algn="l"/>
-            <a:r>
-              <a:rPr sz="900" b="1">
-                <a:solidFill>
-                  <a:srgbClr val="2863C5"/>
-                </a:solidFill>
-                <a:latin typeface="Open Sans"/>
-              </a:rPr>
-              <a:t>How</a:t>
-            </a:r>
-          </a:p>
-        </p:txBody>
-      </p:sp>
-      <p:sp>
-        <p:nvSpPr>
-          <p:cNvPr id="17" name="TextBox 16"/>
-          <p:cNvSpPr txBox="1"/>
-          <p:nvPr/>
-        </p:nvSpPr>
-        <p:spPr>
-          <a:xfrm>
-            <a:off x="685800" y="4745736"/>
-            <a:ext cx="3200400" cy="457200"/>
-          </a:xfrm>
-          <a:prstGeom prst="rect">
-            <a:avLst/>
-          </a:prstGeom>
-          <a:noFill/>
-        </p:spPr>
-        <p:txBody>
-          <a:bodyPr wrap="square" anchor="t" lIns="0" rIns="0" tIns="0" bIns="0">
-            <a:spAutoFit/>
-          </a:bodyPr>
-          <a:lstStyle/>
-          <a:p>
-            <a:pPr algn="l"/>
-            <a:r>
-              <a:rPr sz="1000" b="0">
-                <a:solidFill>
-                  <a:srgbClr val="334155"/>
-                </a:solidFill>
-                <a:latin typeface="Open Sans"/>
-              </a:rPr>
-              <a:t>We prep the packet · user submits via state portal</a:t>
-            </a:r>
-          </a:p>
-        </p:txBody>
-      </p:sp>
-      <p:sp>
-        <p:nvSpPr>
-          <p:cNvPr id="18" name="TextBox 17"/>
-          <p:cNvSpPr txBox="1"/>
-          <p:nvPr/>
-        </p:nvSpPr>
-        <p:spPr>
-          <a:xfrm>
-            <a:off x="685800" y="5074919"/>
-            <a:ext cx="1371600" cy="201168"/>
-          </a:xfrm>
-          <a:prstGeom prst="rect">
-            <a:avLst/>
-          </a:prstGeom>
-          <a:noFill/>
-        </p:spPr>
-        <p:txBody>
-          <a:bodyPr wrap="square" anchor="t" lIns="0" rIns="0" tIns="0" bIns="0">
-            <a:spAutoFit/>
-          </a:bodyPr>
-          <a:lstStyle/>
-          <a:p>
-            <a:pPr algn="l"/>
-            <a:r>
-              <a:rPr sz="900" b="1">
-                <a:solidFill>
-                  <a:srgbClr val="2863C5"/>
-                </a:solidFill>
-                <a:latin typeface="Open Sans"/>
-              </a:rPr>
-              <a:t>We track</a:t>
-            </a:r>
-          </a:p>
-        </p:txBody>
-      </p:sp>
-      <p:sp>
-        <p:nvSpPr>
-          <p:cNvPr id="19" name="TextBox 18"/>
-          <p:cNvSpPr txBox="1"/>
-          <p:nvPr/>
-        </p:nvSpPr>
-        <p:spPr>
-          <a:xfrm>
-            <a:off x="685800" y="5294375"/>
-            <a:ext cx="3200400" cy="457200"/>
-          </a:xfrm>
-          <a:prstGeom prst="rect">
-            <a:avLst/>
-          </a:prstGeom>
-          <a:noFill/>
-        </p:spPr>
-        <p:txBody>
-          <a:bodyPr wrap="square" anchor="t" lIns="0" rIns="0" tIns="0" bIns="0">
-            <a:spAutoFit/>
-          </a:bodyPr>
-          <a:lstStyle/>
-          <a:p>
-            <a:pPr algn="l"/>
-            <a:r>
-              <a:rPr sz="1000" b="0">
-                <a:solidFill>
-                  <a:srgbClr val="334155"/>
-                </a:solidFill>
-                <a:latin typeface="Open Sans"/>
-              </a:rPr>
-              <a:t>Claim ID + status entered by member or updated manually until state APIs exist</a:t>
-            </a:r>
-          </a:p>
-        </p:txBody>
-      </p:sp>
-      <p:sp>
-        <p:nvSpPr>
-          <p:cNvPr id="20" name="TextBox 19"/>
-          <p:cNvSpPr txBox="1"/>
-          <p:nvPr/>
-        </p:nvSpPr>
-        <p:spPr>
-          <a:xfrm>
-            <a:off x="685800" y="5623559"/>
-            <a:ext cx="1371600" cy="201168"/>
-          </a:xfrm>
-          <a:prstGeom prst="rect">
-            <a:avLst/>
-          </a:prstGeom>
-          <a:noFill/>
-        </p:spPr>
-        <p:txBody>
-          <a:bodyPr wrap="square" anchor="t" lIns="0" rIns="0" tIns="0" bIns="0">
-            <a:spAutoFit/>
-          </a:bodyPr>
-          <a:lstStyle/>
-          <a:p>
-            <a:pPr algn="l"/>
-            <a:r>
-              <a:rPr sz="900" b="1">
-                <a:solidFill>
-                  <a:srgbClr val="2863C5"/>
-                </a:solidFill>
-                <a:latin typeface="Open Sans"/>
-              </a:rPr>
-              <a:t>Status</a:t>
-            </a:r>
-          </a:p>
-        </p:txBody>
-      </p:sp>
-      <p:sp>
-        <p:nvSpPr>
-          <p:cNvPr id="21" name="TextBox 20"/>
-          <p:cNvSpPr txBox="1"/>
-          <p:nvPr/>
-        </p:nvSpPr>
-        <p:spPr>
-          <a:xfrm>
-            <a:off x="685800" y="5843015"/>
-            <a:ext cx="3200400" cy="457200"/>
-          </a:xfrm>
-          <a:prstGeom prst="rect">
-            <a:avLst/>
-          </a:prstGeom>
-          <a:noFill/>
-        </p:spPr>
-        <p:txBody>
-          <a:bodyPr wrap="square" anchor="t" lIns="0" rIns="0" tIns="0" bIns="0">
-            <a:spAutoFit/>
-          </a:bodyPr>
-          <a:lstStyle/>
-          <a:p>
-            <a:pPr algn="l"/>
-            <a:r>
-              <a:rPr sz="1000" b="0">
-                <a:solidFill>
-                  <a:srgbClr val="334155"/>
-                </a:solidFill>
-                <a:latin typeface="Open Sans"/>
-              </a:rPr>
-              <a:t>Ships Sprint 1 · every state with online filing</a:t>
-            </a:r>
-          </a:p>
-        </p:txBody>
-      </p:sp>
-      <p:sp>
-        <p:nvSpPr>
-          <p:cNvPr id="22" name="Rounded Rectangle 21"/>
+              <a:t>customers with at least one possible match</a:t>
+            </a:r>
+          </a:p>
+        </p:txBody>
+      </p:sp>
+      <p:sp>
+        <p:nvSpPr>
+          <p:cNvPr id="14" name="Rounded Rectangle 13"/>
           <p:cNvSpPr/>
           <p:nvPr/>
         </p:nvSpPr>
         <p:spPr>
           <a:xfrm>
-            <a:off x="4251960" y="2606040"/>
-            <a:ext cx="3657600" cy="3657600"/>
+            <a:off x="3291840" y="2606040"/>
+            <a:ext cx="2697480" cy="1417320"/>
           </a:xfrm>
           <a:prstGeom prst="roundRect">
             <a:avLst>
-              <a:gd name="adj" fmla="val 3000"/>
+              <a:gd name="adj" fmla="val 4000"/>
             </a:avLst>
           </a:prstGeom>
           <a:solidFill>
@@ -10813,20 +10534,20 @@
       </p:sp>
       <p:sp>
         <p:nvSpPr>
-          <p:cNvPr id="23" name="Rectangle 22"/>
+          <p:cNvPr id="15" name="Rectangle 14"/>
           <p:cNvSpPr/>
           <p:nvPr/>
         </p:nvSpPr>
         <p:spPr>
           <a:xfrm>
-            <a:off x="4251960" y="2606040"/>
-            <a:ext cx="3657600" cy="164592"/>
+            <a:off x="3291840" y="2606040"/>
+            <a:ext cx="2697480" cy="137160"/>
           </a:xfrm>
           <a:prstGeom prst="rect">
             <a:avLst/>
           </a:prstGeom>
           <a:solidFill>
-            <a:srgbClr val="FFB352"/>
+            <a:srgbClr val="2863C5"/>
           </a:solidFill>
           <a:ln>
             <a:noFill/>
@@ -10857,119 +10578,49 @@
       </p:sp>
       <p:sp>
         <p:nvSpPr>
-          <p:cNvPr id="24" name="TextBox 23"/>
-          <p:cNvSpPr txBox="1"/>
-          <p:nvPr/>
-        </p:nvSpPr>
-        <p:spPr>
-          <a:xfrm>
-            <a:off x="4480560" y="2898648"/>
-            <a:ext cx="3200400" cy="329184"/>
-          </a:xfrm>
-          <a:prstGeom prst="rect">
-            <a:avLst/>
-          </a:prstGeom>
-          <a:noFill/>
-        </p:spPr>
-        <p:txBody>
-          <a:bodyPr wrap="square" anchor="t" lIns="0" rIns="0" tIns="0" bIns="0">
-            <a:spAutoFit/>
-          </a:bodyPr>
-          <a:lstStyle/>
-          <a:p>
-            <a:pPr algn="l"/>
-            <a:r>
-              <a:rPr sz="1100" b="1">
-                <a:solidFill>
-                  <a:srgbClr val="FFB352"/>
-                </a:solidFill>
-                <a:latin typeface="Open Sans"/>
-              </a:rPr>
-              <a:t>v1 · FALLBACK</a:t>
-            </a:r>
-          </a:p>
-        </p:txBody>
-      </p:sp>
-      <p:sp>
-        <p:nvSpPr>
-          <p:cNvPr id="25" name="TextBox 24"/>
-          <p:cNvSpPr txBox="1"/>
-          <p:nvPr/>
-        </p:nvSpPr>
-        <p:spPr>
-          <a:xfrm>
-            <a:off x="4480560" y="3246120"/>
-            <a:ext cx="3200400" cy="502920"/>
-          </a:xfrm>
-          <a:prstGeom prst="rect">
-            <a:avLst/>
-          </a:prstGeom>
-          <a:noFill/>
-        </p:spPr>
-        <p:txBody>
-          <a:bodyPr wrap="square" anchor="t" lIns="0" rIns="0" tIns="0" bIns="0">
-            <a:spAutoFit/>
-          </a:bodyPr>
-          <a:lstStyle/>
-          <a:p>
-            <a:pPr algn="l"/>
-            <a:r>
-              <a:rPr sz="1400" b="1">
-                <a:solidFill>
-                  <a:srgbClr val="0F172A"/>
-                </a:solidFill>
-                <a:latin typeface="Open Sans"/>
-              </a:rPr>
-              <a:t>Mail packet via ActionLetters</a:t>
-            </a:r>
-          </a:p>
-        </p:txBody>
-      </p:sp>
-      <p:sp>
-        <p:nvSpPr>
-          <p:cNvPr id="26" name="TextBox 25"/>
-          <p:cNvSpPr txBox="1"/>
-          <p:nvPr/>
-        </p:nvSpPr>
-        <p:spPr>
-          <a:xfrm>
-            <a:off x="4480560" y="3977639"/>
-            <a:ext cx="1371600" cy="201168"/>
-          </a:xfrm>
-          <a:prstGeom prst="rect">
-            <a:avLst/>
-          </a:prstGeom>
-          <a:noFill/>
-        </p:spPr>
-        <p:txBody>
-          <a:bodyPr wrap="square" anchor="t" lIns="0" rIns="0" tIns="0" bIns="0">
-            <a:spAutoFit/>
-          </a:bodyPr>
-          <a:lstStyle/>
-          <a:p>
-            <a:pPr algn="l"/>
-            <a:r>
-              <a:rPr sz="900" b="1">
+          <p:cNvPr id="16" name="TextBox 15"/>
+          <p:cNvSpPr txBox="1"/>
+          <p:nvPr/>
+        </p:nvSpPr>
+        <p:spPr>
+          <a:xfrm>
+            <a:off x="3474720" y="2880360"/>
+            <a:ext cx="2331720" cy="777240"/>
+          </a:xfrm>
+          <a:prstGeom prst="rect">
+            <a:avLst/>
+          </a:prstGeom>
+          <a:noFill/>
+        </p:spPr>
+        <p:txBody>
+          <a:bodyPr wrap="square" anchor="t" lIns="0" rIns="0" tIns="0" bIns="0">
+            <a:spAutoFit/>
+          </a:bodyPr>
+          <a:lstStyle/>
+          <a:p>
+            <a:pPr algn="l"/>
+            <a:r>
+              <a:rPr sz="3600" b="1">
                 <a:solidFill>
                   <a:srgbClr val="2863C5"/>
                 </a:solidFill>
                 <a:latin typeface="Open Sans"/>
               </a:rPr>
-              <a:t>Who submits</a:t>
-            </a:r>
-          </a:p>
-        </p:txBody>
-      </p:sp>
-      <p:sp>
-        <p:nvSpPr>
-          <p:cNvPr id="27" name="TextBox 26"/>
-          <p:cNvSpPr txBox="1"/>
-          <p:nvPr/>
-        </p:nvSpPr>
-        <p:spPr>
-          <a:xfrm>
-            <a:off x="4480560" y="4197096"/>
-            <a:ext cx="3200400" cy="457200"/>
+              <a:t>70.8%</a:t>
+            </a:r>
+          </a:p>
+        </p:txBody>
+      </p:sp>
+      <p:sp>
+        <p:nvSpPr>
+          <p:cNvPr id="17" name="TextBox 16"/>
+          <p:cNvSpPr txBox="1"/>
+          <p:nvPr/>
+        </p:nvSpPr>
+        <p:spPr>
+          <a:xfrm>
+            <a:off x="3474720" y="3611880"/>
+            <a:ext cx="2331720" cy="365760"/>
           </a:xfrm>
           <a:prstGeom prst="rect">
             <a:avLst/>
@@ -10990,235 +10641,25 @@
                 </a:solidFill>
                 <a:latin typeface="Open Sans"/>
               </a:rPr>
-              <a:t>Member; we generate the packet + mailing instructions</a:t>
-            </a:r>
-          </a:p>
-        </p:txBody>
-      </p:sp>
-      <p:sp>
-        <p:nvSpPr>
-          <p:cNvPr id="28" name="TextBox 27"/>
-          <p:cNvSpPr txBox="1"/>
-          <p:nvPr/>
-        </p:nvSpPr>
-        <p:spPr>
-          <a:xfrm>
-            <a:off x="4480560" y="4526279"/>
-            <a:ext cx="1371600" cy="201168"/>
-          </a:xfrm>
-          <a:prstGeom prst="rect">
-            <a:avLst/>
-          </a:prstGeom>
-          <a:noFill/>
-        </p:spPr>
-        <p:txBody>
-          <a:bodyPr wrap="square" anchor="t" lIns="0" rIns="0" tIns="0" bIns="0">
-            <a:spAutoFit/>
-          </a:bodyPr>
-          <a:lstStyle/>
-          <a:p>
-            <a:pPr algn="l"/>
-            <a:r>
-              <a:rPr sz="900" b="1">
-                <a:solidFill>
-                  <a:srgbClr val="2863C5"/>
-                </a:solidFill>
-                <a:latin typeface="Open Sans"/>
-              </a:rPr>
-              <a:t>How</a:t>
-            </a:r>
-          </a:p>
-        </p:txBody>
-      </p:sp>
-      <p:sp>
-        <p:nvSpPr>
-          <p:cNvPr id="29" name="TextBox 28"/>
-          <p:cNvSpPr txBox="1"/>
-          <p:nvPr/>
-        </p:nvSpPr>
-        <p:spPr>
-          <a:xfrm>
-            <a:off x="4480560" y="4745736"/>
-            <a:ext cx="3200400" cy="457200"/>
-          </a:xfrm>
-          <a:prstGeom prst="rect">
-            <a:avLst/>
-          </a:prstGeom>
-          <a:noFill/>
-        </p:spPr>
-        <p:txBody>
-          <a:bodyPr wrap="square" anchor="t" lIns="0" rIns="0" tIns="0" bIns="0">
-            <a:spAutoFit/>
-          </a:bodyPr>
-          <a:lstStyle/>
-          <a:p>
-            <a:pPr algn="l"/>
-            <a:r>
-              <a:rPr sz="1000" b="0">
-                <a:solidFill>
-                  <a:srgbClr val="334155"/>
-                </a:solidFill>
-                <a:latin typeface="Open Sans"/>
-              </a:rPr>
-              <a:t>If ActionLetters mails directly, legal must confirm it isn't representative filing</a:t>
-            </a:r>
-          </a:p>
-        </p:txBody>
-      </p:sp>
-      <p:sp>
-        <p:nvSpPr>
-          <p:cNvPr id="30" name="TextBox 29"/>
-          <p:cNvSpPr txBox="1"/>
-          <p:nvPr/>
-        </p:nvSpPr>
-        <p:spPr>
-          <a:xfrm>
-            <a:off x="4480560" y="5074919"/>
-            <a:ext cx="1371600" cy="201168"/>
-          </a:xfrm>
-          <a:prstGeom prst="rect">
-            <a:avLst/>
-          </a:prstGeom>
-          <a:noFill/>
-        </p:spPr>
-        <p:txBody>
-          <a:bodyPr wrap="square" anchor="t" lIns="0" rIns="0" tIns="0" bIns="0">
-            <a:spAutoFit/>
-          </a:bodyPr>
-          <a:lstStyle/>
-          <a:p>
-            <a:pPr algn="l"/>
-            <a:r>
-              <a:rPr sz="900" b="1">
-                <a:solidFill>
-                  <a:srgbClr val="2863C5"/>
-                </a:solidFill>
-                <a:latin typeface="Open Sans"/>
-              </a:rPr>
-              <a:t>When</a:t>
-            </a:r>
-          </a:p>
-        </p:txBody>
-      </p:sp>
-      <p:sp>
-        <p:nvSpPr>
-          <p:cNvPr id="31" name="TextBox 30"/>
-          <p:cNvSpPr txBox="1"/>
-          <p:nvPr/>
-        </p:nvSpPr>
-        <p:spPr>
-          <a:xfrm>
-            <a:off x="4480560" y="5294375"/>
-            <a:ext cx="3200400" cy="457200"/>
-          </a:xfrm>
-          <a:prstGeom prst="rect">
-            <a:avLst/>
-          </a:prstGeom>
-          <a:noFill/>
-        </p:spPr>
-        <p:txBody>
-          <a:bodyPr wrap="square" anchor="t" lIns="0" rIns="0" tIns="0" bIns="0">
-            <a:spAutoFit/>
-          </a:bodyPr>
-          <a:lstStyle/>
-          <a:p>
-            <a:pPr algn="l"/>
-            <a:r>
-              <a:rPr sz="1000" b="0">
-                <a:solidFill>
-                  <a:srgbClr val="334155"/>
-                </a:solidFill>
-                <a:latin typeface="Open Sans"/>
-              </a:rPr>
-              <a:t>States requiring notarized physical paperwork</a:t>
-            </a:r>
-          </a:p>
-        </p:txBody>
-      </p:sp>
-      <p:sp>
-        <p:nvSpPr>
-          <p:cNvPr id="32" name="TextBox 31"/>
-          <p:cNvSpPr txBox="1"/>
-          <p:nvPr/>
-        </p:nvSpPr>
-        <p:spPr>
-          <a:xfrm>
-            <a:off x="4480560" y="5623559"/>
-            <a:ext cx="1371600" cy="201168"/>
-          </a:xfrm>
-          <a:prstGeom prst="rect">
-            <a:avLst/>
-          </a:prstGeom>
-          <a:noFill/>
-        </p:spPr>
-        <p:txBody>
-          <a:bodyPr wrap="square" anchor="t" lIns="0" rIns="0" tIns="0" bIns="0">
-            <a:spAutoFit/>
-          </a:bodyPr>
-          <a:lstStyle/>
-          <a:p>
-            <a:pPr algn="l"/>
-            <a:r>
-              <a:rPr sz="900" b="1">
-                <a:solidFill>
-                  <a:srgbClr val="2863C5"/>
-                </a:solidFill>
-                <a:latin typeface="Open Sans"/>
-              </a:rPr>
-              <a:t>Status</a:t>
-            </a:r>
-          </a:p>
-        </p:txBody>
-      </p:sp>
-      <p:sp>
-        <p:nvSpPr>
-          <p:cNvPr id="33" name="TextBox 32"/>
-          <p:cNvSpPr txBox="1"/>
-          <p:nvPr/>
-        </p:nvSpPr>
-        <p:spPr>
-          <a:xfrm>
-            <a:off x="4480560" y="5843015"/>
-            <a:ext cx="3200400" cy="457200"/>
-          </a:xfrm>
-          <a:prstGeom prst="rect">
-            <a:avLst/>
-          </a:prstGeom>
-          <a:noFill/>
-        </p:spPr>
-        <p:txBody>
-          <a:bodyPr wrap="square" anchor="t" lIns="0" rIns="0" tIns="0" bIns="0">
-            <a:spAutoFit/>
-          </a:bodyPr>
-          <a:lstStyle/>
-          <a:p>
-            <a:pPr algn="l"/>
-            <a:r>
-              <a:rPr sz="1000" b="0">
-                <a:solidFill>
-                  <a:srgbClr val="334155"/>
-                </a:solidFill>
-                <a:latin typeface="Open Sans"/>
-              </a:rPr>
-              <a:t>Available now · same rail as credit-dispute mailers</a:t>
-            </a:r>
-          </a:p>
-        </p:txBody>
-      </p:sp>
-      <p:sp>
-        <p:nvSpPr>
-          <p:cNvPr id="34" name="Rounded Rectangle 33"/>
+              <a:t>of the 30,862 active CA base</a:t>
+            </a:r>
+          </a:p>
+        </p:txBody>
+      </p:sp>
+      <p:sp>
+        <p:nvSpPr>
+          <p:cNvPr id="18" name="Rounded Rectangle 17"/>
           <p:cNvSpPr/>
           <p:nvPr/>
         </p:nvSpPr>
         <p:spPr>
           <a:xfrm>
-            <a:off x="8046720" y="2606040"/>
-            <a:ext cx="3657600" cy="3657600"/>
+            <a:off x="6126480" y="2606040"/>
+            <a:ext cx="2697480" cy="1417320"/>
           </a:xfrm>
           <a:prstGeom prst="roundRect">
             <a:avLst>
-              <a:gd name="adj" fmla="val 3000"/>
+              <a:gd name="adj" fmla="val 4000"/>
             </a:avLst>
           </a:prstGeom>
           <a:solidFill>
@@ -11255,17 +10696,2275 @@
       </p:sp>
       <p:sp>
         <p:nvSpPr>
-          <p:cNvPr id="35" name="Rectangle 34"/>
+          <p:cNvPr id="19" name="Rectangle 18"/>
           <p:cNvSpPr/>
           <p:nvPr/>
         </p:nvSpPr>
         <p:spPr>
           <a:xfrm>
-            <a:off x="8046720" y="2606040"/>
-            <a:ext cx="3657600" cy="164592"/>
-          </a:xfrm>
-          <a:prstGeom prst="rect">
-            <a:avLst/>
+            <a:off x="6126480" y="2606040"/>
+            <a:ext cx="2697480" cy="137160"/>
+          </a:xfrm>
+          <a:prstGeom prst="rect">
+            <a:avLst/>
+          </a:prstGeom>
+          <a:solidFill>
+            <a:srgbClr val="FC4C0B"/>
+          </a:solidFill>
+          <a:ln>
+            <a:noFill/>
+          </a:ln>
+          <a:effectLst/>
+        </p:spPr>
+        <p:style>
+          <a:lnRef idx="1">
+            <a:schemeClr val="accent1"/>
+          </a:lnRef>
+          <a:fillRef idx="3">
+            <a:schemeClr val="accent1"/>
+          </a:fillRef>
+          <a:effectRef idx="2">
+            <a:schemeClr val="accent1"/>
+          </a:effectRef>
+          <a:fontRef idx="minor">
+            <a:schemeClr val="lt1"/>
+          </a:fontRef>
+        </p:style>
+        <p:txBody>
+          <a:bodyPr rtlCol="0" anchor="ctr"/>
+          <a:lstStyle/>
+          <a:p>
+            <a:pPr algn="ctr"/>
+          </a:p>
+        </p:txBody>
+      </p:sp>
+      <p:sp>
+        <p:nvSpPr>
+          <p:cNvPr id="20" name="TextBox 19"/>
+          <p:cNvSpPr txBox="1"/>
+          <p:nvPr/>
+        </p:nvSpPr>
+        <p:spPr>
+          <a:xfrm>
+            <a:off x="6309360" y="2880360"/>
+            <a:ext cx="2331720" cy="777240"/>
+          </a:xfrm>
+          <a:prstGeom prst="rect">
+            <a:avLst/>
+          </a:prstGeom>
+          <a:noFill/>
+        </p:spPr>
+        <p:txBody>
+          <a:bodyPr wrap="square" anchor="t" lIns="0" rIns="0" tIns="0" bIns="0">
+            <a:spAutoFit/>
+          </a:bodyPr>
+          <a:lstStyle/>
+          <a:p>
+            <a:pPr algn="l"/>
+            <a:r>
+              <a:rPr sz="3600" b="1">
+                <a:solidFill>
+                  <a:srgbClr val="FC4C0B"/>
+                </a:solidFill>
+                <a:latin typeface="Open Sans"/>
+              </a:rPr>
+              <a:t>4.4M</a:t>
+            </a:r>
+          </a:p>
+        </p:txBody>
+      </p:sp>
+      <p:sp>
+        <p:nvSpPr>
+          <p:cNvPr id="21" name="TextBox 20"/>
+          <p:cNvSpPr txBox="1"/>
+          <p:nvPr/>
+        </p:nvSpPr>
+        <p:spPr>
+          <a:xfrm>
+            <a:off x="6309360" y="3611880"/>
+            <a:ext cx="2331720" cy="365760"/>
+          </a:xfrm>
+          <a:prstGeom prst="rect">
+            <a:avLst/>
+          </a:prstGeom>
+          <a:noFill/>
+        </p:spPr>
+        <p:txBody>
+          <a:bodyPr wrap="square" anchor="t" lIns="0" rIns="0" tIns="0" bIns="0">
+            <a:spAutoFit/>
+          </a:bodyPr>
+          <a:lstStyle/>
+          <a:p>
+            <a:pPr algn="l"/>
+            <a:r>
+              <a:rPr sz="1000" b="0">
+                <a:solidFill>
+                  <a:srgbClr val="334155"/>
+                </a:solidFill>
+                <a:latin typeface="Open Sans"/>
+              </a:rPr>
+              <a:t>matched property records across all tiers</a:t>
+            </a:r>
+          </a:p>
+        </p:txBody>
+      </p:sp>
+      <p:sp>
+        <p:nvSpPr>
+          <p:cNvPr id="22" name="Rounded Rectangle 21"/>
+          <p:cNvSpPr/>
+          <p:nvPr/>
+        </p:nvSpPr>
+        <p:spPr>
+          <a:xfrm>
+            <a:off x="8961120" y="2606040"/>
+            <a:ext cx="2697480" cy="1417320"/>
+          </a:xfrm>
+          <a:prstGeom prst="roundRect">
+            <a:avLst>
+              <a:gd name="adj" fmla="val 4000"/>
+            </a:avLst>
+          </a:prstGeom>
+          <a:solidFill>
+            <a:srgbClr val="FFFFFF"/>
+          </a:solidFill>
+          <a:ln w="6350">
+            <a:solidFill>
+              <a:srgbClr val="E2E8F0"/>
+            </a:solidFill>
+          </a:ln>
+          <a:effectLst/>
+        </p:spPr>
+        <p:style>
+          <a:lnRef idx="1">
+            <a:schemeClr val="accent1"/>
+          </a:lnRef>
+          <a:fillRef idx="3">
+            <a:schemeClr val="accent1"/>
+          </a:fillRef>
+          <a:effectRef idx="2">
+            <a:schemeClr val="accent1"/>
+          </a:effectRef>
+          <a:fontRef idx="minor">
+            <a:schemeClr val="lt1"/>
+          </a:fontRef>
+        </p:style>
+        <p:txBody>
+          <a:bodyPr rtlCol="0" anchor="ctr"/>
+          <a:lstStyle/>
+          <a:p>
+            <a:pPr algn="ctr"/>
+          </a:p>
+        </p:txBody>
+      </p:sp>
+      <p:sp>
+        <p:nvSpPr>
+          <p:cNvPr id="23" name="Rectangle 22"/>
+          <p:cNvSpPr/>
+          <p:nvPr/>
+        </p:nvSpPr>
+        <p:spPr>
+          <a:xfrm>
+            <a:off x="8961120" y="2606040"/>
+            <a:ext cx="2697480" cy="137160"/>
+          </a:xfrm>
+          <a:prstGeom prst="rect">
+            <a:avLst/>
+          </a:prstGeom>
+          <a:solidFill>
+            <a:srgbClr val="FC4C0B"/>
+          </a:solidFill>
+          <a:ln>
+            <a:noFill/>
+          </a:ln>
+          <a:effectLst/>
+        </p:spPr>
+        <p:style>
+          <a:lnRef idx="1">
+            <a:schemeClr val="accent1"/>
+          </a:lnRef>
+          <a:fillRef idx="3">
+            <a:schemeClr val="accent1"/>
+          </a:fillRef>
+          <a:effectRef idx="2">
+            <a:schemeClr val="accent1"/>
+          </a:effectRef>
+          <a:fontRef idx="minor">
+            <a:schemeClr val="lt1"/>
+          </a:fontRef>
+        </p:style>
+        <p:txBody>
+          <a:bodyPr rtlCol="0" anchor="ctr"/>
+          <a:lstStyle/>
+          <a:p>
+            <a:pPr algn="ctr"/>
+          </a:p>
+        </p:txBody>
+      </p:sp>
+      <p:sp>
+        <p:nvSpPr>
+          <p:cNvPr id="24" name="TextBox 23"/>
+          <p:cNvSpPr txBox="1"/>
+          <p:nvPr/>
+        </p:nvSpPr>
+        <p:spPr>
+          <a:xfrm>
+            <a:off x="9144000" y="2880360"/>
+            <a:ext cx="2331720" cy="777240"/>
+          </a:xfrm>
+          <a:prstGeom prst="rect">
+            <a:avLst/>
+          </a:prstGeom>
+          <a:noFill/>
+        </p:spPr>
+        <p:txBody>
+          <a:bodyPr wrap="square" anchor="t" lIns="0" rIns="0" tIns="0" bIns="0">
+            <a:spAutoFit/>
+          </a:bodyPr>
+          <a:lstStyle/>
+          <a:p>
+            <a:pPr algn="l"/>
+            <a:r>
+              <a:rPr sz="3600" b="1">
+                <a:solidFill>
+                  <a:srgbClr val="FC4C0B"/>
+                </a:solidFill>
+                <a:latin typeface="Open Sans"/>
+              </a:rPr>
+              <a:t>$324M</a:t>
+            </a:r>
+          </a:p>
+        </p:txBody>
+      </p:sp>
+      <p:sp>
+        <p:nvSpPr>
+          <p:cNvPr id="25" name="TextBox 24"/>
+          <p:cNvSpPr txBox="1"/>
+          <p:nvPr/>
+        </p:nvSpPr>
+        <p:spPr>
+          <a:xfrm>
+            <a:off x="9144000" y="3611880"/>
+            <a:ext cx="2331720" cy="365760"/>
+          </a:xfrm>
+          <a:prstGeom prst="rect">
+            <a:avLst/>
+          </a:prstGeom>
+          <a:noFill/>
+        </p:spPr>
+        <p:txBody>
+          <a:bodyPr wrap="square" anchor="t" lIns="0" rIns="0" tIns="0" bIns="0">
+            <a:spAutoFit/>
+          </a:bodyPr>
+          <a:lstStyle/>
+          <a:p>
+            <a:pPr algn="l"/>
+            <a:r>
+              <a:rPr sz="1000" b="0">
+                <a:solidFill>
+                  <a:srgbClr val="334155"/>
+                </a:solidFill>
+                <a:latin typeface="Open Sans"/>
+              </a:rPr>
+              <a:t>estimated value across all matches</a:t>
+            </a:r>
+          </a:p>
+        </p:txBody>
+      </p:sp>
+      <p:sp>
+        <p:nvSpPr>
+          <p:cNvPr id="26" name="TextBox 25"/>
+          <p:cNvSpPr txBox="1"/>
+          <p:nvPr/>
+        </p:nvSpPr>
+        <p:spPr>
+          <a:xfrm>
+            <a:off x="457200" y="4206240"/>
+            <a:ext cx="5486400" cy="320040"/>
+          </a:xfrm>
+          <a:prstGeom prst="rect">
+            <a:avLst/>
+          </a:prstGeom>
+          <a:noFill/>
+        </p:spPr>
+        <p:txBody>
+          <a:bodyPr wrap="square" anchor="t" lIns="0" rIns="0" tIns="0" bIns="0">
+            <a:spAutoFit/>
+          </a:bodyPr>
+          <a:lstStyle/>
+          <a:p>
+            <a:pPr algn="l"/>
+            <a:r>
+              <a:rPr sz="1100" b="1">
+                <a:solidFill>
+                  <a:srgbClr val="2863C5"/>
+                </a:solidFill>
+                <a:latin typeface="Open Sans"/>
+              </a:rPr>
+              <a:t>MATCH DISTRIBUTION</a:t>
+            </a:r>
+          </a:p>
+        </p:txBody>
+      </p:sp>
+      <p:sp>
+        <p:nvSpPr>
+          <p:cNvPr id="27" name="TextBox 26"/>
+          <p:cNvSpPr txBox="1"/>
+          <p:nvPr/>
+        </p:nvSpPr>
+        <p:spPr>
+          <a:xfrm>
+            <a:off x="457200" y="4498848"/>
+            <a:ext cx="5486400" cy="274320"/>
+          </a:xfrm>
+          <a:prstGeom prst="rect">
+            <a:avLst/>
+          </a:prstGeom>
+          <a:noFill/>
+        </p:spPr>
+        <p:txBody>
+          <a:bodyPr wrap="square" anchor="t" lIns="0" rIns="0" tIns="0" bIns="0">
+            <a:spAutoFit/>
+          </a:bodyPr>
+          <a:lstStyle/>
+          <a:p>
+            <a:pPr algn="l"/>
+            <a:r>
+              <a:rPr sz="1000" b="0">
+                <a:solidFill>
+                  <a:srgbClr val="64748B"/>
+                </a:solidFill>
+                <a:latin typeface="Open Sans"/>
+              </a:rPr>
+              <a:t>Distinct names cluster in the 1–5 record bucket — high-confidence matches.</a:t>
+            </a:r>
+          </a:p>
+        </p:txBody>
+      </p:sp>
+      <p:sp>
+        <p:nvSpPr>
+          <p:cNvPr id="28" name="Rectangle 27"/>
+          <p:cNvSpPr/>
+          <p:nvPr/>
+        </p:nvSpPr>
+        <p:spPr>
+          <a:xfrm>
+            <a:off x="457200" y="4846320"/>
+            <a:ext cx="5486400" cy="256032"/>
+          </a:xfrm>
+          <a:prstGeom prst="rect">
+            <a:avLst/>
+          </a:prstGeom>
+          <a:solidFill>
+            <a:srgbClr val="0F172A"/>
+          </a:solidFill>
+          <a:ln>
+            <a:noFill/>
+          </a:ln>
+          <a:effectLst/>
+        </p:spPr>
+        <p:style>
+          <a:lnRef idx="1">
+            <a:schemeClr val="accent1"/>
+          </a:lnRef>
+          <a:fillRef idx="3">
+            <a:schemeClr val="accent1"/>
+          </a:fillRef>
+          <a:effectRef idx="2">
+            <a:schemeClr val="accent1"/>
+          </a:effectRef>
+          <a:fontRef idx="minor">
+            <a:schemeClr val="lt1"/>
+          </a:fontRef>
+        </p:style>
+        <p:txBody>
+          <a:bodyPr rtlCol="0" anchor="ctr"/>
+          <a:lstStyle/>
+          <a:p>
+            <a:pPr algn="ctr"/>
+          </a:p>
+        </p:txBody>
+      </p:sp>
+      <p:sp>
+        <p:nvSpPr>
+          <p:cNvPr id="29" name="TextBox 28"/>
+          <p:cNvSpPr txBox="1"/>
+          <p:nvPr/>
+        </p:nvSpPr>
+        <p:spPr>
+          <a:xfrm>
+            <a:off x="548640" y="4892040"/>
+            <a:ext cx="1554480" cy="201168"/>
+          </a:xfrm>
+          <a:prstGeom prst="rect">
+            <a:avLst/>
+          </a:prstGeom>
+          <a:noFill/>
+        </p:spPr>
+        <p:txBody>
+          <a:bodyPr wrap="square" anchor="t" lIns="0" rIns="0" tIns="0" bIns="0">
+            <a:spAutoFit/>
+          </a:bodyPr>
+          <a:lstStyle/>
+          <a:p>
+            <a:pPr algn="l"/>
+            <a:r>
+              <a:rPr sz="900" b="1">
+                <a:solidFill>
+                  <a:srgbClr val="FFFFFF"/>
+                </a:solidFill>
+                <a:latin typeface="Open Sans"/>
+              </a:rPr>
+              <a:t>Bucket</a:t>
+            </a:r>
+          </a:p>
+        </p:txBody>
+      </p:sp>
+      <p:sp>
+        <p:nvSpPr>
+          <p:cNvPr id="30" name="TextBox 29"/>
+          <p:cNvSpPr txBox="1"/>
+          <p:nvPr/>
+        </p:nvSpPr>
+        <p:spPr>
+          <a:xfrm>
+            <a:off x="2194560" y="4892040"/>
+            <a:ext cx="914400" cy="201168"/>
+          </a:xfrm>
+          <a:prstGeom prst="rect">
+            <a:avLst/>
+          </a:prstGeom>
+          <a:noFill/>
+        </p:spPr>
+        <p:txBody>
+          <a:bodyPr wrap="square" anchor="t" lIns="0" rIns="0" tIns="0" bIns="0">
+            <a:spAutoFit/>
+          </a:bodyPr>
+          <a:lstStyle/>
+          <a:p>
+            <a:pPr algn="l"/>
+            <a:r>
+              <a:rPr sz="900" b="1">
+                <a:solidFill>
+                  <a:srgbClr val="FFFFFF"/>
+                </a:solidFill>
+                <a:latin typeface="Open Sans"/>
+              </a:rPr>
+              <a:t>Customers</a:t>
+            </a:r>
+          </a:p>
+        </p:txBody>
+      </p:sp>
+      <p:sp>
+        <p:nvSpPr>
+          <p:cNvPr id="31" name="TextBox 30"/>
+          <p:cNvSpPr txBox="1"/>
+          <p:nvPr/>
+        </p:nvSpPr>
+        <p:spPr>
+          <a:xfrm>
+            <a:off x="3246120" y="4892040"/>
+            <a:ext cx="914400" cy="201168"/>
+          </a:xfrm>
+          <a:prstGeom prst="rect">
+            <a:avLst/>
+          </a:prstGeom>
+          <a:noFill/>
+        </p:spPr>
+        <p:txBody>
+          <a:bodyPr wrap="square" anchor="t" lIns="0" rIns="0" tIns="0" bIns="0">
+            <a:spAutoFit/>
+          </a:bodyPr>
+          <a:lstStyle/>
+          <a:p>
+            <a:pPr algn="l"/>
+            <a:r>
+              <a:rPr sz="900" b="1">
+                <a:solidFill>
+                  <a:srgbClr val="FFFFFF"/>
+                </a:solidFill>
+                <a:latin typeface="Open Sans"/>
+              </a:rPr>
+              <a:t>$ value</a:t>
+            </a:r>
+          </a:p>
+        </p:txBody>
+      </p:sp>
+      <p:sp>
+        <p:nvSpPr>
+          <p:cNvPr id="32" name="TextBox 31"/>
+          <p:cNvSpPr txBox="1"/>
+          <p:nvPr/>
+        </p:nvSpPr>
+        <p:spPr>
+          <a:xfrm>
+            <a:off x="4297680" y="4892040"/>
+            <a:ext cx="1554480" cy="201168"/>
+          </a:xfrm>
+          <a:prstGeom prst="rect">
+            <a:avLst/>
+          </a:prstGeom>
+          <a:noFill/>
+        </p:spPr>
+        <p:txBody>
+          <a:bodyPr wrap="square" anchor="t" lIns="0" rIns="0" tIns="0" bIns="0">
+            <a:spAutoFit/>
+          </a:bodyPr>
+          <a:lstStyle/>
+          <a:p>
+            <a:pPr algn="l"/>
+            <a:r>
+              <a:rPr sz="900" b="1">
+                <a:solidFill>
+                  <a:srgbClr val="FFFFFF"/>
+                </a:solidFill>
+                <a:latin typeface="Open Sans"/>
+              </a:rPr>
+              <a:t>Note</a:t>
+            </a:r>
+          </a:p>
+        </p:txBody>
+      </p:sp>
+      <p:sp>
+        <p:nvSpPr>
+          <p:cNvPr id="33" name="Rectangle 32"/>
+          <p:cNvSpPr/>
+          <p:nvPr/>
+        </p:nvSpPr>
+        <p:spPr>
+          <a:xfrm>
+            <a:off x="457200" y="5102352"/>
+            <a:ext cx="5486400" cy="365760"/>
+          </a:xfrm>
+          <a:prstGeom prst="rect">
+            <a:avLst/>
+          </a:prstGeom>
+          <a:solidFill>
+            <a:srgbClr val="F8FAFC"/>
+          </a:solidFill>
+          <a:ln>
+            <a:noFill/>
+          </a:ln>
+          <a:effectLst/>
+        </p:spPr>
+        <p:style>
+          <a:lnRef idx="1">
+            <a:schemeClr val="accent1"/>
+          </a:lnRef>
+          <a:fillRef idx="3">
+            <a:schemeClr val="accent1"/>
+          </a:fillRef>
+          <a:effectRef idx="2">
+            <a:schemeClr val="accent1"/>
+          </a:effectRef>
+          <a:fontRef idx="minor">
+            <a:schemeClr val="lt1"/>
+          </a:fontRef>
+        </p:style>
+        <p:txBody>
+          <a:bodyPr rtlCol="0" anchor="ctr"/>
+          <a:lstStyle/>
+          <a:p>
+            <a:pPr algn="ctr"/>
+          </a:p>
+        </p:txBody>
+      </p:sp>
+      <p:sp>
+        <p:nvSpPr>
+          <p:cNvPr id="34" name="TextBox 33"/>
+          <p:cNvSpPr txBox="1"/>
+          <p:nvPr/>
+        </p:nvSpPr>
+        <p:spPr>
+          <a:xfrm>
+            <a:off x="548640" y="5175504"/>
+            <a:ext cx="1554480" cy="228600"/>
+          </a:xfrm>
+          <a:prstGeom prst="rect">
+            <a:avLst/>
+          </a:prstGeom>
+          <a:noFill/>
+        </p:spPr>
+        <p:txBody>
+          <a:bodyPr wrap="square" anchor="t" lIns="0" rIns="0" tIns="0" bIns="0">
+            <a:spAutoFit/>
+          </a:bodyPr>
+          <a:lstStyle/>
+          <a:p>
+            <a:pPr algn="l"/>
+            <a:r>
+              <a:rPr sz="1100" b="1">
+                <a:solidFill>
+                  <a:srgbClr val="0F172A"/>
+                </a:solidFill>
+                <a:latin typeface="Open Sans"/>
+              </a:rPr>
+              <a:t>1 record</a:t>
+            </a:r>
+          </a:p>
+        </p:txBody>
+      </p:sp>
+      <p:sp>
+        <p:nvSpPr>
+          <p:cNvPr id="35" name="TextBox 34"/>
+          <p:cNvSpPr txBox="1"/>
+          <p:nvPr/>
+        </p:nvSpPr>
+        <p:spPr>
+          <a:xfrm>
+            <a:off x="2194560" y="5175504"/>
+            <a:ext cx="914400" cy="228600"/>
+          </a:xfrm>
+          <a:prstGeom prst="rect">
+            <a:avLst/>
+          </a:prstGeom>
+          <a:noFill/>
+        </p:spPr>
+        <p:txBody>
+          <a:bodyPr wrap="square" anchor="t" lIns="0" rIns="0" tIns="0" bIns="0">
+            <a:spAutoFit/>
+          </a:bodyPr>
+          <a:lstStyle/>
+          <a:p>
+            <a:pPr algn="l"/>
+            <a:r>
+              <a:rPr sz="1100" b="0">
+                <a:solidFill>
+                  <a:srgbClr val="334155"/>
+                </a:solidFill>
+                <a:latin typeface="Open Sans"/>
+              </a:rPr>
+              <a:t>3,266</a:t>
+            </a:r>
+          </a:p>
+        </p:txBody>
+      </p:sp>
+      <p:sp>
+        <p:nvSpPr>
+          <p:cNvPr id="36" name="TextBox 35"/>
+          <p:cNvSpPr txBox="1"/>
+          <p:nvPr/>
+        </p:nvSpPr>
+        <p:spPr>
+          <a:xfrm>
+            <a:off x="3246120" y="5175504"/>
+            <a:ext cx="914400" cy="228600"/>
+          </a:xfrm>
+          <a:prstGeom prst="rect">
+            <a:avLst/>
+          </a:prstGeom>
+          <a:noFill/>
+        </p:spPr>
+        <p:txBody>
+          <a:bodyPr wrap="square" anchor="t" lIns="0" rIns="0" tIns="0" bIns="0">
+            <a:spAutoFit/>
+          </a:bodyPr>
+          <a:lstStyle/>
+          <a:p>
+            <a:pPr algn="l"/>
+            <a:r>
+              <a:rPr sz="1100" b="1">
+                <a:solidFill>
+                  <a:srgbClr val="059669"/>
+                </a:solidFill>
+                <a:latin typeface="Open Sans"/>
+              </a:rPr>
+              <a:t>$239K</a:t>
+            </a:r>
+          </a:p>
+        </p:txBody>
+      </p:sp>
+      <p:sp>
+        <p:nvSpPr>
+          <p:cNvPr id="37" name="TextBox 36"/>
+          <p:cNvSpPr txBox="1"/>
+          <p:nvPr/>
+        </p:nvSpPr>
+        <p:spPr>
+          <a:xfrm>
+            <a:off x="4297680" y="5175504"/>
+            <a:ext cx="1554480" cy="228600"/>
+          </a:xfrm>
+          <a:prstGeom prst="rect">
+            <a:avLst/>
+          </a:prstGeom>
+          <a:noFill/>
+        </p:spPr>
+        <p:txBody>
+          <a:bodyPr wrap="square" anchor="t" lIns="0" rIns="0" tIns="0" bIns="0">
+            <a:spAutoFit/>
+          </a:bodyPr>
+          <a:lstStyle/>
+          <a:p>
+            <a:pPr algn="l"/>
+            <a:r>
+              <a:rPr sz="1000" b="0">
+                <a:solidFill>
+                  <a:srgbClr val="64748B"/>
+                </a:solidFill>
+                <a:latin typeface="Open Sans"/>
+              </a:rPr>
+              <a:t>High confidence</a:t>
+            </a:r>
+          </a:p>
+        </p:txBody>
+      </p:sp>
+      <p:sp>
+        <p:nvSpPr>
+          <p:cNvPr id="38" name="Rectangle 37"/>
+          <p:cNvSpPr/>
+          <p:nvPr/>
+        </p:nvSpPr>
+        <p:spPr>
+          <a:xfrm>
+            <a:off x="457200" y="5468112"/>
+            <a:ext cx="5486400" cy="365760"/>
+          </a:xfrm>
+          <a:prstGeom prst="rect">
+            <a:avLst/>
+          </a:prstGeom>
+          <a:solidFill>
+            <a:srgbClr val="FFFFFF"/>
+          </a:solidFill>
+          <a:ln>
+            <a:noFill/>
+          </a:ln>
+          <a:effectLst/>
+        </p:spPr>
+        <p:style>
+          <a:lnRef idx="1">
+            <a:schemeClr val="accent1"/>
+          </a:lnRef>
+          <a:fillRef idx="3">
+            <a:schemeClr val="accent1"/>
+          </a:fillRef>
+          <a:effectRef idx="2">
+            <a:schemeClr val="accent1"/>
+          </a:effectRef>
+          <a:fontRef idx="minor">
+            <a:schemeClr val="lt1"/>
+          </a:fontRef>
+        </p:style>
+        <p:txBody>
+          <a:bodyPr rtlCol="0" anchor="ctr"/>
+          <a:lstStyle/>
+          <a:p>
+            <a:pPr algn="ctr"/>
+          </a:p>
+        </p:txBody>
+      </p:sp>
+      <p:sp>
+        <p:nvSpPr>
+          <p:cNvPr id="39" name="TextBox 38"/>
+          <p:cNvSpPr txBox="1"/>
+          <p:nvPr/>
+        </p:nvSpPr>
+        <p:spPr>
+          <a:xfrm>
+            <a:off x="548640" y="5541264"/>
+            <a:ext cx="1554480" cy="228600"/>
+          </a:xfrm>
+          <a:prstGeom prst="rect">
+            <a:avLst/>
+          </a:prstGeom>
+          <a:noFill/>
+        </p:spPr>
+        <p:txBody>
+          <a:bodyPr wrap="square" anchor="t" lIns="0" rIns="0" tIns="0" bIns="0">
+            <a:spAutoFit/>
+          </a:bodyPr>
+          <a:lstStyle/>
+          <a:p>
+            <a:pPr algn="l"/>
+            <a:r>
+              <a:rPr sz="1100" b="1">
+                <a:solidFill>
+                  <a:srgbClr val="0F172A"/>
+                </a:solidFill>
+                <a:latin typeface="Open Sans"/>
+              </a:rPr>
+              <a:t>2–5 records</a:t>
+            </a:r>
+          </a:p>
+        </p:txBody>
+      </p:sp>
+      <p:sp>
+        <p:nvSpPr>
+          <p:cNvPr id="40" name="TextBox 39"/>
+          <p:cNvSpPr txBox="1"/>
+          <p:nvPr/>
+        </p:nvSpPr>
+        <p:spPr>
+          <a:xfrm>
+            <a:off x="2194560" y="5541264"/>
+            <a:ext cx="914400" cy="228600"/>
+          </a:xfrm>
+          <a:prstGeom prst="rect">
+            <a:avLst/>
+          </a:prstGeom>
+          <a:noFill/>
+        </p:spPr>
+        <p:txBody>
+          <a:bodyPr wrap="square" anchor="t" lIns="0" rIns="0" tIns="0" bIns="0">
+            <a:spAutoFit/>
+          </a:bodyPr>
+          <a:lstStyle/>
+          <a:p>
+            <a:pPr algn="l"/>
+            <a:r>
+              <a:rPr sz="1100" b="0">
+                <a:solidFill>
+                  <a:srgbClr val="334155"/>
+                </a:solidFill>
+                <a:latin typeface="Open Sans"/>
+              </a:rPr>
+              <a:t>5,788</a:t>
+            </a:r>
+          </a:p>
+        </p:txBody>
+      </p:sp>
+      <p:sp>
+        <p:nvSpPr>
+          <p:cNvPr id="41" name="TextBox 40"/>
+          <p:cNvSpPr txBox="1"/>
+          <p:nvPr/>
+        </p:nvSpPr>
+        <p:spPr>
+          <a:xfrm>
+            <a:off x="3246120" y="5541264"/>
+            <a:ext cx="914400" cy="228600"/>
+          </a:xfrm>
+          <a:prstGeom prst="rect">
+            <a:avLst/>
+          </a:prstGeom>
+          <a:noFill/>
+        </p:spPr>
+        <p:txBody>
+          <a:bodyPr wrap="square" anchor="t" lIns="0" rIns="0" tIns="0" bIns="0">
+            <a:spAutoFit/>
+          </a:bodyPr>
+          <a:lstStyle/>
+          <a:p>
+            <a:pPr algn="l"/>
+            <a:r>
+              <a:rPr sz="1100" b="1">
+                <a:solidFill>
+                  <a:srgbClr val="059669"/>
+                </a:solidFill>
+                <a:latin typeface="Open Sans"/>
+              </a:rPr>
+              <a:t>$1.21M</a:t>
+            </a:r>
+          </a:p>
+        </p:txBody>
+      </p:sp>
+      <p:sp>
+        <p:nvSpPr>
+          <p:cNvPr id="42" name="TextBox 41"/>
+          <p:cNvSpPr txBox="1"/>
+          <p:nvPr/>
+        </p:nvSpPr>
+        <p:spPr>
+          <a:xfrm>
+            <a:off x="4297680" y="5541264"/>
+            <a:ext cx="1554480" cy="228600"/>
+          </a:xfrm>
+          <a:prstGeom prst="rect">
+            <a:avLst/>
+          </a:prstGeom>
+          <a:noFill/>
+        </p:spPr>
+        <p:txBody>
+          <a:bodyPr wrap="square" anchor="t" lIns="0" rIns="0" tIns="0" bIns="0">
+            <a:spAutoFit/>
+          </a:bodyPr>
+          <a:lstStyle/>
+          <a:p>
+            <a:pPr algn="l"/>
+            <a:r>
+              <a:rPr sz="1000" b="0">
+                <a:solidFill>
+                  <a:srgbClr val="64748B"/>
+                </a:solidFill>
+                <a:latin typeface="Open Sans"/>
+              </a:rPr>
+              <a:t>High confidence</a:t>
+            </a:r>
+          </a:p>
+        </p:txBody>
+      </p:sp>
+      <p:sp>
+        <p:nvSpPr>
+          <p:cNvPr id="43" name="Rectangle 42"/>
+          <p:cNvSpPr/>
+          <p:nvPr/>
+        </p:nvSpPr>
+        <p:spPr>
+          <a:xfrm>
+            <a:off x="457200" y="5833872"/>
+            <a:ext cx="5486400" cy="365760"/>
+          </a:xfrm>
+          <a:prstGeom prst="rect">
+            <a:avLst/>
+          </a:prstGeom>
+          <a:solidFill>
+            <a:srgbClr val="F8FAFC"/>
+          </a:solidFill>
+          <a:ln>
+            <a:noFill/>
+          </a:ln>
+          <a:effectLst/>
+        </p:spPr>
+        <p:style>
+          <a:lnRef idx="1">
+            <a:schemeClr val="accent1"/>
+          </a:lnRef>
+          <a:fillRef idx="3">
+            <a:schemeClr val="accent1"/>
+          </a:fillRef>
+          <a:effectRef idx="2">
+            <a:schemeClr val="accent1"/>
+          </a:effectRef>
+          <a:fontRef idx="minor">
+            <a:schemeClr val="lt1"/>
+          </a:fontRef>
+        </p:style>
+        <p:txBody>
+          <a:bodyPr rtlCol="0" anchor="ctr"/>
+          <a:lstStyle/>
+          <a:p>
+            <a:pPr algn="ctr"/>
+          </a:p>
+        </p:txBody>
+      </p:sp>
+      <p:sp>
+        <p:nvSpPr>
+          <p:cNvPr id="44" name="TextBox 43"/>
+          <p:cNvSpPr txBox="1"/>
+          <p:nvPr/>
+        </p:nvSpPr>
+        <p:spPr>
+          <a:xfrm>
+            <a:off x="548640" y="5907024"/>
+            <a:ext cx="1554480" cy="228600"/>
+          </a:xfrm>
+          <a:prstGeom prst="rect">
+            <a:avLst/>
+          </a:prstGeom>
+          <a:noFill/>
+        </p:spPr>
+        <p:txBody>
+          <a:bodyPr wrap="square" anchor="t" lIns="0" rIns="0" tIns="0" bIns="0">
+            <a:spAutoFit/>
+          </a:bodyPr>
+          <a:lstStyle/>
+          <a:p>
+            <a:pPr algn="l"/>
+            <a:r>
+              <a:rPr sz="1100" b="1">
+                <a:solidFill>
+                  <a:srgbClr val="0F172A"/>
+                </a:solidFill>
+                <a:latin typeface="Open Sans"/>
+              </a:rPr>
+              <a:t>6–20 records</a:t>
+            </a:r>
+          </a:p>
+        </p:txBody>
+      </p:sp>
+      <p:sp>
+        <p:nvSpPr>
+          <p:cNvPr id="45" name="TextBox 44"/>
+          <p:cNvSpPr txBox="1"/>
+          <p:nvPr/>
+        </p:nvSpPr>
+        <p:spPr>
+          <a:xfrm>
+            <a:off x="2194560" y="5907024"/>
+            <a:ext cx="914400" cy="228600"/>
+          </a:xfrm>
+          <a:prstGeom prst="rect">
+            <a:avLst/>
+          </a:prstGeom>
+          <a:noFill/>
+        </p:spPr>
+        <p:txBody>
+          <a:bodyPr wrap="square" anchor="t" lIns="0" rIns="0" tIns="0" bIns="0">
+            <a:spAutoFit/>
+          </a:bodyPr>
+          <a:lstStyle/>
+          <a:p>
+            <a:pPr algn="l"/>
+            <a:r>
+              <a:rPr sz="1100" b="0">
+                <a:solidFill>
+                  <a:srgbClr val="334155"/>
+                </a:solidFill>
+                <a:latin typeface="Open Sans"/>
+              </a:rPr>
+              <a:t>4,393</a:t>
+            </a:r>
+          </a:p>
+        </p:txBody>
+      </p:sp>
+      <p:sp>
+        <p:nvSpPr>
+          <p:cNvPr id="46" name="TextBox 45"/>
+          <p:cNvSpPr txBox="1"/>
+          <p:nvPr/>
+        </p:nvSpPr>
+        <p:spPr>
+          <a:xfrm>
+            <a:off x="3246120" y="5907024"/>
+            <a:ext cx="914400" cy="228600"/>
+          </a:xfrm>
+          <a:prstGeom prst="rect">
+            <a:avLst/>
+          </a:prstGeom>
+          <a:noFill/>
+        </p:spPr>
+        <p:txBody>
+          <a:bodyPr wrap="square" anchor="t" lIns="0" rIns="0" tIns="0" bIns="0">
+            <a:spAutoFit/>
+          </a:bodyPr>
+          <a:lstStyle/>
+          <a:p>
+            <a:pPr algn="l"/>
+            <a:r>
+              <a:rPr sz="1100" b="1">
+                <a:solidFill>
+                  <a:srgbClr val="FFB352"/>
+                </a:solidFill>
+                <a:latin typeface="Open Sans"/>
+              </a:rPr>
+              <a:t>$3.50M</a:t>
+            </a:r>
+          </a:p>
+        </p:txBody>
+      </p:sp>
+      <p:sp>
+        <p:nvSpPr>
+          <p:cNvPr id="47" name="TextBox 46"/>
+          <p:cNvSpPr txBox="1"/>
+          <p:nvPr/>
+        </p:nvSpPr>
+        <p:spPr>
+          <a:xfrm>
+            <a:off x="4297680" y="5907024"/>
+            <a:ext cx="1554480" cy="228600"/>
+          </a:xfrm>
+          <a:prstGeom prst="rect">
+            <a:avLst/>
+          </a:prstGeom>
+          <a:noFill/>
+        </p:spPr>
+        <p:txBody>
+          <a:bodyPr wrap="square" anchor="t" lIns="0" rIns="0" tIns="0" bIns="0">
+            <a:spAutoFit/>
+          </a:bodyPr>
+          <a:lstStyle/>
+          <a:p>
+            <a:pPr algn="l"/>
+            <a:r>
+              <a:rPr sz="1000" b="0">
+                <a:solidFill>
+                  <a:srgbClr val="64748B"/>
+                </a:solidFill>
+                <a:latin typeface="Open Sans"/>
+              </a:rPr>
+              <a:t>Mixed — needs review</a:t>
+            </a:r>
+          </a:p>
+        </p:txBody>
+      </p:sp>
+      <p:sp>
+        <p:nvSpPr>
+          <p:cNvPr id="48" name="Rectangle 47"/>
+          <p:cNvSpPr/>
+          <p:nvPr/>
+        </p:nvSpPr>
+        <p:spPr>
+          <a:xfrm>
+            <a:off x="457200" y="6199632"/>
+            <a:ext cx="5486400" cy="365760"/>
+          </a:xfrm>
+          <a:prstGeom prst="rect">
+            <a:avLst/>
+          </a:prstGeom>
+          <a:solidFill>
+            <a:srgbClr val="FFFFFF"/>
+          </a:solidFill>
+          <a:ln>
+            <a:noFill/>
+          </a:ln>
+          <a:effectLst/>
+        </p:spPr>
+        <p:style>
+          <a:lnRef idx="1">
+            <a:schemeClr val="accent1"/>
+          </a:lnRef>
+          <a:fillRef idx="3">
+            <a:schemeClr val="accent1"/>
+          </a:fillRef>
+          <a:effectRef idx="2">
+            <a:schemeClr val="accent1"/>
+          </a:effectRef>
+          <a:fontRef idx="minor">
+            <a:schemeClr val="lt1"/>
+          </a:fontRef>
+        </p:style>
+        <p:txBody>
+          <a:bodyPr rtlCol="0" anchor="ctr"/>
+          <a:lstStyle/>
+          <a:p>
+            <a:pPr algn="ctr"/>
+          </a:p>
+        </p:txBody>
+      </p:sp>
+      <p:sp>
+        <p:nvSpPr>
+          <p:cNvPr id="49" name="TextBox 48"/>
+          <p:cNvSpPr txBox="1"/>
+          <p:nvPr/>
+        </p:nvSpPr>
+        <p:spPr>
+          <a:xfrm>
+            <a:off x="548640" y="6272784"/>
+            <a:ext cx="1554480" cy="228600"/>
+          </a:xfrm>
+          <a:prstGeom prst="rect">
+            <a:avLst/>
+          </a:prstGeom>
+          <a:noFill/>
+        </p:spPr>
+        <p:txBody>
+          <a:bodyPr wrap="square" anchor="t" lIns="0" rIns="0" tIns="0" bIns="0">
+            <a:spAutoFit/>
+          </a:bodyPr>
+          <a:lstStyle/>
+          <a:p>
+            <a:pPr algn="l"/>
+            <a:r>
+              <a:rPr sz="1100" b="1">
+                <a:solidFill>
+                  <a:srgbClr val="0F172A"/>
+                </a:solidFill>
+                <a:latin typeface="Open Sans"/>
+              </a:rPr>
+              <a:t>20+ records</a:t>
+            </a:r>
+          </a:p>
+        </p:txBody>
+      </p:sp>
+      <p:sp>
+        <p:nvSpPr>
+          <p:cNvPr id="50" name="TextBox 49"/>
+          <p:cNvSpPr txBox="1"/>
+          <p:nvPr/>
+        </p:nvSpPr>
+        <p:spPr>
+          <a:xfrm>
+            <a:off x="2194560" y="6272784"/>
+            <a:ext cx="914400" cy="228600"/>
+          </a:xfrm>
+          <a:prstGeom prst="rect">
+            <a:avLst/>
+          </a:prstGeom>
+          <a:noFill/>
+        </p:spPr>
+        <p:txBody>
+          <a:bodyPr wrap="square" anchor="t" lIns="0" rIns="0" tIns="0" bIns="0">
+            <a:spAutoFit/>
+          </a:bodyPr>
+          <a:lstStyle/>
+          <a:p>
+            <a:pPr algn="l"/>
+            <a:r>
+              <a:rPr sz="1100" b="0">
+                <a:solidFill>
+                  <a:srgbClr val="334155"/>
+                </a:solidFill>
+                <a:latin typeface="Open Sans"/>
+              </a:rPr>
+              <a:t>8,417</a:t>
+            </a:r>
+          </a:p>
+        </p:txBody>
+      </p:sp>
+      <p:sp>
+        <p:nvSpPr>
+          <p:cNvPr id="51" name="TextBox 50"/>
+          <p:cNvSpPr txBox="1"/>
+          <p:nvPr/>
+        </p:nvSpPr>
+        <p:spPr>
+          <a:xfrm>
+            <a:off x="3246120" y="6272784"/>
+            <a:ext cx="914400" cy="228600"/>
+          </a:xfrm>
+          <a:prstGeom prst="rect">
+            <a:avLst/>
+          </a:prstGeom>
+          <a:noFill/>
+        </p:spPr>
+        <p:txBody>
+          <a:bodyPr wrap="square" anchor="t" lIns="0" rIns="0" tIns="0" bIns="0">
+            <a:spAutoFit/>
+          </a:bodyPr>
+          <a:lstStyle/>
+          <a:p>
+            <a:pPr algn="l"/>
+            <a:r>
+              <a:rPr sz="1100" b="1">
+                <a:solidFill>
+                  <a:srgbClr val="64748B"/>
+                </a:solidFill>
+                <a:latin typeface="Open Sans"/>
+              </a:rPr>
+              <a:t>$319M</a:t>
+            </a:r>
+          </a:p>
+        </p:txBody>
+      </p:sp>
+      <p:sp>
+        <p:nvSpPr>
+          <p:cNvPr id="52" name="TextBox 51"/>
+          <p:cNvSpPr txBox="1"/>
+          <p:nvPr/>
+        </p:nvSpPr>
+        <p:spPr>
+          <a:xfrm>
+            <a:off x="4297680" y="6272784"/>
+            <a:ext cx="1554480" cy="228600"/>
+          </a:xfrm>
+          <a:prstGeom prst="rect">
+            <a:avLst/>
+          </a:prstGeom>
+          <a:noFill/>
+        </p:spPr>
+        <p:txBody>
+          <a:bodyPr wrap="square" anchor="t" lIns="0" rIns="0" tIns="0" bIns="0">
+            <a:spAutoFit/>
+          </a:bodyPr>
+          <a:lstStyle/>
+          <a:p>
+            <a:pPr algn="l"/>
+            <a:r>
+              <a:rPr sz="1000" b="0">
+                <a:solidFill>
+                  <a:srgbClr val="64748B"/>
+                </a:solidFill>
+                <a:latin typeface="Open Sans"/>
+              </a:rPr>
+              <a:t>Common-name collisions</a:t>
+            </a:r>
+          </a:p>
+        </p:txBody>
+      </p:sp>
+      <p:sp>
+        <p:nvSpPr>
+          <p:cNvPr id="53" name="TextBox 52"/>
+          <p:cNvSpPr txBox="1"/>
+          <p:nvPr/>
+        </p:nvSpPr>
+        <p:spPr>
+          <a:xfrm>
+            <a:off x="6217920" y="4206240"/>
+            <a:ext cx="5486400" cy="320040"/>
+          </a:xfrm>
+          <a:prstGeom prst="rect">
+            <a:avLst/>
+          </a:prstGeom>
+          <a:noFill/>
+        </p:spPr>
+        <p:txBody>
+          <a:bodyPr wrap="square" anchor="t" lIns="0" rIns="0" tIns="0" bIns="0">
+            <a:spAutoFit/>
+          </a:bodyPr>
+          <a:lstStyle/>
+          <a:p>
+            <a:pPr algn="l"/>
+            <a:r>
+              <a:rPr sz="1100" b="1">
+                <a:solidFill>
+                  <a:srgbClr val="2863C5"/>
+                </a:solidFill>
+                <a:latin typeface="Open Sans"/>
+              </a:rPr>
+              <a:t>MATCHES BY TIER</a:t>
+            </a:r>
+          </a:p>
+        </p:txBody>
+      </p:sp>
+      <p:sp>
+        <p:nvSpPr>
+          <p:cNvPr id="54" name="TextBox 53"/>
+          <p:cNvSpPr txBox="1"/>
+          <p:nvPr/>
+        </p:nvSpPr>
+        <p:spPr>
+          <a:xfrm>
+            <a:off x="6217920" y="4498848"/>
+            <a:ext cx="5486400" cy="274320"/>
+          </a:xfrm>
+          <a:prstGeom prst="rect">
+            <a:avLst/>
+          </a:prstGeom>
+          <a:noFill/>
+        </p:spPr>
+        <p:txBody>
+          <a:bodyPr wrap="square" anchor="t" lIns="0" rIns="0" tIns="0" bIns="0">
+            <a:spAutoFit/>
+          </a:bodyPr>
+          <a:lstStyle/>
+          <a:p>
+            <a:pPr algn="l"/>
+            <a:r>
+              <a:rPr sz="1000" b="0">
+                <a:solidFill>
+                  <a:srgbClr val="64748B"/>
+                </a:solidFill>
+                <a:latin typeface="Open Sans"/>
+              </a:rPr>
+              <a:t>Tier 04 ($500+) = highest dollar value per record.</a:t>
+            </a:r>
+          </a:p>
+        </p:txBody>
+      </p:sp>
+      <p:sp>
+        <p:nvSpPr>
+          <p:cNvPr id="55" name="Rectangle 54"/>
+          <p:cNvSpPr/>
+          <p:nvPr/>
+        </p:nvSpPr>
+        <p:spPr>
+          <a:xfrm>
+            <a:off x="6217920" y="4846320"/>
+            <a:ext cx="5486400" cy="256032"/>
+          </a:xfrm>
+          <a:prstGeom prst="rect">
+            <a:avLst/>
+          </a:prstGeom>
+          <a:solidFill>
+            <a:srgbClr val="0F172A"/>
+          </a:solidFill>
+          <a:ln>
+            <a:noFill/>
+          </a:ln>
+          <a:effectLst/>
+        </p:spPr>
+        <p:style>
+          <a:lnRef idx="1">
+            <a:schemeClr val="accent1"/>
+          </a:lnRef>
+          <a:fillRef idx="3">
+            <a:schemeClr val="accent1"/>
+          </a:fillRef>
+          <a:effectRef idx="2">
+            <a:schemeClr val="accent1"/>
+          </a:effectRef>
+          <a:fontRef idx="minor">
+            <a:schemeClr val="lt1"/>
+          </a:fontRef>
+        </p:style>
+        <p:txBody>
+          <a:bodyPr rtlCol="0" anchor="ctr"/>
+          <a:lstStyle/>
+          <a:p>
+            <a:pPr algn="ctr"/>
+          </a:p>
+        </p:txBody>
+      </p:sp>
+      <p:sp>
+        <p:nvSpPr>
+          <p:cNvPr id="56" name="TextBox 55"/>
+          <p:cNvSpPr txBox="1"/>
+          <p:nvPr/>
+        </p:nvSpPr>
+        <p:spPr>
+          <a:xfrm>
+            <a:off x="6309360" y="4892040"/>
+            <a:ext cx="914400" cy="201168"/>
+          </a:xfrm>
+          <a:prstGeom prst="rect">
+            <a:avLst/>
+          </a:prstGeom>
+          <a:noFill/>
+        </p:spPr>
+        <p:txBody>
+          <a:bodyPr wrap="square" anchor="t" lIns="0" rIns="0" tIns="0" bIns="0">
+            <a:spAutoFit/>
+          </a:bodyPr>
+          <a:lstStyle/>
+          <a:p>
+            <a:pPr algn="l"/>
+            <a:r>
+              <a:rPr sz="900" b="1">
+                <a:solidFill>
+                  <a:srgbClr val="FFFFFF"/>
+                </a:solidFill>
+                <a:latin typeface="Open Sans"/>
+              </a:rPr>
+              <a:t>Tier</a:t>
+            </a:r>
+          </a:p>
+        </p:txBody>
+      </p:sp>
+      <p:sp>
+        <p:nvSpPr>
+          <p:cNvPr id="57" name="TextBox 56"/>
+          <p:cNvSpPr txBox="1"/>
+          <p:nvPr/>
+        </p:nvSpPr>
+        <p:spPr>
+          <a:xfrm>
+            <a:off x="7269480" y="4892040"/>
+            <a:ext cx="1280160" cy="201168"/>
+          </a:xfrm>
+          <a:prstGeom prst="rect">
+            <a:avLst/>
+          </a:prstGeom>
+          <a:noFill/>
+        </p:spPr>
+        <p:txBody>
+          <a:bodyPr wrap="square" anchor="t" lIns="0" rIns="0" tIns="0" bIns="0">
+            <a:spAutoFit/>
+          </a:bodyPr>
+          <a:lstStyle/>
+          <a:p>
+            <a:pPr algn="l"/>
+            <a:r>
+              <a:rPr sz="900" b="1">
+                <a:solidFill>
+                  <a:srgbClr val="FFFFFF"/>
+                </a:solidFill>
+                <a:latin typeface="Open Sans"/>
+              </a:rPr>
+              <a:t>Range</a:t>
+            </a:r>
+          </a:p>
+        </p:txBody>
+      </p:sp>
+      <p:sp>
+        <p:nvSpPr>
+          <p:cNvPr id="58" name="TextBox 57"/>
+          <p:cNvSpPr txBox="1"/>
+          <p:nvPr/>
+        </p:nvSpPr>
+        <p:spPr>
+          <a:xfrm>
+            <a:off x="8641080" y="4892040"/>
+            <a:ext cx="1371600" cy="201168"/>
+          </a:xfrm>
+          <a:prstGeom prst="rect">
+            <a:avLst/>
+          </a:prstGeom>
+          <a:noFill/>
+        </p:spPr>
+        <p:txBody>
+          <a:bodyPr wrap="square" anchor="t" lIns="0" rIns="0" tIns="0" bIns="0">
+            <a:spAutoFit/>
+          </a:bodyPr>
+          <a:lstStyle/>
+          <a:p>
+            <a:pPr algn="l"/>
+            <a:r>
+              <a:rPr sz="900" b="1">
+                <a:solidFill>
+                  <a:srgbClr val="FFFFFF"/>
+                </a:solidFill>
+                <a:latin typeface="Open Sans"/>
+              </a:rPr>
+              <a:t>Records</a:t>
+            </a:r>
+          </a:p>
+        </p:txBody>
+      </p:sp>
+      <p:sp>
+        <p:nvSpPr>
+          <p:cNvPr id="59" name="TextBox 58"/>
+          <p:cNvSpPr txBox="1"/>
+          <p:nvPr/>
+        </p:nvSpPr>
+        <p:spPr>
+          <a:xfrm>
+            <a:off x="10104120" y="4892040"/>
+            <a:ext cx="1371600" cy="201168"/>
+          </a:xfrm>
+          <a:prstGeom prst="rect">
+            <a:avLst/>
+          </a:prstGeom>
+          <a:noFill/>
+        </p:spPr>
+        <p:txBody>
+          <a:bodyPr wrap="square" anchor="t" lIns="0" rIns="0" tIns="0" bIns="0">
+            <a:spAutoFit/>
+          </a:bodyPr>
+          <a:lstStyle/>
+          <a:p>
+            <a:pPr algn="l"/>
+            <a:r>
+              <a:rPr sz="900" b="1">
+                <a:solidFill>
+                  <a:srgbClr val="FFFFFF"/>
+                </a:solidFill>
+                <a:latin typeface="Open Sans"/>
+              </a:rPr>
+              <a:t>$ value</a:t>
+            </a:r>
+          </a:p>
+        </p:txBody>
+      </p:sp>
+      <p:sp>
+        <p:nvSpPr>
+          <p:cNvPr id="60" name="Rectangle 59"/>
+          <p:cNvSpPr/>
+          <p:nvPr/>
+        </p:nvSpPr>
+        <p:spPr>
+          <a:xfrm>
+            <a:off x="6217920" y="5102352"/>
+            <a:ext cx="5486400" cy="365760"/>
+          </a:xfrm>
+          <a:prstGeom prst="rect">
+            <a:avLst/>
+          </a:prstGeom>
+          <a:solidFill>
+            <a:srgbClr val="F8FAFC"/>
+          </a:solidFill>
+          <a:ln>
+            <a:noFill/>
+          </a:ln>
+          <a:effectLst/>
+        </p:spPr>
+        <p:style>
+          <a:lnRef idx="1">
+            <a:schemeClr val="accent1"/>
+          </a:lnRef>
+          <a:fillRef idx="3">
+            <a:schemeClr val="accent1"/>
+          </a:fillRef>
+          <a:effectRef idx="2">
+            <a:schemeClr val="accent1"/>
+          </a:effectRef>
+          <a:fontRef idx="minor">
+            <a:schemeClr val="lt1"/>
+          </a:fontRef>
+        </p:style>
+        <p:txBody>
+          <a:bodyPr rtlCol="0" anchor="ctr"/>
+          <a:lstStyle/>
+          <a:p>
+            <a:pPr algn="ctr"/>
+          </a:p>
+        </p:txBody>
+      </p:sp>
+      <p:sp>
+        <p:nvSpPr>
+          <p:cNvPr id="61" name="TextBox 60"/>
+          <p:cNvSpPr txBox="1"/>
+          <p:nvPr/>
+        </p:nvSpPr>
+        <p:spPr>
+          <a:xfrm>
+            <a:off x="6309360" y="5175504"/>
+            <a:ext cx="914400" cy="228600"/>
+          </a:xfrm>
+          <a:prstGeom prst="rect">
+            <a:avLst/>
+          </a:prstGeom>
+          <a:noFill/>
+        </p:spPr>
+        <p:txBody>
+          <a:bodyPr wrap="square" anchor="t" lIns="0" rIns="0" tIns="0" bIns="0">
+            <a:spAutoFit/>
+          </a:bodyPr>
+          <a:lstStyle/>
+          <a:p>
+            <a:pPr algn="l"/>
+            <a:r>
+              <a:rPr sz="1100" b="1">
+                <a:solidFill>
+                  <a:srgbClr val="64748B"/>
+                </a:solidFill>
+                <a:latin typeface="Open Sans"/>
+              </a:rPr>
+              <a:t>Tier 01</a:t>
+            </a:r>
+          </a:p>
+        </p:txBody>
+      </p:sp>
+      <p:sp>
+        <p:nvSpPr>
+          <p:cNvPr id="62" name="TextBox 61"/>
+          <p:cNvSpPr txBox="1"/>
+          <p:nvPr/>
+        </p:nvSpPr>
+        <p:spPr>
+          <a:xfrm>
+            <a:off x="7269480" y="5175504"/>
+            <a:ext cx="1280160" cy="228600"/>
+          </a:xfrm>
+          <a:prstGeom prst="rect">
+            <a:avLst/>
+          </a:prstGeom>
+          <a:noFill/>
+        </p:spPr>
+        <p:txBody>
+          <a:bodyPr wrap="square" anchor="t" lIns="0" rIns="0" tIns="0" bIns="0">
+            <a:spAutoFit/>
+          </a:bodyPr>
+          <a:lstStyle/>
+          <a:p>
+            <a:pPr algn="l"/>
+            <a:r>
+              <a:rPr sz="1000" b="0">
+                <a:solidFill>
+                  <a:srgbClr val="334155"/>
+                </a:solidFill>
+                <a:latin typeface="Open Sans"/>
+              </a:rPr>
+              <a:t>$0–$9.99</a:t>
+            </a:r>
+          </a:p>
+        </p:txBody>
+      </p:sp>
+      <p:sp>
+        <p:nvSpPr>
+          <p:cNvPr id="63" name="TextBox 62"/>
+          <p:cNvSpPr txBox="1"/>
+          <p:nvPr/>
+        </p:nvSpPr>
+        <p:spPr>
+          <a:xfrm>
+            <a:off x="8641080" y="5175504"/>
+            <a:ext cx="1371600" cy="228600"/>
+          </a:xfrm>
+          <a:prstGeom prst="rect">
+            <a:avLst/>
+          </a:prstGeom>
+          <a:noFill/>
+        </p:spPr>
+        <p:txBody>
+          <a:bodyPr wrap="square" anchor="t" lIns="0" rIns="0" tIns="0" bIns="0">
+            <a:spAutoFit/>
+          </a:bodyPr>
+          <a:lstStyle/>
+          <a:p>
+            <a:pPr algn="l"/>
+            <a:r>
+              <a:rPr sz="1100" b="0">
+                <a:solidFill>
+                  <a:srgbClr val="334155"/>
+                </a:solidFill>
+                <a:latin typeface="Open Sans"/>
+              </a:rPr>
+              <a:t>2,283,461</a:t>
+            </a:r>
+          </a:p>
+        </p:txBody>
+      </p:sp>
+      <p:sp>
+        <p:nvSpPr>
+          <p:cNvPr id="64" name="TextBox 63"/>
+          <p:cNvSpPr txBox="1"/>
+          <p:nvPr/>
+        </p:nvSpPr>
+        <p:spPr>
+          <a:xfrm>
+            <a:off x="10104120" y="5175504"/>
+            <a:ext cx="1371600" cy="228600"/>
+          </a:xfrm>
+          <a:prstGeom prst="rect">
+            <a:avLst/>
+          </a:prstGeom>
+          <a:noFill/>
+        </p:spPr>
+        <p:txBody>
+          <a:bodyPr wrap="square" anchor="t" lIns="0" rIns="0" tIns="0" bIns="0">
+            <a:spAutoFit/>
+          </a:bodyPr>
+          <a:lstStyle/>
+          <a:p>
+            <a:pPr algn="l"/>
+            <a:r>
+              <a:rPr sz="1100" b="1">
+                <a:solidFill>
+                  <a:srgbClr val="64748B"/>
+                </a:solidFill>
+                <a:latin typeface="Open Sans"/>
+              </a:rPr>
+              <a:t>$5.8M</a:t>
+            </a:r>
+          </a:p>
+        </p:txBody>
+      </p:sp>
+      <p:sp>
+        <p:nvSpPr>
+          <p:cNvPr id="65" name="Rectangle 64"/>
+          <p:cNvSpPr/>
+          <p:nvPr/>
+        </p:nvSpPr>
+        <p:spPr>
+          <a:xfrm>
+            <a:off x="6217920" y="5468112"/>
+            <a:ext cx="5486400" cy="365760"/>
+          </a:xfrm>
+          <a:prstGeom prst="rect">
+            <a:avLst/>
+          </a:prstGeom>
+          <a:solidFill>
+            <a:srgbClr val="FFFFFF"/>
+          </a:solidFill>
+          <a:ln>
+            <a:noFill/>
+          </a:ln>
+          <a:effectLst/>
+        </p:spPr>
+        <p:style>
+          <a:lnRef idx="1">
+            <a:schemeClr val="accent1"/>
+          </a:lnRef>
+          <a:fillRef idx="3">
+            <a:schemeClr val="accent1"/>
+          </a:fillRef>
+          <a:effectRef idx="2">
+            <a:schemeClr val="accent1"/>
+          </a:effectRef>
+          <a:fontRef idx="minor">
+            <a:schemeClr val="lt1"/>
+          </a:fontRef>
+        </p:style>
+        <p:txBody>
+          <a:bodyPr rtlCol="0" anchor="ctr"/>
+          <a:lstStyle/>
+          <a:p>
+            <a:pPr algn="ctr"/>
+          </a:p>
+        </p:txBody>
+      </p:sp>
+      <p:sp>
+        <p:nvSpPr>
+          <p:cNvPr id="66" name="TextBox 65"/>
+          <p:cNvSpPr txBox="1"/>
+          <p:nvPr/>
+        </p:nvSpPr>
+        <p:spPr>
+          <a:xfrm>
+            <a:off x="6309360" y="5541264"/>
+            <a:ext cx="914400" cy="228600"/>
+          </a:xfrm>
+          <a:prstGeom prst="rect">
+            <a:avLst/>
+          </a:prstGeom>
+          <a:noFill/>
+        </p:spPr>
+        <p:txBody>
+          <a:bodyPr wrap="square" anchor="t" lIns="0" rIns="0" tIns="0" bIns="0">
+            <a:spAutoFit/>
+          </a:bodyPr>
+          <a:lstStyle/>
+          <a:p>
+            <a:pPr algn="l"/>
+            <a:r>
+              <a:rPr sz="1100" b="1">
+                <a:solidFill>
+                  <a:srgbClr val="FFB352"/>
+                </a:solidFill>
+                <a:latin typeface="Open Sans"/>
+              </a:rPr>
+              <a:t>Tier 02</a:t>
+            </a:r>
+          </a:p>
+        </p:txBody>
+      </p:sp>
+      <p:sp>
+        <p:nvSpPr>
+          <p:cNvPr id="67" name="TextBox 66"/>
+          <p:cNvSpPr txBox="1"/>
+          <p:nvPr/>
+        </p:nvSpPr>
+        <p:spPr>
+          <a:xfrm>
+            <a:off x="7269480" y="5541264"/>
+            <a:ext cx="1280160" cy="228600"/>
+          </a:xfrm>
+          <a:prstGeom prst="rect">
+            <a:avLst/>
+          </a:prstGeom>
+          <a:noFill/>
+        </p:spPr>
+        <p:txBody>
+          <a:bodyPr wrap="square" anchor="t" lIns="0" rIns="0" tIns="0" bIns="0">
+            <a:spAutoFit/>
+          </a:bodyPr>
+          <a:lstStyle/>
+          <a:p>
+            <a:pPr algn="l"/>
+            <a:r>
+              <a:rPr sz="1000" b="0">
+                <a:solidFill>
+                  <a:srgbClr val="334155"/>
+                </a:solidFill>
+                <a:latin typeface="Open Sans"/>
+              </a:rPr>
+              <a:t>$10–$99.99</a:t>
+            </a:r>
+          </a:p>
+        </p:txBody>
+      </p:sp>
+      <p:sp>
+        <p:nvSpPr>
+          <p:cNvPr id="68" name="TextBox 67"/>
+          <p:cNvSpPr txBox="1"/>
+          <p:nvPr/>
+        </p:nvSpPr>
+        <p:spPr>
+          <a:xfrm>
+            <a:off x="8641080" y="5541264"/>
+            <a:ext cx="1371600" cy="228600"/>
+          </a:xfrm>
+          <a:prstGeom prst="rect">
+            <a:avLst/>
+          </a:prstGeom>
+          <a:noFill/>
+        </p:spPr>
+        <p:txBody>
+          <a:bodyPr wrap="square" anchor="t" lIns="0" rIns="0" tIns="0" bIns="0">
+            <a:spAutoFit/>
+          </a:bodyPr>
+          <a:lstStyle/>
+          <a:p>
+            <a:pPr algn="l"/>
+            <a:r>
+              <a:rPr sz="1100" b="0">
+                <a:solidFill>
+                  <a:srgbClr val="334155"/>
+                </a:solidFill>
+                <a:latin typeface="Open Sans"/>
+              </a:rPr>
+              <a:t>1,622,140</a:t>
+            </a:r>
+          </a:p>
+        </p:txBody>
+      </p:sp>
+      <p:sp>
+        <p:nvSpPr>
+          <p:cNvPr id="69" name="TextBox 68"/>
+          <p:cNvSpPr txBox="1"/>
+          <p:nvPr/>
+        </p:nvSpPr>
+        <p:spPr>
+          <a:xfrm>
+            <a:off x="10104120" y="5541264"/>
+            <a:ext cx="1371600" cy="228600"/>
+          </a:xfrm>
+          <a:prstGeom prst="rect">
+            <a:avLst/>
+          </a:prstGeom>
+          <a:noFill/>
+        </p:spPr>
+        <p:txBody>
+          <a:bodyPr wrap="square" anchor="t" lIns="0" rIns="0" tIns="0" bIns="0">
+            <a:spAutoFit/>
+          </a:bodyPr>
+          <a:lstStyle/>
+          <a:p>
+            <a:pPr algn="l"/>
+            <a:r>
+              <a:rPr sz="1100" b="1">
+                <a:solidFill>
+                  <a:srgbClr val="FFB352"/>
+                </a:solidFill>
+                <a:latin typeface="Open Sans"/>
+              </a:rPr>
+              <a:t>$57.9M</a:t>
+            </a:r>
+          </a:p>
+        </p:txBody>
+      </p:sp>
+      <p:sp>
+        <p:nvSpPr>
+          <p:cNvPr id="70" name="Rectangle 69"/>
+          <p:cNvSpPr/>
+          <p:nvPr/>
+        </p:nvSpPr>
+        <p:spPr>
+          <a:xfrm>
+            <a:off x="6217920" y="5833872"/>
+            <a:ext cx="5486400" cy="365760"/>
+          </a:xfrm>
+          <a:prstGeom prst="rect">
+            <a:avLst/>
+          </a:prstGeom>
+          <a:solidFill>
+            <a:srgbClr val="F8FAFC"/>
+          </a:solidFill>
+          <a:ln>
+            <a:noFill/>
+          </a:ln>
+          <a:effectLst/>
+        </p:spPr>
+        <p:style>
+          <a:lnRef idx="1">
+            <a:schemeClr val="accent1"/>
+          </a:lnRef>
+          <a:fillRef idx="3">
+            <a:schemeClr val="accent1"/>
+          </a:fillRef>
+          <a:effectRef idx="2">
+            <a:schemeClr val="accent1"/>
+          </a:effectRef>
+          <a:fontRef idx="minor">
+            <a:schemeClr val="lt1"/>
+          </a:fontRef>
+        </p:style>
+        <p:txBody>
+          <a:bodyPr rtlCol="0" anchor="ctr"/>
+          <a:lstStyle/>
+          <a:p>
+            <a:pPr algn="ctr"/>
+          </a:p>
+        </p:txBody>
+      </p:sp>
+      <p:sp>
+        <p:nvSpPr>
+          <p:cNvPr id="71" name="TextBox 70"/>
+          <p:cNvSpPr txBox="1"/>
+          <p:nvPr/>
+        </p:nvSpPr>
+        <p:spPr>
+          <a:xfrm>
+            <a:off x="6309360" y="5907024"/>
+            <a:ext cx="914400" cy="228600"/>
+          </a:xfrm>
+          <a:prstGeom prst="rect">
+            <a:avLst/>
+          </a:prstGeom>
+          <a:noFill/>
+        </p:spPr>
+        <p:txBody>
+          <a:bodyPr wrap="square" anchor="t" lIns="0" rIns="0" tIns="0" bIns="0">
+            <a:spAutoFit/>
+          </a:bodyPr>
+          <a:lstStyle/>
+          <a:p>
+            <a:pPr algn="l"/>
+            <a:r>
+              <a:rPr sz="1100" b="1">
+                <a:solidFill>
+                  <a:srgbClr val="FC4C0B"/>
+                </a:solidFill>
+                <a:latin typeface="Open Sans"/>
+              </a:rPr>
+              <a:t>Tier 03</a:t>
+            </a:r>
+          </a:p>
+        </p:txBody>
+      </p:sp>
+      <p:sp>
+        <p:nvSpPr>
+          <p:cNvPr id="72" name="TextBox 71"/>
+          <p:cNvSpPr txBox="1"/>
+          <p:nvPr/>
+        </p:nvSpPr>
+        <p:spPr>
+          <a:xfrm>
+            <a:off x="7269480" y="5907024"/>
+            <a:ext cx="1280160" cy="228600"/>
+          </a:xfrm>
+          <a:prstGeom prst="rect">
+            <a:avLst/>
+          </a:prstGeom>
+          <a:noFill/>
+        </p:spPr>
+        <p:txBody>
+          <a:bodyPr wrap="square" anchor="t" lIns="0" rIns="0" tIns="0" bIns="0">
+            <a:spAutoFit/>
+          </a:bodyPr>
+          <a:lstStyle/>
+          <a:p>
+            <a:pPr algn="l"/>
+            <a:r>
+              <a:rPr sz="1000" b="0">
+                <a:solidFill>
+                  <a:srgbClr val="334155"/>
+                </a:solidFill>
+                <a:latin typeface="Open Sans"/>
+              </a:rPr>
+              <a:t>$100–$499.99</a:t>
+            </a:r>
+          </a:p>
+        </p:txBody>
+      </p:sp>
+      <p:sp>
+        <p:nvSpPr>
+          <p:cNvPr id="73" name="TextBox 72"/>
+          <p:cNvSpPr txBox="1"/>
+          <p:nvPr/>
+        </p:nvSpPr>
+        <p:spPr>
+          <a:xfrm>
+            <a:off x="8641080" y="5907024"/>
+            <a:ext cx="1371600" cy="228600"/>
+          </a:xfrm>
+          <a:prstGeom prst="rect">
+            <a:avLst/>
+          </a:prstGeom>
+          <a:noFill/>
+        </p:spPr>
+        <p:txBody>
+          <a:bodyPr wrap="square" anchor="t" lIns="0" rIns="0" tIns="0" bIns="0">
+            <a:spAutoFit/>
+          </a:bodyPr>
+          <a:lstStyle/>
+          <a:p>
+            <a:pPr algn="l"/>
+            <a:r>
+              <a:rPr sz="1100" b="0">
+                <a:solidFill>
+                  <a:srgbClr val="334155"/>
+                </a:solidFill>
+                <a:latin typeface="Open Sans"/>
+              </a:rPr>
+              <a:t>425,201</a:t>
+            </a:r>
+          </a:p>
+        </p:txBody>
+      </p:sp>
+      <p:sp>
+        <p:nvSpPr>
+          <p:cNvPr id="74" name="TextBox 73"/>
+          <p:cNvSpPr txBox="1"/>
+          <p:nvPr/>
+        </p:nvSpPr>
+        <p:spPr>
+          <a:xfrm>
+            <a:off x="10104120" y="5907024"/>
+            <a:ext cx="1371600" cy="228600"/>
+          </a:xfrm>
+          <a:prstGeom prst="rect">
+            <a:avLst/>
+          </a:prstGeom>
+          <a:noFill/>
+        </p:spPr>
+        <p:txBody>
+          <a:bodyPr wrap="square" anchor="t" lIns="0" rIns="0" tIns="0" bIns="0">
+            <a:spAutoFit/>
+          </a:bodyPr>
+          <a:lstStyle/>
+          <a:p>
+            <a:pPr algn="l"/>
+            <a:r>
+              <a:rPr sz="1100" b="1">
+                <a:solidFill>
+                  <a:srgbClr val="FC4C0B"/>
+                </a:solidFill>
+                <a:latin typeface="Open Sans"/>
+              </a:rPr>
+              <a:t>$87.5M</a:t>
+            </a:r>
+          </a:p>
+        </p:txBody>
+      </p:sp>
+      <p:sp>
+        <p:nvSpPr>
+          <p:cNvPr id="75" name="Rectangle 74"/>
+          <p:cNvSpPr/>
+          <p:nvPr/>
+        </p:nvSpPr>
+        <p:spPr>
+          <a:xfrm>
+            <a:off x="6217920" y="6199632"/>
+            <a:ext cx="5486400" cy="365760"/>
+          </a:xfrm>
+          <a:prstGeom prst="rect">
+            <a:avLst/>
+          </a:prstGeom>
+          <a:solidFill>
+            <a:srgbClr val="FFFFFF"/>
+          </a:solidFill>
+          <a:ln>
+            <a:noFill/>
+          </a:ln>
+          <a:effectLst/>
+        </p:spPr>
+        <p:style>
+          <a:lnRef idx="1">
+            <a:schemeClr val="accent1"/>
+          </a:lnRef>
+          <a:fillRef idx="3">
+            <a:schemeClr val="accent1"/>
+          </a:fillRef>
+          <a:effectRef idx="2">
+            <a:schemeClr val="accent1"/>
+          </a:effectRef>
+          <a:fontRef idx="minor">
+            <a:schemeClr val="lt1"/>
+          </a:fontRef>
+        </p:style>
+        <p:txBody>
+          <a:bodyPr rtlCol="0" anchor="ctr"/>
+          <a:lstStyle/>
+          <a:p>
+            <a:pPr algn="ctr"/>
+          </a:p>
+        </p:txBody>
+      </p:sp>
+      <p:sp>
+        <p:nvSpPr>
+          <p:cNvPr id="76" name="TextBox 75"/>
+          <p:cNvSpPr txBox="1"/>
+          <p:nvPr/>
+        </p:nvSpPr>
+        <p:spPr>
+          <a:xfrm>
+            <a:off x="6309360" y="6272784"/>
+            <a:ext cx="914400" cy="228600"/>
+          </a:xfrm>
+          <a:prstGeom prst="rect">
+            <a:avLst/>
+          </a:prstGeom>
+          <a:noFill/>
+        </p:spPr>
+        <p:txBody>
+          <a:bodyPr wrap="square" anchor="t" lIns="0" rIns="0" tIns="0" bIns="0">
+            <a:spAutoFit/>
+          </a:bodyPr>
+          <a:lstStyle/>
+          <a:p>
+            <a:pPr algn="l"/>
+            <a:r>
+              <a:rPr sz="1100" b="1">
+                <a:solidFill>
+                  <a:srgbClr val="2863C5"/>
+                </a:solidFill>
+                <a:latin typeface="Open Sans"/>
+              </a:rPr>
+              <a:t>Tier 04</a:t>
+            </a:r>
+          </a:p>
+        </p:txBody>
+      </p:sp>
+      <p:sp>
+        <p:nvSpPr>
+          <p:cNvPr id="77" name="TextBox 76"/>
+          <p:cNvSpPr txBox="1"/>
+          <p:nvPr/>
+        </p:nvSpPr>
+        <p:spPr>
+          <a:xfrm>
+            <a:off x="7269480" y="6272784"/>
+            <a:ext cx="1280160" cy="228600"/>
+          </a:xfrm>
+          <a:prstGeom prst="rect">
+            <a:avLst/>
+          </a:prstGeom>
+          <a:noFill/>
+        </p:spPr>
+        <p:txBody>
+          <a:bodyPr wrap="square" anchor="t" lIns="0" rIns="0" tIns="0" bIns="0">
+            <a:spAutoFit/>
+          </a:bodyPr>
+          <a:lstStyle/>
+          <a:p>
+            <a:pPr algn="l"/>
+            <a:r>
+              <a:rPr sz="1000" b="0">
+                <a:solidFill>
+                  <a:srgbClr val="334155"/>
+                </a:solidFill>
+                <a:latin typeface="Open Sans"/>
+              </a:rPr>
+              <a:t>$500+</a:t>
+            </a:r>
+          </a:p>
+        </p:txBody>
+      </p:sp>
+      <p:sp>
+        <p:nvSpPr>
+          <p:cNvPr id="78" name="TextBox 77"/>
+          <p:cNvSpPr txBox="1"/>
+          <p:nvPr/>
+        </p:nvSpPr>
+        <p:spPr>
+          <a:xfrm>
+            <a:off x="8641080" y="6272784"/>
+            <a:ext cx="1371600" cy="228600"/>
+          </a:xfrm>
+          <a:prstGeom prst="rect">
+            <a:avLst/>
+          </a:prstGeom>
+          <a:noFill/>
+        </p:spPr>
+        <p:txBody>
+          <a:bodyPr wrap="square" anchor="t" lIns="0" rIns="0" tIns="0" bIns="0">
+            <a:spAutoFit/>
+          </a:bodyPr>
+          <a:lstStyle/>
+          <a:p>
+            <a:pPr algn="l"/>
+            <a:r>
+              <a:rPr sz="1100" b="0">
+                <a:solidFill>
+                  <a:srgbClr val="334155"/>
+                </a:solidFill>
+                <a:latin typeface="Open Sans"/>
+              </a:rPr>
+              <a:t>97,787</a:t>
+            </a:r>
+          </a:p>
+        </p:txBody>
+      </p:sp>
+      <p:sp>
+        <p:nvSpPr>
+          <p:cNvPr id="79" name="TextBox 78"/>
+          <p:cNvSpPr txBox="1"/>
+          <p:nvPr/>
+        </p:nvSpPr>
+        <p:spPr>
+          <a:xfrm>
+            <a:off x="10104120" y="6272784"/>
+            <a:ext cx="1371600" cy="228600"/>
+          </a:xfrm>
+          <a:prstGeom prst="rect">
+            <a:avLst/>
+          </a:prstGeom>
+          <a:noFill/>
+        </p:spPr>
+        <p:txBody>
+          <a:bodyPr wrap="square" anchor="t" lIns="0" rIns="0" tIns="0" bIns="0">
+            <a:spAutoFit/>
+          </a:bodyPr>
+          <a:lstStyle/>
+          <a:p>
+            <a:pPr algn="l"/>
+            <a:r>
+              <a:rPr sz="1100" b="1">
+                <a:solidFill>
+                  <a:srgbClr val="2863C5"/>
+                </a:solidFill>
+                <a:latin typeface="Open Sans"/>
+              </a:rPr>
+              <a:t>$173.1M</a:t>
+            </a:r>
+          </a:p>
+        </p:txBody>
+      </p:sp>
+      <p:sp>
+        <p:nvSpPr>
+          <p:cNvPr id="80" name="Rounded Rectangle 79"/>
+          <p:cNvSpPr/>
+          <p:nvPr/>
+        </p:nvSpPr>
+        <p:spPr>
+          <a:xfrm>
+            <a:off x="457200" y="6400800"/>
+            <a:ext cx="11247120" cy="411480"/>
+          </a:xfrm>
+          <a:prstGeom prst="roundRect">
+            <a:avLst>
+              <a:gd name="adj" fmla="val 7000"/>
+            </a:avLst>
           </a:prstGeom>
           <a:solidFill>
             <a:srgbClr val="2863C5"/>
@@ -11299,403 +12998,7 @@
       </p:sp>
       <p:sp>
         <p:nvSpPr>
-          <p:cNvPr id="36" name="TextBox 35"/>
-          <p:cNvSpPr txBox="1"/>
-          <p:nvPr/>
-        </p:nvSpPr>
-        <p:spPr>
-          <a:xfrm>
-            <a:off x="8275320" y="2898648"/>
-            <a:ext cx="3200400" cy="329184"/>
-          </a:xfrm>
-          <a:prstGeom prst="rect">
-            <a:avLst/>
-          </a:prstGeom>
-          <a:noFill/>
-        </p:spPr>
-        <p:txBody>
-          <a:bodyPr wrap="square" anchor="t" lIns="0" rIns="0" tIns="0" bIns="0">
-            <a:spAutoFit/>
-          </a:bodyPr>
-          <a:lstStyle/>
-          <a:p>
-            <a:pPr algn="l"/>
-            <a:r>
-              <a:rPr sz="1100" b="1">
-                <a:solidFill>
-                  <a:srgbClr val="2863C5"/>
-                </a:solidFill>
-                <a:latin typeface="Open Sans"/>
-              </a:rPr>
-              <a:t>v2 · UNLOCK</a:t>
-            </a:r>
-          </a:p>
-        </p:txBody>
-      </p:sp>
-      <p:sp>
-        <p:nvSpPr>
-          <p:cNvPr id="37" name="TextBox 36"/>
-          <p:cNvSpPr txBox="1"/>
-          <p:nvPr/>
-        </p:nvSpPr>
-        <p:spPr>
-          <a:xfrm>
-            <a:off x="8275320" y="3246120"/>
-            <a:ext cx="3200400" cy="502920"/>
-          </a:xfrm>
-          <a:prstGeom prst="rect">
-            <a:avLst/>
-          </a:prstGeom>
-          <a:noFill/>
-        </p:spPr>
-        <p:txBody>
-          <a:bodyPr wrap="square" anchor="t" lIns="0" rIns="0" tIns="0" bIns="0">
-            <a:spAutoFit/>
-          </a:bodyPr>
-          <a:lstStyle/>
-          <a:p>
-            <a:pPr algn="l"/>
-            <a:r>
-              <a:rPr sz="1400" b="1">
-                <a:solidFill>
-                  <a:srgbClr val="0F172A"/>
-                </a:solidFill>
-                <a:latin typeface="Open Sans"/>
-              </a:rPr>
-              <a:t>Registered representative</a:t>
-            </a:r>
-          </a:p>
-        </p:txBody>
-      </p:sp>
-      <p:sp>
-        <p:nvSpPr>
-          <p:cNvPr id="38" name="TextBox 37"/>
-          <p:cNvSpPr txBox="1"/>
-          <p:nvPr/>
-        </p:nvSpPr>
-        <p:spPr>
-          <a:xfrm>
-            <a:off x="8275320" y="3977639"/>
-            <a:ext cx="1371600" cy="201168"/>
-          </a:xfrm>
-          <a:prstGeom prst="rect">
-            <a:avLst/>
-          </a:prstGeom>
-          <a:noFill/>
-        </p:spPr>
-        <p:txBody>
-          <a:bodyPr wrap="square" anchor="t" lIns="0" rIns="0" tIns="0" bIns="0">
-            <a:spAutoFit/>
-          </a:bodyPr>
-          <a:lstStyle/>
-          <a:p>
-            <a:pPr algn="l"/>
-            <a:r>
-              <a:rPr sz="900" b="1">
-                <a:solidFill>
-                  <a:srgbClr val="2863C5"/>
-                </a:solidFill>
-                <a:latin typeface="Open Sans"/>
-              </a:rPr>
-              <a:t>Who submits</a:t>
-            </a:r>
-          </a:p>
-        </p:txBody>
-      </p:sp>
-      <p:sp>
-        <p:nvSpPr>
-          <p:cNvPr id="39" name="TextBox 38"/>
-          <p:cNvSpPr txBox="1"/>
-          <p:nvPr/>
-        </p:nvSpPr>
-        <p:spPr>
-          <a:xfrm>
-            <a:off x="8275320" y="4197096"/>
-            <a:ext cx="3200400" cy="457200"/>
-          </a:xfrm>
-          <a:prstGeom prst="rect">
-            <a:avLst/>
-          </a:prstGeom>
-          <a:noFill/>
-        </p:spPr>
-        <p:txBody>
-          <a:bodyPr wrap="square" anchor="t" lIns="0" rIns="0" tIns="0" bIns="0">
-            <a:spAutoFit/>
-          </a:bodyPr>
-          <a:lstStyle/>
-          <a:p>
-            <a:pPr algn="l"/>
-            <a:r>
-              <a:rPr sz="1000" b="0">
-                <a:solidFill>
-                  <a:srgbClr val="334155"/>
-                </a:solidFill>
-                <a:latin typeface="Open Sans"/>
-              </a:rPr>
-              <a:t>SmartCredit, on the member's behalf</a:t>
-            </a:r>
-          </a:p>
-        </p:txBody>
-      </p:sp>
-      <p:sp>
-        <p:nvSpPr>
-          <p:cNvPr id="40" name="TextBox 39"/>
-          <p:cNvSpPr txBox="1"/>
-          <p:nvPr/>
-        </p:nvSpPr>
-        <p:spPr>
-          <a:xfrm>
-            <a:off x="8275320" y="4526279"/>
-            <a:ext cx="1371600" cy="201168"/>
-          </a:xfrm>
-          <a:prstGeom prst="rect">
-            <a:avLst/>
-          </a:prstGeom>
-          <a:noFill/>
-        </p:spPr>
-        <p:txBody>
-          <a:bodyPr wrap="square" anchor="t" lIns="0" rIns="0" tIns="0" bIns="0">
-            <a:spAutoFit/>
-          </a:bodyPr>
-          <a:lstStyle/>
-          <a:p>
-            <a:pPr algn="l"/>
-            <a:r>
-              <a:rPr sz="900" b="1">
-                <a:solidFill>
-                  <a:srgbClr val="2863C5"/>
-                </a:solidFill>
-                <a:latin typeface="Open Sans"/>
-              </a:rPr>
-              <a:t>Where</a:t>
-            </a:r>
-          </a:p>
-        </p:txBody>
-      </p:sp>
-      <p:sp>
-        <p:nvSpPr>
-          <p:cNvPr id="41" name="TextBox 40"/>
-          <p:cNvSpPr txBox="1"/>
-          <p:nvPr/>
-        </p:nvSpPr>
-        <p:spPr>
-          <a:xfrm>
-            <a:off x="8275320" y="4745736"/>
-            <a:ext cx="3200400" cy="457200"/>
-          </a:xfrm>
-          <a:prstGeom prst="rect">
-            <a:avLst/>
-          </a:prstGeom>
-          <a:noFill/>
-        </p:spPr>
-        <p:txBody>
-          <a:bodyPr wrap="square" anchor="t" lIns="0" rIns="0" tIns="0" bIns="0">
-            <a:spAutoFit/>
-          </a:bodyPr>
-          <a:lstStyle/>
-          <a:p>
-            <a:pPr algn="l"/>
-            <a:r>
-              <a:rPr sz="1000" b="0">
-                <a:solidFill>
-                  <a:srgbClr val="334155"/>
-                </a:solidFill>
-                <a:latin typeface="Open Sans"/>
-              </a:rPr>
-              <a:t>GA (CDR) · FL (Ch. 717) · OH (Finder) · MI (locator)</a:t>
-            </a:r>
-          </a:p>
-        </p:txBody>
-      </p:sp>
-      <p:sp>
-        <p:nvSpPr>
-          <p:cNvPr id="42" name="TextBox 41"/>
-          <p:cNvSpPr txBox="1"/>
-          <p:nvPr/>
-        </p:nvSpPr>
-        <p:spPr>
-          <a:xfrm>
-            <a:off x="8275320" y="5074919"/>
-            <a:ext cx="1371600" cy="201168"/>
-          </a:xfrm>
-          <a:prstGeom prst="rect">
-            <a:avLst/>
-          </a:prstGeom>
-          <a:noFill/>
-        </p:spPr>
-        <p:txBody>
-          <a:bodyPr wrap="square" anchor="t" lIns="0" rIns="0" tIns="0" bIns="0">
-            <a:spAutoFit/>
-          </a:bodyPr>
-          <a:lstStyle/>
-          <a:p>
-            <a:pPr algn="l"/>
-            <a:r>
-              <a:rPr sz="900" b="1">
-                <a:solidFill>
-                  <a:srgbClr val="2863C5"/>
-                </a:solidFill>
-                <a:latin typeface="Open Sans"/>
-              </a:rPr>
-              <a:t>Fee</a:t>
-            </a:r>
-          </a:p>
-        </p:txBody>
-      </p:sp>
-      <p:sp>
-        <p:nvSpPr>
-          <p:cNvPr id="43" name="TextBox 42"/>
-          <p:cNvSpPr txBox="1"/>
-          <p:nvPr/>
-        </p:nvSpPr>
-        <p:spPr>
-          <a:xfrm>
-            <a:off x="8275320" y="5294375"/>
-            <a:ext cx="3200400" cy="457200"/>
-          </a:xfrm>
-          <a:prstGeom prst="rect">
-            <a:avLst/>
-          </a:prstGeom>
-          <a:noFill/>
-        </p:spPr>
-        <p:txBody>
-          <a:bodyPr wrap="square" anchor="t" lIns="0" rIns="0" tIns="0" bIns="0">
-            <a:spAutoFit/>
-          </a:bodyPr>
-          <a:lstStyle/>
-          <a:p>
-            <a:pPr algn="l"/>
-            <a:r>
-              <a:rPr sz="1000" b="0">
-                <a:solidFill>
-                  <a:srgbClr val="334155"/>
-                </a:solidFill>
-                <a:latin typeface="Open Sans"/>
-              </a:rPr>
-              <a:t>GA caps reps at 30% · we charge $0</a:t>
-            </a:r>
-          </a:p>
-        </p:txBody>
-      </p:sp>
-      <p:sp>
-        <p:nvSpPr>
-          <p:cNvPr id="44" name="TextBox 43"/>
-          <p:cNvSpPr txBox="1"/>
-          <p:nvPr/>
-        </p:nvSpPr>
-        <p:spPr>
-          <a:xfrm>
-            <a:off x="8275320" y="5623559"/>
-            <a:ext cx="1371600" cy="201168"/>
-          </a:xfrm>
-          <a:prstGeom prst="rect">
-            <a:avLst/>
-          </a:prstGeom>
-          <a:noFill/>
-        </p:spPr>
-        <p:txBody>
-          <a:bodyPr wrap="square" anchor="t" lIns="0" rIns="0" tIns="0" bIns="0">
-            <a:spAutoFit/>
-          </a:bodyPr>
-          <a:lstStyle/>
-          <a:p>
-            <a:pPr algn="l"/>
-            <a:r>
-              <a:rPr sz="900" b="1">
-                <a:solidFill>
-                  <a:srgbClr val="2863C5"/>
-                </a:solidFill>
-                <a:latin typeface="Open Sans"/>
-              </a:rPr>
-              <a:t>Status</a:t>
-            </a:r>
-          </a:p>
-        </p:txBody>
-      </p:sp>
-      <p:sp>
-        <p:nvSpPr>
-          <p:cNvPr id="45" name="TextBox 44"/>
-          <p:cNvSpPr txBox="1"/>
-          <p:nvPr/>
-        </p:nvSpPr>
-        <p:spPr>
-          <a:xfrm>
-            <a:off x="8275320" y="5843015"/>
-            <a:ext cx="3200400" cy="457200"/>
-          </a:xfrm>
-          <a:prstGeom prst="rect">
-            <a:avLst/>
-          </a:prstGeom>
-          <a:noFill/>
-        </p:spPr>
-        <p:txBody>
-          <a:bodyPr wrap="square" anchor="t" lIns="0" rIns="0" tIns="0" bIns="0">
-            <a:spAutoFit/>
-          </a:bodyPr>
-          <a:lstStyle/>
-          <a:p>
-            <a:pPr algn="l"/>
-            <a:r>
-              <a:rPr sz="1000" b="0">
-                <a:solidFill>
-                  <a:srgbClr val="334155"/>
-                </a:solidFill>
-                <a:latin typeface="Open Sans"/>
-              </a:rPr>
-              <a:t>Sprint 4+ once first state approves</a:t>
-            </a:r>
-          </a:p>
-        </p:txBody>
-      </p:sp>
-      <p:sp>
-        <p:nvSpPr>
-          <p:cNvPr id="46" name="Rounded Rectangle 45"/>
-          <p:cNvSpPr/>
-          <p:nvPr/>
-        </p:nvSpPr>
-        <p:spPr>
-          <a:xfrm>
-            <a:off x="457200" y="6400800"/>
-            <a:ext cx="11247120" cy="365760"/>
-          </a:xfrm>
-          <a:prstGeom prst="roundRect">
-            <a:avLst>
-              <a:gd name="adj" fmla="val 10000"/>
-            </a:avLst>
-          </a:prstGeom>
-          <a:solidFill>
-            <a:srgbClr val="2863C5"/>
-          </a:solidFill>
-          <a:ln>
-            <a:noFill/>
-          </a:ln>
-          <a:effectLst/>
-        </p:spPr>
-        <p:style>
-          <a:lnRef idx="1">
-            <a:schemeClr val="accent1"/>
-          </a:lnRef>
-          <a:fillRef idx="3">
-            <a:schemeClr val="accent1"/>
-          </a:fillRef>
-          <a:effectRef idx="2">
-            <a:schemeClr val="accent1"/>
-          </a:effectRef>
-          <a:fontRef idx="minor">
-            <a:schemeClr val="lt1"/>
-          </a:fontRef>
-        </p:style>
-        <p:txBody>
-          <a:bodyPr rtlCol="0" anchor="ctr"/>
-          <a:lstStyle/>
-          <a:p>
-            <a:pPr algn="ctr"/>
-          </a:p>
-        </p:txBody>
-      </p:sp>
-      <p:sp>
-        <p:nvSpPr>
-          <p:cNvPr id="47" name="TextBox 46"/>
+          <p:cNvPr id="81" name="TextBox 80"/>
           <p:cNvSpPr txBox="1"/>
           <p:nvPr/>
         </p:nvSpPr>
@@ -11717,13 +13020,13 @@
           <a:p>
             <a:pPr algn="l"/>
             <a:r>
-              <a:rPr sz="1000" b="1">
+              <a:rPr sz="1100" b="1">
                 <a:solidFill>
                   <a:srgbClr val="FFFFFF"/>
                 </a:solidFill>
                 <a:latin typeface="Open Sans"/>
               </a:rPr>
-              <a:t>Members never pay. We never take a cut. Free reduces finder-fee risk — but representative filing still requires state-by-state approval, registration, and legal sign-off.</a:t>
+              <a:t>Even discounting common-name false positives, ~9,000 customers in the high-confidence bucket map to ~$1.5M of unclaimed property in CA alone.</a:t>
             </a:r>
           </a:p>
         </p:txBody>
@@ -11899,7 +13202,7 @@
                 </a:solidFill>
                 <a:latin typeface="Open Sans"/>
               </a:rPr>
-              <a:t>7 / 8</a:t>
+              <a:t>7 / 9</a:t>
             </a:r>
           </a:p>
         </p:txBody>
@@ -11969,7 +13272,7 @@
                 </a:solidFill>
                 <a:latin typeface="Open Sans"/>
               </a:rPr>
-              <a:t>COMPLIANCE GUARDRAILS</a:t>
+              <a:t>FILING THE CLAIM</a:t>
             </a:r>
           </a:p>
         </p:txBody>
@@ -11998,13 +13301,13 @@
           <a:p>
             <a:pPr algn="l"/>
             <a:r>
-              <a:rPr sz="2600" b="1">
+              <a:rPr sz="2200" b="1">
                 <a:solidFill>
                   <a:srgbClr val="0F172A"/>
                 </a:solidFill>
                 <a:latin typeface="Open Sans"/>
               </a:rPr>
-              <a:t>Free for members. State-approved where required.</a:t>
+              <a:t>Three channels. E-file preferred. Mail when required. Rep when approved.</a:t>
             </a:r>
           </a:p>
         </p:txBody>
@@ -12018,28 +13321,28 @@
         <p:spPr>
           <a:xfrm>
             <a:off x="457200" y="1965960"/>
-            <a:ext cx="11430000" cy="411480"/>
-          </a:xfrm>
-          <a:prstGeom prst="rect">
-            <a:avLst/>
-          </a:prstGeom>
-          <a:noFill/>
-        </p:spPr>
-        <p:txBody>
-          <a:bodyPr wrap="square" anchor="t" lIns="0" rIns="0" tIns="0" bIns="0">
-            <a:spAutoFit/>
-          </a:bodyPr>
-          <a:lstStyle/>
-          <a:p>
-            <a:pPr algn="l"/>
-            <a:r>
-              <a:rPr sz="1200" b="0">
+            <a:ext cx="11430000" cy="457200"/>
+          </a:xfrm>
+          <a:prstGeom prst="rect">
+            <a:avLst/>
+          </a:prstGeom>
+          <a:noFill/>
+        </p:spPr>
+        <p:txBody>
+          <a:bodyPr wrap="square" anchor="t" lIns="0" rIns="0" tIns="0" bIns="0">
+            <a:spAutoFit/>
+          </a:bodyPr>
+          <a:lstStyle/>
+          <a:p>
+            <a:pPr algn="l"/>
+            <a:r>
+              <a:rPr sz="1100" b="0">
                 <a:solidFill>
                   <a:srgbClr val="64748B"/>
                 </a:solidFill>
                 <a:latin typeface="Open Sans"/>
               </a:rPr>
-              <a:t>Verified-identity matching, member consent, official state filing channels — and a clear list of things we will not do.</a:t>
+              <a:t>Most states support online claim initiation, but some claims still require document upload, notarization, mailed forms, or manual review. v1 is assisted e-file. Mail packets via our ActionLetters service when states require physical paperwork. Filing on the member's behalf is a state-by-state regulatory unlock — not a technical one.</a:t>
             </a:r>
           </a:p>
         </p:txBody>
@@ -12053,7 +13356,7 @@
         <p:spPr>
           <a:xfrm>
             <a:off x="457200" y="2606040"/>
-            <a:ext cx="5486400" cy="3703320"/>
+            <a:ext cx="3657600" cy="3657600"/>
           </a:xfrm>
           <a:prstGeom prst="roundRect">
             <a:avLst>
@@ -12101,7 +13404,7 @@
         <p:spPr>
           <a:xfrm>
             <a:off x="457200" y="2606040"/>
-            <a:ext cx="5486400" cy="164592"/>
+            <a:ext cx="3657600" cy="164592"/>
           </a:xfrm>
           <a:prstGeom prst="rect">
             <a:avLst/>
@@ -12144,29 +13447,29 @@
         </p:nvSpPr>
         <p:spPr>
           <a:xfrm>
-            <a:off x="640080" y="2898648"/>
-            <a:ext cx="5120640" cy="365760"/>
-          </a:xfrm>
-          <a:prstGeom prst="rect">
-            <a:avLst/>
-          </a:prstGeom>
-          <a:noFill/>
-        </p:spPr>
-        <p:txBody>
-          <a:bodyPr wrap="square" anchor="t" lIns="0" rIns="0" tIns="0" bIns="0">
-            <a:spAutoFit/>
-          </a:bodyPr>
-          <a:lstStyle/>
-          <a:p>
-            <a:pPr algn="l"/>
-            <a:r>
-              <a:rPr sz="1200" b="1">
+            <a:off x="685800" y="2898648"/>
+            <a:ext cx="3200400" cy="329184"/>
+          </a:xfrm>
+          <a:prstGeom prst="rect">
+            <a:avLst/>
+          </a:prstGeom>
+          <a:noFill/>
+        </p:spPr>
+        <p:txBody>
+          <a:bodyPr wrap="square" anchor="t" lIns="0" rIns="0" tIns="0" bIns="0">
+            <a:spAutoFit/>
+          </a:bodyPr>
+          <a:lstStyle/>
+          <a:p>
+            <a:pPr algn="l"/>
+            <a:r>
+              <a:rPr sz="1100" b="1">
                 <a:solidFill>
                   <a:srgbClr val="059669"/>
                 </a:solidFill>
                 <a:latin typeface="Open Sans"/>
               </a:rPr>
-              <a:t>WHAT WE WILL DO</a:t>
+              <a:t>v1 · DEFAULT</a:t>
             </a:r>
           </a:p>
         </p:txBody>
@@ -12179,8 +13482,8 @@
         </p:nvSpPr>
         <p:spPr>
           <a:xfrm>
-            <a:off x="777240" y="3383280"/>
-            <a:ext cx="274320" cy="274320"/>
+            <a:off x="685800" y="3246120"/>
+            <a:ext cx="3200400" cy="502920"/>
           </a:xfrm>
           <a:prstGeom prst="rect">
             <a:avLst/>
@@ -12197,11 +13500,11 @@
             <a:r>
               <a:rPr sz="1400" b="1">
                 <a:solidFill>
-                  <a:srgbClr val="059669"/>
-                </a:solidFill>
-                <a:latin typeface="Open Sans"/>
-              </a:rPr>
-              <a:t>✓</a:t>
+                  <a:srgbClr val="0F172A"/>
+                </a:solidFill>
+                <a:latin typeface="Open Sans"/>
+              </a:rPr>
+              <a:t>Assisted e-file</a:t>
             </a:r>
           </a:p>
         </p:txBody>
@@ -12214,64 +13517,64 @@
         </p:nvSpPr>
         <p:spPr>
           <a:xfrm>
-            <a:off x="1097280" y="3401568"/>
-            <a:ext cx="4572000" cy="457200"/>
-          </a:xfrm>
-          <a:prstGeom prst="rect">
-            <a:avLst/>
-          </a:prstGeom>
-          <a:noFill/>
-        </p:spPr>
-        <p:txBody>
-          <a:bodyPr wrap="square" anchor="t" lIns="0" rIns="0" tIns="0" bIns="0">
-            <a:spAutoFit/>
-          </a:bodyPr>
-          <a:lstStyle/>
-          <a:p>
-            <a:pPr algn="l"/>
-            <a:r>
-              <a:rPr sz="1100" b="0">
+            <a:off x="685800" y="3977639"/>
+            <a:ext cx="1371600" cy="201168"/>
+          </a:xfrm>
+          <a:prstGeom prst="rect">
+            <a:avLst/>
+          </a:prstGeom>
+          <a:noFill/>
+        </p:spPr>
+        <p:txBody>
+          <a:bodyPr wrap="square" anchor="t" lIns="0" rIns="0" tIns="0" bIns="0">
+            <a:spAutoFit/>
+          </a:bodyPr>
+          <a:lstStyle/>
+          <a:p>
+            <a:pPr algn="l"/>
+            <a:r>
+              <a:rPr sz="900" b="1">
+                <a:solidFill>
+                  <a:srgbClr val="2863C5"/>
+                </a:solidFill>
+                <a:latin typeface="Open Sans"/>
+              </a:rPr>
+              <a:t>Who submits</a:t>
+            </a:r>
+          </a:p>
+        </p:txBody>
+      </p:sp>
+      <p:sp>
+        <p:nvSpPr>
+          <p:cNvPr id="15" name="TextBox 14"/>
+          <p:cNvSpPr txBox="1"/>
+          <p:nvPr/>
+        </p:nvSpPr>
+        <p:spPr>
+          <a:xfrm>
+            <a:off x="685800" y="4197096"/>
+            <a:ext cx="3200400" cy="457200"/>
+          </a:xfrm>
+          <a:prstGeom prst="rect">
+            <a:avLst/>
+          </a:prstGeom>
+          <a:noFill/>
+        </p:spPr>
+        <p:txBody>
+          <a:bodyPr wrap="square" anchor="t" lIns="0" rIns="0" tIns="0" bIns="0">
+            <a:spAutoFit/>
+          </a:bodyPr>
+          <a:lstStyle/>
+          <a:p>
+            <a:pPr algn="l"/>
+            <a:r>
+              <a:rPr sz="1000" b="0">
                 <a:solidFill>
                   <a:srgbClr val="334155"/>
                 </a:solidFill>
                 <a:latin typeface="Open Sans"/>
               </a:rPr>
-              <a:t>Use official state files or state-approved data access only</a:t>
-            </a:r>
-          </a:p>
-        </p:txBody>
-      </p:sp>
-      <p:sp>
-        <p:nvSpPr>
-          <p:cNvPr id="15" name="TextBox 14"/>
-          <p:cNvSpPr txBox="1"/>
-          <p:nvPr/>
-        </p:nvSpPr>
-        <p:spPr>
-          <a:xfrm>
-            <a:off x="777240" y="3840480"/>
-            <a:ext cx="274320" cy="274320"/>
-          </a:xfrm>
-          <a:prstGeom prst="rect">
-            <a:avLst/>
-          </a:prstGeom>
-          <a:noFill/>
-        </p:spPr>
-        <p:txBody>
-          <a:bodyPr wrap="square" anchor="t" lIns="0" rIns="0" tIns="0" bIns="0">
-            <a:spAutoFit/>
-          </a:bodyPr>
-          <a:lstStyle/>
-          <a:p>
-            <a:pPr algn="l"/>
-            <a:r>
-              <a:rPr sz="1400" b="1">
-                <a:solidFill>
-                  <a:srgbClr val="059669"/>
-                </a:solidFill>
-                <a:latin typeface="Open Sans"/>
-              </a:rPr>
-              <a:t>✓</a:t>
+              <a:t>The member</a:t>
             </a:r>
           </a:p>
         </p:txBody>
@@ -12284,64 +13587,64 @@
         </p:nvSpPr>
         <p:spPr>
           <a:xfrm>
-            <a:off x="1097280" y="3858768"/>
-            <a:ext cx="4572000" cy="457200"/>
-          </a:xfrm>
-          <a:prstGeom prst="rect">
-            <a:avLst/>
-          </a:prstGeom>
-          <a:noFill/>
-        </p:spPr>
-        <p:txBody>
-          <a:bodyPr wrap="square" anchor="t" lIns="0" rIns="0" tIns="0" bIns="0">
-            <a:spAutoFit/>
-          </a:bodyPr>
-          <a:lstStyle/>
-          <a:p>
-            <a:pPr algn="l"/>
-            <a:r>
-              <a:rPr sz="1100" b="0">
+            <a:off x="685800" y="4526279"/>
+            <a:ext cx="1371600" cy="201168"/>
+          </a:xfrm>
+          <a:prstGeom prst="rect">
+            <a:avLst/>
+          </a:prstGeom>
+          <a:noFill/>
+        </p:spPr>
+        <p:txBody>
+          <a:bodyPr wrap="square" anchor="t" lIns="0" rIns="0" tIns="0" bIns="0">
+            <a:spAutoFit/>
+          </a:bodyPr>
+          <a:lstStyle/>
+          <a:p>
+            <a:pPr algn="l"/>
+            <a:r>
+              <a:rPr sz="900" b="1">
+                <a:solidFill>
+                  <a:srgbClr val="2863C5"/>
+                </a:solidFill>
+                <a:latin typeface="Open Sans"/>
+              </a:rPr>
+              <a:t>How</a:t>
+            </a:r>
+          </a:p>
+        </p:txBody>
+      </p:sp>
+      <p:sp>
+        <p:nvSpPr>
+          <p:cNvPr id="17" name="TextBox 16"/>
+          <p:cNvSpPr txBox="1"/>
+          <p:nvPr/>
+        </p:nvSpPr>
+        <p:spPr>
+          <a:xfrm>
+            <a:off x="685800" y="4745736"/>
+            <a:ext cx="3200400" cy="457200"/>
+          </a:xfrm>
+          <a:prstGeom prst="rect">
+            <a:avLst/>
+          </a:prstGeom>
+          <a:noFill/>
+        </p:spPr>
+        <p:txBody>
+          <a:bodyPr wrap="square" anchor="t" lIns="0" rIns="0" tIns="0" bIns="0">
+            <a:spAutoFit/>
+          </a:bodyPr>
+          <a:lstStyle/>
+          <a:p>
+            <a:pPr algn="l"/>
+            <a:r>
+              <a:rPr sz="1000" b="0">
                 <a:solidFill>
                   <a:srgbClr val="334155"/>
                 </a:solidFill>
                 <a:latin typeface="Open Sans"/>
               </a:rPr>
-              <a:t>Get explicit member consent before matching and claim prep</a:t>
-            </a:r>
-          </a:p>
-        </p:txBody>
-      </p:sp>
-      <p:sp>
-        <p:nvSpPr>
-          <p:cNvPr id="17" name="TextBox 16"/>
-          <p:cNvSpPr txBox="1"/>
-          <p:nvPr/>
-        </p:nvSpPr>
-        <p:spPr>
-          <a:xfrm>
-            <a:off x="777240" y="4297680"/>
-            <a:ext cx="274320" cy="274320"/>
-          </a:xfrm>
-          <a:prstGeom prst="rect">
-            <a:avLst/>
-          </a:prstGeom>
-          <a:noFill/>
-        </p:spPr>
-        <p:txBody>
-          <a:bodyPr wrap="square" anchor="t" lIns="0" rIns="0" tIns="0" bIns="0">
-            <a:spAutoFit/>
-          </a:bodyPr>
-          <a:lstStyle/>
-          <a:p>
-            <a:pPr algn="l"/>
-            <a:r>
-              <a:rPr sz="1400" b="1">
-                <a:solidFill>
-                  <a:srgbClr val="059669"/>
-                </a:solidFill>
-                <a:latin typeface="Open Sans"/>
-              </a:rPr>
-              <a:t>✓</a:t>
+              <a:t>We prep the packet · user submits via state portal</a:t>
             </a:r>
           </a:p>
         </p:txBody>
@@ -12354,64 +13657,64 @@
         </p:nvSpPr>
         <p:spPr>
           <a:xfrm>
-            <a:off x="1097280" y="4315968"/>
-            <a:ext cx="4572000" cy="457200"/>
-          </a:xfrm>
-          <a:prstGeom prst="rect">
-            <a:avLst/>
-          </a:prstGeom>
-          <a:noFill/>
-        </p:spPr>
-        <p:txBody>
-          <a:bodyPr wrap="square" anchor="t" lIns="0" rIns="0" tIns="0" bIns="0">
-            <a:spAutoFit/>
-          </a:bodyPr>
-          <a:lstStyle/>
-          <a:p>
-            <a:pPr algn="l"/>
-            <a:r>
-              <a:rPr sz="1100" b="0">
+            <a:off x="685800" y="5074919"/>
+            <a:ext cx="1371600" cy="201168"/>
+          </a:xfrm>
+          <a:prstGeom prst="rect">
+            <a:avLst/>
+          </a:prstGeom>
+          <a:noFill/>
+        </p:spPr>
+        <p:txBody>
+          <a:bodyPr wrap="square" anchor="t" lIns="0" rIns="0" tIns="0" bIns="0">
+            <a:spAutoFit/>
+          </a:bodyPr>
+          <a:lstStyle/>
+          <a:p>
+            <a:pPr algn="l"/>
+            <a:r>
+              <a:rPr sz="900" b="1">
+                <a:solidFill>
+                  <a:srgbClr val="2863C5"/>
+                </a:solidFill>
+                <a:latin typeface="Open Sans"/>
+              </a:rPr>
+              <a:t>We track</a:t>
+            </a:r>
+          </a:p>
+        </p:txBody>
+      </p:sp>
+      <p:sp>
+        <p:nvSpPr>
+          <p:cNvPr id="19" name="TextBox 18"/>
+          <p:cNvSpPr txBox="1"/>
+          <p:nvPr/>
+        </p:nvSpPr>
+        <p:spPr>
+          <a:xfrm>
+            <a:off x="685800" y="5294375"/>
+            <a:ext cx="3200400" cy="457200"/>
+          </a:xfrm>
+          <a:prstGeom prst="rect">
+            <a:avLst/>
+          </a:prstGeom>
+          <a:noFill/>
+        </p:spPr>
+        <p:txBody>
+          <a:bodyPr wrap="square" anchor="t" lIns="0" rIns="0" tIns="0" bIns="0">
+            <a:spAutoFit/>
+          </a:bodyPr>
+          <a:lstStyle/>
+          <a:p>
+            <a:pPr algn="l"/>
+            <a:r>
+              <a:rPr sz="1000" b="0">
                 <a:solidFill>
                   <a:srgbClr val="334155"/>
                 </a:solidFill>
                 <a:latin typeface="Open Sans"/>
               </a:rPr>
-              <a:t>Route members to official state claim portals for v1</a:t>
-            </a:r>
-          </a:p>
-        </p:txBody>
-      </p:sp>
-      <p:sp>
-        <p:nvSpPr>
-          <p:cNvPr id="19" name="TextBox 18"/>
-          <p:cNvSpPr txBox="1"/>
-          <p:nvPr/>
-        </p:nvSpPr>
-        <p:spPr>
-          <a:xfrm>
-            <a:off x="777240" y="4754880"/>
-            <a:ext cx="274320" cy="274320"/>
-          </a:xfrm>
-          <a:prstGeom prst="rect">
-            <a:avLst/>
-          </a:prstGeom>
-          <a:noFill/>
-        </p:spPr>
-        <p:txBody>
-          <a:bodyPr wrap="square" anchor="t" lIns="0" rIns="0" tIns="0" bIns="0">
-            <a:spAutoFit/>
-          </a:bodyPr>
-          <a:lstStyle/>
-          <a:p>
-            <a:pPr algn="l"/>
-            <a:r>
-              <a:rPr sz="1400" b="1">
-                <a:solidFill>
-                  <a:srgbClr val="059669"/>
-                </a:solidFill>
-                <a:latin typeface="Open Sans"/>
-              </a:rPr>
-              <a:t>✓</a:t>
+              <a:t>Claim ID + status entered by member or updated manually until state APIs exist</a:t>
             </a:r>
           </a:p>
         </p:txBody>
@@ -12424,183 +13727,78 @@
         </p:nvSpPr>
         <p:spPr>
           <a:xfrm>
-            <a:off x="1097280" y="4773168"/>
-            <a:ext cx="4572000" cy="457200"/>
-          </a:xfrm>
-          <a:prstGeom prst="rect">
-            <a:avLst/>
-          </a:prstGeom>
-          <a:noFill/>
-        </p:spPr>
-        <p:txBody>
-          <a:bodyPr wrap="square" anchor="t" lIns="0" rIns="0" tIns="0" bIns="0">
-            <a:spAutoFit/>
-          </a:bodyPr>
-          <a:lstStyle/>
-          <a:p>
-            <a:pPr algn="l"/>
-            <a:r>
-              <a:rPr sz="1100" b="0">
+            <a:off x="685800" y="5623559"/>
+            <a:ext cx="1371600" cy="201168"/>
+          </a:xfrm>
+          <a:prstGeom prst="rect">
+            <a:avLst/>
+          </a:prstGeom>
+          <a:noFill/>
+        </p:spPr>
+        <p:txBody>
+          <a:bodyPr wrap="square" anchor="t" lIns="0" rIns="0" tIns="0" bIns="0">
+            <a:spAutoFit/>
+          </a:bodyPr>
+          <a:lstStyle/>
+          <a:p>
+            <a:pPr algn="l"/>
+            <a:r>
+              <a:rPr sz="900" b="1">
+                <a:solidFill>
+                  <a:srgbClr val="2863C5"/>
+                </a:solidFill>
+                <a:latin typeface="Open Sans"/>
+              </a:rPr>
+              <a:t>Status</a:t>
+            </a:r>
+          </a:p>
+        </p:txBody>
+      </p:sp>
+      <p:sp>
+        <p:nvSpPr>
+          <p:cNvPr id="21" name="TextBox 20"/>
+          <p:cNvSpPr txBox="1"/>
+          <p:nvPr/>
+        </p:nvSpPr>
+        <p:spPr>
+          <a:xfrm>
+            <a:off x="685800" y="5843015"/>
+            <a:ext cx="3200400" cy="457200"/>
+          </a:xfrm>
+          <a:prstGeom prst="rect">
+            <a:avLst/>
+          </a:prstGeom>
+          <a:noFill/>
+        </p:spPr>
+        <p:txBody>
+          <a:bodyPr wrap="square" anchor="t" lIns="0" rIns="0" tIns="0" bIns="0">
+            <a:spAutoFit/>
+          </a:bodyPr>
+          <a:lstStyle/>
+          <a:p>
+            <a:pPr algn="l"/>
+            <a:r>
+              <a:rPr sz="1000" b="0">
                 <a:solidFill>
                   <a:srgbClr val="334155"/>
                 </a:solidFill>
                 <a:latin typeface="Open Sans"/>
               </a:rPr>
-              <a:t>Track claim ID + status inside SmartCredit (manual entry)</a:t>
-            </a:r>
-          </a:p>
-        </p:txBody>
-      </p:sp>
-      <p:sp>
-        <p:nvSpPr>
-          <p:cNvPr id="21" name="TextBox 20"/>
-          <p:cNvSpPr txBox="1"/>
-          <p:nvPr/>
-        </p:nvSpPr>
-        <p:spPr>
-          <a:xfrm>
-            <a:off x="777240" y="5212080"/>
-            <a:ext cx="274320" cy="274320"/>
-          </a:xfrm>
-          <a:prstGeom prst="rect">
-            <a:avLst/>
-          </a:prstGeom>
-          <a:noFill/>
-        </p:spPr>
-        <p:txBody>
-          <a:bodyPr wrap="square" anchor="t" lIns="0" rIns="0" tIns="0" bIns="0">
-            <a:spAutoFit/>
-          </a:bodyPr>
-          <a:lstStyle/>
-          <a:p>
-            <a:pPr algn="l"/>
-            <a:r>
-              <a:rPr sz="1400" b="1">
-                <a:solidFill>
-                  <a:srgbClr val="059669"/>
-                </a:solidFill>
-                <a:latin typeface="Open Sans"/>
-              </a:rPr>
-              <a:t>✓</a:t>
-            </a:r>
-          </a:p>
-        </p:txBody>
-      </p:sp>
-      <p:sp>
-        <p:nvSpPr>
-          <p:cNvPr id="22" name="TextBox 21"/>
-          <p:cNvSpPr txBox="1"/>
-          <p:nvPr/>
-        </p:nvSpPr>
-        <p:spPr>
-          <a:xfrm>
-            <a:off x="1097280" y="5230368"/>
-            <a:ext cx="4572000" cy="457200"/>
-          </a:xfrm>
-          <a:prstGeom prst="rect">
-            <a:avLst/>
-          </a:prstGeom>
-          <a:noFill/>
-        </p:spPr>
-        <p:txBody>
-          <a:bodyPr wrap="square" anchor="t" lIns="0" rIns="0" tIns="0" bIns="0">
-            <a:spAutoFit/>
-          </a:bodyPr>
-          <a:lstStyle/>
-          <a:p>
-            <a:pPr algn="l"/>
-            <a:r>
-              <a:rPr sz="1100" b="0">
-                <a:solidFill>
-                  <a:srgbClr val="334155"/>
-                </a:solidFill>
-                <a:latin typeface="Open Sans"/>
-              </a:rPr>
-              <a:t>File on members' behalf only where registered or approved</a:t>
-            </a:r>
-          </a:p>
-        </p:txBody>
-      </p:sp>
-      <p:sp>
-        <p:nvSpPr>
-          <p:cNvPr id="23" name="TextBox 22"/>
-          <p:cNvSpPr txBox="1"/>
-          <p:nvPr/>
-        </p:nvSpPr>
-        <p:spPr>
-          <a:xfrm>
-            <a:off x="777240" y="5669280"/>
-            <a:ext cx="274320" cy="274320"/>
-          </a:xfrm>
-          <a:prstGeom prst="rect">
-            <a:avLst/>
-          </a:prstGeom>
-          <a:noFill/>
-        </p:spPr>
-        <p:txBody>
-          <a:bodyPr wrap="square" anchor="t" lIns="0" rIns="0" tIns="0" bIns="0">
-            <a:spAutoFit/>
-          </a:bodyPr>
-          <a:lstStyle/>
-          <a:p>
-            <a:pPr algn="l"/>
-            <a:r>
-              <a:rPr sz="1400" b="1">
-                <a:solidFill>
-                  <a:srgbClr val="059669"/>
-                </a:solidFill>
-                <a:latin typeface="Open Sans"/>
-              </a:rPr>
-              <a:t>✓</a:t>
-            </a:r>
-          </a:p>
-        </p:txBody>
-      </p:sp>
-      <p:sp>
-        <p:nvSpPr>
-          <p:cNvPr id="24" name="TextBox 23"/>
-          <p:cNvSpPr txBox="1"/>
-          <p:nvPr/>
-        </p:nvSpPr>
-        <p:spPr>
-          <a:xfrm>
-            <a:off x="1097280" y="5687568"/>
-            <a:ext cx="4572000" cy="457200"/>
-          </a:xfrm>
-          <a:prstGeom prst="rect">
-            <a:avLst/>
-          </a:prstGeom>
-          <a:noFill/>
-        </p:spPr>
-        <p:txBody>
-          <a:bodyPr wrap="square" anchor="t" lIns="0" rIns="0" tIns="0" bIns="0">
-            <a:spAutoFit/>
-          </a:bodyPr>
-          <a:lstStyle/>
-          <a:p>
-            <a:pPr algn="l"/>
-            <a:r>
-              <a:rPr sz="1100" b="0">
-                <a:solidFill>
-                  <a:srgbClr val="334155"/>
-                </a:solidFill>
-                <a:latin typeface="Open Sans"/>
-              </a:rPr>
-              <a:t>Source-by-source data-use permissions; legal review per state</a:t>
-            </a:r>
-          </a:p>
-        </p:txBody>
-      </p:sp>
-      <p:sp>
-        <p:nvSpPr>
-          <p:cNvPr id="25" name="Rounded Rectangle 24"/>
+              <a:t>Ships Sprint 1 · every state with online filing</a:t>
+            </a:r>
+          </a:p>
+        </p:txBody>
+      </p:sp>
+      <p:sp>
+        <p:nvSpPr>
+          <p:cNvPr id="22" name="Rounded Rectangle 21"/>
           <p:cNvSpPr/>
           <p:nvPr/>
         </p:nvSpPr>
         <p:spPr>
           <a:xfrm>
-            <a:off x="6217920" y="2606040"/>
-            <a:ext cx="5486400" cy="3703320"/>
+            <a:off x="4251960" y="2606040"/>
+            <a:ext cx="3657600" cy="3657600"/>
           </a:xfrm>
           <a:prstGeom prst="roundRect">
             <a:avLst>
@@ -12641,20 +13839,20 @@
       </p:sp>
       <p:sp>
         <p:nvSpPr>
-          <p:cNvPr id="26" name="Rectangle 25"/>
+          <p:cNvPr id="23" name="Rectangle 22"/>
           <p:cNvSpPr/>
           <p:nvPr/>
         </p:nvSpPr>
         <p:spPr>
           <a:xfrm>
-            <a:off x="6217920" y="2606040"/>
-            <a:ext cx="5486400" cy="164592"/>
+            <a:off x="4251960" y="2606040"/>
+            <a:ext cx="3657600" cy="164592"/>
           </a:xfrm>
           <a:prstGeom prst="rect">
             <a:avLst/>
           </a:prstGeom>
           <a:solidFill>
-            <a:srgbClr val="E11D48"/>
+            <a:srgbClr val="FFB352"/>
           </a:solidFill>
           <a:ln>
             <a:noFill/>
@@ -12685,35 +13883,140 @@
       </p:sp>
       <p:sp>
         <p:nvSpPr>
+          <p:cNvPr id="24" name="TextBox 23"/>
+          <p:cNvSpPr txBox="1"/>
+          <p:nvPr/>
+        </p:nvSpPr>
+        <p:spPr>
+          <a:xfrm>
+            <a:off x="4480560" y="2898648"/>
+            <a:ext cx="3200400" cy="329184"/>
+          </a:xfrm>
+          <a:prstGeom prst="rect">
+            <a:avLst/>
+          </a:prstGeom>
+          <a:noFill/>
+        </p:spPr>
+        <p:txBody>
+          <a:bodyPr wrap="square" anchor="t" lIns="0" rIns="0" tIns="0" bIns="0">
+            <a:spAutoFit/>
+          </a:bodyPr>
+          <a:lstStyle/>
+          <a:p>
+            <a:pPr algn="l"/>
+            <a:r>
+              <a:rPr sz="1100" b="1">
+                <a:solidFill>
+                  <a:srgbClr val="FFB352"/>
+                </a:solidFill>
+                <a:latin typeface="Open Sans"/>
+              </a:rPr>
+              <a:t>v1 · FALLBACK</a:t>
+            </a:r>
+          </a:p>
+        </p:txBody>
+      </p:sp>
+      <p:sp>
+        <p:nvSpPr>
+          <p:cNvPr id="25" name="TextBox 24"/>
+          <p:cNvSpPr txBox="1"/>
+          <p:nvPr/>
+        </p:nvSpPr>
+        <p:spPr>
+          <a:xfrm>
+            <a:off x="4480560" y="3246120"/>
+            <a:ext cx="3200400" cy="502920"/>
+          </a:xfrm>
+          <a:prstGeom prst="rect">
+            <a:avLst/>
+          </a:prstGeom>
+          <a:noFill/>
+        </p:spPr>
+        <p:txBody>
+          <a:bodyPr wrap="square" anchor="t" lIns="0" rIns="0" tIns="0" bIns="0">
+            <a:spAutoFit/>
+          </a:bodyPr>
+          <a:lstStyle/>
+          <a:p>
+            <a:pPr algn="l"/>
+            <a:r>
+              <a:rPr sz="1400" b="1">
+                <a:solidFill>
+                  <a:srgbClr val="0F172A"/>
+                </a:solidFill>
+                <a:latin typeface="Open Sans"/>
+              </a:rPr>
+              <a:t>Mail packet via ActionLetters</a:t>
+            </a:r>
+          </a:p>
+        </p:txBody>
+      </p:sp>
+      <p:sp>
+        <p:nvSpPr>
+          <p:cNvPr id="26" name="TextBox 25"/>
+          <p:cNvSpPr txBox="1"/>
+          <p:nvPr/>
+        </p:nvSpPr>
+        <p:spPr>
+          <a:xfrm>
+            <a:off x="4480560" y="3977639"/>
+            <a:ext cx="1371600" cy="201168"/>
+          </a:xfrm>
+          <a:prstGeom prst="rect">
+            <a:avLst/>
+          </a:prstGeom>
+          <a:noFill/>
+        </p:spPr>
+        <p:txBody>
+          <a:bodyPr wrap="square" anchor="t" lIns="0" rIns="0" tIns="0" bIns="0">
+            <a:spAutoFit/>
+          </a:bodyPr>
+          <a:lstStyle/>
+          <a:p>
+            <a:pPr algn="l"/>
+            <a:r>
+              <a:rPr sz="900" b="1">
+                <a:solidFill>
+                  <a:srgbClr val="2863C5"/>
+                </a:solidFill>
+                <a:latin typeface="Open Sans"/>
+              </a:rPr>
+              <a:t>Who submits</a:t>
+            </a:r>
+          </a:p>
+        </p:txBody>
+      </p:sp>
+      <p:sp>
+        <p:nvSpPr>
           <p:cNvPr id="27" name="TextBox 26"/>
           <p:cNvSpPr txBox="1"/>
           <p:nvPr/>
         </p:nvSpPr>
         <p:spPr>
           <a:xfrm>
-            <a:off x="6400800" y="2898648"/>
-            <a:ext cx="5120640" cy="365760"/>
-          </a:xfrm>
-          <a:prstGeom prst="rect">
-            <a:avLst/>
-          </a:prstGeom>
-          <a:noFill/>
-        </p:spPr>
-        <p:txBody>
-          <a:bodyPr wrap="square" anchor="t" lIns="0" rIns="0" tIns="0" bIns="0">
-            <a:spAutoFit/>
-          </a:bodyPr>
-          <a:lstStyle/>
-          <a:p>
-            <a:pPr algn="l"/>
-            <a:r>
-              <a:rPr sz="1200" b="1">
-                <a:solidFill>
-                  <a:srgbClr val="E11D48"/>
-                </a:solidFill>
-                <a:latin typeface="Open Sans"/>
-              </a:rPr>
-              <a:t>WHAT WE WILL NOT DO</a:t>
+            <a:off x="4480560" y="4197096"/>
+            <a:ext cx="3200400" cy="457200"/>
+          </a:xfrm>
+          <a:prstGeom prst="rect">
+            <a:avLst/>
+          </a:prstGeom>
+          <a:noFill/>
+        </p:spPr>
+        <p:txBody>
+          <a:bodyPr wrap="square" anchor="t" lIns="0" rIns="0" tIns="0" bIns="0">
+            <a:spAutoFit/>
+          </a:bodyPr>
+          <a:lstStyle/>
+          <a:p>
+            <a:pPr algn="l"/>
+            <a:r>
+              <a:rPr sz="1000" b="0">
+                <a:solidFill>
+                  <a:srgbClr val="334155"/>
+                </a:solidFill>
+                <a:latin typeface="Open Sans"/>
+              </a:rPr>
+              <a:t>Member; we generate the packet + mailing instructions</a:t>
             </a:r>
           </a:p>
         </p:txBody>
@@ -12726,29 +14029,29 @@
         </p:nvSpPr>
         <p:spPr>
           <a:xfrm>
-            <a:off x="6355080" y="3383280"/>
-            <a:ext cx="274320" cy="274320"/>
-          </a:xfrm>
-          <a:prstGeom prst="rect">
-            <a:avLst/>
-          </a:prstGeom>
-          <a:noFill/>
-        </p:spPr>
-        <p:txBody>
-          <a:bodyPr wrap="square" anchor="t" lIns="0" rIns="0" tIns="0" bIns="0">
-            <a:spAutoFit/>
-          </a:bodyPr>
-          <a:lstStyle/>
-          <a:p>
-            <a:pPr algn="l"/>
-            <a:r>
-              <a:rPr sz="1400" b="1">
-                <a:solidFill>
-                  <a:srgbClr val="E11D48"/>
-                </a:solidFill>
-                <a:latin typeface="Open Sans"/>
-              </a:rPr>
-              <a:t>✗</a:t>
+            <a:off x="4480560" y="4526279"/>
+            <a:ext cx="1371600" cy="201168"/>
+          </a:xfrm>
+          <a:prstGeom prst="rect">
+            <a:avLst/>
+          </a:prstGeom>
+          <a:noFill/>
+        </p:spPr>
+        <p:txBody>
+          <a:bodyPr wrap="square" anchor="t" lIns="0" rIns="0" tIns="0" bIns="0">
+            <a:spAutoFit/>
+          </a:bodyPr>
+          <a:lstStyle/>
+          <a:p>
+            <a:pPr algn="l"/>
+            <a:r>
+              <a:rPr sz="900" b="1">
+                <a:solidFill>
+                  <a:srgbClr val="2863C5"/>
+                </a:solidFill>
+                <a:latin typeface="Open Sans"/>
+              </a:rPr>
+              <a:t>How</a:t>
             </a:r>
           </a:p>
         </p:txBody>
@@ -12761,29 +14064,29 @@
         </p:nvSpPr>
         <p:spPr>
           <a:xfrm>
-            <a:off x="6675120" y="3401568"/>
-            <a:ext cx="4846320" cy="457200"/>
-          </a:xfrm>
-          <a:prstGeom prst="rect">
-            <a:avLst/>
-          </a:prstGeom>
-          <a:noFill/>
-        </p:spPr>
-        <p:txBody>
-          <a:bodyPr wrap="square" anchor="t" lIns="0" rIns="0" tIns="0" bIns="0">
-            <a:spAutoFit/>
-          </a:bodyPr>
-          <a:lstStyle/>
-          <a:p>
-            <a:pPr algn="l"/>
-            <a:r>
-              <a:rPr sz="1100" b="0">
+            <a:off x="4480560" y="4745736"/>
+            <a:ext cx="3200400" cy="457200"/>
+          </a:xfrm>
+          <a:prstGeom prst="rect">
+            <a:avLst/>
+          </a:prstGeom>
+          <a:noFill/>
+        </p:spPr>
+        <p:txBody>
+          <a:bodyPr wrap="square" anchor="t" lIns="0" rIns="0" tIns="0" bIns="0">
+            <a:spAutoFit/>
+          </a:bodyPr>
+          <a:lstStyle/>
+          <a:p>
+            <a:pPr algn="l"/>
+            <a:r>
+              <a:rPr sz="1000" b="0">
                 <a:solidFill>
                   <a:srgbClr val="334155"/>
                 </a:solidFill>
                 <a:latin typeface="Open Sans"/>
               </a:rPr>
-              <a:t>Scrape state portals or MissingMoney.com</a:t>
+              <a:t>If ActionLetters mails directly, legal must confirm it isn't representative filing</a:t>
             </a:r>
           </a:p>
         </p:txBody>
@@ -12796,29 +14099,29 @@
         </p:nvSpPr>
         <p:spPr>
           <a:xfrm>
-            <a:off x="6355080" y="3840480"/>
-            <a:ext cx="274320" cy="274320"/>
-          </a:xfrm>
-          <a:prstGeom prst="rect">
-            <a:avLst/>
-          </a:prstGeom>
-          <a:noFill/>
-        </p:spPr>
-        <p:txBody>
-          <a:bodyPr wrap="square" anchor="t" lIns="0" rIns="0" tIns="0" bIns="0">
-            <a:spAutoFit/>
-          </a:bodyPr>
-          <a:lstStyle/>
-          <a:p>
-            <a:pPr algn="l"/>
-            <a:r>
-              <a:rPr sz="1400" b="1">
-                <a:solidFill>
-                  <a:srgbClr val="E11D48"/>
-                </a:solidFill>
-                <a:latin typeface="Open Sans"/>
-              </a:rPr>
-              <a:t>✗</a:t>
+            <a:off x="4480560" y="5074919"/>
+            <a:ext cx="1371600" cy="201168"/>
+          </a:xfrm>
+          <a:prstGeom prst="rect">
+            <a:avLst/>
+          </a:prstGeom>
+          <a:noFill/>
+        </p:spPr>
+        <p:txBody>
+          <a:bodyPr wrap="square" anchor="t" lIns="0" rIns="0" tIns="0" bIns="0">
+            <a:spAutoFit/>
+          </a:bodyPr>
+          <a:lstStyle/>
+          <a:p>
+            <a:pPr algn="l"/>
+            <a:r>
+              <a:rPr sz="900" b="1">
+                <a:solidFill>
+                  <a:srgbClr val="2863C5"/>
+                </a:solidFill>
+                <a:latin typeface="Open Sans"/>
+              </a:rPr>
+              <a:t>When</a:t>
             </a:r>
           </a:p>
         </p:txBody>
@@ -12831,29 +14134,29 @@
         </p:nvSpPr>
         <p:spPr>
           <a:xfrm>
-            <a:off x="6675120" y="3858768"/>
-            <a:ext cx="4846320" cy="457200"/>
-          </a:xfrm>
-          <a:prstGeom prst="rect">
-            <a:avLst/>
-          </a:prstGeom>
-          <a:noFill/>
-        </p:spPr>
-        <p:txBody>
-          <a:bodyPr wrap="square" anchor="t" lIns="0" rIns="0" tIns="0" bIns="0">
-            <a:spAutoFit/>
-          </a:bodyPr>
-          <a:lstStyle/>
-          <a:p>
-            <a:pPr algn="l"/>
-            <a:r>
-              <a:rPr sz="1100" b="0">
+            <a:off x="4480560" y="5294375"/>
+            <a:ext cx="3200400" cy="457200"/>
+          </a:xfrm>
+          <a:prstGeom prst="rect">
+            <a:avLst/>
+          </a:prstGeom>
+          <a:noFill/>
+        </p:spPr>
+        <p:txBody>
+          <a:bodyPr wrap="square" anchor="t" lIns="0" rIns="0" tIns="0" bIns="0">
+            <a:spAutoFit/>
+          </a:bodyPr>
+          <a:lstStyle/>
+          <a:p>
+            <a:pPr algn="l"/>
+            <a:r>
+              <a:rPr sz="1000" b="0">
                 <a:solidFill>
                   <a:srgbClr val="334155"/>
                 </a:solidFill>
                 <a:latin typeface="Open Sans"/>
               </a:rPr>
-              <a:t>Guarantee a claim belongs to the member</a:t>
+              <a:t>States requiring notarized physical paperwork</a:t>
             </a:r>
           </a:p>
         </p:txBody>
@@ -12866,29 +14169,29 @@
         </p:nvSpPr>
         <p:spPr>
           <a:xfrm>
-            <a:off x="6355080" y="4297680"/>
-            <a:ext cx="274320" cy="274320"/>
-          </a:xfrm>
-          <a:prstGeom prst="rect">
-            <a:avLst/>
-          </a:prstGeom>
-          <a:noFill/>
-        </p:spPr>
-        <p:txBody>
-          <a:bodyPr wrap="square" anchor="t" lIns="0" rIns="0" tIns="0" bIns="0">
-            <a:spAutoFit/>
-          </a:bodyPr>
-          <a:lstStyle/>
-          <a:p>
-            <a:pPr algn="l"/>
-            <a:r>
-              <a:rPr sz="1400" b="1">
-                <a:solidFill>
-                  <a:srgbClr val="E11D48"/>
-                </a:solidFill>
-                <a:latin typeface="Open Sans"/>
-              </a:rPr>
-              <a:t>✗</a:t>
+            <a:off x="4480560" y="5623559"/>
+            <a:ext cx="1371600" cy="201168"/>
+          </a:xfrm>
+          <a:prstGeom prst="rect">
+            <a:avLst/>
+          </a:prstGeom>
+          <a:noFill/>
+        </p:spPr>
+        <p:txBody>
+          <a:bodyPr wrap="square" anchor="t" lIns="0" rIns="0" tIns="0" bIns="0">
+            <a:spAutoFit/>
+          </a:bodyPr>
+          <a:lstStyle/>
+          <a:p>
+            <a:pPr algn="l"/>
+            <a:r>
+              <a:rPr sz="900" b="1">
+                <a:solidFill>
+                  <a:srgbClr val="2863C5"/>
+                </a:solidFill>
+                <a:latin typeface="Open Sans"/>
+              </a:rPr>
+              <a:t>Status</a:t>
             </a:r>
           </a:p>
         </p:txBody>
@@ -12901,261 +14204,97 @@
         </p:nvSpPr>
         <p:spPr>
           <a:xfrm>
-            <a:off x="6675120" y="4315968"/>
-            <a:ext cx="4846320" cy="457200"/>
-          </a:xfrm>
-          <a:prstGeom prst="rect">
-            <a:avLst/>
-          </a:prstGeom>
-          <a:noFill/>
-        </p:spPr>
-        <p:txBody>
-          <a:bodyPr wrap="square" anchor="t" lIns="0" rIns="0" tIns="0" bIns="0">
-            <a:spAutoFit/>
-          </a:bodyPr>
-          <a:lstStyle/>
-          <a:p>
-            <a:pPr algn="l"/>
-            <a:r>
-              <a:rPr sz="1100" b="0">
+            <a:off x="4480560" y="5843015"/>
+            <a:ext cx="3200400" cy="457200"/>
+          </a:xfrm>
+          <a:prstGeom prst="rect">
+            <a:avLst/>
+          </a:prstGeom>
+          <a:noFill/>
+        </p:spPr>
+        <p:txBody>
+          <a:bodyPr wrap="square" anchor="t" lIns="0" rIns="0" tIns="0" bIns="0">
+            <a:spAutoFit/>
+          </a:bodyPr>
+          <a:lstStyle/>
+          <a:p>
+            <a:pPr algn="l"/>
+            <a:r>
+              <a:rPr sz="1000" b="0">
                 <a:solidFill>
                   <a:srgbClr val="334155"/>
                 </a:solidFill>
                 <a:latin typeface="Open Sans"/>
               </a:rPr>
-              <a:t>Charge a success fee or take a cut</a:t>
-            </a:r>
-          </a:p>
-        </p:txBody>
-      </p:sp>
-      <p:sp>
-        <p:nvSpPr>
-          <p:cNvPr id="34" name="TextBox 33"/>
-          <p:cNvSpPr txBox="1"/>
-          <p:nvPr/>
-        </p:nvSpPr>
-        <p:spPr>
-          <a:xfrm>
-            <a:off x="6355080" y="4754880"/>
-            <a:ext cx="274320" cy="274320"/>
-          </a:xfrm>
-          <a:prstGeom prst="rect">
-            <a:avLst/>
-          </a:prstGeom>
-          <a:noFill/>
-        </p:spPr>
-        <p:txBody>
-          <a:bodyPr wrap="square" anchor="t" lIns="0" rIns="0" tIns="0" bIns="0">
-            <a:spAutoFit/>
-          </a:bodyPr>
-          <a:lstStyle/>
-          <a:p>
-            <a:pPr algn="l"/>
-            <a:r>
-              <a:rPr sz="1400" b="1">
-                <a:solidFill>
-                  <a:srgbClr val="E11D48"/>
-                </a:solidFill>
-                <a:latin typeface="Open Sans"/>
-              </a:rPr>
-              <a:t>✗</a:t>
-            </a:r>
-          </a:p>
-        </p:txBody>
-      </p:sp>
-      <p:sp>
-        <p:nvSpPr>
-          <p:cNvPr id="35" name="TextBox 34"/>
-          <p:cNvSpPr txBox="1"/>
-          <p:nvPr/>
-        </p:nvSpPr>
-        <p:spPr>
-          <a:xfrm>
-            <a:off x="6675120" y="4773168"/>
-            <a:ext cx="4846320" cy="457200"/>
-          </a:xfrm>
-          <a:prstGeom prst="rect">
-            <a:avLst/>
-          </a:prstGeom>
-          <a:noFill/>
-        </p:spPr>
-        <p:txBody>
-          <a:bodyPr wrap="square" anchor="t" lIns="0" rIns="0" tIns="0" bIns="0">
-            <a:spAutoFit/>
-          </a:bodyPr>
-          <a:lstStyle/>
-          <a:p>
-            <a:pPr algn="l"/>
-            <a:r>
-              <a:rPr sz="1100" b="0">
-                <a:solidFill>
-                  <a:srgbClr val="334155"/>
-                </a:solidFill>
-                <a:latin typeface="Open Sans"/>
-              </a:rPr>
-              <a:t>Submit claims without fresh user authorization</a:t>
-            </a:r>
-          </a:p>
-        </p:txBody>
-      </p:sp>
-      <p:sp>
-        <p:nvSpPr>
-          <p:cNvPr id="36" name="TextBox 35"/>
-          <p:cNvSpPr txBox="1"/>
-          <p:nvPr/>
-        </p:nvSpPr>
-        <p:spPr>
-          <a:xfrm>
-            <a:off x="6355080" y="5212080"/>
-            <a:ext cx="274320" cy="274320"/>
-          </a:xfrm>
-          <a:prstGeom prst="rect">
-            <a:avLst/>
-          </a:prstGeom>
-          <a:noFill/>
-        </p:spPr>
-        <p:txBody>
-          <a:bodyPr wrap="square" anchor="t" lIns="0" rIns="0" tIns="0" bIns="0">
-            <a:spAutoFit/>
-          </a:bodyPr>
-          <a:lstStyle/>
-          <a:p>
-            <a:pPr algn="l"/>
-            <a:r>
-              <a:rPr sz="1400" b="1">
-                <a:solidFill>
-                  <a:srgbClr val="E11D48"/>
-                </a:solidFill>
-                <a:latin typeface="Open Sans"/>
-              </a:rPr>
-              <a:t>✗</a:t>
-            </a:r>
-          </a:p>
-        </p:txBody>
-      </p:sp>
-      <p:sp>
-        <p:nvSpPr>
-          <p:cNvPr id="37" name="TextBox 36"/>
-          <p:cNvSpPr txBox="1"/>
-          <p:nvPr/>
-        </p:nvSpPr>
-        <p:spPr>
-          <a:xfrm>
-            <a:off x="6675120" y="5230368"/>
-            <a:ext cx="4846320" cy="457200"/>
-          </a:xfrm>
-          <a:prstGeom prst="rect">
-            <a:avLst/>
-          </a:prstGeom>
-          <a:noFill/>
-        </p:spPr>
-        <p:txBody>
-          <a:bodyPr wrap="square" anchor="t" lIns="0" rIns="0" tIns="0" bIns="0">
-            <a:spAutoFit/>
-          </a:bodyPr>
-          <a:lstStyle/>
-          <a:p>
-            <a:pPr algn="l"/>
-            <a:r>
-              <a:rPr sz="1100" b="0">
-                <a:solidFill>
-                  <a:srgbClr val="334155"/>
-                </a:solidFill>
-                <a:latin typeface="Open Sans"/>
-              </a:rPr>
-              <a:t>Re-use credit-report-derived data without legal sign-off</a:t>
-            </a:r>
-          </a:p>
-        </p:txBody>
-      </p:sp>
-      <p:sp>
-        <p:nvSpPr>
-          <p:cNvPr id="38" name="TextBox 37"/>
-          <p:cNvSpPr txBox="1"/>
-          <p:nvPr/>
-        </p:nvSpPr>
-        <p:spPr>
-          <a:xfrm>
-            <a:off x="6355080" y="5669280"/>
-            <a:ext cx="274320" cy="274320"/>
-          </a:xfrm>
-          <a:prstGeom prst="rect">
-            <a:avLst/>
-          </a:prstGeom>
-          <a:noFill/>
-        </p:spPr>
-        <p:txBody>
-          <a:bodyPr wrap="square" anchor="t" lIns="0" rIns="0" tIns="0" bIns="0">
-            <a:spAutoFit/>
-          </a:bodyPr>
-          <a:lstStyle/>
-          <a:p>
-            <a:pPr algn="l"/>
-            <a:r>
-              <a:rPr sz="1400" b="1">
-                <a:solidFill>
-                  <a:srgbClr val="E11D48"/>
-                </a:solidFill>
-                <a:latin typeface="Open Sans"/>
-              </a:rPr>
-              <a:t>✗</a:t>
-            </a:r>
-          </a:p>
-        </p:txBody>
-      </p:sp>
-      <p:sp>
-        <p:nvSpPr>
-          <p:cNvPr id="39" name="TextBox 38"/>
-          <p:cNvSpPr txBox="1"/>
-          <p:nvPr/>
-        </p:nvSpPr>
-        <p:spPr>
-          <a:xfrm>
-            <a:off x="6675120" y="5687568"/>
-            <a:ext cx="4846320" cy="457200"/>
-          </a:xfrm>
-          <a:prstGeom prst="rect">
-            <a:avLst/>
-          </a:prstGeom>
-          <a:noFill/>
-        </p:spPr>
-        <p:txBody>
-          <a:bodyPr wrap="square" anchor="t" lIns="0" rIns="0" tIns="0" bIns="0">
-            <a:spAutoFit/>
-          </a:bodyPr>
-          <a:lstStyle/>
-          <a:p>
-            <a:pPr algn="l"/>
-            <a:r>
-              <a:rPr sz="1100" b="0">
-                <a:solidFill>
-                  <a:srgbClr val="334155"/>
-                </a:solidFill>
-                <a:latin typeface="Open Sans"/>
-              </a:rPr>
-              <a:t>Store sensitive claim documents unless required and approved</a:t>
-            </a:r>
-          </a:p>
-        </p:txBody>
-      </p:sp>
-      <p:sp>
-        <p:nvSpPr>
-          <p:cNvPr id="40" name="Rounded Rectangle 39"/>
+              <a:t>Available now · same rail as credit-dispute mailers</a:t>
+            </a:r>
+          </a:p>
+        </p:txBody>
+      </p:sp>
+      <p:sp>
+        <p:nvSpPr>
+          <p:cNvPr id="34" name="Rounded Rectangle 33"/>
           <p:cNvSpPr/>
           <p:nvPr/>
         </p:nvSpPr>
         <p:spPr>
           <a:xfrm>
-            <a:off x="457200" y="6446520"/>
-            <a:ext cx="11247120" cy="365760"/>
+            <a:off x="8046720" y="2606040"/>
+            <a:ext cx="3657600" cy="3657600"/>
           </a:xfrm>
           <a:prstGeom prst="roundRect">
             <a:avLst>
-              <a:gd name="adj" fmla="val 7000"/>
+              <a:gd name="adj" fmla="val 3000"/>
             </a:avLst>
           </a:prstGeom>
           <a:solidFill>
-            <a:srgbClr val="0F172A"/>
+            <a:srgbClr val="FFFFFF"/>
+          </a:solidFill>
+          <a:ln w="6350">
+            <a:solidFill>
+              <a:srgbClr val="E2E8F0"/>
+            </a:solidFill>
+          </a:ln>
+          <a:effectLst/>
+        </p:spPr>
+        <p:style>
+          <a:lnRef idx="1">
+            <a:schemeClr val="accent1"/>
+          </a:lnRef>
+          <a:fillRef idx="3">
+            <a:schemeClr val="accent1"/>
+          </a:fillRef>
+          <a:effectRef idx="2">
+            <a:schemeClr val="accent1"/>
+          </a:effectRef>
+          <a:fontRef idx="minor">
+            <a:schemeClr val="lt1"/>
+          </a:fontRef>
+        </p:style>
+        <p:txBody>
+          <a:bodyPr rtlCol="0" anchor="ctr"/>
+          <a:lstStyle/>
+          <a:p>
+            <a:pPr algn="ctr"/>
+          </a:p>
+        </p:txBody>
+      </p:sp>
+      <p:sp>
+        <p:nvSpPr>
+          <p:cNvPr id="35" name="Rectangle 34"/>
+          <p:cNvSpPr/>
+          <p:nvPr/>
+        </p:nvSpPr>
+        <p:spPr>
+          <a:xfrm>
+            <a:off x="8046720" y="2606040"/>
+            <a:ext cx="3657600" cy="164592"/>
+          </a:xfrm>
+          <a:prstGeom prst="rect">
+            <a:avLst/>
+          </a:prstGeom>
+          <a:solidFill>
+            <a:srgbClr val="2863C5"/>
           </a:solidFill>
           <a:ln>
             <a:noFill/>
@@ -13186,13 +14325,409 @@
       </p:sp>
       <p:sp>
         <p:nvSpPr>
+          <p:cNvPr id="36" name="TextBox 35"/>
+          <p:cNvSpPr txBox="1"/>
+          <p:nvPr/>
+        </p:nvSpPr>
+        <p:spPr>
+          <a:xfrm>
+            <a:off x="8275320" y="2898648"/>
+            <a:ext cx="3200400" cy="329184"/>
+          </a:xfrm>
+          <a:prstGeom prst="rect">
+            <a:avLst/>
+          </a:prstGeom>
+          <a:noFill/>
+        </p:spPr>
+        <p:txBody>
+          <a:bodyPr wrap="square" anchor="t" lIns="0" rIns="0" tIns="0" bIns="0">
+            <a:spAutoFit/>
+          </a:bodyPr>
+          <a:lstStyle/>
+          <a:p>
+            <a:pPr algn="l"/>
+            <a:r>
+              <a:rPr sz="1100" b="1">
+                <a:solidFill>
+                  <a:srgbClr val="2863C5"/>
+                </a:solidFill>
+                <a:latin typeface="Open Sans"/>
+              </a:rPr>
+              <a:t>v2 · UNLOCK</a:t>
+            </a:r>
+          </a:p>
+        </p:txBody>
+      </p:sp>
+      <p:sp>
+        <p:nvSpPr>
+          <p:cNvPr id="37" name="TextBox 36"/>
+          <p:cNvSpPr txBox="1"/>
+          <p:nvPr/>
+        </p:nvSpPr>
+        <p:spPr>
+          <a:xfrm>
+            <a:off x="8275320" y="3246120"/>
+            <a:ext cx="3200400" cy="502920"/>
+          </a:xfrm>
+          <a:prstGeom prst="rect">
+            <a:avLst/>
+          </a:prstGeom>
+          <a:noFill/>
+        </p:spPr>
+        <p:txBody>
+          <a:bodyPr wrap="square" anchor="t" lIns="0" rIns="0" tIns="0" bIns="0">
+            <a:spAutoFit/>
+          </a:bodyPr>
+          <a:lstStyle/>
+          <a:p>
+            <a:pPr algn="l"/>
+            <a:r>
+              <a:rPr sz="1400" b="1">
+                <a:solidFill>
+                  <a:srgbClr val="0F172A"/>
+                </a:solidFill>
+                <a:latin typeface="Open Sans"/>
+              </a:rPr>
+              <a:t>Registered representative</a:t>
+            </a:r>
+          </a:p>
+        </p:txBody>
+      </p:sp>
+      <p:sp>
+        <p:nvSpPr>
+          <p:cNvPr id="38" name="TextBox 37"/>
+          <p:cNvSpPr txBox="1"/>
+          <p:nvPr/>
+        </p:nvSpPr>
+        <p:spPr>
+          <a:xfrm>
+            <a:off x="8275320" y="3977639"/>
+            <a:ext cx="1371600" cy="201168"/>
+          </a:xfrm>
+          <a:prstGeom prst="rect">
+            <a:avLst/>
+          </a:prstGeom>
+          <a:noFill/>
+        </p:spPr>
+        <p:txBody>
+          <a:bodyPr wrap="square" anchor="t" lIns="0" rIns="0" tIns="0" bIns="0">
+            <a:spAutoFit/>
+          </a:bodyPr>
+          <a:lstStyle/>
+          <a:p>
+            <a:pPr algn="l"/>
+            <a:r>
+              <a:rPr sz="900" b="1">
+                <a:solidFill>
+                  <a:srgbClr val="2863C5"/>
+                </a:solidFill>
+                <a:latin typeface="Open Sans"/>
+              </a:rPr>
+              <a:t>Who submits</a:t>
+            </a:r>
+          </a:p>
+        </p:txBody>
+      </p:sp>
+      <p:sp>
+        <p:nvSpPr>
+          <p:cNvPr id="39" name="TextBox 38"/>
+          <p:cNvSpPr txBox="1"/>
+          <p:nvPr/>
+        </p:nvSpPr>
+        <p:spPr>
+          <a:xfrm>
+            <a:off x="8275320" y="4197096"/>
+            <a:ext cx="3200400" cy="457200"/>
+          </a:xfrm>
+          <a:prstGeom prst="rect">
+            <a:avLst/>
+          </a:prstGeom>
+          <a:noFill/>
+        </p:spPr>
+        <p:txBody>
+          <a:bodyPr wrap="square" anchor="t" lIns="0" rIns="0" tIns="0" bIns="0">
+            <a:spAutoFit/>
+          </a:bodyPr>
+          <a:lstStyle/>
+          <a:p>
+            <a:pPr algn="l"/>
+            <a:r>
+              <a:rPr sz="1000" b="0">
+                <a:solidFill>
+                  <a:srgbClr val="334155"/>
+                </a:solidFill>
+                <a:latin typeface="Open Sans"/>
+              </a:rPr>
+              <a:t>SmartCredit, on the member's behalf</a:t>
+            </a:r>
+          </a:p>
+        </p:txBody>
+      </p:sp>
+      <p:sp>
+        <p:nvSpPr>
+          <p:cNvPr id="40" name="TextBox 39"/>
+          <p:cNvSpPr txBox="1"/>
+          <p:nvPr/>
+        </p:nvSpPr>
+        <p:spPr>
+          <a:xfrm>
+            <a:off x="8275320" y="4526279"/>
+            <a:ext cx="1371600" cy="201168"/>
+          </a:xfrm>
+          <a:prstGeom prst="rect">
+            <a:avLst/>
+          </a:prstGeom>
+          <a:noFill/>
+        </p:spPr>
+        <p:txBody>
+          <a:bodyPr wrap="square" anchor="t" lIns="0" rIns="0" tIns="0" bIns="0">
+            <a:spAutoFit/>
+          </a:bodyPr>
+          <a:lstStyle/>
+          <a:p>
+            <a:pPr algn="l"/>
+            <a:r>
+              <a:rPr sz="900" b="1">
+                <a:solidFill>
+                  <a:srgbClr val="2863C5"/>
+                </a:solidFill>
+                <a:latin typeface="Open Sans"/>
+              </a:rPr>
+              <a:t>Where</a:t>
+            </a:r>
+          </a:p>
+        </p:txBody>
+      </p:sp>
+      <p:sp>
+        <p:nvSpPr>
           <p:cNvPr id="41" name="TextBox 40"/>
           <p:cNvSpPr txBox="1"/>
           <p:nvPr/>
         </p:nvSpPr>
         <p:spPr>
           <a:xfrm>
-            <a:off x="640080" y="6492240"/>
+            <a:off x="8275320" y="4745736"/>
+            <a:ext cx="3200400" cy="457200"/>
+          </a:xfrm>
+          <a:prstGeom prst="rect">
+            <a:avLst/>
+          </a:prstGeom>
+          <a:noFill/>
+        </p:spPr>
+        <p:txBody>
+          <a:bodyPr wrap="square" anchor="t" lIns="0" rIns="0" tIns="0" bIns="0">
+            <a:spAutoFit/>
+          </a:bodyPr>
+          <a:lstStyle/>
+          <a:p>
+            <a:pPr algn="l"/>
+            <a:r>
+              <a:rPr sz="1000" b="0">
+                <a:solidFill>
+                  <a:srgbClr val="334155"/>
+                </a:solidFill>
+                <a:latin typeface="Open Sans"/>
+              </a:rPr>
+              <a:t>GA (CDR) · FL (Ch. 717) · OH (Finder) · MI (locator)</a:t>
+            </a:r>
+          </a:p>
+        </p:txBody>
+      </p:sp>
+      <p:sp>
+        <p:nvSpPr>
+          <p:cNvPr id="42" name="TextBox 41"/>
+          <p:cNvSpPr txBox="1"/>
+          <p:nvPr/>
+        </p:nvSpPr>
+        <p:spPr>
+          <a:xfrm>
+            <a:off x="8275320" y="5074919"/>
+            <a:ext cx="1371600" cy="201168"/>
+          </a:xfrm>
+          <a:prstGeom prst="rect">
+            <a:avLst/>
+          </a:prstGeom>
+          <a:noFill/>
+        </p:spPr>
+        <p:txBody>
+          <a:bodyPr wrap="square" anchor="t" lIns="0" rIns="0" tIns="0" bIns="0">
+            <a:spAutoFit/>
+          </a:bodyPr>
+          <a:lstStyle/>
+          <a:p>
+            <a:pPr algn="l"/>
+            <a:r>
+              <a:rPr sz="900" b="1">
+                <a:solidFill>
+                  <a:srgbClr val="2863C5"/>
+                </a:solidFill>
+                <a:latin typeface="Open Sans"/>
+              </a:rPr>
+              <a:t>Fee</a:t>
+            </a:r>
+          </a:p>
+        </p:txBody>
+      </p:sp>
+      <p:sp>
+        <p:nvSpPr>
+          <p:cNvPr id="43" name="TextBox 42"/>
+          <p:cNvSpPr txBox="1"/>
+          <p:nvPr/>
+        </p:nvSpPr>
+        <p:spPr>
+          <a:xfrm>
+            <a:off x="8275320" y="5294375"/>
+            <a:ext cx="3200400" cy="457200"/>
+          </a:xfrm>
+          <a:prstGeom prst="rect">
+            <a:avLst/>
+          </a:prstGeom>
+          <a:noFill/>
+        </p:spPr>
+        <p:txBody>
+          <a:bodyPr wrap="square" anchor="t" lIns="0" rIns="0" tIns="0" bIns="0">
+            <a:spAutoFit/>
+          </a:bodyPr>
+          <a:lstStyle/>
+          <a:p>
+            <a:pPr algn="l"/>
+            <a:r>
+              <a:rPr sz="1000" b="0">
+                <a:solidFill>
+                  <a:srgbClr val="334155"/>
+                </a:solidFill>
+                <a:latin typeface="Open Sans"/>
+              </a:rPr>
+              <a:t>GA caps reps at 30% · we charge $0</a:t>
+            </a:r>
+          </a:p>
+        </p:txBody>
+      </p:sp>
+      <p:sp>
+        <p:nvSpPr>
+          <p:cNvPr id="44" name="TextBox 43"/>
+          <p:cNvSpPr txBox="1"/>
+          <p:nvPr/>
+        </p:nvSpPr>
+        <p:spPr>
+          <a:xfrm>
+            <a:off x="8275320" y="5623559"/>
+            <a:ext cx="1371600" cy="201168"/>
+          </a:xfrm>
+          <a:prstGeom prst="rect">
+            <a:avLst/>
+          </a:prstGeom>
+          <a:noFill/>
+        </p:spPr>
+        <p:txBody>
+          <a:bodyPr wrap="square" anchor="t" lIns="0" rIns="0" tIns="0" bIns="0">
+            <a:spAutoFit/>
+          </a:bodyPr>
+          <a:lstStyle/>
+          <a:p>
+            <a:pPr algn="l"/>
+            <a:r>
+              <a:rPr sz="900" b="1">
+                <a:solidFill>
+                  <a:srgbClr val="2863C5"/>
+                </a:solidFill>
+                <a:latin typeface="Open Sans"/>
+              </a:rPr>
+              <a:t>Status</a:t>
+            </a:r>
+          </a:p>
+        </p:txBody>
+      </p:sp>
+      <p:sp>
+        <p:nvSpPr>
+          <p:cNvPr id="45" name="TextBox 44"/>
+          <p:cNvSpPr txBox="1"/>
+          <p:nvPr/>
+        </p:nvSpPr>
+        <p:spPr>
+          <a:xfrm>
+            <a:off x="8275320" y="5843015"/>
+            <a:ext cx="3200400" cy="457200"/>
+          </a:xfrm>
+          <a:prstGeom prst="rect">
+            <a:avLst/>
+          </a:prstGeom>
+          <a:noFill/>
+        </p:spPr>
+        <p:txBody>
+          <a:bodyPr wrap="square" anchor="t" lIns="0" rIns="0" tIns="0" bIns="0">
+            <a:spAutoFit/>
+          </a:bodyPr>
+          <a:lstStyle/>
+          <a:p>
+            <a:pPr algn="l"/>
+            <a:r>
+              <a:rPr sz="1000" b="0">
+                <a:solidFill>
+                  <a:srgbClr val="334155"/>
+                </a:solidFill>
+                <a:latin typeface="Open Sans"/>
+              </a:rPr>
+              <a:t>Sprint 4+ once first state approves</a:t>
+            </a:r>
+          </a:p>
+        </p:txBody>
+      </p:sp>
+      <p:sp>
+        <p:nvSpPr>
+          <p:cNvPr id="46" name="Rounded Rectangle 45"/>
+          <p:cNvSpPr/>
+          <p:nvPr/>
+        </p:nvSpPr>
+        <p:spPr>
+          <a:xfrm>
+            <a:off x="457200" y="6400800"/>
+            <a:ext cx="11247120" cy="365760"/>
+          </a:xfrm>
+          <a:prstGeom prst="roundRect">
+            <a:avLst>
+              <a:gd name="adj" fmla="val 10000"/>
+            </a:avLst>
+          </a:prstGeom>
+          <a:solidFill>
+            <a:srgbClr val="2863C5"/>
+          </a:solidFill>
+          <a:ln>
+            <a:noFill/>
+          </a:ln>
+          <a:effectLst/>
+        </p:spPr>
+        <p:style>
+          <a:lnRef idx="1">
+            <a:schemeClr val="accent1"/>
+          </a:lnRef>
+          <a:fillRef idx="3">
+            <a:schemeClr val="accent1"/>
+          </a:fillRef>
+          <a:effectRef idx="2">
+            <a:schemeClr val="accent1"/>
+          </a:effectRef>
+          <a:fontRef idx="minor">
+            <a:schemeClr val="lt1"/>
+          </a:fontRef>
+        </p:style>
+        <p:txBody>
+          <a:bodyPr rtlCol="0" anchor="ctr"/>
+          <a:lstStyle/>
+          <a:p>
+            <a:pPr algn="ctr"/>
+          </a:p>
+        </p:txBody>
+      </p:sp>
+      <p:sp>
+        <p:nvSpPr>
+          <p:cNvPr id="47" name="TextBox 46"/>
+          <p:cNvSpPr txBox="1"/>
+          <p:nvPr/>
+        </p:nvSpPr>
+        <p:spPr>
+          <a:xfrm>
+            <a:off x="640080" y="6446520"/>
             <a:ext cx="10972800" cy="292608"/>
           </a:xfrm>
           <a:prstGeom prst="rect">
@@ -13208,13 +14743,13 @@
           <a:p>
             <a:pPr algn="l"/>
             <a:r>
-              <a:rPr sz="1100" b="1">
+              <a:rPr sz="1000" b="1">
                 <a:solidFill>
                   <a:srgbClr val="FFFFFF"/>
                 </a:solidFill>
                 <a:latin typeface="Open Sans"/>
               </a:rPr>
-              <a:t>Every state ingestion has a legal review gate. Every claim has a fresh consent. Every data source has documented terms.</a:t>
+              <a:t>Members never pay. We never take a cut. Free reduces finder-fee risk — but representative filing still requires state-by-state approval, registration, and legal sign-off.</a:t>
             </a:r>
           </a:p>
         </p:txBody>
@@ -13390,7 +14925,1498 @@
                 </a:solidFill>
                 <a:latin typeface="Open Sans"/>
               </a:rPr>
-              <a:t>8 / 8</a:t>
+              <a:t>8 / 9</a:t>
+            </a:r>
+          </a:p>
+        </p:txBody>
+      </p:sp>
+      <p:sp>
+        <p:nvSpPr>
+          <p:cNvPr id="6" name="TextBox 5"/>
+          <p:cNvSpPr txBox="1"/>
+          <p:nvPr/>
+        </p:nvSpPr>
+        <p:spPr>
+          <a:xfrm>
+            <a:off x="457200" y="6446520"/>
+            <a:ext cx="7315200" cy="274320"/>
+          </a:xfrm>
+          <a:prstGeom prst="rect">
+            <a:avLst/>
+          </a:prstGeom>
+          <a:noFill/>
+        </p:spPr>
+        <p:txBody>
+          <a:bodyPr wrap="square" anchor="t" lIns="0" rIns="0" tIns="0" bIns="0">
+            <a:spAutoFit/>
+          </a:bodyPr>
+          <a:lstStyle/>
+          <a:p>
+            <a:pPr algn="l"/>
+            <a:r>
+              <a:rPr sz="900" b="0">
+                <a:solidFill>
+                  <a:srgbClr val="64748B"/>
+                </a:solidFill>
+                <a:latin typeface="Open Sans"/>
+              </a:rPr>
+              <a:t>myReclaim · Confidential — Consumer Direct, Inc.</a:t>
+            </a:r>
+          </a:p>
+        </p:txBody>
+      </p:sp>
+      <p:sp>
+        <p:nvSpPr>
+          <p:cNvPr id="7" name="TextBox 6"/>
+          <p:cNvSpPr txBox="1"/>
+          <p:nvPr/>
+        </p:nvSpPr>
+        <p:spPr>
+          <a:xfrm>
+            <a:off x="457200" y="777240"/>
+            <a:ext cx="11430000" cy="365760"/>
+          </a:xfrm>
+          <a:prstGeom prst="rect">
+            <a:avLst/>
+          </a:prstGeom>
+          <a:noFill/>
+        </p:spPr>
+        <p:txBody>
+          <a:bodyPr wrap="square" anchor="t" lIns="0" rIns="0" tIns="0" bIns="0">
+            <a:spAutoFit/>
+          </a:bodyPr>
+          <a:lstStyle/>
+          <a:p>
+            <a:pPr algn="l"/>
+            <a:r>
+              <a:rPr sz="1200" b="1">
+                <a:solidFill>
+                  <a:srgbClr val="2863C5"/>
+                </a:solidFill>
+                <a:latin typeface="Open Sans"/>
+              </a:rPr>
+              <a:t>COMPLIANCE GUARDRAILS</a:t>
+            </a:r>
+          </a:p>
+        </p:txBody>
+      </p:sp>
+      <p:sp>
+        <p:nvSpPr>
+          <p:cNvPr id="8" name="TextBox 7"/>
+          <p:cNvSpPr txBox="1"/>
+          <p:nvPr/>
+        </p:nvSpPr>
+        <p:spPr>
+          <a:xfrm>
+            <a:off x="457200" y="1143000"/>
+            <a:ext cx="11430000" cy="868680"/>
+          </a:xfrm>
+          <a:prstGeom prst="rect">
+            <a:avLst/>
+          </a:prstGeom>
+          <a:noFill/>
+        </p:spPr>
+        <p:txBody>
+          <a:bodyPr wrap="square" anchor="t" lIns="0" rIns="0" tIns="0" bIns="0">
+            <a:spAutoFit/>
+          </a:bodyPr>
+          <a:lstStyle/>
+          <a:p>
+            <a:pPr algn="l"/>
+            <a:r>
+              <a:rPr sz="2600" b="1">
+                <a:solidFill>
+                  <a:srgbClr val="0F172A"/>
+                </a:solidFill>
+                <a:latin typeface="Open Sans"/>
+              </a:rPr>
+              <a:t>Free for members. State-approved where required.</a:t>
+            </a:r>
+          </a:p>
+        </p:txBody>
+      </p:sp>
+      <p:sp>
+        <p:nvSpPr>
+          <p:cNvPr id="9" name="TextBox 8"/>
+          <p:cNvSpPr txBox="1"/>
+          <p:nvPr/>
+        </p:nvSpPr>
+        <p:spPr>
+          <a:xfrm>
+            <a:off x="457200" y="1965960"/>
+            <a:ext cx="11430000" cy="411480"/>
+          </a:xfrm>
+          <a:prstGeom prst="rect">
+            <a:avLst/>
+          </a:prstGeom>
+          <a:noFill/>
+        </p:spPr>
+        <p:txBody>
+          <a:bodyPr wrap="square" anchor="t" lIns="0" rIns="0" tIns="0" bIns="0">
+            <a:spAutoFit/>
+          </a:bodyPr>
+          <a:lstStyle/>
+          <a:p>
+            <a:pPr algn="l"/>
+            <a:r>
+              <a:rPr sz="1200" b="0">
+                <a:solidFill>
+                  <a:srgbClr val="64748B"/>
+                </a:solidFill>
+                <a:latin typeface="Open Sans"/>
+              </a:rPr>
+              <a:t>Verified-identity matching, member consent, official state filing channels — and a clear list of things we will not do.</a:t>
+            </a:r>
+          </a:p>
+        </p:txBody>
+      </p:sp>
+      <p:sp>
+        <p:nvSpPr>
+          <p:cNvPr id="10" name="Rounded Rectangle 9"/>
+          <p:cNvSpPr/>
+          <p:nvPr/>
+        </p:nvSpPr>
+        <p:spPr>
+          <a:xfrm>
+            <a:off x="457200" y="2606040"/>
+            <a:ext cx="5486400" cy="3703320"/>
+          </a:xfrm>
+          <a:prstGeom prst="roundRect">
+            <a:avLst>
+              <a:gd name="adj" fmla="val 3000"/>
+            </a:avLst>
+          </a:prstGeom>
+          <a:solidFill>
+            <a:srgbClr val="FFFFFF"/>
+          </a:solidFill>
+          <a:ln w="6350">
+            <a:solidFill>
+              <a:srgbClr val="E2E8F0"/>
+            </a:solidFill>
+          </a:ln>
+          <a:effectLst/>
+        </p:spPr>
+        <p:style>
+          <a:lnRef idx="1">
+            <a:schemeClr val="accent1"/>
+          </a:lnRef>
+          <a:fillRef idx="3">
+            <a:schemeClr val="accent1"/>
+          </a:fillRef>
+          <a:effectRef idx="2">
+            <a:schemeClr val="accent1"/>
+          </a:effectRef>
+          <a:fontRef idx="minor">
+            <a:schemeClr val="lt1"/>
+          </a:fontRef>
+        </p:style>
+        <p:txBody>
+          <a:bodyPr rtlCol="0" anchor="ctr"/>
+          <a:lstStyle/>
+          <a:p>
+            <a:pPr algn="ctr"/>
+          </a:p>
+        </p:txBody>
+      </p:sp>
+      <p:sp>
+        <p:nvSpPr>
+          <p:cNvPr id="11" name="Rectangle 10"/>
+          <p:cNvSpPr/>
+          <p:nvPr/>
+        </p:nvSpPr>
+        <p:spPr>
+          <a:xfrm>
+            <a:off x="457200" y="2606040"/>
+            <a:ext cx="5486400" cy="164592"/>
+          </a:xfrm>
+          <a:prstGeom prst="rect">
+            <a:avLst/>
+          </a:prstGeom>
+          <a:solidFill>
+            <a:srgbClr val="059669"/>
+          </a:solidFill>
+          <a:ln>
+            <a:noFill/>
+          </a:ln>
+          <a:effectLst/>
+        </p:spPr>
+        <p:style>
+          <a:lnRef idx="1">
+            <a:schemeClr val="accent1"/>
+          </a:lnRef>
+          <a:fillRef idx="3">
+            <a:schemeClr val="accent1"/>
+          </a:fillRef>
+          <a:effectRef idx="2">
+            <a:schemeClr val="accent1"/>
+          </a:effectRef>
+          <a:fontRef idx="minor">
+            <a:schemeClr val="lt1"/>
+          </a:fontRef>
+        </p:style>
+        <p:txBody>
+          <a:bodyPr rtlCol="0" anchor="ctr"/>
+          <a:lstStyle/>
+          <a:p>
+            <a:pPr algn="ctr"/>
+          </a:p>
+        </p:txBody>
+      </p:sp>
+      <p:sp>
+        <p:nvSpPr>
+          <p:cNvPr id="12" name="TextBox 11"/>
+          <p:cNvSpPr txBox="1"/>
+          <p:nvPr/>
+        </p:nvSpPr>
+        <p:spPr>
+          <a:xfrm>
+            <a:off x="640080" y="2898648"/>
+            <a:ext cx="5120640" cy="365760"/>
+          </a:xfrm>
+          <a:prstGeom prst="rect">
+            <a:avLst/>
+          </a:prstGeom>
+          <a:noFill/>
+        </p:spPr>
+        <p:txBody>
+          <a:bodyPr wrap="square" anchor="t" lIns="0" rIns="0" tIns="0" bIns="0">
+            <a:spAutoFit/>
+          </a:bodyPr>
+          <a:lstStyle/>
+          <a:p>
+            <a:pPr algn="l"/>
+            <a:r>
+              <a:rPr sz="1200" b="1">
+                <a:solidFill>
+                  <a:srgbClr val="059669"/>
+                </a:solidFill>
+                <a:latin typeface="Open Sans"/>
+              </a:rPr>
+              <a:t>WHAT WE WILL DO</a:t>
+            </a:r>
+          </a:p>
+        </p:txBody>
+      </p:sp>
+      <p:sp>
+        <p:nvSpPr>
+          <p:cNvPr id="13" name="TextBox 12"/>
+          <p:cNvSpPr txBox="1"/>
+          <p:nvPr/>
+        </p:nvSpPr>
+        <p:spPr>
+          <a:xfrm>
+            <a:off x="777240" y="3383280"/>
+            <a:ext cx="274320" cy="274320"/>
+          </a:xfrm>
+          <a:prstGeom prst="rect">
+            <a:avLst/>
+          </a:prstGeom>
+          <a:noFill/>
+        </p:spPr>
+        <p:txBody>
+          <a:bodyPr wrap="square" anchor="t" lIns="0" rIns="0" tIns="0" bIns="0">
+            <a:spAutoFit/>
+          </a:bodyPr>
+          <a:lstStyle/>
+          <a:p>
+            <a:pPr algn="l"/>
+            <a:r>
+              <a:rPr sz="1400" b="1">
+                <a:solidFill>
+                  <a:srgbClr val="059669"/>
+                </a:solidFill>
+                <a:latin typeface="Open Sans"/>
+              </a:rPr>
+              <a:t>✓</a:t>
+            </a:r>
+          </a:p>
+        </p:txBody>
+      </p:sp>
+      <p:sp>
+        <p:nvSpPr>
+          <p:cNvPr id="14" name="TextBox 13"/>
+          <p:cNvSpPr txBox="1"/>
+          <p:nvPr/>
+        </p:nvSpPr>
+        <p:spPr>
+          <a:xfrm>
+            <a:off x="1097280" y="3401568"/>
+            <a:ext cx="4572000" cy="457200"/>
+          </a:xfrm>
+          <a:prstGeom prst="rect">
+            <a:avLst/>
+          </a:prstGeom>
+          <a:noFill/>
+        </p:spPr>
+        <p:txBody>
+          <a:bodyPr wrap="square" anchor="t" lIns="0" rIns="0" tIns="0" bIns="0">
+            <a:spAutoFit/>
+          </a:bodyPr>
+          <a:lstStyle/>
+          <a:p>
+            <a:pPr algn="l"/>
+            <a:r>
+              <a:rPr sz="1100" b="0">
+                <a:solidFill>
+                  <a:srgbClr val="334155"/>
+                </a:solidFill>
+                <a:latin typeface="Open Sans"/>
+              </a:rPr>
+              <a:t>Use official state files or state-approved data access only</a:t>
+            </a:r>
+          </a:p>
+        </p:txBody>
+      </p:sp>
+      <p:sp>
+        <p:nvSpPr>
+          <p:cNvPr id="15" name="TextBox 14"/>
+          <p:cNvSpPr txBox="1"/>
+          <p:nvPr/>
+        </p:nvSpPr>
+        <p:spPr>
+          <a:xfrm>
+            <a:off x="777240" y="3840480"/>
+            <a:ext cx="274320" cy="274320"/>
+          </a:xfrm>
+          <a:prstGeom prst="rect">
+            <a:avLst/>
+          </a:prstGeom>
+          <a:noFill/>
+        </p:spPr>
+        <p:txBody>
+          <a:bodyPr wrap="square" anchor="t" lIns="0" rIns="0" tIns="0" bIns="0">
+            <a:spAutoFit/>
+          </a:bodyPr>
+          <a:lstStyle/>
+          <a:p>
+            <a:pPr algn="l"/>
+            <a:r>
+              <a:rPr sz="1400" b="1">
+                <a:solidFill>
+                  <a:srgbClr val="059669"/>
+                </a:solidFill>
+                <a:latin typeface="Open Sans"/>
+              </a:rPr>
+              <a:t>✓</a:t>
+            </a:r>
+          </a:p>
+        </p:txBody>
+      </p:sp>
+      <p:sp>
+        <p:nvSpPr>
+          <p:cNvPr id="16" name="TextBox 15"/>
+          <p:cNvSpPr txBox="1"/>
+          <p:nvPr/>
+        </p:nvSpPr>
+        <p:spPr>
+          <a:xfrm>
+            <a:off x="1097280" y="3858768"/>
+            <a:ext cx="4572000" cy="457200"/>
+          </a:xfrm>
+          <a:prstGeom prst="rect">
+            <a:avLst/>
+          </a:prstGeom>
+          <a:noFill/>
+        </p:spPr>
+        <p:txBody>
+          <a:bodyPr wrap="square" anchor="t" lIns="0" rIns="0" tIns="0" bIns="0">
+            <a:spAutoFit/>
+          </a:bodyPr>
+          <a:lstStyle/>
+          <a:p>
+            <a:pPr algn="l"/>
+            <a:r>
+              <a:rPr sz="1100" b="0">
+                <a:solidFill>
+                  <a:srgbClr val="334155"/>
+                </a:solidFill>
+                <a:latin typeface="Open Sans"/>
+              </a:rPr>
+              <a:t>Get explicit member consent before matching and claim prep</a:t>
+            </a:r>
+          </a:p>
+        </p:txBody>
+      </p:sp>
+      <p:sp>
+        <p:nvSpPr>
+          <p:cNvPr id="17" name="TextBox 16"/>
+          <p:cNvSpPr txBox="1"/>
+          <p:nvPr/>
+        </p:nvSpPr>
+        <p:spPr>
+          <a:xfrm>
+            <a:off x="777240" y="4297680"/>
+            <a:ext cx="274320" cy="274320"/>
+          </a:xfrm>
+          <a:prstGeom prst="rect">
+            <a:avLst/>
+          </a:prstGeom>
+          <a:noFill/>
+        </p:spPr>
+        <p:txBody>
+          <a:bodyPr wrap="square" anchor="t" lIns="0" rIns="0" tIns="0" bIns="0">
+            <a:spAutoFit/>
+          </a:bodyPr>
+          <a:lstStyle/>
+          <a:p>
+            <a:pPr algn="l"/>
+            <a:r>
+              <a:rPr sz="1400" b="1">
+                <a:solidFill>
+                  <a:srgbClr val="059669"/>
+                </a:solidFill>
+                <a:latin typeface="Open Sans"/>
+              </a:rPr>
+              <a:t>✓</a:t>
+            </a:r>
+          </a:p>
+        </p:txBody>
+      </p:sp>
+      <p:sp>
+        <p:nvSpPr>
+          <p:cNvPr id="18" name="TextBox 17"/>
+          <p:cNvSpPr txBox="1"/>
+          <p:nvPr/>
+        </p:nvSpPr>
+        <p:spPr>
+          <a:xfrm>
+            <a:off x="1097280" y="4315968"/>
+            <a:ext cx="4572000" cy="457200"/>
+          </a:xfrm>
+          <a:prstGeom prst="rect">
+            <a:avLst/>
+          </a:prstGeom>
+          <a:noFill/>
+        </p:spPr>
+        <p:txBody>
+          <a:bodyPr wrap="square" anchor="t" lIns="0" rIns="0" tIns="0" bIns="0">
+            <a:spAutoFit/>
+          </a:bodyPr>
+          <a:lstStyle/>
+          <a:p>
+            <a:pPr algn="l"/>
+            <a:r>
+              <a:rPr sz="1100" b="0">
+                <a:solidFill>
+                  <a:srgbClr val="334155"/>
+                </a:solidFill>
+                <a:latin typeface="Open Sans"/>
+              </a:rPr>
+              <a:t>Route members to official state claim portals for v1</a:t>
+            </a:r>
+          </a:p>
+        </p:txBody>
+      </p:sp>
+      <p:sp>
+        <p:nvSpPr>
+          <p:cNvPr id="19" name="TextBox 18"/>
+          <p:cNvSpPr txBox="1"/>
+          <p:nvPr/>
+        </p:nvSpPr>
+        <p:spPr>
+          <a:xfrm>
+            <a:off x="777240" y="4754880"/>
+            <a:ext cx="274320" cy="274320"/>
+          </a:xfrm>
+          <a:prstGeom prst="rect">
+            <a:avLst/>
+          </a:prstGeom>
+          <a:noFill/>
+        </p:spPr>
+        <p:txBody>
+          <a:bodyPr wrap="square" anchor="t" lIns="0" rIns="0" tIns="0" bIns="0">
+            <a:spAutoFit/>
+          </a:bodyPr>
+          <a:lstStyle/>
+          <a:p>
+            <a:pPr algn="l"/>
+            <a:r>
+              <a:rPr sz="1400" b="1">
+                <a:solidFill>
+                  <a:srgbClr val="059669"/>
+                </a:solidFill>
+                <a:latin typeface="Open Sans"/>
+              </a:rPr>
+              <a:t>✓</a:t>
+            </a:r>
+          </a:p>
+        </p:txBody>
+      </p:sp>
+      <p:sp>
+        <p:nvSpPr>
+          <p:cNvPr id="20" name="TextBox 19"/>
+          <p:cNvSpPr txBox="1"/>
+          <p:nvPr/>
+        </p:nvSpPr>
+        <p:spPr>
+          <a:xfrm>
+            <a:off x="1097280" y="4773168"/>
+            <a:ext cx="4572000" cy="457200"/>
+          </a:xfrm>
+          <a:prstGeom prst="rect">
+            <a:avLst/>
+          </a:prstGeom>
+          <a:noFill/>
+        </p:spPr>
+        <p:txBody>
+          <a:bodyPr wrap="square" anchor="t" lIns="0" rIns="0" tIns="0" bIns="0">
+            <a:spAutoFit/>
+          </a:bodyPr>
+          <a:lstStyle/>
+          <a:p>
+            <a:pPr algn="l"/>
+            <a:r>
+              <a:rPr sz="1100" b="0">
+                <a:solidFill>
+                  <a:srgbClr val="334155"/>
+                </a:solidFill>
+                <a:latin typeface="Open Sans"/>
+              </a:rPr>
+              <a:t>Track claim ID + status inside SmartCredit (manual entry)</a:t>
+            </a:r>
+          </a:p>
+        </p:txBody>
+      </p:sp>
+      <p:sp>
+        <p:nvSpPr>
+          <p:cNvPr id="21" name="TextBox 20"/>
+          <p:cNvSpPr txBox="1"/>
+          <p:nvPr/>
+        </p:nvSpPr>
+        <p:spPr>
+          <a:xfrm>
+            <a:off x="777240" y="5212080"/>
+            <a:ext cx="274320" cy="274320"/>
+          </a:xfrm>
+          <a:prstGeom prst="rect">
+            <a:avLst/>
+          </a:prstGeom>
+          <a:noFill/>
+        </p:spPr>
+        <p:txBody>
+          <a:bodyPr wrap="square" anchor="t" lIns="0" rIns="0" tIns="0" bIns="0">
+            <a:spAutoFit/>
+          </a:bodyPr>
+          <a:lstStyle/>
+          <a:p>
+            <a:pPr algn="l"/>
+            <a:r>
+              <a:rPr sz="1400" b="1">
+                <a:solidFill>
+                  <a:srgbClr val="059669"/>
+                </a:solidFill>
+                <a:latin typeface="Open Sans"/>
+              </a:rPr>
+              <a:t>✓</a:t>
+            </a:r>
+          </a:p>
+        </p:txBody>
+      </p:sp>
+      <p:sp>
+        <p:nvSpPr>
+          <p:cNvPr id="22" name="TextBox 21"/>
+          <p:cNvSpPr txBox="1"/>
+          <p:nvPr/>
+        </p:nvSpPr>
+        <p:spPr>
+          <a:xfrm>
+            <a:off x="1097280" y="5230368"/>
+            <a:ext cx="4572000" cy="457200"/>
+          </a:xfrm>
+          <a:prstGeom prst="rect">
+            <a:avLst/>
+          </a:prstGeom>
+          <a:noFill/>
+        </p:spPr>
+        <p:txBody>
+          <a:bodyPr wrap="square" anchor="t" lIns="0" rIns="0" tIns="0" bIns="0">
+            <a:spAutoFit/>
+          </a:bodyPr>
+          <a:lstStyle/>
+          <a:p>
+            <a:pPr algn="l"/>
+            <a:r>
+              <a:rPr sz="1100" b="0">
+                <a:solidFill>
+                  <a:srgbClr val="334155"/>
+                </a:solidFill>
+                <a:latin typeface="Open Sans"/>
+              </a:rPr>
+              <a:t>File on members' behalf only where registered or approved</a:t>
+            </a:r>
+          </a:p>
+        </p:txBody>
+      </p:sp>
+      <p:sp>
+        <p:nvSpPr>
+          <p:cNvPr id="23" name="TextBox 22"/>
+          <p:cNvSpPr txBox="1"/>
+          <p:nvPr/>
+        </p:nvSpPr>
+        <p:spPr>
+          <a:xfrm>
+            <a:off x="777240" y="5669280"/>
+            <a:ext cx="274320" cy="274320"/>
+          </a:xfrm>
+          <a:prstGeom prst="rect">
+            <a:avLst/>
+          </a:prstGeom>
+          <a:noFill/>
+        </p:spPr>
+        <p:txBody>
+          <a:bodyPr wrap="square" anchor="t" lIns="0" rIns="0" tIns="0" bIns="0">
+            <a:spAutoFit/>
+          </a:bodyPr>
+          <a:lstStyle/>
+          <a:p>
+            <a:pPr algn="l"/>
+            <a:r>
+              <a:rPr sz="1400" b="1">
+                <a:solidFill>
+                  <a:srgbClr val="059669"/>
+                </a:solidFill>
+                <a:latin typeface="Open Sans"/>
+              </a:rPr>
+              <a:t>✓</a:t>
+            </a:r>
+          </a:p>
+        </p:txBody>
+      </p:sp>
+      <p:sp>
+        <p:nvSpPr>
+          <p:cNvPr id="24" name="TextBox 23"/>
+          <p:cNvSpPr txBox="1"/>
+          <p:nvPr/>
+        </p:nvSpPr>
+        <p:spPr>
+          <a:xfrm>
+            <a:off x="1097280" y="5687568"/>
+            <a:ext cx="4572000" cy="457200"/>
+          </a:xfrm>
+          <a:prstGeom prst="rect">
+            <a:avLst/>
+          </a:prstGeom>
+          <a:noFill/>
+        </p:spPr>
+        <p:txBody>
+          <a:bodyPr wrap="square" anchor="t" lIns="0" rIns="0" tIns="0" bIns="0">
+            <a:spAutoFit/>
+          </a:bodyPr>
+          <a:lstStyle/>
+          <a:p>
+            <a:pPr algn="l"/>
+            <a:r>
+              <a:rPr sz="1100" b="0">
+                <a:solidFill>
+                  <a:srgbClr val="334155"/>
+                </a:solidFill>
+                <a:latin typeface="Open Sans"/>
+              </a:rPr>
+              <a:t>Source-by-source data-use permissions; legal review per state</a:t>
+            </a:r>
+          </a:p>
+        </p:txBody>
+      </p:sp>
+      <p:sp>
+        <p:nvSpPr>
+          <p:cNvPr id="25" name="Rounded Rectangle 24"/>
+          <p:cNvSpPr/>
+          <p:nvPr/>
+        </p:nvSpPr>
+        <p:spPr>
+          <a:xfrm>
+            <a:off x="6217920" y="2606040"/>
+            <a:ext cx="5486400" cy="3703320"/>
+          </a:xfrm>
+          <a:prstGeom prst="roundRect">
+            <a:avLst>
+              <a:gd name="adj" fmla="val 3000"/>
+            </a:avLst>
+          </a:prstGeom>
+          <a:solidFill>
+            <a:srgbClr val="FFFFFF"/>
+          </a:solidFill>
+          <a:ln w="6350">
+            <a:solidFill>
+              <a:srgbClr val="E2E8F0"/>
+            </a:solidFill>
+          </a:ln>
+          <a:effectLst/>
+        </p:spPr>
+        <p:style>
+          <a:lnRef idx="1">
+            <a:schemeClr val="accent1"/>
+          </a:lnRef>
+          <a:fillRef idx="3">
+            <a:schemeClr val="accent1"/>
+          </a:fillRef>
+          <a:effectRef idx="2">
+            <a:schemeClr val="accent1"/>
+          </a:effectRef>
+          <a:fontRef idx="minor">
+            <a:schemeClr val="lt1"/>
+          </a:fontRef>
+        </p:style>
+        <p:txBody>
+          <a:bodyPr rtlCol="0" anchor="ctr"/>
+          <a:lstStyle/>
+          <a:p>
+            <a:pPr algn="ctr"/>
+          </a:p>
+        </p:txBody>
+      </p:sp>
+      <p:sp>
+        <p:nvSpPr>
+          <p:cNvPr id="26" name="Rectangle 25"/>
+          <p:cNvSpPr/>
+          <p:nvPr/>
+        </p:nvSpPr>
+        <p:spPr>
+          <a:xfrm>
+            <a:off x="6217920" y="2606040"/>
+            <a:ext cx="5486400" cy="164592"/>
+          </a:xfrm>
+          <a:prstGeom prst="rect">
+            <a:avLst/>
+          </a:prstGeom>
+          <a:solidFill>
+            <a:srgbClr val="E11D48"/>
+          </a:solidFill>
+          <a:ln>
+            <a:noFill/>
+          </a:ln>
+          <a:effectLst/>
+        </p:spPr>
+        <p:style>
+          <a:lnRef idx="1">
+            <a:schemeClr val="accent1"/>
+          </a:lnRef>
+          <a:fillRef idx="3">
+            <a:schemeClr val="accent1"/>
+          </a:fillRef>
+          <a:effectRef idx="2">
+            <a:schemeClr val="accent1"/>
+          </a:effectRef>
+          <a:fontRef idx="minor">
+            <a:schemeClr val="lt1"/>
+          </a:fontRef>
+        </p:style>
+        <p:txBody>
+          <a:bodyPr rtlCol="0" anchor="ctr"/>
+          <a:lstStyle/>
+          <a:p>
+            <a:pPr algn="ctr"/>
+          </a:p>
+        </p:txBody>
+      </p:sp>
+      <p:sp>
+        <p:nvSpPr>
+          <p:cNvPr id="27" name="TextBox 26"/>
+          <p:cNvSpPr txBox="1"/>
+          <p:nvPr/>
+        </p:nvSpPr>
+        <p:spPr>
+          <a:xfrm>
+            <a:off x="6400800" y="2898648"/>
+            <a:ext cx="5120640" cy="365760"/>
+          </a:xfrm>
+          <a:prstGeom prst="rect">
+            <a:avLst/>
+          </a:prstGeom>
+          <a:noFill/>
+        </p:spPr>
+        <p:txBody>
+          <a:bodyPr wrap="square" anchor="t" lIns="0" rIns="0" tIns="0" bIns="0">
+            <a:spAutoFit/>
+          </a:bodyPr>
+          <a:lstStyle/>
+          <a:p>
+            <a:pPr algn="l"/>
+            <a:r>
+              <a:rPr sz="1200" b="1">
+                <a:solidFill>
+                  <a:srgbClr val="E11D48"/>
+                </a:solidFill>
+                <a:latin typeface="Open Sans"/>
+              </a:rPr>
+              <a:t>WHAT WE WILL NOT DO</a:t>
+            </a:r>
+          </a:p>
+        </p:txBody>
+      </p:sp>
+      <p:sp>
+        <p:nvSpPr>
+          <p:cNvPr id="28" name="TextBox 27"/>
+          <p:cNvSpPr txBox="1"/>
+          <p:nvPr/>
+        </p:nvSpPr>
+        <p:spPr>
+          <a:xfrm>
+            <a:off x="6355080" y="3383280"/>
+            <a:ext cx="274320" cy="274320"/>
+          </a:xfrm>
+          <a:prstGeom prst="rect">
+            <a:avLst/>
+          </a:prstGeom>
+          <a:noFill/>
+        </p:spPr>
+        <p:txBody>
+          <a:bodyPr wrap="square" anchor="t" lIns="0" rIns="0" tIns="0" bIns="0">
+            <a:spAutoFit/>
+          </a:bodyPr>
+          <a:lstStyle/>
+          <a:p>
+            <a:pPr algn="l"/>
+            <a:r>
+              <a:rPr sz="1400" b="1">
+                <a:solidFill>
+                  <a:srgbClr val="E11D48"/>
+                </a:solidFill>
+                <a:latin typeface="Open Sans"/>
+              </a:rPr>
+              <a:t>✗</a:t>
+            </a:r>
+          </a:p>
+        </p:txBody>
+      </p:sp>
+      <p:sp>
+        <p:nvSpPr>
+          <p:cNvPr id="29" name="TextBox 28"/>
+          <p:cNvSpPr txBox="1"/>
+          <p:nvPr/>
+        </p:nvSpPr>
+        <p:spPr>
+          <a:xfrm>
+            <a:off x="6675120" y="3401568"/>
+            <a:ext cx="4846320" cy="457200"/>
+          </a:xfrm>
+          <a:prstGeom prst="rect">
+            <a:avLst/>
+          </a:prstGeom>
+          <a:noFill/>
+        </p:spPr>
+        <p:txBody>
+          <a:bodyPr wrap="square" anchor="t" lIns="0" rIns="0" tIns="0" bIns="0">
+            <a:spAutoFit/>
+          </a:bodyPr>
+          <a:lstStyle/>
+          <a:p>
+            <a:pPr algn="l"/>
+            <a:r>
+              <a:rPr sz="1100" b="0">
+                <a:solidFill>
+                  <a:srgbClr val="334155"/>
+                </a:solidFill>
+                <a:latin typeface="Open Sans"/>
+              </a:rPr>
+              <a:t>Scrape state portals or MissingMoney.com</a:t>
+            </a:r>
+          </a:p>
+        </p:txBody>
+      </p:sp>
+      <p:sp>
+        <p:nvSpPr>
+          <p:cNvPr id="30" name="TextBox 29"/>
+          <p:cNvSpPr txBox="1"/>
+          <p:nvPr/>
+        </p:nvSpPr>
+        <p:spPr>
+          <a:xfrm>
+            <a:off x="6355080" y="3840480"/>
+            <a:ext cx="274320" cy="274320"/>
+          </a:xfrm>
+          <a:prstGeom prst="rect">
+            <a:avLst/>
+          </a:prstGeom>
+          <a:noFill/>
+        </p:spPr>
+        <p:txBody>
+          <a:bodyPr wrap="square" anchor="t" lIns="0" rIns="0" tIns="0" bIns="0">
+            <a:spAutoFit/>
+          </a:bodyPr>
+          <a:lstStyle/>
+          <a:p>
+            <a:pPr algn="l"/>
+            <a:r>
+              <a:rPr sz="1400" b="1">
+                <a:solidFill>
+                  <a:srgbClr val="E11D48"/>
+                </a:solidFill>
+                <a:latin typeface="Open Sans"/>
+              </a:rPr>
+              <a:t>✗</a:t>
+            </a:r>
+          </a:p>
+        </p:txBody>
+      </p:sp>
+      <p:sp>
+        <p:nvSpPr>
+          <p:cNvPr id="31" name="TextBox 30"/>
+          <p:cNvSpPr txBox="1"/>
+          <p:nvPr/>
+        </p:nvSpPr>
+        <p:spPr>
+          <a:xfrm>
+            <a:off x="6675120" y="3858768"/>
+            <a:ext cx="4846320" cy="457200"/>
+          </a:xfrm>
+          <a:prstGeom prst="rect">
+            <a:avLst/>
+          </a:prstGeom>
+          <a:noFill/>
+        </p:spPr>
+        <p:txBody>
+          <a:bodyPr wrap="square" anchor="t" lIns="0" rIns="0" tIns="0" bIns="0">
+            <a:spAutoFit/>
+          </a:bodyPr>
+          <a:lstStyle/>
+          <a:p>
+            <a:pPr algn="l"/>
+            <a:r>
+              <a:rPr sz="1100" b="0">
+                <a:solidFill>
+                  <a:srgbClr val="334155"/>
+                </a:solidFill>
+                <a:latin typeface="Open Sans"/>
+              </a:rPr>
+              <a:t>Guarantee a claim belongs to the member</a:t>
+            </a:r>
+          </a:p>
+        </p:txBody>
+      </p:sp>
+      <p:sp>
+        <p:nvSpPr>
+          <p:cNvPr id="32" name="TextBox 31"/>
+          <p:cNvSpPr txBox="1"/>
+          <p:nvPr/>
+        </p:nvSpPr>
+        <p:spPr>
+          <a:xfrm>
+            <a:off x="6355080" y="4297680"/>
+            <a:ext cx="274320" cy="274320"/>
+          </a:xfrm>
+          <a:prstGeom prst="rect">
+            <a:avLst/>
+          </a:prstGeom>
+          <a:noFill/>
+        </p:spPr>
+        <p:txBody>
+          <a:bodyPr wrap="square" anchor="t" lIns="0" rIns="0" tIns="0" bIns="0">
+            <a:spAutoFit/>
+          </a:bodyPr>
+          <a:lstStyle/>
+          <a:p>
+            <a:pPr algn="l"/>
+            <a:r>
+              <a:rPr sz="1400" b="1">
+                <a:solidFill>
+                  <a:srgbClr val="E11D48"/>
+                </a:solidFill>
+                <a:latin typeface="Open Sans"/>
+              </a:rPr>
+              <a:t>✗</a:t>
+            </a:r>
+          </a:p>
+        </p:txBody>
+      </p:sp>
+      <p:sp>
+        <p:nvSpPr>
+          <p:cNvPr id="33" name="TextBox 32"/>
+          <p:cNvSpPr txBox="1"/>
+          <p:nvPr/>
+        </p:nvSpPr>
+        <p:spPr>
+          <a:xfrm>
+            <a:off x="6675120" y="4315968"/>
+            <a:ext cx="4846320" cy="457200"/>
+          </a:xfrm>
+          <a:prstGeom prst="rect">
+            <a:avLst/>
+          </a:prstGeom>
+          <a:noFill/>
+        </p:spPr>
+        <p:txBody>
+          <a:bodyPr wrap="square" anchor="t" lIns="0" rIns="0" tIns="0" bIns="0">
+            <a:spAutoFit/>
+          </a:bodyPr>
+          <a:lstStyle/>
+          <a:p>
+            <a:pPr algn="l"/>
+            <a:r>
+              <a:rPr sz="1100" b="0">
+                <a:solidFill>
+                  <a:srgbClr val="334155"/>
+                </a:solidFill>
+                <a:latin typeface="Open Sans"/>
+              </a:rPr>
+              <a:t>Charge a success fee or take a cut</a:t>
+            </a:r>
+          </a:p>
+        </p:txBody>
+      </p:sp>
+      <p:sp>
+        <p:nvSpPr>
+          <p:cNvPr id="34" name="TextBox 33"/>
+          <p:cNvSpPr txBox="1"/>
+          <p:nvPr/>
+        </p:nvSpPr>
+        <p:spPr>
+          <a:xfrm>
+            <a:off x="6355080" y="4754880"/>
+            <a:ext cx="274320" cy="274320"/>
+          </a:xfrm>
+          <a:prstGeom prst="rect">
+            <a:avLst/>
+          </a:prstGeom>
+          <a:noFill/>
+        </p:spPr>
+        <p:txBody>
+          <a:bodyPr wrap="square" anchor="t" lIns="0" rIns="0" tIns="0" bIns="0">
+            <a:spAutoFit/>
+          </a:bodyPr>
+          <a:lstStyle/>
+          <a:p>
+            <a:pPr algn="l"/>
+            <a:r>
+              <a:rPr sz="1400" b="1">
+                <a:solidFill>
+                  <a:srgbClr val="E11D48"/>
+                </a:solidFill>
+                <a:latin typeface="Open Sans"/>
+              </a:rPr>
+              <a:t>✗</a:t>
+            </a:r>
+          </a:p>
+        </p:txBody>
+      </p:sp>
+      <p:sp>
+        <p:nvSpPr>
+          <p:cNvPr id="35" name="TextBox 34"/>
+          <p:cNvSpPr txBox="1"/>
+          <p:nvPr/>
+        </p:nvSpPr>
+        <p:spPr>
+          <a:xfrm>
+            <a:off x="6675120" y="4773168"/>
+            <a:ext cx="4846320" cy="457200"/>
+          </a:xfrm>
+          <a:prstGeom prst="rect">
+            <a:avLst/>
+          </a:prstGeom>
+          <a:noFill/>
+        </p:spPr>
+        <p:txBody>
+          <a:bodyPr wrap="square" anchor="t" lIns="0" rIns="0" tIns="0" bIns="0">
+            <a:spAutoFit/>
+          </a:bodyPr>
+          <a:lstStyle/>
+          <a:p>
+            <a:pPr algn="l"/>
+            <a:r>
+              <a:rPr sz="1100" b="0">
+                <a:solidFill>
+                  <a:srgbClr val="334155"/>
+                </a:solidFill>
+                <a:latin typeface="Open Sans"/>
+              </a:rPr>
+              <a:t>Submit claims without fresh user authorization</a:t>
+            </a:r>
+          </a:p>
+        </p:txBody>
+      </p:sp>
+      <p:sp>
+        <p:nvSpPr>
+          <p:cNvPr id="36" name="TextBox 35"/>
+          <p:cNvSpPr txBox="1"/>
+          <p:nvPr/>
+        </p:nvSpPr>
+        <p:spPr>
+          <a:xfrm>
+            <a:off x="6355080" y="5212080"/>
+            <a:ext cx="274320" cy="274320"/>
+          </a:xfrm>
+          <a:prstGeom prst="rect">
+            <a:avLst/>
+          </a:prstGeom>
+          <a:noFill/>
+        </p:spPr>
+        <p:txBody>
+          <a:bodyPr wrap="square" anchor="t" lIns="0" rIns="0" tIns="0" bIns="0">
+            <a:spAutoFit/>
+          </a:bodyPr>
+          <a:lstStyle/>
+          <a:p>
+            <a:pPr algn="l"/>
+            <a:r>
+              <a:rPr sz="1400" b="1">
+                <a:solidFill>
+                  <a:srgbClr val="E11D48"/>
+                </a:solidFill>
+                <a:latin typeface="Open Sans"/>
+              </a:rPr>
+              <a:t>✗</a:t>
+            </a:r>
+          </a:p>
+        </p:txBody>
+      </p:sp>
+      <p:sp>
+        <p:nvSpPr>
+          <p:cNvPr id="37" name="TextBox 36"/>
+          <p:cNvSpPr txBox="1"/>
+          <p:nvPr/>
+        </p:nvSpPr>
+        <p:spPr>
+          <a:xfrm>
+            <a:off x="6675120" y="5230368"/>
+            <a:ext cx="4846320" cy="457200"/>
+          </a:xfrm>
+          <a:prstGeom prst="rect">
+            <a:avLst/>
+          </a:prstGeom>
+          <a:noFill/>
+        </p:spPr>
+        <p:txBody>
+          <a:bodyPr wrap="square" anchor="t" lIns="0" rIns="0" tIns="0" bIns="0">
+            <a:spAutoFit/>
+          </a:bodyPr>
+          <a:lstStyle/>
+          <a:p>
+            <a:pPr algn="l"/>
+            <a:r>
+              <a:rPr sz="1100" b="0">
+                <a:solidFill>
+                  <a:srgbClr val="334155"/>
+                </a:solidFill>
+                <a:latin typeface="Open Sans"/>
+              </a:rPr>
+              <a:t>Re-use credit-report-derived data without legal sign-off</a:t>
+            </a:r>
+          </a:p>
+        </p:txBody>
+      </p:sp>
+      <p:sp>
+        <p:nvSpPr>
+          <p:cNvPr id="38" name="TextBox 37"/>
+          <p:cNvSpPr txBox="1"/>
+          <p:nvPr/>
+        </p:nvSpPr>
+        <p:spPr>
+          <a:xfrm>
+            <a:off x="6355080" y="5669280"/>
+            <a:ext cx="274320" cy="274320"/>
+          </a:xfrm>
+          <a:prstGeom prst="rect">
+            <a:avLst/>
+          </a:prstGeom>
+          <a:noFill/>
+        </p:spPr>
+        <p:txBody>
+          <a:bodyPr wrap="square" anchor="t" lIns="0" rIns="0" tIns="0" bIns="0">
+            <a:spAutoFit/>
+          </a:bodyPr>
+          <a:lstStyle/>
+          <a:p>
+            <a:pPr algn="l"/>
+            <a:r>
+              <a:rPr sz="1400" b="1">
+                <a:solidFill>
+                  <a:srgbClr val="E11D48"/>
+                </a:solidFill>
+                <a:latin typeface="Open Sans"/>
+              </a:rPr>
+              <a:t>✗</a:t>
+            </a:r>
+          </a:p>
+        </p:txBody>
+      </p:sp>
+      <p:sp>
+        <p:nvSpPr>
+          <p:cNvPr id="39" name="TextBox 38"/>
+          <p:cNvSpPr txBox="1"/>
+          <p:nvPr/>
+        </p:nvSpPr>
+        <p:spPr>
+          <a:xfrm>
+            <a:off x="6675120" y="5687568"/>
+            <a:ext cx="4846320" cy="457200"/>
+          </a:xfrm>
+          <a:prstGeom prst="rect">
+            <a:avLst/>
+          </a:prstGeom>
+          <a:noFill/>
+        </p:spPr>
+        <p:txBody>
+          <a:bodyPr wrap="square" anchor="t" lIns="0" rIns="0" tIns="0" bIns="0">
+            <a:spAutoFit/>
+          </a:bodyPr>
+          <a:lstStyle/>
+          <a:p>
+            <a:pPr algn="l"/>
+            <a:r>
+              <a:rPr sz="1100" b="0">
+                <a:solidFill>
+                  <a:srgbClr val="334155"/>
+                </a:solidFill>
+                <a:latin typeface="Open Sans"/>
+              </a:rPr>
+              <a:t>Store sensitive claim documents unless required and approved</a:t>
+            </a:r>
+          </a:p>
+        </p:txBody>
+      </p:sp>
+      <p:sp>
+        <p:nvSpPr>
+          <p:cNvPr id="40" name="Rounded Rectangle 39"/>
+          <p:cNvSpPr/>
+          <p:nvPr/>
+        </p:nvSpPr>
+        <p:spPr>
+          <a:xfrm>
+            <a:off x="457200" y="6446520"/>
+            <a:ext cx="11247120" cy="365760"/>
+          </a:xfrm>
+          <a:prstGeom prst="roundRect">
+            <a:avLst>
+              <a:gd name="adj" fmla="val 7000"/>
+            </a:avLst>
+          </a:prstGeom>
+          <a:solidFill>
+            <a:srgbClr val="0F172A"/>
+          </a:solidFill>
+          <a:ln>
+            <a:noFill/>
+          </a:ln>
+          <a:effectLst/>
+        </p:spPr>
+        <p:style>
+          <a:lnRef idx="1">
+            <a:schemeClr val="accent1"/>
+          </a:lnRef>
+          <a:fillRef idx="3">
+            <a:schemeClr val="accent1"/>
+          </a:fillRef>
+          <a:effectRef idx="2">
+            <a:schemeClr val="accent1"/>
+          </a:effectRef>
+          <a:fontRef idx="minor">
+            <a:schemeClr val="lt1"/>
+          </a:fontRef>
+        </p:style>
+        <p:txBody>
+          <a:bodyPr rtlCol="0" anchor="ctr"/>
+          <a:lstStyle/>
+          <a:p>
+            <a:pPr algn="ctr"/>
+          </a:p>
+        </p:txBody>
+      </p:sp>
+      <p:sp>
+        <p:nvSpPr>
+          <p:cNvPr id="41" name="TextBox 40"/>
+          <p:cNvSpPr txBox="1"/>
+          <p:nvPr/>
+        </p:nvSpPr>
+        <p:spPr>
+          <a:xfrm>
+            <a:off x="640080" y="6492240"/>
+            <a:ext cx="10972800" cy="292608"/>
+          </a:xfrm>
+          <a:prstGeom prst="rect">
+            <a:avLst/>
+          </a:prstGeom>
+          <a:noFill/>
+        </p:spPr>
+        <p:txBody>
+          <a:bodyPr wrap="square" anchor="t" lIns="0" rIns="0" tIns="0" bIns="0">
+            <a:spAutoFit/>
+          </a:bodyPr>
+          <a:lstStyle/>
+          <a:p>
+            <a:pPr algn="l"/>
+            <a:r>
+              <a:rPr sz="1100" b="1">
+                <a:solidFill>
+                  <a:srgbClr val="FFFFFF"/>
+                </a:solidFill>
+                <a:latin typeface="Open Sans"/>
+              </a:rPr>
+              <a:t>Every state ingestion has a legal review gate. Every claim has a fresh consent. Every data source has documented terms.</a:t>
+            </a:r>
+          </a:p>
+        </p:txBody>
+      </p:sp>
+    </p:spTree>
+  </p:cSld>
+  <p:clrMapOvr>
+    <a:masterClrMapping/>
+  </p:clrMapOvr>
+</p:sld>
+</file>
+
+<file path=ppt/slides/slide9.xml><?xml version="1.0" encoding="utf-8"?>
+<p:sld xmlns:a="http://schemas.openxmlformats.org/drawingml/2006/main" xmlns:p="http://schemas.openxmlformats.org/presentationml/2006/main" xmlns:r="http://schemas.openxmlformats.org/officeDocument/2006/relationships">
+  <p:cSld>
+    <p:spTree>
+      <p:nvGrpSpPr>
+        <p:cNvPr id="1" name=""/>
+        <p:cNvGrpSpPr/>
+        <p:nvPr/>
+      </p:nvGrpSpPr>
+      <p:grpSpPr/>
+      <p:sp>
+        <p:nvSpPr>
+          <p:cNvPr id="2" name="Rectangle 1"/>
+          <p:cNvSpPr/>
+          <p:nvPr/>
+        </p:nvSpPr>
+        <p:spPr>
+          <a:xfrm>
+            <a:off x="0" y="0"/>
+            <a:ext cx="12188952" cy="6858000"/>
+          </a:xfrm>
+          <a:prstGeom prst="rect">
+            <a:avLst/>
+          </a:prstGeom>
+          <a:solidFill>
+            <a:srgbClr val="F8FAFC"/>
+          </a:solidFill>
+          <a:ln>
+            <a:noFill/>
+          </a:ln>
+          <a:effectLst/>
+        </p:spPr>
+        <p:style>
+          <a:lnRef idx="1">
+            <a:schemeClr val="accent1"/>
+          </a:lnRef>
+          <a:fillRef idx="3">
+            <a:schemeClr val="accent1"/>
+          </a:fillRef>
+          <a:effectRef idx="2">
+            <a:schemeClr val="accent1"/>
+          </a:effectRef>
+          <a:fontRef idx="minor">
+            <a:schemeClr val="lt1"/>
+          </a:fontRef>
+        </p:style>
+        <p:txBody>
+          <a:bodyPr rtlCol="0" anchor="ctr"/>
+          <a:lstStyle/>
+          <a:p>
+            <a:pPr algn="ctr"/>
+          </a:p>
+        </p:txBody>
+      </p:sp>
+      <p:sp>
+        <p:nvSpPr>
+          <p:cNvPr id="3" name="Rectangle 2"/>
+          <p:cNvSpPr/>
+          <p:nvPr/>
+        </p:nvSpPr>
+        <p:spPr>
+          <a:xfrm>
+            <a:off x="0" y="0"/>
+            <a:ext cx="12188952" cy="54864"/>
+          </a:xfrm>
+          <a:prstGeom prst="rect">
+            <a:avLst/>
+          </a:prstGeom>
+          <a:solidFill>
+            <a:srgbClr val="2863C5"/>
+          </a:solidFill>
+          <a:ln>
+            <a:noFill/>
+          </a:ln>
+          <a:effectLst/>
+        </p:spPr>
+        <p:style>
+          <a:lnRef idx="1">
+            <a:schemeClr val="accent1"/>
+          </a:lnRef>
+          <a:fillRef idx="3">
+            <a:schemeClr val="accent1"/>
+          </a:fillRef>
+          <a:effectRef idx="2">
+            <a:schemeClr val="accent1"/>
+          </a:effectRef>
+          <a:fontRef idx="minor">
+            <a:schemeClr val="lt1"/>
+          </a:fontRef>
+        </p:style>
+        <p:txBody>
+          <a:bodyPr rtlCol="0" anchor="ctr"/>
+          <a:lstStyle/>
+          <a:p>
+            <a:pPr algn="ctr"/>
+          </a:p>
+        </p:txBody>
+      </p:sp>
+      <p:sp>
+        <p:nvSpPr>
+          <p:cNvPr id="4" name="TextBox 3"/>
+          <p:cNvSpPr txBox="1"/>
+          <p:nvPr/>
+        </p:nvSpPr>
+        <p:spPr>
+          <a:xfrm>
+            <a:off x="457200" y="164592"/>
+            <a:ext cx="2286000" cy="329184"/>
+          </a:xfrm>
+          <a:prstGeom prst="rect">
+            <a:avLst/>
+          </a:prstGeom>
+          <a:noFill/>
+        </p:spPr>
+        <p:txBody>
+          <a:bodyPr wrap="square" anchor="t" lIns="0" rIns="0" tIns="0" bIns="0">
+            <a:spAutoFit/>
+          </a:bodyPr>
+          <a:lstStyle/>
+          <a:p>
+            <a:pPr algn="l"/>
+            <a:r>
+              <a:rPr sz="1600" b="1">
+                <a:solidFill>
+                  <a:srgbClr val="0F172A"/>
+                </a:solidFill>
+                <a:latin typeface="Open Sans"/>
+              </a:rPr>
+              <a:t>smartcredit</a:t>
+            </a:r>
+          </a:p>
+        </p:txBody>
+      </p:sp>
+      <p:sp>
+        <p:nvSpPr>
+          <p:cNvPr id="5" name="TextBox 4"/>
+          <p:cNvSpPr txBox="1"/>
+          <p:nvPr/>
+        </p:nvSpPr>
+        <p:spPr>
+          <a:xfrm>
+            <a:off x="11338560" y="6446520"/>
+            <a:ext cx="731520" cy="274320"/>
+          </a:xfrm>
+          <a:prstGeom prst="rect">
+            <a:avLst/>
+          </a:prstGeom>
+          <a:noFill/>
+        </p:spPr>
+        <p:txBody>
+          <a:bodyPr wrap="square" anchor="t" lIns="0" rIns="0" tIns="0" bIns="0">
+            <a:spAutoFit/>
+          </a:bodyPr>
+          <a:lstStyle/>
+          <a:p>
+            <a:pPr algn="r"/>
+            <a:r>
+              <a:rPr sz="900" b="0">
+                <a:solidFill>
+                  <a:srgbClr val="64748B"/>
+                </a:solidFill>
+                <a:latin typeface="Open Sans"/>
+              </a:rPr>
+              <a:t>9 / 9</a:t>
             </a:r>
           </a:p>
         </p:txBody>

--- a/myReclaim-Exec-Deck.pptx
+++ b/myReclaim-Exec-Deck.pptx
@@ -11049,7 +11049,7 @@
         <p:spPr>
           <a:xfrm>
             <a:off x="457200" y="4846320"/>
-            <a:ext cx="5486400" cy="256032"/>
+            <a:ext cx="5486400" cy="237744"/>
           </a:xfrm>
           <a:prstGeom prst="rect">
             <a:avLst/>
@@ -11092,8 +11092,8 @@
         </p:nvSpPr>
         <p:spPr>
           <a:xfrm>
-            <a:off x="548640" y="4892040"/>
-            <a:ext cx="1554480" cy="201168"/>
+            <a:off x="548640" y="4882896"/>
+            <a:ext cx="1554480" cy="182880"/>
           </a:xfrm>
           <a:prstGeom prst="rect">
             <a:avLst/>
@@ -11127,8 +11127,8 @@
         </p:nvSpPr>
         <p:spPr>
           <a:xfrm>
-            <a:off x="2194560" y="4892040"/>
-            <a:ext cx="914400" cy="201168"/>
+            <a:off x="2194560" y="4882896"/>
+            <a:ext cx="914400" cy="182880"/>
           </a:xfrm>
           <a:prstGeom prst="rect">
             <a:avLst/>
@@ -11162,8 +11162,8 @@
         </p:nvSpPr>
         <p:spPr>
           <a:xfrm>
-            <a:off x="3246120" y="4892040"/>
-            <a:ext cx="914400" cy="201168"/>
+            <a:off x="3246120" y="4882896"/>
+            <a:ext cx="914400" cy="182880"/>
           </a:xfrm>
           <a:prstGeom prst="rect">
             <a:avLst/>
@@ -11197,8 +11197,8 @@
         </p:nvSpPr>
         <p:spPr>
           <a:xfrm>
-            <a:off x="4297680" y="4892040"/>
-            <a:ext cx="1554480" cy="201168"/>
+            <a:off x="4297680" y="4882896"/>
+            <a:ext cx="1554480" cy="182880"/>
           </a:xfrm>
           <a:prstGeom prst="rect">
             <a:avLst/>
@@ -11232,8 +11232,8 @@
         </p:nvSpPr>
         <p:spPr>
           <a:xfrm>
-            <a:off x="457200" y="5102352"/>
-            <a:ext cx="5486400" cy="365760"/>
+            <a:off x="457200" y="5084064"/>
+            <a:ext cx="5486400" cy="301752"/>
           </a:xfrm>
           <a:prstGeom prst="rect">
             <a:avLst/>
@@ -11276,23 +11276,23 @@
         </p:nvSpPr>
         <p:spPr>
           <a:xfrm>
-            <a:off x="548640" y="5175504"/>
-            <a:ext cx="1554480" cy="228600"/>
-          </a:xfrm>
-          <a:prstGeom prst="rect">
-            <a:avLst/>
-          </a:prstGeom>
-          <a:noFill/>
-        </p:spPr>
-        <p:txBody>
-          <a:bodyPr wrap="square" anchor="t" lIns="0" rIns="0" tIns="0" bIns="0">
-            <a:spAutoFit/>
-          </a:bodyPr>
-          <a:lstStyle/>
-          <a:p>
-            <a:pPr algn="l"/>
-            <a:r>
-              <a:rPr sz="1100" b="1">
+            <a:off x="548640" y="5138927"/>
+            <a:ext cx="1554480" cy="201168"/>
+          </a:xfrm>
+          <a:prstGeom prst="rect">
+            <a:avLst/>
+          </a:prstGeom>
+          <a:noFill/>
+        </p:spPr>
+        <p:txBody>
+          <a:bodyPr wrap="square" anchor="t" lIns="0" rIns="0" tIns="0" bIns="0">
+            <a:spAutoFit/>
+          </a:bodyPr>
+          <a:lstStyle/>
+          <a:p>
+            <a:pPr algn="l"/>
+            <a:r>
+              <a:rPr sz="1050" b="1">
                 <a:solidFill>
                   <a:srgbClr val="0F172A"/>
                 </a:solidFill>
@@ -11311,23 +11311,23 @@
         </p:nvSpPr>
         <p:spPr>
           <a:xfrm>
-            <a:off x="2194560" y="5175504"/>
-            <a:ext cx="914400" cy="228600"/>
-          </a:xfrm>
-          <a:prstGeom prst="rect">
-            <a:avLst/>
-          </a:prstGeom>
-          <a:noFill/>
-        </p:spPr>
-        <p:txBody>
-          <a:bodyPr wrap="square" anchor="t" lIns="0" rIns="0" tIns="0" bIns="0">
-            <a:spAutoFit/>
-          </a:bodyPr>
-          <a:lstStyle/>
-          <a:p>
-            <a:pPr algn="l"/>
-            <a:r>
-              <a:rPr sz="1100" b="0">
+            <a:off x="2194560" y="5138927"/>
+            <a:ext cx="914400" cy="201168"/>
+          </a:xfrm>
+          <a:prstGeom prst="rect">
+            <a:avLst/>
+          </a:prstGeom>
+          <a:noFill/>
+        </p:spPr>
+        <p:txBody>
+          <a:bodyPr wrap="square" anchor="t" lIns="0" rIns="0" tIns="0" bIns="0">
+            <a:spAutoFit/>
+          </a:bodyPr>
+          <a:lstStyle/>
+          <a:p>
+            <a:pPr algn="l"/>
+            <a:r>
+              <a:rPr sz="1050" b="0">
                 <a:solidFill>
                   <a:srgbClr val="334155"/>
                 </a:solidFill>
@@ -11346,23 +11346,23 @@
         </p:nvSpPr>
         <p:spPr>
           <a:xfrm>
-            <a:off x="3246120" y="5175504"/>
-            <a:ext cx="914400" cy="228600"/>
-          </a:xfrm>
-          <a:prstGeom prst="rect">
-            <a:avLst/>
-          </a:prstGeom>
-          <a:noFill/>
-        </p:spPr>
-        <p:txBody>
-          <a:bodyPr wrap="square" anchor="t" lIns="0" rIns="0" tIns="0" bIns="0">
-            <a:spAutoFit/>
-          </a:bodyPr>
-          <a:lstStyle/>
-          <a:p>
-            <a:pPr algn="l"/>
-            <a:r>
-              <a:rPr sz="1100" b="1">
+            <a:off x="3246120" y="5138927"/>
+            <a:ext cx="914400" cy="201168"/>
+          </a:xfrm>
+          <a:prstGeom prst="rect">
+            <a:avLst/>
+          </a:prstGeom>
+          <a:noFill/>
+        </p:spPr>
+        <p:txBody>
+          <a:bodyPr wrap="square" anchor="t" lIns="0" rIns="0" tIns="0" bIns="0">
+            <a:spAutoFit/>
+          </a:bodyPr>
+          <a:lstStyle/>
+          <a:p>
+            <a:pPr algn="l"/>
+            <a:r>
+              <a:rPr sz="1050" b="1">
                 <a:solidFill>
                   <a:srgbClr val="059669"/>
                 </a:solidFill>
@@ -11381,23 +11381,23 @@
         </p:nvSpPr>
         <p:spPr>
           <a:xfrm>
-            <a:off x="4297680" y="5175504"/>
-            <a:ext cx="1554480" cy="228600"/>
-          </a:xfrm>
-          <a:prstGeom prst="rect">
-            <a:avLst/>
-          </a:prstGeom>
-          <a:noFill/>
-        </p:spPr>
-        <p:txBody>
-          <a:bodyPr wrap="square" anchor="t" lIns="0" rIns="0" tIns="0" bIns="0">
-            <a:spAutoFit/>
-          </a:bodyPr>
-          <a:lstStyle/>
-          <a:p>
-            <a:pPr algn="l"/>
-            <a:r>
-              <a:rPr sz="1000" b="0">
+            <a:off x="4297680" y="5138927"/>
+            <a:ext cx="1554480" cy="201168"/>
+          </a:xfrm>
+          <a:prstGeom prst="rect">
+            <a:avLst/>
+          </a:prstGeom>
+          <a:noFill/>
+        </p:spPr>
+        <p:txBody>
+          <a:bodyPr wrap="square" anchor="t" lIns="0" rIns="0" tIns="0" bIns="0">
+            <a:spAutoFit/>
+          </a:bodyPr>
+          <a:lstStyle/>
+          <a:p>
+            <a:pPr algn="l"/>
+            <a:r>
+              <a:rPr sz="950" b="0">
                 <a:solidFill>
                   <a:srgbClr val="64748B"/>
                 </a:solidFill>
@@ -11416,8 +11416,8 @@
         </p:nvSpPr>
         <p:spPr>
           <a:xfrm>
-            <a:off x="457200" y="5468112"/>
-            <a:ext cx="5486400" cy="365760"/>
+            <a:off x="457200" y="5385816"/>
+            <a:ext cx="5486400" cy="301752"/>
           </a:xfrm>
           <a:prstGeom prst="rect">
             <a:avLst/>
@@ -11460,23 +11460,23 @@
         </p:nvSpPr>
         <p:spPr>
           <a:xfrm>
-            <a:off x="548640" y="5541264"/>
-            <a:ext cx="1554480" cy="228600"/>
-          </a:xfrm>
-          <a:prstGeom prst="rect">
-            <a:avLst/>
-          </a:prstGeom>
-          <a:noFill/>
-        </p:spPr>
-        <p:txBody>
-          <a:bodyPr wrap="square" anchor="t" lIns="0" rIns="0" tIns="0" bIns="0">
-            <a:spAutoFit/>
-          </a:bodyPr>
-          <a:lstStyle/>
-          <a:p>
-            <a:pPr algn="l"/>
-            <a:r>
-              <a:rPr sz="1100" b="1">
+            <a:off x="548640" y="5440679"/>
+            <a:ext cx="1554480" cy="201168"/>
+          </a:xfrm>
+          <a:prstGeom prst="rect">
+            <a:avLst/>
+          </a:prstGeom>
+          <a:noFill/>
+        </p:spPr>
+        <p:txBody>
+          <a:bodyPr wrap="square" anchor="t" lIns="0" rIns="0" tIns="0" bIns="0">
+            <a:spAutoFit/>
+          </a:bodyPr>
+          <a:lstStyle/>
+          <a:p>
+            <a:pPr algn="l"/>
+            <a:r>
+              <a:rPr sz="1050" b="1">
                 <a:solidFill>
                   <a:srgbClr val="0F172A"/>
                 </a:solidFill>
@@ -11495,23 +11495,23 @@
         </p:nvSpPr>
         <p:spPr>
           <a:xfrm>
-            <a:off x="2194560" y="5541264"/>
-            <a:ext cx="914400" cy="228600"/>
-          </a:xfrm>
-          <a:prstGeom prst="rect">
-            <a:avLst/>
-          </a:prstGeom>
-          <a:noFill/>
-        </p:spPr>
-        <p:txBody>
-          <a:bodyPr wrap="square" anchor="t" lIns="0" rIns="0" tIns="0" bIns="0">
-            <a:spAutoFit/>
-          </a:bodyPr>
-          <a:lstStyle/>
-          <a:p>
-            <a:pPr algn="l"/>
-            <a:r>
-              <a:rPr sz="1100" b="0">
+            <a:off x="2194560" y="5440679"/>
+            <a:ext cx="914400" cy="201168"/>
+          </a:xfrm>
+          <a:prstGeom prst="rect">
+            <a:avLst/>
+          </a:prstGeom>
+          <a:noFill/>
+        </p:spPr>
+        <p:txBody>
+          <a:bodyPr wrap="square" anchor="t" lIns="0" rIns="0" tIns="0" bIns="0">
+            <a:spAutoFit/>
+          </a:bodyPr>
+          <a:lstStyle/>
+          <a:p>
+            <a:pPr algn="l"/>
+            <a:r>
+              <a:rPr sz="1050" b="0">
                 <a:solidFill>
                   <a:srgbClr val="334155"/>
                 </a:solidFill>
@@ -11530,23 +11530,23 @@
         </p:nvSpPr>
         <p:spPr>
           <a:xfrm>
-            <a:off x="3246120" y="5541264"/>
-            <a:ext cx="914400" cy="228600"/>
-          </a:xfrm>
-          <a:prstGeom prst="rect">
-            <a:avLst/>
-          </a:prstGeom>
-          <a:noFill/>
-        </p:spPr>
-        <p:txBody>
-          <a:bodyPr wrap="square" anchor="t" lIns="0" rIns="0" tIns="0" bIns="0">
-            <a:spAutoFit/>
-          </a:bodyPr>
-          <a:lstStyle/>
-          <a:p>
-            <a:pPr algn="l"/>
-            <a:r>
-              <a:rPr sz="1100" b="1">
+            <a:off x="3246120" y="5440679"/>
+            <a:ext cx="914400" cy="201168"/>
+          </a:xfrm>
+          <a:prstGeom prst="rect">
+            <a:avLst/>
+          </a:prstGeom>
+          <a:noFill/>
+        </p:spPr>
+        <p:txBody>
+          <a:bodyPr wrap="square" anchor="t" lIns="0" rIns="0" tIns="0" bIns="0">
+            <a:spAutoFit/>
+          </a:bodyPr>
+          <a:lstStyle/>
+          <a:p>
+            <a:pPr algn="l"/>
+            <a:r>
+              <a:rPr sz="1050" b="1">
                 <a:solidFill>
                   <a:srgbClr val="059669"/>
                 </a:solidFill>
@@ -11565,23 +11565,23 @@
         </p:nvSpPr>
         <p:spPr>
           <a:xfrm>
-            <a:off x="4297680" y="5541264"/>
-            <a:ext cx="1554480" cy="228600"/>
-          </a:xfrm>
-          <a:prstGeom prst="rect">
-            <a:avLst/>
-          </a:prstGeom>
-          <a:noFill/>
-        </p:spPr>
-        <p:txBody>
-          <a:bodyPr wrap="square" anchor="t" lIns="0" rIns="0" tIns="0" bIns="0">
-            <a:spAutoFit/>
-          </a:bodyPr>
-          <a:lstStyle/>
-          <a:p>
-            <a:pPr algn="l"/>
-            <a:r>
-              <a:rPr sz="1000" b="0">
+            <a:off x="4297680" y="5440679"/>
+            <a:ext cx="1554480" cy="201168"/>
+          </a:xfrm>
+          <a:prstGeom prst="rect">
+            <a:avLst/>
+          </a:prstGeom>
+          <a:noFill/>
+        </p:spPr>
+        <p:txBody>
+          <a:bodyPr wrap="square" anchor="t" lIns="0" rIns="0" tIns="0" bIns="0">
+            <a:spAutoFit/>
+          </a:bodyPr>
+          <a:lstStyle/>
+          <a:p>
+            <a:pPr algn="l"/>
+            <a:r>
+              <a:rPr sz="950" b="0">
                 <a:solidFill>
                   <a:srgbClr val="64748B"/>
                 </a:solidFill>
@@ -11600,8 +11600,8 @@
         </p:nvSpPr>
         <p:spPr>
           <a:xfrm>
-            <a:off x="457200" y="5833872"/>
-            <a:ext cx="5486400" cy="365760"/>
+            <a:off x="457200" y="5687568"/>
+            <a:ext cx="5486400" cy="301752"/>
           </a:xfrm>
           <a:prstGeom prst="rect">
             <a:avLst/>
@@ -11644,23 +11644,23 @@
         </p:nvSpPr>
         <p:spPr>
           <a:xfrm>
-            <a:off x="548640" y="5907024"/>
-            <a:ext cx="1554480" cy="228600"/>
-          </a:xfrm>
-          <a:prstGeom prst="rect">
-            <a:avLst/>
-          </a:prstGeom>
-          <a:noFill/>
-        </p:spPr>
-        <p:txBody>
-          <a:bodyPr wrap="square" anchor="t" lIns="0" rIns="0" tIns="0" bIns="0">
-            <a:spAutoFit/>
-          </a:bodyPr>
-          <a:lstStyle/>
-          <a:p>
-            <a:pPr algn="l"/>
-            <a:r>
-              <a:rPr sz="1100" b="1">
+            <a:off x="548640" y="5742431"/>
+            <a:ext cx="1554480" cy="201168"/>
+          </a:xfrm>
+          <a:prstGeom prst="rect">
+            <a:avLst/>
+          </a:prstGeom>
+          <a:noFill/>
+        </p:spPr>
+        <p:txBody>
+          <a:bodyPr wrap="square" anchor="t" lIns="0" rIns="0" tIns="0" bIns="0">
+            <a:spAutoFit/>
+          </a:bodyPr>
+          <a:lstStyle/>
+          <a:p>
+            <a:pPr algn="l"/>
+            <a:r>
+              <a:rPr sz="1050" b="1">
                 <a:solidFill>
                   <a:srgbClr val="0F172A"/>
                 </a:solidFill>
@@ -11679,23 +11679,23 @@
         </p:nvSpPr>
         <p:spPr>
           <a:xfrm>
-            <a:off x="2194560" y="5907024"/>
-            <a:ext cx="914400" cy="228600"/>
-          </a:xfrm>
-          <a:prstGeom prst="rect">
-            <a:avLst/>
-          </a:prstGeom>
-          <a:noFill/>
-        </p:spPr>
-        <p:txBody>
-          <a:bodyPr wrap="square" anchor="t" lIns="0" rIns="0" tIns="0" bIns="0">
-            <a:spAutoFit/>
-          </a:bodyPr>
-          <a:lstStyle/>
-          <a:p>
-            <a:pPr algn="l"/>
-            <a:r>
-              <a:rPr sz="1100" b="0">
+            <a:off x="2194560" y="5742431"/>
+            <a:ext cx="914400" cy="201168"/>
+          </a:xfrm>
+          <a:prstGeom prst="rect">
+            <a:avLst/>
+          </a:prstGeom>
+          <a:noFill/>
+        </p:spPr>
+        <p:txBody>
+          <a:bodyPr wrap="square" anchor="t" lIns="0" rIns="0" tIns="0" bIns="0">
+            <a:spAutoFit/>
+          </a:bodyPr>
+          <a:lstStyle/>
+          <a:p>
+            <a:pPr algn="l"/>
+            <a:r>
+              <a:rPr sz="1050" b="0">
                 <a:solidFill>
                   <a:srgbClr val="334155"/>
                 </a:solidFill>
@@ -11714,23 +11714,23 @@
         </p:nvSpPr>
         <p:spPr>
           <a:xfrm>
-            <a:off x="3246120" y="5907024"/>
-            <a:ext cx="914400" cy="228600"/>
-          </a:xfrm>
-          <a:prstGeom prst="rect">
-            <a:avLst/>
-          </a:prstGeom>
-          <a:noFill/>
-        </p:spPr>
-        <p:txBody>
-          <a:bodyPr wrap="square" anchor="t" lIns="0" rIns="0" tIns="0" bIns="0">
-            <a:spAutoFit/>
-          </a:bodyPr>
-          <a:lstStyle/>
-          <a:p>
-            <a:pPr algn="l"/>
-            <a:r>
-              <a:rPr sz="1100" b="1">
+            <a:off x="3246120" y="5742431"/>
+            <a:ext cx="914400" cy="201168"/>
+          </a:xfrm>
+          <a:prstGeom prst="rect">
+            <a:avLst/>
+          </a:prstGeom>
+          <a:noFill/>
+        </p:spPr>
+        <p:txBody>
+          <a:bodyPr wrap="square" anchor="t" lIns="0" rIns="0" tIns="0" bIns="0">
+            <a:spAutoFit/>
+          </a:bodyPr>
+          <a:lstStyle/>
+          <a:p>
+            <a:pPr algn="l"/>
+            <a:r>
+              <a:rPr sz="1050" b="1">
                 <a:solidFill>
                   <a:srgbClr val="FFB352"/>
                 </a:solidFill>
@@ -11749,23 +11749,23 @@
         </p:nvSpPr>
         <p:spPr>
           <a:xfrm>
-            <a:off x="4297680" y="5907024"/>
-            <a:ext cx="1554480" cy="228600"/>
-          </a:xfrm>
-          <a:prstGeom prst="rect">
-            <a:avLst/>
-          </a:prstGeom>
-          <a:noFill/>
-        </p:spPr>
-        <p:txBody>
-          <a:bodyPr wrap="square" anchor="t" lIns="0" rIns="0" tIns="0" bIns="0">
-            <a:spAutoFit/>
-          </a:bodyPr>
-          <a:lstStyle/>
-          <a:p>
-            <a:pPr algn="l"/>
-            <a:r>
-              <a:rPr sz="1000" b="0">
+            <a:off x="4297680" y="5742431"/>
+            <a:ext cx="1554480" cy="201168"/>
+          </a:xfrm>
+          <a:prstGeom prst="rect">
+            <a:avLst/>
+          </a:prstGeom>
+          <a:noFill/>
+        </p:spPr>
+        <p:txBody>
+          <a:bodyPr wrap="square" anchor="t" lIns="0" rIns="0" tIns="0" bIns="0">
+            <a:spAutoFit/>
+          </a:bodyPr>
+          <a:lstStyle/>
+          <a:p>
+            <a:pPr algn="l"/>
+            <a:r>
+              <a:rPr sz="950" b="0">
                 <a:solidFill>
                   <a:srgbClr val="64748B"/>
                 </a:solidFill>
@@ -11784,8 +11784,8 @@
         </p:nvSpPr>
         <p:spPr>
           <a:xfrm>
-            <a:off x="457200" y="6199632"/>
-            <a:ext cx="5486400" cy="365760"/>
+            <a:off x="457200" y="5989320"/>
+            <a:ext cx="5486400" cy="301752"/>
           </a:xfrm>
           <a:prstGeom prst="rect">
             <a:avLst/>
@@ -11828,23 +11828,23 @@
         </p:nvSpPr>
         <p:spPr>
           <a:xfrm>
-            <a:off x="548640" y="6272784"/>
-            <a:ext cx="1554480" cy="228600"/>
-          </a:xfrm>
-          <a:prstGeom prst="rect">
-            <a:avLst/>
-          </a:prstGeom>
-          <a:noFill/>
-        </p:spPr>
-        <p:txBody>
-          <a:bodyPr wrap="square" anchor="t" lIns="0" rIns="0" tIns="0" bIns="0">
-            <a:spAutoFit/>
-          </a:bodyPr>
-          <a:lstStyle/>
-          <a:p>
-            <a:pPr algn="l"/>
-            <a:r>
-              <a:rPr sz="1100" b="1">
+            <a:off x="548640" y="6044183"/>
+            <a:ext cx="1554480" cy="201168"/>
+          </a:xfrm>
+          <a:prstGeom prst="rect">
+            <a:avLst/>
+          </a:prstGeom>
+          <a:noFill/>
+        </p:spPr>
+        <p:txBody>
+          <a:bodyPr wrap="square" anchor="t" lIns="0" rIns="0" tIns="0" bIns="0">
+            <a:spAutoFit/>
+          </a:bodyPr>
+          <a:lstStyle/>
+          <a:p>
+            <a:pPr algn="l"/>
+            <a:r>
+              <a:rPr sz="1050" b="1">
                 <a:solidFill>
                   <a:srgbClr val="0F172A"/>
                 </a:solidFill>
@@ -11863,23 +11863,23 @@
         </p:nvSpPr>
         <p:spPr>
           <a:xfrm>
-            <a:off x="2194560" y="6272784"/>
-            <a:ext cx="914400" cy="228600"/>
-          </a:xfrm>
-          <a:prstGeom prst="rect">
-            <a:avLst/>
-          </a:prstGeom>
-          <a:noFill/>
-        </p:spPr>
-        <p:txBody>
-          <a:bodyPr wrap="square" anchor="t" lIns="0" rIns="0" tIns="0" bIns="0">
-            <a:spAutoFit/>
-          </a:bodyPr>
-          <a:lstStyle/>
-          <a:p>
-            <a:pPr algn="l"/>
-            <a:r>
-              <a:rPr sz="1100" b="0">
+            <a:off x="2194560" y="6044183"/>
+            <a:ext cx="914400" cy="201168"/>
+          </a:xfrm>
+          <a:prstGeom prst="rect">
+            <a:avLst/>
+          </a:prstGeom>
+          <a:noFill/>
+        </p:spPr>
+        <p:txBody>
+          <a:bodyPr wrap="square" anchor="t" lIns="0" rIns="0" tIns="0" bIns="0">
+            <a:spAutoFit/>
+          </a:bodyPr>
+          <a:lstStyle/>
+          <a:p>
+            <a:pPr algn="l"/>
+            <a:r>
+              <a:rPr sz="1050" b="0">
                 <a:solidFill>
                   <a:srgbClr val="334155"/>
                 </a:solidFill>
@@ -11898,23 +11898,23 @@
         </p:nvSpPr>
         <p:spPr>
           <a:xfrm>
-            <a:off x="3246120" y="6272784"/>
-            <a:ext cx="914400" cy="228600"/>
-          </a:xfrm>
-          <a:prstGeom prst="rect">
-            <a:avLst/>
-          </a:prstGeom>
-          <a:noFill/>
-        </p:spPr>
-        <p:txBody>
-          <a:bodyPr wrap="square" anchor="t" lIns="0" rIns="0" tIns="0" bIns="0">
-            <a:spAutoFit/>
-          </a:bodyPr>
-          <a:lstStyle/>
-          <a:p>
-            <a:pPr algn="l"/>
-            <a:r>
-              <a:rPr sz="1100" b="1">
+            <a:off x="3246120" y="6044183"/>
+            <a:ext cx="914400" cy="201168"/>
+          </a:xfrm>
+          <a:prstGeom prst="rect">
+            <a:avLst/>
+          </a:prstGeom>
+          <a:noFill/>
+        </p:spPr>
+        <p:txBody>
+          <a:bodyPr wrap="square" anchor="t" lIns="0" rIns="0" tIns="0" bIns="0">
+            <a:spAutoFit/>
+          </a:bodyPr>
+          <a:lstStyle/>
+          <a:p>
+            <a:pPr algn="l"/>
+            <a:r>
+              <a:rPr sz="1050" b="1">
                 <a:solidFill>
                   <a:srgbClr val="64748B"/>
                 </a:solidFill>
@@ -11933,23 +11933,23 @@
         </p:nvSpPr>
         <p:spPr>
           <a:xfrm>
-            <a:off x="4297680" y="6272784"/>
-            <a:ext cx="1554480" cy="228600"/>
-          </a:xfrm>
-          <a:prstGeom prst="rect">
-            <a:avLst/>
-          </a:prstGeom>
-          <a:noFill/>
-        </p:spPr>
-        <p:txBody>
-          <a:bodyPr wrap="square" anchor="t" lIns="0" rIns="0" tIns="0" bIns="0">
-            <a:spAutoFit/>
-          </a:bodyPr>
-          <a:lstStyle/>
-          <a:p>
-            <a:pPr algn="l"/>
-            <a:r>
-              <a:rPr sz="1000" b="0">
+            <a:off x="4297680" y="6044183"/>
+            <a:ext cx="1554480" cy="201168"/>
+          </a:xfrm>
+          <a:prstGeom prst="rect">
+            <a:avLst/>
+          </a:prstGeom>
+          <a:noFill/>
+        </p:spPr>
+        <p:txBody>
+          <a:bodyPr wrap="square" anchor="t" lIns="0" rIns="0" tIns="0" bIns="0">
+            <a:spAutoFit/>
+          </a:bodyPr>
+          <a:lstStyle/>
+          <a:p>
+            <a:pPr algn="l"/>
+            <a:r>
+              <a:rPr sz="950" b="0">
                 <a:solidFill>
                   <a:srgbClr val="64748B"/>
                 </a:solidFill>
@@ -12039,7 +12039,7 @@
         <p:spPr>
           <a:xfrm>
             <a:off x="6217920" y="4846320"/>
-            <a:ext cx="5486400" cy="256032"/>
+            <a:ext cx="5486400" cy="237744"/>
           </a:xfrm>
           <a:prstGeom prst="rect">
             <a:avLst/>
@@ -12082,8 +12082,8 @@
         </p:nvSpPr>
         <p:spPr>
           <a:xfrm>
-            <a:off x="6309360" y="4892040"/>
-            <a:ext cx="914400" cy="201168"/>
+            <a:off x="6309360" y="4882896"/>
+            <a:ext cx="914400" cy="182880"/>
           </a:xfrm>
           <a:prstGeom prst="rect">
             <a:avLst/>
@@ -12117,8 +12117,8 @@
         </p:nvSpPr>
         <p:spPr>
           <a:xfrm>
-            <a:off x="7269480" y="4892040"/>
-            <a:ext cx="1280160" cy="201168"/>
+            <a:off x="7269480" y="4882896"/>
+            <a:ext cx="1280160" cy="182880"/>
           </a:xfrm>
           <a:prstGeom prst="rect">
             <a:avLst/>
@@ -12152,8 +12152,8 @@
         </p:nvSpPr>
         <p:spPr>
           <a:xfrm>
-            <a:off x="8641080" y="4892040"/>
-            <a:ext cx="1371600" cy="201168"/>
+            <a:off x="8641080" y="4882896"/>
+            <a:ext cx="1371600" cy="182880"/>
           </a:xfrm>
           <a:prstGeom prst="rect">
             <a:avLst/>
@@ -12187,8 +12187,8 @@
         </p:nvSpPr>
         <p:spPr>
           <a:xfrm>
-            <a:off x="10104120" y="4892040"/>
-            <a:ext cx="1371600" cy="201168"/>
+            <a:off x="10104120" y="4882896"/>
+            <a:ext cx="1371600" cy="182880"/>
           </a:xfrm>
           <a:prstGeom prst="rect">
             <a:avLst/>
@@ -12222,8 +12222,8 @@
         </p:nvSpPr>
         <p:spPr>
           <a:xfrm>
-            <a:off x="6217920" y="5102352"/>
-            <a:ext cx="5486400" cy="365760"/>
+            <a:off x="6217920" y="5084064"/>
+            <a:ext cx="5486400" cy="301752"/>
           </a:xfrm>
           <a:prstGeom prst="rect">
             <a:avLst/>
@@ -12266,23 +12266,23 @@
         </p:nvSpPr>
         <p:spPr>
           <a:xfrm>
-            <a:off x="6309360" y="5175504"/>
-            <a:ext cx="914400" cy="228600"/>
-          </a:xfrm>
-          <a:prstGeom prst="rect">
-            <a:avLst/>
-          </a:prstGeom>
-          <a:noFill/>
-        </p:spPr>
-        <p:txBody>
-          <a:bodyPr wrap="square" anchor="t" lIns="0" rIns="0" tIns="0" bIns="0">
-            <a:spAutoFit/>
-          </a:bodyPr>
-          <a:lstStyle/>
-          <a:p>
-            <a:pPr algn="l"/>
-            <a:r>
-              <a:rPr sz="1100" b="1">
+            <a:off x="6309360" y="5138927"/>
+            <a:ext cx="914400" cy="201168"/>
+          </a:xfrm>
+          <a:prstGeom prst="rect">
+            <a:avLst/>
+          </a:prstGeom>
+          <a:noFill/>
+        </p:spPr>
+        <p:txBody>
+          <a:bodyPr wrap="square" anchor="t" lIns="0" rIns="0" tIns="0" bIns="0">
+            <a:spAutoFit/>
+          </a:bodyPr>
+          <a:lstStyle/>
+          <a:p>
+            <a:pPr algn="l"/>
+            <a:r>
+              <a:rPr sz="1050" b="1">
                 <a:solidFill>
                   <a:srgbClr val="64748B"/>
                 </a:solidFill>
@@ -12301,23 +12301,23 @@
         </p:nvSpPr>
         <p:spPr>
           <a:xfrm>
-            <a:off x="7269480" y="5175504"/>
-            <a:ext cx="1280160" cy="228600"/>
-          </a:xfrm>
-          <a:prstGeom prst="rect">
-            <a:avLst/>
-          </a:prstGeom>
-          <a:noFill/>
-        </p:spPr>
-        <p:txBody>
-          <a:bodyPr wrap="square" anchor="t" lIns="0" rIns="0" tIns="0" bIns="0">
-            <a:spAutoFit/>
-          </a:bodyPr>
-          <a:lstStyle/>
-          <a:p>
-            <a:pPr algn="l"/>
-            <a:r>
-              <a:rPr sz="1000" b="0">
+            <a:off x="7269480" y="5138927"/>
+            <a:ext cx="1280160" cy="201168"/>
+          </a:xfrm>
+          <a:prstGeom prst="rect">
+            <a:avLst/>
+          </a:prstGeom>
+          <a:noFill/>
+        </p:spPr>
+        <p:txBody>
+          <a:bodyPr wrap="square" anchor="t" lIns="0" rIns="0" tIns="0" bIns="0">
+            <a:spAutoFit/>
+          </a:bodyPr>
+          <a:lstStyle/>
+          <a:p>
+            <a:pPr algn="l"/>
+            <a:r>
+              <a:rPr sz="950" b="0">
                 <a:solidFill>
                   <a:srgbClr val="334155"/>
                 </a:solidFill>
@@ -12336,23 +12336,23 @@
         </p:nvSpPr>
         <p:spPr>
           <a:xfrm>
-            <a:off x="8641080" y="5175504"/>
-            <a:ext cx="1371600" cy="228600"/>
-          </a:xfrm>
-          <a:prstGeom prst="rect">
-            <a:avLst/>
-          </a:prstGeom>
-          <a:noFill/>
-        </p:spPr>
-        <p:txBody>
-          <a:bodyPr wrap="square" anchor="t" lIns="0" rIns="0" tIns="0" bIns="0">
-            <a:spAutoFit/>
-          </a:bodyPr>
-          <a:lstStyle/>
-          <a:p>
-            <a:pPr algn="l"/>
-            <a:r>
-              <a:rPr sz="1100" b="0">
+            <a:off x="8641080" y="5138927"/>
+            <a:ext cx="1371600" cy="201168"/>
+          </a:xfrm>
+          <a:prstGeom prst="rect">
+            <a:avLst/>
+          </a:prstGeom>
+          <a:noFill/>
+        </p:spPr>
+        <p:txBody>
+          <a:bodyPr wrap="square" anchor="t" lIns="0" rIns="0" tIns="0" bIns="0">
+            <a:spAutoFit/>
+          </a:bodyPr>
+          <a:lstStyle/>
+          <a:p>
+            <a:pPr algn="l"/>
+            <a:r>
+              <a:rPr sz="1050" b="0">
                 <a:solidFill>
                   <a:srgbClr val="334155"/>
                 </a:solidFill>
@@ -12371,23 +12371,23 @@
         </p:nvSpPr>
         <p:spPr>
           <a:xfrm>
-            <a:off x="10104120" y="5175504"/>
-            <a:ext cx="1371600" cy="228600"/>
-          </a:xfrm>
-          <a:prstGeom prst="rect">
-            <a:avLst/>
-          </a:prstGeom>
-          <a:noFill/>
-        </p:spPr>
-        <p:txBody>
-          <a:bodyPr wrap="square" anchor="t" lIns="0" rIns="0" tIns="0" bIns="0">
-            <a:spAutoFit/>
-          </a:bodyPr>
-          <a:lstStyle/>
-          <a:p>
-            <a:pPr algn="l"/>
-            <a:r>
-              <a:rPr sz="1100" b="1">
+            <a:off x="10104120" y="5138927"/>
+            <a:ext cx="1371600" cy="201168"/>
+          </a:xfrm>
+          <a:prstGeom prst="rect">
+            <a:avLst/>
+          </a:prstGeom>
+          <a:noFill/>
+        </p:spPr>
+        <p:txBody>
+          <a:bodyPr wrap="square" anchor="t" lIns="0" rIns="0" tIns="0" bIns="0">
+            <a:spAutoFit/>
+          </a:bodyPr>
+          <a:lstStyle/>
+          <a:p>
+            <a:pPr algn="l"/>
+            <a:r>
+              <a:rPr sz="1050" b="1">
                 <a:solidFill>
                   <a:srgbClr val="64748B"/>
                 </a:solidFill>
@@ -12406,8 +12406,8 @@
         </p:nvSpPr>
         <p:spPr>
           <a:xfrm>
-            <a:off x="6217920" y="5468112"/>
-            <a:ext cx="5486400" cy="365760"/>
+            <a:off x="6217920" y="5385816"/>
+            <a:ext cx="5486400" cy="301752"/>
           </a:xfrm>
           <a:prstGeom prst="rect">
             <a:avLst/>
@@ -12450,23 +12450,23 @@
         </p:nvSpPr>
         <p:spPr>
           <a:xfrm>
-            <a:off x="6309360" y="5541264"/>
-            <a:ext cx="914400" cy="228600"/>
-          </a:xfrm>
-          <a:prstGeom prst="rect">
-            <a:avLst/>
-          </a:prstGeom>
-          <a:noFill/>
-        </p:spPr>
-        <p:txBody>
-          <a:bodyPr wrap="square" anchor="t" lIns="0" rIns="0" tIns="0" bIns="0">
-            <a:spAutoFit/>
-          </a:bodyPr>
-          <a:lstStyle/>
-          <a:p>
-            <a:pPr algn="l"/>
-            <a:r>
-              <a:rPr sz="1100" b="1">
+            <a:off x="6309360" y="5440679"/>
+            <a:ext cx="914400" cy="201168"/>
+          </a:xfrm>
+          <a:prstGeom prst="rect">
+            <a:avLst/>
+          </a:prstGeom>
+          <a:noFill/>
+        </p:spPr>
+        <p:txBody>
+          <a:bodyPr wrap="square" anchor="t" lIns="0" rIns="0" tIns="0" bIns="0">
+            <a:spAutoFit/>
+          </a:bodyPr>
+          <a:lstStyle/>
+          <a:p>
+            <a:pPr algn="l"/>
+            <a:r>
+              <a:rPr sz="1050" b="1">
                 <a:solidFill>
                   <a:srgbClr val="FFB352"/>
                 </a:solidFill>
@@ -12485,23 +12485,23 @@
         </p:nvSpPr>
         <p:spPr>
           <a:xfrm>
-            <a:off x="7269480" y="5541264"/>
-            <a:ext cx="1280160" cy="228600"/>
-          </a:xfrm>
-          <a:prstGeom prst="rect">
-            <a:avLst/>
-          </a:prstGeom>
-          <a:noFill/>
-        </p:spPr>
-        <p:txBody>
-          <a:bodyPr wrap="square" anchor="t" lIns="0" rIns="0" tIns="0" bIns="0">
-            <a:spAutoFit/>
-          </a:bodyPr>
-          <a:lstStyle/>
-          <a:p>
-            <a:pPr algn="l"/>
-            <a:r>
-              <a:rPr sz="1000" b="0">
+            <a:off x="7269480" y="5440679"/>
+            <a:ext cx="1280160" cy="201168"/>
+          </a:xfrm>
+          <a:prstGeom prst="rect">
+            <a:avLst/>
+          </a:prstGeom>
+          <a:noFill/>
+        </p:spPr>
+        <p:txBody>
+          <a:bodyPr wrap="square" anchor="t" lIns="0" rIns="0" tIns="0" bIns="0">
+            <a:spAutoFit/>
+          </a:bodyPr>
+          <a:lstStyle/>
+          <a:p>
+            <a:pPr algn="l"/>
+            <a:r>
+              <a:rPr sz="950" b="0">
                 <a:solidFill>
                   <a:srgbClr val="334155"/>
                 </a:solidFill>
@@ -12520,23 +12520,23 @@
         </p:nvSpPr>
         <p:spPr>
           <a:xfrm>
-            <a:off x="8641080" y="5541264"/>
-            <a:ext cx="1371600" cy="228600"/>
-          </a:xfrm>
-          <a:prstGeom prst="rect">
-            <a:avLst/>
-          </a:prstGeom>
-          <a:noFill/>
-        </p:spPr>
-        <p:txBody>
-          <a:bodyPr wrap="square" anchor="t" lIns="0" rIns="0" tIns="0" bIns="0">
-            <a:spAutoFit/>
-          </a:bodyPr>
-          <a:lstStyle/>
-          <a:p>
-            <a:pPr algn="l"/>
-            <a:r>
-              <a:rPr sz="1100" b="0">
+            <a:off x="8641080" y="5440679"/>
+            <a:ext cx="1371600" cy="201168"/>
+          </a:xfrm>
+          <a:prstGeom prst="rect">
+            <a:avLst/>
+          </a:prstGeom>
+          <a:noFill/>
+        </p:spPr>
+        <p:txBody>
+          <a:bodyPr wrap="square" anchor="t" lIns="0" rIns="0" tIns="0" bIns="0">
+            <a:spAutoFit/>
+          </a:bodyPr>
+          <a:lstStyle/>
+          <a:p>
+            <a:pPr algn="l"/>
+            <a:r>
+              <a:rPr sz="1050" b="0">
                 <a:solidFill>
                   <a:srgbClr val="334155"/>
                 </a:solidFill>
@@ -12555,23 +12555,23 @@
         </p:nvSpPr>
         <p:spPr>
           <a:xfrm>
-            <a:off x="10104120" y="5541264"/>
-            <a:ext cx="1371600" cy="228600"/>
-          </a:xfrm>
-          <a:prstGeom prst="rect">
-            <a:avLst/>
-          </a:prstGeom>
-          <a:noFill/>
-        </p:spPr>
-        <p:txBody>
-          <a:bodyPr wrap="square" anchor="t" lIns="0" rIns="0" tIns="0" bIns="0">
-            <a:spAutoFit/>
-          </a:bodyPr>
-          <a:lstStyle/>
-          <a:p>
-            <a:pPr algn="l"/>
-            <a:r>
-              <a:rPr sz="1100" b="1">
+            <a:off x="10104120" y="5440679"/>
+            <a:ext cx="1371600" cy="201168"/>
+          </a:xfrm>
+          <a:prstGeom prst="rect">
+            <a:avLst/>
+          </a:prstGeom>
+          <a:noFill/>
+        </p:spPr>
+        <p:txBody>
+          <a:bodyPr wrap="square" anchor="t" lIns="0" rIns="0" tIns="0" bIns="0">
+            <a:spAutoFit/>
+          </a:bodyPr>
+          <a:lstStyle/>
+          <a:p>
+            <a:pPr algn="l"/>
+            <a:r>
+              <a:rPr sz="1050" b="1">
                 <a:solidFill>
                   <a:srgbClr val="FFB352"/>
                 </a:solidFill>
@@ -12590,8 +12590,8 @@
         </p:nvSpPr>
         <p:spPr>
           <a:xfrm>
-            <a:off x="6217920" y="5833872"/>
-            <a:ext cx="5486400" cy="365760"/>
+            <a:off x="6217920" y="5687568"/>
+            <a:ext cx="5486400" cy="301752"/>
           </a:xfrm>
           <a:prstGeom prst="rect">
             <a:avLst/>
@@ -12634,23 +12634,23 @@
         </p:nvSpPr>
         <p:spPr>
           <a:xfrm>
-            <a:off x="6309360" y="5907024"/>
-            <a:ext cx="914400" cy="228600"/>
-          </a:xfrm>
-          <a:prstGeom prst="rect">
-            <a:avLst/>
-          </a:prstGeom>
-          <a:noFill/>
-        </p:spPr>
-        <p:txBody>
-          <a:bodyPr wrap="square" anchor="t" lIns="0" rIns="0" tIns="0" bIns="0">
-            <a:spAutoFit/>
-          </a:bodyPr>
-          <a:lstStyle/>
-          <a:p>
-            <a:pPr algn="l"/>
-            <a:r>
-              <a:rPr sz="1100" b="1">
+            <a:off x="6309360" y="5742431"/>
+            <a:ext cx="914400" cy="201168"/>
+          </a:xfrm>
+          <a:prstGeom prst="rect">
+            <a:avLst/>
+          </a:prstGeom>
+          <a:noFill/>
+        </p:spPr>
+        <p:txBody>
+          <a:bodyPr wrap="square" anchor="t" lIns="0" rIns="0" tIns="0" bIns="0">
+            <a:spAutoFit/>
+          </a:bodyPr>
+          <a:lstStyle/>
+          <a:p>
+            <a:pPr algn="l"/>
+            <a:r>
+              <a:rPr sz="1050" b="1">
                 <a:solidFill>
                   <a:srgbClr val="FC4C0B"/>
                 </a:solidFill>
@@ -12669,23 +12669,23 @@
         </p:nvSpPr>
         <p:spPr>
           <a:xfrm>
-            <a:off x="7269480" y="5907024"/>
-            <a:ext cx="1280160" cy="228600"/>
-          </a:xfrm>
-          <a:prstGeom prst="rect">
-            <a:avLst/>
-          </a:prstGeom>
-          <a:noFill/>
-        </p:spPr>
-        <p:txBody>
-          <a:bodyPr wrap="square" anchor="t" lIns="0" rIns="0" tIns="0" bIns="0">
-            <a:spAutoFit/>
-          </a:bodyPr>
-          <a:lstStyle/>
-          <a:p>
-            <a:pPr algn="l"/>
-            <a:r>
-              <a:rPr sz="1000" b="0">
+            <a:off x="7269480" y="5742431"/>
+            <a:ext cx="1280160" cy="201168"/>
+          </a:xfrm>
+          <a:prstGeom prst="rect">
+            <a:avLst/>
+          </a:prstGeom>
+          <a:noFill/>
+        </p:spPr>
+        <p:txBody>
+          <a:bodyPr wrap="square" anchor="t" lIns="0" rIns="0" tIns="0" bIns="0">
+            <a:spAutoFit/>
+          </a:bodyPr>
+          <a:lstStyle/>
+          <a:p>
+            <a:pPr algn="l"/>
+            <a:r>
+              <a:rPr sz="950" b="0">
                 <a:solidFill>
                   <a:srgbClr val="334155"/>
                 </a:solidFill>
@@ -12704,23 +12704,23 @@
         </p:nvSpPr>
         <p:spPr>
           <a:xfrm>
-            <a:off x="8641080" y="5907024"/>
-            <a:ext cx="1371600" cy="228600"/>
-          </a:xfrm>
-          <a:prstGeom prst="rect">
-            <a:avLst/>
-          </a:prstGeom>
-          <a:noFill/>
-        </p:spPr>
-        <p:txBody>
-          <a:bodyPr wrap="square" anchor="t" lIns="0" rIns="0" tIns="0" bIns="0">
-            <a:spAutoFit/>
-          </a:bodyPr>
-          <a:lstStyle/>
-          <a:p>
-            <a:pPr algn="l"/>
-            <a:r>
-              <a:rPr sz="1100" b="0">
+            <a:off x="8641080" y="5742431"/>
+            <a:ext cx="1371600" cy="201168"/>
+          </a:xfrm>
+          <a:prstGeom prst="rect">
+            <a:avLst/>
+          </a:prstGeom>
+          <a:noFill/>
+        </p:spPr>
+        <p:txBody>
+          <a:bodyPr wrap="square" anchor="t" lIns="0" rIns="0" tIns="0" bIns="0">
+            <a:spAutoFit/>
+          </a:bodyPr>
+          <a:lstStyle/>
+          <a:p>
+            <a:pPr algn="l"/>
+            <a:r>
+              <a:rPr sz="1050" b="0">
                 <a:solidFill>
                   <a:srgbClr val="334155"/>
                 </a:solidFill>
@@ -12739,23 +12739,23 @@
         </p:nvSpPr>
         <p:spPr>
           <a:xfrm>
-            <a:off x="10104120" y="5907024"/>
-            <a:ext cx="1371600" cy="228600"/>
-          </a:xfrm>
-          <a:prstGeom prst="rect">
-            <a:avLst/>
-          </a:prstGeom>
-          <a:noFill/>
-        </p:spPr>
-        <p:txBody>
-          <a:bodyPr wrap="square" anchor="t" lIns="0" rIns="0" tIns="0" bIns="0">
-            <a:spAutoFit/>
-          </a:bodyPr>
-          <a:lstStyle/>
-          <a:p>
-            <a:pPr algn="l"/>
-            <a:r>
-              <a:rPr sz="1100" b="1">
+            <a:off x="10104120" y="5742431"/>
+            <a:ext cx="1371600" cy="201168"/>
+          </a:xfrm>
+          <a:prstGeom prst="rect">
+            <a:avLst/>
+          </a:prstGeom>
+          <a:noFill/>
+        </p:spPr>
+        <p:txBody>
+          <a:bodyPr wrap="square" anchor="t" lIns="0" rIns="0" tIns="0" bIns="0">
+            <a:spAutoFit/>
+          </a:bodyPr>
+          <a:lstStyle/>
+          <a:p>
+            <a:pPr algn="l"/>
+            <a:r>
+              <a:rPr sz="1050" b="1">
                 <a:solidFill>
                   <a:srgbClr val="FC4C0B"/>
                 </a:solidFill>
@@ -12774,8 +12774,8 @@
         </p:nvSpPr>
         <p:spPr>
           <a:xfrm>
-            <a:off x="6217920" y="6199632"/>
-            <a:ext cx="5486400" cy="365760"/>
+            <a:off x="6217920" y="5989320"/>
+            <a:ext cx="5486400" cy="301752"/>
           </a:xfrm>
           <a:prstGeom prst="rect">
             <a:avLst/>
@@ -12818,23 +12818,23 @@
         </p:nvSpPr>
         <p:spPr>
           <a:xfrm>
-            <a:off x="6309360" y="6272784"/>
-            <a:ext cx="914400" cy="228600"/>
-          </a:xfrm>
-          <a:prstGeom prst="rect">
-            <a:avLst/>
-          </a:prstGeom>
-          <a:noFill/>
-        </p:spPr>
-        <p:txBody>
-          <a:bodyPr wrap="square" anchor="t" lIns="0" rIns="0" tIns="0" bIns="0">
-            <a:spAutoFit/>
-          </a:bodyPr>
-          <a:lstStyle/>
-          <a:p>
-            <a:pPr algn="l"/>
-            <a:r>
-              <a:rPr sz="1100" b="1">
+            <a:off x="6309360" y="6044183"/>
+            <a:ext cx="914400" cy="201168"/>
+          </a:xfrm>
+          <a:prstGeom prst="rect">
+            <a:avLst/>
+          </a:prstGeom>
+          <a:noFill/>
+        </p:spPr>
+        <p:txBody>
+          <a:bodyPr wrap="square" anchor="t" lIns="0" rIns="0" tIns="0" bIns="0">
+            <a:spAutoFit/>
+          </a:bodyPr>
+          <a:lstStyle/>
+          <a:p>
+            <a:pPr algn="l"/>
+            <a:r>
+              <a:rPr sz="1050" b="1">
                 <a:solidFill>
                   <a:srgbClr val="2863C5"/>
                 </a:solidFill>
@@ -12853,23 +12853,23 @@
         </p:nvSpPr>
         <p:spPr>
           <a:xfrm>
-            <a:off x="7269480" y="6272784"/>
-            <a:ext cx="1280160" cy="228600"/>
-          </a:xfrm>
-          <a:prstGeom prst="rect">
-            <a:avLst/>
-          </a:prstGeom>
-          <a:noFill/>
-        </p:spPr>
-        <p:txBody>
-          <a:bodyPr wrap="square" anchor="t" lIns="0" rIns="0" tIns="0" bIns="0">
-            <a:spAutoFit/>
-          </a:bodyPr>
-          <a:lstStyle/>
-          <a:p>
-            <a:pPr algn="l"/>
-            <a:r>
-              <a:rPr sz="1000" b="0">
+            <a:off x="7269480" y="6044183"/>
+            <a:ext cx="1280160" cy="201168"/>
+          </a:xfrm>
+          <a:prstGeom prst="rect">
+            <a:avLst/>
+          </a:prstGeom>
+          <a:noFill/>
+        </p:spPr>
+        <p:txBody>
+          <a:bodyPr wrap="square" anchor="t" lIns="0" rIns="0" tIns="0" bIns="0">
+            <a:spAutoFit/>
+          </a:bodyPr>
+          <a:lstStyle/>
+          <a:p>
+            <a:pPr algn="l"/>
+            <a:r>
+              <a:rPr sz="950" b="0">
                 <a:solidFill>
                   <a:srgbClr val="334155"/>
                 </a:solidFill>
@@ -12888,23 +12888,23 @@
         </p:nvSpPr>
         <p:spPr>
           <a:xfrm>
-            <a:off x="8641080" y="6272784"/>
-            <a:ext cx="1371600" cy="228600"/>
-          </a:xfrm>
-          <a:prstGeom prst="rect">
-            <a:avLst/>
-          </a:prstGeom>
-          <a:noFill/>
-        </p:spPr>
-        <p:txBody>
-          <a:bodyPr wrap="square" anchor="t" lIns="0" rIns="0" tIns="0" bIns="0">
-            <a:spAutoFit/>
-          </a:bodyPr>
-          <a:lstStyle/>
-          <a:p>
-            <a:pPr algn="l"/>
-            <a:r>
-              <a:rPr sz="1100" b="0">
+            <a:off x="8641080" y="6044183"/>
+            <a:ext cx="1371600" cy="201168"/>
+          </a:xfrm>
+          <a:prstGeom prst="rect">
+            <a:avLst/>
+          </a:prstGeom>
+          <a:noFill/>
+        </p:spPr>
+        <p:txBody>
+          <a:bodyPr wrap="square" anchor="t" lIns="0" rIns="0" tIns="0" bIns="0">
+            <a:spAutoFit/>
+          </a:bodyPr>
+          <a:lstStyle/>
+          <a:p>
+            <a:pPr algn="l"/>
+            <a:r>
+              <a:rPr sz="1050" b="0">
                 <a:solidFill>
                   <a:srgbClr val="334155"/>
                 </a:solidFill>
@@ -12923,23 +12923,23 @@
         </p:nvSpPr>
         <p:spPr>
           <a:xfrm>
-            <a:off x="10104120" y="6272784"/>
-            <a:ext cx="1371600" cy="228600"/>
-          </a:xfrm>
-          <a:prstGeom prst="rect">
-            <a:avLst/>
-          </a:prstGeom>
-          <a:noFill/>
-        </p:spPr>
-        <p:txBody>
-          <a:bodyPr wrap="square" anchor="t" lIns="0" rIns="0" tIns="0" bIns="0">
-            <a:spAutoFit/>
-          </a:bodyPr>
-          <a:lstStyle/>
-          <a:p>
-            <a:pPr algn="l"/>
-            <a:r>
-              <a:rPr sz="1100" b="1">
+            <a:off x="10104120" y="6044183"/>
+            <a:ext cx="1371600" cy="201168"/>
+          </a:xfrm>
+          <a:prstGeom prst="rect">
+            <a:avLst/>
+          </a:prstGeom>
+          <a:noFill/>
+        </p:spPr>
+        <p:txBody>
+          <a:bodyPr wrap="square" anchor="t" lIns="0" rIns="0" tIns="0" bIns="0">
+            <a:spAutoFit/>
+          </a:bodyPr>
+          <a:lstStyle/>
+          <a:p>
+            <a:pPr algn="l"/>
+            <a:r>
+              <a:rPr sz="1050" b="1">
                 <a:solidFill>
                   <a:srgbClr val="2863C5"/>
                 </a:solidFill>

--- a/myReclaim-Exec-Deck.pptx
+++ b/myReclaim-Exec-Deck.pptx
@@ -10330,8 +10330,8 @@
         </p:nvSpPr>
         <p:spPr>
           <a:xfrm>
-            <a:off x="457200" y="2606040"/>
-            <a:ext cx="2697480" cy="1417320"/>
+            <a:off x="457200" y="2468880"/>
+            <a:ext cx="2697480" cy="1097280"/>
           </a:xfrm>
           <a:prstGeom prst="roundRect">
             <a:avLst>
@@ -10378,8 +10378,8 @@
         </p:nvSpPr>
         <p:spPr>
           <a:xfrm>
-            <a:off x="457200" y="2606040"/>
-            <a:ext cx="2697480" cy="137160"/>
+            <a:off x="457200" y="2468880"/>
+            <a:ext cx="2697480" cy="118872"/>
           </a:xfrm>
           <a:prstGeom prst="rect">
             <a:avLst/>
@@ -10422,23 +10422,23 @@
         </p:nvSpPr>
         <p:spPr>
           <a:xfrm>
-            <a:off x="640080" y="2880360"/>
-            <a:ext cx="2331720" cy="777240"/>
-          </a:xfrm>
-          <a:prstGeom prst="rect">
-            <a:avLst/>
-          </a:prstGeom>
-          <a:noFill/>
-        </p:spPr>
-        <p:txBody>
-          <a:bodyPr wrap="square" anchor="t" lIns="0" rIns="0" tIns="0" bIns="0">
-            <a:spAutoFit/>
-          </a:bodyPr>
-          <a:lstStyle/>
-          <a:p>
-            <a:pPr algn="l"/>
-            <a:r>
-              <a:rPr sz="3600" b="1">
+            <a:off x="640080" y="2670048"/>
+            <a:ext cx="2331720" cy="640080"/>
+          </a:xfrm>
+          <a:prstGeom prst="rect">
+            <a:avLst/>
+          </a:prstGeom>
+          <a:noFill/>
+        </p:spPr>
+        <p:txBody>
+          <a:bodyPr wrap="square" anchor="t" lIns="0" rIns="0" tIns="0" bIns="0">
+            <a:spAutoFit/>
+          </a:bodyPr>
+          <a:lstStyle/>
+          <a:p>
+            <a:pPr algn="l"/>
+            <a:r>
+              <a:rPr sz="3200" b="1">
                 <a:solidFill>
                   <a:srgbClr val="2863C5"/>
                 </a:solidFill>
@@ -10457,8 +10457,8 @@
         </p:nvSpPr>
         <p:spPr>
           <a:xfrm>
-            <a:off x="640080" y="3611880"/>
-            <a:ext cx="2331720" cy="365760"/>
+            <a:off x="640080" y="3246120"/>
+            <a:ext cx="2331720" cy="292608"/>
           </a:xfrm>
           <a:prstGeom prst="rect">
             <a:avLst/>
@@ -10479,7 +10479,7 @@
                 </a:solidFill>
                 <a:latin typeface="Open Sans"/>
               </a:rPr>
-              <a:t>customers with at least one possible match</a:t>
+              <a:t>customers with ≥1 name match</a:t>
             </a:r>
           </a:p>
         </p:txBody>
@@ -10492,8 +10492,8 @@
         </p:nvSpPr>
         <p:spPr>
           <a:xfrm>
-            <a:off x="3291840" y="2606040"/>
-            <a:ext cx="2697480" cy="1417320"/>
+            <a:off x="3291840" y="2468880"/>
+            <a:ext cx="2697480" cy="1097280"/>
           </a:xfrm>
           <a:prstGeom prst="roundRect">
             <a:avLst>
@@ -10540,8 +10540,8 @@
         </p:nvSpPr>
         <p:spPr>
           <a:xfrm>
-            <a:off x="3291840" y="2606040"/>
-            <a:ext cx="2697480" cy="137160"/>
+            <a:off x="3291840" y="2468880"/>
+            <a:ext cx="2697480" cy="118872"/>
           </a:xfrm>
           <a:prstGeom prst="rect">
             <a:avLst/>
@@ -10584,23 +10584,23 @@
         </p:nvSpPr>
         <p:spPr>
           <a:xfrm>
-            <a:off x="3474720" y="2880360"/>
-            <a:ext cx="2331720" cy="777240"/>
-          </a:xfrm>
-          <a:prstGeom prst="rect">
-            <a:avLst/>
-          </a:prstGeom>
-          <a:noFill/>
-        </p:spPr>
-        <p:txBody>
-          <a:bodyPr wrap="square" anchor="t" lIns="0" rIns="0" tIns="0" bIns="0">
-            <a:spAutoFit/>
-          </a:bodyPr>
-          <a:lstStyle/>
-          <a:p>
-            <a:pPr algn="l"/>
-            <a:r>
-              <a:rPr sz="3600" b="1">
+            <a:off x="3474720" y="2670048"/>
+            <a:ext cx="2331720" cy="640080"/>
+          </a:xfrm>
+          <a:prstGeom prst="rect">
+            <a:avLst/>
+          </a:prstGeom>
+          <a:noFill/>
+        </p:spPr>
+        <p:txBody>
+          <a:bodyPr wrap="square" anchor="t" lIns="0" rIns="0" tIns="0" bIns="0">
+            <a:spAutoFit/>
+          </a:bodyPr>
+          <a:lstStyle/>
+          <a:p>
+            <a:pPr algn="l"/>
+            <a:r>
+              <a:rPr sz="3200" b="1">
                 <a:solidFill>
                   <a:srgbClr val="2863C5"/>
                 </a:solidFill>
@@ -10619,8 +10619,8 @@
         </p:nvSpPr>
         <p:spPr>
           <a:xfrm>
-            <a:off x="3474720" y="3611880"/>
-            <a:ext cx="2331720" cy="365760"/>
+            <a:off x="3474720" y="3246120"/>
+            <a:ext cx="2331720" cy="292608"/>
           </a:xfrm>
           <a:prstGeom prst="rect">
             <a:avLst/>
@@ -10641,7 +10641,7 @@
                 </a:solidFill>
                 <a:latin typeface="Open Sans"/>
               </a:rPr>
-              <a:t>of the 30,862 active CA base</a:t>
+              <a:t>upper bound (name-only)</a:t>
             </a:r>
           </a:p>
         </p:txBody>
@@ -10654,8 +10654,8 @@
         </p:nvSpPr>
         <p:spPr>
           <a:xfrm>
-            <a:off x="6126480" y="2606040"/>
-            <a:ext cx="2697480" cy="1417320"/>
+            <a:off x="6126480" y="2468880"/>
+            <a:ext cx="2697480" cy="1097280"/>
           </a:xfrm>
           <a:prstGeom prst="roundRect">
             <a:avLst>
@@ -10702,14 +10702,14 @@
         </p:nvSpPr>
         <p:spPr>
           <a:xfrm>
-            <a:off x="6126480" y="2606040"/>
-            <a:ext cx="2697480" cy="137160"/>
+            <a:off x="6126480" y="2468880"/>
+            <a:ext cx="2697480" cy="118872"/>
           </a:xfrm>
           <a:prstGeom prst="rect">
             <a:avLst/>
           </a:prstGeom>
           <a:solidFill>
-            <a:srgbClr val="FC4C0B"/>
+            <a:srgbClr val="059669"/>
           </a:solidFill>
           <a:ln>
             <a:noFill/>
@@ -10746,29 +10746,29 @@
         </p:nvSpPr>
         <p:spPr>
           <a:xfrm>
-            <a:off x="6309360" y="2880360"/>
-            <a:ext cx="2331720" cy="777240"/>
-          </a:xfrm>
-          <a:prstGeom prst="rect">
-            <a:avLst/>
-          </a:prstGeom>
-          <a:noFill/>
-        </p:spPr>
-        <p:txBody>
-          <a:bodyPr wrap="square" anchor="t" lIns="0" rIns="0" tIns="0" bIns="0">
-            <a:spAutoFit/>
-          </a:bodyPr>
-          <a:lstStyle/>
-          <a:p>
-            <a:pPr algn="l"/>
-            <a:r>
-              <a:rPr sz="3600" b="1">
-                <a:solidFill>
-                  <a:srgbClr val="FC4C0B"/>
-                </a:solidFill>
-                <a:latin typeface="Open Sans"/>
-              </a:rPr>
-              <a:t>4.4M</a:t>
+            <a:off x="6309360" y="2670048"/>
+            <a:ext cx="2331720" cy="640080"/>
+          </a:xfrm>
+          <a:prstGeom prst="rect">
+            <a:avLst/>
+          </a:prstGeom>
+          <a:noFill/>
+        </p:spPr>
+        <p:txBody>
+          <a:bodyPr wrap="square" anchor="t" lIns="0" rIns="0" tIns="0" bIns="0">
+            <a:spAutoFit/>
+          </a:bodyPr>
+          <a:lstStyle/>
+          <a:p>
+            <a:pPr algn="l"/>
+            <a:r>
+              <a:rPr sz="3200" b="1">
+                <a:solidFill>
+                  <a:srgbClr val="059669"/>
+                </a:solidFill>
+                <a:latin typeface="Open Sans"/>
+              </a:rPr>
+              <a:t>9,054</a:t>
             </a:r>
           </a:p>
         </p:txBody>
@@ -10781,8 +10781,8 @@
         </p:nvSpPr>
         <p:spPr>
           <a:xfrm>
-            <a:off x="6309360" y="3611880"/>
-            <a:ext cx="2331720" cy="365760"/>
+            <a:off x="6309360" y="3246120"/>
+            <a:ext cx="2331720" cy="292608"/>
           </a:xfrm>
           <a:prstGeom prst="rect">
             <a:avLst/>
@@ -10803,7 +10803,7 @@
                 </a:solidFill>
                 <a:latin typeface="Open Sans"/>
               </a:rPr>
-              <a:t>matched property records across all tiers</a:t>
+              <a:t>high-confidence (1–5 records)</a:t>
             </a:r>
           </a:p>
         </p:txBody>
@@ -10816,8 +10816,8 @@
         </p:nvSpPr>
         <p:spPr>
           <a:xfrm>
-            <a:off x="8961120" y="2606040"/>
-            <a:ext cx="2697480" cy="1417320"/>
+            <a:off x="8961120" y="2468880"/>
+            <a:ext cx="2697480" cy="1097280"/>
           </a:xfrm>
           <a:prstGeom prst="roundRect">
             <a:avLst>
@@ -10864,8 +10864,8 @@
         </p:nvSpPr>
         <p:spPr>
           <a:xfrm>
-            <a:off x="8961120" y="2606040"/>
-            <a:ext cx="2697480" cy="137160"/>
+            <a:off x="8961120" y="2468880"/>
+            <a:ext cx="2697480" cy="118872"/>
           </a:xfrm>
           <a:prstGeom prst="rect">
             <a:avLst/>
@@ -10908,23 +10908,23 @@
         </p:nvSpPr>
         <p:spPr>
           <a:xfrm>
-            <a:off x="9144000" y="2880360"/>
-            <a:ext cx="2331720" cy="777240"/>
-          </a:xfrm>
-          <a:prstGeom prst="rect">
-            <a:avLst/>
-          </a:prstGeom>
-          <a:noFill/>
-        </p:spPr>
-        <p:txBody>
-          <a:bodyPr wrap="square" anchor="t" lIns="0" rIns="0" tIns="0" bIns="0">
-            <a:spAutoFit/>
-          </a:bodyPr>
-          <a:lstStyle/>
-          <a:p>
-            <a:pPr algn="l"/>
-            <a:r>
-              <a:rPr sz="3600" b="1">
+            <a:off x="9144000" y="2670048"/>
+            <a:ext cx="2331720" cy="640080"/>
+          </a:xfrm>
+          <a:prstGeom prst="rect">
+            <a:avLst/>
+          </a:prstGeom>
+          <a:noFill/>
+        </p:spPr>
+        <p:txBody>
+          <a:bodyPr wrap="square" anchor="t" lIns="0" rIns="0" tIns="0" bIns="0">
+            <a:spAutoFit/>
+          </a:bodyPr>
+          <a:lstStyle/>
+          <a:p>
+            <a:pPr algn="l"/>
+            <a:r>
+              <a:rPr sz="3200" b="1">
                 <a:solidFill>
                   <a:srgbClr val="FC4C0B"/>
                 </a:solidFill>
@@ -10943,8 +10943,8 @@
         </p:nvSpPr>
         <p:spPr>
           <a:xfrm>
-            <a:off x="9144000" y="3611880"/>
-            <a:ext cx="2331720" cy="365760"/>
+            <a:off x="9144000" y="3246120"/>
+            <a:ext cx="2331720" cy="292608"/>
           </a:xfrm>
           <a:prstGeom prst="rect">
             <a:avLst/>
@@ -10965,7 +10965,7 @@
                 </a:solidFill>
                 <a:latin typeface="Open Sans"/>
               </a:rPr>
-              <a:t>estimated value across all matches</a:t>
+              <a:t>max value across all matches</a:t>
             </a:r>
           </a:p>
         </p:txBody>
@@ -10978,8 +10978,8 @@
         </p:nvSpPr>
         <p:spPr>
           <a:xfrm>
-            <a:off x="457200" y="4206240"/>
-            <a:ext cx="5486400" cy="320040"/>
+            <a:off x="457200" y="3703320"/>
+            <a:ext cx="11430000" cy="292608"/>
           </a:xfrm>
           <a:prstGeom prst="rect">
             <a:avLst/>
@@ -11000,43 +11000,56 @@
                 </a:solidFill>
                 <a:latin typeface="Open Sans"/>
               </a:rPr>
-              <a:t>MATCH DISTRIBUTION</a:t>
-            </a:r>
-          </a:p>
-        </p:txBody>
-      </p:sp>
-      <p:sp>
-        <p:nvSpPr>
-          <p:cNvPr id="27" name="TextBox 26"/>
-          <p:cNvSpPr txBox="1"/>
-          <p:nvPr/>
-        </p:nvSpPr>
-        <p:spPr>
-          <a:xfrm>
-            <a:off x="457200" y="4498848"/>
-            <a:ext cx="5486400" cy="274320"/>
-          </a:xfrm>
-          <a:prstGeom prst="rect">
-            <a:avLst/>
-          </a:prstGeom>
-          <a:noFill/>
-        </p:spPr>
-        <p:txBody>
-          <a:bodyPr wrap="square" anchor="t" lIns="0" rIns="0" tIns="0" bIns="0">
-            <a:spAutoFit/>
-          </a:bodyPr>
-          <a:lstStyle/>
-          <a:p>
-            <a:pPr algn="l"/>
-            <a:r>
-              <a:rPr sz="1000" b="0">
-                <a:solidFill>
-                  <a:srgbClr val="64748B"/>
-                </a:solidFill>
-                <a:latin typeface="Open Sans"/>
-              </a:rPr>
-              <a:t>Distinct names cluster in the 1–5 record bucket — high-confidence matches.</a:t>
-            </a:r>
+              <a:t>HOW WE MATCHED · TRANSPARENCY</a:t>
+            </a:r>
+          </a:p>
+        </p:txBody>
+      </p:sp>
+      <p:sp>
+        <p:nvSpPr>
+          <p:cNvPr id="27" name="Rounded Rectangle 26"/>
+          <p:cNvSpPr/>
+          <p:nvPr/>
+        </p:nvSpPr>
+        <p:spPr>
+          <a:xfrm>
+            <a:off x="457200" y="4023360"/>
+            <a:ext cx="2697480" cy="594360"/>
+          </a:xfrm>
+          <a:prstGeom prst="roundRect">
+            <a:avLst>
+              <a:gd name="adj" fmla="val 4000"/>
+            </a:avLst>
+          </a:prstGeom>
+          <a:solidFill>
+            <a:srgbClr val="FFFFFF"/>
+          </a:solidFill>
+          <a:ln w="6350">
+            <a:solidFill>
+              <a:srgbClr val="E2E8F0"/>
+            </a:solidFill>
+          </a:ln>
+          <a:effectLst/>
+        </p:spPr>
+        <p:style>
+          <a:lnRef idx="1">
+            <a:schemeClr val="accent1"/>
+          </a:lnRef>
+          <a:fillRef idx="3">
+            <a:schemeClr val="accent1"/>
+          </a:fillRef>
+          <a:effectRef idx="2">
+            <a:schemeClr val="accent1"/>
+          </a:effectRef>
+          <a:fontRef idx="minor">
+            <a:schemeClr val="lt1"/>
+          </a:fontRef>
+        </p:style>
+        <p:txBody>
+          <a:bodyPr rtlCol="0" anchor="ctr"/>
+          <a:lstStyle/>
+          <a:p>
+            <a:pPr algn="ctr"/>
           </a:p>
         </p:txBody>
       </p:sp>
@@ -11048,8 +11061,678 @@
         </p:nvSpPr>
         <p:spPr>
           <a:xfrm>
-            <a:off x="457200" y="4846320"/>
-            <a:ext cx="5486400" cy="237744"/>
+            <a:off x="457200" y="4023360"/>
+            <a:ext cx="91440" cy="594360"/>
+          </a:xfrm>
+          <a:prstGeom prst="rect">
+            <a:avLst/>
+          </a:prstGeom>
+          <a:solidFill>
+            <a:srgbClr val="2863C5"/>
+          </a:solidFill>
+          <a:ln>
+            <a:noFill/>
+          </a:ln>
+          <a:effectLst/>
+        </p:spPr>
+        <p:style>
+          <a:lnRef idx="1">
+            <a:schemeClr val="accent1"/>
+          </a:lnRef>
+          <a:fillRef idx="3">
+            <a:schemeClr val="accent1"/>
+          </a:fillRef>
+          <a:effectRef idx="2">
+            <a:schemeClr val="accent1"/>
+          </a:effectRef>
+          <a:fontRef idx="minor">
+            <a:schemeClr val="lt1"/>
+          </a:fontRef>
+        </p:style>
+        <p:txBody>
+          <a:bodyPr rtlCol="0" anchor="ctr"/>
+          <a:lstStyle/>
+          <a:p>
+            <a:pPr algn="ctr"/>
+          </a:p>
+        </p:txBody>
+      </p:sp>
+      <p:sp>
+        <p:nvSpPr>
+          <p:cNvPr id="29" name="TextBox 28"/>
+          <p:cNvSpPr txBox="1"/>
+          <p:nvPr/>
+        </p:nvSpPr>
+        <p:spPr>
+          <a:xfrm>
+            <a:off x="640080" y="4069080"/>
+            <a:ext cx="2423160" cy="201168"/>
+          </a:xfrm>
+          <a:prstGeom prst="rect">
+            <a:avLst/>
+          </a:prstGeom>
+          <a:noFill/>
+        </p:spPr>
+        <p:txBody>
+          <a:bodyPr wrap="square" anchor="t" lIns="0" rIns="0" tIns="0" bIns="0">
+            <a:spAutoFit/>
+          </a:bodyPr>
+          <a:lstStyle/>
+          <a:p>
+            <a:pPr algn="l"/>
+            <a:r>
+              <a:rPr sz="1000" b="1">
+                <a:solidFill>
+                  <a:srgbClr val="2863C5"/>
+                </a:solidFill>
+                <a:latin typeface="Open Sans"/>
+              </a:rPr>
+              <a:t>Normalize</a:t>
+            </a:r>
+          </a:p>
+        </p:txBody>
+      </p:sp>
+      <p:sp>
+        <p:nvSpPr>
+          <p:cNvPr id="30" name="TextBox 29"/>
+          <p:cNvSpPr txBox="1"/>
+          <p:nvPr/>
+        </p:nvSpPr>
+        <p:spPr>
+          <a:xfrm>
+            <a:off x="640080" y="4270248"/>
+            <a:ext cx="2423160" cy="329184"/>
+          </a:xfrm>
+          <a:prstGeom prst="rect">
+            <a:avLst/>
+          </a:prstGeom>
+          <a:noFill/>
+        </p:spPr>
+        <p:txBody>
+          <a:bodyPr wrap="square" anchor="t" lIns="0" rIns="0" tIns="0" bIns="0">
+            <a:spAutoFit/>
+          </a:bodyPr>
+          <a:lstStyle/>
+          <a:p>
+            <a:pPr algn="l"/>
+            <a:r>
+              <a:rPr sz="850" b="0">
+                <a:solidFill>
+                  <a:srgbClr val="334155"/>
+                </a:solidFill>
+                <a:latin typeface="Open Sans"/>
+              </a:rPr>
+              <a:t>UPPER(TRIM(name)). Collapse internal whitespace. Both customer and unclaimed-record names go through identical normalization.</a:t>
+            </a:r>
+          </a:p>
+        </p:txBody>
+      </p:sp>
+      <p:sp>
+        <p:nvSpPr>
+          <p:cNvPr id="31" name="Rounded Rectangle 30"/>
+          <p:cNvSpPr/>
+          <p:nvPr/>
+        </p:nvSpPr>
+        <p:spPr>
+          <a:xfrm>
+            <a:off x="3291840" y="4023360"/>
+            <a:ext cx="2697480" cy="594360"/>
+          </a:xfrm>
+          <a:prstGeom prst="roundRect">
+            <a:avLst>
+              <a:gd name="adj" fmla="val 4000"/>
+            </a:avLst>
+          </a:prstGeom>
+          <a:solidFill>
+            <a:srgbClr val="FFFFFF"/>
+          </a:solidFill>
+          <a:ln w="6350">
+            <a:solidFill>
+              <a:srgbClr val="E2E8F0"/>
+            </a:solidFill>
+          </a:ln>
+          <a:effectLst/>
+        </p:spPr>
+        <p:style>
+          <a:lnRef idx="1">
+            <a:schemeClr val="accent1"/>
+          </a:lnRef>
+          <a:fillRef idx="3">
+            <a:schemeClr val="accent1"/>
+          </a:fillRef>
+          <a:effectRef idx="2">
+            <a:schemeClr val="accent1"/>
+          </a:effectRef>
+          <a:fontRef idx="minor">
+            <a:schemeClr val="lt1"/>
+          </a:fontRef>
+        </p:style>
+        <p:txBody>
+          <a:bodyPr rtlCol="0" anchor="ctr"/>
+          <a:lstStyle/>
+          <a:p>
+            <a:pPr algn="ctr"/>
+          </a:p>
+        </p:txBody>
+      </p:sp>
+      <p:sp>
+        <p:nvSpPr>
+          <p:cNvPr id="32" name="Rectangle 31"/>
+          <p:cNvSpPr/>
+          <p:nvPr/>
+        </p:nvSpPr>
+        <p:spPr>
+          <a:xfrm>
+            <a:off x="3291840" y="4023360"/>
+            <a:ext cx="91440" cy="594360"/>
+          </a:xfrm>
+          <a:prstGeom prst="rect">
+            <a:avLst/>
+          </a:prstGeom>
+          <a:solidFill>
+            <a:srgbClr val="2863C5"/>
+          </a:solidFill>
+          <a:ln>
+            <a:noFill/>
+          </a:ln>
+          <a:effectLst/>
+        </p:spPr>
+        <p:style>
+          <a:lnRef idx="1">
+            <a:schemeClr val="accent1"/>
+          </a:lnRef>
+          <a:fillRef idx="3">
+            <a:schemeClr val="accent1"/>
+          </a:fillRef>
+          <a:effectRef idx="2">
+            <a:schemeClr val="accent1"/>
+          </a:effectRef>
+          <a:fontRef idx="minor">
+            <a:schemeClr val="lt1"/>
+          </a:fontRef>
+        </p:style>
+        <p:txBody>
+          <a:bodyPr rtlCol="0" anchor="ctr"/>
+          <a:lstStyle/>
+          <a:p>
+            <a:pPr algn="ctr"/>
+          </a:p>
+        </p:txBody>
+      </p:sp>
+      <p:sp>
+        <p:nvSpPr>
+          <p:cNvPr id="33" name="TextBox 32"/>
+          <p:cNvSpPr txBox="1"/>
+          <p:nvPr/>
+        </p:nvSpPr>
+        <p:spPr>
+          <a:xfrm>
+            <a:off x="3474720" y="4069080"/>
+            <a:ext cx="2423160" cy="201168"/>
+          </a:xfrm>
+          <a:prstGeom prst="rect">
+            <a:avLst/>
+          </a:prstGeom>
+          <a:noFill/>
+        </p:spPr>
+        <p:txBody>
+          <a:bodyPr wrap="square" anchor="t" lIns="0" rIns="0" tIns="0" bIns="0">
+            <a:spAutoFit/>
+          </a:bodyPr>
+          <a:lstStyle/>
+          <a:p>
+            <a:pPr algn="l"/>
+            <a:r>
+              <a:rPr sz="1000" b="1">
+                <a:solidFill>
+                  <a:srgbClr val="2863C5"/>
+                </a:solidFill>
+                <a:latin typeface="Open Sans"/>
+              </a:rPr>
+              <a:t>Build key</a:t>
+            </a:r>
+          </a:p>
+        </p:txBody>
+      </p:sp>
+      <p:sp>
+        <p:nvSpPr>
+          <p:cNvPr id="34" name="TextBox 33"/>
+          <p:cNvSpPr txBox="1"/>
+          <p:nvPr/>
+        </p:nvSpPr>
+        <p:spPr>
+          <a:xfrm>
+            <a:off x="3474720" y="4270248"/>
+            <a:ext cx="2423160" cy="329184"/>
+          </a:xfrm>
+          <a:prstGeom prst="rect">
+            <a:avLst/>
+          </a:prstGeom>
+          <a:noFill/>
+        </p:spPr>
+        <p:txBody>
+          <a:bodyPr wrap="square" anchor="t" lIns="0" rIns="0" tIns="0" bIns="0">
+            <a:spAutoFit/>
+          </a:bodyPr>
+          <a:lstStyle/>
+          <a:p>
+            <a:pPr algn="l"/>
+            <a:r>
+              <a:rPr sz="850" b="0">
+                <a:solidFill>
+                  <a:srgbClr val="334155"/>
+                </a:solidFill>
+                <a:latin typeface="Open Sans"/>
+              </a:rPr>
+              <a:t>Per customer: "FIRST LAST" and "LAST FIRST". Both orderings tried — CA records use both styles.</a:t>
+            </a:r>
+          </a:p>
+        </p:txBody>
+      </p:sp>
+      <p:sp>
+        <p:nvSpPr>
+          <p:cNvPr id="35" name="Rounded Rectangle 34"/>
+          <p:cNvSpPr/>
+          <p:nvPr/>
+        </p:nvSpPr>
+        <p:spPr>
+          <a:xfrm>
+            <a:off x="6126480" y="4023360"/>
+            <a:ext cx="2697480" cy="594360"/>
+          </a:xfrm>
+          <a:prstGeom prst="roundRect">
+            <a:avLst>
+              <a:gd name="adj" fmla="val 4000"/>
+            </a:avLst>
+          </a:prstGeom>
+          <a:solidFill>
+            <a:srgbClr val="FFFFFF"/>
+          </a:solidFill>
+          <a:ln w="6350">
+            <a:solidFill>
+              <a:srgbClr val="E2E8F0"/>
+            </a:solidFill>
+          </a:ln>
+          <a:effectLst/>
+        </p:spPr>
+        <p:style>
+          <a:lnRef idx="1">
+            <a:schemeClr val="accent1"/>
+          </a:lnRef>
+          <a:fillRef idx="3">
+            <a:schemeClr val="accent1"/>
+          </a:fillRef>
+          <a:effectRef idx="2">
+            <a:schemeClr val="accent1"/>
+          </a:effectRef>
+          <a:fontRef idx="minor">
+            <a:schemeClr val="lt1"/>
+          </a:fontRef>
+        </p:style>
+        <p:txBody>
+          <a:bodyPr rtlCol="0" anchor="ctr"/>
+          <a:lstStyle/>
+          <a:p>
+            <a:pPr algn="ctr"/>
+          </a:p>
+        </p:txBody>
+      </p:sp>
+      <p:sp>
+        <p:nvSpPr>
+          <p:cNvPr id="36" name="Rectangle 35"/>
+          <p:cNvSpPr/>
+          <p:nvPr/>
+        </p:nvSpPr>
+        <p:spPr>
+          <a:xfrm>
+            <a:off x="6126480" y="4023360"/>
+            <a:ext cx="91440" cy="594360"/>
+          </a:xfrm>
+          <a:prstGeom prst="rect">
+            <a:avLst/>
+          </a:prstGeom>
+          <a:solidFill>
+            <a:srgbClr val="059669"/>
+          </a:solidFill>
+          <a:ln>
+            <a:noFill/>
+          </a:ln>
+          <a:effectLst/>
+        </p:spPr>
+        <p:style>
+          <a:lnRef idx="1">
+            <a:schemeClr val="accent1"/>
+          </a:lnRef>
+          <a:fillRef idx="3">
+            <a:schemeClr val="accent1"/>
+          </a:fillRef>
+          <a:effectRef idx="2">
+            <a:schemeClr val="accent1"/>
+          </a:effectRef>
+          <a:fontRef idx="minor">
+            <a:schemeClr val="lt1"/>
+          </a:fontRef>
+        </p:style>
+        <p:txBody>
+          <a:bodyPr rtlCol="0" anchor="ctr"/>
+          <a:lstStyle/>
+          <a:p>
+            <a:pPr algn="ctr"/>
+          </a:p>
+        </p:txBody>
+      </p:sp>
+      <p:sp>
+        <p:nvSpPr>
+          <p:cNvPr id="37" name="TextBox 36"/>
+          <p:cNvSpPr txBox="1"/>
+          <p:nvPr/>
+        </p:nvSpPr>
+        <p:spPr>
+          <a:xfrm>
+            <a:off x="6309360" y="4069080"/>
+            <a:ext cx="2423160" cy="201168"/>
+          </a:xfrm>
+          <a:prstGeom prst="rect">
+            <a:avLst/>
+          </a:prstGeom>
+          <a:noFill/>
+        </p:spPr>
+        <p:txBody>
+          <a:bodyPr wrap="square" anchor="t" lIns="0" rIns="0" tIns="0" bIns="0">
+            <a:spAutoFit/>
+          </a:bodyPr>
+          <a:lstStyle/>
+          <a:p>
+            <a:pPr algn="l"/>
+            <a:r>
+              <a:rPr sz="1000" b="1">
+                <a:solidFill>
+                  <a:srgbClr val="059669"/>
+                </a:solidFill>
+                <a:latin typeface="Open Sans"/>
+              </a:rPr>
+              <a:t>Equality join</a:t>
+            </a:r>
+          </a:p>
+        </p:txBody>
+      </p:sp>
+      <p:sp>
+        <p:nvSpPr>
+          <p:cNvPr id="38" name="TextBox 37"/>
+          <p:cNvSpPr txBox="1"/>
+          <p:nvPr/>
+        </p:nvSpPr>
+        <p:spPr>
+          <a:xfrm>
+            <a:off x="6309360" y="4270248"/>
+            <a:ext cx="2423160" cy="329184"/>
+          </a:xfrm>
+          <a:prstGeom prst="rect">
+            <a:avLst/>
+          </a:prstGeom>
+          <a:noFill/>
+        </p:spPr>
+        <p:txBody>
+          <a:bodyPr wrap="square" anchor="t" lIns="0" rIns="0" tIns="0" bIns="0">
+            <a:spAutoFit/>
+          </a:bodyPr>
+          <a:lstStyle/>
+          <a:p>
+            <a:pPr algn="l"/>
+            <a:r>
+              <a:rPr sz="850" b="0">
+                <a:solidFill>
+                  <a:srgbClr val="334155"/>
+                </a:solidFill>
+                <a:latin typeface="Open Sans"/>
+              </a:rPr>
+              <a:t>owner_name_normalized = key. Uses ix_owner_normalized — 0.7s for 30,862 × 92.4M rows.</a:t>
+            </a:r>
+          </a:p>
+        </p:txBody>
+      </p:sp>
+      <p:sp>
+        <p:nvSpPr>
+          <p:cNvPr id="39" name="Rounded Rectangle 38"/>
+          <p:cNvSpPr/>
+          <p:nvPr/>
+        </p:nvSpPr>
+        <p:spPr>
+          <a:xfrm>
+            <a:off x="8961120" y="4023360"/>
+            <a:ext cx="2697480" cy="594360"/>
+          </a:xfrm>
+          <a:prstGeom prst="roundRect">
+            <a:avLst>
+              <a:gd name="adj" fmla="val 4000"/>
+            </a:avLst>
+          </a:prstGeom>
+          <a:solidFill>
+            <a:srgbClr val="FFFFFF"/>
+          </a:solidFill>
+          <a:ln w="6350">
+            <a:solidFill>
+              <a:srgbClr val="E2E8F0"/>
+            </a:solidFill>
+          </a:ln>
+          <a:effectLst/>
+        </p:spPr>
+        <p:style>
+          <a:lnRef idx="1">
+            <a:schemeClr val="accent1"/>
+          </a:lnRef>
+          <a:fillRef idx="3">
+            <a:schemeClr val="accent1"/>
+          </a:fillRef>
+          <a:effectRef idx="2">
+            <a:schemeClr val="accent1"/>
+          </a:effectRef>
+          <a:fontRef idx="minor">
+            <a:schemeClr val="lt1"/>
+          </a:fontRef>
+        </p:style>
+        <p:txBody>
+          <a:bodyPr rtlCol="0" anchor="ctr"/>
+          <a:lstStyle/>
+          <a:p>
+            <a:pPr algn="ctr"/>
+          </a:p>
+        </p:txBody>
+      </p:sp>
+      <p:sp>
+        <p:nvSpPr>
+          <p:cNvPr id="40" name="Rectangle 39"/>
+          <p:cNvSpPr/>
+          <p:nvPr/>
+        </p:nvSpPr>
+        <p:spPr>
+          <a:xfrm>
+            <a:off x="8961120" y="4023360"/>
+            <a:ext cx="91440" cy="594360"/>
+          </a:xfrm>
+          <a:prstGeom prst="rect">
+            <a:avLst/>
+          </a:prstGeom>
+          <a:solidFill>
+            <a:srgbClr val="FC4C0B"/>
+          </a:solidFill>
+          <a:ln>
+            <a:noFill/>
+          </a:ln>
+          <a:effectLst/>
+        </p:spPr>
+        <p:style>
+          <a:lnRef idx="1">
+            <a:schemeClr val="accent1"/>
+          </a:lnRef>
+          <a:fillRef idx="3">
+            <a:schemeClr val="accent1"/>
+          </a:fillRef>
+          <a:effectRef idx="2">
+            <a:schemeClr val="accent1"/>
+          </a:effectRef>
+          <a:fontRef idx="minor">
+            <a:schemeClr val="lt1"/>
+          </a:fontRef>
+        </p:style>
+        <p:txBody>
+          <a:bodyPr rtlCol="0" anchor="ctr"/>
+          <a:lstStyle/>
+          <a:p>
+            <a:pPr algn="ctr"/>
+          </a:p>
+        </p:txBody>
+      </p:sp>
+      <p:sp>
+        <p:nvSpPr>
+          <p:cNvPr id="41" name="TextBox 40"/>
+          <p:cNvSpPr txBox="1"/>
+          <p:nvPr/>
+        </p:nvSpPr>
+        <p:spPr>
+          <a:xfrm>
+            <a:off x="9144000" y="4069080"/>
+            <a:ext cx="2423160" cy="201168"/>
+          </a:xfrm>
+          <a:prstGeom prst="rect">
+            <a:avLst/>
+          </a:prstGeom>
+          <a:noFill/>
+        </p:spPr>
+        <p:txBody>
+          <a:bodyPr wrap="square" anchor="t" lIns="0" rIns="0" tIns="0" bIns="0">
+            <a:spAutoFit/>
+          </a:bodyPr>
+          <a:lstStyle/>
+          <a:p>
+            <a:pPr algn="l"/>
+            <a:r>
+              <a:rPr sz="1000" b="1">
+                <a:solidFill>
+                  <a:srgbClr val="FC4C0B"/>
+                </a:solidFill>
+                <a:latin typeface="Open Sans"/>
+              </a:rPr>
+              <a:t>Production adds</a:t>
+            </a:r>
+          </a:p>
+        </p:txBody>
+      </p:sp>
+      <p:sp>
+        <p:nvSpPr>
+          <p:cNvPr id="42" name="TextBox 41"/>
+          <p:cNvSpPr txBox="1"/>
+          <p:nvPr/>
+        </p:nvSpPr>
+        <p:spPr>
+          <a:xfrm>
+            <a:off x="9144000" y="4270248"/>
+            <a:ext cx="2423160" cy="329184"/>
+          </a:xfrm>
+          <a:prstGeom prst="rect">
+            <a:avLst/>
+          </a:prstGeom>
+          <a:noFill/>
+        </p:spPr>
+        <p:txBody>
+          <a:bodyPr wrap="square" anchor="t" lIns="0" rIns="0" tIns="0" bIns="0">
+            <a:spAutoFit/>
+          </a:bodyPr>
+          <a:lstStyle/>
+          <a:p>
+            <a:pPr algn="l"/>
+            <a:r>
+              <a:rPr sz="850" b="0">
+                <a:solidFill>
+                  <a:srgbClr val="334155"/>
+                </a:solidFill>
+                <a:latin typeface="Open Sans"/>
+              </a:rPr>
+              <a:t>Phonetic (Soundex/Metaphone) · middle-name · last-4 SSN · DOB. Cuts false positives ~5×.</a:t>
+            </a:r>
+          </a:p>
+        </p:txBody>
+      </p:sp>
+      <p:sp>
+        <p:nvSpPr>
+          <p:cNvPr id="43" name="TextBox 42"/>
+          <p:cNvSpPr txBox="1"/>
+          <p:nvPr/>
+        </p:nvSpPr>
+        <p:spPr>
+          <a:xfrm>
+            <a:off x="457200" y="4754880"/>
+            <a:ext cx="5486400" cy="292608"/>
+          </a:xfrm>
+          <a:prstGeom prst="rect">
+            <a:avLst/>
+          </a:prstGeom>
+          <a:noFill/>
+        </p:spPr>
+        <p:txBody>
+          <a:bodyPr wrap="square" anchor="t" lIns="0" rIns="0" tIns="0" bIns="0">
+            <a:spAutoFit/>
+          </a:bodyPr>
+          <a:lstStyle/>
+          <a:p>
+            <a:pPr algn="l"/>
+            <a:r>
+              <a:rPr sz="1100" b="1">
+                <a:solidFill>
+                  <a:srgbClr val="2863C5"/>
+                </a:solidFill>
+                <a:latin typeface="Open Sans"/>
+              </a:rPr>
+              <a:t>MATCH DISTRIBUTION</a:t>
+            </a:r>
+          </a:p>
+        </p:txBody>
+      </p:sp>
+      <p:sp>
+        <p:nvSpPr>
+          <p:cNvPr id="44" name="TextBox 43"/>
+          <p:cNvSpPr txBox="1"/>
+          <p:nvPr/>
+        </p:nvSpPr>
+        <p:spPr>
+          <a:xfrm>
+            <a:off x="457200" y="5029200"/>
+            <a:ext cx="5486400" cy="256032"/>
+          </a:xfrm>
+          <a:prstGeom prst="rect">
+            <a:avLst/>
+          </a:prstGeom>
+          <a:noFill/>
+        </p:spPr>
+        <p:txBody>
+          <a:bodyPr wrap="square" anchor="t" lIns="0" rIns="0" tIns="0" bIns="0">
+            <a:spAutoFit/>
+          </a:bodyPr>
+          <a:lstStyle/>
+          <a:p>
+            <a:pPr algn="l"/>
+            <a:r>
+              <a:rPr sz="1000" b="0">
+                <a:solidFill>
+                  <a:srgbClr val="64748B"/>
+                </a:solidFill>
+                <a:latin typeface="Open Sans"/>
+              </a:rPr>
+              <a:t>Distinct names cluster in the 1–5 record bucket — high-confidence matches.</a:t>
+            </a:r>
+          </a:p>
+        </p:txBody>
+      </p:sp>
+      <p:sp>
+        <p:nvSpPr>
+          <p:cNvPr id="45" name="Rectangle 44"/>
+          <p:cNvSpPr/>
+          <p:nvPr/>
+        </p:nvSpPr>
+        <p:spPr>
+          <a:xfrm>
+            <a:off x="457200" y="5349240"/>
+            <a:ext cx="5486400" cy="219456"/>
           </a:xfrm>
           <a:prstGeom prst="rect">
             <a:avLst/>
@@ -11086,14 +11769,14 @@
       </p:sp>
       <p:sp>
         <p:nvSpPr>
-          <p:cNvPr id="29" name="TextBox 28"/>
-          <p:cNvSpPr txBox="1"/>
-          <p:nvPr/>
-        </p:nvSpPr>
-        <p:spPr>
-          <a:xfrm>
-            <a:off x="548640" y="4882896"/>
-            <a:ext cx="1554480" cy="182880"/>
+          <p:cNvPr id="46" name="TextBox 45"/>
+          <p:cNvSpPr txBox="1"/>
+          <p:nvPr/>
+        </p:nvSpPr>
+        <p:spPr>
+          <a:xfrm>
+            <a:off x="548640" y="5385816"/>
+            <a:ext cx="1554480" cy="164592"/>
           </a:xfrm>
           <a:prstGeom prst="rect">
             <a:avLst/>
@@ -11121,14 +11804,14 @@
       </p:sp>
       <p:sp>
         <p:nvSpPr>
-          <p:cNvPr id="30" name="TextBox 29"/>
-          <p:cNvSpPr txBox="1"/>
-          <p:nvPr/>
-        </p:nvSpPr>
-        <p:spPr>
-          <a:xfrm>
-            <a:off x="2194560" y="4882896"/>
-            <a:ext cx="914400" cy="182880"/>
+          <p:cNvPr id="47" name="TextBox 46"/>
+          <p:cNvSpPr txBox="1"/>
+          <p:nvPr/>
+        </p:nvSpPr>
+        <p:spPr>
+          <a:xfrm>
+            <a:off x="2194560" y="5385816"/>
+            <a:ext cx="914400" cy="164592"/>
           </a:xfrm>
           <a:prstGeom prst="rect">
             <a:avLst/>
@@ -11156,14 +11839,14 @@
       </p:sp>
       <p:sp>
         <p:nvSpPr>
-          <p:cNvPr id="31" name="TextBox 30"/>
-          <p:cNvSpPr txBox="1"/>
-          <p:nvPr/>
-        </p:nvSpPr>
-        <p:spPr>
-          <a:xfrm>
-            <a:off x="3246120" y="4882896"/>
-            <a:ext cx="914400" cy="182880"/>
+          <p:cNvPr id="48" name="TextBox 47"/>
+          <p:cNvSpPr txBox="1"/>
+          <p:nvPr/>
+        </p:nvSpPr>
+        <p:spPr>
+          <a:xfrm>
+            <a:off x="3246120" y="5385816"/>
+            <a:ext cx="914400" cy="164592"/>
           </a:xfrm>
           <a:prstGeom prst="rect">
             <a:avLst/>
@@ -11191,14 +11874,14 @@
       </p:sp>
       <p:sp>
         <p:nvSpPr>
-          <p:cNvPr id="32" name="TextBox 31"/>
-          <p:cNvSpPr txBox="1"/>
-          <p:nvPr/>
-        </p:nvSpPr>
-        <p:spPr>
-          <a:xfrm>
-            <a:off x="4297680" y="4882896"/>
-            <a:ext cx="1554480" cy="182880"/>
+          <p:cNvPr id="49" name="TextBox 48"/>
+          <p:cNvSpPr txBox="1"/>
+          <p:nvPr/>
+        </p:nvSpPr>
+        <p:spPr>
+          <a:xfrm>
+            <a:off x="4297680" y="5385816"/>
+            <a:ext cx="1554480" cy="164592"/>
           </a:xfrm>
           <a:prstGeom prst="rect">
             <a:avLst/>
@@ -11226,14 +11909,14 @@
       </p:sp>
       <p:sp>
         <p:nvSpPr>
-          <p:cNvPr id="33" name="Rectangle 32"/>
+          <p:cNvPr id="50" name="Rectangle 49"/>
           <p:cNvSpPr/>
           <p:nvPr/>
         </p:nvSpPr>
         <p:spPr>
           <a:xfrm>
-            <a:off x="457200" y="5084064"/>
-            <a:ext cx="5486400" cy="301752"/>
+            <a:off x="457200" y="5568696"/>
+            <a:ext cx="5486400" cy="246888"/>
           </a:xfrm>
           <a:prstGeom prst="rect">
             <a:avLst/>
@@ -11270,29 +11953,29 @@
       </p:sp>
       <p:sp>
         <p:nvSpPr>
-          <p:cNvPr id="34" name="TextBox 33"/>
-          <p:cNvSpPr txBox="1"/>
-          <p:nvPr/>
-        </p:nvSpPr>
-        <p:spPr>
-          <a:xfrm>
-            <a:off x="548640" y="5138927"/>
-            <a:ext cx="1554480" cy="201168"/>
-          </a:xfrm>
-          <a:prstGeom prst="rect">
-            <a:avLst/>
-          </a:prstGeom>
-          <a:noFill/>
-        </p:spPr>
-        <p:txBody>
-          <a:bodyPr wrap="square" anchor="t" lIns="0" rIns="0" tIns="0" bIns="0">
-            <a:spAutoFit/>
-          </a:bodyPr>
-          <a:lstStyle/>
-          <a:p>
-            <a:pPr algn="l"/>
-            <a:r>
-              <a:rPr sz="1050" b="1">
+          <p:cNvPr id="51" name="TextBox 50"/>
+          <p:cNvSpPr txBox="1"/>
+          <p:nvPr/>
+        </p:nvSpPr>
+        <p:spPr>
+          <a:xfrm>
+            <a:off x="548640" y="5605272"/>
+            <a:ext cx="1554480" cy="182880"/>
+          </a:xfrm>
+          <a:prstGeom prst="rect">
+            <a:avLst/>
+          </a:prstGeom>
+          <a:noFill/>
+        </p:spPr>
+        <p:txBody>
+          <a:bodyPr wrap="square" anchor="t" lIns="0" rIns="0" tIns="0" bIns="0">
+            <a:spAutoFit/>
+          </a:bodyPr>
+          <a:lstStyle/>
+          <a:p>
+            <a:pPr algn="l"/>
+            <a:r>
+              <a:rPr sz="1000" b="1">
                 <a:solidFill>
                   <a:srgbClr val="0F172A"/>
                 </a:solidFill>
@@ -11305,29 +11988,29 @@
       </p:sp>
       <p:sp>
         <p:nvSpPr>
-          <p:cNvPr id="35" name="TextBox 34"/>
-          <p:cNvSpPr txBox="1"/>
-          <p:nvPr/>
-        </p:nvSpPr>
-        <p:spPr>
-          <a:xfrm>
-            <a:off x="2194560" y="5138927"/>
-            <a:ext cx="914400" cy="201168"/>
-          </a:xfrm>
-          <a:prstGeom prst="rect">
-            <a:avLst/>
-          </a:prstGeom>
-          <a:noFill/>
-        </p:spPr>
-        <p:txBody>
-          <a:bodyPr wrap="square" anchor="t" lIns="0" rIns="0" tIns="0" bIns="0">
-            <a:spAutoFit/>
-          </a:bodyPr>
-          <a:lstStyle/>
-          <a:p>
-            <a:pPr algn="l"/>
-            <a:r>
-              <a:rPr sz="1050" b="0">
+          <p:cNvPr id="52" name="TextBox 51"/>
+          <p:cNvSpPr txBox="1"/>
+          <p:nvPr/>
+        </p:nvSpPr>
+        <p:spPr>
+          <a:xfrm>
+            <a:off x="2194560" y="5605272"/>
+            <a:ext cx="914400" cy="182880"/>
+          </a:xfrm>
+          <a:prstGeom prst="rect">
+            <a:avLst/>
+          </a:prstGeom>
+          <a:noFill/>
+        </p:spPr>
+        <p:txBody>
+          <a:bodyPr wrap="square" anchor="t" lIns="0" rIns="0" tIns="0" bIns="0">
+            <a:spAutoFit/>
+          </a:bodyPr>
+          <a:lstStyle/>
+          <a:p>
+            <a:pPr algn="l"/>
+            <a:r>
+              <a:rPr sz="1000" b="0">
                 <a:solidFill>
                   <a:srgbClr val="334155"/>
                 </a:solidFill>
@@ -11340,29 +12023,29 @@
       </p:sp>
       <p:sp>
         <p:nvSpPr>
-          <p:cNvPr id="36" name="TextBox 35"/>
-          <p:cNvSpPr txBox="1"/>
-          <p:nvPr/>
-        </p:nvSpPr>
-        <p:spPr>
-          <a:xfrm>
-            <a:off x="3246120" y="5138927"/>
-            <a:ext cx="914400" cy="201168"/>
-          </a:xfrm>
-          <a:prstGeom prst="rect">
-            <a:avLst/>
-          </a:prstGeom>
-          <a:noFill/>
-        </p:spPr>
-        <p:txBody>
-          <a:bodyPr wrap="square" anchor="t" lIns="0" rIns="0" tIns="0" bIns="0">
-            <a:spAutoFit/>
-          </a:bodyPr>
-          <a:lstStyle/>
-          <a:p>
-            <a:pPr algn="l"/>
-            <a:r>
-              <a:rPr sz="1050" b="1">
+          <p:cNvPr id="53" name="TextBox 52"/>
+          <p:cNvSpPr txBox="1"/>
+          <p:nvPr/>
+        </p:nvSpPr>
+        <p:spPr>
+          <a:xfrm>
+            <a:off x="3246120" y="5605272"/>
+            <a:ext cx="914400" cy="182880"/>
+          </a:xfrm>
+          <a:prstGeom prst="rect">
+            <a:avLst/>
+          </a:prstGeom>
+          <a:noFill/>
+        </p:spPr>
+        <p:txBody>
+          <a:bodyPr wrap="square" anchor="t" lIns="0" rIns="0" tIns="0" bIns="0">
+            <a:spAutoFit/>
+          </a:bodyPr>
+          <a:lstStyle/>
+          <a:p>
+            <a:pPr algn="l"/>
+            <a:r>
+              <a:rPr sz="1000" b="1">
                 <a:solidFill>
                   <a:srgbClr val="059669"/>
                 </a:solidFill>
@@ -11375,29 +12058,29 @@
       </p:sp>
       <p:sp>
         <p:nvSpPr>
-          <p:cNvPr id="37" name="TextBox 36"/>
-          <p:cNvSpPr txBox="1"/>
-          <p:nvPr/>
-        </p:nvSpPr>
-        <p:spPr>
-          <a:xfrm>
-            <a:off x="4297680" y="5138927"/>
-            <a:ext cx="1554480" cy="201168"/>
-          </a:xfrm>
-          <a:prstGeom prst="rect">
-            <a:avLst/>
-          </a:prstGeom>
-          <a:noFill/>
-        </p:spPr>
-        <p:txBody>
-          <a:bodyPr wrap="square" anchor="t" lIns="0" rIns="0" tIns="0" bIns="0">
-            <a:spAutoFit/>
-          </a:bodyPr>
-          <a:lstStyle/>
-          <a:p>
-            <a:pPr algn="l"/>
-            <a:r>
-              <a:rPr sz="950" b="0">
+          <p:cNvPr id="54" name="TextBox 53"/>
+          <p:cNvSpPr txBox="1"/>
+          <p:nvPr/>
+        </p:nvSpPr>
+        <p:spPr>
+          <a:xfrm>
+            <a:off x="4297680" y="5605272"/>
+            <a:ext cx="1554480" cy="182880"/>
+          </a:xfrm>
+          <a:prstGeom prst="rect">
+            <a:avLst/>
+          </a:prstGeom>
+          <a:noFill/>
+        </p:spPr>
+        <p:txBody>
+          <a:bodyPr wrap="square" anchor="t" lIns="0" rIns="0" tIns="0" bIns="0">
+            <a:spAutoFit/>
+          </a:bodyPr>
+          <a:lstStyle/>
+          <a:p>
+            <a:pPr algn="l"/>
+            <a:r>
+              <a:rPr sz="900" b="0">
                 <a:solidFill>
                   <a:srgbClr val="64748B"/>
                 </a:solidFill>
@@ -11410,14 +12093,14 @@
       </p:sp>
       <p:sp>
         <p:nvSpPr>
-          <p:cNvPr id="38" name="Rectangle 37"/>
+          <p:cNvPr id="55" name="Rectangle 54"/>
           <p:cNvSpPr/>
           <p:nvPr/>
         </p:nvSpPr>
         <p:spPr>
           <a:xfrm>
-            <a:off x="457200" y="5385816"/>
-            <a:ext cx="5486400" cy="301752"/>
+            <a:off x="457200" y="5815583"/>
+            <a:ext cx="5486400" cy="246888"/>
           </a:xfrm>
           <a:prstGeom prst="rect">
             <a:avLst/>
@@ -11454,29 +12137,29 @@
       </p:sp>
       <p:sp>
         <p:nvSpPr>
-          <p:cNvPr id="39" name="TextBox 38"/>
-          <p:cNvSpPr txBox="1"/>
-          <p:nvPr/>
-        </p:nvSpPr>
-        <p:spPr>
-          <a:xfrm>
-            <a:off x="548640" y="5440679"/>
-            <a:ext cx="1554480" cy="201168"/>
-          </a:xfrm>
-          <a:prstGeom prst="rect">
-            <a:avLst/>
-          </a:prstGeom>
-          <a:noFill/>
-        </p:spPr>
-        <p:txBody>
-          <a:bodyPr wrap="square" anchor="t" lIns="0" rIns="0" tIns="0" bIns="0">
-            <a:spAutoFit/>
-          </a:bodyPr>
-          <a:lstStyle/>
-          <a:p>
-            <a:pPr algn="l"/>
-            <a:r>
-              <a:rPr sz="1050" b="1">
+          <p:cNvPr id="56" name="TextBox 55"/>
+          <p:cNvSpPr txBox="1"/>
+          <p:nvPr/>
+        </p:nvSpPr>
+        <p:spPr>
+          <a:xfrm>
+            <a:off x="548640" y="5852159"/>
+            <a:ext cx="1554480" cy="182880"/>
+          </a:xfrm>
+          <a:prstGeom prst="rect">
+            <a:avLst/>
+          </a:prstGeom>
+          <a:noFill/>
+        </p:spPr>
+        <p:txBody>
+          <a:bodyPr wrap="square" anchor="t" lIns="0" rIns="0" tIns="0" bIns="0">
+            <a:spAutoFit/>
+          </a:bodyPr>
+          <a:lstStyle/>
+          <a:p>
+            <a:pPr algn="l"/>
+            <a:r>
+              <a:rPr sz="1000" b="1">
                 <a:solidFill>
                   <a:srgbClr val="0F172A"/>
                 </a:solidFill>
@@ -11489,29 +12172,29 @@
       </p:sp>
       <p:sp>
         <p:nvSpPr>
-          <p:cNvPr id="40" name="TextBox 39"/>
-          <p:cNvSpPr txBox="1"/>
-          <p:nvPr/>
-        </p:nvSpPr>
-        <p:spPr>
-          <a:xfrm>
-            <a:off x="2194560" y="5440679"/>
-            <a:ext cx="914400" cy="201168"/>
-          </a:xfrm>
-          <a:prstGeom prst="rect">
-            <a:avLst/>
-          </a:prstGeom>
-          <a:noFill/>
-        </p:spPr>
-        <p:txBody>
-          <a:bodyPr wrap="square" anchor="t" lIns="0" rIns="0" tIns="0" bIns="0">
-            <a:spAutoFit/>
-          </a:bodyPr>
-          <a:lstStyle/>
-          <a:p>
-            <a:pPr algn="l"/>
-            <a:r>
-              <a:rPr sz="1050" b="0">
+          <p:cNvPr id="57" name="TextBox 56"/>
+          <p:cNvSpPr txBox="1"/>
+          <p:nvPr/>
+        </p:nvSpPr>
+        <p:spPr>
+          <a:xfrm>
+            <a:off x="2194560" y="5852159"/>
+            <a:ext cx="914400" cy="182880"/>
+          </a:xfrm>
+          <a:prstGeom prst="rect">
+            <a:avLst/>
+          </a:prstGeom>
+          <a:noFill/>
+        </p:spPr>
+        <p:txBody>
+          <a:bodyPr wrap="square" anchor="t" lIns="0" rIns="0" tIns="0" bIns="0">
+            <a:spAutoFit/>
+          </a:bodyPr>
+          <a:lstStyle/>
+          <a:p>
+            <a:pPr algn="l"/>
+            <a:r>
+              <a:rPr sz="1000" b="0">
                 <a:solidFill>
                   <a:srgbClr val="334155"/>
                 </a:solidFill>
@@ -11524,29 +12207,29 @@
       </p:sp>
       <p:sp>
         <p:nvSpPr>
-          <p:cNvPr id="41" name="TextBox 40"/>
-          <p:cNvSpPr txBox="1"/>
-          <p:nvPr/>
-        </p:nvSpPr>
-        <p:spPr>
-          <a:xfrm>
-            <a:off x="3246120" y="5440679"/>
-            <a:ext cx="914400" cy="201168"/>
-          </a:xfrm>
-          <a:prstGeom prst="rect">
-            <a:avLst/>
-          </a:prstGeom>
-          <a:noFill/>
-        </p:spPr>
-        <p:txBody>
-          <a:bodyPr wrap="square" anchor="t" lIns="0" rIns="0" tIns="0" bIns="0">
-            <a:spAutoFit/>
-          </a:bodyPr>
-          <a:lstStyle/>
-          <a:p>
-            <a:pPr algn="l"/>
-            <a:r>
-              <a:rPr sz="1050" b="1">
+          <p:cNvPr id="58" name="TextBox 57"/>
+          <p:cNvSpPr txBox="1"/>
+          <p:nvPr/>
+        </p:nvSpPr>
+        <p:spPr>
+          <a:xfrm>
+            <a:off x="3246120" y="5852159"/>
+            <a:ext cx="914400" cy="182880"/>
+          </a:xfrm>
+          <a:prstGeom prst="rect">
+            <a:avLst/>
+          </a:prstGeom>
+          <a:noFill/>
+        </p:spPr>
+        <p:txBody>
+          <a:bodyPr wrap="square" anchor="t" lIns="0" rIns="0" tIns="0" bIns="0">
+            <a:spAutoFit/>
+          </a:bodyPr>
+          <a:lstStyle/>
+          <a:p>
+            <a:pPr algn="l"/>
+            <a:r>
+              <a:rPr sz="1000" b="1">
                 <a:solidFill>
                   <a:srgbClr val="059669"/>
                 </a:solidFill>
@@ -11559,29 +12242,29 @@
       </p:sp>
       <p:sp>
         <p:nvSpPr>
-          <p:cNvPr id="42" name="TextBox 41"/>
-          <p:cNvSpPr txBox="1"/>
-          <p:nvPr/>
-        </p:nvSpPr>
-        <p:spPr>
-          <a:xfrm>
-            <a:off x="4297680" y="5440679"/>
-            <a:ext cx="1554480" cy="201168"/>
-          </a:xfrm>
-          <a:prstGeom prst="rect">
-            <a:avLst/>
-          </a:prstGeom>
-          <a:noFill/>
-        </p:spPr>
-        <p:txBody>
-          <a:bodyPr wrap="square" anchor="t" lIns="0" rIns="0" tIns="0" bIns="0">
-            <a:spAutoFit/>
-          </a:bodyPr>
-          <a:lstStyle/>
-          <a:p>
-            <a:pPr algn="l"/>
-            <a:r>
-              <a:rPr sz="950" b="0">
+          <p:cNvPr id="59" name="TextBox 58"/>
+          <p:cNvSpPr txBox="1"/>
+          <p:nvPr/>
+        </p:nvSpPr>
+        <p:spPr>
+          <a:xfrm>
+            <a:off x="4297680" y="5852159"/>
+            <a:ext cx="1554480" cy="182880"/>
+          </a:xfrm>
+          <a:prstGeom prst="rect">
+            <a:avLst/>
+          </a:prstGeom>
+          <a:noFill/>
+        </p:spPr>
+        <p:txBody>
+          <a:bodyPr wrap="square" anchor="t" lIns="0" rIns="0" tIns="0" bIns="0">
+            <a:spAutoFit/>
+          </a:bodyPr>
+          <a:lstStyle/>
+          <a:p>
+            <a:pPr algn="l"/>
+            <a:r>
+              <a:rPr sz="900" b="0">
                 <a:solidFill>
                   <a:srgbClr val="64748B"/>
                 </a:solidFill>
@@ -11594,14 +12277,14 @@
       </p:sp>
       <p:sp>
         <p:nvSpPr>
-          <p:cNvPr id="43" name="Rectangle 42"/>
+          <p:cNvPr id="60" name="Rectangle 59"/>
           <p:cNvSpPr/>
           <p:nvPr/>
         </p:nvSpPr>
         <p:spPr>
           <a:xfrm>
-            <a:off x="457200" y="5687568"/>
-            <a:ext cx="5486400" cy="301752"/>
+            <a:off x="457200" y="6062471"/>
+            <a:ext cx="5486400" cy="246888"/>
           </a:xfrm>
           <a:prstGeom prst="rect">
             <a:avLst/>
@@ -11638,29 +12321,29 @@
       </p:sp>
       <p:sp>
         <p:nvSpPr>
-          <p:cNvPr id="44" name="TextBox 43"/>
-          <p:cNvSpPr txBox="1"/>
-          <p:nvPr/>
-        </p:nvSpPr>
-        <p:spPr>
-          <a:xfrm>
-            <a:off x="548640" y="5742431"/>
-            <a:ext cx="1554480" cy="201168"/>
-          </a:xfrm>
-          <a:prstGeom prst="rect">
-            <a:avLst/>
-          </a:prstGeom>
-          <a:noFill/>
-        </p:spPr>
-        <p:txBody>
-          <a:bodyPr wrap="square" anchor="t" lIns="0" rIns="0" tIns="0" bIns="0">
-            <a:spAutoFit/>
-          </a:bodyPr>
-          <a:lstStyle/>
-          <a:p>
-            <a:pPr algn="l"/>
-            <a:r>
-              <a:rPr sz="1050" b="1">
+          <p:cNvPr id="61" name="TextBox 60"/>
+          <p:cNvSpPr txBox="1"/>
+          <p:nvPr/>
+        </p:nvSpPr>
+        <p:spPr>
+          <a:xfrm>
+            <a:off x="548640" y="6099047"/>
+            <a:ext cx="1554480" cy="182880"/>
+          </a:xfrm>
+          <a:prstGeom prst="rect">
+            <a:avLst/>
+          </a:prstGeom>
+          <a:noFill/>
+        </p:spPr>
+        <p:txBody>
+          <a:bodyPr wrap="square" anchor="t" lIns="0" rIns="0" tIns="0" bIns="0">
+            <a:spAutoFit/>
+          </a:bodyPr>
+          <a:lstStyle/>
+          <a:p>
+            <a:pPr algn="l"/>
+            <a:r>
+              <a:rPr sz="1000" b="1">
                 <a:solidFill>
                   <a:srgbClr val="0F172A"/>
                 </a:solidFill>
@@ -11673,29 +12356,29 @@
       </p:sp>
       <p:sp>
         <p:nvSpPr>
-          <p:cNvPr id="45" name="TextBox 44"/>
-          <p:cNvSpPr txBox="1"/>
-          <p:nvPr/>
-        </p:nvSpPr>
-        <p:spPr>
-          <a:xfrm>
-            <a:off x="2194560" y="5742431"/>
-            <a:ext cx="914400" cy="201168"/>
-          </a:xfrm>
-          <a:prstGeom prst="rect">
-            <a:avLst/>
-          </a:prstGeom>
-          <a:noFill/>
-        </p:spPr>
-        <p:txBody>
-          <a:bodyPr wrap="square" anchor="t" lIns="0" rIns="0" tIns="0" bIns="0">
-            <a:spAutoFit/>
-          </a:bodyPr>
-          <a:lstStyle/>
-          <a:p>
-            <a:pPr algn="l"/>
-            <a:r>
-              <a:rPr sz="1050" b="0">
+          <p:cNvPr id="62" name="TextBox 61"/>
+          <p:cNvSpPr txBox="1"/>
+          <p:nvPr/>
+        </p:nvSpPr>
+        <p:spPr>
+          <a:xfrm>
+            <a:off x="2194560" y="6099047"/>
+            <a:ext cx="914400" cy="182880"/>
+          </a:xfrm>
+          <a:prstGeom prst="rect">
+            <a:avLst/>
+          </a:prstGeom>
+          <a:noFill/>
+        </p:spPr>
+        <p:txBody>
+          <a:bodyPr wrap="square" anchor="t" lIns="0" rIns="0" tIns="0" bIns="0">
+            <a:spAutoFit/>
+          </a:bodyPr>
+          <a:lstStyle/>
+          <a:p>
+            <a:pPr algn="l"/>
+            <a:r>
+              <a:rPr sz="1000" b="0">
                 <a:solidFill>
                   <a:srgbClr val="334155"/>
                 </a:solidFill>
@@ -11708,29 +12391,29 @@
       </p:sp>
       <p:sp>
         <p:nvSpPr>
-          <p:cNvPr id="46" name="TextBox 45"/>
-          <p:cNvSpPr txBox="1"/>
-          <p:nvPr/>
-        </p:nvSpPr>
-        <p:spPr>
-          <a:xfrm>
-            <a:off x="3246120" y="5742431"/>
-            <a:ext cx="914400" cy="201168"/>
-          </a:xfrm>
-          <a:prstGeom prst="rect">
-            <a:avLst/>
-          </a:prstGeom>
-          <a:noFill/>
-        </p:spPr>
-        <p:txBody>
-          <a:bodyPr wrap="square" anchor="t" lIns="0" rIns="0" tIns="0" bIns="0">
-            <a:spAutoFit/>
-          </a:bodyPr>
-          <a:lstStyle/>
-          <a:p>
-            <a:pPr algn="l"/>
-            <a:r>
-              <a:rPr sz="1050" b="1">
+          <p:cNvPr id="63" name="TextBox 62"/>
+          <p:cNvSpPr txBox="1"/>
+          <p:nvPr/>
+        </p:nvSpPr>
+        <p:spPr>
+          <a:xfrm>
+            <a:off x="3246120" y="6099047"/>
+            <a:ext cx="914400" cy="182880"/>
+          </a:xfrm>
+          <a:prstGeom prst="rect">
+            <a:avLst/>
+          </a:prstGeom>
+          <a:noFill/>
+        </p:spPr>
+        <p:txBody>
+          <a:bodyPr wrap="square" anchor="t" lIns="0" rIns="0" tIns="0" bIns="0">
+            <a:spAutoFit/>
+          </a:bodyPr>
+          <a:lstStyle/>
+          <a:p>
+            <a:pPr algn="l"/>
+            <a:r>
+              <a:rPr sz="1000" b="1">
                 <a:solidFill>
                   <a:srgbClr val="FFB352"/>
                 </a:solidFill>
@@ -11743,29 +12426,29 @@
       </p:sp>
       <p:sp>
         <p:nvSpPr>
-          <p:cNvPr id="47" name="TextBox 46"/>
-          <p:cNvSpPr txBox="1"/>
-          <p:nvPr/>
-        </p:nvSpPr>
-        <p:spPr>
-          <a:xfrm>
-            <a:off x="4297680" y="5742431"/>
-            <a:ext cx="1554480" cy="201168"/>
-          </a:xfrm>
-          <a:prstGeom prst="rect">
-            <a:avLst/>
-          </a:prstGeom>
-          <a:noFill/>
-        </p:spPr>
-        <p:txBody>
-          <a:bodyPr wrap="square" anchor="t" lIns="0" rIns="0" tIns="0" bIns="0">
-            <a:spAutoFit/>
-          </a:bodyPr>
-          <a:lstStyle/>
-          <a:p>
-            <a:pPr algn="l"/>
-            <a:r>
-              <a:rPr sz="950" b="0">
+          <p:cNvPr id="64" name="TextBox 63"/>
+          <p:cNvSpPr txBox="1"/>
+          <p:nvPr/>
+        </p:nvSpPr>
+        <p:spPr>
+          <a:xfrm>
+            <a:off x="4297680" y="6099047"/>
+            <a:ext cx="1554480" cy="182880"/>
+          </a:xfrm>
+          <a:prstGeom prst="rect">
+            <a:avLst/>
+          </a:prstGeom>
+          <a:noFill/>
+        </p:spPr>
+        <p:txBody>
+          <a:bodyPr wrap="square" anchor="t" lIns="0" rIns="0" tIns="0" bIns="0">
+            <a:spAutoFit/>
+          </a:bodyPr>
+          <a:lstStyle/>
+          <a:p>
+            <a:pPr algn="l"/>
+            <a:r>
+              <a:rPr sz="900" b="0">
                 <a:solidFill>
                   <a:srgbClr val="64748B"/>
                 </a:solidFill>
@@ -11778,14 +12461,14 @@
       </p:sp>
       <p:sp>
         <p:nvSpPr>
-          <p:cNvPr id="48" name="Rectangle 47"/>
+          <p:cNvPr id="65" name="Rectangle 64"/>
           <p:cNvSpPr/>
           <p:nvPr/>
         </p:nvSpPr>
         <p:spPr>
           <a:xfrm>
-            <a:off x="457200" y="5989320"/>
-            <a:ext cx="5486400" cy="301752"/>
+            <a:off x="457200" y="6309359"/>
+            <a:ext cx="5486400" cy="246888"/>
           </a:xfrm>
           <a:prstGeom prst="rect">
             <a:avLst/>
@@ -11822,29 +12505,29 @@
       </p:sp>
       <p:sp>
         <p:nvSpPr>
-          <p:cNvPr id="49" name="TextBox 48"/>
-          <p:cNvSpPr txBox="1"/>
-          <p:nvPr/>
-        </p:nvSpPr>
-        <p:spPr>
-          <a:xfrm>
-            <a:off x="548640" y="6044183"/>
-            <a:ext cx="1554480" cy="201168"/>
-          </a:xfrm>
-          <a:prstGeom prst="rect">
-            <a:avLst/>
-          </a:prstGeom>
-          <a:noFill/>
-        </p:spPr>
-        <p:txBody>
-          <a:bodyPr wrap="square" anchor="t" lIns="0" rIns="0" tIns="0" bIns="0">
-            <a:spAutoFit/>
-          </a:bodyPr>
-          <a:lstStyle/>
-          <a:p>
-            <a:pPr algn="l"/>
-            <a:r>
-              <a:rPr sz="1050" b="1">
+          <p:cNvPr id="66" name="TextBox 65"/>
+          <p:cNvSpPr txBox="1"/>
+          <p:nvPr/>
+        </p:nvSpPr>
+        <p:spPr>
+          <a:xfrm>
+            <a:off x="548640" y="6345935"/>
+            <a:ext cx="1554480" cy="182880"/>
+          </a:xfrm>
+          <a:prstGeom prst="rect">
+            <a:avLst/>
+          </a:prstGeom>
+          <a:noFill/>
+        </p:spPr>
+        <p:txBody>
+          <a:bodyPr wrap="square" anchor="t" lIns="0" rIns="0" tIns="0" bIns="0">
+            <a:spAutoFit/>
+          </a:bodyPr>
+          <a:lstStyle/>
+          <a:p>
+            <a:pPr algn="l"/>
+            <a:r>
+              <a:rPr sz="1000" b="1">
                 <a:solidFill>
                   <a:srgbClr val="0F172A"/>
                 </a:solidFill>
@@ -11857,29 +12540,29 @@
       </p:sp>
       <p:sp>
         <p:nvSpPr>
-          <p:cNvPr id="50" name="TextBox 49"/>
-          <p:cNvSpPr txBox="1"/>
-          <p:nvPr/>
-        </p:nvSpPr>
-        <p:spPr>
-          <a:xfrm>
-            <a:off x="2194560" y="6044183"/>
-            <a:ext cx="914400" cy="201168"/>
-          </a:xfrm>
-          <a:prstGeom prst="rect">
-            <a:avLst/>
-          </a:prstGeom>
-          <a:noFill/>
-        </p:spPr>
-        <p:txBody>
-          <a:bodyPr wrap="square" anchor="t" lIns="0" rIns="0" tIns="0" bIns="0">
-            <a:spAutoFit/>
-          </a:bodyPr>
-          <a:lstStyle/>
-          <a:p>
-            <a:pPr algn="l"/>
-            <a:r>
-              <a:rPr sz="1050" b="0">
+          <p:cNvPr id="67" name="TextBox 66"/>
+          <p:cNvSpPr txBox="1"/>
+          <p:nvPr/>
+        </p:nvSpPr>
+        <p:spPr>
+          <a:xfrm>
+            <a:off x="2194560" y="6345935"/>
+            <a:ext cx="914400" cy="182880"/>
+          </a:xfrm>
+          <a:prstGeom prst="rect">
+            <a:avLst/>
+          </a:prstGeom>
+          <a:noFill/>
+        </p:spPr>
+        <p:txBody>
+          <a:bodyPr wrap="square" anchor="t" lIns="0" rIns="0" tIns="0" bIns="0">
+            <a:spAutoFit/>
+          </a:bodyPr>
+          <a:lstStyle/>
+          <a:p>
+            <a:pPr algn="l"/>
+            <a:r>
+              <a:rPr sz="1000" b="0">
                 <a:solidFill>
                   <a:srgbClr val="334155"/>
                 </a:solidFill>
@@ -11892,29 +12575,29 @@
       </p:sp>
       <p:sp>
         <p:nvSpPr>
-          <p:cNvPr id="51" name="TextBox 50"/>
-          <p:cNvSpPr txBox="1"/>
-          <p:nvPr/>
-        </p:nvSpPr>
-        <p:spPr>
-          <a:xfrm>
-            <a:off x="3246120" y="6044183"/>
-            <a:ext cx="914400" cy="201168"/>
-          </a:xfrm>
-          <a:prstGeom prst="rect">
-            <a:avLst/>
-          </a:prstGeom>
-          <a:noFill/>
-        </p:spPr>
-        <p:txBody>
-          <a:bodyPr wrap="square" anchor="t" lIns="0" rIns="0" tIns="0" bIns="0">
-            <a:spAutoFit/>
-          </a:bodyPr>
-          <a:lstStyle/>
-          <a:p>
-            <a:pPr algn="l"/>
-            <a:r>
-              <a:rPr sz="1050" b="1">
+          <p:cNvPr id="68" name="TextBox 67"/>
+          <p:cNvSpPr txBox="1"/>
+          <p:nvPr/>
+        </p:nvSpPr>
+        <p:spPr>
+          <a:xfrm>
+            <a:off x="3246120" y="6345935"/>
+            <a:ext cx="914400" cy="182880"/>
+          </a:xfrm>
+          <a:prstGeom prst="rect">
+            <a:avLst/>
+          </a:prstGeom>
+          <a:noFill/>
+        </p:spPr>
+        <p:txBody>
+          <a:bodyPr wrap="square" anchor="t" lIns="0" rIns="0" tIns="0" bIns="0">
+            <a:spAutoFit/>
+          </a:bodyPr>
+          <a:lstStyle/>
+          <a:p>
+            <a:pPr algn="l"/>
+            <a:r>
+              <a:rPr sz="1000" b="1">
                 <a:solidFill>
                   <a:srgbClr val="64748B"/>
                 </a:solidFill>
@@ -11927,29 +12610,29 @@
       </p:sp>
       <p:sp>
         <p:nvSpPr>
-          <p:cNvPr id="52" name="TextBox 51"/>
-          <p:cNvSpPr txBox="1"/>
-          <p:nvPr/>
-        </p:nvSpPr>
-        <p:spPr>
-          <a:xfrm>
-            <a:off x="4297680" y="6044183"/>
-            <a:ext cx="1554480" cy="201168"/>
-          </a:xfrm>
-          <a:prstGeom prst="rect">
-            <a:avLst/>
-          </a:prstGeom>
-          <a:noFill/>
-        </p:spPr>
-        <p:txBody>
-          <a:bodyPr wrap="square" anchor="t" lIns="0" rIns="0" tIns="0" bIns="0">
-            <a:spAutoFit/>
-          </a:bodyPr>
-          <a:lstStyle/>
-          <a:p>
-            <a:pPr algn="l"/>
-            <a:r>
-              <a:rPr sz="950" b="0">
+          <p:cNvPr id="69" name="TextBox 68"/>
+          <p:cNvSpPr txBox="1"/>
+          <p:nvPr/>
+        </p:nvSpPr>
+        <p:spPr>
+          <a:xfrm>
+            <a:off x="4297680" y="6345935"/>
+            <a:ext cx="1554480" cy="182880"/>
+          </a:xfrm>
+          <a:prstGeom prst="rect">
+            <a:avLst/>
+          </a:prstGeom>
+          <a:noFill/>
+        </p:spPr>
+        <p:txBody>
+          <a:bodyPr wrap="square" anchor="t" lIns="0" rIns="0" tIns="0" bIns="0">
+            <a:spAutoFit/>
+          </a:bodyPr>
+          <a:lstStyle/>
+          <a:p>
+            <a:pPr algn="l"/>
+            <a:r>
+              <a:rPr sz="900" b="0">
                 <a:solidFill>
                   <a:srgbClr val="64748B"/>
                 </a:solidFill>
@@ -11962,14 +12645,14 @@
       </p:sp>
       <p:sp>
         <p:nvSpPr>
-          <p:cNvPr id="53" name="TextBox 52"/>
-          <p:cNvSpPr txBox="1"/>
-          <p:nvPr/>
-        </p:nvSpPr>
-        <p:spPr>
-          <a:xfrm>
-            <a:off x="6217920" y="4206240"/>
-            <a:ext cx="5486400" cy="320040"/>
+          <p:cNvPr id="70" name="TextBox 69"/>
+          <p:cNvSpPr txBox="1"/>
+          <p:nvPr/>
+        </p:nvSpPr>
+        <p:spPr>
+          <a:xfrm>
+            <a:off x="6217920" y="4754880"/>
+            <a:ext cx="5486400" cy="292608"/>
           </a:xfrm>
           <a:prstGeom prst="rect">
             <a:avLst/>
@@ -11997,14 +12680,14 @@
       </p:sp>
       <p:sp>
         <p:nvSpPr>
-          <p:cNvPr id="54" name="TextBox 53"/>
-          <p:cNvSpPr txBox="1"/>
-          <p:nvPr/>
-        </p:nvSpPr>
-        <p:spPr>
-          <a:xfrm>
-            <a:off x="6217920" y="4498848"/>
-            <a:ext cx="5486400" cy="274320"/>
+          <p:cNvPr id="71" name="TextBox 70"/>
+          <p:cNvSpPr txBox="1"/>
+          <p:nvPr/>
+        </p:nvSpPr>
+        <p:spPr>
+          <a:xfrm>
+            <a:off x="6217920" y="5029200"/>
+            <a:ext cx="5486400" cy="256032"/>
           </a:xfrm>
           <a:prstGeom prst="rect">
             <a:avLst/>
@@ -12025,21 +12708,21 @@
                 </a:solidFill>
                 <a:latin typeface="Open Sans"/>
               </a:rPr>
-              <a:t>Tier 04 ($500+) = highest dollar value per record.</a:t>
-            </a:r>
-          </a:p>
-        </p:txBody>
-      </p:sp>
-      <p:sp>
-        <p:nvSpPr>
-          <p:cNvPr id="55" name="Rectangle 54"/>
+              <a:t>Tier 04 ($500+) carries 53% of the value despite 2% of records.</a:t>
+            </a:r>
+          </a:p>
+        </p:txBody>
+      </p:sp>
+      <p:sp>
+        <p:nvSpPr>
+          <p:cNvPr id="72" name="Rectangle 71"/>
           <p:cNvSpPr/>
           <p:nvPr/>
         </p:nvSpPr>
         <p:spPr>
           <a:xfrm>
-            <a:off x="6217920" y="4846320"/>
-            <a:ext cx="5486400" cy="237744"/>
+            <a:off x="6217920" y="5349240"/>
+            <a:ext cx="5486400" cy="219456"/>
           </a:xfrm>
           <a:prstGeom prst="rect">
             <a:avLst/>
@@ -12076,14 +12759,14 @@
       </p:sp>
       <p:sp>
         <p:nvSpPr>
-          <p:cNvPr id="56" name="TextBox 55"/>
-          <p:cNvSpPr txBox="1"/>
-          <p:nvPr/>
-        </p:nvSpPr>
-        <p:spPr>
-          <a:xfrm>
-            <a:off x="6309360" y="4882896"/>
-            <a:ext cx="914400" cy="182880"/>
+          <p:cNvPr id="73" name="TextBox 72"/>
+          <p:cNvSpPr txBox="1"/>
+          <p:nvPr/>
+        </p:nvSpPr>
+        <p:spPr>
+          <a:xfrm>
+            <a:off x="6309360" y="5385816"/>
+            <a:ext cx="914400" cy="164592"/>
           </a:xfrm>
           <a:prstGeom prst="rect">
             <a:avLst/>
@@ -12111,14 +12794,14 @@
       </p:sp>
       <p:sp>
         <p:nvSpPr>
-          <p:cNvPr id="57" name="TextBox 56"/>
-          <p:cNvSpPr txBox="1"/>
-          <p:nvPr/>
-        </p:nvSpPr>
-        <p:spPr>
-          <a:xfrm>
-            <a:off x="7269480" y="4882896"/>
-            <a:ext cx="1280160" cy="182880"/>
+          <p:cNvPr id="74" name="TextBox 73"/>
+          <p:cNvSpPr txBox="1"/>
+          <p:nvPr/>
+        </p:nvSpPr>
+        <p:spPr>
+          <a:xfrm>
+            <a:off x="7269480" y="5385816"/>
+            <a:ext cx="1280160" cy="164592"/>
           </a:xfrm>
           <a:prstGeom prst="rect">
             <a:avLst/>
@@ -12146,14 +12829,14 @@
       </p:sp>
       <p:sp>
         <p:nvSpPr>
-          <p:cNvPr id="58" name="TextBox 57"/>
-          <p:cNvSpPr txBox="1"/>
-          <p:nvPr/>
-        </p:nvSpPr>
-        <p:spPr>
-          <a:xfrm>
-            <a:off x="8641080" y="4882896"/>
-            <a:ext cx="1371600" cy="182880"/>
+          <p:cNvPr id="75" name="TextBox 74"/>
+          <p:cNvSpPr txBox="1"/>
+          <p:nvPr/>
+        </p:nvSpPr>
+        <p:spPr>
+          <a:xfrm>
+            <a:off x="8641080" y="5385816"/>
+            <a:ext cx="1371600" cy="164592"/>
           </a:xfrm>
           <a:prstGeom prst="rect">
             <a:avLst/>
@@ -12181,14 +12864,14 @@
       </p:sp>
       <p:sp>
         <p:nvSpPr>
-          <p:cNvPr id="59" name="TextBox 58"/>
-          <p:cNvSpPr txBox="1"/>
-          <p:nvPr/>
-        </p:nvSpPr>
-        <p:spPr>
-          <a:xfrm>
-            <a:off x="10104120" y="4882896"/>
-            <a:ext cx="1371600" cy="182880"/>
+          <p:cNvPr id="76" name="TextBox 75"/>
+          <p:cNvSpPr txBox="1"/>
+          <p:nvPr/>
+        </p:nvSpPr>
+        <p:spPr>
+          <a:xfrm>
+            <a:off x="10104120" y="5385816"/>
+            <a:ext cx="1371600" cy="164592"/>
           </a:xfrm>
           <a:prstGeom prst="rect">
             <a:avLst/>
@@ -12216,14 +12899,14 @@
       </p:sp>
       <p:sp>
         <p:nvSpPr>
-          <p:cNvPr id="60" name="Rectangle 59"/>
+          <p:cNvPr id="77" name="Rectangle 76"/>
           <p:cNvSpPr/>
           <p:nvPr/>
         </p:nvSpPr>
         <p:spPr>
           <a:xfrm>
-            <a:off x="6217920" y="5084064"/>
-            <a:ext cx="5486400" cy="301752"/>
+            <a:off x="6217920" y="5568696"/>
+            <a:ext cx="5486400" cy="246888"/>
           </a:xfrm>
           <a:prstGeom prst="rect">
             <a:avLst/>
@@ -12260,29 +12943,29 @@
       </p:sp>
       <p:sp>
         <p:nvSpPr>
-          <p:cNvPr id="61" name="TextBox 60"/>
-          <p:cNvSpPr txBox="1"/>
-          <p:nvPr/>
-        </p:nvSpPr>
-        <p:spPr>
-          <a:xfrm>
-            <a:off x="6309360" y="5138927"/>
-            <a:ext cx="914400" cy="201168"/>
-          </a:xfrm>
-          <a:prstGeom prst="rect">
-            <a:avLst/>
-          </a:prstGeom>
-          <a:noFill/>
-        </p:spPr>
-        <p:txBody>
-          <a:bodyPr wrap="square" anchor="t" lIns="0" rIns="0" tIns="0" bIns="0">
-            <a:spAutoFit/>
-          </a:bodyPr>
-          <a:lstStyle/>
-          <a:p>
-            <a:pPr algn="l"/>
-            <a:r>
-              <a:rPr sz="1050" b="1">
+          <p:cNvPr id="78" name="TextBox 77"/>
+          <p:cNvSpPr txBox="1"/>
+          <p:nvPr/>
+        </p:nvSpPr>
+        <p:spPr>
+          <a:xfrm>
+            <a:off x="6309360" y="5605272"/>
+            <a:ext cx="914400" cy="182880"/>
+          </a:xfrm>
+          <a:prstGeom prst="rect">
+            <a:avLst/>
+          </a:prstGeom>
+          <a:noFill/>
+        </p:spPr>
+        <p:txBody>
+          <a:bodyPr wrap="square" anchor="t" lIns="0" rIns="0" tIns="0" bIns="0">
+            <a:spAutoFit/>
+          </a:bodyPr>
+          <a:lstStyle/>
+          <a:p>
+            <a:pPr algn="l"/>
+            <a:r>
+              <a:rPr sz="1000" b="1">
                 <a:solidFill>
                   <a:srgbClr val="64748B"/>
                 </a:solidFill>
@@ -12295,29 +12978,29 @@
       </p:sp>
       <p:sp>
         <p:nvSpPr>
-          <p:cNvPr id="62" name="TextBox 61"/>
-          <p:cNvSpPr txBox="1"/>
-          <p:nvPr/>
-        </p:nvSpPr>
-        <p:spPr>
-          <a:xfrm>
-            <a:off x="7269480" y="5138927"/>
-            <a:ext cx="1280160" cy="201168"/>
-          </a:xfrm>
-          <a:prstGeom prst="rect">
-            <a:avLst/>
-          </a:prstGeom>
-          <a:noFill/>
-        </p:spPr>
-        <p:txBody>
-          <a:bodyPr wrap="square" anchor="t" lIns="0" rIns="0" tIns="0" bIns="0">
-            <a:spAutoFit/>
-          </a:bodyPr>
-          <a:lstStyle/>
-          <a:p>
-            <a:pPr algn="l"/>
-            <a:r>
-              <a:rPr sz="950" b="0">
+          <p:cNvPr id="79" name="TextBox 78"/>
+          <p:cNvSpPr txBox="1"/>
+          <p:nvPr/>
+        </p:nvSpPr>
+        <p:spPr>
+          <a:xfrm>
+            <a:off x="7269480" y="5605272"/>
+            <a:ext cx="1280160" cy="182880"/>
+          </a:xfrm>
+          <a:prstGeom prst="rect">
+            <a:avLst/>
+          </a:prstGeom>
+          <a:noFill/>
+        </p:spPr>
+        <p:txBody>
+          <a:bodyPr wrap="square" anchor="t" lIns="0" rIns="0" tIns="0" bIns="0">
+            <a:spAutoFit/>
+          </a:bodyPr>
+          <a:lstStyle/>
+          <a:p>
+            <a:pPr algn="l"/>
+            <a:r>
+              <a:rPr sz="900" b="0">
                 <a:solidFill>
                   <a:srgbClr val="334155"/>
                 </a:solidFill>
@@ -12330,29 +13013,29 @@
       </p:sp>
       <p:sp>
         <p:nvSpPr>
-          <p:cNvPr id="63" name="TextBox 62"/>
-          <p:cNvSpPr txBox="1"/>
-          <p:nvPr/>
-        </p:nvSpPr>
-        <p:spPr>
-          <a:xfrm>
-            <a:off x="8641080" y="5138927"/>
-            <a:ext cx="1371600" cy="201168"/>
-          </a:xfrm>
-          <a:prstGeom prst="rect">
-            <a:avLst/>
-          </a:prstGeom>
-          <a:noFill/>
-        </p:spPr>
-        <p:txBody>
-          <a:bodyPr wrap="square" anchor="t" lIns="0" rIns="0" tIns="0" bIns="0">
-            <a:spAutoFit/>
-          </a:bodyPr>
-          <a:lstStyle/>
-          <a:p>
-            <a:pPr algn="l"/>
-            <a:r>
-              <a:rPr sz="1050" b="0">
+          <p:cNvPr id="80" name="TextBox 79"/>
+          <p:cNvSpPr txBox="1"/>
+          <p:nvPr/>
+        </p:nvSpPr>
+        <p:spPr>
+          <a:xfrm>
+            <a:off x="8641080" y="5605272"/>
+            <a:ext cx="1371600" cy="182880"/>
+          </a:xfrm>
+          <a:prstGeom prst="rect">
+            <a:avLst/>
+          </a:prstGeom>
+          <a:noFill/>
+        </p:spPr>
+        <p:txBody>
+          <a:bodyPr wrap="square" anchor="t" lIns="0" rIns="0" tIns="0" bIns="0">
+            <a:spAutoFit/>
+          </a:bodyPr>
+          <a:lstStyle/>
+          <a:p>
+            <a:pPr algn="l"/>
+            <a:r>
+              <a:rPr sz="1000" b="0">
                 <a:solidFill>
                   <a:srgbClr val="334155"/>
                 </a:solidFill>
@@ -12365,29 +13048,29 @@
       </p:sp>
       <p:sp>
         <p:nvSpPr>
-          <p:cNvPr id="64" name="TextBox 63"/>
-          <p:cNvSpPr txBox="1"/>
-          <p:nvPr/>
-        </p:nvSpPr>
-        <p:spPr>
-          <a:xfrm>
-            <a:off x="10104120" y="5138927"/>
-            <a:ext cx="1371600" cy="201168"/>
-          </a:xfrm>
-          <a:prstGeom prst="rect">
-            <a:avLst/>
-          </a:prstGeom>
-          <a:noFill/>
-        </p:spPr>
-        <p:txBody>
-          <a:bodyPr wrap="square" anchor="t" lIns="0" rIns="0" tIns="0" bIns="0">
-            <a:spAutoFit/>
-          </a:bodyPr>
-          <a:lstStyle/>
-          <a:p>
-            <a:pPr algn="l"/>
-            <a:r>
-              <a:rPr sz="1050" b="1">
+          <p:cNvPr id="81" name="TextBox 80"/>
+          <p:cNvSpPr txBox="1"/>
+          <p:nvPr/>
+        </p:nvSpPr>
+        <p:spPr>
+          <a:xfrm>
+            <a:off x="10104120" y="5605272"/>
+            <a:ext cx="1371600" cy="182880"/>
+          </a:xfrm>
+          <a:prstGeom prst="rect">
+            <a:avLst/>
+          </a:prstGeom>
+          <a:noFill/>
+        </p:spPr>
+        <p:txBody>
+          <a:bodyPr wrap="square" anchor="t" lIns="0" rIns="0" tIns="0" bIns="0">
+            <a:spAutoFit/>
+          </a:bodyPr>
+          <a:lstStyle/>
+          <a:p>
+            <a:pPr algn="l"/>
+            <a:r>
+              <a:rPr sz="1000" b="1">
                 <a:solidFill>
                   <a:srgbClr val="64748B"/>
                 </a:solidFill>
@@ -12400,14 +13083,14 @@
       </p:sp>
       <p:sp>
         <p:nvSpPr>
-          <p:cNvPr id="65" name="Rectangle 64"/>
+          <p:cNvPr id="82" name="Rectangle 81"/>
           <p:cNvSpPr/>
           <p:nvPr/>
         </p:nvSpPr>
         <p:spPr>
           <a:xfrm>
-            <a:off x="6217920" y="5385816"/>
-            <a:ext cx="5486400" cy="301752"/>
+            <a:off x="6217920" y="5815583"/>
+            <a:ext cx="5486400" cy="246888"/>
           </a:xfrm>
           <a:prstGeom prst="rect">
             <a:avLst/>
@@ -12444,29 +13127,29 @@
       </p:sp>
       <p:sp>
         <p:nvSpPr>
-          <p:cNvPr id="66" name="TextBox 65"/>
-          <p:cNvSpPr txBox="1"/>
-          <p:nvPr/>
-        </p:nvSpPr>
-        <p:spPr>
-          <a:xfrm>
-            <a:off x="6309360" y="5440679"/>
-            <a:ext cx="914400" cy="201168"/>
-          </a:xfrm>
-          <a:prstGeom prst="rect">
-            <a:avLst/>
-          </a:prstGeom>
-          <a:noFill/>
-        </p:spPr>
-        <p:txBody>
-          <a:bodyPr wrap="square" anchor="t" lIns="0" rIns="0" tIns="0" bIns="0">
-            <a:spAutoFit/>
-          </a:bodyPr>
-          <a:lstStyle/>
-          <a:p>
-            <a:pPr algn="l"/>
-            <a:r>
-              <a:rPr sz="1050" b="1">
+          <p:cNvPr id="83" name="TextBox 82"/>
+          <p:cNvSpPr txBox="1"/>
+          <p:nvPr/>
+        </p:nvSpPr>
+        <p:spPr>
+          <a:xfrm>
+            <a:off x="6309360" y="5852159"/>
+            <a:ext cx="914400" cy="182880"/>
+          </a:xfrm>
+          <a:prstGeom prst="rect">
+            <a:avLst/>
+          </a:prstGeom>
+          <a:noFill/>
+        </p:spPr>
+        <p:txBody>
+          <a:bodyPr wrap="square" anchor="t" lIns="0" rIns="0" tIns="0" bIns="0">
+            <a:spAutoFit/>
+          </a:bodyPr>
+          <a:lstStyle/>
+          <a:p>
+            <a:pPr algn="l"/>
+            <a:r>
+              <a:rPr sz="1000" b="1">
                 <a:solidFill>
                   <a:srgbClr val="FFB352"/>
                 </a:solidFill>
@@ -12479,29 +13162,29 @@
       </p:sp>
       <p:sp>
         <p:nvSpPr>
-          <p:cNvPr id="67" name="TextBox 66"/>
-          <p:cNvSpPr txBox="1"/>
-          <p:nvPr/>
-        </p:nvSpPr>
-        <p:spPr>
-          <a:xfrm>
-            <a:off x="7269480" y="5440679"/>
-            <a:ext cx="1280160" cy="201168"/>
-          </a:xfrm>
-          <a:prstGeom prst="rect">
-            <a:avLst/>
-          </a:prstGeom>
-          <a:noFill/>
-        </p:spPr>
-        <p:txBody>
-          <a:bodyPr wrap="square" anchor="t" lIns="0" rIns="0" tIns="0" bIns="0">
-            <a:spAutoFit/>
-          </a:bodyPr>
-          <a:lstStyle/>
-          <a:p>
-            <a:pPr algn="l"/>
-            <a:r>
-              <a:rPr sz="950" b="0">
+          <p:cNvPr id="84" name="TextBox 83"/>
+          <p:cNvSpPr txBox="1"/>
+          <p:nvPr/>
+        </p:nvSpPr>
+        <p:spPr>
+          <a:xfrm>
+            <a:off x="7269480" y="5852159"/>
+            <a:ext cx="1280160" cy="182880"/>
+          </a:xfrm>
+          <a:prstGeom prst="rect">
+            <a:avLst/>
+          </a:prstGeom>
+          <a:noFill/>
+        </p:spPr>
+        <p:txBody>
+          <a:bodyPr wrap="square" anchor="t" lIns="0" rIns="0" tIns="0" bIns="0">
+            <a:spAutoFit/>
+          </a:bodyPr>
+          <a:lstStyle/>
+          <a:p>
+            <a:pPr algn="l"/>
+            <a:r>
+              <a:rPr sz="900" b="0">
                 <a:solidFill>
                   <a:srgbClr val="334155"/>
                 </a:solidFill>
@@ -12514,29 +13197,29 @@
       </p:sp>
       <p:sp>
         <p:nvSpPr>
-          <p:cNvPr id="68" name="TextBox 67"/>
-          <p:cNvSpPr txBox="1"/>
-          <p:nvPr/>
-        </p:nvSpPr>
-        <p:spPr>
-          <a:xfrm>
-            <a:off x="8641080" y="5440679"/>
-            <a:ext cx="1371600" cy="201168"/>
-          </a:xfrm>
-          <a:prstGeom prst="rect">
-            <a:avLst/>
-          </a:prstGeom>
-          <a:noFill/>
-        </p:spPr>
-        <p:txBody>
-          <a:bodyPr wrap="square" anchor="t" lIns="0" rIns="0" tIns="0" bIns="0">
-            <a:spAutoFit/>
-          </a:bodyPr>
-          <a:lstStyle/>
-          <a:p>
-            <a:pPr algn="l"/>
-            <a:r>
-              <a:rPr sz="1050" b="0">
+          <p:cNvPr id="85" name="TextBox 84"/>
+          <p:cNvSpPr txBox="1"/>
+          <p:nvPr/>
+        </p:nvSpPr>
+        <p:spPr>
+          <a:xfrm>
+            <a:off x="8641080" y="5852159"/>
+            <a:ext cx="1371600" cy="182880"/>
+          </a:xfrm>
+          <a:prstGeom prst="rect">
+            <a:avLst/>
+          </a:prstGeom>
+          <a:noFill/>
+        </p:spPr>
+        <p:txBody>
+          <a:bodyPr wrap="square" anchor="t" lIns="0" rIns="0" tIns="0" bIns="0">
+            <a:spAutoFit/>
+          </a:bodyPr>
+          <a:lstStyle/>
+          <a:p>
+            <a:pPr algn="l"/>
+            <a:r>
+              <a:rPr sz="1000" b="0">
                 <a:solidFill>
                   <a:srgbClr val="334155"/>
                 </a:solidFill>
@@ -12549,29 +13232,29 @@
       </p:sp>
       <p:sp>
         <p:nvSpPr>
-          <p:cNvPr id="69" name="TextBox 68"/>
-          <p:cNvSpPr txBox="1"/>
-          <p:nvPr/>
-        </p:nvSpPr>
-        <p:spPr>
-          <a:xfrm>
-            <a:off x="10104120" y="5440679"/>
-            <a:ext cx="1371600" cy="201168"/>
-          </a:xfrm>
-          <a:prstGeom prst="rect">
-            <a:avLst/>
-          </a:prstGeom>
-          <a:noFill/>
-        </p:spPr>
-        <p:txBody>
-          <a:bodyPr wrap="square" anchor="t" lIns="0" rIns="0" tIns="0" bIns="0">
-            <a:spAutoFit/>
-          </a:bodyPr>
-          <a:lstStyle/>
-          <a:p>
-            <a:pPr algn="l"/>
-            <a:r>
-              <a:rPr sz="1050" b="1">
+          <p:cNvPr id="86" name="TextBox 85"/>
+          <p:cNvSpPr txBox="1"/>
+          <p:nvPr/>
+        </p:nvSpPr>
+        <p:spPr>
+          <a:xfrm>
+            <a:off x="10104120" y="5852159"/>
+            <a:ext cx="1371600" cy="182880"/>
+          </a:xfrm>
+          <a:prstGeom prst="rect">
+            <a:avLst/>
+          </a:prstGeom>
+          <a:noFill/>
+        </p:spPr>
+        <p:txBody>
+          <a:bodyPr wrap="square" anchor="t" lIns="0" rIns="0" tIns="0" bIns="0">
+            <a:spAutoFit/>
+          </a:bodyPr>
+          <a:lstStyle/>
+          <a:p>
+            <a:pPr algn="l"/>
+            <a:r>
+              <a:rPr sz="1000" b="1">
                 <a:solidFill>
                   <a:srgbClr val="FFB352"/>
                 </a:solidFill>
@@ -12584,14 +13267,14 @@
       </p:sp>
       <p:sp>
         <p:nvSpPr>
-          <p:cNvPr id="70" name="Rectangle 69"/>
+          <p:cNvPr id="87" name="Rectangle 86"/>
           <p:cNvSpPr/>
           <p:nvPr/>
         </p:nvSpPr>
         <p:spPr>
           <a:xfrm>
-            <a:off x="6217920" y="5687568"/>
-            <a:ext cx="5486400" cy="301752"/>
+            <a:off x="6217920" y="6062471"/>
+            <a:ext cx="5486400" cy="246888"/>
           </a:xfrm>
           <a:prstGeom prst="rect">
             <a:avLst/>
@@ -12628,29 +13311,29 @@
       </p:sp>
       <p:sp>
         <p:nvSpPr>
-          <p:cNvPr id="71" name="TextBox 70"/>
-          <p:cNvSpPr txBox="1"/>
-          <p:nvPr/>
-        </p:nvSpPr>
-        <p:spPr>
-          <a:xfrm>
-            <a:off x="6309360" y="5742431"/>
-            <a:ext cx="914400" cy="201168"/>
-          </a:xfrm>
-          <a:prstGeom prst="rect">
-            <a:avLst/>
-          </a:prstGeom>
-          <a:noFill/>
-        </p:spPr>
-        <p:txBody>
-          <a:bodyPr wrap="square" anchor="t" lIns="0" rIns="0" tIns="0" bIns="0">
-            <a:spAutoFit/>
-          </a:bodyPr>
-          <a:lstStyle/>
-          <a:p>
-            <a:pPr algn="l"/>
-            <a:r>
-              <a:rPr sz="1050" b="1">
+          <p:cNvPr id="88" name="TextBox 87"/>
+          <p:cNvSpPr txBox="1"/>
+          <p:nvPr/>
+        </p:nvSpPr>
+        <p:spPr>
+          <a:xfrm>
+            <a:off x="6309360" y="6099047"/>
+            <a:ext cx="914400" cy="182880"/>
+          </a:xfrm>
+          <a:prstGeom prst="rect">
+            <a:avLst/>
+          </a:prstGeom>
+          <a:noFill/>
+        </p:spPr>
+        <p:txBody>
+          <a:bodyPr wrap="square" anchor="t" lIns="0" rIns="0" tIns="0" bIns="0">
+            <a:spAutoFit/>
+          </a:bodyPr>
+          <a:lstStyle/>
+          <a:p>
+            <a:pPr algn="l"/>
+            <a:r>
+              <a:rPr sz="1000" b="1">
                 <a:solidFill>
                   <a:srgbClr val="FC4C0B"/>
                 </a:solidFill>
@@ -12663,29 +13346,29 @@
       </p:sp>
       <p:sp>
         <p:nvSpPr>
-          <p:cNvPr id="72" name="TextBox 71"/>
-          <p:cNvSpPr txBox="1"/>
-          <p:nvPr/>
-        </p:nvSpPr>
-        <p:spPr>
-          <a:xfrm>
-            <a:off x="7269480" y="5742431"/>
-            <a:ext cx="1280160" cy="201168"/>
-          </a:xfrm>
-          <a:prstGeom prst="rect">
-            <a:avLst/>
-          </a:prstGeom>
-          <a:noFill/>
-        </p:spPr>
-        <p:txBody>
-          <a:bodyPr wrap="square" anchor="t" lIns="0" rIns="0" tIns="0" bIns="0">
-            <a:spAutoFit/>
-          </a:bodyPr>
-          <a:lstStyle/>
-          <a:p>
-            <a:pPr algn="l"/>
-            <a:r>
-              <a:rPr sz="950" b="0">
+          <p:cNvPr id="89" name="TextBox 88"/>
+          <p:cNvSpPr txBox="1"/>
+          <p:nvPr/>
+        </p:nvSpPr>
+        <p:spPr>
+          <a:xfrm>
+            <a:off x="7269480" y="6099047"/>
+            <a:ext cx="1280160" cy="182880"/>
+          </a:xfrm>
+          <a:prstGeom prst="rect">
+            <a:avLst/>
+          </a:prstGeom>
+          <a:noFill/>
+        </p:spPr>
+        <p:txBody>
+          <a:bodyPr wrap="square" anchor="t" lIns="0" rIns="0" tIns="0" bIns="0">
+            <a:spAutoFit/>
+          </a:bodyPr>
+          <a:lstStyle/>
+          <a:p>
+            <a:pPr algn="l"/>
+            <a:r>
+              <a:rPr sz="900" b="0">
                 <a:solidFill>
                   <a:srgbClr val="334155"/>
                 </a:solidFill>
@@ -12698,29 +13381,29 @@
       </p:sp>
       <p:sp>
         <p:nvSpPr>
-          <p:cNvPr id="73" name="TextBox 72"/>
-          <p:cNvSpPr txBox="1"/>
-          <p:nvPr/>
-        </p:nvSpPr>
-        <p:spPr>
-          <a:xfrm>
-            <a:off x="8641080" y="5742431"/>
-            <a:ext cx="1371600" cy="201168"/>
-          </a:xfrm>
-          <a:prstGeom prst="rect">
-            <a:avLst/>
-          </a:prstGeom>
-          <a:noFill/>
-        </p:spPr>
-        <p:txBody>
-          <a:bodyPr wrap="square" anchor="t" lIns="0" rIns="0" tIns="0" bIns="0">
-            <a:spAutoFit/>
-          </a:bodyPr>
-          <a:lstStyle/>
-          <a:p>
-            <a:pPr algn="l"/>
-            <a:r>
-              <a:rPr sz="1050" b="0">
+          <p:cNvPr id="90" name="TextBox 89"/>
+          <p:cNvSpPr txBox="1"/>
+          <p:nvPr/>
+        </p:nvSpPr>
+        <p:spPr>
+          <a:xfrm>
+            <a:off x="8641080" y="6099047"/>
+            <a:ext cx="1371600" cy="182880"/>
+          </a:xfrm>
+          <a:prstGeom prst="rect">
+            <a:avLst/>
+          </a:prstGeom>
+          <a:noFill/>
+        </p:spPr>
+        <p:txBody>
+          <a:bodyPr wrap="square" anchor="t" lIns="0" rIns="0" tIns="0" bIns="0">
+            <a:spAutoFit/>
+          </a:bodyPr>
+          <a:lstStyle/>
+          <a:p>
+            <a:pPr algn="l"/>
+            <a:r>
+              <a:rPr sz="1000" b="0">
                 <a:solidFill>
                   <a:srgbClr val="334155"/>
                 </a:solidFill>
@@ -12733,29 +13416,29 @@
       </p:sp>
       <p:sp>
         <p:nvSpPr>
-          <p:cNvPr id="74" name="TextBox 73"/>
-          <p:cNvSpPr txBox="1"/>
-          <p:nvPr/>
-        </p:nvSpPr>
-        <p:spPr>
-          <a:xfrm>
-            <a:off x="10104120" y="5742431"/>
-            <a:ext cx="1371600" cy="201168"/>
-          </a:xfrm>
-          <a:prstGeom prst="rect">
-            <a:avLst/>
-          </a:prstGeom>
-          <a:noFill/>
-        </p:spPr>
-        <p:txBody>
-          <a:bodyPr wrap="square" anchor="t" lIns="0" rIns="0" tIns="0" bIns="0">
-            <a:spAutoFit/>
-          </a:bodyPr>
-          <a:lstStyle/>
-          <a:p>
-            <a:pPr algn="l"/>
-            <a:r>
-              <a:rPr sz="1050" b="1">
+          <p:cNvPr id="91" name="TextBox 90"/>
+          <p:cNvSpPr txBox="1"/>
+          <p:nvPr/>
+        </p:nvSpPr>
+        <p:spPr>
+          <a:xfrm>
+            <a:off x="10104120" y="6099047"/>
+            <a:ext cx="1371600" cy="182880"/>
+          </a:xfrm>
+          <a:prstGeom prst="rect">
+            <a:avLst/>
+          </a:prstGeom>
+          <a:noFill/>
+        </p:spPr>
+        <p:txBody>
+          <a:bodyPr wrap="square" anchor="t" lIns="0" rIns="0" tIns="0" bIns="0">
+            <a:spAutoFit/>
+          </a:bodyPr>
+          <a:lstStyle/>
+          <a:p>
+            <a:pPr algn="l"/>
+            <a:r>
+              <a:rPr sz="1000" b="1">
                 <a:solidFill>
                   <a:srgbClr val="FC4C0B"/>
                 </a:solidFill>
@@ -12768,14 +13451,14 @@
       </p:sp>
       <p:sp>
         <p:nvSpPr>
-          <p:cNvPr id="75" name="Rectangle 74"/>
+          <p:cNvPr id="92" name="Rectangle 91"/>
           <p:cNvSpPr/>
           <p:nvPr/>
         </p:nvSpPr>
         <p:spPr>
           <a:xfrm>
-            <a:off x="6217920" y="5989320"/>
-            <a:ext cx="5486400" cy="301752"/>
+            <a:off x="6217920" y="6309359"/>
+            <a:ext cx="5486400" cy="246888"/>
           </a:xfrm>
           <a:prstGeom prst="rect">
             <a:avLst/>
@@ -12812,29 +13495,29 @@
       </p:sp>
       <p:sp>
         <p:nvSpPr>
-          <p:cNvPr id="76" name="TextBox 75"/>
-          <p:cNvSpPr txBox="1"/>
-          <p:nvPr/>
-        </p:nvSpPr>
-        <p:spPr>
-          <a:xfrm>
-            <a:off x="6309360" y="6044183"/>
-            <a:ext cx="914400" cy="201168"/>
-          </a:xfrm>
-          <a:prstGeom prst="rect">
-            <a:avLst/>
-          </a:prstGeom>
-          <a:noFill/>
-        </p:spPr>
-        <p:txBody>
-          <a:bodyPr wrap="square" anchor="t" lIns="0" rIns="0" tIns="0" bIns="0">
-            <a:spAutoFit/>
-          </a:bodyPr>
-          <a:lstStyle/>
-          <a:p>
-            <a:pPr algn="l"/>
-            <a:r>
-              <a:rPr sz="1050" b="1">
+          <p:cNvPr id="93" name="TextBox 92"/>
+          <p:cNvSpPr txBox="1"/>
+          <p:nvPr/>
+        </p:nvSpPr>
+        <p:spPr>
+          <a:xfrm>
+            <a:off x="6309360" y="6345935"/>
+            <a:ext cx="914400" cy="182880"/>
+          </a:xfrm>
+          <a:prstGeom prst="rect">
+            <a:avLst/>
+          </a:prstGeom>
+          <a:noFill/>
+        </p:spPr>
+        <p:txBody>
+          <a:bodyPr wrap="square" anchor="t" lIns="0" rIns="0" tIns="0" bIns="0">
+            <a:spAutoFit/>
+          </a:bodyPr>
+          <a:lstStyle/>
+          <a:p>
+            <a:pPr algn="l"/>
+            <a:r>
+              <a:rPr sz="1000" b="1">
                 <a:solidFill>
                   <a:srgbClr val="2863C5"/>
                 </a:solidFill>
@@ -12847,29 +13530,29 @@
       </p:sp>
       <p:sp>
         <p:nvSpPr>
-          <p:cNvPr id="77" name="TextBox 76"/>
-          <p:cNvSpPr txBox="1"/>
-          <p:nvPr/>
-        </p:nvSpPr>
-        <p:spPr>
-          <a:xfrm>
-            <a:off x="7269480" y="6044183"/>
-            <a:ext cx="1280160" cy="201168"/>
-          </a:xfrm>
-          <a:prstGeom prst="rect">
-            <a:avLst/>
-          </a:prstGeom>
-          <a:noFill/>
-        </p:spPr>
-        <p:txBody>
-          <a:bodyPr wrap="square" anchor="t" lIns="0" rIns="0" tIns="0" bIns="0">
-            <a:spAutoFit/>
-          </a:bodyPr>
-          <a:lstStyle/>
-          <a:p>
-            <a:pPr algn="l"/>
-            <a:r>
-              <a:rPr sz="950" b="0">
+          <p:cNvPr id="94" name="TextBox 93"/>
+          <p:cNvSpPr txBox="1"/>
+          <p:nvPr/>
+        </p:nvSpPr>
+        <p:spPr>
+          <a:xfrm>
+            <a:off x="7269480" y="6345935"/>
+            <a:ext cx="1280160" cy="182880"/>
+          </a:xfrm>
+          <a:prstGeom prst="rect">
+            <a:avLst/>
+          </a:prstGeom>
+          <a:noFill/>
+        </p:spPr>
+        <p:txBody>
+          <a:bodyPr wrap="square" anchor="t" lIns="0" rIns="0" tIns="0" bIns="0">
+            <a:spAutoFit/>
+          </a:bodyPr>
+          <a:lstStyle/>
+          <a:p>
+            <a:pPr algn="l"/>
+            <a:r>
+              <a:rPr sz="900" b="0">
                 <a:solidFill>
                   <a:srgbClr val="334155"/>
                 </a:solidFill>
@@ -12882,29 +13565,29 @@
       </p:sp>
       <p:sp>
         <p:nvSpPr>
-          <p:cNvPr id="78" name="TextBox 77"/>
-          <p:cNvSpPr txBox="1"/>
-          <p:nvPr/>
-        </p:nvSpPr>
-        <p:spPr>
-          <a:xfrm>
-            <a:off x="8641080" y="6044183"/>
-            <a:ext cx="1371600" cy="201168"/>
-          </a:xfrm>
-          <a:prstGeom prst="rect">
-            <a:avLst/>
-          </a:prstGeom>
-          <a:noFill/>
-        </p:spPr>
-        <p:txBody>
-          <a:bodyPr wrap="square" anchor="t" lIns="0" rIns="0" tIns="0" bIns="0">
-            <a:spAutoFit/>
-          </a:bodyPr>
-          <a:lstStyle/>
-          <a:p>
-            <a:pPr algn="l"/>
-            <a:r>
-              <a:rPr sz="1050" b="0">
+          <p:cNvPr id="95" name="TextBox 94"/>
+          <p:cNvSpPr txBox="1"/>
+          <p:nvPr/>
+        </p:nvSpPr>
+        <p:spPr>
+          <a:xfrm>
+            <a:off x="8641080" y="6345935"/>
+            <a:ext cx="1371600" cy="182880"/>
+          </a:xfrm>
+          <a:prstGeom prst="rect">
+            <a:avLst/>
+          </a:prstGeom>
+          <a:noFill/>
+        </p:spPr>
+        <p:txBody>
+          <a:bodyPr wrap="square" anchor="t" lIns="0" rIns="0" tIns="0" bIns="0">
+            <a:spAutoFit/>
+          </a:bodyPr>
+          <a:lstStyle/>
+          <a:p>
+            <a:pPr algn="l"/>
+            <a:r>
+              <a:rPr sz="1000" b="0">
                 <a:solidFill>
                   <a:srgbClr val="334155"/>
                 </a:solidFill>
@@ -12917,29 +13600,29 @@
       </p:sp>
       <p:sp>
         <p:nvSpPr>
-          <p:cNvPr id="79" name="TextBox 78"/>
-          <p:cNvSpPr txBox="1"/>
-          <p:nvPr/>
-        </p:nvSpPr>
-        <p:spPr>
-          <a:xfrm>
-            <a:off x="10104120" y="6044183"/>
-            <a:ext cx="1371600" cy="201168"/>
-          </a:xfrm>
-          <a:prstGeom prst="rect">
-            <a:avLst/>
-          </a:prstGeom>
-          <a:noFill/>
-        </p:spPr>
-        <p:txBody>
-          <a:bodyPr wrap="square" anchor="t" lIns="0" rIns="0" tIns="0" bIns="0">
-            <a:spAutoFit/>
-          </a:bodyPr>
-          <a:lstStyle/>
-          <a:p>
-            <a:pPr algn="l"/>
-            <a:r>
-              <a:rPr sz="1050" b="1">
+          <p:cNvPr id="96" name="TextBox 95"/>
+          <p:cNvSpPr txBox="1"/>
+          <p:nvPr/>
+        </p:nvSpPr>
+        <p:spPr>
+          <a:xfrm>
+            <a:off x="10104120" y="6345935"/>
+            <a:ext cx="1371600" cy="182880"/>
+          </a:xfrm>
+          <a:prstGeom prst="rect">
+            <a:avLst/>
+          </a:prstGeom>
+          <a:noFill/>
+        </p:spPr>
+        <p:txBody>
+          <a:bodyPr wrap="square" anchor="t" lIns="0" rIns="0" tIns="0" bIns="0">
+            <a:spAutoFit/>
+          </a:bodyPr>
+          <a:lstStyle/>
+          <a:p>
+            <a:pPr algn="l"/>
+            <a:r>
+              <a:rPr sz="1000" b="1">
                 <a:solidFill>
                   <a:srgbClr val="2863C5"/>
                 </a:solidFill>
@@ -12952,18 +13635,18 @@
       </p:sp>
       <p:sp>
         <p:nvSpPr>
-          <p:cNvPr id="80" name="Rounded Rectangle 79"/>
+          <p:cNvPr id="97" name="Rounded Rectangle 96"/>
           <p:cNvSpPr/>
           <p:nvPr/>
         </p:nvSpPr>
         <p:spPr>
           <a:xfrm>
-            <a:off x="457200" y="6400800"/>
-            <a:ext cx="11247120" cy="411480"/>
+            <a:off x="457200" y="6492240"/>
+            <a:ext cx="11247120" cy="329184"/>
           </a:xfrm>
           <a:prstGeom prst="roundRect">
             <a:avLst>
-              <a:gd name="adj" fmla="val 7000"/>
+              <a:gd name="adj" fmla="val 10000"/>
             </a:avLst>
           </a:prstGeom>
           <a:solidFill>
@@ -12998,14 +13681,14 @@
       </p:sp>
       <p:sp>
         <p:nvSpPr>
-          <p:cNvPr id="81" name="TextBox 80"/>
-          <p:cNvSpPr txBox="1"/>
-          <p:nvPr/>
-        </p:nvSpPr>
-        <p:spPr>
-          <a:xfrm>
-            <a:off x="640080" y="6446520"/>
-            <a:ext cx="10972800" cy="292608"/>
+          <p:cNvPr id="98" name="TextBox 97"/>
+          <p:cNvSpPr txBox="1"/>
+          <p:nvPr/>
+        </p:nvSpPr>
+        <p:spPr>
+          <a:xfrm>
+            <a:off x="640080" y="6537960"/>
+            <a:ext cx="10972800" cy="256032"/>
           </a:xfrm>
           <a:prstGeom prst="rect">
             <a:avLst/>
@@ -13026,7 +13709,7 @@
                 </a:solidFill>
                 <a:latin typeface="Open Sans"/>
               </a:rPr>
-              <a:t>Even discounting common-name false positives, ~9,000 customers in the high-confidence bucket map to ~$1.5M of unclaimed property in CA alone.</a:t>
+              <a:t>70.8% is the upper bound. NAUPA baseline is ~14% of Americans. With the production PII matcher, expect 20–30% of our CA base.</a:t>
             </a:r>
           </a:p>
         </p:txBody>

--- a/myReclaim-Exec-Deck.pptx
+++ b/myReclaim-Exec-Deck.pptx
@@ -10330,8 +10330,8 @@
         </p:nvSpPr>
         <p:spPr>
           <a:xfrm>
-            <a:off x="457200" y="2468880"/>
-            <a:ext cx="2697480" cy="1097280"/>
+            <a:off x="457200" y="2606040"/>
+            <a:ext cx="2697480" cy="1417320"/>
           </a:xfrm>
           <a:prstGeom prst="roundRect">
             <a:avLst>
@@ -10378,8 +10378,8 @@
         </p:nvSpPr>
         <p:spPr>
           <a:xfrm>
-            <a:off x="457200" y="2468880"/>
-            <a:ext cx="2697480" cy="118872"/>
+            <a:off x="457200" y="2606040"/>
+            <a:ext cx="2697480" cy="137160"/>
           </a:xfrm>
           <a:prstGeom prst="rect">
             <a:avLst/>
@@ -10422,23 +10422,23 @@
         </p:nvSpPr>
         <p:spPr>
           <a:xfrm>
-            <a:off x="640080" y="2670048"/>
-            <a:ext cx="2331720" cy="640080"/>
-          </a:xfrm>
-          <a:prstGeom prst="rect">
-            <a:avLst/>
-          </a:prstGeom>
-          <a:noFill/>
-        </p:spPr>
-        <p:txBody>
-          <a:bodyPr wrap="square" anchor="t" lIns="0" rIns="0" tIns="0" bIns="0">
-            <a:spAutoFit/>
-          </a:bodyPr>
-          <a:lstStyle/>
-          <a:p>
-            <a:pPr algn="l"/>
-            <a:r>
-              <a:rPr sz="3200" b="1">
+            <a:off x="640080" y="2880360"/>
+            <a:ext cx="2331720" cy="777240"/>
+          </a:xfrm>
+          <a:prstGeom prst="rect">
+            <a:avLst/>
+          </a:prstGeom>
+          <a:noFill/>
+        </p:spPr>
+        <p:txBody>
+          <a:bodyPr wrap="square" anchor="t" lIns="0" rIns="0" tIns="0" bIns="0">
+            <a:spAutoFit/>
+          </a:bodyPr>
+          <a:lstStyle/>
+          <a:p>
+            <a:pPr algn="l"/>
+            <a:r>
+              <a:rPr sz="3600" b="1">
                 <a:solidFill>
                   <a:srgbClr val="2863C5"/>
                 </a:solidFill>
@@ -10457,8 +10457,8 @@
         </p:nvSpPr>
         <p:spPr>
           <a:xfrm>
-            <a:off x="640080" y="3246120"/>
-            <a:ext cx="2331720" cy="292608"/>
+            <a:off x="640080" y="3611880"/>
+            <a:ext cx="2331720" cy="365760"/>
           </a:xfrm>
           <a:prstGeom prst="rect">
             <a:avLst/>
@@ -10479,7 +10479,7 @@
                 </a:solidFill>
                 <a:latin typeface="Open Sans"/>
               </a:rPr>
-              <a:t>customers with ≥1 name match</a:t>
+              <a:t>customers with at least one possible match</a:t>
             </a:r>
           </a:p>
         </p:txBody>
@@ -10492,8 +10492,8 @@
         </p:nvSpPr>
         <p:spPr>
           <a:xfrm>
-            <a:off x="3291840" y="2468880"/>
-            <a:ext cx="2697480" cy="1097280"/>
+            <a:off x="3291840" y="2606040"/>
+            <a:ext cx="2697480" cy="1417320"/>
           </a:xfrm>
           <a:prstGeom prst="roundRect">
             <a:avLst>
@@ -10540,8 +10540,8 @@
         </p:nvSpPr>
         <p:spPr>
           <a:xfrm>
-            <a:off x="3291840" y="2468880"/>
-            <a:ext cx="2697480" cy="118872"/>
+            <a:off x="3291840" y="2606040"/>
+            <a:ext cx="2697480" cy="137160"/>
           </a:xfrm>
           <a:prstGeom prst="rect">
             <a:avLst/>
@@ -10584,23 +10584,23 @@
         </p:nvSpPr>
         <p:spPr>
           <a:xfrm>
-            <a:off x="3474720" y="2670048"/>
-            <a:ext cx="2331720" cy="640080"/>
-          </a:xfrm>
-          <a:prstGeom prst="rect">
-            <a:avLst/>
-          </a:prstGeom>
-          <a:noFill/>
-        </p:spPr>
-        <p:txBody>
-          <a:bodyPr wrap="square" anchor="t" lIns="0" rIns="0" tIns="0" bIns="0">
-            <a:spAutoFit/>
-          </a:bodyPr>
-          <a:lstStyle/>
-          <a:p>
-            <a:pPr algn="l"/>
-            <a:r>
-              <a:rPr sz="3200" b="1">
+            <a:off x="3474720" y="2880360"/>
+            <a:ext cx="2331720" cy="777240"/>
+          </a:xfrm>
+          <a:prstGeom prst="rect">
+            <a:avLst/>
+          </a:prstGeom>
+          <a:noFill/>
+        </p:spPr>
+        <p:txBody>
+          <a:bodyPr wrap="square" anchor="t" lIns="0" rIns="0" tIns="0" bIns="0">
+            <a:spAutoFit/>
+          </a:bodyPr>
+          <a:lstStyle/>
+          <a:p>
+            <a:pPr algn="l"/>
+            <a:r>
+              <a:rPr sz="3600" b="1">
                 <a:solidFill>
                   <a:srgbClr val="2863C5"/>
                 </a:solidFill>
@@ -10619,8 +10619,8 @@
         </p:nvSpPr>
         <p:spPr>
           <a:xfrm>
-            <a:off x="3474720" y="3246120"/>
-            <a:ext cx="2331720" cy="292608"/>
+            <a:off x="3474720" y="3611880"/>
+            <a:ext cx="2331720" cy="365760"/>
           </a:xfrm>
           <a:prstGeom prst="rect">
             <a:avLst/>
@@ -10641,7 +10641,7 @@
                 </a:solidFill>
                 <a:latin typeface="Open Sans"/>
               </a:rPr>
-              <a:t>upper bound (name-only)</a:t>
+              <a:t>of the 30,862 active CA base</a:t>
             </a:r>
           </a:p>
         </p:txBody>
@@ -10654,8 +10654,8 @@
         </p:nvSpPr>
         <p:spPr>
           <a:xfrm>
-            <a:off x="6126480" y="2468880"/>
-            <a:ext cx="2697480" cy="1097280"/>
+            <a:off x="6126480" y="2606040"/>
+            <a:ext cx="2697480" cy="1417320"/>
           </a:xfrm>
           <a:prstGeom prst="roundRect">
             <a:avLst>
@@ -10702,14 +10702,14 @@
         </p:nvSpPr>
         <p:spPr>
           <a:xfrm>
-            <a:off x="6126480" y="2468880"/>
-            <a:ext cx="2697480" cy="118872"/>
+            <a:off x="6126480" y="2606040"/>
+            <a:ext cx="2697480" cy="137160"/>
           </a:xfrm>
           <a:prstGeom prst="rect">
             <a:avLst/>
           </a:prstGeom>
           <a:solidFill>
-            <a:srgbClr val="059669"/>
+            <a:srgbClr val="FC4C0B"/>
           </a:solidFill>
           <a:ln>
             <a:noFill/>
@@ -10746,29 +10746,29 @@
         </p:nvSpPr>
         <p:spPr>
           <a:xfrm>
-            <a:off x="6309360" y="2670048"/>
-            <a:ext cx="2331720" cy="640080"/>
-          </a:xfrm>
-          <a:prstGeom prst="rect">
-            <a:avLst/>
-          </a:prstGeom>
-          <a:noFill/>
-        </p:spPr>
-        <p:txBody>
-          <a:bodyPr wrap="square" anchor="t" lIns="0" rIns="0" tIns="0" bIns="0">
-            <a:spAutoFit/>
-          </a:bodyPr>
-          <a:lstStyle/>
-          <a:p>
-            <a:pPr algn="l"/>
-            <a:r>
-              <a:rPr sz="3200" b="1">
-                <a:solidFill>
-                  <a:srgbClr val="059669"/>
-                </a:solidFill>
-                <a:latin typeface="Open Sans"/>
-              </a:rPr>
-              <a:t>9,054</a:t>
+            <a:off x="6309360" y="2880360"/>
+            <a:ext cx="2331720" cy="777240"/>
+          </a:xfrm>
+          <a:prstGeom prst="rect">
+            <a:avLst/>
+          </a:prstGeom>
+          <a:noFill/>
+        </p:spPr>
+        <p:txBody>
+          <a:bodyPr wrap="square" anchor="t" lIns="0" rIns="0" tIns="0" bIns="0">
+            <a:spAutoFit/>
+          </a:bodyPr>
+          <a:lstStyle/>
+          <a:p>
+            <a:pPr algn="l"/>
+            <a:r>
+              <a:rPr sz="3600" b="1">
+                <a:solidFill>
+                  <a:srgbClr val="FC4C0B"/>
+                </a:solidFill>
+                <a:latin typeface="Open Sans"/>
+              </a:rPr>
+              <a:t>4.4M</a:t>
             </a:r>
           </a:p>
         </p:txBody>
@@ -10781,8 +10781,8 @@
         </p:nvSpPr>
         <p:spPr>
           <a:xfrm>
-            <a:off x="6309360" y="3246120"/>
-            <a:ext cx="2331720" cy="292608"/>
+            <a:off x="6309360" y="3611880"/>
+            <a:ext cx="2331720" cy="365760"/>
           </a:xfrm>
           <a:prstGeom prst="rect">
             <a:avLst/>
@@ -10803,7 +10803,7 @@
                 </a:solidFill>
                 <a:latin typeface="Open Sans"/>
               </a:rPr>
-              <a:t>high-confidence (1–5 records)</a:t>
+              <a:t>matched property records across all tiers</a:t>
             </a:r>
           </a:p>
         </p:txBody>
@@ -10816,8 +10816,8 @@
         </p:nvSpPr>
         <p:spPr>
           <a:xfrm>
-            <a:off x="8961120" y="2468880"/>
-            <a:ext cx="2697480" cy="1097280"/>
+            <a:off x="8961120" y="2606040"/>
+            <a:ext cx="2697480" cy="1417320"/>
           </a:xfrm>
           <a:prstGeom prst="roundRect">
             <a:avLst>
@@ -10864,8 +10864,8 @@
         </p:nvSpPr>
         <p:spPr>
           <a:xfrm>
-            <a:off x="8961120" y="2468880"/>
-            <a:ext cx="2697480" cy="118872"/>
+            <a:off x="8961120" y="2606040"/>
+            <a:ext cx="2697480" cy="137160"/>
           </a:xfrm>
           <a:prstGeom prst="rect">
             <a:avLst/>
@@ -10908,23 +10908,23 @@
         </p:nvSpPr>
         <p:spPr>
           <a:xfrm>
-            <a:off x="9144000" y="2670048"/>
-            <a:ext cx="2331720" cy="640080"/>
-          </a:xfrm>
-          <a:prstGeom prst="rect">
-            <a:avLst/>
-          </a:prstGeom>
-          <a:noFill/>
-        </p:spPr>
-        <p:txBody>
-          <a:bodyPr wrap="square" anchor="t" lIns="0" rIns="0" tIns="0" bIns="0">
-            <a:spAutoFit/>
-          </a:bodyPr>
-          <a:lstStyle/>
-          <a:p>
-            <a:pPr algn="l"/>
-            <a:r>
-              <a:rPr sz="3200" b="1">
+            <a:off x="9144000" y="2880360"/>
+            <a:ext cx="2331720" cy="777240"/>
+          </a:xfrm>
+          <a:prstGeom prst="rect">
+            <a:avLst/>
+          </a:prstGeom>
+          <a:noFill/>
+        </p:spPr>
+        <p:txBody>
+          <a:bodyPr wrap="square" anchor="t" lIns="0" rIns="0" tIns="0" bIns="0">
+            <a:spAutoFit/>
+          </a:bodyPr>
+          <a:lstStyle/>
+          <a:p>
+            <a:pPr algn="l"/>
+            <a:r>
+              <a:rPr sz="3600" b="1">
                 <a:solidFill>
                   <a:srgbClr val="FC4C0B"/>
                 </a:solidFill>
@@ -10943,8 +10943,8 @@
         </p:nvSpPr>
         <p:spPr>
           <a:xfrm>
-            <a:off x="9144000" y="3246120"/>
-            <a:ext cx="2331720" cy="292608"/>
+            <a:off x="9144000" y="3611880"/>
+            <a:ext cx="2331720" cy="365760"/>
           </a:xfrm>
           <a:prstGeom prst="rect">
             <a:avLst/>
@@ -10965,7 +10965,7 @@
                 </a:solidFill>
                 <a:latin typeface="Open Sans"/>
               </a:rPr>
-              <a:t>max value across all matches</a:t>
+              <a:t>estimated value across all matches</a:t>
             </a:r>
           </a:p>
         </p:txBody>
@@ -10978,8 +10978,8 @@
         </p:nvSpPr>
         <p:spPr>
           <a:xfrm>
-            <a:off x="457200" y="3703320"/>
-            <a:ext cx="11430000" cy="292608"/>
+            <a:off x="457200" y="4206240"/>
+            <a:ext cx="5486400" cy="320040"/>
           </a:xfrm>
           <a:prstGeom prst="rect">
             <a:avLst/>
@@ -11000,34 +11000,65 @@
                 </a:solidFill>
                 <a:latin typeface="Open Sans"/>
               </a:rPr>
-              <a:t>HOW WE MATCHED · TRANSPARENCY</a:t>
-            </a:r>
-          </a:p>
-        </p:txBody>
-      </p:sp>
-      <p:sp>
-        <p:nvSpPr>
-          <p:cNvPr id="27" name="Rounded Rectangle 26"/>
+              <a:t>MATCH DISTRIBUTION</a:t>
+            </a:r>
+          </a:p>
+        </p:txBody>
+      </p:sp>
+      <p:sp>
+        <p:nvSpPr>
+          <p:cNvPr id="27" name="TextBox 26"/>
+          <p:cNvSpPr txBox="1"/>
+          <p:nvPr/>
+        </p:nvSpPr>
+        <p:spPr>
+          <a:xfrm>
+            <a:off x="457200" y="4498848"/>
+            <a:ext cx="5486400" cy="274320"/>
+          </a:xfrm>
+          <a:prstGeom prst="rect">
+            <a:avLst/>
+          </a:prstGeom>
+          <a:noFill/>
+        </p:spPr>
+        <p:txBody>
+          <a:bodyPr wrap="square" anchor="t" lIns="0" rIns="0" tIns="0" bIns="0">
+            <a:spAutoFit/>
+          </a:bodyPr>
+          <a:lstStyle/>
+          <a:p>
+            <a:pPr algn="l"/>
+            <a:r>
+              <a:rPr sz="1000" b="0">
+                <a:solidFill>
+                  <a:srgbClr val="64748B"/>
+                </a:solidFill>
+                <a:latin typeface="Open Sans"/>
+              </a:rPr>
+              <a:t>Number of records each customer's name returned. Fewer records = more distinctive name = more likely match.</a:t>
+            </a:r>
+          </a:p>
+        </p:txBody>
+      </p:sp>
+      <p:sp>
+        <p:nvSpPr>
+          <p:cNvPr id="28" name="Rectangle 27"/>
           <p:cNvSpPr/>
           <p:nvPr/>
         </p:nvSpPr>
         <p:spPr>
           <a:xfrm>
-            <a:off x="457200" y="4023360"/>
-            <a:ext cx="2697480" cy="594360"/>
-          </a:xfrm>
-          <a:prstGeom prst="roundRect">
-            <a:avLst>
-              <a:gd name="adj" fmla="val 4000"/>
-            </a:avLst>
+            <a:off x="457200" y="4846320"/>
+            <a:ext cx="5486400" cy="237744"/>
+          </a:xfrm>
+          <a:prstGeom prst="rect">
+            <a:avLst/>
           </a:prstGeom>
           <a:solidFill>
-            <a:srgbClr val="FFFFFF"/>
+            <a:srgbClr val="0F172A"/>
           </a:solidFill>
-          <a:ln w="6350">
-            <a:solidFill>
-              <a:srgbClr val="E2E8F0"/>
-            </a:solidFill>
+          <a:ln>
+            <a:noFill/>
           </a:ln>
           <a:effectLst/>
         </p:spPr>
@@ -11055,17 +11086,1885 @@
       </p:sp>
       <p:sp>
         <p:nvSpPr>
-          <p:cNvPr id="28" name="Rectangle 27"/>
+          <p:cNvPr id="29" name="TextBox 28"/>
+          <p:cNvSpPr txBox="1"/>
+          <p:nvPr/>
+        </p:nvSpPr>
+        <p:spPr>
+          <a:xfrm>
+            <a:off x="548640" y="4882896"/>
+            <a:ext cx="1554480" cy="182880"/>
+          </a:xfrm>
+          <a:prstGeom prst="rect">
+            <a:avLst/>
+          </a:prstGeom>
+          <a:noFill/>
+        </p:spPr>
+        <p:txBody>
+          <a:bodyPr wrap="square" anchor="t" lIns="0" rIns="0" tIns="0" bIns="0">
+            <a:spAutoFit/>
+          </a:bodyPr>
+          <a:lstStyle/>
+          <a:p>
+            <a:pPr algn="l"/>
+            <a:r>
+              <a:rPr sz="900" b="1">
+                <a:solidFill>
+                  <a:srgbClr val="FFFFFF"/>
+                </a:solidFill>
+                <a:latin typeface="Open Sans"/>
+              </a:rPr>
+              <a:t>Records returned</a:t>
+            </a:r>
+          </a:p>
+        </p:txBody>
+      </p:sp>
+      <p:sp>
+        <p:nvSpPr>
+          <p:cNvPr id="30" name="TextBox 29"/>
+          <p:cNvSpPr txBox="1"/>
+          <p:nvPr/>
+        </p:nvSpPr>
+        <p:spPr>
+          <a:xfrm>
+            <a:off x="2194560" y="4882896"/>
+            <a:ext cx="914400" cy="182880"/>
+          </a:xfrm>
+          <a:prstGeom prst="rect">
+            <a:avLst/>
+          </a:prstGeom>
+          <a:noFill/>
+        </p:spPr>
+        <p:txBody>
+          <a:bodyPr wrap="square" anchor="t" lIns="0" rIns="0" tIns="0" bIns="0">
+            <a:spAutoFit/>
+          </a:bodyPr>
+          <a:lstStyle/>
+          <a:p>
+            <a:pPr algn="l"/>
+            <a:r>
+              <a:rPr sz="900" b="1">
+                <a:solidFill>
+                  <a:srgbClr val="FFFFFF"/>
+                </a:solidFill>
+                <a:latin typeface="Open Sans"/>
+              </a:rPr>
+              <a:t>Customers</a:t>
+            </a:r>
+          </a:p>
+        </p:txBody>
+      </p:sp>
+      <p:sp>
+        <p:nvSpPr>
+          <p:cNvPr id="31" name="TextBox 30"/>
+          <p:cNvSpPr txBox="1"/>
+          <p:nvPr/>
+        </p:nvSpPr>
+        <p:spPr>
+          <a:xfrm>
+            <a:off x="3246120" y="4882896"/>
+            <a:ext cx="914400" cy="182880"/>
+          </a:xfrm>
+          <a:prstGeom prst="rect">
+            <a:avLst/>
+          </a:prstGeom>
+          <a:noFill/>
+        </p:spPr>
+        <p:txBody>
+          <a:bodyPr wrap="square" anchor="t" lIns="0" rIns="0" tIns="0" bIns="0">
+            <a:spAutoFit/>
+          </a:bodyPr>
+          <a:lstStyle/>
+          <a:p>
+            <a:pPr algn="l"/>
+            <a:r>
+              <a:rPr sz="900" b="1">
+                <a:solidFill>
+                  <a:srgbClr val="FFFFFF"/>
+                </a:solidFill>
+                <a:latin typeface="Open Sans"/>
+              </a:rPr>
+              <a:t>$ value</a:t>
+            </a:r>
+          </a:p>
+        </p:txBody>
+      </p:sp>
+      <p:sp>
+        <p:nvSpPr>
+          <p:cNvPr id="32" name="TextBox 31"/>
+          <p:cNvSpPr txBox="1"/>
+          <p:nvPr/>
+        </p:nvSpPr>
+        <p:spPr>
+          <a:xfrm>
+            <a:off x="4297680" y="4882896"/>
+            <a:ext cx="1554480" cy="182880"/>
+          </a:xfrm>
+          <a:prstGeom prst="rect">
+            <a:avLst/>
+          </a:prstGeom>
+          <a:noFill/>
+        </p:spPr>
+        <p:txBody>
+          <a:bodyPr wrap="square" anchor="t" lIns="0" rIns="0" tIns="0" bIns="0">
+            <a:spAutoFit/>
+          </a:bodyPr>
+          <a:lstStyle/>
+          <a:p>
+            <a:pPr algn="l"/>
+            <a:r>
+              <a:rPr sz="900" b="1">
+                <a:solidFill>
+                  <a:srgbClr val="FFFFFF"/>
+                </a:solidFill>
+                <a:latin typeface="Open Sans"/>
+              </a:rPr>
+              <a:t>Confidence</a:t>
+            </a:r>
+          </a:p>
+        </p:txBody>
+      </p:sp>
+      <p:sp>
+        <p:nvSpPr>
+          <p:cNvPr id="33" name="Rectangle 32"/>
           <p:cNvSpPr/>
           <p:nvPr/>
         </p:nvSpPr>
         <p:spPr>
           <a:xfrm>
-            <a:off x="457200" y="4023360"/>
-            <a:ext cx="91440" cy="594360"/>
-          </a:xfrm>
-          <a:prstGeom prst="rect">
-            <a:avLst/>
+            <a:off x="457200" y="5084064"/>
+            <a:ext cx="5486400" cy="301752"/>
+          </a:xfrm>
+          <a:prstGeom prst="rect">
+            <a:avLst/>
+          </a:prstGeom>
+          <a:solidFill>
+            <a:srgbClr val="F8FAFC"/>
+          </a:solidFill>
+          <a:ln>
+            <a:noFill/>
+          </a:ln>
+          <a:effectLst/>
+        </p:spPr>
+        <p:style>
+          <a:lnRef idx="1">
+            <a:schemeClr val="accent1"/>
+          </a:lnRef>
+          <a:fillRef idx="3">
+            <a:schemeClr val="accent1"/>
+          </a:fillRef>
+          <a:effectRef idx="2">
+            <a:schemeClr val="accent1"/>
+          </a:effectRef>
+          <a:fontRef idx="minor">
+            <a:schemeClr val="lt1"/>
+          </a:fontRef>
+        </p:style>
+        <p:txBody>
+          <a:bodyPr rtlCol="0" anchor="ctr"/>
+          <a:lstStyle/>
+          <a:p>
+            <a:pPr algn="ctr"/>
+          </a:p>
+        </p:txBody>
+      </p:sp>
+      <p:sp>
+        <p:nvSpPr>
+          <p:cNvPr id="34" name="TextBox 33"/>
+          <p:cNvSpPr txBox="1"/>
+          <p:nvPr/>
+        </p:nvSpPr>
+        <p:spPr>
+          <a:xfrm>
+            <a:off x="548640" y="5138927"/>
+            <a:ext cx="1554480" cy="201168"/>
+          </a:xfrm>
+          <a:prstGeom prst="rect">
+            <a:avLst/>
+          </a:prstGeom>
+          <a:noFill/>
+        </p:spPr>
+        <p:txBody>
+          <a:bodyPr wrap="square" anchor="t" lIns="0" rIns="0" tIns="0" bIns="0">
+            <a:spAutoFit/>
+          </a:bodyPr>
+          <a:lstStyle/>
+          <a:p>
+            <a:pPr algn="l"/>
+            <a:r>
+              <a:rPr sz="1050" b="1">
+                <a:solidFill>
+                  <a:srgbClr val="0F172A"/>
+                </a:solidFill>
+                <a:latin typeface="Open Sans"/>
+              </a:rPr>
+              <a:t>1 record</a:t>
+            </a:r>
+          </a:p>
+        </p:txBody>
+      </p:sp>
+      <p:sp>
+        <p:nvSpPr>
+          <p:cNvPr id="35" name="TextBox 34"/>
+          <p:cNvSpPr txBox="1"/>
+          <p:nvPr/>
+        </p:nvSpPr>
+        <p:spPr>
+          <a:xfrm>
+            <a:off x="2194560" y="5138927"/>
+            <a:ext cx="914400" cy="201168"/>
+          </a:xfrm>
+          <a:prstGeom prst="rect">
+            <a:avLst/>
+          </a:prstGeom>
+          <a:noFill/>
+        </p:spPr>
+        <p:txBody>
+          <a:bodyPr wrap="square" anchor="t" lIns="0" rIns="0" tIns="0" bIns="0">
+            <a:spAutoFit/>
+          </a:bodyPr>
+          <a:lstStyle/>
+          <a:p>
+            <a:pPr algn="l"/>
+            <a:r>
+              <a:rPr sz="1050" b="0">
+                <a:solidFill>
+                  <a:srgbClr val="334155"/>
+                </a:solidFill>
+                <a:latin typeface="Open Sans"/>
+              </a:rPr>
+              <a:t>3,266</a:t>
+            </a:r>
+          </a:p>
+        </p:txBody>
+      </p:sp>
+      <p:sp>
+        <p:nvSpPr>
+          <p:cNvPr id="36" name="TextBox 35"/>
+          <p:cNvSpPr txBox="1"/>
+          <p:nvPr/>
+        </p:nvSpPr>
+        <p:spPr>
+          <a:xfrm>
+            <a:off x="3246120" y="5138927"/>
+            <a:ext cx="914400" cy="201168"/>
+          </a:xfrm>
+          <a:prstGeom prst="rect">
+            <a:avLst/>
+          </a:prstGeom>
+          <a:noFill/>
+        </p:spPr>
+        <p:txBody>
+          <a:bodyPr wrap="square" anchor="t" lIns="0" rIns="0" tIns="0" bIns="0">
+            <a:spAutoFit/>
+          </a:bodyPr>
+          <a:lstStyle/>
+          <a:p>
+            <a:pPr algn="l"/>
+            <a:r>
+              <a:rPr sz="1050" b="1">
+                <a:solidFill>
+                  <a:srgbClr val="059669"/>
+                </a:solidFill>
+                <a:latin typeface="Open Sans"/>
+              </a:rPr>
+              <a:t>$239K</a:t>
+            </a:r>
+          </a:p>
+        </p:txBody>
+      </p:sp>
+      <p:sp>
+        <p:nvSpPr>
+          <p:cNvPr id="37" name="TextBox 36"/>
+          <p:cNvSpPr txBox="1"/>
+          <p:nvPr/>
+        </p:nvSpPr>
+        <p:spPr>
+          <a:xfrm>
+            <a:off x="4297680" y="5138927"/>
+            <a:ext cx="1554480" cy="201168"/>
+          </a:xfrm>
+          <a:prstGeom prst="rect">
+            <a:avLst/>
+          </a:prstGeom>
+          <a:noFill/>
+        </p:spPr>
+        <p:txBody>
+          <a:bodyPr wrap="square" anchor="t" lIns="0" rIns="0" tIns="0" bIns="0">
+            <a:spAutoFit/>
+          </a:bodyPr>
+          <a:lstStyle/>
+          <a:p>
+            <a:pPr algn="l"/>
+            <a:r>
+              <a:rPr sz="950" b="0">
+                <a:solidFill>
+                  <a:srgbClr val="64748B"/>
+                </a:solidFill>
+                <a:latin typeface="Open Sans"/>
+              </a:rPr>
+              <a:t>High confidence</a:t>
+            </a:r>
+          </a:p>
+        </p:txBody>
+      </p:sp>
+      <p:sp>
+        <p:nvSpPr>
+          <p:cNvPr id="38" name="Rectangle 37"/>
+          <p:cNvSpPr/>
+          <p:nvPr/>
+        </p:nvSpPr>
+        <p:spPr>
+          <a:xfrm>
+            <a:off x="457200" y="5385816"/>
+            <a:ext cx="5486400" cy="301752"/>
+          </a:xfrm>
+          <a:prstGeom prst="rect">
+            <a:avLst/>
+          </a:prstGeom>
+          <a:solidFill>
+            <a:srgbClr val="FFFFFF"/>
+          </a:solidFill>
+          <a:ln>
+            <a:noFill/>
+          </a:ln>
+          <a:effectLst/>
+        </p:spPr>
+        <p:style>
+          <a:lnRef idx="1">
+            <a:schemeClr val="accent1"/>
+          </a:lnRef>
+          <a:fillRef idx="3">
+            <a:schemeClr val="accent1"/>
+          </a:fillRef>
+          <a:effectRef idx="2">
+            <a:schemeClr val="accent1"/>
+          </a:effectRef>
+          <a:fontRef idx="minor">
+            <a:schemeClr val="lt1"/>
+          </a:fontRef>
+        </p:style>
+        <p:txBody>
+          <a:bodyPr rtlCol="0" anchor="ctr"/>
+          <a:lstStyle/>
+          <a:p>
+            <a:pPr algn="ctr"/>
+          </a:p>
+        </p:txBody>
+      </p:sp>
+      <p:sp>
+        <p:nvSpPr>
+          <p:cNvPr id="39" name="TextBox 38"/>
+          <p:cNvSpPr txBox="1"/>
+          <p:nvPr/>
+        </p:nvSpPr>
+        <p:spPr>
+          <a:xfrm>
+            <a:off x="548640" y="5440679"/>
+            <a:ext cx="1554480" cy="201168"/>
+          </a:xfrm>
+          <a:prstGeom prst="rect">
+            <a:avLst/>
+          </a:prstGeom>
+          <a:noFill/>
+        </p:spPr>
+        <p:txBody>
+          <a:bodyPr wrap="square" anchor="t" lIns="0" rIns="0" tIns="0" bIns="0">
+            <a:spAutoFit/>
+          </a:bodyPr>
+          <a:lstStyle/>
+          <a:p>
+            <a:pPr algn="l"/>
+            <a:r>
+              <a:rPr sz="1050" b="1">
+                <a:solidFill>
+                  <a:srgbClr val="0F172A"/>
+                </a:solidFill>
+                <a:latin typeface="Open Sans"/>
+              </a:rPr>
+              <a:t>2–5 records</a:t>
+            </a:r>
+          </a:p>
+        </p:txBody>
+      </p:sp>
+      <p:sp>
+        <p:nvSpPr>
+          <p:cNvPr id="40" name="TextBox 39"/>
+          <p:cNvSpPr txBox="1"/>
+          <p:nvPr/>
+        </p:nvSpPr>
+        <p:spPr>
+          <a:xfrm>
+            <a:off x="2194560" y="5440679"/>
+            <a:ext cx="914400" cy="201168"/>
+          </a:xfrm>
+          <a:prstGeom prst="rect">
+            <a:avLst/>
+          </a:prstGeom>
+          <a:noFill/>
+        </p:spPr>
+        <p:txBody>
+          <a:bodyPr wrap="square" anchor="t" lIns="0" rIns="0" tIns="0" bIns="0">
+            <a:spAutoFit/>
+          </a:bodyPr>
+          <a:lstStyle/>
+          <a:p>
+            <a:pPr algn="l"/>
+            <a:r>
+              <a:rPr sz="1050" b="0">
+                <a:solidFill>
+                  <a:srgbClr val="334155"/>
+                </a:solidFill>
+                <a:latin typeface="Open Sans"/>
+              </a:rPr>
+              <a:t>5,788</a:t>
+            </a:r>
+          </a:p>
+        </p:txBody>
+      </p:sp>
+      <p:sp>
+        <p:nvSpPr>
+          <p:cNvPr id="41" name="TextBox 40"/>
+          <p:cNvSpPr txBox="1"/>
+          <p:nvPr/>
+        </p:nvSpPr>
+        <p:spPr>
+          <a:xfrm>
+            <a:off x="3246120" y="5440679"/>
+            <a:ext cx="914400" cy="201168"/>
+          </a:xfrm>
+          <a:prstGeom prst="rect">
+            <a:avLst/>
+          </a:prstGeom>
+          <a:noFill/>
+        </p:spPr>
+        <p:txBody>
+          <a:bodyPr wrap="square" anchor="t" lIns="0" rIns="0" tIns="0" bIns="0">
+            <a:spAutoFit/>
+          </a:bodyPr>
+          <a:lstStyle/>
+          <a:p>
+            <a:pPr algn="l"/>
+            <a:r>
+              <a:rPr sz="1050" b="1">
+                <a:solidFill>
+                  <a:srgbClr val="059669"/>
+                </a:solidFill>
+                <a:latin typeface="Open Sans"/>
+              </a:rPr>
+              <a:t>$1.21M</a:t>
+            </a:r>
+          </a:p>
+        </p:txBody>
+      </p:sp>
+      <p:sp>
+        <p:nvSpPr>
+          <p:cNvPr id="42" name="TextBox 41"/>
+          <p:cNvSpPr txBox="1"/>
+          <p:nvPr/>
+        </p:nvSpPr>
+        <p:spPr>
+          <a:xfrm>
+            <a:off x="4297680" y="5440679"/>
+            <a:ext cx="1554480" cy="201168"/>
+          </a:xfrm>
+          <a:prstGeom prst="rect">
+            <a:avLst/>
+          </a:prstGeom>
+          <a:noFill/>
+        </p:spPr>
+        <p:txBody>
+          <a:bodyPr wrap="square" anchor="t" lIns="0" rIns="0" tIns="0" bIns="0">
+            <a:spAutoFit/>
+          </a:bodyPr>
+          <a:lstStyle/>
+          <a:p>
+            <a:pPr algn="l"/>
+            <a:r>
+              <a:rPr sz="950" b="0">
+                <a:solidFill>
+                  <a:srgbClr val="64748B"/>
+                </a:solidFill>
+                <a:latin typeface="Open Sans"/>
+              </a:rPr>
+              <a:t>High confidence</a:t>
+            </a:r>
+          </a:p>
+        </p:txBody>
+      </p:sp>
+      <p:sp>
+        <p:nvSpPr>
+          <p:cNvPr id="43" name="Rectangle 42"/>
+          <p:cNvSpPr/>
+          <p:nvPr/>
+        </p:nvSpPr>
+        <p:spPr>
+          <a:xfrm>
+            <a:off x="457200" y="5687568"/>
+            <a:ext cx="5486400" cy="301752"/>
+          </a:xfrm>
+          <a:prstGeom prst="rect">
+            <a:avLst/>
+          </a:prstGeom>
+          <a:solidFill>
+            <a:srgbClr val="F8FAFC"/>
+          </a:solidFill>
+          <a:ln>
+            <a:noFill/>
+          </a:ln>
+          <a:effectLst/>
+        </p:spPr>
+        <p:style>
+          <a:lnRef idx="1">
+            <a:schemeClr val="accent1"/>
+          </a:lnRef>
+          <a:fillRef idx="3">
+            <a:schemeClr val="accent1"/>
+          </a:fillRef>
+          <a:effectRef idx="2">
+            <a:schemeClr val="accent1"/>
+          </a:effectRef>
+          <a:fontRef idx="minor">
+            <a:schemeClr val="lt1"/>
+          </a:fontRef>
+        </p:style>
+        <p:txBody>
+          <a:bodyPr rtlCol="0" anchor="ctr"/>
+          <a:lstStyle/>
+          <a:p>
+            <a:pPr algn="ctr"/>
+          </a:p>
+        </p:txBody>
+      </p:sp>
+      <p:sp>
+        <p:nvSpPr>
+          <p:cNvPr id="44" name="TextBox 43"/>
+          <p:cNvSpPr txBox="1"/>
+          <p:nvPr/>
+        </p:nvSpPr>
+        <p:spPr>
+          <a:xfrm>
+            <a:off x="548640" y="5742431"/>
+            <a:ext cx="1554480" cy="201168"/>
+          </a:xfrm>
+          <a:prstGeom prst="rect">
+            <a:avLst/>
+          </a:prstGeom>
+          <a:noFill/>
+        </p:spPr>
+        <p:txBody>
+          <a:bodyPr wrap="square" anchor="t" lIns="0" rIns="0" tIns="0" bIns="0">
+            <a:spAutoFit/>
+          </a:bodyPr>
+          <a:lstStyle/>
+          <a:p>
+            <a:pPr algn="l"/>
+            <a:r>
+              <a:rPr sz="1050" b="1">
+                <a:solidFill>
+                  <a:srgbClr val="0F172A"/>
+                </a:solidFill>
+                <a:latin typeface="Open Sans"/>
+              </a:rPr>
+              <a:t>6–20 records</a:t>
+            </a:r>
+          </a:p>
+        </p:txBody>
+      </p:sp>
+      <p:sp>
+        <p:nvSpPr>
+          <p:cNvPr id="45" name="TextBox 44"/>
+          <p:cNvSpPr txBox="1"/>
+          <p:nvPr/>
+        </p:nvSpPr>
+        <p:spPr>
+          <a:xfrm>
+            <a:off x="2194560" y="5742431"/>
+            <a:ext cx="914400" cy="201168"/>
+          </a:xfrm>
+          <a:prstGeom prst="rect">
+            <a:avLst/>
+          </a:prstGeom>
+          <a:noFill/>
+        </p:spPr>
+        <p:txBody>
+          <a:bodyPr wrap="square" anchor="t" lIns="0" rIns="0" tIns="0" bIns="0">
+            <a:spAutoFit/>
+          </a:bodyPr>
+          <a:lstStyle/>
+          <a:p>
+            <a:pPr algn="l"/>
+            <a:r>
+              <a:rPr sz="1050" b="0">
+                <a:solidFill>
+                  <a:srgbClr val="334155"/>
+                </a:solidFill>
+                <a:latin typeface="Open Sans"/>
+              </a:rPr>
+              <a:t>4,393</a:t>
+            </a:r>
+          </a:p>
+        </p:txBody>
+      </p:sp>
+      <p:sp>
+        <p:nvSpPr>
+          <p:cNvPr id="46" name="TextBox 45"/>
+          <p:cNvSpPr txBox="1"/>
+          <p:nvPr/>
+        </p:nvSpPr>
+        <p:spPr>
+          <a:xfrm>
+            <a:off x="3246120" y="5742431"/>
+            <a:ext cx="914400" cy="201168"/>
+          </a:xfrm>
+          <a:prstGeom prst="rect">
+            <a:avLst/>
+          </a:prstGeom>
+          <a:noFill/>
+        </p:spPr>
+        <p:txBody>
+          <a:bodyPr wrap="square" anchor="t" lIns="0" rIns="0" tIns="0" bIns="0">
+            <a:spAutoFit/>
+          </a:bodyPr>
+          <a:lstStyle/>
+          <a:p>
+            <a:pPr algn="l"/>
+            <a:r>
+              <a:rPr sz="1050" b="1">
+                <a:solidFill>
+                  <a:srgbClr val="FFB352"/>
+                </a:solidFill>
+                <a:latin typeface="Open Sans"/>
+              </a:rPr>
+              <a:t>$3.50M</a:t>
+            </a:r>
+          </a:p>
+        </p:txBody>
+      </p:sp>
+      <p:sp>
+        <p:nvSpPr>
+          <p:cNvPr id="47" name="TextBox 46"/>
+          <p:cNvSpPr txBox="1"/>
+          <p:nvPr/>
+        </p:nvSpPr>
+        <p:spPr>
+          <a:xfrm>
+            <a:off x="4297680" y="5742431"/>
+            <a:ext cx="1554480" cy="201168"/>
+          </a:xfrm>
+          <a:prstGeom prst="rect">
+            <a:avLst/>
+          </a:prstGeom>
+          <a:noFill/>
+        </p:spPr>
+        <p:txBody>
+          <a:bodyPr wrap="square" anchor="t" lIns="0" rIns="0" tIns="0" bIns="0">
+            <a:spAutoFit/>
+          </a:bodyPr>
+          <a:lstStyle/>
+          <a:p>
+            <a:pPr algn="l"/>
+            <a:r>
+              <a:rPr sz="950" b="0">
+                <a:solidFill>
+                  <a:srgbClr val="64748B"/>
+                </a:solidFill>
+                <a:latin typeface="Open Sans"/>
+              </a:rPr>
+              <a:t>Mixed — needs review</a:t>
+            </a:r>
+          </a:p>
+        </p:txBody>
+      </p:sp>
+      <p:sp>
+        <p:nvSpPr>
+          <p:cNvPr id="48" name="Rectangle 47"/>
+          <p:cNvSpPr/>
+          <p:nvPr/>
+        </p:nvSpPr>
+        <p:spPr>
+          <a:xfrm>
+            <a:off x="457200" y="5989320"/>
+            <a:ext cx="5486400" cy="301752"/>
+          </a:xfrm>
+          <a:prstGeom prst="rect">
+            <a:avLst/>
+          </a:prstGeom>
+          <a:solidFill>
+            <a:srgbClr val="FFFFFF"/>
+          </a:solidFill>
+          <a:ln>
+            <a:noFill/>
+          </a:ln>
+          <a:effectLst/>
+        </p:spPr>
+        <p:style>
+          <a:lnRef idx="1">
+            <a:schemeClr val="accent1"/>
+          </a:lnRef>
+          <a:fillRef idx="3">
+            <a:schemeClr val="accent1"/>
+          </a:fillRef>
+          <a:effectRef idx="2">
+            <a:schemeClr val="accent1"/>
+          </a:effectRef>
+          <a:fontRef idx="minor">
+            <a:schemeClr val="lt1"/>
+          </a:fontRef>
+        </p:style>
+        <p:txBody>
+          <a:bodyPr rtlCol="0" anchor="ctr"/>
+          <a:lstStyle/>
+          <a:p>
+            <a:pPr algn="ctr"/>
+          </a:p>
+        </p:txBody>
+      </p:sp>
+      <p:sp>
+        <p:nvSpPr>
+          <p:cNvPr id="49" name="TextBox 48"/>
+          <p:cNvSpPr txBox="1"/>
+          <p:nvPr/>
+        </p:nvSpPr>
+        <p:spPr>
+          <a:xfrm>
+            <a:off x="548640" y="6044183"/>
+            <a:ext cx="1554480" cy="201168"/>
+          </a:xfrm>
+          <a:prstGeom prst="rect">
+            <a:avLst/>
+          </a:prstGeom>
+          <a:noFill/>
+        </p:spPr>
+        <p:txBody>
+          <a:bodyPr wrap="square" anchor="t" lIns="0" rIns="0" tIns="0" bIns="0">
+            <a:spAutoFit/>
+          </a:bodyPr>
+          <a:lstStyle/>
+          <a:p>
+            <a:pPr algn="l"/>
+            <a:r>
+              <a:rPr sz="1050" b="1">
+                <a:solidFill>
+                  <a:srgbClr val="0F172A"/>
+                </a:solidFill>
+                <a:latin typeface="Open Sans"/>
+              </a:rPr>
+              <a:t>20+ records</a:t>
+            </a:r>
+          </a:p>
+        </p:txBody>
+      </p:sp>
+      <p:sp>
+        <p:nvSpPr>
+          <p:cNvPr id="50" name="TextBox 49"/>
+          <p:cNvSpPr txBox="1"/>
+          <p:nvPr/>
+        </p:nvSpPr>
+        <p:spPr>
+          <a:xfrm>
+            <a:off x="2194560" y="6044183"/>
+            <a:ext cx="914400" cy="201168"/>
+          </a:xfrm>
+          <a:prstGeom prst="rect">
+            <a:avLst/>
+          </a:prstGeom>
+          <a:noFill/>
+        </p:spPr>
+        <p:txBody>
+          <a:bodyPr wrap="square" anchor="t" lIns="0" rIns="0" tIns="0" bIns="0">
+            <a:spAutoFit/>
+          </a:bodyPr>
+          <a:lstStyle/>
+          <a:p>
+            <a:pPr algn="l"/>
+            <a:r>
+              <a:rPr sz="1050" b="0">
+                <a:solidFill>
+                  <a:srgbClr val="334155"/>
+                </a:solidFill>
+                <a:latin typeface="Open Sans"/>
+              </a:rPr>
+              <a:t>8,417</a:t>
+            </a:r>
+          </a:p>
+        </p:txBody>
+      </p:sp>
+      <p:sp>
+        <p:nvSpPr>
+          <p:cNvPr id="51" name="TextBox 50"/>
+          <p:cNvSpPr txBox="1"/>
+          <p:nvPr/>
+        </p:nvSpPr>
+        <p:spPr>
+          <a:xfrm>
+            <a:off x="3246120" y="6044183"/>
+            <a:ext cx="914400" cy="201168"/>
+          </a:xfrm>
+          <a:prstGeom prst="rect">
+            <a:avLst/>
+          </a:prstGeom>
+          <a:noFill/>
+        </p:spPr>
+        <p:txBody>
+          <a:bodyPr wrap="square" anchor="t" lIns="0" rIns="0" tIns="0" bIns="0">
+            <a:spAutoFit/>
+          </a:bodyPr>
+          <a:lstStyle/>
+          <a:p>
+            <a:pPr algn="l"/>
+            <a:r>
+              <a:rPr sz="1050" b="1">
+                <a:solidFill>
+                  <a:srgbClr val="64748B"/>
+                </a:solidFill>
+                <a:latin typeface="Open Sans"/>
+              </a:rPr>
+              <a:t>$319M</a:t>
+            </a:r>
+          </a:p>
+        </p:txBody>
+      </p:sp>
+      <p:sp>
+        <p:nvSpPr>
+          <p:cNvPr id="52" name="TextBox 51"/>
+          <p:cNvSpPr txBox="1"/>
+          <p:nvPr/>
+        </p:nvSpPr>
+        <p:spPr>
+          <a:xfrm>
+            <a:off x="4297680" y="6044183"/>
+            <a:ext cx="1554480" cy="201168"/>
+          </a:xfrm>
+          <a:prstGeom prst="rect">
+            <a:avLst/>
+          </a:prstGeom>
+          <a:noFill/>
+        </p:spPr>
+        <p:txBody>
+          <a:bodyPr wrap="square" anchor="t" lIns="0" rIns="0" tIns="0" bIns="0">
+            <a:spAutoFit/>
+          </a:bodyPr>
+          <a:lstStyle/>
+          <a:p>
+            <a:pPr algn="l"/>
+            <a:r>
+              <a:rPr sz="950" b="0">
+                <a:solidFill>
+                  <a:srgbClr val="64748B"/>
+                </a:solidFill>
+                <a:latin typeface="Open Sans"/>
+              </a:rPr>
+              <a:t>Common-name collisions</a:t>
+            </a:r>
+          </a:p>
+        </p:txBody>
+      </p:sp>
+      <p:sp>
+        <p:nvSpPr>
+          <p:cNvPr id="53" name="TextBox 52"/>
+          <p:cNvSpPr txBox="1"/>
+          <p:nvPr/>
+        </p:nvSpPr>
+        <p:spPr>
+          <a:xfrm>
+            <a:off x="6217920" y="4206240"/>
+            <a:ext cx="5486400" cy="320040"/>
+          </a:xfrm>
+          <a:prstGeom prst="rect">
+            <a:avLst/>
+          </a:prstGeom>
+          <a:noFill/>
+        </p:spPr>
+        <p:txBody>
+          <a:bodyPr wrap="square" anchor="t" lIns="0" rIns="0" tIns="0" bIns="0">
+            <a:spAutoFit/>
+          </a:bodyPr>
+          <a:lstStyle/>
+          <a:p>
+            <a:pPr algn="l"/>
+            <a:r>
+              <a:rPr sz="1100" b="1">
+                <a:solidFill>
+                  <a:srgbClr val="2863C5"/>
+                </a:solidFill>
+                <a:latin typeface="Open Sans"/>
+              </a:rPr>
+              <a:t>MATCHES BY TIER</a:t>
+            </a:r>
+          </a:p>
+        </p:txBody>
+      </p:sp>
+      <p:sp>
+        <p:nvSpPr>
+          <p:cNvPr id="54" name="TextBox 53"/>
+          <p:cNvSpPr txBox="1"/>
+          <p:nvPr/>
+        </p:nvSpPr>
+        <p:spPr>
+          <a:xfrm>
+            <a:off x="6217920" y="4498848"/>
+            <a:ext cx="5486400" cy="274320"/>
+          </a:xfrm>
+          <a:prstGeom prst="rect">
+            <a:avLst/>
+          </a:prstGeom>
+          <a:noFill/>
+        </p:spPr>
+        <p:txBody>
+          <a:bodyPr wrap="square" anchor="t" lIns="0" rIns="0" tIns="0" bIns="0">
+            <a:spAutoFit/>
+          </a:bodyPr>
+          <a:lstStyle/>
+          <a:p>
+            <a:pPr algn="l"/>
+            <a:r>
+              <a:rPr sz="1000" b="0">
+                <a:solidFill>
+                  <a:srgbClr val="64748B"/>
+                </a:solidFill>
+                <a:latin typeface="Open Sans"/>
+              </a:rPr>
+              <a:t>Tier 04 ($500+) carries 53% of the value despite 2% of records.</a:t>
+            </a:r>
+          </a:p>
+        </p:txBody>
+      </p:sp>
+      <p:sp>
+        <p:nvSpPr>
+          <p:cNvPr id="55" name="Rectangle 54"/>
+          <p:cNvSpPr/>
+          <p:nvPr/>
+        </p:nvSpPr>
+        <p:spPr>
+          <a:xfrm>
+            <a:off x="6217920" y="4846320"/>
+            <a:ext cx="5486400" cy="237744"/>
+          </a:xfrm>
+          <a:prstGeom prst="rect">
+            <a:avLst/>
+          </a:prstGeom>
+          <a:solidFill>
+            <a:srgbClr val="0F172A"/>
+          </a:solidFill>
+          <a:ln>
+            <a:noFill/>
+          </a:ln>
+          <a:effectLst/>
+        </p:spPr>
+        <p:style>
+          <a:lnRef idx="1">
+            <a:schemeClr val="accent1"/>
+          </a:lnRef>
+          <a:fillRef idx="3">
+            <a:schemeClr val="accent1"/>
+          </a:fillRef>
+          <a:effectRef idx="2">
+            <a:schemeClr val="accent1"/>
+          </a:effectRef>
+          <a:fontRef idx="minor">
+            <a:schemeClr val="lt1"/>
+          </a:fontRef>
+        </p:style>
+        <p:txBody>
+          <a:bodyPr rtlCol="0" anchor="ctr"/>
+          <a:lstStyle/>
+          <a:p>
+            <a:pPr algn="ctr"/>
+          </a:p>
+        </p:txBody>
+      </p:sp>
+      <p:sp>
+        <p:nvSpPr>
+          <p:cNvPr id="56" name="TextBox 55"/>
+          <p:cNvSpPr txBox="1"/>
+          <p:nvPr/>
+        </p:nvSpPr>
+        <p:spPr>
+          <a:xfrm>
+            <a:off x="6309360" y="4882896"/>
+            <a:ext cx="914400" cy="182880"/>
+          </a:xfrm>
+          <a:prstGeom prst="rect">
+            <a:avLst/>
+          </a:prstGeom>
+          <a:noFill/>
+        </p:spPr>
+        <p:txBody>
+          <a:bodyPr wrap="square" anchor="t" lIns="0" rIns="0" tIns="0" bIns="0">
+            <a:spAutoFit/>
+          </a:bodyPr>
+          <a:lstStyle/>
+          <a:p>
+            <a:pPr algn="l"/>
+            <a:r>
+              <a:rPr sz="900" b="1">
+                <a:solidFill>
+                  <a:srgbClr val="FFFFFF"/>
+                </a:solidFill>
+                <a:latin typeface="Open Sans"/>
+              </a:rPr>
+              <a:t>Tier</a:t>
+            </a:r>
+          </a:p>
+        </p:txBody>
+      </p:sp>
+      <p:sp>
+        <p:nvSpPr>
+          <p:cNvPr id="57" name="TextBox 56"/>
+          <p:cNvSpPr txBox="1"/>
+          <p:nvPr/>
+        </p:nvSpPr>
+        <p:spPr>
+          <a:xfrm>
+            <a:off x="7269480" y="4882896"/>
+            <a:ext cx="1280160" cy="182880"/>
+          </a:xfrm>
+          <a:prstGeom prst="rect">
+            <a:avLst/>
+          </a:prstGeom>
+          <a:noFill/>
+        </p:spPr>
+        <p:txBody>
+          <a:bodyPr wrap="square" anchor="t" lIns="0" rIns="0" tIns="0" bIns="0">
+            <a:spAutoFit/>
+          </a:bodyPr>
+          <a:lstStyle/>
+          <a:p>
+            <a:pPr algn="l"/>
+            <a:r>
+              <a:rPr sz="900" b="1">
+                <a:solidFill>
+                  <a:srgbClr val="FFFFFF"/>
+                </a:solidFill>
+                <a:latin typeface="Open Sans"/>
+              </a:rPr>
+              <a:t>Range</a:t>
+            </a:r>
+          </a:p>
+        </p:txBody>
+      </p:sp>
+      <p:sp>
+        <p:nvSpPr>
+          <p:cNvPr id="58" name="TextBox 57"/>
+          <p:cNvSpPr txBox="1"/>
+          <p:nvPr/>
+        </p:nvSpPr>
+        <p:spPr>
+          <a:xfrm>
+            <a:off x="8641080" y="4882896"/>
+            <a:ext cx="1371600" cy="182880"/>
+          </a:xfrm>
+          <a:prstGeom prst="rect">
+            <a:avLst/>
+          </a:prstGeom>
+          <a:noFill/>
+        </p:spPr>
+        <p:txBody>
+          <a:bodyPr wrap="square" anchor="t" lIns="0" rIns="0" tIns="0" bIns="0">
+            <a:spAutoFit/>
+          </a:bodyPr>
+          <a:lstStyle/>
+          <a:p>
+            <a:pPr algn="l"/>
+            <a:r>
+              <a:rPr sz="900" b="1">
+                <a:solidFill>
+                  <a:srgbClr val="FFFFFF"/>
+                </a:solidFill>
+                <a:latin typeface="Open Sans"/>
+              </a:rPr>
+              <a:t>Records</a:t>
+            </a:r>
+          </a:p>
+        </p:txBody>
+      </p:sp>
+      <p:sp>
+        <p:nvSpPr>
+          <p:cNvPr id="59" name="TextBox 58"/>
+          <p:cNvSpPr txBox="1"/>
+          <p:nvPr/>
+        </p:nvSpPr>
+        <p:spPr>
+          <a:xfrm>
+            <a:off x="10104120" y="4882896"/>
+            <a:ext cx="1371600" cy="182880"/>
+          </a:xfrm>
+          <a:prstGeom prst="rect">
+            <a:avLst/>
+          </a:prstGeom>
+          <a:noFill/>
+        </p:spPr>
+        <p:txBody>
+          <a:bodyPr wrap="square" anchor="t" lIns="0" rIns="0" tIns="0" bIns="0">
+            <a:spAutoFit/>
+          </a:bodyPr>
+          <a:lstStyle/>
+          <a:p>
+            <a:pPr algn="l"/>
+            <a:r>
+              <a:rPr sz="900" b="1">
+                <a:solidFill>
+                  <a:srgbClr val="FFFFFF"/>
+                </a:solidFill>
+                <a:latin typeface="Open Sans"/>
+              </a:rPr>
+              <a:t>$ value</a:t>
+            </a:r>
+          </a:p>
+        </p:txBody>
+      </p:sp>
+      <p:sp>
+        <p:nvSpPr>
+          <p:cNvPr id="60" name="Rectangle 59"/>
+          <p:cNvSpPr/>
+          <p:nvPr/>
+        </p:nvSpPr>
+        <p:spPr>
+          <a:xfrm>
+            <a:off x="6217920" y="5084064"/>
+            <a:ext cx="5486400" cy="301752"/>
+          </a:xfrm>
+          <a:prstGeom prst="rect">
+            <a:avLst/>
+          </a:prstGeom>
+          <a:solidFill>
+            <a:srgbClr val="F8FAFC"/>
+          </a:solidFill>
+          <a:ln>
+            <a:noFill/>
+          </a:ln>
+          <a:effectLst/>
+        </p:spPr>
+        <p:style>
+          <a:lnRef idx="1">
+            <a:schemeClr val="accent1"/>
+          </a:lnRef>
+          <a:fillRef idx="3">
+            <a:schemeClr val="accent1"/>
+          </a:fillRef>
+          <a:effectRef idx="2">
+            <a:schemeClr val="accent1"/>
+          </a:effectRef>
+          <a:fontRef idx="minor">
+            <a:schemeClr val="lt1"/>
+          </a:fontRef>
+        </p:style>
+        <p:txBody>
+          <a:bodyPr rtlCol="0" anchor="ctr"/>
+          <a:lstStyle/>
+          <a:p>
+            <a:pPr algn="ctr"/>
+          </a:p>
+        </p:txBody>
+      </p:sp>
+      <p:sp>
+        <p:nvSpPr>
+          <p:cNvPr id="61" name="TextBox 60"/>
+          <p:cNvSpPr txBox="1"/>
+          <p:nvPr/>
+        </p:nvSpPr>
+        <p:spPr>
+          <a:xfrm>
+            <a:off x="6309360" y="5138927"/>
+            <a:ext cx="914400" cy="201168"/>
+          </a:xfrm>
+          <a:prstGeom prst="rect">
+            <a:avLst/>
+          </a:prstGeom>
+          <a:noFill/>
+        </p:spPr>
+        <p:txBody>
+          <a:bodyPr wrap="square" anchor="t" lIns="0" rIns="0" tIns="0" bIns="0">
+            <a:spAutoFit/>
+          </a:bodyPr>
+          <a:lstStyle/>
+          <a:p>
+            <a:pPr algn="l"/>
+            <a:r>
+              <a:rPr sz="1050" b="1">
+                <a:solidFill>
+                  <a:srgbClr val="64748B"/>
+                </a:solidFill>
+                <a:latin typeface="Open Sans"/>
+              </a:rPr>
+              <a:t>Tier 01</a:t>
+            </a:r>
+          </a:p>
+        </p:txBody>
+      </p:sp>
+      <p:sp>
+        <p:nvSpPr>
+          <p:cNvPr id="62" name="TextBox 61"/>
+          <p:cNvSpPr txBox="1"/>
+          <p:nvPr/>
+        </p:nvSpPr>
+        <p:spPr>
+          <a:xfrm>
+            <a:off x="7269480" y="5138927"/>
+            <a:ext cx="1280160" cy="201168"/>
+          </a:xfrm>
+          <a:prstGeom prst="rect">
+            <a:avLst/>
+          </a:prstGeom>
+          <a:noFill/>
+        </p:spPr>
+        <p:txBody>
+          <a:bodyPr wrap="square" anchor="t" lIns="0" rIns="0" tIns="0" bIns="0">
+            <a:spAutoFit/>
+          </a:bodyPr>
+          <a:lstStyle/>
+          <a:p>
+            <a:pPr algn="l"/>
+            <a:r>
+              <a:rPr sz="950" b="0">
+                <a:solidFill>
+                  <a:srgbClr val="334155"/>
+                </a:solidFill>
+                <a:latin typeface="Open Sans"/>
+              </a:rPr>
+              <a:t>$0–$9.99</a:t>
+            </a:r>
+          </a:p>
+        </p:txBody>
+      </p:sp>
+      <p:sp>
+        <p:nvSpPr>
+          <p:cNvPr id="63" name="TextBox 62"/>
+          <p:cNvSpPr txBox="1"/>
+          <p:nvPr/>
+        </p:nvSpPr>
+        <p:spPr>
+          <a:xfrm>
+            <a:off x="8641080" y="5138927"/>
+            <a:ext cx="1371600" cy="201168"/>
+          </a:xfrm>
+          <a:prstGeom prst="rect">
+            <a:avLst/>
+          </a:prstGeom>
+          <a:noFill/>
+        </p:spPr>
+        <p:txBody>
+          <a:bodyPr wrap="square" anchor="t" lIns="0" rIns="0" tIns="0" bIns="0">
+            <a:spAutoFit/>
+          </a:bodyPr>
+          <a:lstStyle/>
+          <a:p>
+            <a:pPr algn="l"/>
+            <a:r>
+              <a:rPr sz="1050" b="0">
+                <a:solidFill>
+                  <a:srgbClr val="334155"/>
+                </a:solidFill>
+                <a:latin typeface="Open Sans"/>
+              </a:rPr>
+              <a:t>2,283,461</a:t>
+            </a:r>
+          </a:p>
+        </p:txBody>
+      </p:sp>
+      <p:sp>
+        <p:nvSpPr>
+          <p:cNvPr id="64" name="TextBox 63"/>
+          <p:cNvSpPr txBox="1"/>
+          <p:nvPr/>
+        </p:nvSpPr>
+        <p:spPr>
+          <a:xfrm>
+            <a:off x="10104120" y="5138927"/>
+            <a:ext cx="1371600" cy="201168"/>
+          </a:xfrm>
+          <a:prstGeom prst="rect">
+            <a:avLst/>
+          </a:prstGeom>
+          <a:noFill/>
+        </p:spPr>
+        <p:txBody>
+          <a:bodyPr wrap="square" anchor="t" lIns="0" rIns="0" tIns="0" bIns="0">
+            <a:spAutoFit/>
+          </a:bodyPr>
+          <a:lstStyle/>
+          <a:p>
+            <a:pPr algn="l"/>
+            <a:r>
+              <a:rPr sz="1050" b="1">
+                <a:solidFill>
+                  <a:srgbClr val="64748B"/>
+                </a:solidFill>
+                <a:latin typeface="Open Sans"/>
+              </a:rPr>
+              <a:t>$5.8M</a:t>
+            </a:r>
+          </a:p>
+        </p:txBody>
+      </p:sp>
+      <p:sp>
+        <p:nvSpPr>
+          <p:cNvPr id="65" name="Rectangle 64"/>
+          <p:cNvSpPr/>
+          <p:nvPr/>
+        </p:nvSpPr>
+        <p:spPr>
+          <a:xfrm>
+            <a:off x="6217920" y="5385816"/>
+            <a:ext cx="5486400" cy="301752"/>
+          </a:xfrm>
+          <a:prstGeom prst="rect">
+            <a:avLst/>
+          </a:prstGeom>
+          <a:solidFill>
+            <a:srgbClr val="FFFFFF"/>
+          </a:solidFill>
+          <a:ln>
+            <a:noFill/>
+          </a:ln>
+          <a:effectLst/>
+        </p:spPr>
+        <p:style>
+          <a:lnRef idx="1">
+            <a:schemeClr val="accent1"/>
+          </a:lnRef>
+          <a:fillRef idx="3">
+            <a:schemeClr val="accent1"/>
+          </a:fillRef>
+          <a:effectRef idx="2">
+            <a:schemeClr val="accent1"/>
+          </a:effectRef>
+          <a:fontRef idx="minor">
+            <a:schemeClr val="lt1"/>
+          </a:fontRef>
+        </p:style>
+        <p:txBody>
+          <a:bodyPr rtlCol="0" anchor="ctr"/>
+          <a:lstStyle/>
+          <a:p>
+            <a:pPr algn="ctr"/>
+          </a:p>
+        </p:txBody>
+      </p:sp>
+      <p:sp>
+        <p:nvSpPr>
+          <p:cNvPr id="66" name="TextBox 65"/>
+          <p:cNvSpPr txBox="1"/>
+          <p:nvPr/>
+        </p:nvSpPr>
+        <p:spPr>
+          <a:xfrm>
+            <a:off x="6309360" y="5440679"/>
+            <a:ext cx="914400" cy="201168"/>
+          </a:xfrm>
+          <a:prstGeom prst="rect">
+            <a:avLst/>
+          </a:prstGeom>
+          <a:noFill/>
+        </p:spPr>
+        <p:txBody>
+          <a:bodyPr wrap="square" anchor="t" lIns="0" rIns="0" tIns="0" bIns="0">
+            <a:spAutoFit/>
+          </a:bodyPr>
+          <a:lstStyle/>
+          <a:p>
+            <a:pPr algn="l"/>
+            <a:r>
+              <a:rPr sz="1050" b="1">
+                <a:solidFill>
+                  <a:srgbClr val="FFB352"/>
+                </a:solidFill>
+                <a:latin typeface="Open Sans"/>
+              </a:rPr>
+              <a:t>Tier 02</a:t>
+            </a:r>
+          </a:p>
+        </p:txBody>
+      </p:sp>
+      <p:sp>
+        <p:nvSpPr>
+          <p:cNvPr id="67" name="TextBox 66"/>
+          <p:cNvSpPr txBox="1"/>
+          <p:nvPr/>
+        </p:nvSpPr>
+        <p:spPr>
+          <a:xfrm>
+            <a:off x="7269480" y="5440679"/>
+            <a:ext cx="1280160" cy="201168"/>
+          </a:xfrm>
+          <a:prstGeom prst="rect">
+            <a:avLst/>
+          </a:prstGeom>
+          <a:noFill/>
+        </p:spPr>
+        <p:txBody>
+          <a:bodyPr wrap="square" anchor="t" lIns="0" rIns="0" tIns="0" bIns="0">
+            <a:spAutoFit/>
+          </a:bodyPr>
+          <a:lstStyle/>
+          <a:p>
+            <a:pPr algn="l"/>
+            <a:r>
+              <a:rPr sz="950" b="0">
+                <a:solidFill>
+                  <a:srgbClr val="334155"/>
+                </a:solidFill>
+                <a:latin typeface="Open Sans"/>
+              </a:rPr>
+              <a:t>$10–$99.99</a:t>
+            </a:r>
+          </a:p>
+        </p:txBody>
+      </p:sp>
+      <p:sp>
+        <p:nvSpPr>
+          <p:cNvPr id="68" name="TextBox 67"/>
+          <p:cNvSpPr txBox="1"/>
+          <p:nvPr/>
+        </p:nvSpPr>
+        <p:spPr>
+          <a:xfrm>
+            <a:off x="8641080" y="5440679"/>
+            <a:ext cx="1371600" cy="201168"/>
+          </a:xfrm>
+          <a:prstGeom prst="rect">
+            <a:avLst/>
+          </a:prstGeom>
+          <a:noFill/>
+        </p:spPr>
+        <p:txBody>
+          <a:bodyPr wrap="square" anchor="t" lIns="0" rIns="0" tIns="0" bIns="0">
+            <a:spAutoFit/>
+          </a:bodyPr>
+          <a:lstStyle/>
+          <a:p>
+            <a:pPr algn="l"/>
+            <a:r>
+              <a:rPr sz="1050" b="0">
+                <a:solidFill>
+                  <a:srgbClr val="334155"/>
+                </a:solidFill>
+                <a:latin typeface="Open Sans"/>
+              </a:rPr>
+              <a:t>1,622,140</a:t>
+            </a:r>
+          </a:p>
+        </p:txBody>
+      </p:sp>
+      <p:sp>
+        <p:nvSpPr>
+          <p:cNvPr id="69" name="TextBox 68"/>
+          <p:cNvSpPr txBox="1"/>
+          <p:nvPr/>
+        </p:nvSpPr>
+        <p:spPr>
+          <a:xfrm>
+            <a:off x="10104120" y="5440679"/>
+            <a:ext cx="1371600" cy="201168"/>
+          </a:xfrm>
+          <a:prstGeom prst="rect">
+            <a:avLst/>
+          </a:prstGeom>
+          <a:noFill/>
+        </p:spPr>
+        <p:txBody>
+          <a:bodyPr wrap="square" anchor="t" lIns="0" rIns="0" tIns="0" bIns="0">
+            <a:spAutoFit/>
+          </a:bodyPr>
+          <a:lstStyle/>
+          <a:p>
+            <a:pPr algn="l"/>
+            <a:r>
+              <a:rPr sz="1050" b="1">
+                <a:solidFill>
+                  <a:srgbClr val="FFB352"/>
+                </a:solidFill>
+                <a:latin typeface="Open Sans"/>
+              </a:rPr>
+              <a:t>$57.9M</a:t>
+            </a:r>
+          </a:p>
+        </p:txBody>
+      </p:sp>
+      <p:sp>
+        <p:nvSpPr>
+          <p:cNvPr id="70" name="Rectangle 69"/>
+          <p:cNvSpPr/>
+          <p:nvPr/>
+        </p:nvSpPr>
+        <p:spPr>
+          <a:xfrm>
+            <a:off x="6217920" y="5687568"/>
+            <a:ext cx="5486400" cy="301752"/>
+          </a:xfrm>
+          <a:prstGeom prst="rect">
+            <a:avLst/>
+          </a:prstGeom>
+          <a:solidFill>
+            <a:srgbClr val="F8FAFC"/>
+          </a:solidFill>
+          <a:ln>
+            <a:noFill/>
+          </a:ln>
+          <a:effectLst/>
+        </p:spPr>
+        <p:style>
+          <a:lnRef idx="1">
+            <a:schemeClr val="accent1"/>
+          </a:lnRef>
+          <a:fillRef idx="3">
+            <a:schemeClr val="accent1"/>
+          </a:fillRef>
+          <a:effectRef idx="2">
+            <a:schemeClr val="accent1"/>
+          </a:effectRef>
+          <a:fontRef idx="minor">
+            <a:schemeClr val="lt1"/>
+          </a:fontRef>
+        </p:style>
+        <p:txBody>
+          <a:bodyPr rtlCol="0" anchor="ctr"/>
+          <a:lstStyle/>
+          <a:p>
+            <a:pPr algn="ctr"/>
+          </a:p>
+        </p:txBody>
+      </p:sp>
+      <p:sp>
+        <p:nvSpPr>
+          <p:cNvPr id="71" name="TextBox 70"/>
+          <p:cNvSpPr txBox="1"/>
+          <p:nvPr/>
+        </p:nvSpPr>
+        <p:spPr>
+          <a:xfrm>
+            <a:off x="6309360" y="5742431"/>
+            <a:ext cx="914400" cy="201168"/>
+          </a:xfrm>
+          <a:prstGeom prst="rect">
+            <a:avLst/>
+          </a:prstGeom>
+          <a:noFill/>
+        </p:spPr>
+        <p:txBody>
+          <a:bodyPr wrap="square" anchor="t" lIns="0" rIns="0" tIns="0" bIns="0">
+            <a:spAutoFit/>
+          </a:bodyPr>
+          <a:lstStyle/>
+          <a:p>
+            <a:pPr algn="l"/>
+            <a:r>
+              <a:rPr sz="1050" b="1">
+                <a:solidFill>
+                  <a:srgbClr val="FC4C0B"/>
+                </a:solidFill>
+                <a:latin typeface="Open Sans"/>
+              </a:rPr>
+              <a:t>Tier 03</a:t>
+            </a:r>
+          </a:p>
+        </p:txBody>
+      </p:sp>
+      <p:sp>
+        <p:nvSpPr>
+          <p:cNvPr id="72" name="TextBox 71"/>
+          <p:cNvSpPr txBox="1"/>
+          <p:nvPr/>
+        </p:nvSpPr>
+        <p:spPr>
+          <a:xfrm>
+            <a:off x="7269480" y="5742431"/>
+            <a:ext cx="1280160" cy="201168"/>
+          </a:xfrm>
+          <a:prstGeom prst="rect">
+            <a:avLst/>
+          </a:prstGeom>
+          <a:noFill/>
+        </p:spPr>
+        <p:txBody>
+          <a:bodyPr wrap="square" anchor="t" lIns="0" rIns="0" tIns="0" bIns="0">
+            <a:spAutoFit/>
+          </a:bodyPr>
+          <a:lstStyle/>
+          <a:p>
+            <a:pPr algn="l"/>
+            <a:r>
+              <a:rPr sz="950" b="0">
+                <a:solidFill>
+                  <a:srgbClr val="334155"/>
+                </a:solidFill>
+                <a:latin typeface="Open Sans"/>
+              </a:rPr>
+              <a:t>$100–$499.99</a:t>
+            </a:r>
+          </a:p>
+        </p:txBody>
+      </p:sp>
+      <p:sp>
+        <p:nvSpPr>
+          <p:cNvPr id="73" name="TextBox 72"/>
+          <p:cNvSpPr txBox="1"/>
+          <p:nvPr/>
+        </p:nvSpPr>
+        <p:spPr>
+          <a:xfrm>
+            <a:off x="8641080" y="5742431"/>
+            <a:ext cx="1371600" cy="201168"/>
+          </a:xfrm>
+          <a:prstGeom prst="rect">
+            <a:avLst/>
+          </a:prstGeom>
+          <a:noFill/>
+        </p:spPr>
+        <p:txBody>
+          <a:bodyPr wrap="square" anchor="t" lIns="0" rIns="0" tIns="0" bIns="0">
+            <a:spAutoFit/>
+          </a:bodyPr>
+          <a:lstStyle/>
+          <a:p>
+            <a:pPr algn="l"/>
+            <a:r>
+              <a:rPr sz="1050" b="0">
+                <a:solidFill>
+                  <a:srgbClr val="334155"/>
+                </a:solidFill>
+                <a:latin typeface="Open Sans"/>
+              </a:rPr>
+              <a:t>425,201</a:t>
+            </a:r>
+          </a:p>
+        </p:txBody>
+      </p:sp>
+      <p:sp>
+        <p:nvSpPr>
+          <p:cNvPr id="74" name="TextBox 73"/>
+          <p:cNvSpPr txBox="1"/>
+          <p:nvPr/>
+        </p:nvSpPr>
+        <p:spPr>
+          <a:xfrm>
+            <a:off x="10104120" y="5742431"/>
+            <a:ext cx="1371600" cy="201168"/>
+          </a:xfrm>
+          <a:prstGeom prst="rect">
+            <a:avLst/>
+          </a:prstGeom>
+          <a:noFill/>
+        </p:spPr>
+        <p:txBody>
+          <a:bodyPr wrap="square" anchor="t" lIns="0" rIns="0" tIns="0" bIns="0">
+            <a:spAutoFit/>
+          </a:bodyPr>
+          <a:lstStyle/>
+          <a:p>
+            <a:pPr algn="l"/>
+            <a:r>
+              <a:rPr sz="1050" b="1">
+                <a:solidFill>
+                  <a:srgbClr val="FC4C0B"/>
+                </a:solidFill>
+                <a:latin typeface="Open Sans"/>
+              </a:rPr>
+              <a:t>$87.5M</a:t>
+            </a:r>
+          </a:p>
+        </p:txBody>
+      </p:sp>
+      <p:sp>
+        <p:nvSpPr>
+          <p:cNvPr id="75" name="Rectangle 74"/>
+          <p:cNvSpPr/>
+          <p:nvPr/>
+        </p:nvSpPr>
+        <p:spPr>
+          <a:xfrm>
+            <a:off x="6217920" y="5989320"/>
+            <a:ext cx="5486400" cy="301752"/>
+          </a:xfrm>
+          <a:prstGeom prst="rect">
+            <a:avLst/>
+          </a:prstGeom>
+          <a:solidFill>
+            <a:srgbClr val="FFFFFF"/>
+          </a:solidFill>
+          <a:ln>
+            <a:noFill/>
+          </a:ln>
+          <a:effectLst/>
+        </p:spPr>
+        <p:style>
+          <a:lnRef idx="1">
+            <a:schemeClr val="accent1"/>
+          </a:lnRef>
+          <a:fillRef idx="3">
+            <a:schemeClr val="accent1"/>
+          </a:fillRef>
+          <a:effectRef idx="2">
+            <a:schemeClr val="accent1"/>
+          </a:effectRef>
+          <a:fontRef idx="minor">
+            <a:schemeClr val="lt1"/>
+          </a:fontRef>
+        </p:style>
+        <p:txBody>
+          <a:bodyPr rtlCol="0" anchor="ctr"/>
+          <a:lstStyle/>
+          <a:p>
+            <a:pPr algn="ctr"/>
+          </a:p>
+        </p:txBody>
+      </p:sp>
+      <p:sp>
+        <p:nvSpPr>
+          <p:cNvPr id="76" name="TextBox 75"/>
+          <p:cNvSpPr txBox="1"/>
+          <p:nvPr/>
+        </p:nvSpPr>
+        <p:spPr>
+          <a:xfrm>
+            <a:off x="6309360" y="6044183"/>
+            <a:ext cx="914400" cy="201168"/>
+          </a:xfrm>
+          <a:prstGeom prst="rect">
+            <a:avLst/>
+          </a:prstGeom>
+          <a:noFill/>
+        </p:spPr>
+        <p:txBody>
+          <a:bodyPr wrap="square" anchor="t" lIns="0" rIns="0" tIns="0" bIns="0">
+            <a:spAutoFit/>
+          </a:bodyPr>
+          <a:lstStyle/>
+          <a:p>
+            <a:pPr algn="l"/>
+            <a:r>
+              <a:rPr sz="1050" b="1">
+                <a:solidFill>
+                  <a:srgbClr val="2863C5"/>
+                </a:solidFill>
+                <a:latin typeface="Open Sans"/>
+              </a:rPr>
+              <a:t>Tier 04</a:t>
+            </a:r>
+          </a:p>
+        </p:txBody>
+      </p:sp>
+      <p:sp>
+        <p:nvSpPr>
+          <p:cNvPr id="77" name="TextBox 76"/>
+          <p:cNvSpPr txBox="1"/>
+          <p:nvPr/>
+        </p:nvSpPr>
+        <p:spPr>
+          <a:xfrm>
+            <a:off x="7269480" y="6044183"/>
+            <a:ext cx="1280160" cy="201168"/>
+          </a:xfrm>
+          <a:prstGeom prst="rect">
+            <a:avLst/>
+          </a:prstGeom>
+          <a:noFill/>
+        </p:spPr>
+        <p:txBody>
+          <a:bodyPr wrap="square" anchor="t" lIns="0" rIns="0" tIns="0" bIns="0">
+            <a:spAutoFit/>
+          </a:bodyPr>
+          <a:lstStyle/>
+          <a:p>
+            <a:pPr algn="l"/>
+            <a:r>
+              <a:rPr sz="950" b="0">
+                <a:solidFill>
+                  <a:srgbClr val="334155"/>
+                </a:solidFill>
+                <a:latin typeface="Open Sans"/>
+              </a:rPr>
+              <a:t>$500+</a:t>
+            </a:r>
+          </a:p>
+        </p:txBody>
+      </p:sp>
+      <p:sp>
+        <p:nvSpPr>
+          <p:cNvPr id="78" name="TextBox 77"/>
+          <p:cNvSpPr txBox="1"/>
+          <p:nvPr/>
+        </p:nvSpPr>
+        <p:spPr>
+          <a:xfrm>
+            <a:off x="8641080" y="6044183"/>
+            <a:ext cx="1371600" cy="201168"/>
+          </a:xfrm>
+          <a:prstGeom prst="rect">
+            <a:avLst/>
+          </a:prstGeom>
+          <a:noFill/>
+        </p:spPr>
+        <p:txBody>
+          <a:bodyPr wrap="square" anchor="t" lIns="0" rIns="0" tIns="0" bIns="0">
+            <a:spAutoFit/>
+          </a:bodyPr>
+          <a:lstStyle/>
+          <a:p>
+            <a:pPr algn="l"/>
+            <a:r>
+              <a:rPr sz="1050" b="0">
+                <a:solidFill>
+                  <a:srgbClr val="334155"/>
+                </a:solidFill>
+                <a:latin typeface="Open Sans"/>
+              </a:rPr>
+              <a:t>97,787</a:t>
+            </a:r>
+          </a:p>
+        </p:txBody>
+      </p:sp>
+      <p:sp>
+        <p:nvSpPr>
+          <p:cNvPr id="79" name="TextBox 78"/>
+          <p:cNvSpPr txBox="1"/>
+          <p:nvPr/>
+        </p:nvSpPr>
+        <p:spPr>
+          <a:xfrm>
+            <a:off x="10104120" y="6044183"/>
+            <a:ext cx="1371600" cy="201168"/>
+          </a:xfrm>
+          <a:prstGeom prst="rect">
+            <a:avLst/>
+          </a:prstGeom>
+          <a:noFill/>
+        </p:spPr>
+        <p:txBody>
+          <a:bodyPr wrap="square" anchor="t" lIns="0" rIns="0" tIns="0" bIns="0">
+            <a:spAutoFit/>
+          </a:bodyPr>
+          <a:lstStyle/>
+          <a:p>
+            <a:pPr algn="l"/>
+            <a:r>
+              <a:rPr sz="1050" b="1">
+                <a:solidFill>
+                  <a:srgbClr val="2863C5"/>
+                </a:solidFill>
+                <a:latin typeface="Open Sans"/>
+              </a:rPr>
+              <a:t>$173.1M</a:t>
+            </a:r>
+          </a:p>
+        </p:txBody>
+      </p:sp>
+      <p:sp>
+        <p:nvSpPr>
+          <p:cNvPr id="80" name="Rounded Rectangle 79"/>
+          <p:cNvSpPr/>
+          <p:nvPr/>
+        </p:nvSpPr>
+        <p:spPr>
+          <a:xfrm>
+            <a:off x="457200" y="6400800"/>
+            <a:ext cx="11247120" cy="411480"/>
+          </a:xfrm>
+          <a:prstGeom prst="roundRect">
+            <a:avLst>
+              <a:gd name="adj" fmla="val 7000"/>
+            </a:avLst>
           </a:prstGeom>
           <a:solidFill>
             <a:srgbClr val="2863C5"/>
@@ -11099,570 +12998,14 @@
       </p:sp>
       <p:sp>
         <p:nvSpPr>
-          <p:cNvPr id="29" name="TextBox 28"/>
-          <p:cNvSpPr txBox="1"/>
-          <p:nvPr/>
-        </p:nvSpPr>
-        <p:spPr>
-          <a:xfrm>
-            <a:off x="640080" y="4069080"/>
-            <a:ext cx="2423160" cy="201168"/>
-          </a:xfrm>
-          <a:prstGeom prst="rect">
-            <a:avLst/>
-          </a:prstGeom>
-          <a:noFill/>
-        </p:spPr>
-        <p:txBody>
-          <a:bodyPr wrap="square" anchor="t" lIns="0" rIns="0" tIns="0" bIns="0">
-            <a:spAutoFit/>
-          </a:bodyPr>
-          <a:lstStyle/>
-          <a:p>
-            <a:pPr algn="l"/>
-            <a:r>
-              <a:rPr sz="1000" b="1">
-                <a:solidFill>
-                  <a:srgbClr val="2863C5"/>
-                </a:solidFill>
-                <a:latin typeface="Open Sans"/>
-              </a:rPr>
-              <a:t>Normalize</a:t>
-            </a:r>
-          </a:p>
-        </p:txBody>
-      </p:sp>
-      <p:sp>
-        <p:nvSpPr>
-          <p:cNvPr id="30" name="TextBox 29"/>
-          <p:cNvSpPr txBox="1"/>
-          <p:nvPr/>
-        </p:nvSpPr>
-        <p:spPr>
-          <a:xfrm>
-            <a:off x="640080" y="4270248"/>
-            <a:ext cx="2423160" cy="329184"/>
-          </a:xfrm>
-          <a:prstGeom prst="rect">
-            <a:avLst/>
-          </a:prstGeom>
-          <a:noFill/>
-        </p:spPr>
-        <p:txBody>
-          <a:bodyPr wrap="square" anchor="t" lIns="0" rIns="0" tIns="0" bIns="0">
-            <a:spAutoFit/>
-          </a:bodyPr>
-          <a:lstStyle/>
-          <a:p>
-            <a:pPr algn="l"/>
-            <a:r>
-              <a:rPr sz="850" b="0">
-                <a:solidFill>
-                  <a:srgbClr val="334155"/>
-                </a:solidFill>
-                <a:latin typeface="Open Sans"/>
-              </a:rPr>
-              <a:t>UPPER(TRIM(name)). Collapse internal whitespace. Both customer and unclaimed-record names go through identical normalization.</a:t>
-            </a:r>
-          </a:p>
-        </p:txBody>
-      </p:sp>
-      <p:sp>
-        <p:nvSpPr>
-          <p:cNvPr id="31" name="Rounded Rectangle 30"/>
-          <p:cNvSpPr/>
-          <p:nvPr/>
-        </p:nvSpPr>
-        <p:spPr>
-          <a:xfrm>
-            <a:off x="3291840" y="4023360"/>
-            <a:ext cx="2697480" cy="594360"/>
-          </a:xfrm>
-          <a:prstGeom prst="roundRect">
-            <a:avLst>
-              <a:gd name="adj" fmla="val 4000"/>
-            </a:avLst>
-          </a:prstGeom>
-          <a:solidFill>
-            <a:srgbClr val="FFFFFF"/>
-          </a:solidFill>
-          <a:ln w="6350">
-            <a:solidFill>
-              <a:srgbClr val="E2E8F0"/>
-            </a:solidFill>
-          </a:ln>
-          <a:effectLst/>
-        </p:spPr>
-        <p:style>
-          <a:lnRef idx="1">
-            <a:schemeClr val="accent1"/>
-          </a:lnRef>
-          <a:fillRef idx="3">
-            <a:schemeClr val="accent1"/>
-          </a:fillRef>
-          <a:effectRef idx="2">
-            <a:schemeClr val="accent1"/>
-          </a:effectRef>
-          <a:fontRef idx="minor">
-            <a:schemeClr val="lt1"/>
-          </a:fontRef>
-        </p:style>
-        <p:txBody>
-          <a:bodyPr rtlCol="0" anchor="ctr"/>
-          <a:lstStyle/>
-          <a:p>
-            <a:pPr algn="ctr"/>
-          </a:p>
-        </p:txBody>
-      </p:sp>
-      <p:sp>
-        <p:nvSpPr>
-          <p:cNvPr id="32" name="Rectangle 31"/>
-          <p:cNvSpPr/>
-          <p:nvPr/>
-        </p:nvSpPr>
-        <p:spPr>
-          <a:xfrm>
-            <a:off x="3291840" y="4023360"/>
-            <a:ext cx="91440" cy="594360"/>
-          </a:xfrm>
-          <a:prstGeom prst="rect">
-            <a:avLst/>
-          </a:prstGeom>
-          <a:solidFill>
-            <a:srgbClr val="2863C5"/>
-          </a:solidFill>
-          <a:ln>
-            <a:noFill/>
-          </a:ln>
-          <a:effectLst/>
-        </p:spPr>
-        <p:style>
-          <a:lnRef idx="1">
-            <a:schemeClr val="accent1"/>
-          </a:lnRef>
-          <a:fillRef idx="3">
-            <a:schemeClr val="accent1"/>
-          </a:fillRef>
-          <a:effectRef idx="2">
-            <a:schemeClr val="accent1"/>
-          </a:effectRef>
-          <a:fontRef idx="minor">
-            <a:schemeClr val="lt1"/>
-          </a:fontRef>
-        </p:style>
-        <p:txBody>
-          <a:bodyPr rtlCol="0" anchor="ctr"/>
-          <a:lstStyle/>
-          <a:p>
-            <a:pPr algn="ctr"/>
-          </a:p>
-        </p:txBody>
-      </p:sp>
-      <p:sp>
-        <p:nvSpPr>
-          <p:cNvPr id="33" name="TextBox 32"/>
-          <p:cNvSpPr txBox="1"/>
-          <p:nvPr/>
-        </p:nvSpPr>
-        <p:spPr>
-          <a:xfrm>
-            <a:off x="3474720" y="4069080"/>
-            <a:ext cx="2423160" cy="201168"/>
-          </a:xfrm>
-          <a:prstGeom prst="rect">
-            <a:avLst/>
-          </a:prstGeom>
-          <a:noFill/>
-        </p:spPr>
-        <p:txBody>
-          <a:bodyPr wrap="square" anchor="t" lIns="0" rIns="0" tIns="0" bIns="0">
-            <a:spAutoFit/>
-          </a:bodyPr>
-          <a:lstStyle/>
-          <a:p>
-            <a:pPr algn="l"/>
-            <a:r>
-              <a:rPr sz="1000" b="1">
-                <a:solidFill>
-                  <a:srgbClr val="2863C5"/>
-                </a:solidFill>
-                <a:latin typeface="Open Sans"/>
-              </a:rPr>
-              <a:t>Build key</a:t>
-            </a:r>
-          </a:p>
-        </p:txBody>
-      </p:sp>
-      <p:sp>
-        <p:nvSpPr>
-          <p:cNvPr id="34" name="TextBox 33"/>
-          <p:cNvSpPr txBox="1"/>
-          <p:nvPr/>
-        </p:nvSpPr>
-        <p:spPr>
-          <a:xfrm>
-            <a:off x="3474720" y="4270248"/>
-            <a:ext cx="2423160" cy="329184"/>
-          </a:xfrm>
-          <a:prstGeom prst="rect">
-            <a:avLst/>
-          </a:prstGeom>
-          <a:noFill/>
-        </p:spPr>
-        <p:txBody>
-          <a:bodyPr wrap="square" anchor="t" lIns="0" rIns="0" tIns="0" bIns="0">
-            <a:spAutoFit/>
-          </a:bodyPr>
-          <a:lstStyle/>
-          <a:p>
-            <a:pPr algn="l"/>
-            <a:r>
-              <a:rPr sz="850" b="0">
-                <a:solidFill>
-                  <a:srgbClr val="334155"/>
-                </a:solidFill>
-                <a:latin typeface="Open Sans"/>
-              </a:rPr>
-              <a:t>Per customer: "FIRST LAST" and "LAST FIRST". Both orderings tried — CA records use both styles.</a:t>
-            </a:r>
-          </a:p>
-        </p:txBody>
-      </p:sp>
-      <p:sp>
-        <p:nvSpPr>
-          <p:cNvPr id="35" name="Rounded Rectangle 34"/>
-          <p:cNvSpPr/>
-          <p:nvPr/>
-        </p:nvSpPr>
-        <p:spPr>
-          <a:xfrm>
-            <a:off x="6126480" y="4023360"/>
-            <a:ext cx="2697480" cy="594360"/>
-          </a:xfrm>
-          <a:prstGeom prst="roundRect">
-            <a:avLst>
-              <a:gd name="adj" fmla="val 4000"/>
-            </a:avLst>
-          </a:prstGeom>
-          <a:solidFill>
-            <a:srgbClr val="FFFFFF"/>
-          </a:solidFill>
-          <a:ln w="6350">
-            <a:solidFill>
-              <a:srgbClr val="E2E8F0"/>
-            </a:solidFill>
-          </a:ln>
-          <a:effectLst/>
-        </p:spPr>
-        <p:style>
-          <a:lnRef idx="1">
-            <a:schemeClr val="accent1"/>
-          </a:lnRef>
-          <a:fillRef idx="3">
-            <a:schemeClr val="accent1"/>
-          </a:fillRef>
-          <a:effectRef idx="2">
-            <a:schemeClr val="accent1"/>
-          </a:effectRef>
-          <a:fontRef idx="minor">
-            <a:schemeClr val="lt1"/>
-          </a:fontRef>
-        </p:style>
-        <p:txBody>
-          <a:bodyPr rtlCol="0" anchor="ctr"/>
-          <a:lstStyle/>
-          <a:p>
-            <a:pPr algn="ctr"/>
-          </a:p>
-        </p:txBody>
-      </p:sp>
-      <p:sp>
-        <p:nvSpPr>
-          <p:cNvPr id="36" name="Rectangle 35"/>
-          <p:cNvSpPr/>
-          <p:nvPr/>
-        </p:nvSpPr>
-        <p:spPr>
-          <a:xfrm>
-            <a:off x="6126480" y="4023360"/>
-            <a:ext cx="91440" cy="594360"/>
-          </a:xfrm>
-          <a:prstGeom prst="rect">
-            <a:avLst/>
-          </a:prstGeom>
-          <a:solidFill>
-            <a:srgbClr val="059669"/>
-          </a:solidFill>
-          <a:ln>
-            <a:noFill/>
-          </a:ln>
-          <a:effectLst/>
-        </p:spPr>
-        <p:style>
-          <a:lnRef idx="1">
-            <a:schemeClr val="accent1"/>
-          </a:lnRef>
-          <a:fillRef idx="3">
-            <a:schemeClr val="accent1"/>
-          </a:fillRef>
-          <a:effectRef idx="2">
-            <a:schemeClr val="accent1"/>
-          </a:effectRef>
-          <a:fontRef idx="minor">
-            <a:schemeClr val="lt1"/>
-          </a:fontRef>
-        </p:style>
-        <p:txBody>
-          <a:bodyPr rtlCol="0" anchor="ctr"/>
-          <a:lstStyle/>
-          <a:p>
-            <a:pPr algn="ctr"/>
-          </a:p>
-        </p:txBody>
-      </p:sp>
-      <p:sp>
-        <p:nvSpPr>
-          <p:cNvPr id="37" name="TextBox 36"/>
-          <p:cNvSpPr txBox="1"/>
-          <p:nvPr/>
-        </p:nvSpPr>
-        <p:spPr>
-          <a:xfrm>
-            <a:off x="6309360" y="4069080"/>
-            <a:ext cx="2423160" cy="201168"/>
-          </a:xfrm>
-          <a:prstGeom prst="rect">
-            <a:avLst/>
-          </a:prstGeom>
-          <a:noFill/>
-        </p:spPr>
-        <p:txBody>
-          <a:bodyPr wrap="square" anchor="t" lIns="0" rIns="0" tIns="0" bIns="0">
-            <a:spAutoFit/>
-          </a:bodyPr>
-          <a:lstStyle/>
-          <a:p>
-            <a:pPr algn="l"/>
-            <a:r>
-              <a:rPr sz="1000" b="1">
-                <a:solidFill>
-                  <a:srgbClr val="059669"/>
-                </a:solidFill>
-                <a:latin typeface="Open Sans"/>
-              </a:rPr>
-              <a:t>Equality join</a:t>
-            </a:r>
-          </a:p>
-        </p:txBody>
-      </p:sp>
-      <p:sp>
-        <p:nvSpPr>
-          <p:cNvPr id="38" name="TextBox 37"/>
-          <p:cNvSpPr txBox="1"/>
-          <p:nvPr/>
-        </p:nvSpPr>
-        <p:spPr>
-          <a:xfrm>
-            <a:off x="6309360" y="4270248"/>
-            <a:ext cx="2423160" cy="329184"/>
-          </a:xfrm>
-          <a:prstGeom prst="rect">
-            <a:avLst/>
-          </a:prstGeom>
-          <a:noFill/>
-        </p:spPr>
-        <p:txBody>
-          <a:bodyPr wrap="square" anchor="t" lIns="0" rIns="0" tIns="0" bIns="0">
-            <a:spAutoFit/>
-          </a:bodyPr>
-          <a:lstStyle/>
-          <a:p>
-            <a:pPr algn="l"/>
-            <a:r>
-              <a:rPr sz="850" b="0">
-                <a:solidFill>
-                  <a:srgbClr val="334155"/>
-                </a:solidFill>
-                <a:latin typeface="Open Sans"/>
-              </a:rPr>
-              <a:t>owner_name_normalized = key. Uses ix_owner_normalized — 0.7s for 30,862 × 92.4M rows.</a:t>
-            </a:r>
-          </a:p>
-        </p:txBody>
-      </p:sp>
-      <p:sp>
-        <p:nvSpPr>
-          <p:cNvPr id="39" name="Rounded Rectangle 38"/>
-          <p:cNvSpPr/>
-          <p:nvPr/>
-        </p:nvSpPr>
-        <p:spPr>
-          <a:xfrm>
-            <a:off x="8961120" y="4023360"/>
-            <a:ext cx="2697480" cy="594360"/>
-          </a:xfrm>
-          <a:prstGeom prst="roundRect">
-            <a:avLst>
-              <a:gd name="adj" fmla="val 4000"/>
-            </a:avLst>
-          </a:prstGeom>
-          <a:solidFill>
-            <a:srgbClr val="FFFFFF"/>
-          </a:solidFill>
-          <a:ln w="6350">
-            <a:solidFill>
-              <a:srgbClr val="E2E8F0"/>
-            </a:solidFill>
-          </a:ln>
-          <a:effectLst/>
-        </p:spPr>
-        <p:style>
-          <a:lnRef idx="1">
-            <a:schemeClr val="accent1"/>
-          </a:lnRef>
-          <a:fillRef idx="3">
-            <a:schemeClr val="accent1"/>
-          </a:fillRef>
-          <a:effectRef idx="2">
-            <a:schemeClr val="accent1"/>
-          </a:effectRef>
-          <a:fontRef idx="minor">
-            <a:schemeClr val="lt1"/>
-          </a:fontRef>
-        </p:style>
-        <p:txBody>
-          <a:bodyPr rtlCol="0" anchor="ctr"/>
-          <a:lstStyle/>
-          <a:p>
-            <a:pPr algn="ctr"/>
-          </a:p>
-        </p:txBody>
-      </p:sp>
-      <p:sp>
-        <p:nvSpPr>
-          <p:cNvPr id="40" name="Rectangle 39"/>
-          <p:cNvSpPr/>
-          <p:nvPr/>
-        </p:nvSpPr>
-        <p:spPr>
-          <a:xfrm>
-            <a:off x="8961120" y="4023360"/>
-            <a:ext cx="91440" cy="594360"/>
-          </a:xfrm>
-          <a:prstGeom prst="rect">
-            <a:avLst/>
-          </a:prstGeom>
-          <a:solidFill>
-            <a:srgbClr val="FC4C0B"/>
-          </a:solidFill>
-          <a:ln>
-            <a:noFill/>
-          </a:ln>
-          <a:effectLst/>
-        </p:spPr>
-        <p:style>
-          <a:lnRef idx="1">
-            <a:schemeClr val="accent1"/>
-          </a:lnRef>
-          <a:fillRef idx="3">
-            <a:schemeClr val="accent1"/>
-          </a:fillRef>
-          <a:effectRef idx="2">
-            <a:schemeClr val="accent1"/>
-          </a:effectRef>
-          <a:fontRef idx="minor">
-            <a:schemeClr val="lt1"/>
-          </a:fontRef>
-        </p:style>
-        <p:txBody>
-          <a:bodyPr rtlCol="0" anchor="ctr"/>
-          <a:lstStyle/>
-          <a:p>
-            <a:pPr algn="ctr"/>
-          </a:p>
-        </p:txBody>
-      </p:sp>
-      <p:sp>
-        <p:nvSpPr>
-          <p:cNvPr id="41" name="TextBox 40"/>
-          <p:cNvSpPr txBox="1"/>
-          <p:nvPr/>
-        </p:nvSpPr>
-        <p:spPr>
-          <a:xfrm>
-            <a:off x="9144000" y="4069080"/>
-            <a:ext cx="2423160" cy="201168"/>
-          </a:xfrm>
-          <a:prstGeom prst="rect">
-            <a:avLst/>
-          </a:prstGeom>
-          <a:noFill/>
-        </p:spPr>
-        <p:txBody>
-          <a:bodyPr wrap="square" anchor="t" lIns="0" rIns="0" tIns="0" bIns="0">
-            <a:spAutoFit/>
-          </a:bodyPr>
-          <a:lstStyle/>
-          <a:p>
-            <a:pPr algn="l"/>
-            <a:r>
-              <a:rPr sz="1000" b="1">
-                <a:solidFill>
-                  <a:srgbClr val="FC4C0B"/>
-                </a:solidFill>
-                <a:latin typeface="Open Sans"/>
-              </a:rPr>
-              <a:t>Production adds</a:t>
-            </a:r>
-          </a:p>
-        </p:txBody>
-      </p:sp>
-      <p:sp>
-        <p:nvSpPr>
-          <p:cNvPr id="42" name="TextBox 41"/>
-          <p:cNvSpPr txBox="1"/>
-          <p:nvPr/>
-        </p:nvSpPr>
-        <p:spPr>
-          <a:xfrm>
-            <a:off x="9144000" y="4270248"/>
-            <a:ext cx="2423160" cy="329184"/>
-          </a:xfrm>
-          <a:prstGeom prst="rect">
-            <a:avLst/>
-          </a:prstGeom>
-          <a:noFill/>
-        </p:spPr>
-        <p:txBody>
-          <a:bodyPr wrap="square" anchor="t" lIns="0" rIns="0" tIns="0" bIns="0">
-            <a:spAutoFit/>
-          </a:bodyPr>
-          <a:lstStyle/>
-          <a:p>
-            <a:pPr algn="l"/>
-            <a:r>
-              <a:rPr sz="850" b="0">
-                <a:solidFill>
-                  <a:srgbClr val="334155"/>
-                </a:solidFill>
-                <a:latin typeface="Open Sans"/>
-              </a:rPr>
-              <a:t>Phonetic (Soundex/Metaphone) · middle-name · last-4 SSN · DOB. Cuts false positives ~5×.</a:t>
-            </a:r>
-          </a:p>
-        </p:txBody>
-      </p:sp>
-      <p:sp>
-        <p:nvSpPr>
-          <p:cNvPr id="43" name="TextBox 42"/>
-          <p:cNvSpPr txBox="1"/>
-          <p:nvPr/>
-        </p:nvSpPr>
-        <p:spPr>
-          <a:xfrm>
-            <a:off x="457200" y="4754880"/>
-            <a:ext cx="5486400" cy="292608"/>
+          <p:cNvPr id="81" name="TextBox 80"/>
+          <p:cNvSpPr txBox="1"/>
+          <p:nvPr/>
+        </p:nvSpPr>
+        <p:spPr>
+          <a:xfrm>
+            <a:off x="640080" y="6446520"/>
+            <a:ext cx="10972800" cy="292608"/>
           </a:xfrm>
           <a:prstGeom prst="rect">
             <a:avLst/>
@@ -11679,2037 +13022,11 @@
             <a:r>
               <a:rPr sz="1100" b="1">
                 <a:solidFill>
-                  <a:srgbClr val="2863C5"/>
-                </a:solidFill>
-                <a:latin typeface="Open Sans"/>
-              </a:rPr>
-              <a:t>MATCH DISTRIBUTION</a:t>
-            </a:r>
-          </a:p>
-        </p:txBody>
-      </p:sp>
-      <p:sp>
-        <p:nvSpPr>
-          <p:cNvPr id="44" name="TextBox 43"/>
-          <p:cNvSpPr txBox="1"/>
-          <p:nvPr/>
-        </p:nvSpPr>
-        <p:spPr>
-          <a:xfrm>
-            <a:off x="457200" y="5029200"/>
-            <a:ext cx="5486400" cy="256032"/>
-          </a:xfrm>
-          <a:prstGeom prst="rect">
-            <a:avLst/>
-          </a:prstGeom>
-          <a:noFill/>
-        </p:spPr>
-        <p:txBody>
-          <a:bodyPr wrap="square" anchor="t" lIns="0" rIns="0" tIns="0" bIns="0">
-            <a:spAutoFit/>
-          </a:bodyPr>
-          <a:lstStyle/>
-          <a:p>
-            <a:pPr algn="l"/>
-            <a:r>
-              <a:rPr sz="1000" b="0">
-                <a:solidFill>
-                  <a:srgbClr val="64748B"/>
-                </a:solidFill>
-                <a:latin typeface="Open Sans"/>
-              </a:rPr>
-              <a:t>Distinct names cluster in the 1–5 record bucket — high-confidence matches.</a:t>
-            </a:r>
-          </a:p>
-        </p:txBody>
-      </p:sp>
-      <p:sp>
-        <p:nvSpPr>
-          <p:cNvPr id="45" name="Rectangle 44"/>
-          <p:cNvSpPr/>
-          <p:nvPr/>
-        </p:nvSpPr>
-        <p:spPr>
-          <a:xfrm>
-            <a:off x="457200" y="5349240"/>
-            <a:ext cx="5486400" cy="219456"/>
-          </a:xfrm>
-          <a:prstGeom prst="rect">
-            <a:avLst/>
-          </a:prstGeom>
-          <a:solidFill>
-            <a:srgbClr val="0F172A"/>
-          </a:solidFill>
-          <a:ln>
-            <a:noFill/>
-          </a:ln>
-          <a:effectLst/>
-        </p:spPr>
-        <p:style>
-          <a:lnRef idx="1">
-            <a:schemeClr val="accent1"/>
-          </a:lnRef>
-          <a:fillRef idx="3">
-            <a:schemeClr val="accent1"/>
-          </a:fillRef>
-          <a:effectRef idx="2">
-            <a:schemeClr val="accent1"/>
-          </a:effectRef>
-          <a:fontRef idx="minor">
-            <a:schemeClr val="lt1"/>
-          </a:fontRef>
-        </p:style>
-        <p:txBody>
-          <a:bodyPr rtlCol="0" anchor="ctr"/>
-          <a:lstStyle/>
-          <a:p>
-            <a:pPr algn="ctr"/>
-          </a:p>
-        </p:txBody>
-      </p:sp>
-      <p:sp>
-        <p:nvSpPr>
-          <p:cNvPr id="46" name="TextBox 45"/>
-          <p:cNvSpPr txBox="1"/>
-          <p:nvPr/>
-        </p:nvSpPr>
-        <p:spPr>
-          <a:xfrm>
-            <a:off x="548640" y="5385816"/>
-            <a:ext cx="1554480" cy="164592"/>
-          </a:xfrm>
-          <a:prstGeom prst="rect">
-            <a:avLst/>
-          </a:prstGeom>
-          <a:noFill/>
-        </p:spPr>
-        <p:txBody>
-          <a:bodyPr wrap="square" anchor="t" lIns="0" rIns="0" tIns="0" bIns="0">
-            <a:spAutoFit/>
-          </a:bodyPr>
-          <a:lstStyle/>
-          <a:p>
-            <a:pPr algn="l"/>
-            <a:r>
-              <a:rPr sz="900" b="1">
-                <a:solidFill>
                   <a:srgbClr val="FFFFFF"/>
                 </a:solidFill>
                 <a:latin typeface="Open Sans"/>
               </a:rPr>
-              <a:t>Bucket</a:t>
-            </a:r>
-          </a:p>
-        </p:txBody>
-      </p:sp>
-      <p:sp>
-        <p:nvSpPr>
-          <p:cNvPr id="47" name="TextBox 46"/>
-          <p:cNvSpPr txBox="1"/>
-          <p:nvPr/>
-        </p:nvSpPr>
-        <p:spPr>
-          <a:xfrm>
-            <a:off x="2194560" y="5385816"/>
-            <a:ext cx="914400" cy="164592"/>
-          </a:xfrm>
-          <a:prstGeom prst="rect">
-            <a:avLst/>
-          </a:prstGeom>
-          <a:noFill/>
-        </p:spPr>
-        <p:txBody>
-          <a:bodyPr wrap="square" anchor="t" lIns="0" rIns="0" tIns="0" bIns="0">
-            <a:spAutoFit/>
-          </a:bodyPr>
-          <a:lstStyle/>
-          <a:p>
-            <a:pPr algn="l"/>
-            <a:r>
-              <a:rPr sz="900" b="1">
-                <a:solidFill>
-                  <a:srgbClr val="FFFFFF"/>
-                </a:solidFill>
-                <a:latin typeface="Open Sans"/>
-              </a:rPr>
-              <a:t>Customers</a:t>
-            </a:r>
-          </a:p>
-        </p:txBody>
-      </p:sp>
-      <p:sp>
-        <p:nvSpPr>
-          <p:cNvPr id="48" name="TextBox 47"/>
-          <p:cNvSpPr txBox="1"/>
-          <p:nvPr/>
-        </p:nvSpPr>
-        <p:spPr>
-          <a:xfrm>
-            <a:off x="3246120" y="5385816"/>
-            <a:ext cx="914400" cy="164592"/>
-          </a:xfrm>
-          <a:prstGeom prst="rect">
-            <a:avLst/>
-          </a:prstGeom>
-          <a:noFill/>
-        </p:spPr>
-        <p:txBody>
-          <a:bodyPr wrap="square" anchor="t" lIns="0" rIns="0" tIns="0" bIns="0">
-            <a:spAutoFit/>
-          </a:bodyPr>
-          <a:lstStyle/>
-          <a:p>
-            <a:pPr algn="l"/>
-            <a:r>
-              <a:rPr sz="900" b="1">
-                <a:solidFill>
-                  <a:srgbClr val="FFFFFF"/>
-                </a:solidFill>
-                <a:latin typeface="Open Sans"/>
-              </a:rPr>
-              <a:t>$ value</a:t>
-            </a:r>
-          </a:p>
-        </p:txBody>
-      </p:sp>
-      <p:sp>
-        <p:nvSpPr>
-          <p:cNvPr id="49" name="TextBox 48"/>
-          <p:cNvSpPr txBox="1"/>
-          <p:nvPr/>
-        </p:nvSpPr>
-        <p:spPr>
-          <a:xfrm>
-            <a:off x="4297680" y="5385816"/>
-            <a:ext cx="1554480" cy="164592"/>
-          </a:xfrm>
-          <a:prstGeom prst="rect">
-            <a:avLst/>
-          </a:prstGeom>
-          <a:noFill/>
-        </p:spPr>
-        <p:txBody>
-          <a:bodyPr wrap="square" anchor="t" lIns="0" rIns="0" tIns="0" bIns="0">
-            <a:spAutoFit/>
-          </a:bodyPr>
-          <a:lstStyle/>
-          <a:p>
-            <a:pPr algn="l"/>
-            <a:r>
-              <a:rPr sz="900" b="1">
-                <a:solidFill>
-                  <a:srgbClr val="FFFFFF"/>
-                </a:solidFill>
-                <a:latin typeface="Open Sans"/>
-              </a:rPr>
-              <a:t>Note</a:t>
-            </a:r>
-          </a:p>
-        </p:txBody>
-      </p:sp>
-      <p:sp>
-        <p:nvSpPr>
-          <p:cNvPr id="50" name="Rectangle 49"/>
-          <p:cNvSpPr/>
-          <p:nvPr/>
-        </p:nvSpPr>
-        <p:spPr>
-          <a:xfrm>
-            <a:off x="457200" y="5568696"/>
-            <a:ext cx="5486400" cy="246888"/>
-          </a:xfrm>
-          <a:prstGeom prst="rect">
-            <a:avLst/>
-          </a:prstGeom>
-          <a:solidFill>
-            <a:srgbClr val="F8FAFC"/>
-          </a:solidFill>
-          <a:ln>
-            <a:noFill/>
-          </a:ln>
-          <a:effectLst/>
-        </p:spPr>
-        <p:style>
-          <a:lnRef idx="1">
-            <a:schemeClr val="accent1"/>
-          </a:lnRef>
-          <a:fillRef idx="3">
-            <a:schemeClr val="accent1"/>
-          </a:fillRef>
-          <a:effectRef idx="2">
-            <a:schemeClr val="accent1"/>
-          </a:effectRef>
-          <a:fontRef idx="minor">
-            <a:schemeClr val="lt1"/>
-          </a:fontRef>
-        </p:style>
-        <p:txBody>
-          <a:bodyPr rtlCol="0" anchor="ctr"/>
-          <a:lstStyle/>
-          <a:p>
-            <a:pPr algn="ctr"/>
-          </a:p>
-        </p:txBody>
-      </p:sp>
-      <p:sp>
-        <p:nvSpPr>
-          <p:cNvPr id="51" name="TextBox 50"/>
-          <p:cNvSpPr txBox="1"/>
-          <p:nvPr/>
-        </p:nvSpPr>
-        <p:spPr>
-          <a:xfrm>
-            <a:off x="548640" y="5605272"/>
-            <a:ext cx="1554480" cy="182880"/>
-          </a:xfrm>
-          <a:prstGeom prst="rect">
-            <a:avLst/>
-          </a:prstGeom>
-          <a:noFill/>
-        </p:spPr>
-        <p:txBody>
-          <a:bodyPr wrap="square" anchor="t" lIns="0" rIns="0" tIns="0" bIns="0">
-            <a:spAutoFit/>
-          </a:bodyPr>
-          <a:lstStyle/>
-          <a:p>
-            <a:pPr algn="l"/>
-            <a:r>
-              <a:rPr sz="1000" b="1">
-                <a:solidFill>
-                  <a:srgbClr val="0F172A"/>
-                </a:solidFill>
-                <a:latin typeface="Open Sans"/>
-              </a:rPr>
-              <a:t>1 record</a:t>
-            </a:r>
-          </a:p>
-        </p:txBody>
-      </p:sp>
-      <p:sp>
-        <p:nvSpPr>
-          <p:cNvPr id="52" name="TextBox 51"/>
-          <p:cNvSpPr txBox="1"/>
-          <p:nvPr/>
-        </p:nvSpPr>
-        <p:spPr>
-          <a:xfrm>
-            <a:off x="2194560" y="5605272"/>
-            <a:ext cx="914400" cy="182880"/>
-          </a:xfrm>
-          <a:prstGeom prst="rect">
-            <a:avLst/>
-          </a:prstGeom>
-          <a:noFill/>
-        </p:spPr>
-        <p:txBody>
-          <a:bodyPr wrap="square" anchor="t" lIns="0" rIns="0" tIns="0" bIns="0">
-            <a:spAutoFit/>
-          </a:bodyPr>
-          <a:lstStyle/>
-          <a:p>
-            <a:pPr algn="l"/>
-            <a:r>
-              <a:rPr sz="1000" b="0">
-                <a:solidFill>
-                  <a:srgbClr val="334155"/>
-                </a:solidFill>
-                <a:latin typeface="Open Sans"/>
-              </a:rPr>
-              <a:t>3,266</a:t>
-            </a:r>
-          </a:p>
-        </p:txBody>
-      </p:sp>
-      <p:sp>
-        <p:nvSpPr>
-          <p:cNvPr id="53" name="TextBox 52"/>
-          <p:cNvSpPr txBox="1"/>
-          <p:nvPr/>
-        </p:nvSpPr>
-        <p:spPr>
-          <a:xfrm>
-            <a:off x="3246120" y="5605272"/>
-            <a:ext cx="914400" cy="182880"/>
-          </a:xfrm>
-          <a:prstGeom prst="rect">
-            <a:avLst/>
-          </a:prstGeom>
-          <a:noFill/>
-        </p:spPr>
-        <p:txBody>
-          <a:bodyPr wrap="square" anchor="t" lIns="0" rIns="0" tIns="0" bIns="0">
-            <a:spAutoFit/>
-          </a:bodyPr>
-          <a:lstStyle/>
-          <a:p>
-            <a:pPr algn="l"/>
-            <a:r>
-              <a:rPr sz="1000" b="1">
-                <a:solidFill>
-                  <a:srgbClr val="059669"/>
-                </a:solidFill>
-                <a:latin typeface="Open Sans"/>
-              </a:rPr>
-              <a:t>$239K</a:t>
-            </a:r>
-          </a:p>
-        </p:txBody>
-      </p:sp>
-      <p:sp>
-        <p:nvSpPr>
-          <p:cNvPr id="54" name="TextBox 53"/>
-          <p:cNvSpPr txBox="1"/>
-          <p:nvPr/>
-        </p:nvSpPr>
-        <p:spPr>
-          <a:xfrm>
-            <a:off x="4297680" y="5605272"/>
-            <a:ext cx="1554480" cy="182880"/>
-          </a:xfrm>
-          <a:prstGeom prst="rect">
-            <a:avLst/>
-          </a:prstGeom>
-          <a:noFill/>
-        </p:spPr>
-        <p:txBody>
-          <a:bodyPr wrap="square" anchor="t" lIns="0" rIns="0" tIns="0" bIns="0">
-            <a:spAutoFit/>
-          </a:bodyPr>
-          <a:lstStyle/>
-          <a:p>
-            <a:pPr algn="l"/>
-            <a:r>
-              <a:rPr sz="900" b="0">
-                <a:solidFill>
-                  <a:srgbClr val="64748B"/>
-                </a:solidFill>
-                <a:latin typeface="Open Sans"/>
-              </a:rPr>
-              <a:t>High confidence</a:t>
-            </a:r>
-          </a:p>
-        </p:txBody>
-      </p:sp>
-      <p:sp>
-        <p:nvSpPr>
-          <p:cNvPr id="55" name="Rectangle 54"/>
-          <p:cNvSpPr/>
-          <p:nvPr/>
-        </p:nvSpPr>
-        <p:spPr>
-          <a:xfrm>
-            <a:off x="457200" y="5815583"/>
-            <a:ext cx="5486400" cy="246888"/>
-          </a:xfrm>
-          <a:prstGeom prst="rect">
-            <a:avLst/>
-          </a:prstGeom>
-          <a:solidFill>
-            <a:srgbClr val="FFFFFF"/>
-          </a:solidFill>
-          <a:ln>
-            <a:noFill/>
-          </a:ln>
-          <a:effectLst/>
-        </p:spPr>
-        <p:style>
-          <a:lnRef idx="1">
-            <a:schemeClr val="accent1"/>
-          </a:lnRef>
-          <a:fillRef idx="3">
-            <a:schemeClr val="accent1"/>
-          </a:fillRef>
-          <a:effectRef idx="2">
-            <a:schemeClr val="accent1"/>
-          </a:effectRef>
-          <a:fontRef idx="minor">
-            <a:schemeClr val="lt1"/>
-          </a:fontRef>
-        </p:style>
-        <p:txBody>
-          <a:bodyPr rtlCol="0" anchor="ctr"/>
-          <a:lstStyle/>
-          <a:p>
-            <a:pPr algn="ctr"/>
-          </a:p>
-        </p:txBody>
-      </p:sp>
-      <p:sp>
-        <p:nvSpPr>
-          <p:cNvPr id="56" name="TextBox 55"/>
-          <p:cNvSpPr txBox="1"/>
-          <p:nvPr/>
-        </p:nvSpPr>
-        <p:spPr>
-          <a:xfrm>
-            <a:off x="548640" y="5852159"/>
-            <a:ext cx="1554480" cy="182880"/>
-          </a:xfrm>
-          <a:prstGeom prst="rect">
-            <a:avLst/>
-          </a:prstGeom>
-          <a:noFill/>
-        </p:spPr>
-        <p:txBody>
-          <a:bodyPr wrap="square" anchor="t" lIns="0" rIns="0" tIns="0" bIns="0">
-            <a:spAutoFit/>
-          </a:bodyPr>
-          <a:lstStyle/>
-          <a:p>
-            <a:pPr algn="l"/>
-            <a:r>
-              <a:rPr sz="1000" b="1">
-                <a:solidFill>
-                  <a:srgbClr val="0F172A"/>
-                </a:solidFill>
-                <a:latin typeface="Open Sans"/>
-              </a:rPr>
-              <a:t>2–5 records</a:t>
-            </a:r>
-          </a:p>
-        </p:txBody>
-      </p:sp>
-      <p:sp>
-        <p:nvSpPr>
-          <p:cNvPr id="57" name="TextBox 56"/>
-          <p:cNvSpPr txBox="1"/>
-          <p:nvPr/>
-        </p:nvSpPr>
-        <p:spPr>
-          <a:xfrm>
-            <a:off x="2194560" y="5852159"/>
-            <a:ext cx="914400" cy="182880"/>
-          </a:xfrm>
-          <a:prstGeom prst="rect">
-            <a:avLst/>
-          </a:prstGeom>
-          <a:noFill/>
-        </p:spPr>
-        <p:txBody>
-          <a:bodyPr wrap="square" anchor="t" lIns="0" rIns="0" tIns="0" bIns="0">
-            <a:spAutoFit/>
-          </a:bodyPr>
-          <a:lstStyle/>
-          <a:p>
-            <a:pPr algn="l"/>
-            <a:r>
-              <a:rPr sz="1000" b="0">
-                <a:solidFill>
-                  <a:srgbClr val="334155"/>
-                </a:solidFill>
-                <a:latin typeface="Open Sans"/>
-              </a:rPr>
-              <a:t>5,788</a:t>
-            </a:r>
-          </a:p>
-        </p:txBody>
-      </p:sp>
-      <p:sp>
-        <p:nvSpPr>
-          <p:cNvPr id="58" name="TextBox 57"/>
-          <p:cNvSpPr txBox="1"/>
-          <p:nvPr/>
-        </p:nvSpPr>
-        <p:spPr>
-          <a:xfrm>
-            <a:off x="3246120" y="5852159"/>
-            <a:ext cx="914400" cy="182880"/>
-          </a:xfrm>
-          <a:prstGeom prst="rect">
-            <a:avLst/>
-          </a:prstGeom>
-          <a:noFill/>
-        </p:spPr>
-        <p:txBody>
-          <a:bodyPr wrap="square" anchor="t" lIns="0" rIns="0" tIns="0" bIns="0">
-            <a:spAutoFit/>
-          </a:bodyPr>
-          <a:lstStyle/>
-          <a:p>
-            <a:pPr algn="l"/>
-            <a:r>
-              <a:rPr sz="1000" b="1">
-                <a:solidFill>
-                  <a:srgbClr val="059669"/>
-                </a:solidFill>
-                <a:latin typeface="Open Sans"/>
-              </a:rPr>
-              <a:t>$1.21M</a:t>
-            </a:r>
-          </a:p>
-        </p:txBody>
-      </p:sp>
-      <p:sp>
-        <p:nvSpPr>
-          <p:cNvPr id="59" name="TextBox 58"/>
-          <p:cNvSpPr txBox="1"/>
-          <p:nvPr/>
-        </p:nvSpPr>
-        <p:spPr>
-          <a:xfrm>
-            <a:off x="4297680" y="5852159"/>
-            <a:ext cx="1554480" cy="182880"/>
-          </a:xfrm>
-          <a:prstGeom prst="rect">
-            <a:avLst/>
-          </a:prstGeom>
-          <a:noFill/>
-        </p:spPr>
-        <p:txBody>
-          <a:bodyPr wrap="square" anchor="t" lIns="0" rIns="0" tIns="0" bIns="0">
-            <a:spAutoFit/>
-          </a:bodyPr>
-          <a:lstStyle/>
-          <a:p>
-            <a:pPr algn="l"/>
-            <a:r>
-              <a:rPr sz="900" b="0">
-                <a:solidFill>
-                  <a:srgbClr val="64748B"/>
-                </a:solidFill>
-                <a:latin typeface="Open Sans"/>
-              </a:rPr>
-              <a:t>High confidence</a:t>
-            </a:r>
-          </a:p>
-        </p:txBody>
-      </p:sp>
-      <p:sp>
-        <p:nvSpPr>
-          <p:cNvPr id="60" name="Rectangle 59"/>
-          <p:cNvSpPr/>
-          <p:nvPr/>
-        </p:nvSpPr>
-        <p:spPr>
-          <a:xfrm>
-            <a:off x="457200" y="6062471"/>
-            <a:ext cx="5486400" cy="246888"/>
-          </a:xfrm>
-          <a:prstGeom prst="rect">
-            <a:avLst/>
-          </a:prstGeom>
-          <a:solidFill>
-            <a:srgbClr val="F8FAFC"/>
-          </a:solidFill>
-          <a:ln>
-            <a:noFill/>
-          </a:ln>
-          <a:effectLst/>
-        </p:spPr>
-        <p:style>
-          <a:lnRef idx="1">
-            <a:schemeClr val="accent1"/>
-          </a:lnRef>
-          <a:fillRef idx="3">
-            <a:schemeClr val="accent1"/>
-          </a:fillRef>
-          <a:effectRef idx="2">
-            <a:schemeClr val="accent1"/>
-          </a:effectRef>
-          <a:fontRef idx="minor">
-            <a:schemeClr val="lt1"/>
-          </a:fontRef>
-        </p:style>
-        <p:txBody>
-          <a:bodyPr rtlCol="0" anchor="ctr"/>
-          <a:lstStyle/>
-          <a:p>
-            <a:pPr algn="ctr"/>
-          </a:p>
-        </p:txBody>
-      </p:sp>
-      <p:sp>
-        <p:nvSpPr>
-          <p:cNvPr id="61" name="TextBox 60"/>
-          <p:cNvSpPr txBox="1"/>
-          <p:nvPr/>
-        </p:nvSpPr>
-        <p:spPr>
-          <a:xfrm>
-            <a:off x="548640" y="6099047"/>
-            <a:ext cx="1554480" cy="182880"/>
-          </a:xfrm>
-          <a:prstGeom prst="rect">
-            <a:avLst/>
-          </a:prstGeom>
-          <a:noFill/>
-        </p:spPr>
-        <p:txBody>
-          <a:bodyPr wrap="square" anchor="t" lIns="0" rIns="0" tIns="0" bIns="0">
-            <a:spAutoFit/>
-          </a:bodyPr>
-          <a:lstStyle/>
-          <a:p>
-            <a:pPr algn="l"/>
-            <a:r>
-              <a:rPr sz="1000" b="1">
-                <a:solidFill>
-                  <a:srgbClr val="0F172A"/>
-                </a:solidFill>
-                <a:latin typeface="Open Sans"/>
-              </a:rPr>
-              <a:t>6–20 records</a:t>
-            </a:r>
-          </a:p>
-        </p:txBody>
-      </p:sp>
-      <p:sp>
-        <p:nvSpPr>
-          <p:cNvPr id="62" name="TextBox 61"/>
-          <p:cNvSpPr txBox="1"/>
-          <p:nvPr/>
-        </p:nvSpPr>
-        <p:spPr>
-          <a:xfrm>
-            <a:off x="2194560" y="6099047"/>
-            <a:ext cx="914400" cy="182880"/>
-          </a:xfrm>
-          <a:prstGeom prst="rect">
-            <a:avLst/>
-          </a:prstGeom>
-          <a:noFill/>
-        </p:spPr>
-        <p:txBody>
-          <a:bodyPr wrap="square" anchor="t" lIns="0" rIns="0" tIns="0" bIns="0">
-            <a:spAutoFit/>
-          </a:bodyPr>
-          <a:lstStyle/>
-          <a:p>
-            <a:pPr algn="l"/>
-            <a:r>
-              <a:rPr sz="1000" b="0">
-                <a:solidFill>
-                  <a:srgbClr val="334155"/>
-                </a:solidFill>
-                <a:latin typeface="Open Sans"/>
-              </a:rPr>
-              <a:t>4,393</a:t>
-            </a:r>
-          </a:p>
-        </p:txBody>
-      </p:sp>
-      <p:sp>
-        <p:nvSpPr>
-          <p:cNvPr id="63" name="TextBox 62"/>
-          <p:cNvSpPr txBox="1"/>
-          <p:nvPr/>
-        </p:nvSpPr>
-        <p:spPr>
-          <a:xfrm>
-            <a:off x="3246120" y="6099047"/>
-            <a:ext cx="914400" cy="182880"/>
-          </a:xfrm>
-          <a:prstGeom prst="rect">
-            <a:avLst/>
-          </a:prstGeom>
-          <a:noFill/>
-        </p:spPr>
-        <p:txBody>
-          <a:bodyPr wrap="square" anchor="t" lIns="0" rIns="0" tIns="0" bIns="0">
-            <a:spAutoFit/>
-          </a:bodyPr>
-          <a:lstStyle/>
-          <a:p>
-            <a:pPr algn="l"/>
-            <a:r>
-              <a:rPr sz="1000" b="1">
-                <a:solidFill>
-                  <a:srgbClr val="FFB352"/>
-                </a:solidFill>
-                <a:latin typeface="Open Sans"/>
-              </a:rPr>
-              <a:t>$3.50M</a:t>
-            </a:r>
-          </a:p>
-        </p:txBody>
-      </p:sp>
-      <p:sp>
-        <p:nvSpPr>
-          <p:cNvPr id="64" name="TextBox 63"/>
-          <p:cNvSpPr txBox="1"/>
-          <p:nvPr/>
-        </p:nvSpPr>
-        <p:spPr>
-          <a:xfrm>
-            <a:off x="4297680" y="6099047"/>
-            <a:ext cx="1554480" cy="182880"/>
-          </a:xfrm>
-          <a:prstGeom prst="rect">
-            <a:avLst/>
-          </a:prstGeom>
-          <a:noFill/>
-        </p:spPr>
-        <p:txBody>
-          <a:bodyPr wrap="square" anchor="t" lIns="0" rIns="0" tIns="0" bIns="0">
-            <a:spAutoFit/>
-          </a:bodyPr>
-          <a:lstStyle/>
-          <a:p>
-            <a:pPr algn="l"/>
-            <a:r>
-              <a:rPr sz="900" b="0">
-                <a:solidFill>
-                  <a:srgbClr val="64748B"/>
-                </a:solidFill>
-                <a:latin typeface="Open Sans"/>
-              </a:rPr>
-              <a:t>Mixed — needs review</a:t>
-            </a:r>
-          </a:p>
-        </p:txBody>
-      </p:sp>
-      <p:sp>
-        <p:nvSpPr>
-          <p:cNvPr id="65" name="Rectangle 64"/>
-          <p:cNvSpPr/>
-          <p:nvPr/>
-        </p:nvSpPr>
-        <p:spPr>
-          <a:xfrm>
-            <a:off x="457200" y="6309359"/>
-            <a:ext cx="5486400" cy="246888"/>
-          </a:xfrm>
-          <a:prstGeom prst="rect">
-            <a:avLst/>
-          </a:prstGeom>
-          <a:solidFill>
-            <a:srgbClr val="FFFFFF"/>
-          </a:solidFill>
-          <a:ln>
-            <a:noFill/>
-          </a:ln>
-          <a:effectLst/>
-        </p:spPr>
-        <p:style>
-          <a:lnRef idx="1">
-            <a:schemeClr val="accent1"/>
-          </a:lnRef>
-          <a:fillRef idx="3">
-            <a:schemeClr val="accent1"/>
-          </a:fillRef>
-          <a:effectRef idx="2">
-            <a:schemeClr val="accent1"/>
-          </a:effectRef>
-          <a:fontRef idx="minor">
-            <a:schemeClr val="lt1"/>
-          </a:fontRef>
-        </p:style>
-        <p:txBody>
-          <a:bodyPr rtlCol="0" anchor="ctr"/>
-          <a:lstStyle/>
-          <a:p>
-            <a:pPr algn="ctr"/>
-          </a:p>
-        </p:txBody>
-      </p:sp>
-      <p:sp>
-        <p:nvSpPr>
-          <p:cNvPr id="66" name="TextBox 65"/>
-          <p:cNvSpPr txBox="1"/>
-          <p:nvPr/>
-        </p:nvSpPr>
-        <p:spPr>
-          <a:xfrm>
-            <a:off x="548640" y="6345935"/>
-            <a:ext cx="1554480" cy="182880"/>
-          </a:xfrm>
-          <a:prstGeom prst="rect">
-            <a:avLst/>
-          </a:prstGeom>
-          <a:noFill/>
-        </p:spPr>
-        <p:txBody>
-          <a:bodyPr wrap="square" anchor="t" lIns="0" rIns="0" tIns="0" bIns="0">
-            <a:spAutoFit/>
-          </a:bodyPr>
-          <a:lstStyle/>
-          <a:p>
-            <a:pPr algn="l"/>
-            <a:r>
-              <a:rPr sz="1000" b="1">
-                <a:solidFill>
-                  <a:srgbClr val="0F172A"/>
-                </a:solidFill>
-                <a:latin typeface="Open Sans"/>
-              </a:rPr>
-              <a:t>20+ records</a:t>
-            </a:r>
-          </a:p>
-        </p:txBody>
-      </p:sp>
-      <p:sp>
-        <p:nvSpPr>
-          <p:cNvPr id="67" name="TextBox 66"/>
-          <p:cNvSpPr txBox="1"/>
-          <p:nvPr/>
-        </p:nvSpPr>
-        <p:spPr>
-          <a:xfrm>
-            <a:off x="2194560" y="6345935"/>
-            <a:ext cx="914400" cy="182880"/>
-          </a:xfrm>
-          <a:prstGeom prst="rect">
-            <a:avLst/>
-          </a:prstGeom>
-          <a:noFill/>
-        </p:spPr>
-        <p:txBody>
-          <a:bodyPr wrap="square" anchor="t" lIns="0" rIns="0" tIns="0" bIns="0">
-            <a:spAutoFit/>
-          </a:bodyPr>
-          <a:lstStyle/>
-          <a:p>
-            <a:pPr algn="l"/>
-            <a:r>
-              <a:rPr sz="1000" b="0">
-                <a:solidFill>
-                  <a:srgbClr val="334155"/>
-                </a:solidFill>
-                <a:latin typeface="Open Sans"/>
-              </a:rPr>
-              <a:t>8,417</a:t>
-            </a:r>
-          </a:p>
-        </p:txBody>
-      </p:sp>
-      <p:sp>
-        <p:nvSpPr>
-          <p:cNvPr id="68" name="TextBox 67"/>
-          <p:cNvSpPr txBox="1"/>
-          <p:nvPr/>
-        </p:nvSpPr>
-        <p:spPr>
-          <a:xfrm>
-            <a:off x="3246120" y="6345935"/>
-            <a:ext cx="914400" cy="182880"/>
-          </a:xfrm>
-          <a:prstGeom prst="rect">
-            <a:avLst/>
-          </a:prstGeom>
-          <a:noFill/>
-        </p:spPr>
-        <p:txBody>
-          <a:bodyPr wrap="square" anchor="t" lIns="0" rIns="0" tIns="0" bIns="0">
-            <a:spAutoFit/>
-          </a:bodyPr>
-          <a:lstStyle/>
-          <a:p>
-            <a:pPr algn="l"/>
-            <a:r>
-              <a:rPr sz="1000" b="1">
-                <a:solidFill>
-                  <a:srgbClr val="64748B"/>
-                </a:solidFill>
-                <a:latin typeface="Open Sans"/>
-              </a:rPr>
-              <a:t>$319M</a:t>
-            </a:r>
-          </a:p>
-        </p:txBody>
-      </p:sp>
-      <p:sp>
-        <p:nvSpPr>
-          <p:cNvPr id="69" name="TextBox 68"/>
-          <p:cNvSpPr txBox="1"/>
-          <p:nvPr/>
-        </p:nvSpPr>
-        <p:spPr>
-          <a:xfrm>
-            <a:off x="4297680" y="6345935"/>
-            <a:ext cx="1554480" cy="182880"/>
-          </a:xfrm>
-          <a:prstGeom prst="rect">
-            <a:avLst/>
-          </a:prstGeom>
-          <a:noFill/>
-        </p:spPr>
-        <p:txBody>
-          <a:bodyPr wrap="square" anchor="t" lIns="0" rIns="0" tIns="0" bIns="0">
-            <a:spAutoFit/>
-          </a:bodyPr>
-          <a:lstStyle/>
-          <a:p>
-            <a:pPr algn="l"/>
-            <a:r>
-              <a:rPr sz="900" b="0">
-                <a:solidFill>
-                  <a:srgbClr val="64748B"/>
-                </a:solidFill>
-                <a:latin typeface="Open Sans"/>
-              </a:rPr>
-              <a:t>Common-name collisions</a:t>
-            </a:r>
-          </a:p>
-        </p:txBody>
-      </p:sp>
-      <p:sp>
-        <p:nvSpPr>
-          <p:cNvPr id="70" name="TextBox 69"/>
-          <p:cNvSpPr txBox="1"/>
-          <p:nvPr/>
-        </p:nvSpPr>
-        <p:spPr>
-          <a:xfrm>
-            <a:off x="6217920" y="4754880"/>
-            <a:ext cx="5486400" cy="292608"/>
-          </a:xfrm>
-          <a:prstGeom prst="rect">
-            <a:avLst/>
-          </a:prstGeom>
-          <a:noFill/>
-        </p:spPr>
-        <p:txBody>
-          <a:bodyPr wrap="square" anchor="t" lIns="0" rIns="0" tIns="0" bIns="0">
-            <a:spAutoFit/>
-          </a:bodyPr>
-          <a:lstStyle/>
-          <a:p>
-            <a:pPr algn="l"/>
-            <a:r>
-              <a:rPr sz="1100" b="1">
-                <a:solidFill>
-                  <a:srgbClr val="2863C5"/>
-                </a:solidFill>
-                <a:latin typeface="Open Sans"/>
-              </a:rPr>
-              <a:t>MATCHES BY TIER</a:t>
-            </a:r>
-          </a:p>
-        </p:txBody>
-      </p:sp>
-      <p:sp>
-        <p:nvSpPr>
-          <p:cNvPr id="71" name="TextBox 70"/>
-          <p:cNvSpPr txBox="1"/>
-          <p:nvPr/>
-        </p:nvSpPr>
-        <p:spPr>
-          <a:xfrm>
-            <a:off x="6217920" y="5029200"/>
-            <a:ext cx="5486400" cy="256032"/>
-          </a:xfrm>
-          <a:prstGeom prst="rect">
-            <a:avLst/>
-          </a:prstGeom>
-          <a:noFill/>
-        </p:spPr>
-        <p:txBody>
-          <a:bodyPr wrap="square" anchor="t" lIns="0" rIns="0" tIns="0" bIns="0">
-            <a:spAutoFit/>
-          </a:bodyPr>
-          <a:lstStyle/>
-          <a:p>
-            <a:pPr algn="l"/>
-            <a:r>
-              <a:rPr sz="1000" b="0">
-                <a:solidFill>
-                  <a:srgbClr val="64748B"/>
-                </a:solidFill>
-                <a:latin typeface="Open Sans"/>
-              </a:rPr>
-              <a:t>Tier 04 ($500+) carries 53% of the value despite 2% of records.</a:t>
-            </a:r>
-          </a:p>
-        </p:txBody>
-      </p:sp>
-      <p:sp>
-        <p:nvSpPr>
-          <p:cNvPr id="72" name="Rectangle 71"/>
-          <p:cNvSpPr/>
-          <p:nvPr/>
-        </p:nvSpPr>
-        <p:spPr>
-          <a:xfrm>
-            <a:off x="6217920" y="5349240"/>
-            <a:ext cx="5486400" cy="219456"/>
-          </a:xfrm>
-          <a:prstGeom prst="rect">
-            <a:avLst/>
-          </a:prstGeom>
-          <a:solidFill>
-            <a:srgbClr val="0F172A"/>
-          </a:solidFill>
-          <a:ln>
-            <a:noFill/>
-          </a:ln>
-          <a:effectLst/>
-        </p:spPr>
-        <p:style>
-          <a:lnRef idx="1">
-            <a:schemeClr val="accent1"/>
-          </a:lnRef>
-          <a:fillRef idx="3">
-            <a:schemeClr val="accent1"/>
-          </a:fillRef>
-          <a:effectRef idx="2">
-            <a:schemeClr val="accent1"/>
-          </a:effectRef>
-          <a:fontRef idx="minor">
-            <a:schemeClr val="lt1"/>
-          </a:fontRef>
-        </p:style>
-        <p:txBody>
-          <a:bodyPr rtlCol="0" anchor="ctr"/>
-          <a:lstStyle/>
-          <a:p>
-            <a:pPr algn="ctr"/>
-          </a:p>
-        </p:txBody>
-      </p:sp>
-      <p:sp>
-        <p:nvSpPr>
-          <p:cNvPr id="73" name="TextBox 72"/>
-          <p:cNvSpPr txBox="1"/>
-          <p:nvPr/>
-        </p:nvSpPr>
-        <p:spPr>
-          <a:xfrm>
-            <a:off x="6309360" y="5385816"/>
-            <a:ext cx="914400" cy="164592"/>
-          </a:xfrm>
-          <a:prstGeom prst="rect">
-            <a:avLst/>
-          </a:prstGeom>
-          <a:noFill/>
-        </p:spPr>
-        <p:txBody>
-          <a:bodyPr wrap="square" anchor="t" lIns="0" rIns="0" tIns="0" bIns="0">
-            <a:spAutoFit/>
-          </a:bodyPr>
-          <a:lstStyle/>
-          <a:p>
-            <a:pPr algn="l"/>
-            <a:r>
-              <a:rPr sz="900" b="1">
-                <a:solidFill>
-                  <a:srgbClr val="FFFFFF"/>
-                </a:solidFill>
-                <a:latin typeface="Open Sans"/>
-              </a:rPr>
-              <a:t>Tier</a:t>
-            </a:r>
-          </a:p>
-        </p:txBody>
-      </p:sp>
-      <p:sp>
-        <p:nvSpPr>
-          <p:cNvPr id="74" name="TextBox 73"/>
-          <p:cNvSpPr txBox="1"/>
-          <p:nvPr/>
-        </p:nvSpPr>
-        <p:spPr>
-          <a:xfrm>
-            <a:off x="7269480" y="5385816"/>
-            <a:ext cx="1280160" cy="164592"/>
-          </a:xfrm>
-          <a:prstGeom prst="rect">
-            <a:avLst/>
-          </a:prstGeom>
-          <a:noFill/>
-        </p:spPr>
-        <p:txBody>
-          <a:bodyPr wrap="square" anchor="t" lIns="0" rIns="0" tIns="0" bIns="0">
-            <a:spAutoFit/>
-          </a:bodyPr>
-          <a:lstStyle/>
-          <a:p>
-            <a:pPr algn="l"/>
-            <a:r>
-              <a:rPr sz="900" b="1">
-                <a:solidFill>
-                  <a:srgbClr val="FFFFFF"/>
-                </a:solidFill>
-                <a:latin typeface="Open Sans"/>
-              </a:rPr>
-              <a:t>Range</a:t>
-            </a:r>
-          </a:p>
-        </p:txBody>
-      </p:sp>
-      <p:sp>
-        <p:nvSpPr>
-          <p:cNvPr id="75" name="TextBox 74"/>
-          <p:cNvSpPr txBox="1"/>
-          <p:nvPr/>
-        </p:nvSpPr>
-        <p:spPr>
-          <a:xfrm>
-            <a:off x="8641080" y="5385816"/>
-            <a:ext cx="1371600" cy="164592"/>
-          </a:xfrm>
-          <a:prstGeom prst="rect">
-            <a:avLst/>
-          </a:prstGeom>
-          <a:noFill/>
-        </p:spPr>
-        <p:txBody>
-          <a:bodyPr wrap="square" anchor="t" lIns="0" rIns="0" tIns="0" bIns="0">
-            <a:spAutoFit/>
-          </a:bodyPr>
-          <a:lstStyle/>
-          <a:p>
-            <a:pPr algn="l"/>
-            <a:r>
-              <a:rPr sz="900" b="1">
-                <a:solidFill>
-                  <a:srgbClr val="FFFFFF"/>
-                </a:solidFill>
-                <a:latin typeface="Open Sans"/>
-              </a:rPr>
-              <a:t>Records</a:t>
-            </a:r>
-          </a:p>
-        </p:txBody>
-      </p:sp>
-      <p:sp>
-        <p:nvSpPr>
-          <p:cNvPr id="76" name="TextBox 75"/>
-          <p:cNvSpPr txBox="1"/>
-          <p:nvPr/>
-        </p:nvSpPr>
-        <p:spPr>
-          <a:xfrm>
-            <a:off x="10104120" y="5385816"/>
-            <a:ext cx="1371600" cy="164592"/>
-          </a:xfrm>
-          <a:prstGeom prst="rect">
-            <a:avLst/>
-          </a:prstGeom>
-          <a:noFill/>
-        </p:spPr>
-        <p:txBody>
-          <a:bodyPr wrap="square" anchor="t" lIns="0" rIns="0" tIns="0" bIns="0">
-            <a:spAutoFit/>
-          </a:bodyPr>
-          <a:lstStyle/>
-          <a:p>
-            <a:pPr algn="l"/>
-            <a:r>
-              <a:rPr sz="900" b="1">
-                <a:solidFill>
-                  <a:srgbClr val="FFFFFF"/>
-                </a:solidFill>
-                <a:latin typeface="Open Sans"/>
-              </a:rPr>
-              <a:t>$ value</a:t>
-            </a:r>
-          </a:p>
-        </p:txBody>
-      </p:sp>
-      <p:sp>
-        <p:nvSpPr>
-          <p:cNvPr id="77" name="Rectangle 76"/>
-          <p:cNvSpPr/>
-          <p:nvPr/>
-        </p:nvSpPr>
-        <p:spPr>
-          <a:xfrm>
-            <a:off x="6217920" y="5568696"/>
-            <a:ext cx="5486400" cy="246888"/>
-          </a:xfrm>
-          <a:prstGeom prst="rect">
-            <a:avLst/>
-          </a:prstGeom>
-          <a:solidFill>
-            <a:srgbClr val="F8FAFC"/>
-          </a:solidFill>
-          <a:ln>
-            <a:noFill/>
-          </a:ln>
-          <a:effectLst/>
-        </p:spPr>
-        <p:style>
-          <a:lnRef idx="1">
-            <a:schemeClr val="accent1"/>
-          </a:lnRef>
-          <a:fillRef idx="3">
-            <a:schemeClr val="accent1"/>
-          </a:fillRef>
-          <a:effectRef idx="2">
-            <a:schemeClr val="accent1"/>
-          </a:effectRef>
-          <a:fontRef idx="minor">
-            <a:schemeClr val="lt1"/>
-          </a:fontRef>
-        </p:style>
-        <p:txBody>
-          <a:bodyPr rtlCol="0" anchor="ctr"/>
-          <a:lstStyle/>
-          <a:p>
-            <a:pPr algn="ctr"/>
-          </a:p>
-        </p:txBody>
-      </p:sp>
-      <p:sp>
-        <p:nvSpPr>
-          <p:cNvPr id="78" name="TextBox 77"/>
-          <p:cNvSpPr txBox="1"/>
-          <p:nvPr/>
-        </p:nvSpPr>
-        <p:spPr>
-          <a:xfrm>
-            <a:off x="6309360" y="5605272"/>
-            <a:ext cx="914400" cy="182880"/>
-          </a:xfrm>
-          <a:prstGeom prst="rect">
-            <a:avLst/>
-          </a:prstGeom>
-          <a:noFill/>
-        </p:spPr>
-        <p:txBody>
-          <a:bodyPr wrap="square" anchor="t" lIns="0" rIns="0" tIns="0" bIns="0">
-            <a:spAutoFit/>
-          </a:bodyPr>
-          <a:lstStyle/>
-          <a:p>
-            <a:pPr algn="l"/>
-            <a:r>
-              <a:rPr sz="1000" b="1">
-                <a:solidFill>
-                  <a:srgbClr val="64748B"/>
-                </a:solidFill>
-                <a:latin typeface="Open Sans"/>
-              </a:rPr>
-              <a:t>Tier 01</a:t>
-            </a:r>
-          </a:p>
-        </p:txBody>
-      </p:sp>
-      <p:sp>
-        <p:nvSpPr>
-          <p:cNvPr id="79" name="TextBox 78"/>
-          <p:cNvSpPr txBox="1"/>
-          <p:nvPr/>
-        </p:nvSpPr>
-        <p:spPr>
-          <a:xfrm>
-            <a:off x="7269480" y="5605272"/>
-            <a:ext cx="1280160" cy="182880"/>
-          </a:xfrm>
-          <a:prstGeom prst="rect">
-            <a:avLst/>
-          </a:prstGeom>
-          <a:noFill/>
-        </p:spPr>
-        <p:txBody>
-          <a:bodyPr wrap="square" anchor="t" lIns="0" rIns="0" tIns="0" bIns="0">
-            <a:spAutoFit/>
-          </a:bodyPr>
-          <a:lstStyle/>
-          <a:p>
-            <a:pPr algn="l"/>
-            <a:r>
-              <a:rPr sz="900" b="0">
-                <a:solidFill>
-                  <a:srgbClr val="334155"/>
-                </a:solidFill>
-                <a:latin typeface="Open Sans"/>
-              </a:rPr>
-              <a:t>$0–$9.99</a:t>
-            </a:r>
-          </a:p>
-        </p:txBody>
-      </p:sp>
-      <p:sp>
-        <p:nvSpPr>
-          <p:cNvPr id="80" name="TextBox 79"/>
-          <p:cNvSpPr txBox="1"/>
-          <p:nvPr/>
-        </p:nvSpPr>
-        <p:spPr>
-          <a:xfrm>
-            <a:off x="8641080" y="5605272"/>
-            <a:ext cx="1371600" cy="182880"/>
-          </a:xfrm>
-          <a:prstGeom prst="rect">
-            <a:avLst/>
-          </a:prstGeom>
-          <a:noFill/>
-        </p:spPr>
-        <p:txBody>
-          <a:bodyPr wrap="square" anchor="t" lIns="0" rIns="0" tIns="0" bIns="0">
-            <a:spAutoFit/>
-          </a:bodyPr>
-          <a:lstStyle/>
-          <a:p>
-            <a:pPr algn="l"/>
-            <a:r>
-              <a:rPr sz="1000" b="0">
-                <a:solidFill>
-                  <a:srgbClr val="334155"/>
-                </a:solidFill>
-                <a:latin typeface="Open Sans"/>
-              </a:rPr>
-              <a:t>2,283,461</a:t>
-            </a:r>
-          </a:p>
-        </p:txBody>
-      </p:sp>
-      <p:sp>
-        <p:nvSpPr>
-          <p:cNvPr id="81" name="TextBox 80"/>
-          <p:cNvSpPr txBox="1"/>
-          <p:nvPr/>
-        </p:nvSpPr>
-        <p:spPr>
-          <a:xfrm>
-            <a:off x="10104120" y="5605272"/>
-            <a:ext cx="1371600" cy="182880"/>
-          </a:xfrm>
-          <a:prstGeom prst="rect">
-            <a:avLst/>
-          </a:prstGeom>
-          <a:noFill/>
-        </p:spPr>
-        <p:txBody>
-          <a:bodyPr wrap="square" anchor="t" lIns="0" rIns="0" tIns="0" bIns="0">
-            <a:spAutoFit/>
-          </a:bodyPr>
-          <a:lstStyle/>
-          <a:p>
-            <a:pPr algn="l"/>
-            <a:r>
-              <a:rPr sz="1000" b="1">
-                <a:solidFill>
-                  <a:srgbClr val="64748B"/>
-                </a:solidFill>
-                <a:latin typeface="Open Sans"/>
-              </a:rPr>
-              <a:t>$5.8M</a:t>
-            </a:r>
-          </a:p>
-        </p:txBody>
-      </p:sp>
-      <p:sp>
-        <p:nvSpPr>
-          <p:cNvPr id="82" name="Rectangle 81"/>
-          <p:cNvSpPr/>
-          <p:nvPr/>
-        </p:nvSpPr>
-        <p:spPr>
-          <a:xfrm>
-            <a:off x="6217920" y="5815583"/>
-            <a:ext cx="5486400" cy="246888"/>
-          </a:xfrm>
-          <a:prstGeom prst="rect">
-            <a:avLst/>
-          </a:prstGeom>
-          <a:solidFill>
-            <a:srgbClr val="FFFFFF"/>
-          </a:solidFill>
-          <a:ln>
-            <a:noFill/>
-          </a:ln>
-          <a:effectLst/>
-        </p:spPr>
-        <p:style>
-          <a:lnRef idx="1">
-            <a:schemeClr val="accent1"/>
-          </a:lnRef>
-          <a:fillRef idx="3">
-            <a:schemeClr val="accent1"/>
-          </a:fillRef>
-          <a:effectRef idx="2">
-            <a:schemeClr val="accent1"/>
-          </a:effectRef>
-          <a:fontRef idx="minor">
-            <a:schemeClr val="lt1"/>
-          </a:fontRef>
-        </p:style>
-        <p:txBody>
-          <a:bodyPr rtlCol="0" anchor="ctr"/>
-          <a:lstStyle/>
-          <a:p>
-            <a:pPr algn="ctr"/>
-          </a:p>
-        </p:txBody>
-      </p:sp>
-      <p:sp>
-        <p:nvSpPr>
-          <p:cNvPr id="83" name="TextBox 82"/>
-          <p:cNvSpPr txBox="1"/>
-          <p:nvPr/>
-        </p:nvSpPr>
-        <p:spPr>
-          <a:xfrm>
-            <a:off x="6309360" y="5852159"/>
-            <a:ext cx="914400" cy="182880"/>
-          </a:xfrm>
-          <a:prstGeom prst="rect">
-            <a:avLst/>
-          </a:prstGeom>
-          <a:noFill/>
-        </p:spPr>
-        <p:txBody>
-          <a:bodyPr wrap="square" anchor="t" lIns="0" rIns="0" tIns="0" bIns="0">
-            <a:spAutoFit/>
-          </a:bodyPr>
-          <a:lstStyle/>
-          <a:p>
-            <a:pPr algn="l"/>
-            <a:r>
-              <a:rPr sz="1000" b="1">
-                <a:solidFill>
-                  <a:srgbClr val="FFB352"/>
-                </a:solidFill>
-                <a:latin typeface="Open Sans"/>
-              </a:rPr>
-              <a:t>Tier 02</a:t>
-            </a:r>
-          </a:p>
-        </p:txBody>
-      </p:sp>
-      <p:sp>
-        <p:nvSpPr>
-          <p:cNvPr id="84" name="TextBox 83"/>
-          <p:cNvSpPr txBox="1"/>
-          <p:nvPr/>
-        </p:nvSpPr>
-        <p:spPr>
-          <a:xfrm>
-            <a:off x="7269480" y="5852159"/>
-            <a:ext cx="1280160" cy="182880"/>
-          </a:xfrm>
-          <a:prstGeom prst="rect">
-            <a:avLst/>
-          </a:prstGeom>
-          <a:noFill/>
-        </p:spPr>
-        <p:txBody>
-          <a:bodyPr wrap="square" anchor="t" lIns="0" rIns="0" tIns="0" bIns="0">
-            <a:spAutoFit/>
-          </a:bodyPr>
-          <a:lstStyle/>
-          <a:p>
-            <a:pPr algn="l"/>
-            <a:r>
-              <a:rPr sz="900" b="0">
-                <a:solidFill>
-                  <a:srgbClr val="334155"/>
-                </a:solidFill>
-                <a:latin typeface="Open Sans"/>
-              </a:rPr>
-              <a:t>$10–$99.99</a:t>
-            </a:r>
-          </a:p>
-        </p:txBody>
-      </p:sp>
-      <p:sp>
-        <p:nvSpPr>
-          <p:cNvPr id="85" name="TextBox 84"/>
-          <p:cNvSpPr txBox="1"/>
-          <p:nvPr/>
-        </p:nvSpPr>
-        <p:spPr>
-          <a:xfrm>
-            <a:off x="8641080" y="5852159"/>
-            <a:ext cx="1371600" cy="182880"/>
-          </a:xfrm>
-          <a:prstGeom prst="rect">
-            <a:avLst/>
-          </a:prstGeom>
-          <a:noFill/>
-        </p:spPr>
-        <p:txBody>
-          <a:bodyPr wrap="square" anchor="t" lIns="0" rIns="0" tIns="0" bIns="0">
-            <a:spAutoFit/>
-          </a:bodyPr>
-          <a:lstStyle/>
-          <a:p>
-            <a:pPr algn="l"/>
-            <a:r>
-              <a:rPr sz="1000" b="0">
-                <a:solidFill>
-                  <a:srgbClr val="334155"/>
-                </a:solidFill>
-                <a:latin typeface="Open Sans"/>
-              </a:rPr>
-              <a:t>1,622,140</a:t>
-            </a:r>
-          </a:p>
-        </p:txBody>
-      </p:sp>
-      <p:sp>
-        <p:nvSpPr>
-          <p:cNvPr id="86" name="TextBox 85"/>
-          <p:cNvSpPr txBox="1"/>
-          <p:nvPr/>
-        </p:nvSpPr>
-        <p:spPr>
-          <a:xfrm>
-            <a:off x="10104120" y="5852159"/>
-            <a:ext cx="1371600" cy="182880"/>
-          </a:xfrm>
-          <a:prstGeom prst="rect">
-            <a:avLst/>
-          </a:prstGeom>
-          <a:noFill/>
-        </p:spPr>
-        <p:txBody>
-          <a:bodyPr wrap="square" anchor="t" lIns="0" rIns="0" tIns="0" bIns="0">
-            <a:spAutoFit/>
-          </a:bodyPr>
-          <a:lstStyle/>
-          <a:p>
-            <a:pPr algn="l"/>
-            <a:r>
-              <a:rPr sz="1000" b="1">
-                <a:solidFill>
-                  <a:srgbClr val="FFB352"/>
-                </a:solidFill>
-                <a:latin typeface="Open Sans"/>
-              </a:rPr>
-              <a:t>$57.9M</a:t>
-            </a:r>
-          </a:p>
-        </p:txBody>
-      </p:sp>
-      <p:sp>
-        <p:nvSpPr>
-          <p:cNvPr id="87" name="Rectangle 86"/>
-          <p:cNvSpPr/>
-          <p:nvPr/>
-        </p:nvSpPr>
-        <p:spPr>
-          <a:xfrm>
-            <a:off x="6217920" y="6062471"/>
-            <a:ext cx="5486400" cy="246888"/>
-          </a:xfrm>
-          <a:prstGeom prst="rect">
-            <a:avLst/>
-          </a:prstGeom>
-          <a:solidFill>
-            <a:srgbClr val="F8FAFC"/>
-          </a:solidFill>
-          <a:ln>
-            <a:noFill/>
-          </a:ln>
-          <a:effectLst/>
-        </p:spPr>
-        <p:style>
-          <a:lnRef idx="1">
-            <a:schemeClr val="accent1"/>
-          </a:lnRef>
-          <a:fillRef idx="3">
-            <a:schemeClr val="accent1"/>
-          </a:fillRef>
-          <a:effectRef idx="2">
-            <a:schemeClr val="accent1"/>
-          </a:effectRef>
-          <a:fontRef idx="minor">
-            <a:schemeClr val="lt1"/>
-          </a:fontRef>
-        </p:style>
-        <p:txBody>
-          <a:bodyPr rtlCol="0" anchor="ctr"/>
-          <a:lstStyle/>
-          <a:p>
-            <a:pPr algn="ctr"/>
-          </a:p>
-        </p:txBody>
-      </p:sp>
-      <p:sp>
-        <p:nvSpPr>
-          <p:cNvPr id="88" name="TextBox 87"/>
-          <p:cNvSpPr txBox="1"/>
-          <p:nvPr/>
-        </p:nvSpPr>
-        <p:spPr>
-          <a:xfrm>
-            <a:off x="6309360" y="6099047"/>
-            <a:ext cx="914400" cy="182880"/>
-          </a:xfrm>
-          <a:prstGeom prst="rect">
-            <a:avLst/>
-          </a:prstGeom>
-          <a:noFill/>
-        </p:spPr>
-        <p:txBody>
-          <a:bodyPr wrap="square" anchor="t" lIns="0" rIns="0" tIns="0" bIns="0">
-            <a:spAutoFit/>
-          </a:bodyPr>
-          <a:lstStyle/>
-          <a:p>
-            <a:pPr algn="l"/>
-            <a:r>
-              <a:rPr sz="1000" b="1">
-                <a:solidFill>
-                  <a:srgbClr val="FC4C0B"/>
-                </a:solidFill>
-                <a:latin typeface="Open Sans"/>
-              </a:rPr>
-              <a:t>Tier 03</a:t>
-            </a:r>
-          </a:p>
-        </p:txBody>
-      </p:sp>
-      <p:sp>
-        <p:nvSpPr>
-          <p:cNvPr id="89" name="TextBox 88"/>
-          <p:cNvSpPr txBox="1"/>
-          <p:nvPr/>
-        </p:nvSpPr>
-        <p:spPr>
-          <a:xfrm>
-            <a:off x="7269480" y="6099047"/>
-            <a:ext cx="1280160" cy="182880"/>
-          </a:xfrm>
-          <a:prstGeom prst="rect">
-            <a:avLst/>
-          </a:prstGeom>
-          <a:noFill/>
-        </p:spPr>
-        <p:txBody>
-          <a:bodyPr wrap="square" anchor="t" lIns="0" rIns="0" tIns="0" bIns="0">
-            <a:spAutoFit/>
-          </a:bodyPr>
-          <a:lstStyle/>
-          <a:p>
-            <a:pPr algn="l"/>
-            <a:r>
-              <a:rPr sz="900" b="0">
-                <a:solidFill>
-                  <a:srgbClr val="334155"/>
-                </a:solidFill>
-                <a:latin typeface="Open Sans"/>
-              </a:rPr>
-              <a:t>$100–$499.99</a:t>
-            </a:r>
-          </a:p>
-        </p:txBody>
-      </p:sp>
-      <p:sp>
-        <p:nvSpPr>
-          <p:cNvPr id="90" name="TextBox 89"/>
-          <p:cNvSpPr txBox="1"/>
-          <p:nvPr/>
-        </p:nvSpPr>
-        <p:spPr>
-          <a:xfrm>
-            <a:off x="8641080" y="6099047"/>
-            <a:ext cx="1371600" cy="182880"/>
-          </a:xfrm>
-          <a:prstGeom prst="rect">
-            <a:avLst/>
-          </a:prstGeom>
-          <a:noFill/>
-        </p:spPr>
-        <p:txBody>
-          <a:bodyPr wrap="square" anchor="t" lIns="0" rIns="0" tIns="0" bIns="0">
-            <a:spAutoFit/>
-          </a:bodyPr>
-          <a:lstStyle/>
-          <a:p>
-            <a:pPr algn="l"/>
-            <a:r>
-              <a:rPr sz="1000" b="0">
-                <a:solidFill>
-                  <a:srgbClr val="334155"/>
-                </a:solidFill>
-                <a:latin typeface="Open Sans"/>
-              </a:rPr>
-              <a:t>425,201</a:t>
-            </a:r>
-          </a:p>
-        </p:txBody>
-      </p:sp>
-      <p:sp>
-        <p:nvSpPr>
-          <p:cNvPr id="91" name="TextBox 90"/>
-          <p:cNvSpPr txBox="1"/>
-          <p:nvPr/>
-        </p:nvSpPr>
-        <p:spPr>
-          <a:xfrm>
-            <a:off x="10104120" y="6099047"/>
-            <a:ext cx="1371600" cy="182880"/>
-          </a:xfrm>
-          <a:prstGeom prst="rect">
-            <a:avLst/>
-          </a:prstGeom>
-          <a:noFill/>
-        </p:spPr>
-        <p:txBody>
-          <a:bodyPr wrap="square" anchor="t" lIns="0" rIns="0" tIns="0" bIns="0">
-            <a:spAutoFit/>
-          </a:bodyPr>
-          <a:lstStyle/>
-          <a:p>
-            <a:pPr algn="l"/>
-            <a:r>
-              <a:rPr sz="1000" b="1">
-                <a:solidFill>
-                  <a:srgbClr val="FC4C0B"/>
-                </a:solidFill>
-                <a:latin typeface="Open Sans"/>
-              </a:rPr>
-              <a:t>$87.5M</a:t>
-            </a:r>
-          </a:p>
-        </p:txBody>
-      </p:sp>
-      <p:sp>
-        <p:nvSpPr>
-          <p:cNvPr id="92" name="Rectangle 91"/>
-          <p:cNvSpPr/>
-          <p:nvPr/>
-        </p:nvSpPr>
-        <p:spPr>
-          <a:xfrm>
-            <a:off x="6217920" y="6309359"/>
-            <a:ext cx="5486400" cy="246888"/>
-          </a:xfrm>
-          <a:prstGeom prst="rect">
-            <a:avLst/>
-          </a:prstGeom>
-          <a:solidFill>
-            <a:srgbClr val="FFFFFF"/>
-          </a:solidFill>
-          <a:ln>
-            <a:noFill/>
-          </a:ln>
-          <a:effectLst/>
-        </p:spPr>
-        <p:style>
-          <a:lnRef idx="1">
-            <a:schemeClr val="accent1"/>
-          </a:lnRef>
-          <a:fillRef idx="3">
-            <a:schemeClr val="accent1"/>
-          </a:fillRef>
-          <a:effectRef idx="2">
-            <a:schemeClr val="accent1"/>
-          </a:effectRef>
-          <a:fontRef idx="minor">
-            <a:schemeClr val="lt1"/>
-          </a:fontRef>
-        </p:style>
-        <p:txBody>
-          <a:bodyPr rtlCol="0" anchor="ctr"/>
-          <a:lstStyle/>
-          <a:p>
-            <a:pPr algn="ctr"/>
-          </a:p>
-        </p:txBody>
-      </p:sp>
-      <p:sp>
-        <p:nvSpPr>
-          <p:cNvPr id="93" name="TextBox 92"/>
-          <p:cNvSpPr txBox="1"/>
-          <p:nvPr/>
-        </p:nvSpPr>
-        <p:spPr>
-          <a:xfrm>
-            <a:off x="6309360" y="6345935"/>
-            <a:ext cx="914400" cy="182880"/>
-          </a:xfrm>
-          <a:prstGeom prst="rect">
-            <a:avLst/>
-          </a:prstGeom>
-          <a:noFill/>
-        </p:spPr>
-        <p:txBody>
-          <a:bodyPr wrap="square" anchor="t" lIns="0" rIns="0" tIns="0" bIns="0">
-            <a:spAutoFit/>
-          </a:bodyPr>
-          <a:lstStyle/>
-          <a:p>
-            <a:pPr algn="l"/>
-            <a:r>
-              <a:rPr sz="1000" b="1">
-                <a:solidFill>
-                  <a:srgbClr val="2863C5"/>
-                </a:solidFill>
-                <a:latin typeface="Open Sans"/>
-              </a:rPr>
-              <a:t>Tier 04</a:t>
-            </a:r>
-          </a:p>
-        </p:txBody>
-      </p:sp>
-      <p:sp>
-        <p:nvSpPr>
-          <p:cNvPr id="94" name="TextBox 93"/>
-          <p:cNvSpPr txBox="1"/>
-          <p:nvPr/>
-        </p:nvSpPr>
-        <p:spPr>
-          <a:xfrm>
-            <a:off x="7269480" y="6345935"/>
-            <a:ext cx="1280160" cy="182880"/>
-          </a:xfrm>
-          <a:prstGeom prst="rect">
-            <a:avLst/>
-          </a:prstGeom>
-          <a:noFill/>
-        </p:spPr>
-        <p:txBody>
-          <a:bodyPr wrap="square" anchor="t" lIns="0" rIns="0" tIns="0" bIns="0">
-            <a:spAutoFit/>
-          </a:bodyPr>
-          <a:lstStyle/>
-          <a:p>
-            <a:pPr algn="l"/>
-            <a:r>
-              <a:rPr sz="900" b="0">
-                <a:solidFill>
-                  <a:srgbClr val="334155"/>
-                </a:solidFill>
-                <a:latin typeface="Open Sans"/>
-              </a:rPr>
-              <a:t>$500+</a:t>
-            </a:r>
-          </a:p>
-        </p:txBody>
-      </p:sp>
-      <p:sp>
-        <p:nvSpPr>
-          <p:cNvPr id="95" name="TextBox 94"/>
-          <p:cNvSpPr txBox="1"/>
-          <p:nvPr/>
-        </p:nvSpPr>
-        <p:spPr>
-          <a:xfrm>
-            <a:off x="8641080" y="6345935"/>
-            <a:ext cx="1371600" cy="182880"/>
-          </a:xfrm>
-          <a:prstGeom prst="rect">
-            <a:avLst/>
-          </a:prstGeom>
-          <a:noFill/>
-        </p:spPr>
-        <p:txBody>
-          <a:bodyPr wrap="square" anchor="t" lIns="0" rIns="0" tIns="0" bIns="0">
-            <a:spAutoFit/>
-          </a:bodyPr>
-          <a:lstStyle/>
-          <a:p>
-            <a:pPr algn="l"/>
-            <a:r>
-              <a:rPr sz="1000" b="0">
-                <a:solidFill>
-                  <a:srgbClr val="334155"/>
-                </a:solidFill>
-                <a:latin typeface="Open Sans"/>
-              </a:rPr>
-              <a:t>97,787</a:t>
-            </a:r>
-          </a:p>
-        </p:txBody>
-      </p:sp>
-      <p:sp>
-        <p:nvSpPr>
-          <p:cNvPr id="96" name="TextBox 95"/>
-          <p:cNvSpPr txBox="1"/>
-          <p:nvPr/>
-        </p:nvSpPr>
-        <p:spPr>
-          <a:xfrm>
-            <a:off x="10104120" y="6345935"/>
-            <a:ext cx="1371600" cy="182880"/>
-          </a:xfrm>
-          <a:prstGeom prst="rect">
-            <a:avLst/>
-          </a:prstGeom>
-          <a:noFill/>
-        </p:spPr>
-        <p:txBody>
-          <a:bodyPr wrap="square" anchor="t" lIns="0" rIns="0" tIns="0" bIns="0">
-            <a:spAutoFit/>
-          </a:bodyPr>
-          <a:lstStyle/>
-          <a:p>
-            <a:pPr algn="l"/>
-            <a:r>
-              <a:rPr sz="1000" b="1">
-                <a:solidFill>
-                  <a:srgbClr val="2863C5"/>
-                </a:solidFill>
-                <a:latin typeface="Open Sans"/>
-              </a:rPr>
-              <a:t>$173.1M</a:t>
-            </a:r>
-          </a:p>
-        </p:txBody>
-      </p:sp>
-      <p:sp>
-        <p:nvSpPr>
-          <p:cNvPr id="97" name="Rounded Rectangle 96"/>
-          <p:cNvSpPr/>
-          <p:nvPr/>
-        </p:nvSpPr>
-        <p:spPr>
-          <a:xfrm>
-            <a:off x="457200" y="6492240"/>
-            <a:ext cx="11247120" cy="329184"/>
-          </a:xfrm>
-          <a:prstGeom prst="roundRect">
-            <a:avLst>
-              <a:gd name="adj" fmla="val 10000"/>
-            </a:avLst>
-          </a:prstGeom>
-          <a:solidFill>
-            <a:srgbClr val="2863C5"/>
-          </a:solidFill>
-          <a:ln>
-            <a:noFill/>
-          </a:ln>
-          <a:effectLst/>
-        </p:spPr>
-        <p:style>
-          <a:lnRef idx="1">
-            <a:schemeClr val="accent1"/>
-          </a:lnRef>
-          <a:fillRef idx="3">
-            <a:schemeClr val="accent1"/>
-          </a:fillRef>
-          <a:effectRef idx="2">
-            <a:schemeClr val="accent1"/>
-          </a:effectRef>
-          <a:fontRef idx="minor">
-            <a:schemeClr val="lt1"/>
-          </a:fontRef>
-        </p:style>
-        <p:txBody>
-          <a:bodyPr rtlCol="0" anchor="ctr"/>
-          <a:lstStyle/>
-          <a:p>
-            <a:pPr algn="ctr"/>
-          </a:p>
-        </p:txBody>
-      </p:sp>
-      <p:sp>
-        <p:nvSpPr>
-          <p:cNvPr id="98" name="TextBox 97"/>
-          <p:cNvSpPr txBox="1"/>
-          <p:nvPr/>
-        </p:nvSpPr>
-        <p:spPr>
-          <a:xfrm>
-            <a:off x="640080" y="6537960"/>
-            <a:ext cx="10972800" cy="256032"/>
-          </a:xfrm>
-          <a:prstGeom prst="rect">
-            <a:avLst/>
-          </a:prstGeom>
-          <a:noFill/>
-        </p:spPr>
-        <p:txBody>
-          <a:bodyPr wrap="square" anchor="t" lIns="0" rIns="0" tIns="0" bIns="0">
-            <a:spAutoFit/>
-          </a:bodyPr>
-          <a:lstStyle/>
-          <a:p>
-            <a:pPr algn="l"/>
-            <a:r>
-              <a:rPr sz="1100" b="1">
-                <a:solidFill>
-                  <a:srgbClr val="FFFFFF"/>
-                </a:solidFill>
-                <a:latin typeface="Open Sans"/>
-              </a:rPr>
-              <a:t>70.8% is the upper bound. NAUPA baseline is ~14% of Americans. With the production PII matcher, expect 20–30% of our CA base.</a:t>
+              <a:t>Even discounting common-name false positives, ~9,000 customers in the high-confidence bucket map to ~$1.5M of unclaimed property in CA alone.</a:t>
             </a:r>
           </a:p>
         </p:txBody>

--- a/myReclaim-Exec-Deck.pptx
+++ b/myReclaim-Exec-Deck.pptx
@@ -11092,8 +11092,8 @@
         </p:nvSpPr>
         <p:spPr>
           <a:xfrm>
-            <a:off x="548640" y="4882896"/>
-            <a:ext cx="1554480" cy="182880"/>
+            <a:off x="502920" y="4882896"/>
+            <a:ext cx="868680" cy="182880"/>
           </a:xfrm>
           <a:prstGeom prst="rect">
             <a:avLst/>
@@ -11114,7 +11114,7 @@
                 </a:solidFill>
                 <a:latin typeface="Open Sans"/>
               </a:rPr>
-              <a:t>Records returned</a:t>
+              <a:t>Records</a:t>
             </a:r>
           </a:p>
         </p:txBody>
@@ -11127,7 +11127,77 @@
         </p:nvSpPr>
         <p:spPr>
           <a:xfrm>
-            <a:off x="2194560" y="4882896"/>
+            <a:off x="1417320" y="4882896"/>
+            <a:ext cx="777240" cy="182880"/>
+          </a:xfrm>
+          <a:prstGeom prst="rect">
+            <a:avLst/>
+          </a:prstGeom>
+          <a:noFill/>
+        </p:spPr>
+        <p:txBody>
+          <a:bodyPr wrap="square" anchor="t" lIns="0" rIns="0" tIns="0" bIns="0">
+            <a:spAutoFit/>
+          </a:bodyPr>
+          <a:lstStyle/>
+          <a:p>
+            <a:pPr algn="l"/>
+            <a:r>
+              <a:rPr sz="900" b="1">
+                <a:solidFill>
+                  <a:srgbClr val="FFFFFF"/>
+                </a:solidFill>
+                <a:latin typeface="Open Sans"/>
+              </a:rPr>
+              <a:t>Customers</a:t>
+            </a:r>
+          </a:p>
+        </p:txBody>
+      </p:sp>
+      <p:sp>
+        <p:nvSpPr>
+          <p:cNvPr id="31" name="TextBox 30"/>
+          <p:cNvSpPr txBox="1"/>
+          <p:nvPr/>
+        </p:nvSpPr>
+        <p:spPr>
+          <a:xfrm>
+            <a:off x="2240280" y="4882896"/>
+            <a:ext cx="777240" cy="182880"/>
+          </a:xfrm>
+          <a:prstGeom prst="rect">
+            <a:avLst/>
+          </a:prstGeom>
+          <a:noFill/>
+        </p:spPr>
+        <p:txBody>
+          <a:bodyPr wrap="square" anchor="t" lIns="0" rIns="0" tIns="0" bIns="0">
+            <a:spAutoFit/>
+          </a:bodyPr>
+          <a:lstStyle/>
+          <a:p>
+            <a:pPr algn="l"/>
+            <a:r>
+              <a:rPr sz="900" b="1">
+                <a:solidFill>
+                  <a:srgbClr val="FFFFFF"/>
+                </a:solidFill>
+                <a:latin typeface="Open Sans"/>
+              </a:rPr>
+              <a:t>$ total</a:t>
+            </a:r>
+          </a:p>
+        </p:txBody>
+      </p:sp>
+      <p:sp>
+        <p:nvSpPr>
+          <p:cNvPr id="32" name="TextBox 31"/>
+          <p:cNvSpPr txBox="1"/>
+          <p:nvPr/>
+        </p:nvSpPr>
+        <p:spPr>
+          <a:xfrm>
+            <a:off x="3063240" y="4882896"/>
             <a:ext cx="914400" cy="182880"/>
           </a:xfrm>
           <a:prstGeom prst="rect">
@@ -11149,21 +11219,21 @@
                 </a:solidFill>
                 <a:latin typeface="Open Sans"/>
               </a:rPr>
-              <a:t>Customers</a:t>
-            </a:r>
-          </a:p>
-        </p:txBody>
-      </p:sp>
-      <p:sp>
-        <p:nvSpPr>
-          <p:cNvPr id="31" name="TextBox 30"/>
-          <p:cNvSpPr txBox="1"/>
-          <p:nvPr/>
-        </p:nvSpPr>
-        <p:spPr>
-          <a:xfrm>
-            <a:off x="3246120" y="4882896"/>
-            <a:ext cx="914400" cy="182880"/>
+              <a:t>$/customer</a:t>
+            </a:r>
+          </a:p>
+        </p:txBody>
+      </p:sp>
+      <p:sp>
+        <p:nvSpPr>
+          <p:cNvPr id="33" name="TextBox 32"/>
+          <p:cNvSpPr txBox="1"/>
+          <p:nvPr/>
+        </p:nvSpPr>
+        <p:spPr>
+          <a:xfrm>
+            <a:off x="4023360" y="4882896"/>
+            <a:ext cx="1874519" cy="182880"/>
           </a:xfrm>
           <a:prstGeom prst="rect">
             <a:avLst/>
@@ -11184,41 +11254,6 @@
                 </a:solidFill>
                 <a:latin typeface="Open Sans"/>
               </a:rPr>
-              <a:t>$ value</a:t>
-            </a:r>
-          </a:p>
-        </p:txBody>
-      </p:sp>
-      <p:sp>
-        <p:nvSpPr>
-          <p:cNvPr id="32" name="TextBox 31"/>
-          <p:cNvSpPr txBox="1"/>
-          <p:nvPr/>
-        </p:nvSpPr>
-        <p:spPr>
-          <a:xfrm>
-            <a:off x="4297680" y="4882896"/>
-            <a:ext cx="1554480" cy="182880"/>
-          </a:xfrm>
-          <a:prstGeom prst="rect">
-            <a:avLst/>
-          </a:prstGeom>
-          <a:noFill/>
-        </p:spPr>
-        <p:txBody>
-          <a:bodyPr wrap="square" anchor="t" lIns="0" rIns="0" tIns="0" bIns="0">
-            <a:spAutoFit/>
-          </a:bodyPr>
-          <a:lstStyle/>
-          <a:p>
-            <a:pPr algn="l"/>
-            <a:r>
-              <a:rPr sz="900" b="1">
-                <a:solidFill>
-                  <a:srgbClr val="FFFFFF"/>
-                </a:solidFill>
-                <a:latin typeface="Open Sans"/>
-              </a:rPr>
               <a:t>Confidence</a:t>
             </a:r>
           </a:p>
@@ -11226,7 +11261,7 @@
       </p:sp>
       <p:sp>
         <p:nvSpPr>
-          <p:cNvPr id="33" name="Rectangle 32"/>
+          <p:cNvPr id="34" name="Rectangle 33"/>
           <p:cNvSpPr/>
           <p:nvPr/>
         </p:nvSpPr>
@@ -11270,29 +11305,29 @@
       </p:sp>
       <p:sp>
         <p:nvSpPr>
-          <p:cNvPr id="34" name="TextBox 33"/>
-          <p:cNvSpPr txBox="1"/>
-          <p:nvPr/>
-        </p:nvSpPr>
-        <p:spPr>
-          <a:xfrm>
-            <a:off x="548640" y="5138927"/>
-            <a:ext cx="1554480" cy="201168"/>
-          </a:xfrm>
-          <a:prstGeom prst="rect">
-            <a:avLst/>
-          </a:prstGeom>
-          <a:noFill/>
-        </p:spPr>
-        <p:txBody>
-          <a:bodyPr wrap="square" anchor="t" lIns="0" rIns="0" tIns="0" bIns="0">
-            <a:spAutoFit/>
-          </a:bodyPr>
-          <a:lstStyle/>
-          <a:p>
-            <a:pPr algn="l"/>
-            <a:r>
-              <a:rPr sz="1050" b="1">
+          <p:cNvPr id="35" name="TextBox 34"/>
+          <p:cNvSpPr txBox="1"/>
+          <p:nvPr/>
+        </p:nvSpPr>
+        <p:spPr>
+          <a:xfrm>
+            <a:off x="502920" y="5138927"/>
+            <a:ext cx="868680" cy="201168"/>
+          </a:xfrm>
+          <a:prstGeom prst="rect">
+            <a:avLst/>
+          </a:prstGeom>
+          <a:noFill/>
+        </p:spPr>
+        <p:txBody>
+          <a:bodyPr wrap="square" anchor="t" lIns="0" rIns="0" tIns="0" bIns="0">
+            <a:spAutoFit/>
+          </a:bodyPr>
+          <a:lstStyle/>
+          <a:p>
+            <a:pPr algn="l"/>
+            <a:r>
+              <a:rPr sz="1000" b="1">
                 <a:solidFill>
                   <a:srgbClr val="0F172A"/>
                 </a:solidFill>
@@ -11305,13 +11340,83 @@
       </p:sp>
       <p:sp>
         <p:nvSpPr>
-          <p:cNvPr id="35" name="TextBox 34"/>
-          <p:cNvSpPr txBox="1"/>
-          <p:nvPr/>
-        </p:nvSpPr>
-        <p:spPr>
-          <a:xfrm>
-            <a:off x="2194560" y="5138927"/>
+          <p:cNvPr id="36" name="TextBox 35"/>
+          <p:cNvSpPr txBox="1"/>
+          <p:nvPr/>
+        </p:nvSpPr>
+        <p:spPr>
+          <a:xfrm>
+            <a:off x="1417320" y="5138927"/>
+            <a:ext cx="777240" cy="201168"/>
+          </a:xfrm>
+          <a:prstGeom prst="rect">
+            <a:avLst/>
+          </a:prstGeom>
+          <a:noFill/>
+        </p:spPr>
+        <p:txBody>
+          <a:bodyPr wrap="square" anchor="t" lIns="0" rIns="0" tIns="0" bIns="0">
+            <a:spAutoFit/>
+          </a:bodyPr>
+          <a:lstStyle/>
+          <a:p>
+            <a:pPr algn="l"/>
+            <a:r>
+              <a:rPr sz="1000" b="0">
+                <a:solidFill>
+                  <a:srgbClr val="334155"/>
+                </a:solidFill>
+                <a:latin typeface="Open Sans"/>
+              </a:rPr>
+              <a:t>3,266</a:t>
+            </a:r>
+          </a:p>
+        </p:txBody>
+      </p:sp>
+      <p:sp>
+        <p:nvSpPr>
+          <p:cNvPr id="37" name="TextBox 36"/>
+          <p:cNvSpPr txBox="1"/>
+          <p:nvPr/>
+        </p:nvSpPr>
+        <p:spPr>
+          <a:xfrm>
+            <a:off x="2240280" y="5138927"/>
+            <a:ext cx="777240" cy="201168"/>
+          </a:xfrm>
+          <a:prstGeom prst="rect">
+            <a:avLst/>
+          </a:prstGeom>
+          <a:noFill/>
+        </p:spPr>
+        <p:txBody>
+          <a:bodyPr wrap="square" anchor="t" lIns="0" rIns="0" tIns="0" bIns="0">
+            <a:spAutoFit/>
+          </a:bodyPr>
+          <a:lstStyle/>
+          <a:p>
+            <a:pPr algn="l"/>
+            <a:r>
+              <a:rPr sz="1000" b="1">
+                <a:solidFill>
+                  <a:srgbClr val="059669"/>
+                </a:solidFill>
+                <a:latin typeface="Open Sans"/>
+              </a:rPr>
+              <a:t>$239K</a:t>
+            </a:r>
+          </a:p>
+        </p:txBody>
+      </p:sp>
+      <p:sp>
+        <p:nvSpPr>
+          <p:cNvPr id="38" name="TextBox 37"/>
+          <p:cNvSpPr txBox="1"/>
+          <p:nvPr/>
+        </p:nvSpPr>
+        <p:spPr>
+          <a:xfrm>
+            <a:off x="3063240" y="5138927"/>
             <a:ext cx="914400" cy="201168"/>
           </a:xfrm>
           <a:prstGeom prst="rect">
@@ -11327,77 +11432,42 @@
           <a:p>
             <a:pPr algn="l"/>
             <a:r>
-              <a:rPr sz="1050" b="0">
-                <a:solidFill>
-                  <a:srgbClr val="334155"/>
-                </a:solidFill>
-                <a:latin typeface="Open Sans"/>
-              </a:rPr>
-              <a:t>3,266</a:t>
-            </a:r>
-          </a:p>
-        </p:txBody>
-      </p:sp>
-      <p:sp>
-        <p:nvSpPr>
-          <p:cNvPr id="36" name="TextBox 35"/>
-          <p:cNvSpPr txBox="1"/>
-          <p:nvPr/>
-        </p:nvSpPr>
-        <p:spPr>
-          <a:xfrm>
-            <a:off x="3246120" y="5138927"/>
-            <a:ext cx="914400" cy="201168"/>
-          </a:xfrm>
-          <a:prstGeom prst="rect">
-            <a:avLst/>
-          </a:prstGeom>
-          <a:noFill/>
-        </p:spPr>
-        <p:txBody>
-          <a:bodyPr wrap="square" anchor="t" lIns="0" rIns="0" tIns="0" bIns="0">
-            <a:spAutoFit/>
-          </a:bodyPr>
-          <a:lstStyle/>
-          <a:p>
-            <a:pPr algn="l"/>
-            <a:r>
-              <a:rPr sz="1050" b="1">
+              <a:rPr sz="1000" b="0">
                 <a:solidFill>
                   <a:srgbClr val="059669"/>
                 </a:solidFill>
                 <a:latin typeface="Open Sans"/>
               </a:rPr>
-              <a:t>$239K</a:t>
-            </a:r>
-          </a:p>
-        </p:txBody>
-      </p:sp>
-      <p:sp>
-        <p:nvSpPr>
-          <p:cNvPr id="37" name="TextBox 36"/>
-          <p:cNvSpPr txBox="1"/>
-          <p:nvPr/>
-        </p:nvSpPr>
-        <p:spPr>
-          <a:xfrm>
-            <a:off x="4297680" y="5138927"/>
-            <a:ext cx="1554480" cy="201168"/>
-          </a:xfrm>
-          <a:prstGeom prst="rect">
-            <a:avLst/>
-          </a:prstGeom>
-          <a:noFill/>
-        </p:spPr>
-        <p:txBody>
-          <a:bodyPr wrap="square" anchor="t" lIns="0" rIns="0" tIns="0" bIns="0">
-            <a:spAutoFit/>
-          </a:bodyPr>
-          <a:lstStyle/>
-          <a:p>
-            <a:pPr algn="l"/>
-            <a:r>
-              <a:rPr sz="950" b="0">
+              <a:t>$73</a:t>
+            </a:r>
+          </a:p>
+        </p:txBody>
+      </p:sp>
+      <p:sp>
+        <p:nvSpPr>
+          <p:cNvPr id="39" name="TextBox 38"/>
+          <p:cNvSpPr txBox="1"/>
+          <p:nvPr/>
+        </p:nvSpPr>
+        <p:spPr>
+          <a:xfrm>
+            <a:off x="4023360" y="5138927"/>
+            <a:ext cx="1874519" cy="201168"/>
+          </a:xfrm>
+          <a:prstGeom prst="rect">
+            <a:avLst/>
+          </a:prstGeom>
+          <a:noFill/>
+        </p:spPr>
+        <p:txBody>
+          <a:bodyPr wrap="square" anchor="t" lIns="0" rIns="0" tIns="0" bIns="0">
+            <a:spAutoFit/>
+          </a:bodyPr>
+          <a:lstStyle/>
+          <a:p>
+            <a:pPr algn="l"/>
+            <a:r>
+              <a:rPr sz="900" b="0">
                 <a:solidFill>
                   <a:srgbClr val="64748B"/>
                 </a:solidFill>
@@ -11410,7 +11480,7 @@
       </p:sp>
       <p:sp>
         <p:nvSpPr>
-          <p:cNvPr id="38" name="Rectangle 37"/>
+          <p:cNvPr id="40" name="Rectangle 39"/>
           <p:cNvSpPr/>
           <p:nvPr/>
         </p:nvSpPr>
@@ -11454,29 +11524,29 @@
       </p:sp>
       <p:sp>
         <p:nvSpPr>
-          <p:cNvPr id="39" name="TextBox 38"/>
-          <p:cNvSpPr txBox="1"/>
-          <p:nvPr/>
-        </p:nvSpPr>
-        <p:spPr>
-          <a:xfrm>
-            <a:off x="548640" y="5440679"/>
-            <a:ext cx="1554480" cy="201168"/>
-          </a:xfrm>
-          <a:prstGeom prst="rect">
-            <a:avLst/>
-          </a:prstGeom>
-          <a:noFill/>
-        </p:spPr>
-        <p:txBody>
-          <a:bodyPr wrap="square" anchor="t" lIns="0" rIns="0" tIns="0" bIns="0">
-            <a:spAutoFit/>
-          </a:bodyPr>
-          <a:lstStyle/>
-          <a:p>
-            <a:pPr algn="l"/>
-            <a:r>
-              <a:rPr sz="1050" b="1">
+          <p:cNvPr id="41" name="TextBox 40"/>
+          <p:cNvSpPr txBox="1"/>
+          <p:nvPr/>
+        </p:nvSpPr>
+        <p:spPr>
+          <a:xfrm>
+            <a:off x="502920" y="5440679"/>
+            <a:ext cx="868680" cy="201168"/>
+          </a:xfrm>
+          <a:prstGeom prst="rect">
+            <a:avLst/>
+          </a:prstGeom>
+          <a:noFill/>
+        </p:spPr>
+        <p:txBody>
+          <a:bodyPr wrap="square" anchor="t" lIns="0" rIns="0" tIns="0" bIns="0">
+            <a:spAutoFit/>
+          </a:bodyPr>
+          <a:lstStyle/>
+          <a:p>
+            <a:pPr algn="l"/>
+            <a:r>
+              <a:rPr sz="1000" b="1">
                 <a:solidFill>
                   <a:srgbClr val="0F172A"/>
                 </a:solidFill>
@@ -11489,13 +11559,83 @@
       </p:sp>
       <p:sp>
         <p:nvSpPr>
-          <p:cNvPr id="40" name="TextBox 39"/>
-          <p:cNvSpPr txBox="1"/>
-          <p:nvPr/>
-        </p:nvSpPr>
-        <p:spPr>
-          <a:xfrm>
-            <a:off x="2194560" y="5440679"/>
+          <p:cNvPr id="42" name="TextBox 41"/>
+          <p:cNvSpPr txBox="1"/>
+          <p:nvPr/>
+        </p:nvSpPr>
+        <p:spPr>
+          <a:xfrm>
+            <a:off x="1417320" y="5440679"/>
+            <a:ext cx="777240" cy="201168"/>
+          </a:xfrm>
+          <a:prstGeom prst="rect">
+            <a:avLst/>
+          </a:prstGeom>
+          <a:noFill/>
+        </p:spPr>
+        <p:txBody>
+          <a:bodyPr wrap="square" anchor="t" lIns="0" rIns="0" tIns="0" bIns="0">
+            <a:spAutoFit/>
+          </a:bodyPr>
+          <a:lstStyle/>
+          <a:p>
+            <a:pPr algn="l"/>
+            <a:r>
+              <a:rPr sz="1000" b="0">
+                <a:solidFill>
+                  <a:srgbClr val="334155"/>
+                </a:solidFill>
+                <a:latin typeface="Open Sans"/>
+              </a:rPr>
+              <a:t>5,788</a:t>
+            </a:r>
+          </a:p>
+        </p:txBody>
+      </p:sp>
+      <p:sp>
+        <p:nvSpPr>
+          <p:cNvPr id="43" name="TextBox 42"/>
+          <p:cNvSpPr txBox="1"/>
+          <p:nvPr/>
+        </p:nvSpPr>
+        <p:spPr>
+          <a:xfrm>
+            <a:off x="2240280" y="5440679"/>
+            <a:ext cx="777240" cy="201168"/>
+          </a:xfrm>
+          <a:prstGeom prst="rect">
+            <a:avLst/>
+          </a:prstGeom>
+          <a:noFill/>
+        </p:spPr>
+        <p:txBody>
+          <a:bodyPr wrap="square" anchor="t" lIns="0" rIns="0" tIns="0" bIns="0">
+            <a:spAutoFit/>
+          </a:bodyPr>
+          <a:lstStyle/>
+          <a:p>
+            <a:pPr algn="l"/>
+            <a:r>
+              <a:rPr sz="1000" b="1">
+                <a:solidFill>
+                  <a:srgbClr val="059669"/>
+                </a:solidFill>
+                <a:latin typeface="Open Sans"/>
+              </a:rPr>
+              <a:t>$1.21M</a:t>
+            </a:r>
+          </a:p>
+        </p:txBody>
+      </p:sp>
+      <p:sp>
+        <p:nvSpPr>
+          <p:cNvPr id="44" name="TextBox 43"/>
+          <p:cNvSpPr txBox="1"/>
+          <p:nvPr/>
+        </p:nvSpPr>
+        <p:spPr>
+          <a:xfrm>
+            <a:off x="3063240" y="5440679"/>
             <a:ext cx="914400" cy="201168"/>
           </a:xfrm>
           <a:prstGeom prst="rect">
@@ -11511,77 +11651,42 @@
           <a:p>
             <a:pPr algn="l"/>
             <a:r>
-              <a:rPr sz="1050" b="0">
-                <a:solidFill>
-                  <a:srgbClr val="334155"/>
-                </a:solidFill>
-                <a:latin typeface="Open Sans"/>
-              </a:rPr>
-              <a:t>5,788</a:t>
-            </a:r>
-          </a:p>
-        </p:txBody>
-      </p:sp>
-      <p:sp>
-        <p:nvSpPr>
-          <p:cNvPr id="41" name="TextBox 40"/>
-          <p:cNvSpPr txBox="1"/>
-          <p:nvPr/>
-        </p:nvSpPr>
-        <p:spPr>
-          <a:xfrm>
-            <a:off x="3246120" y="5440679"/>
-            <a:ext cx="914400" cy="201168"/>
-          </a:xfrm>
-          <a:prstGeom prst="rect">
-            <a:avLst/>
-          </a:prstGeom>
-          <a:noFill/>
-        </p:spPr>
-        <p:txBody>
-          <a:bodyPr wrap="square" anchor="t" lIns="0" rIns="0" tIns="0" bIns="0">
-            <a:spAutoFit/>
-          </a:bodyPr>
-          <a:lstStyle/>
-          <a:p>
-            <a:pPr algn="l"/>
-            <a:r>
-              <a:rPr sz="1050" b="1">
+              <a:rPr sz="1000" b="0">
                 <a:solidFill>
                   <a:srgbClr val="059669"/>
                 </a:solidFill>
                 <a:latin typeface="Open Sans"/>
               </a:rPr>
-              <a:t>$1.21M</a:t>
-            </a:r>
-          </a:p>
-        </p:txBody>
-      </p:sp>
-      <p:sp>
-        <p:nvSpPr>
-          <p:cNvPr id="42" name="TextBox 41"/>
-          <p:cNvSpPr txBox="1"/>
-          <p:nvPr/>
-        </p:nvSpPr>
-        <p:spPr>
-          <a:xfrm>
-            <a:off x="4297680" y="5440679"/>
-            <a:ext cx="1554480" cy="201168"/>
-          </a:xfrm>
-          <a:prstGeom prst="rect">
-            <a:avLst/>
-          </a:prstGeom>
-          <a:noFill/>
-        </p:spPr>
-        <p:txBody>
-          <a:bodyPr wrap="square" anchor="t" lIns="0" rIns="0" tIns="0" bIns="0">
-            <a:spAutoFit/>
-          </a:bodyPr>
-          <a:lstStyle/>
-          <a:p>
-            <a:pPr algn="l"/>
-            <a:r>
-              <a:rPr sz="950" b="0">
+              <a:t>$209</a:t>
+            </a:r>
+          </a:p>
+        </p:txBody>
+      </p:sp>
+      <p:sp>
+        <p:nvSpPr>
+          <p:cNvPr id="45" name="TextBox 44"/>
+          <p:cNvSpPr txBox="1"/>
+          <p:nvPr/>
+        </p:nvSpPr>
+        <p:spPr>
+          <a:xfrm>
+            <a:off x="4023360" y="5440679"/>
+            <a:ext cx="1874519" cy="201168"/>
+          </a:xfrm>
+          <a:prstGeom prst="rect">
+            <a:avLst/>
+          </a:prstGeom>
+          <a:noFill/>
+        </p:spPr>
+        <p:txBody>
+          <a:bodyPr wrap="square" anchor="t" lIns="0" rIns="0" tIns="0" bIns="0">
+            <a:spAutoFit/>
+          </a:bodyPr>
+          <a:lstStyle/>
+          <a:p>
+            <a:pPr algn="l"/>
+            <a:r>
+              <a:rPr sz="900" b="0">
                 <a:solidFill>
                   <a:srgbClr val="64748B"/>
                 </a:solidFill>
@@ -11594,7 +11699,7 @@
       </p:sp>
       <p:sp>
         <p:nvSpPr>
-          <p:cNvPr id="43" name="Rectangle 42"/>
+          <p:cNvPr id="46" name="Rectangle 45"/>
           <p:cNvSpPr/>
           <p:nvPr/>
         </p:nvSpPr>
@@ -11638,29 +11743,29 @@
       </p:sp>
       <p:sp>
         <p:nvSpPr>
-          <p:cNvPr id="44" name="TextBox 43"/>
-          <p:cNvSpPr txBox="1"/>
-          <p:nvPr/>
-        </p:nvSpPr>
-        <p:spPr>
-          <a:xfrm>
-            <a:off x="548640" y="5742431"/>
-            <a:ext cx="1554480" cy="201168"/>
-          </a:xfrm>
-          <a:prstGeom prst="rect">
-            <a:avLst/>
-          </a:prstGeom>
-          <a:noFill/>
-        </p:spPr>
-        <p:txBody>
-          <a:bodyPr wrap="square" anchor="t" lIns="0" rIns="0" tIns="0" bIns="0">
-            <a:spAutoFit/>
-          </a:bodyPr>
-          <a:lstStyle/>
-          <a:p>
-            <a:pPr algn="l"/>
-            <a:r>
-              <a:rPr sz="1050" b="1">
+          <p:cNvPr id="47" name="TextBox 46"/>
+          <p:cNvSpPr txBox="1"/>
+          <p:nvPr/>
+        </p:nvSpPr>
+        <p:spPr>
+          <a:xfrm>
+            <a:off x="502920" y="5742431"/>
+            <a:ext cx="868680" cy="201168"/>
+          </a:xfrm>
+          <a:prstGeom prst="rect">
+            <a:avLst/>
+          </a:prstGeom>
+          <a:noFill/>
+        </p:spPr>
+        <p:txBody>
+          <a:bodyPr wrap="square" anchor="t" lIns="0" rIns="0" tIns="0" bIns="0">
+            <a:spAutoFit/>
+          </a:bodyPr>
+          <a:lstStyle/>
+          <a:p>
+            <a:pPr algn="l"/>
+            <a:r>
+              <a:rPr sz="1000" b="1">
                 <a:solidFill>
                   <a:srgbClr val="0F172A"/>
                 </a:solidFill>
@@ -11673,13 +11778,83 @@
       </p:sp>
       <p:sp>
         <p:nvSpPr>
-          <p:cNvPr id="45" name="TextBox 44"/>
-          <p:cNvSpPr txBox="1"/>
-          <p:nvPr/>
-        </p:nvSpPr>
-        <p:spPr>
-          <a:xfrm>
-            <a:off x="2194560" y="5742431"/>
+          <p:cNvPr id="48" name="TextBox 47"/>
+          <p:cNvSpPr txBox="1"/>
+          <p:nvPr/>
+        </p:nvSpPr>
+        <p:spPr>
+          <a:xfrm>
+            <a:off x="1417320" y="5742431"/>
+            <a:ext cx="777240" cy="201168"/>
+          </a:xfrm>
+          <a:prstGeom prst="rect">
+            <a:avLst/>
+          </a:prstGeom>
+          <a:noFill/>
+        </p:spPr>
+        <p:txBody>
+          <a:bodyPr wrap="square" anchor="t" lIns="0" rIns="0" tIns="0" bIns="0">
+            <a:spAutoFit/>
+          </a:bodyPr>
+          <a:lstStyle/>
+          <a:p>
+            <a:pPr algn="l"/>
+            <a:r>
+              <a:rPr sz="1000" b="0">
+                <a:solidFill>
+                  <a:srgbClr val="334155"/>
+                </a:solidFill>
+                <a:latin typeface="Open Sans"/>
+              </a:rPr>
+              <a:t>4,393</a:t>
+            </a:r>
+          </a:p>
+        </p:txBody>
+      </p:sp>
+      <p:sp>
+        <p:nvSpPr>
+          <p:cNvPr id="49" name="TextBox 48"/>
+          <p:cNvSpPr txBox="1"/>
+          <p:nvPr/>
+        </p:nvSpPr>
+        <p:spPr>
+          <a:xfrm>
+            <a:off x="2240280" y="5742431"/>
+            <a:ext cx="777240" cy="201168"/>
+          </a:xfrm>
+          <a:prstGeom prst="rect">
+            <a:avLst/>
+          </a:prstGeom>
+          <a:noFill/>
+        </p:spPr>
+        <p:txBody>
+          <a:bodyPr wrap="square" anchor="t" lIns="0" rIns="0" tIns="0" bIns="0">
+            <a:spAutoFit/>
+          </a:bodyPr>
+          <a:lstStyle/>
+          <a:p>
+            <a:pPr algn="l"/>
+            <a:r>
+              <a:rPr sz="1000" b="1">
+                <a:solidFill>
+                  <a:srgbClr val="FFB352"/>
+                </a:solidFill>
+                <a:latin typeface="Open Sans"/>
+              </a:rPr>
+              <a:t>$3.50M</a:t>
+            </a:r>
+          </a:p>
+        </p:txBody>
+      </p:sp>
+      <p:sp>
+        <p:nvSpPr>
+          <p:cNvPr id="50" name="TextBox 49"/>
+          <p:cNvSpPr txBox="1"/>
+          <p:nvPr/>
+        </p:nvSpPr>
+        <p:spPr>
+          <a:xfrm>
+            <a:off x="3063240" y="5742431"/>
             <a:ext cx="914400" cy="201168"/>
           </a:xfrm>
           <a:prstGeom prst="rect">
@@ -11695,90 +11870,55 @@
           <a:p>
             <a:pPr algn="l"/>
             <a:r>
-              <a:rPr sz="1050" b="0">
-                <a:solidFill>
-                  <a:srgbClr val="334155"/>
-                </a:solidFill>
-                <a:latin typeface="Open Sans"/>
-              </a:rPr>
-              <a:t>4,393</a:t>
-            </a:r>
-          </a:p>
-        </p:txBody>
-      </p:sp>
-      <p:sp>
-        <p:nvSpPr>
-          <p:cNvPr id="46" name="TextBox 45"/>
-          <p:cNvSpPr txBox="1"/>
-          <p:nvPr/>
-        </p:nvSpPr>
-        <p:spPr>
-          <a:xfrm>
-            <a:off x="3246120" y="5742431"/>
-            <a:ext cx="914400" cy="201168"/>
-          </a:xfrm>
-          <a:prstGeom prst="rect">
-            <a:avLst/>
-          </a:prstGeom>
-          <a:noFill/>
-        </p:spPr>
-        <p:txBody>
-          <a:bodyPr wrap="square" anchor="t" lIns="0" rIns="0" tIns="0" bIns="0">
-            <a:spAutoFit/>
-          </a:bodyPr>
-          <a:lstStyle/>
-          <a:p>
-            <a:pPr algn="l"/>
-            <a:r>
-              <a:rPr sz="1050" b="1">
+              <a:rPr sz="1000" b="0">
                 <a:solidFill>
                   <a:srgbClr val="FFB352"/>
                 </a:solidFill>
                 <a:latin typeface="Open Sans"/>
               </a:rPr>
-              <a:t>$3.50M</a:t>
-            </a:r>
-          </a:p>
-        </p:txBody>
-      </p:sp>
-      <p:sp>
-        <p:nvSpPr>
-          <p:cNvPr id="47" name="TextBox 46"/>
-          <p:cNvSpPr txBox="1"/>
-          <p:nvPr/>
-        </p:nvSpPr>
-        <p:spPr>
-          <a:xfrm>
-            <a:off x="4297680" y="5742431"/>
-            <a:ext cx="1554480" cy="201168"/>
-          </a:xfrm>
-          <a:prstGeom prst="rect">
-            <a:avLst/>
-          </a:prstGeom>
-          <a:noFill/>
-        </p:spPr>
-        <p:txBody>
-          <a:bodyPr wrap="square" anchor="t" lIns="0" rIns="0" tIns="0" bIns="0">
-            <a:spAutoFit/>
-          </a:bodyPr>
-          <a:lstStyle/>
-          <a:p>
-            <a:pPr algn="l"/>
-            <a:r>
-              <a:rPr sz="950" b="0">
+              <a:t>$797</a:t>
+            </a:r>
+          </a:p>
+        </p:txBody>
+      </p:sp>
+      <p:sp>
+        <p:nvSpPr>
+          <p:cNvPr id="51" name="TextBox 50"/>
+          <p:cNvSpPr txBox="1"/>
+          <p:nvPr/>
+        </p:nvSpPr>
+        <p:spPr>
+          <a:xfrm>
+            <a:off x="4023360" y="5742431"/>
+            <a:ext cx="1874519" cy="201168"/>
+          </a:xfrm>
+          <a:prstGeom prst="rect">
+            <a:avLst/>
+          </a:prstGeom>
+          <a:noFill/>
+        </p:spPr>
+        <p:txBody>
+          <a:bodyPr wrap="square" anchor="t" lIns="0" rIns="0" tIns="0" bIns="0">
+            <a:spAutoFit/>
+          </a:bodyPr>
+          <a:lstStyle/>
+          <a:p>
+            <a:pPr algn="l"/>
+            <a:r>
+              <a:rPr sz="900" b="0">
                 <a:solidFill>
                   <a:srgbClr val="64748B"/>
                 </a:solidFill>
                 <a:latin typeface="Open Sans"/>
               </a:rPr>
-              <a:t>Mixed — needs review</a:t>
-            </a:r>
-          </a:p>
-        </p:txBody>
-      </p:sp>
-      <p:sp>
-        <p:nvSpPr>
-          <p:cNvPr id="48" name="Rectangle 47"/>
+              <a:t>Mixed — review</a:t>
+            </a:r>
+          </a:p>
+        </p:txBody>
+      </p:sp>
+      <p:sp>
+        <p:nvSpPr>
+          <p:cNvPr id="52" name="Rectangle 51"/>
           <p:cNvSpPr/>
           <p:nvPr/>
         </p:nvSpPr>
@@ -11822,29 +11962,29 @@
       </p:sp>
       <p:sp>
         <p:nvSpPr>
-          <p:cNvPr id="49" name="TextBox 48"/>
-          <p:cNvSpPr txBox="1"/>
-          <p:nvPr/>
-        </p:nvSpPr>
-        <p:spPr>
-          <a:xfrm>
-            <a:off x="548640" y="6044183"/>
-            <a:ext cx="1554480" cy="201168"/>
-          </a:xfrm>
-          <a:prstGeom prst="rect">
-            <a:avLst/>
-          </a:prstGeom>
-          <a:noFill/>
-        </p:spPr>
-        <p:txBody>
-          <a:bodyPr wrap="square" anchor="t" lIns="0" rIns="0" tIns="0" bIns="0">
-            <a:spAutoFit/>
-          </a:bodyPr>
-          <a:lstStyle/>
-          <a:p>
-            <a:pPr algn="l"/>
-            <a:r>
-              <a:rPr sz="1050" b="1">
+          <p:cNvPr id="53" name="TextBox 52"/>
+          <p:cNvSpPr txBox="1"/>
+          <p:nvPr/>
+        </p:nvSpPr>
+        <p:spPr>
+          <a:xfrm>
+            <a:off x="502920" y="6044183"/>
+            <a:ext cx="868680" cy="201168"/>
+          </a:xfrm>
+          <a:prstGeom prst="rect">
+            <a:avLst/>
+          </a:prstGeom>
+          <a:noFill/>
+        </p:spPr>
+        <p:txBody>
+          <a:bodyPr wrap="square" anchor="t" lIns="0" rIns="0" tIns="0" bIns="0">
+            <a:spAutoFit/>
+          </a:bodyPr>
+          <a:lstStyle/>
+          <a:p>
+            <a:pPr algn="l"/>
+            <a:r>
+              <a:rPr sz="1000" b="1">
                 <a:solidFill>
                   <a:srgbClr val="0F172A"/>
                 </a:solidFill>
@@ -11857,13 +11997,83 @@
       </p:sp>
       <p:sp>
         <p:nvSpPr>
-          <p:cNvPr id="50" name="TextBox 49"/>
-          <p:cNvSpPr txBox="1"/>
-          <p:nvPr/>
-        </p:nvSpPr>
-        <p:spPr>
-          <a:xfrm>
-            <a:off x="2194560" y="6044183"/>
+          <p:cNvPr id="54" name="TextBox 53"/>
+          <p:cNvSpPr txBox="1"/>
+          <p:nvPr/>
+        </p:nvSpPr>
+        <p:spPr>
+          <a:xfrm>
+            <a:off x="1417320" y="6044183"/>
+            <a:ext cx="777240" cy="201168"/>
+          </a:xfrm>
+          <a:prstGeom prst="rect">
+            <a:avLst/>
+          </a:prstGeom>
+          <a:noFill/>
+        </p:spPr>
+        <p:txBody>
+          <a:bodyPr wrap="square" anchor="t" lIns="0" rIns="0" tIns="0" bIns="0">
+            <a:spAutoFit/>
+          </a:bodyPr>
+          <a:lstStyle/>
+          <a:p>
+            <a:pPr algn="l"/>
+            <a:r>
+              <a:rPr sz="1000" b="0">
+                <a:solidFill>
+                  <a:srgbClr val="334155"/>
+                </a:solidFill>
+                <a:latin typeface="Open Sans"/>
+              </a:rPr>
+              <a:t>8,417</a:t>
+            </a:r>
+          </a:p>
+        </p:txBody>
+      </p:sp>
+      <p:sp>
+        <p:nvSpPr>
+          <p:cNvPr id="55" name="TextBox 54"/>
+          <p:cNvSpPr txBox="1"/>
+          <p:nvPr/>
+        </p:nvSpPr>
+        <p:spPr>
+          <a:xfrm>
+            <a:off x="2240280" y="6044183"/>
+            <a:ext cx="777240" cy="201168"/>
+          </a:xfrm>
+          <a:prstGeom prst="rect">
+            <a:avLst/>
+          </a:prstGeom>
+          <a:noFill/>
+        </p:spPr>
+        <p:txBody>
+          <a:bodyPr wrap="square" anchor="t" lIns="0" rIns="0" tIns="0" bIns="0">
+            <a:spAutoFit/>
+          </a:bodyPr>
+          <a:lstStyle/>
+          <a:p>
+            <a:pPr algn="l"/>
+            <a:r>
+              <a:rPr sz="1000" b="1">
+                <a:solidFill>
+                  <a:srgbClr val="64748B"/>
+                </a:solidFill>
+                <a:latin typeface="Open Sans"/>
+              </a:rPr>
+              <a:t>$319M</a:t>
+            </a:r>
+          </a:p>
+        </p:txBody>
+      </p:sp>
+      <p:sp>
+        <p:nvSpPr>
+          <p:cNvPr id="56" name="TextBox 55"/>
+          <p:cNvSpPr txBox="1"/>
+          <p:nvPr/>
+        </p:nvSpPr>
+        <p:spPr>
+          <a:xfrm>
+            <a:off x="3063240" y="6044183"/>
             <a:ext cx="914400" cy="201168"/>
           </a:xfrm>
           <a:prstGeom prst="rect">
@@ -11879,77 +12089,42 @@
           <a:p>
             <a:pPr algn="l"/>
             <a:r>
-              <a:rPr sz="1050" b="0">
-                <a:solidFill>
-                  <a:srgbClr val="334155"/>
-                </a:solidFill>
-                <a:latin typeface="Open Sans"/>
-              </a:rPr>
-              <a:t>8,417</a:t>
-            </a:r>
-          </a:p>
-        </p:txBody>
-      </p:sp>
-      <p:sp>
-        <p:nvSpPr>
-          <p:cNvPr id="51" name="TextBox 50"/>
-          <p:cNvSpPr txBox="1"/>
-          <p:nvPr/>
-        </p:nvSpPr>
-        <p:spPr>
-          <a:xfrm>
-            <a:off x="3246120" y="6044183"/>
-            <a:ext cx="914400" cy="201168"/>
-          </a:xfrm>
-          <a:prstGeom prst="rect">
-            <a:avLst/>
-          </a:prstGeom>
-          <a:noFill/>
-        </p:spPr>
-        <p:txBody>
-          <a:bodyPr wrap="square" anchor="t" lIns="0" rIns="0" tIns="0" bIns="0">
-            <a:spAutoFit/>
-          </a:bodyPr>
-          <a:lstStyle/>
-          <a:p>
-            <a:pPr algn="l"/>
-            <a:r>
-              <a:rPr sz="1050" b="1">
+              <a:rPr sz="1000" b="0">
                 <a:solidFill>
                   <a:srgbClr val="64748B"/>
                 </a:solidFill>
                 <a:latin typeface="Open Sans"/>
               </a:rPr>
-              <a:t>$319M</a:t>
-            </a:r>
-          </a:p>
-        </p:txBody>
-      </p:sp>
-      <p:sp>
-        <p:nvSpPr>
-          <p:cNvPr id="52" name="TextBox 51"/>
-          <p:cNvSpPr txBox="1"/>
-          <p:nvPr/>
-        </p:nvSpPr>
-        <p:spPr>
-          <a:xfrm>
-            <a:off x="4297680" y="6044183"/>
-            <a:ext cx="1554480" cy="201168"/>
-          </a:xfrm>
-          <a:prstGeom prst="rect">
-            <a:avLst/>
-          </a:prstGeom>
-          <a:noFill/>
-        </p:spPr>
-        <p:txBody>
-          <a:bodyPr wrap="square" anchor="t" lIns="0" rIns="0" tIns="0" bIns="0">
-            <a:spAutoFit/>
-          </a:bodyPr>
-          <a:lstStyle/>
-          <a:p>
-            <a:pPr algn="l"/>
-            <a:r>
-              <a:rPr sz="950" b="0">
+              <a:t>$37,898</a:t>
+            </a:r>
+          </a:p>
+        </p:txBody>
+      </p:sp>
+      <p:sp>
+        <p:nvSpPr>
+          <p:cNvPr id="57" name="TextBox 56"/>
+          <p:cNvSpPr txBox="1"/>
+          <p:nvPr/>
+        </p:nvSpPr>
+        <p:spPr>
+          <a:xfrm>
+            <a:off x="4023360" y="6044183"/>
+            <a:ext cx="1874519" cy="201168"/>
+          </a:xfrm>
+          <a:prstGeom prst="rect">
+            <a:avLst/>
+          </a:prstGeom>
+          <a:noFill/>
+        </p:spPr>
+        <p:txBody>
+          <a:bodyPr wrap="square" anchor="t" lIns="0" rIns="0" tIns="0" bIns="0">
+            <a:spAutoFit/>
+          </a:bodyPr>
+          <a:lstStyle/>
+          <a:p>
+            <a:pPr algn="l"/>
+            <a:r>
+              <a:rPr sz="900" b="0">
                 <a:solidFill>
                   <a:srgbClr val="64748B"/>
                 </a:solidFill>
@@ -11962,7 +12137,7 @@
       </p:sp>
       <p:sp>
         <p:nvSpPr>
-          <p:cNvPr id="53" name="TextBox 52"/>
+          <p:cNvPr id="58" name="TextBox 57"/>
           <p:cNvSpPr txBox="1"/>
           <p:nvPr/>
         </p:nvSpPr>
@@ -11997,7 +12172,7 @@
       </p:sp>
       <p:sp>
         <p:nvSpPr>
-          <p:cNvPr id="54" name="TextBox 53"/>
+          <p:cNvPr id="59" name="TextBox 58"/>
           <p:cNvSpPr txBox="1"/>
           <p:nvPr/>
         </p:nvSpPr>
@@ -12032,7 +12207,7 @@
       </p:sp>
       <p:sp>
         <p:nvSpPr>
-          <p:cNvPr id="55" name="Rectangle 54"/>
+          <p:cNvPr id="60" name="Rectangle 59"/>
           <p:cNvSpPr/>
           <p:nvPr/>
         </p:nvSpPr>
@@ -12076,14 +12251,14 @@
       </p:sp>
       <p:sp>
         <p:nvSpPr>
-          <p:cNvPr id="56" name="TextBox 55"/>
-          <p:cNvSpPr txBox="1"/>
-          <p:nvPr/>
-        </p:nvSpPr>
-        <p:spPr>
-          <a:xfrm>
-            <a:off x="6309360" y="4882896"/>
-            <a:ext cx="914400" cy="182880"/>
+          <p:cNvPr id="61" name="TextBox 60"/>
+          <p:cNvSpPr txBox="1"/>
+          <p:nvPr/>
+        </p:nvSpPr>
+        <p:spPr>
+          <a:xfrm>
+            <a:off x="6263640" y="4882896"/>
+            <a:ext cx="777240" cy="182880"/>
           </a:xfrm>
           <a:prstGeom prst="rect">
             <a:avLst/>
@@ -12111,14 +12286,14 @@
       </p:sp>
       <p:sp>
         <p:nvSpPr>
-          <p:cNvPr id="57" name="TextBox 56"/>
-          <p:cNvSpPr txBox="1"/>
-          <p:nvPr/>
-        </p:nvSpPr>
-        <p:spPr>
-          <a:xfrm>
-            <a:off x="7269480" y="4882896"/>
-            <a:ext cx="1280160" cy="182880"/>
+          <p:cNvPr id="62" name="TextBox 61"/>
+          <p:cNvSpPr txBox="1"/>
+          <p:nvPr/>
+        </p:nvSpPr>
+        <p:spPr>
+          <a:xfrm>
+            <a:off x="6995160" y="4882896"/>
+            <a:ext cx="1188720" cy="182880"/>
           </a:xfrm>
           <a:prstGeom prst="rect">
             <a:avLst/>
@@ -12146,14 +12321,14 @@
       </p:sp>
       <p:sp>
         <p:nvSpPr>
-          <p:cNvPr id="58" name="TextBox 57"/>
-          <p:cNvSpPr txBox="1"/>
-          <p:nvPr/>
-        </p:nvSpPr>
-        <p:spPr>
-          <a:xfrm>
-            <a:off x="8641080" y="4882896"/>
-            <a:ext cx="1371600" cy="182880"/>
+          <p:cNvPr id="63" name="TextBox 62"/>
+          <p:cNvSpPr txBox="1"/>
+          <p:nvPr/>
+        </p:nvSpPr>
+        <p:spPr>
+          <a:xfrm>
+            <a:off x="8229600" y="4882896"/>
+            <a:ext cx="960120" cy="182880"/>
           </a:xfrm>
           <a:prstGeom prst="rect">
             <a:avLst/>
@@ -12174,6 +12349,41 @@
                 </a:solidFill>
                 <a:latin typeface="Open Sans"/>
               </a:rPr>
+              <a:t>Customers</a:t>
+            </a:r>
+          </a:p>
+        </p:txBody>
+      </p:sp>
+      <p:sp>
+        <p:nvSpPr>
+          <p:cNvPr id="64" name="TextBox 63"/>
+          <p:cNvSpPr txBox="1"/>
+          <p:nvPr/>
+        </p:nvSpPr>
+        <p:spPr>
+          <a:xfrm>
+            <a:off x="9189720" y="4882896"/>
+            <a:ext cx="1005840" cy="182880"/>
+          </a:xfrm>
+          <a:prstGeom prst="rect">
+            <a:avLst/>
+          </a:prstGeom>
+          <a:noFill/>
+        </p:spPr>
+        <p:txBody>
+          <a:bodyPr wrap="square" anchor="t" lIns="0" rIns="0" tIns="0" bIns="0">
+            <a:spAutoFit/>
+          </a:bodyPr>
+          <a:lstStyle/>
+          <a:p>
+            <a:pPr algn="l"/>
+            <a:r>
+              <a:rPr sz="900" b="1">
+                <a:solidFill>
+                  <a:srgbClr val="FFFFFF"/>
+                </a:solidFill>
+                <a:latin typeface="Open Sans"/>
+              </a:rPr>
               <a:t>Records</a:t>
             </a:r>
           </a:p>
@@ -12181,14 +12391,14 @@
       </p:sp>
       <p:sp>
         <p:nvSpPr>
-          <p:cNvPr id="59" name="TextBox 58"/>
-          <p:cNvSpPr txBox="1"/>
-          <p:nvPr/>
-        </p:nvSpPr>
-        <p:spPr>
-          <a:xfrm>
-            <a:off x="10104120" y="4882896"/>
-            <a:ext cx="1371600" cy="182880"/>
+          <p:cNvPr id="65" name="TextBox 64"/>
+          <p:cNvSpPr txBox="1"/>
+          <p:nvPr/>
+        </p:nvSpPr>
+        <p:spPr>
+          <a:xfrm>
+            <a:off x="10241280" y="4882896"/>
+            <a:ext cx="1417320" cy="182880"/>
           </a:xfrm>
           <a:prstGeom prst="rect">
             <a:avLst/>
@@ -12216,7 +12426,7 @@
       </p:sp>
       <p:sp>
         <p:nvSpPr>
-          <p:cNvPr id="60" name="Rectangle 59"/>
+          <p:cNvPr id="66" name="Rectangle 65"/>
           <p:cNvSpPr/>
           <p:nvPr/>
         </p:nvSpPr>
@@ -12260,29 +12470,29 @@
       </p:sp>
       <p:sp>
         <p:nvSpPr>
-          <p:cNvPr id="61" name="TextBox 60"/>
-          <p:cNvSpPr txBox="1"/>
-          <p:nvPr/>
-        </p:nvSpPr>
-        <p:spPr>
-          <a:xfrm>
-            <a:off x="6309360" y="5138927"/>
-            <a:ext cx="914400" cy="201168"/>
-          </a:xfrm>
-          <a:prstGeom prst="rect">
-            <a:avLst/>
-          </a:prstGeom>
-          <a:noFill/>
-        </p:spPr>
-        <p:txBody>
-          <a:bodyPr wrap="square" anchor="t" lIns="0" rIns="0" tIns="0" bIns="0">
-            <a:spAutoFit/>
-          </a:bodyPr>
-          <a:lstStyle/>
-          <a:p>
-            <a:pPr algn="l"/>
-            <a:r>
-              <a:rPr sz="1050" b="1">
+          <p:cNvPr id="67" name="TextBox 66"/>
+          <p:cNvSpPr txBox="1"/>
+          <p:nvPr/>
+        </p:nvSpPr>
+        <p:spPr>
+          <a:xfrm>
+            <a:off x="6263640" y="5138927"/>
+            <a:ext cx="777240" cy="201168"/>
+          </a:xfrm>
+          <a:prstGeom prst="rect">
+            <a:avLst/>
+          </a:prstGeom>
+          <a:noFill/>
+        </p:spPr>
+        <p:txBody>
+          <a:bodyPr wrap="square" anchor="t" lIns="0" rIns="0" tIns="0" bIns="0">
+            <a:spAutoFit/>
+          </a:bodyPr>
+          <a:lstStyle/>
+          <a:p>
+            <a:pPr algn="l"/>
+            <a:r>
+              <a:rPr sz="1000" b="1">
                 <a:solidFill>
                   <a:srgbClr val="64748B"/>
                 </a:solidFill>
@@ -12295,14 +12505,14 @@
       </p:sp>
       <p:sp>
         <p:nvSpPr>
-          <p:cNvPr id="62" name="TextBox 61"/>
-          <p:cNvSpPr txBox="1"/>
-          <p:nvPr/>
-        </p:nvSpPr>
-        <p:spPr>
-          <a:xfrm>
-            <a:off x="7269480" y="5138927"/>
-            <a:ext cx="1280160" cy="201168"/>
+          <p:cNvPr id="68" name="TextBox 67"/>
+          <p:cNvSpPr txBox="1"/>
+          <p:nvPr/>
+        </p:nvSpPr>
+        <p:spPr>
+          <a:xfrm>
+            <a:off x="6995160" y="5138927"/>
+            <a:ext cx="1188720" cy="201168"/>
           </a:xfrm>
           <a:prstGeom prst="rect">
             <a:avLst/>
@@ -12330,64 +12540,99 @@
       </p:sp>
       <p:sp>
         <p:nvSpPr>
-          <p:cNvPr id="63" name="TextBox 62"/>
-          <p:cNvSpPr txBox="1"/>
-          <p:nvPr/>
-        </p:nvSpPr>
-        <p:spPr>
-          <a:xfrm>
-            <a:off x="8641080" y="5138927"/>
-            <a:ext cx="1371600" cy="201168"/>
-          </a:xfrm>
-          <a:prstGeom prst="rect">
-            <a:avLst/>
-          </a:prstGeom>
-          <a:noFill/>
-        </p:spPr>
-        <p:txBody>
-          <a:bodyPr wrap="square" anchor="t" lIns="0" rIns="0" tIns="0" bIns="0">
-            <a:spAutoFit/>
-          </a:bodyPr>
-          <a:lstStyle/>
-          <a:p>
-            <a:pPr algn="l"/>
-            <a:r>
-              <a:rPr sz="1050" b="0">
+          <p:cNvPr id="69" name="TextBox 68"/>
+          <p:cNvSpPr txBox="1"/>
+          <p:nvPr/>
+        </p:nvSpPr>
+        <p:spPr>
+          <a:xfrm>
+            <a:off x="8229600" y="5138927"/>
+            <a:ext cx="960120" cy="201168"/>
+          </a:xfrm>
+          <a:prstGeom prst="rect">
+            <a:avLst/>
+          </a:prstGeom>
+          <a:noFill/>
+        </p:spPr>
+        <p:txBody>
+          <a:bodyPr wrap="square" anchor="t" lIns="0" rIns="0" tIns="0" bIns="0">
+            <a:spAutoFit/>
+          </a:bodyPr>
+          <a:lstStyle/>
+          <a:p>
+            <a:pPr algn="l"/>
+            <a:r>
+              <a:rPr sz="1000" b="0">
                 <a:solidFill>
                   <a:srgbClr val="334155"/>
                 </a:solidFill>
                 <a:latin typeface="Open Sans"/>
               </a:rPr>
-              <a:t>2,283,461</a:t>
-            </a:r>
-          </a:p>
-        </p:txBody>
-      </p:sp>
-      <p:sp>
-        <p:nvSpPr>
-          <p:cNvPr id="64" name="TextBox 63"/>
-          <p:cNvSpPr txBox="1"/>
-          <p:nvPr/>
-        </p:nvSpPr>
-        <p:spPr>
-          <a:xfrm>
-            <a:off x="10104120" y="5138927"/>
-            <a:ext cx="1371600" cy="201168"/>
-          </a:xfrm>
-          <a:prstGeom prst="rect">
-            <a:avLst/>
-          </a:prstGeom>
-          <a:noFill/>
-        </p:spPr>
-        <p:txBody>
-          <a:bodyPr wrap="square" anchor="t" lIns="0" rIns="0" tIns="0" bIns="0">
-            <a:spAutoFit/>
-          </a:bodyPr>
-          <a:lstStyle/>
-          <a:p>
-            <a:pPr algn="l"/>
-            <a:r>
-              <a:rPr sz="1050" b="1">
+              <a:t>19,476</a:t>
+            </a:r>
+          </a:p>
+        </p:txBody>
+      </p:sp>
+      <p:sp>
+        <p:nvSpPr>
+          <p:cNvPr id="70" name="TextBox 69"/>
+          <p:cNvSpPr txBox="1"/>
+          <p:nvPr/>
+        </p:nvSpPr>
+        <p:spPr>
+          <a:xfrm>
+            <a:off x="9189720" y="5138927"/>
+            <a:ext cx="1005840" cy="201168"/>
+          </a:xfrm>
+          <a:prstGeom prst="rect">
+            <a:avLst/>
+          </a:prstGeom>
+          <a:noFill/>
+        </p:spPr>
+        <p:txBody>
+          <a:bodyPr wrap="square" anchor="t" lIns="0" rIns="0" tIns="0" bIns="0">
+            <a:spAutoFit/>
+          </a:bodyPr>
+          <a:lstStyle/>
+          <a:p>
+            <a:pPr algn="l"/>
+            <a:r>
+              <a:rPr sz="1000" b="0">
+                <a:solidFill>
+                  <a:srgbClr val="334155"/>
+                </a:solidFill>
+                <a:latin typeface="Open Sans"/>
+              </a:rPr>
+              <a:t>2.28M</a:t>
+            </a:r>
+          </a:p>
+        </p:txBody>
+      </p:sp>
+      <p:sp>
+        <p:nvSpPr>
+          <p:cNvPr id="71" name="TextBox 70"/>
+          <p:cNvSpPr txBox="1"/>
+          <p:nvPr/>
+        </p:nvSpPr>
+        <p:spPr>
+          <a:xfrm>
+            <a:off x="10241280" y="5138927"/>
+            <a:ext cx="1417320" cy="201168"/>
+          </a:xfrm>
+          <a:prstGeom prst="rect">
+            <a:avLst/>
+          </a:prstGeom>
+          <a:noFill/>
+        </p:spPr>
+        <p:txBody>
+          <a:bodyPr wrap="square" anchor="t" lIns="0" rIns="0" tIns="0" bIns="0">
+            <a:spAutoFit/>
+          </a:bodyPr>
+          <a:lstStyle/>
+          <a:p>
+            <a:pPr algn="l"/>
+            <a:r>
+              <a:rPr sz="1000" b="1">
                 <a:solidFill>
                   <a:srgbClr val="64748B"/>
                 </a:solidFill>
@@ -12400,7 +12645,7 @@
       </p:sp>
       <p:sp>
         <p:nvSpPr>
-          <p:cNvPr id="65" name="Rectangle 64"/>
+          <p:cNvPr id="72" name="Rectangle 71"/>
           <p:cNvSpPr/>
           <p:nvPr/>
         </p:nvSpPr>
@@ -12444,29 +12689,29 @@
       </p:sp>
       <p:sp>
         <p:nvSpPr>
-          <p:cNvPr id="66" name="TextBox 65"/>
-          <p:cNvSpPr txBox="1"/>
-          <p:nvPr/>
-        </p:nvSpPr>
-        <p:spPr>
-          <a:xfrm>
-            <a:off x="6309360" y="5440679"/>
-            <a:ext cx="914400" cy="201168"/>
-          </a:xfrm>
-          <a:prstGeom prst="rect">
-            <a:avLst/>
-          </a:prstGeom>
-          <a:noFill/>
-        </p:spPr>
-        <p:txBody>
-          <a:bodyPr wrap="square" anchor="t" lIns="0" rIns="0" tIns="0" bIns="0">
-            <a:spAutoFit/>
-          </a:bodyPr>
-          <a:lstStyle/>
-          <a:p>
-            <a:pPr algn="l"/>
-            <a:r>
-              <a:rPr sz="1050" b="1">
+          <p:cNvPr id="73" name="TextBox 72"/>
+          <p:cNvSpPr txBox="1"/>
+          <p:nvPr/>
+        </p:nvSpPr>
+        <p:spPr>
+          <a:xfrm>
+            <a:off x="6263640" y="5440679"/>
+            <a:ext cx="777240" cy="201168"/>
+          </a:xfrm>
+          <a:prstGeom prst="rect">
+            <a:avLst/>
+          </a:prstGeom>
+          <a:noFill/>
+        </p:spPr>
+        <p:txBody>
+          <a:bodyPr wrap="square" anchor="t" lIns="0" rIns="0" tIns="0" bIns="0">
+            <a:spAutoFit/>
+          </a:bodyPr>
+          <a:lstStyle/>
+          <a:p>
+            <a:pPr algn="l"/>
+            <a:r>
+              <a:rPr sz="1000" b="1">
                 <a:solidFill>
                   <a:srgbClr val="FFB352"/>
                 </a:solidFill>
@@ -12479,14 +12724,14 @@
       </p:sp>
       <p:sp>
         <p:nvSpPr>
-          <p:cNvPr id="67" name="TextBox 66"/>
-          <p:cNvSpPr txBox="1"/>
-          <p:nvPr/>
-        </p:nvSpPr>
-        <p:spPr>
-          <a:xfrm>
-            <a:off x="7269480" y="5440679"/>
-            <a:ext cx="1280160" cy="201168"/>
+          <p:cNvPr id="74" name="TextBox 73"/>
+          <p:cNvSpPr txBox="1"/>
+          <p:nvPr/>
+        </p:nvSpPr>
+        <p:spPr>
+          <a:xfrm>
+            <a:off x="6995160" y="5440679"/>
+            <a:ext cx="1188720" cy="201168"/>
           </a:xfrm>
           <a:prstGeom prst="rect">
             <a:avLst/>
@@ -12514,64 +12759,99 @@
       </p:sp>
       <p:sp>
         <p:nvSpPr>
-          <p:cNvPr id="68" name="TextBox 67"/>
-          <p:cNvSpPr txBox="1"/>
-          <p:nvPr/>
-        </p:nvSpPr>
-        <p:spPr>
-          <a:xfrm>
-            <a:off x="8641080" y="5440679"/>
-            <a:ext cx="1371600" cy="201168"/>
-          </a:xfrm>
-          <a:prstGeom prst="rect">
-            <a:avLst/>
-          </a:prstGeom>
-          <a:noFill/>
-        </p:spPr>
-        <p:txBody>
-          <a:bodyPr wrap="square" anchor="t" lIns="0" rIns="0" tIns="0" bIns="0">
-            <a:spAutoFit/>
-          </a:bodyPr>
-          <a:lstStyle/>
-          <a:p>
-            <a:pPr algn="l"/>
-            <a:r>
-              <a:rPr sz="1050" b="0">
+          <p:cNvPr id="75" name="TextBox 74"/>
+          <p:cNvSpPr txBox="1"/>
+          <p:nvPr/>
+        </p:nvSpPr>
+        <p:spPr>
+          <a:xfrm>
+            <a:off x="8229600" y="5440679"/>
+            <a:ext cx="960120" cy="201168"/>
+          </a:xfrm>
+          <a:prstGeom prst="rect">
+            <a:avLst/>
+          </a:prstGeom>
+          <a:noFill/>
+        </p:spPr>
+        <p:txBody>
+          <a:bodyPr wrap="square" anchor="t" lIns="0" rIns="0" tIns="0" bIns="0">
+            <a:spAutoFit/>
+          </a:bodyPr>
+          <a:lstStyle/>
+          <a:p>
+            <a:pPr algn="l"/>
+            <a:r>
+              <a:rPr sz="1000" b="0">
                 <a:solidFill>
                   <a:srgbClr val="334155"/>
                 </a:solidFill>
                 <a:latin typeface="Open Sans"/>
               </a:rPr>
-              <a:t>1,622,140</a:t>
-            </a:r>
-          </a:p>
-        </p:txBody>
-      </p:sp>
-      <p:sp>
-        <p:nvSpPr>
-          <p:cNvPr id="69" name="TextBox 68"/>
-          <p:cNvSpPr txBox="1"/>
-          <p:nvPr/>
-        </p:nvSpPr>
-        <p:spPr>
-          <a:xfrm>
-            <a:off x="10104120" y="5440679"/>
-            <a:ext cx="1371600" cy="201168"/>
-          </a:xfrm>
-          <a:prstGeom prst="rect">
-            <a:avLst/>
-          </a:prstGeom>
-          <a:noFill/>
-        </p:spPr>
-        <p:txBody>
-          <a:bodyPr wrap="square" anchor="t" lIns="0" rIns="0" tIns="0" bIns="0">
-            <a:spAutoFit/>
-          </a:bodyPr>
-          <a:lstStyle/>
-          <a:p>
-            <a:pPr algn="l"/>
-            <a:r>
-              <a:rPr sz="1050" b="1">
+              <a:t>17,927</a:t>
+            </a:r>
+          </a:p>
+        </p:txBody>
+      </p:sp>
+      <p:sp>
+        <p:nvSpPr>
+          <p:cNvPr id="76" name="TextBox 75"/>
+          <p:cNvSpPr txBox="1"/>
+          <p:nvPr/>
+        </p:nvSpPr>
+        <p:spPr>
+          <a:xfrm>
+            <a:off x="9189720" y="5440679"/>
+            <a:ext cx="1005840" cy="201168"/>
+          </a:xfrm>
+          <a:prstGeom prst="rect">
+            <a:avLst/>
+          </a:prstGeom>
+          <a:noFill/>
+        </p:spPr>
+        <p:txBody>
+          <a:bodyPr wrap="square" anchor="t" lIns="0" rIns="0" tIns="0" bIns="0">
+            <a:spAutoFit/>
+          </a:bodyPr>
+          <a:lstStyle/>
+          <a:p>
+            <a:pPr algn="l"/>
+            <a:r>
+              <a:rPr sz="1000" b="0">
+                <a:solidFill>
+                  <a:srgbClr val="334155"/>
+                </a:solidFill>
+                <a:latin typeface="Open Sans"/>
+              </a:rPr>
+              <a:t>1.62M</a:t>
+            </a:r>
+          </a:p>
+        </p:txBody>
+      </p:sp>
+      <p:sp>
+        <p:nvSpPr>
+          <p:cNvPr id="77" name="TextBox 76"/>
+          <p:cNvSpPr txBox="1"/>
+          <p:nvPr/>
+        </p:nvSpPr>
+        <p:spPr>
+          <a:xfrm>
+            <a:off x="10241280" y="5440679"/>
+            <a:ext cx="1417320" cy="201168"/>
+          </a:xfrm>
+          <a:prstGeom prst="rect">
+            <a:avLst/>
+          </a:prstGeom>
+          <a:noFill/>
+        </p:spPr>
+        <p:txBody>
+          <a:bodyPr wrap="square" anchor="t" lIns="0" rIns="0" tIns="0" bIns="0">
+            <a:spAutoFit/>
+          </a:bodyPr>
+          <a:lstStyle/>
+          <a:p>
+            <a:pPr algn="l"/>
+            <a:r>
+              <a:rPr sz="1000" b="1">
                 <a:solidFill>
                   <a:srgbClr val="FFB352"/>
                 </a:solidFill>
@@ -12584,7 +12864,7 @@
       </p:sp>
       <p:sp>
         <p:nvSpPr>
-          <p:cNvPr id="70" name="Rectangle 69"/>
+          <p:cNvPr id="78" name="Rectangle 77"/>
           <p:cNvSpPr/>
           <p:nvPr/>
         </p:nvSpPr>
@@ -12628,29 +12908,29 @@
       </p:sp>
       <p:sp>
         <p:nvSpPr>
-          <p:cNvPr id="71" name="TextBox 70"/>
-          <p:cNvSpPr txBox="1"/>
-          <p:nvPr/>
-        </p:nvSpPr>
-        <p:spPr>
-          <a:xfrm>
-            <a:off x="6309360" y="5742431"/>
-            <a:ext cx="914400" cy="201168"/>
-          </a:xfrm>
-          <a:prstGeom prst="rect">
-            <a:avLst/>
-          </a:prstGeom>
-          <a:noFill/>
-        </p:spPr>
-        <p:txBody>
-          <a:bodyPr wrap="square" anchor="t" lIns="0" rIns="0" tIns="0" bIns="0">
-            <a:spAutoFit/>
-          </a:bodyPr>
-          <a:lstStyle/>
-          <a:p>
-            <a:pPr algn="l"/>
-            <a:r>
-              <a:rPr sz="1050" b="1">
+          <p:cNvPr id="79" name="TextBox 78"/>
+          <p:cNvSpPr txBox="1"/>
+          <p:nvPr/>
+        </p:nvSpPr>
+        <p:spPr>
+          <a:xfrm>
+            <a:off x="6263640" y="5742431"/>
+            <a:ext cx="777240" cy="201168"/>
+          </a:xfrm>
+          <a:prstGeom prst="rect">
+            <a:avLst/>
+          </a:prstGeom>
+          <a:noFill/>
+        </p:spPr>
+        <p:txBody>
+          <a:bodyPr wrap="square" anchor="t" lIns="0" rIns="0" tIns="0" bIns="0">
+            <a:spAutoFit/>
+          </a:bodyPr>
+          <a:lstStyle/>
+          <a:p>
+            <a:pPr algn="l"/>
+            <a:r>
+              <a:rPr sz="1000" b="1">
                 <a:solidFill>
                   <a:srgbClr val="FC4C0B"/>
                 </a:solidFill>
@@ -12663,14 +12943,14 @@
       </p:sp>
       <p:sp>
         <p:nvSpPr>
-          <p:cNvPr id="72" name="TextBox 71"/>
-          <p:cNvSpPr txBox="1"/>
-          <p:nvPr/>
-        </p:nvSpPr>
-        <p:spPr>
-          <a:xfrm>
-            <a:off x="7269480" y="5742431"/>
-            <a:ext cx="1280160" cy="201168"/>
+          <p:cNvPr id="80" name="TextBox 79"/>
+          <p:cNvSpPr txBox="1"/>
+          <p:nvPr/>
+        </p:nvSpPr>
+        <p:spPr>
+          <a:xfrm>
+            <a:off x="6995160" y="5742431"/>
+            <a:ext cx="1188720" cy="201168"/>
           </a:xfrm>
           <a:prstGeom prst="rect">
             <a:avLst/>
@@ -12698,34 +12978,69 @@
       </p:sp>
       <p:sp>
         <p:nvSpPr>
-          <p:cNvPr id="73" name="TextBox 72"/>
-          <p:cNvSpPr txBox="1"/>
-          <p:nvPr/>
-        </p:nvSpPr>
-        <p:spPr>
-          <a:xfrm>
-            <a:off x="8641080" y="5742431"/>
-            <a:ext cx="1371600" cy="201168"/>
-          </a:xfrm>
-          <a:prstGeom prst="rect">
-            <a:avLst/>
-          </a:prstGeom>
-          <a:noFill/>
-        </p:spPr>
-        <p:txBody>
-          <a:bodyPr wrap="square" anchor="t" lIns="0" rIns="0" tIns="0" bIns="0">
-            <a:spAutoFit/>
-          </a:bodyPr>
-          <a:lstStyle/>
-          <a:p>
-            <a:pPr algn="l"/>
-            <a:r>
-              <a:rPr sz="1050" b="0">
+          <p:cNvPr id="81" name="TextBox 80"/>
+          <p:cNvSpPr txBox="1"/>
+          <p:nvPr/>
+        </p:nvSpPr>
+        <p:spPr>
+          <a:xfrm>
+            <a:off x="8229600" y="5742431"/>
+            <a:ext cx="960120" cy="201168"/>
+          </a:xfrm>
+          <a:prstGeom prst="rect">
+            <a:avLst/>
+          </a:prstGeom>
+          <a:noFill/>
+        </p:spPr>
+        <p:txBody>
+          <a:bodyPr wrap="square" anchor="t" lIns="0" rIns="0" tIns="0" bIns="0">
+            <a:spAutoFit/>
+          </a:bodyPr>
+          <a:lstStyle/>
+          <a:p>
+            <a:pPr algn="l"/>
+            <a:r>
+              <a:rPr sz="1000" b="0">
                 <a:solidFill>
                   <a:srgbClr val="334155"/>
                 </a:solidFill>
                 <a:latin typeface="Open Sans"/>
               </a:rPr>
+              <a:t>12,384</a:t>
+            </a:r>
+          </a:p>
+        </p:txBody>
+      </p:sp>
+      <p:sp>
+        <p:nvSpPr>
+          <p:cNvPr id="82" name="TextBox 81"/>
+          <p:cNvSpPr txBox="1"/>
+          <p:nvPr/>
+        </p:nvSpPr>
+        <p:spPr>
+          <a:xfrm>
+            <a:off x="9189720" y="5742431"/>
+            <a:ext cx="1005840" cy="201168"/>
+          </a:xfrm>
+          <a:prstGeom prst="rect">
+            <a:avLst/>
+          </a:prstGeom>
+          <a:noFill/>
+        </p:spPr>
+        <p:txBody>
+          <a:bodyPr wrap="square" anchor="t" lIns="0" rIns="0" tIns="0" bIns="0">
+            <a:spAutoFit/>
+          </a:bodyPr>
+          <a:lstStyle/>
+          <a:p>
+            <a:pPr algn="l"/>
+            <a:r>
+              <a:rPr sz="1000" b="0">
+                <a:solidFill>
+                  <a:srgbClr val="334155"/>
+                </a:solidFill>
+                <a:latin typeface="Open Sans"/>
+              </a:rPr>
               <a:t>425,201</a:t>
             </a:r>
           </a:p>
@@ -12733,29 +13048,29 @@
       </p:sp>
       <p:sp>
         <p:nvSpPr>
-          <p:cNvPr id="74" name="TextBox 73"/>
-          <p:cNvSpPr txBox="1"/>
-          <p:nvPr/>
-        </p:nvSpPr>
-        <p:spPr>
-          <a:xfrm>
-            <a:off x="10104120" y="5742431"/>
-            <a:ext cx="1371600" cy="201168"/>
-          </a:xfrm>
-          <a:prstGeom prst="rect">
-            <a:avLst/>
-          </a:prstGeom>
-          <a:noFill/>
-        </p:spPr>
-        <p:txBody>
-          <a:bodyPr wrap="square" anchor="t" lIns="0" rIns="0" tIns="0" bIns="0">
-            <a:spAutoFit/>
-          </a:bodyPr>
-          <a:lstStyle/>
-          <a:p>
-            <a:pPr algn="l"/>
-            <a:r>
-              <a:rPr sz="1050" b="1">
+          <p:cNvPr id="83" name="TextBox 82"/>
+          <p:cNvSpPr txBox="1"/>
+          <p:nvPr/>
+        </p:nvSpPr>
+        <p:spPr>
+          <a:xfrm>
+            <a:off x="10241280" y="5742431"/>
+            <a:ext cx="1417320" cy="201168"/>
+          </a:xfrm>
+          <a:prstGeom prst="rect">
+            <a:avLst/>
+          </a:prstGeom>
+          <a:noFill/>
+        </p:spPr>
+        <p:txBody>
+          <a:bodyPr wrap="square" anchor="t" lIns="0" rIns="0" tIns="0" bIns="0">
+            <a:spAutoFit/>
+          </a:bodyPr>
+          <a:lstStyle/>
+          <a:p>
+            <a:pPr algn="l"/>
+            <a:r>
+              <a:rPr sz="1000" b="1">
                 <a:solidFill>
                   <a:srgbClr val="FC4C0B"/>
                 </a:solidFill>
@@ -12768,7 +13083,7 @@
       </p:sp>
       <p:sp>
         <p:nvSpPr>
-          <p:cNvPr id="75" name="Rectangle 74"/>
+          <p:cNvPr id="84" name="Rectangle 83"/>
           <p:cNvSpPr/>
           <p:nvPr/>
         </p:nvSpPr>
@@ -12812,29 +13127,29 @@
       </p:sp>
       <p:sp>
         <p:nvSpPr>
-          <p:cNvPr id="76" name="TextBox 75"/>
-          <p:cNvSpPr txBox="1"/>
-          <p:nvPr/>
-        </p:nvSpPr>
-        <p:spPr>
-          <a:xfrm>
-            <a:off x="6309360" y="6044183"/>
-            <a:ext cx="914400" cy="201168"/>
-          </a:xfrm>
-          <a:prstGeom prst="rect">
-            <a:avLst/>
-          </a:prstGeom>
-          <a:noFill/>
-        </p:spPr>
-        <p:txBody>
-          <a:bodyPr wrap="square" anchor="t" lIns="0" rIns="0" tIns="0" bIns="0">
-            <a:spAutoFit/>
-          </a:bodyPr>
-          <a:lstStyle/>
-          <a:p>
-            <a:pPr algn="l"/>
-            <a:r>
-              <a:rPr sz="1050" b="1">
+          <p:cNvPr id="85" name="TextBox 84"/>
+          <p:cNvSpPr txBox="1"/>
+          <p:nvPr/>
+        </p:nvSpPr>
+        <p:spPr>
+          <a:xfrm>
+            <a:off x="6263640" y="6044183"/>
+            <a:ext cx="777240" cy="201168"/>
+          </a:xfrm>
+          <a:prstGeom prst="rect">
+            <a:avLst/>
+          </a:prstGeom>
+          <a:noFill/>
+        </p:spPr>
+        <p:txBody>
+          <a:bodyPr wrap="square" anchor="t" lIns="0" rIns="0" tIns="0" bIns="0">
+            <a:spAutoFit/>
+          </a:bodyPr>
+          <a:lstStyle/>
+          <a:p>
+            <a:pPr algn="l"/>
+            <a:r>
+              <a:rPr sz="1000" b="1">
                 <a:solidFill>
                   <a:srgbClr val="2863C5"/>
                 </a:solidFill>
@@ -12847,14 +13162,14 @@
       </p:sp>
       <p:sp>
         <p:nvSpPr>
-          <p:cNvPr id="77" name="TextBox 76"/>
-          <p:cNvSpPr txBox="1"/>
-          <p:nvPr/>
-        </p:nvSpPr>
-        <p:spPr>
-          <a:xfrm>
-            <a:off x="7269480" y="6044183"/>
-            <a:ext cx="1280160" cy="201168"/>
+          <p:cNvPr id="86" name="TextBox 85"/>
+          <p:cNvSpPr txBox="1"/>
+          <p:nvPr/>
+        </p:nvSpPr>
+        <p:spPr>
+          <a:xfrm>
+            <a:off x="6995160" y="6044183"/>
+            <a:ext cx="1188720" cy="201168"/>
           </a:xfrm>
           <a:prstGeom prst="rect">
             <a:avLst/>
@@ -12882,34 +13197,69 @@
       </p:sp>
       <p:sp>
         <p:nvSpPr>
-          <p:cNvPr id="78" name="TextBox 77"/>
-          <p:cNvSpPr txBox="1"/>
-          <p:nvPr/>
-        </p:nvSpPr>
-        <p:spPr>
-          <a:xfrm>
-            <a:off x="8641080" y="6044183"/>
-            <a:ext cx="1371600" cy="201168"/>
-          </a:xfrm>
-          <a:prstGeom prst="rect">
-            <a:avLst/>
-          </a:prstGeom>
-          <a:noFill/>
-        </p:spPr>
-        <p:txBody>
-          <a:bodyPr wrap="square" anchor="t" lIns="0" rIns="0" tIns="0" bIns="0">
-            <a:spAutoFit/>
-          </a:bodyPr>
-          <a:lstStyle/>
-          <a:p>
-            <a:pPr algn="l"/>
-            <a:r>
-              <a:rPr sz="1050" b="0">
+          <p:cNvPr id="87" name="TextBox 86"/>
+          <p:cNvSpPr txBox="1"/>
+          <p:nvPr/>
+        </p:nvSpPr>
+        <p:spPr>
+          <a:xfrm>
+            <a:off x="8229600" y="6044183"/>
+            <a:ext cx="960120" cy="201168"/>
+          </a:xfrm>
+          <a:prstGeom prst="rect">
+            <a:avLst/>
+          </a:prstGeom>
+          <a:noFill/>
+        </p:spPr>
+        <p:txBody>
+          <a:bodyPr wrap="square" anchor="t" lIns="0" rIns="0" tIns="0" bIns="0">
+            <a:spAutoFit/>
+          </a:bodyPr>
+          <a:lstStyle/>
+          <a:p>
+            <a:pPr algn="l"/>
+            <a:r>
+              <a:rPr sz="1000" b="0">
                 <a:solidFill>
                   <a:srgbClr val="334155"/>
                 </a:solidFill>
                 <a:latin typeface="Open Sans"/>
               </a:rPr>
+              <a:t>7,569</a:t>
+            </a:r>
+          </a:p>
+        </p:txBody>
+      </p:sp>
+      <p:sp>
+        <p:nvSpPr>
+          <p:cNvPr id="88" name="TextBox 87"/>
+          <p:cNvSpPr txBox="1"/>
+          <p:nvPr/>
+        </p:nvSpPr>
+        <p:spPr>
+          <a:xfrm>
+            <a:off x="9189720" y="6044183"/>
+            <a:ext cx="1005840" cy="201168"/>
+          </a:xfrm>
+          <a:prstGeom prst="rect">
+            <a:avLst/>
+          </a:prstGeom>
+          <a:noFill/>
+        </p:spPr>
+        <p:txBody>
+          <a:bodyPr wrap="square" anchor="t" lIns="0" rIns="0" tIns="0" bIns="0">
+            <a:spAutoFit/>
+          </a:bodyPr>
+          <a:lstStyle/>
+          <a:p>
+            <a:pPr algn="l"/>
+            <a:r>
+              <a:rPr sz="1000" b="0">
+                <a:solidFill>
+                  <a:srgbClr val="334155"/>
+                </a:solidFill>
+                <a:latin typeface="Open Sans"/>
+              </a:rPr>
               <a:t>97,787</a:t>
             </a:r>
           </a:p>
@@ -12917,29 +13267,29 @@
       </p:sp>
       <p:sp>
         <p:nvSpPr>
-          <p:cNvPr id="79" name="TextBox 78"/>
-          <p:cNvSpPr txBox="1"/>
-          <p:nvPr/>
-        </p:nvSpPr>
-        <p:spPr>
-          <a:xfrm>
-            <a:off x="10104120" y="6044183"/>
-            <a:ext cx="1371600" cy="201168"/>
-          </a:xfrm>
-          <a:prstGeom prst="rect">
-            <a:avLst/>
-          </a:prstGeom>
-          <a:noFill/>
-        </p:spPr>
-        <p:txBody>
-          <a:bodyPr wrap="square" anchor="t" lIns="0" rIns="0" tIns="0" bIns="0">
-            <a:spAutoFit/>
-          </a:bodyPr>
-          <a:lstStyle/>
-          <a:p>
-            <a:pPr algn="l"/>
-            <a:r>
-              <a:rPr sz="1050" b="1">
+          <p:cNvPr id="89" name="TextBox 88"/>
+          <p:cNvSpPr txBox="1"/>
+          <p:nvPr/>
+        </p:nvSpPr>
+        <p:spPr>
+          <a:xfrm>
+            <a:off x="10241280" y="6044183"/>
+            <a:ext cx="1417320" cy="201168"/>
+          </a:xfrm>
+          <a:prstGeom prst="rect">
+            <a:avLst/>
+          </a:prstGeom>
+          <a:noFill/>
+        </p:spPr>
+        <p:txBody>
+          <a:bodyPr wrap="square" anchor="t" lIns="0" rIns="0" tIns="0" bIns="0">
+            <a:spAutoFit/>
+          </a:bodyPr>
+          <a:lstStyle/>
+          <a:p>
+            <a:pPr algn="l"/>
+            <a:r>
+              <a:rPr sz="1000" b="1">
                 <a:solidFill>
                   <a:srgbClr val="2863C5"/>
                 </a:solidFill>
@@ -12952,7 +13302,7 @@
       </p:sp>
       <p:sp>
         <p:nvSpPr>
-          <p:cNvPr id="80" name="Rounded Rectangle 79"/>
+          <p:cNvPr id="90" name="Rounded Rectangle 89"/>
           <p:cNvSpPr/>
           <p:nvPr/>
         </p:nvSpPr>
@@ -12998,7 +13348,7 @@
       </p:sp>
       <p:sp>
         <p:nvSpPr>
-          <p:cNvPr id="81" name="TextBox 80"/>
+          <p:cNvPr id="91" name="TextBox 90"/>
           <p:cNvSpPr txBox="1"/>
           <p:nvPr/>
         </p:nvSpPr>

--- a/myReclaim-Exec-Deck.pptx
+++ b/myReclaim-Exec-Deck.pptx
@@ -12200,7 +12200,7 @@
                 </a:solidFill>
                 <a:latin typeface="Open Sans"/>
               </a:rPr>
-              <a:t>Tier 04 ($500+) carries 53% of the value despite 2% of records.</a:t>
+              <a:t>$ shown is sum across all matched records ÷ unique customers in that tier.</a:t>
             </a:r>
           </a:p>
         </p:txBody>
@@ -12384,7 +12384,7 @@
                 </a:solidFill>
                 <a:latin typeface="Open Sans"/>
               </a:rPr>
-              <a:t>Records</a:t>
+              <a:t>$ total</a:t>
             </a:r>
           </a:p>
         </p:txBody>
@@ -12419,7 +12419,7 @@
                 </a:solidFill>
                 <a:latin typeface="Open Sans"/>
               </a:rPr>
-              <a:t>$ value</a:t>
+              <a:t>$/customer</a:t>
             </a:r>
           </a:p>
         </p:txBody>
@@ -12597,13 +12597,13 @@
           <a:p>
             <a:pPr algn="l"/>
             <a:r>
-              <a:rPr sz="1000" b="0">
-                <a:solidFill>
-                  <a:srgbClr val="334155"/>
-                </a:solidFill>
-                <a:latin typeface="Open Sans"/>
-              </a:rPr>
-              <a:t>2.28M</a:t>
+              <a:rPr sz="1000" b="1">
+                <a:solidFill>
+                  <a:srgbClr val="64748B"/>
+                </a:solidFill>
+                <a:latin typeface="Open Sans"/>
+              </a:rPr>
+              <a:t>$5.8M</a:t>
             </a:r>
           </a:p>
         </p:txBody>
@@ -12632,13 +12632,13 @@
           <a:p>
             <a:pPr algn="l"/>
             <a:r>
-              <a:rPr sz="1000" b="1">
+              <a:rPr sz="1000" b="0">
                 <a:solidFill>
                   <a:srgbClr val="64748B"/>
                 </a:solidFill>
                 <a:latin typeface="Open Sans"/>
               </a:rPr>
-              <a:t>$5.8M</a:t>
+              <a:t>$298</a:t>
             </a:r>
           </a:p>
         </p:txBody>
@@ -12816,13 +12816,13 @@
           <a:p>
             <a:pPr algn="l"/>
             <a:r>
-              <a:rPr sz="1000" b="0">
-                <a:solidFill>
-                  <a:srgbClr val="334155"/>
-                </a:solidFill>
-                <a:latin typeface="Open Sans"/>
-              </a:rPr>
-              <a:t>1.62M</a:t>
+              <a:rPr sz="1000" b="1">
+                <a:solidFill>
+                  <a:srgbClr val="FFB352"/>
+                </a:solidFill>
+                <a:latin typeface="Open Sans"/>
+              </a:rPr>
+              <a:t>$57.9M</a:t>
             </a:r>
           </a:p>
         </p:txBody>
@@ -12851,13 +12851,13 @@
           <a:p>
             <a:pPr algn="l"/>
             <a:r>
-              <a:rPr sz="1000" b="1">
+              <a:rPr sz="1000" b="0">
                 <a:solidFill>
                   <a:srgbClr val="FFB352"/>
                 </a:solidFill>
                 <a:latin typeface="Open Sans"/>
               </a:rPr>
-              <a:t>$57.9M</a:t>
+              <a:t>$3,230</a:t>
             </a:r>
           </a:p>
         </p:txBody>
@@ -13035,13 +13035,13 @@
           <a:p>
             <a:pPr algn="l"/>
             <a:r>
-              <a:rPr sz="1000" b="0">
-                <a:solidFill>
-                  <a:srgbClr val="334155"/>
-                </a:solidFill>
-                <a:latin typeface="Open Sans"/>
-              </a:rPr>
-              <a:t>425,201</a:t>
+              <a:rPr sz="1000" b="1">
+                <a:solidFill>
+                  <a:srgbClr val="FC4C0B"/>
+                </a:solidFill>
+                <a:latin typeface="Open Sans"/>
+              </a:rPr>
+              <a:t>$87.5M</a:t>
             </a:r>
           </a:p>
         </p:txBody>
@@ -13070,13 +13070,13 @@
           <a:p>
             <a:pPr algn="l"/>
             <a:r>
-              <a:rPr sz="1000" b="1">
+              <a:rPr sz="1000" b="0">
                 <a:solidFill>
                   <a:srgbClr val="FC4C0B"/>
                 </a:solidFill>
                 <a:latin typeface="Open Sans"/>
               </a:rPr>
-              <a:t>$87.5M</a:t>
+              <a:t>$7,067</a:t>
             </a:r>
           </a:p>
         </p:txBody>
@@ -13254,13 +13254,13 @@
           <a:p>
             <a:pPr algn="l"/>
             <a:r>
-              <a:rPr sz="1000" b="0">
-                <a:solidFill>
-                  <a:srgbClr val="334155"/>
-                </a:solidFill>
-                <a:latin typeface="Open Sans"/>
-              </a:rPr>
-              <a:t>97,787</a:t>
+              <a:rPr sz="1000" b="1">
+                <a:solidFill>
+                  <a:srgbClr val="2863C5"/>
+                </a:solidFill>
+                <a:latin typeface="Open Sans"/>
+              </a:rPr>
+              <a:t>$173.1M</a:t>
             </a:r>
           </a:p>
         </p:txBody>
@@ -13289,13 +13289,13 @@
           <a:p>
             <a:pPr algn="l"/>
             <a:r>
-              <a:rPr sz="1000" b="1">
+              <a:rPr sz="1000" b="0">
                 <a:solidFill>
                   <a:srgbClr val="2863C5"/>
                 </a:solidFill>
                 <a:latin typeface="Open Sans"/>
               </a:rPr>
-              <a:t>$173.1M</a:t>
+              <a:t>$22,872</a:t>
             </a:r>
           </a:p>
         </p:txBody>

--- a/myReclaim-Exec-Deck.pptx
+++ b/myReclaim-Exec-Deck.pptx
@@ -12165,7 +12165,7 @@
                 </a:solidFill>
                 <a:latin typeface="Open Sans"/>
               </a:rPr>
-              <a:t>MATCHES BY TIER</a:t>
+              <a:t>CUSTOMERS BY TOTAL OWED</a:t>
             </a:r>
           </a:p>
         </p:txBody>
@@ -12200,7 +12200,7 @@
                 </a:solidFill>
                 <a:latin typeface="Open Sans"/>
               </a:rPr>
-              <a:t>$ shown is sum across all matched records ÷ unique customers in that tier.</a:t>
+              <a:t>Each customer placed in one bucket based on the SUM of their matched records. Customers add up to 21,864.</a:t>
             </a:r>
           </a:p>
         </p:txBody>
@@ -12258,7 +12258,7 @@
         <p:spPr>
           <a:xfrm>
             <a:off x="6263640" y="4882896"/>
-            <a:ext cx="777240" cy="182880"/>
+            <a:ext cx="1325880" cy="182880"/>
           </a:xfrm>
           <a:prstGeom prst="rect">
             <a:avLst/>
@@ -12279,7 +12279,7 @@
                 </a:solidFill>
                 <a:latin typeface="Open Sans"/>
               </a:rPr>
-              <a:t>Tier</a:t>
+              <a:t>Total owed</a:t>
             </a:r>
           </a:p>
         </p:txBody>
@@ -12292,8 +12292,8 @@
         </p:nvSpPr>
         <p:spPr>
           <a:xfrm>
-            <a:off x="6995160" y="4882896"/>
-            <a:ext cx="1188720" cy="182880"/>
+            <a:off x="7680960" y="4882896"/>
+            <a:ext cx="1097280" cy="182880"/>
           </a:xfrm>
           <a:prstGeom prst="rect">
             <a:avLst/>
@@ -12314,7 +12314,7 @@
                 </a:solidFill>
                 <a:latin typeface="Open Sans"/>
               </a:rPr>
-              <a:t>Range</a:t>
+              <a:t>Customers</a:t>
             </a:r>
           </a:p>
         </p:txBody>
@@ -12327,8 +12327,8 @@
         </p:nvSpPr>
         <p:spPr>
           <a:xfrm>
-            <a:off x="8229600" y="4882896"/>
-            <a:ext cx="960120" cy="182880"/>
+            <a:off x="8823960" y="4882896"/>
+            <a:ext cx="1280160" cy="182880"/>
           </a:xfrm>
           <a:prstGeom prst="rect">
             <a:avLst/>
@@ -12349,7 +12349,7 @@
                 </a:solidFill>
                 <a:latin typeface="Open Sans"/>
               </a:rPr>
-              <a:t>Customers</a:t>
+              <a:t>Bucket total</a:t>
             </a:r>
           </a:p>
         </p:txBody>
@@ -12362,8 +12362,8 @@
         </p:nvSpPr>
         <p:spPr>
           <a:xfrm>
-            <a:off x="9189720" y="4882896"/>
-            <a:ext cx="1005840" cy="182880"/>
+            <a:off x="10149840" y="4882896"/>
+            <a:ext cx="1508760" cy="182880"/>
           </a:xfrm>
           <a:prstGeom prst="rect">
             <a:avLst/>
@@ -12384,49 +12384,14 @@
                 </a:solidFill>
                 <a:latin typeface="Open Sans"/>
               </a:rPr>
-              <a:t>$ total</a:t>
-            </a:r>
-          </a:p>
-        </p:txBody>
-      </p:sp>
-      <p:sp>
-        <p:nvSpPr>
-          <p:cNvPr id="65" name="TextBox 64"/>
-          <p:cNvSpPr txBox="1"/>
-          <p:nvPr/>
-        </p:nvSpPr>
-        <p:spPr>
-          <a:xfrm>
-            <a:off x="10241280" y="4882896"/>
-            <a:ext cx="1417320" cy="182880"/>
-          </a:xfrm>
-          <a:prstGeom prst="rect">
-            <a:avLst/>
-          </a:prstGeom>
-          <a:noFill/>
-        </p:spPr>
-        <p:txBody>
-          <a:bodyPr wrap="square" anchor="t" lIns="0" rIns="0" tIns="0" bIns="0">
-            <a:spAutoFit/>
-          </a:bodyPr>
-          <a:lstStyle/>
-          <a:p>
-            <a:pPr algn="l"/>
-            <a:r>
-              <a:rPr sz="900" b="1">
-                <a:solidFill>
-                  <a:srgbClr val="FFFFFF"/>
-                </a:solidFill>
-                <a:latin typeface="Open Sans"/>
-              </a:rPr>
-              <a:t>$/customer</a:t>
-            </a:r>
-          </a:p>
-        </p:txBody>
-      </p:sp>
-      <p:sp>
-        <p:nvSpPr>
-          <p:cNvPr id="66" name="Rectangle 65"/>
+              <a:t>$ per customer</a:t>
+            </a:r>
+          </a:p>
+        </p:txBody>
+      </p:sp>
+      <p:sp>
+        <p:nvSpPr>
+          <p:cNvPr id="65" name="Rectangle 64"/>
           <p:cNvSpPr/>
           <p:nvPr/>
         </p:nvSpPr>
@@ -12470,14 +12435,84 @@
       </p:sp>
       <p:sp>
         <p:nvSpPr>
+          <p:cNvPr id="66" name="TextBox 65"/>
+          <p:cNvSpPr txBox="1"/>
+          <p:nvPr/>
+        </p:nvSpPr>
+        <p:spPr>
+          <a:xfrm>
+            <a:off x="6263640" y="5138927"/>
+            <a:ext cx="1325880" cy="201168"/>
+          </a:xfrm>
+          <a:prstGeom prst="rect">
+            <a:avLst/>
+          </a:prstGeom>
+          <a:noFill/>
+        </p:spPr>
+        <p:txBody>
+          <a:bodyPr wrap="square" anchor="t" lIns="0" rIns="0" tIns="0" bIns="0">
+            <a:spAutoFit/>
+          </a:bodyPr>
+          <a:lstStyle/>
+          <a:p>
+            <a:pPr algn="l"/>
+            <a:r>
+              <a:rPr sz="1000" b="1">
+                <a:solidFill>
+                  <a:srgbClr val="64748B"/>
+                </a:solidFill>
+                <a:latin typeface="Open Sans"/>
+              </a:rPr>
+              <a:t>$0–$9.99</a:t>
+            </a:r>
+          </a:p>
+        </p:txBody>
+      </p:sp>
+      <p:sp>
+        <p:nvSpPr>
           <p:cNvPr id="67" name="TextBox 66"/>
           <p:cNvSpPr txBox="1"/>
           <p:nvPr/>
         </p:nvSpPr>
         <p:spPr>
           <a:xfrm>
-            <a:off x="6263640" y="5138927"/>
-            <a:ext cx="777240" cy="201168"/>
+            <a:off x="7680960" y="5138927"/>
+            <a:ext cx="1097280" cy="201168"/>
+          </a:xfrm>
+          <a:prstGeom prst="rect">
+            <a:avLst/>
+          </a:prstGeom>
+          <a:noFill/>
+        </p:spPr>
+        <p:txBody>
+          <a:bodyPr wrap="square" anchor="t" lIns="0" rIns="0" tIns="0" bIns="0">
+            <a:spAutoFit/>
+          </a:bodyPr>
+          <a:lstStyle/>
+          <a:p>
+            <a:pPr algn="l"/>
+            <a:r>
+              <a:rPr sz="1000" b="0">
+                <a:solidFill>
+                  <a:srgbClr val="334155"/>
+                </a:solidFill>
+                <a:latin typeface="Open Sans"/>
+              </a:rPr>
+              <a:t>2,706</a:t>
+            </a:r>
+          </a:p>
+        </p:txBody>
+      </p:sp>
+      <p:sp>
+        <p:nvSpPr>
+          <p:cNvPr id="68" name="TextBox 67"/>
+          <p:cNvSpPr txBox="1"/>
+          <p:nvPr/>
+        </p:nvSpPr>
+        <p:spPr>
+          <a:xfrm>
+            <a:off x="8823960" y="5138927"/>
+            <a:ext cx="1280160" cy="201168"/>
           </a:xfrm>
           <a:prstGeom prst="rect">
             <a:avLst/>
@@ -12498,42 +12533,7 @@
                 </a:solidFill>
                 <a:latin typeface="Open Sans"/>
               </a:rPr>
-              <a:t>Tier 01</a:t>
-            </a:r>
-          </a:p>
-        </p:txBody>
-      </p:sp>
-      <p:sp>
-        <p:nvSpPr>
-          <p:cNvPr id="68" name="TextBox 67"/>
-          <p:cNvSpPr txBox="1"/>
-          <p:nvPr/>
-        </p:nvSpPr>
-        <p:spPr>
-          <a:xfrm>
-            <a:off x="6995160" y="5138927"/>
-            <a:ext cx="1188720" cy="201168"/>
-          </a:xfrm>
-          <a:prstGeom prst="rect">
-            <a:avLst/>
-          </a:prstGeom>
-          <a:noFill/>
-        </p:spPr>
-        <p:txBody>
-          <a:bodyPr wrap="square" anchor="t" lIns="0" rIns="0" tIns="0" bIns="0">
-            <a:spAutoFit/>
-          </a:bodyPr>
-          <a:lstStyle/>
-          <a:p>
-            <a:pPr algn="l"/>
-            <a:r>
-              <a:rPr sz="950" b="0">
-                <a:solidFill>
-                  <a:srgbClr val="334155"/>
-                </a:solidFill>
-                <a:latin typeface="Open Sans"/>
-              </a:rPr>
-              <a:t>$0–$9.99</a:t>
+              <a:t>$8K</a:t>
             </a:r>
           </a:p>
         </p:txBody>
@@ -12546,8 +12546,8 @@
         </p:nvSpPr>
         <p:spPr>
           <a:xfrm>
-            <a:off x="8229600" y="5138927"/>
-            <a:ext cx="960120" cy="201168"/>
+            <a:off x="10149840" y="5138927"/>
+            <a:ext cx="1508760" cy="201168"/>
           </a:xfrm>
           <a:prstGeom prst="rect">
             <a:avLst/>
@@ -12564,88 +12564,18 @@
             <a:r>
               <a:rPr sz="1000" b="0">
                 <a:solidFill>
-                  <a:srgbClr val="334155"/>
-                </a:solidFill>
-                <a:latin typeface="Open Sans"/>
-              </a:rPr>
-              <a:t>19,476</a:t>
-            </a:r>
-          </a:p>
-        </p:txBody>
-      </p:sp>
-      <p:sp>
-        <p:nvSpPr>
-          <p:cNvPr id="70" name="TextBox 69"/>
-          <p:cNvSpPr txBox="1"/>
-          <p:nvPr/>
-        </p:nvSpPr>
-        <p:spPr>
-          <a:xfrm>
-            <a:off x="9189720" y="5138927"/>
-            <a:ext cx="1005840" cy="201168"/>
-          </a:xfrm>
-          <a:prstGeom prst="rect">
-            <a:avLst/>
-          </a:prstGeom>
-          <a:noFill/>
-        </p:spPr>
-        <p:txBody>
-          <a:bodyPr wrap="square" anchor="t" lIns="0" rIns="0" tIns="0" bIns="0">
-            <a:spAutoFit/>
-          </a:bodyPr>
-          <a:lstStyle/>
-          <a:p>
-            <a:pPr algn="l"/>
-            <a:r>
-              <a:rPr sz="1000" b="1">
-                <a:solidFill>
                   <a:srgbClr val="64748B"/>
                 </a:solidFill>
                 <a:latin typeface="Open Sans"/>
               </a:rPr>
-              <a:t>$5.8M</a:t>
-            </a:r>
-          </a:p>
-        </p:txBody>
-      </p:sp>
-      <p:sp>
-        <p:nvSpPr>
-          <p:cNvPr id="71" name="TextBox 70"/>
-          <p:cNvSpPr txBox="1"/>
-          <p:nvPr/>
-        </p:nvSpPr>
-        <p:spPr>
-          <a:xfrm>
-            <a:off x="10241280" y="5138927"/>
-            <a:ext cx="1417320" cy="201168"/>
-          </a:xfrm>
-          <a:prstGeom prst="rect">
-            <a:avLst/>
-          </a:prstGeom>
-          <a:noFill/>
-        </p:spPr>
-        <p:txBody>
-          <a:bodyPr wrap="square" anchor="t" lIns="0" rIns="0" tIns="0" bIns="0">
-            <a:spAutoFit/>
-          </a:bodyPr>
-          <a:lstStyle/>
-          <a:p>
-            <a:pPr algn="l"/>
-            <a:r>
-              <a:rPr sz="1000" b="0">
-                <a:solidFill>
-                  <a:srgbClr val="64748B"/>
-                </a:solidFill>
-                <a:latin typeface="Open Sans"/>
-              </a:rPr>
-              <a:t>$298</a:t>
-            </a:r>
-          </a:p>
-        </p:txBody>
-      </p:sp>
-      <p:sp>
-        <p:nvSpPr>
-          <p:cNvPr id="72" name="Rectangle 71"/>
+              <a:t>$3</a:t>
+            </a:r>
+          </a:p>
+        </p:txBody>
+      </p:sp>
+      <p:sp>
+        <p:nvSpPr>
+          <p:cNvPr id="70" name="Rectangle 69"/>
           <p:cNvSpPr/>
           <p:nvPr/>
         </p:nvSpPr>
@@ -12689,14 +12619,84 @@
       </p:sp>
       <p:sp>
         <p:nvSpPr>
+          <p:cNvPr id="71" name="TextBox 70"/>
+          <p:cNvSpPr txBox="1"/>
+          <p:nvPr/>
+        </p:nvSpPr>
+        <p:spPr>
+          <a:xfrm>
+            <a:off x="6263640" y="5440679"/>
+            <a:ext cx="1325880" cy="201168"/>
+          </a:xfrm>
+          <a:prstGeom prst="rect">
+            <a:avLst/>
+          </a:prstGeom>
+          <a:noFill/>
+        </p:spPr>
+        <p:txBody>
+          <a:bodyPr wrap="square" anchor="t" lIns="0" rIns="0" tIns="0" bIns="0">
+            <a:spAutoFit/>
+          </a:bodyPr>
+          <a:lstStyle/>
+          <a:p>
+            <a:pPr algn="l"/>
+            <a:r>
+              <a:rPr sz="1000" b="1">
+                <a:solidFill>
+                  <a:srgbClr val="059669"/>
+                </a:solidFill>
+                <a:latin typeface="Open Sans"/>
+              </a:rPr>
+              <a:t>$10–$99.99</a:t>
+            </a:r>
+          </a:p>
+        </p:txBody>
+      </p:sp>
+      <p:sp>
+        <p:nvSpPr>
+          <p:cNvPr id="72" name="TextBox 71"/>
+          <p:cNvSpPr txBox="1"/>
+          <p:nvPr/>
+        </p:nvSpPr>
+        <p:spPr>
+          <a:xfrm>
+            <a:off x="7680960" y="5440679"/>
+            <a:ext cx="1097280" cy="201168"/>
+          </a:xfrm>
+          <a:prstGeom prst="rect">
+            <a:avLst/>
+          </a:prstGeom>
+          <a:noFill/>
+        </p:spPr>
+        <p:txBody>
+          <a:bodyPr wrap="square" anchor="t" lIns="0" rIns="0" tIns="0" bIns="0">
+            <a:spAutoFit/>
+          </a:bodyPr>
+          <a:lstStyle/>
+          <a:p>
+            <a:pPr algn="l"/>
+            <a:r>
+              <a:rPr sz="1000" b="0">
+                <a:solidFill>
+                  <a:srgbClr val="334155"/>
+                </a:solidFill>
+                <a:latin typeface="Open Sans"/>
+              </a:rPr>
+              <a:t>4,564</a:t>
+            </a:r>
+          </a:p>
+        </p:txBody>
+      </p:sp>
+      <p:sp>
+        <p:nvSpPr>
           <p:cNvPr id="73" name="TextBox 72"/>
           <p:cNvSpPr txBox="1"/>
           <p:nvPr/>
         </p:nvSpPr>
         <p:spPr>
           <a:xfrm>
-            <a:off x="6263640" y="5440679"/>
-            <a:ext cx="777240" cy="201168"/>
+            <a:off x="8823960" y="5440679"/>
+            <a:ext cx="1280160" cy="201168"/>
           </a:xfrm>
           <a:prstGeom prst="rect">
             <a:avLst/>
@@ -12713,11 +12713,11 @@
             <a:r>
               <a:rPr sz="1000" b="1">
                 <a:solidFill>
-                  <a:srgbClr val="FFB352"/>
-                </a:solidFill>
-                <a:latin typeface="Open Sans"/>
-              </a:rPr>
-              <a:t>Tier 02</a:t>
+                  <a:srgbClr val="059669"/>
+                </a:solidFill>
+                <a:latin typeface="Open Sans"/>
+              </a:rPr>
+              <a:t>$200K</a:t>
             </a:r>
           </a:p>
         </p:txBody>
@@ -12730,43 +12730,8 @@
         </p:nvSpPr>
         <p:spPr>
           <a:xfrm>
-            <a:off x="6995160" y="5440679"/>
-            <a:ext cx="1188720" cy="201168"/>
-          </a:xfrm>
-          <a:prstGeom prst="rect">
-            <a:avLst/>
-          </a:prstGeom>
-          <a:noFill/>
-        </p:spPr>
-        <p:txBody>
-          <a:bodyPr wrap="square" anchor="t" lIns="0" rIns="0" tIns="0" bIns="0">
-            <a:spAutoFit/>
-          </a:bodyPr>
-          <a:lstStyle/>
-          <a:p>
-            <a:pPr algn="l"/>
-            <a:r>
-              <a:rPr sz="950" b="0">
-                <a:solidFill>
-                  <a:srgbClr val="334155"/>
-                </a:solidFill>
-                <a:latin typeface="Open Sans"/>
-              </a:rPr>
-              <a:t>$10–$99.99</a:t>
-            </a:r>
-          </a:p>
-        </p:txBody>
-      </p:sp>
-      <p:sp>
-        <p:nvSpPr>
-          <p:cNvPr id="75" name="TextBox 74"/>
-          <p:cNvSpPr txBox="1"/>
-          <p:nvPr/>
-        </p:nvSpPr>
-        <p:spPr>
-          <a:xfrm>
-            <a:off x="8229600" y="5440679"/>
-            <a:ext cx="960120" cy="201168"/>
+            <a:off x="10149840" y="5440679"/>
+            <a:ext cx="1508760" cy="201168"/>
           </a:xfrm>
           <a:prstGeom prst="rect">
             <a:avLst/>
@@ -12783,88 +12748,18 @@
             <a:r>
               <a:rPr sz="1000" b="0">
                 <a:solidFill>
-                  <a:srgbClr val="334155"/>
-                </a:solidFill>
-                <a:latin typeface="Open Sans"/>
-              </a:rPr>
-              <a:t>17,927</a:t>
-            </a:r>
-          </a:p>
-        </p:txBody>
-      </p:sp>
-      <p:sp>
-        <p:nvSpPr>
-          <p:cNvPr id="76" name="TextBox 75"/>
-          <p:cNvSpPr txBox="1"/>
-          <p:nvPr/>
-        </p:nvSpPr>
-        <p:spPr>
-          <a:xfrm>
-            <a:off x="9189720" y="5440679"/>
-            <a:ext cx="1005840" cy="201168"/>
-          </a:xfrm>
-          <a:prstGeom prst="rect">
-            <a:avLst/>
-          </a:prstGeom>
-          <a:noFill/>
-        </p:spPr>
-        <p:txBody>
-          <a:bodyPr wrap="square" anchor="t" lIns="0" rIns="0" tIns="0" bIns="0">
-            <a:spAutoFit/>
-          </a:bodyPr>
-          <a:lstStyle/>
-          <a:p>
-            <a:pPr algn="l"/>
-            <a:r>
-              <a:rPr sz="1000" b="1">
-                <a:solidFill>
-                  <a:srgbClr val="FFB352"/>
-                </a:solidFill>
-                <a:latin typeface="Open Sans"/>
-              </a:rPr>
-              <a:t>$57.9M</a:t>
-            </a:r>
-          </a:p>
-        </p:txBody>
-      </p:sp>
-      <p:sp>
-        <p:nvSpPr>
-          <p:cNvPr id="77" name="TextBox 76"/>
-          <p:cNvSpPr txBox="1"/>
-          <p:nvPr/>
-        </p:nvSpPr>
-        <p:spPr>
-          <a:xfrm>
-            <a:off x="10241280" y="5440679"/>
-            <a:ext cx="1417320" cy="201168"/>
-          </a:xfrm>
-          <a:prstGeom prst="rect">
-            <a:avLst/>
-          </a:prstGeom>
-          <a:noFill/>
-        </p:spPr>
-        <p:txBody>
-          <a:bodyPr wrap="square" anchor="t" lIns="0" rIns="0" tIns="0" bIns="0">
-            <a:spAutoFit/>
-          </a:bodyPr>
-          <a:lstStyle/>
-          <a:p>
-            <a:pPr algn="l"/>
-            <a:r>
-              <a:rPr sz="1000" b="0">
-                <a:solidFill>
-                  <a:srgbClr val="FFB352"/>
-                </a:solidFill>
-                <a:latin typeface="Open Sans"/>
-              </a:rPr>
-              <a:t>$3,230</a:t>
-            </a:r>
-          </a:p>
-        </p:txBody>
-      </p:sp>
-      <p:sp>
-        <p:nvSpPr>
-          <p:cNvPr id="78" name="Rectangle 77"/>
+                  <a:srgbClr val="059669"/>
+                </a:solidFill>
+                <a:latin typeface="Open Sans"/>
+              </a:rPr>
+              <a:t>$44</a:t>
+            </a:r>
+          </a:p>
+        </p:txBody>
+      </p:sp>
+      <p:sp>
+        <p:nvSpPr>
+          <p:cNvPr id="75" name="Rectangle 74"/>
           <p:cNvSpPr/>
           <p:nvPr/>
         </p:nvSpPr>
@@ -12908,84 +12803,119 @@
       </p:sp>
       <p:sp>
         <p:nvSpPr>
+          <p:cNvPr id="76" name="TextBox 75"/>
+          <p:cNvSpPr txBox="1"/>
+          <p:nvPr/>
+        </p:nvSpPr>
+        <p:spPr>
+          <a:xfrm>
+            <a:off x="6263640" y="5742431"/>
+            <a:ext cx="1325880" cy="201168"/>
+          </a:xfrm>
+          <a:prstGeom prst="rect">
+            <a:avLst/>
+          </a:prstGeom>
+          <a:noFill/>
+        </p:spPr>
+        <p:txBody>
+          <a:bodyPr wrap="square" anchor="t" lIns="0" rIns="0" tIns="0" bIns="0">
+            <a:spAutoFit/>
+          </a:bodyPr>
+          <a:lstStyle/>
+          <a:p>
+            <a:pPr algn="l"/>
+            <a:r>
+              <a:rPr sz="1000" b="1">
+                <a:solidFill>
+                  <a:srgbClr val="FFB352"/>
+                </a:solidFill>
+                <a:latin typeface="Open Sans"/>
+              </a:rPr>
+              <a:t>$100–$499.99</a:t>
+            </a:r>
+          </a:p>
+        </p:txBody>
+      </p:sp>
+      <p:sp>
+        <p:nvSpPr>
+          <p:cNvPr id="77" name="TextBox 76"/>
+          <p:cNvSpPr txBox="1"/>
+          <p:nvPr/>
+        </p:nvSpPr>
+        <p:spPr>
+          <a:xfrm>
+            <a:off x="7680960" y="5742431"/>
+            <a:ext cx="1097280" cy="201168"/>
+          </a:xfrm>
+          <a:prstGeom prst="rect">
+            <a:avLst/>
+          </a:prstGeom>
+          <a:noFill/>
+        </p:spPr>
+        <p:txBody>
+          <a:bodyPr wrap="square" anchor="t" lIns="0" rIns="0" tIns="0" bIns="0">
+            <a:spAutoFit/>
+          </a:bodyPr>
+          <a:lstStyle/>
+          <a:p>
+            <a:pPr algn="l"/>
+            <a:r>
+              <a:rPr sz="1000" b="0">
+                <a:solidFill>
+                  <a:srgbClr val="334155"/>
+                </a:solidFill>
+                <a:latin typeface="Open Sans"/>
+              </a:rPr>
+              <a:t>4,289</a:t>
+            </a:r>
+          </a:p>
+        </p:txBody>
+      </p:sp>
+      <p:sp>
+        <p:nvSpPr>
+          <p:cNvPr id="78" name="TextBox 77"/>
+          <p:cNvSpPr txBox="1"/>
+          <p:nvPr/>
+        </p:nvSpPr>
+        <p:spPr>
+          <a:xfrm>
+            <a:off x="8823960" y="5742431"/>
+            <a:ext cx="1280160" cy="201168"/>
+          </a:xfrm>
+          <a:prstGeom prst="rect">
+            <a:avLst/>
+          </a:prstGeom>
+          <a:noFill/>
+        </p:spPr>
+        <p:txBody>
+          <a:bodyPr wrap="square" anchor="t" lIns="0" rIns="0" tIns="0" bIns="0">
+            <a:spAutoFit/>
+          </a:bodyPr>
+          <a:lstStyle/>
+          <a:p>
+            <a:pPr algn="l"/>
+            <a:r>
+              <a:rPr sz="1000" b="1">
+                <a:solidFill>
+                  <a:srgbClr val="FFB352"/>
+                </a:solidFill>
+                <a:latin typeface="Open Sans"/>
+              </a:rPr>
+              <a:t>$1.05M</a:t>
+            </a:r>
+          </a:p>
+        </p:txBody>
+      </p:sp>
+      <p:sp>
+        <p:nvSpPr>
           <p:cNvPr id="79" name="TextBox 78"/>
           <p:cNvSpPr txBox="1"/>
           <p:nvPr/>
         </p:nvSpPr>
         <p:spPr>
           <a:xfrm>
-            <a:off x="6263640" y="5742431"/>
-            <a:ext cx="777240" cy="201168"/>
-          </a:xfrm>
-          <a:prstGeom prst="rect">
-            <a:avLst/>
-          </a:prstGeom>
-          <a:noFill/>
-        </p:spPr>
-        <p:txBody>
-          <a:bodyPr wrap="square" anchor="t" lIns="0" rIns="0" tIns="0" bIns="0">
-            <a:spAutoFit/>
-          </a:bodyPr>
-          <a:lstStyle/>
-          <a:p>
-            <a:pPr algn="l"/>
-            <a:r>
-              <a:rPr sz="1000" b="1">
-                <a:solidFill>
-                  <a:srgbClr val="FC4C0B"/>
-                </a:solidFill>
-                <a:latin typeface="Open Sans"/>
-              </a:rPr>
-              <a:t>Tier 03</a:t>
-            </a:r>
-          </a:p>
-        </p:txBody>
-      </p:sp>
-      <p:sp>
-        <p:nvSpPr>
-          <p:cNvPr id="80" name="TextBox 79"/>
-          <p:cNvSpPr txBox="1"/>
-          <p:nvPr/>
-        </p:nvSpPr>
-        <p:spPr>
-          <a:xfrm>
-            <a:off x="6995160" y="5742431"/>
-            <a:ext cx="1188720" cy="201168"/>
-          </a:xfrm>
-          <a:prstGeom prst="rect">
-            <a:avLst/>
-          </a:prstGeom>
-          <a:noFill/>
-        </p:spPr>
-        <p:txBody>
-          <a:bodyPr wrap="square" anchor="t" lIns="0" rIns="0" tIns="0" bIns="0">
-            <a:spAutoFit/>
-          </a:bodyPr>
-          <a:lstStyle/>
-          <a:p>
-            <a:pPr algn="l"/>
-            <a:r>
-              <a:rPr sz="950" b="0">
-                <a:solidFill>
-                  <a:srgbClr val="334155"/>
-                </a:solidFill>
-                <a:latin typeface="Open Sans"/>
-              </a:rPr>
-              <a:t>$100–$499.99</a:t>
-            </a:r>
-          </a:p>
-        </p:txBody>
-      </p:sp>
-      <p:sp>
-        <p:nvSpPr>
-          <p:cNvPr id="81" name="TextBox 80"/>
-          <p:cNvSpPr txBox="1"/>
-          <p:nvPr/>
-        </p:nvSpPr>
-        <p:spPr>
-          <a:xfrm>
-            <a:off x="8229600" y="5742431"/>
-            <a:ext cx="960120" cy="201168"/>
+            <a:off x="10149840" y="5742431"/>
+            <a:ext cx="1508760" cy="201168"/>
           </a:xfrm>
           <a:prstGeom prst="rect">
             <a:avLst/>
@@ -13002,88 +12932,18 @@
             <a:r>
               <a:rPr sz="1000" b="0">
                 <a:solidFill>
-                  <a:srgbClr val="334155"/>
-                </a:solidFill>
-                <a:latin typeface="Open Sans"/>
-              </a:rPr>
-              <a:t>12,384</a:t>
-            </a:r>
-          </a:p>
-        </p:txBody>
-      </p:sp>
-      <p:sp>
-        <p:nvSpPr>
-          <p:cNvPr id="82" name="TextBox 81"/>
-          <p:cNvSpPr txBox="1"/>
-          <p:nvPr/>
-        </p:nvSpPr>
-        <p:spPr>
-          <a:xfrm>
-            <a:off x="9189720" y="5742431"/>
-            <a:ext cx="1005840" cy="201168"/>
-          </a:xfrm>
-          <a:prstGeom prst="rect">
-            <a:avLst/>
-          </a:prstGeom>
-          <a:noFill/>
-        </p:spPr>
-        <p:txBody>
-          <a:bodyPr wrap="square" anchor="t" lIns="0" rIns="0" tIns="0" bIns="0">
-            <a:spAutoFit/>
-          </a:bodyPr>
-          <a:lstStyle/>
-          <a:p>
-            <a:pPr algn="l"/>
-            <a:r>
-              <a:rPr sz="1000" b="1">
-                <a:solidFill>
-                  <a:srgbClr val="FC4C0B"/>
-                </a:solidFill>
-                <a:latin typeface="Open Sans"/>
-              </a:rPr>
-              <a:t>$87.5M</a:t>
-            </a:r>
-          </a:p>
-        </p:txBody>
-      </p:sp>
-      <p:sp>
-        <p:nvSpPr>
-          <p:cNvPr id="83" name="TextBox 82"/>
-          <p:cNvSpPr txBox="1"/>
-          <p:nvPr/>
-        </p:nvSpPr>
-        <p:spPr>
-          <a:xfrm>
-            <a:off x="10241280" y="5742431"/>
-            <a:ext cx="1417320" cy="201168"/>
-          </a:xfrm>
-          <a:prstGeom prst="rect">
-            <a:avLst/>
-          </a:prstGeom>
-          <a:noFill/>
-        </p:spPr>
-        <p:txBody>
-          <a:bodyPr wrap="square" anchor="t" lIns="0" rIns="0" tIns="0" bIns="0">
-            <a:spAutoFit/>
-          </a:bodyPr>
-          <a:lstStyle/>
-          <a:p>
-            <a:pPr algn="l"/>
-            <a:r>
-              <a:rPr sz="1000" b="0">
-                <a:solidFill>
-                  <a:srgbClr val="FC4C0B"/>
-                </a:solidFill>
-                <a:latin typeface="Open Sans"/>
-              </a:rPr>
-              <a:t>$7,067</a:t>
-            </a:r>
-          </a:p>
-        </p:txBody>
-      </p:sp>
-      <p:sp>
-        <p:nvSpPr>
-          <p:cNvPr id="84" name="Rectangle 83"/>
+                  <a:srgbClr val="FFB352"/>
+                </a:solidFill>
+                <a:latin typeface="Open Sans"/>
+              </a:rPr>
+              <a:t>$246</a:t>
+            </a:r>
+          </a:p>
+        </p:txBody>
+      </p:sp>
+      <p:sp>
+        <p:nvSpPr>
+          <p:cNvPr id="80" name="Rectangle 79"/>
           <p:cNvSpPr/>
           <p:nvPr/>
         </p:nvSpPr>
@@ -13127,14 +12987,14 @@
       </p:sp>
       <p:sp>
         <p:nvSpPr>
-          <p:cNvPr id="85" name="TextBox 84"/>
+          <p:cNvPr id="81" name="TextBox 80"/>
           <p:cNvSpPr txBox="1"/>
           <p:nvPr/>
         </p:nvSpPr>
         <p:spPr>
           <a:xfrm>
             <a:off x="6263640" y="6044183"/>
-            <a:ext cx="777240" cy="201168"/>
+            <a:ext cx="1325880" cy="201168"/>
           </a:xfrm>
           <a:prstGeom prst="rect">
             <a:avLst/>
@@ -13155,56 +13015,91 @@
                 </a:solidFill>
                 <a:latin typeface="Open Sans"/>
               </a:rPr>
-              <a:t>Tier 04</a:t>
-            </a:r>
-          </a:p>
-        </p:txBody>
-      </p:sp>
-      <p:sp>
-        <p:nvSpPr>
-          <p:cNvPr id="86" name="TextBox 85"/>
-          <p:cNvSpPr txBox="1"/>
-          <p:nvPr/>
-        </p:nvSpPr>
-        <p:spPr>
-          <a:xfrm>
-            <a:off x="6995160" y="6044183"/>
-            <a:ext cx="1188720" cy="201168"/>
-          </a:xfrm>
-          <a:prstGeom prst="rect">
-            <a:avLst/>
-          </a:prstGeom>
-          <a:noFill/>
-        </p:spPr>
-        <p:txBody>
-          <a:bodyPr wrap="square" anchor="t" lIns="0" rIns="0" tIns="0" bIns="0">
-            <a:spAutoFit/>
-          </a:bodyPr>
-          <a:lstStyle/>
-          <a:p>
-            <a:pPr algn="l"/>
-            <a:r>
-              <a:rPr sz="950" b="0">
+              <a:t>$500+</a:t>
+            </a:r>
+          </a:p>
+        </p:txBody>
+      </p:sp>
+      <p:sp>
+        <p:nvSpPr>
+          <p:cNvPr id="82" name="TextBox 81"/>
+          <p:cNvSpPr txBox="1"/>
+          <p:nvPr/>
+        </p:nvSpPr>
+        <p:spPr>
+          <a:xfrm>
+            <a:off x="7680960" y="6044183"/>
+            <a:ext cx="1097280" cy="201168"/>
+          </a:xfrm>
+          <a:prstGeom prst="rect">
+            <a:avLst/>
+          </a:prstGeom>
+          <a:noFill/>
+        </p:spPr>
+        <p:txBody>
+          <a:bodyPr wrap="square" anchor="t" lIns="0" rIns="0" tIns="0" bIns="0">
+            <a:spAutoFit/>
+          </a:bodyPr>
+          <a:lstStyle/>
+          <a:p>
+            <a:pPr algn="l"/>
+            <a:r>
+              <a:rPr sz="1000" b="0">
                 <a:solidFill>
                   <a:srgbClr val="334155"/>
                 </a:solidFill>
                 <a:latin typeface="Open Sans"/>
               </a:rPr>
-              <a:t>$500+</a:t>
-            </a:r>
-          </a:p>
-        </p:txBody>
-      </p:sp>
-      <p:sp>
-        <p:nvSpPr>
-          <p:cNvPr id="87" name="TextBox 86"/>
-          <p:cNvSpPr txBox="1"/>
-          <p:nvPr/>
-        </p:nvSpPr>
-        <p:spPr>
-          <a:xfrm>
-            <a:off x="8229600" y="6044183"/>
-            <a:ext cx="960120" cy="201168"/>
+              <a:t>10,305</a:t>
+            </a:r>
+          </a:p>
+        </p:txBody>
+      </p:sp>
+      <p:sp>
+        <p:nvSpPr>
+          <p:cNvPr id="83" name="TextBox 82"/>
+          <p:cNvSpPr txBox="1"/>
+          <p:nvPr/>
+        </p:nvSpPr>
+        <p:spPr>
+          <a:xfrm>
+            <a:off x="8823960" y="6044183"/>
+            <a:ext cx="1280160" cy="201168"/>
+          </a:xfrm>
+          <a:prstGeom prst="rect">
+            <a:avLst/>
+          </a:prstGeom>
+          <a:noFill/>
+        </p:spPr>
+        <p:txBody>
+          <a:bodyPr wrap="square" anchor="t" lIns="0" rIns="0" tIns="0" bIns="0">
+            <a:spAutoFit/>
+          </a:bodyPr>
+          <a:lstStyle/>
+          <a:p>
+            <a:pPr algn="l"/>
+            <a:r>
+              <a:rPr sz="1000" b="1">
+                <a:solidFill>
+                  <a:srgbClr val="2863C5"/>
+                </a:solidFill>
+                <a:latin typeface="Open Sans"/>
+              </a:rPr>
+              <a:t>$323M</a:t>
+            </a:r>
+          </a:p>
+        </p:txBody>
+      </p:sp>
+      <p:sp>
+        <p:nvSpPr>
+          <p:cNvPr id="84" name="TextBox 83"/>
+          <p:cNvSpPr txBox="1"/>
+          <p:nvPr/>
+        </p:nvSpPr>
+        <p:spPr>
+          <a:xfrm>
+            <a:off x="10149840" y="6044183"/>
+            <a:ext cx="1508760" cy="201168"/>
           </a:xfrm>
           <a:prstGeom prst="rect">
             <a:avLst/>
@@ -13221,88 +13116,18 @@
             <a:r>
               <a:rPr sz="1000" b="0">
                 <a:solidFill>
-                  <a:srgbClr val="334155"/>
-                </a:solidFill>
-                <a:latin typeface="Open Sans"/>
-              </a:rPr>
-              <a:t>7,569</a:t>
-            </a:r>
-          </a:p>
-        </p:txBody>
-      </p:sp>
-      <p:sp>
-        <p:nvSpPr>
-          <p:cNvPr id="88" name="TextBox 87"/>
-          <p:cNvSpPr txBox="1"/>
-          <p:nvPr/>
-        </p:nvSpPr>
-        <p:spPr>
-          <a:xfrm>
-            <a:off x="9189720" y="6044183"/>
-            <a:ext cx="1005840" cy="201168"/>
-          </a:xfrm>
-          <a:prstGeom prst="rect">
-            <a:avLst/>
-          </a:prstGeom>
-          <a:noFill/>
-        </p:spPr>
-        <p:txBody>
-          <a:bodyPr wrap="square" anchor="t" lIns="0" rIns="0" tIns="0" bIns="0">
-            <a:spAutoFit/>
-          </a:bodyPr>
-          <a:lstStyle/>
-          <a:p>
-            <a:pPr algn="l"/>
-            <a:r>
-              <a:rPr sz="1000" b="1">
-                <a:solidFill>
                   <a:srgbClr val="2863C5"/>
                 </a:solidFill>
                 <a:latin typeface="Open Sans"/>
               </a:rPr>
-              <a:t>$173.1M</a:t>
-            </a:r>
-          </a:p>
-        </p:txBody>
-      </p:sp>
-      <p:sp>
-        <p:nvSpPr>
-          <p:cNvPr id="89" name="TextBox 88"/>
-          <p:cNvSpPr txBox="1"/>
-          <p:nvPr/>
-        </p:nvSpPr>
-        <p:spPr>
-          <a:xfrm>
-            <a:off x="10241280" y="6044183"/>
-            <a:ext cx="1417320" cy="201168"/>
-          </a:xfrm>
-          <a:prstGeom prst="rect">
-            <a:avLst/>
-          </a:prstGeom>
-          <a:noFill/>
-        </p:spPr>
-        <p:txBody>
-          <a:bodyPr wrap="square" anchor="t" lIns="0" rIns="0" tIns="0" bIns="0">
-            <a:spAutoFit/>
-          </a:bodyPr>
-          <a:lstStyle/>
-          <a:p>
-            <a:pPr algn="l"/>
-            <a:r>
-              <a:rPr sz="1000" b="0">
-                <a:solidFill>
-                  <a:srgbClr val="2863C5"/>
-                </a:solidFill>
-                <a:latin typeface="Open Sans"/>
-              </a:rPr>
-              <a:t>$22,872</a:t>
-            </a:r>
-          </a:p>
-        </p:txBody>
-      </p:sp>
-      <p:sp>
-        <p:nvSpPr>
-          <p:cNvPr id="90" name="Rounded Rectangle 89"/>
+              <a:t>$31,353</a:t>
+            </a:r>
+          </a:p>
+        </p:txBody>
+      </p:sp>
+      <p:sp>
+        <p:nvSpPr>
+          <p:cNvPr id="85" name="Rounded Rectangle 84"/>
           <p:cNvSpPr/>
           <p:nvPr/>
         </p:nvSpPr>
@@ -13348,7 +13173,7 @@
       </p:sp>
       <p:sp>
         <p:nvSpPr>
-          <p:cNvPr id="91" name="TextBox 90"/>
+          <p:cNvPr id="86" name="TextBox 85"/>
           <p:cNvSpPr txBox="1"/>
           <p:nvPr/>
         </p:nvSpPr>

--- a/myReclaim-Exec-Deck.pptx
+++ b/myReclaim-Exec-Deck.pptx
@@ -10276,13 +10276,13 @@
           <a:p>
             <a:pPr algn="l"/>
             <a:r>
-              <a:rPr sz="2200" b="1">
+              <a:rPr sz="2000" b="1">
                 <a:solidFill>
                   <a:srgbClr val="0F172A"/>
                 </a:solidFill>
                 <a:latin typeface="Open Sans"/>
               </a:rPr>
-              <a:t>We matched 30,862 active CA customers against all four CA unclaimed tiers (92.4M records).</a:t>
+              <a:t>We matched 29,405 distinct customer names (from 30,862 active CA rows) against all four CA unclaimed tiers (92.4M records).</a:t>
             </a:r>
           </a:p>
         </p:txBody>
@@ -10317,7 +10317,7 @@
                 </a:solidFill>
                 <a:latin typeface="Open Sans"/>
               </a:rPr>
-              <a:t>Method: exact name match (FIRST LAST or LAST FIRST) — same matching logic the prototype uses, run via the indexed equality path. The state determines actual eligibility per record.</a:t>
+              <a:t>Method: exact name match (FIRST LAST or LAST FIRST) on de-duplicated customer names. Same logic the prototype uses, run via the indexed equality path. The state determines actual eligibility per record.</a:t>
             </a:r>
           </a:p>
         </p:txBody>
@@ -10479,7 +10479,7 @@
                 </a:solidFill>
                 <a:latin typeface="Open Sans"/>
               </a:rPr>
-              <a:t>customers with at least one possible match</a:t>
+              <a:t>distinct names with at least one match</a:t>
             </a:r>
           </a:p>
         </p:txBody>
@@ -10606,7 +10606,7 @@
                 </a:solidFill>
                 <a:latin typeface="Open Sans"/>
               </a:rPr>
-              <a:t>70.8%</a:t>
+              <a:t>74.4%</a:t>
             </a:r>
           </a:p>
         </p:txBody>
@@ -10641,7 +10641,7 @@
                 </a:solidFill>
                 <a:latin typeface="Open Sans"/>
               </a:rPr>
-              <a:t>of the 30,862 active CA base</a:t>
+              <a:t>of the 29,405 distinct names</a:t>
             </a:r>
           </a:p>
         </p:txBody>
@@ -10768,7 +10768,7 @@
                 </a:solidFill>
                 <a:latin typeface="Open Sans"/>
               </a:rPr>
-              <a:t>4.4M</a:t>
+              <a:t>2.4M</a:t>
             </a:r>
           </a:p>
         </p:txBody>
@@ -10803,7 +10803,7 @@
                 </a:solidFill>
                 <a:latin typeface="Open Sans"/>
               </a:rPr>
-              <a:t>matched property records across all tiers</a:t>
+              <a:t>property records matched (deduped)</a:t>
             </a:r>
           </a:p>
         </p:txBody>
@@ -10930,7 +10930,7 @@
                 </a:solidFill>
                 <a:latin typeface="Open Sans"/>
               </a:rPr>
-              <a:t>$324M</a:t>
+              <a:t>$178M</a:t>
             </a:r>
           </a:p>
         </p:txBody>
@@ -11368,7 +11368,7 @@
                 </a:solidFill>
                 <a:latin typeface="Open Sans"/>
               </a:rPr>
-              <a:t>3,266</a:t>
+              <a:t>3,278</a:t>
             </a:r>
           </a:p>
         </p:txBody>
@@ -11587,7 +11587,7 @@
                 </a:solidFill>
                 <a:latin typeface="Open Sans"/>
               </a:rPr>
-              <a:t>5,788</a:t>
+              <a:t>5,798</a:t>
             </a:r>
           </a:p>
         </p:txBody>
@@ -11622,7 +11622,7 @@
                 </a:solidFill>
                 <a:latin typeface="Open Sans"/>
               </a:rPr>
-              <a:t>$1.21M</a:t>
+              <a:t>$1.22M</a:t>
             </a:r>
           </a:p>
         </p:txBody>
@@ -11657,7 +11657,7 @@
                 </a:solidFill>
                 <a:latin typeface="Open Sans"/>
               </a:rPr>
-              <a:t>$209</a:t>
+              <a:t>$210</a:t>
             </a:r>
           </a:p>
         </p:txBody>
@@ -11806,7 +11806,7 @@
                 </a:solidFill>
                 <a:latin typeface="Open Sans"/>
               </a:rPr>
-              <a:t>4,393</a:t>
+              <a:t>4,402</a:t>
             </a:r>
           </a:p>
         </p:txBody>
@@ -11841,7 +11841,7 @@
                 </a:solidFill>
                 <a:latin typeface="Open Sans"/>
               </a:rPr>
-              <a:t>$3.50M</a:t>
+              <a:t>$3.52M</a:t>
             </a:r>
           </a:p>
         </p:txBody>
@@ -11876,7 +11876,7 @@
                 </a:solidFill>
                 <a:latin typeface="Open Sans"/>
               </a:rPr>
-              <a:t>$797</a:t>
+              <a:t>$800</a:t>
             </a:r>
           </a:p>
         </p:txBody>
@@ -12025,7 +12025,7 @@
                 </a:solidFill>
                 <a:latin typeface="Open Sans"/>
               </a:rPr>
-              <a:t>8,417</a:t>
+              <a:t>8,386</a:t>
             </a:r>
           </a:p>
         </p:txBody>
@@ -12060,7 +12060,7 @@
                 </a:solidFill>
                 <a:latin typeface="Open Sans"/>
               </a:rPr>
-              <a:t>$319M</a:t>
+              <a:t>$173M</a:t>
             </a:r>
           </a:p>
         </p:txBody>
@@ -12095,7 +12095,7 @@
                 </a:solidFill>
                 <a:latin typeface="Open Sans"/>
               </a:rPr>
-              <a:t>$37,898</a:t>
+              <a:t>$20,673</a:t>
             </a:r>
           </a:p>
         </p:txBody>
@@ -12498,7 +12498,7 @@
                 </a:solidFill>
                 <a:latin typeface="Open Sans"/>
               </a:rPr>
-              <a:t>2,706</a:t>
+              <a:t>2,707</a:t>
             </a:r>
           </a:p>
         </p:txBody>
@@ -12682,7 +12682,7 @@
                 </a:solidFill>
                 <a:latin typeface="Open Sans"/>
               </a:rPr>
-              <a:t>4,564</a:t>
+              <a:t>4,571</a:t>
             </a:r>
           </a:p>
         </p:txBody>
@@ -12866,7 +12866,7 @@
                 </a:solidFill>
                 <a:latin typeface="Open Sans"/>
               </a:rPr>
-              <a:t>4,289</a:t>
+              <a:t>4,297</a:t>
             </a:r>
           </a:p>
         </p:txBody>
@@ -12901,7 +12901,7 @@
                 </a:solidFill>
                 <a:latin typeface="Open Sans"/>
               </a:rPr>
-              <a:t>$1.05M</a:t>
+              <a:t>$1.06M</a:t>
             </a:r>
           </a:p>
         </p:txBody>
@@ -13050,7 +13050,7 @@
                 </a:solidFill>
                 <a:latin typeface="Open Sans"/>
               </a:rPr>
-              <a:t>10,305</a:t>
+              <a:t>10,289</a:t>
             </a:r>
           </a:p>
         </p:txBody>
@@ -13085,7 +13085,7 @@
                 </a:solidFill>
                 <a:latin typeface="Open Sans"/>
               </a:rPr>
-              <a:t>$323M</a:t>
+              <a:t>$177M</a:t>
             </a:r>
           </a:p>
         </p:txBody>
@@ -13120,7 +13120,7 @@
                 </a:solidFill>
                 <a:latin typeface="Open Sans"/>
               </a:rPr>
-              <a:t>$31,353</a:t>
+              <a:t>$17,211</a:t>
             </a:r>
           </a:p>
         </p:txBody>
@@ -13201,7 +13201,7 @@
                 </a:solidFill>
                 <a:latin typeface="Open Sans"/>
               </a:rPr>
-              <a:t>Even discounting common-name false positives, ~9,000 customers in the high-confidence bucket map to ~$1.5M of unclaimed property in CA alone.</a:t>
+              <a:t>12,576 customers in the high-confidence buckets ($0–$499.99) map to ~$1.27M of likely-real CA unclaimed property.</a:t>
             </a:r>
           </a:p>
         </p:txBody>

--- a/myReclaim-Exec-Deck.pptx
+++ b/myReclaim-Exec-Deck.pptx
@@ -10311,13 +10311,13 @@
           <a:p>
             <a:pPr algn="l"/>
             <a:r>
-              <a:rPr sz="1100" b="0">
+              <a:rPr sz="1000" b="0">
                 <a:solidFill>
                   <a:srgbClr val="64748B"/>
                 </a:solidFill>
                 <a:latin typeface="Open Sans"/>
               </a:rPr>
-              <a:t>Method: exact name match (FIRST LAST or LAST FIRST) on de-duplicated customer names. Same logic the prototype uses, run via the indexed equality path. The state determines actual eligibility per record.</a:t>
+              <a:t>Cohort: active SmartCredit customers with customerproductid=4, excluding test accounts (30,862 of the 44,222 total CA base). Method: exact name match (FIRST LAST or LAST FIRST) on de-duplicated customer names — same logic the prototype uses, indexed equality path. State determines actual eligibility per record.</a:t>
             </a:r>
           </a:p>
         </p:txBody>

--- a/myReclaim-Exec-Deck.pptx
+++ b/myReclaim-Exec-Deck.pptx
@@ -10317,7 +10317,7 @@
                 </a:solidFill>
                 <a:latin typeface="Open Sans"/>
               </a:rPr>
-              <a:t>Cohort: active SmartCredit customers with customerproductid=4, excluding test accounts (30,862 of the 44,222 total CA base). Method: exact name match (FIRST LAST or LAST FIRST) on de-duplicated customer names — same logic the prototype uses, indexed equality path. State determines actual eligibility per record.</a:t>
+              <a:t>Cohort: active SmartCredit customers with customerproductid=4, excluding test accounts (30,862 of the 44,222 total CA base). Method: exact LAST FIRST match (CA's storage convention) on de-duplicated customer names. State determines actual eligibility per record.</a:t>
             </a:r>
           </a:p>
         </p:txBody>
@@ -10444,7 +10444,7 @@
                 </a:solidFill>
                 <a:latin typeface="Open Sans"/>
               </a:rPr>
-              <a:t>21,864</a:t>
+              <a:t>21,655</a:t>
             </a:r>
           </a:p>
         </p:txBody>
@@ -10606,7 +10606,7 @@
                 </a:solidFill>
                 <a:latin typeface="Open Sans"/>
               </a:rPr>
-              <a:t>74.4%</a:t>
+              <a:t>73.6%</a:t>
             </a:r>
           </a:p>
         </p:txBody>
@@ -10768,7 +10768,7 @@
                 </a:solidFill>
                 <a:latin typeface="Open Sans"/>
               </a:rPr>
-              <a:t>2.4M</a:t>
+              <a:t>2.3M</a:t>
             </a:r>
           </a:p>
         </p:txBody>
@@ -10803,7 +10803,7 @@
                 </a:solidFill>
                 <a:latin typeface="Open Sans"/>
               </a:rPr>
-              <a:t>property records matched (deduped)</a:t>
+              <a:t>property records matched</a:t>
             </a:r>
           </a:p>
         </p:txBody>
@@ -10930,7 +10930,7 @@
                 </a:solidFill>
                 <a:latin typeface="Open Sans"/>
               </a:rPr>
-              <a:t>$178M</a:t>
+              <a:t>$172M</a:t>
             </a:r>
           </a:p>
         </p:txBody>
@@ -11368,7 +11368,7 @@
                 </a:solidFill>
                 <a:latin typeface="Open Sans"/>
               </a:rPr>
-              <a:t>3,278</a:t>
+              <a:t>3,323</a:t>
             </a:r>
           </a:p>
         </p:txBody>
@@ -11403,7 +11403,7 @@
                 </a:solidFill>
                 <a:latin typeface="Open Sans"/>
               </a:rPr>
-              <a:t>$239K</a:t>
+              <a:t>$242K</a:t>
             </a:r>
           </a:p>
         </p:txBody>
@@ -11587,7 +11587,7 @@
                 </a:solidFill>
                 <a:latin typeface="Open Sans"/>
               </a:rPr>
-              <a:t>5,798</a:t>
+              <a:t>5,757</a:t>
             </a:r>
           </a:p>
         </p:txBody>
@@ -11622,7 +11622,7 @@
                 </a:solidFill>
                 <a:latin typeface="Open Sans"/>
               </a:rPr>
-              <a:t>$1.22M</a:t>
+              <a:t>$1.21M</a:t>
             </a:r>
           </a:p>
         </p:txBody>
@@ -11657,7 +11657,7 @@
                 </a:solidFill>
                 <a:latin typeface="Open Sans"/>
               </a:rPr>
-              <a:t>$210</a:t>
+              <a:t>$211</a:t>
             </a:r>
           </a:p>
         </p:txBody>
@@ -11806,7 +11806,7 @@
                 </a:solidFill>
                 <a:latin typeface="Open Sans"/>
               </a:rPr>
-              <a:t>4,402</a:t>
+              <a:t>4,347</a:t>
             </a:r>
           </a:p>
         </p:txBody>
@@ -11841,7 +11841,7 @@
                 </a:solidFill>
                 <a:latin typeface="Open Sans"/>
               </a:rPr>
-              <a:t>$3.52M</a:t>
+              <a:t>$3.49M</a:t>
             </a:r>
           </a:p>
         </p:txBody>
@@ -11876,7 +11876,7 @@
                 </a:solidFill>
                 <a:latin typeface="Open Sans"/>
               </a:rPr>
-              <a:t>$800</a:t>
+              <a:t>$802</a:t>
             </a:r>
           </a:p>
         </p:txBody>
@@ -12025,7 +12025,7 @@
                 </a:solidFill>
                 <a:latin typeface="Open Sans"/>
               </a:rPr>
-              <a:t>8,386</a:t>
+              <a:t>8,228</a:t>
             </a:r>
           </a:p>
         </p:txBody>
@@ -12060,7 +12060,7 @@
                 </a:solidFill>
                 <a:latin typeface="Open Sans"/>
               </a:rPr>
-              <a:t>$173M</a:t>
+              <a:t>$167M</a:t>
             </a:r>
           </a:p>
         </p:txBody>
@@ -12095,7 +12095,7 @@
                 </a:solidFill>
                 <a:latin typeface="Open Sans"/>
               </a:rPr>
-              <a:t>$20,673</a:t>
+              <a:t>$20,342</a:t>
             </a:r>
           </a:p>
         </p:txBody>
@@ -12498,7 +12498,7 @@
                 </a:solidFill>
                 <a:latin typeface="Open Sans"/>
               </a:rPr>
-              <a:t>2,707</a:t>
+              <a:t>2,765</a:t>
             </a:r>
           </a:p>
         </p:txBody>
@@ -12533,7 +12533,7 @@
                 </a:solidFill>
                 <a:latin typeface="Open Sans"/>
               </a:rPr>
-              <a:t>$8K</a:t>
+              <a:t>$9K</a:t>
             </a:r>
           </a:p>
         </p:txBody>
@@ -12682,7 +12682,7 @@
                 </a:solidFill>
                 <a:latin typeface="Open Sans"/>
               </a:rPr>
-              <a:t>4,571</a:t>
+              <a:t>4,505</a:t>
             </a:r>
           </a:p>
         </p:txBody>
@@ -12717,7 +12717,7 @@
                 </a:solidFill>
                 <a:latin typeface="Open Sans"/>
               </a:rPr>
-              <a:t>$200K</a:t>
+              <a:t>$198K</a:t>
             </a:r>
           </a:p>
         </p:txBody>
@@ -12936,7 +12936,7 @@
                 </a:solidFill>
                 <a:latin typeface="Open Sans"/>
               </a:rPr>
-              <a:t>$246</a:t>
+              <a:t>$247</a:t>
             </a:r>
           </a:p>
         </p:txBody>
@@ -13050,7 +13050,7 @@
                 </a:solidFill>
                 <a:latin typeface="Open Sans"/>
               </a:rPr>
-              <a:t>10,289</a:t>
+              <a:t>10,088</a:t>
             </a:r>
           </a:p>
         </p:txBody>
@@ -13085,7 +13085,7 @@
                 </a:solidFill>
                 <a:latin typeface="Open Sans"/>
               </a:rPr>
-              <a:t>$177M</a:t>
+              <a:t>$171M</a:t>
             </a:r>
           </a:p>
         </p:txBody>
@@ -13120,7 +13120,7 @@
                 </a:solidFill>
                 <a:latin typeface="Open Sans"/>
               </a:rPr>
-              <a:t>$17,211</a:t>
+              <a:t>$16,956</a:t>
             </a:r>
           </a:p>
         </p:txBody>
@@ -13201,7 +13201,7 @@
                 </a:solidFill>
                 <a:latin typeface="Open Sans"/>
               </a:rPr>
-              <a:t>12,576 customers in the high-confidence buckets ($0–$499.99) map to ~$1.27M of likely-real CA unclaimed property.</a:t>
+              <a:t>11,567 customers in the high-confidence buckets ($0–$499.99) map to ~$1.27M of likely-real CA unclaimed property.</a:t>
             </a:r>
           </a:p>
         </p:txBody>

--- a/myReclaim-Exec-Deck.pptx
+++ b/myReclaim-Exec-Deck.pptx
@@ -10282,7 +10282,7 @@
                 </a:solidFill>
                 <a:latin typeface="Open Sans"/>
               </a:rPr>
-              <a:t>We matched 29,405 distinct customer names (from 30,862 active CA rows) against all four CA unclaimed tiers (92.4M records).</a:t>
+              <a:t>We matched 30,931 active CA customers against all four CA unclaimed tiers (92.4M records).</a:t>
             </a:r>
           </a:p>
         </p:txBody>
@@ -10317,7 +10317,7 @@
                 </a:solidFill>
                 <a:latin typeface="Open Sans"/>
               </a:rPr>
-              <a:t>Cohort: active SmartCredit customers with customerproductid=4, excluding test accounts (30,862 of the 44,222 total CA base). Method: exact LAST FIRST match (CA's storage convention) on de-duplicated customer names. State determines actual eligibility per record.</a:t>
+              <a:t>Cohort: active SmartCredit customers (customerproductid=4, non-test) — 30,931 of the 44,222 total CA base. Customer-level counts via CUSTOMERTOKEN. Method: exact LAST FIRST match (CA's storage convention). State determines actual eligibility per record.</a:t>
             </a:r>
           </a:p>
         </p:txBody>
@@ -10444,7 +10444,7 @@
                 </a:solidFill>
                 <a:latin typeface="Open Sans"/>
               </a:rPr>
-              <a:t>21,655</a:t>
+              <a:t>23,166</a:t>
             </a:r>
           </a:p>
         </p:txBody>
@@ -10479,7 +10479,7 @@
                 </a:solidFill>
                 <a:latin typeface="Open Sans"/>
               </a:rPr>
-              <a:t>distinct names with at least one match</a:t>
+              <a:t>customers with at least one matching name</a:t>
             </a:r>
           </a:p>
         </p:txBody>
@@ -10606,7 +10606,7 @@
                 </a:solidFill>
                 <a:latin typeface="Open Sans"/>
               </a:rPr>
-              <a:t>73.6%</a:t>
+              <a:t>74.9%</a:t>
             </a:r>
           </a:p>
         </p:txBody>
@@ -10641,7 +10641,7 @@
                 </a:solidFill>
                 <a:latin typeface="Open Sans"/>
               </a:rPr>
-              <a:t>of the 29,405 distinct names</a:t>
+              <a:t>of the 30,931 active CA customers</a:t>
             </a:r>
           </a:p>
         </p:txBody>
@@ -11368,7 +11368,7 @@
                 </a:solidFill>
                 <a:latin typeface="Open Sans"/>
               </a:rPr>
-              <a:t>3,323</a:t>
+              <a:t>3,331</a:t>
             </a:r>
           </a:p>
         </p:txBody>
@@ -11403,7 +11403,7 @@
                 </a:solidFill>
                 <a:latin typeface="Open Sans"/>
               </a:rPr>
-              <a:t>$242K</a:t>
+              <a:t>$219K</a:t>
             </a:r>
           </a:p>
         </p:txBody>
@@ -11438,7 +11438,7 @@
                 </a:solidFill>
                 <a:latin typeface="Open Sans"/>
               </a:rPr>
-              <a:t>$73</a:t>
+              <a:t>$66</a:t>
             </a:r>
           </a:p>
         </p:txBody>
@@ -11587,7 +11587,7 @@
                 </a:solidFill>
                 <a:latin typeface="Open Sans"/>
               </a:rPr>
-              <a:t>5,757</a:t>
+              <a:t>5,790</a:t>
             </a:r>
           </a:p>
         </p:txBody>
@@ -11622,7 +11622,7 @@
                 </a:solidFill>
                 <a:latin typeface="Open Sans"/>
               </a:rPr>
-              <a:t>$1.21M</a:t>
+              <a:t>$1.19M</a:t>
             </a:r>
           </a:p>
         </p:txBody>
@@ -11657,7 +11657,7 @@
                 </a:solidFill>
                 <a:latin typeface="Open Sans"/>
               </a:rPr>
-              <a:t>$211</a:t>
+              <a:t>$205</a:t>
             </a:r>
           </a:p>
         </p:txBody>
@@ -11806,7 +11806,7 @@
                 </a:solidFill>
                 <a:latin typeface="Open Sans"/>
               </a:rPr>
-              <a:t>4,347</a:t>
+              <a:t>4,388</a:t>
             </a:r>
           </a:p>
         </p:txBody>
@@ -11841,7 +11841,7 @@
                 </a:solidFill>
                 <a:latin typeface="Open Sans"/>
               </a:rPr>
-              <a:t>$3.49M</a:t>
+              <a:t>$3.47M</a:t>
             </a:r>
           </a:p>
         </p:txBody>
@@ -11876,7 +11876,7 @@
                 </a:solidFill>
                 <a:latin typeface="Open Sans"/>
               </a:rPr>
-              <a:t>$802</a:t>
+              <a:t>$792</a:t>
             </a:r>
           </a:p>
         </p:txBody>
@@ -12025,7 +12025,7 @@
                 </a:solidFill>
                 <a:latin typeface="Open Sans"/>
               </a:rPr>
-              <a:t>8,228</a:t>
+              <a:t>9,657</a:t>
             </a:r>
           </a:p>
         </p:txBody>
@@ -12095,7 +12095,7 @@
                 </a:solidFill>
                 <a:latin typeface="Open Sans"/>
               </a:rPr>
-              <a:t>$20,342</a:t>
+              <a:t>$17,329</a:t>
             </a:r>
           </a:p>
         </p:txBody>
@@ -12498,7 +12498,7 @@
                 </a:solidFill>
                 <a:latin typeface="Open Sans"/>
               </a:rPr>
-              <a:t>2,765</a:t>
+              <a:t>2,774</a:t>
             </a:r>
           </a:p>
         </p:txBody>
@@ -12682,7 +12682,7 @@
                 </a:solidFill>
                 <a:latin typeface="Open Sans"/>
               </a:rPr>
-              <a:t>4,505</a:t>
+              <a:t>4,526</a:t>
             </a:r>
           </a:p>
         </p:txBody>
@@ -12866,7 +12866,7 @@
                 </a:solidFill>
                 <a:latin typeface="Open Sans"/>
               </a:rPr>
-              <a:t>4,297</a:t>
+              <a:t>4,317</a:t>
             </a:r>
           </a:p>
         </p:txBody>
@@ -12936,7 +12936,7 @@
                 </a:solidFill>
                 <a:latin typeface="Open Sans"/>
               </a:rPr>
-              <a:t>$247</a:t>
+              <a:t>$245</a:t>
             </a:r>
           </a:p>
         </p:txBody>
@@ -13050,7 +13050,7 @@
                 </a:solidFill>
                 <a:latin typeface="Open Sans"/>
               </a:rPr>
-              <a:t>10,088</a:t>
+              <a:t>11,549</a:t>
             </a:r>
           </a:p>
         </p:txBody>
@@ -13120,7 +13120,7 @@
                 </a:solidFill>
                 <a:latin typeface="Open Sans"/>
               </a:rPr>
-              <a:t>$16,956</a:t>
+              <a:t>$14,814</a:t>
             </a:r>
           </a:p>
         </p:txBody>
@@ -13201,7 +13201,7 @@
                 </a:solidFill>
                 <a:latin typeface="Open Sans"/>
               </a:rPr>
-              <a:t>11,567 customers in the high-confidence buckets ($0–$499.99) map to ~$1.27M of likely-real CA unclaimed property.</a:t>
+              <a:t>11,617 customers in the high-confidence buckets ($0–$499.99) map to ~$1.27M of likely-real CA unclaimed property.</a:t>
             </a:r>
           </a:p>
         </p:txBody>

--- a/myReclaim-Exec-Deck.pptx
+++ b/myReclaim-Exec-Deck.pptx
@@ -7242,7 +7242,7 @@
                 </a:solidFill>
                 <a:latin typeface="Open Sans"/>
               </a:rPr>
-              <a:t>Top 10 customer states cover ~70% of the SmartCredit base. Four of the top five (FL, TX, GA, NY) need a state agreement before we can ingest at scale. CA is the only top-10 state with a clean public bulk feed — that's where the prototype starts.</a:t>
+              <a:t>Top 10 customer states cover ~65% of the SmartCredit base (288,065 of 443,206). Four of the top five (FL, TX, GA, NY) need a state agreement before we can ingest at scale. CA is the only top-10 state with a clean public bulk feed — that's where the prototype starts.</a:t>
             </a:r>
           </a:p>
         </p:txBody>
@@ -7664,7 +7664,7 @@
                 </a:solidFill>
                 <a:latin typeface="Open Sans"/>
               </a:rPr>
-              <a:t>MANUAL</a:t>
+              <a:t>LEGAL</a:t>
             </a:r>
           </a:p>
         </p:txBody>
@@ -7699,7 +7699,7 @@
                 </a:solidFill>
                 <a:latin typeface="Open Sans"/>
               </a:rPr>
-              <a:t>Registered FL rep path (atty/CPA/PI, Ch. 717). No cacheable bulk dataset confirmed.</a:t>
+              <a:t>Permissioned claimant-rep path (FL atty/CPA/PI, Ch. 717). Bulk ingest/caching only after written DFS approval; portal manual by default.</a:t>
             </a:r>
           </a:p>
         </p:txBody>
@@ -8219,7 +8219,7 @@
                 </a:solidFill>
                 <a:latin typeface="Open Sans"/>
               </a:rPr>
-              <a:t>Public CSV, updated Thursdays — prototype loaded 81M rows ✓</a:t>
+              <a:t>Public CSV, updated Thursdays — prototype loaded 92.4M rows across 4 tiers ✓</a:t>
             </a:r>
           </a:p>
         </p:txBody>
@@ -9966,7 +9966,7 @@
                 </a:solidFill>
                 <a:latin typeface="Open Sans"/>
               </a:rPr>
-              <a:t>Top-10 states = 288,065 customers (~70% of base, pending base-size confirmation).</a:t>
+              <a:t>Top 10 customer states cover ~65% of the SmartCredit base (288,065 of 443,206).</a:t>
             </a:r>
           </a:p>
         </p:txBody>

--- a/myReclaim-Exec-Deck.pptx
+++ b/myReclaim-Exec-Deck.pptx
@@ -7699,7 +7699,7 @@
                 </a:solidFill>
                 <a:latin typeface="Open Sans"/>
               </a:rPr>
-              <a:t>Permissioned claimant-rep path (FL atty/CPA/PI, Ch. 717). Bulk ingest/caching only after written DFS approval; portal manual by default.</a:t>
+              <a:t>Atty/CPA/PI rep path (Ch. 717). Bulk caching needs written DFS approval; portal manual by default.</a:t>
             </a:r>
           </a:p>
         </p:txBody>
@@ -7988,17 +7988,124 @@
       </p:sp>
       <p:sp>
         <p:nvSpPr>
-          <p:cNvPr id="29" name="Rectangle 28"/>
+          <p:cNvPr id="29" name="TextBox 28"/>
+          <p:cNvSpPr txBox="1"/>
+          <p:nvPr/>
+        </p:nvSpPr>
+        <p:spPr>
+          <a:xfrm>
+            <a:off x="548640" y="3493008"/>
+            <a:ext cx="457200" cy="201168"/>
+          </a:xfrm>
+          <a:prstGeom prst="rect">
+            <a:avLst/>
+          </a:prstGeom>
+          <a:noFill/>
+        </p:spPr>
+        <p:txBody>
+          <a:bodyPr wrap="square" anchor="t" lIns="0" rIns="0" tIns="0" bIns="0">
+            <a:spAutoFit/>
+          </a:bodyPr>
+          <a:lstStyle/>
+          <a:p>
+            <a:pPr algn="l"/>
+            <a:r>
+              <a:rPr sz="1100" b="1">
+                <a:solidFill>
+                  <a:srgbClr val="64748B"/>
+                </a:solidFill>
+                <a:latin typeface="Open Sans"/>
+              </a:rPr>
+              <a:t>3</a:t>
+            </a:r>
+          </a:p>
+        </p:txBody>
+      </p:sp>
+      <p:sp>
+        <p:nvSpPr>
+          <p:cNvPr id="30" name="TextBox 29"/>
+          <p:cNvSpPr txBox="1"/>
+          <p:nvPr/>
+        </p:nvSpPr>
+        <p:spPr>
+          <a:xfrm>
+            <a:off x="1051560" y="3474720"/>
+            <a:ext cx="822960" cy="219456"/>
+          </a:xfrm>
+          <a:prstGeom prst="rect">
+            <a:avLst/>
+          </a:prstGeom>
+          <a:noFill/>
+        </p:spPr>
+        <p:txBody>
+          <a:bodyPr wrap="square" anchor="t" lIns="0" rIns="0" tIns="0" bIns="0">
+            <a:spAutoFit/>
+          </a:bodyPr>
+          <a:lstStyle/>
+          <a:p>
+            <a:pPr algn="l"/>
+            <a:r>
+              <a:rPr sz="1400" b="1">
+                <a:solidFill>
+                  <a:srgbClr val="0F172A"/>
+                </a:solidFill>
+                <a:latin typeface="Open Sans"/>
+              </a:rPr>
+              <a:t>CA</a:t>
+            </a:r>
+          </a:p>
+        </p:txBody>
+      </p:sp>
+      <p:sp>
+        <p:nvSpPr>
+          <p:cNvPr id="31" name="TextBox 30"/>
+          <p:cNvSpPr txBox="1"/>
+          <p:nvPr/>
+        </p:nvSpPr>
+        <p:spPr>
+          <a:xfrm>
+            <a:off x="1920240" y="3483863"/>
+            <a:ext cx="1463040" cy="201168"/>
+          </a:xfrm>
+          <a:prstGeom prst="rect">
+            <a:avLst/>
+          </a:prstGeom>
+          <a:noFill/>
+        </p:spPr>
+        <p:txBody>
+          <a:bodyPr wrap="square" anchor="t" lIns="0" rIns="0" tIns="0" bIns="0">
+            <a:spAutoFit/>
+          </a:bodyPr>
+          <a:lstStyle/>
+          <a:p>
+            <a:pPr algn="l"/>
+            <a:r>
+              <a:rPr sz="1200" b="1">
+                <a:solidFill>
+                  <a:srgbClr val="0F172A"/>
+                </a:solidFill>
+                <a:latin typeface="Open Sans"/>
+              </a:rPr>
+              <a:t>44,222</a:t>
+            </a:r>
+          </a:p>
+        </p:txBody>
+      </p:sp>
+      <p:sp>
+        <p:nvSpPr>
+          <p:cNvPr id="32" name="Rounded Rectangle 31"/>
           <p:cNvSpPr/>
           <p:nvPr/>
         </p:nvSpPr>
         <p:spPr>
           <a:xfrm>
-            <a:off x="457200" y="3419856"/>
-            <a:ext cx="109728" cy="329184"/>
-          </a:xfrm>
-          <a:prstGeom prst="rect">
-            <a:avLst/>
+            <a:off x="3520440" y="3474720"/>
+            <a:ext cx="960120" cy="219456"/>
+          </a:xfrm>
+          <a:prstGeom prst="roundRect">
+            <a:avLst>
+              <a:gd name="adj" fmla="val 50000"/>
+            </a:avLst>
           </a:prstGeom>
           <a:solidFill>
             <a:srgbClr val="059669"/>
@@ -8006,7 +8113,6 @@
           <a:ln>
             <a:noFill/>
           </a:ln>
-          <a:effectLst/>
         </p:spPr>
         <p:style>
           <a:lnRef idx="1">
@@ -8023,160 +8129,10 @@
           </a:fontRef>
         </p:style>
         <p:txBody>
-          <a:bodyPr rtlCol="0" anchor="ctr"/>
+          <a:bodyPr rtlCol="0" anchor="ctr" lIns="45720" rIns="45720" tIns="18288" bIns="18288"/>
           <a:lstStyle/>
           <a:p>
             <a:pPr algn="ctr"/>
-          </a:p>
-        </p:txBody>
-      </p:sp>
-      <p:sp>
-        <p:nvSpPr>
-          <p:cNvPr id="30" name="TextBox 29"/>
-          <p:cNvSpPr txBox="1"/>
-          <p:nvPr/>
-        </p:nvSpPr>
-        <p:spPr>
-          <a:xfrm>
-            <a:off x="548640" y="3493008"/>
-            <a:ext cx="457200" cy="201168"/>
-          </a:xfrm>
-          <a:prstGeom prst="rect">
-            <a:avLst/>
-          </a:prstGeom>
-          <a:noFill/>
-        </p:spPr>
-        <p:txBody>
-          <a:bodyPr wrap="square" anchor="t" lIns="0" rIns="0" tIns="0" bIns="0">
-            <a:spAutoFit/>
-          </a:bodyPr>
-          <a:lstStyle/>
-          <a:p>
-            <a:pPr algn="l"/>
-            <a:r>
-              <a:rPr sz="1100" b="1">
-                <a:solidFill>
-                  <a:srgbClr val="64748B"/>
-                </a:solidFill>
-                <a:latin typeface="Open Sans"/>
-              </a:rPr>
-              <a:t>3</a:t>
-            </a:r>
-          </a:p>
-        </p:txBody>
-      </p:sp>
-      <p:sp>
-        <p:nvSpPr>
-          <p:cNvPr id="31" name="TextBox 30"/>
-          <p:cNvSpPr txBox="1"/>
-          <p:nvPr/>
-        </p:nvSpPr>
-        <p:spPr>
-          <a:xfrm>
-            <a:off x="1051560" y="3474720"/>
-            <a:ext cx="822960" cy="219456"/>
-          </a:xfrm>
-          <a:prstGeom prst="rect">
-            <a:avLst/>
-          </a:prstGeom>
-          <a:noFill/>
-        </p:spPr>
-        <p:txBody>
-          <a:bodyPr wrap="square" anchor="t" lIns="0" rIns="0" tIns="0" bIns="0">
-            <a:spAutoFit/>
-          </a:bodyPr>
-          <a:lstStyle/>
-          <a:p>
-            <a:pPr algn="l"/>
-            <a:r>
-              <a:rPr sz="1400" b="1">
-                <a:solidFill>
-                  <a:srgbClr val="0F172A"/>
-                </a:solidFill>
-                <a:latin typeface="Open Sans"/>
-              </a:rPr>
-              <a:t>CA</a:t>
-            </a:r>
-          </a:p>
-        </p:txBody>
-      </p:sp>
-      <p:sp>
-        <p:nvSpPr>
-          <p:cNvPr id="32" name="TextBox 31"/>
-          <p:cNvSpPr txBox="1"/>
-          <p:nvPr/>
-        </p:nvSpPr>
-        <p:spPr>
-          <a:xfrm>
-            <a:off x="1920240" y="3483863"/>
-            <a:ext cx="1463040" cy="201168"/>
-          </a:xfrm>
-          <a:prstGeom prst="rect">
-            <a:avLst/>
-          </a:prstGeom>
-          <a:noFill/>
-        </p:spPr>
-        <p:txBody>
-          <a:bodyPr wrap="square" anchor="t" lIns="0" rIns="0" tIns="0" bIns="0">
-            <a:spAutoFit/>
-          </a:bodyPr>
-          <a:lstStyle/>
-          <a:p>
-            <a:pPr algn="l"/>
-            <a:r>
-              <a:rPr sz="1200" b="1">
-                <a:solidFill>
-                  <a:srgbClr val="0F172A"/>
-                </a:solidFill>
-                <a:latin typeface="Open Sans"/>
-              </a:rPr>
-              <a:t>44,222</a:t>
-            </a:r>
-          </a:p>
-        </p:txBody>
-      </p:sp>
-      <p:sp>
-        <p:nvSpPr>
-          <p:cNvPr id="33" name="Rounded Rectangle 32"/>
-          <p:cNvSpPr/>
-          <p:nvPr/>
-        </p:nvSpPr>
-        <p:spPr>
-          <a:xfrm>
-            <a:off x="3520440" y="3474720"/>
-            <a:ext cx="960120" cy="219456"/>
-          </a:xfrm>
-          <a:prstGeom prst="roundRect">
-            <a:avLst>
-              <a:gd name="adj" fmla="val 50000"/>
-            </a:avLst>
-          </a:prstGeom>
-          <a:solidFill>
-            <a:srgbClr val="059669"/>
-          </a:solidFill>
-          <a:ln>
-            <a:noFill/>
-          </a:ln>
-        </p:spPr>
-        <p:style>
-          <a:lnRef idx="1">
-            <a:schemeClr val="accent1"/>
-          </a:lnRef>
-          <a:fillRef idx="3">
-            <a:schemeClr val="accent1"/>
-          </a:fillRef>
-          <a:effectRef idx="2">
-            <a:schemeClr val="accent1"/>
-          </a:effectRef>
-          <a:fontRef idx="minor">
-            <a:schemeClr val="lt1"/>
-          </a:fontRef>
-        </p:style>
-        <p:txBody>
-          <a:bodyPr rtlCol="0" anchor="ctr" lIns="45720" rIns="45720" tIns="18288" bIns="18288"/>
-          <a:lstStyle/>
-          <a:p>
-            <a:pPr algn="ctr"/>
             <a:r>
               <a:rPr sz="800" b="1">
                 <a:solidFill>
@@ -8191,7 +8147,7 @@
       </p:sp>
       <p:sp>
         <p:nvSpPr>
-          <p:cNvPr id="34" name="TextBox 33"/>
+          <p:cNvPr id="33" name="TextBox 32"/>
           <p:cNvSpPr txBox="1"/>
           <p:nvPr/>
         </p:nvSpPr>
@@ -8226,7 +8182,7 @@
       </p:sp>
       <p:sp>
         <p:nvSpPr>
-          <p:cNvPr id="35" name="Rectangle 34"/>
+          <p:cNvPr id="34" name="Rectangle 33"/>
           <p:cNvSpPr/>
           <p:nvPr/>
         </p:nvSpPr>
@@ -8270,7 +8226,7 @@
       </p:sp>
       <p:sp>
         <p:nvSpPr>
-          <p:cNvPr id="36" name="TextBox 35"/>
+          <p:cNvPr id="35" name="TextBox 34"/>
           <p:cNvSpPr txBox="1"/>
           <p:nvPr/>
         </p:nvSpPr>
@@ -8305,7 +8261,7 @@
       </p:sp>
       <p:sp>
         <p:nvSpPr>
-          <p:cNvPr id="37" name="TextBox 36"/>
+          <p:cNvPr id="36" name="TextBox 35"/>
           <p:cNvSpPr txBox="1"/>
           <p:nvPr/>
         </p:nvSpPr>
@@ -8340,7 +8296,7 @@
       </p:sp>
       <p:sp>
         <p:nvSpPr>
-          <p:cNvPr id="38" name="TextBox 37"/>
+          <p:cNvPr id="37" name="TextBox 36"/>
           <p:cNvSpPr txBox="1"/>
           <p:nvPr/>
         </p:nvSpPr>
@@ -8375,7 +8331,7 @@
       </p:sp>
       <p:sp>
         <p:nvSpPr>
-          <p:cNvPr id="39" name="Rounded Rectangle 38"/>
+          <p:cNvPr id="38" name="Rounded Rectangle 37"/>
           <p:cNvSpPr/>
           <p:nvPr/>
         </p:nvSpPr>
@@ -8429,7 +8385,7 @@
       </p:sp>
       <p:sp>
         <p:nvSpPr>
-          <p:cNvPr id="40" name="TextBox 39"/>
+          <p:cNvPr id="39" name="TextBox 38"/>
           <p:cNvSpPr txBox="1"/>
           <p:nvPr/>
         </p:nvSpPr>
@@ -8464,7 +8420,7 @@
       </p:sp>
       <p:sp>
         <p:nvSpPr>
-          <p:cNvPr id="41" name="Rectangle 40"/>
+          <p:cNvPr id="40" name="Rectangle 39"/>
           <p:cNvSpPr/>
           <p:nvPr/>
         </p:nvSpPr>
@@ -8508,7 +8464,7 @@
       </p:sp>
       <p:sp>
         <p:nvSpPr>
-          <p:cNvPr id="42" name="TextBox 41"/>
+          <p:cNvPr id="41" name="TextBox 40"/>
           <p:cNvSpPr txBox="1"/>
           <p:nvPr/>
         </p:nvSpPr>
@@ -8543,7 +8499,7 @@
       </p:sp>
       <p:sp>
         <p:nvSpPr>
-          <p:cNvPr id="43" name="TextBox 42"/>
+          <p:cNvPr id="42" name="TextBox 41"/>
           <p:cNvSpPr txBox="1"/>
           <p:nvPr/>
         </p:nvSpPr>
@@ -8578,7 +8534,7 @@
       </p:sp>
       <p:sp>
         <p:nvSpPr>
-          <p:cNvPr id="44" name="TextBox 43"/>
+          <p:cNvPr id="43" name="TextBox 42"/>
           <p:cNvSpPr txBox="1"/>
           <p:nvPr/>
         </p:nvSpPr>
@@ -8613,7 +8569,7 @@
       </p:sp>
       <p:sp>
         <p:nvSpPr>
-          <p:cNvPr id="45" name="Rounded Rectangle 44"/>
+          <p:cNvPr id="44" name="Rounded Rectangle 43"/>
           <p:cNvSpPr/>
           <p:nvPr/>
         </p:nvSpPr>
@@ -8667,7 +8623,7 @@
       </p:sp>
       <p:sp>
         <p:nvSpPr>
-          <p:cNvPr id="46" name="TextBox 45"/>
+          <p:cNvPr id="45" name="TextBox 44"/>
           <p:cNvSpPr txBox="1"/>
           <p:nvPr/>
         </p:nvSpPr>
@@ -8702,7 +8658,7 @@
       </p:sp>
       <p:sp>
         <p:nvSpPr>
-          <p:cNvPr id="47" name="Rectangle 46"/>
+          <p:cNvPr id="46" name="Rectangle 45"/>
           <p:cNvSpPr/>
           <p:nvPr/>
         </p:nvSpPr>
@@ -8746,7 +8702,7 @@
       </p:sp>
       <p:sp>
         <p:nvSpPr>
-          <p:cNvPr id="48" name="TextBox 47"/>
+          <p:cNvPr id="47" name="TextBox 46"/>
           <p:cNvSpPr txBox="1"/>
           <p:nvPr/>
         </p:nvSpPr>
@@ -8781,7 +8737,7 @@
       </p:sp>
       <p:sp>
         <p:nvSpPr>
-          <p:cNvPr id="49" name="TextBox 48"/>
+          <p:cNvPr id="48" name="TextBox 47"/>
           <p:cNvSpPr txBox="1"/>
           <p:nvPr/>
         </p:nvSpPr>
@@ -8816,7 +8772,7 @@
       </p:sp>
       <p:sp>
         <p:nvSpPr>
-          <p:cNvPr id="50" name="TextBox 49"/>
+          <p:cNvPr id="49" name="TextBox 48"/>
           <p:cNvSpPr txBox="1"/>
           <p:nvPr/>
         </p:nvSpPr>
@@ -8851,7 +8807,7 @@
       </p:sp>
       <p:sp>
         <p:nvSpPr>
-          <p:cNvPr id="51" name="Rounded Rectangle 50"/>
+          <p:cNvPr id="50" name="Rounded Rectangle 49"/>
           <p:cNvSpPr/>
           <p:nvPr/>
         </p:nvSpPr>
@@ -8905,7 +8861,7 @@
       </p:sp>
       <p:sp>
         <p:nvSpPr>
-          <p:cNvPr id="52" name="TextBox 51"/>
+          <p:cNvPr id="51" name="TextBox 50"/>
           <p:cNvSpPr txBox="1"/>
           <p:nvPr/>
         </p:nvSpPr>
@@ -8940,7 +8896,7 @@
       </p:sp>
       <p:sp>
         <p:nvSpPr>
-          <p:cNvPr id="53" name="Rectangle 52"/>
+          <p:cNvPr id="52" name="Rectangle 51"/>
           <p:cNvSpPr/>
           <p:nvPr/>
         </p:nvSpPr>
@@ -8984,7 +8940,7 @@
       </p:sp>
       <p:sp>
         <p:nvSpPr>
-          <p:cNvPr id="54" name="TextBox 53"/>
+          <p:cNvPr id="53" name="TextBox 52"/>
           <p:cNvSpPr txBox="1"/>
           <p:nvPr/>
         </p:nvSpPr>
@@ -9019,7 +8975,7 @@
       </p:sp>
       <p:sp>
         <p:nvSpPr>
-          <p:cNvPr id="55" name="TextBox 54"/>
+          <p:cNvPr id="54" name="TextBox 53"/>
           <p:cNvSpPr txBox="1"/>
           <p:nvPr/>
         </p:nvSpPr>
@@ -9054,7 +9010,7 @@
       </p:sp>
       <p:sp>
         <p:nvSpPr>
-          <p:cNvPr id="56" name="TextBox 55"/>
+          <p:cNvPr id="55" name="TextBox 54"/>
           <p:cNvSpPr txBox="1"/>
           <p:nvPr/>
         </p:nvSpPr>
@@ -9089,7 +9045,7 @@
       </p:sp>
       <p:sp>
         <p:nvSpPr>
-          <p:cNvPr id="57" name="Rounded Rectangle 56"/>
+          <p:cNvPr id="56" name="Rounded Rectangle 55"/>
           <p:cNvSpPr/>
           <p:nvPr/>
         </p:nvSpPr>
@@ -9143,7 +9099,7 @@
       </p:sp>
       <p:sp>
         <p:nvSpPr>
-          <p:cNvPr id="58" name="TextBox 57"/>
+          <p:cNvPr id="57" name="TextBox 56"/>
           <p:cNvSpPr txBox="1"/>
           <p:nvPr/>
         </p:nvSpPr>
@@ -9178,7 +9134,7 @@
       </p:sp>
       <p:sp>
         <p:nvSpPr>
-          <p:cNvPr id="59" name="Rectangle 58"/>
+          <p:cNvPr id="58" name="Rectangle 57"/>
           <p:cNvSpPr/>
           <p:nvPr/>
         </p:nvSpPr>
@@ -9222,7 +9178,7 @@
       </p:sp>
       <p:sp>
         <p:nvSpPr>
-          <p:cNvPr id="60" name="TextBox 59"/>
+          <p:cNvPr id="59" name="TextBox 58"/>
           <p:cNvSpPr txBox="1"/>
           <p:nvPr/>
         </p:nvSpPr>
@@ -9257,7 +9213,7 @@
       </p:sp>
       <p:sp>
         <p:nvSpPr>
-          <p:cNvPr id="61" name="TextBox 60"/>
+          <p:cNvPr id="60" name="TextBox 59"/>
           <p:cNvSpPr txBox="1"/>
           <p:nvPr/>
         </p:nvSpPr>
@@ -9292,7 +9248,7 @@
       </p:sp>
       <p:sp>
         <p:nvSpPr>
-          <p:cNvPr id="62" name="TextBox 61"/>
+          <p:cNvPr id="61" name="TextBox 60"/>
           <p:cNvSpPr txBox="1"/>
           <p:nvPr/>
         </p:nvSpPr>
@@ -9327,7 +9283,7 @@
       </p:sp>
       <p:sp>
         <p:nvSpPr>
-          <p:cNvPr id="63" name="Rounded Rectangle 62"/>
+          <p:cNvPr id="62" name="Rounded Rectangle 61"/>
           <p:cNvSpPr/>
           <p:nvPr/>
         </p:nvSpPr>
@@ -9381,7 +9337,7 @@
       </p:sp>
       <p:sp>
         <p:nvSpPr>
-          <p:cNvPr id="64" name="TextBox 63"/>
+          <p:cNvPr id="63" name="TextBox 62"/>
           <p:cNvSpPr txBox="1"/>
           <p:nvPr/>
         </p:nvSpPr>
@@ -9416,7 +9372,7 @@
       </p:sp>
       <p:sp>
         <p:nvSpPr>
-          <p:cNvPr id="65" name="Rectangle 64"/>
+          <p:cNvPr id="64" name="Rectangle 63"/>
           <p:cNvSpPr/>
           <p:nvPr/>
         </p:nvSpPr>
@@ -9460,7 +9416,7 @@
       </p:sp>
       <p:sp>
         <p:nvSpPr>
-          <p:cNvPr id="66" name="TextBox 65"/>
+          <p:cNvPr id="65" name="TextBox 64"/>
           <p:cNvSpPr txBox="1"/>
           <p:nvPr/>
         </p:nvSpPr>
@@ -9495,7 +9451,7 @@
       </p:sp>
       <p:sp>
         <p:nvSpPr>
-          <p:cNvPr id="67" name="TextBox 66"/>
+          <p:cNvPr id="66" name="TextBox 65"/>
           <p:cNvSpPr txBox="1"/>
           <p:nvPr/>
         </p:nvSpPr>
@@ -9530,7 +9486,7 @@
       </p:sp>
       <p:sp>
         <p:nvSpPr>
-          <p:cNvPr id="68" name="TextBox 67"/>
+          <p:cNvPr id="67" name="TextBox 66"/>
           <p:cNvSpPr txBox="1"/>
           <p:nvPr/>
         </p:nvSpPr>
@@ -9565,7 +9521,7 @@
       </p:sp>
       <p:sp>
         <p:nvSpPr>
-          <p:cNvPr id="69" name="Rounded Rectangle 68"/>
+          <p:cNvPr id="68" name="Rounded Rectangle 67"/>
           <p:cNvSpPr/>
           <p:nvPr/>
         </p:nvSpPr>
@@ -9619,7 +9575,7 @@
       </p:sp>
       <p:sp>
         <p:nvSpPr>
-          <p:cNvPr id="70" name="TextBox 69"/>
+          <p:cNvPr id="69" name="TextBox 68"/>
           <p:cNvSpPr txBox="1"/>
           <p:nvPr/>
         </p:nvSpPr>
@@ -9654,7 +9610,7 @@
       </p:sp>
       <p:sp>
         <p:nvSpPr>
-          <p:cNvPr id="71" name="Rectangle 70"/>
+          <p:cNvPr id="70" name="Rectangle 69"/>
           <p:cNvSpPr/>
           <p:nvPr/>
         </p:nvSpPr>
@@ -9698,7 +9654,7 @@
       </p:sp>
       <p:sp>
         <p:nvSpPr>
-          <p:cNvPr id="72" name="TextBox 71"/>
+          <p:cNvPr id="71" name="TextBox 70"/>
           <p:cNvSpPr txBox="1"/>
           <p:nvPr/>
         </p:nvSpPr>
@@ -9733,7 +9689,7 @@
       </p:sp>
       <p:sp>
         <p:nvSpPr>
-          <p:cNvPr id="73" name="TextBox 72"/>
+          <p:cNvPr id="72" name="TextBox 71"/>
           <p:cNvSpPr txBox="1"/>
           <p:nvPr/>
         </p:nvSpPr>
@@ -9768,7 +9724,7 @@
       </p:sp>
       <p:sp>
         <p:nvSpPr>
-          <p:cNvPr id="74" name="TextBox 73"/>
+          <p:cNvPr id="73" name="TextBox 72"/>
           <p:cNvSpPr txBox="1"/>
           <p:nvPr/>
         </p:nvSpPr>
@@ -9803,7 +9759,7 @@
       </p:sp>
       <p:sp>
         <p:nvSpPr>
-          <p:cNvPr id="75" name="Rounded Rectangle 74"/>
+          <p:cNvPr id="74" name="Rounded Rectangle 73"/>
           <p:cNvSpPr/>
           <p:nvPr/>
         </p:nvSpPr>
@@ -9857,7 +9813,7 @@
       </p:sp>
       <p:sp>
         <p:nvSpPr>
-          <p:cNvPr id="76" name="TextBox 75"/>
+          <p:cNvPr id="75" name="TextBox 74"/>
           <p:cNvSpPr txBox="1"/>
           <p:nvPr/>
         </p:nvSpPr>
@@ -9892,7 +9848,7 @@
       </p:sp>
       <p:sp>
         <p:nvSpPr>
-          <p:cNvPr id="77" name="Rounded Rectangle 76"/>
+          <p:cNvPr id="76" name="Rounded Rectangle 75"/>
           <p:cNvSpPr/>
           <p:nvPr/>
         </p:nvSpPr>
@@ -9938,48 +9894,48 @@
       </p:sp>
       <p:sp>
         <p:nvSpPr>
+          <p:cNvPr id="77" name="TextBox 76"/>
+          <p:cNvSpPr txBox="1"/>
+          <p:nvPr/>
+        </p:nvSpPr>
+        <p:spPr>
+          <a:xfrm>
+            <a:off x="640080" y="6126480"/>
+            <a:ext cx="10972800" cy="256032"/>
+          </a:xfrm>
+          <a:prstGeom prst="rect">
+            <a:avLst/>
+          </a:prstGeom>
+          <a:noFill/>
+        </p:spPr>
+        <p:txBody>
+          <a:bodyPr wrap="square" anchor="t" lIns="0" rIns="0" tIns="0" bIns="0">
+            <a:spAutoFit/>
+          </a:bodyPr>
+          <a:lstStyle/>
+          <a:p>
+            <a:pPr algn="l"/>
+            <a:r>
+              <a:rPr sz="1200" b="1">
+                <a:solidFill>
+                  <a:srgbClr val="FFFFFF"/>
+                </a:solidFill>
+                <a:latin typeface="Open Sans"/>
+              </a:rPr>
+              <a:t>Top 10 customer states cover ~65% of the SmartCredit base (288,065 of 443,206).</a:t>
+            </a:r>
+          </a:p>
+        </p:txBody>
+      </p:sp>
+      <p:sp>
+        <p:nvSpPr>
           <p:cNvPr id="78" name="TextBox 77"/>
           <p:cNvSpPr txBox="1"/>
           <p:nvPr/>
         </p:nvSpPr>
         <p:spPr>
           <a:xfrm>
-            <a:off x="640080" y="6144768"/>
-            <a:ext cx="10972800" cy="292608"/>
-          </a:xfrm>
-          <a:prstGeom prst="rect">
-            <a:avLst/>
-          </a:prstGeom>
-          <a:noFill/>
-        </p:spPr>
-        <p:txBody>
-          <a:bodyPr wrap="square" anchor="t" lIns="0" rIns="0" tIns="0" bIns="0">
-            <a:spAutoFit/>
-          </a:bodyPr>
-          <a:lstStyle/>
-          <a:p>
-            <a:pPr algn="l"/>
-            <a:r>
-              <a:rPr sz="1200" b="1">
-                <a:solidFill>
-                  <a:srgbClr val="FFFFFF"/>
-                </a:solidFill>
-                <a:latin typeface="Open Sans"/>
-              </a:rPr>
-              <a:t>Top 10 customer states cover ~65% of the SmartCredit base (288,065 of 443,206).</a:t>
-            </a:r>
-          </a:p>
-        </p:txBody>
-      </p:sp>
-      <p:sp>
-        <p:nvSpPr>
-          <p:cNvPr id="79" name="TextBox 78"/>
-          <p:cNvSpPr txBox="1"/>
-          <p:nvPr/>
-        </p:nvSpPr>
-        <p:spPr>
-          <a:xfrm>
-            <a:off x="640080" y="6400800"/>
+            <a:off x="640080" y="6355080"/>
             <a:ext cx="10972800" cy="201168"/>
           </a:xfrm>
           <a:prstGeom prst="rect">
@@ -10001,7 +9957,7 @@
                 </a:solidFill>
                 <a:latin typeface="Open Sans"/>
               </a:rPr>
-              <a:t>CA is the only top-10 state with a confirmed public bulk feed. Sprint 2 begins TX + NY data requests and GA CDR registration; bulk availability depends on state approval, terms, and legal sign-off.</a:t>
+              <a:t>CA is the only top-10 state with a confirmed public bulk feed; Sprint 2 opens TX, NY, and GA pending state approval.</a:t>
             </a:r>
           </a:p>
         </p:txBody>

--- a/myReclaim-Exec-Deck.pptx
+++ b/myReclaim-Exec-Deck.pptx
@@ -7242,7 +7242,7 @@
                 </a:solidFill>
                 <a:latin typeface="Open Sans"/>
               </a:rPr>
-              <a:t>Top 10 customer states cover ~65% of the SmartCredit base (288,065 of 443,206). Four of the top five (FL, TX, GA, NY) need a state agreement before we can ingest at scale. CA is the only top-10 state with a clean public bulk feed — that's where the prototype starts.</a:t>
+              <a:t>Top 10 customer states cover ~68% of SmartCredit net actives (201,829 of 297,096). Four of the top five (FL, TX, GA, NY) need a state agreement before we can ingest at scale. CA is the only top-10 state with a clean public bulk feed — that's where the prototype starts.</a:t>
             </a:r>
           </a:p>
         </p:txBody>
@@ -7610,7 +7610,7 @@
                 </a:solidFill>
                 <a:latin typeface="Open Sans"/>
               </a:rPr>
-              <a:t>65,400</a:t>
+              <a:t>48,436</a:t>
             </a:r>
           </a:p>
         </p:txBody>
@@ -7848,7 +7848,7 @@
                 </a:solidFill>
                 <a:latin typeface="Open Sans"/>
               </a:rPr>
-              <a:t>61,414</a:t>
+              <a:t>45,670</a:t>
             </a:r>
           </a:p>
         </p:txBody>
@@ -8086,7 +8086,7 @@
                 </a:solidFill>
                 <a:latin typeface="Open Sans"/>
               </a:rPr>
-              <a:t>44,222</a:t>
+              <a:t>31,110</a:t>
             </a:r>
           </a:p>
         </p:txBody>
@@ -8324,7 +8324,7 @@
                 </a:solidFill>
                 <a:latin typeface="Open Sans"/>
               </a:rPr>
-              <a:t>29,566</a:t>
+              <a:t>18,837</a:t>
             </a:r>
           </a:p>
         </p:txBody>
@@ -8562,7 +8562,7 @@
                 </a:solidFill>
                 <a:latin typeface="Open Sans"/>
               </a:rPr>
-              <a:t>22,137</a:t>
+              <a:t>15,001</a:t>
             </a:r>
           </a:p>
         </p:txBody>
@@ -8800,7 +8800,7 @@
                 </a:solidFill>
                 <a:latin typeface="Open Sans"/>
               </a:rPr>
-              <a:t>16,242</a:t>
+              <a:t>10,536</a:t>
             </a:r>
           </a:p>
         </p:txBody>
@@ -9038,7 +9038,7 @@
                 </a:solidFill>
                 <a:latin typeface="Open Sans"/>
               </a:rPr>
-              <a:t>14,404</a:t>
+              <a:t>9,549</a:t>
             </a:r>
           </a:p>
         </p:txBody>
@@ -9241,7 +9241,7 @@
                 </a:solidFill>
                 <a:latin typeface="Open Sans"/>
               </a:rPr>
-              <a:t>PA</a:t>
+              <a:t>NJ</a:t>
             </a:r>
           </a:p>
         </p:txBody>
@@ -9276,7 +9276,7 @@
                 </a:solidFill>
                 <a:latin typeface="Open Sans"/>
               </a:rPr>
-              <a:t>12,290</a:t>
+              <a:t>8,526</a:t>
             </a:r>
           </a:p>
         </p:txBody>
@@ -9479,7 +9479,7 @@
                 </a:solidFill>
                 <a:latin typeface="Open Sans"/>
               </a:rPr>
-              <a:t>NJ</a:t>
+              <a:t>PA</a:t>
             </a:r>
           </a:p>
         </p:txBody>
@@ -9514,7 +9514,7 @@
                 </a:solidFill>
                 <a:latin typeface="Open Sans"/>
               </a:rPr>
-              <a:t>11,856</a:t>
+              <a:t>8,172</a:t>
             </a:r>
           </a:p>
         </p:txBody>
@@ -9752,7 +9752,7 @@
                 </a:solidFill>
                 <a:latin typeface="Open Sans"/>
               </a:rPr>
-              <a:t>10,534</a:t>
+              <a:t>5,992</a:t>
             </a:r>
           </a:p>
         </p:txBody>
@@ -9922,7 +9922,7 @@
                 </a:solidFill>
                 <a:latin typeface="Open Sans"/>
               </a:rPr>
-              <a:t>Top 10 customer states cover ~65% of the SmartCredit base (288,065 of 443,206).</a:t>
+              <a:t>Top 10 customer states cover ~68% of SmartCredit net actives (201,829 of 297,096).</a:t>
             </a:r>
           </a:p>
         </p:txBody>

--- a/myReclaim-Exec-Deck.pptx
+++ b/myReclaim-Exec-Deck.pptx
@@ -12358,7 +12358,7 @@
                 </a:solidFill>
                 <a:latin typeface="Open Sans"/>
               </a:rPr>
-              <a:t>We matched 30,931 active CA customers against all four CA unclaimed tiers (92.4M records).</a:t>
+              <a:t>We matched 31,110 net actives CA · SmartCredit against all four CA unclaimed tiers (92.4M records).</a:t>
             </a:r>
           </a:p>
         </p:txBody>
@@ -12393,7 +12393,7 @@
                 </a:solidFill>
                 <a:latin typeface="Open Sans"/>
               </a:rPr>
-              <a:t>Cohort: active SmartCredit customers (customerproductid=4, non-test) — 30,931 of the 44,222 total CA base. Customer-level counts via CUSTOMERTOKEN. Method: exact LAST FIRST match (CA's storage convention). State determines actual eligibility per record.</a:t>
+              <a:t>Matching on name only.</a:t>
             </a:r>
           </a:p>
         </p:txBody>
@@ -12682,7 +12682,7 @@
                 </a:solidFill>
                 <a:latin typeface="Open Sans"/>
               </a:rPr>
-              <a:t>74.9%</a:t>
+              <a:t>74.5%</a:t>
             </a:r>
           </a:p>
         </p:txBody>
@@ -12717,7 +12717,7 @@
                 </a:solidFill>
                 <a:latin typeface="Open Sans"/>
               </a:rPr>
-              <a:t>of the 30,931 active CA customers</a:t>
+              <a:t>of 31,110 net actives CA · SmartCredit</a:t>
             </a:r>
           </a:p>
         </p:txBody>
@@ -14276,7 +14276,7 @@
                 </a:solidFill>
                 <a:latin typeface="Open Sans"/>
               </a:rPr>
-              <a:t>Each customer placed in one bucket based on the SUM of their matched records. Customers add up to 21,864.</a:t>
+              <a:t>Each customer placed in one bucket based on the SUM of their matched records. Customers add up to 23,166.</a:t>
             </a:r>
           </a:p>
         </p:txBody>
@@ -15558,7 +15558,7 @@
                 </a:solidFill>
                 <a:latin typeface="Open Sans"/>
               </a:rPr>
-              <a:t>Adding city to the join key cuts common-name collisions — the conservative view of who really has property.</a:t>
+              <a:t>We matched 31,110 net actives CA · SmartCredit against all four CA unclaimed tiers (92.4M records).</a:t>
             </a:r>
           </a:p>
         </p:txBody>
@@ -15593,7 +15593,7 @@
                 </a:solidFill>
                 <a:latin typeface="Open Sans"/>
               </a:rPr>
-              <a:t>Same cohort (30,931 active CA customers, customertoken-aware). Match key now: LAST FIRST + last_known_city. Filters customers without a stored city; CA's last_known_city populated on 96% of records.</a:t>
+              <a:t>Matching on name and city.</a:t>
             </a:r>
           </a:p>
         </p:txBody>
@@ -15882,7 +15882,7 @@
                 </a:solidFill>
                 <a:latin typeface="Open Sans"/>
               </a:rPr>
-              <a:t>38.7%</a:t>
+              <a:t>38.4%</a:t>
             </a:r>
           </a:p>
         </p:txBody>
@@ -15917,7 +15917,7 @@
                 </a:solidFill>
                 <a:latin typeface="Open Sans"/>
               </a:rPr>
-              <a:t>of the 30,931 active CA customers</a:t>
+              <a:t>of 31,110 net actives CA · SmartCredit</a:t>
             </a:r>
           </a:p>
         </p:txBody>

--- a/myReclaim-Exec-Deck.pptx
+++ b/myReclaim-Exec-Deck.pptx
@@ -5853,7 +5853,7 @@
                 </a:solidFill>
                 <a:latin typeface="Open Sans"/>
               </a:rPr>
-              <a:t>THE OPPORTUNITY</a:t>
+              <a:t>WHAT IS UNCLAIMED PROPERTY?</a:t>
             </a:r>
           </a:p>
         </p:txBody>
@@ -5866,78 +5866,113 @@
         </p:nvSpPr>
         <p:spPr>
           <a:xfrm>
-            <a:off x="457200" y="1280160"/>
-            <a:ext cx="11430000" cy="2286000"/>
-          </a:xfrm>
-          <a:prstGeom prst="rect">
-            <a:avLst/>
-          </a:prstGeom>
-          <a:noFill/>
-        </p:spPr>
-        <p:txBody>
-          <a:bodyPr wrap="square" anchor="t" lIns="0" rIns="0" tIns="0" bIns="0">
-            <a:spAutoFit/>
-          </a:bodyPr>
-          <a:lstStyle/>
-          <a:p>
-            <a:pPr algn="l"/>
-            <a:r>
-              <a:rPr sz="16000" b="1">
+            <a:off x="457200" y="1188720"/>
+            <a:ext cx="11430000" cy="1097280"/>
+          </a:xfrm>
+          <a:prstGeom prst="rect">
+            <a:avLst/>
+          </a:prstGeom>
+          <a:noFill/>
+        </p:spPr>
+        <p:txBody>
+          <a:bodyPr wrap="square" anchor="t" lIns="0" rIns="0" tIns="0" bIns="0">
+            <a:spAutoFit/>
+          </a:bodyPr>
+          <a:lstStyle/>
+          <a:p>
+            <a:pPr algn="l"/>
+            <a:r>
+              <a:rPr sz="3400" b="1">
+                <a:solidFill>
+                  <a:srgbClr val="0F172A"/>
+                </a:solidFill>
+                <a:latin typeface="Open Sans"/>
+              </a:rPr>
+              <a:t>Money owed to you that the company holding it lost track of.</a:t>
+            </a:r>
+          </a:p>
+        </p:txBody>
+      </p:sp>
+      <p:sp>
+        <p:nvSpPr>
+          <p:cNvPr id="9" name="TextBox 8"/>
+          <p:cNvSpPr txBox="1"/>
+          <p:nvPr/>
+        </p:nvSpPr>
+        <p:spPr>
+          <a:xfrm>
+            <a:off x="457200" y="2377440"/>
+            <a:ext cx="11430000" cy="1005840"/>
+          </a:xfrm>
+          <a:prstGeom prst="rect">
+            <a:avLst/>
+          </a:prstGeom>
+          <a:noFill/>
+        </p:spPr>
+        <p:txBody>
+          <a:bodyPr wrap="square" anchor="t" lIns="0" rIns="0" tIns="0" bIns="0">
+            <a:spAutoFit/>
+          </a:bodyPr>
+          <a:lstStyle/>
+          <a:p>
+            <a:pPr algn="l"/>
+            <a:r>
+              <a:rPr sz="1500" b="0">
+                <a:solidFill>
+                  <a:srgbClr val="334155"/>
+                </a:solidFill>
+                <a:latin typeface="Open Sans"/>
+              </a:rPr>
+              <a:t>When a bank, employer, insurer, or utility can't reach the owner of an account or balance for a set period (typically 1–3 years), state law requires them to turn it over to the state. It sits there — in the owner's name — until someone claims it.</a:t>
+            </a:r>
+          </a:p>
+        </p:txBody>
+      </p:sp>
+      <p:sp>
+        <p:nvSpPr>
+          <p:cNvPr id="10" name="TextBox 9"/>
+          <p:cNvSpPr txBox="1"/>
+          <p:nvPr/>
+        </p:nvSpPr>
+        <p:spPr>
+          <a:xfrm>
+            <a:off x="457200" y="3657600"/>
+            <a:ext cx="11430000" cy="274320"/>
+          </a:xfrm>
+          <a:prstGeom prst="rect">
+            <a:avLst/>
+          </a:prstGeom>
+          <a:noFill/>
+        </p:spPr>
+        <p:txBody>
+          <a:bodyPr wrap="square" anchor="t" lIns="0" rIns="0" tIns="0" bIns="0">
+            <a:spAutoFit/>
+          </a:bodyPr>
+          <a:lstStyle/>
+          <a:p>
+            <a:pPr algn="l"/>
+            <a:r>
+              <a:rPr sz="1000" b="1">
                 <a:solidFill>
                   <a:srgbClr val="2863C5"/>
                 </a:solidFill>
                 <a:latin typeface="Open Sans"/>
               </a:rPr>
-              <a:t>$70B+</a:t>
-            </a:r>
-          </a:p>
-        </p:txBody>
-      </p:sp>
-      <p:sp>
-        <p:nvSpPr>
-          <p:cNvPr id="9" name="TextBox 8"/>
-          <p:cNvSpPr txBox="1"/>
-          <p:nvPr/>
-        </p:nvSpPr>
-        <p:spPr>
-          <a:xfrm>
-            <a:off x="457200" y="3657600"/>
-            <a:ext cx="11430000" cy="640080"/>
-          </a:xfrm>
-          <a:prstGeom prst="rect">
-            <a:avLst/>
-          </a:prstGeom>
-          <a:noFill/>
-        </p:spPr>
-        <p:txBody>
-          <a:bodyPr wrap="square" anchor="t" lIns="0" rIns="0" tIns="0" bIns="0">
-            <a:spAutoFit/>
-          </a:bodyPr>
-          <a:lstStyle/>
-          <a:p>
-            <a:pPr algn="l"/>
-            <a:r>
-              <a:rPr sz="2400" b="1">
-                <a:solidFill>
-                  <a:srgbClr val="0F172A"/>
-                </a:solidFill>
-                <a:latin typeface="Open Sans"/>
-              </a:rPr>
-              <a:t>estimated in unclaimed property nationwide. Some of it is reported in our members' names.</a:t>
-            </a:r>
-          </a:p>
-        </p:txBody>
-      </p:sp>
-      <p:sp>
-        <p:nvSpPr>
-          <p:cNvPr id="10" name="Rounded Rectangle 9"/>
+              <a:t>COMMON SOURCES</a:t>
+            </a:r>
+          </a:p>
+        </p:txBody>
+      </p:sp>
+      <p:sp>
+        <p:nvSpPr>
+          <p:cNvPr id="11" name="Rounded Rectangle 10"/>
           <p:cNvSpPr/>
           <p:nvPr/>
         </p:nvSpPr>
         <p:spPr>
           <a:xfrm>
-            <a:off x="457200" y="4846320"/>
-            <a:ext cx="3657600" cy="1280160"/>
+            <a:off x="457200" y="4023360"/>
+            <a:ext cx="2743200" cy="1143000"/>
           </a:xfrm>
           <a:prstGeom prst="roundRect">
             <a:avLst>
@@ -5978,84 +6013,128 @@
       </p:sp>
       <p:sp>
         <p:nvSpPr>
-          <p:cNvPr id="11" name="TextBox 10"/>
-          <p:cNvSpPr txBox="1"/>
-          <p:nvPr/>
-        </p:nvSpPr>
-        <p:spPr>
-          <a:xfrm>
-            <a:off x="731520" y="5010912"/>
-            <a:ext cx="3108960" cy="640080"/>
-          </a:xfrm>
-          <a:prstGeom prst="rect">
-            <a:avLst/>
-          </a:prstGeom>
-          <a:noFill/>
-        </p:spPr>
-        <p:txBody>
-          <a:bodyPr wrap="square" anchor="t" lIns="0" rIns="0" tIns="0" bIns="0">
-            <a:spAutoFit/>
-          </a:bodyPr>
-          <a:lstStyle/>
-          <a:p>
-            <a:pPr algn="l"/>
-            <a:r>
-              <a:rPr sz="3600" b="1">
-                <a:solidFill>
-                  <a:srgbClr val="FC4C0B"/>
-                </a:solidFill>
-                <a:latin typeface="Open Sans"/>
-              </a:rPr>
-              <a:t>~33M</a:t>
-            </a:r>
-          </a:p>
-        </p:txBody>
-      </p:sp>
-      <p:sp>
-        <p:nvSpPr>
-          <p:cNvPr id="12" name="TextBox 11"/>
-          <p:cNvSpPr txBox="1"/>
-          <p:nvPr/>
-        </p:nvSpPr>
-        <p:spPr>
-          <a:xfrm>
-            <a:off x="731520" y="5623559"/>
-            <a:ext cx="3108960" cy="457200"/>
-          </a:xfrm>
-          <a:prstGeom prst="rect">
-            <a:avLst/>
-          </a:prstGeom>
-          <a:noFill/>
-        </p:spPr>
-        <p:txBody>
-          <a:bodyPr wrap="square" anchor="t" lIns="0" rIns="0" tIns="0" bIns="0">
-            <a:spAutoFit/>
-          </a:bodyPr>
-          <a:lstStyle/>
-          <a:p>
-            <a:pPr algn="l"/>
-            <a:r>
-              <a:rPr sz="1200" b="0">
+          <p:cNvPr id="12" name="Rectangle 11"/>
+          <p:cNvSpPr/>
+          <p:nvPr/>
+        </p:nvSpPr>
+        <p:spPr>
+          <a:xfrm>
+            <a:off x="457200" y="4023360"/>
+            <a:ext cx="2743200" cy="73152"/>
+          </a:xfrm>
+          <a:prstGeom prst="rect">
+            <a:avLst/>
+          </a:prstGeom>
+          <a:solidFill>
+            <a:srgbClr val="2863C5"/>
+          </a:solidFill>
+          <a:ln>
+            <a:noFill/>
+          </a:ln>
+          <a:effectLst/>
+        </p:spPr>
+        <p:style>
+          <a:lnRef idx="1">
+            <a:schemeClr val="accent1"/>
+          </a:lnRef>
+          <a:fillRef idx="3">
+            <a:schemeClr val="accent1"/>
+          </a:fillRef>
+          <a:effectRef idx="2">
+            <a:schemeClr val="accent1"/>
+          </a:effectRef>
+          <a:fontRef idx="minor">
+            <a:schemeClr val="lt1"/>
+          </a:fontRef>
+        </p:style>
+        <p:txBody>
+          <a:bodyPr rtlCol="0" anchor="ctr"/>
+          <a:lstStyle/>
+          <a:p>
+            <a:pPr algn="ctr"/>
+          </a:p>
+        </p:txBody>
+      </p:sp>
+      <p:sp>
+        <p:nvSpPr>
+          <p:cNvPr id="13" name="TextBox 12"/>
+          <p:cNvSpPr txBox="1"/>
+          <p:nvPr/>
+        </p:nvSpPr>
+        <p:spPr>
+          <a:xfrm>
+            <a:off x="685800" y="4224528"/>
+            <a:ext cx="2286000" cy="320040"/>
+          </a:xfrm>
+          <a:prstGeom prst="rect">
+            <a:avLst/>
+          </a:prstGeom>
+          <a:noFill/>
+        </p:spPr>
+        <p:txBody>
+          <a:bodyPr wrap="square" anchor="t" lIns="0" rIns="0" tIns="0" bIns="0">
+            <a:spAutoFit/>
+          </a:bodyPr>
+          <a:lstStyle/>
+          <a:p>
+            <a:pPr algn="l"/>
+            <a:r>
+              <a:rPr sz="1400" b="1">
+                <a:solidFill>
+                  <a:srgbClr val="0F172A"/>
+                </a:solidFill>
+                <a:latin typeface="Open Sans"/>
+              </a:rPr>
+              <a:t>Bank accounts</a:t>
+            </a:r>
+          </a:p>
+        </p:txBody>
+      </p:sp>
+      <p:sp>
+        <p:nvSpPr>
+          <p:cNvPr id="14" name="TextBox 13"/>
+          <p:cNvSpPr txBox="1"/>
+          <p:nvPr/>
+        </p:nvSpPr>
+        <p:spPr>
+          <a:xfrm>
+            <a:off x="685800" y="4590288"/>
+            <a:ext cx="2286000" cy="502920"/>
+          </a:xfrm>
+          <a:prstGeom prst="rect">
+            <a:avLst/>
+          </a:prstGeom>
+          <a:noFill/>
+        </p:spPr>
+        <p:txBody>
+          <a:bodyPr wrap="square" anchor="t" lIns="0" rIns="0" tIns="0" bIns="0">
+            <a:spAutoFit/>
+          </a:bodyPr>
+          <a:lstStyle/>
+          <a:p>
+            <a:pPr algn="l"/>
+            <a:r>
+              <a:rPr sz="1100" b="0">
                 <a:solidFill>
                   <a:srgbClr val="334155"/>
                 </a:solidFill>
                 <a:latin typeface="Open Sans"/>
               </a:rPr>
-              <a:t>people may have property waiting to be claimed (NAUPA)</a:t>
-            </a:r>
-          </a:p>
-        </p:txBody>
-      </p:sp>
-      <p:sp>
-        <p:nvSpPr>
-          <p:cNvPr id="13" name="Rounded Rectangle 12"/>
+              <a:t>Dormant savings, checking, CDs</a:t>
+            </a:r>
+          </a:p>
+        </p:txBody>
+      </p:sp>
+      <p:sp>
+        <p:nvSpPr>
+          <p:cNvPr id="15" name="Rounded Rectangle 14"/>
           <p:cNvSpPr/>
           <p:nvPr/>
         </p:nvSpPr>
         <p:spPr>
           <a:xfrm>
-            <a:off x="4251960" y="4846320"/>
-            <a:ext cx="3657600" cy="1280160"/>
+            <a:off x="3319272" y="4023360"/>
+            <a:ext cx="2743200" cy="1143000"/>
           </a:xfrm>
           <a:prstGeom prst="roundRect">
             <a:avLst>
@@ -6096,84 +6175,128 @@
       </p:sp>
       <p:sp>
         <p:nvSpPr>
-          <p:cNvPr id="14" name="TextBox 13"/>
-          <p:cNvSpPr txBox="1"/>
-          <p:nvPr/>
-        </p:nvSpPr>
-        <p:spPr>
-          <a:xfrm>
-            <a:off x="4526280" y="5010912"/>
-            <a:ext cx="3108960" cy="640080"/>
-          </a:xfrm>
-          <a:prstGeom prst="rect">
-            <a:avLst/>
-          </a:prstGeom>
-          <a:noFill/>
-        </p:spPr>
-        <p:txBody>
-          <a:bodyPr wrap="square" anchor="t" lIns="0" rIns="0" tIns="0" bIns="0">
-            <a:spAutoFit/>
-          </a:bodyPr>
-          <a:lstStyle/>
-          <a:p>
-            <a:pPr algn="l"/>
-            <a:r>
-              <a:rPr sz="3600" b="1">
-                <a:solidFill>
-                  <a:srgbClr val="FC4C0B"/>
-                </a:solidFill>
-                <a:latin typeface="Open Sans"/>
-              </a:rPr>
-              <a:t>$2,080</a:t>
-            </a:r>
-          </a:p>
-        </p:txBody>
-      </p:sp>
-      <p:sp>
-        <p:nvSpPr>
-          <p:cNvPr id="15" name="TextBox 14"/>
-          <p:cNvSpPr txBox="1"/>
-          <p:nvPr/>
-        </p:nvSpPr>
-        <p:spPr>
-          <a:xfrm>
-            <a:off x="4526280" y="5623559"/>
-            <a:ext cx="3108960" cy="457200"/>
-          </a:xfrm>
-          <a:prstGeom prst="rect">
-            <a:avLst/>
-          </a:prstGeom>
-          <a:noFill/>
-        </p:spPr>
-        <p:txBody>
-          <a:bodyPr wrap="square" anchor="t" lIns="0" rIns="0" tIns="0" bIns="0">
-            <a:spAutoFit/>
-          </a:bodyPr>
-          <a:lstStyle/>
-          <a:p>
-            <a:pPr algn="l"/>
-            <a:r>
-              <a:rPr sz="1200" b="0">
+          <p:cNvPr id="16" name="Rectangle 15"/>
+          <p:cNvSpPr/>
+          <p:nvPr/>
+        </p:nvSpPr>
+        <p:spPr>
+          <a:xfrm>
+            <a:off x="3319272" y="4023360"/>
+            <a:ext cx="2743200" cy="73152"/>
+          </a:xfrm>
+          <a:prstGeom prst="rect">
+            <a:avLst/>
+          </a:prstGeom>
+          <a:solidFill>
+            <a:srgbClr val="2863C5"/>
+          </a:solidFill>
+          <a:ln>
+            <a:noFill/>
+          </a:ln>
+          <a:effectLst/>
+        </p:spPr>
+        <p:style>
+          <a:lnRef idx="1">
+            <a:schemeClr val="accent1"/>
+          </a:lnRef>
+          <a:fillRef idx="3">
+            <a:schemeClr val="accent1"/>
+          </a:fillRef>
+          <a:effectRef idx="2">
+            <a:schemeClr val="accent1"/>
+          </a:effectRef>
+          <a:fontRef idx="minor">
+            <a:schemeClr val="lt1"/>
+          </a:fontRef>
+        </p:style>
+        <p:txBody>
+          <a:bodyPr rtlCol="0" anchor="ctr"/>
+          <a:lstStyle/>
+          <a:p>
+            <a:pPr algn="ctr"/>
+          </a:p>
+        </p:txBody>
+      </p:sp>
+      <p:sp>
+        <p:nvSpPr>
+          <p:cNvPr id="17" name="TextBox 16"/>
+          <p:cNvSpPr txBox="1"/>
+          <p:nvPr/>
+        </p:nvSpPr>
+        <p:spPr>
+          <a:xfrm>
+            <a:off x="3547872" y="4224528"/>
+            <a:ext cx="2286000" cy="320040"/>
+          </a:xfrm>
+          <a:prstGeom prst="rect">
+            <a:avLst/>
+          </a:prstGeom>
+          <a:noFill/>
+        </p:spPr>
+        <p:txBody>
+          <a:bodyPr wrap="square" anchor="t" lIns="0" rIns="0" tIns="0" bIns="0">
+            <a:spAutoFit/>
+          </a:bodyPr>
+          <a:lstStyle/>
+          <a:p>
+            <a:pPr algn="l"/>
+            <a:r>
+              <a:rPr sz="1400" b="1">
+                <a:solidFill>
+                  <a:srgbClr val="0F172A"/>
+                </a:solidFill>
+                <a:latin typeface="Open Sans"/>
+              </a:rPr>
+              <a:t>Uncashed paychecks</a:t>
+            </a:r>
+          </a:p>
+        </p:txBody>
+      </p:sp>
+      <p:sp>
+        <p:nvSpPr>
+          <p:cNvPr id="18" name="TextBox 17"/>
+          <p:cNvSpPr txBox="1"/>
+          <p:nvPr/>
+        </p:nvSpPr>
+        <p:spPr>
+          <a:xfrm>
+            <a:off x="3547872" y="4590288"/>
+            <a:ext cx="2286000" cy="502920"/>
+          </a:xfrm>
+          <a:prstGeom prst="rect">
+            <a:avLst/>
+          </a:prstGeom>
+          <a:noFill/>
+        </p:spPr>
+        <p:txBody>
+          <a:bodyPr wrap="square" anchor="t" lIns="0" rIns="0" tIns="0" bIns="0">
+            <a:spAutoFit/>
+          </a:bodyPr>
+          <a:lstStyle/>
+          <a:p>
+            <a:pPr algn="l"/>
+            <a:r>
+              <a:rPr sz="1100" b="0">
                 <a:solidFill>
                   <a:srgbClr val="334155"/>
                 </a:solidFill>
                 <a:latin typeface="Open Sans"/>
               </a:rPr>
-              <a:t>average claim paid through MissingMoney.com (median $100, FY2024)</a:t>
-            </a:r>
-          </a:p>
-        </p:txBody>
-      </p:sp>
-      <p:sp>
-        <p:nvSpPr>
-          <p:cNvPr id="16" name="Rounded Rectangle 15"/>
+              <a:t>Final wages, commissions, bonuses</a:t>
+            </a:r>
+          </a:p>
+        </p:txBody>
+      </p:sp>
+      <p:sp>
+        <p:nvSpPr>
+          <p:cNvPr id="19" name="Rounded Rectangle 18"/>
           <p:cNvSpPr/>
           <p:nvPr/>
         </p:nvSpPr>
         <p:spPr>
           <a:xfrm>
-            <a:off x="8046720" y="4846320"/>
-            <a:ext cx="3657600" cy="1280160"/>
+            <a:off x="6181344" y="4023360"/>
+            <a:ext cx="2743200" cy="1143000"/>
           </a:xfrm>
           <a:prstGeom prst="roundRect">
             <a:avLst>
@@ -6214,70 +6337,357 @@
       </p:sp>
       <p:sp>
         <p:nvSpPr>
-          <p:cNvPr id="17" name="TextBox 16"/>
-          <p:cNvSpPr txBox="1"/>
-          <p:nvPr/>
-        </p:nvSpPr>
-        <p:spPr>
-          <a:xfrm>
-            <a:off x="8321040" y="5010912"/>
-            <a:ext cx="3108960" cy="640080"/>
-          </a:xfrm>
-          <a:prstGeom prst="rect">
-            <a:avLst/>
-          </a:prstGeom>
-          <a:noFill/>
-        </p:spPr>
-        <p:txBody>
-          <a:bodyPr wrap="square" anchor="t" lIns="0" rIns="0" tIns="0" bIns="0">
-            <a:spAutoFit/>
-          </a:bodyPr>
-          <a:lstStyle/>
-          <a:p>
-            <a:pPr algn="l"/>
-            <a:r>
-              <a:rPr sz="3600" b="1">
-                <a:solidFill>
-                  <a:srgbClr val="FC4C0B"/>
-                </a:solidFill>
-                <a:latin typeface="Open Sans"/>
-              </a:rPr>
-              <a:t>Unique</a:t>
-            </a:r>
-          </a:p>
-        </p:txBody>
-      </p:sp>
-      <p:sp>
-        <p:nvSpPr>
-          <p:cNvPr id="18" name="TextBox 17"/>
-          <p:cNvSpPr txBox="1"/>
-          <p:nvPr/>
-        </p:nvSpPr>
-        <p:spPr>
-          <a:xfrm>
-            <a:off x="8321040" y="5623559"/>
-            <a:ext cx="3108960" cy="457200"/>
-          </a:xfrm>
-          <a:prstGeom prst="rect">
-            <a:avLst/>
-          </a:prstGeom>
-          <a:noFill/>
-        </p:spPr>
-        <p:txBody>
-          <a:bodyPr wrap="square" anchor="t" lIns="0" rIns="0" tIns="0" bIns="0">
-            <a:spAutoFit/>
-          </a:bodyPr>
-          <a:lstStyle/>
-          <a:p>
-            <a:pPr algn="l"/>
-            <a:r>
-              <a:rPr sz="1200" b="0">
+          <p:cNvPr id="20" name="Rectangle 19"/>
+          <p:cNvSpPr/>
+          <p:nvPr/>
+        </p:nvSpPr>
+        <p:spPr>
+          <a:xfrm>
+            <a:off x="6181344" y="4023360"/>
+            <a:ext cx="2743200" cy="73152"/>
+          </a:xfrm>
+          <a:prstGeom prst="rect">
+            <a:avLst/>
+          </a:prstGeom>
+          <a:solidFill>
+            <a:srgbClr val="2863C5"/>
+          </a:solidFill>
+          <a:ln>
+            <a:noFill/>
+          </a:ln>
+          <a:effectLst/>
+        </p:spPr>
+        <p:style>
+          <a:lnRef idx="1">
+            <a:schemeClr val="accent1"/>
+          </a:lnRef>
+          <a:fillRef idx="3">
+            <a:schemeClr val="accent1"/>
+          </a:fillRef>
+          <a:effectRef idx="2">
+            <a:schemeClr val="accent1"/>
+          </a:effectRef>
+          <a:fontRef idx="minor">
+            <a:schemeClr val="lt1"/>
+          </a:fontRef>
+        </p:style>
+        <p:txBody>
+          <a:bodyPr rtlCol="0" anchor="ctr"/>
+          <a:lstStyle/>
+          <a:p>
+            <a:pPr algn="ctr"/>
+          </a:p>
+        </p:txBody>
+      </p:sp>
+      <p:sp>
+        <p:nvSpPr>
+          <p:cNvPr id="21" name="TextBox 20"/>
+          <p:cNvSpPr txBox="1"/>
+          <p:nvPr/>
+        </p:nvSpPr>
+        <p:spPr>
+          <a:xfrm>
+            <a:off x="6409944" y="4224528"/>
+            <a:ext cx="2286000" cy="320040"/>
+          </a:xfrm>
+          <a:prstGeom prst="rect">
+            <a:avLst/>
+          </a:prstGeom>
+          <a:noFill/>
+        </p:spPr>
+        <p:txBody>
+          <a:bodyPr wrap="square" anchor="t" lIns="0" rIns="0" tIns="0" bIns="0">
+            <a:spAutoFit/>
+          </a:bodyPr>
+          <a:lstStyle/>
+          <a:p>
+            <a:pPr algn="l"/>
+            <a:r>
+              <a:rPr sz="1400" b="1">
+                <a:solidFill>
+                  <a:srgbClr val="0F172A"/>
+                </a:solidFill>
+                <a:latin typeface="Open Sans"/>
+              </a:rPr>
+              <a:t>Refunds &amp; deposits</a:t>
+            </a:r>
+          </a:p>
+        </p:txBody>
+      </p:sp>
+      <p:sp>
+        <p:nvSpPr>
+          <p:cNvPr id="22" name="TextBox 21"/>
+          <p:cNvSpPr txBox="1"/>
+          <p:nvPr/>
+        </p:nvSpPr>
+        <p:spPr>
+          <a:xfrm>
+            <a:off x="6409944" y="4590288"/>
+            <a:ext cx="2286000" cy="502920"/>
+          </a:xfrm>
+          <a:prstGeom prst="rect">
+            <a:avLst/>
+          </a:prstGeom>
+          <a:noFill/>
+        </p:spPr>
+        <p:txBody>
+          <a:bodyPr wrap="square" anchor="t" lIns="0" rIns="0" tIns="0" bIns="0">
+            <a:spAutoFit/>
+          </a:bodyPr>
+          <a:lstStyle/>
+          <a:p>
+            <a:pPr algn="l"/>
+            <a:r>
+              <a:rPr sz="1100" b="0">
                 <a:solidFill>
                   <a:srgbClr val="334155"/>
                 </a:solidFill>
                 <a:latin typeface="Open Sans"/>
               </a:rPr>
-              <a:t>combination of verified-identity matching + alerts + free claim guidance</a:t>
+              <a:t>Utility, rent, insurance, retail</a:t>
+            </a:r>
+          </a:p>
+        </p:txBody>
+      </p:sp>
+      <p:sp>
+        <p:nvSpPr>
+          <p:cNvPr id="23" name="Rounded Rectangle 22"/>
+          <p:cNvSpPr/>
+          <p:nvPr/>
+        </p:nvSpPr>
+        <p:spPr>
+          <a:xfrm>
+            <a:off x="9043416" y="4023360"/>
+            <a:ext cx="2743200" cy="1143000"/>
+          </a:xfrm>
+          <a:prstGeom prst="roundRect">
+            <a:avLst>
+              <a:gd name="adj" fmla="val 4000"/>
+            </a:avLst>
+          </a:prstGeom>
+          <a:solidFill>
+            <a:srgbClr val="FFFFFF"/>
+          </a:solidFill>
+          <a:ln w="6350">
+            <a:solidFill>
+              <a:srgbClr val="E2E8F0"/>
+            </a:solidFill>
+          </a:ln>
+          <a:effectLst/>
+        </p:spPr>
+        <p:style>
+          <a:lnRef idx="1">
+            <a:schemeClr val="accent1"/>
+          </a:lnRef>
+          <a:fillRef idx="3">
+            <a:schemeClr val="accent1"/>
+          </a:fillRef>
+          <a:effectRef idx="2">
+            <a:schemeClr val="accent1"/>
+          </a:effectRef>
+          <a:fontRef idx="minor">
+            <a:schemeClr val="lt1"/>
+          </a:fontRef>
+        </p:style>
+        <p:txBody>
+          <a:bodyPr rtlCol="0" anchor="ctr"/>
+          <a:lstStyle/>
+          <a:p>
+            <a:pPr algn="ctr"/>
+          </a:p>
+        </p:txBody>
+      </p:sp>
+      <p:sp>
+        <p:nvSpPr>
+          <p:cNvPr id="24" name="Rectangle 23"/>
+          <p:cNvSpPr/>
+          <p:nvPr/>
+        </p:nvSpPr>
+        <p:spPr>
+          <a:xfrm>
+            <a:off x="9043416" y="4023360"/>
+            <a:ext cx="2743200" cy="73152"/>
+          </a:xfrm>
+          <a:prstGeom prst="rect">
+            <a:avLst/>
+          </a:prstGeom>
+          <a:solidFill>
+            <a:srgbClr val="2863C5"/>
+          </a:solidFill>
+          <a:ln>
+            <a:noFill/>
+          </a:ln>
+          <a:effectLst/>
+        </p:spPr>
+        <p:style>
+          <a:lnRef idx="1">
+            <a:schemeClr val="accent1"/>
+          </a:lnRef>
+          <a:fillRef idx="3">
+            <a:schemeClr val="accent1"/>
+          </a:fillRef>
+          <a:effectRef idx="2">
+            <a:schemeClr val="accent1"/>
+          </a:effectRef>
+          <a:fontRef idx="minor">
+            <a:schemeClr val="lt1"/>
+          </a:fontRef>
+        </p:style>
+        <p:txBody>
+          <a:bodyPr rtlCol="0" anchor="ctr"/>
+          <a:lstStyle/>
+          <a:p>
+            <a:pPr algn="ctr"/>
+          </a:p>
+        </p:txBody>
+      </p:sp>
+      <p:sp>
+        <p:nvSpPr>
+          <p:cNvPr id="25" name="TextBox 24"/>
+          <p:cNvSpPr txBox="1"/>
+          <p:nvPr/>
+        </p:nvSpPr>
+        <p:spPr>
+          <a:xfrm>
+            <a:off x="9272016" y="4224528"/>
+            <a:ext cx="2286000" cy="320040"/>
+          </a:xfrm>
+          <a:prstGeom prst="rect">
+            <a:avLst/>
+          </a:prstGeom>
+          <a:noFill/>
+        </p:spPr>
+        <p:txBody>
+          <a:bodyPr wrap="square" anchor="t" lIns="0" rIns="0" tIns="0" bIns="0">
+            <a:spAutoFit/>
+          </a:bodyPr>
+          <a:lstStyle/>
+          <a:p>
+            <a:pPr algn="l"/>
+            <a:r>
+              <a:rPr sz="1400" b="1">
+                <a:solidFill>
+                  <a:srgbClr val="0F172A"/>
+                </a:solidFill>
+                <a:latin typeface="Open Sans"/>
+              </a:rPr>
+              <a:t>Investments</a:t>
+            </a:r>
+          </a:p>
+        </p:txBody>
+      </p:sp>
+      <p:sp>
+        <p:nvSpPr>
+          <p:cNvPr id="26" name="TextBox 25"/>
+          <p:cNvSpPr txBox="1"/>
+          <p:nvPr/>
+        </p:nvSpPr>
+        <p:spPr>
+          <a:xfrm>
+            <a:off x="9272016" y="4590288"/>
+            <a:ext cx="2286000" cy="502920"/>
+          </a:xfrm>
+          <a:prstGeom prst="rect">
+            <a:avLst/>
+          </a:prstGeom>
+          <a:noFill/>
+        </p:spPr>
+        <p:txBody>
+          <a:bodyPr wrap="square" anchor="t" lIns="0" rIns="0" tIns="0" bIns="0">
+            <a:spAutoFit/>
+          </a:bodyPr>
+          <a:lstStyle/>
+          <a:p>
+            <a:pPr algn="l"/>
+            <a:r>
+              <a:rPr sz="1100" b="0">
+                <a:solidFill>
+                  <a:srgbClr val="334155"/>
+                </a:solidFill>
+                <a:latin typeface="Open Sans"/>
+              </a:rPr>
+              <a:t>Stock dividends, matured bonds, IRAs</a:t>
+            </a:r>
+          </a:p>
+        </p:txBody>
+      </p:sp>
+      <p:sp>
+        <p:nvSpPr>
+          <p:cNvPr id="27" name="Rounded Rectangle 26"/>
+          <p:cNvSpPr/>
+          <p:nvPr/>
+        </p:nvSpPr>
+        <p:spPr>
+          <a:xfrm>
+            <a:off x="457200" y="5486400"/>
+            <a:ext cx="11247120" cy="502920"/>
+          </a:xfrm>
+          <a:prstGeom prst="roundRect">
+            <a:avLst>
+              <a:gd name="adj" fmla="val 7000"/>
+            </a:avLst>
+          </a:prstGeom>
+          <a:solidFill>
+            <a:srgbClr val="2863C5"/>
+          </a:solidFill>
+          <a:ln>
+            <a:noFill/>
+          </a:ln>
+          <a:effectLst/>
+        </p:spPr>
+        <p:style>
+          <a:lnRef idx="1">
+            <a:schemeClr val="accent1"/>
+          </a:lnRef>
+          <a:fillRef idx="3">
+            <a:schemeClr val="accent1"/>
+          </a:fillRef>
+          <a:effectRef idx="2">
+            <a:schemeClr val="accent1"/>
+          </a:effectRef>
+          <a:fontRef idx="minor">
+            <a:schemeClr val="lt1"/>
+          </a:fontRef>
+        </p:style>
+        <p:txBody>
+          <a:bodyPr rtlCol="0" anchor="ctr"/>
+          <a:lstStyle/>
+          <a:p>
+            <a:pPr algn="ctr"/>
+          </a:p>
+        </p:txBody>
+      </p:sp>
+      <p:sp>
+        <p:nvSpPr>
+          <p:cNvPr id="28" name="TextBox 27"/>
+          <p:cNvSpPr txBox="1"/>
+          <p:nvPr/>
+        </p:nvSpPr>
+        <p:spPr>
+          <a:xfrm>
+            <a:off x="640080" y="5550408"/>
+            <a:ext cx="10972800" cy="365760"/>
+          </a:xfrm>
+          <a:prstGeom prst="rect">
+            <a:avLst/>
+          </a:prstGeom>
+          <a:noFill/>
+        </p:spPr>
+        <p:txBody>
+          <a:bodyPr wrap="square" anchor="t" lIns="0" rIns="0" tIns="0" bIns="0">
+            <a:spAutoFit/>
+          </a:bodyPr>
+          <a:lstStyle/>
+          <a:p>
+            <a:pPr algn="l"/>
+            <a:r>
+              <a:rPr sz="1200" b="1">
+                <a:solidFill>
+                  <a:srgbClr val="FFFFFF"/>
+                </a:solidFill>
+                <a:latin typeface="Open Sans"/>
+              </a:rPr>
+              <a:t>Nationwide: $70B+ sitting with state treasurers · ~33M Americans have property waiting (NAUPA, FY2024)</a:t>
             </a:r>
           </a:p>
         </p:txBody>

--- a/myReclaim-Exec-Deck.pptx
+++ b/myReclaim-Exec-Deck.pptx
@@ -7485,7 +7485,7 @@
                 </a:solidFill>
                 <a:latin typeface="Open Sans"/>
               </a:rPr>
-              <a:t>We help them file with the state</a:t>
+              <a:t>We hand them off to the state</a:t>
             </a:r>
           </a:p>
         </p:txBody>
@@ -7520,7 +7520,7 @@
                 </a:solidFill>
                 <a:latin typeface="Open Sans"/>
               </a:rPr>
-              <a:t>Prepare claim packet · route to official state portal · track status.</a:t>
+              <a:t>Deep-link to the official state claim portal with step-by-step instructions for filing.</a:t>
             </a:r>
           </a:p>
         </p:txBody>

--- a/myReclaim-Exec-Deck.pptx
+++ b/myReclaim-Exec-Deck.pptx
@@ -9772,7 +9772,7 @@
                 </a:solidFill>
                 <a:latin typeface="Open Sans"/>
               </a:rPr>
-              <a:t>Top 10 customer states cover ~68% of SmartCredit net actives (201,829 of 297,096). Four of the top five (FL, TX, GA, NY) need a state agreement before we can ingest at scale. CA is the only top-10 state with a clean public bulk feed — that's where the prototype starts.</a:t>
+              <a:t>Top 10 states cover ~68% of SC net actives (201,829 of 297,096). Four of the top five (FL, TX, GA, NY) need a state agreement before we can ingest at scale. CA is the only top-10 state with a clean public bulk feed — that's where the prototype starts.</a:t>
             </a:r>
           </a:p>
         </p:txBody>
@@ -9921,7 +9921,7 @@
                 </a:solidFill>
                 <a:latin typeface="Open Sans"/>
               </a:rPr>
-              <a:t>CUSTOMERS</a:t>
+              <a:t>NET ACTIVES</a:t>
             </a:r>
           </a:p>
         </p:txBody>
@@ -12452,7 +12452,7 @@
                 </a:solidFill>
                 <a:latin typeface="Open Sans"/>
               </a:rPr>
-              <a:t>Top 10 customer states cover ~68% of SmartCredit net actives (201,829 of 297,096).</a:t>
+              <a:t>Top 10 states cover ~68% of SC net actives (201,829 of 297,096).</a:t>
             </a:r>
           </a:p>
         </p:txBody>
@@ -12733,7 +12733,7 @@
                 </a:solidFill>
                 <a:latin typeface="Open Sans"/>
               </a:rPr>
-              <a:t>WHAT WE'D FIND TODAY · LIVE MATCH</a:t>
+              <a:t>WHAT WE'D FIND TODAY · NAME ONLY</a:t>
             </a:r>
           </a:p>
         </p:txBody>
@@ -12803,7 +12803,7 @@
                 </a:solidFill>
                 <a:latin typeface="Open Sans"/>
               </a:rPr>
-              <a:t>Matching on name only.</a:t>
+              <a:t>Matching on name only — the upper bound. Common names like 'John Smith' inflate the totals; the next slide adds city for the defensible view.</a:t>
             </a:r>
           </a:p>
         </p:txBody>
@@ -12817,7 +12817,7 @@
         <p:spPr>
           <a:xfrm>
             <a:off x="457200" y="2606040"/>
-            <a:ext cx="2697480" cy="1417320"/>
+            <a:ext cx="5532120" cy="1417320"/>
           </a:xfrm>
           <a:prstGeom prst="roundRect">
             <a:avLst>
@@ -12865,7 +12865,7 @@
         <p:spPr>
           <a:xfrm>
             <a:off x="457200" y="2606040"/>
-            <a:ext cx="2697480" cy="137160"/>
+            <a:ext cx="5532120" cy="137160"/>
           </a:xfrm>
           <a:prstGeom prst="rect">
             <a:avLst/>
@@ -12908,23 +12908,23 @@
         </p:nvSpPr>
         <p:spPr>
           <a:xfrm>
-            <a:off x="640080" y="2880360"/>
-            <a:ext cx="2331720" cy="777240"/>
-          </a:xfrm>
-          <a:prstGeom prst="rect">
-            <a:avLst/>
-          </a:prstGeom>
-          <a:noFill/>
-        </p:spPr>
-        <p:txBody>
-          <a:bodyPr wrap="square" anchor="t" lIns="0" rIns="0" tIns="0" bIns="0">
-            <a:spAutoFit/>
-          </a:bodyPr>
-          <a:lstStyle/>
-          <a:p>
-            <a:pPr algn="l"/>
-            <a:r>
-              <a:rPr sz="3600" b="1">
+            <a:off x="731520" y="2880360"/>
+            <a:ext cx="4983480" cy="777240"/>
+          </a:xfrm>
+          <a:prstGeom prst="rect">
+            <a:avLst/>
+          </a:prstGeom>
+          <a:noFill/>
+        </p:spPr>
+        <p:txBody>
+          <a:bodyPr wrap="square" anchor="t" lIns="0" rIns="0" tIns="0" bIns="0">
+            <a:spAutoFit/>
+          </a:bodyPr>
+          <a:lstStyle/>
+          <a:p>
+            <a:pPr algn="l"/>
+            <a:r>
+              <a:rPr sz="4400" b="1">
                 <a:solidFill>
                   <a:srgbClr val="2863C5"/>
                 </a:solidFill>
@@ -12943,29 +12943,29 @@
         </p:nvSpPr>
         <p:spPr>
           <a:xfrm>
-            <a:off x="640080" y="3611880"/>
-            <a:ext cx="2331720" cy="365760"/>
-          </a:xfrm>
-          <a:prstGeom prst="rect">
-            <a:avLst/>
-          </a:prstGeom>
-          <a:noFill/>
-        </p:spPr>
-        <p:txBody>
-          <a:bodyPr wrap="square" anchor="t" lIns="0" rIns="0" tIns="0" bIns="0">
-            <a:spAutoFit/>
-          </a:bodyPr>
-          <a:lstStyle/>
-          <a:p>
-            <a:pPr algn="l"/>
-            <a:r>
-              <a:rPr sz="1000" b="0">
+            <a:off x="731520" y="3611880"/>
+            <a:ext cx="4983480" cy="365760"/>
+          </a:xfrm>
+          <a:prstGeom prst="rect">
+            <a:avLst/>
+          </a:prstGeom>
+          <a:noFill/>
+        </p:spPr>
+        <p:txBody>
+          <a:bodyPr wrap="square" anchor="t" lIns="0" rIns="0" tIns="0" bIns="0">
+            <a:spAutoFit/>
+          </a:bodyPr>
+          <a:lstStyle/>
+          <a:p>
+            <a:pPr algn="l"/>
+            <a:r>
+              <a:rPr sz="1100" b="0">
                 <a:solidFill>
                   <a:srgbClr val="334155"/>
                 </a:solidFill>
                 <a:latin typeface="Open Sans"/>
               </a:rPr>
-              <a:t>customers with at least one matching name</a:t>
+              <a:t>net actives matched at least one name</a:t>
             </a:r>
           </a:p>
         </p:txBody>
@@ -12978,8 +12978,8 @@
         </p:nvSpPr>
         <p:spPr>
           <a:xfrm>
-            <a:off x="3291840" y="2606040"/>
-            <a:ext cx="2697480" cy="1417320"/>
+            <a:off x="6172200" y="2606040"/>
+            <a:ext cx="5532120" cy="1417320"/>
           </a:xfrm>
           <a:prstGeom prst="roundRect">
             <a:avLst>
@@ -13026,8 +13026,8 @@
         </p:nvSpPr>
         <p:spPr>
           <a:xfrm>
-            <a:off x="3291840" y="2606040"/>
-            <a:ext cx="2697480" cy="137160"/>
+            <a:off x="6172200" y="2606040"/>
+            <a:ext cx="5532120" cy="137160"/>
           </a:xfrm>
           <a:prstGeom prst="rect">
             <a:avLst/>
@@ -13070,23 +13070,23 @@
         </p:nvSpPr>
         <p:spPr>
           <a:xfrm>
-            <a:off x="3474720" y="2880360"/>
-            <a:ext cx="2331720" cy="777240"/>
-          </a:xfrm>
-          <a:prstGeom prst="rect">
-            <a:avLst/>
-          </a:prstGeom>
-          <a:noFill/>
-        </p:spPr>
-        <p:txBody>
-          <a:bodyPr wrap="square" anchor="t" lIns="0" rIns="0" tIns="0" bIns="0">
-            <a:spAutoFit/>
-          </a:bodyPr>
-          <a:lstStyle/>
-          <a:p>
-            <a:pPr algn="l"/>
-            <a:r>
-              <a:rPr sz="3600" b="1">
+            <a:off x="6446520" y="2880360"/>
+            <a:ext cx="4983480" cy="777240"/>
+          </a:xfrm>
+          <a:prstGeom prst="rect">
+            <a:avLst/>
+          </a:prstGeom>
+          <a:noFill/>
+        </p:spPr>
+        <p:txBody>
+          <a:bodyPr wrap="square" anchor="t" lIns="0" rIns="0" tIns="0" bIns="0">
+            <a:spAutoFit/>
+          </a:bodyPr>
+          <a:lstStyle/>
+          <a:p>
+            <a:pPr algn="l"/>
+            <a:r>
+              <a:rPr sz="4400" b="1">
                 <a:solidFill>
                   <a:srgbClr val="2863C5"/>
                 </a:solidFill>
@@ -13105,8 +13105,78 @@
         </p:nvSpPr>
         <p:spPr>
           <a:xfrm>
-            <a:off x="3474720" y="3611880"/>
-            <a:ext cx="2331720" cy="365760"/>
+            <a:off x="6446520" y="3611880"/>
+            <a:ext cx="4983480" cy="365760"/>
+          </a:xfrm>
+          <a:prstGeom prst="rect">
+            <a:avLst/>
+          </a:prstGeom>
+          <a:noFill/>
+        </p:spPr>
+        <p:txBody>
+          <a:bodyPr wrap="square" anchor="t" lIns="0" rIns="0" tIns="0" bIns="0">
+            <a:spAutoFit/>
+          </a:bodyPr>
+          <a:lstStyle/>
+          <a:p>
+            <a:pPr algn="l"/>
+            <a:r>
+              <a:rPr sz="1100" b="0">
+                <a:solidFill>
+                  <a:srgbClr val="334155"/>
+                </a:solidFill>
+                <a:latin typeface="Open Sans"/>
+              </a:rPr>
+              <a:t>of 31,110 net actives CA · SmartCredit</a:t>
+            </a:r>
+          </a:p>
+        </p:txBody>
+      </p:sp>
+      <p:sp>
+        <p:nvSpPr>
+          <p:cNvPr id="18" name="TextBox 17"/>
+          <p:cNvSpPr txBox="1"/>
+          <p:nvPr/>
+        </p:nvSpPr>
+        <p:spPr>
+          <a:xfrm>
+            <a:off x="2286000" y="4251960"/>
+            <a:ext cx="7589520" cy="320040"/>
+          </a:xfrm>
+          <a:prstGeom prst="rect">
+            <a:avLst/>
+          </a:prstGeom>
+          <a:noFill/>
+        </p:spPr>
+        <p:txBody>
+          <a:bodyPr wrap="square" anchor="t" lIns="0" rIns="0" tIns="0" bIns="0">
+            <a:spAutoFit/>
+          </a:bodyPr>
+          <a:lstStyle/>
+          <a:p>
+            <a:pPr algn="l"/>
+            <a:r>
+              <a:rPr sz="1100" b="1">
+                <a:solidFill>
+                  <a:srgbClr val="2863C5"/>
+                </a:solidFill>
+                <a:latin typeface="Open Sans"/>
+              </a:rPr>
+              <a:t>NET ACTIVES BY TOTAL OWED (under their name)</a:t>
+            </a:r>
+          </a:p>
+        </p:txBody>
+      </p:sp>
+      <p:sp>
+        <p:nvSpPr>
+          <p:cNvPr id="19" name="TextBox 18"/>
+          <p:cNvSpPr txBox="1"/>
+          <p:nvPr/>
+        </p:nvSpPr>
+        <p:spPr>
+          <a:xfrm>
+            <a:off x="2286000" y="4544568"/>
+            <a:ext cx="7589520" cy="274320"/>
           </a:xfrm>
           <a:prstGeom prst="rect">
             <a:avLst/>
@@ -13123,419 +13193,25 @@
             <a:r>
               <a:rPr sz="1000" b="0">
                 <a:solidFill>
-                  <a:srgbClr val="334155"/>
-                </a:solidFill>
-                <a:latin typeface="Open Sans"/>
-              </a:rPr>
-              <a:t>of 31,110 net actives CA · SmartCredit</a:t>
-            </a:r>
-          </a:p>
-        </p:txBody>
-      </p:sp>
-      <p:sp>
-        <p:nvSpPr>
-          <p:cNvPr id="18" name="Rounded Rectangle 17"/>
+                  <a:srgbClr val="64748B"/>
+                </a:solidFill>
+                <a:latin typeface="Open Sans"/>
+              </a:rPr>
+              <a:t>Each net active placed in one bucket by the SUM of their matched records. Add up to 23,166.</a:t>
+            </a:r>
+          </a:p>
+        </p:txBody>
+      </p:sp>
+      <p:sp>
+        <p:nvSpPr>
+          <p:cNvPr id="20" name="Rectangle 19"/>
           <p:cNvSpPr/>
           <p:nvPr/>
         </p:nvSpPr>
         <p:spPr>
           <a:xfrm>
-            <a:off x="6126480" y="2606040"/>
-            <a:ext cx="2697480" cy="1417320"/>
-          </a:xfrm>
-          <a:prstGeom prst="roundRect">
-            <a:avLst>
-              <a:gd name="adj" fmla="val 4000"/>
-            </a:avLst>
-          </a:prstGeom>
-          <a:solidFill>
-            <a:srgbClr val="FFFFFF"/>
-          </a:solidFill>
-          <a:ln w="6350">
-            <a:solidFill>
-              <a:srgbClr val="E2E8F0"/>
-            </a:solidFill>
-          </a:ln>
-          <a:effectLst/>
-        </p:spPr>
-        <p:style>
-          <a:lnRef idx="1">
-            <a:schemeClr val="accent1"/>
-          </a:lnRef>
-          <a:fillRef idx="3">
-            <a:schemeClr val="accent1"/>
-          </a:fillRef>
-          <a:effectRef idx="2">
-            <a:schemeClr val="accent1"/>
-          </a:effectRef>
-          <a:fontRef idx="minor">
-            <a:schemeClr val="lt1"/>
-          </a:fontRef>
-        </p:style>
-        <p:txBody>
-          <a:bodyPr rtlCol="0" anchor="ctr"/>
-          <a:lstStyle/>
-          <a:p>
-            <a:pPr algn="ctr"/>
-          </a:p>
-        </p:txBody>
-      </p:sp>
-      <p:sp>
-        <p:nvSpPr>
-          <p:cNvPr id="19" name="Rectangle 18"/>
-          <p:cNvSpPr/>
-          <p:nvPr/>
-        </p:nvSpPr>
-        <p:spPr>
-          <a:xfrm>
-            <a:off x="6126480" y="2606040"/>
-            <a:ext cx="2697480" cy="137160"/>
-          </a:xfrm>
-          <a:prstGeom prst="rect">
-            <a:avLst/>
-          </a:prstGeom>
-          <a:solidFill>
-            <a:srgbClr val="FC4C0B"/>
-          </a:solidFill>
-          <a:ln>
-            <a:noFill/>
-          </a:ln>
-          <a:effectLst/>
-        </p:spPr>
-        <p:style>
-          <a:lnRef idx="1">
-            <a:schemeClr val="accent1"/>
-          </a:lnRef>
-          <a:fillRef idx="3">
-            <a:schemeClr val="accent1"/>
-          </a:fillRef>
-          <a:effectRef idx="2">
-            <a:schemeClr val="accent1"/>
-          </a:effectRef>
-          <a:fontRef idx="minor">
-            <a:schemeClr val="lt1"/>
-          </a:fontRef>
-        </p:style>
-        <p:txBody>
-          <a:bodyPr rtlCol="0" anchor="ctr"/>
-          <a:lstStyle/>
-          <a:p>
-            <a:pPr algn="ctr"/>
-          </a:p>
-        </p:txBody>
-      </p:sp>
-      <p:sp>
-        <p:nvSpPr>
-          <p:cNvPr id="20" name="TextBox 19"/>
-          <p:cNvSpPr txBox="1"/>
-          <p:nvPr/>
-        </p:nvSpPr>
-        <p:spPr>
-          <a:xfrm>
-            <a:off x="6309360" y="2880360"/>
-            <a:ext cx="2331720" cy="777240"/>
-          </a:xfrm>
-          <a:prstGeom prst="rect">
-            <a:avLst/>
-          </a:prstGeom>
-          <a:noFill/>
-        </p:spPr>
-        <p:txBody>
-          <a:bodyPr wrap="square" anchor="t" lIns="0" rIns="0" tIns="0" bIns="0">
-            <a:spAutoFit/>
-          </a:bodyPr>
-          <a:lstStyle/>
-          <a:p>
-            <a:pPr algn="l"/>
-            <a:r>
-              <a:rPr sz="3600" b="1">
-                <a:solidFill>
-                  <a:srgbClr val="FC4C0B"/>
-                </a:solidFill>
-                <a:latin typeface="Open Sans"/>
-              </a:rPr>
-              <a:t>2.3M</a:t>
-            </a:r>
-          </a:p>
-        </p:txBody>
-      </p:sp>
-      <p:sp>
-        <p:nvSpPr>
-          <p:cNvPr id="21" name="TextBox 20"/>
-          <p:cNvSpPr txBox="1"/>
-          <p:nvPr/>
-        </p:nvSpPr>
-        <p:spPr>
-          <a:xfrm>
-            <a:off x="6309360" y="3611880"/>
-            <a:ext cx="2331720" cy="365760"/>
-          </a:xfrm>
-          <a:prstGeom prst="rect">
-            <a:avLst/>
-          </a:prstGeom>
-          <a:noFill/>
-        </p:spPr>
-        <p:txBody>
-          <a:bodyPr wrap="square" anchor="t" lIns="0" rIns="0" tIns="0" bIns="0">
-            <a:spAutoFit/>
-          </a:bodyPr>
-          <a:lstStyle/>
-          <a:p>
-            <a:pPr algn="l"/>
-            <a:r>
-              <a:rPr sz="1000" b="0">
-                <a:solidFill>
-                  <a:srgbClr val="334155"/>
-                </a:solidFill>
-                <a:latin typeface="Open Sans"/>
-              </a:rPr>
-              <a:t>property records matched</a:t>
-            </a:r>
-          </a:p>
-        </p:txBody>
-      </p:sp>
-      <p:sp>
-        <p:nvSpPr>
-          <p:cNvPr id="22" name="Rounded Rectangle 21"/>
-          <p:cNvSpPr/>
-          <p:nvPr/>
-        </p:nvSpPr>
-        <p:spPr>
-          <a:xfrm>
-            <a:off x="8961120" y="2606040"/>
-            <a:ext cx="2697480" cy="1417320"/>
-          </a:xfrm>
-          <a:prstGeom prst="roundRect">
-            <a:avLst>
-              <a:gd name="adj" fmla="val 4000"/>
-            </a:avLst>
-          </a:prstGeom>
-          <a:solidFill>
-            <a:srgbClr val="FFFFFF"/>
-          </a:solidFill>
-          <a:ln w="6350">
-            <a:solidFill>
-              <a:srgbClr val="E2E8F0"/>
-            </a:solidFill>
-          </a:ln>
-          <a:effectLst/>
-        </p:spPr>
-        <p:style>
-          <a:lnRef idx="1">
-            <a:schemeClr val="accent1"/>
-          </a:lnRef>
-          <a:fillRef idx="3">
-            <a:schemeClr val="accent1"/>
-          </a:fillRef>
-          <a:effectRef idx="2">
-            <a:schemeClr val="accent1"/>
-          </a:effectRef>
-          <a:fontRef idx="minor">
-            <a:schemeClr val="lt1"/>
-          </a:fontRef>
-        </p:style>
-        <p:txBody>
-          <a:bodyPr rtlCol="0" anchor="ctr"/>
-          <a:lstStyle/>
-          <a:p>
-            <a:pPr algn="ctr"/>
-          </a:p>
-        </p:txBody>
-      </p:sp>
-      <p:sp>
-        <p:nvSpPr>
-          <p:cNvPr id="23" name="Rectangle 22"/>
-          <p:cNvSpPr/>
-          <p:nvPr/>
-        </p:nvSpPr>
-        <p:spPr>
-          <a:xfrm>
-            <a:off x="8961120" y="2606040"/>
-            <a:ext cx="2697480" cy="137160"/>
-          </a:xfrm>
-          <a:prstGeom prst="rect">
-            <a:avLst/>
-          </a:prstGeom>
-          <a:solidFill>
-            <a:srgbClr val="FC4C0B"/>
-          </a:solidFill>
-          <a:ln>
-            <a:noFill/>
-          </a:ln>
-          <a:effectLst/>
-        </p:spPr>
-        <p:style>
-          <a:lnRef idx="1">
-            <a:schemeClr val="accent1"/>
-          </a:lnRef>
-          <a:fillRef idx="3">
-            <a:schemeClr val="accent1"/>
-          </a:fillRef>
-          <a:effectRef idx="2">
-            <a:schemeClr val="accent1"/>
-          </a:effectRef>
-          <a:fontRef idx="minor">
-            <a:schemeClr val="lt1"/>
-          </a:fontRef>
-        </p:style>
-        <p:txBody>
-          <a:bodyPr rtlCol="0" anchor="ctr"/>
-          <a:lstStyle/>
-          <a:p>
-            <a:pPr algn="ctr"/>
-          </a:p>
-        </p:txBody>
-      </p:sp>
-      <p:sp>
-        <p:nvSpPr>
-          <p:cNvPr id="24" name="TextBox 23"/>
-          <p:cNvSpPr txBox="1"/>
-          <p:nvPr/>
-        </p:nvSpPr>
-        <p:spPr>
-          <a:xfrm>
-            <a:off x="9144000" y="2880360"/>
-            <a:ext cx="2331720" cy="777240"/>
-          </a:xfrm>
-          <a:prstGeom prst="rect">
-            <a:avLst/>
-          </a:prstGeom>
-          <a:noFill/>
-        </p:spPr>
-        <p:txBody>
-          <a:bodyPr wrap="square" anchor="t" lIns="0" rIns="0" tIns="0" bIns="0">
-            <a:spAutoFit/>
-          </a:bodyPr>
-          <a:lstStyle/>
-          <a:p>
-            <a:pPr algn="l"/>
-            <a:r>
-              <a:rPr sz="3600" b="1">
-                <a:solidFill>
-                  <a:srgbClr val="FC4C0B"/>
-                </a:solidFill>
-                <a:latin typeface="Open Sans"/>
-              </a:rPr>
-              <a:t>$172M</a:t>
-            </a:r>
-          </a:p>
-        </p:txBody>
-      </p:sp>
-      <p:sp>
-        <p:nvSpPr>
-          <p:cNvPr id="25" name="TextBox 24"/>
-          <p:cNvSpPr txBox="1"/>
-          <p:nvPr/>
-        </p:nvSpPr>
-        <p:spPr>
-          <a:xfrm>
-            <a:off x="9144000" y="3611880"/>
-            <a:ext cx="2331720" cy="365760"/>
-          </a:xfrm>
-          <a:prstGeom prst="rect">
-            <a:avLst/>
-          </a:prstGeom>
-          <a:noFill/>
-        </p:spPr>
-        <p:txBody>
-          <a:bodyPr wrap="square" anchor="t" lIns="0" rIns="0" tIns="0" bIns="0">
-            <a:spAutoFit/>
-          </a:bodyPr>
-          <a:lstStyle/>
-          <a:p>
-            <a:pPr algn="l"/>
-            <a:r>
-              <a:rPr sz="1000" b="0">
-                <a:solidFill>
-                  <a:srgbClr val="334155"/>
-                </a:solidFill>
-                <a:latin typeface="Open Sans"/>
-              </a:rPr>
-              <a:t>estimated value across all matches</a:t>
-            </a:r>
-          </a:p>
-        </p:txBody>
-      </p:sp>
-      <p:sp>
-        <p:nvSpPr>
-          <p:cNvPr id="26" name="TextBox 25"/>
-          <p:cNvSpPr txBox="1"/>
-          <p:nvPr/>
-        </p:nvSpPr>
-        <p:spPr>
-          <a:xfrm>
-            <a:off x="457200" y="4206240"/>
-            <a:ext cx="5486400" cy="320040"/>
-          </a:xfrm>
-          <a:prstGeom prst="rect">
-            <a:avLst/>
-          </a:prstGeom>
-          <a:noFill/>
-        </p:spPr>
-        <p:txBody>
-          <a:bodyPr wrap="square" anchor="t" lIns="0" rIns="0" tIns="0" bIns="0">
-            <a:spAutoFit/>
-          </a:bodyPr>
-          <a:lstStyle/>
-          <a:p>
-            <a:pPr algn="l"/>
-            <a:r>
-              <a:rPr sz="1100" b="1">
-                <a:solidFill>
-                  <a:srgbClr val="2863C5"/>
-                </a:solidFill>
-                <a:latin typeface="Open Sans"/>
-              </a:rPr>
-              <a:t>MATCH DISTRIBUTION</a:t>
-            </a:r>
-          </a:p>
-        </p:txBody>
-      </p:sp>
-      <p:sp>
-        <p:nvSpPr>
-          <p:cNvPr id="27" name="TextBox 26"/>
-          <p:cNvSpPr txBox="1"/>
-          <p:nvPr/>
-        </p:nvSpPr>
-        <p:spPr>
-          <a:xfrm>
-            <a:off x="457200" y="4498848"/>
-            <a:ext cx="5486400" cy="274320"/>
-          </a:xfrm>
-          <a:prstGeom prst="rect">
-            <a:avLst/>
-          </a:prstGeom>
-          <a:noFill/>
-        </p:spPr>
-        <p:txBody>
-          <a:bodyPr wrap="square" anchor="t" lIns="0" rIns="0" tIns="0" bIns="0">
-            <a:spAutoFit/>
-          </a:bodyPr>
-          <a:lstStyle/>
-          <a:p>
-            <a:pPr algn="l"/>
-            <a:r>
-              <a:rPr sz="1000" b="0">
-                <a:solidFill>
-                  <a:srgbClr val="64748B"/>
-                </a:solidFill>
-                <a:latin typeface="Open Sans"/>
-              </a:rPr>
-              <a:t>Number of records each customer's name returned. Fewer records = more distinctive name = more likely match.</a:t>
-            </a:r>
-          </a:p>
-        </p:txBody>
-      </p:sp>
-      <p:sp>
-        <p:nvSpPr>
-          <p:cNvPr id="28" name="Rectangle 27"/>
-          <p:cNvSpPr/>
-          <p:nvPr/>
-        </p:nvSpPr>
-        <p:spPr>
-          <a:xfrm>
-            <a:off x="457200" y="4846320"/>
-            <a:ext cx="5486400" cy="237744"/>
+            <a:off x="2286000" y="4937760"/>
+            <a:ext cx="7589520" cy="256032"/>
           </a:xfrm>
           <a:prstGeom prst="rect">
             <a:avLst/>
@@ -13572,189 +13248,154 @@
       </p:sp>
       <p:sp>
         <p:nvSpPr>
-          <p:cNvPr id="29" name="TextBox 28"/>
-          <p:cNvSpPr txBox="1"/>
-          <p:nvPr/>
-        </p:nvSpPr>
-        <p:spPr>
-          <a:xfrm>
-            <a:off x="502920" y="4882896"/>
-            <a:ext cx="868680" cy="182880"/>
-          </a:xfrm>
-          <a:prstGeom prst="rect">
-            <a:avLst/>
-          </a:prstGeom>
-          <a:noFill/>
-        </p:spPr>
-        <p:txBody>
-          <a:bodyPr wrap="square" anchor="t" lIns="0" rIns="0" tIns="0" bIns="0">
-            <a:spAutoFit/>
-          </a:bodyPr>
-          <a:lstStyle/>
-          <a:p>
-            <a:pPr algn="l"/>
-            <a:r>
-              <a:rPr sz="900" b="1">
+          <p:cNvPr id="21" name="TextBox 20"/>
+          <p:cNvSpPr txBox="1"/>
+          <p:nvPr/>
+        </p:nvSpPr>
+        <p:spPr>
+          <a:xfrm>
+            <a:off x="2377440" y="4983480"/>
+            <a:ext cx="1737360" cy="201168"/>
+          </a:xfrm>
+          <a:prstGeom prst="rect">
+            <a:avLst/>
+          </a:prstGeom>
+          <a:noFill/>
+        </p:spPr>
+        <p:txBody>
+          <a:bodyPr wrap="square" anchor="t" lIns="0" rIns="0" tIns="0" bIns="0">
+            <a:spAutoFit/>
+          </a:bodyPr>
+          <a:lstStyle/>
+          <a:p>
+            <a:pPr algn="l"/>
+            <a:r>
+              <a:rPr sz="1000" b="1">
                 <a:solidFill>
                   <a:srgbClr val="FFFFFF"/>
                 </a:solidFill>
                 <a:latin typeface="Open Sans"/>
               </a:rPr>
-              <a:t>Records</a:t>
-            </a:r>
-          </a:p>
-        </p:txBody>
-      </p:sp>
-      <p:sp>
-        <p:nvSpPr>
-          <p:cNvPr id="30" name="TextBox 29"/>
-          <p:cNvSpPr txBox="1"/>
-          <p:nvPr/>
-        </p:nvSpPr>
-        <p:spPr>
-          <a:xfrm>
-            <a:off x="1417320" y="4882896"/>
-            <a:ext cx="777240" cy="182880"/>
-          </a:xfrm>
-          <a:prstGeom prst="rect">
-            <a:avLst/>
-          </a:prstGeom>
-          <a:noFill/>
-        </p:spPr>
-        <p:txBody>
-          <a:bodyPr wrap="square" anchor="t" lIns="0" rIns="0" tIns="0" bIns="0">
-            <a:spAutoFit/>
-          </a:bodyPr>
-          <a:lstStyle/>
-          <a:p>
-            <a:pPr algn="l"/>
-            <a:r>
-              <a:rPr sz="900" b="1">
+              <a:t>Total owed</a:t>
+            </a:r>
+          </a:p>
+        </p:txBody>
+      </p:sp>
+      <p:sp>
+        <p:nvSpPr>
+          <p:cNvPr id="22" name="TextBox 21"/>
+          <p:cNvSpPr txBox="1"/>
+          <p:nvPr/>
+        </p:nvSpPr>
+        <p:spPr>
+          <a:xfrm>
+            <a:off x="4297680" y="4983480"/>
+            <a:ext cx="1463040" cy="201168"/>
+          </a:xfrm>
+          <a:prstGeom prst="rect">
+            <a:avLst/>
+          </a:prstGeom>
+          <a:noFill/>
+        </p:spPr>
+        <p:txBody>
+          <a:bodyPr wrap="square" anchor="t" lIns="0" rIns="0" tIns="0" bIns="0">
+            <a:spAutoFit/>
+          </a:bodyPr>
+          <a:lstStyle/>
+          <a:p>
+            <a:pPr algn="l"/>
+            <a:r>
+              <a:rPr sz="1000" b="1">
                 <a:solidFill>
                   <a:srgbClr val="FFFFFF"/>
                 </a:solidFill>
                 <a:latin typeface="Open Sans"/>
               </a:rPr>
-              <a:t>Customers</a:t>
-            </a:r>
-          </a:p>
-        </p:txBody>
-      </p:sp>
-      <p:sp>
-        <p:nvSpPr>
-          <p:cNvPr id="31" name="TextBox 30"/>
-          <p:cNvSpPr txBox="1"/>
-          <p:nvPr/>
-        </p:nvSpPr>
-        <p:spPr>
-          <a:xfrm>
-            <a:off x="2240280" y="4882896"/>
-            <a:ext cx="777240" cy="182880"/>
-          </a:xfrm>
-          <a:prstGeom prst="rect">
-            <a:avLst/>
-          </a:prstGeom>
-          <a:noFill/>
-        </p:spPr>
-        <p:txBody>
-          <a:bodyPr wrap="square" anchor="t" lIns="0" rIns="0" tIns="0" bIns="0">
-            <a:spAutoFit/>
-          </a:bodyPr>
-          <a:lstStyle/>
-          <a:p>
-            <a:pPr algn="l"/>
-            <a:r>
-              <a:rPr sz="900" b="1">
+              <a:t>Net actives</a:t>
+            </a:r>
+          </a:p>
+        </p:txBody>
+      </p:sp>
+      <p:sp>
+        <p:nvSpPr>
+          <p:cNvPr id="23" name="TextBox 22"/>
+          <p:cNvSpPr txBox="1"/>
+          <p:nvPr/>
+        </p:nvSpPr>
+        <p:spPr>
+          <a:xfrm>
+            <a:off x="5943600" y="4983480"/>
+            <a:ext cx="1737360" cy="201168"/>
+          </a:xfrm>
+          <a:prstGeom prst="rect">
+            <a:avLst/>
+          </a:prstGeom>
+          <a:noFill/>
+        </p:spPr>
+        <p:txBody>
+          <a:bodyPr wrap="square" anchor="t" lIns="0" rIns="0" tIns="0" bIns="0">
+            <a:spAutoFit/>
+          </a:bodyPr>
+          <a:lstStyle/>
+          <a:p>
+            <a:pPr algn="l"/>
+            <a:r>
+              <a:rPr sz="1000" b="1">
                 <a:solidFill>
                   <a:srgbClr val="FFFFFF"/>
                 </a:solidFill>
                 <a:latin typeface="Open Sans"/>
               </a:rPr>
-              <a:t>$ total</a:t>
-            </a:r>
-          </a:p>
-        </p:txBody>
-      </p:sp>
-      <p:sp>
-        <p:nvSpPr>
-          <p:cNvPr id="32" name="TextBox 31"/>
-          <p:cNvSpPr txBox="1"/>
-          <p:nvPr/>
-        </p:nvSpPr>
-        <p:spPr>
-          <a:xfrm>
-            <a:off x="3063240" y="4882896"/>
-            <a:ext cx="914400" cy="182880"/>
-          </a:xfrm>
-          <a:prstGeom prst="rect">
-            <a:avLst/>
-          </a:prstGeom>
-          <a:noFill/>
-        </p:spPr>
-        <p:txBody>
-          <a:bodyPr wrap="square" anchor="t" lIns="0" rIns="0" tIns="0" bIns="0">
-            <a:spAutoFit/>
-          </a:bodyPr>
-          <a:lstStyle/>
-          <a:p>
-            <a:pPr algn="l"/>
-            <a:r>
-              <a:rPr sz="900" b="1">
+              <a:t>Bucket total</a:t>
+            </a:r>
+          </a:p>
+        </p:txBody>
+      </p:sp>
+      <p:sp>
+        <p:nvSpPr>
+          <p:cNvPr id="24" name="TextBox 23"/>
+          <p:cNvSpPr txBox="1"/>
+          <p:nvPr/>
+        </p:nvSpPr>
+        <p:spPr>
+          <a:xfrm>
+            <a:off x="7863840" y="4983480"/>
+            <a:ext cx="1920240" cy="201168"/>
+          </a:xfrm>
+          <a:prstGeom prst="rect">
+            <a:avLst/>
+          </a:prstGeom>
+          <a:noFill/>
+        </p:spPr>
+        <p:txBody>
+          <a:bodyPr wrap="square" anchor="t" lIns="0" rIns="0" tIns="0" bIns="0">
+            <a:spAutoFit/>
+          </a:bodyPr>
+          <a:lstStyle/>
+          <a:p>
+            <a:pPr algn="l"/>
+            <a:r>
+              <a:rPr sz="1000" b="1">
                 <a:solidFill>
                   <a:srgbClr val="FFFFFF"/>
                 </a:solidFill>
                 <a:latin typeface="Open Sans"/>
               </a:rPr>
-              <a:t>$/customer</a:t>
-            </a:r>
-          </a:p>
-        </p:txBody>
-      </p:sp>
-      <p:sp>
-        <p:nvSpPr>
-          <p:cNvPr id="33" name="TextBox 32"/>
-          <p:cNvSpPr txBox="1"/>
-          <p:nvPr/>
-        </p:nvSpPr>
-        <p:spPr>
-          <a:xfrm>
-            <a:off x="4023360" y="4882896"/>
-            <a:ext cx="1874519" cy="182880"/>
-          </a:xfrm>
-          <a:prstGeom prst="rect">
-            <a:avLst/>
-          </a:prstGeom>
-          <a:noFill/>
-        </p:spPr>
-        <p:txBody>
-          <a:bodyPr wrap="square" anchor="t" lIns="0" rIns="0" tIns="0" bIns="0">
-            <a:spAutoFit/>
-          </a:bodyPr>
-          <a:lstStyle/>
-          <a:p>
-            <a:pPr algn="l"/>
-            <a:r>
-              <a:rPr sz="900" b="1">
-                <a:solidFill>
-                  <a:srgbClr val="FFFFFF"/>
-                </a:solidFill>
-                <a:latin typeface="Open Sans"/>
-              </a:rPr>
-              <a:t>Confidence</a:t>
-            </a:r>
-          </a:p>
-        </p:txBody>
-      </p:sp>
-      <p:sp>
-        <p:nvSpPr>
-          <p:cNvPr id="34" name="Rectangle 33"/>
+              <a:t>$ per net active</a:t>
+            </a:r>
+          </a:p>
+        </p:txBody>
+      </p:sp>
+      <p:sp>
+        <p:nvSpPr>
+          <p:cNvPr id="25" name="Rectangle 24"/>
           <p:cNvSpPr/>
           <p:nvPr/>
         </p:nvSpPr>
         <p:spPr>
           <a:xfrm>
-            <a:off x="457200" y="5084064"/>
-            <a:ext cx="5486400" cy="301752"/>
+            <a:off x="2286000" y="5193792"/>
+            <a:ext cx="7589520" cy="310896"/>
           </a:xfrm>
           <a:prstGeom prst="rect">
             <a:avLst/>
@@ -13791,189 +13432,154 @@
       </p:sp>
       <p:sp>
         <p:nvSpPr>
-          <p:cNvPr id="35" name="TextBox 34"/>
-          <p:cNvSpPr txBox="1"/>
-          <p:nvPr/>
-        </p:nvSpPr>
-        <p:spPr>
-          <a:xfrm>
-            <a:off x="502920" y="5138927"/>
-            <a:ext cx="868680" cy="201168"/>
-          </a:xfrm>
-          <a:prstGeom prst="rect">
-            <a:avLst/>
-          </a:prstGeom>
-          <a:noFill/>
-        </p:spPr>
-        <p:txBody>
-          <a:bodyPr wrap="square" anchor="t" lIns="0" rIns="0" tIns="0" bIns="0">
-            <a:spAutoFit/>
-          </a:bodyPr>
-          <a:lstStyle/>
-          <a:p>
-            <a:pPr algn="l"/>
-            <a:r>
-              <a:rPr sz="1000" b="1">
-                <a:solidFill>
-                  <a:srgbClr val="0F172A"/>
-                </a:solidFill>
-                <a:latin typeface="Open Sans"/>
-              </a:rPr>
-              <a:t>1 record</a:t>
-            </a:r>
-          </a:p>
-        </p:txBody>
-      </p:sp>
-      <p:sp>
-        <p:nvSpPr>
-          <p:cNvPr id="36" name="TextBox 35"/>
-          <p:cNvSpPr txBox="1"/>
-          <p:nvPr/>
-        </p:nvSpPr>
-        <p:spPr>
-          <a:xfrm>
-            <a:off x="1417320" y="5138927"/>
-            <a:ext cx="777240" cy="201168"/>
-          </a:xfrm>
-          <a:prstGeom prst="rect">
-            <a:avLst/>
-          </a:prstGeom>
-          <a:noFill/>
-        </p:spPr>
-        <p:txBody>
-          <a:bodyPr wrap="square" anchor="t" lIns="0" rIns="0" tIns="0" bIns="0">
-            <a:spAutoFit/>
-          </a:bodyPr>
-          <a:lstStyle/>
-          <a:p>
-            <a:pPr algn="l"/>
-            <a:r>
-              <a:rPr sz="1000" b="0">
+          <p:cNvPr id="26" name="TextBox 25"/>
+          <p:cNvSpPr txBox="1"/>
+          <p:nvPr/>
+        </p:nvSpPr>
+        <p:spPr>
+          <a:xfrm>
+            <a:off x="2377440" y="5257800"/>
+            <a:ext cx="1737360" cy="219456"/>
+          </a:xfrm>
+          <a:prstGeom prst="rect">
+            <a:avLst/>
+          </a:prstGeom>
+          <a:noFill/>
+        </p:spPr>
+        <p:txBody>
+          <a:bodyPr wrap="square" anchor="t" lIns="0" rIns="0" tIns="0" bIns="0">
+            <a:spAutoFit/>
+          </a:bodyPr>
+          <a:lstStyle/>
+          <a:p>
+            <a:pPr algn="l"/>
+            <a:r>
+              <a:rPr sz="1100" b="1">
+                <a:solidFill>
+                  <a:srgbClr val="64748B"/>
+                </a:solidFill>
+                <a:latin typeface="Open Sans"/>
+              </a:rPr>
+              <a:t>$0–$9.99</a:t>
+            </a:r>
+          </a:p>
+        </p:txBody>
+      </p:sp>
+      <p:sp>
+        <p:nvSpPr>
+          <p:cNvPr id="27" name="TextBox 26"/>
+          <p:cNvSpPr txBox="1"/>
+          <p:nvPr/>
+        </p:nvSpPr>
+        <p:spPr>
+          <a:xfrm>
+            <a:off x="4297680" y="5257800"/>
+            <a:ext cx="1463040" cy="219456"/>
+          </a:xfrm>
+          <a:prstGeom prst="rect">
+            <a:avLst/>
+          </a:prstGeom>
+          <a:noFill/>
+        </p:spPr>
+        <p:txBody>
+          <a:bodyPr wrap="square" anchor="t" lIns="0" rIns="0" tIns="0" bIns="0">
+            <a:spAutoFit/>
+          </a:bodyPr>
+          <a:lstStyle/>
+          <a:p>
+            <a:pPr algn="l"/>
+            <a:r>
+              <a:rPr sz="1100" b="0">
                 <a:solidFill>
                   <a:srgbClr val="334155"/>
                 </a:solidFill>
                 <a:latin typeface="Open Sans"/>
               </a:rPr>
-              <a:t>3,331</a:t>
-            </a:r>
-          </a:p>
-        </p:txBody>
-      </p:sp>
-      <p:sp>
-        <p:nvSpPr>
-          <p:cNvPr id="37" name="TextBox 36"/>
-          <p:cNvSpPr txBox="1"/>
-          <p:nvPr/>
-        </p:nvSpPr>
-        <p:spPr>
-          <a:xfrm>
-            <a:off x="2240280" y="5138927"/>
-            <a:ext cx="777240" cy="201168"/>
-          </a:xfrm>
-          <a:prstGeom prst="rect">
-            <a:avLst/>
-          </a:prstGeom>
-          <a:noFill/>
-        </p:spPr>
-        <p:txBody>
-          <a:bodyPr wrap="square" anchor="t" lIns="0" rIns="0" tIns="0" bIns="0">
-            <a:spAutoFit/>
-          </a:bodyPr>
-          <a:lstStyle/>
-          <a:p>
-            <a:pPr algn="l"/>
-            <a:r>
-              <a:rPr sz="1000" b="1">
-                <a:solidFill>
-                  <a:srgbClr val="059669"/>
-                </a:solidFill>
-                <a:latin typeface="Open Sans"/>
-              </a:rPr>
-              <a:t>$219K</a:t>
-            </a:r>
-          </a:p>
-        </p:txBody>
-      </p:sp>
-      <p:sp>
-        <p:nvSpPr>
-          <p:cNvPr id="38" name="TextBox 37"/>
-          <p:cNvSpPr txBox="1"/>
-          <p:nvPr/>
-        </p:nvSpPr>
-        <p:spPr>
-          <a:xfrm>
-            <a:off x="3063240" y="5138927"/>
-            <a:ext cx="914400" cy="201168"/>
-          </a:xfrm>
-          <a:prstGeom prst="rect">
-            <a:avLst/>
-          </a:prstGeom>
-          <a:noFill/>
-        </p:spPr>
-        <p:txBody>
-          <a:bodyPr wrap="square" anchor="t" lIns="0" rIns="0" tIns="0" bIns="0">
-            <a:spAutoFit/>
-          </a:bodyPr>
-          <a:lstStyle/>
-          <a:p>
-            <a:pPr algn="l"/>
-            <a:r>
-              <a:rPr sz="1000" b="0">
-                <a:solidFill>
-                  <a:srgbClr val="059669"/>
-                </a:solidFill>
-                <a:latin typeface="Open Sans"/>
-              </a:rPr>
-              <a:t>$66</a:t>
-            </a:r>
-          </a:p>
-        </p:txBody>
-      </p:sp>
-      <p:sp>
-        <p:nvSpPr>
-          <p:cNvPr id="39" name="TextBox 38"/>
-          <p:cNvSpPr txBox="1"/>
-          <p:nvPr/>
-        </p:nvSpPr>
-        <p:spPr>
-          <a:xfrm>
-            <a:off x="4023360" y="5138927"/>
-            <a:ext cx="1874519" cy="201168"/>
-          </a:xfrm>
-          <a:prstGeom prst="rect">
-            <a:avLst/>
-          </a:prstGeom>
-          <a:noFill/>
-        </p:spPr>
-        <p:txBody>
-          <a:bodyPr wrap="square" anchor="t" lIns="0" rIns="0" tIns="0" bIns="0">
-            <a:spAutoFit/>
-          </a:bodyPr>
-          <a:lstStyle/>
-          <a:p>
-            <a:pPr algn="l"/>
-            <a:r>
-              <a:rPr sz="900" b="0">
+              <a:t>2,774</a:t>
+            </a:r>
+          </a:p>
+        </p:txBody>
+      </p:sp>
+      <p:sp>
+        <p:nvSpPr>
+          <p:cNvPr id="28" name="TextBox 27"/>
+          <p:cNvSpPr txBox="1"/>
+          <p:nvPr/>
+        </p:nvSpPr>
+        <p:spPr>
+          <a:xfrm>
+            <a:off x="5943600" y="5257800"/>
+            <a:ext cx="1737360" cy="219456"/>
+          </a:xfrm>
+          <a:prstGeom prst="rect">
+            <a:avLst/>
+          </a:prstGeom>
+          <a:noFill/>
+        </p:spPr>
+        <p:txBody>
+          <a:bodyPr wrap="square" anchor="t" lIns="0" rIns="0" tIns="0" bIns="0">
+            <a:spAutoFit/>
+          </a:bodyPr>
+          <a:lstStyle/>
+          <a:p>
+            <a:pPr algn="l"/>
+            <a:r>
+              <a:rPr sz="1100" b="1">
                 <a:solidFill>
                   <a:srgbClr val="64748B"/>
                 </a:solidFill>
                 <a:latin typeface="Open Sans"/>
               </a:rPr>
-              <a:t>High confidence</a:t>
-            </a:r>
-          </a:p>
-        </p:txBody>
-      </p:sp>
-      <p:sp>
-        <p:nvSpPr>
-          <p:cNvPr id="40" name="Rectangle 39"/>
+              <a:t>$9K</a:t>
+            </a:r>
+          </a:p>
+        </p:txBody>
+      </p:sp>
+      <p:sp>
+        <p:nvSpPr>
+          <p:cNvPr id="29" name="TextBox 28"/>
+          <p:cNvSpPr txBox="1"/>
+          <p:nvPr/>
+        </p:nvSpPr>
+        <p:spPr>
+          <a:xfrm>
+            <a:off x="7863840" y="5257800"/>
+            <a:ext cx="1920240" cy="219456"/>
+          </a:xfrm>
+          <a:prstGeom prst="rect">
+            <a:avLst/>
+          </a:prstGeom>
+          <a:noFill/>
+        </p:spPr>
+        <p:txBody>
+          <a:bodyPr wrap="square" anchor="t" lIns="0" rIns="0" tIns="0" bIns="0">
+            <a:spAutoFit/>
+          </a:bodyPr>
+          <a:lstStyle/>
+          <a:p>
+            <a:pPr algn="l"/>
+            <a:r>
+              <a:rPr sz="1100" b="0">
+                <a:solidFill>
+                  <a:srgbClr val="64748B"/>
+                </a:solidFill>
+                <a:latin typeface="Open Sans"/>
+              </a:rPr>
+              <a:t>$3</a:t>
+            </a:r>
+          </a:p>
+        </p:txBody>
+      </p:sp>
+      <p:sp>
+        <p:nvSpPr>
+          <p:cNvPr id="30" name="Rectangle 29"/>
           <p:cNvSpPr/>
           <p:nvPr/>
         </p:nvSpPr>
         <p:spPr>
           <a:xfrm>
-            <a:off x="457200" y="5385816"/>
-            <a:ext cx="5486400" cy="301752"/>
+            <a:off x="2286000" y="5504688"/>
+            <a:ext cx="7589520" cy="310896"/>
           </a:xfrm>
           <a:prstGeom prst="rect">
             <a:avLst/>
@@ -14010,189 +13616,154 @@
       </p:sp>
       <p:sp>
         <p:nvSpPr>
-          <p:cNvPr id="41" name="TextBox 40"/>
-          <p:cNvSpPr txBox="1"/>
-          <p:nvPr/>
-        </p:nvSpPr>
-        <p:spPr>
-          <a:xfrm>
-            <a:off x="502920" y="5440679"/>
-            <a:ext cx="868680" cy="201168"/>
-          </a:xfrm>
-          <a:prstGeom prst="rect">
-            <a:avLst/>
-          </a:prstGeom>
-          <a:noFill/>
-        </p:spPr>
-        <p:txBody>
-          <a:bodyPr wrap="square" anchor="t" lIns="0" rIns="0" tIns="0" bIns="0">
-            <a:spAutoFit/>
-          </a:bodyPr>
-          <a:lstStyle/>
-          <a:p>
-            <a:pPr algn="l"/>
-            <a:r>
-              <a:rPr sz="1000" b="1">
-                <a:solidFill>
-                  <a:srgbClr val="0F172A"/>
-                </a:solidFill>
-                <a:latin typeface="Open Sans"/>
-              </a:rPr>
-              <a:t>2–5 records</a:t>
-            </a:r>
-          </a:p>
-        </p:txBody>
-      </p:sp>
-      <p:sp>
-        <p:nvSpPr>
-          <p:cNvPr id="42" name="TextBox 41"/>
-          <p:cNvSpPr txBox="1"/>
-          <p:nvPr/>
-        </p:nvSpPr>
-        <p:spPr>
-          <a:xfrm>
-            <a:off x="1417320" y="5440679"/>
-            <a:ext cx="777240" cy="201168"/>
-          </a:xfrm>
-          <a:prstGeom prst="rect">
-            <a:avLst/>
-          </a:prstGeom>
-          <a:noFill/>
-        </p:spPr>
-        <p:txBody>
-          <a:bodyPr wrap="square" anchor="t" lIns="0" rIns="0" tIns="0" bIns="0">
-            <a:spAutoFit/>
-          </a:bodyPr>
-          <a:lstStyle/>
-          <a:p>
-            <a:pPr algn="l"/>
-            <a:r>
-              <a:rPr sz="1000" b="0">
+          <p:cNvPr id="31" name="TextBox 30"/>
+          <p:cNvSpPr txBox="1"/>
+          <p:nvPr/>
+        </p:nvSpPr>
+        <p:spPr>
+          <a:xfrm>
+            <a:off x="2377440" y="5568696"/>
+            <a:ext cx="1737360" cy="219456"/>
+          </a:xfrm>
+          <a:prstGeom prst="rect">
+            <a:avLst/>
+          </a:prstGeom>
+          <a:noFill/>
+        </p:spPr>
+        <p:txBody>
+          <a:bodyPr wrap="square" anchor="t" lIns="0" rIns="0" tIns="0" bIns="0">
+            <a:spAutoFit/>
+          </a:bodyPr>
+          <a:lstStyle/>
+          <a:p>
+            <a:pPr algn="l"/>
+            <a:r>
+              <a:rPr sz="1100" b="1">
+                <a:solidFill>
+                  <a:srgbClr val="059669"/>
+                </a:solidFill>
+                <a:latin typeface="Open Sans"/>
+              </a:rPr>
+              <a:t>$10–$99.99</a:t>
+            </a:r>
+          </a:p>
+        </p:txBody>
+      </p:sp>
+      <p:sp>
+        <p:nvSpPr>
+          <p:cNvPr id="32" name="TextBox 31"/>
+          <p:cNvSpPr txBox="1"/>
+          <p:nvPr/>
+        </p:nvSpPr>
+        <p:spPr>
+          <a:xfrm>
+            <a:off x="4297680" y="5568696"/>
+            <a:ext cx="1463040" cy="219456"/>
+          </a:xfrm>
+          <a:prstGeom prst="rect">
+            <a:avLst/>
+          </a:prstGeom>
+          <a:noFill/>
+        </p:spPr>
+        <p:txBody>
+          <a:bodyPr wrap="square" anchor="t" lIns="0" rIns="0" tIns="0" bIns="0">
+            <a:spAutoFit/>
+          </a:bodyPr>
+          <a:lstStyle/>
+          <a:p>
+            <a:pPr algn="l"/>
+            <a:r>
+              <a:rPr sz="1100" b="0">
                 <a:solidFill>
                   <a:srgbClr val="334155"/>
                 </a:solidFill>
                 <a:latin typeface="Open Sans"/>
               </a:rPr>
-              <a:t>5,790</a:t>
-            </a:r>
-          </a:p>
-        </p:txBody>
-      </p:sp>
-      <p:sp>
-        <p:nvSpPr>
-          <p:cNvPr id="43" name="TextBox 42"/>
-          <p:cNvSpPr txBox="1"/>
-          <p:nvPr/>
-        </p:nvSpPr>
-        <p:spPr>
-          <a:xfrm>
-            <a:off x="2240280" y="5440679"/>
-            <a:ext cx="777240" cy="201168"/>
-          </a:xfrm>
-          <a:prstGeom prst="rect">
-            <a:avLst/>
-          </a:prstGeom>
-          <a:noFill/>
-        </p:spPr>
-        <p:txBody>
-          <a:bodyPr wrap="square" anchor="t" lIns="0" rIns="0" tIns="0" bIns="0">
-            <a:spAutoFit/>
-          </a:bodyPr>
-          <a:lstStyle/>
-          <a:p>
-            <a:pPr algn="l"/>
-            <a:r>
-              <a:rPr sz="1000" b="1">
+              <a:t>4,526</a:t>
+            </a:r>
+          </a:p>
+        </p:txBody>
+      </p:sp>
+      <p:sp>
+        <p:nvSpPr>
+          <p:cNvPr id="33" name="TextBox 32"/>
+          <p:cNvSpPr txBox="1"/>
+          <p:nvPr/>
+        </p:nvSpPr>
+        <p:spPr>
+          <a:xfrm>
+            <a:off x="5943600" y="5568696"/>
+            <a:ext cx="1737360" cy="219456"/>
+          </a:xfrm>
+          <a:prstGeom prst="rect">
+            <a:avLst/>
+          </a:prstGeom>
+          <a:noFill/>
+        </p:spPr>
+        <p:txBody>
+          <a:bodyPr wrap="square" anchor="t" lIns="0" rIns="0" tIns="0" bIns="0">
+            <a:spAutoFit/>
+          </a:bodyPr>
+          <a:lstStyle/>
+          <a:p>
+            <a:pPr algn="l"/>
+            <a:r>
+              <a:rPr sz="1100" b="1">
                 <a:solidFill>
                   <a:srgbClr val="059669"/>
                 </a:solidFill>
                 <a:latin typeface="Open Sans"/>
               </a:rPr>
-              <a:t>$1.19M</a:t>
-            </a:r>
-          </a:p>
-        </p:txBody>
-      </p:sp>
-      <p:sp>
-        <p:nvSpPr>
-          <p:cNvPr id="44" name="TextBox 43"/>
-          <p:cNvSpPr txBox="1"/>
-          <p:nvPr/>
-        </p:nvSpPr>
-        <p:spPr>
-          <a:xfrm>
-            <a:off x="3063240" y="5440679"/>
-            <a:ext cx="914400" cy="201168"/>
-          </a:xfrm>
-          <a:prstGeom prst="rect">
-            <a:avLst/>
-          </a:prstGeom>
-          <a:noFill/>
-        </p:spPr>
-        <p:txBody>
-          <a:bodyPr wrap="square" anchor="t" lIns="0" rIns="0" tIns="0" bIns="0">
-            <a:spAutoFit/>
-          </a:bodyPr>
-          <a:lstStyle/>
-          <a:p>
-            <a:pPr algn="l"/>
-            <a:r>
-              <a:rPr sz="1000" b="0">
+              <a:t>$198K</a:t>
+            </a:r>
+          </a:p>
+        </p:txBody>
+      </p:sp>
+      <p:sp>
+        <p:nvSpPr>
+          <p:cNvPr id="34" name="TextBox 33"/>
+          <p:cNvSpPr txBox="1"/>
+          <p:nvPr/>
+        </p:nvSpPr>
+        <p:spPr>
+          <a:xfrm>
+            <a:off x="7863840" y="5568696"/>
+            <a:ext cx="1920240" cy="219456"/>
+          </a:xfrm>
+          <a:prstGeom prst="rect">
+            <a:avLst/>
+          </a:prstGeom>
+          <a:noFill/>
+        </p:spPr>
+        <p:txBody>
+          <a:bodyPr wrap="square" anchor="t" lIns="0" rIns="0" tIns="0" bIns="0">
+            <a:spAutoFit/>
+          </a:bodyPr>
+          <a:lstStyle/>
+          <a:p>
+            <a:pPr algn="l"/>
+            <a:r>
+              <a:rPr sz="1100" b="0">
                 <a:solidFill>
                   <a:srgbClr val="059669"/>
                 </a:solidFill>
                 <a:latin typeface="Open Sans"/>
               </a:rPr>
-              <a:t>$205</a:t>
-            </a:r>
-          </a:p>
-        </p:txBody>
-      </p:sp>
-      <p:sp>
-        <p:nvSpPr>
-          <p:cNvPr id="45" name="TextBox 44"/>
-          <p:cNvSpPr txBox="1"/>
-          <p:nvPr/>
-        </p:nvSpPr>
-        <p:spPr>
-          <a:xfrm>
-            <a:off x="4023360" y="5440679"/>
-            <a:ext cx="1874519" cy="201168"/>
-          </a:xfrm>
-          <a:prstGeom prst="rect">
-            <a:avLst/>
-          </a:prstGeom>
-          <a:noFill/>
-        </p:spPr>
-        <p:txBody>
-          <a:bodyPr wrap="square" anchor="t" lIns="0" rIns="0" tIns="0" bIns="0">
-            <a:spAutoFit/>
-          </a:bodyPr>
-          <a:lstStyle/>
-          <a:p>
-            <a:pPr algn="l"/>
-            <a:r>
-              <a:rPr sz="900" b="0">
-                <a:solidFill>
-                  <a:srgbClr val="64748B"/>
-                </a:solidFill>
-                <a:latin typeface="Open Sans"/>
-              </a:rPr>
-              <a:t>High confidence</a:t>
-            </a:r>
-          </a:p>
-        </p:txBody>
-      </p:sp>
-      <p:sp>
-        <p:nvSpPr>
-          <p:cNvPr id="46" name="Rectangle 45"/>
+              <a:t>$44</a:t>
+            </a:r>
+          </a:p>
+        </p:txBody>
+      </p:sp>
+      <p:sp>
+        <p:nvSpPr>
+          <p:cNvPr id="35" name="Rectangle 34"/>
           <p:cNvSpPr/>
           <p:nvPr/>
         </p:nvSpPr>
         <p:spPr>
           <a:xfrm>
-            <a:off x="457200" y="5687568"/>
-            <a:ext cx="5486400" cy="301752"/>
+            <a:off x="2286000" y="5815584"/>
+            <a:ext cx="7589520" cy="310896"/>
           </a:xfrm>
           <a:prstGeom prst="rect">
             <a:avLst/>
@@ -14229,189 +13800,154 @@
       </p:sp>
       <p:sp>
         <p:nvSpPr>
-          <p:cNvPr id="47" name="TextBox 46"/>
-          <p:cNvSpPr txBox="1"/>
-          <p:nvPr/>
-        </p:nvSpPr>
-        <p:spPr>
-          <a:xfrm>
-            <a:off x="502920" y="5742431"/>
-            <a:ext cx="868680" cy="201168"/>
-          </a:xfrm>
-          <a:prstGeom prst="rect">
-            <a:avLst/>
-          </a:prstGeom>
-          <a:noFill/>
-        </p:spPr>
-        <p:txBody>
-          <a:bodyPr wrap="square" anchor="t" lIns="0" rIns="0" tIns="0" bIns="0">
-            <a:spAutoFit/>
-          </a:bodyPr>
-          <a:lstStyle/>
-          <a:p>
-            <a:pPr algn="l"/>
-            <a:r>
-              <a:rPr sz="1000" b="1">
-                <a:solidFill>
-                  <a:srgbClr val="0F172A"/>
-                </a:solidFill>
-                <a:latin typeface="Open Sans"/>
-              </a:rPr>
-              <a:t>6–20 records</a:t>
-            </a:r>
-          </a:p>
-        </p:txBody>
-      </p:sp>
-      <p:sp>
-        <p:nvSpPr>
-          <p:cNvPr id="48" name="TextBox 47"/>
-          <p:cNvSpPr txBox="1"/>
-          <p:nvPr/>
-        </p:nvSpPr>
-        <p:spPr>
-          <a:xfrm>
-            <a:off x="1417320" y="5742431"/>
-            <a:ext cx="777240" cy="201168"/>
-          </a:xfrm>
-          <a:prstGeom prst="rect">
-            <a:avLst/>
-          </a:prstGeom>
-          <a:noFill/>
-        </p:spPr>
-        <p:txBody>
-          <a:bodyPr wrap="square" anchor="t" lIns="0" rIns="0" tIns="0" bIns="0">
-            <a:spAutoFit/>
-          </a:bodyPr>
-          <a:lstStyle/>
-          <a:p>
-            <a:pPr algn="l"/>
-            <a:r>
-              <a:rPr sz="1000" b="0">
+          <p:cNvPr id="36" name="TextBox 35"/>
+          <p:cNvSpPr txBox="1"/>
+          <p:nvPr/>
+        </p:nvSpPr>
+        <p:spPr>
+          <a:xfrm>
+            <a:off x="2377440" y="5879592"/>
+            <a:ext cx="1737360" cy="219456"/>
+          </a:xfrm>
+          <a:prstGeom prst="rect">
+            <a:avLst/>
+          </a:prstGeom>
+          <a:noFill/>
+        </p:spPr>
+        <p:txBody>
+          <a:bodyPr wrap="square" anchor="t" lIns="0" rIns="0" tIns="0" bIns="0">
+            <a:spAutoFit/>
+          </a:bodyPr>
+          <a:lstStyle/>
+          <a:p>
+            <a:pPr algn="l"/>
+            <a:r>
+              <a:rPr sz="1100" b="1">
+                <a:solidFill>
+                  <a:srgbClr val="FFB352"/>
+                </a:solidFill>
+                <a:latin typeface="Open Sans"/>
+              </a:rPr>
+              <a:t>$100–$499.99</a:t>
+            </a:r>
+          </a:p>
+        </p:txBody>
+      </p:sp>
+      <p:sp>
+        <p:nvSpPr>
+          <p:cNvPr id="37" name="TextBox 36"/>
+          <p:cNvSpPr txBox="1"/>
+          <p:nvPr/>
+        </p:nvSpPr>
+        <p:spPr>
+          <a:xfrm>
+            <a:off x="4297680" y="5879592"/>
+            <a:ext cx="1463040" cy="219456"/>
+          </a:xfrm>
+          <a:prstGeom prst="rect">
+            <a:avLst/>
+          </a:prstGeom>
+          <a:noFill/>
+        </p:spPr>
+        <p:txBody>
+          <a:bodyPr wrap="square" anchor="t" lIns="0" rIns="0" tIns="0" bIns="0">
+            <a:spAutoFit/>
+          </a:bodyPr>
+          <a:lstStyle/>
+          <a:p>
+            <a:pPr algn="l"/>
+            <a:r>
+              <a:rPr sz="1100" b="0">
                 <a:solidFill>
                   <a:srgbClr val="334155"/>
                 </a:solidFill>
                 <a:latin typeface="Open Sans"/>
               </a:rPr>
-              <a:t>4,388</a:t>
-            </a:r>
-          </a:p>
-        </p:txBody>
-      </p:sp>
-      <p:sp>
-        <p:nvSpPr>
-          <p:cNvPr id="49" name="TextBox 48"/>
-          <p:cNvSpPr txBox="1"/>
-          <p:nvPr/>
-        </p:nvSpPr>
-        <p:spPr>
-          <a:xfrm>
-            <a:off x="2240280" y="5742431"/>
-            <a:ext cx="777240" cy="201168"/>
-          </a:xfrm>
-          <a:prstGeom prst="rect">
-            <a:avLst/>
-          </a:prstGeom>
-          <a:noFill/>
-        </p:spPr>
-        <p:txBody>
-          <a:bodyPr wrap="square" anchor="t" lIns="0" rIns="0" tIns="0" bIns="0">
-            <a:spAutoFit/>
-          </a:bodyPr>
-          <a:lstStyle/>
-          <a:p>
-            <a:pPr algn="l"/>
-            <a:r>
-              <a:rPr sz="1000" b="1">
+              <a:t>4,317</a:t>
+            </a:r>
+          </a:p>
+        </p:txBody>
+      </p:sp>
+      <p:sp>
+        <p:nvSpPr>
+          <p:cNvPr id="38" name="TextBox 37"/>
+          <p:cNvSpPr txBox="1"/>
+          <p:nvPr/>
+        </p:nvSpPr>
+        <p:spPr>
+          <a:xfrm>
+            <a:off x="5943600" y="5879592"/>
+            <a:ext cx="1737360" cy="219456"/>
+          </a:xfrm>
+          <a:prstGeom prst="rect">
+            <a:avLst/>
+          </a:prstGeom>
+          <a:noFill/>
+        </p:spPr>
+        <p:txBody>
+          <a:bodyPr wrap="square" anchor="t" lIns="0" rIns="0" tIns="0" bIns="0">
+            <a:spAutoFit/>
+          </a:bodyPr>
+          <a:lstStyle/>
+          <a:p>
+            <a:pPr algn="l"/>
+            <a:r>
+              <a:rPr sz="1100" b="1">
                 <a:solidFill>
                   <a:srgbClr val="FFB352"/>
                 </a:solidFill>
                 <a:latin typeface="Open Sans"/>
               </a:rPr>
-              <a:t>$3.47M</a:t>
-            </a:r>
-          </a:p>
-        </p:txBody>
-      </p:sp>
-      <p:sp>
-        <p:nvSpPr>
-          <p:cNvPr id="50" name="TextBox 49"/>
-          <p:cNvSpPr txBox="1"/>
-          <p:nvPr/>
-        </p:nvSpPr>
-        <p:spPr>
-          <a:xfrm>
-            <a:off x="3063240" y="5742431"/>
-            <a:ext cx="914400" cy="201168"/>
-          </a:xfrm>
-          <a:prstGeom prst="rect">
-            <a:avLst/>
-          </a:prstGeom>
-          <a:noFill/>
-        </p:spPr>
-        <p:txBody>
-          <a:bodyPr wrap="square" anchor="t" lIns="0" rIns="0" tIns="0" bIns="0">
-            <a:spAutoFit/>
-          </a:bodyPr>
-          <a:lstStyle/>
-          <a:p>
-            <a:pPr algn="l"/>
-            <a:r>
-              <a:rPr sz="1000" b="0">
+              <a:t>$1.06M</a:t>
+            </a:r>
+          </a:p>
+        </p:txBody>
+      </p:sp>
+      <p:sp>
+        <p:nvSpPr>
+          <p:cNvPr id="39" name="TextBox 38"/>
+          <p:cNvSpPr txBox="1"/>
+          <p:nvPr/>
+        </p:nvSpPr>
+        <p:spPr>
+          <a:xfrm>
+            <a:off x="7863840" y="5879592"/>
+            <a:ext cx="1920240" cy="219456"/>
+          </a:xfrm>
+          <a:prstGeom prst="rect">
+            <a:avLst/>
+          </a:prstGeom>
+          <a:noFill/>
+        </p:spPr>
+        <p:txBody>
+          <a:bodyPr wrap="square" anchor="t" lIns="0" rIns="0" tIns="0" bIns="0">
+            <a:spAutoFit/>
+          </a:bodyPr>
+          <a:lstStyle/>
+          <a:p>
+            <a:pPr algn="l"/>
+            <a:r>
+              <a:rPr sz="1100" b="0">
                 <a:solidFill>
                   <a:srgbClr val="FFB352"/>
                 </a:solidFill>
                 <a:latin typeface="Open Sans"/>
               </a:rPr>
-              <a:t>$792</a:t>
-            </a:r>
-          </a:p>
-        </p:txBody>
-      </p:sp>
-      <p:sp>
-        <p:nvSpPr>
-          <p:cNvPr id="51" name="TextBox 50"/>
-          <p:cNvSpPr txBox="1"/>
-          <p:nvPr/>
-        </p:nvSpPr>
-        <p:spPr>
-          <a:xfrm>
-            <a:off x="4023360" y="5742431"/>
-            <a:ext cx="1874519" cy="201168"/>
-          </a:xfrm>
-          <a:prstGeom prst="rect">
-            <a:avLst/>
-          </a:prstGeom>
-          <a:noFill/>
-        </p:spPr>
-        <p:txBody>
-          <a:bodyPr wrap="square" anchor="t" lIns="0" rIns="0" tIns="0" bIns="0">
-            <a:spAutoFit/>
-          </a:bodyPr>
-          <a:lstStyle/>
-          <a:p>
-            <a:pPr algn="l"/>
-            <a:r>
-              <a:rPr sz="900" b="0">
-                <a:solidFill>
-                  <a:srgbClr val="64748B"/>
-                </a:solidFill>
-                <a:latin typeface="Open Sans"/>
-              </a:rPr>
-              <a:t>Mixed — review</a:t>
-            </a:r>
-          </a:p>
-        </p:txBody>
-      </p:sp>
-      <p:sp>
-        <p:nvSpPr>
-          <p:cNvPr id="52" name="Rectangle 51"/>
+              <a:t>$245</a:t>
+            </a:r>
+          </a:p>
+        </p:txBody>
+      </p:sp>
+      <p:sp>
+        <p:nvSpPr>
+          <p:cNvPr id="40" name="Rectangle 39"/>
           <p:cNvSpPr/>
           <p:nvPr/>
         </p:nvSpPr>
         <p:spPr>
           <a:xfrm>
-            <a:off x="457200" y="5989320"/>
-            <a:ext cx="5486400" cy="301752"/>
+            <a:off x="2286000" y="6126480"/>
+            <a:ext cx="7589520" cy="310896"/>
           </a:xfrm>
           <a:prstGeom prst="rect">
             <a:avLst/>
@@ -14448,189 +13984,84 @@
       </p:sp>
       <p:sp>
         <p:nvSpPr>
-          <p:cNvPr id="53" name="TextBox 52"/>
-          <p:cNvSpPr txBox="1"/>
-          <p:nvPr/>
-        </p:nvSpPr>
-        <p:spPr>
-          <a:xfrm>
-            <a:off x="502920" y="6044183"/>
-            <a:ext cx="868680" cy="201168"/>
-          </a:xfrm>
-          <a:prstGeom prst="rect">
-            <a:avLst/>
-          </a:prstGeom>
-          <a:noFill/>
-        </p:spPr>
-        <p:txBody>
-          <a:bodyPr wrap="square" anchor="t" lIns="0" rIns="0" tIns="0" bIns="0">
-            <a:spAutoFit/>
-          </a:bodyPr>
-          <a:lstStyle/>
-          <a:p>
-            <a:pPr algn="l"/>
-            <a:r>
-              <a:rPr sz="1000" b="1">
-                <a:solidFill>
-                  <a:srgbClr val="0F172A"/>
-                </a:solidFill>
-                <a:latin typeface="Open Sans"/>
-              </a:rPr>
-              <a:t>20+ records</a:t>
-            </a:r>
-          </a:p>
-        </p:txBody>
-      </p:sp>
-      <p:sp>
-        <p:nvSpPr>
-          <p:cNvPr id="54" name="TextBox 53"/>
-          <p:cNvSpPr txBox="1"/>
-          <p:nvPr/>
-        </p:nvSpPr>
-        <p:spPr>
-          <a:xfrm>
-            <a:off x="1417320" y="6044183"/>
-            <a:ext cx="777240" cy="201168"/>
-          </a:xfrm>
-          <a:prstGeom prst="rect">
-            <a:avLst/>
-          </a:prstGeom>
-          <a:noFill/>
-        </p:spPr>
-        <p:txBody>
-          <a:bodyPr wrap="square" anchor="t" lIns="0" rIns="0" tIns="0" bIns="0">
-            <a:spAutoFit/>
-          </a:bodyPr>
-          <a:lstStyle/>
-          <a:p>
-            <a:pPr algn="l"/>
-            <a:r>
-              <a:rPr sz="1000" b="0">
+          <p:cNvPr id="41" name="TextBox 40"/>
+          <p:cNvSpPr txBox="1"/>
+          <p:nvPr/>
+        </p:nvSpPr>
+        <p:spPr>
+          <a:xfrm>
+            <a:off x="2377440" y="6190488"/>
+            <a:ext cx="1737360" cy="219456"/>
+          </a:xfrm>
+          <a:prstGeom prst="rect">
+            <a:avLst/>
+          </a:prstGeom>
+          <a:noFill/>
+        </p:spPr>
+        <p:txBody>
+          <a:bodyPr wrap="square" anchor="t" lIns="0" rIns="0" tIns="0" bIns="0">
+            <a:spAutoFit/>
+          </a:bodyPr>
+          <a:lstStyle/>
+          <a:p>
+            <a:pPr algn="l"/>
+            <a:r>
+              <a:rPr sz="1100" b="1">
+                <a:solidFill>
+                  <a:srgbClr val="2863C5"/>
+                </a:solidFill>
+                <a:latin typeface="Open Sans"/>
+              </a:rPr>
+              <a:t>$500+</a:t>
+            </a:r>
+          </a:p>
+        </p:txBody>
+      </p:sp>
+      <p:sp>
+        <p:nvSpPr>
+          <p:cNvPr id="42" name="TextBox 41"/>
+          <p:cNvSpPr txBox="1"/>
+          <p:nvPr/>
+        </p:nvSpPr>
+        <p:spPr>
+          <a:xfrm>
+            <a:off x="4297680" y="6190488"/>
+            <a:ext cx="1463040" cy="219456"/>
+          </a:xfrm>
+          <a:prstGeom prst="rect">
+            <a:avLst/>
+          </a:prstGeom>
+          <a:noFill/>
+        </p:spPr>
+        <p:txBody>
+          <a:bodyPr wrap="square" anchor="t" lIns="0" rIns="0" tIns="0" bIns="0">
+            <a:spAutoFit/>
+          </a:bodyPr>
+          <a:lstStyle/>
+          <a:p>
+            <a:pPr algn="l"/>
+            <a:r>
+              <a:rPr sz="1100" b="0">
                 <a:solidFill>
                   <a:srgbClr val="334155"/>
                 </a:solidFill>
                 <a:latin typeface="Open Sans"/>
               </a:rPr>
-              <a:t>9,657</a:t>
-            </a:r>
-          </a:p>
-        </p:txBody>
-      </p:sp>
-      <p:sp>
-        <p:nvSpPr>
-          <p:cNvPr id="55" name="TextBox 54"/>
-          <p:cNvSpPr txBox="1"/>
-          <p:nvPr/>
-        </p:nvSpPr>
-        <p:spPr>
-          <a:xfrm>
-            <a:off x="2240280" y="6044183"/>
-            <a:ext cx="777240" cy="201168"/>
-          </a:xfrm>
-          <a:prstGeom prst="rect">
-            <a:avLst/>
-          </a:prstGeom>
-          <a:noFill/>
-        </p:spPr>
-        <p:txBody>
-          <a:bodyPr wrap="square" anchor="t" lIns="0" rIns="0" tIns="0" bIns="0">
-            <a:spAutoFit/>
-          </a:bodyPr>
-          <a:lstStyle/>
-          <a:p>
-            <a:pPr algn="l"/>
-            <a:r>
-              <a:rPr sz="1000" b="1">
-                <a:solidFill>
-                  <a:srgbClr val="64748B"/>
-                </a:solidFill>
-                <a:latin typeface="Open Sans"/>
-              </a:rPr>
-              <a:t>$167M</a:t>
-            </a:r>
-          </a:p>
-        </p:txBody>
-      </p:sp>
-      <p:sp>
-        <p:nvSpPr>
-          <p:cNvPr id="56" name="TextBox 55"/>
-          <p:cNvSpPr txBox="1"/>
-          <p:nvPr/>
-        </p:nvSpPr>
-        <p:spPr>
-          <a:xfrm>
-            <a:off x="3063240" y="6044183"/>
-            <a:ext cx="914400" cy="201168"/>
-          </a:xfrm>
-          <a:prstGeom prst="rect">
-            <a:avLst/>
-          </a:prstGeom>
-          <a:noFill/>
-        </p:spPr>
-        <p:txBody>
-          <a:bodyPr wrap="square" anchor="t" lIns="0" rIns="0" tIns="0" bIns="0">
-            <a:spAutoFit/>
-          </a:bodyPr>
-          <a:lstStyle/>
-          <a:p>
-            <a:pPr algn="l"/>
-            <a:r>
-              <a:rPr sz="1000" b="0">
-                <a:solidFill>
-                  <a:srgbClr val="64748B"/>
-                </a:solidFill>
-                <a:latin typeface="Open Sans"/>
-              </a:rPr>
-              <a:t>$17,329</a:t>
-            </a:r>
-          </a:p>
-        </p:txBody>
-      </p:sp>
-      <p:sp>
-        <p:nvSpPr>
-          <p:cNvPr id="57" name="TextBox 56"/>
-          <p:cNvSpPr txBox="1"/>
-          <p:nvPr/>
-        </p:nvSpPr>
-        <p:spPr>
-          <a:xfrm>
-            <a:off x="4023360" y="6044183"/>
-            <a:ext cx="1874519" cy="201168"/>
-          </a:xfrm>
-          <a:prstGeom prst="rect">
-            <a:avLst/>
-          </a:prstGeom>
-          <a:noFill/>
-        </p:spPr>
-        <p:txBody>
-          <a:bodyPr wrap="square" anchor="t" lIns="0" rIns="0" tIns="0" bIns="0">
-            <a:spAutoFit/>
-          </a:bodyPr>
-          <a:lstStyle/>
-          <a:p>
-            <a:pPr algn="l"/>
-            <a:r>
-              <a:rPr sz="900" b="0">
-                <a:solidFill>
-                  <a:srgbClr val="64748B"/>
-                </a:solidFill>
-                <a:latin typeface="Open Sans"/>
-              </a:rPr>
-              <a:t>Common-name collisions</a:t>
-            </a:r>
-          </a:p>
-        </p:txBody>
-      </p:sp>
-      <p:sp>
-        <p:nvSpPr>
-          <p:cNvPr id="58" name="TextBox 57"/>
-          <p:cNvSpPr txBox="1"/>
-          <p:nvPr/>
-        </p:nvSpPr>
-        <p:spPr>
-          <a:xfrm>
-            <a:off x="6217920" y="4206240"/>
-            <a:ext cx="5486400" cy="320040"/>
+              <a:t>11,549</a:t>
+            </a:r>
+          </a:p>
+        </p:txBody>
+      </p:sp>
+      <p:sp>
+        <p:nvSpPr>
+          <p:cNvPr id="43" name="TextBox 42"/>
+          <p:cNvSpPr txBox="1"/>
+          <p:nvPr/>
+        </p:nvSpPr>
+        <p:spPr>
+          <a:xfrm>
+            <a:off x="5943600" y="6190488"/>
+            <a:ext cx="1737360" cy="219456"/>
           </a:xfrm>
           <a:prstGeom prst="rect">
             <a:avLst/>
@@ -14651,961 +14082,41 @@
                 </a:solidFill>
                 <a:latin typeface="Open Sans"/>
               </a:rPr>
-              <a:t>CUSTOMERS BY TOTAL OWED</a:t>
-            </a:r>
-          </a:p>
-        </p:txBody>
-      </p:sp>
-      <p:sp>
-        <p:nvSpPr>
-          <p:cNvPr id="59" name="TextBox 58"/>
-          <p:cNvSpPr txBox="1"/>
-          <p:nvPr/>
-        </p:nvSpPr>
-        <p:spPr>
-          <a:xfrm>
-            <a:off x="6217920" y="4498848"/>
-            <a:ext cx="5486400" cy="274320"/>
-          </a:xfrm>
-          <a:prstGeom prst="rect">
-            <a:avLst/>
-          </a:prstGeom>
-          <a:noFill/>
-        </p:spPr>
-        <p:txBody>
-          <a:bodyPr wrap="square" anchor="t" lIns="0" rIns="0" tIns="0" bIns="0">
-            <a:spAutoFit/>
-          </a:bodyPr>
-          <a:lstStyle/>
-          <a:p>
-            <a:pPr algn="l"/>
-            <a:r>
-              <a:rPr sz="1000" b="0">
-                <a:solidFill>
-                  <a:srgbClr val="64748B"/>
-                </a:solidFill>
-                <a:latin typeface="Open Sans"/>
-              </a:rPr>
-              <a:t>Each customer placed in one bucket based on the SUM of their matched records. Customers add up to 23,166.</a:t>
-            </a:r>
-          </a:p>
-        </p:txBody>
-      </p:sp>
-      <p:sp>
-        <p:nvSpPr>
-          <p:cNvPr id="60" name="Rectangle 59"/>
-          <p:cNvSpPr/>
-          <p:nvPr/>
-        </p:nvSpPr>
-        <p:spPr>
-          <a:xfrm>
-            <a:off x="6217920" y="4846320"/>
-            <a:ext cx="5486400" cy="237744"/>
-          </a:xfrm>
-          <a:prstGeom prst="rect">
-            <a:avLst/>
-          </a:prstGeom>
-          <a:solidFill>
-            <a:srgbClr val="0F172A"/>
-          </a:solidFill>
-          <a:ln>
-            <a:noFill/>
-          </a:ln>
-          <a:effectLst/>
-        </p:spPr>
-        <p:style>
-          <a:lnRef idx="1">
-            <a:schemeClr val="accent1"/>
-          </a:lnRef>
-          <a:fillRef idx="3">
-            <a:schemeClr val="accent1"/>
-          </a:fillRef>
-          <a:effectRef idx="2">
-            <a:schemeClr val="accent1"/>
-          </a:effectRef>
-          <a:fontRef idx="minor">
-            <a:schemeClr val="lt1"/>
-          </a:fontRef>
-        </p:style>
-        <p:txBody>
-          <a:bodyPr rtlCol="0" anchor="ctr"/>
-          <a:lstStyle/>
-          <a:p>
-            <a:pPr algn="ctr"/>
-          </a:p>
-        </p:txBody>
-      </p:sp>
-      <p:sp>
-        <p:nvSpPr>
-          <p:cNvPr id="61" name="TextBox 60"/>
-          <p:cNvSpPr txBox="1"/>
-          <p:nvPr/>
-        </p:nvSpPr>
-        <p:spPr>
-          <a:xfrm>
-            <a:off x="6263640" y="4882896"/>
-            <a:ext cx="1325880" cy="182880"/>
-          </a:xfrm>
-          <a:prstGeom prst="rect">
-            <a:avLst/>
-          </a:prstGeom>
-          <a:noFill/>
-        </p:spPr>
-        <p:txBody>
-          <a:bodyPr wrap="square" anchor="t" lIns="0" rIns="0" tIns="0" bIns="0">
-            <a:spAutoFit/>
-          </a:bodyPr>
-          <a:lstStyle/>
-          <a:p>
-            <a:pPr algn="l"/>
-            <a:r>
-              <a:rPr sz="900" b="1">
-                <a:solidFill>
-                  <a:srgbClr val="FFFFFF"/>
-                </a:solidFill>
-                <a:latin typeface="Open Sans"/>
-              </a:rPr>
-              <a:t>Total owed</a:t>
-            </a:r>
-          </a:p>
-        </p:txBody>
-      </p:sp>
-      <p:sp>
-        <p:nvSpPr>
-          <p:cNvPr id="62" name="TextBox 61"/>
-          <p:cNvSpPr txBox="1"/>
-          <p:nvPr/>
-        </p:nvSpPr>
-        <p:spPr>
-          <a:xfrm>
-            <a:off x="7680960" y="4882896"/>
-            <a:ext cx="1097280" cy="182880"/>
-          </a:xfrm>
-          <a:prstGeom prst="rect">
-            <a:avLst/>
-          </a:prstGeom>
-          <a:noFill/>
-        </p:spPr>
-        <p:txBody>
-          <a:bodyPr wrap="square" anchor="t" lIns="0" rIns="0" tIns="0" bIns="0">
-            <a:spAutoFit/>
-          </a:bodyPr>
-          <a:lstStyle/>
-          <a:p>
-            <a:pPr algn="l"/>
-            <a:r>
-              <a:rPr sz="900" b="1">
-                <a:solidFill>
-                  <a:srgbClr val="FFFFFF"/>
-                </a:solidFill>
-                <a:latin typeface="Open Sans"/>
-              </a:rPr>
-              <a:t>Customers</a:t>
-            </a:r>
-          </a:p>
-        </p:txBody>
-      </p:sp>
-      <p:sp>
-        <p:nvSpPr>
-          <p:cNvPr id="63" name="TextBox 62"/>
-          <p:cNvSpPr txBox="1"/>
-          <p:nvPr/>
-        </p:nvSpPr>
-        <p:spPr>
-          <a:xfrm>
-            <a:off x="8823960" y="4882896"/>
-            <a:ext cx="1280160" cy="182880"/>
-          </a:xfrm>
-          <a:prstGeom prst="rect">
-            <a:avLst/>
-          </a:prstGeom>
-          <a:noFill/>
-        </p:spPr>
-        <p:txBody>
-          <a:bodyPr wrap="square" anchor="t" lIns="0" rIns="0" tIns="0" bIns="0">
-            <a:spAutoFit/>
-          </a:bodyPr>
-          <a:lstStyle/>
-          <a:p>
-            <a:pPr algn="l"/>
-            <a:r>
-              <a:rPr sz="900" b="1">
-                <a:solidFill>
-                  <a:srgbClr val="FFFFFF"/>
-                </a:solidFill>
-                <a:latin typeface="Open Sans"/>
-              </a:rPr>
-              <a:t>Bucket total</a:t>
-            </a:r>
-          </a:p>
-        </p:txBody>
-      </p:sp>
-      <p:sp>
-        <p:nvSpPr>
-          <p:cNvPr id="64" name="TextBox 63"/>
-          <p:cNvSpPr txBox="1"/>
-          <p:nvPr/>
-        </p:nvSpPr>
-        <p:spPr>
-          <a:xfrm>
-            <a:off x="10149840" y="4882896"/>
-            <a:ext cx="1508760" cy="182880"/>
-          </a:xfrm>
-          <a:prstGeom prst="rect">
-            <a:avLst/>
-          </a:prstGeom>
-          <a:noFill/>
-        </p:spPr>
-        <p:txBody>
-          <a:bodyPr wrap="square" anchor="t" lIns="0" rIns="0" tIns="0" bIns="0">
-            <a:spAutoFit/>
-          </a:bodyPr>
-          <a:lstStyle/>
-          <a:p>
-            <a:pPr algn="l"/>
-            <a:r>
-              <a:rPr sz="900" b="1">
-                <a:solidFill>
-                  <a:srgbClr val="FFFFFF"/>
-                </a:solidFill>
-                <a:latin typeface="Open Sans"/>
-              </a:rPr>
-              <a:t>$ per customer</a:t>
-            </a:r>
-          </a:p>
-        </p:txBody>
-      </p:sp>
-      <p:sp>
-        <p:nvSpPr>
-          <p:cNvPr id="65" name="Rectangle 64"/>
-          <p:cNvSpPr/>
-          <p:nvPr/>
-        </p:nvSpPr>
-        <p:spPr>
-          <a:xfrm>
-            <a:off x="6217920" y="5084064"/>
-            <a:ext cx="5486400" cy="301752"/>
-          </a:xfrm>
-          <a:prstGeom prst="rect">
-            <a:avLst/>
-          </a:prstGeom>
-          <a:solidFill>
-            <a:srgbClr val="F8FAFC"/>
-          </a:solidFill>
-          <a:ln>
-            <a:noFill/>
-          </a:ln>
-          <a:effectLst/>
-        </p:spPr>
-        <p:style>
-          <a:lnRef idx="1">
-            <a:schemeClr val="accent1"/>
-          </a:lnRef>
-          <a:fillRef idx="3">
-            <a:schemeClr val="accent1"/>
-          </a:fillRef>
-          <a:effectRef idx="2">
-            <a:schemeClr val="accent1"/>
-          </a:effectRef>
-          <a:fontRef idx="minor">
-            <a:schemeClr val="lt1"/>
-          </a:fontRef>
-        </p:style>
-        <p:txBody>
-          <a:bodyPr rtlCol="0" anchor="ctr"/>
-          <a:lstStyle/>
-          <a:p>
-            <a:pPr algn="ctr"/>
-          </a:p>
-        </p:txBody>
-      </p:sp>
-      <p:sp>
-        <p:nvSpPr>
-          <p:cNvPr id="66" name="TextBox 65"/>
-          <p:cNvSpPr txBox="1"/>
-          <p:nvPr/>
-        </p:nvSpPr>
-        <p:spPr>
-          <a:xfrm>
-            <a:off x="6263640" y="5138927"/>
-            <a:ext cx="1325880" cy="201168"/>
-          </a:xfrm>
-          <a:prstGeom prst="rect">
-            <a:avLst/>
-          </a:prstGeom>
-          <a:noFill/>
-        </p:spPr>
-        <p:txBody>
-          <a:bodyPr wrap="square" anchor="t" lIns="0" rIns="0" tIns="0" bIns="0">
-            <a:spAutoFit/>
-          </a:bodyPr>
-          <a:lstStyle/>
-          <a:p>
-            <a:pPr algn="l"/>
-            <a:r>
-              <a:rPr sz="1000" b="1">
-                <a:solidFill>
-                  <a:srgbClr val="64748B"/>
-                </a:solidFill>
-                <a:latin typeface="Open Sans"/>
-              </a:rPr>
-              <a:t>$0–$9.99</a:t>
-            </a:r>
-          </a:p>
-        </p:txBody>
-      </p:sp>
-      <p:sp>
-        <p:nvSpPr>
-          <p:cNvPr id="67" name="TextBox 66"/>
-          <p:cNvSpPr txBox="1"/>
-          <p:nvPr/>
-        </p:nvSpPr>
-        <p:spPr>
-          <a:xfrm>
-            <a:off x="7680960" y="5138927"/>
-            <a:ext cx="1097280" cy="201168"/>
-          </a:xfrm>
-          <a:prstGeom prst="rect">
-            <a:avLst/>
-          </a:prstGeom>
-          <a:noFill/>
-        </p:spPr>
-        <p:txBody>
-          <a:bodyPr wrap="square" anchor="t" lIns="0" rIns="0" tIns="0" bIns="0">
-            <a:spAutoFit/>
-          </a:bodyPr>
-          <a:lstStyle/>
-          <a:p>
-            <a:pPr algn="l"/>
-            <a:r>
-              <a:rPr sz="1000" b="0">
-                <a:solidFill>
-                  <a:srgbClr val="334155"/>
-                </a:solidFill>
-                <a:latin typeface="Open Sans"/>
-              </a:rPr>
-              <a:t>2,774</a:t>
-            </a:r>
-          </a:p>
-        </p:txBody>
-      </p:sp>
-      <p:sp>
-        <p:nvSpPr>
-          <p:cNvPr id="68" name="TextBox 67"/>
-          <p:cNvSpPr txBox="1"/>
-          <p:nvPr/>
-        </p:nvSpPr>
-        <p:spPr>
-          <a:xfrm>
-            <a:off x="8823960" y="5138927"/>
-            <a:ext cx="1280160" cy="201168"/>
-          </a:xfrm>
-          <a:prstGeom prst="rect">
-            <a:avLst/>
-          </a:prstGeom>
-          <a:noFill/>
-        </p:spPr>
-        <p:txBody>
-          <a:bodyPr wrap="square" anchor="t" lIns="0" rIns="0" tIns="0" bIns="0">
-            <a:spAutoFit/>
-          </a:bodyPr>
-          <a:lstStyle/>
-          <a:p>
-            <a:pPr algn="l"/>
-            <a:r>
-              <a:rPr sz="1000" b="1">
-                <a:solidFill>
-                  <a:srgbClr val="64748B"/>
-                </a:solidFill>
-                <a:latin typeface="Open Sans"/>
-              </a:rPr>
-              <a:t>$9K</a:t>
-            </a:r>
-          </a:p>
-        </p:txBody>
-      </p:sp>
-      <p:sp>
-        <p:nvSpPr>
-          <p:cNvPr id="69" name="TextBox 68"/>
-          <p:cNvSpPr txBox="1"/>
-          <p:nvPr/>
-        </p:nvSpPr>
-        <p:spPr>
-          <a:xfrm>
-            <a:off x="10149840" y="5138927"/>
-            <a:ext cx="1508760" cy="201168"/>
-          </a:xfrm>
-          <a:prstGeom prst="rect">
-            <a:avLst/>
-          </a:prstGeom>
-          <a:noFill/>
-        </p:spPr>
-        <p:txBody>
-          <a:bodyPr wrap="square" anchor="t" lIns="0" rIns="0" tIns="0" bIns="0">
-            <a:spAutoFit/>
-          </a:bodyPr>
-          <a:lstStyle/>
-          <a:p>
-            <a:pPr algn="l"/>
-            <a:r>
-              <a:rPr sz="1000" b="0">
-                <a:solidFill>
-                  <a:srgbClr val="64748B"/>
-                </a:solidFill>
-                <a:latin typeface="Open Sans"/>
-              </a:rPr>
-              <a:t>$3</a:t>
-            </a:r>
-          </a:p>
-        </p:txBody>
-      </p:sp>
-      <p:sp>
-        <p:nvSpPr>
-          <p:cNvPr id="70" name="Rectangle 69"/>
-          <p:cNvSpPr/>
-          <p:nvPr/>
-        </p:nvSpPr>
-        <p:spPr>
-          <a:xfrm>
-            <a:off x="6217920" y="5385816"/>
-            <a:ext cx="5486400" cy="301752"/>
-          </a:xfrm>
-          <a:prstGeom prst="rect">
-            <a:avLst/>
-          </a:prstGeom>
-          <a:solidFill>
-            <a:srgbClr val="FFFFFF"/>
-          </a:solidFill>
-          <a:ln>
-            <a:noFill/>
-          </a:ln>
-          <a:effectLst/>
-        </p:spPr>
-        <p:style>
-          <a:lnRef idx="1">
-            <a:schemeClr val="accent1"/>
-          </a:lnRef>
-          <a:fillRef idx="3">
-            <a:schemeClr val="accent1"/>
-          </a:fillRef>
-          <a:effectRef idx="2">
-            <a:schemeClr val="accent1"/>
-          </a:effectRef>
-          <a:fontRef idx="minor">
-            <a:schemeClr val="lt1"/>
-          </a:fontRef>
-        </p:style>
-        <p:txBody>
-          <a:bodyPr rtlCol="0" anchor="ctr"/>
-          <a:lstStyle/>
-          <a:p>
-            <a:pPr algn="ctr"/>
-          </a:p>
-        </p:txBody>
-      </p:sp>
-      <p:sp>
-        <p:nvSpPr>
-          <p:cNvPr id="71" name="TextBox 70"/>
-          <p:cNvSpPr txBox="1"/>
-          <p:nvPr/>
-        </p:nvSpPr>
-        <p:spPr>
-          <a:xfrm>
-            <a:off x="6263640" y="5440679"/>
-            <a:ext cx="1325880" cy="201168"/>
-          </a:xfrm>
-          <a:prstGeom prst="rect">
-            <a:avLst/>
-          </a:prstGeom>
-          <a:noFill/>
-        </p:spPr>
-        <p:txBody>
-          <a:bodyPr wrap="square" anchor="t" lIns="0" rIns="0" tIns="0" bIns="0">
-            <a:spAutoFit/>
-          </a:bodyPr>
-          <a:lstStyle/>
-          <a:p>
-            <a:pPr algn="l"/>
-            <a:r>
-              <a:rPr sz="1000" b="1">
-                <a:solidFill>
-                  <a:srgbClr val="059669"/>
-                </a:solidFill>
-                <a:latin typeface="Open Sans"/>
-              </a:rPr>
-              <a:t>$10–$99.99</a:t>
-            </a:r>
-          </a:p>
-        </p:txBody>
-      </p:sp>
-      <p:sp>
-        <p:nvSpPr>
-          <p:cNvPr id="72" name="TextBox 71"/>
-          <p:cNvSpPr txBox="1"/>
-          <p:nvPr/>
-        </p:nvSpPr>
-        <p:spPr>
-          <a:xfrm>
-            <a:off x="7680960" y="5440679"/>
-            <a:ext cx="1097280" cy="201168"/>
-          </a:xfrm>
-          <a:prstGeom prst="rect">
-            <a:avLst/>
-          </a:prstGeom>
-          <a:noFill/>
-        </p:spPr>
-        <p:txBody>
-          <a:bodyPr wrap="square" anchor="t" lIns="0" rIns="0" tIns="0" bIns="0">
-            <a:spAutoFit/>
-          </a:bodyPr>
-          <a:lstStyle/>
-          <a:p>
-            <a:pPr algn="l"/>
-            <a:r>
-              <a:rPr sz="1000" b="0">
-                <a:solidFill>
-                  <a:srgbClr val="334155"/>
-                </a:solidFill>
-                <a:latin typeface="Open Sans"/>
-              </a:rPr>
-              <a:t>4,526</a:t>
-            </a:r>
-          </a:p>
-        </p:txBody>
-      </p:sp>
-      <p:sp>
-        <p:nvSpPr>
-          <p:cNvPr id="73" name="TextBox 72"/>
-          <p:cNvSpPr txBox="1"/>
-          <p:nvPr/>
-        </p:nvSpPr>
-        <p:spPr>
-          <a:xfrm>
-            <a:off x="8823960" y="5440679"/>
-            <a:ext cx="1280160" cy="201168"/>
-          </a:xfrm>
-          <a:prstGeom prst="rect">
-            <a:avLst/>
-          </a:prstGeom>
-          <a:noFill/>
-        </p:spPr>
-        <p:txBody>
-          <a:bodyPr wrap="square" anchor="t" lIns="0" rIns="0" tIns="0" bIns="0">
-            <a:spAutoFit/>
-          </a:bodyPr>
-          <a:lstStyle/>
-          <a:p>
-            <a:pPr algn="l"/>
-            <a:r>
-              <a:rPr sz="1000" b="1">
-                <a:solidFill>
-                  <a:srgbClr val="059669"/>
-                </a:solidFill>
-                <a:latin typeface="Open Sans"/>
-              </a:rPr>
-              <a:t>$198K</a:t>
-            </a:r>
-          </a:p>
-        </p:txBody>
-      </p:sp>
-      <p:sp>
-        <p:nvSpPr>
-          <p:cNvPr id="74" name="TextBox 73"/>
-          <p:cNvSpPr txBox="1"/>
-          <p:nvPr/>
-        </p:nvSpPr>
-        <p:spPr>
-          <a:xfrm>
-            <a:off x="10149840" y="5440679"/>
-            <a:ext cx="1508760" cy="201168"/>
-          </a:xfrm>
-          <a:prstGeom prst="rect">
-            <a:avLst/>
-          </a:prstGeom>
-          <a:noFill/>
-        </p:spPr>
-        <p:txBody>
-          <a:bodyPr wrap="square" anchor="t" lIns="0" rIns="0" tIns="0" bIns="0">
-            <a:spAutoFit/>
-          </a:bodyPr>
-          <a:lstStyle/>
-          <a:p>
-            <a:pPr algn="l"/>
-            <a:r>
-              <a:rPr sz="1000" b="0">
-                <a:solidFill>
-                  <a:srgbClr val="059669"/>
-                </a:solidFill>
-                <a:latin typeface="Open Sans"/>
-              </a:rPr>
-              <a:t>$44</a:t>
-            </a:r>
-          </a:p>
-        </p:txBody>
-      </p:sp>
-      <p:sp>
-        <p:nvSpPr>
-          <p:cNvPr id="75" name="Rectangle 74"/>
-          <p:cNvSpPr/>
-          <p:nvPr/>
-        </p:nvSpPr>
-        <p:spPr>
-          <a:xfrm>
-            <a:off x="6217920" y="5687568"/>
-            <a:ext cx="5486400" cy="301752"/>
-          </a:xfrm>
-          <a:prstGeom prst="rect">
-            <a:avLst/>
-          </a:prstGeom>
-          <a:solidFill>
-            <a:srgbClr val="F8FAFC"/>
-          </a:solidFill>
-          <a:ln>
-            <a:noFill/>
-          </a:ln>
-          <a:effectLst/>
-        </p:spPr>
-        <p:style>
-          <a:lnRef idx="1">
-            <a:schemeClr val="accent1"/>
-          </a:lnRef>
-          <a:fillRef idx="3">
-            <a:schemeClr val="accent1"/>
-          </a:fillRef>
-          <a:effectRef idx="2">
-            <a:schemeClr val="accent1"/>
-          </a:effectRef>
-          <a:fontRef idx="minor">
-            <a:schemeClr val="lt1"/>
-          </a:fontRef>
-        </p:style>
-        <p:txBody>
-          <a:bodyPr rtlCol="0" anchor="ctr"/>
-          <a:lstStyle/>
-          <a:p>
-            <a:pPr algn="ctr"/>
-          </a:p>
-        </p:txBody>
-      </p:sp>
-      <p:sp>
-        <p:nvSpPr>
-          <p:cNvPr id="76" name="TextBox 75"/>
-          <p:cNvSpPr txBox="1"/>
-          <p:nvPr/>
-        </p:nvSpPr>
-        <p:spPr>
-          <a:xfrm>
-            <a:off x="6263640" y="5742431"/>
-            <a:ext cx="1325880" cy="201168"/>
-          </a:xfrm>
-          <a:prstGeom prst="rect">
-            <a:avLst/>
-          </a:prstGeom>
-          <a:noFill/>
-        </p:spPr>
-        <p:txBody>
-          <a:bodyPr wrap="square" anchor="t" lIns="0" rIns="0" tIns="0" bIns="0">
-            <a:spAutoFit/>
-          </a:bodyPr>
-          <a:lstStyle/>
-          <a:p>
-            <a:pPr algn="l"/>
-            <a:r>
-              <a:rPr sz="1000" b="1">
-                <a:solidFill>
-                  <a:srgbClr val="FFB352"/>
-                </a:solidFill>
-                <a:latin typeface="Open Sans"/>
-              </a:rPr>
-              <a:t>$100–$499.99</a:t>
-            </a:r>
-          </a:p>
-        </p:txBody>
-      </p:sp>
-      <p:sp>
-        <p:nvSpPr>
-          <p:cNvPr id="77" name="TextBox 76"/>
-          <p:cNvSpPr txBox="1"/>
-          <p:nvPr/>
-        </p:nvSpPr>
-        <p:spPr>
-          <a:xfrm>
-            <a:off x="7680960" y="5742431"/>
-            <a:ext cx="1097280" cy="201168"/>
-          </a:xfrm>
-          <a:prstGeom prst="rect">
-            <a:avLst/>
-          </a:prstGeom>
-          <a:noFill/>
-        </p:spPr>
-        <p:txBody>
-          <a:bodyPr wrap="square" anchor="t" lIns="0" rIns="0" tIns="0" bIns="0">
-            <a:spAutoFit/>
-          </a:bodyPr>
-          <a:lstStyle/>
-          <a:p>
-            <a:pPr algn="l"/>
-            <a:r>
-              <a:rPr sz="1000" b="0">
-                <a:solidFill>
-                  <a:srgbClr val="334155"/>
-                </a:solidFill>
-                <a:latin typeface="Open Sans"/>
-              </a:rPr>
-              <a:t>4,317</a:t>
-            </a:r>
-          </a:p>
-        </p:txBody>
-      </p:sp>
-      <p:sp>
-        <p:nvSpPr>
-          <p:cNvPr id="78" name="TextBox 77"/>
-          <p:cNvSpPr txBox="1"/>
-          <p:nvPr/>
-        </p:nvSpPr>
-        <p:spPr>
-          <a:xfrm>
-            <a:off x="8823960" y="5742431"/>
-            <a:ext cx="1280160" cy="201168"/>
-          </a:xfrm>
-          <a:prstGeom prst="rect">
-            <a:avLst/>
-          </a:prstGeom>
-          <a:noFill/>
-        </p:spPr>
-        <p:txBody>
-          <a:bodyPr wrap="square" anchor="t" lIns="0" rIns="0" tIns="0" bIns="0">
-            <a:spAutoFit/>
-          </a:bodyPr>
-          <a:lstStyle/>
-          <a:p>
-            <a:pPr algn="l"/>
-            <a:r>
-              <a:rPr sz="1000" b="1">
-                <a:solidFill>
-                  <a:srgbClr val="FFB352"/>
-                </a:solidFill>
-                <a:latin typeface="Open Sans"/>
-              </a:rPr>
-              <a:t>$1.06M</a:t>
-            </a:r>
-          </a:p>
-        </p:txBody>
-      </p:sp>
-      <p:sp>
-        <p:nvSpPr>
-          <p:cNvPr id="79" name="TextBox 78"/>
-          <p:cNvSpPr txBox="1"/>
-          <p:nvPr/>
-        </p:nvSpPr>
-        <p:spPr>
-          <a:xfrm>
-            <a:off x="10149840" y="5742431"/>
-            <a:ext cx="1508760" cy="201168"/>
-          </a:xfrm>
-          <a:prstGeom prst="rect">
-            <a:avLst/>
-          </a:prstGeom>
-          <a:noFill/>
-        </p:spPr>
-        <p:txBody>
-          <a:bodyPr wrap="square" anchor="t" lIns="0" rIns="0" tIns="0" bIns="0">
-            <a:spAutoFit/>
-          </a:bodyPr>
-          <a:lstStyle/>
-          <a:p>
-            <a:pPr algn="l"/>
-            <a:r>
-              <a:rPr sz="1000" b="0">
-                <a:solidFill>
-                  <a:srgbClr val="FFB352"/>
-                </a:solidFill>
-                <a:latin typeface="Open Sans"/>
-              </a:rPr>
-              <a:t>$245</a:t>
-            </a:r>
-          </a:p>
-        </p:txBody>
-      </p:sp>
-      <p:sp>
-        <p:nvSpPr>
-          <p:cNvPr id="80" name="Rectangle 79"/>
-          <p:cNvSpPr/>
-          <p:nvPr/>
-        </p:nvSpPr>
-        <p:spPr>
-          <a:xfrm>
-            <a:off x="6217920" y="5989320"/>
-            <a:ext cx="5486400" cy="301752"/>
-          </a:xfrm>
-          <a:prstGeom prst="rect">
-            <a:avLst/>
-          </a:prstGeom>
-          <a:solidFill>
-            <a:srgbClr val="FFFFFF"/>
-          </a:solidFill>
-          <a:ln>
-            <a:noFill/>
-          </a:ln>
-          <a:effectLst/>
-        </p:spPr>
-        <p:style>
-          <a:lnRef idx="1">
-            <a:schemeClr val="accent1"/>
-          </a:lnRef>
-          <a:fillRef idx="3">
-            <a:schemeClr val="accent1"/>
-          </a:fillRef>
-          <a:effectRef idx="2">
-            <a:schemeClr val="accent1"/>
-          </a:effectRef>
-          <a:fontRef idx="minor">
-            <a:schemeClr val="lt1"/>
-          </a:fontRef>
-        </p:style>
-        <p:txBody>
-          <a:bodyPr rtlCol="0" anchor="ctr"/>
-          <a:lstStyle/>
-          <a:p>
-            <a:pPr algn="ctr"/>
-          </a:p>
-        </p:txBody>
-      </p:sp>
-      <p:sp>
-        <p:nvSpPr>
-          <p:cNvPr id="81" name="TextBox 80"/>
-          <p:cNvSpPr txBox="1"/>
-          <p:nvPr/>
-        </p:nvSpPr>
-        <p:spPr>
-          <a:xfrm>
-            <a:off x="6263640" y="6044183"/>
-            <a:ext cx="1325880" cy="201168"/>
-          </a:xfrm>
-          <a:prstGeom prst="rect">
-            <a:avLst/>
-          </a:prstGeom>
-          <a:noFill/>
-        </p:spPr>
-        <p:txBody>
-          <a:bodyPr wrap="square" anchor="t" lIns="0" rIns="0" tIns="0" bIns="0">
-            <a:spAutoFit/>
-          </a:bodyPr>
-          <a:lstStyle/>
-          <a:p>
-            <a:pPr algn="l"/>
-            <a:r>
-              <a:rPr sz="1000" b="1">
+              <a:t>$171M</a:t>
+            </a:r>
+          </a:p>
+        </p:txBody>
+      </p:sp>
+      <p:sp>
+        <p:nvSpPr>
+          <p:cNvPr id="44" name="TextBox 43"/>
+          <p:cNvSpPr txBox="1"/>
+          <p:nvPr/>
+        </p:nvSpPr>
+        <p:spPr>
+          <a:xfrm>
+            <a:off x="7863840" y="6190488"/>
+            <a:ext cx="1920240" cy="219456"/>
+          </a:xfrm>
+          <a:prstGeom prst="rect">
+            <a:avLst/>
+          </a:prstGeom>
+          <a:noFill/>
+        </p:spPr>
+        <p:txBody>
+          <a:bodyPr wrap="square" anchor="t" lIns="0" rIns="0" tIns="0" bIns="0">
+            <a:spAutoFit/>
+          </a:bodyPr>
+          <a:lstStyle/>
+          <a:p>
+            <a:pPr algn="l"/>
+            <a:r>
+              <a:rPr sz="1100" b="0">
                 <a:solidFill>
                   <a:srgbClr val="2863C5"/>
                 </a:solidFill>
                 <a:latin typeface="Open Sans"/>
               </a:rPr>
-              <a:t>$500+</a:t>
-            </a:r>
-          </a:p>
-        </p:txBody>
-      </p:sp>
-      <p:sp>
-        <p:nvSpPr>
-          <p:cNvPr id="82" name="TextBox 81"/>
-          <p:cNvSpPr txBox="1"/>
-          <p:nvPr/>
-        </p:nvSpPr>
-        <p:spPr>
-          <a:xfrm>
-            <a:off x="7680960" y="6044183"/>
-            <a:ext cx="1097280" cy="201168"/>
-          </a:xfrm>
-          <a:prstGeom prst="rect">
-            <a:avLst/>
-          </a:prstGeom>
-          <a:noFill/>
-        </p:spPr>
-        <p:txBody>
-          <a:bodyPr wrap="square" anchor="t" lIns="0" rIns="0" tIns="0" bIns="0">
-            <a:spAutoFit/>
-          </a:bodyPr>
-          <a:lstStyle/>
-          <a:p>
-            <a:pPr algn="l"/>
-            <a:r>
-              <a:rPr sz="1000" b="0">
-                <a:solidFill>
-                  <a:srgbClr val="334155"/>
-                </a:solidFill>
-                <a:latin typeface="Open Sans"/>
-              </a:rPr>
-              <a:t>11,549</a:t>
-            </a:r>
-          </a:p>
-        </p:txBody>
-      </p:sp>
-      <p:sp>
-        <p:nvSpPr>
-          <p:cNvPr id="83" name="TextBox 82"/>
-          <p:cNvSpPr txBox="1"/>
-          <p:nvPr/>
-        </p:nvSpPr>
-        <p:spPr>
-          <a:xfrm>
-            <a:off x="8823960" y="6044183"/>
-            <a:ext cx="1280160" cy="201168"/>
-          </a:xfrm>
-          <a:prstGeom prst="rect">
-            <a:avLst/>
-          </a:prstGeom>
-          <a:noFill/>
-        </p:spPr>
-        <p:txBody>
-          <a:bodyPr wrap="square" anchor="t" lIns="0" rIns="0" tIns="0" bIns="0">
-            <a:spAutoFit/>
-          </a:bodyPr>
-          <a:lstStyle/>
-          <a:p>
-            <a:pPr algn="l"/>
-            <a:r>
-              <a:rPr sz="1000" b="1">
-                <a:solidFill>
-                  <a:srgbClr val="2863C5"/>
-                </a:solidFill>
-                <a:latin typeface="Open Sans"/>
-              </a:rPr>
-              <a:t>$171M</a:t>
-            </a:r>
-          </a:p>
-        </p:txBody>
-      </p:sp>
-      <p:sp>
-        <p:nvSpPr>
-          <p:cNvPr id="84" name="TextBox 83"/>
-          <p:cNvSpPr txBox="1"/>
-          <p:nvPr/>
-        </p:nvSpPr>
-        <p:spPr>
-          <a:xfrm>
-            <a:off x="10149840" y="6044183"/>
-            <a:ext cx="1508760" cy="201168"/>
-          </a:xfrm>
-          <a:prstGeom prst="rect">
-            <a:avLst/>
-          </a:prstGeom>
-          <a:noFill/>
-        </p:spPr>
-        <p:txBody>
-          <a:bodyPr wrap="square" anchor="t" lIns="0" rIns="0" tIns="0" bIns="0">
-            <a:spAutoFit/>
-          </a:bodyPr>
-          <a:lstStyle/>
-          <a:p>
-            <a:pPr algn="l"/>
-            <a:r>
-              <a:rPr sz="1000" b="0">
-                <a:solidFill>
-                  <a:srgbClr val="2863C5"/>
-                </a:solidFill>
-                <a:latin typeface="Open Sans"/>
-              </a:rPr>
               <a:t>$14,814</a:t>
             </a:r>
           </a:p>
@@ -15613,7 +14124,7 @@
       </p:sp>
       <p:sp>
         <p:nvSpPr>
-          <p:cNvPr id="85" name="Rounded Rectangle 84"/>
+          <p:cNvPr id="45" name="Rounded Rectangle 44"/>
           <p:cNvSpPr/>
           <p:nvPr/>
         </p:nvSpPr>
@@ -15659,7 +14170,7 @@
       </p:sp>
       <p:sp>
         <p:nvSpPr>
-          <p:cNvPr id="86" name="TextBox 85"/>
+          <p:cNvPr id="46" name="TextBox 45"/>
           <p:cNvSpPr txBox="1"/>
           <p:nvPr/>
         </p:nvSpPr>
@@ -15687,7 +14198,7 @@
                 </a:solidFill>
                 <a:latin typeface="Open Sans"/>
               </a:rPr>
-              <a:t>11,617 customers in the high-confidence buckets ($0–$499.99) map to ~$1.27M of likely-real CA unclaimed property.</a:t>
+              <a:t>Aggregate $172M / 2.3M records on this slide are upper bounds — name alone collides on common names. See next slide (name + city).</a:t>
             </a:r>
           </a:p>
         </p:txBody>
@@ -16165,7 +14676,7 @@
                 </a:solidFill>
                 <a:latin typeface="Open Sans"/>
               </a:rPr>
-              <a:t>customers with at least one name+city match</a:t>
+              <a:t>net actives matched (name + city)</a:t>
             </a:r>
           </a:p>
         </p:txBody>
@@ -16664,8 +15175,8 @@
         </p:nvSpPr>
         <p:spPr>
           <a:xfrm>
-            <a:off x="457200" y="4206240"/>
-            <a:ext cx="5486400" cy="320040"/>
+            <a:off x="2286000" y="4251960"/>
+            <a:ext cx="7589520" cy="320040"/>
           </a:xfrm>
           <a:prstGeom prst="rect">
             <a:avLst/>
@@ -16686,7 +15197,7 @@
                 </a:solidFill>
                 <a:latin typeface="Open Sans"/>
               </a:rPr>
-              <a:t>MATCH DISTRIBUTION</a:t>
+              <a:t>NET ACTIVES BY TOTAL OWED (name + city)</a:t>
             </a:r>
           </a:p>
         </p:txBody>
@@ -16699,8 +15210,8 @@
         </p:nvSpPr>
         <p:spPr>
           <a:xfrm>
-            <a:off x="457200" y="4498848"/>
-            <a:ext cx="5486400" cy="274320"/>
+            <a:off x="2286000" y="4544568"/>
+            <a:ext cx="7589520" cy="274320"/>
           </a:xfrm>
           <a:prstGeom prst="rect">
             <a:avLst/>
@@ -16721,7 +15232,7 @@
                 </a:solidFill>
                 <a:latin typeface="Open Sans"/>
               </a:rPr>
-              <a:t>Records each (name + city) key returned. City filter shrinks the long tail of common-name collisions.</a:t>
+              <a:t>Each net active placed in one bucket by the SUM of their matched records. Add up to 11,958.</a:t>
             </a:r>
           </a:p>
         </p:txBody>
@@ -16734,8 +15245,8 @@
         </p:nvSpPr>
         <p:spPr>
           <a:xfrm>
-            <a:off x="457200" y="4846320"/>
-            <a:ext cx="5486400" cy="237744"/>
+            <a:off x="2286000" y="4937760"/>
+            <a:ext cx="7589520" cy="256032"/>
           </a:xfrm>
           <a:prstGeom prst="rect">
             <a:avLst/>
@@ -16778,29 +15289,29 @@
         </p:nvSpPr>
         <p:spPr>
           <a:xfrm>
-            <a:off x="502920" y="4882896"/>
-            <a:ext cx="868680" cy="182880"/>
-          </a:xfrm>
-          <a:prstGeom prst="rect">
-            <a:avLst/>
-          </a:prstGeom>
-          <a:noFill/>
-        </p:spPr>
-        <p:txBody>
-          <a:bodyPr wrap="square" anchor="t" lIns="0" rIns="0" tIns="0" bIns="0">
-            <a:spAutoFit/>
-          </a:bodyPr>
-          <a:lstStyle/>
-          <a:p>
-            <a:pPr algn="l"/>
-            <a:r>
-              <a:rPr sz="900" b="1">
+            <a:off x="2377440" y="4983480"/>
+            <a:ext cx="1737360" cy="201168"/>
+          </a:xfrm>
+          <a:prstGeom prst="rect">
+            <a:avLst/>
+          </a:prstGeom>
+          <a:noFill/>
+        </p:spPr>
+        <p:txBody>
+          <a:bodyPr wrap="square" anchor="t" lIns="0" rIns="0" tIns="0" bIns="0">
+            <a:spAutoFit/>
+          </a:bodyPr>
+          <a:lstStyle/>
+          <a:p>
+            <a:pPr algn="l"/>
+            <a:r>
+              <a:rPr sz="1000" b="1">
                 <a:solidFill>
                   <a:srgbClr val="FFFFFF"/>
                 </a:solidFill>
                 <a:latin typeface="Open Sans"/>
               </a:rPr>
-              <a:t>Records</a:t>
+              <a:t>Total owed</a:t>
             </a:r>
           </a:p>
         </p:txBody>
@@ -16813,29 +15324,29 @@
         </p:nvSpPr>
         <p:spPr>
           <a:xfrm>
-            <a:off x="1417320" y="4882896"/>
-            <a:ext cx="777240" cy="182880"/>
-          </a:xfrm>
-          <a:prstGeom prst="rect">
-            <a:avLst/>
-          </a:prstGeom>
-          <a:noFill/>
-        </p:spPr>
-        <p:txBody>
-          <a:bodyPr wrap="square" anchor="t" lIns="0" rIns="0" tIns="0" bIns="0">
-            <a:spAutoFit/>
-          </a:bodyPr>
-          <a:lstStyle/>
-          <a:p>
-            <a:pPr algn="l"/>
-            <a:r>
-              <a:rPr sz="900" b="1">
+            <a:off x="4297680" y="4983480"/>
+            <a:ext cx="1463040" cy="201168"/>
+          </a:xfrm>
+          <a:prstGeom prst="rect">
+            <a:avLst/>
+          </a:prstGeom>
+          <a:noFill/>
+        </p:spPr>
+        <p:txBody>
+          <a:bodyPr wrap="square" anchor="t" lIns="0" rIns="0" tIns="0" bIns="0">
+            <a:spAutoFit/>
+          </a:bodyPr>
+          <a:lstStyle/>
+          <a:p>
+            <a:pPr algn="l"/>
+            <a:r>
+              <a:rPr sz="1000" b="1">
                 <a:solidFill>
                   <a:srgbClr val="FFFFFF"/>
                 </a:solidFill>
                 <a:latin typeface="Open Sans"/>
               </a:rPr>
-              <a:t>Customers</a:t>
+              <a:t>Net actives</a:t>
             </a:r>
           </a:p>
         </p:txBody>
@@ -16848,29 +15359,29 @@
         </p:nvSpPr>
         <p:spPr>
           <a:xfrm>
-            <a:off x="2240280" y="4882896"/>
-            <a:ext cx="777240" cy="182880"/>
-          </a:xfrm>
-          <a:prstGeom prst="rect">
-            <a:avLst/>
-          </a:prstGeom>
-          <a:noFill/>
-        </p:spPr>
-        <p:txBody>
-          <a:bodyPr wrap="square" anchor="t" lIns="0" rIns="0" tIns="0" bIns="0">
-            <a:spAutoFit/>
-          </a:bodyPr>
-          <a:lstStyle/>
-          <a:p>
-            <a:pPr algn="l"/>
-            <a:r>
-              <a:rPr sz="900" b="1">
+            <a:off x="5943600" y="4983480"/>
+            <a:ext cx="1737360" cy="201168"/>
+          </a:xfrm>
+          <a:prstGeom prst="rect">
+            <a:avLst/>
+          </a:prstGeom>
+          <a:noFill/>
+        </p:spPr>
+        <p:txBody>
+          <a:bodyPr wrap="square" anchor="t" lIns="0" rIns="0" tIns="0" bIns="0">
+            <a:spAutoFit/>
+          </a:bodyPr>
+          <a:lstStyle/>
+          <a:p>
+            <a:pPr algn="l"/>
+            <a:r>
+              <a:rPr sz="1000" b="1">
                 <a:solidFill>
                   <a:srgbClr val="FFFFFF"/>
                 </a:solidFill>
                 <a:latin typeface="Open Sans"/>
               </a:rPr>
-              <a:t>$ total</a:t>
+              <a:t>Bucket total</a:t>
             </a:r>
           </a:p>
         </p:txBody>
@@ -16883,78 +15394,43 @@
         </p:nvSpPr>
         <p:spPr>
           <a:xfrm>
-            <a:off x="3063240" y="4882896"/>
-            <a:ext cx="914400" cy="182880"/>
-          </a:xfrm>
-          <a:prstGeom prst="rect">
-            <a:avLst/>
-          </a:prstGeom>
-          <a:noFill/>
-        </p:spPr>
-        <p:txBody>
-          <a:bodyPr wrap="square" anchor="t" lIns="0" rIns="0" tIns="0" bIns="0">
-            <a:spAutoFit/>
-          </a:bodyPr>
-          <a:lstStyle/>
-          <a:p>
-            <a:pPr algn="l"/>
-            <a:r>
-              <a:rPr sz="900" b="1">
+            <a:off x="7863840" y="4983480"/>
+            <a:ext cx="1920240" cy="201168"/>
+          </a:xfrm>
+          <a:prstGeom prst="rect">
+            <a:avLst/>
+          </a:prstGeom>
+          <a:noFill/>
+        </p:spPr>
+        <p:txBody>
+          <a:bodyPr wrap="square" anchor="t" lIns="0" rIns="0" tIns="0" bIns="0">
+            <a:spAutoFit/>
+          </a:bodyPr>
+          <a:lstStyle/>
+          <a:p>
+            <a:pPr algn="l"/>
+            <a:r>
+              <a:rPr sz="1000" b="1">
                 <a:solidFill>
                   <a:srgbClr val="FFFFFF"/>
                 </a:solidFill>
                 <a:latin typeface="Open Sans"/>
               </a:rPr>
-              <a:t>$/customer</a:t>
-            </a:r>
-          </a:p>
-        </p:txBody>
-      </p:sp>
-      <p:sp>
-        <p:nvSpPr>
-          <p:cNvPr id="33" name="TextBox 32"/>
-          <p:cNvSpPr txBox="1"/>
-          <p:nvPr/>
-        </p:nvSpPr>
-        <p:spPr>
-          <a:xfrm>
-            <a:off x="4023360" y="4882896"/>
-            <a:ext cx="1874519" cy="182880"/>
-          </a:xfrm>
-          <a:prstGeom prst="rect">
-            <a:avLst/>
-          </a:prstGeom>
-          <a:noFill/>
-        </p:spPr>
-        <p:txBody>
-          <a:bodyPr wrap="square" anchor="t" lIns="0" rIns="0" tIns="0" bIns="0">
-            <a:spAutoFit/>
-          </a:bodyPr>
-          <a:lstStyle/>
-          <a:p>
-            <a:pPr algn="l"/>
-            <a:r>
-              <a:rPr sz="900" b="1">
-                <a:solidFill>
-                  <a:srgbClr val="FFFFFF"/>
-                </a:solidFill>
-                <a:latin typeface="Open Sans"/>
-              </a:rPr>
-              <a:t>Confidence</a:t>
-            </a:r>
-          </a:p>
-        </p:txBody>
-      </p:sp>
-      <p:sp>
-        <p:nvSpPr>
-          <p:cNvPr id="34" name="Rectangle 33"/>
+              <a:t>$ per net active</a:t>
+            </a:r>
+          </a:p>
+        </p:txBody>
+      </p:sp>
+      <p:sp>
+        <p:nvSpPr>
+          <p:cNvPr id="33" name="Rectangle 32"/>
           <p:cNvSpPr/>
           <p:nvPr/>
         </p:nvSpPr>
         <p:spPr>
           <a:xfrm>
-            <a:off x="457200" y="5084064"/>
-            <a:ext cx="5486400" cy="301752"/>
+            <a:off x="2286000" y="5193792"/>
+            <a:ext cx="7589520" cy="310896"/>
           </a:xfrm>
           <a:prstGeom prst="rect">
             <a:avLst/>
@@ -16991,35 +15467,70 @@
       </p:sp>
       <p:sp>
         <p:nvSpPr>
+          <p:cNvPr id="34" name="TextBox 33"/>
+          <p:cNvSpPr txBox="1"/>
+          <p:nvPr/>
+        </p:nvSpPr>
+        <p:spPr>
+          <a:xfrm>
+            <a:off x="2377440" y="5257800"/>
+            <a:ext cx="1737360" cy="219456"/>
+          </a:xfrm>
+          <a:prstGeom prst="rect">
+            <a:avLst/>
+          </a:prstGeom>
+          <a:noFill/>
+        </p:spPr>
+        <p:txBody>
+          <a:bodyPr wrap="square" anchor="t" lIns="0" rIns="0" tIns="0" bIns="0">
+            <a:spAutoFit/>
+          </a:bodyPr>
+          <a:lstStyle/>
+          <a:p>
+            <a:pPr algn="l"/>
+            <a:r>
+              <a:rPr sz="1100" b="1">
+                <a:solidFill>
+                  <a:srgbClr val="64748B"/>
+                </a:solidFill>
+                <a:latin typeface="Open Sans"/>
+              </a:rPr>
+              <a:t>$0–$9.99</a:t>
+            </a:r>
+          </a:p>
+        </p:txBody>
+      </p:sp>
+      <p:sp>
+        <p:nvSpPr>
           <p:cNvPr id="35" name="TextBox 34"/>
           <p:cNvSpPr txBox="1"/>
           <p:nvPr/>
         </p:nvSpPr>
         <p:spPr>
           <a:xfrm>
-            <a:off x="502920" y="5138927"/>
-            <a:ext cx="868680" cy="201168"/>
-          </a:xfrm>
-          <a:prstGeom prst="rect">
-            <a:avLst/>
-          </a:prstGeom>
-          <a:noFill/>
-        </p:spPr>
-        <p:txBody>
-          <a:bodyPr wrap="square" anchor="t" lIns="0" rIns="0" tIns="0" bIns="0">
-            <a:spAutoFit/>
-          </a:bodyPr>
-          <a:lstStyle/>
-          <a:p>
-            <a:pPr algn="l"/>
-            <a:r>
-              <a:rPr sz="1000" b="1">
-                <a:solidFill>
-                  <a:srgbClr val="0F172A"/>
-                </a:solidFill>
-                <a:latin typeface="Open Sans"/>
-              </a:rPr>
-              <a:t>1 record</a:t>
+            <a:off x="4297680" y="5257800"/>
+            <a:ext cx="1463040" cy="219456"/>
+          </a:xfrm>
+          <a:prstGeom prst="rect">
+            <a:avLst/>
+          </a:prstGeom>
+          <a:noFill/>
+        </p:spPr>
+        <p:txBody>
+          <a:bodyPr wrap="square" anchor="t" lIns="0" rIns="0" tIns="0" bIns="0">
+            <a:spAutoFit/>
+          </a:bodyPr>
+          <a:lstStyle/>
+          <a:p>
+            <a:pPr algn="l"/>
+            <a:r>
+              <a:rPr sz="1100" b="0">
+                <a:solidFill>
+                  <a:srgbClr val="334155"/>
+                </a:solidFill>
+                <a:latin typeface="Open Sans"/>
+              </a:rPr>
+              <a:t>3,684</a:t>
             </a:r>
           </a:p>
         </p:txBody>
@@ -17032,29 +15543,29 @@
         </p:nvSpPr>
         <p:spPr>
           <a:xfrm>
-            <a:off x="1417320" y="5138927"/>
-            <a:ext cx="777240" cy="201168"/>
-          </a:xfrm>
-          <a:prstGeom prst="rect">
-            <a:avLst/>
-          </a:prstGeom>
-          <a:noFill/>
-        </p:spPr>
-        <p:txBody>
-          <a:bodyPr wrap="square" anchor="t" lIns="0" rIns="0" tIns="0" bIns="0">
-            <a:spAutoFit/>
-          </a:bodyPr>
-          <a:lstStyle/>
-          <a:p>
-            <a:pPr algn="l"/>
-            <a:r>
-              <a:rPr sz="1000" b="0">
-                <a:solidFill>
-                  <a:srgbClr val="334155"/>
-                </a:solidFill>
-                <a:latin typeface="Open Sans"/>
-              </a:rPr>
-              <a:t>4,742</a:t>
+            <a:off x="5943600" y="5257800"/>
+            <a:ext cx="1737360" cy="219456"/>
+          </a:xfrm>
+          <a:prstGeom prst="rect">
+            <a:avLst/>
+          </a:prstGeom>
+          <a:noFill/>
+        </p:spPr>
+        <p:txBody>
+          <a:bodyPr wrap="square" anchor="t" lIns="0" rIns="0" tIns="0" bIns="0">
+            <a:spAutoFit/>
+          </a:bodyPr>
+          <a:lstStyle/>
+          <a:p>
+            <a:pPr algn="l"/>
+            <a:r>
+              <a:rPr sz="1100" b="1">
+                <a:solidFill>
+                  <a:srgbClr val="64748B"/>
+                </a:solidFill>
+                <a:latin typeface="Open Sans"/>
+              </a:rPr>
+              <a:t>$11K</a:t>
             </a:r>
           </a:p>
         </p:txBody>
@@ -17067,113 +15578,43 @@
         </p:nvSpPr>
         <p:spPr>
           <a:xfrm>
-            <a:off x="2240280" y="5138927"/>
-            <a:ext cx="777240" cy="201168"/>
-          </a:xfrm>
-          <a:prstGeom prst="rect">
-            <a:avLst/>
-          </a:prstGeom>
-          <a:noFill/>
-        </p:spPr>
-        <p:txBody>
-          <a:bodyPr wrap="square" anchor="t" lIns="0" rIns="0" tIns="0" bIns="0">
-            <a:spAutoFit/>
-          </a:bodyPr>
-          <a:lstStyle/>
-          <a:p>
-            <a:pPr algn="l"/>
-            <a:r>
-              <a:rPr sz="1000" b="1">
-                <a:solidFill>
-                  <a:srgbClr val="059669"/>
-                </a:solidFill>
-                <a:latin typeface="Open Sans"/>
-              </a:rPr>
-              <a:t>$240K</a:t>
-            </a:r>
-          </a:p>
-        </p:txBody>
-      </p:sp>
-      <p:sp>
-        <p:nvSpPr>
-          <p:cNvPr id="38" name="TextBox 37"/>
-          <p:cNvSpPr txBox="1"/>
-          <p:nvPr/>
-        </p:nvSpPr>
-        <p:spPr>
-          <a:xfrm>
-            <a:off x="3063240" y="5138927"/>
-            <a:ext cx="914400" cy="201168"/>
-          </a:xfrm>
-          <a:prstGeom prst="rect">
-            <a:avLst/>
-          </a:prstGeom>
-          <a:noFill/>
-        </p:spPr>
-        <p:txBody>
-          <a:bodyPr wrap="square" anchor="t" lIns="0" rIns="0" tIns="0" bIns="0">
-            <a:spAutoFit/>
-          </a:bodyPr>
-          <a:lstStyle/>
-          <a:p>
-            <a:pPr algn="l"/>
-            <a:r>
-              <a:rPr sz="1000" b="0">
-                <a:solidFill>
-                  <a:srgbClr val="059669"/>
-                </a:solidFill>
-                <a:latin typeface="Open Sans"/>
-              </a:rPr>
-              <a:t>$51</a:t>
-            </a:r>
-          </a:p>
-        </p:txBody>
-      </p:sp>
-      <p:sp>
-        <p:nvSpPr>
-          <p:cNvPr id="39" name="TextBox 38"/>
-          <p:cNvSpPr txBox="1"/>
-          <p:nvPr/>
-        </p:nvSpPr>
-        <p:spPr>
-          <a:xfrm>
-            <a:off x="4023360" y="5138927"/>
-            <a:ext cx="1874519" cy="201168"/>
-          </a:xfrm>
-          <a:prstGeom prst="rect">
-            <a:avLst/>
-          </a:prstGeom>
-          <a:noFill/>
-        </p:spPr>
-        <p:txBody>
-          <a:bodyPr wrap="square" anchor="t" lIns="0" rIns="0" tIns="0" bIns="0">
-            <a:spAutoFit/>
-          </a:bodyPr>
-          <a:lstStyle/>
-          <a:p>
-            <a:pPr algn="l"/>
-            <a:r>
-              <a:rPr sz="900" b="0">
+            <a:off x="7863840" y="5257800"/>
+            <a:ext cx="1920240" cy="219456"/>
+          </a:xfrm>
+          <a:prstGeom prst="rect">
+            <a:avLst/>
+          </a:prstGeom>
+          <a:noFill/>
+        </p:spPr>
+        <p:txBody>
+          <a:bodyPr wrap="square" anchor="t" lIns="0" rIns="0" tIns="0" bIns="0">
+            <a:spAutoFit/>
+          </a:bodyPr>
+          <a:lstStyle/>
+          <a:p>
+            <a:pPr algn="l"/>
+            <a:r>
+              <a:rPr sz="1100" b="0">
                 <a:solidFill>
                   <a:srgbClr val="64748B"/>
                 </a:solidFill>
                 <a:latin typeface="Open Sans"/>
               </a:rPr>
-              <a:t>High confidence</a:t>
-            </a:r>
-          </a:p>
-        </p:txBody>
-      </p:sp>
-      <p:sp>
-        <p:nvSpPr>
-          <p:cNvPr id="40" name="Rectangle 39"/>
+              <a:t>$3</a:t>
+            </a:r>
+          </a:p>
+        </p:txBody>
+      </p:sp>
+      <p:sp>
+        <p:nvSpPr>
+          <p:cNvPr id="38" name="Rectangle 37"/>
           <p:cNvSpPr/>
           <p:nvPr/>
         </p:nvSpPr>
         <p:spPr>
           <a:xfrm>
-            <a:off x="457200" y="5385816"/>
-            <a:ext cx="5486400" cy="301752"/>
+            <a:off x="2286000" y="5504688"/>
+            <a:ext cx="7589520" cy="310896"/>
           </a:xfrm>
           <a:prstGeom prst="rect">
             <a:avLst/>
@@ -17210,35 +15651,105 @@
       </p:sp>
       <p:sp>
         <p:nvSpPr>
+          <p:cNvPr id="39" name="TextBox 38"/>
+          <p:cNvSpPr txBox="1"/>
+          <p:nvPr/>
+        </p:nvSpPr>
+        <p:spPr>
+          <a:xfrm>
+            <a:off x="2377440" y="5568696"/>
+            <a:ext cx="1737360" cy="219456"/>
+          </a:xfrm>
+          <a:prstGeom prst="rect">
+            <a:avLst/>
+          </a:prstGeom>
+          <a:noFill/>
+        </p:spPr>
+        <p:txBody>
+          <a:bodyPr wrap="square" anchor="t" lIns="0" rIns="0" tIns="0" bIns="0">
+            <a:spAutoFit/>
+          </a:bodyPr>
+          <a:lstStyle/>
+          <a:p>
+            <a:pPr algn="l"/>
+            <a:r>
+              <a:rPr sz="1100" b="1">
+                <a:solidFill>
+                  <a:srgbClr val="059669"/>
+                </a:solidFill>
+                <a:latin typeface="Open Sans"/>
+              </a:rPr>
+              <a:t>$10–$99.99</a:t>
+            </a:r>
+          </a:p>
+        </p:txBody>
+      </p:sp>
+      <p:sp>
+        <p:nvSpPr>
+          <p:cNvPr id="40" name="TextBox 39"/>
+          <p:cNvSpPr txBox="1"/>
+          <p:nvPr/>
+        </p:nvSpPr>
+        <p:spPr>
+          <a:xfrm>
+            <a:off x="4297680" y="5568696"/>
+            <a:ext cx="1463040" cy="219456"/>
+          </a:xfrm>
+          <a:prstGeom prst="rect">
+            <a:avLst/>
+          </a:prstGeom>
+          <a:noFill/>
+        </p:spPr>
+        <p:txBody>
+          <a:bodyPr wrap="square" anchor="t" lIns="0" rIns="0" tIns="0" bIns="0">
+            <a:spAutoFit/>
+          </a:bodyPr>
+          <a:lstStyle/>
+          <a:p>
+            <a:pPr algn="l"/>
+            <a:r>
+              <a:rPr sz="1100" b="0">
+                <a:solidFill>
+                  <a:srgbClr val="334155"/>
+                </a:solidFill>
+                <a:latin typeface="Open Sans"/>
+              </a:rPr>
+              <a:t>4,395</a:t>
+            </a:r>
+          </a:p>
+        </p:txBody>
+      </p:sp>
+      <p:sp>
+        <p:nvSpPr>
           <p:cNvPr id="41" name="TextBox 40"/>
           <p:cNvSpPr txBox="1"/>
           <p:nvPr/>
         </p:nvSpPr>
         <p:spPr>
           <a:xfrm>
-            <a:off x="502920" y="5440679"/>
-            <a:ext cx="868680" cy="201168"/>
-          </a:xfrm>
-          <a:prstGeom prst="rect">
-            <a:avLst/>
-          </a:prstGeom>
-          <a:noFill/>
-        </p:spPr>
-        <p:txBody>
-          <a:bodyPr wrap="square" anchor="t" lIns="0" rIns="0" tIns="0" bIns="0">
-            <a:spAutoFit/>
-          </a:bodyPr>
-          <a:lstStyle/>
-          <a:p>
-            <a:pPr algn="l"/>
-            <a:r>
-              <a:rPr sz="1000" b="1">
-                <a:solidFill>
-                  <a:srgbClr val="0F172A"/>
-                </a:solidFill>
-                <a:latin typeface="Open Sans"/>
-              </a:rPr>
-              <a:t>2–5 records</a:t>
+            <a:off x="5943600" y="5568696"/>
+            <a:ext cx="1737360" cy="219456"/>
+          </a:xfrm>
+          <a:prstGeom prst="rect">
+            <a:avLst/>
+          </a:prstGeom>
+          <a:noFill/>
+        </p:spPr>
+        <p:txBody>
+          <a:bodyPr wrap="square" anchor="t" lIns="0" rIns="0" tIns="0" bIns="0">
+            <a:spAutoFit/>
+          </a:bodyPr>
+          <a:lstStyle/>
+          <a:p>
+            <a:pPr algn="l"/>
+            <a:r>
+              <a:rPr sz="1100" b="1">
+                <a:solidFill>
+                  <a:srgbClr val="059669"/>
+                </a:solidFill>
+                <a:latin typeface="Open Sans"/>
+              </a:rPr>
+              <a:t>$174K</a:t>
             </a:r>
           </a:p>
         </p:txBody>
@@ -17251,148 +15762,43 @@
         </p:nvSpPr>
         <p:spPr>
           <a:xfrm>
-            <a:off x="1417320" y="5440679"/>
-            <a:ext cx="777240" cy="201168"/>
-          </a:xfrm>
-          <a:prstGeom prst="rect">
-            <a:avLst/>
-          </a:prstGeom>
-          <a:noFill/>
-        </p:spPr>
-        <p:txBody>
-          <a:bodyPr wrap="square" anchor="t" lIns="0" rIns="0" tIns="0" bIns="0">
-            <a:spAutoFit/>
-          </a:bodyPr>
-          <a:lstStyle/>
-          <a:p>
-            <a:pPr algn="l"/>
-            <a:r>
-              <a:rPr sz="1000" b="0">
-                <a:solidFill>
-                  <a:srgbClr val="334155"/>
-                </a:solidFill>
-                <a:latin typeface="Open Sans"/>
-              </a:rPr>
-              <a:t>4,971</a:t>
-            </a:r>
-          </a:p>
-        </p:txBody>
-      </p:sp>
-      <p:sp>
-        <p:nvSpPr>
-          <p:cNvPr id="43" name="TextBox 42"/>
-          <p:cNvSpPr txBox="1"/>
-          <p:nvPr/>
-        </p:nvSpPr>
-        <p:spPr>
-          <a:xfrm>
-            <a:off x="2240280" y="5440679"/>
-            <a:ext cx="777240" cy="201168"/>
-          </a:xfrm>
-          <a:prstGeom prst="rect">
-            <a:avLst/>
-          </a:prstGeom>
-          <a:noFill/>
-        </p:spPr>
-        <p:txBody>
-          <a:bodyPr wrap="square" anchor="t" lIns="0" rIns="0" tIns="0" bIns="0">
-            <a:spAutoFit/>
-          </a:bodyPr>
-          <a:lstStyle/>
-          <a:p>
-            <a:pPr algn="l"/>
-            <a:r>
-              <a:rPr sz="1000" b="1">
+            <a:off x="7863840" y="5568696"/>
+            <a:ext cx="1920240" cy="219456"/>
+          </a:xfrm>
+          <a:prstGeom prst="rect">
+            <a:avLst/>
+          </a:prstGeom>
+          <a:noFill/>
+        </p:spPr>
+        <p:txBody>
+          <a:bodyPr wrap="square" anchor="t" lIns="0" rIns="0" tIns="0" bIns="0">
+            <a:spAutoFit/>
+          </a:bodyPr>
+          <a:lstStyle/>
+          <a:p>
+            <a:pPr algn="l"/>
+            <a:r>
+              <a:rPr sz="1100" b="0">
                 <a:solidFill>
                   <a:srgbClr val="059669"/>
                 </a:solidFill>
                 <a:latin typeface="Open Sans"/>
               </a:rPr>
-              <a:t>$710K</a:t>
-            </a:r>
-          </a:p>
-        </p:txBody>
-      </p:sp>
-      <p:sp>
-        <p:nvSpPr>
-          <p:cNvPr id="44" name="TextBox 43"/>
-          <p:cNvSpPr txBox="1"/>
-          <p:nvPr/>
-        </p:nvSpPr>
-        <p:spPr>
-          <a:xfrm>
-            <a:off x="3063240" y="5440679"/>
-            <a:ext cx="914400" cy="201168"/>
-          </a:xfrm>
-          <a:prstGeom prst="rect">
-            <a:avLst/>
-          </a:prstGeom>
-          <a:noFill/>
-        </p:spPr>
-        <p:txBody>
-          <a:bodyPr wrap="square" anchor="t" lIns="0" rIns="0" tIns="0" bIns="0">
-            <a:spAutoFit/>
-          </a:bodyPr>
-          <a:lstStyle/>
-          <a:p>
-            <a:pPr algn="l"/>
-            <a:r>
-              <a:rPr sz="1000" b="0">
-                <a:solidFill>
-                  <a:srgbClr val="059669"/>
-                </a:solidFill>
-                <a:latin typeface="Open Sans"/>
-              </a:rPr>
-              <a:t>$143</a:t>
-            </a:r>
-          </a:p>
-        </p:txBody>
-      </p:sp>
-      <p:sp>
-        <p:nvSpPr>
-          <p:cNvPr id="45" name="TextBox 44"/>
-          <p:cNvSpPr txBox="1"/>
-          <p:nvPr/>
-        </p:nvSpPr>
-        <p:spPr>
-          <a:xfrm>
-            <a:off x="4023360" y="5440679"/>
-            <a:ext cx="1874519" cy="201168"/>
-          </a:xfrm>
-          <a:prstGeom prst="rect">
-            <a:avLst/>
-          </a:prstGeom>
-          <a:noFill/>
-        </p:spPr>
-        <p:txBody>
-          <a:bodyPr wrap="square" anchor="t" lIns="0" rIns="0" tIns="0" bIns="0">
-            <a:spAutoFit/>
-          </a:bodyPr>
-          <a:lstStyle/>
-          <a:p>
-            <a:pPr algn="l"/>
-            <a:r>
-              <a:rPr sz="900" b="0">
-                <a:solidFill>
-                  <a:srgbClr val="64748B"/>
-                </a:solidFill>
-                <a:latin typeface="Open Sans"/>
-              </a:rPr>
-              <a:t>High confidence</a:t>
-            </a:r>
-          </a:p>
-        </p:txBody>
-      </p:sp>
-      <p:sp>
-        <p:nvSpPr>
-          <p:cNvPr id="46" name="Rectangle 45"/>
+              <a:t>$40</a:t>
+            </a:r>
+          </a:p>
+        </p:txBody>
+      </p:sp>
+      <p:sp>
+        <p:nvSpPr>
+          <p:cNvPr id="43" name="Rectangle 42"/>
           <p:cNvSpPr/>
           <p:nvPr/>
         </p:nvSpPr>
         <p:spPr>
           <a:xfrm>
-            <a:off x="457200" y="5687568"/>
-            <a:ext cx="5486400" cy="301752"/>
+            <a:off x="2286000" y="5815584"/>
+            <a:ext cx="7589520" cy="310896"/>
           </a:xfrm>
           <a:prstGeom prst="rect">
             <a:avLst/>
@@ -17429,189 +15835,154 @@
       </p:sp>
       <p:sp>
         <p:nvSpPr>
+          <p:cNvPr id="44" name="TextBox 43"/>
+          <p:cNvSpPr txBox="1"/>
+          <p:nvPr/>
+        </p:nvSpPr>
+        <p:spPr>
+          <a:xfrm>
+            <a:off x="2377440" y="5879592"/>
+            <a:ext cx="1737360" cy="219456"/>
+          </a:xfrm>
+          <a:prstGeom prst="rect">
+            <a:avLst/>
+          </a:prstGeom>
+          <a:noFill/>
+        </p:spPr>
+        <p:txBody>
+          <a:bodyPr wrap="square" anchor="t" lIns="0" rIns="0" tIns="0" bIns="0">
+            <a:spAutoFit/>
+          </a:bodyPr>
+          <a:lstStyle/>
+          <a:p>
+            <a:pPr algn="l"/>
+            <a:r>
+              <a:rPr sz="1100" b="1">
+                <a:solidFill>
+                  <a:srgbClr val="FFB352"/>
+                </a:solidFill>
+                <a:latin typeface="Open Sans"/>
+              </a:rPr>
+              <a:t>$100–$499.99</a:t>
+            </a:r>
+          </a:p>
+        </p:txBody>
+      </p:sp>
+      <p:sp>
+        <p:nvSpPr>
+          <p:cNvPr id="45" name="TextBox 44"/>
+          <p:cNvSpPr txBox="1"/>
+          <p:nvPr/>
+        </p:nvSpPr>
+        <p:spPr>
+          <a:xfrm>
+            <a:off x="4297680" y="5879592"/>
+            <a:ext cx="1463040" cy="219456"/>
+          </a:xfrm>
+          <a:prstGeom prst="rect">
+            <a:avLst/>
+          </a:prstGeom>
+          <a:noFill/>
+        </p:spPr>
+        <p:txBody>
+          <a:bodyPr wrap="square" anchor="t" lIns="0" rIns="0" tIns="0" bIns="0">
+            <a:spAutoFit/>
+          </a:bodyPr>
+          <a:lstStyle/>
+          <a:p>
+            <a:pPr algn="l"/>
+            <a:r>
+              <a:rPr sz="1100" b="0">
+                <a:solidFill>
+                  <a:srgbClr val="334155"/>
+                </a:solidFill>
+                <a:latin typeface="Open Sans"/>
+              </a:rPr>
+              <a:t>2,368</a:t>
+            </a:r>
+          </a:p>
+        </p:txBody>
+      </p:sp>
+      <p:sp>
+        <p:nvSpPr>
+          <p:cNvPr id="46" name="TextBox 45"/>
+          <p:cNvSpPr txBox="1"/>
+          <p:nvPr/>
+        </p:nvSpPr>
+        <p:spPr>
+          <a:xfrm>
+            <a:off x="5943600" y="5879592"/>
+            <a:ext cx="1737360" cy="219456"/>
+          </a:xfrm>
+          <a:prstGeom prst="rect">
+            <a:avLst/>
+          </a:prstGeom>
+          <a:noFill/>
+        </p:spPr>
+        <p:txBody>
+          <a:bodyPr wrap="square" anchor="t" lIns="0" rIns="0" tIns="0" bIns="0">
+            <a:spAutoFit/>
+          </a:bodyPr>
+          <a:lstStyle/>
+          <a:p>
+            <a:pPr algn="l"/>
+            <a:r>
+              <a:rPr sz="1100" b="1">
+                <a:solidFill>
+                  <a:srgbClr val="FFB352"/>
+                </a:solidFill>
+                <a:latin typeface="Open Sans"/>
+              </a:rPr>
+              <a:t>$534K</a:t>
+            </a:r>
+          </a:p>
+        </p:txBody>
+      </p:sp>
+      <p:sp>
+        <p:nvSpPr>
           <p:cNvPr id="47" name="TextBox 46"/>
           <p:cNvSpPr txBox="1"/>
           <p:nvPr/>
         </p:nvSpPr>
         <p:spPr>
           <a:xfrm>
-            <a:off x="502920" y="5742431"/>
-            <a:ext cx="868680" cy="201168"/>
-          </a:xfrm>
-          <a:prstGeom prst="rect">
-            <a:avLst/>
-          </a:prstGeom>
-          <a:noFill/>
-        </p:spPr>
-        <p:txBody>
-          <a:bodyPr wrap="square" anchor="t" lIns="0" rIns="0" tIns="0" bIns="0">
-            <a:spAutoFit/>
-          </a:bodyPr>
-          <a:lstStyle/>
-          <a:p>
-            <a:pPr algn="l"/>
-            <a:r>
-              <a:rPr sz="1000" b="1">
-                <a:solidFill>
-                  <a:srgbClr val="0F172A"/>
-                </a:solidFill>
-                <a:latin typeface="Open Sans"/>
-              </a:rPr>
-              <a:t>6–20 records</a:t>
-            </a:r>
-          </a:p>
-        </p:txBody>
-      </p:sp>
-      <p:sp>
-        <p:nvSpPr>
-          <p:cNvPr id="48" name="TextBox 47"/>
-          <p:cNvSpPr txBox="1"/>
-          <p:nvPr/>
-        </p:nvSpPr>
-        <p:spPr>
-          <a:xfrm>
-            <a:off x="1417320" y="5742431"/>
-            <a:ext cx="777240" cy="201168"/>
-          </a:xfrm>
-          <a:prstGeom prst="rect">
-            <a:avLst/>
-          </a:prstGeom>
-          <a:noFill/>
-        </p:spPr>
-        <p:txBody>
-          <a:bodyPr wrap="square" anchor="t" lIns="0" rIns="0" tIns="0" bIns="0">
-            <a:spAutoFit/>
-          </a:bodyPr>
-          <a:lstStyle/>
-          <a:p>
-            <a:pPr algn="l"/>
-            <a:r>
-              <a:rPr sz="1000" b="0">
-                <a:solidFill>
-                  <a:srgbClr val="334155"/>
-                </a:solidFill>
-                <a:latin typeface="Open Sans"/>
-              </a:rPr>
-              <a:t>1,602</a:t>
-            </a:r>
-          </a:p>
-        </p:txBody>
-      </p:sp>
-      <p:sp>
-        <p:nvSpPr>
-          <p:cNvPr id="49" name="TextBox 48"/>
-          <p:cNvSpPr txBox="1"/>
-          <p:nvPr/>
-        </p:nvSpPr>
-        <p:spPr>
-          <a:xfrm>
-            <a:off x="2240280" y="5742431"/>
-            <a:ext cx="777240" cy="201168"/>
-          </a:xfrm>
-          <a:prstGeom prst="rect">
-            <a:avLst/>
-          </a:prstGeom>
-          <a:noFill/>
-        </p:spPr>
-        <p:txBody>
-          <a:bodyPr wrap="square" anchor="t" lIns="0" rIns="0" tIns="0" bIns="0">
-            <a:spAutoFit/>
-          </a:bodyPr>
-          <a:lstStyle/>
-          <a:p>
-            <a:pPr algn="l"/>
-            <a:r>
-              <a:rPr sz="1000" b="1">
+            <a:off x="7863840" y="5879592"/>
+            <a:ext cx="1920240" cy="219456"/>
+          </a:xfrm>
+          <a:prstGeom prst="rect">
+            <a:avLst/>
+          </a:prstGeom>
+          <a:noFill/>
+        </p:spPr>
+        <p:txBody>
+          <a:bodyPr wrap="square" anchor="t" lIns="0" rIns="0" tIns="0" bIns="0">
+            <a:spAutoFit/>
+          </a:bodyPr>
+          <a:lstStyle/>
+          <a:p>
+            <a:pPr algn="l"/>
+            <a:r>
+              <a:rPr sz="1100" b="0">
                 <a:solidFill>
                   <a:srgbClr val="FFB352"/>
                 </a:solidFill>
                 <a:latin typeface="Open Sans"/>
               </a:rPr>
-              <a:t>$1.21M</a:t>
-            </a:r>
-          </a:p>
-        </p:txBody>
-      </p:sp>
-      <p:sp>
-        <p:nvSpPr>
-          <p:cNvPr id="50" name="TextBox 49"/>
-          <p:cNvSpPr txBox="1"/>
-          <p:nvPr/>
-        </p:nvSpPr>
-        <p:spPr>
-          <a:xfrm>
-            <a:off x="3063240" y="5742431"/>
-            <a:ext cx="914400" cy="201168"/>
-          </a:xfrm>
-          <a:prstGeom prst="rect">
-            <a:avLst/>
-          </a:prstGeom>
-          <a:noFill/>
-        </p:spPr>
-        <p:txBody>
-          <a:bodyPr wrap="square" anchor="t" lIns="0" rIns="0" tIns="0" bIns="0">
-            <a:spAutoFit/>
-          </a:bodyPr>
-          <a:lstStyle/>
-          <a:p>
-            <a:pPr algn="l"/>
-            <a:r>
-              <a:rPr sz="1000" b="0">
-                <a:solidFill>
-                  <a:srgbClr val="FFB352"/>
-                </a:solidFill>
-                <a:latin typeface="Open Sans"/>
-              </a:rPr>
-              <a:t>$755</a:t>
-            </a:r>
-          </a:p>
-        </p:txBody>
-      </p:sp>
-      <p:sp>
-        <p:nvSpPr>
-          <p:cNvPr id="51" name="TextBox 50"/>
-          <p:cNvSpPr txBox="1"/>
-          <p:nvPr/>
-        </p:nvSpPr>
-        <p:spPr>
-          <a:xfrm>
-            <a:off x="4023360" y="5742431"/>
-            <a:ext cx="1874519" cy="201168"/>
-          </a:xfrm>
-          <a:prstGeom prst="rect">
-            <a:avLst/>
-          </a:prstGeom>
-          <a:noFill/>
-        </p:spPr>
-        <p:txBody>
-          <a:bodyPr wrap="square" anchor="t" lIns="0" rIns="0" tIns="0" bIns="0">
-            <a:spAutoFit/>
-          </a:bodyPr>
-          <a:lstStyle/>
-          <a:p>
-            <a:pPr algn="l"/>
-            <a:r>
-              <a:rPr sz="900" b="0">
-                <a:solidFill>
-                  <a:srgbClr val="64748B"/>
-                </a:solidFill>
-                <a:latin typeface="Open Sans"/>
-              </a:rPr>
-              <a:t>Mixed — review</a:t>
-            </a:r>
-          </a:p>
-        </p:txBody>
-      </p:sp>
-      <p:sp>
-        <p:nvSpPr>
-          <p:cNvPr id="52" name="Rectangle 51"/>
+              <a:t>$225</a:t>
+            </a:r>
+          </a:p>
+        </p:txBody>
+      </p:sp>
+      <p:sp>
+        <p:nvSpPr>
+          <p:cNvPr id="48" name="Rectangle 47"/>
           <p:cNvSpPr/>
           <p:nvPr/>
         </p:nvSpPr>
         <p:spPr>
           <a:xfrm>
-            <a:off x="457200" y="5989320"/>
-            <a:ext cx="5486400" cy="301752"/>
+            <a:off x="2286000" y="6126480"/>
+            <a:ext cx="7589520" cy="310896"/>
           </a:xfrm>
           <a:prstGeom prst="rect">
             <a:avLst/>
@@ -17648,189 +16019,84 @@
       </p:sp>
       <p:sp>
         <p:nvSpPr>
-          <p:cNvPr id="53" name="TextBox 52"/>
-          <p:cNvSpPr txBox="1"/>
-          <p:nvPr/>
-        </p:nvSpPr>
-        <p:spPr>
-          <a:xfrm>
-            <a:off x="502920" y="6044183"/>
-            <a:ext cx="868680" cy="201168"/>
-          </a:xfrm>
-          <a:prstGeom prst="rect">
-            <a:avLst/>
-          </a:prstGeom>
-          <a:noFill/>
-        </p:spPr>
-        <p:txBody>
-          <a:bodyPr wrap="square" anchor="t" lIns="0" rIns="0" tIns="0" bIns="0">
-            <a:spAutoFit/>
-          </a:bodyPr>
-          <a:lstStyle/>
-          <a:p>
-            <a:pPr algn="l"/>
-            <a:r>
-              <a:rPr sz="1000" b="1">
-                <a:solidFill>
-                  <a:srgbClr val="0F172A"/>
-                </a:solidFill>
-                <a:latin typeface="Open Sans"/>
-              </a:rPr>
-              <a:t>20+ records</a:t>
-            </a:r>
-          </a:p>
-        </p:txBody>
-      </p:sp>
-      <p:sp>
-        <p:nvSpPr>
-          <p:cNvPr id="54" name="TextBox 53"/>
-          <p:cNvSpPr txBox="1"/>
-          <p:nvPr/>
-        </p:nvSpPr>
-        <p:spPr>
-          <a:xfrm>
-            <a:off x="1417320" y="6044183"/>
-            <a:ext cx="777240" cy="201168"/>
-          </a:xfrm>
-          <a:prstGeom prst="rect">
-            <a:avLst/>
-          </a:prstGeom>
-          <a:noFill/>
-        </p:spPr>
-        <p:txBody>
-          <a:bodyPr wrap="square" anchor="t" lIns="0" rIns="0" tIns="0" bIns="0">
-            <a:spAutoFit/>
-          </a:bodyPr>
-          <a:lstStyle/>
-          <a:p>
-            <a:pPr algn="l"/>
-            <a:r>
-              <a:rPr sz="1000" b="0">
+          <p:cNvPr id="49" name="TextBox 48"/>
+          <p:cNvSpPr txBox="1"/>
+          <p:nvPr/>
+        </p:nvSpPr>
+        <p:spPr>
+          <a:xfrm>
+            <a:off x="2377440" y="6190488"/>
+            <a:ext cx="1737360" cy="219456"/>
+          </a:xfrm>
+          <a:prstGeom prst="rect">
+            <a:avLst/>
+          </a:prstGeom>
+          <a:noFill/>
+        </p:spPr>
+        <p:txBody>
+          <a:bodyPr wrap="square" anchor="t" lIns="0" rIns="0" tIns="0" bIns="0">
+            <a:spAutoFit/>
+          </a:bodyPr>
+          <a:lstStyle/>
+          <a:p>
+            <a:pPr algn="l"/>
+            <a:r>
+              <a:rPr sz="1100" b="1">
+                <a:solidFill>
+                  <a:srgbClr val="2863C5"/>
+                </a:solidFill>
+                <a:latin typeface="Open Sans"/>
+              </a:rPr>
+              <a:t>$500+</a:t>
+            </a:r>
+          </a:p>
+        </p:txBody>
+      </p:sp>
+      <p:sp>
+        <p:nvSpPr>
+          <p:cNvPr id="50" name="TextBox 49"/>
+          <p:cNvSpPr txBox="1"/>
+          <p:nvPr/>
+        </p:nvSpPr>
+        <p:spPr>
+          <a:xfrm>
+            <a:off x="4297680" y="6190488"/>
+            <a:ext cx="1463040" cy="219456"/>
+          </a:xfrm>
+          <a:prstGeom prst="rect">
+            <a:avLst/>
+          </a:prstGeom>
+          <a:noFill/>
+        </p:spPr>
+        <p:txBody>
+          <a:bodyPr wrap="square" anchor="t" lIns="0" rIns="0" tIns="0" bIns="0">
+            <a:spAutoFit/>
+          </a:bodyPr>
+          <a:lstStyle/>
+          <a:p>
+            <a:pPr algn="l"/>
+            <a:r>
+              <a:rPr sz="1100" b="0">
                 <a:solidFill>
                   <a:srgbClr val="334155"/>
                 </a:solidFill>
                 <a:latin typeface="Open Sans"/>
               </a:rPr>
-              <a:t>643</a:t>
-            </a:r>
-          </a:p>
-        </p:txBody>
-      </p:sp>
-      <p:sp>
-        <p:nvSpPr>
-          <p:cNvPr id="55" name="TextBox 54"/>
-          <p:cNvSpPr txBox="1"/>
-          <p:nvPr/>
-        </p:nvSpPr>
-        <p:spPr>
-          <a:xfrm>
-            <a:off x="2240280" y="6044183"/>
-            <a:ext cx="777240" cy="201168"/>
-          </a:xfrm>
-          <a:prstGeom prst="rect">
-            <a:avLst/>
-          </a:prstGeom>
-          <a:noFill/>
-        </p:spPr>
-        <p:txBody>
-          <a:bodyPr wrap="square" anchor="t" lIns="0" rIns="0" tIns="0" bIns="0">
-            <a:spAutoFit/>
-          </a:bodyPr>
-          <a:lstStyle/>
-          <a:p>
-            <a:pPr algn="l"/>
-            <a:r>
-              <a:rPr sz="1000" b="1">
-                <a:solidFill>
-                  <a:srgbClr val="64748B"/>
-                </a:solidFill>
-                <a:latin typeface="Open Sans"/>
-              </a:rPr>
-              <a:t>$2.88M</a:t>
-            </a:r>
-          </a:p>
-        </p:txBody>
-      </p:sp>
-      <p:sp>
-        <p:nvSpPr>
-          <p:cNvPr id="56" name="TextBox 55"/>
-          <p:cNvSpPr txBox="1"/>
-          <p:nvPr/>
-        </p:nvSpPr>
-        <p:spPr>
-          <a:xfrm>
-            <a:off x="3063240" y="6044183"/>
-            <a:ext cx="914400" cy="201168"/>
-          </a:xfrm>
-          <a:prstGeom prst="rect">
-            <a:avLst/>
-          </a:prstGeom>
-          <a:noFill/>
-        </p:spPr>
-        <p:txBody>
-          <a:bodyPr wrap="square" anchor="t" lIns="0" rIns="0" tIns="0" bIns="0">
-            <a:spAutoFit/>
-          </a:bodyPr>
-          <a:lstStyle/>
-          <a:p>
-            <a:pPr algn="l"/>
-            <a:r>
-              <a:rPr sz="1000" b="0">
-                <a:solidFill>
-                  <a:srgbClr val="64748B"/>
-                </a:solidFill>
-                <a:latin typeface="Open Sans"/>
-              </a:rPr>
-              <a:t>$4,478</a:t>
-            </a:r>
-          </a:p>
-        </p:txBody>
-      </p:sp>
-      <p:sp>
-        <p:nvSpPr>
-          <p:cNvPr id="57" name="TextBox 56"/>
-          <p:cNvSpPr txBox="1"/>
-          <p:nvPr/>
-        </p:nvSpPr>
-        <p:spPr>
-          <a:xfrm>
-            <a:off x="4023360" y="6044183"/>
-            <a:ext cx="1874519" cy="201168"/>
-          </a:xfrm>
-          <a:prstGeom prst="rect">
-            <a:avLst/>
-          </a:prstGeom>
-          <a:noFill/>
-        </p:spPr>
-        <p:txBody>
-          <a:bodyPr wrap="square" anchor="t" lIns="0" rIns="0" tIns="0" bIns="0">
-            <a:spAutoFit/>
-          </a:bodyPr>
-          <a:lstStyle/>
-          <a:p>
-            <a:pPr algn="l"/>
-            <a:r>
-              <a:rPr sz="900" b="0">
-                <a:solidFill>
-                  <a:srgbClr val="64748B"/>
-                </a:solidFill>
-                <a:latin typeface="Open Sans"/>
-              </a:rPr>
-              <a:t>Likely real, large estates</a:t>
-            </a:r>
-          </a:p>
-        </p:txBody>
-      </p:sp>
-      <p:sp>
-        <p:nvSpPr>
-          <p:cNvPr id="58" name="TextBox 57"/>
-          <p:cNvSpPr txBox="1"/>
-          <p:nvPr/>
-        </p:nvSpPr>
-        <p:spPr>
-          <a:xfrm>
-            <a:off x="6217920" y="4206240"/>
-            <a:ext cx="5486400" cy="320040"/>
+              <a:t>1,511</a:t>
+            </a:r>
+          </a:p>
+        </p:txBody>
+      </p:sp>
+      <p:sp>
+        <p:nvSpPr>
+          <p:cNvPr id="51" name="TextBox 50"/>
+          <p:cNvSpPr txBox="1"/>
+          <p:nvPr/>
+        </p:nvSpPr>
+        <p:spPr>
+          <a:xfrm>
+            <a:off x="5943600" y="6190488"/>
+            <a:ext cx="1737360" cy="219456"/>
           </a:xfrm>
           <a:prstGeom prst="rect">
             <a:avLst/>
@@ -17851,961 +16117,41 @@
                 </a:solidFill>
                 <a:latin typeface="Open Sans"/>
               </a:rPr>
-              <a:t>CUSTOMERS BY TOTAL OWED</a:t>
-            </a:r>
-          </a:p>
-        </p:txBody>
-      </p:sp>
-      <p:sp>
-        <p:nvSpPr>
-          <p:cNvPr id="59" name="TextBox 58"/>
-          <p:cNvSpPr txBox="1"/>
-          <p:nvPr/>
-        </p:nvSpPr>
-        <p:spPr>
-          <a:xfrm>
-            <a:off x="6217920" y="4498848"/>
-            <a:ext cx="5486400" cy="274320"/>
-          </a:xfrm>
-          <a:prstGeom prst="rect">
-            <a:avLst/>
-          </a:prstGeom>
-          <a:noFill/>
-        </p:spPr>
-        <p:txBody>
-          <a:bodyPr wrap="square" anchor="t" lIns="0" rIns="0" tIns="0" bIns="0">
-            <a:spAutoFit/>
-          </a:bodyPr>
-          <a:lstStyle/>
-          <a:p>
-            <a:pPr algn="l"/>
-            <a:r>
-              <a:rPr sz="1000" b="0">
-                <a:solidFill>
-                  <a:srgbClr val="64748B"/>
-                </a:solidFill>
-                <a:latin typeface="Open Sans"/>
-              </a:rPr>
-              <a:t>Each customer placed in one bucket based on the SUM of their matched records. Customers add up to 11,958.</a:t>
-            </a:r>
-          </a:p>
-        </p:txBody>
-      </p:sp>
-      <p:sp>
-        <p:nvSpPr>
-          <p:cNvPr id="60" name="Rectangle 59"/>
-          <p:cNvSpPr/>
-          <p:nvPr/>
-        </p:nvSpPr>
-        <p:spPr>
-          <a:xfrm>
-            <a:off x="6217920" y="4846320"/>
-            <a:ext cx="5486400" cy="237744"/>
-          </a:xfrm>
-          <a:prstGeom prst="rect">
-            <a:avLst/>
-          </a:prstGeom>
-          <a:solidFill>
-            <a:srgbClr val="0F172A"/>
-          </a:solidFill>
-          <a:ln>
-            <a:noFill/>
-          </a:ln>
-          <a:effectLst/>
-        </p:spPr>
-        <p:style>
-          <a:lnRef idx="1">
-            <a:schemeClr val="accent1"/>
-          </a:lnRef>
-          <a:fillRef idx="3">
-            <a:schemeClr val="accent1"/>
-          </a:fillRef>
-          <a:effectRef idx="2">
-            <a:schemeClr val="accent1"/>
-          </a:effectRef>
-          <a:fontRef idx="minor">
-            <a:schemeClr val="lt1"/>
-          </a:fontRef>
-        </p:style>
-        <p:txBody>
-          <a:bodyPr rtlCol="0" anchor="ctr"/>
-          <a:lstStyle/>
-          <a:p>
-            <a:pPr algn="ctr"/>
-          </a:p>
-        </p:txBody>
-      </p:sp>
-      <p:sp>
-        <p:nvSpPr>
-          <p:cNvPr id="61" name="TextBox 60"/>
-          <p:cNvSpPr txBox="1"/>
-          <p:nvPr/>
-        </p:nvSpPr>
-        <p:spPr>
-          <a:xfrm>
-            <a:off x="6263640" y="4882896"/>
-            <a:ext cx="1325880" cy="182880"/>
-          </a:xfrm>
-          <a:prstGeom prst="rect">
-            <a:avLst/>
-          </a:prstGeom>
-          <a:noFill/>
-        </p:spPr>
-        <p:txBody>
-          <a:bodyPr wrap="square" anchor="t" lIns="0" rIns="0" tIns="0" bIns="0">
-            <a:spAutoFit/>
-          </a:bodyPr>
-          <a:lstStyle/>
-          <a:p>
-            <a:pPr algn="l"/>
-            <a:r>
-              <a:rPr sz="900" b="1">
-                <a:solidFill>
-                  <a:srgbClr val="FFFFFF"/>
-                </a:solidFill>
-                <a:latin typeface="Open Sans"/>
-              </a:rPr>
-              <a:t>Total owed</a:t>
-            </a:r>
-          </a:p>
-        </p:txBody>
-      </p:sp>
-      <p:sp>
-        <p:nvSpPr>
-          <p:cNvPr id="62" name="TextBox 61"/>
-          <p:cNvSpPr txBox="1"/>
-          <p:nvPr/>
-        </p:nvSpPr>
-        <p:spPr>
-          <a:xfrm>
-            <a:off x="7680960" y="4882896"/>
-            <a:ext cx="1097280" cy="182880"/>
-          </a:xfrm>
-          <a:prstGeom prst="rect">
-            <a:avLst/>
-          </a:prstGeom>
-          <a:noFill/>
-        </p:spPr>
-        <p:txBody>
-          <a:bodyPr wrap="square" anchor="t" lIns="0" rIns="0" tIns="0" bIns="0">
-            <a:spAutoFit/>
-          </a:bodyPr>
-          <a:lstStyle/>
-          <a:p>
-            <a:pPr algn="l"/>
-            <a:r>
-              <a:rPr sz="900" b="1">
-                <a:solidFill>
-                  <a:srgbClr val="FFFFFF"/>
-                </a:solidFill>
-                <a:latin typeface="Open Sans"/>
-              </a:rPr>
-              <a:t>Customers</a:t>
-            </a:r>
-          </a:p>
-        </p:txBody>
-      </p:sp>
-      <p:sp>
-        <p:nvSpPr>
-          <p:cNvPr id="63" name="TextBox 62"/>
-          <p:cNvSpPr txBox="1"/>
-          <p:nvPr/>
-        </p:nvSpPr>
-        <p:spPr>
-          <a:xfrm>
-            <a:off x="8823960" y="4882896"/>
-            <a:ext cx="1280160" cy="182880"/>
-          </a:xfrm>
-          <a:prstGeom prst="rect">
-            <a:avLst/>
-          </a:prstGeom>
-          <a:noFill/>
-        </p:spPr>
-        <p:txBody>
-          <a:bodyPr wrap="square" anchor="t" lIns="0" rIns="0" tIns="0" bIns="0">
-            <a:spAutoFit/>
-          </a:bodyPr>
-          <a:lstStyle/>
-          <a:p>
-            <a:pPr algn="l"/>
-            <a:r>
-              <a:rPr sz="900" b="1">
-                <a:solidFill>
-                  <a:srgbClr val="FFFFFF"/>
-                </a:solidFill>
-                <a:latin typeface="Open Sans"/>
-              </a:rPr>
-              <a:t>Bucket total</a:t>
-            </a:r>
-          </a:p>
-        </p:txBody>
-      </p:sp>
-      <p:sp>
-        <p:nvSpPr>
-          <p:cNvPr id="64" name="TextBox 63"/>
-          <p:cNvSpPr txBox="1"/>
-          <p:nvPr/>
-        </p:nvSpPr>
-        <p:spPr>
-          <a:xfrm>
-            <a:off x="10149840" y="4882896"/>
-            <a:ext cx="1508760" cy="182880"/>
-          </a:xfrm>
-          <a:prstGeom prst="rect">
-            <a:avLst/>
-          </a:prstGeom>
-          <a:noFill/>
-        </p:spPr>
-        <p:txBody>
-          <a:bodyPr wrap="square" anchor="t" lIns="0" rIns="0" tIns="0" bIns="0">
-            <a:spAutoFit/>
-          </a:bodyPr>
-          <a:lstStyle/>
-          <a:p>
-            <a:pPr algn="l"/>
-            <a:r>
-              <a:rPr sz="900" b="1">
-                <a:solidFill>
-                  <a:srgbClr val="FFFFFF"/>
-                </a:solidFill>
-                <a:latin typeface="Open Sans"/>
-              </a:rPr>
-              <a:t>$ per customer</a:t>
-            </a:r>
-          </a:p>
-        </p:txBody>
-      </p:sp>
-      <p:sp>
-        <p:nvSpPr>
-          <p:cNvPr id="65" name="Rectangle 64"/>
-          <p:cNvSpPr/>
-          <p:nvPr/>
-        </p:nvSpPr>
-        <p:spPr>
-          <a:xfrm>
-            <a:off x="6217920" y="5084064"/>
-            <a:ext cx="5486400" cy="301752"/>
-          </a:xfrm>
-          <a:prstGeom prst="rect">
-            <a:avLst/>
-          </a:prstGeom>
-          <a:solidFill>
-            <a:srgbClr val="F8FAFC"/>
-          </a:solidFill>
-          <a:ln>
-            <a:noFill/>
-          </a:ln>
-          <a:effectLst/>
-        </p:spPr>
-        <p:style>
-          <a:lnRef idx="1">
-            <a:schemeClr val="accent1"/>
-          </a:lnRef>
-          <a:fillRef idx="3">
-            <a:schemeClr val="accent1"/>
-          </a:fillRef>
-          <a:effectRef idx="2">
-            <a:schemeClr val="accent1"/>
-          </a:effectRef>
-          <a:fontRef idx="minor">
-            <a:schemeClr val="lt1"/>
-          </a:fontRef>
-        </p:style>
-        <p:txBody>
-          <a:bodyPr rtlCol="0" anchor="ctr"/>
-          <a:lstStyle/>
-          <a:p>
-            <a:pPr algn="ctr"/>
-          </a:p>
-        </p:txBody>
-      </p:sp>
-      <p:sp>
-        <p:nvSpPr>
-          <p:cNvPr id="66" name="TextBox 65"/>
-          <p:cNvSpPr txBox="1"/>
-          <p:nvPr/>
-        </p:nvSpPr>
-        <p:spPr>
-          <a:xfrm>
-            <a:off x="6263640" y="5138927"/>
-            <a:ext cx="1325880" cy="201168"/>
-          </a:xfrm>
-          <a:prstGeom prst="rect">
-            <a:avLst/>
-          </a:prstGeom>
-          <a:noFill/>
-        </p:spPr>
-        <p:txBody>
-          <a:bodyPr wrap="square" anchor="t" lIns="0" rIns="0" tIns="0" bIns="0">
-            <a:spAutoFit/>
-          </a:bodyPr>
-          <a:lstStyle/>
-          <a:p>
-            <a:pPr algn="l"/>
-            <a:r>
-              <a:rPr sz="1000" b="1">
-                <a:solidFill>
-                  <a:srgbClr val="64748B"/>
-                </a:solidFill>
-                <a:latin typeface="Open Sans"/>
-              </a:rPr>
-              <a:t>$0–$9.99</a:t>
-            </a:r>
-          </a:p>
-        </p:txBody>
-      </p:sp>
-      <p:sp>
-        <p:nvSpPr>
-          <p:cNvPr id="67" name="TextBox 66"/>
-          <p:cNvSpPr txBox="1"/>
-          <p:nvPr/>
-        </p:nvSpPr>
-        <p:spPr>
-          <a:xfrm>
-            <a:off x="7680960" y="5138927"/>
-            <a:ext cx="1097280" cy="201168"/>
-          </a:xfrm>
-          <a:prstGeom prst="rect">
-            <a:avLst/>
-          </a:prstGeom>
-          <a:noFill/>
-        </p:spPr>
-        <p:txBody>
-          <a:bodyPr wrap="square" anchor="t" lIns="0" rIns="0" tIns="0" bIns="0">
-            <a:spAutoFit/>
-          </a:bodyPr>
-          <a:lstStyle/>
-          <a:p>
-            <a:pPr algn="l"/>
-            <a:r>
-              <a:rPr sz="1000" b="0">
-                <a:solidFill>
-                  <a:srgbClr val="334155"/>
-                </a:solidFill>
-                <a:latin typeface="Open Sans"/>
-              </a:rPr>
-              <a:t>3,684</a:t>
-            </a:r>
-          </a:p>
-        </p:txBody>
-      </p:sp>
-      <p:sp>
-        <p:nvSpPr>
-          <p:cNvPr id="68" name="TextBox 67"/>
-          <p:cNvSpPr txBox="1"/>
-          <p:nvPr/>
-        </p:nvSpPr>
-        <p:spPr>
-          <a:xfrm>
-            <a:off x="8823960" y="5138927"/>
-            <a:ext cx="1280160" cy="201168"/>
-          </a:xfrm>
-          <a:prstGeom prst="rect">
-            <a:avLst/>
-          </a:prstGeom>
-          <a:noFill/>
-        </p:spPr>
-        <p:txBody>
-          <a:bodyPr wrap="square" anchor="t" lIns="0" rIns="0" tIns="0" bIns="0">
-            <a:spAutoFit/>
-          </a:bodyPr>
-          <a:lstStyle/>
-          <a:p>
-            <a:pPr algn="l"/>
-            <a:r>
-              <a:rPr sz="1000" b="1">
-                <a:solidFill>
-                  <a:srgbClr val="64748B"/>
-                </a:solidFill>
-                <a:latin typeface="Open Sans"/>
-              </a:rPr>
-              <a:t>$11K</a:t>
-            </a:r>
-          </a:p>
-        </p:txBody>
-      </p:sp>
-      <p:sp>
-        <p:nvSpPr>
-          <p:cNvPr id="69" name="TextBox 68"/>
-          <p:cNvSpPr txBox="1"/>
-          <p:nvPr/>
-        </p:nvSpPr>
-        <p:spPr>
-          <a:xfrm>
-            <a:off x="10149840" y="5138927"/>
-            <a:ext cx="1508760" cy="201168"/>
-          </a:xfrm>
-          <a:prstGeom prst="rect">
-            <a:avLst/>
-          </a:prstGeom>
-          <a:noFill/>
-        </p:spPr>
-        <p:txBody>
-          <a:bodyPr wrap="square" anchor="t" lIns="0" rIns="0" tIns="0" bIns="0">
-            <a:spAutoFit/>
-          </a:bodyPr>
-          <a:lstStyle/>
-          <a:p>
-            <a:pPr algn="l"/>
-            <a:r>
-              <a:rPr sz="1000" b="0">
-                <a:solidFill>
-                  <a:srgbClr val="64748B"/>
-                </a:solidFill>
-                <a:latin typeface="Open Sans"/>
-              </a:rPr>
-              <a:t>$3</a:t>
-            </a:r>
-          </a:p>
-        </p:txBody>
-      </p:sp>
-      <p:sp>
-        <p:nvSpPr>
-          <p:cNvPr id="70" name="Rectangle 69"/>
-          <p:cNvSpPr/>
-          <p:nvPr/>
-        </p:nvSpPr>
-        <p:spPr>
-          <a:xfrm>
-            <a:off x="6217920" y="5385816"/>
-            <a:ext cx="5486400" cy="301752"/>
-          </a:xfrm>
-          <a:prstGeom prst="rect">
-            <a:avLst/>
-          </a:prstGeom>
-          <a:solidFill>
-            <a:srgbClr val="FFFFFF"/>
-          </a:solidFill>
-          <a:ln>
-            <a:noFill/>
-          </a:ln>
-          <a:effectLst/>
-        </p:spPr>
-        <p:style>
-          <a:lnRef idx="1">
-            <a:schemeClr val="accent1"/>
-          </a:lnRef>
-          <a:fillRef idx="3">
-            <a:schemeClr val="accent1"/>
-          </a:fillRef>
-          <a:effectRef idx="2">
-            <a:schemeClr val="accent1"/>
-          </a:effectRef>
-          <a:fontRef idx="minor">
-            <a:schemeClr val="lt1"/>
-          </a:fontRef>
-        </p:style>
-        <p:txBody>
-          <a:bodyPr rtlCol="0" anchor="ctr"/>
-          <a:lstStyle/>
-          <a:p>
-            <a:pPr algn="ctr"/>
-          </a:p>
-        </p:txBody>
-      </p:sp>
-      <p:sp>
-        <p:nvSpPr>
-          <p:cNvPr id="71" name="TextBox 70"/>
-          <p:cNvSpPr txBox="1"/>
-          <p:nvPr/>
-        </p:nvSpPr>
-        <p:spPr>
-          <a:xfrm>
-            <a:off x="6263640" y="5440679"/>
-            <a:ext cx="1325880" cy="201168"/>
-          </a:xfrm>
-          <a:prstGeom prst="rect">
-            <a:avLst/>
-          </a:prstGeom>
-          <a:noFill/>
-        </p:spPr>
-        <p:txBody>
-          <a:bodyPr wrap="square" anchor="t" lIns="0" rIns="0" tIns="0" bIns="0">
-            <a:spAutoFit/>
-          </a:bodyPr>
-          <a:lstStyle/>
-          <a:p>
-            <a:pPr algn="l"/>
-            <a:r>
-              <a:rPr sz="1000" b="1">
-                <a:solidFill>
-                  <a:srgbClr val="059669"/>
-                </a:solidFill>
-                <a:latin typeface="Open Sans"/>
-              </a:rPr>
-              <a:t>$10–$99.99</a:t>
-            </a:r>
-          </a:p>
-        </p:txBody>
-      </p:sp>
-      <p:sp>
-        <p:nvSpPr>
-          <p:cNvPr id="72" name="TextBox 71"/>
-          <p:cNvSpPr txBox="1"/>
-          <p:nvPr/>
-        </p:nvSpPr>
-        <p:spPr>
-          <a:xfrm>
-            <a:off x="7680960" y="5440679"/>
-            <a:ext cx="1097280" cy="201168"/>
-          </a:xfrm>
-          <a:prstGeom prst="rect">
-            <a:avLst/>
-          </a:prstGeom>
-          <a:noFill/>
-        </p:spPr>
-        <p:txBody>
-          <a:bodyPr wrap="square" anchor="t" lIns="0" rIns="0" tIns="0" bIns="0">
-            <a:spAutoFit/>
-          </a:bodyPr>
-          <a:lstStyle/>
-          <a:p>
-            <a:pPr algn="l"/>
-            <a:r>
-              <a:rPr sz="1000" b="0">
-                <a:solidFill>
-                  <a:srgbClr val="334155"/>
-                </a:solidFill>
-                <a:latin typeface="Open Sans"/>
-              </a:rPr>
-              <a:t>4,395</a:t>
-            </a:r>
-          </a:p>
-        </p:txBody>
-      </p:sp>
-      <p:sp>
-        <p:nvSpPr>
-          <p:cNvPr id="73" name="TextBox 72"/>
-          <p:cNvSpPr txBox="1"/>
-          <p:nvPr/>
-        </p:nvSpPr>
-        <p:spPr>
-          <a:xfrm>
-            <a:off x="8823960" y="5440679"/>
-            <a:ext cx="1280160" cy="201168"/>
-          </a:xfrm>
-          <a:prstGeom prst="rect">
-            <a:avLst/>
-          </a:prstGeom>
-          <a:noFill/>
-        </p:spPr>
-        <p:txBody>
-          <a:bodyPr wrap="square" anchor="t" lIns="0" rIns="0" tIns="0" bIns="0">
-            <a:spAutoFit/>
-          </a:bodyPr>
-          <a:lstStyle/>
-          <a:p>
-            <a:pPr algn="l"/>
-            <a:r>
-              <a:rPr sz="1000" b="1">
-                <a:solidFill>
-                  <a:srgbClr val="059669"/>
-                </a:solidFill>
-                <a:latin typeface="Open Sans"/>
-              </a:rPr>
-              <a:t>$174K</a:t>
-            </a:r>
-          </a:p>
-        </p:txBody>
-      </p:sp>
-      <p:sp>
-        <p:nvSpPr>
-          <p:cNvPr id="74" name="TextBox 73"/>
-          <p:cNvSpPr txBox="1"/>
-          <p:nvPr/>
-        </p:nvSpPr>
-        <p:spPr>
-          <a:xfrm>
-            <a:off x="10149840" y="5440679"/>
-            <a:ext cx="1508760" cy="201168"/>
-          </a:xfrm>
-          <a:prstGeom prst="rect">
-            <a:avLst/>
-          </a:prstGeom>
-          <a:noFill/>
-        </p:spPr>
-        <p:txBody>
-          <a:bodyPr wrap="square" anchor="t" lIns="0" rIns="0" tIns="0" bIns="0">
-            <a:spAutoFit/>
-          </a:bodyPr>
-          <a:lstStyle/>
-          <a:p>
-            <a:pPr algn="l"/>
-            <a:r>
-              <a:rPr sz="1000" b="0">
-                <a:solidFill>
-                  <a:srgbClr val="059669"/>
-                </a:solidFill>
-                <a:latin typeface="Open Sans"/>
-              </a:rPr>
-              <a:t>$40</a:t>
-            </a:r>
-          </a:p>
-        </p:txBody>
-      </p:sp>
-      <p:sp>
-        <p:nvSpPr>
-          <p:cNvPr id="75" name="Rectangle 74"/>
-          <p:cNvSpPr/>
-          <p:nvPr/>
-        </p:nvSpPr>
-        <p:spPr>
-          <a:xfrm>
-            <a:off x="6217920" y="5687568"/>
-            <a:ext cx="5486400" cy="301752"/>
-          </a:xfrm>
-          <a:prstGeom prst="rect">
-            <a:avLst/>
-          </a:prstGeom>
-          <a:solidFill>
-            <a:srgbClr val="F8FAFC"/>
-          </a:solidFill>
-          <a:ln>
-            <a:noFill/>
-          </a:ln>
-          <a:effectLst/>
-        </p:spPr>
-        <p:style>
-          <a:lnRef idx="1">
-            <a:schemeClr val="accent1"/>
-          </a:lnRef>
-          <a:fillRef idx="3">
-            <a:schemeClr val="accent1"/>
-          </a:fillRef>
-          <a:effectRef idx="2">
-            <a:schemeClr val="accent1"/>
-          </a:effectRef>
-          <a:fontRef idx="minor">
-            <a:schemeClr val="lt1"/>
-          </a:fontRef>
-        </p:style>
-        <p:txBody>
-          <a:bodyPr rtlCol="0" anchor="ctr"/>
-          <a:lstStyle/>
-          <a:p>
-            <a:pPr algn="ctr"/>
-          </a:p>
-        </p:txBody>
-      </p:sp>
-      <p:sp>
-        <p:nvSpPr>
-          <p:cNvPr id="76" name="TextBox 75"/>
-          <p:cNvSpPr txBox="1"/>
-          <p:nvPr/>
-        </p:nvSpPr>
-        <p:spPr>
-          <a:xfrm>
-            <a:off x="6263640" y="5742431"/>
-            <a:ext cx="1325880" cy="201168"/>
-          </a:xfrm>
-          <a:prstGeom prst="rect">
-            <a:avLst/>
-          </a:prstGeom>
-          <a:noFill/>
-        </p:spPr>
-        <p:txBody>
-          <a:bodyPr wrap="square" anchor="t" lIns="0" rIns="0" tIns="0" bIns="0">
-            <a:spAutoFit/>
-          </a:bodyPr>
-          <a:lstStyle/>
-          <a:p>
-            <a:pPr algn="l"/>
-            <a:r>
-              <a:rPr sz="1000" b="1">
-                <a:solidFill>
-                  <a:srgbClr val="FFB352"/>
-                </a:solidFill>
-                <a:latin typeface="Open Sans"/>
-              </a:rPr>
-              <a:t>$100–$499.99</a:t>
-            </a:r>
-          </a:p>
-        </p:txBody>
-      </p:sp>
-      <p:sp>
-        <p:nvSpPr>
-          <p:cNvPr id="77" name="TextBox 76"/>
-          <p:cNvSpPr txBox="1"/>
-          <p:nvPr/>
-        </p:nvSpPr>
-        <p:spPr>
-          <a:xfrm>
-            <a:off x="7680960" y="5742431"/>
-            <a:ext cx="1097280" cy="201168"/>
-          </a:xfrm>
-          <a:prstGeom prst="rect">
-            <a:avLst/>
-          </a:prstGeom>
-          <a:noFill/>
-        </p:spPr>
-        <p:txBody>
-          <a:bodyPr wrap="square" anchor="t" lIns="0" rIns="0" tIns="0" bIns="0">
-            <a:spAutoFit/>
-          </a:bodyPr>
-          <a:lstStyle/>
-          <a:p>
-            <a:pPr algn="l"/>
-            <a:r>
-              <a:rPr sz="1000" b="0">
-                <a:solidFill>
-                  <a:srgbClr val="334155"/>
-                </a:solidFill>
-                <a:latin typeface="Open Sans"/>
-              </a:rPr>
-              <a:t>2,368</a:t>
-            </a:r>
-          </a:p>
-        </p:txBody>
-      </p:sp>
-      <p:sp>
-        <p:nvSpPr>
-          <p:cNvPr id="78" name="TextBox 77"/>
-          <p:cNvSpPr txBox="1"/>
-          <p:nvPr/>
-        </p:nvSpPr>
-        <p:spPr>
-          <a:xfrm>
-            <a:off x="8823960" y="5742431"/>
-            <a:ext cx="1280160" cy="201168"/>
-          </a:xfrm>
-          <a:prstGeom prst="rect">
-            <a:avLst/>
-          </a:prstGeom>
-          <a:noFill/>
-        </p:spPr>
-        <p:txBody>
-          <a:bodyPr wrap="square" anchor="t" lIns="0" rIns="0" tIns="0" bIns="0">
-            <a:spAutoFit/>
-          </a:bodyPr>
-          <a:lstStyle/>
-          <a:p>
-            <a:pPr algn="l"/>
-            <a:r>
-              <a:rPr sz="1000" b="1">
-                <a:solidFill>
-                  <a:srgbClr val="FFB352"/>
-                </a:solidFill>
-                <a:latin typeface="Open Sans"/>
-              </a:rPr>
-              <a:t>$534K</a:t>
-            </a:r>
-          </a:p>
-        </p:txBody>
-      </p:sp>
-      <p:sp>
-        <p:nvSpPr>
-          <p:cNvPr id="79" name="TextBox 78"/>
-          <p:cNvSpPr txBox="1"/>
-          <p:nvPr/>
-        </p:nvSpPr>
-        <p:spPr>
-          <a:xfrm>
-            <a:off x="10149840" y="5742431"/>
-            <a:ext cx="1508760" cy="201168"/>
-          </a:xfrm>
-          <a:prstGeom prst="rect">
-            <a:avLst/>
-          </a:prstGeom>
-          <a:noFill/>
-        </p:spPr>
-        <p:txBody>
-          <a:bodyPr wrap="square" anchor="t" lIns="0" rIns="0" tIns="0" bIns="0">
-            <a:spAutoFit/>
-          </a:bodyPr>
-          <a:lstStyle/>
-          <a:p>
-            <a:pPr algn="l"/>
-            <a:r>
-              <a:rPr sz="1000" b="0">
-                <a:solidFill>
-                  <a:srgbClr val="FFB352"/>
-                </a:solidFill>
-                <a:latin typeface="Open Sans"/>
-              </a:rPr>
-              <a:t>$225</a:t>
-            </a:r>
-          </a:p>
-        </p:txBody>
-      </p:sp>
-      <p:sp>
-        <p:nvSpPr>
-          <p:cNvPr id="80" name="Rectangle 79"/>
-          <p:cNvSpPr/>
-          <p:nvPr/>
-        </p:nvSpPr>
-        <p:spPr>
-          <a:xfrm>
-            <a:off x="6217920" y="5989320"/>
-            <a:ext cx="5486400" cy="301752"/>
-          </a:xfrm>
-          <a:prstGeom prst="rect">
-            <a:avLst/>
-          </a:prstGeom>
-          <a:solidFill>
-            <a:srgbClr val="FFFFFF"/>
-          </a:solidFill>
-          <a:ln>
-            <a:noFill/>
-          </a:ln>
-          <a:effectLst/>
-        </p:spPr>
-        <p:style>
-          <a:lnRef idx="1">
-            <a:schemeClr val="accent1"/>
-          </a:lnRef>
-          <a:fillRef idx="3">
-            <a:schemeClr val="accent1"/>
-          </a:fillRef>
-          <a:effectRef idx="2">
-            <a:schemeClr val="accent1"/>
-          </a:effectRef>
-          <a:fontRef idx="minor">
-            <a:schemeClr val="lt1"/>
-          </a:fontRef>
-        </p:style>
-        <p:txBody>
-          <a:bodyPr rtlCol="0" anchor="ctr"/>
-          <a:lstStyle/>
-          <a:p>
-            <a:pPr algn="ctr"/>
-          </a:p>
-        </p:txBody>
-      </p:sp>
-      <p:sp>
-        <p:nvSpPr>
-          <p:cNvPr id="81" name="TextBox 80"/>
-          <p:cNvSpPr txBox="1"/>
-          <p:nvPr/>
-        </p:nvSpPr>
-        <p:spPr>
-          <a:xfrm>
-            <a:off x="6263640" y="6044183"/>
-            <a:ext cx="1325880" cy="201168"/>
-          </a:xfrm>
-          <a:prstGeom prst="rect">
-            <a:avLst/>
-          </a:prstGeom>
-          <a:noFill/>
-        </p:spPr>
-        <p:txBody>
-          <a:bodyPr wrap="square" anchor="t" lIns="0" rIns="0" tIns="0" bIns="0">
-            <a:spAutoFit/>
-          </a:bodyPr>
-          <a:lstStyle/>
-          <a:p>
-            <a:pPr algn="l"/>
-            <a:r>
-              <a:rPr sz="1000" b="1">
+              <a:t>$4.32M</a:t>
+            </a:r>
+          </a:p>
+        </p:txBody>
+      </p:sp>
+      <p:sp>
+        <p:nvSpPr>
+          <p:cNvPr id="52" name="TextBox 51"/>
+          <p:cNvSpPr txBox="1"/>
+          <p:nvPr/>
+        </p:nvSpPr>
+        <p:spPr>
+          <a:xfrm>
+            <a:off x="7863840" y="6190488"/>
+            <a:ext cx="1920240" cy="219456"/>
+          </a:xfrm>
+          <a:prstGeom prst="rect">
+            <a:avLst/>
+          </a:prstGeom>
+          <a:noFill/>
+        </p:spPr>
+        <p:txBody>
+          <a:bodyPr wrap="square" anchor="t" lIns="0" rIns="0" tIns="0" bIns="0">
+            <a:spAutoFit/>
+          </a:bodyPr>
+          <a:lstStyle/>
+          <a:p>
+            <a:pPr algn="l"/>
+            <a:r>
+              <a:rPr sz="1100" b="0">
                 <a:solidFill>
                   <a:srgbClr val="2863C5"/>
                 </a:solidFill>
                 <a:latin typeface="Open Sans"/>
               </a:rPr>
-              <a:t>$500+</a:t>
-            </a:r>
-          </a:p>
-        </p:txBody>
-      </p:sp>
-      <p:sp>
-        <p:nvSpPr>
-          <p:cNvPr id="82" name="TextBox 81"/>
-          <p:cNvSpPr txBox="1"/>
-          <p:nvPr/>
-        </p:nvSpPr>
-        <p:spPr>
-          <a:xfrm>
-            <a:off x="7680960" y="6044183"/>
-            <a:ext cx="1097280" cy="201168"/>
-          </a:xfrm>
-          <a:prstGeom prst="rect">
-            <a:avLst/>
-          </a:prstGeom>
-          <a:noFill/>
-        </p:spPr>
-        <p:txBody>
-          <a:bodyPr wrap="square" anchor="t" lIns="0" rIns="0" tIns="0" bIns="0">
-            <a:spAutoFit/>
-          </a:bodyPr>
-          <a:lstStyle/>
-          <a:p>
-            <a:pPr algn="l"/>
-            <a:r>
-              <a:rPr sz="1000" b="0">
-                <a:solidFill>
-                  <a:srgbClr val="334155"/>
-                </a:solidFill>
-                <a:latin typeface="Open Sans"/>
-              </a:rPr>
-              <a:t>1,511</a:t>
-            </a:r>
-          </a:p>
-        </p:txBody>
-      </p:sp>
-      <p:sp>
-        <p:nvSpPr>
-          <p:cNvPr id="83" name="TextBox 82"/>
-          <p:cNvSpPr txBox="1"/>
-          <p:nvPr/>
-        </p:nvSpPr>
-        <p:spPr>
-          <a:xfrm>
-            <a:off x="8823960" y="6044183"/>
-            <a:ext cx="1280160" cy="201168"/>
-          </a:xfrm>
-          <a:prstGeom prst="rect">
-            <a:avLst/>
-          </a:prstGeom>
-          <a:noFill/>
-        </p:spPr>
-        <p:txBody>
-          <a:bodyPr wrap="square" anchor="t" lIns="0" rIns="0" tIns="0" bIns="0">
-            <a:spAutoFit/>
-          </a:bodyPr>
-          <a:lstStyle/>
-          <a:p>
-            <a:pPr algn="l"/>
-            <a:r>
-              <a:rPr sz="1000" b="1">
-                <a:solidFill>
-                  <a:srgbClr val="2863C5"/>
-                </a:solidFill>
-                <a:latin typeface="Open Sans"/>
-              </a:rPr>
-              <a:t>$4.32M</a:t>
-            </a:r>
-          </a:p>
-        </p:txBody>
-      </p:sp>
-      <p:sp>
-        <p:nvSpPr>
-          <p:cNvPr id="84" name="TextBox 83"/>
-          <p:cNvSpPr txBox="1"/>
-          <p:nvPr/>
-        </p:nvSpPr>
-        <p:spPr>
-          <a:xfrm>
-            <a:off x="10149840" y="6044183"/>
-            <a:ext cx="1508760" cy="201168"/>
-          </a:xfrm>
-          <a:prstGeom prst="rect">
-            <a:avLst/>
-          </a:prstGeom>
-          <a:noFill/>
-        </p:spPr>
-        <p:txBody>
-          <a:bodyPr wrap="square" anchor="t" lIns="0" rIns="0" tIns="0" bIns="0">
-            <a:spAutoFit/>
-          </a:bodyPr>
-          <a:lstStyle/>
-          <a:p>
-            <a:pPr algn="l"/>
-            <a:r>
-              <a:rPr sz="1000" b="0">
-                <a:solidFill>
-                  <a:srgbClr val="2863C5"/>
-                </a:solidFill>
-                <a:latin typeface="Open Sans"/>
-              </a:rPr>
               <a:t>$2,859</a:t>
             </a:r>
           </a:p>
@@ -18813,7 +16159,7 @@
       </p:sp>
       <p:sp>
         <p:nvSpPr>
-          <p:cNvPr id="85" name="Rounded Rectangle 84"/>
+          <p:cNvPr id="53" name="Rounded Rectangle 52"/>
           <p:cNvSpPr/>
           <p:nvPr/>
         </p:nvSpPr>
@@ -18859,7 +16205,7 @@
       </p:sp>
       <p:sp>
         <p:nvSpPr>
-          <p:cNvPr id="86" name="TextBox 85"/>
+          <p:cNvPr id="54" name="TextBox 53"/>
           <p:cNvSpPr txBox="1"/>
           <p:nvPr/>
         </p:nvSpPr>
@@ -18887,7 +16233,7 @@
                 </a:solidFill>
                 <a:latin typeface="Open Sans"/>
               </a:rPr>
-              <a:t>Adding city collapses 23,166 → 11,958 matched customers and $172M → $5.04M — the defensible floor before deeper PII matching.</a:t>
+              <a:t>Adding city collapses 23,166 → 11,958 matched and $172M → $5.04M — the defensible floor before production PII (DOB, SSN-last-4, full address).</a:t>
             </a:r>
           </a:p>
         </p:txBody>

--- a/myReclaim-Exec-Deck.pptx
+++ b/myReclaim-Exec-Deck.pptx
@@ -12803,7 +12803,7 @@
                 </a:solidFill>
                 <a:latin typeface="Open Sans"/>
               </a:rPr>
-              <a:t>Matching on name only — the upper bound. Common names like 'John Smith' inflate the totals; the next slide adds city for the defensible view.</a:t>
+              <a:t>Matching on name only.</a:t>
             </a:r>
           </a:p>
         </p:txBody>
@@ -12817,7 +12817,7 @@
         <p:spPr>
           <a:xfrm>
             <a:off x="457200" y="2606040"/>
-            <a:ext cx="5532120" cy="1417320"/>
+            <a:ext cx="2697480" cy="1417320"/>
           </a:xfrm>
           <a:prstGeom prst="roundRect">
             <a:avLst>
@@ -12865,7 +12865,7 @@
         <p:spPr>
           <a:xfrm>
             <a:off x="457200" y="2606040"/>
-            <a:ext cx="5532120" cy="137160"/>
+            <a:ext cx="2697480" cy="137160"/>
           </a:xfrm>
           <a:prstGeom prst="rect">
             <a:avLst/>
@@ -12908,23 +12908,23 @@
         </p:nvSpPr>
         <p:spPr>
           <a:xfrm>
-            <a:off x="731520" y="2880360"/>
-            <a:ext cx="4983480" cy="777240"/>
-          </a:xfrm>
-          <a:prstGeom prst="rect">
-            <a:avLst/>
-          </a:prstGeom>
-          <a:noFill/>
-        </p:spPr>
-        <p:txBody>
-          <a:bodyPr wrap="square" anchor="t" lIns="0" rIns="0" tIns="0" bIns="0">
-            <a:spAutoFit/>
-          </a:bodyPr>
-          <a:lstStyle/>
-          <a:p>
-            <a:pPr algn="l"/>
-            <a:r>
-              <a:rPr sz="4400" b="1">
+            <a:off x="640080" y="2880360"/>
+            <a:ext cx="2331720" cy="777240"/>
+          </a:xfrm>
+          <a:prstGeom prst="rect">
+            <a:avLst/>
+          </a:prstGeom>
+          <a:noFill/>
+        </p:spPr>
+        <p:txBody>
+          <a:bodyPr wrap="square" anchor="t" lIns="0" rIns="0" tIns="0" bIns="0">
+            <a:spAutoFit/>
+          </a:bodyPr>
+          <a:lstStyle/>
+          <a:p>
+            <a:pPr algn="l"/>
+            <a:r>
+              <a:rPr sz="3600" b="1">
                 <a:solidFill>
                   <a:srgbClr val="2863C5"/>
                 </a:solidFill>
@@ -12943,29 +12943,29 @@
         </p:nvSpPr>
         <p:spPr>
           <a:xfrm>
-            <a:off x="731520" y="3611880"/>
-            <a:ext cx="4983480" cy="365760"/>
-          </a:xfrm>
-          <a:prstGeom prst="rect">
-            <a:avLst/>
-          </a:prstGeom>
-          <a:noFill/>
-        </p:spPr>
-        <p:txBody>
-          <a:bodyPr wrap="square" anchor="t" lIns="0" rIns="0" tIns="0" bIns="0">
-            <a:spAutoFit/>
-          </a:bodyPr>
-          <a:lstStyle/>
-          <a:p>
-            <a:pPr algn="l"/>
-            <a:r>
-              <a:rPr sz="1100" b="0">
+            <a:off x="640080" y="3611880"/>
+            <a:ext cx="2331720" cy="365760"/>
+          </a:xfrm>
+          <a:prstGeom prst="rect">
+            <a:avLst/>
+          </a:prstGeom>
+          <a:noFill/>
+        </p:spPr>
+        <p:txBody>
+          <a:bodyPr wrap="square" anchor="t" lIns="0" rIns="0" tIns="0" bIns="0">
+            <a:spAutoFit/>
+          </a:bodyPr>
+          <a:lstStyle/>
+          <a:p>
+            <a:pPr algn="l"/>
+            <a:r>
+              <a:rPr sz="1000" b="0">
                 <a:solidFill>
                   <a:srgbClr val="334155"/>
                 </a:solidFill>
                 <a:latin typeface="Open Sans"/>
               </a:rPr>
-              <a:t>net actives matched at least one name</a:t>
+              <a:t>net actives matched (name only)</a:t>
             </a:r>
           </a:p>
         </p:txBody>
@@ -12978,8 +12978,8 @@
         </p:nvSpPr>
         <p:spPr>
           <a:xfrm>
-            <a:off x="6172200" y="2606040"/>
-            <a:ext cx="5532120" cy="1417320"/>
+            <a:off x="3291840" y="2606040"/>
+            <a:ext cx="2697480" cy="1417320"/>
           </a:xfrm>
           <a:prstGeom prst="roundRect">
             <a:avLst>
@@ -13026,8 +13026,8 @@
         </p:nvSpPr>
         <p:spPr>
           <a:xfrm>
-            <a:off x="6172200" y="2606040"/>
-            <a:ext cx="5532120" cy="137160"/>
+            <a:off x="3291840" y="2606040"/>
+            <a:ext cx="2697480" cy="137160"/>
           </a:xfrm>
           <a:prstGeom prst="rect">
             <a:avLst/>
@@ -13070,23 +13070,23 @@
         </p:nvSpPr>
         <p:spPr>
           <a:xfrm>
-            <a:off x="6446520" y="2880360"/>
-            <a:ext cx="4983480" cy="777240"/>
-          </a:xfrm>
-          <a:prstGeom prst="rect">
-            <a:avLst/>
-          </a:prstGeom>
-          <a:noFill/>
-        </p:spPr>
-        <p:txBody>
-          <a:bodyPr wrap="square" anchor="t" lIns="0" rIns="0" tIns="0" bIns="0">
-            <a:spAutoFit/>
-          </a:bodyPr>
-          <a:lstStyle/>
-          <a:p>
-            <a:pPr algn="l"/>
-            <a:r>
-              <a:rPr sz="4400" b="1">
+            <a:off x="3474720" y="2880360"/>
+            <a:ext cx="2331720" cy="777240"/>
+          </a:xfrm>
+          <a:prstGeom prst="rect">
+            <a:avLst/>
+          </a:prstGeom>
+          <a:noFill/>
+        </p:spPr>
+        <p:txBody>
+          <a:bodyPr wrap="square" anchor="t" lIns="0" rIns="0" tIns="0" bIns="0">
+            <a:spAutoFit/>
+          </a:bodyPr>
+          <a:lstStyle/>
+          <a:p>
+            <a:pPr algn="l"/>
+            <a:r>
+              <a:rPr sz="3600" b="1">
                 <a:solidFill>
                   <a:srgbClr val="2863C5"/>
                 </a:solidFill>
@@ -13105,23 +13105,23 @@
         </p:nvSpPr>
         <p:spPr>
           <a:xfrm>
-            <a:off x="6446520" y="3611880"/>
-            <a:ext cx="4983480" cy="365760"/>
-          </a:xfrm>
-          <a:prstGeom prst="rect">
-            <a:avLst/>
-          </a:prstGeom>
-          <a:noFill/>
-        </p:spPr>
-        <p:txBody>
-          <a:bodyPr wrap="square" anchor="t" lIns="0" rIns="0" tIns="0" bIns="0">
-            <a:spAutoFit/>
-          </a:bodyPr>
-          <a:lstStyle/>
-          <a:p>
-            <a:pPr algn="l"/>
-            <a:r>
-              <a:rPr sz="1100" b="0">
+            <a:off x="3474720" y="3611880"/>
+            <a:ext cx="2331720" cy="365760"/>
+          </a:xfrm>
+          <a:prstGeom prst="rect">
+            <a:avLst/>
+          </a:prstGeom>
+          <a:noFill/>
+        </p:spPr>
+        <p:txBody>
+          <a:bodyPr wrap="square" anchor="t" lIns="0" rIns="0" tIns="0" bIns="0">
+            <a:spAutoFit/>
+          </a:bodyPr>
+          <a:lstStyle/>
+          <a:p>
+            <a:pPr algn="l"/>
+            <a:r>
+              <a:rPr sz="1000" b="0">
                 <a:solidFill>
                   <a:srgbClr val="334155"/>
                 </a:solidFill>
@@ -13134,7 +13134,331 @@
       </p:sp>
       <p:sp>
         <p:nvSpPr>
-          <p:cNvPr id="18" name="TextBox 17"/>
+          <p:cNvPr id="18" name="Rounded Rectangle 17"/>
+          <p:cNvSpPr/>
+          <p:nvPr/>
+        </p:nvSpPr>
+        <p:spPr>
+          <a:xfrm>
+            <a:off x="6126480" y="2606040"/>
+            <a:ext cx="2697480" cy="1417320"/>
+          </a:xfrm>
+          <a:prstGeom prst="roundRect">
+            <a:avLst>
+              <a:gd name="adj" fmla="val 4000"/>
+            </a:avLst>
+          </a:prstGeom>
+          <a:solidFill>
+            <a:srgbClr val="FFFFFF"/>
+          </a:solidFill>
+          <a:ln w="6350">
+            <a:solidFill>
+              <a:srgbClr val="E2E8F0"/>
+            </a:solidFill>
+          </a:ln>
+          <a:effectLst/>
+        </p:spPr>
+        <p:style>
+          <a:lnRef idx="1">
+            <a:schemeClr val="accent1"/>
+          </a:lnRef>
+          <a:fillRef idx="3">
+            <a:schemeClr val="accent1"/>
+          </a:fillRef>
+          <a:effectRef idx="2">
+            <a:schemeClr val="accent1"/>
+          </a:effectRef>
+          <a:fontRef idx="minor">
+            <a:schemeClr val="lt1"/>
+          </a:fontRef>
+        </p:style>
+        <p:txBody>
+          <a:bodyPr rtlCol="0" anchor="ctr"/>
+          <a:lstStyle/>
+          <a:p>
+            <a:pPr algn="ctr"/>
+          </a:p>
+        </p:txBody>
+      </p:sp>
+      <p:sp>
+        <p:nvSpPr>
+          <p:cNvPr id="19" name="Rectangle 18"/>
+          <p:cNvSpPr/>
+          <p:nvPr/>
+        </p:nvSpPr>
+        <p:spPr>
+          <a:xfrm>
+            <a:off x="6126480" y="2606040"/>
+            <a:ext cx="2697480" cy="137160"/>
+          </a:xfrm>
+          <a:prstGeom prst="rect">
+            <a:avLst/>
+          </a:prstGeom>
+          <a:solidFill>
+            <a:srgbClr val="FC4C0B"/>
+          </a:solidFill>
+          <a:ln>
+            <a:noFill/>
+          </a:ln>
+          <a:effectLst/>
+        </p:spPr>
+        <p:style>
+          <a:lnRef idx="1">
+            <a:schemeClr val="accent1"/>
+          </a:lnRef>
+          <a:fillRef idx="3">
+            <a:schemeClr val="accent1"/>
+          </a:fillRef>
+          <a:effectRef idx="2">
+            <a:schemeClr val="accent1"/>
+          </a:effectRef>
+          <a:fontRef idx="minor">
+            <a:schemeClr val="lt1"/>
+          </a:fontRef>
+        </p:style>
+        <p:txBody>
+          <a:bodyPr rtlCol="0" anchor="ctr"/>
+          <a:lstStyle/>
+          <a:p>
+            <a:pPr algn="ctr"/>
+          </a:p>
+        </p:txBody>
+      </p:sp>
+      <p:sp>
+        <p:nvSpPr>
+          <p:cNvPr id="20" name="TextBox 19"/>
+          <p:cNvSpPr txBox="1"/>
+          <p:nvPr/>
+        </p:nvSpPr>
+        <p:spPr>
+          <a:xfrm>
+            <a:off x="6309360" y="2880360"/>
+            <a:ext cx="2331720" cy="777240"/>
+          </a:xfrm>
+          <a:prstGeom prst="rect">
+            <a:avLst/>
+          </a:prstGeom>
+          <a:noFill/>
+        </p:spPr>
+        <p:txBody>
+          <a:bodyPr wrap="square" anchor="t" lIns="0" rIns="0" tIns="0" bIns="0">
+            <a:spAutoFit/>
+          </a:bodyPr>
+          <a:lstStyle/>
+          <a:p>
+            <a:pPr algn="l"/>
+            <a:r>
+              <a:rPr sz="3600" b="1">
+                <a:solidFill>
+                  <a:srgbClr val="FC4C0B"/>
+                </a:solidFill>
+                <a:latin typeface="Open Sans"/>
+              </a:rPr>
+              <a:t>2.3M</a:t>
+            </a:r>
+          </a:p>
+        </p:txBody>
+      </p:sp>
+      <p:sp>
+        <p:nvSpPr>
+          <p:cNvPr id="21" name="TextBox 20"/>
+          <p:cNvSpPr txBox="1"/>
+          <p:nvPr/>
+        </p:nvSpPr>
+        <p:spPr>
+          <a:xfrm>
+            <a:off x="6309360" y="3611880"/>
+            <a:ext cx="2331720" cy="365760"/>
+          </a:xfrm>
+          <a:prstGeom prst="rect">
+            <a:avLst/>
+          </a:prstGeom>
+          <a:noFill/>
+        </p:spPr>
+        <p:txBody>
+          <a:bodyPr wrap="square" anchor="t" lIns="0" rIns="0" tIns="0" bIns="0">
+            <a:spAutoFit/>
+          </a:bodyPr>
+          <a:lstStyle/>
+          <a:p>
+            <a:pPr algn="l"/>
+            <a:r>
+              <a:rPr sz="1000" b="0">
+                <a:solidFill>
+                  <a:srgbClr val="334155"/>
+                </a:solidFill>
+                <a:latin typeface="Open Sans"/>
+              </a:rPr>
+              <a:t>property records matched</a:t>
+            </a:r>
+          </a:p>
+        </p:txBody>
+      </p:sp>
+      <p:sp>
+        <p:nvSpPr>
+          <p:cNvPr id="22" name="Rounded Rectangle 21"/>
+          <p:cNvSpPr/>
+          <p:nvPr/>
+        </p:nvSpPr>
+        <p:spPr>
+          <a:xfrm>
+            <a:off x="8961120" y="2606040"/>
+            <a:ext cx="2697480" cy="1417320"/>
+          </a:xfrm>
+          <a:prstGeom prst="roundRect">
+            <a:avLst>
+              <a:gd name="adj" fmla="val 4000"/>
+            </a:avLst>
+          </a:prstGeom>
+          <a:solidFill>
+            <a:srgbClr val="FFFFFF"/>
+          </a:solidFill>
+          <a:ln w="6350">
+            <a:solidFill>
+              <a:srgbClr val="E2E8F0"/>
+            </a:solidFill>
+          </a:ln>
+          <a:effectLst/>
+        </p:spPr>
+        <p:style>
+          <a:lnRef idx="1">
+            <a:schemeClr val="accent1"/>
+          </a:lnRef>
+          <a:fillRef idx="3">
+            <a:schemeClr val="accent1"/>
+          </a:fillRef>
+          <a:effectRef idx="2">
+            <a:schemeClr val="accent1"/>
+          </a:effectRef>
+          <a:fontRef idx="minor">
+            <a:schemeClr val="lt1"/>
+          </a:fontRef>
+        </p:style>
+        <p:txBody>
+          <a:bodyPr rtlCol="0" anchor="ctr"/>
+          <a:lstStyle/>
+          <a:p>
+            <a:pPr algn="ctr"/>
+          </a:p>
+        </p:txBody>
+      </p:sp>
+      <p:sp>
+        <p:nvSpPr>
+          <p:cNvPr id="23" name="Rectangle 22"/>
+          <p:cNvSpPr/>
+          <p:nvPr/>
+        </p:nvSpPr>
+        <p:spPr>
+          <a:xfrm>
+            <a:off x="8961120" y="2606040"/>
+            <a:ext cx="2697480" cy="137160"/>
+          </a:xfrm>
+          <a:prstGeom prst="rect">
+            <a:avLst/>
+          </a:prstGeom>
+          <a:solidFill>
+            <a:srgbClr val="FC4C0B"/>
+          </a:solidFill>
+          <a:ln>
+            <a:noFill/>
+          </a:ln>
+          <a:effectLst/>
+        </p:spPr>
+        <p:style>
+          <a:lnRef idx="1">
+            <a:schemeClr val="accent1"/>
+          </a:lnRef>
+          <a:fillRef idx="3">
+            <a:schemeClr val="accent1"/>
+          </a:fillRef>
+          <a:effectRef idx="2">
+            <a:schemeClr val="accent1"/>
+          </a:effectRef>
+          <a:fontRef idx="minor">
+            <a:schemeClr val="lt1"/>
+          </a:fontRef>
+        </p:style>
+        <p:txBody>
+          <a:bodyPr rtlCol="0" anchor="ctr"/>
+          <a:lstStyle/>
+          <a:p>
+            <a:pPr algn="ctr"/>
+          </a:p>
+        </p:txBody>
+      </p:sp>
+      <p:sp>
+        <p:nvSpPr>
+          <p:cNvPr id="24" name="TextBox 23"/>
+          <p:cNvSpPr txBox="1"/>
+          <p:nvPr/>
+        </p:nvSpPr>
+        <p:spPr>
+          <a:xfrm>
+            <a:off x="9144000" y="2880360"/>
+            <a:ext cx="2331720" cy="777240"/>
+          </a:xfrm>
+          <a:prstGeom prst="rect">
+            <a:avLst/>
+          </a:prstGeom>
+          <a:noFill/>
+        </p:spPr>
+        <p:txBody>
+          <a:bodyPr wrap="square" anchor="t" lIns="0" rIns="0" tIns="0" bIns="0">
+            <a:spAutoFit/>
+          </a:bodyPr>
+          <a:lstStyle/>
+          <a:p>
+            <a:pPr algn="l"/>
+            <a:r>
+              <a:rPr sz="3600" b="1">
+                <a:solidFill>
+                  <a:srgbClr val="FC4C0B"/>
+                </a:solidFill>
+                <a:latin typeface="Open Sans"/>
+              </a:rPr>
+              <a:t>$172M</a:t>
+            </a:r>
+          </a:p>
+        </p:txBody>
+      </p:sp>
+      <p:sp>
+        <p:nvSpPr>
+          <p:cNvPr id="25" name="TextBox 24"/>
+          <p:cNvSpPr txBox="1"/>
+          <p:nvPr/>
+        </p:nvSpPr>
+        <p:spPr>
+          <a:xfrm>
+            <a:off x="9144000" y="3611880"/>
+            <a:ext cx="2331720" cy="365760"/>
+          </a:xfrm>
+          <a:prstGeom prst="rect">
+            <a:avLst/>
+          </a:prstGeom>
+          <a:noFill/>
+        </p:spPr>
+        <p:txBody>
+          <a:bodyPr wrap="square" anchor="t" lIns="0" rIns="0" tIns="0" bIns="0">
+            <a:spAutoFit/>
+          </a:bodyPr>
+          <a:lstStyle/>
+          <a:p>
+            <a:pPr algn="l"/>
+            <a:r>
+              <a:rPr sz="1000" b="0">
+                <a:solidFill>
+                  <a:srgbClr val="334155"/>
+                </a:solidFill>
+                <a:latin typeface="Open Sans"/>
+              </a:rPr>
+              <a:t>estimated value across all matches</a:t>
+            </a:r>
+          </a:p>
+        </p:txBody>
+      </p:sp>
+      <p:sp>
+        <p:nvSpPr>
+          <p:cNvPr id="26" name="TextBox 25"/>
           <p:cNvSpPr txBox="1"/>
           <p:nvPr/>
         </p:nvSpPr>
@@ -13162,14 +13486,14 @@
                 </a:solidFill>
                 <a:latin typeface="Open Sans"/>
               </a:rPr>
-              <a:t>NET ACTIVES BY TOTAL OWED (under their name)</a:t>
-            </a:r>
-          </a:p>
-        </p:txBody>
-      </p:sp>
-      <p:sp>
-        <p:nvSpPr>
-          <p:cNvPr id="19" name="TextBox 18"/>
+              <a:t>NET ACTIVES BY TOTAL OWED (name only)</a:t>
+            </a:r>
+          </a:p>
+        </p:txBody>
+      </p:sp>
+      <p:sp>
+        <p:nvSpPr>
+          <p:cNvPr id="27" name="TextBox 26"/>
           <p:cNvSpPr txBox="1"/>
           <p:nvPr/>
         </p:nvSpPr>
@@ -13204,7 +13528,7 @@
       </p:sp>
       <p:sp>
         <p:nvSpPr>
-          <p:cNvPr id="20" name="Rectangle 19"/>
+          <p:cNvPr id="28" name="Rectangle 27"/>
           <p:cNvSpPr/>
           <p:nvPr/>
         </p:nvSpPr>
@@ -13248,7 +13572,7 @@
       </p:sp>
       <p:sp>
         <p:nvSpPr>
-          <p:cNvPr id="21" name="TextBox 20"/>
+          <p:cNvPr id="29" name="TextBox 28"/>
           <p:cNvSpPr txBox="1"/>
           <p:nvPr/>
         </p:nvSpPr>
@@ -13283,7 +13607,7 @@
       </p:sp>
       <p:sp>
         <p:nvSpPr>
-          <p:cNvPr id="22" name="TextBox 21"/>
+          <p:cNvPr id="30" name="TextBox 29"/>
           <p:cNvSpPr txBox="1"/>
           <p:nvPr/>
         </p:nvSpPr>
@@ -13318,7 +13642,7 @@
       </p:sp>
       <p:sp>
         <p:nvSpPr>
-          <p:cNvPr id="23" name="TextBox 22"/>
+          <p:cNvPr id="31" name="TextBox 30"/>
           <p:cNvSpPr txBox="1"/>
           <p:nvPr/>
         </p:nvSpPr>
@@ -13353,7 +13677,7 @@
       </p:sp>
       <p:sp>
         <p:nvSpPr>
-          <p:cNvPr id="24" name="TextBox 23"/>
+          <p:cNvPr id="32" name="TextBox 31"/>
           <p:cNvSpPr txBox="1"/>
           <p:nvPr/>
         </p:nvSpPr>
@@ -13388,7 +13712,7 @@
       </p:sp>
       <p:sp>
         <p:nvSpPr>
-          <p:cNvPr id="25" name="Rectangle 24"/>
+          <p:cNvPr id="33" name="Rectangle 32"/>
           <p:cNvSpPr/>
           <p:nvPr/>
         </p:nvSpPr>
@@ -13432,7 +13756,7 @@
       </p:sp>
       <p:sp>
         <p:nvSpPr>
-          <p:cNvPr id="26" name="TextBox 25"/>
+          <p:cNvPr id="34" name="TextBox 33"/>
           <p:cNvSpPr txBox="1"/>
           <p:nvPr/>
         </p:nvSpPr>
@@ -13467,7 +13791,7 @@
       </p:sp>
       <p:sp>
         <p:nvSpPr>
-          <p:cNvPr id="27" name="TextBox 26"/>
+          <p:cNvPr id="35" name="TextBox 34"/>
           <p:cNvSpPr txBox="1"/>
           <p:nvPr/>
         </p:nvSpPr>
@@ -13502,7 +13826,7 @@
       </p:sp>
       <p:sp>
         <p:nvSpPr>
-          <p:cNvPr id="28" name="TextBox 27"/>
+          <p:cNvPr id="36" name="TextBox 35"/>
           <p:cNvSpPr txBox="1"/>
           <p:nvPr/>
         </p:nvSpPr>
@@ -13537,7 +13861,7 @@
       </p:sp>
       <p:sp>
         <p:nvSpPr>
-          <p:cNvPr id="29" name="TextBox 28"/>
+          <p:cNvPr id="37" name="TextBox 36"/>
           <p:cNvSpPr txBox="1"/>
           <p:nvPr/>
         </p:nvSpPr>
@@ -13572,7 +13896,7 @@
       </p:sp>
       <p:sp>
         <p:nvSpPr>
-          <p:cNvPr id="30" name="Rectangle 29"/>
+          <p:cNvPr id="38" name="Rectangle 37"/>
           <p:cNvSpPr/>
           <p:nvPr/>
         </p:nvSpPr>
@@ -13616,7 +13940,7 @@
       </p:sp>
       <p:sp>
         <p:nvSpPr>
-          <p:cNvPr id="31" name="TextBox 30"/>
+          <p:cNvPr id="39" name="TextBox 38"/>
           <p:cNvSpPr txBox="1"/>
           <p:nvPr/>
         </p:nvSpPr>
@@ -13651,7 +13975,7 @@
       </p:sp>
       <p:sp>
         <p:nvSpPr>
-          <p:cNvPr id="32" name="TextBox 31"/>
+          <p:cNvPr id="40" name="TextBox 39"/>
           <p:cNvSpPr txBox="1"/>
           <p:nvPr/>
         </p:nvSpPr>
@@ -13686,7 +14010,7 @@
       </p:sp>
       <p:sp>
         <p:nvSpPr>
-          <p:cNvPr id="33" name="TextBox 32"/>
+          <p:cNvPr id="41" name="TextBox 40"/>
           <p:cNvSpPr txBox="1"/>
           <p:nvPr/>
         </p:nvSpPr>
@@ -13721,7 +14045,7 @@
       </p:sp>
       <p:sp>
         <p:nvSpPr>
-          <p:cNvPr id="34" name="TextBox 33"/>
+          <p:cNvPr id="42" name="TextBox 41"/>
           <p:cNvSpPr txBox="1"/>
           <p:nvPr/>
         </p:nvSpPr>
@@ -13756,7 +14080,7 @@
       </p:sp>
       <p:sp>
         <p:nvSpPr>
-          <p:cNvPr id="35" name="Rectangle 34"/>
+          <p:cNvPr id="43" name="Rectangle 42"/>
           <p:cNvSpPr/>
           <p:nvPr/>
         </p:nvSpPr>
@@ -13800,7 +14124,7 @@
       </p:sp>
       <p:sp>
         <p:nvSpPr>
-          <p:cNvPr id="36" name="TextBox 35"/>
+          <p:cNvPr id="44" name="TextBox 43"/>
           <p:cNvSpPr txBox="1"/>
           <p:nvPr/>
         </p:nvSpPr>
@@ -13835,7 +14159,7 @@
       </p:sp>
       <p:sp>
         <p:nvSpPr>
-          <p:cNvPr id="37" name="TextBox 36"/>
+          <p:cNvPr id="45" name="TextBox 44"/>
           <p:cNvSpPr txBox="1"/>
           <p:nvPr/>
         </p:nvSpPr>
@@ -13870,7 +14194,7 @@
       </p:sp>
       <p:sp>
         <p:nvSpPr>
-          <p:cNvPr id="38" name="TextBox 37"/>
+          <p:cNvPr id="46" name="TextBox 45"/>
           <p:cNvSpPr txBox="1"/>
           <p:nvPr/>
         </p:nvSpPr>
@@ -13905,7 +14229,7 @@
       </p:sp>
       <p:sp>
         <p:nvSpPr>
-          <p:cNvPr id="39" name="TextBox 38"/>
+          <p:cNvPr id="47" name="TextBox 46"/>
           <p:cNvSpPr txBox="1"/>
           <p:nvPr/>
         </p:nvSpPr>
@@ -13940,7 +14264,7 @@
       </p:sp>
       <p:sp>
         <p:nvSpPr>
-          <p:cNvPr id="40" name="Rectangle 39"/>
+          <p:cNvPr id="48" name="Rectangle 47"/>
           <p:cNvSpPr/>
           <p:nvPr/>
         </p:nvSpPr>
@@ -13984,7 +14308,7 @@
       </p:sp>
       <p:sp>
         <p:nvSpPr>
-          <p:cNvPr id="41" name="TextBox 40"/>
+          <p:cNvPr id="49" name="TextBox 48"/>
           <p:cNvSpPr txBox="1"/>
           <p:nvPr/>
         </p:nvSpPr>
@@ -14019,7 +14343,7 @@
       </p:sp>
       <p:sp>
         <p:nvSpPr>
-          <p:cNvPr id="42" name="TextBox 41"/>
+          <p:cNvPr id="50" name="TextBox 49"/>
           <p:cNvSpPr txBox="1"/>
           <p:nvPr/>
         </p:nvSpPr>
@@ -14054,7 +14378,7 @@
       </p:sp>
       <p:sp>
         <p:nvSpPr>
-          <p:cNvPr id="43" name="TextBox 42"/>
+          <p:cNvPr id="51" name="TextBox 50"/>
           <p:cNvSpPr txBox="1"/>
           <p:nvPr/>
         </p:nvSpPr>
@@ -14089,7 +14413,7 @@
       </p:sp>
       <p:sp>
         <p:nvSpPr>
-          <p:cNvPr id="44" name="TextBox 43"/>
+          <p:cNvPr id="52" name="TextBox 51"/>
           <p:cNvSpPr txBox="1"/>
           <p:nvPr/>
         </p:nvSpPr>
@@ -14124,7 +14448,7 @@
       </p:sp>
       <p:sp>
         <p:nvSpPr>
-          <p:cNvPr id="45" name="Rounded Rectangle 44"/>
+          <p:cNvPr id="53" name="Rounded Rectangle 52"/>
           <p:cNvSpPr/>
           <p:nvPr/>
         </p:nvSpPr>
@@ -14170,7 +14494,7 @@
       </p:sp>
       <p:sp>
         <p:nvSpPr>
-          <p:cNvPr id="46" name="TextBox 45"/>
+          <p:cNvPr id="54" name="TextBox 53"/>
           <p:cNvSpPr txBox="1"/>
           <p:nvPr/>
         </p:nvSpPr>
@@ -14198,7 +14522,7 @@
                 </a:solidFill>
                 <a:latin typeface="Open Sans"/>
               </a:rPr>
-              <a:t>Aggregate $172M / 2.3M records on this slide are upper bounds — name alone collides on common names. See next slide (name + city).</a:t>
+              <a:t>Name-only is the upper bound — common names inflate the totals. Next slide adds city for the defensible view.</a:t>
             </a:r>
           </a:p>
         </p:txBody>

--- a/myReclaim-Exec-Deck.pptx
+++ b/myReclaim-Exec-Deck.pptx
@@ -13,8 +13,6 @@
     <p:sldId id="261" r:id="rId12"/>
     <p:sldId id="262" r:id="rId13"/>
     <p:sldId id="263" r:id="rId14"/>
-    <p:sldId id="264" r:id="rId15"/>
-    <p:sldId id="265" r:id="rId16"/>
   </p:sldIdLst>
   <p:sldSz cx="12188952" cy="6858000" type="screen4x3"/>
   <p:notesSz cx="6858000" cy="9144000"/>
@@ -3501,2125 +3499,6 @@
 </p:sld>
 </file>
 
-<file path=ppt/slides/slide10.xml><?xml version="1.0" encoding="utf-8"?>
-<p:sld xmlns:a="http://schemas.openxmlformats.org/drawingml/2006/main" xmlns:p="http://schemas.openxmlformats.org/presentationml/2006/main" xmlns:r="http://schemas.openxmlformats.org/officeDocument/2006/relationships">
-  <p:cSld>
-    <p:spTree>
-      <p:nvGrpSpPr>
-        <p:cNvPr id="1" name=""/>
-        <p:cNvGrpSpPr/>
-        <p:nvPr/>
-      </p:nvGrpSpPr>
-      <p:grpSpPr/>
-      <p:sp>
-        <p:nvSpPr>
-          <p:cNvPr id="2" name="Rectangle 1"/>
-          <p:cNvSpPr/>
-          <p:nvPr/>
-        </p:nvSpPr>
-        <p:spPr>
-          <a:xfrm>
-            <a:off x="0" y="0"/>
-            <a:ext cx="12188952" cy="6858000"/>
-          </a:xfrm>
-          <a:prstGeom prst="rect">
-            <a:avLst/>
-          </a:prstGeom>
-          <a:solidFill>
-            <a:srgbClr val="F8FAFC"/>
-          </a:solidFill>
-          <a:ln>
-            <a:noFill/>
-          </a:ln>
-          <a:effectLst/>
-        </p:spPr>
-        <p:style>
-          <a:lnRef idx="1">
-            <a:schemeClr val="accent1"/>
-          </a:lnRef>
-          <a:fillRef idx="3">
-            <a:schemeClr val="accent1"/>
-          </a:fillRef>
-          <a:effectRef idx="2">
-            <a:schemeClr val="accent1"/>
-          </a:effectRef>
-          <a:fontRef idx="minor">
-            <a:schemeClr val="lt1"/>
-          </a:fontRef>
-        </p:style>
-        <p:txBody>
-          <a:bodyPr rtlCol="0" anchor="ctr"/>
-          <a:lstStyle/>
-          <a:p>
-            <a:pPr algn="ctr"/>
-          </a:p>
-        </p:txBody>
-      </p:sp>
-      <p:sp>
-        <p:nvSpPr>
-          <p:cNvPr id="3" name="Rectangle 2"/>
-          <p:cNvSpPr/>
-          <p:nvPr/>
-        </p:nvSpPr>
-        <p:spPr>
-          <a:xfrm>
-            <a:off x="0" y="0"/>
-            <a:ext cx="12188952" cy="54864"/>
-          </a:xfrm>
-          <a:prstGeom prst="rect">
-            <a:avLst/>
-          </a:prstGeom>
-          <a:solidFill>
-            <a:srgbClr val="2863C5"/>
-          </a:solidFill>
-          <a:ln>
-            <a:noFill/>
-          </a:ln>
-          <a:effectLst/>
-        </p:spPr>
-        <p:style>
-          <a:lnRef idx="1">
-            <a:schemeClr val="accent1"/>
-          </a:lnRef>
-          <a:fillRef idx="3">
-            <a:schemeClr val="accent1"/>
-          </a:fillRef>
-          <a:effectRef idx="2">
-            <a:schemeClr val="accent1"/>
-          </a:effectRef>
-          <a:fontRef idx="minor">
-            <a:schemeClr val="lt1"/>
-          </a:fontRef>
-        </p:style>
-        <p:txBody>
-          <a:bodyPr rtlCol="0" anchor="ctr"/>
-          <a:lstStyle/>
-          <a:p>
-            <a:pPr algn="ctr"/>
-          </a:p>
-        </p:txBody>
-      </p:sp>
-      <p:sp>
-        <p:nvSpPr>
-          <p:cNvPr id="4" name="TextBox 3"/>
-          <p:cNvSpPr txBox="1"/>
-          <p:nvPr/>
-        </p:nvSpPr>
-        <p:spPr>
-          <a:xfrm>
-            <a:off x="457200" y="164592"/>
-            <a:ext cx="2286000" cy="329184"/>
-          </a:xfrm>
-          <a:prstGeom prst="rect">
-            <a:avLst/>
-          </a:prstGeom>
-          <a:noFill/>
-        </p:spPr>
-        <p:txBody>
-          <a:bodyPr wrap="square" anchor="t" lIns="0" rIns="0" tIns="0" bIns="0">
-            <a:spAutoFit/>
-          </a:bodyPr>
-          <a:lstStyle/>
-          <a:p>
-            <a:pPr algn="l"/>
-            <a:r>
-              <a:rPr sz="1600" b="1">
-                <a:solidFill>
-                  <a:srgbClr val="0F172A"/>
-                </a:solidFill>
-                <a:latin typeface="Open Sans"/>
-              </a:rPr>
-              <a:t>smartcredit</a:t>
-            </a:r>
-          </a:p>
-        </p:txBody>
-      </p:sp>
-      <p:sp>
-        <p:nvSpPr>
-          <p:cNvPr id="5" name="TextBox 4"/>
-          <p:cNvSpPr txBox="1"/>
-          <p:nvPr/>
-        </p:nvSpPr>
-        <p:spPr>
-          <a:xfrm>
-            <a:off x="11338560" y="6446520"/>
-            <a:ext cx="731520" cy="274320"/>
-          </a:xfrm>
-          <a:prstGeom prst="rect">
-            <a:avLst/>
-          </a:prstGeom>
-          <a:noFill/>
-        </p:spPr>
-        <p:txBody>
-          <a:bodyPr wrap="square" anchor="t" lIns="0" rIns="0" tIns="0" bIns="0">
-            <a:spAutoFit/>
-          </a:bodyPr>
-          <a:lstStyle/>
-          <a:p>
-            <a:pPr algn="r"/>
-            <a:r>
-              <a:rPr sz="900" b="0">
-                <a:solidFill>
-                  <a:srgbClr val="64748B"/>
-                </a:solidFill>
-                <a:latin typeface="Open Sans"/>
-              </a:rPr>
-              <a:t>10 / 10</a:t>
-            </a:r>
-          </a:p>
-        </p:txBody>
-      </p:sp>
-      <p:sp>
-        <p:nvSpPr>
-          <p:cNvPr id="6" name="TextBox 5"/>
-          <p:cNvSpPr txBox="1"/>
-          <p:nvPr/>
-        </p:nvSpPr>
-        <p:spPr>
-          <a:xfrm>
-            <a:off x="457200" y="6446520"/>
-            <a:ext cx="7315200" cy="274320"/>
-          </a:xfrm>
-          <a:prstGeom prst="rect">
-            <a:avLst/>
-          </a:prstGeom>
-          <a:noFill/>
-        </p:spPr>
-        <p:txBody>
-          <a:bodyPr wrap="square" anchor="t" lIns="0" rIns="0" tIns="0" bIns="0">
-            <a:spAutoFit/>
-          </a:bodyPr>
-          <a:lstStyle/>
-          <a:p>
-            <a:pPr algn="l"/>
-            <a:r>
-              <a:rPr sz="900" b="0">
-                <a:solidFill>
-                  <a:srgbClr val="64748B"/>
-                </a:solidFill>
-                <a:latin typeface="Open Sans"/>
-              </a:rPr>
-              <a:t>myReclaim · Confidential — Consumer Direct, Inc.</a:t>
-            </a:r>
-          </a:p>
-        </p:txBody>
-      </p:sp>
-      <p:sp>
-        <p:nvSpPr>
-          <p:cNvPr id="7" name="TextBox 6"/>
-          <p:cNvSpPr txBox="1"/>
-          <p:nvPr/>
-        </p:nvSpPr>
-        <p:spPr>
-          <a:xfrm>
-            <a:off x="457200" y="777240"/>
-            <a:ext cx="11430000" cy="365760"/>
-          </a:xfrm>
-          <a:prstGeom prst="rect">
-            <a:avLst/>
-          </a:prstGeom>
-          <a:noFill/>
-        </p:spPr>
-        <p:txBody>
-          <a:bodyPr wrap="square" anchor="t" lIns="0" rIns="0" tIns="0" bIns="0">
-            <a:spAutoFit/>
-          </a:bodyPr>
-          <a:lstStyle/>
-          <a:p>
-            <a:pPr algn="l"/>
-            <a:r>
-              <a:rPr sz="1200" b="1">
-                <a:solidFill>
-                  <a:srgbClr val="2863C5"/>
-                </a:solidFill>
-                <a:latin typeface="Open Sans"/>
-              </a:rPr>
-              <a:t>WORKFLOW · WHAT NEEDS TO HAPPEN NEXT</a:t>
-            </a:r>
-          </a:p>
-        </p:txBody>
-      </p:sp>
-      <p:sp>
-        <p:nvSpPr>
-          <p:cNvPr id="8" name="TextBox 7"/>
-          <p:cNvSpPr txBox="1"/>
-          <p:nvPr/>
-        </p:nvSpPr>
-        <p:spPr>
-          <a:xfrm>
-            <a:off x="457200" y="1143000"/>
-            <a:ext cx="11430000" cy="822960"/>
-          </a:xfrm>
-          <a:prstGeom prst="rect">
-            <a:avLst/>
-          </a:prstGeom>
-          <a:noFill/>
-        </p:spPr>
-        <p:txBody>
-          <a:bodyPr wrap="square" anchor="t" lIns="0" rIns="0" tIns="0" bIns="0">
-            <a:spAutoFit/>
-          </a:bodyPr>
-          <a:lstStyle/>
-          <a:p>
-            <a:pPr algn="l"/>
-            <a:r>
-              <a:rPr sz="2800" b="1">
-                <a:solidFill>
-                  <a:srgbClr val="0F172A"/>
-                </a:solidFill>
-                <a:latin typeface="Open Sans"/>
-              </a:rPr>
-              <a:t>From approval to first member alert.</a:t>
-            </a:r>
-          </a:p>
-        </p:txBody>
-      </p:sp>
-      <p:sp>
-        <p:nvSpPr>
-          <p:cNvPr id="9" name="Rounded Rectangle 8"/>
-          <p:cNvSpPr/>
-          <p:nvPr/>
-        </p:nvSpPr>
-        <p:spPr>
-          <a:xfrm>
-            <a:off x="457200" y="2011680"/>
-            <a:ext cx="11247120" cy="603503"/>
-          </a:xfrm>
-          <a:prstGeom prst="roundRect">
-            <a:avLst>
-              <a:gd name="adj" fmla="val 3000"/>
-            </a:avLst>
-          </a:prstGeom>
-          <a:solidFill>
-            <a:srgbClr val="FFFFFF"/>
-          </a:solidFill>
-          <a:ln w="6350">
-            <a:solidFill>
-              <a:srgbClr val="E2E8F0"/>
-            </a:solidFill>
-          </a:ln>
-          <a:effectLst/>
-        </p:spPr>
-        <p:style>
-          <a:lnRef idx="1">
-            <a:schemeClr val="accent1"/>
-          </a:lnRef>
-          <a:fillRef idx="3">
-            <a:schemeClr val="accent1"/>
-          </a:fillRef>
-          <a:effectRef idx="2">
-            <a:schemeClr val="accent1"/>
-          </a:effectRef>
-          <a:fontRef idx="minor">
-            <a:schemeClr val="lt1"/>
-          </a:fontRef>
-        </p:style>
-        <p:txBody>
-          <a:bodyPr rtlCol="0" anchor="ctr"/>
-          <a:lstStyle/>
-          <a:p>
-            <a:pPr algn="ctr"/>
-          </a:p>
-        </p:txBody>
-      </p:sp>
-      <p:sp>
-        <p:nvSpPr>
-          <p:cNvPr id="10" name="Rectangle 9"/>
-          <p:cNvSpPr/>
-          <p:nvPr/>
-        </p:nvSpPr>
-        <p:spPr>
-          <a:xfrm>
-            <a:off x="457200" y="2011680"/>
-            <a:ext cx="164592" cy="603503"/>
-          </a:xfrm>
-          <a:prstGeom prst="rect">
-            <a:avLst/>
-          </a:prstGeom>
-          <a:solidFill>
-            <a:srgbClr val="2863C5"/>
-          </a:solidFill>
-          <a:ln>
-            <a:noFill/>
-          </a:ln>
-          <a:effectLst/>
-        </p:spPr>
-        <p:style>
-          <a:lnRef idx="1">
-            <a:schemeClr val="accent1"/>
-          </a:lnRef>
-          <a:fillRef idx="3">
-            <a:schemeClr val="accent1"/>
-          </a:fillRef>
-          <a:effectRef idx="2">
-            <a:schemeClr val="accent1"/>
-          </a:effectRef>
-          <a:fontRef idx="minor">
-            <a:schemeClr val="lt1"/>
-          </a:fontRef>
-        </p:style>
-        <p:txBody>
-          <a:bodyPr rtlCol="0" anchor="ctr"/>
-          <a:lstStyle/>
-          <a:p>
-            <a:pPr algn="ctr"/>
-          </a:p>
-        </p:txBody>
-      </p:sp>
-      <p:sp>
-        <p:nvSpPr>
-          <p:cNvPr id="11" name="TextBox 10"/>
-          <p:cNvSpPr txBox="1"/>
-          <p:nvPr/>
-        </p:nvSpPr>
-        <p:spPr>
-          <a:xfrm>
-            <a:off x="777240" y="2176272"/>
-            <a:ext cx="594360" cy="365760"/>
-          </a:xfrm>
-          <a:prstGeom prst="rect">
-            <a:avLst/>
-          </a:prstGeom>
-          <a:noFill/>
-        </p:spPr>
-        <p:txBody>
-          <a:bodyPr wrap="square" anchor="t" lIns="0" rIns="0" tIns="0" bIns="0">
-            <a:spAutoFit/>
-          </a:bodyPr>
-          <a:lstStyle/>
-          <a:p>
-            <a:pPr algn="l"/>
-            <a:r>
-              <a:rPr sz="1800" b="1">
-                <a:solidFill>
-                  <a:srgbClr val="2863C5"/>
-                </a:solidFill>
-                <a:latin typeface="Open Sans"/>
-              </a:rPr>
-              <a:t>01</a:t>
-            </a:r>
-          </a:p>
-        </p:txBody>
-      </p:sp>
-      <p:sp>
-        <p:nvSpPr>
-          <p:cNvPr id="12" name="TextBox 11"/>
-          <p:cNvSpPr txBox="1"/>
-          <p:nvPr/>
-        </p:nvSpPr>
-        <p:spPr>
-          <a:xfrm>
-            <a:off x="1508760" y="2066544"/>
-            <a:ext cx="7863840" cy="274320"/>
-          </a:xfrm>
-          <a:prstGeom prst="rect">
-            <a:avLst/>
-          </a:prstGeom>
-          <a:noFill/>
-        </p:spPr>
-        <p:txBody>
-          <a:bodyPr wrap="square" anchor="t" lIns="0" rIns="0" tIns="0" bIns="0">
-            <a:spAutoFit/>
-          </a:bodyPr>
-          <a:lstStyle/>
-          <a:p>
-            <a:pPr algn="l"/>
-            <a:r>
-              <a:rPr sz="1200" b="1">
-                <a:solidFill>
-                  <a:srgbClr val="0F172A"/>
-                </a:solidFill>
-                <a:latin typeface="Open Sans"/>
-              </a:rPr>
-              <a:t>Exec approval &amp; resourcing</a:t>
-            </a:r>
-          </a:p>
-        </p:txBody>
-      </p:sp>
-      <p:sp>
-        <p:nvSpPr>
-          <p:cNvPr id="13" name="TextBox 12"/>
-          <p:cNvSpPr txBox="1"/>
-          <p:nvPr/>
-        </p:nvSpPr>
-        <p:spPr>
-          <a:xfrm>
-            <a:off x="1508760" y="2340864"/>
-            <a:ext cx="7863840" cy="292608"/>
-          </a:xfrm>
-          <a:prstGeom prst="rect">
-            <a:avLst/>
-          </a:prstGeom>
-          <a:noFill/>
-        </p:spPr>
-        <p:txBody>
-          <a:bodyPr wrap="square" anchor="t" lIns="0" rIns="0" tIns="0" bIns="0">
-            <a:spAutoFit/>
-          </a:bodyPr>
-          <a:lstStyle/>
-          <a:p>
-            <a:pPr algn="l"/>
-            <a:r>
-              <a:rPr sz="950" b="0">
-                <a:solidFill>
-                  <a:srgbClr val="334155"/>
-                </a:solidFill>
-                <a:latin typeface="Open Sans"/>
-              </a:rPr>
-              <a:t>Greenlight myReclaim. Assign 1 data engineer + 1 product engineer.</a:t>
-            </a:r>
-          </a:p>
-        </p:txBody>
-      </p:sp>
-      <p:sp>
-        <p:nvSpPr>
-          <p:cNvPr id="14" name="Rounded Rectangle 13"/>
-          <p:cNvSpPr/>
-          <p:nvPr/>
-        </p:nvSpPr>
-        <p:spPr>
-          <a:xfrm>
-            <a:off x="9555480" y="2212848"/>
-            <a:ext cx="1600200" cy="274320"/>
-          </a:xfrm>
-          <a:prstGeom prst="roundRect">
-            <a:avLst>
-              <a:gd name="adj" fmla="val 50000"/>
-            </a:avLst>
-          </a:prstGeom>
-          <a:solidFill>
-            <a:srgbClr val="2863C5"/>
-          </a:solidFill>
-          <a:ln>
-            <a:noFill/>
-          </a:ln>
-        </p:spPr>
-        <p:style>
-          <a:lnRef idx="1">
-            <a:schemeClr val="accent1"/>
-          </a:lnRef>
-          <a:fillRef idx="3">
-            <a:schemeClr val="accent1"/>
-          </a:fillRef>
-          <a:effectRef idx="2">
-            <a:schemeClr val="accent1"/>
-          </a:effectRef>
-          <a:fontRef idx="minor">
-            <a:schemeClr val="lt1"/>
-          </a:fontRef>
-        </p:style>
-        <p:txBody>
-          <a:bodyPr rtlCol="0" anchor="ctr" lIns="45720" rIns="45720" tIns="18288" bIns="18288"/>
-          <a:lstStyle/>
-          <a:p>
-            <a:pPr algn="ctr"/>
-            <a:r>
-              <a:rPr sz="900" b="1">
-                <a:solidFill>
-                  <a:srgbClr val="FFFFFF"/>
-                </a:solidFill>
-                <a:latin typeface="Open Sans"/>
-              </a:rPr>
-              <a:t>Now</a:t>
-            </a:r>
-          </a:p>
-        </p:txBody>
-      </p:sp>
-      <p:sp>
-        <p:nvSpPr>
-          <p:cNvPr id="15" name="Rounded Rectangle 14"/>
-          <p:cNvSpPr/>
-          <p:nvPr/>
-        </p:nvSpPr>
-        <p:spPr>
-          <a:xfrm>
-            <a:off x="457200" y="2670048"/>
-            <a:ext cx="11247120" cy="603503"/>
-          </a:xfrm>
-          <a:prstGeom prst="roundRect">
-            <a:avLst>
-              <a:gd name="adj" fmla="val 3000"/>
-            </a:avLst>
-          </a:prstGeom>
-          <a:solidFill>
-            <a:srgbClr val="FFFFFF"/>
-          </a:solidFill>
-          <a:ln w="6350">
-            <a:solidFill>
-              <a:srgbClr val="E2E8F0"/>
-            </a:solidFill>
-          </a:ln>
-          <a:effectLst/>
-        </p:spPr>
-        <p:style>
-          <a:lnRef idx="1">
-            <a:schemeClr val="accent1"/>
-          </a:lnRef>
-          <a:fillRef idx="3">
-            <a:schemeClr val="accent1"/>
-          </a:fillRef>
-          <a:effectRef idx="2">
-            <a:schemeClr val="accent1"/>
-          </a:effectRef>
-          <a:fontRef idx="minor">
-            <a:schemeClr val="lt1"/>
-          </a:fontRef>
-        </p:style>
-        <p:txBody>
-          <a:bodyPr rtlCol="0" anchor="ctr"/>
-          <a:lstStyle/>
-          <a:p>
-            <a:pPr algn="ctr"/>
-          </a:p>
-        </p:txBody>
-      </p:sp>
-      <p:sp>
-        <p:nvSpPr>
-          <p:cNvPr id="16" name="Rectangle 15"/>
-          <p:cNvSpPr/>
-          <p:nvPr/>
-        </p:nvSpPr>
-        <p:spPr>
-          <a:xfrm>
-            <a:off x="457200" y="2670048"/>
-            <a:ext cx="164592" cy="603503"/>
-          </a:xfrm>
-          <a:prstGeom prst="rect">
-            <a:avLst/>
-          </a:prstGeom>
-          <a:solidFill>
-            <a:srgbClr val="2863C5"/>
-          </a:solidFill>
-          <a:ln>
-            <a:noFill/>
-          </a:ln>
-          <a:effectLst/>
-        </p:spPr>
-        <p:style>
-          <a:lnRef idx="1">
-            <a:schemeClr val="accent1"/>
-          </a:lnRef>
-          <a:fillRef idx="3">
-            <a:schemeClr val="accent1"/>
-          </a:fillRef>
-          <a:effectRef idx="2">
-            <a:schemeClr val="accent1"/>
-          </a:effectRef>
-          <a:fontRef idx="minor">
-            <a:schemeClr val="lt1"/>
-          </a:fontRef>
-        </p:style>
-        <p:txBody>
-          <a:bodyPr rtlCol="0" anchor="ctr"/>
-          <a:lstStyle/>
-          <a:p>
-            <a:pPr algn="ctr"/>
-          </a:p>
-        </p:txBody>
-      </p:sp>
-      <p:sp>
-        <p:nvSpPr>
-          <p:cNvPr id="17" name="TextBox 16"/>
-          <p:cNvSpPr txBox="1"/>
-          <p:nvPr/>
-        </p:nvSpPr>
-        <p:spPr>
-          <a:xfrm>
-            <a:off x="777240" y="2834640"/>
-            <a:ext cx="594360" cy="365760"/>
-          </a:xfrm>
-          <a:prstGeom prst="rect">
-            <a:avLst/>
-          </a:prstGeom>
-          <a:noFill/>
-        </p:spPr>
-        <p:txBody>
-          <a:bodyPr wrap="square" anchor="t" lIns="0" rIns="0" tIns="0" bIns="0">
-            <a:spAutoFit/>
-          </a:bodyPr>
-          <a:lstStyle/>
-          <a:p>
-            <a:pPr algn="l"/>
-            <a:r>
-              <a:rPr sz="1800" b="1">
-                <a:solidFill>
-                  <a:srgbClr val="2863C5"/>
-                </a:solidFill>
-                <a:latin typeface="Open Sans"/>
-              </a:rPr>
-              <a:t>02</a:t>
-            </a:r>
-          </a:p>
-        </p:txBody>
-      </p:sp>
-      <p:sp>
-        <p:nvSpPr>
-          <p:cNvPr id="18" name="TextBox 17"/>
-          <p:cNvSpPr txBox="1"/>
-          <p:nvPr/>
-        </p:nvSpPr>
-        <p:spPr>
-          <a:xfrm>
-            <a:off x="1508760" y="2724912"/>
-            <a:ext cx="7863840" cy="274320"/>
-          </a:xfrm>
-          <a:prstGeom prst="rect">
-            <a:avLst/>
-          </a:prstGeom>
-          <a:noFill/>
-        </p:spPr>
-        <p:txBody>
-          <a:bodyPr wrap="square" anchor="t" lIns="0" rIns="0" tIns="0" bIns="0">
-            <a:spAutoFit/>
-          </a:bodyPr>
-          <a:lstStyle/>
-          <a:p>
-            <a:pPr algn="l"/>
-            <a:r>
-              <a:rPr sz="1200" b="1">
-                <a:solidFill>
-                  <a:srgbClr val="0F172A"/>
-                </a:solidFill>
-                <a:latin typeface="Open Sans"/>
-              </a:rPr>
-              <a:t>California ingestion live</a:t>
-            </a:r>
-          </a:p>
-        </p:txBody>
-      </p:sp>
-      <p:sp>
-        <p:nvSpPr>
-          <p:cNvPr id="19" name="TextBox 18"/>
-          <p:cNvSpPr txBox="1"/>
-          <p:nvPr/>
-        </p:nvSpPr>
-        <p:spPr>
-          <a:xfrm>
-            <a:off x="1508760" y="2999232"/>
-            <a:ext cx="7863840" cy="292608"/>
-          </a:xfrm>
-          <a:prstGeom prst="rect">
-            <a:avLst/>
-          </a:prstGeom>
-          <a:noFill/>
-        </p:spPr>
-        <p:txBody>
-          <a:bodyPr wrap="square" anchor="t" lIns="0" rIns="0" tIns="0" bIns="0">
-            <a:spAutoFit/>
-          </a:bodyPr>
-          <a:lstStyle/>
-          <a:p>
-            <a:pPr algn="l"/>
-            <a:r>
-              <a:rPr sz="950" b="0">
-                <a:solidFill>
-                  <a:srgbClr val="334155"/>
-                </a:solidFill>
-                <a:latin typeface="Open Sans"/>
-              </a:rPr>
-              <a:t>Scheduled pull from sco.ca.gov → S3 → Snowflake. Canonical schema, dedupe, dbt models.</a:t>
-            </a:r>
-          </a:p>
-        </p:txBody>
-      </p:sp>
-      <p:sp>
-        <p:nvSpPr>
-          <p:cNvPr id="20" name="Rounded Rectangle 19"/>
-          <p:cNvSpPr/>
-          <p:nvPr/>
-        </p:nvSpPr>
-        <p:spPr>
-          <a:xfrm>
-            <a:off x="9555480" y="2871216"/>
-            <a:ext cx="1600200" cy="274320"/>
-          </a:xfrm>
-          <a:prstGeom prst="roundRect">
-            <a:avLst>
-              <a:gd name="adj" fmla="val 50000"/>
-            </a:avLst>
-          </a:prstGeom>
-          <a:solidFill>
-            <a:srgbClr val="2863C5"/>
-          </a:solidFill>
-          <a:ln>
-            <a:noFill/>
-          </a:ln>
-        </p:spPr>
-        <p:style>
-          <a:lnRef idx="1">
-            <a:schemeClr val="accent1"/>
-          </a:lnRef>
-          <a:fillRef idx="3">
-            <a:schemeClr val="accent1"/>
-          </a:fillRef>
-          <a:effectRef idx="2">
-            <a:schemeClr val="accent1"/>
-          </a:effectRef>
-          <a:fontRef idx="minor">
-            <a:schemeClr val="lt1"/>
-          </a:fontRef>
-        </p:style>
-        <p:txBody>
-          <a:bodyPr rtlCol="0" anchor="ctr" lIns="45720" rIns="45720" tIns="18288" bIns="18288"/>
-          <a:lstStyle/>
-          <a:p>
-            <a:pPr algn="ctr"/>
-            <a:r>
-              <a:rPr sz="900" b="1">
-                <a:solidFill>
-                  <a:srgbClr val="FFFFFF"/>
-                </a:solidFill>
-                <a:latin typeface="Open Sans"/>
-              </a:rPr>
-              <a:t>Sprint 1 · ~6 weeks</a:t>
-            </a:r>
-          </a:p>
-        </p:txBody>
-      </p:sp>
-      <p:sp>
-        <p:nvSpPr>
-          <p:cNvPr id="21" name="Rounded Rectangle 20"/>
-          <p:cNvSpPr/>
-          <p:nvPr/>
-        </p:nvSpPr>
-        <p:spPr>
-          <a:xfrm>
-            <a:off x="457200" y="3328415"/>
-            <a:ext cx="11247120" cy="603503"/>
-          </a:xfrm>
-          <a:prstGeom prst="roundRect">
-            <a:avLst>
-              <a:gd name="adj" fmla="val 3000"/>
-            </a:avLst>
-          </a:prstGeom>
-          <a:solidFill>
-            <a:srgbClr val="FFFFFF"/>
-          </a:solidFill>
-          <a:ln w="6350">
-            <a:solidFill>
-              <a:srgbClr val="E2E8F0"/>
-            </a:solidFill>
-          </a:ln>
-          <a:effectLst/>
-        </p:spPr>
-        <p:style>
-          <a:lnRef idx="1">
-            <a:schemeClr val="accent1"/>
-          </a:lnRef>
-          <a:fillRef idx="3">
-            <a:schemeClr val="accent1"/>
-          </a:fillRef>
-          <a:effectRef idx="2">
-            <a:schemeClr val="accent1"/>
-          </a:effectRef>
-          <a:fontRef idx="minor">
-            <a:schemeClr val="lt1"/>
-          </a:fontRef>
-        </p:style>
-        <p:txBody>
-          <a:bodyPr rtlCol="0" anchor="ctr"/>
-          <a:lstStyle/>
-          <a:p>
-            <a:pPr algn="ctr"/>
-          </a:p>
-        </p:txBody>
-      </p:sp>
-      <p:sp>
-        <p:nvSpPr>
-          <p:cNvPr id="22" name="Rectangle 21"/>
-          <p:cNvSpPr/>
-          <p:nvPr/>
-        </p:nvSpPr>
-        <p:spPr>
-          <a:xfrm>
-            <a:off x="457200" y="3328415"/>
-            <a:ext cx="164592" cy="603503"/>
-          </a:xfrm>
-          <a:prstGeom prst="rect">
-            <a:avLst/>
-          </a:prstGeom>
-          <a:solidFill>
-            <a:srgbClr val="2863C5"/>
-          </a:solidFill>
-          <a:ln>
-            <a:noFill/>
-          </a:ln>
-          <a:effectLst/>
-        </p:spPr>
-        <p:style>
-          <a:lnRef idx="1">
-            <a:schemeClr val="accent1"/>
-          </a:lnRef>
-          <a:fillRef idx="3">
-            <a:schemeClr val="accent1"/>
-          </a:fillRef>
-          <a:effectRef idx="2">
-            <a:schemeClr val="accent1"/>
-          </a:effectRef>
-          <a:fontRef idx="minor">
-            <a:schemeClr val="lt1"/>
-          </a:fontRef>
-        </p:style>
-        <p:txBody>
-          <a:bodyPr rtlCol="0" anchor="ctr"/>
-          <a:lstStyle/>
-          <a:p>
-            <a:pPr algn="ctr"/>
-          </a:p>
-        </p:txBody>
-      </p:sp>
-      <p:sp>
-        <p:nvSpPr>
-          <p:cNvPr id="23" name="TextBox 22"/>
-          <p:cNvSpPr txBox="1"/>
-          <p:nvPr/>
-        </p:nvSpPr>
-        <p:spPr>
-          <a:xfrm>
-            <a:off x="777240" y="3493008"/>
-            <a:ext cx="594360" cy="365760"/>
-          </a:xfrm>
-          <a:prstGeom prst="rect">
-            <a:avLst/>
-          </a:prstGeom>
-          <a:noFill/>
-        </p:spPr>
-        <p:txBody>
-          <a:bodyPr wrap="square" anchor="t" lIns="0" rIns="0" tIns="0" bIns="0">
-            <a:spAutoFit/>
-          </a:bodyPr>
-          <a:lstStyle/>
-          <a:p>
-            <a:pPr algn="l"/>
-            <a:r>
-              <a:rPr sz="1800" b="1">
-                <a:solidFill>
-                  <a:srgbClr val="2863C5"/>
-                </a:solidFill>
-                <a:latin typeface="Open Sans"/>
-              </a:rPr>
-              <a:t>03</a:t>
-            </a:r>
-          </a:p>
-        </p:txBody>
-      </p:sp>
-      <p:sp>
-        <p:nvSpPr>
-          <p:cNvPr id="24" name="TextBox 23"/>
-          <p:cNvSpPr txBox="1"/>
-          <p:nvPr/>
-        </p:nvSpPr>
-        <p:spPr>
-          <a:xfrm>
-            <a:off x="1508760" y="3383279"/>
-            <a:ext cx="7863840" cy="274320"/>
-          </a:xfrm>
-          <a:prstGeom prst="rect">
-            <a:avLst/>
-          </a:prstGeom>
-          <a:noFill/>
-        </p:spPr>
-        <p:txBody>
-          <a:bodyPr wrap="square" anchor="t" lIns="0" rIns="0" tIns="0" bIns="0">
-            <a:spAutoFit/>
-          </a:bodyPr>
-          <a:lstStyle/>
-          <a:p>
-            <a:pPr algn="l"/>
-            <a:r>
-              <a:rPr sz="1200" b="1">
-                <a:solidFill>
-                  <a:srgbClr val="0F172A"/>
-                </a:solidFill>
-                <a:latin typeface="Open Sans"/>
-              </a:rPr>
-              <a:t>Plug in the PII matching engine</a:t>
-            </a:r>
-          </a:p>
-        </p:txBody>
-      </p:sp>
-      <p:sp>
-        <p:nvSpPr>
-          <p:cNvPr id="25" name="TextBox 24"/>
-          <p:cNvSpPr txBox="1"/>
-          <p:nvPr/>
-        </p:nvSpPr>
-        <p:spPr>
-          <a:xfrm>
-            <a:off x="1508760" y="3657599"/>
-            <a:ext cx="7863840" cy="292608"/>
-          </a:xfrm>
-          <a:prstGeom prst="rect">
-            <a:avLst/>
-          </a:prstGeom>
-          <a:noFill/>
-        </p:spPr>
-        <p:txBody>
-          <a:bodyPr wrap="square" anchor="t" lIns="0" rIns="0" tIns="0" bIns="0">
-            <a:spAutoFit/>
-          </a:bodyPr>
-          <a:lstStyle/>
-          <a:p>
-            <a:pPr algn="l"/>
-            <a:r>
-              <a:rPr sz="950" b="0">
-                <a:solidFill>
-                  <a:srgbClr val="334155"/>
-                </a:solidFill>
-                <a:latin typeface="Open Sans"/>
-              </a:rPr>
-              <a:t>Connect SmartCredit's existing identity matcher. Alert only on high-confidence matches (name + address/city/state). Suppress name-only matches.</a:t>
-            </a:r>
-          </a:p>
-        </p:txBody>
-      </p:sp>
-      <p:sp>
-        <p:nvSpPr>
-          <p:cNvPr id="26" name="Rounded Rectangle 25"/>
-          <p:cNvSpPr/>
-          <p:nvPr/>
-        </p:nvSpPr>
-        <p:spPr>
-          <a:xfrm>
-            <a:off x="9555480" y="3529584"/>
-            <a:ext cx="1600200" cy="274320"/>
-          </a:xfrm>
-          <a:prstGeom prst="roundRect">
-            <a:avLst>
-              <a:gd name="adj" fmla="val 50000"/>
-            </a:avLst>
-          </a:prstGeom>
-          <a:solidFill>
-            <a:srgbClr val="2863C5"/>
-          </a:solidFill>
-          <a:ln>
-            <a:noFill/>
-          </a:ln>
-        </p:spPr>
-        <p:style>
-          <a:lnRef idx="1">
-            <a:schemeClr val="accent1"/>
-          </a:lnRef>
-          <a:fillRef idx="3">
-            <a:schemeClr val="accent1"/>
-          </a:fillRef>
-          <a:effectRef idx="2">
-            <a:schemeClr val="accent1"/>
-          </a:effectRef>
-          <a:fontRef idx="minor">
-            <a:schemeClr val="lt1"/>
-          </a:fontRef>
-        </p:style>
-        <p:txBody>
-          <a:bodyPr rtlCol="0" anchor="ctr" lIns="45720" rIns="45720" tIns="18288" bIns="18288"/>
-          <a:lstStyle/>
-          <a:p>
-            <a:pPr algn="ctr"/>
-            <a:r>
-              <a:rPr sz="900" b="1">
-                <a:solidFill>
-                  <a:srgbClr val="FFFFFF"/>
-                </a:solidFill>
-                <a:latin typeface="Open Sans"/>
-              </a:rPr>
-              <a:t>Sprint 1–2</a:t>
-            </a:r>
-          </a:p>
-        </p:txBody>
-      </p:sp>
-      <p:sp>
-        <p:nvSpPr>
-          <p:cNvPr id="27" name="Rounded Rectangle 26"/>
-          <p:cNvSpPr/>
-          <p:nvPr/>
-        </p:nvSpPr>
-        <p:spPr>
-          <a:xfrm>
-            <a:off x="457200" y="3986783"/>
-            <a:ext cx="11247120" cy="603503"/>
-          </a:xfrm>
-          <a:prstGeom prst="roundRect">
-            <a:avLst>
-              <a:gd name="adj" fmla="val 3000"/>
-            </a:avLst>
-          </a:prstGeom>
-          <a:solidFill>
-            <a:srgbClr val="FFFFFF"/>
-          </a:solidFill>
-          <a:ln w="6350">
-            <a:solidFill>
-              <a:srgbClr val="E2E8F0"/>
-            </a:solidFill>
-          </a:ln>
-          <a:effectLst/>
-        </p:spPr>
-        <p:style>
-          <a:lnRef idx="1">
-            <a:schemeClr val="accent1"/>
-          </a:lnRef>
-          <a:fillRef idx="3">
-            <a:schemeClr val="accent1"/>
-          </a:fillRef>
-          <a:effectRef idx="2">
-            <a:schemeClr val="accent1"/>
-          </a:effectRef>
-          <a:fontRef idx="minor">
-            <a:schemeClr val="lt1"/>
-          </a:fontRef>
-        </p:style>
-        <p:txBody>
-          <a:bodyPr rtlCol="0" anchor="ctr"/>
-          <a:lstStyle/>
-          <a:p>
-            <a:pPr algn="ctr"/>
-          </a:p>
-        </p:txBody>
-      </p:sp>
-      <p:sp>
-        <p:nvSpPr>
-          <p:cNvPr id="28" name="Rectangle 27"/>
-          <p:cNvSpPr/>
-          <p:nvPr/>
-        </p:nvSpPr>
-        <p:spPr>
-          <a:xfrm>
-            <a:off x="457200" y="3986783"/>
-            <a:ext cx="164592" cy="603503"/>
-          </a:xfrm>
-          <a:prstGeom prst="rect">
-            <a:avLst/>
-          </a:prstGeom>
-          <a:solidFill>
-            <a:srgbClr val="059669"/>
-          </a:solidFill>
-          <a:ln>
-            <a:noFill/>
-          </a:ln>
-          <a:effectLst/>
-        </p:spPr>
-        <p:style>
-          <a:lnRef idx="1">
-            <a:schemeClr val="accent1"/>
-          </a:lnRef>
-          <a:fillRef idx="3">
-            <a:schemeClr val="accent1"/>
-          </a:fillRef>
-          <a:effectRef idx="2">
-            <a:schemeClr val="accent1"/>
-          </a:effectRef>
-          <a:fontRef idx="minor">
-            <a:schemeClr val="lt1"/>
-          </a:fontRef>
-        </p:style>
-        <p:txBody>
-          <a:bodyPr rtlCol="0" anchor="ctr"/>
-          <a:lstStyle/>
-          <a:p>
-            <a:pPr algn="ctr"/>
-          </a:p>
-        </p:txBody>
-      </p:sp>
-      <p:sp>
-        <p:nvSpPr>
-          <p:cNvPr id="29" name="TextBox 28"/>
-          <p:cNvSpPr txBox="1"/>
-          <p:nvPr/>
-        </p:nvSpPr>
-        <p:spPr>
-          <a:xfrm>
-            <a:off x="777240" y="4151375"/>
-            <a:ext cx="594360" cy="365760"/>
-          </a:xfrm>
-          <a:prstGeom prst="rect">
-            <a:avLst/>
-          </a:prstGeom>
-          <a:noFill/>
-        </p:spPr>
-        <p:txBody>
-          <a:bodyPr wrap="square" anchor="t" lIns="0" rIns="0" tIns="0" bIns="0">
-            <a:spAutoFit/>
-          </a:bodyPr>
-          <a:lstStyle/>
-          <a:p>
-            <a:pPr algn="l"/>
-            <a:r>
-              <a:rPr sz="1800" b="1">
-                <a:solidFill>
-                  <a:srgbClr val="059669"/>
-                </a:solidFill>
-                <a:latin typeface="Open Sans"/>
-              </a:rPr>
-              <a:t>04</a:t>
-            </a:r>
-          </a:p>
-        </p:txBody>
-      </p:sp>
-      <p:sp>
-        <p:nvSpPr>
-          <p:cNvPr id="30" name="TextBox 29"/>
-          <p:cNvSpPr txBox="1"/>
-          <p:nvPr/>
-        </p:nvSpPr>
-        <p:spPr>
-          <a:xfrm>
-            <a:off x="1508760" y="4041647"/>
-            <a:ext cx="7863840" cy="274320"/>
-          </a:xfrm>
-          <a:prstGeom prst="rect">
-            <a:avLst/>
-          </a:prstGeom>
-          <a:noFill/>
-        </p:spPr>
-        <p:txBody>
-          <a:bodyPr wrap="square" anchor="t" lIns="0" rIns="0" tIns="0" bIns="0">
-            <a:spAutoFit/>
-          </a:bodyPr>
-          <a:lstStyle/>
-          <a:p>
-            <a:pPr algn="l"/>
-            <a:r>
-              <a:rPr sz="1200" b="1">
-                <a:solidFill>
-                  <a:srgbClr val="0F172A"/>
-                </a:solidFill>
-                <a:latin typeface="Open Sans"/>
-              </a:rPr>
-              <a:t>Assisted e-file + ActionLetters fallback shipped</a:t>
-            </a:r>
-          </a:p>
-        </p:txBody>
-      </p:sp>
-      <p:sp>
-        <p:nvSpPr>
-          <p:cNvPr id="31" name="TextBox 30"/>
-          <p:cNvSpPr txBox="1"/>
-          <p:nvPr/>
-        </p:nvSpPr>
-        <p:spPr>
-          <a:xfrm>
-            <a:off x="1508760" y="4315968"/>
-            <a:ext cx="7863840" cy="292608"/>
-          </a:xfrm>
-          <a:prstGeom prst="rect">
-            <a:avLst/>
-          </a:prstGeom>
-          <a:noFill/>
-        </p:spPr>
-        <p:txBody>
-          <a:bodyPr wrap="square" anchor="t" lIns="0" rIns="0" tIns="0" bIns="0">
-            <a:spAutoFit/>
-          </a:bodyPr>
-          <a:lstStyle/>
-          <a:p>
-            <a:pPr algn="l"/>
-            <a:r>
-              <a:rPr sz="950" b="0">
-                <a:solidFill>
-                  <a:srgbClr val="334155"/>
-                </a:solidFill>
-                <a:latin typeface="Open Sans"/>
-              </a:rPr>
-              <a:t>Member confirms a match. We prep packet → official state portal. Mail packet enabled only where legal approves the workflow.</a:t>
-            </a:r>
-          </a:p>
-        </p:txBody>
-      </p:sp>
-      <p:sp>
-        <p:nvSpPr>
-          <p:cNvPr id="32" name="Rounded Rectangle 31"/>
-          <p:cNvSpPr/>
-          <p:nvPr/>
-        </p:nvSpPr>
-        <p:spPr>
-          <a:xfrm>
-            <a:off x="9555480" y="4187951"/>
-            <a:ext cx="1600200" cy="274320"/>
-          </a:xfrm>
-          <a:prstGeom prst="roundRect">
-            <a:avLst>
-              <a:gd name="adj" fmla="val 50000"/>
-            </a:avLst>
-          </a:prstGeom>
-          <a:solidFill>
-            <a:srgbClr val="059669"/>
-          </a:solidFill>
-          <a:ln>
-            <a:noFill/>
-          </a:ln>
-        </p:spPr>
-        <p:style>
-          <a:lnRef idx="1">
-            <a:schemeClr val="accent1"/>
-          </a:lnRef>
-          <a:fillRef idx="3">
-            <a:schemeClr val="accent1"/>
-          </a:fillRef>
-          <a:effectRef idx="2">
-            <a:schemeClr val="accent1"/>
-          </a:effectRef>
-          <a:fontRef idx="minor">
-            <a:schemeClr val="lt1"/>
-          </a:fontRef>
-        </p:style>
-        <p:txBody>
-          <a:bodyPr rtlCol="0" anchor="ctr" lIns="45720" rIns="45720" tIns="18288" bIns="18288"/>
-          <a:lstStyle/>
-          <a:p>
-            <a:pPr algn="ctr"/>
-            <a:r>
-              <a:rPr sz="900" b="1">
-                <a:solidFill>
-                  <a:srgbClr val="FFFFFF"/>
-                </a:solidFill>
-                <a:latin typeface="Open Sans"/>
-              </a:rPr>
-              <a:t>End of Sprint 2</a:t>
-            </a:r>
-          </a:p>
-        </p:txBody>
-      </p:sp>
-      <p:sp>
-        <p:nvSpPr>
-          <p:cNvPr id="33" name="Rounded Rectangle 32"/>
-          <p:cNvSpPr/>
-          <p:nvPr/>
-        </p:nvSpPr>
-        <p:spPr>
-          <a:xfrm>
-            <a:off x="457200" y="4645151"/>
-            <a:ext cx="11247120" cy="603503"/>
-          </a:xfrm>
-          <a:prstGeom prst="roundRect">
-            <a:avLst>
-              <a:gd name="adj" fmla="val 3000"/>
-            </a:avLst>
-          </a:prstGeom>
-          <a:solidFill>
-            <a:srgbClr val="FFFFFF"/>
-          </a:solidFill>
-          <a:ln w="6350">
-            <a:solidFill>
-              <a:srgbClr val="E2E8F0"/>
-            </a:solidFill>
-          </a:ln>
-          <a:effectLst/>
-        </p:spPr>
-        <p:style>
-          <a:lnRef idx="1">
-            <a:schemeClr val="accent1"/>
-          </a:lnRef>
-          <a:fillRef idx="3">
-            <a:schemeClr val="accent1"/>
-          </a:fillRef>
-          <a:effectRef idx="2">
-            <a:schemeClr val="accent1"/>
-          </a:effectRef>
-          <a:fontRef idx="minor">
-            <a:schemeClr val="lt1"/>
-          </a:fontRef>
-        </p:style>
-        <p:txBody>
-          <a:bodyPr rtlCol="0" anchor="ctr"/>
-          <a:lstStyle/>
-          <a:p>
-            <a:pPr algn="ctr"/>
-          </a:p>
-        </p:txBody>
-      </p:sp>
-      <p:sp>
-        <p:nvSpPr>
-          <p:cNvPr id="34" name="Rectangle 33"/>
-          <p:cNvSpPr/>
-          <p:nvPr/>
-        </p:nvSpPr>
-        <p:spPr>
-          <a:xfrm>
-            <a:off x="457200" y="4645151"/>
-            <a:ext cx="164592" cy="603503"/>
-          </a:xfrm>
-          <a:prstGeom prst="rect">
-            <a:avLst/>
-          </a:prstGeom>
-          <a:solidFill>
-            <a:srgbClr val="FFB352"/>
-          </a:solidFill>
-          <a:ln>
-            <a:noFill/>
-          </a:ln>
-          <a:effectLst/>
-        </p:spPr>
-        <p:style>
-          <a:lnRef idx="1">
-            <a:schemeClr val="accent1"/>
-          </a:lnRef>
-          <a:fillRef idx="3">
-            <a:schemeClr val="accent1"/>
-          </a:fillRef>
-          <a:effectRef idx="2">
-            <a:schemeClr val="accent1"/>
-          </a:effectRef>
-          <a:fontRef idx="minor">
-            <a:schemeClr val="lt1"/>
-          </a:fontRef>
-        </p:style>
-        <p:txBody>
-          <a:bodyPr rtlCol="0" anchor="ctr"/>
-          <a:lstStyle/>
-          <a:p>
-            <a:pPr algn="ctr"/>
-          </a:p>
-        </p:txBody>
-      </p:sp>
-      <p:sp>
-        <p:nvSpPr>
-          <p:cNvPr id="35" name="TextBox 34"/>
-          <p:cNvSpPr txBox="1"/>
-          <p:nvPr/>
-        </p:nvSpPr>
-        <p:spPr>
-          <a:xfrm>
-            <a:off x="777240" y="4809743"/>
-            <a:ext cx="594360" cy="365760"/>
-          </a:xfrm>
-          <a:prstGeom prst="rect">
-            <a:avLst/>
-          </a:prstGeom>
-          <a:noFill/>
-        </p:spPr>
-        <p:txBody>
-          <a:bodyPr wrap="square" anchor="t" lIns="0" rIns="0" tIns="0" bIns="0">
-            <a:spAutoFit/>
-          </a:bodyPr>
-          <a:lstStyle/>
-          <a:p>
-            <a:pPr algn="l"/>
-            <a:r>
-              <a:rPr sz="1800" b="1">
-                <a:solidFill>
-                  <a:srgbClr val="FFB352"/>
-                </a:solidFill>
-                <a:latin typeface="Open Sans"/>
-              </a:rPr>
-              <a:t>05</a:t>
-            </a:r>
-          </a:p>
-        </p:txBody>
-      </p:sp>
-      <p:sp>
-        <p:nvSpPr>
-          <p:cNvPr id="36" name="TextBox 35"/>
-          <p:cNvSpPr txBox="1"/>
-          <p:nvPr/>
-        </p:nvSpPr>
-        <p:spPr>
-          <a:xfrm>
-            <a:off x="1508760" y="4700015"/>
-            <a:ext cx="7863840" cy="274320"/>
-          </a:xfrm>
-          <a:prstGeom prst="rect">
-            <a:avLst/>
-          </a:prstGeom>
-          <a:noFill/>
-        </p:spPr>
-        <p:txBody>
-          <a:bodyPr wrap="square" anchor="t" lIns="0" rIns="0" tIns="0" bIns="0">
-            <a:spAutoFit/>
-          </a:bodyPr>
-          <a:lstStyle/>
-          <a:p>
-            <a:pPr algn="l"/>
-            <a:r>
-              <a:rPr sz="1200" b="1">
-                <a:solidFill>
-                  <a:srgbClr val="0F172A"/>
-                </a:solidFill>
-                <a:latin typeface="Open Sans"/>
-              </a:rPr>
-              <a:t>State outreach &amp; registrations</a:t>
-            </a:r>
-          </a:p>
-        </p:txBody>
-      </p:sp>
-      <p:sp>
-        <p:nvSpPr>
-          <p:cNvPr id="37" name="TextBox 36"/>
-          <p:cNvSpPr txBox="1"/>
-          <p:nvPr/>
-        </p:nvSpPr>
-        <p:spPr>
-          <a:xfrm>
-            <a:off x="1508760" y="4974336"/>
-            <a:ext cx="7863840" cy="292608"/>
-          </a:xfrm>
-          <a:prstGeom prst="rect">
-            <a:avLst/>
-          </a:prstGeom>
-          <a:noFill/>
-        </p:spPr>
-        <p:txBody>
-          <a:bodyPr wrap="square" anchor="t" lIns="0" rIns="0" tIns="0" bIns="0">
-            <a:spAutoFit/>
-          </a:bodyPr>
-          <a:lstStyle/>
-          <a:p>
-            <a:pPr algn="l"/>
-            <a:r>
-              <a:rPr sz="950" b="0">
-                <a:solidFill>
-                  <a:srgbClr val="334155"/>
-                </a:solidFill>
-                <a:latin typeface="Open Sans"/>
-              </a:rPr>
-              <a:t>Request written permission for caching, matching, redisplay, retention, commercial use. File GA CDR; open TX, NY, FL conversations.</a:t>
-            </a:r>
-          </a:p>
-        </p:txBody>
-      </p:sp>
-      <p:sp>
-        <p:nvSpPr>
-          <p:cNvPr id="38" name="Rounded Rectangle 37"/>
-          <p:cNvSpPr/>
-          <p:nvPr/>
-        </p:nvSpPr>
-        <p:spPr>
-          <a:xfrm>
-            <a:off x="9555480" y="4846319"/>
-            <a:ext cx="1600200" cy="274320"/>
-          </a:xfrm>
-          <a:prstGeom prst="roundRect">
-            <a:avLst>
-              <a:gd name="adj" fmla="val 50000"/>
-            </a:avLst>
-          </a:prstGeom>
-          <a:solidFill>
-            <a:srgbClr val="FFB352"/>
-          </a:solidFill>
-          <a:ln>
-            <a:noFill/>
-          </a:ln>
-        </p:spPr>
-        <p:style>
-          <a:lnRef idx="1">
-            <a:schemeClr val="accent1"/>
-          </a:lnRef>
-          <a:fillRef idx="3">
-            <a:schemeClr val="accent1"/>
-          </a:fillRef>
-          <a:effectRef idx="2">
-            <a:schemeClr val="accent1"/>
-          </a:effectRef>
-          <a:fontRef idx="minor">
-            <a:schemeClr val="lt1"/>
-          </a:fontRef>
-        </p:style>
-        <p:txBody>
-          <a:bodyPr rtlCol="0" anchor="ctr" lIns="45720" rIns="45720" tIns="18288" bIns="18288"/>
-          <a:lstStyle/>
-          <a:p>
-            <a:pPr algn="ctr"/>
-            <a:r>
-              <a:rPr sz="900" b="1">
-                <a:solidFill>
-                  <a:srgbClr val="FFFFFF"/>
-                </a:solidFill>
-                <a:latin typeface="Open Sans"/>
-              </a:rPr>
-              <a:t>Parallel · Sprint 2+</a:t>
-            </a:r>
-          </a:p>
-        </p:txBody>
-      </p:sp>
-      <p:sp>
-        <p:nvSpPr>
-          <p:cNvPr id="39" name="Rounded Rectangle 38"/>
-          <p:cNvSpPr/>
-          <p:nvPr/>
-        </p:nvSpPr>
-        <p:spPr>
-          <a:xfrm>
-            <a:off x="457200" y="5303519"/>
-            <a:ext cx="11247120" cy="603503"/>
-          </a:xfrm>
-          <a:prstGeom prst="roundRect">
-            <a:avLst>
-              <a:gd name="adj" fmla="val 3000"/>
-            </a:avLst>
-          </a:prstGeom>
-          <a:solidFill>
-            <a:srgbClr val="FFFFFF"/>
-          </a:solidFill>
-          <a:ln w="6350">
-            <a:solidFill>
-              <a:srgbClr val="E2E8F0"/>
-            </a:solidFill>
-          </a:ln>
-          <a:effectLst/>
-        </p:spPr>
-        <p:style>
-          <a:lnRef idx="1">
-            <a:schemeClr val="accent1"/>
-          </a:lnRef>
-          <a:fillRef idx="3">
-            <a:schemeClr val="accent1"/>
-          </a:fillRef>
-          <a:effectRef idx="2">
-            <a:schemeClr val="accent1"/>
-          </a:effectRef>
-          <a:fontRef idx="minor">
-            <a:schemeClr val="lt1"/>
-          </a:fontRef>
-        </p:style>
-        <p:txBody>
-          <a:bodyPr rtlCol="0" anchor="ctr"/>
-          <a:lstStyle/>
-          <a:p>
-            <a:pPr algn="ctr"/>
-          </a:p>
-        </p:txBody>
-      </p:sp>
-      <p:sp>
-        <p:nvSpPr>
-          <p:cNvPr id="40" name="Rectangle 39"/>
-          <p:cNvSpPr/>
-          <p:nvPr/>
-        </p:nvSpPr>
-        <p:spPr>
-          <a:xfrm>
-            <a:off x="457200" y="5303519"/>
-            <a:ext cx="164592" cy="603503"/>
-          </a:xfrm>
-          <a:prstGeom prst="rect">
-            <a:avLst/>
-          </a:prstGeom>
-          <a:solidFill>
-            <a:srgbClr val="FFB352"/>
-          </a:solidFill>
-          <a:ln>
-            <a:noFill/>
-          </a:ln>
-          <a:effectLst/>
-        </p:spPr>
-        <p:style>
-          <a:lnRef idx="1">
-            <a:schemeClr val="accent1"/>
-          </a:lnRef>
-          <a:fillRef idx="3">
-            <a:schemeClr val="accent1"/>
-          </a:fillRef>
-          <a:effectRef idx="2">
-            <a:schemeClr val="accent1"/>
-          </a:effectRef>
-          <a:fontRef idx="minor">
-            <a:schemeClr val="lt1"/>
-          </a:fontRef>
-        </p:style>
-        <p:txBody>
-          <a:bodyPr rtlCol="0" anchor="ctr"/>
-          <a:lstStyle/>
-          <a:p>
-            <a:pPr algn="ctr"/>
-          </a:p>
-        </p:txBody>
-      </p:sp>
-      <p:sp>
-        <p:nvSpPr>
-          <p:cNvPr id="41" name="TextBox 40"/>
-          <p:cNvSpPr txBox="1"/>
-          <p:nvPr/>
-        </p:nvSpPr>
-        <p:spPr>
-          <a:xfrm>
-            <a:off x="777240" y="5468111"/>
-            <a:ext cx="594360" cy="365760"/>
-          </a:xfrm>
-          <a:prstGeom prst="rect">
-            <a:avLst/>
-          </a:prstGeom>
-          <a:noFill/>
-        </p:spPr>
-        <p:txBody>
-          <a:bodyPr wrap="square" anchor="t" lIns="0" rIns="0" tIns="0" bIns="0">
-            <a:spAutoFit/>
-          </a:bodyPr>
-          <a:lstStyle/>
-          <a:p>
-            <a:pPr algn="l"/>
-            <a:r>
-              <a:rPr sz="1800" b="1">
-                <a:solidFill>
-                  <a:srgbClr val="FFB352"/>
-                </a:solidFill>
-                <a:latin typeface="Open Sans"/>
-              </a:rPr>
-              <a:t>06</a:t>
-            </a:r>
-          </a:p>
-        </p:txBody>
-      </p:sp>
-      <p:sp>
-        <p:nvSpPr>
-          <p:cNvPr id="42" name="TextBox 41"/>
-          <p:cNvSpPr txBox="1"/>
-          <p:nvPr/>
-        </p:nvSpPr>
-        <p:spPr>
-          <a:xfrm>
-            <a:off x="1508760" y="5358383"/>
-            <a:ext cx="7863840" cy="274320"/>
-          </a:xfrm>
-          <a:prstGeom prst="rect">
-            <a:avLst/>
-          </a:prstGeom>
-          <a:noFill/>
-        </p:spPr>
-        <p:txBody>
-          <a:bodyPr wrap="square" anchor="t" lIns="0" rIns="0" tIns="0" bIns="0">
-            <a:spAutoFit/>
-          </a:bodyPr>
-          <a:lstStyle/>
-          <a:p>
-            <a:pPr algn="l"/>
-            <a:r>
-              <a:rPr sz="1200" b="1">
-                <a:solidFill>
-                  <a:srgbClr val="0F172A"/>
-                </a:solidFill>
-                <a:latin typeface="Open Sans"/>
-              </a:rPr>
-              <a:t>Expand to top-5 states (as approved)</a:t>
-            </a:r>
-          </a:p>
-        </p:txBody>
-      </p:sp>
-      <p:sp>
-        <p:nvSpPr>
-          <p:cNvPr id="43" name="TextBox 42"/>
-          <p:cNvSpPr txBox="1"/>
-          <p:nvPr/>
-        </p:nvSpPr>
-        <p:spPr>
-          <a:xfrm>
-            <a:off x="1508760" y="5632703"/>
-            <a:ext cx="7863840" cy="292608"/>
-          </a:xfrm>
-          <a:prstGeom prst="rect">
-            <a:avLst/>
-          </a:prstGeom>
-          <a:noFill/>
-        </p:spPr>
-        <p:txBody>
-          <a:bodyPr wrap="square" anchor="t" lIns="0" rIns="0" tIns="0" bIns="0">
-            <a:spAutoFit/>
-          </a:bodyPr>
-          <a:lstStyle/>
-          <a:p>
-            <a:pPr algn="l"/>
-            <a:r>
-              <a:rPr sz="950" b="0">
-                <a:solidFill>
-                  <a:srgbClr val="334155"/>
-                </a:solidFill>
-                <a:latin typeface="Open Sans"/>
-              </a:rPr>
-              <a:t>TX + NY added pending data-request approval; GA pending CDR registration + legal sign-off. Member-driven submit via state portals.</a:t>
-            </a:r>
-          </a:p>
-        </p:txBody>
-      </p:sp>
-      <p:sp>
-        <p:nvSpPr>
-          <p:cNvPr id="44" name="Rounded Rectangle 43"/>
-          <p:cNvSpPr/>
-          <p:nvPr/>
-        </p:nvSpPr>
-        <p:spPr>
-          <a:xfrm>
-            <a:off x="9555480" y="5504687"/>
-            <a:ext cx="1600200" cy="274320"/>
-          </a:xfrm>
-          <a:prstGeom prst="roundRect">
-            <a:avLst>
-              <a:gd name="adj" fmla="val 50000"/>
-            </a:avLst>
-          </a:prstGeom>
-          <a:solidFill>
-            <a:srgbClr val="FFB352"/>
-          </a:solidFill>
-          <a:ln>
-            <a:noFill/>
-          </a:ln>
-        </p:spPr>
-        <p:style>
-          <a:lnRef idx="1">
-            <a:schemeClr val="accent1"/>
-          </a:lnRef>
-          <a:fillRef idx="3">
-            <a:schemeClr val="accent1"/>
-          </a:fillRef>
-          <a:effectRef idx="2">
-            <a:schemeClr val="accent1"/>
-          </a:effectRef>
-          <a:fontRef idx="minor">
-            <a:schemeClr val="lt1"/>
-          </a:fontRef>
-        </p:style>
-        <p:txBody>
-          <a:bodyPr rtlCol="0" anchor="ctr" lIns="45720" rIns="45720" tIns="18288" bIns="18288"/>
-          <a:lstStyle/>
-          <a:p>
-            <a:pPr algn="ctr"/>
-            <a:r>
-              <a:rPr sz="900" b="1">
-                <a:solidFill>
-                  <a:srgbClr val="FFFFFF"/>
-                </a:solidFill>
-                <a:latin typeface="Open Sans"/>
-              </a:rPr>
-              <a:t>Q3–Q4 2026</a:t>
-            </a:r>
-          </a:p>
-        </p:txBody>
-      </p:sp>
-      <p:sp>
-        <p:nvSpPr>
-          <p:cNvPr id="45" name="Rounded Rectangle 44"/>
-          <p:cNvSpPr/>
-          <p:nvPr/>
-        </p:nvSpPr>
-        <p:spPr>
-          <a:xfrm>
-            <a:off x="457200" y="5961887"/>
-            <a:ext cx="11247120" cy="603503"/>
-          </a:xfrm>
-          <a:prstGeom prst="roundRect">
-            <a:avLst>
-              <a:gd name="adj" fmla="val 3000"/>
-            </a:avLst>
-          </a:prstGeom>
-          <a:solidFill>
-            <a:srgbClr val="FFFFFF"/>
-          </a:solidFill>
-          <a:ln w="6350">
-            <a:solidFill>
-              <a:srgbClr val="E2E8F0"/>
-            </a:solidFill>
-          </a:ln>
-          <a:effectLst/>
-        </p:spPr>
-        <p:style>
-          <a:lnRef idx="1">
-            <a:schemeClr val="accent1"/>
-          </a:lnRef>
-          <a:fillRef idx="3">
-            <a:schemeClr val="accent1"/>
-          </a:fillRef>
-          <a:effectRef idx="2">
-            <a:schemeClr val="accent1"/>
-          </a:effectRef>
-          <a:fontRef idx="minor">
-            <a:schemeClr val="lt1"/>
-          </a:fontRef>
-        </p:style>
-        <p:txBody>
-          <a:bodyPr rtlCol="0" anchor="ctr"/>
-          <a:lstStyle/>
-          <a:p>
-            <a:pPr algn="ctr"/>
-          </a:p>
-        </p:txBody>
-      </p:sp>
-      <p:sp>
-        <p:nvSpPr>
-          <p:cNvPr id="46" name="Rectangle 45"/>
-          <p:cNvSpPr/>
-          <p:nvPr/>
-        </p:nvSpPr>
-        <p:spPr>
-          <a:xfrm>
-            <a:off x="457200" y="5961887"/>
-            <a:ext cx="164592" cy="603503"/>
-          </a:xfrm>
-          <a:prstGeom prst="rect">
-            <a:avLst/>
-          </a:prstGeom>
-          <a:solidFill>
-            <a:srgbClr val="FC4C0B"/>
-          </a:solidFill>
-          <a:ln>
-            <a:noFill/>
-          </a:ln>
-          <a:effectLst/>
-        </p:spPr>
-        <p:style>
-          <a:lnRef idx="1">
-            <a:schemeClr val="accent1"/>
-          </a:lnRef>
-          <a:fillRef idx="3">
-            <a:schemeClr val="accent1"/>
-          </a:fillRef>
-          <a:effectRef idx="2">
-            <a:schemeClr val="accent1"/>
-          </a:effectRef>
-          <a:fontRef idx="minor">
-            <a:schemeClr val="lt1"/>
-          </a:fontRef>
-        </p:style>
-        <p:txBody>
-          <a:bodyPr rtlCol="0" anchor="ctr"/>
-          <a:lstStyle/>
-          <a:p>
-            <a:pPr algn="ctr"/>
-          </a:p>
-        </p:txBody>
-      </p:sp>
-      <p:sp>
-        <p:nvSpPr>
-          <p:cNvPr id="47" name="TextBox 46"/>
-          <p:cNvSpPr txBox="1"/>
-          <p:nvPr/>
-        </p:nvSpPr>
-        <p:spPr>
-          <a:xfrm>
-            <a:off x="777240" y="6126479"/>
-            <a:ext cx="594360" cy="365760"/>
-          </a:xfrm>
-          <a:prstGeom prst="rect">
-            <a:avLst/>
-          </a:prstGeom>
-          <a:noFill/>
-        </p:spPr>
-        <p:txBody>
-          <a:bodyPr wrap="square" anchor="t" lIns="0" rIns="0" tIns="0" bIns="0">
-            <a:spAutoFit/>
-          </a:bodyPr>
-          <a:lstStyle/>
-          <a:p>
-            <a:pPr algn="l"/>
-            <a:r>
-              <a:rPr sz="1800" b="1">
-                <a:solidFill>
-                  <a:srgbClr val="FC4C0B"/>
-                </a:solidFill>
-                <a:latin typeface="Open Sans"/>
-              </a:rPr>
-              <a:t>07</a:t>
-            </a:r>
-          </a:p>
-        </p:txBody>
-      </p:sp>
-      <p:sp>
-        <p:nvSpPr>
-          <p:cNvPr id="48" name="TextBox 47"/>
-          <p:cNvSpPr txBox="1"/>
-          <p:nvPr/>
-        </p:nvSpPr>
-        <p:spPr>
-          <a:xfrm>
-            <a:off x="1508760" y="6016751"/>
-            <a:ext cx="7863840" cy="274320"/>
-          </a:xfrm>
-          <a:prstGeom prst="rect">
-            <a:avLst/>
-          </a:prstGeom>
-          <a:noFill/>
-        </p:spPr>
-        <p:txBody>
-          <a:bodyPr wrap="square" anchor="t" lIns="0" rIns="0" tIns="0" bIns="0">
-            <a:spAutoFit/>
-          </a:bodyPr>
-          <a:lstStyle/>
-          <a:p>
-            <a:pPr algn="l"/>
-            <a:r>
-              <a:rPr sz="1200" b="1">
-                <a:solidFill>
-                  <a:srgbClr val="0F172A"/>
-                </a:solidFill>
-                <a:latin typeface="Open Sans"/>
-              </a:rPr>
-              <a:t>Tier 3 unlock — we file for the member</a:t>
-            </a:r>
-          </a:p>
-        </p:txBody>
-      </p:sp>
-      <p:sp>
-        <p:nvSpPr>
-          <p:cNvPr id="49" name="TextBox 48"/>
-          <p:cNvSpPr txBox="1"/>
-          <p:nvPr/>
-        </p:nvSpPr>
-        <p:spPr>
-          <a:xfrm>
-            <a:off x="1508760" y="6291071"/>
-            <a:ext cx="7863840" cy="292608"/>
-          </a:xfrm>
-          <a:prstGeom prst="rect">
-            <a:avLst/>
-          </a:prstGeom>
-          <a:noFill/>
-        </p:spPr>
-        <p:txBody>
-          <a:bodyPr wrap="square" anchor="t" lIns="0" rIns="0" tIns="0" bIns="0">
-            <a:spAutoFit/>
-          </a:bodyPr>
-          <a:lstStyle/>
-          <a:p>
-            <a:pPr algn="l"/>
-            <a:r>
-              <a:rPr sz="950" b="0">
-                <a:solidFill>
-                  <a:srgbClr val="334155"/>
-                </a:solidFill>
-                <a:latin typeface="Open Sans"/>
-              </a:rPr>
-              <a:t>First approved representative workflow. Show "we filed for you" only in states where SmartCredit (or partner) is authorized.</a:t>
-            </a:r>
-          </a:p>
-        </p:txBody>
-      </p:sp>
-      <p:sp>
-        <p:nvSpPr>
-          <p:cNvPr id="50" name="Rounded Rectangle 49"/>
-          <p:cNvSpPr/>
-          <p:nvPr/>
-        </p:nvSpPr>
-        <p:spPr>
-          <a:xfrm>
-            <a:off x="9555480" y="6163055"/>
-            <a:ext cx="1600200" cy="274320"/>
-          </a:xfrm>
-          <a:prstGeom prst="roundRect">
-            <a:avLst>
-              <a:gd name="adj" fmla="val 50000"/>
-            </a:avLst>
-          </a:prstGeom>
-          <a:solidFill>
-            <a:srgbClr val="FC4C0B"/>
-          </a:solidFill>
-          <a:ln>
-            <a:noFill/>
-          </a:ln>
-        </p:spPr>
-        <p:style>
-          <a:lnRef idx="1">
-            <a:schemeClr val="accent1"/>
-          </a:lnRef>
-          <a:fillRef idx="3">
-            <a:schemeClr val="accent1"/>
-          </a:fillRef>
-          <a:effectRef idx="2">
-            <a:schemeClr val="accent1"/>
-          </a:effectRef>
-          <a:fontRef idx="minor">
-            <a:schemeClr val="lt1"/>
-          </a:fontRef>
-        </p:style>
-        <p:txBody>
-          <a:bodyPr rtlCol="0" anchor="ctr" lIns="45720" rIns="45720" tIns="18288" bIns="18288"/>
-          <a:lstStyle/>
-          <a:p>
-            <a:pPr algn="ctr"/>
-            <a:r>
-              <a:rPr sz="900" b="1">
-                <a:solidFill>
-                  <a:srgbClr val="FFFFFF"/>
-                </a:solidFill>
-                <a:latin typeface="Open Sans"/>
-              </a:rPr>
-              <a:t>Q4 2026 · Q1 2027</a:t>
-            </a:r>
-          </a:p>
-        </p:txBody>
-      </p:sp>
-      <p:sp>
-        <p:nvSpPr>
-          <p:cNvPr id="51" name="Rounded Rectangle 50"/>
-          <p:cNvSpPr/>
-          <p:nvPr/>
-        </p:nvSpPr>
-        <p:spPr>
-          <a:xfrm>
-            <a:off x="457200" y="6647688"/>
-            <a:ext cx="11247120" cy="182880"/>
-          </a:xfrm>
-          <a:prstGeom prst="roundRect">
-            <a:avLst>
-              <a:gd name="adj" fmla="val 10000"/>
-            </a:avLst>
-          </a:prstGeom>
-          <a:solidFill>
-            <a:srgbClr val="0F172A"/>
-          </a:solidFill>
-          <a:ln>
-            <a:noFill/>
-          </a:ln>
-          <a:effectLst/>
-        </p:spPr>
-        <p:style>
-          <a:lnRef idx="1">
-            <a:schemeClr val="accent1"/>
-          </a:lnRef>
-          <a:fillRef idx="3">
-            <a:schemeClr val="accent1"/>
-          </a:fillRef>
-          <a:effectRef idx="2">
-            <a:schemeClr val="accent1"/>
-          </a:effectRef>
-          <a:fontRef idx="minor">
-            <a:schemeClr val="lt1"/>
-          </a:fontRef>
-        </p:style>
-        <p:txBody>
-          <a:bodyPr rtlCol="0" anchor="ctr"/>
-          <a:lstStyle/>
-          <a:p>
-            <a:pPr algn="ctr"/>
-          </a:p>
-        </p:txBody>
-      </p:sp>
-      <p:sp>
-        <p:nvSpPr>
-          <p:cNvPr id="52" name="TextBox 51"/>
-          <p:cNvSpPr txBox="1"/>
-          <p:nvPr/>
-        </p:nvSpPr>
-        <p:spPr>
-          <a:xfrm>
-            <a:off x="640080" y="6675120"/>
-            <a:ext cx="10972800" cy="146304"/>
-          </a:xfrm>
-          <a:prstGeom prst="rect">
-            <a:avLst/>
-          </a:prstGeom>
-          <a:noFill/>
-        </p:spPr>
-        <p:txBody>
-          <a:bodyPr wrap="square" anchor="t" lIns="0" rIns="0" tIns="0" bIns="0">
-            <a:spAutoFit/>
-          </a:bodyPr>
-          <a:lstStyle/>
-          <a:p>
-            <a:pPr algn="l"/>
-            <a:r>
-              <a:rPr sz="1000" b="1">
-                <a:solidFill>
-                  <a:srgbClr val="FFFFFF"/>
-                </a:solidFill>
-                <a:latin typeface="Open Sans"/>
-              </a:rPr>
-              <a:t>First member alert in ~6 weeks. First "we filed for you" within ~9 months.</a:t>
-            </a:r>
-          </a:p>
-        </p:txBody>
-      </p:sp>
-    </p:spTree>
-  </p:cSld>
-  <p:clrMapOvr>
-    <a:masterClrMapping/>
-  </p:clrMapOvr>
-</p:sld>
-</file>
-
 <file path=ppt/slides/slide2.xml><?xml version="1.0" encoding="utf-8"?>
 <p:sld xmlns:a="http://schemas.openxmlformats.org/drawingml/2006/main" xmlns:p="http://schemas.openxmlformats.org/presentationml/2006/main" xmlns:r="http://schemas.openxmlformats.org/officeDocument/2006/relationships">
   <p:cSld>
@@ -5783,7 +3662,7 @@
                 </a:solidFill>
                 <a:latin typeface="Open Sans"/>
               </a:rPr>
-              <a:t>2 / 10</a:t>
+              <a:t>2 / 8</a:t>
             </a:r>
           </a:p>
         </p:txBody>
@@ -6863,7 +4742,7 @@
                 </a:solidFill>
                 <a:latin typeface="Open Sans"/>
               </a:rPr>
-              <a:t>3 / 10</a:t>
+              <a:t>3 / 8</a:t>
             </a:r>
           </a:p>
         </p:txBody>
@@ -8132,7 +6011,7 @@
                 </a:solidFill>
                 <a:latin typeface="Open Sans"/>
               </a:rPr>
-              <a:t>4 / 10</a:t>
+              <a:t>4 / 8</a:t>
             </a:r>
           </a:p>
         </p:txBody>
@@ -9632,7 +7511,7 @@
                 </a:solidFill>
                 <a:latin typeface="Open Sans"/>
               </a:rPr>
-              <a:t>5 / 10</a:t>
+              <a:t>5 / 8</a:t>
             </a:r>
           </a:p>
         </p:txBody>
@@ -12663,7 +10542,7 @@
                 </a:solidFill>
                 <a:latin typeface="Open Sans"/>
               </a:rPr>
-              <a:t>6 / 10</a:t>
+              <a:t>6 / 8</a:t>
             </a:r>
           </a:p>
         </p:txBody>
@@ -14698,7 +12577,7 @@
                 </a:solidFill>
                 <a:latin typeface="Open Sans"/>
               </a:rPr>
-              <a:t>7 / 10</a:t>
+              <a:t>7 / 8</a:t>
             </a:r>
           </a:p>
         </p:txBody>
@@ -16733,7 +14612,7 @@
                 </a:solidFill>
                 <a:latin typeface="Open Sans"/>
               </a:rPr>
-              <a:t>8 / 10</a:t>
+              <a:t>8 / 8</a:t>
             </a:r>
           </a:p>
         </p:txBody>
@@ -16803,7 +14682,7 @@
                 </a:solidFill>
                 <a:latin typeface="Open Sans"/>
               </a:rPr>
-              <a:t>FILING THE CLAIM</a:t>
+              <a:t>NEXT STEPS</a:t>
             </a:r>
           </a:p>
         </p:txBody>
@@ -16817,28 +14696,28 @@
         <p:spPr>
           <a:xfrm>
             <a:off x="457200" y="1143000"/>
-            <a:ext cx="11430000" cy="868680"/>
-          </a:xfrm>
-          <a:prstGeom prst="rect">
-            <a:avLst/>
-          </a:prstGeom>
-          <a:noFill/>
-        </p:spPr>
-        <p:txBody>
-          <a:bodyPr wrap="square" anchor="t" lIns="0" rIns="0" tIns="0" bIns="0">
-            <a:spAutoFit/>
-          </a:bodyPr>
-          <a:lstStyle/>
-          <a:p>
-            <a:pPr algn="l"/>
-            <a:r>
-              <a:rPr sz="2200" b="1">
+            <a:ext cx="11430000" cy="914400"/>
+          </a:xfrm>
+          <a:prstGeom prst="rect">
+            <a:avLst/>
+          </a:prstGeom>
+          <a:noFill/>
+        </p:spPr>
+        <p:txBody>
+          <a:bodyPr wrap="square" anchor="t" lIns="0" rIns="0" tIns="0" bIns="0">
+            <a:spAutoFit/>
+          </a:bodyPr>
+          <a:lstStyle/>
+          <a:p>
+            <a:pPr algn="l"/>
+            <a:r>
+              <a:rPr sz="2600" b="1">
                 <a:solidFill>
                   <a:srgbClr val="0F172A"/>
                 </a:solidFill>
                 <a:latin typeface="Open Sans"/>
               </a:rPr>
-              <a:t>Three channels. E-file preferred. Mail when required. Rep when approved.</a:t>
+              <a:t>Engage legal — unlock the top 5 states where our members live.</a:t>
             </a:r>
           </a:p>
         </p:txBody>
@@ -16851,7 +14730,7 @@
         </p:nvSpPr>
         <p:spPr>
           <a:xfrm>
-            <a:off x="457200" y="1965960"/>
+            <a:off x="457200" y="2011680"/>
             <a:ext cx="11430000" cy="457200"/>
           </a:xfrm>
           <a:prstGeom prst="rect">
@@ -16873,34 +14752,30 @@
                 </a:solidFill>
                 <a:latin typeface="Open Sans"/>
               </a:rPr>
-              <a:t>Most states support online claim initiation, but some claims still require document upload, notarization, mailed forms, or manual review. v1 is assisted e-file. Mail packets via our ActionLetters service when states require physical paperwork. Filing on the member's behalf is a state-by-state regulatory unlock — not a technical one.</a:t>
-            </a:r>
-          </a:p>
-        </p:txBody>
-      </p:sp>
-      <p:sp>
-        <p:nvSpPr>
-          <p:cNvPr id="10" name="Rounded Rectangle 9"/>
+              <a:t>The prototype proves we can match at scale against CA's public feed. Scaling to FL, TX, GA, NY is a regulatory unlock — not a technical one. Legal owns the next step in each state: confirm caching/redisplay rights, file the right registration, or open a written-permission dialogue.</a:t>
+            </a:r>
+          </a:p>
+        </p:txBody>
+      </p:sp>
+      <p:sp>
+        <p:nvSpPr>
+          <p:cNvPr id="10" name="Rectangle 9"/>
           <p:cNvSpPr/>
           <p:nvPr/>
         </p:nvSpPr>
         <p:spPr>
           <a:xfrm>
             <a:off x="457200" y="2606040"/>
-            <a:ext cx="3657600" cy="3657600"/>
-          </a:xfrm>
-          <a:prstGeom prst="roundRect">
-            <a:avLst>
-              <a:gd name="adj" fmla="val 3000"/>
-            </a:avLst>
+            <a:ext cx="11247120" cy="292608"/>
+          </a:xfrm>
+          <a:prstGeom prst="rect">
+            <a:avLst/>
           </a:prstGeom>
           <a:solidFill>
-            <a:srgbClr val="FFFFFF"/>
+            <a:srgbClr val="0F172A"/>
           </a:solidFill>
-          <a:ln w="6350">
-            <a:solidFill>
-              <a:srgbClr val="E2E8F0"/>
-            </a:solidFill>
+          <a:ln>
+            <a:noFill/>
           </a:ln>
           <a:effectLst/>
         </p:spPr>
@@ -16928,17 +14803,819 @@
       </p:sp>
       <p:sp>
         <p:nvSpPr>
-          <p:cNvPr id="11" name="Rectangle 10"/>
+          <p:cNvPr id="11" name="TextBox 10"/>
+          <p:cNvSpPr txBox="1"/>
+          <p:nvPr/>
+        </p:nvSpPr>
+        <p:spPr>
+          <a:xfrm>
+            <a:off x="548640" y="2660904"/>
+            <a:ext cx="457200" cy="201168"/>
+          </a:xfrm>
+          <a:prstGeom prst="rect">
+            <a:avLst/>
+          </a:prstGeom>
+          <a:noFill/>
+        </p:spPr>
+        <p:txBody>
+          <a:bodyPr wrap="square" anchor="t" lIns="0" rIns="0" tIns="0" bIns="0">
+            <a:spAutoFit/>
+          </a:bodyPr>
+          <a:lstStyle/>
+          <a:p>
+            <a:pPr algn="l"/>
+            <a:r>
+              <a:rPr sz="900" b="1">
+                <a:solidFill>
+                  <a:srgbClr val="FFFFFF"/>
+                </a:solidFill>
+                <a:latin typeface="Open Sans"/>
+              </a:rPr>
+              <a:t>#</a:t>
+            </a:r>
+          </a:p>
+        </p:txBody>
+      </p:sp>
+      <p:sp>
+        <p:nvSpPr>
+          <p:cNvPr id="12" name="TextBox 11"/>
+          <p:cNvSpPr txBox="1"/>
+          <p:nvPr/>
+        </p:nvSpPr>
+        <p:spPr>
+          <a:xfrm>
+            <a:off x="1051560" y="2660904"/>
+            <a:ext cx="822960" cy="201168"/>
+          </a:xfrm>
+          <a:prstGeom prst="rect">
+            <a:avLst/>
+          </a:prstGeom>
+          <a:noFill/>
+        </p:spPr>
+        <p:txBody>
+          <a:bodyPr wrap="square" anchor="t" lIns="0" rIns="0" tIns="0" bIns="0">
+            <a:spAutoFit/>
+          </a:bodyPr>
+          <a:lstStyle/>
+          <a:p>
+            <a:pPr algn="l"/>
+            <a:r>
+              <a:rPr sz="900" b="1">
+                <a:solidFill>
+                  <a:srgbClr val="FFFFFF"/>
+                </a:solidFill>
+                <a:latin typeface="Open Sans"/>
+              </a:rPr>
+              <a:t>STATE</a:t>
+            </a:r>
+          </a:p>
+        </p:txBody>
+      </p:sp>
+      <p:sp>
+        <p:nvSpPr>
+          <p:cNvPr id="13" name="TextBox 12"/>
+          <p:cNvSpPr txBox="1"/>
+          <p:nvPr/>
+        </p:nvSpPr>
+        <p:spPr>
+          <a:xfrm>
+            <a:off x="1920240" y="2660904"/>
+            <a:ext cx="1463040" cy="201168"/>
+          </a:xfrm>
+          <a:prstGeom prst="rect">
+            <a:avLst/>
+          </a:prstGeom>
+          <a:noFill/>
+        </p:spPr>
+        <p:txBody>
+          <a:bodyPr wrap="square" anchor="t" lIns="0" rIns="0" tIns="0" bIns="0">
+            <a:spAutoFit/>
+          </a:bodyPr>
+          <a:lstStyle/>
+          <a:p>
+            <a:pPr algn="l"/>
+            <a:r>
+              <a:rPr sz="900" b="1">
+                <a:solidFill>
+                  <a:srgbClr val="FFFFFF"/>
+                </a:solidFill>
+                <a:latin typeface="Open Sans"/>
+              </a:rPr>
+              <a:t>NET ACTIVES</a:t>
+            </a:r>
+          </a:p>
+        </p:txBody>
+      </p:sp>
+      <p:sp>
+        <p:nvSpPr>
+          <p:cNvPr id="14" name="TextBox 13"/>
+          <p:cNvSpPr txBox="1"/>
+          <p:nvPr/>
+        </p:nvSpPr>
+        <p:spPr>
+          <a:xfrm>
+            <a:off x="3520440" y="2660904"/>
+            <a:ext cx="960120" cy="201168"/>
+          </a:xfrm>
+          <a:prstGeom prst="rect">
+            <a:avLst/>
+          </a:prstGeom>
+          <a:noFill/>
+        </p:spPr>
+        <p:txBody>
+          <a:bodyPr wrap="square" anchor="t" lIns="0" rIns="0" tIns="0" bIns="0">
+            <a:spAutoFit/>
+          </a:bodyPr>
+          <a:lstStyle/>
+          <a:p>
+            <a:pPr algn="l"/>
+            <a:r>
+              <a:rPr sz="900" b="1">
+                <a:solidFill>
+                  <a:srgbClr val="FFFFFF"/>
+                </a:solidFill>
+                <a:latin typeface="Open Sans"/>
+              </a:rPr>
+              <a:t>POSTURE</a:t>
+            </a:r>
+          </a:p>
+        </p:txBody>
+      </p:sp>
+      <p:sp>
+        <p:nvSpPr>
+          <p:cNvPr id="15" name="TextBox 14"/>
+          <p:cNvSpPr txBox="1"/>
+          <p:nvPr/>
+        </p:nvSpPr>
+        <p:spPr>
+          <a:xfrm>
+            <a:off x="4617720" y="2660904"/>
+            <a:ext cx="7040880" cy="201168"/>
+          </a:xfrm>
+          <a:prstGeom prst="rect">
+            <a:avLst/>
+          </a:prstGeom>
+          <a:noFill/>
+        </p:spPr>
+        <p:txBody>
+          <a:bodyPr wrap="square" anchor="t" lIns="0" rIns="0" tIns="0" bIns="0">
+            <a:spAutoFit/>
+          </a:bodyPr>
+          <a:lstStyle/>
+          <a:p>
+            <a:pPr algn="l"/>
+            <a:r>
+              <a:rPr sz="900" b="1">
+                <a:solidFill>
+                  <a:srgbClr val="FFFFFF"/>
+                </a:solidFill>
+                <a:latin typeface="Open Sans"/>
+              </a:rPr>
+              <a:t>LEGAL ACTION</a:t>
+            </a:r>
+          </a:p>
+        </p:txBody>
+      </p:sp>
+      <p:sp>
+        <p:nvSpPr>
+          <p:cNvPr id="16" name="Rectangle 15"/>
           <p:cNvSpPr/>
           <p:nvPr/>
         </p:nvSpPr>
         <p:spPr>
           <a:xfrm>
-            <a:off x="457200" y="2606040"/>
-            <a:ext cx="3657600" cy="164592"/>
-          </a:xfrm>
-          <a:prstGeom prst="rect">
-            <a:avLst/>
+            <a:off x="457200" y="2898648"/>
+            <a:ext cx="11247120" cy="676656"/>
+          </a:xfrm>
+          <a:prstGeom prst="rect">
+            <a:avLst/>
+          </a:prstGeom>
+          <a:solidFill>
+            <a:srgbClr val="F8FAFC"/>
+          </a:solidFill>
+          <a:ln>
+            <a:noFill/>
+          </a:ln>
+          <a:effectLst/>
+        </p:spPr>
+        <p:style>
+          <a:lnRef idx="1">
+            <a:schemeClr val="accent1"/>
+          </a:lnRef>
+          <a:fillRef idx="3">
+            <a:schemeClr val="accent1"/>
+          </a:fillRef>
+          <a:effectRef idx="2">
+            <a:schemeClr val="accent1"/>
+          </a:effectRef>
+          <a:fontRef idx="minor">
+            <a:schemeClr val="lt1"/>
+          </a:fontRef>
+        </p:style>
+        <p:txBody>
+          <a:bodyPr rtlCol="0" anchor="ctr"/>
+          <a:lstStyle/>
+          <a:p>
+            <a:pPr algn="ctr"/>
+          </a:p>
+        </p:txBody>
+      </p:sp>
+      <p:sp>
+        <p:nvSpPr>
+          <p:cNvPr id="17" name="TextBox 16"/>
+          <p:cNvSpPr txBox="1"/>
+          <p:nvPr/>
+        </p:nvSpPr>
+        <p:spPr>
+          <a:xfrm>
+            <a:off x="548640" y="3145536"/>
+            <a:ext cx="457200" cy="201168"/>
+          </a:xfrm>
+          <a:prstGeom prst="rect">
+            <a:avLst/>
+          </a:prstGeom>
+          <a:noFill/>
+        </p:spPr>
+        <p:txBody>
+          <a:bodyPr wrap="square" anchor="t" lIns="0" rIns="0" tIns="0" bIns="0">
+            <a:spAutoFit/>
+          </a:bodyPr>
+          <a:lstStyle/>
+          <a:p>
+            <a:pPr algn="l"/>
+            <a:r>
+              <a:rPr sz="1200" b="1">
+                <a:solidFill>
+                  <a:srgbClr val="64748B"/>
+                </a:solidFill>
+                <a:latin typeface="Open Sans"/>
+              </a:rPr>
+              <a:t>1</a:t>
+            </a:r>
+          </a:p>
+        </p:txBody>
+      </p:sp>
+      <p:sp>
+        <p:nvSpPr>
+          <p:cNvPr id="18" name="TextBox 17"/>
+          <p:cNvSpPr txBox="1"/>
+          <p:nvPr/>
+        </p:nvSpPr>
+        <p:spPr>
+          <a:xfrm>
+            <a:off x="1051560" y="3118104"/>
+            <a:ext cx="822960" cy="256032"/>
+          </a:xfrm>
+          <a:prstGeom prst="rect">
+            <a:avLst/>
+          </a:prstGeom>
+          <a:noFill/>
+        </p:spPr>
+        <p:txBody>
+          <a:bodyPr wrap="square" anchor="t" lIns="0" rIns="0" tIns="0" bIns="0">
+            <a:spAutoFit/>
+          </a:bodyPr>
+          <a:lstStyle/>
+          <a:p>
+            <a:pPr algn="l"/>
+            <a:r>
+              <a:rPr sz="1600" b="1">
+                <a:solidFill>
+                  <a:srgbClr val="0F172A"/>
+                </a:solidFill>
+                <a:latin typeface="Open Sans"/>
+              </a:rPr>
+              <a:t>FL</a:t>
+            </a:r>
+          </a:p>
+        </p:txBody>
+      </p:sp>
+      <p:sp>
+        <p:nvSpPr>
+          <p:cNvPr id="19" name="TextBox 18"/>
+          <p:cNvSpPr txBox="1"/>
+          <p:nvPr/>
+        </p:nvSpPr>
+        <p:spPr>
+          <a:xfrm>
+            <a:off x="1920240" y="3145536"/>
+            <a:ext cx="1463040" cy="201168"/>
+          </a:xfrm>
+          <a:prstGeom prst="rect">
+            <a:avLst/>
+          </a:prstGeom>
+          <a:noFill/>
+        </p:spPr>
+        <p:txBody>
+          <a:bodyPr wrap="square" anchor="t" lIns="0" rIns="0" tIns="0" bIns="0">
+            <a:spAutoFit/>
+          </a:bodyPr>
+          <a:lstStyle/>
+          <a:p>
+            <a:pPr algn="l"/>
+            <a:r>
+              <a:rPr sz="1300" b="1">
+                <a:solidFill>
+                  <a:srgbClr val="0F172A"/>
+                </a:solidFill>
+                <a:latin typeface="Open Sans"/>
+              </a:rPr>
+              <a:t>48,436</a:t>
+            </a:r>
+          </a:p>
+        </p:txBody>
+      </p:sp>
+      <p:sp>
+        <p:nvSpPr>
+          <p:cNvPr id="20" name="Rounded Rectangle 19"/>
+          <p:cNvSpPr/>
+          <p:nvPr/>
+        </p:nvSpPr>
+        <p:spPr>
+          <a:xfrm>
+            <a:off x="3520440" y="3118104"/>
+            <a:ext cx="960120" cy="256032"/>
+          </a:xfrm>
+          <a:prstGeom prst="roundRect">
+            <a:avLst>
+              <a:gd name="adj" fmla="val 50000"/>
+            </a:avLst>
+          </a:prstGeom>
+          <a:solidFill>
+            <a:srgbClr val="FC4C0B"/>
+          </a:solidFill>
+          <a:ln>
+            <a:noFill/>
+          </a:ln>
+        </p:spPr>
+        <p:style>
+          <a:lnRef idx="1">
+            <a:schemeClr val="accent1"/>
+          </a:lnRef>
+          <a:fillRef idx="3">
+            <a:schemeClr val="accent1"/>
+          </a:fillRef>
+          <a:effectRef idx="2">
+            <a:schemeClr val="accent1"/>
+          </a:effectRef>
+          <a:fontRef idx="minor">
+            <a:schemeClr val="lt1"/>
+          </a:fontRef>
+        </p:style>
+        <p:txBody>
+          <a:bodyPr rtlCol="0" anchor="ctr" lIns="45720" rIns="45720" tIns="18288" bIns="18288"/>
+          <a:lstStyle/>
+          <a:p>
+            <a:pPr algn="ctr"/>
+            <a:r>
+              <a:rPr sz="900" b="1">
+                <a:solidFill>
+                  <a:srgbClr val="FFFFFF"/>
+                </a:solidFill>
+                <a:latin typeface="Open Sans"/>
+              </a:rPr>
+              <a:t>LEGAL</a:t>
+            </a:r>
+          </a:p>
+        </p:txBody>
+      </p:sp>
+      <p:sp>
+        <p:nvSpPr>
+          <p:cNvPr id="21" name="TextBox 20"/>
+          <p:cNvSpPr txBox="1"/>
+          <p:nvPr/>
+        </p:nvSpPr>
+        <p:spPr>
+          <a:xfrm>
+            <a:off x="4617720" y="2962656"/>
+            <a:ext cx="7040880" cy="548640"/>
+          </a:xfrm>
+          <a:prstGeom prst="rect">
+            <a:avLst/>
+          </a:prstGeom>
+          <a:noFill/>
+        </p:spPr>
+        <p:txBody>
+          <a:bodyPr wrap="square" anchor="t" lIns="0" rIns="0" tIns="0" bIns="0">
+            <a:spAutoFit/>
+          </a:bodyPr>
+          <a:lstStyle/>
+          <a:p>
+            <a:pPr algn="l"/>
+            <a:r>
+              <a:rPr sz="1000" b="0">
+                <a:solidFill>
+                  <a:srgbClr val="334155"/>
+                </a:solidFill>
+                <a:latin typeface="Open Sans"/>
+              </a:rPr>
+              <a:t>Open dialogue with FL Dept of Financial Services on Ch. 717 registered-rep path AND written approval for bulk caching of the claimant portal data. Confirm FL atty / CPA / PI partnership model.</a:t>
+            </a:r>
+          </a:p>
+        </p:txBody>
+      </p:sp>
+      <p:sp>
+        <p:nvSpPr>
+          <p:cNvPr id="22" name="Rectangle 21"/>
+          <p:cNvSpPr/>
+          <p:nvPr/>
+        </p:nvSpPr>
+        <p:spPr>
+          <a:xfrm>
+            <a:off x="457200" y="3575304"/>
+            <a:ext cx="11247120" cy="676656"/>
+          </a:xfrm>
+          <a:prstGeom prst="rect">
+            <a:avLst/>
+          </a:prstGeom>
+          <a:solidFill>
+            <a:srgbClr val="FFFFFF"/>
+          </a:solidFill>
+          <a:ln>
+            <a:noFill/>
+          </a:ln>
+          <a:effectLst/>
+        </p:spPr>
+        <p:style>
+          <a:lnRef idx="1">
+            <a:schemeClr val="accent1"/>
+          </a:lnRef>
+          <a:fillRef idx="3">
+            <a:schemeClr val="accent1"/>
+          </a:fillRef>
+          <a:effectRef idx="2">
+            <a:schemeClr val="accent1"/>
+          </a:effectRef>
+          <a:fontRef idx="minor">
+            <a:schemeClr val="lt1"/>
+          </a:fontRef>
+        </p:style>
+        <p:txBody>
+          <a:bodyPr rtlCol="0" anchor="ctr"/>
+          <a:lstStyle/>
+          <a:p>
+            <a:pPr algn="ctr"/>
+          </a:p>
+        </p:txBody>
+      </p:sp>
+      <p:sp>
+        <p:nvSpPr>
+          <p:cNvPr id="23" name="TextBox 22"/>
+          <p:cNvSpPr txBox="1"/>
+          <p:nvPr/>
+        </p:nvSpPr>
+        <p:spPr>
+          <a:xfrm>
+            <a:off x="548640" y="3822191"/>
+            <a:ext cx="457200" cy="201168"/>
+          </a:xfrm>
+          <a:prstGeom prst="rect">
+            <a:avLst/>
+          </a:prstGeom>
+          <a:noFill/>
+        </p:spPr>
+        <p:txBody>
+          <a:bodyPr wrap="square" anchor="t" lIns="0" rIns="0" tIns="0" bIns="0">
+            <a:spAutoFit/>
+          </a:bodyPr>
+          <a:lstStyle/>
+          <a:p>
+            <a:pPr algn="l"/>
+            <a:r>
+              <a:rPr sz="1200" b="1">
+                <a:solidFill>
+                  <a:srgbClr val="64748B"/>
+                </a:solidFill>
+                <a:latin typeface="Open Sans"/>
+              </a:rPr>
+              <a:t>2</a:t>
+            </a:r>
+          </a:p>
+        </p:txBody>
+      </p:sp>
+      <p:sp>
+        <p:nvSpPr>
+          <p:cNvPr id="24" name="TextBox 23"/>
+          <p:cNvSpPr txBox="1"/>
+          <p:nvPr/>
+        </p:nvSpPr>
+        <p:spPr>
+          <a:xfrm>
+            <a:off x="1051560" y="3794760"/>
+            <a:ext cx="822960" cy="256032"/>
+          </a:xfrm>
+          <a:prstGeom prst="rect">
+            <a:avLst/>
+          </a:prstGeom>
+          <a:noFill/>
+        </p:spPr>
+        <p:txBody>
+          <a:bodyPr wrap="square" anchor="t" lIns="0" rIns="0" tIns="0" bIns="0">
+            <a:spAutoFit/>
+          </a:bodyPr>
+          <a:lstStyle/>
+          <a:p>
+            <a:pPr algn="l"/>
+            <a:r>
+              <a:rPr sz="1600" b="1">
+                <a:solidFill>
+                  <a:srgbClr val="0F172A"/>
+                </a:solidFill>
+                <a:latin typeface="Open Sans"/>
+              </a:rPr>
+              <a:t>TX</a:t>
+            </a:r>
+          </a:p>
+        </p:txBody>
+      </p:sp>
+      <p:sp>
+        <p:nvSpPr>
+          <p:cNvPr id="25" name="TextBox 24"/>
+          <p:cNvSpPr txBox="1"/>
+          <p:nvPr/>
+        </p:nvSpPr>
+        <p:spPr>
+          <a:xfrm>
+            <a:off x="1920240" y="3822191"/>
+            <a:ext cx="1463040" cy="201168"/>
+          </a:xfrm>
+          <a:prstGeom prst="rect">
+            <a:avLst/>
+          </a:prstGeom>
+          <a:noFill/>
+        </p:spPr>
+        <p:txBody>
+          <a:bodyPr wrap="square" anchor="t" lIns="0" rIns="0" tIns="0" bIns="0">
+            <a:spAutoFit/>
+          </a:bodyPr>
+          <a:lstStyle/>
+          <a:p>
+            <a:pPr algn="l"/>
+            <a:r>
+              <a:rPr sz="1300" b="1">
+                <a:solidFill>
+                  <a:srgbClr val="0F172A"/>
+                </a:solidFill>
+                <a:latin typeface="Open Sans"/>
+              </a:rPr>
+              <a:t>45,670</a:t>
+            </a:r>
+          </a:p>
+        </p:txBody>
+      </p:sp>
+      <p:sp>
+        <p:nvSpPr>
+          <p:cNvPr id="26" name="Rounded Rectangle 25"/>
+          <p:cNvSpPr/>
+          <p:nvPr/>
+        </p:nvSpPr>
+        <p:spPr>
+          <a:xfrm>
+            <a:off x="3520440" y="3794760"/>
+            <a:ext cx="960120" cy="256032"/>
+          </a:xfrm>
+          <a:prstGeom prst="roundRect">
+            <a:avLst>
+              <a:gd name="adj" fmla="val 50000"/>
+            </a:avLst>
+          </a:prstGeom>
+          <a:solidFill>
+            <a:srgbClr val="FFB352"/>
+          </a:solidFill>
+          <a:ln>
+            <a:noFill/>
+          </a:ln>
+        </p:spPr>
+        <p:style>
+          <a:lnRef idx="1">
+            <a:schemeClr val="accent1"/>
+          </a:lnRef>
+          <a:fillRef idx="3">
+            <a:schemeClr val="accent1"/>
+          </a:fillRef>
+          <a:effectRef idx="2">
+            <a:schemeClr val="accent1"/>
+          </a:effectRef>
+          <a:fontRef idx="minor">
+            <a:schemeClr val="lt1"/>
+          </a:fontRef>
+        </p:style>
+        <p:txBody>
+          <a:bodyPr rtlCol="0" anchor="ctr" lIns="45720" rIns="45720" tIns="18288" bIns="18288"/>
+          <a:lstStyle/>
+          <a:p>
+            <a:pPr algn="ctr"/>
+            <a:r>
+              <a:rPr sz="900" b="1">
+                <a:solidFill>
+                  <a:srgbClr val="FFFFFF"/>
+                </a:solidFill>
+                <a:latin typeface="Open Sans"/>
+              </a:rPr>
+              <a:t>REQUEST</a:t>
+            </a:r>
+          </a:p>
+        </p:txBody>
+      </p:sp>
+      <p:sp>
+        <p:nvSpPr>
+          <p:cNvPr id="27" name="TextBox 26"/>
+          <p:cNvSpPr txBox="1"/>
+          <p:nvPr/>
+        </p:nvSpPr>
+        <p:spPr>
+          <a:xfrm>
+            <a:off x="4617720" y="3639312"/>
+            <a:ext cx="7040880" cy="548640"/>
+          </a:xfrm>
+          <a:prstGeom prst="rect">
+            <a:avLst/>
+          </a:prstGeom>
+          <a:noFill/>
+        </p:spPr>
+        <p:txBody>
+          <a:bodyPr wrap="square" anchor="t" lIns="0" rIns="0" tIns="0" bIns="0">
+            <a:spAutoFit/>
+          </a:bodyPr>
+          <a:lstStyle/>
+          <a:p>
+            <a:pPr algn="l"/>
+            <a:r>
+              <a:rPr sz="1000" b="0">
+                <a:solidFill>
+                  <a:srgbClr val="334155"/>
+                </a:solidFill>
+                <a:latin typeface="Open Sans"/>
+              </a:rPr>
+              <a:t>Submit dataset request via data.gov contact (name, company, mailing address, phone, TX PI license if applicable). Secure written approval for caching, matching, redisplay, and commercial use before production.</a:t>
+            </a:r>
+          </a:p>
+        </p:txBody>
+      </p:sp>
+      <p:sp>
+        <p:nvSpPr>
+          <p:cNvPr id="28" name="Rectangle 27"/>
+          <p:cNvSpPr/>
+          <p:nvPr/>
+        </p:nvSpPr>
+        <p:spPr>
+          <a:xfrm>
+            <a:off x="457200" y="4251960"/>
+            <a:ext cx="11247120" cy="676656"/>
+          </a:xfrm>
+          <a:prstGeom prst="rect">
+            <a:avLst/>
+          </a:prstGeom>
+          <a:solidFill>
+            <a:srgbClr val="F8FAFC"/>
+          </a:solidFill>
+          <a:ln>
+            <a:noFill/>
+          </a:ln>
+          <a:effectLst/>
+        </p:spPr>
+        <p:style>
+          <a:lnRef idx="1">
+            <a:schemeClr val="accent1"/>
+          </a:lnRef>
+          <a:fillRef idx="3">
+            <a:schemeClr val="accent1"/>
+          </a:fillRef>
+          <a:effectRef idx="2">
+            <a:schemeClr val="accent1"/>
+          </a:effectRef>
+          <a:fontRef idx="minor">
+            <a:schemeClr val="lt1"/>
+          </a:fontRef>
+        </p:style>
+        <p:txBody>
+          <a:bodyPr rtlCol="0" anchor="ctr"/>
+          <a:lstStyle/>
+          <a:p>
+            <a:pPr algn="ctr"/>
+          </a:p>
+        </p:txBody>
+      </p:sp>
+      <p:sp>
+        <p:nvSpPr>
+          <p:cNvPr id="29" name="TextBox 28"/>
+          <p:cNvSpPr txBox="1"/>
+          <p:nvPr/>
+        </p:nvSpPr>
+        <p:spPr>
+          <a:xfrm>
+            <a:off x="548640" y="4498848"/>
+            <a:ext cx="457200" cy="201168"/>
+          </a:xfrm>
+          <a:prstGeom prst="rect">
+            <a:avLst/>
+          </a:prstGeom>
+          <a:noFill/>
+        </p:spPr>
+        <p:txBody>
+          <a:bodyPr wrap="square" anchor="t" lIns="0" rIns="0" tIns="0" bIns="0">
+            <a:spAutoFit/>
+          </a:bodyPr>
+          <a:lstStyle/>
+          <a:p>
+            <a:pPr algn="l"/>
+            <a:r>
+              <a:rPr sz="1200" b="1">
+                <a:solidFill>
+                  <a:srgbClr val="64748B"/>
+                </a:solidFill>
+                <a:latin typeface="Open Sans"/>
+              </a:rPr>
+              <a:t>3</a:t>
+            </a:r>
+          </a:p>
+        </p:txBody>
+      </p:sp>
+      <p:sp>
+        <p:nvSpPr>
+          <p:cNvPr id="30" name="TextBox 29"/>
+          <p:cNvSpPr txBox="1"/>
+          <p:nvPr/>
+        </p:nvSpPr>
+        <p:spPr>
+          <a:xfrm>
+            <a:off x="1051560" y="4471416"/>
+            <a:ext cx="822960" cy="256032"/>
+          </a:xfrm>
+          <a:prstGeom prst="rect">
+            <a:avLst/>
+          </a:prstGeom>
+          <a:noFill/>
+        </p:spPr>
+        <p:txBody>
+          <a:bodyPr wrap="square" anchor="t" lIns="0" rIns="0" tIns="0" bIns="0">
+            <a:spAutoFit/>
+          </a:bodyPr>
+          <a:lstStyle/>
+          <a:p>
+            <a:pPr algn="l"/>
+            <a:r>
+              <a:rPr sz="1600" b="1">
+                <a:solidFill>
+                  <a:srgbClr val="0F172A"/>
+                </a:solidFill>
+                <a:latin typeface="Open Sans"/>
+              </a:rPr>
+              <a:t>CA</a:t>
+            </a:r>
+          </a:p>
+        </p:txBody>
+      </p:sp>
+      <p:sp>
+        <p:nvSpPr>
+          <p:cNvPr id="31" name="TextBox 30"/>
+          <p:cNvSpPr txBox="1"/>
+          <p:nvPr/>
+        </p:nvSpPr>
+        <p:spPr>
+          <a:xfrm>
+            <a:off x="1920240" y="4498848"/>
+            <a:ext cx="1463040" cy="201168"/>
+          </a:xfrm>
+          <a:prstGeom prst="rect">
+            <a:avLst/>
+          </a:prstGeom>
+          <a:noFill/>
+        </p:spPr>
+        <p:txBody>
+          <a:bodyPr wrap="square" anchor="t" lIns="0" rIns="0" tIns="0" bIns="0">
+            <a:spAutoFit/>
+          </a:bodyPr>
+          <a:lstStyle/>
+          <a:p>
+            <a:pPr algn="l"/>
+            <a:r>
+              <a:rPr sz="1300" b="1">
+                <a:solidFill>
+                  <a:srgbClr val="0F172A"/>
+                </a:solidFill>
+                <a:latin typeface="Open Sans"/>
+              </a:rPr>
+              <a:t>31,110</a:t>
+            </a:r>
+          </a:p>
+        </p:txBody>
+      </p:sp>
+      <p:sp>
+        <p:nvSpPr>
+          <p:cNvPr id="32" name="Rounded Rectangle 31"/>
+          <p:cNvSpPr/>
+          <p:nvPr/>
+        </p:nvSpPr>
+        <p:spPr>
+          <a:xfrm>
+            <a:off x="3520440" y="4471416"/>
+            <a:ext cx="960120" cy="256032"/>
+          </a:xfrm>
+          <a:prstGeom prst="roundRect">
+            <a:avLst>
+              <a:gd name="adj" fmla="val 50000"/>
+            </a:avLst>
           </a:prstGeom>
           <a:solidFill>
             <a:srgbClr val="059669"/>
@@ -16946,7 +15623,6 @@
           <a:ln>
             <a:noFill/>
           </a:ln>
-          <a:effectLst/>
         </p:spPr>
         <p:style>
           <a:lnRef idx="1">
@@ -16963,128 +15639,32 @@
           </a:fontRef>
         </p:style>
         <p:txBody>
-          <a:bodyPr rtlCol="0" anchor="ctr"/>
+          <a:bodyPr rtlCol="0" anchor="ctr" lIns="45720" rIns="45720" tIns="18288" bIns="18288"/>
           <a:lstStyle/>
           <a:p>
             <a:pPr algn="ctr"/>
-          </a:p>
-        </p:txBody>
-      </p:sp>
-      <p:sp>
-        <p:nvSpPr>
-          <p:cNvPr id="12" name="TextBox 11"/>
-          <p:cNvSpPr txBox="1"/>
-          <p:nvPr/>
-        </p:nvSpPr>
-        <p:spPr>
-          <a:xfrm>
-            <a:off x="685800" y="2898648"/>
-            <a:ext cx="3200400" cy="329184"/>
-          </a:xfrm>
-          <a:prstGeom prst="rect">
-            <a:avLst/>
-          </a:prstGeom>
-          <a:noFill/>
-        </p:spPr>
-        <p:txBody>
-          <a:bodyPr wrap="square" anchor="t" lIns="0" rIns="0" tIns="0" bIns="0">
-            <a:spAutoFit/>
-          </a:bodyPr>
-          <a:lstStyle/>
-          <a:p>
-            <a:pPr algn="l"/>
-            <a:r>
-              <a:rPr sz="1100" b="1">
-                <a:solidFill>
-                  <a:srgbClr val="059669"/>
-                </a:solidFill>
-                <a:latin typeface="Open Sans"/>
-              </a:rPr>
-              <a:t>v1 · DEFAULT</a:t>
-            </a:r>
-          </a:p>
-        </p:txBody>
-      </p:sp>
-      <p:sp>
-        <p:nvSpPr>
-          <p:cNvPr id="13" name="TextBox 12"/>
-          <p:cNvSpPr txBox="1"/>
-          <p:nvPr/>
-        </p:nvSpPr>
-        <p:spPr>
-          <a:xfrm>
-            <a:off x="685800" y="3246120"/>
-            <a:ext cx="3200400" cy="502920"/>
-          </a:xfrm>
-          <a:prstGeom prst="rect">
-            <a:avLst/>
-          </a:prstGeom>
-          <a:noFill/>
-        </p:spPr>
-        <p:txBody>
-          <a:bodyPr wrap="square" anchor="t" lIns="0" rIns="0" tIns="0" bIns="0">
-            <a:spAutoFit/>
-          </a:bodyPr>
-          <a:lstStyle/>
-          <a:p>
-            <a:pPr algn="l"/>
-            <a:r>
-              <a:rPr sz="1400" b="1">
-                <a:solidFill>
-                  <a:srgbClr val="0F172A"/>
-                </a:solidFill>
-                <a:latin typeface="Open Sans"/>
-              </a:rPr>
-              <a:t>Assisted e-file</a:t>
-            </a:r>
-          </a:p>
-        </p:txBody>
-      </p:sp>
-      <p:sp>
-        <p:nvSpPr>
-          <p:cNvPr id="14" name="TextBox 13"/>
-          <p:cNvSpPr txBox="1"/>
-          <p:nvPr/>
-        </p:nvSpPr>
-        <p:spPr>
-          <a:xfrm>
-            <a:off x="685800" y="3977639"/>
-            <a:ext cx="1371600" cy="201168"/>
-          </a:xfrm>
-          <a:prstGeom prst="rect">
-            <a:avLst/>
-          </a:prstGeom>
-          <a:noFill/>
-        </p:spPr>
-        <p:txBody>
-          <a:bodyPr wrap="square" anchor="t" lIns="0" rIns="0" tIns="0" bIns="0">
-            <a:spAutoFit/>
-          </a:bodyPr>
-          <a:lstStyle/>
-          <a:p>
-            <a:pPr algn="l"/>
             <a:r>
               <a:rPr sz="900" b="1">
                 <a:solidFill>
-                  <a:srgbClr val="2863C5"/>
-                </a:solidFill>
-                <a:latin typeface="Open Sans"/>
-              </a:rPr>
-              <a:t>Who submits</a:t>
-            </a:r>
-          </a:p>
-        </p:txBody>
-      </p:sp>
-      <p:sp>
-        <p:nvSpPr>
-          <p:cNvPr id="15" name="TextBox 14"/>
-          <p:cNvSpPr txBox="1"/>
-          <p:nvPr/>
-        </p:nvSpPr>
-        <p:spPr>
-          <a:xfrm>
-            <a:off x="685800" y="4197096"/>
-            <a:ext cx="3200400" cy="457200"/>
+                  <a:srgbClr val="FFFFFF"/>
+                </a:solidFill>
+                <a:latin typeface="Open Sans"/>
+              </a:rPr>
+              <a:t>BUILD</a:t>
+            </a:r>
+          </a:p>
+        </p:txBody>
+      </p:sp>
+      <p:sp>
+        <p:nvSpPr>
+          <p:cNvPr id="33" name="TextBox 32"/>
+          <p:cNvSpPr txBox="1"/>
+          <p:nvPr/>
+        </p:nvSpPr>
+        <p:spPr>
+          <a:xfrm>
+            <a:off x="4617720" y="4315968"/>
+            <a:ext cx="7040880" cy="548640"/>
           </a:xfrm>
           <a:prstGeom prst="rect">
             <a:avLst/>
@@ -17105,244 +15685,30 @@
                 </a:solidFill>
                 <a:latin typeface="Open Sans"/>
               </a:rPr>
-              <a:t>The member</a:t>
-            </a:r>
-          </a:p>
-        </p:txBody>
-      </p:sp>
-      <p:sp>
-        <p:nvSpPr>
-          <p:cNvPr id="16" name="TextBox 15"/>
-          <p:cNvSpPr txBox="1"/>
-          <p:nvPr/>
-        </p:nvSpPr>
-        <p:spPr>
-          <a:xfrm>
-            <a:off x="685800" y="4526279"/>
-            <a:ext cx="1371600" cy="201168"/>
-          </a:xfrm>
-          <a:prstGeom prst="rect">
-            <a:avLst/>
-          </a:prstGeom>
-          <a:noFill/>
-        </p:spPr>
-        <p:txBody>
-          <a:bodyPr wrap="square" anchor="t" lIns="0" rIns="0" tIns="0" bIns="0">
-            <a:spAutoFit/>
-          </a:bodyPr>
-          <a:lstStyle/>
-          <a:p>
-            <a:pPr algn="l"/>
-            <a:r>
-              <a:rPr sz="900" b="1">
-                <a:solidFill>
-                  <a:srgbClr val="2863C5"/>
-                </a:solidFill>
-                <a:latin typeface="Open Sans"/>
-              </a:rPr>
-              <a:t>How</a:t>
-            </a:r>
-          </a:p>
-        </p:txBody>
-      </p:sp>
-      <p:sp>
-        <p:nvSpPr>
-          <p:cNvPr id="17" name="TextBox 16"/>
-          <p:cNvSpPr txBox="1"/>
-          <p:nvPr/>
-        </p:nvSpPr>
-        <p:spPr>
-          <a:xfrm>
-            <a:off x="685800" y="4745736"/>
-            <a:ext cx="3200400" cy="457200"/>
-          </a:xfrm>
-          <a:prstGeom prst="rect">
-            <a:avLst/>
-          </a:prstGeom>
-          <a:noFill/>
-        </p:spPr>
-        <p:txBody>
-          <a:bodyPr wrap="square" anchor="t" lIns="0" rIns="0" tIns="0" bIns="0">
-            <a:spAutoFit/>
-          </a:bodyPr>
-          <a:lstStyle/>
-          <a:p>
-            <a:pPr algn="l"/>
-            <a:r>
-              <a:rPr sz="1000" b="0">
-                <a:solidFill>
-                  <a:srgbClr val="334155"/>
-                </a:solidFill>
-                <a:latin typeface="Open Sans"/>
-              </a:rPr>
-              <a:t>We prep the packet · user submits via state portal</a:t>
-            </a:r>
-          </a:p>
-        </p:txBody>
-      </p:sp>
-      <p:sp>
-        <p:nvSpPr>
-          <p:cNvPr id="18" name="TextBox 17"/>
-          <p:cNvSpPr txBox="1"/>
-          <p:nvPr/>
-        </p:nvSpPr>
-        <p:spPr>
-          <a:xfrm>
-            <a:off x="685800" y="5074919"/>
-            <a:ext cx="1371600" cy="201168"/>
-          </a:xfrm>
-          <a:prstGeom prst="rect">
-            <a:avLst/>
-          </a:prstGeom>
-          <a:noFill/>
-        </p:spPr>
-        <p:txBody>
-          <a:bodyPr wrap="square" anchor="t" lIns="0" rIns="0" tIns="0" bIns="0">
-            <a:spAutoFit/>
-          </a:bodyPr>
-          <a:lstStyle/>
-          <a:p>
-            <a:pPr algn="l"/>
-            <a:r>
-              <a:rPr sz="900" b="1">
-                <a:solidFill>
-                  <a:srgbClr val="2863C5"/>
-                </a:solidFill>
-                <a:latin typeface="Open Sans"/>
-              </a:rPr>
-              <a:t>We track</a:t>
-            </a:r>
-          </a:p>
-        </p:txBody>
-      </p:sp>
-      <p:sp>
-        <p:nvSpPr>
-          <p:cNvPr id="19" name="TextBox 18"/>
-          <p:cNvSpPr txBox="1"/>
-          <p:nvPr/>
-        </p:nvSpPr>
-        <p:spPr>
-          <a:xfrm>
-            <a:off x="685800" y="5294375"/>
-            <a:ext cx="3200400" cy="457200"/>
-          </a:xfrm>
-          <a:prstGeom prst="rect">
-            <a:avLst/>
-          </a:prstGeom>
-          <a:noFill/>
-        </p:spPr>
-        <p:txBody>
-          <a:bodyPr wrap="square" anchor="t" lIns="0" rIns="0" tIns="0" bIns="0">
-            <a:spAutoFit/>
-          </a:bodyPr>
-          <a:lstStyle/>
-          <a:p>
-            <a:pPr algn="l"/>
-            <a:r>
-              <a:rPr sz="1000" b="0">
-                <a:solidFill>
-                  <a:srgbClr val="334155"/>
-                </a:solidFill>
-                <a:latin typeface="Open Sans"/>
-              </a:rPr>
-              <a:t>Claim ID + status entered by member or updated manually until state APIs exist</a:t>
-            </a:r>
-          </a:p>
-        </p:txBody>
-      </p:sp>
-      <p:sp>
-        <p:nvSpPr>
-          <p:cNvPr id="20" name="TextBox 19"/>
-          <p:cNvSpPr txBox="1"/>
-          <p:nvPr/>
-        </p:nvSpPr>
-        <p:spPr>
-          <a:xfrm>
-            <a:off x="685800" y="5623559"/>
-            <a:ext cx="1371600" cy="201168"/>
-          </a:xfrm>
-          <a:prstGeom prst="rect">
-            <a:avLst/>
-          </a:prstGeom>
-          <a:noFill/>
-        </p:spPr>
-        <p:txBody>
-          <a:bodyPr wrap="square" anchor="t" lIns="0" rIns="0" tIns="0" bIns="0">
-            <a:spAutoFit/>
-          </a:bodyPr>
-          <a:lstStyle/>
-          <a:p>
-            <a:pPr algn="l"/>
-            <a:r>
-              <a:rPr sz="900" b="1">
-                <a:solidFill>
-                  <a:srgbClr val="2863C5"/>
-                </a:solidFill>
-                <a:latin typeface="Open Sans"/>
-              </a:rPr>
-              <a:t>Status</a:t>
-            </a:r>
-          </a:p>
-        </p:txBody>
-      </p:sp>
-      <p:sp>
-        <p:nvSpPr>
-          <p:cNvPr id="21" name="TextBox 20"/>
-          <p:cNvSpPr txBox="1"/>
-          <p:nvPr/>
-        </p:nvSpPr>
-        <p:spPr>
-          <a:xfrm>
-            <a:off x="685800" y="5843015"/>
-            <a:ext cx="3200400" cy="457200"/>
-          </a:xfrm>
-          <a:prstGeom prst="rect">
-            <a:avLst/>
-          </a:prstGeom>
-          <a:noFill/>
-        </p:spPr>
-        <p:txBody>
-          <a:bodyPr wrap="square" anchor="t" lIns="0" rIns="0" tIns="0" bIns="0">
-            <a:spAutoFit/>
-          </a:bodyPr>
-          <a:lstStyle/>
-          <a:p>
-            <a:pPr algn="l"/>
-            <a:r>
-              <a:rPr sz="1000" b="0">
-                <a:solidFill>
-                  <a:srgbClr val="334155"/>
-                </a:solidFill>
-                <a:latin typeface="Open Sans"/>
-              </a:rPr>
-              <a:t>Ships Sprint 1 · every state with online filing</a:t>
-            </a:r>
-          </a:p>
-        </p:txBody>
-      </p:sp>
-      <p:sp>
-        <p:nvSpPr>
-          <p:cNvPr id="22" name="Rounded Rectangle 21"/>
+              <a:t>Already ingestible — public CSV in production. Legal sign-off needed on commercial caching + in-product redisplay terms before launch. Lowest-friction state.</a:t>
+            </a:r>
+          </a:p>
+        </p:txBody>
+      </p:sp>
+      <p:sp>
+        <p:nvSpPr>
+          <p:cNvPr id="34" name="Rectangle 33"/>
           <p:cNvSpPr/>
           <p:nvPr/>
         </p:nvSpPr>
         <p:spPr>
           <a:xfrm>
-            <a:off x="4251960" y="2606040"/>
-            <a:ext cx="3657600" cy="3657600"/>
-          </a:xfrm>
-          <a:prstGeom prst="roundRect">
-            <a:avLst>
-              <a:gd name="adj" fmla="val 3000"/>
-            </a:avLst>
+            <a:off x="457200" y="4928616"/>
+            <a:ext cx="11247120" cy="676656"/>
+          </a:xfrm>
+          <a:prstGeom prst="rect">
+            <a:avLst/>
           </a:prstGeom>
           <a:solidFill>
             <a:srgbClr val="FFFFFF"/>
           </a:solidFill>
-          <a:ln w="6350">
-            <a:solidFill>
-              <a:srgbClr val="E2E8F0"/>
-            </a:solidFill>
+          <a:ln>
+            <a:noFill/>
           </a:ln>
           <a:effectLst/>
         </p:spPr>
@@ -17370,17 +15736,124 @@
       </p:sp>
       <p:sp>
         <p:nvSpPr>
-          <p:cNvPr id="23" name="Rectangle 22"/>
+          <p:cNvPr id="35" name="TextBox 34"/>
+          <p:cNvSpPr txBox="1"/>
+          <p:nvPr/>
+        </p:nvSpPr>
+        <p:spPr>
+          <a:xfrm>
+            <a:off x="548640" y="5175504"/>
+            <a:ext cx="457200" cy="201168"/>
+          </a:xfrm>
+          <a:prstGeom prst="rect">
+            <a:avLst/>
+          </a:prstGeom>
+          <a:noFill/>
+        </p:spPr>
+        <p:txBody>
+          <a:bodyPr wrap="square" anchor="t" lIns="0" rIns="0" tIns="0" bIns="0">
+            <a:spAutoFit/>
+          </a:bodyPr>
+          <a:lstStyle/>
+          <a:p>
+            <a:pPr algn="l"/>
+            <a:r>
+              <a:rPr sz="1200" b="1">
+                <a:solidFill>
+                  <a:srgbClr val="64748B"/>
+                </a:solidFill>
+                <a:latin typeface="Open Sans"/>
+              </a:rPr>
+              <a:t>4</a:t>
+            </a:r>
+          </a:p>
+        </p:txBody>
+      </p:sp>
+      <p:sp>
+        <p:nvSpPr>
+          <p:cNvPr id="36" name="TextBox 35"/>
+          <p:cNvSpPr txBox="1"/>
+          <p:nvPr/>
+        </p:nvSpPr>
+        <p:spPr>
+          <a:xfrm>
+            <a:off x="1051560" y="5148072"/>
+            <a:ext cx="822960" cy="256032"/>
+          </a:xfrm>
+          <a:prstGeom prst="rect">
+            <a:avLst/>
+          </a:prstGeom>
+          <a:noFill/>
+        </p:spPr>
+        <p:txBody>
+          <a:bodyPr wrap="square" anchor="t" lIns="0" rIns="0" tIns="0" bIns="0">
+            <a:spAutoFit/>
+          </a:bodyPr>
+          <a:lstStyle/>
+          <a:p>
+            <a:pPr algn="l"/>
+            <a:r>
+              <a:rPr sz="1600" b="1">
+                <a:solidFill>
+                  <a:srgbClr val="0F172A"/>
+                </a:solidFill>
+                <a:latin typeface="Open Sans"/>
+              </a:rPr>
+              <a:t>GA</a:t>
+            </a:r>
+          </a:p>
+        </p:txBody>
+      </p:sp>
+      <p:sp>
+        <p:nvSpPr>
+          <p:cNvPr id="37" name="TextBox 36"/>
+          <p:cNvSpPr txBox="1"/>
+          <p:nvPr/>
+        </p:nvSpPr>
+        <p:spPr>
+          <a:xfrm>
+            <a:off x="1920240" y="5175504"/>
+            <a:ext cx="1463040" cy="201168"/>
+          </a:xfrm>
+          <a:prstGeom prst="rect">
+            <a:avLst/>
+          </a:prstGeom>
+          <a:noFill/>
+        </p:spPr>
+        <p:txBody>
+          <a:bodyPr wrap="square" anchor="t" lIns="0" rIns="0" tIns="0" bIns="0">
+            <a:spAutoFit/>
+          </a:bodyPr>
+          <a:lstStyle/>
+          <a:p>
+            <a:pPr algn="l"/>
+            <a:r>
+              <a:rPr sz="1300" b="1">
+                <a:solidFill>
+                  <a:srgbClr val="0F172A"/>
+                </a:solidFill>
+                <a:latin typeface="Open Sans"/>
+              </a:rPr>
+              <a:t>18,837</a:t>
+            </a:r>
+          </a:p>
+        </p:txBody>
+      </p:sp>
+      <p:sp>
+        <p:nvSpPr>
+          <p:cNvPr id="38" name="Rounded Rectangle 37"/>
           <p:cNvSpPr/>
           <p:nvPr/>
         </p:nvSpPr>
         <p:spPr>
           <a:xfrm>
-            <a:off x="4251960" y="2606040"/>
-            <a:ext cx="3657600" cy="164592"/>
-          </a:xfrm>
-          <a:prstGeom prst="rect">
-            <a:avLst/>
+            <a:off x="3520440" y="5148072"/>
+            <a:ext cx="960120" cy="256032"/>
+          </a:xfrm>
+          <a:prstGeom prst="roundRect">
+            <a:avLst>
+              <a:gd name="adj" fmla="val 50000"/>
+            </a:avLst>
           </a:prstGeom>
           <a:solidFill>
             <a:srgbClr val="FFB352"/>
@@ -17388,7 +15861,6 @@
           <a:ln>
             <a:noFill/>
           </a:ln>
-          <a:effectLst/>
         </p:spPr>
         <p:style>
           <a:lnRef idx="1">
@@ -17405,128 +15877,32 @@
           </a:fontRef>
         </p:style>
         <p:txBody>
-          <a:bodyPr rtlCol="0" anchor="ctr"/>
+          <a:bodyPr rtlCol="0" anchor="ctr" lIns="45720" rIns="45720" tIns="18288" bIns="18288"/>
           <a:lstStyle/>
           <a:p>
             <a:pPr algn="ctr"/>
-          </a:p>
-        </p:txBody>
-      </p:sp>
-      <p:sp>
-        <p:nvSpPr>
-          <p:cNvPr id="24" name="TextBox 23"/>
-          <p:cNvSpPr txBox="1"/>
-          <p:nvPr/>
-        </p:nvSpPr>
-        <p:spPr>
-          <a:xfrm>
-            <a:off x="4480560" y="2898648"/>
-            <a:ext cx="3200400" cy="329184"/>
-          </a:xfrm>
-          <a:prstGeom prst="rect">
-            <a:avLst/>
-          </a:prstGeom>
-          <a:noFill/>
-        </p:spPr>
-        <p:txBody>
-          <a:bodyPr wrap="square" anchor="t" lIns="0" rIns="0" tIns="0" bIns="0">
-            <a:spAutoFit/>
-          </a:bodyPr>
-          <a:lstStyle/>
-          <a:p>
-            <a:pPr algn="l"/>
-            <a:r>
-              <a:rPr sz="1100" b="1">
-                <a:solidFill>
-                  <a:srgbClr val="FFB352"/>
-                </a:solidFill>
-                <a:latin typeface="Open Sans"/>
-              </a:rPr>
-              <a:t>v1 · FALLBACK</a:t>
-            </a:r>
-          </a:p>
-        </p:txBody>
-      </p:sp>
-      <p:sp>
-        <p:nvSpPr>
-          <p:cNvPr id="25" name="TextBox 24"/>
-          <p:cNvSpPr txBox="1"/>
-          <p:nvPr/>
-        </p:nvSpPr>
-        <p:spPr>
-          <a:xfrm>
-            <a:off x="4480560" y="3246120"/>
-            <a:ext cx="3200400" cy="502920"/>
-          </a:xfrm>
-          <a:prstGeom prst="rect">
-            <a:avLst/>
-          </a:prstGeom>
-          <a:noFill/>
-        </p:spPr>
-        <p:txBody>
-          <a:bodyPr wrap="square" anchor="t" lIns="0" rIns="0" tIns="0" bIns="0">
-            <a:spAutoFit/>
-          </a:bodyPr>
-          <a:lstStyle/>
-          <a:p>
-            <a:pPr algn="l"/>
-            <a:r>
-              <a:rPr sz="1400" b="1">
-                <a:solidFill>
-                  <a:srgbClr val="0F172A"/>
-                </a:solidFill>
-                <a:latin typeface="Open Sans"/>
-              </a:rPr>
-              <a:t>Mail packet via ActionLetters</a:t>
-            </a:r>
-          </a:p>
-        </p:txBody>
-      </p:sp>
-      <p:sp>
-        <p:nvSpPr>
-          <p:cNvPr id="26" name="TextBox 25"/>
-          <p:cNvSpPr txBox="1"/>
-          <p:nvPr/>
-        </p:nvSpPr>
-        <p:spPr>
-          <a:xfrm>
-            <a:off x="4480560" y="3977639"/>
-            <a:ext cx="1371600" cy="201168"/>
-          </a:xfrm>
-          <a:prstGeom prst="rect">
-            <a:avLst/>
-          </a:prstGeom>
-          <a:noFill/>
-        </p:spPr>
-        <p:txBody>
-          <a:bodyPr wrap="square" anchor="t" lIns="0" rIns="0" tIns="0" bIns="0">
-            <a:spAutoFit/>
-          </a:bodyPr>
-          <a:lstStyle/>
-          <a:p>
-            <a:pPr algn="l"/>
             <a:r>
               <a:rPr sz="900" b="1">
                 <a:solidFill>
-                  <a:srgbClr val="2863C5"/>
-                </a:solidFill>
-                <a:latin typeface="Open Sans"/>
-              </a:rPr>
-              <a:t>Who submits</a:t>
-            </a:r>
-          </a:p>
-        </p:txBody>
-      </p:sp>
-      <p:sp>
-        <p:nvSpPr>
-          <p:cNvPr id="27" name="TextBox 26"/>
-          <p:cNvSpPr txBox="1"/>
-          <p:nvPr/>
-        </p:nvSpPr>
-        <p:spPr>
-          <a:xfrm>
-            <a:off x="4480560" y="4197096"/>
-            <a:ext cx="3200400" cy="457200"/>
+                  <a:srgbClr val="FFFFFF"/>
+                </a:solidFill>
+                <a:latin typeface="Open Sans"/>
+              </a:rPr>
+              <a:t>REQUEST</a:t>
+            </a:r>
+          </a:p>
+        </p:txBody>
+      </p:sp>
+      <p:sp>
+        <p:nvSpPr>
+          <p:cNvPr id="39" name="TextBox 38"/>
+          <p:cNvSpPr txBox="1"/>
+          <p:nvPr/>
+        </p:nvSpPr>
+        <p:spPr>
+          <a:xfrm>
+            <a:off x="4617720" y="4992624"/>
+            <a:ext cx="7040880" cy="548640"/>
           </a:xfrm>
           <a:prstGeom prst="rect">
             <a:avLst/>
@@ -17547,244 +15923,30 @@
                 </a:solidFill>
                 <a:latin typeface="Open Sans"/>
               </a:rPr>
-              <a:t>Member; we generate the packet + mailing instructions</a:t>
-            </a:r>
-          </a:p>
-        </p:txBody>
-      </p:sp>
-      <p:sp>
-        <p:nvSpPr>
-          <p:cNvPr id="28" name="TextBox 27"/>
-          <p:cNvSpPr txBox="1"/>
-          <p:nvPr/>
-        </p:nvSpPr>
-        <p:spPr>
-          <a:xfrm>
-            <a:off x="4480560" y="4526279"/>
-            <a:ext cx="1371600" cy="201168"/>
-          </a:xfrm>
-          <a:prstGeom prst="rect">
-            <a:avLst/>
-          </a:prstGeom>
-          <a:noFill/>
-        </p:spPr>
-        <p:txBody>
-          <a:bodyPr wrap="square" anchor="t" lIns="0" rIns="0" tIns="0" bIns="0">
-            <a:spAutoFit/>
-          </a:bodyPr>
-          <a:lstStyle/>
-          <a:p>
-            <a:pPr algn="l"/>
-            <a:r>
-              <a:rPr sz="900" b="1">
-                <a:solidFill>
-                  <a:srgbClr val="2863C5"/>
-                </a:solidFill>
-                <a:latin typeface="Open Sans"/>
-              </a:rPr>
-              <a:t>How</a:t>
-            </a:r>
-          </a:p>
-        </p:txBody>
-      </p:sp>
-      <p:sp>
-        <p:nvSpPr>
-          <p:cNvPr id="29" name="TextBox 28"/>
-          <p:cNvSpPr txBox="1"/>
-          <p:nvPr/>
-        </p:nvSpPr>
-        <p:spPr>
-          <a:xfrm>
-            <a:off x="4480560" y="4745736"/>
-            <a:ext cx="3200400" cy="457200"/>
-          </a:xfrm>
-          <a:prstGeom prst="rect">
-            <a:avLst/>
-          </a:prstGeom>
-          <a:noFill/>
-        </p:spPr>
-        <p:txBody>
-          <a:bodyPr wrap="square" anchor="t" lIns="0" rIns="0" tIns="0" bIns="0">
-            <a:spAutoFit/>
-          </a:bodyPr>
-          <a:lstStyle/>
-          <a:p>
-            <a:pPr algn="l"/>
-            <a:r>
-              <a:rPr sz="1000" b="0">
-                <a:solidFill>
-                  <a:srgbClr val="334155"/>
-                </a:solidFill>
-                <a:latin typeface="Open Sans"/>
-              </a:rPr>
-              <a:t>If ActionLetters mails directly, legal must confirm it isn't representative filing</a:t>
-            </a:r>
-          </a:p>
-        </p:txBody>
-      </p:sp>
-      <p:sp>
-        <p:nvSpPr>
-          <p:cNvPr id="30" name="TextBox 29"/>
-          <p:cNvSpPr txBox="1"/>
-          <p:nvPr/>
-        </p:nvSpPr>
-        <p:spPr>
-          <a:xfrm>
-            <a:off x="4480560" y="5074919"/>
-            <a:ext cx="1371600" cy="201168"/>
-          </a:xfrm>
-          <a:prstGeom prst="rect">
-            <a:avLst/>
-          </a:prstGeom>
-          <a:noFill/>
-        </p:spPr>
-        <p:txBody>
-          <a:bodyPr wrap="square" anchor="t" lIns="0" rIns="0" tIns="0" bIns="0">
-            <a:spAutoFit/>
-          </a:bodyPr>
-          <a:lstStyle/>
-          <a:p>
-            <a:pPr algn="l"/>
-            <a:r>
-              <a:rPr sz="900" b="1">
-                <a:solidFill>
-                  <a:srgbClr val="2863C5"/>
-                </a:solidFill>
-                <a:latin typeface="Open Sans"/>
-              </a:rPr>
-              <a:t>When</a:t>
-            </a:r>
-          </a:p>
-        </p:txBody>
-      </p:sp>
-      <p:sp>
-        <p:nvSpPr>
-          <p:cNvPr id="31" name="TextBox 30"/>
-          <p:cNvSpPr txBox="1"/>
-          <p:nvPr/>
-        </p:nvSpPr>
-        <p:spPr>
-          <a:xfrm>
-            <a:off x="4480560" y="5294375"/>
-            <a:ext cx="3200400" cy="457200"/>
-          </a:xfrm>
-          <a:prstGeom prst="rect">
-            <a:avLst/>
-          </a:prstGeom>
-          <a:noFill/>
-        </p:spPr>
-        <p:txBody>
-          <a:bodyPr wrap="square" anchor="t" lIns="0" rIns="0" tIns="0" bIns="0">
-            <a:spAutoFit/>
-          </a:bodyPr>
-          <a:lstStyle/>
-          <a:p>
-            <a:pPr algn="l"/>
-            <a:r>
-              <a:rPr sz="1000" b="0">
-                <a:solidFill>
-                  <a:srgbClr val="334155"/>
-                </a:solidFill>
-                <a:latin typeface="Open Sans"/>
-              </a:rPr>
-              <a:t>States requiring notarized physical paperwork</a:t>
-            </a:r>
-          </a:p>
-        </p:txBody>
-      </p:sp>
-      <p:sp>
-        <p:nvSpPr>
-          <p:cNvPr id="32" name="TextBox 31"/>
-          <p:cNvSpPr txBox="1"/>
-          <p:nvPr/>
-        </p:nvSpPr>
-        <p:spPr>
-          <a:xfrm>
-            <a:off x="4480560" y="5623559"/>
-            <a:ext cx="1371600" cy="201168"/>
-          </a:xfrm>
-          <a:prstGeom prst="rect">
-            <a:avLst/>
-          </a:prstGeom>
-          <a:noFill/>
-        </p:spPr>
-        <p:txBody>
-          <a:bodyPr wrap="square" anchor="t" lIns="0" rIns="0" tIns="0" bIns="0">
-            <a:spAutoFit/>
-          </a:bodyPr>
-          <a:lstStyle/>
-          <a:p>
-            <a:pPr algn="l"/>
-            <a:r>
-              <a:rPr sz="900" b="1">
-                <a:solidFill>
-                  <a:srgbClr val="2863C5"/>
-                </a:solidFill>
-                <a:latin typeface="Open Sans"/>
-              </a:rPr>
-              <a:t>Status</a:t>
-            </a:r>
-          </a:p>
-        </p:txBody>
-      </p:sp>
-      <p:sp>
-        <p:nvSpPr>
-          <p:cNvPr id="33" name="TextBox 32"/>
-          <p:cNvSpPr txBox="1"/>
-          <p:nvPr/>
-        </p:nvSpPr>
-        <p:spPr>
-          <a:xfrm>
-            <a:off x="4480560" y="5843015"/>
-            <a:ext cx="3200400" cy="457200"/>
-          </a:xfrm>
-          <a:prstGeom prst="rect">
-            <a:avLst/>
-          </a:prstGeom>
-          <a:noFill/>
-        </p:spPr>
-        <p:txBody>
-          <a:bodyPr wrap="square" anchor="t" lIns="0" rIns="0" tIns="0" bIns="0">
-            <a:spAutoFit/>
-          </a:bodyPr>
-          <a:lstStyle/>
-          <a:p>
-            <a:pPr algn="l"/>
-            <a:r>
-              <a:rPr sz="1000" b="0">
-                <a:solidFill>
-                  <a:srgbClr val="334155"/>
-                </a:solidFill>
-                <a:latin typeface="Open Sans"/>
-              </a:rPr>
-              <a:t>Available now · same rail as credit-dispute mailers</a:t>
-            </a:r>
-          </a:p>
-        </p:txBody>
-      </p:sp>
-      <p:sp>
-        <p:nvSpPr>
-          <p:cNvPr id="34" name="Rounded Rectangle 33"/>
+              <a:t>Begin Claimant Designated Representative registration (background checks + bond). Confirm reuse and automation rights for the weekly delimited file. CDR fee cap is 30% — we charge $0.</a:t>
+            </a:r>
+          </a:p>
+        </p:txBody>
+      </p:sp>
+      <p:sp>
+        <p:nvSpPr>
+          <p:cNvPr id="40" name="Rectangle 39"/>
           <p:cNvSpPr/>
           <p:nvPr/>
         </p:nvSpPr>
         <p:spPr>
           <a:xfrm>
-            <a:off x="8046720" y="2606040"/>
-            <a:ext cx="3657600" cy="3657600"/>
-          </a:xfrm>
-          <a:prstGeom prst="roundRect">
-            <a:avLst>
-              <a:gd name="adj" fmla="val 3000"/>
-            </a:avLst>
+            <a:off x="457200" y="5605272"/>
+            <a:ext cx="11247120" cy="676656"/>
+          </a:xfrm>
+          <a:prstGeom prst="rect">
+            <a:avLst/>
           </a:prstGeom>
           <a:solidFill>
-            <a:srgbClr val="FFFFFF"/>
+            <a:srgbClr val="F8FAFC"/>
           </a:solidFill>
-          <a:ln w="6350">
-            <a:solidFill>
-              <a:srgbClr val="E2E8F0"/>
-            </a:solidFill>
+          <a:ln>
+            <a:noFill/>
           </a:ln>
           <a:effectLst/>
         </p:spPr>
@@ -17812,17 +15974,213 @@
       </p:sp>
       <p:sp>
         <p:nvSpPr>
-          <p:cNvPr id="35" name="Rectangle 34"/>
+          <p:cNvPr id="41" name="TextBox 40"/>
+          <p:cNvSpPr txBox="1"/>
+          <p:nvPr/>
+        </p:nvSpPr>
+        <p:spPr>
+          <a:xfrm>
+            <a:off x="548640" y="5852160"/>
+            <a:ext cx="457200" cy="201168"/>
+          </a:xfrm>
+          <a:prstGeom prst="rect">
+            <a:avLst/>
+          </a:prstGeom>
+          <a:noFill/>
+        </p:spPr>
+        <p:txBody>
+          <a:bodyPr wrap="square" anchor="t" lIns="0" rIns="0" tIns="0" bIns="0">
+            <a:spAutoFit/>
+          </a:bodyPr>
+          <a:lstStyle/>
+          <a:p>
+            <a:pPr algn="l"/>
+            <a:r>
+              <a:rPr sz="1200" b="1">
+                <a:solidFill>
+                  <a:srgbClr val="64748B"/>
+                </a:solidFill>
+                <a:latin typeface="Open Sans"/>
+              </a:rPr>
+              <a:t>5</a:t>
+            </a:r>
+          </a:p>
+        </p:txBody>
+      </p:sp>
+      <p:sp>
+        <p:nvSpPr>
+          <p:cNvPr id="42" name="TextBox 41"/>
+          <p:cNvSpPr txBox="1"/>
+          <p:nvPr/>
+        </p:nvSpPr>
+        <p:spPr>
+          <a:xfrm>
+            <a:off x="1051560" y="5824728"/>
+            <a:ext cx="822960" cy="256032"/>
+          </a:xfrm>
+          <a:prstGeom prst="rect">
+            <a:avLst/>
+          </a:prstGeom>
+          <a:noFill/>
+        </p:spPr>
+        <p:txBody>
+          <a:bodyPr wrap="square" anchor="t" lIns="0" rIns="0" tIns="0" bIns="0">
+            <a:spAutoFit/>
+          </a:bodyPr>
+          <a:lstStyle/>
+          <a:p>
+            <a:pPr algn="l"/>
+            <a:r>
+              <a:rPr sz="1600" b="1">
+                <a:solidFill>
+                  <a:srgbClr val="0F172A"/>
+                </a:solidFill>
+                <a:latin typeface="Open Sans"/>
+              </a:rPr>
+              <a:t>NY</a:t>
+            </a:r>
+          </a:p>
+        </p:txBody>
+      </p:sp>
+      <p:sp>
+        <p:nvSpPr>
+          <p:cNvPr id="43" name="TextBox 42"/>
+          <p:cNvSpPr txBox="1"/>
+          <p:nvPr/>
+        </p:nvSpPr>
+        <p:spPr>
+          <a:xfrm>
+            <a:off x="1920240" y="5852160"/>
+            <a:ext cx="1463040" cy="201168"/>
+          </a:xfrm>
+          <a:prstGeom prst="rect">
+            <a:avLst/>
+          </a:prstGeom>
+          <a:noFill/>
+        </p:spPr>
+        <p:txBody>
+          <a:bodyPr wrap="square" anchor="t" lIns="0" rIns="0" tIns="0" bIns="0">
+            <a:spAutoFit/>
+          </a:bodyPr>
+          <a:lstStyle/>
+          <a:p>
+            <a:pPr algn="l"/>
+            <a:r>
+              <a:rPr sz="1300" b="1">
+                <a:solidFill>
+                  <a:srgbClr val="0F172A"/>
+                </a:solidFill>
+                <a:latin typeface="Open Sans"/>
+              </a:rPr>
+              <a:t>15,001</a:t>
+            </a:r>
+          </a:p>
+        </p:txBody>
+      </p:sp>
+      <p:sp>
+        <p:nvSpPr>
+          <p:cNvPr id="44" name="Rounded Rectangle 43"/>
           <p:cNvSpPr/>
           <p:nvPr/>
         </p:nvSpPr>
         <p:spPr>
           <a:xfrm>
-            <a:off x="8046720" y="2606040"/>
-            <a:ext cx="3657600" cy="164592"/>
-          </a:xfrm>
-          <a:prstGeom prst="rect">
-            <a:avLst/>
+            <a:off x="3520440" y="5824728"/>
+            <a:ext cx="960120" cy="256032"/>
+          </a:xfrm>
+          <a:prstGeom prst="roundRect">
+            <a:avLst>
+              <a:gd name="adj" fmla="val 50000"/>
+            </a:avLst>
+          </a:prstGeom>
+          <a:solidFill>
+            <a:srgbClr val="FFB352"/>
+          </a:solidFill>
+          <a:ln>
+            <a:noFill/>
+          </a:ln>
+        </p:spPr>
+        <p:style>
+          <a:lnRef idx="1">
+            <a:schemeClr val="accent1"/>
+          </a:lnRef>
+          <a:fillRef idx="3">
+            <a:schemeClr val="accent1"/>
+          </a:fillRef>
+          <a:effectRef idx="2">
+            <a:schemeClr val="accent1"/>
+          </a:effectRef>
+          <a:fontRef idx="minor">
+            <a:schemeClr val="lt1"/>
+          </a:fontRef>
+        </p:style>
+        <p:txBody>
+          <a:bodyPr rtlCol="0" anchor="ctr" lIns="45720" rIns="45720" tIns="18288" bIns="18288"/>
+          <a:lstStyle/>
+          <a:p>
+            <a:pPr algn="ctr"/>
+            <a:r>
+              <a:rPr sz="900" b="1">
+                <a:solidFill>
+                  <a:srgbClr val="FFFFFF"/>
+                </a:solidFill>
+                <a:latin typeface="Open Sans"/>
+              </a:rPr>
+              <a:t>REQUEST</a:t>
+            </a:r>
+          </a:p>
+        </p:txBody>
+      </p:sp>
+      <p:sp>
+        <p:nvSpPr>
+          <p:cNvPr id="45" name="TextBox 44"/>
+          <p:cNvSpPr txBox="1"/>
+          <p:nvPr/>
+        </p:nvSpPr>
+        <p:spPr>
+          <a:xfrm>
+            <a:off x="4617720" y="5669280"/>
+            <a:ext cx="7040880" cy="548640"/>
+          </a:xfrm>
+          <a:prstGeom prst="rect">
+            <a:avLst/>
+          </a:prstGeom>
+          <a:noFill/>
+        </p:spPr>
+        <p:txBody>
+          <a:bodyPr wrap="square" anchor="t" lIns="0" rIns="0" tIns="0" bIns="0">
+            <a:spAutoFit/>
+          </a:bodyPr>
+          <a:lstStyle/>
+          <a:p>
+            <a:pPr algn="l"/>
+            <a:r>
+              <a:rPr sz="1000" b="0">
+                <a:solidFill>
+                  <a:srgbClr val="334155"/>
+                </a:solidFill>
+                <a:latin typeface="Open Sans"/>
+              </a:rPr>
+              <a:t>Submit owner-name file request to OSC (secure-FTP TXT, quarterly). File excludes amounts and tax IDs. Get written caching and redisplay approval for matching against members.</a:t>
+            </a:r>
+          </a:p>
+        </p:txBody>
+      </p:sp>
+      <p:sp>
+        <p:nvSpPr>
+          <p:cNvPr id="46" name="Rounded Rectangle 45"/>
+          <p:cNvSpPr/>
+          <p:nvPr/>
+        </p:nvSpPr>
+        <p:spPr>
+          <a:xfrm>
+            <a:off x="457200" y="6400800"/>
+            <a:ext cx="11247120" cy="411480"/>
+          </a:xfrm>
+          <a:prstGeom prst="roundRect">
+            <a:avLst>
+              <a:gd name="adj" fmla="val 7000"/>
+            </a:avLst>
           </a:prstGeom>
           <a:solidFill>
             <a:srgbClr val="2863C5"/>
@@ -17856,402 +16214,6 @@
       </p:sp>
       <p:sp>
         <p:nvSpPr>
-          <p:cNvPr id="36" name="TextBox 35"/>
-          <p:cNvSpPr txBox="1"/>
-          <p:nvPr/>
-        </p:nvSpPr>
-        <p:spPr>
-          <a:xfrm>
-            <a:off x="8275320" y="2898648"/>
-            <a:ext cx="3200400" cy="329184"/>
-          </a:xfrm>
-          <a:prstGeom prst="rect">
-            <a:avLst/>
-          </a:prstGeom>
-          <a:noFill/>
-        </p:spPr>
-        <p:txBody>
-          <a:bodyPr wrap="square" anchor="t" lIns="0" rIns="0" tIns="0" bIns="0">
-            <a:spAutoFit/>
-          </a:bodyPr>
-          <a:lstStyle/>
-          <a:p>
-            <a:pPr algn="l"/>
-            <a:r>
-              <a:rPr sz="1100" b="1">
-                <a:solidFill>
-                  <a:srgbClr val="2863C5"/>
-                </a:solidFill>
-                <a:latin typeface="Open Sans"/>
-              </a:rPr>
-              <a:t>v2 · UNLOCK</a:t>
-            </a:r>
-          </a:p>
-        </p:txBody>
-      </p:sp>
-      <p:sp>
-        <p:nvSpPr>
-          <p:cNvPr id="37" name="TextBox 36"/>
-          <p:cNvSpPr txBox="1"/>
-          <p:nvPr/>
-        </p:nvSpPr>
-        <p:spPr>
-          <a:xfrm>
-            <a:off x="8275320" y="3246120"/>
-            <a:ext cx="3200400" cy="502920"/>
-          </a:xfrm>
-          <a:prstGeom prst="rect">
-            <a:avLst/>
-          </a:prstGeom>
-          <a:noFill/>
-        </p:spPr>
-        <p:txBody>
-          <a:bodyPr wrap="square" anchor="t" lIns="0" rIns="0" tIns="0" bIns="0">
-            <a:spAutoFit/>
-          </a:bodyPr>
-          <a:lstStyle/>
-          <a:p>
-            <a:pPr algn="l"/>
-            <a:r>
-              <a:rPr sz="1400" b="1">
-                <a:solidFill>
-                  <a:srgbClr val="0F172A"/>
-                </a:solidFill>
-                <a:latin typeface="Open Sans"/>
-              </a:rPr>
-              <a:t>Registered representative</a:t>
-            </a:r>
-          </a:p>
-        </p:txBody>
-      </p:sp>
-      <p:sp>
-        <p:nvSpPr>
-          <p:cNvPr id="38" name="TextBox 37"/>
-          <p:cNvSpPr txBox="1"/>
-          <p:nvPr/>
-        </p:nvSpPr>
-        <p:spPr>
-          <a:xfrm>
-            <a:off x="8275320" y="3977639"/>
-            <a:ext cx="1371600" cy="201168"/>
-          </a:xfrm>
-          <a:prstGeom prst="rect">
-            <a:avLst/>
-          </a:prstGeom>
-          <a:noFill/>
-        </p:spPr>
-        <p:txBody>
-          <a:bodyPr wrap="square" anchor="t" lIns="0" rIns="0" tIns="0" bIns="0">
-            <a:spAutoFit/>
-          </a:bodyPr>
-          <a:lstStyle/>
-          <a:p>
-            <a:pPr algn="l"/>
-            <a:r>
-              <a:rPr sz="900" b="1">
-                <a:solidFill>
-                  <a:srgbClr val="2863C5"/>
-                </a:solidFill>
-                <a:latin typeface="Open Sans"/>
-              </a:rPr>
-              <a:t>Who submits</a:t>
-            </a:r>
-          </a:p>
-        </p:txBody>
-      </p:sp>
-      <p:sp>
-        <p:nvSpPr>
-          <p:cNvPr id="39" name="TextBox 38"/>
-          <p:cNvSpPr txBox="1"/>
-          <p:nvPr/>
-        </p:nvSpPr>
-        <p:spPr>
-          <a:xfrm>
-            <a:off x="8275320" y="4197096"/>
-            <a:ext cx="3200400" cy="457200"/>
-          </a:xfrm>
-          <a:prstGeom prst="rect">
-            <a:avLst/>
-          </a:prstGeom>
-          <a:noFill/>
-        </p:spPr>
-        <p:txBody>
-          <a:bodyPr wrap="square" anchor="t" lIns="0" rIns="0" tIns="0" bIns="0">
-            <a:spAutoFit/>
-          </a:bodyPr>
-          <a:lstStyle/>
-          <a:p>
-            <a:pPr algn="l"/>
-            <a:r>
-              <a:rPr sz="1000" b="0">
-                <a:solidFill>
-                  <a:srgbClr val="334155"/>
-                </a:solidFill>
-                <a:latin typeface="Open Sans"/>
-              </a:rPr>
-              <a:t>SmartCredit, on the member's behalf</a:t>
-            </a:r>
-          </a:p>
-        </p:txBody>
-      </p:sp>
-      <p:sp>
-        <p:nvSpPr>
-          <p:cNvPr id="40" name="TextBox 39"/>
-          <p:cNvSpPr txBox="1"/>
-          <p:nvPr/>
-        </p:nvSpPr>
-        <p:spPr>
-          <a:xfrm>
-            <a:off x="8275320" y="4526279"/>
-            <a:ext cx="1371600" cy="201168"/>
-          </a:xfrm>
-          <a:prstGeom prst="rect">
-            <a:avLst/>
-          </a:prstGeom>
-          <a:noFill/>
-        </p:spPr>
-        <p:txBody>
-          <a:bodyPr wrap="square" anchor="t" lIns="0" rIns="0" tIns="0" bIns="0">
-            <a:spAutoFit/>
-          </a:bodyPr>
-          <a:lstStyle/>
-          <a:p>
-            <a:pPr algn="l"/>
-            <a:r>
-              <a:rPr sz="900" b="1">
-                <a:solidFill>
-                  <a:srgbClr val="2863C5"/>
-                </a:solidFill>
-                <a:latin typeface="Open Sans"/>
-              </a:rPr>
-              <a:t>Where</a:t>
-            </a:r>
-          </a:p>
-        </p:txBody>
-      </p:sp>
-      <p:sp>
-        <p:nvSpPr>
-          <p:cNvPr id="41" name="TextBox 40"/>
-          <p:cNvSpPr txBox="1"/>
-          <p:nvPr/>
-        </p:nvSpPr>
-        <p:spPr>
-          <a:xfrm>
-            <a:off x="8275320" y="4745736"/>
-            <a:ext cx="3200400" cy="457200"/>
-          </a:xfrm>
-          <a:prstGeom prst="rect">
-            <a:avLst/>
-          </a:prstGeom>
-          <a:noFill/>
-        </p:spPr>
-        <p:txBody>
-          <a:bodyPr wrap="square" anchor="t" lIns="0" rIns="0" tIns="0" bIns="0">
-            <a:spAutoFit/>
-          </a:bodyPr>
-          <a:lstStyle/>
-          <a:p>
-            <a:pPr algn="l"/>
-            <a:r>
-              <a:rPr sz="1000" b="0">
-                <a:solidFill>
-                  <a:srgbClr val="334155"/>
-                </a:solidFill>
-                <a:latin typeface="Open Sans"/>
-              </a:rPr>
-              <a:t>GA (CDR) · FL (Ch. 717) · OH (Finder) · MI (locator)</a:t>
-            </a:r>
-          </a:p>
-        </p:txBody>
-      </p:sp>
-      <p:sp>
-        <p:nvSpPr>
-          <p:cNvPr id="42" name="TextBox 41"/>
-          <p:cNvSpPr txBox="1"/>
-          <p:nvPr/>
-        </p:nvSpPr>
-        <p:spPr>
-          <a:xfrm>
-            <a:off x="8275320" y="5074919"/>
-            <a:ext cx="1371600" cy="201168"/>
-          </a:xfrm>
-          <a:prstGeom prst="rect">
-            <a:avLst/>
-          </a:prstGeom>
-          <a:noFill/>
-        </p:spPr>
-        <p:txBody>
-          <a:bodyPr wrap="square" anchor="t" lIns="0" rIns="0" tIns="0" bIns="0">
-            <a:spAutoFit/>
-          </a:bodyPr>
-          <a:lstStyle/>
-          <a:p>
-            <a:pPr algn="l"/>
-            <a:r>
-              <a:rPr sz="900" b="1">
-                <a:solidFill>
-                  <a:srgbClr val="2863C5"/>
-                </a:solidFill>
-                <a:latin typeface="Open Sans"/>
-              </a:rPr>
-              <a:t>Fee</a:t>
-            </a:r>
-          </a:p>
-        </p:txBody>
-      </p:sp>
-      <p:sp>
-        <p:nvSpPr>
-          <p:cNvPr id="43" name="TextBox 42"/>
-          <p:cNvSpPr txBox="1"/>
-          <p:nvPr/>
-        </p:nvSpPr>
-        <p:spPr>
-          <a:xfrm>
-            <a:off x="8275320" y="5294375"/>
-            <a:ext cx="3200400" cy="457200"/>
-          </a:xfrm>
-          <a:prstGeom prst="rect">
-            <a:avLst/>
-          </a:prstGeom>
-          <a:noFill/>
-        </p:spPr>
-        <p:txBody>
-          <a:bodyPr wrap="square" anchor="t" lIns="0" rIns="0" tIns="0" bIns="0">
-            <a:spAutoFit/>
-          </a:bodyPr>
-          <a:lstStyle/>
-          <a:p>
-            <a:pPr algn="l"/>
-            <a:r>
-              <a:rPr sz="1000" b="0">
-                <a:solidFill>
-                  <a:srgbClr val="334155"/>
-                </a:solidFill>
-                <a:latin typeface="Open Sans"/>
-              </a:rPr>
-              <a:t>GA caps reps at 30% · we charge $0</a:t>
-            </a:r>
-          </a:p>
-        </p:txBody>
-      </p:sp>
-      <p:sp>
-        <p:nvSpPr>
-          <p:cNvPr id="44" name="TextBox 43"/>
-          <p:cNvSpPr txBox="1"/>
-          <p:nvPr/>
-        </p:nvSpPr>
-        <p:spPr>
-          <a:xfrm>
-            <a:off x="8275320" y="5623559"/>
-            <a:ext cx="1371600" cy="201168"/>
-          </a:xfrm>
-          <a:prstGeom prst="rect">
-            <a:avLst/>
-          </a:prstGeom>
-          <a:noFill/>
-        </p:spPr>
-        <p:txBody>
-          <a:bodyPr wrap="square" anchor="t" lIns="0" rIns="0" tIns="0" bIns="0">
-            <a:spAutoFit/>
-          </a:bodyPr>
-          <a:lstStyle/>
-          <a:p>
-            <a:pPr algn="l"/>
-            <a:r>
-              <a:rPr sz="900" b="1">
-                <a:solidFill>
-                  <a:srgbClr val="2863C5"/>
-                </a:solidFill>
-                <a:latin typeface="Open Sans"/>
-              </a:rPr>
-              <a:t>Status</a:t>
-            </a:r>
-          </a:p>
-        </p:txBody>
-      </p:sp>
-      <p:sp>
-        <p:nvSpPr>
-          <p:cNvPr id="45" name="TextBox 44"/>
-          <p:cNvSpPr txBox="1"/>
-          <p:nvPr/>
-        </p:nvSpPr>
-        <p:spPr>
-          <a:xfrm>
-            <a:off x="8275320" y="5843015"/>
-            <a:ext cx="3200400" cy="457200"/>
-          </a:xfrm>
-          <a:prstGeom prst="rect">
-            <a:avLst/>
-          </a:prstGeom>
-          <a:noFill/>
-        </p:spPr>
-        <p:txBody>
-          <a:bodyPr wrap="square" anchor="t" lIns="0" rIns="0" tIns="0" bIns="0">
-            <a:spAutoFit/>
-          </a:bodyPr>
-          <a:lstStyle/>
-          <a:p>
-            <a:pPr algn="l"/>
-            <a:r>
-              <a:rPr sz="1000" b="0">
-                <a:solidFill>
-                  <a:srgbClr val="334155"/>
-                </a:solidFill>
-                <a:latin typeface="Open Sans"/>
-              </a:rPr>
-              <a:t>Sprint 4+ once first state approves</a:t>
-            </a:r>
-          </a:p>
-        </p:txBody>
-      </p:sp>
-      <p:sp>
-        <p:nvSpPr>
-          <p:cNvPr id="46" name="Rounded Rectangle 45"/>
-          <p:cNvSpPr/>
-          <p:nvPr/>
-        </p:nvSpPr>
-        <p:spPr>
-          <a:xfrm>
-            <a:off x="457200" y="6400800"/>
-            <a:ext cx="11247120" cy="365760"/>
-          </a:xfrm>
-          <a:prstGeom prst="roundRect">
-            <a:avLst>
-              <a:gd name="adj" fmla="val 10000"/>
-            </a:avLst>
-          </a:prstGeom>
-          <a:solidFill>
-            <a:srgbClr val="2863C5"/>
-          </a:solidFill>
-          <a:ln>
-            <a:noFill/>
-          </a:ln>
-          <a:effectLst/>
-        </p:spPr>
-        <p:style>
-          <a:lnRef idx="1">
-            <a:schemeClr val="accent1"/>
-          </a:lnRef>
-          <a:fillRef idx="3">
-            <a:schemeClr val="accent1"/>
-          </a:fillRef>
-          <a:effectRef idx="2">
-            <a:schemeClr val="accent1"/>
-          </a:effectRef>
-          <a:fontRef idx="minor">
-            <a:schemeClr val="lt1"/>
-          </a:fontRef>
-        </p:style>
-        <p:txBody>
-          <a:bodyPr rtlCol="0" anchor="ctr"/>
-          <a:lstStyle/>
-          <a:p>
-            <a:pPr algn="ctr"/>
-          </a:p>
-        </p:txBody>
-      </p:sp>
-      <p:sp>
-        <p:nvSpPr>
           <p:cNvPr id="47" name="TextBox 46"/>
           <p:cNvSpPr txBox="1"/>
           <p:nvPr/>
@@ -18274,1504 +16236,13 @@
           <a:p>
             <a:pPr algn="l"/>
             <a:r>
-              <a:rPr sz="1000" b="1">
+              <a:rPr sz="1100" b="1">
                 <a:solidFill>
                   <a:srgbClr val="FFFFFF"/>
                 </a:solidFill>
                 <a:latin typeface="Open Sans"/>
               </a:rPr>
-              <a:t>Members never pay. We never take a cut. Free reduces finder-fee risk — but representative filing still requires state-by-state approval, registration, and legal sign-off.</a:t>
-            </a:r>
-          </a:p>
-        </p:txBody>
-      </p:sp>
-    </p:spTree>
-  </p:cSld>
-  <p:clrMapOvr>
-    <a:masterClrMapping/>
-  </p:clrMapOvr>
-</p:sld>
-</file>
-
-<file path=ppt/slides/slide9.xml><?xml version="1.0" encoding="utf-8"?>
-<p:sld xmlns:a="http://schemas.openxmlformats.org/drawingml/2006/main" xmlns:p="http://schemas.openxmlformats.org/presentationml/2006/main" xmlns:r="http://schemas.openxmlformats.org/officeDocument/2006/relationships">
-  <p:cSld>
-    <p:spTree>
-      <p:nvGrpSpPr>
-        <p:cNvPr id="1" name=""/>
-        <p:cNvGrpSpPr/>
-        <p:nvPr/>
-      </p:nvGrpSpPr>
-      <p:grpSpPr/>
-      <p:sp>
-        <p:nvSpPr>
-          <p:cNvPr id="2" name="Rectangle 1"/>
-          <p:cNvSpPr/>
-          <p:nvPr/>
-        </p:nvSpPr>
-        <p:spPr>
-          <a:xfrm>
-            <a:off x="0" y="0"/>
-            <a:ext cx="12188952" cy="6858000"/>
-          </a:xfrm>
-          <a:prstGeom prst="rect">
-            <a:avLst/>
-          </a:prstGeom>
-          <a:solidFill>
-            <a:srgbClr val="F8FAFC"/>
-          </a:solidFill>
-          <a:ln>
-            <a:noFill/>
-          </a:ln>
-          <a:effectLst/>
-        </p:spPr>
-        <p:style>
-          <a:lnRef idx="1">
-            <a:schemeClr val="accent1"/>
-          </a:lnRef>
-          <a:fillRef idx="3">
-            <a:schemeClr val="accent1"/>
-          </a:fillRef>
-          <a:effectRef idx="2">
-            <a:schemeClr val="accent1"/>
-          </a:effectRef>
-          <a:fontRef idx="minor">
-            <a:schemeClr val="lt1"/>
-          </a:fontRef>
-        </p:style>
-        <p:txBody>
-          <a:bodyPr rtlCol="0" anchor="ctr"/>
-          <a:lstStyle/>
-          <a:p>
-            <a:pPr algn="ctr"/>
-          </a:p>
-        </p:txBody>
-      </p:sp>
-      <p:sp>
-        <p:nvSpPr>
-          <p:cNvPr id="3" name="Rectangle 2"/>
-          <p:cNvSpPr/>
-          <p:nvPr/>
-        </p:nvSpPr>
-        <p:spPr>
-          <a:xfrm>
-            <a:off x="0" y="0"/>
-            <a:ext cx="12188952" cy="54864"/>
-          </a:xfrm>
-          <a:prstGeom prst="rect">
-            <a:avLst/>
-          </a:prstGeom>
-          <a:solidFill>
-            <a:srgbClr val="2863C5"/>
-          </a:solidFill>
-          <a:ln>
-            <a:noFill/>
-          </a:ln>
-          <a:effectLst/>
-        </p:spPr>
-        <p:style>
-          <a:lnRef idx="1">
-            <a:schemeClr val="accent1"/>
-          </a:lnRef>
-          <a:fillRef idx="3">
-            <a:schemeClr val="accent1"/>
-          </a:fillRef>
-          <a:effectRef idx="2">
-            <a:schemeClr val="accent1"/>
-          </a:effectRef>
-          <a:fontRef idx="minor">
-            <a:schemeClr val="lt1"/>
-          </a:fontRef>
-        </p:style>
-        <p:txBody>
-          <a:bodyPr rtlCol="0" anchor="ctr"/>
-          <a:lstStyle/>
-          <a:p>
-            <a:pPr algn="ctr"/>
-          </a:p>
-        </p:txBody>
-      </p:sp>
-      <p:sp>
-        <p:nvSpPr>
-          <p:cNvPr id="4" name="TextBox 3"/>
-          <p:cNvSpPr txBox="1"/>
-          <p:nvPr/>
-        </p:nvSpPr>
-        <p:spPr>
-          <a:xfrm>
-            <a:off x="457200" y="164592"/>
-            <a:ext cx="2286000" cy="329184"/>
-          </a:xfrm>
-          <a:prstGeom prst="rect">
-            <a:avLst/>
-          </a:prstGeom>
-          <a:noFill/>
-        </p:spPr>
-        <p:txBody>
-          <a:bodyPr wrap="square" anchor="t" lIns="0" rIns="0" tIns="0" bIns="0">
-            <a:spAutoFit/>
-          </a:bodyPr>
-          <a:lstStyle/>
-          <a:p>
-            <a:pPr algn="l"/>
-            <a:r>
-              <a:rPr sz="1600" b="1">
-                <a:solidFill>
-                  <a:srgbClr val="0F172A"/>
-                </a:solidFill>
-                <a:latin typeface="Open Sans"/>
-              </a:rPr>
-              <a:t>smartcredit</a:t>
-            </a:r>
-          </a:p>
-        </p:txBody>
-      </p:sp>
-      <p:sp>
-        <p:nvSpPr>
-          <p:cNvPr id="5" name="TextBox 4"/>
-          <p:cNvSpPr txBox="1"/>
-          <p:nvPr/>
-        </p:nvSpPr>
-        <p:spPr>
-          <a:xfrm>
-            <a:off x="11338560" y="6446520"/>
-            <a:ext cx="731520" cy="274320"/>
-          </a:xfrm>
-          <a:prstGeom prst="rect">
-            <a:avLst/>
-          </a:prstGeom>
-          <a:noFill/>
-        </p:spPr>
-        <p:txBody>
-          <a:bodyPr wrap="square" anchor="t" lIns="0" rIns="0" tIns="0" bIns="0">
-            <a:spAutoFit/>
-          </a:bodyPr>
-          <a:lstStyle/>
-          <a:p>
-            <a:pPr algn="r"/>
-            <a:r>
-              <a:rPr sz="900" b="0">
-                <a:solidFill>
-                  <a:srgbClr val="64748B"/>
-                </a:solidFill>
-                <a:latin typeface="Open Sans"/>
-              </a:rPr>
-              <a:t>9 / 10</a:t>
-            </a:r>
-          </a:p>
-        </p:txBody>
-      </p:sp>
-      <p:sp>
-        <p:nvSpPr>
-          <p:cNvPr id="6" name="TextBox 5"/>
-          <p:cNvSpPr txBox="1"/>
-          <p:nvPr/>
-        </p:nvSpPr>
-        <p:spPr>
-          <a:xfrm>
-            <a:off x="457200" y="6446520"/>
-            <a:ext cx="7315200" cy="274320"/>
-          </a:xfrm>
-          <a:prstGeom prst="rect">
-            <a:avLst/>
-          </a:prstGeom>
-          <a:noFill/>
-        </p:spPr>
-        <p:txBody>
-          <a:bodyPr wrap="square" anchor="t" lIns="0" rIns="0" tIns="0" bIns="0">
-            <a:spAutoFit/>
-          </a:bodyPr>
-          <a:lstStyle/>
-          <a:p>
-            <a:pPr algn="l"/>
-            <a:r>
-              <a:rPr sz="900" b="0">
-                <a:solidFill>
-                  <a:srgbClr val="64748B"/>
-                </a:solidFill>
-                <a:latin typeface="Open Sans"/>
-              </a:rPr>
-              <a:t>myReclaim · Confidential — Consumer Direct, Inc.</a:t>
-            </a:r>
-          </a:p>
-        </p:txBody>
-      </p:sp>
-      <p:sp>
-        <p:nvSpPr>
-          <p:cNvPr id="7" name="TextBox 6"/>
-          <p:cNvSpPr txBox="1"/>
-          <p:nvPr/>
-        </p:nvSpPr>
-        <p:spPr>
-          <a:xfrm>
-            <a:off x="457200" y="777240"/>
-            <a:ext cx="11430000" cy="365760"/>
-          </a:xfrm>
-          <a:prstGeom prst="rect">
-            <a:avLst/>
-          </a:prstGeom>
-          <a:noFill/>
-        </p:spPr>
-        <p:txBody>
-          <a:bodyPr wrap="square" anchor="t" lIns="0" rIns="0" tIns="0" bIns="0">
-            <a:spAutoFit/>
-          </a:bodyPr>
-          <a:lstStyle/>
-          <a:p>
-            <a:pPr algn="l"/>
-            <a:r>
-              <a:rPr sz="1200" b="1">
-                <a:solidFill>
-                  <a:srgbClr val="2863C5"/>
-                </a:solidFill>
-                <a:latin typeface="Open Sans"/>
-              </a:rPr>
-              <a:t>COMPLIANCE GUARDRAILS</a:t>
-            </a:r>
-          </a:p>
-        </p:txBody>
-      </p:sp>
-      <p:sp>
-        <p:nvSpPr>
-          <p:cNvPr id="8" name="TextBox 7"/>
-          <p:cNvSpPr txBox="1"/>
-          <p:nvPr/>
-        </p:nvSpPr>
-        <p:spPr>
-          <a:xfrm>
-            <a:off x="457200" y="1143000"/>
-            <a:ext cx="11430000" cy="868680"/>
-          </a:xfrm>
-          <a:prstGeom prst="rect">
-            <a:avLst/>
-          </a:prstGeom>
-          <a:noFill/>
-        </p:spPr>
-        <p:txBody>
-          <a:bodyPr wrap="square" anchor="t" lIns="0" rIns="0" tIns="0" bIns="0">
-            <a:spAutoFit/>
-          </a:bodyPr>
-          <a:lstStyle/>
-          <a:p>
-            <a:pPr algn="l"/>
-            <a:r>
-              <a:rPr sz="2600" b="1">
-                <a:solidFill>
-                  <a:srgbClr val="0F172A"/>
-                </a:solidFill>
-                <a:latin typeface="Open Sans"/>
-              </a:rPr>
-              <a:t>Free for members. State-approved where required.</a:t>
-            </a:r>
-          </a:p>
-        </p:txBody>
-      </p:sp>
-      <p:sp>
-        <p:nvSpPr>
-          <p:cNvPr id="9" name="TextBox 8"/>
-          <p:cNvSpPr txBox="1"/>
-          <p:nvPr/>
-        </p:nvSpPr>
-        <p:spPr>
-          <a:xfrm>
-            <a:off x="457200" y="1965960"/>
-            <a:ext cx="11430000" cy="411480"/>
-          </a:xfrm>
-          <a:prstGeom prst="rect">
-            <a:avLst/>
-          </a:prstGeom>
-          <a:noFill/>
-        </p:spPr>
-        <p:txBody>
-          <a:bodyPr wrap="square" anchor="t" lIns="0" rIns="0" tIns="0" bIns="0">
-            <a:spAutoFit/>
-          </a:bodyPr>
-          <a:lstStyle/>
-          <a:p>
-            <a:pPr algn="l"/>
-            <a:r>
-              <a:rPr sz="1200" b="0">
-                <a:solidFill>
-                  <a:srgbClr val="64748B"/>
-                </a:solidFill>
-                <a:latin typeface="Open Sans"/>
-              </a:rPr>
-              <a:t>Verified-identity matching, member consent, official state filing channels — and a clear list of things we will not do.</a:t>
-            </a:r>
-          </a:p>
-        </p:txBody>
-      </p:sp>
-      <p:sp>
-        <p:nvSpPr>
-          <p:cNvPr id="10" name="Rounded Rectangle 9"/>
-          <p:cNvSpPr/>
-          <p:nvPr/>
-        </p:nvSpPr>
-        <p:spPr>
-          <a:xfrm>
-            <a:off x="457200" y="2606040"/>
-            <a:ext cx="5486400" cy="3703320"/>
-          </a:xfrm>
-          <a:prstGeom prst="roundRect">
-            <a:avLst>
-              <a:gd name="adj" fmla="val 3000"/>
-            </a:avLst>
-          </a:prstGeom>
-          <a:solidFill>
-            <a:srgbClr val="FFFFFF"/>
-          </a:solidFill>
-          <a:ln w="6350">
-            <a:solidFill>
-              <a:srgbClr val="E2E8F0"/>
-            </a:solidFill>
-          </a:ln>
-          <a:effectLst/>
-        </p:spPr>
-        <p:style>
-          <a:lnRef idx="1">
-            <a:schemeClr val="accent1"/>
-          </a:lnRef>
-          <a:fillRef idx="3">
-            <a:schemeClr val="accent1"/>
-          </a:fillRef>
-          <a:effectRef idx="2">
-            <a:schemeClr val="accent1"/>
-          </a:effectRef>
-          <a:fontRef idx="minor">
-            <a:schemeClr val="lt1"/>
-          </a:fontRef>
-        </p:style>
-        <p:txBody>
-          <a:bodyPr rtlCol="0" anchor="ctr"/>
-          <a:lstStyle/>
-          <a:p>
-            <a:pPr algn="ctr"/>
-          </a:p>
-        </p:txBody>
-      </p:sp>
-      <p:sp>
-        <p:nvSpPr>
-          <p:cNvPr id="11" name="Rectangle 10"/>
-          <p:cNvSpPr/>
-          <p:nvPr/>
-        </p:nvSpPr>
-        <p:spPr>
-          <a:xfrm>
-            <a:off x="457200" y="2606040"/>
-            <a:ext cx="5486400" cy="164592"/>
-          </a:xfrm>
-          <a:prstGeom prst="rect">
-            <a:avLst/>
-          </a:prstGeom>
-          <a:solidFill>
-            <a:srgbClr val="059669"/>
-          </a:solidFill>
-          <a:ln>
-            <a:noFill/>
-          </a:ln>
-          <a:effectLst/>
-        </p:spPr>
-        <p:style>
-          <a:lnRef idx="1">
-            <a:schemeClr val="accent1"/>
-          </a:lnRef>
-          <a:fillRef idx="3">
-            <a:schemeClr val="accent1"/>
-          </a:fillRef>
-          <a:effectRef idx="2">
-            <a:schemeClr val="accent1"/>
-          </a:effectRef>
-          <a:fontRef idx="minor">
-            <a:schemeClr val="lt1"/>
-          </a:fontRef>
-        </p:style>
-        <p:txBody>
-          <a:bodyPr rtlCol="0" anchor="ctr"/>
-          <a:lstStyle/>
-          <a:p>
-            <a:pPr algn="ctr"/>
-          </a:p>
-        </p:txBody>
-      </p:sp>
-      <p:sp>
-        <p:nvSpPr>
-          <p:cNvPr id="12" name="TextBox 11"/>
-          <p:cNvSpPr txBox="1"/>
-          <p:nvPr/>
-        </p:nvSpPr>
-        <p:spPr>
-          <a:xfrm>
-            <a:off x="640080" y="2898648"/>
-            <a:ext cx="5120640" cy="365760"/>
-          </a:xfrm>
-          <a:prstGeom prst="rect">
-            <a:avLst/>
-          </a:prstGeom>
-          <a:noFill/>
-        </p:spPr>
-        <p:txBody>
-          <a:bodyPr wrap="square" anchor="t" lIns="0" rIns="0" tIns="0" bIns="0">
-            <a:spAutoFit/>
-          </a:bodyPr>
-          <a:lstStyle/>
-          <a:p>
-            <a:pPr algn="l"/>
-            <a:r>
-              <a:rPr sz="1200" b="1">
-                <a:solidFill>
-                  <a:srgbClr val="059669"/>
-                </a:solidFill>
-                <a:latin typeface="Open Sans"/>
-              </a:rPr>
-              <a:t>WHAT WE WILL DO</a:t>
-            </a:r>
-          </a:p>
-        </p:txBody>
-      </p:sp>
-      <p:sp>
-        <p:nvSpPr>
-          <p:cNvPr id="13" name="TextBox 12"/>
-          <p:cNvSpPr txBox="1"/>
-          <p:nvPr/>
-        </p:nvSpPr>
-        <p:spPr>
-          <a:xfrm>
-            <a:off x="777240" y="3383280"/>
-            <a:ext cx="274320" cy="274320"/>
-          </a:xfrm>
-          <a:prstGeom prst="rect">
-            <a:avLst/>
-          </a:prstGeom>
-          <a:noFill/>
-        </p:spPr>
-        <p:txBody>
-          <a:bodyPr wrap="square" anchor="t" lIns="0" rIns="0" tIns="0" bIns="0">
-            <a:spAutoFit/>
-          </a:bodyPr>
-          <a:lstStyle/>
-          <a:p>
-            <a:pPr algn="l"/>
-            <a:r>
-              <a:rPr sz="1400" b="1">
-                <a:solidFill>
-                  <a:srgbClr val="059669"/>
-                </a:solidFill>
-                <a:latin typeface="Open Sans"/>
-              </a:rPr>
-              <a:t>✓</a:t>
-            </a:r>
-          </a:p>
-        </p:txBody>
-      </p:sp>
-      <p:sp>
-        <p:nvSpPr>
-          <p:cNvPr id="14" name="TextBox 13"/>
-          <p:cNvSpPr txBox="1"/>
-          <p:nvPr/>
-        </p:nvSpPr>
-        <p:spPr>
-          <a:xfrm>
-            <a:off x="1097280" y="3401568"/>
-            <a:ext cx="4572000" cy="457200"/>
-          </a:xfrm>
-          <a:prstGeom prst="rect">
-            <a:avLst/>
-          </a:prstGeom>
-          <a:noFill/>
-        </p:spPr>
-        <p:txBody>
-          <a:bodyPr wrap="square" anchor="t" lIns="0" rIns="0" tIns="0" bIns="0">
-            <a:spAutoFit/>
-          </a:bodyPr>
-          <a:lstStyle/>
-          <a:p>
-            <a:pPr algn="l"/>
-            <a:r>
-              <a:rPr sz="1100" b="0">
-                <a:solidFill>
-                  <a:srgbClr val="334155"/>
-                </a:solidFill>
-                <a:latin typeface="Open Sans"/>
-              </a:rPr>
-              <a:t>Use official state files or state-approved data access only</a:t>
-            </a:r>
-          </a:p>
-        </p:txBody>
-      </p:sp>
-      <p:sp>
-        <p:nvSpPr>
-          <p:cNvPr id="15" name="TextBox 14"/>
-          <p:cNvSpPr txBox="1"/>
-          <p:nvPr/>
-        </p:nvSpPr>
-        <p:spPr>
-          <a:xfrm>
-            <a:off x="777240" y="3840480"/>
-            <a:ext cx="274320" cy="274320"/>
-          </a:xfrm>
-          <a:prstGeom prst="rect">
-            <a:avLst/>
-          </a:prstGeom>
-          <a:noFill/>
-        </p:spPr>
-        <p:txBody>
-          <a:bodyPr wrap="square" anchor="t" lIns="0" rIns="0" tIns="0" bIns="0">
-            <a:spAutoFit/>
-          </a:bodyPr>
-          <a:lstStyle/>
-          <a:p>
-            <a:pPr algn="l"/>
-            <a:r>
-              <a:rPr sz="1400" b="1">
-                <a:solidFill>
-                  <a:srgbClr val="059669"/>
-                </a:solidFill>
-                <a:latin typeface="Open Sans"/>
-              </a:rPr>
-              <a:t>✓</a:t>
-            </a:r>
-          </a:p>
-        </p:txBody>
-      </p:sp>
-      <p:sp>
-        <p:nvSpPr>
-          <p:cNvPr id="16" name="TextBox 15"/>
-          <p:cNvSpPr txBox="1"/>
-          <p:nvPr/>
-        </p:nvSpPr>
-        <p:spPr>
-          <a:xfrm>
-            <a:off x="1097280" y="3858768"/>
-            <a:ext cx="4572000" cy="457200"/>
-          </a:xfrm>
-          <a:prstGeom prst="rect">
-            <a:avLst/>
-          </a:prstGeom>
-          <a:noFill/>
-        </p:spPr>
-        <p:txBody>
-          <a:bodyPr wrap="square" anchor="t" lIns="0" rIns="0" tIns="0" bIns="0">
-            <a:spAutoFit/>
-          </a:bodyPr>
-          <a:lstStyle/>
-          <a:p>
-            <a:pPr algn="l"/>
-            <a:r>
-              <a:rPr sz="1100" b="0">
-                <a:solidFill>
-                  <a:srgbClr val="334155"/>
-                </a:solidFill>
-                <a:latin typeface="Open Sans"/>
-              </a:rPr>
-              <a:t>Get explicit member consent before matching and claim prep</a:t>
-            </a:r>
-          </a:p>
-        </p:txBody>
-      </p:sp>
-      <p:sp>
-        <p:nvSpPr>
-          <p:cNvPr id="17" name="TextBox 16"/>
-          <p:cNvSpPr txBox="1"/>
-          <p:nvPr/>
-        </p:nvSpPr>
-        <p:spPr>
-          <a:xfrm>
-            <a:off x="777240" y="4297680"/>
-            <a:ext cx="274320" cy="274320"/>
-          </a:xfrm>
-          <a:prstGeom prst="rect">
-            <a:avLst/>
-          </a:prstGeom>
-          <a:noFill/>
-        </p:spPr>
-        <p:txBody>
-          <a:bodyPr wrap="square" anchor="t" lIns="0" rIns="0" tIns="0" bIns="0">
-            <a:spAutoFit/>
-          </a:bodyPr>
-          <a:lstStyle/>
-          <a:p>
-            <a:pPr algn="l"/>
-            <a:r>
-              <a:rPr sz="1400" b="1">
-                <a:solidFill>
-                  <a:srgbClr val="059669"/>
-                </a:solidFill>
-                <a:latin typeface="Open Sans"/>
-              </a:rPr>
-              <a:t>✓</a:t>
-            </a:r>
-          </a:p>
-        </p:txBody>
-      </p:sp>
-      <p:sp>
-        <p:nvSpPr>
-          <p:cNvPr id="18" name="TextBox 17"/>
-          <p:cNvSpPr txBox="1"/>
-          <p:nvPr/>
-        </p:nvSpPr>
-        <p:spPr>
-          <a:xfrm>
-            <a:off x="1097280" y="4315968"/>
-            <a:ext cx="4572000" cy="457200"/>
-          </a:xfrm>
-          <a:prstGeom prst="rect">
-            <a:avLst/>
-          </a:prstGeom>
-          <a:noFill/>
-        </p:spPr>
-        <p:txBody>
-          <a:bodyPr wrap="square" anchor="t" lIns="0" rIns="0" tIns="0" bIns="0">
-            <a:spAutoFit/>
-          </a:bodyPr>
-          <a:lstStyle/>
-          <a:p>
-            <a:pPr algn="l"/>
-            <a:r>
-              <a:rPr sz="1100" b="0">
-                <a:solidFill>
-                  <a:srgbClr val="334155"/>
-                </a:solidFill>
-                <a:latin typeface="Open Sans"/>
-              </a:rPr>
-              <a:t>Route members to official state claim portals for v1</a:t>
-            </a:r>
-          </a:p>
-        </p:txBody>
-      </p:sp>
-      <p:sp>
-        <p:nvSpPr>
-          <p:cNvPr id="19" name="TextBox 18"/>
-          <p:cNvSpPr txBox="1"/>
-          <p:nvPr/>
-        </p:nvSpPr>
-        <p:spPr>
-          <a:xfrm>
-            <a:off x="777240" y="4754880"/>
-            <a:ext cx="274320" cy="274320"/>
-          </a:xfrm>
-          <a:prstGeom prst="rect">
-            <a:avLst/>
-          </a:prstGeom>
-          <a:noFill/>
-        </p:spPr>
-        <p:txBody>
-          <a:bodyPr wrap="square" anchor="t" lIns="0" rIns="0" tIns="0" bIns="0">
-            <a:spAutoFit/>
-          </a:bodyPr>
-          <a:lstStyle/>
-          <a:p>
-            <a:pPr algn="l"/>
-            <a:r>
-              <a:rPr sz="1400" b="1">
-                <a:solidFill>
-                  <a:srgbClr val="059669"/>
-                </a:solidFill>
-                <a:latin typeface="Open Sans"/>
-              </a:rPr>
-              <a:t>✓</a:t>
-            </a:r>
-          </a:p>
-        </p:txBody>
-      </p:sp>
-      <p:sp>
-        <p:nvSpPr>
-          <p:cNvPr id="20" name="TextBox 19"/>
-          <p:cNvSpPr txBox="1"/>
-          <p:nvPr/>
-        </p:nvSpPr>
-        <p:spPr>
-          <a:xfrm>
-            <a:off x="1097280" y="4773168"/>
-            <a:ext cx="4572000" cy="457200"/>
-          </a:xfrm>
-          <a:prstGeom prst="rect">
-            <a:avLst/>
-          </a:prstGeom>
-          <a:noFill/>
-        </p:spPr>
-        <p:txBody>
-          <a:bodyPr wrap="square" anchor="t" lIns="0" rIns="0" tIns="0" bIns="0">
-            <a:spAutoFit/>
-          </a:bodyPr>
-          <a:lstStyle/>
-          <a:p>
-            <a:pPr algn="l"/>
-            <a:r>
-              <a:rPr sz="1100" b="0">
-                <a:solidFill>
-                  <a:srgbClr val="334155"/>
-                </a:solidFill>
-                <a:latin typeface="Open Sans"/>
-              </a:rPr>
-              <a:t>Track claim ID + status inside SmartCredit (manual entry)</a:t>
-            </a:r>
-          </a:p>
-        </p:txBody>
-      </p:sp>
-      <p:sp>
-        <p:nvSpPr>
-          <p:cNvPr id="21" name="TextBox 20"/>
-          <p:cNvSpPr txBox="1"/>
-          <p:nvPr/>
-        </p:nvSpPr>
-        <p:spPr>
-          <a:xfrm>
-            <a:off x="777240" y="5212080"/>
-            <a:ext cx="274320" cy="274320"/>
-          </a:xfrm>
-          <a:prstGeom prst="rect">
-            <a:avLst/>
-          </a:prstGeom>
-          <a:noFill/>
-        </p:spPr>
-        <p:txBody>
-          <a:bodyPr wrap="square" anchor="t" lIns="0" rIns="0" tIns="0" bIns="0">
-            <a:spAutoFit/>
-          </a:bodyPr>
-          <a:lstStyle/>
-          <a:p>
-            <a:pPr algn="l"/>
-            <a:r>
-              <a:rPr sz="1400" b="1">
-                <a:solidFill>
-                  <a:srgbClr val="059669"/>
-                </a:solidFill>
-                <a:latin typeface="Open Sans"/>
-              </a:rPr>
-              <a:t>✓</a:t>
-            </a:r>
-          </a:p>
-        </p:txBody>
-      </p:sp>
-      <p:sp>
-        <p:nvSpPr>
-          <p:cNvPr id="22" name="TextBox 21"/>
-          <p:cNvSpPr txBox="1"/>
-          <p:nvPr/>
-        </p:nvSpPr>
-        <p:spPr>
-          <a:xfrm>
-            <a:off x="1097280" y="5230368"/>
-            <a:ext cx="4572000" cy="457200"/>
-          </a:xfrm>
-          <a:prstGeom prst="rect">
-            <a:avLst/>
-          </a:prstGeom>
-          <a:noFill/>
-        </p:spPr>
-        <p:txBody>
-          <a:bodyPr wrap="square" anchor="t" lIns="0" rIns="0" tIns="0" bIns="0">
-            <a:spAutoFit/>
-          </a:bodyPr>
-          <a:lstStyle/>
-          <a:p>
-            <a:pPr algn="l"/>
-            <a:r>
-              <a:rPr sz="1100" b="0">
-                <a:solidFill>
-                  <a:srgbClr val="334155"/>
-                </a:solidFill>
-                <a:latin typeface="Open Sans"/>
-              </a:rPr>
-              <a:t>File on members' behalf only where registered or approved</a:t>
-            </a:r>
-          </a:p>
-        </p:txBody>
-      </p:sp>
-      <p:sp>
-        <p:nvSpPr>
-          <p:cNvPr id="23" name="TextBox 22"/>
-          <p:cNvSpPr txBox="1"/>
-          <p:nvPr/>
-        </p:nvSpPr>
-        <p:spPr>
-          <a:xfrm>
-            <a:off x="777240" y="5669280"/>
-            <a:ext cx="274320" cy="274320"/>
-          </a:xfrm>
-          <a:prstGeom prst="rect">
-            <a:avLst/>
-          </a:prstGeom>
-          <a:noFill/>
-        </p:spPr>
-        <p:txBody>
-          <a:bodyPr wrap="square" anchor="t" lIns="0" rIns="0" tIns="0" bIns="0">
-            <a:spAutoFit/>
-          </a:bodyPr>
-          <a:lstStyle/>
-          <a:p>
-            <a:pPr algn="l"/>
-            <a:r>
-              <a:rPr sz="1400" b="1">
-                <a:solidFill>
-                  <a:srgbClr val="059669"/>
-                </a:solidFill>
-                <a:latin typeface="Open Sans"/>
-              </a:rPr>
-              <a:t>✓</a:t>
-            </a:r>
-          </a:p>
-        </p:txBody>
-      </p:sp>
-      <p:sp>
-        <p:nvSpPr>
-          <p:cNvPr id="24" name="TextBox 23"/>
-          <p:cNvSpPr txBox="1"/>
-          <p:nvPr/>
-        </p:nvSpPr>
-        <p:spPr>
-          <a:xfrm>
-            <a:off x="1097280" y="5687568"/>
-            <a:ext cx="4572000" cy="457200"/>
-          </a:xfrm>
-          <a:prstGeom prst="rect">
-            <a:avLst/>
-          </a:prstGeom>
-          <a:noFill/>
-        </p:spPr>
-        <p:txBody>
-          <a:bodyPr wrap="square" anchor="t" lIns="0" rIns="0" tIns="0" bIns="0">
-            <a:spAutoFit/>
-          </a:bodyPr>
-          <a:lstStyle/>
-          <a:p>
-            <a:pPr algn="l"/>
-            <a:r>
-              <a:rPr sz="1100" b="0">
-                <a:solidFill>
-                  <a:srgbClr val="334155"/>
-                </a:solidFill>
-                <a:latin typeface="Open Sans"/>
-              </a:rPr>
-              <a:t>Source-by-source data-use permissions; legal review per state</a:t>
-            </a:r>
-          </a:p>
-        </p:txBody>
-      </p:sp>
-      <p:sp>
-        <p:nvSpPr>
-          <p:cNvPr id="25" name="Rounded Rectangle 24"/>
-          <p:cNvSpPr/>
-          <p:nvPr/>
-        </p:nvSpPr>
-        <p:spPr>
-          <a:xfrm>
-            <a:off x="6217920" y="2606040"/>
-            <a:ext cx="5486400" cy="3703320"/>
-          </a:xfrm>
-          <a:prstGeom prst="roundRect">
-            <a:avLst>
-              <a:gd name="adj" fmla="val 3000"/>
-            </a:avLst>
-          </a:prstGeom>
-          <a:solidFill>
-            <a:srgbClr val="FFFFFF"/>
-          </a:solidFill>
-          <a:ln w="6350">
-            <a:solidFill>
-              <a:srgbClr val="E2E8F0"/>
-            </a:solidFill>
-          </a:ln>
-          <a:effectLst/>
-        </p:spPr>
-        <p:style>
-          <a:lnRef idx="1">
-            <a:schemeClr val="accent1"/>
-          </a:lnRef>
-          <a:fillRef idx="3">
-            <a:schemeClr val="accent1"/>
-          </a:fillRef>
-          <a:effectRef idx="2">
-            <a:schemeClr val="accent1"/>
-          </a:effectRef>
-          <a:fontRef idx="minor">
-            <a:schemeClr val="lt1"/>
-          </a:fontRef>
-        </p:style>
-        <p:txBody>
-          <a:bodyPr rtlCol="0" anchor="ctr"/>
-          <a:lstStyle/>
-          <a:p>
-            <a:pPr algn="ctr"/>
-          </a:p>
-        </p:txBody>
-      </p:sp>
-      <p:sp>
-        <p:nvSpPr>
-          <p:cNvPr id="26" name="Rectangle 25"/>
-          <p:cNvSpPr/>
-          <p:nvPr/>
-        </p:nvSpPr>
-        <p:spPr>
-          <a:xfrm>
-            <a:off x="6217920" y="2606040"/>
-            <a:ext cx="5486400" cy="164592"/>
-          </a:xfrm>
-          <a:prstGeom prst="rect">
-            <a:avLst/>
-          </a:prstGeom>
-          <a:solidFill>
-            <a:srgbClr val="E11D48"/>
-          </a:solidFill>
-          <a:ln>
-            <a:noFill/>
-          </a:ln>
-          <a:effectLst/>
-        </p:spPr>
-        <p:style>
-          <a:lnRef idx="1">
-            <a:schemeClr val="accent1"/>
-          </a:lnRef>
-          <a:fillRef idx="3">
-            <a:schemeClr val="accent1"/>
-          </a:fillRef>
-          <a:effectRef idx="2">
-            <a:schemeClr val="accent1"/>
-          </a:effectRef>
-          <a:fontRef idx="minor">
-            <a:schemeClr val="lt1"/>
-          </a:fontRef>
-        </p:style>
-        <p:txBody>
-          <a:bodyPr rtlCol="0" anchor="ctr"/>
-          <a:lstStyle/>
-          <a:p>
-            <a:pPr algn="ctr"/>
-          </a:p>
-        </p:txBody>
-      </p:sp>
-      <p:sp>
-        <p:nvSpPr>
-          <p:cNvPr id="27" name="TextBox 26"/>
-          <p:cNvSpPr txBox="1"/>
-          <p:nvPr/>
-        </p:nvSpPr>
-        <p:spPr>
-          <a:xfrm>
-            <a:off x="6400800" y="2898648"/>
-            <a:ext cx="5120640" cy="365760"/>
-          </a:xfrm>
-          <a:prstGeom prst="rect">
-            <a:avLst/>
-          </a:prstGeom>
-          <a:noFill/>
-        </p:spPr>
-        <p:txBody>
-          <a:bodyPr wrap="square" anchor="t" lIns="0" rIns="0" tIns="0" bIns="0">
-            <a:spAutoFit/>
-          </a:bodyPr>
-          <a:lstStyle/>
-          <a:p>
-            <a:pPr algn="l"/>
-            <a:r>
-              <a:rPr sz="1200" b="1">
-                <a:solidFill>
-                  <a:srgbClr val="E11D48"/>
-                </a:solidFill>
-                <a:latin typeface="Open Sans"/>
-              </a:rPr>
-              <a:t>WHAT WE WILL NOT DO</a:t>
-            </a:r>
-          </a:p>
-        </p:txBody>
-      </p:sp>
-      <p:sp>
-        <p:nvSpPr>
-          <p:cNvPr id="28" name="TextBox 27"/>
-          <p:cNvSpPr txBox="1"/>
-          <p:nvPr/>
-        </p:nvSpPr>
-        <p:spPr>
-          <a:xfrm>
-            <a:off x="6355080" y="3383280"/>
-            <a:ext cx="274320" cy="274320"/>
-          </a:xfrm>
-          <a:prstGeom prst="rect">
-            <a:avLst/>
-          </a:prstGeom>
-          <a:noFill/>
-        </p:spPr>
-        <p:txBody>
-          <a:bodyPr wrap="square" anchor="t" lIns="0" rIns="0" tIns="0" bIns="0">
-            <a:spAutoFit/>
-          </a:bodyPr>
-          <a:lstStyle/>
-          <a:p>
-            <a:pPr algn="l"/>
-            <a:r>
-              <a:rPr sz="1400" b="1">
-                <a:solidFill>
-                  <a:srgbClr val="E11D48"/>
-                </a:solidFill>
-                <a:latin typeface="Open Sans"/>
-              </a:rPr>
-              <a:t>✗</a:t>
-            </a:r>
-          </a:p>
-        </p:txBody>
-      </p:sp>
-      <p:sp>
-        <p:nvSpPr>
-          <p:cNvPr id="29" name="TextBox 28"/>
-          <p:cNvSpPr txBox="1"/>
-          <p:nvPr/>
-        </p:nvSpPr>
-        <p:spPr>
-          <a:xfrm>
-            <a:off x="6675120" y="3401568"/>
-            <a:ext cx="4846320" cy="457200"/>
-          </a:xfrm>
-          <a:prstGeom prst="rect">
-            <a:avLst/>
-          </a:prstGeom>
-          <a:noFill/>
-        </p:spPr>
-        <p:txBody>
-          <a:bodyPr wrap="square" anchor="t" lIns="0" rIns="0" tIns="0" bIns="0">
-            <a:spAutoFit/>
-          </a:bodyPr>
-          <a:lstStyle/>
-          <a:p>
-            <a:pPr algn="l"/>
-            <a:r>
-              <a:rPr sz="1100" b="0">
-                <a:solidFill>
-                  <a:srgbClr val="334155"/>
-                </a:solidFill>
-                <a:latin typeface="Open Sans"/>
-              </a:rPr>
-              <a:t>Scrape state portals or MissingMoney.com</a:t>
-            </a:r>
-          </a:p>
-        </p:txBody>
-      </p:sp>
-      <p:sp>
-        <p:nvSpPr>
-          <p:cNvPr id="30" name="TextBox 29"/>
-          <p:cNvSpPr txBox="1"/>
-          <p:nvPr/>
-        </p:nvSpPr>
-        <p:spPr>
-          <a:xfrm>
-            <a:off x="6355080" y="3840480"/>
-            <a:ext cx="274320" cy="274320"/>
-          </a:xfrm>
-          <a:prstGeom prst="rect">
-            <a:avLst/>
-          </a:prstGeom>
-          <a:noFill/>
-        </p:spPr>
-        <p:txBody>
-          <a:bodyPr wrap="square" anchor="t" lIns="0" rIns="0" tIns="0" bIns="0">
-            <a:spAutoFit/>
-          </a:bodyPr>
-          <a:lstStyle/>
-          <a:p>
-            <a:pPr algn="l"/>
-            <a:r>
-              <a:rPr sz="1400" b="1">
-                <a:solidFill>
-                  <a:srgbClr val="E11D48"/>
-                </a:solidFill>
-                <a:latin typeface="Open Sans"/>
-              </a:rPr>
-              <a:t>✗</a:t>
-            </a:r>
-          </a:p>
-        </p:txBody>
-      </p:sp>
-      <p:sp>
-        <p:nvSpPr>
-          <p:cNvPr id="31" name="TextBox 30"/>
-          <p:cNvSpPr txBox="1"/>
-          <p:nvPr/>
-        </p:nvSpPr>
-        <p:spPr>
-          <a:xfrm>
-            <a:off x="6675120" y="3858768"/>
-            <a:ext cx="4846320" cy="457200"/>
-          </a:xfrm>
-          <a:prstGeom prst="rect">
-            <a:avLst/>
-          </a:prstGeom>
-          <a:noFill/>
-        </p:spPr>
-        <p:txBody>
-          <a:bodyPr wrap="square" anchor="t" lIns="0" rIns="0" tIns="0" bIns="0">
-            <a:spAutoFit/>
-          </a:bodyPr>
-          <a:lstStyle/>
-          <a:p>
-            <a:pPr algn="l"/>
-            <a:r>
-              <a:rPr sz="1100" b="0">
-                <a:solidFill>
-                  <a:srgbClr val="334155"/>
-                </a:solidFill>
-                <a:latin typeface="Open Sans"/>
-              </a:rPr>
-              <a:t>Guarantee a claim belongs to the member</a:t>
-            </a:r>
-          </a:p>
-        </p:txBody>
-      </p:sp>
-      <p:sp>
-        <p:nvSpPr>
-          <p:cNvPr id="32" name="TextBox 31"/>
-          <p:cNvSpPr txBox="1"/>
-          <p:nvPr/>
-        </p:nvSpPr>
-        <p:spPr>
-          <a:xfrm>
-            <a:off x="6355080" y="4297680"/>
-            <a:ext cx="274320" cy="274320"/>
-          </a:xfrm>
-          <a:prstGeom prst="rect">
-            <a:avLst/>
-          </a:prstGeom>
-          <a:noFill/>
-        </p:spPr>
-        <p:txBody>
-          <a:bodyPr wrap="square" anchor="t" lIns="0" rIns="0" tIns="0" bIns="0">
-            <a:spAutoFit/>
-          </a:bodyPr>
-          <a:lstStyle/>
-          <a:p>
-            <a:pPr algn="l"/>
-            <a:r>
-              <a:rPr sz="1400" b="1">
-                <a:solidFill>
-                  <a:srgbClr val="E11D48"/>
-                </a:solidFill>
-                <a:latin typeface="Open Sans"/>
-              </a:rPr>
-              <a:t>✗</a:t>
-            </a:r>
-          </a:p>
-        </p:txBody>
-      </p:sp>
-      <p:sp>
-        <p:nvSpPr>
-          <p:cNvPr id="33" name="TextBox 32"/>
-          <p:cNvSpPr txBox="1"/>
-          <p:nvPr/>
-        </p:nvSpPr>
-        <p:spPr>
-          <a:xfrm>
-            <a:off x="6675120" y="4315968"/>
-            <a:ext cx="4846320" cy="457200"/>
-          </a:xfrm>
-          <a:prstGeom prst="rect">
-            <a:avLst/>
-          </a:prstGeom>
-          <a:noFill/>
-        </p:spPr>
-        <p:txBody>
-          <a:bodyPr wrap="square" anchor="t" lIns="0" rIns="0" tIns="0" bIns="0">
-            <a:spAutoFit/>
-          </a:bodyPr>
-          <a:lstStyle/>
-          <a:p>
-            <a:pPr algn="l"/>
-            <a:r>
-              <a:rPr sz="1100" b="0">
-                <a:solidFill>
-                  <a:srgbClr val="334155"/>
-                </a:solidFill>
-                <a:latin typeface="Open Sans"/>
-              </a:rPr>
-              <a:t>Charge a success fee or take a cut</a:t>
-            </a:r>
-          </a:p>
-        </p:txBody>
-      </p:sp>
-      <p:sp>
-        <p:nvSpPr>
-          <p:cNvPr id="34" name="TextBox 33"/>
-          <p:cNvSpPr txBox="1"/>
-          <p:nvPr/>
-        </p:nvSpPr>
-        <p:spPr>
-          <a:xfrm>
-            <a:off x="6355080" y="4754880"/>
-            <a:ext cx="274320" cy="274320"/>
-          </a:xfrm>
-          <a:prstGeom prst="rect">
-            <a:avLst/>
-          </a:prstGeom>
-          <a:noFill/>
-        </p:spPr>
-        <p:txBody>
-          <a:bodyPr wrap="square" anchor="t" lIns="0" rIns="0" tIns="0" bIns="0">
-            <a:spAutoFit/>
-          </a:bodyPr>
-          <a:lstStyle/>
-          <a:p>
-            <a:pPr algn="l"/>
-            <a:r>
-              <a:rPr sz="1400" b="1">
-                <a:solidFill>
-                  <a:srgbClr val="E11D48"/>
-                </a:solidFill>
-                <a:latin typeface="Open Sans"/>
-              </a:rPr>
-              <a:t>✗</a:t>
-            </a:r>
-          </a:p>
-        </p:txBody>
-      </p:sp>
-      <p:sp>
-        <p:nvSpPr>
-          <p:cNvPr id="35" name="TextBox 34"/>
-          <p:cNvSpPr txBox="1"/>
-          <p:nvPr/>
-        </p:nvSpPr>
-        <p:spPr>
-          <a:xfrm>
-            <a:off x="6675120" y="4773168"/>
-            <a:ext cx="4846320" cy="457200"/>
-          </a:xfrm>
-          <a:prstGeom prst="rect">
-            <a:avLst/>
-          </a:prstGeom>
-          <a:noFill/>
-        </p:spPr>
-        <p:txBody>
-          <a:bodyPr wrap="square" anchor="t" lIns="0" rIns="0" tIns="0" bIns="0">
-            <a:spAutoFit/>
-          </a:bodyPr>
-          <a:lstStyle/>
-          <a:p>
-            <a:pPr algn="l"/>
-            <a:r>
-              <a:rPr sz="1100" b="0">
-                <a:solidFill>
-                  <a:srgbClr val="334155"/>
-                </a:solidFill>
-                <a:latin typeface="Open Sans"/>
-              </a:rPr>
-              <a:t>Submit claims without fresh user authorization</a:t>
-            </a:r>
-          </a:p>
-        </p:txBody>
-      </p:sp>
-      <p:sp>
-        <p:nvSpPr>
-          <p:cNvPr id="36" name="TextBox 35"/>
-          <p:cNvSpPr txBox="1"/>
-          <p:nvPr/>
-        </p:nvSpPr>
-        <p:spPr>
-          <a:xfrm>
-            <a:off x="6355080" y="5212080"/>
-            <a:ext cx="274320" cy="274320"/>
-          </a:xfrm>
-          <a:prstGeom prst="rect">
-            <a:avLst/>
-          </a:prstGeom>
-          <a:noFill/>
-        </p:spPr>
-        <p:txBody>
-          <a:bodyPr wrap="square" anchor="t" lIns="0" rIns="0" tIns="0" bIns="0">
-            <a:spAutoFit/>
-          </a:bodyPr>
-          <a:lstStyle/>
-          <a:p>
-            <a:pPr algn="l"/>
-            <a:r>
-              <a:rPr sz="1400" b="1">
-                <a:solidFill>
-                  <a:srgbClr val="E11D48"/>
-                </a:solidFill>
-                <a:latin typeface="Open Sans"/>
-              </a:rPr>
-              <a:t>✗</a:t>
-            </a:r>
-          </a:p>
-        </p:txBody>
-      </p:sp>
-      <p:sp>
-        <p:nvSpPr>
-          <p:cNvPr id="37" name="TextBox 36"/>
-          <p:cNvSpPr txBox="1"/>
-          <p:nvPr/>
-        </p:nvSpPr>
-        <p:spPr>
-          <a:xfrm>
-            <a:off x="6675120" y="5230368"/>
-            <a:ext cx="4846320" cy="457200"/>
-          </a:xfrm>
-          <a:prstGeom prst="rect">
-            <a:avLst/>
-          </a:prstGeom>
-          <a:noFill/>
-        </p:spPr>
-        <p:txBody>
-          <a:bodyPr wrap="square" anchor="t" lIns="0" rIns="0" tIns="0" bIns="0">
-            <a:spAutoFit/>
-          </a:bodyPr>
-          <a:lstStyle/>
-          <a:p>
-            <a:pPr algn="l"/>
-            <a:r>
-              <a:rPr sz="1100" b="0">
-                <a:solidFill>
-                  <a:srgbClr val="334155"/>
-                </a:solidFill>
-                <a:latin typeface="Open Sans"/>
-              </a:rPr>
-              <a:t>Re-use credit-report-derived data without legal sign-off</a:t>
-            </a:r>
-          </a:p>
-        </p:txBody>
-      </p:sp>
-      <p:sp>
-        <p:nvSpPr>
-          <p:cNvPr id="38" name="TextBox 37"/>
-          <p:cNvSpPr txBox="1"/>
-          <p:nvPr/>
-        </p:nvSpPr>
-        <p:spPr>
-          <a:xfrm>
-            <a:off x="6355080" y="5669280"/>
-            <a:ext cx="274320" cy="274320"/>
-          </a:xfrm>
-          <a:prstGeom prst="rect">
-            <a:avLst/>
-          </a:prstGeom>
-          <a:noFill/>
-        </p:spPr>
-        <p:txBody>
-          <a:bodyPr wrap="square" anchor="t" lIns="0" rIns="0" tIns="0" bIns="0">
-            <a:spAutoFit/>
-          </a:bodyPr>
-          <a:lstStyle/>
-          <a:p>
-            <a:pPr algn="l"/>
-            <a:r>
-              <a:rPr sz="1400" b="1">
-                <a:solidFill>
-                  <a:srgbClr val="E11D48"/>
-                </a:solidFill>
-                <a:latin typeface="Open Sans"/>
-              </a:rPr>
-              <a:t>✗</a:t>
-            </a:r>
-          </a:p>
-        </p:txBody>
-      </p:sp>
-      <p:sp>
-        <p:nvSpPr>
-          <p:cNvPr id="39" name="TextBox 38"/>
-          <p:cNvSpPr txBox="1"/>
-          <p:nvPr/>
-        </p:nvSpPr>
-        <p:spPr>
-          <a:xfrm>
-            <a:off x="6675120" y="5687568"/>
-            <a:ext cx="4846320" cy="457200"/>
-          </a:xfrm>
-          <a:prstGeom prst="rect">
-            <a:avLst/>
-          </a:prstGeom>
-          <a:noFill/>
-        </p:spPr>
-        <p:txBody>
-          <a:bodyPr wrap="square" anchor="t" lIns="0" rIns="0" tIns="0" bIns="0">
-            <a:spAutoFit/>
-          </a:bodyPr>
-          <a:lstStyle/>
-          <a:p>
-            <a:pPr algn="l"/>
-            <a:r>
-              <a:rPr sz="1100" b="0">
-                <a:solidFill>
-                  <a:srgbClr val="334155"/>
-                </a:solidFill>
-                <a:latin typeface="Open Sans"/>
-              </a:rPr>
-              <a:t>Store sensitive claim documents unless required and approved</a:t>
-            </a:r>
-          </a:p>
-        </p:txBody>
-      </p:sp>
-      <p:sp>
-        <p:nvSpPr>
-          <p:cNvPr id="40" name="Rounded Rectangle 39"/>
-          <p:cNvSpPr/>
-          <p:nvPr/>
-        </p:nvSpPr>
-        <p:spPr>
-          <a:xfrm>
-            <a:off x="457200" y="6446520"/>
-            <a:ext cx="11247120" cy="365760"/>
-          </a:xfrm>
-          <a:prstGeom prst="roundRect">
-            <a:avLst>
-              <a:gd name="adj" fmla="val 7000"/>
-            </a:avLst>
-          </a:prstGeom>
-          <a:solidFill>
-            <a:srgbClr val="0F172A"/>
-          </a:solidFill>
-          <a:ln>
-            <a:noFill/>
-          </a:ln>
-          <a:effectLst/>
-        </p:spPr>
-        <p:style>
-          <a:lnRef idx="1">
-            <a:schemeClr val="accent1"/>
-          </a:lnRef>
-          <a:fillRef idx="3">
-            <a:schemeClr val="accent1"/>
-          </a:fillRef>
-          <a:effectRef idx="2">
-            <a:schemeClr val="accent1"/>
-          </a:effectRef>
-          <a:fontRef idx="minor">
-            <a:schemeClr val="lt1"/>
-          </a:fontRef>
-        </p:style>
-        <p:txBody>
-          <a:bodyPr rtlCol="0" anchor="ctr"/>
-          <a:lstStyle/>
-          <a:p>
-            <a:pPr algn="ctr"/>
-          </a:p>
-        </p:txBody>
-      </p:sp>
-      <p:sp>
-        <p:nvSpPr>
-          <p:cNvPr id="41" name="TextBox 40"/>
-          <p:cNvSpPr txBox="1"/>
-          <p:nvPr/>
-        </p:nvSpPr>
-        <p:spPr>
-          <a:xfrm>
-            <a:off x="640080" y="6492240"/>
-            <a:ext cx="10972800" cy="292608"/>
-          </a:xfrm>
-          <a:prstGeom prst="rect">
-            <a:avLst/>
-          </a:prstGeom>
-          <a:noFill/>
-        </p:spPr>
-        <p:txBody>
-          <a:bodyPr wrap="square" anchor="t" lIns="0" rIns="0" tIns="0" bIns="0">
-            <a:spAutoFit/>
-          </a:bodyPr>
-          <a:lstStyle/>
-          <a:p>
-            <a:pPr algn="l"/>
-            <a:r>
-              <a:rPr sz="1100" b="1">
-                <a:solidFill>
-                  <a:srgbClr val="FFFFFF"/>
-                </a:solidFill>
-                <a:latin typeface="Open Sans"/>
-              </a:rPr>
-              <a:t>Every state ingestion has a legal review gate. Every claim has a fresh consent. Every data source has documented terms.</a:t>
+              <a:t>Owner: Legal · Goal: written posture per state in 30 days · Output: go/no-go decision matrix to unlock the next ingest tier.</a:t>
             </a:r>
           </a:p>
         </p:txBody>
